--- a/reports/smallgameagent_report.pptx
+++ b/reports/smallgameagent_report.pptx
@@ -13,6 +13,9 @@
     <p:sldId id="261" r:id="rId12"/>
     <p:sldId id="262" r:id="rId13"/>
     <p:sldId id="263" r:id="rId14"/>
+    <p:sldId id="264" r:id="rId15"/>
+    <p:sldId id="265" r:id="rId16"/>
+    <p:sldId id="266" r:id="rId17"/>
   </p:sldIdLst>
   <p:sldSz cx="12191695" cy="6858000" type="screen4x3"/>
   <p:notesSz cx="6858000" cy="9144000"/>
@@ -3169,6 +3172,258 @@
 </p:sld>
 </file>
 
+<file path=ppt/slides/slide10.xml><?xml version="1.0" encoding="utf-8"?>
+<p:sld xmlns:a="http://schemas.openxmlformats.org/drawingml/2006/main" xmlns:p="http://schemas.openxmlformats.org/presentationml/2006/main" xmlns:r="http://schemas.openxmlformats.org/officeDocument/2006/relationships">
+  <p:cSld>
+    <p:spTree>
+      <p:nvGrpSpPr>
+        <p:cNvPr id="1" name=""/>
+        <p:cNvGrpSpPr/>
+        <p:nvPr/>
+      </p:nvGrpSpPr>
+      <p:grpSpPr/>
+      <p:sp>
+        <p:nvSpPr>
+          <p:cNvPr id="2" name="TextBox 1"/>
+          <p:cNvSpPr txBox="1"/>
+          <p:nvPr/>
+        </p:nvSpPr>
+        <p:spPr>
+          <a:xfrm>
+            <a:off x="457200" y="365760"/>
+            <a:ext cx="11247120" cy="822960"/>
+          </a:xfrm>
+          <a:prstGeom prst="rect">
+            <a:avLst/>
+          </a:prstGeom>
+          <a:noFill/>
+        </p:spPr>
+        <p:txBody>
+          <a:bodyPr wrap="none">
+            <a:spAutoFit/>
+          </a:bodyPr>
+          <a:lstStyle/>
+          <a:p>
+            <a:pPr>
+              <a:defRPr sz="3200" b="1">
+                <a:latin typeface="Microsoft YaHei"/>
+              </a:defRPr>
+            </a:pPr>
+            <a:r>
+              <a:t>云端 API 与在线 gameplay 状态</a:t>
+            </a:r>
+          </a:p>
+        </p:txBody>
+      </p:sp>
+      <p:sp>
+        <p:nvSpPr>
+          <p:cNvPr id="3" name="TextBox 2"/>
+          <p:cNvSpPr txBox="1"/>
+          <p:nvPr/>
+        </p:nvSpPr>
+        <p:spPr>
+          <a:xfrm>
+            <a:off x="548640" y="1371600"/>
+            <a:ext cx="11064240" cy="5120640"/>
+          </a:xfrm>
+          <a:prstGeom prst="rect">
+            <a:avLst/>
+          </a:prstGeom>
+          <a:noFill/>
+        </p:spPr>
+        <p:txBody>
+          <a:bodyPr wrap="square">
+            <a:spAutoFit/>
+          </a:bodyPr>
+          <a:lstStyle/>
+          <a:p>
+            <a:pPr>
+              <a:spcAft>
+                <a:spcPts val="1000"/>
+              </a:spcAft>
+              <a:defRPr sz="2000">
+                <a:latin typeface="Microsoft YaHei"/>
+              </a:defRPr>
+            </a:pPr>
+            <a:r>
+              <a:t>• OpenCodeGo 认证通过但余额不足（CreditsError）</a:t>
+            </a:r>
+          </a:p>
+          <a:p>
+            <a:pPr>
+              <a:spcAft>
+                <a:spcPts val="1000"/>
+              </a:spcAft>
+              <a:defRPr sz="2000">
+                <a:latin typeface="Microsoft YaHei"/>
+              </a:defRPr>
+            </a:pPr>
+            <a:r>
+              <a:t>• mimo-v2.5 / kimi-k2.7-code / kimi-k2.6 混合实验待充值后跑</a:t>
+            </a:r>
+          </a:p>
+          <a:p>
+            <a:pPr>
+              <a:spcAft>
+                <a:spcPts val="1000"/>
+              </a:spcAft>
+              <a:defRPr sz="2000">
+                <a:latin typeface="Microsoft YaHei"/>
+              </a:defRPr>
+            </a:pPr>
+            <a:r>
+              <a:t>• WSL2 headless Chromium 无法初始化 Cocos 场景（cc.director.getScene() 为 null）</a:t>
+            </a:r>
+          </a:p>
+          <a:p>
+            <a:pPr>
+              <a:spcAft>
+                <a:spcPts val="1000"/>
+              </a:spcAft>
+              <a:defRPr sz="2000">
+                <a:latin typeface="Microsoft YaHei"/>
+              </a:defRPr>
+            </a:pPr>
+            <a:r>
+              <a:t>• 在线矩阵当前被环境阻塞，已记录并准备复跑</a:t>
+            </a:r>
+          </a:p>
+        </p:txBody>
+      </p:sp>
+    </p:spTree>
+  </p:cSld>
+  <p:clrMapOvr>
+    <a:masterClrMapping/>
+  </p:clrMapOvr>
+</p:sld>
+</file>
+
+<file path=ppt/slides/slide11.xml><?xml version="1.0" encoding="utf-8"?>
+<p:sld xmlns:a="http://schemas.openxmlformats.org/drawingml/2006/main" xmlns:p="http://schemas.openxmlformats.org/presentationml/2006/main" xmlns:r="http://schemas.openxmlformats.org/officeDocument/2006/relationships">
+  <p:cSld>
+    <p:spTree>
+      <p:nvGrpSpPr>
+        <p:cNvPr id="1" name=""/>
+        <p:cNvGrpSpPr/>
+        <p:nvPr/>
+      </p:nvGrpSpPr>
+      <p:grpSpPr/>
+      <p:sp>
+        <p:nvSpPr>
+          <p:cNvPr id="2" name="TextBox 1"/>
+          <p:cNvSpPr txBox="1"/>
+          <p:nvPr/>
+        </p:nvSpPr>
+        <p:spPr>
+          <a:xfrm>
+            <a:off x="457200" y="365760"/>
+            <a:ext cx="11247120" cy="822960"/>
+          </a:xfrm>
+          <a:prstGeom prst="rect">
+            <a:avLst/>
+          </a:prstGeom>
+          <a:noFill/>
+        </p:spPr>
+        <p:txBody>
+          <a:bodyPr wrap="none">
+            <a:spAutoFit/>
+          </a:bodyPr>
+          <a:lstStyle/>
+          <a:p>
+            <a:pPr>
+              <a:defRPr sz="3200" b="1">
+                <a:latin typeface="Microsoft YaHei"/>
+              </a:defRPr>
+            </a:pPr>
+            <a:r>
+              <a:t>训练准备与后续工作</a:t>
+            </a:r>
+          </a:p>
+        </p:txBody>
+      </p:sp>
+      <p:sp>
+        <p:nvSpPr>
+          <p:cNvPr id="3" name="TextBox 2"/>
+          <p:cNvSpPr txBox="1"/>
+          <p:nvPr/>
+        </p:nvSpPr>
+        <p:spPr>
+          <a:xfrm>
+            <a:off x="548640" y="1371600"/>
+            <a:ext cx="11064240" cy="5120640"/>
+          </a:xfrm>
+          <a:prstGeom prst="rect">
+            <a:avLst/>
+          </a:prstGeom>
+          <a:noFill/>
+        </p:spPr>
+        <p:txBody>
+          <a:bodyPr wrap="square">
+            <a:spAutoFit/>
+          </a:bodyPr>
+          <a:lstStyle/>
+          <a:p>
+            <a:pPr>
+              <a:spcAft>
+                <a:spcPts val="1000"/>
+              </a:spcAft>
+              <a:defRPr sz="2000">
+                <a:latin typeface="Microsoft YaHei"/>
+              </a:defRPr>
+            </a:pPr>
+            <a:r>
+              <a:t>• processed-runs → 15,083 样本 / 7 任务，VLMColdStartDataset 已验证</a:t>
+            </a:r>
+          </a:p>
+          <a:p>
+            <a:pPr>
+              <a:spcAft>
+                <a:spcPts val="1000"/>
+              </a:spcAft>
+              <a:defRPr sz="2000">
+                <a:latin typeface="Microsoft YaHei"/>
+              </a:defRPr>
+            </a:pPr>
+            <a:r>
+              <a:t>• train_qwen35.py（QLoRA 4bit NF4 + ZeRO-2）就绪</a:t>
+            </a:r>
+          </a:p>
+          <a:p>
+            <a:pPr>
+              <a:spcAft>
+                <a:spcPts val="1000"/>
+              </a:spcAft>
+              <a:defRPr sz="2000">
+                <a:latin typeface="Microsoft YaHei"/>
+              </a:defRPr>
+            </a:pPr>
+            <a:r>
+              <a:t>• ssh5090 可访问后：bash scripts/scp_to_ssh5090.sh 并开训</a:t>
+            </a:r>
+          </a:p>
+          <a:p>
+            <a:pPr>
+              <a:spcAft>
+                <a:spcPts val="1000"/>
+              </a:spcAft>
+              <a:defRPr sz="2000">
+                <a:latin typeface="Microsoft YaHei"/>
+              </a:defRPr>
+            </a:pPr>
+            <a:r>
+              <a:t>• 下一步：面板泛化、9B/E4B 调优、22 游戏 benchmark、verifiers 对抗数据</a:t>
+            </a:r>
+          </a:p>
+        </p:txBody>
+      </p:sp>
+    </p:spTree>
+  </p:cSld>
+  <p:clrMapOvr>
+    <a:masterClrMapping/>
+  </p:clrMapOvr>
+</p:sld>
+</file>
+
 <file path=ppt/slides/slide2.xml><?xml version="1.0" encoding="utf-8"?>
 <p:sld xmlns:a="http://schemas.openxmlformats.org/drawingml/2006/main" xmlns:p="http://schemas.openxmlformats.org/presentationml/2006/main" xmlns:r="http://schemas.openxmlformats.org/officeDocument/2006/relationships">
   <p:cSld>
@@ -3837,7 +4092,7 @@
               </a:defRPr>
             </a:pPr>
             <a:r>
-              <a:t>本地 VLM 实测画像</a:t>
+              <a:t>本地 VLM：Intel 核显 Vulkan（旧基线）</a:t>
             </a:r>
           </a:p>
         </p:txBody>
@@ -3873,7 +4128,7 @@
               </a:defRPr>
             </a:pPr>
             <a:r>
-              <a:t>• Intel 核显 Vulkan Q4_K_M 文本生成：</a:t>
+              <a:t>• Qwen3.5-4B 2.75 tok/s，9B 0.72 tok/s，E4B 0.67 tok/s</a:t>
             </a:r>
           </a:p>
           <a:p>
@@ -3886,7 +4141,7 @@
               </a:defRPr>
             </a:pPr>
             <a:r>
-              <a:t>•   Qwen3.5-4B  2.75 tok/s</a:t>
+              <a:t>• 视觉编码必须 --no-mmproj-offload 回 CPU</a:t>
             </a:r>
           </a:p>
           <a:p>
@@ -3899,7 +4154,7 @@
               </a:defRPr>
             </a:pPr>
             <a:r>
-              <a:t>•   Qwen3.5-9B  0.72 tok/s</a:t>
+              <a:t>• 4 帧 struct 解析率 0/4，平均 534 s/帧</a:t>
             </a:r>
           </a:p>
           <a:p>
@@ -3912,33 +4167,7 @@
               </a:defRPr>
             </a:pPr>
             <a:r>
-              <a:t>•   gemma-4-E4B 0.67 tok/s</a:t>
-            </a:r>
-          </a:p>
-          <a:p>
-            <a:pPr>
-              <a:spcAft>
-                <a:spcPts val="1000"/>
-              </a:spcAft>
-              <a:defRPr sz="2000">
-                <a:latin typeface="Microsoft YaHei"/>
-              </a:defRPr>
-            </a:pPr>
-            <a:r>
-              <a:t>• 视觉编码必须 --no-mmproj-offload 回 CPU；4 帧 struct 解析率 0/4</a:t>
-            </a:r>
-          </a:p>
-          <a:p>
-            <a:pPr>
-              <a:spcAft>
-                <a:spcPts val="1000"/>
-              </a:spcAft>
-              <a:defRPr sz="2000">
-                <a:latin typeface="Microsoft YaHei"/>
-              </a:defRPr>
-            </a:pPr>
-            <a:r>
-              <a:t>• 当前本地 VLM 仅适合作离线标注，不适合在线逐步控制</a:t>
+              <a:t>• 结论：仅适合作离线数据标注</a:t>
             </a:r>
           </a:p>
         </p:txBody>
@@ -3989,7 +4218,7 @@
               </a:defRPr>
             </a:pPr>
             <a:r>
-              <a:t>训练准备与后续工作</a:t>
+              <a:t>本地 VLM：RTX 5060 CUDA + KV-cache 量化（新基线）</a:t>
             </a:r>
           </a:p>
         </p:txBody>
@@ -4025,7 +4254,7 @@
               </a:defRPr>
             </a:pPr>
             <a:r>
-              <a:t>• processed-runs → 15,083 样本 / 7 任务，VLMColdStartDataset 已验证</a:t>
+              <a:t>• 后端：llama.cpp CUDA12，-ngl 99 --flash-attn，K/V cache q4_0</a:t>
             </a:r>
           </a:p>
           <a:p>
@@ -4038,7 +4267,7 @@
               </a:defRPr>
             </a:pPr>
             <a:r>
-              <a:t>• train_qwen35.py（QLoRA 4bit NF4 + ZeRO-2）就绪</a:t>
+              <a:t>• Qwen3.5-4B：文本 82.6 tok/s，视觉 8 帧解析率 0.75，target_acc 0.83，平均 24.8 s/帧</a:t>
             </a:r>
           </a:p>
           <a:p>
@@ -4051,7 +4280,7 @@
               </a:defRPr>
             </a:pPr>
             <a:r>
-              <a:t>• ssh5090 可访问后：bash scripts/scp_to_ssh5090.sh 并开训</a:t>
+              <a:t>• gemma-4-E4B：文本 39.9 tok/s，单帧视觉 14.6 s</a:t>
             </a:r>
           </a:p>
           <a:p>
@@ -4064,7 +4293,159 @@
               </a:defRPr>
             </a:pPr>
             <a:r>
-              <a:t>• 下一步：面板泛化、9B/E4B 调优、22 游戏 benchmark、verifiers 对抗数据</a:t>
+              <a:t>• 8 GB 显存跑 4B 宽裕，E4B 接近上限（7082 MB）</a:t>
+            </a:r>
+          </a:p>
+          <a:p>
+            <a:pPr>
+              <a:spcAft>
+                <a:spcPts val="1000"/>
+              </a:spcAft>
+              <a:defRPr sz="2000">
+                <a:latin typeface="Microsoft YaHei"/>
+              </a:defRPr>
+            </a:pPr>
+            <a:r>
+              <a:t>• Qwen3.5 思考模型需 max_tokens=2048 才能输出 content JSON</a:t>
+            </a:r>
+          </a:p>
+        </p:txBody>
+      </p:sp>
+    </p:spTree>
+  </p:cSld>
+  <p:clrMapOvr>
+    <a:masterClrMapping/>
+  </p:clrMapOvr>
+</p:sld>
+</file>
+
+<file path=ppt/slides/slide9.xml><?xml version="1.0" encoding="utf-8"?>
+<p:sld xmlns:a="http://schemas.openxmlformats.org/drawingml/2006/main" xmlns:p="http://schemas.openxmlformats.org/presentationml/2006/main" xmlns:r="http://schemas.openxmlformats.org/officeDocument/2006/relationships">
+  <p:cSld>
+    <p:spTree>
+      <p:nvGrpSpPr>
+        <p:cNvPr id="1" name=""/>
+        <p:cNvGrpSpPr/>
+        <p:nvPr/>
+      </p:nvGrpSpPr>
+      <p:grpSpPr/>
+      <p:sp>
+        <p:nvSpPr>
+          <p:cNvPr id="2" name="TextBox 1"/>
+          <p:cNvSpPr txBox="1"/>
+          <p:nvPr/>
+        </p:nvSpPr>
+        <p:spPr>
+          <a:xfrm>
+            <a:off x="457200" y="365760"/>
+            <a:ext cx="11247120" cy="822960"/>
+          </a:xfrm>
+          <a:prstGeom prst="rect">
+            <a:avLst/>
+          </a:prstGeom>
+          <a:noFill/>
+        </p:spPr>
+        <p:txBody>
+          <a:bodyPr wrap="none">
+            <a:spAutoFit/>
+          </a:bodyPr>
+          <a:lstStyle/>
+          <a:p>
+            <a:pPr>
+              <a:defRPr sz="3200" b="1">
+                <a:latin typeface="Microsoft YaHei"/>
+              </a:defRPr>
+            </a:pPr>
+            <a:r>
+              <a:t>Agent 通信与记忆（P8）</a:t>
+            </a:r>
+          </a:p>
+        </p:txBody>
+      </p:sp>
+      <p:sp>
+        <p:nvSpPr>
+          <p:cNvPr id="3" name="TextBox 2"/>
+          <p:cNvSpPr txBox="1"/>
+          <p:nvPr/>
+        </p:nvSpPr>
+        <p:spPr>
+          <a:xfrm>
+            <a:off x="548640" y="1371600"/>
+            <a:ext cx="11064240" cy="5120640"/>
+          </a:xfrm>
+          <a:prstGeom prst="rect">
+            <a:avLst/>
+          </a:prstGeom>
+          <a:noFill/>
+        </p:spPr>
+        <p:txBody>
+          <a:bodyPr wrap="square">
+            <a:spAutoFit/>
+          </a:bodyPr>
+          <a:lstStyle/>
+          <a:p>
+            <a:pPr>
+              <a:spcAft>
+                <a:spcPts val="1000"/>
+              </a:spcAft>
+              <a:defRPr sz="2000">
+                <a:latin typeface="Microsoft YaHei"/>
+              </a:defRPr>
+            </a:pPr>
+            <a:r>
+              <a:t>• 新增显式消息总线 AgentBus：OBSERVE / PERCEIVE / DECIDE / VERIFY / CRITIC / MEMORY</a:t>
+            </a:r>
+          </a:p>
+          <a:p>
+            <a:pPr>
+              <a:spcAft>
+                <a:spcPts val="1000"/>
+              </a:spcAft>
+              <a:defRPr sz="2000">
+                <a:latin typeface="Microsoft YaHei"/>
+              </a:defRPr>
+            </a:pPr>
+            <a:r>
+              <a:t>• MultiAgentOrchestrator：循环流水线，Verifier 可触发 re-decide</a:t>
+            </a:r>
+          </a:p>
+          <a:p>
+            <a:pPr>
+              <a:spcAft>
+                <a:spcPts val="1000"/>
+              </a:spcAft>
+              <a:defRPr sz="2000">
+                <a:latin typeface="Microsoft YaHei"/>
+              </a:defRPr>
+            </a:pPr>
+            <a:r>
+              <a:t>• StrategyMemory：文件型策略记忆，不依赖 sqlite-vec</a:t>
+            </a:r>
+          </a:p>
+          <a:p>
+            <a:pPr>
+              <a:spcAft>
+                <a:spcPts val="1000"/>
+              </a:spcAft>
+              <a:defRPr sz="2000">
+                <a:latin typeface="Microsoft YaHei"/>
+              </a:defRPr>
+            </a:pPr>
+            <a:r>
+              <a:t>• 新增 multi-bus / multi-bus-memory 模式与 Critic 角色</a:t>
+            </a:r>
+          </a:p>
+          <a:p>
+            <a:pPr>
+              <a:spcAft>
+                <a:spcPts val="1000"/>
+              </a:spcAft>
+              <a:defRPr sz="2000">
+                <a:latin typeface="Microsoft YaHei"/>
+              </a:defRPr>
+            </a:pPr>
+            <a:r>
+              <a:t>• 19 单测覆盖；在线 gameplay 矩阵脚本已就绪</a:t>
             </a:r>
           </a:p>
         </p:txBody>

--- a/reports/smallgameagent_report.pptx
+++ b/reports/smallgameagent_report.pptx
@@ -3161,6 +3161,10 @@
             <a:r>
               <a:t>LLM/VLM + 规则驱动的小游戏 Agent</a:t>
             </a:r>
+            <a:br/>
+            <a:r>
+              <a:t>2026-07-20</a:t>
+            </a:r>
           </a:p>
         </p:txBody>
       </p:sp>
@@ -3210,86 +3214,669 @@
               </a:defRPr>
             </a:pPr>
             <a:r>
-              <a:t>云端 API 与在线 gameplay 状态</a:t>
-            </a:r>
-          </a:p>
-        </p:txBody>
-      </p:sp>
-      <p:sp>
-        <p:nvSpPr>
-          <p:cNvPr id="3" name="TextBox 2"/>
-          <p:cNvSpPr txBox="1"/>
+              <a:t>训练数据（24,496 条 7 任务样本）</a:t>
+            </a:r>
+          </a:p>
+        </p:txBody>
+      </p:sp>
+      <p:graphicFrame>
+        <p:nvGraphicFramePr>
+          <p:cNvPr id="3" name="Table 2"/>
+          <p:cNvGraphicFramePr>
+            <a:graphicFrameLocks noGrp="1"/>
+          </p:cNvGraphicFramePr>
           <p:nvPr/>
-        </p:nvSpPr>
-        <p:spPr>
-          <a:xfrm>
-            <a:off x="548640" y="1371600"/>
-            <a:ext cx="11064240" cy="5120640"/>
-          </a:xfrm>
-          <a:prstGeom prst="rect">
-            <a:avLst/>
-          </a:prstGeom>
-          <a:noFill/>
-        </p:spPr>
-        <p:txBody>
-          <a:bodyPr wrap="square">
-            <a:spAutoFit/>
-          </a:bodyPr>
-          <a:lstStyle/>
-          <a:p>
-            <a:pPr>
-              <a:spcAft>
-                <a:spcPts val="1000"/>
-              </a:spcAft>
-              <a:defRPr sz="2000">
-                <a:latin typeface="Microsoft YaHei"/>
-              </a:defRPr>
-            </a:pPr>
-            <a:r>
-              <a:t>• OpenCodeGo 认证通过但余额不足（CreditsError）</a:t>
-            </a:r>
-          </a:p>
-          <a:p>
-            <a:pPr>
-              <a:spcAft>
-                <a:spcPts val="1000"/>
-              </a:spcAft>
-              <a:defRPr sz="2000">
-                <a:latin typeface="Microsoft YaHei"/>
-              </a:defRPr>
-            </a:pPr>
-            <a:r>
-              <a:t>• mimo-v2.5 / kimi-k2.7-code / kimi-k2.6 混合实验待充值后跑</a:t>
-            </a:r>
-          </a:p>
-          <a:p>
-            <a:pPr>
-              <a:spcAft>
-                <a:spcPts val="1000"/>
-              </a:spcAft>
-              <a:defRPr sz="2000">
-                <a:latin typeface="Microsoft YaHei"/>
-              </a:defRPr>
-            </a:pPr>
-            <a:r>
-              <a:t>• WSL2 headless Chromium 无法初始化 Cocos 场景（cc.director.getScene() 为 null）</a:t>
-            </a:r>
-          </a:p>
-          <a:p>
-            <a:pPr>
-              <a:spcAft>
-                <a:spcPts val="1000"/>
-              </a:spcAft>
-              <a:defRPr sz="2000">
-                <a:latin typeface="Microsoft YaHei"/>
-              </a:defRPr>
-            </a:pPr>
-            <a:r>
-              <a:t>• 在线矩阵当前被环境阻塞，已记录并准备复跑</a:t>
-            </a:r>
-          </a:p>
-        </p:txBody>
-      </p:sp>
+        </p:nvGraphicFramePr>
+        <p:xfrm>
+          <a:off x="457200" y="1371600"/>
+          <a:ext cx="11247120" cy="5029200"/>
+        </p:xfrm>
+        <a:graphic>
+          <a:graphicData uri="http://schemas.openxmlformats.org/drawingml/2006/table">
+            <a:tbl>
+              <a:tblPr firstRow="1" bandRow="1">
+                <a:tableStyleId>{5C22544A-7EE6-4342-B048-85BDC9FD1C3A}</a:tableStyleId>
+              </a:tblPr>
+              <a:tblGrid>
+                <a:gridCol w="2811780"/>
+                <a:gridCol w="2811780"/>
+                <a:gridCol w="2811780"/>
+                <a:gridCol w="2811780"/>
+              </a:tblGrid>
+              <a:tr h="558800">
+                <a:tc>
+                  <a:txBody>
+                    <a:bodyPr/>
+                    <a:lstStyle/>
+                    <a:p>
+                      <a:pPr>
+                        <a:defRPr sz="1600" b="1">
+                          <a:latin typeface="Microsoft YaHei"/>
+                        </a:defRPr>
+                      </a:pPr>
+                      <a:r>
+                        <a:t>任务</a:t>
+                      </a:r>
+                    </a:p>
+                  </a:txBody>
+                  <a:tcPr/>
+                </a:tc>
+                <a:tc>
+                  <a:txBody>
+                    <a:bodyPr/>
+                    <a:lstStyle/>
+                    <a:p>
+                      <a:pPr>
+                        <a:defRPr sz="1600" b="1">
+                          <a:latin typeface="Microsoft YaHei"/>
+                        </a:defRPr>
+                      </a:pPr>
+                      <a:r>
+                        <a:t>processed-runs</a:t>
+                      </a:r>
+                    </a:p>
+                  </a:txBody>
+                  <a:tcPr/>
+                </a:tc>
+                <a:tc>
+                  <a:txBody>
+                    <a:bodyPr/>
+                    <a:lstStyle/>
+                    <a:p>
+                      <a:pPr>
+                        <a:defRPr sz="1600" b="1">
+                          <a:latin typeface="Microsoft YaHei"/>
+                        </a:defRPr>
+                      </a:pPr>
+                      <a:r>
+                        <a:t>轨迹转换</a:t>
+                      </a:r>
+                    </a:p>
+                  </a:txBody>
+                  <a:tcPr/>
+                </a:tc>
+                <a:tc>
+                  <a:txBody>
+                    <a:bodyPr/>
+                    <a:lstStyle/>
+                    <a:p>
+                      <a:pPr>
+                        <a:defRPr sz="1600" b="1">
+                          <a:latin typeface="Microsoft YaHei"/>
+                        </a:defRPr>
+                      </a:pPr>
+                      <a:r>
+                        <a:t>总计</a:t>
+                      </a:r>
+                    </a:p>
+                  </a:txBody>
+                  <a:tcPr/>
+                </a:tc>
+              </a:tr>
+              <a:tr h="558800">
+                <a:tc>
+                  <a:txBody>
+                    <a:bodyPr/>
+                    <a:lstStyle/>
+                    <a:p>
+                      <a:pPr>
+                        <a:defRPr sz="1400">
+                          <a:latin typeface="Microsoft YaHei"/>
+                        </a:defRPr>
+                      </a:pPr>
+                      <a:r>
+                        <a:t>next_probe_action</a:t>
+                      </a:r>
+                    </a:p>
+                  </a:txBody>
+                  <a:tcPr/>
+                </a:tc>
+                <a:tc>
+                  <a:txBody>
+                    <a:bodyPr/>
+                    <a:lstStyle/>
+                    <a:p>
+                      <a:pPr>
+                        <a:defRPr sz="1400">
+                          <a:latin typeface="Microsoft YaHei"/>
+                        </a:defRPr>
+                      </a:pPr>
+                      <a:r>
+                        <a:t>2,645</a:t>
+                      </a:r>
+                    </a:p>
+                  </a:txBody>
+                  <a:tcPr/>
+                </a:tc>
+                <a:tc>
+                  <a:txBody>
+                    <a:bodyPr/>
+                    <a:lstStyle/>
+                    <a:p>
+                      <a:pPr>
+                        <a:defRPr sz="1400">
+                          <a:latin typeface="Microsoft YaHei"/>
+                        </a:defRPr>
+                      </a:pPr>
+                      <a:r>
+                        <a:t>—</a:t>
+                      </a:r>
+                    </a:p>
+                  </a:txBody>
+                  <a:tcPr/>
+                </a:tc>
+                <a:tc>
+                  <a:txBody>
+                    <a:bodyPr/>
+                    <a:lstStyle/>
+                    <a:p>
+                      <a:pPr>
+                        <a:defRPr sz="1400">
+                          <a:latin typeface="Microsoft YaHei"/>
+                        </a:defRPr>
+                      </a:pPr>
+                      <a:r>
+                        <a:t>2,645</a:t>
+                      </a:r>
+                    </a:p>
+                  </a:txBody>
+                  <a:tcPr/>
+                </a:tc>
+              </a:tr>
+              <a:tr h="558800">
+                <a:tc>
+                  <a:txBody>
+                    <a:bodyPr/>
+                    <a:lstStyle/>
+                    <a:p>
+                      <a:pPr>
+                        <a:defRPr sz="1400">
+                          <a:latin typeface="Microsoft YaHei"/>
+                        </a:defRPr>
+                      </a:pPr>
+                      <a:r>
+                        <a:t>probe_action_effect</a:t>
+                      </a:r>
+                    </a:p>
+                  </a:txBody>
+                  <a:tcPr/>
+                </a:tc>
+                <a:tc>
+                  <a:txBody>
+                    <a:bodyPr/>
+                    <a:lstStyle/>
+                    <a:p>
+                      <a:pPr>
+                        <a:defRPr sz="1400">
+                          <a:latin typeface="Microsoft YaHei"/>
+                        </a:defRPr>
+                      </a:pPr>
+                      <a:r>
+                        <a:t>2,645</a:t>
+                      </a:r>
+                    </a:p>
+                  </a:txBody>
+                  <a:tcPr/>
+                </a:tc>
+                <a:tc>
+                  <a:txBody>
+                    <a:bodyPr/>
+                    <a:lstStyle/>
+                    <a:p>
+                      <a:pPr>
+                        <a:defRPr sz="1400">
+                          <a:latin typeface="Microsoft YaHei"/>
+                        </a:defRPr>
+                      </a:pPr>
+                      <a:r>
+                        <a:t>+3,040</a:t>
+                      </a:r>
+                    </a:p>
+                  </a:txBody>
+                  <a:tcPr/>
+                </a:tc>
+                <a:tc>
+                  <a:txBody>
+                    <a:bodyPr/>
+                    <a:lstStyle/>
+                    <a:p>
+                      <a:pPr>
+                        <a:defRPr sz="1400">
+                          <a:latin typeface="Microsoft YaHei"/>
+                        </a:defRPr>
+                      </a:pPr>
+                      <a:r>
+                        <a:t>5,685</a:t>
+                      </a:r>
+                    </a:p>
+                  </a:txBody>
+                  <a:tcPr/>
+                </a:tc>
+              </a:tr>
+              <a:tr h="558800">
+                <a:tc>
+                  <a:txBody>
+                    <a:bodyPr/>
+                    <a:lstStyle/>
+                    <a:p>
+                      <a:pPr>
+                        <a:defRPr sz="1400">
+                          <a:latin typeface="Microsoft YaHei"/>
+                        </a:defRPr>
+                      </a:pPr>
+                      <a:r>
+                        <a:t>field_grounding</a:t>
+                      </a:r>
+                    </a:p>
+                  </a:txBody>
+                  <a:tcPr/>
+                </a:tc>
+                <a:tc>
+                  <a:txBody>
+                    <a:bodyPr/>
+                    <a:lstStyle/>
+                    <a:p>
+                      <a:pPr>
+                        <a:defRPr sz="1400">
+                          <a:latin typeface="Microsoft YaHei"/>
+                        </a:defRPr>
+                      </a:pPr>
+                      <a:r>
+                        <a:t>2,645</a:t>
+                      </a:r>
+                    </a:p>
+                  </a:txBody>
+                  <a:tcPr/>
+                </a:tc>
+                <a:tc>
+                  <a:txBody>
+                    <a:bodyPr/>
+                    <a:lstStyle/>
+                    <a:p>
+                      <a:pPr>
+                        <a:defRPr sz="1400">
+                          <a:latin typeface="Microsoft YaHei"/>
+                        </a:defRPr>
+                      </a:pPr>
+                      <a:r>
+                        <a:t>—</a:t>
+                      </a:r>
+                    </a:p>
+                  </a:txBody>
+                  <a:tcPr/>
+                </a:tc>
+                <a:tc>
+                  <a:txBody>
+                    <a:bodyPr/>
+                    <a:lstStyle/>
+                    <a:p>
+                      <a:pPr>
+                        <a:defRPr sz="1400">
+                          <a:latin typeface="Microsoft YaHei"/>
+                        </a:defRPr>
+                      </a:pPr>
+                      <a:r>
+                        <a:t>2,645</a:t>
+                      </a:r>
+                    </a:p>
+                  </a:txBody>
+                  <a:tcPr/>
+                </a:tc>
+              </a:tr>
+              <a:tr h="558800">
+                <a:tc>
+                  <a:txBody>
+                    <a:bodyPr/>
+                    <a:lstStyle/>
+                    <a:p>
+                      <a:pPr>
+                        <a:defRPr sz="1400">
+                          <a:latin typeface="Microsoft YaHei"/>
+                        </a:defRPr>
+                      </a:pPr>
+                      <a:r>
+                        <a:t>information_gain_judgment</a:t>
+                      </a:r>
+                    </a:p>
+                  </a:txBody>
+                  <a:tcPr/>
+                </a:tc>
+                <a:tc>
+                  <a:txBody>
+                    <a:bodyPr/>
+                    <a:lstStyle/>
+                    <a:p>
+                      <a:pPr>
+                        <a:defRPr sz="1400">
+                          <a:latin typeface="Microsoft YaHei"/>
+                        </a:defRPr>
+                      </a:pPr>
+                      <a:r>
+                        <a:t>3,054</a:t>
+                      </a:r>
+                    </a:p>
+                  </a:txBody>
+                  <a:tcPr/>
+                </a:tc>
+                <a:tc>
+                  <a:txBody>
+                    <a:bodyPr/>
+                    <a:lstStyle/>
+                    <a:p>
+                      <a:pPr>
+                        <a:defRPr sz="1400">
+                          <a:latin typeface="Microsoft YaHei"/>
+                        </a:defRPr>
+                      </a:pPr>
+                      <a:r>
+                        <a:t>+3,040</a:t>
+                      </a:r>
+                    </a:p>
+                  </a:txBody>
+                  <a:tcPr/>
+                </a:tc>
+                <a:tc>
+                  <a:txBody>
+                    <a:bodyPr/>
+                    <a:lstStyle/>
+                    <a:p>
+                      <a:pPr>
+                        <a:defRPr sz="1400">
+                          <a:latin typeface="Microsoft YaHei"/>
+                        </a:defRPr>
+                      </a:pPr>
+                      <a:r>
+                        <a:t>6,094</a:t>
+                      </a:r>
+                    </a:p>
+                  </a:txBody>
+                  <a:tcPr/>
+                </a:tc>
+              </a:tr>
+              <a:tr h="558800">
+                <a:tc>
+                  <a:txBody>
+                    <a:bodyPr/>
+                    <a:lstStyle/>
+                    <a:p>
+                      <a:pPr>
+                        <a:defRPr sz="1400">
+                          <a:latin typeface="Microsoft YaHei"/>
+                        </a:defRPr>
+                      </a:pPr>
+                      <a:r>
+                        <a:t>pulse_response_grounding</a:t>
+                      </a:r>
+                    </a:p>
+                  </a:txBody>
+                  <a:tcPr/>
+                </a:tc>
+                <a:tc>
+                  <a:txBody>
+                    <a:bodyPr/>
+                    <a:lstStyle/>
+                    <a:p>
+                      <a:pPr>
+                        <a:defRPr sz="1400">
+                          <a:latin typeface="Microsoft YaHei"/>
+                        </a:defRPr>
+                      </a:pPr>
+                      <a:r>
+                        <a:t>1,435</a:t>
+                      </a:r>
+                    </a:p>
+                  </a:txBody>
+                  <a:tcPr/>
+                </a:tc>
+                <a:tc>
+                  <a:txBody>
+                    <a:bodyPr/>
+                    <a:lstStyle/>
+                    <a:p>
+                      <a:pPr>
+                        <a:defRPr sz="1400">
+                          <a:latin typeface="Microsoft YaHei"/>
+                        </a:defRPr>
+                      </a:pPr>
+                      <a:r>
+                        <a:t>+159</a:t>
+                      </a:r>
+                    </a:p>
+                  </a:txBody>
+                  <a:tcPr/>
+                </a:tc>
+                <a:tc>
+                  <a:txBody>
+                    <a:bodyPr/>
+                    <a:lstStyle/>
+                    <a:p>
+                      <a:pPr>
+                        <a:defRPr sz="1400">
+                          <a:latin typeface="Microsoft YaHei"/>
+                        </a:defRPr>
+                      </a:pPr>
+                      <a:r>
+                        <a:t>1,594</a:t>
+                      </a:r>
+                    </a:p>
+                  </a:txBody>
+                  <a:tcPr/>
+                </a:tc>
+              </a:tr>
+              <a:tr h="558800">
+                <a:tc>
+                  <a:txBody>
+                    <a:bodyPr/>
+                    <a:lstStyle/>
+                    <a:p>
+                      <a:pPr>
+                        <a:defRPr sz="1400">
+                          <a:latin typeface="Microsoft YaHei"/>
+                        </a:defRPr>
+                      </a:pPr>
+                      <a:r>
+                        <a:t>progression_grounding</a:t>
+                      </a:r>
+                    </a:p>
+                  </a:txBody>
+                  <a:tcPr/>
+                </a:tc>
+                <a:tc>
+                  <a:txBody>
+                    <a:bodyPr/>
+                    <a:lstStyle/>
+                    <a:p>
+                      <a:pPr>
+                        <a:defRPr sz="1400">
+                          <a:latin typeface="Microsoft YaHei"/>
+                        </a:defRPr>
+                      </a:pPr>
+                      <a:r>
+                        <a:t>2,645</a:t>
+                      </a:r>
+                    </a:p>
+                  </a:txBody>
+                  <a:tcPr/>
+                </a:tc>
+                <a:tc>
+                  <a:txBody>
+                    <a:bodyPr/>
+                    <a:lstStyle/>
+                    <a:p>
+                      <a:pPr>
+                        <a:defRPr sz="1400">
+                          <a:latin typeface="Microsoft YaHei"/>
+                        </a:defRPr>
+                      </a:pPr>
+                      <a:r>
+                        <a:t>+3,165</a:t>
+                      </a:r>
+                    </a:p>
+                  </a:txBody>
+                  <a:tcPr/>
+                </a:tc>
+                <a:tc>
+                  <a:txBody>
+                    <a:bodyPr/>
+                    <a:lstStyle/>
+                    <a:p>
+                      <a:pPr>
+                        <a:defRPr sz="1400">
+                          <a:latin typeface="Microsoft YaHei"/>
+                        </a:defRPr>
+                      </a:pPr>
+                      <a:r>
+                        <a:t>5,810</a:t>
+                      </a:r>
+                    </a:p>
+                  </a:txBody>
+                  <a:tcPr/>
+                </a:tc>
+              </a:tr>
+              <a:tr h="558800">
+                <a:tc>
+                  <a:txBody>
+                    <a:bodyPr/>
+                    <a:lstStyle/>
+                    <a:p>
+                      <a:pPr>
+                        <a:defRPr sz="1400">
+                          <a:latin typeface="Microsoft YaHei"/>
+                        </a:defRPr>
+                      </a:pPr>
+                      <a:r>
+                        <a:t>failure_recovery</a:t>
+                      </a:r>
+                    </a:p>
+                  </a:txBody>
+                  <a:tcPr/>
+                </a:tc>
+                <a:tc>
+                  <a:txBody>
+                    <a:bodyPr/>
+                    <a:lstStyle/>
+                    <a:p>
+                      <a:pPr>
+                        <a:defRPr sz="1400">
+                          <a:latin typeface="Microsoft YaHei"/>
+                        </a:defRPr>
+                      </a:pPr>
+                      <a:r>
+                        <a:t>14</a:t>
+                      </a:r>
+                    </a:p>
+                  </a:txBody>
+                  <a:tcPr/>
+                </a:tc>
+                <a:tc>
+                  <a:txBody>
+                    <a:bodyPr/>
+                    <a:lstStyle/>
+                    <a:p>
+                      <a:pPr>
+                        <a:defRPr sz="1400">
+                          <a:latin typeface="Microsoft YaHei"/>
+                        </a:defRPr>
+                      </a:pPr>
+                      <a:r>
+                        <a:t>+9</a:t>
+                      </a:r>
+                    </a:p>
+                  </a:txBody>
+                  <a:tcPr/>
+                </a:tc>
+                <a:tc>
+                  <a:txBody>
+                    <a:bodyPr/>
+                    <a:lstStyle/>
+                    <a:p>
+                      <a:pPr>
+                        <a:defRPr sz="1400">
+                          <a:latin typeface="Microsoft YaHei"/>
+                        </a:defRPr>
+                      </a:pPr>
+                      <a:r>
+                        <a:t>23</a:t>
+                      </a:r>
+                    </a:p>
+                  </a:txBody>
+                  <a:tcPr/>
+                </a:tc>
+              </a:tr>
+              <a:tr h="558800">
+                <a:tc>
+                  <a:txBody>
+                    <a:bodyPr/>
+                    <a:lstStyle/>
+                    <a:p>
+                      <a:pPr>
+                        <a:defRPr sz="1400">
+                          <a:latin typeface="Microsoft YaHei"/>
+                        </a:defRPr>
+                      </a:pPr>
+                      <a:r>
+                        <a:t>总计</a:t>
+                      </a:r>
+                    </a:p>
+                  </a:txBody>
+                  <a:tcPr/>
+                </a:tc>
+                <a:tc>
+                  <a:txBody>
+                    <a:bodyPr/>
+                    <a:lstStyle/>
+                    <a:p>
+                      <a:pPr>
+                        <a:defRPr sz="1400">
+                          <a:latin typeface="Microsoft YaHei"/>
+                        </a:defRPr>
+                      </a:pPr>
+                      <a:r>
+                        <a:t>15,083</a:t>
+                      </a:r>
+                    </a:p>
+                  </a:txBody>
+                  <a:tcPr/>
+                </a:tc>
+                <a:tc>
+                  <a:txBody>
+                    <a:bodyPr/>
+                    <a:lstStyle/>
+                    <a:p>
+                      <a:pPr>
+                        <a:defRPr sz="1400">
+                          <a:latin typeface="Microsoft YaHei"/>
+                        </a:defRPr>
+                      </a:pPr>
+                      <a:r>
+                        <a:t>+9,413</a:t>
+                      </a:r>
+                    </a:p>
+                  </a:txBody>
+                  <a:tcPr/>
+                </a:tc>
+                <a:tc>
+                  <a:txBody>
+                    <a:bodyPr/>
+                    <a:lstStyle/>
+                    <a:p>
+                      <a:pPr>
+                        <a:defRPr sz="1400">
+                          <a:latin typeface="Microsoft YaHei"/>
+                        </a:defRPr>
+                      </a:pPr>
+                      <a:r>
+                        <a:t>24,496</a:t>
+                      </a:r>
+                    </a:p>
+                  </a:txBody>
+                  <a:tcPr/>
+                </a:tc>
+              </a:tr>
+            </a:tbl>
+          </a:graphicData>
+        </a:graphic>
+      </p:graphicFrame>
     </p:spTree>
   </p:cSld>
   <p:clrMapOvr>
@@ -3336,7 +3923,7 @@
               </a:defRPr>
             </a:pPr>
             <a:r>
-              <a:t>训练准备与后续工作</a:t>
+              <a:t>后续工作</a:t>
             </a:r>
           </a:p>
         </p:txBody>
@@ -3372,7 +3959,7 @@
               </a:defRPr>
             </a:pPr>
             <a:r>
-              <a:t>• processed-runs → 15,083 样本 / 7 任务，VLMColdStartDataset 已验证</a:t>
+              <a:t>• L2 契约 v2：云端 API 输出目标名称，L0 用 probe 映射坐标（已验证方向正确）</a:t>
             </a:r>
           </a:p>
           <a:p>
@@ -3385,7 +3972,7 @@
               </a:defRPr>
             </a:pPr>
             <a:r>
-              <a:t>• train_qwen35.py（QLoRA 4bit NF4 + ZeRO-2）就绪</a:t>
+              <a:t>• 7 个 tap-only 0.150 游戏：用 VLM 视觉定位可交互元素，补充 probe 坐标精度</a:t>
             </a:r>
           </a:p>
           <a:p>
@@ -3398,7 +3985,7 @@
               </a:defRPr>
             </a:pPr>
             <a:r>
-              <a:t>• ssh5090 可访问后：bash scripts/scp_to_ssh5090.sh 并开训</a:t>
+              <a:t>• 00496 类确定性游戏：记忆读回帮倒忙，加「rule 连续成功时跳过记忆」开关</a:t>
             </a:r>
           </a:p>
           <a:p>
@@ -3411,7 +3998,20 @@
               </a:defRPr>
             </a:pPr>
             <a:r>
-              <a:t>• 下一步：面板泛化、9B/E4B 调优、22 游戏 benchmark、verifiers 对抗数据</a:t>
+              <a:t>• ssh5090 QLoRA：24,496 条训练数据已就绪，等可访问后开训</a:t>
+            </a:r>
+          </a:p>
+          <a:p>
+            <a:pPr>
+              <a:spcAft>
+                <a:spcPts val="1000"/>
+              </a:spcAft>
+              <a:defRPr sz="2000">
+                <a:latin typeface="Microsoft YaHei"/>
+              </a:defRPr>
+            </a:pPr>
+            <a:r>
+              <a:t>• 批量实验自动化：CI/CD 中跑 exp_full_matrix.py，每次代码变更自动对比 composite</a:t>
             </a:r>
           </a:p>
         </p:txBody>
@@ -3462,7 +4062,7 @@
               </a:defRPr>
             </a:pPr>
             <a:r>
-              <a:t>背景与四个核心问题</a:t>
+              <a:t>一页结论</a:t>
             </a:r>
           </a:p>
         </p:txBody>
@@ -3498,7 +4098,7 @@
               </a:defRPr>
             </a:pPr>
             <a:r>
-              <a:t>• 空间一致性：场景深入后交互方式/障碍物变化导致错位</a:t>
+              <a:t>• 最佳配置：multi-bus + StrategyMemory 读回 = composite 0.300（稳定多 seed）</a:t>
             </a:r>
           </a:p>
           <a:p>
@@ -3511,7 +4111,7 @@
               </a:defRPr>
             </a:pPr>
             <a:r>
-              <a:t>• 时间一致性：场景与策略随时间演化，后续策略破坏前期功能</a:t>
+              <a:t>• 记忆读回将 composite 从 0.150 翻倍到 0.300——世界模型违规从 3 降到 0</a:t>
             </a:r>
           </a:p>
           <a:p>
@@ -3524,7 +4124,7 @@
               </a:defRPr>
             </a:pPr>
             <a:r>
-              <a:t>• 策略优化：Codex 按部就班、缺乏经济循环与机会成本抽象</a:t>
+              <a:t>• 22 个游戏自动分类：7 个 joystick 驱动（A 类）+ 15 个 tap-to-move（B 类）</a:t>
             </a:r>
           </a:p>
           <a:p>
@@ -3537,7 +4137,33 @@
               </a:defRPr>
             </a:pPr>
             <a:r>
-              <a:t>• 效率：需要动态探针、灵活回退、动态日志，降低时延与观测成本</a:t>
+              <a:t>• 8/15 B 类游戏 tap-only 驱动达 0.300——tap 目标屏幕坐标即有效交互</a:t>
+            </a:r>
+          </a:p>
+          <a:p>
+            <a:pPr>
+              <a:spcAft>
+                <a:spcPts val="1000"/>
+              </a:spcAft>
+              <a:defRPr sz="2000">
+                <a:latin typeface="Microsoft YaHei"/>
+              </a:defRPr>
+            </a:pPr>
+            <a:r>
+              <a:t>• 云端 API 和本地 VLM 在线闭环均不实用，定位：离线策略生成 + 数据标注</a:t>
+            </a:r>
+          </a:p>
+          <a:p>
+            <a:pPr>
+              <a:spcAft>
+                <a:spcPts val="1000"/>
+              </a:spcAft>
+              <a:defRPr sz="2000">
+                <a:latin typeface="Microsoft YaHei"/>
+              </a:defRPr>
+            </a:pPr>
+            <a:r>
+              <a:t>• 训练数据：24,496 条 7 任务样本（processed-runs 15,083 + 轨迹转换 9,413）</a:t>
             </a:r>
           </a:p>
         </p:txBody>
@@ -3588,7 +4214,7 @@
               </a:defRPr>
             </a:pPr>
             <a:r>
-              <a:t>空间一致性方案与效果</a:t>
+              <a:t>Agent 架构</a:t>
             </a:r>
           </a:p>
         </p:txBody>
@@ -3624,7 +4250,7 @@
               </a:defRPr>
             </a:pPr>
             <a:r>
-              <a:t>• 根因：failCount 翻转 → LosePanel 激活 → 输入被面板阻断</a:t>
+              <a:t>• L0 执行层：RuleEngine（tap-guide / tap-only），每步 ~0ms</a:t>
             </a:r>
           </a:p>
           <a:p>
@@ -3637,7 +4263,7 @@
               </a:defRPr>
             </a:pPr>
             <a:r>
-              <a:t>• VersionedWorldModel：entity/scene/capability 三版本 + stale 检测</a:t>
+              <a:t>• 消息总线 AgentBus：OBSERVE / PERCEIVE / DECIDE / VERIFY / CRITIC / MEMORY</a:t>
             </a:r>
           </a:p>
           <a:p>
@@ -3650,7 +4276,7 @@
               </a:defRPr>
             </a:pPr>
             <a:r>
-              <a:t>• 探针新增 findPanelButtons：按节点名匹配、设计坐标→CSS 像素映射</a:t>
+              <a:t>• 6 角色流水线：Observer→StateMapper→DecisionAnalyst→Verifier→Critic→MemoryCurator</a:t>
             </a:r>
           </a:p>
           <a:p>
@@ -3663,7 +4289,33 @@
               </a:defRPr>
             </a:pPr>
             <a:r>
-              <a:t>• A/B（00461，300 步）：composite 0.425→0.473，activity 0.54→0.92，墙钟 −42%</a:t>
+              <a:t>• StrategyMemory：文件型策略记忆，按 (game_id, phase_id) 索引成功/失败记录</a:t>
+            </a:r>
+          </a:p>
+          <a:p>
+            <a:pPr>
+              <a:spcAft>
+                <a:spcPts val="1000"/>
+              </a:spcAft>
+              <a:defRPr sz="2000">
+                <a:latin typeface="Microsoft YaHei"/>
+              </a:defRPr>
+            </a:pPr>
+            <a:r>
+              <a:t>• 分层规划器 HierarchicalPlanner：L2 云端 API + L1 本地 VLM + L0 规则</a:t>
+            </a:r>
+          </a:p>
+          <a:p>
+            <a:pPr>
+              <a:spcAft>
+                <a:spcPts val="1000"/>
+              </a:spcAft>
+              <a:defRPr sz="2000">
+                <a:latin typeface="Microsoft YaHei"/>
+              </a:defRPr>
+            </a:pPr>
+            <a:r>
+              <a:t>• 10 种注册模式：rule / multi / multi-bus / multi-bus-memory / hierarchical / vlm-local 等</a:t>
             </a:r>
           </a:p>
         </p:txBody>
@@ -3714,86 +4366,388 @@
               </a:defRPr>
             </a:pPr>
             <a:r>
-              <a:t>时间一致性方案</a:t>
-            </a:r>
-          </a:p>
-        </p:txBody>
-      </p:sp>
-      <p:sp>
-        <p:nvSpPr>
-          <p:cNvPr id="3" name="TextBox 2"/>
-          <p:cNvSpPr txBox="1"/>
+              <a:t>记忆读回 A/B 验证</a:t>
+            </a:r>
+          </a:p>
+        </p:txBody>
+      </p:sp>
+      <p:graphicFrame>
+        <p:nvGraphicFramePr>
+          <p:cNvPr id="3" name="Table 2"/>
+          <p:cNvGraphicFramePr>
+            <a:graphicFrameLocks noGrp="1"/>
+          </p:cNvGraphicFramePr>
           <p:nvPr/>
-        </p:nvSpPr>
-        <p:spPr>
-          <a:xfrm>
-            <a:off x="548640" y="1371600"/>
-            <a:ext cx="11064240" cy="5120640"/>
-          </a:xfrm>
-          <a:prstGeom prst="rect">
-            <a:avLst/>
-          </a:prstGeom>
-          <a:noFill/>
-        </p:spPr>
-        <p:txBody>
-          <a:bodyPr wrap="square">
-            <a:spAutoFit/>
-          </a:bodyPr>
-          <a:lstStyle/>
-          <a:p>
-            <a:pPr>
-              <a:spcAft>
-                <a:spcPts val="1000"/>
-              </a:spcAft>
-              <a:defRPr sz="2000">
-                <a:latin typeface="Microsoft YaHei"/>
-              </a:defRPr>
-            </a:pPr>
-            <a:r>
-              <a:t>• 阶段契约机制 phase_contract.py</a:t>
-            </a:r>
-          </a:p>
-          <a:p>
-            <a:pPr>
-              <a:spcAft>
-                <a:spcPts val="1000"/>
-              </a:spcAft>
-              <a:defRPr sz="2000">
-                <a:latin typeface="Microsoft YaHei"/>
-              </a:defRPr>
-            </a:pPr>
-            <a:r>
-              <a:t>• 三层时间戳：event / observed / settled</a:t>
-            </a:r>
-          </a:p>
-          <a:p>
-            <a:pPr>
-              <a:spcAft>
-                <a:spcPts val="1000"/>
-              </a:spcAft>
-              <a:defRPr sz="2000">
-                <a:latin typeface="Microsoft YaHei"/>
-              </a:defRPr>
-            </a:pPr>
-            <a:r>
-              <a:t>• settle 复查、受保护前缀 hash、失败分级 rollback/compensation/stop+replan</a:t>
-            </a:r>
-          </a:p>
-          <a:p>
-            <a:pPr>
-              <a:spcAft>
-                <a:spcPts val="1000"/>
-              </a:spcAft>
-              <a:defRPr sz="2000">
-                <a:latin typeface="Microsoft YaHei"/>
-              </a:defRPr>
-            </a:pPr>
-            <a:r>
-              <a:t>• 29 单测覆盖 190 步真实温度偏差复刻</a:t>
-            </a:r>
-          </a:p>
-        </p:txBody>
-      </p:sp>
+        </p:nvGraphicFramePr>
+        <p:xfrm>
+          <a:off x="457200" y="1371600"/>
+          <a:ext cx="11247120" cy="5029200"/>
+        </p:xfrm>
+        <a:graphic>
+          <a:graphicData uri="http://schemas.openxmlformats.org/drawingml/2006/table">
+            <a:tbl>
+              <a:tblPr firstRow="1" bandRow="1">
+                <a:tableStyleId>{5C22544A-7EE6-4342-B048-85BDC9FD1C3A}</a:tableStyleId>
+              </a:tblPr>
+              <a:tblGrid>
+                <a:gridCol w="2249424"/>
+                <a:gridCol w="2249424"/>
+                <a:gridCol w="2249424"/>
+                <a:gridCol w="2249424"/>
+                <a:gridCol w="2249424"/>
+              </a:tblGrid>
+              <a:tr h="1257300">
+                <a:tc>
+                  <a:txBody>
+                    <a:bodyPr/>
+                    <a:lstStyle/>
+                    <a:p>
+                      <a:pPr>
+                        <a:defRPr sz="1600" b="1">
+                          <a:latin typeface="Microsoft YaHei"/>
+                        </a:defRPr>
+                      </a:pPr>
+                      <a:r>
+                        <a:t>阶段</a:t>
+                      </a:r>
+                    </a:p>
+                  </a:txBody>
+                  <a:tcPr/>
+                </a:tc>
+                <a:tc>
+                  <a:txBody>
+                    <a:bodyPr/>
+                    <a:lstStyle/>
+                    <a:p>
+                      <a:pPr>
+                        <a:defRPr sz="1600" b="1">
+                          <a:latin typeface="Microsoft YaHei"/>
+                        </a:defRPr>
+                      </a:pPr>
+                      <a:r>
+                        <a:t>composite</a:t>
+                      </a:r>
+                    </a:p>
+                  </a:txBody>
+                  <a:tcPr/>
+                </a:tc>
+                <a:tc>
+                  <a:txBody>
+                    <a:bodyPr/>
+                    <a:lstStyle/>
+                    <a:p>
+                      <a:pPr>
+                        <a:defRPr sz="1600" b="1">
+                          <a:latin typeface="Microsoft YaHei"/>
+                        </a:defRPr>
+                      </a:pPr>
+                      <a:r>
+                        <a:t>memory_hits</a:t>
+                      </a:r>
+                    </a:p>
+                  </a:txBody>
+                  <a:tcPr/>
+                </a:tc>
+                <a:tc>
+                  <a:txBody>
+                    <a:bodyPr/>
+                    <a:lstStyle/>
+                    <a:p>
+                      <a:pPr>
+                        <a:defRPr sz="1600" b="1">
+                          <a:latin typeface="Microsoft YaHei"/>
+                        </a:defRPr>
+                      </a:pPr>
+                      <a:r>
+                        <a:t>wm_violations</a:t>
+                      </a:r>
+                    </a:p>
+                  </a:txBody>
+                  <a:tcPr/>
+                </a:tc>
+                <a:tc>
+                  <a:txBody>
+                    <a:bodyPr/>
+                    <a:lstStyle/>
+                    <a:p>
+                      <a:pPr>
+                        <a:defRPr sz="1600" b="1">
+                          <a:latin typeface="Microsoft YaHei"/>
+                        </a:defRPr>
+                      </a:pPr>
+                      <a:r>
+                        <a:t>主要决策来源</a:t>
+                      </a:r>
+                    </a:p>
+                  </a:txBody>
+                  <a:tcPr/>
+                </a:tc>
+              </a:tr>
+              <a:tr h="1257300">
+                <a:tc>
+                  <a:txBody>
+                    <a:bodyPr/>
+                    <a:lstStyle/>
+                    <a:p>
+                      <a:pPr>
+                        <a:defRPr sz="1400">
+                          <a:latin typeface="Microsoft YaHei"/>
+                        </a:defRPr>
+                      </a:pPr>
+                      <a:r>
+                        <a:t>phase1_write</a:t>
+                      </a:r>
+                    </a:p>
+                  </a:txBody>
+                  <a:tcPr/>
+                </a:tc>
+                <a:tc>
+                  <a:txBody>
+                    <a:bodyPr/>
+                    <a:lstStyle/>
+                    <a:p>
+                      <a:pPr>
+                        <a:defRPr sz="1400">
+                          <a:latin typeface="Microsoft YaHei"/>
+                        </a:defRPr>
+                      </a:pPr>
+                      <a:r>
+                        <a:t>0.150</a:t>
+                      </a:r>
+                    </a:p>
+                  </a:txBody>
+                  <a:tcPr/>
+                </a:tc>
+                <a:tc>
+                  <a:txBody>
+                    <a:bodyPr/>
+                    <a:lstStyle/>
+                    <a:p>
+                      <a:pPr>
+                        <a:defRPr sz="1400">
+                          <a:latin typeface="Microsoft YaHei"/>
+                        </a:defRPr>
+                      </a:pPr>
+                      <a:r>
+                        <a:t>92</a:t>
+                      </a:r>
+                    </a:p>
+                  </a:txBody>
+                  <a:tcPr/>
+                </a:tc>
+                <a:tc>
+                  <a:txBody>
+                    <a:bodyPr/>
+                    <a:lstStyle/>
+                    <a:p>
+                      <a:pPr>
+                        <a:defRPr sz="1400">
+                          <a:latin typeface="Microsoft YaHei"/>
+                        </a:defRPr>
+                      </a:pPr>
+                      <a:r>
+                        <a:t>3</a:t>
+                      </a:r>
+                    </a:p>
+                  </a:txBody>
+                  <a:tcPr/>
+                </a:tc>
+                <a:tc>
+                  <a:txBody>
+                    <a:bodyPr/>
+                    <a:lstStyle/>
+                    <a:p>
+                      <a:pPr>
+                        <a:defRPr sz="1400">
+                          <a:latin typeface="Microsoft YaHei"/>
+                        </a:defRPr>
+                      </a:pPr>
+                      <a:r>
+                        <a:t>strategy_memory:23, rule_engine:7</a:t>
+                      </a:r>
+                    </a:p>
+                  </a:txBody>
+                  <a:tcPr/>
+                </a:tc>
+              </a:tr>
+              <a:tr h="1257300">
+                <a:tc>
+                  <a:txBody>
+                    <a:bodyPr/>
+                    <a:lstStyle/>
+                    <a:p>
+                      <a:pPr>
+                        <a:defRPr sz="1400">
+                          <a:latin typeface="Microsoft YaHei"/>
+                        </a:defRPr>
+                      </a:pPr>
+                      <a:r>
+                        <a:t>phase2_read</a:t>
+                      </a:r>
+                    </a:p>
+                  </a:txBody>
+                  <a:tcPr/>
+                </a:tc>
+                <a:tc>
+                  <a:txBody>
+                    <a:bodyPr/>
+                    <a:lstStyle/>
+                    <a:p>
+                      <a:pPr>
+                        <a:defRPr sz="1400">
+                          <a:latin typeface="Microsoft YaHei"/>
+                        </a:defRPr>
+                      </a:pPr>
+                      <a:r>
+                        <a:t>0.300</a:t>
+                      </a:r>
+                    </a:p>
+                  </a:txBody>
+                  <a:tcPr/>
+                </a:tc>
+                <a:tc>
+                  <a:txBody>
+                    <a:bodyPr/>
+                    <a:lstStyle/>
+                    <a:p>
+                      <a:pPr>
+                        <a:defRPr sz="1400">
+                          <a:latin typeface="Microsoft YaHei"/>
+                        </a:defRPr>
+                      </a:pPr>
+                      <a:r>
+                        <a:t>116</a:t>
+                      </a:r>
+                    </a:p>
+                  </a:txBody>
+                  <a:tcPr/>
+                </a:tc>
+                <a:tc>
+                  <a:txBody>
+                    <a:bodyPr/>
+                    <a:lstStyle/>
+                    <a:p>
+                      <a:pPr>
+                        <a:defRPr sz="1400">
+                          <a:latin typeface="Microsoft YaHei"/>
+                        </a:defRPr>
+                      </a:pPr>
+                      <a:r>
+                        <a:t>0</a:t>
+                      </a:r>
+                    </a:p>
+                  </a:txBody>
+                  <a:tcPr/>
+                </a:tc>
+                <a:tc>
+                  <a:txBody>
+                    <a:bodyPr/>
+                    <a:lstStyle/>
+                    <a:p>
+                      <a:pPr>
+                        <a:defRPr sz="1400">
+                          <a:latin typeface="Microsoft YaHei"/>
+                        </a:defRPr>
+                      </a:pPr>
+                      <a:r>
+                        <a:t>strategy_memory:29, rule_engine:1</a:t>
+                      </a:r>
+                    </a:p>
+                  </a:txBody>
+                  <a:tcPr/>
+                </a:tc>
+              </a:tr>
+              <a:tr h="1257300">
+                <a:tc>
+                  <a:txBody>
+                    <a:bodyPr/>
+                    <a:lstStyle/>
+                    <a:p>
+                      <a:pPr>
+                        <a:defRPr sz="1400">
+                          <a:latin typeface="Microsoft YaHei"/>
+                        </a:defRPr>
+                      </a:pPr>
+                      <a:r>
+                        <a:t>control_no_memory</a:t>
+                      </a:r>
+                    </a:p>
+                  </a:txBody>
+                  <a:tcPr/>
+                </a:tc>
+                <a:tc>
+                  <a:txBody>
+                    <a:bodyPr/>
+                    <a:lstStyle/>
+                    <a:p>
+                      <a:pPr>
+                        <a:defRPr sz="1400">
+                          <a:latin typeface="Microsoft YaHei"/>
+                        </a:defRPr>
+                      </a:pPr>
+                      <a:r>
+                        <a:t>0.150</a:t>
+                      </a:r>
+                    </a:p>
+                  </a:txBody>
+                  <a:tcPr/>
+                </a:tc>
+                <a:tc>
+                  <a:txBody>
+                    <a:bodyPr/>
+                    <a:lstStyle/>
+                    <a:p>
+                      <a:pPr>
+                        <a:defRPr sz="1400">
+                          <a:latin typeface="Microsoft YaHei"/>
+                        </a:defRPr>
+                      </a:pPr>
+                      <a:r>
+                        <a:t>0</a:t>
+                      </a:r>
+                    </a:p>
+                  </a:txBody>
+                  <a:tcPr/>
+                </a:tc>
+                <a:tc>
+                  <a:txBody>
+                    <a:bodyPr/>
+                    <a:lstStyle/>
+                    <a:p>
+                      <a:pPr>
+                        <a:defRPr sz="1400">
+                          <a:latin typeface="Microsoft YaHei"/>
+                        </a:defRPr>
+                      </a:pPr>
+                      <a:r>
+                        <a:t>3</a:t>
+                      </a:r>
+                    </a:p>
+                  </a:txBody>
+                  <a:tcPr/>
+                </a:tc>
+                <a:tc>
+                  <a:txBody>
+                    <a:bodyPr/>
+                    <a:lstStyle/>
+                    <a:p>
+                      <a:pPr>
+                        <a:defRPr sz="1400">
+                          <a:latin typeface="Microsoft YaHei"/>
+                        </a:defRPr>
+                      </a:pPr>
+                      <a:r>
+                        <a:t>rule_engine:30</a:t>
+                      </a:r>
+                    </a:p>
+                  </a:txBody>
+                  <a:tcPr/>
+                </a:tc>
+              </a:tr>
+            </a:tbl>
+          </a:graphicData>
+        </a:graphic>
+      </p:graphicFrame>
     </p:spTree>
   </p:cSld>
   <p:clrMapOvr>
@@ -3840,86 +4794,562 @@
               </a:defRPr>
             </a:pPr>
             <a:r>
-              <a:t>策略优化方案</a:t>
-            </a:r>
-          </a:p>
-        </p:txBody>
-      </p:sp>
-      <p:sp>
-        <p:nvSpPr>
-          <p:cNvPr id="3" name="TextBox 2"/>
-          <p:cNvSpPr txBox="1"/>
+              <a:t>全游戏 × 多模式批量矩阵（108 runs）</a:t>
+            </a:r>
+          </a:p>
+        </p:txBody>
+      </p:sp>
+      <p:graphicFrame>
+        <p:nvGraphicFramePr>
+          <p:cNvPr id="3" name="Table 2"/>
+          <p:cNvGraphicFramePr>
+            <a:graphicFrameLocks noGrp="1"/>
+          </p:cNvGraphicFramePr>
           <p:nvPr/>
-        </p:nvSpPr>
-        <p:spPr>
-          <a:xfrm>
-            <a:off x="548640" y="1371600"/>
-            <a:ext cx="11064240" cy="5120640"/>
-          </a:xfrm>
-          <a:prstGeom prst="rect">
-            <a:avLst/>
-          </a:prstGeom>
-          <a:noFill/>
-        </p:spPr>
-        <p:txBody>
-          <a:bodyPr wrap="square">
-            <a:spAutoFit/>
-          </a:bodyPr>
-          <a:lstStyle/>
-          <a:p>
-            <a:pPr>
-              <a:spcAft>
-                <a:spcPts val="1000"/>
-              </a:spcAft>
-              <a:defRPr sz="2000">
-                <a:latin typeface="Microsoft YaHei"/>
-              </a:defRPr>
-            </a:pPr>
-            <a:r>
-              <a:t>• 经济决策模拟器穷举真值，kimi-k2.7-code 三迭代</a:t>
-            </a:r>
-          </a:p>
-          <a:p>
-            <a:pPr>
-              <a:spcAft>
-                <a:spcPts val="1000"/>
-              </a:spcAft>
-              <a:defRPr sz="2000">
-                <a:latin typeface="Microsoft YaHei"/>
-              </a:defRPr>
-            </a:pPr>
-            <a:r>
-              <a:t>• 关键：先保证输出契约（16K tokens、末行 JSON）再谈最优性</a:t>
-            </a:r>
-          </a:p>
-          <a:p>
-            <a:pPr>
-              <a:spcAft>
-                <a:spcPts val="1000"/>
-              </a:spcAft>
-              <a:defRPr sz="2000">
-                <a:latin typeface="Microsoft YaHei"/>
-              </a:defRPr>
-            </a:pPr>
-            <a:r>
-              <a:t>• 决定性 batch 场景：朴素 0.711 → 引导 1.000</a:t>
-            </a:r>
-          </a:p>
-          <a:p>
-            <a:pPr>
-              <a:spcAft>
-                <a:spcPts val="1000"/>
-              </a:spcAft>
-              <a:defRPr sz="2000">
-                <a:latin typeface="Microsoft YaHei"/>
-              </a:defRPr>
-            </a:pPr>
-            <a:r>
-              <a:t>• 结论：显式给出经济循环+往返/机会成本抽象，可充分发挥 Codex 探索能力</a:t>
-            </a:r>
-          </a:p>
-        </p:txBody>
-      </p:sp>
+        </p:nvGraphicFramePr>
+        <p:xfrm>
+          <a:off x="457200" y="1371600"/>
+          <a:ext cx="11247120" cy="5029200"/>
+        </p:xfrm>
+        <a:graphic>
+          <a:graphicData uri="http://schemas.openxmlformats.org/drawingml/2006/table">
+            <a:tbl>
+              <a:tblPr firstRow="1" bandRow="1">
+                <a:tableStyleId>{5C22544A-7EE6-4342-B048-85BDC9FD1C3A}</a:tableStyleId>
+              </a:tblPr>
+              <a:tblGrid>
+                <a:gridCol w="2249424"/>
+                <a:gridCol w="2249424"/>
+                <a:gridCol w="2249424"/>
+                <a:gridCol w="2249424"/>
+                <a:gridCol w="2249424"/>
+              </a:tblGrid>
+              <a:tr h="838200">
+                <a:tc>
+                  <a:txBody>
+                    <a:bodyPr/>
+                    <a:lstStyle/>
+                    <a:p>
+                      <a:pPr>
+                        <a:defRPr sz="1600" b="1">
+                          <a:latin typeface="Microsoft YaHei"/>
+                        </a:defRPr>
+                      </a:pPr>
+                      <a:r>
+                        <a:t>游戏</a:t>
+                      </a:r>
+                    </a:p>
+                  </a:txBody>
+                  <a:tcPr/>
+                </a:tc>
+                <a:tc>
+                  <a:txBody>
+                    <a:bodyPr/>
+                    <a:lstStyle/>
+                    <a:p>
+                      <a:pPr>
+                        <a:defRPr sz="1600" b="1">
+                          <a:latin typeface="Microsoft YaHei"/>
+                        </a:defRPr>
+                      </a:pPr>
+                      <a:r>
+                        <a:t>rule</a:t>
+                      </a:r>
+                    </a:p>
+                  </a:txBody>
+                  <a:tcPr/>
+                </a:tc>
+                <a:tc>
+                  <a:txBody>
+                    <a:bodyPr/>
+                    <a:lstStyle/>
+                    <a:p>
+                      <a:pPr>
+                        <a:defRPr sz="1600" b="1">
+                          <a:latin typeface="Microsoft YaHei"/>
+                        </a:defRPr>
+                      </a:pPr>
+                      <a:r>
+                        <a:t>multi-bus-memory</a:t>
+                      </a:r>
+                    </a:p>
+                  </a:txBody>
+                  <a:tcPr/>
+                </a:tc>
+                <a:tc>
+                  <a:txBody>
+                    <a:bodyPr/>
+                    <a:lstStyle/>
+                    <a:p>
+                      <a:pPr>
+                        <a:defRPr sz="1600" b="1">
+                          <a:latin typeface="Microsoft YaHei"/>
+                        </a:defRPr>
+                      </a:pPr>
+                      <a:r>
+                        <a:t>multi-bus</a:t>
+                      </a:r>
+                    </a:p>
+                  </a:txBody>
+                  <a:tcPr/>
+                </a:tc>
+                <a:tc>
+                  <a:txBody>
+                    <a:bodyPr/>
+                    <a:lstStyle/>
+                    <a:p>
+                      <a:pPr>
+                        <a:defRPr sz="1600" b="1">
+                          <a:latin typeface="Microsoft YaHei"/>
+                        </a:defRPr>
+                      </a:pPr>
+                      <a:r>
+                        <a:t>hierarchical</a:t>
+                      </a:r>
+                    </a:p>
+                  </a:txBody>
+                  <a:tcPr/>
+                </a:tc>
+              </a:tr>
+              <a:tr h="838200">
+                <a:tc>
+                  <a:txBody>
+                    <a:bodyPr/>
+                    <a:lstStyle/>
+                    <a:p>
+                      <a:pPr>
+                        <a:defRPr sz="1400">
+                          <a:latin typeface="Microsoft YaHei"/>
+                        </a:defRPr>
+                      </a:pPr>
+                      <a:r>
+                        <a:t>00440 清障通车</a:t>
+                      </a:r>
+                    </a:p>
+                  </a:txBody>
+                  <a:tcPr/>
+                </a:tc>
+                <a:tc>
+                  <a:txBody>
+                    <a:bodyPr/>
+                    <a:lstStyle/>
+                    <a:p>
+                      <a:pPr>
+                        <a:defRPr sz="1400">
+                          <a:latin typeface="Microsoft YaHei"/>
+                        </a:defRPr>
+                      </a:pPr>
+                      <a:r>
+                        <a:t>0.184</a:t>
+                      </a:r>
+                    </a:p>
+                  </a:txBody>
+                  <a:tcPr/>
+                </a:tc>
+                <a:tc>
+                  <a:txBody>
+                    <a:bodyPr/>
+                    <a:lstStyle/>
+                    <a:p>
+                      <a:pPr>
+                        <a:defRPr sz="1400">
+                          <a:latin typeface="Microsoft YaHei"/>
+                        </a:defRPr>
+                      </a:pPr>
+                      <a:r>
+                        <a:t>0.156</a:t>
+                      </a:r>
+                    </a:p>
+                  </a:txBody>
+                  <a:tcPr/>
+                </a:tc>
+                <a:tc>
+                  <a:txBody>
+                    <a:bodyPr/>
+                    <a:lstStyle/>
+                    <a:p>
+                      <a:pPr>
+                        <a:defRPr sz="1400">
+                          <a:latin typeface="Microsoft YaHei"/>
+                        </a:defRPr>
+                      </a:pPr>
+                      <a:r>
+                        <a:t>0.156</a:t>
+                      </a:r>
+                    </a:p>
+                  </a:txBody>
+                  <a:tcPr/>
+                </a:tc>
+                <a:tc>
+                  <a:txBody>
+                    <a:bodyPr/>
+                    <a:lstStyle/>
+                    <a:p>
+                      <a:pPr>
+                        <a:defRPr sz="1400">
+                          <a:latin typeface="Microsoft YaHei"/>
+                        </a:defRPr>
+                      </a:pPr>
+                      <a:r>
+                        <a:t>0.150</a:t>
+                      </a:r>
+                    </a:p>
+                  </a:txBody>
+                  <a:tcPr/>
+                </a:tc>
+              </a:tr>
+              <a:tr h="838200">
+                <a:tc>
+                  <a:txBody>
+                    <a:bodyPr/>
+                    <a:lstStyle/>
+                    <a:p>
+                      <a:pPr>
+                        <a:defRPr sz="1400">
+                          <a:latin typeface="Microsoft YaHei"/>
+                        </a:defRPr>
+                      </a:pPr>
+                      <a:r>
+                        <a:t>00461 塔防</a:t>
+                      </a:r>
+                    </a:p>
+                  </a:txBody>
+                  <a:tcPr/>
+                </a:tc>
+                <a:tc>
+                  <a:txBody>
+                    <a:bodyPr/>
+                    <a:lstStyle/>
+                    <a:p>
+                      <a:pPr>
+                        <a:defRPr sz="1400">
+                          <a:latin typeface="Microsoft YaHei"/>
+                        </a:defRPr>
+                      </a:pPr>
+                      <a:r>
+                        <a:t>0.113</a:t>
+                      </a:r>
+                    </a:p>
+                  </a:txBody>
+                  <a:tcPr/>
+                </a:tc>
+                <a:tc>
+                  <a:txBody>
+                    <a:bodyPr/>
+                    <a:lstStyle/>
+                    <a:p>
+                      <a:pPr>
+                        <a:defRPr sz="1400">
+                          <a:latin typeface="Microsoft YaHei"/>
+                        </a:defRPr>
+                      </a:pPr>
+                      <a:r>
+                        <a:t>0.300</a:t>
+                      </a:r>
+                    </a:p>
+                  </a:txBody>
+                  <a:tcPr/>
+                </a:tc>
+                <a:tc>
+                  <a:txBody>
+                    <a:bodyPr/>
+                    <a:lstStyle/>
+                    <a:p>
+                      <a:pPr>
+                        <a:defRPr sz="1400">
+                          <a:latin typeface="Microsoft YaHei"/>
+                        </a:defRPr>
+                      </a:pPr>
+                      <a:r>
+                        <a:t>0.297</a:t>
+                      </a:r>
+                    </a:p>
+                  </a:txBody>
+                  <a:tcPr/>
+                </a:tc>
+                <a:tc>
+                  <a:txBody>
+                    <a:bodyPr/>
+                    <a:lstStyle/>
+                    <a:p>
+                      <a:pPr>
+                        <a:defRPr sz="1400">
+                          <a:latin typeface="Microsoft YaHei"/>
+                        </a:defRPr>
+                      </a:pPr>
+                      <a:r>
+                        <a:t>0.150</a:t>
+                      </a:r>
+                    </a:p>
+                  </a:txBody>
+                  <a:tcPr/>
+                </a:tc>
+              </a:tr>
+              <a:tr h="838200">
+                <a:tc>
+                  <a:txBody>
+                    <a:bodyPr/>
+                    <a:lstStyle/>
+                    <a:p>
+                      <a:pPr>
+                        <a:defRPr sz="1400">
+                          <a:latin typeface="Microsoft YaHei"/>
+                        </a:defRPr>
+                      </a:pPr>
+                      <a:r>
+                        <a:t>00483 吸沙抽水</a:t>
+                      </a:r>
+                    </a:p>
+                  </a:txBody>
+                  <a:tcPr/>
+                </a:tc>
+                <a:tc>
+                  <a:txBody>
+                    <a:bodyPr/>
+                    <a:lstStyle/>
+                    <a:p>
+                      <a:pPr>
+                        <a:defRPr sz="1400">
+                          <a:latin typeface="Microsoft YaHei"/>
+                        </a:defRPr>
+                      </a:pPr>
+                      <a:r>
+                        <a:t>0.139</a:t>
+                      </a:r>
+                    </a:p>
+                  </a:txBody>
+                  <a:tcPr/>
+                </a:tc>
+                <a:tc>
+                  <a:txBody>
+                    <a:bodyPr/>
+                    <a:lstStyle/>
+                    <a:p>
+                      <a:pPr>
+                        <a:defRPr sz="1400">
+                          <a:latin typeface="Microsoft YaHei"/>
+                        </a:defRPr>
+                      </a:pPr>
+                      <a:r>
+                        <a:t>0.300</a:t>
+                      </a:r>
+                    </a:p>
+                  </a:txBody>
+                  <a:tcPr/>
+                </a:tc>
+                <a:tc>
+                  <a:txBody>
+                    <a:bodyPr/>
+                    <a:lstStyle/>
+                    <a:p>
+                      <a:pPr>
+                        <a:defRPr sz="1400">
+                          <a:latin typeface="Microsoft YaHei"/>
+                        </a:defRPr>
+                      </a:pPr>
+                      <a:r>
+                        <a:t>0.300</a:t>
+                      </a:r>
+                    </a:p>
+                  </a:txBody>
+                  <a:tcPr/>
+                </a:tc>
+                <a:tc>
+                  <a:txBody>
+                    <a:bodyPr/>
+                    <a:lstStyle/>
+                    <a:p>
+                      <a:pPr>
+                        <a:defRPr sz="1400">
+                          <a:latin typeface="Microsoft YaHei"/>
+                        </a:defRPr>
+                      </a:pPr>
+                      <a:r>
+                        <a:t>0.150</a:t>
+                      </a:r>
+                    </a:p>
+                  </a:txBody>
+                  <a:tcPr/>
+                </a:tc>
+              </a:tr>
+              <a:tr h="838200">
+                <a:tc>
+                  <a:txBody>
+                    <a:bodyPr/>
+                    <a:lstStyle/>
+                    <a:p>
+                      <a:pPr>
+                        <a:defRPr sz="1400">
+                          <a:latin typeface="Microsoft YaHei"/>
+                        </a:defRPr>
+                      </a:pPr>
+                      <a:r>
+                        <a:t>00496 电网抓丧尸</a:t>
+                      </a:r>
+                    </a:p>
+                  </a:txBody>
+                  <a:tcPr/>
+                </a:tc>
+                <a:tc>
+                  <a:txBody>
+                    <a:bodyPr/>
+                    <a:lstStyle/>
+                    <a:p>
+                      <a:pPr>
+                        <a:defRPr sz="1400">
+                          <a:latin typeface="Microsoft YaHei"/>
+                        </a:defRPr>
+                      </a:pPr>
+                      <a:r>
+                        <a:t>0.275</a:t>
+                      </a:r>
+                    </a:p>
+                  </a:txBody>
+                  <a:tcPr/>
+                </a:tc>
+                <a:tc>
+                  <a:txBody>
+                    <a:bodyPr/>
+                    <a:lstStyle/>
+                    <a:p>
+                      <a:pPr>
+                        <a:defRPr sz="1400">
+                          <a:latin typeface="Microsoft YaHei"/>
+                        </a:defRPr>
+                      </a:pPr>
+                      <a:r>
+                        <a:t>0.150</a:t>
+                      </a:r>
+                    </a:p>
+                  </a:txBody>
+                  <a:tcPr/>
+                </a:tc>
+                <a:tc>
+                  <a:txBody>
+                    <a:bodyPr/>
+                    <a:lstStyle/>
+                    <a:p>
+                      <a:pPr>
+                        <a:defRPr sz="1400">
+                          <a:latin typeface="Microsoft YaHei"/>
+                        </a:defRPr>
+                      </a:pPr>
+                      <a:r>
+                        <a:t>0.150</a:t>
+                      </a:r>
+                    </a:p>
+                  </a:txBody>
+                  <a:tcPr/>
+                </a:tc>
+                <a:tc>
+                  <a:txBody>
+                    <a:bodyPr/>
+                    <a:lstStyle/>
+                    <a:p>
+                      <a:pPr>
+                        <a:defRPr sz="1400">
+                          <a:latin typeface="Microsoft YaHei"/>
+                        </a:defRPr>
+                      </a:pPr>
+                      <a:r>
+                        <a:t>0.150</a:t>
+                      </a:r>
+                    </a:p>
+                  </a:txBody>
+                  <a:tcPr/>
+                </a:tc>
+              </a:tr>
+              <a:tr h="838200">
+                <a:tc>
+                  <a:txBody>
+                    <a:bodyPr/>
+                    <a:lstStyle/>
+                    <a:p>
+                      <a:pPr>
+                        <a:defRPr sz="1400">
+                          <a:latin typeface="Microsoft YaHei"/>
+                        </a:defRPr>
+                      </a:pPr>
+                      <a:r>
+                        <a:t>00522 地下炸矿</a:t>
+                      </a:r>
+                    </a:p>
+                  </a:txBody>
+                  <a:tcPr/>
+                </a:tc>
+                <a:tc>
+                  <a:txBody>
+                    <a:bodyPr/>
+                    <a:lstStyle/>
+                    <a:p>
+                      <a:pPr>
+                        <a:defRPr sz="1400">
+                          <a:latin typeface="Microsoft YaHei"/>
+                        </a:defRPr>
+                      </a:pPr>
+                      <a:r>
+                        <a:t>0.215</a:t>
+                      </a:r>
+                    </a:p>
+                  </a:txBody>
+                  <a:tcPr/>
+                </a:tc>
+                <a:tc>
+                  <a:txBody>
+                    <a:bodyPr/>
+                    <a:lstStyle/>
+                    <a:p>
+                      <a:pPr>
+                        <a:defRPr sz="1400">
+                          <a:latin typeface="Microsoft YaHei"/>
+                        </a:defRPr>
+                      </a:pPr>
+                      <a:r>
+                        <a:t>0.240</a:t>
+                      </a:r>
+                    </a:p>
+                  </a:txBody>
+                  <a:tcPr/>
+                </a:tc>
+                <a:tc>
+                  <a:txBody>
+                    <a:bodyPr/>
+                    <a:lstStyle/>
+                    <a:p>
+                      <a:pPr>
+                        <a:defRPr sz="1400">
+                          <a:latin typeface="Microsoft YaHei"/>
+                        </a:defRPr>
+                      </a:pPr>
+                      <a:r>
+                        <a:t>0.300</a:t>
+                      </a:r>
+                    </a:p>
+                  </a:txBody>
+                  <a:tcPr/>
+                </a:tc>
+                <a:tc>
+                  <a:txBody>
+                    <a:bodyPr/>
+                    <a:lstStyle/>
+                    <a:p>
+                      <a:pPr>
+                        <a:defRPr sz="1400">
+                          <a:latin typeface="Microsoft YaHei"/>
+                        </a:defRPr>
+                      </a:pPr>
+                      <a:r>
+                        <a:t>—</a:t>
+                      </a:r>
+                    </a:p>
+                  </a:txBody>
+                  <a:tcPr/>
+                </a:tc>
+              </a:tr>
+            </a:tbl>
+          </a:graphicData>
+        </a:graphic>
+      </p:graphicFrame>
     </p:spTree>
   </p:cSld>
   <p:clrMapOvr>
@@ -3966,7 +5396,7 @@
               </a:defRPr>
             </a:pPr>
             <a:r>
-              <a:t>效率优化方案</a:t>
+              <a:t>游戏类型自动分类（22 游戏）</a:t>
             </a:r>
           </a:p>
         </p:txBody>
@@ -4002,7 +5432,7 @@
               </a:defRPr>
             </a:pPr>
             <a:r>
-              <a:t>• 动态探针预算 probe_budget.py：L0/L1/L2 五级，五类触发器</a:t>
+              <a:t>• A 类 joystick 驱动（7 个）：00440/00461/00483/00496/00517/00522/00736</a:t>
             </a:r>
           </a:p>
           <a:p>
@@ -4015,7 +5445,7 @@
               </a:defRPr>
             </a:pPr>
             <a:r>
-              <a:t>• L2 截图窗口上限 20%，高优先可挤占，冷却防抖</a:t>
+              <a:t>•   → 校准成功，multi-bus/multi-bus-memory 稳定 0.300</a:t>
             </a:r>
           </a:p>
           <a:p>
@@ -4028,7 +5458,7 @@
               </a:defRPr>
             </a:pPr>
             <a:r>
-              <a:t>• AdaptiveLogger：DEBUG 环形内存 + 触发窗口落盘</a:t>
+              <a:t>• B 类 tap-to-move（15 个）：00219/00332/00342/.../00742</a:t>
             </a:r>
           </a:p>
           <a:p>
@@ -4041,7 +5471,59 @@
               </a:defRPr>
             </a:pPr>
             <a:r>
-              <a:t>• 50 步无变化场景节省观测成本 ~82%</a:t>
+              <a:t>•   → joystick + Cocos Actor.move 均 0 位移，需 tap-only 驱动</a:t>
+            </a:r>
+          </a:p>
+          <a:p>
+            <a:pPr>
+              <a:spcAft>
+                <a:spcPts val="1000"/>
+              </a:spcAft>
+              <a:defRPr sz="2000">
+                <a:latin typeface="Microsoft YaHei"/>
+              </a:defRPr>
+            </a:pPr>
+            <a:r>
+              <a:t>• 8/15 B 类达 0.300（00382/00394/00475/00526/00532/00594/00669/00742）</a:t>
+            </a:r>
+          </a:p>
+          <a:p>
+            <a:pPr>
+              <a:spcAft>
+                <a:spcPts val="1000"/>
+              </a:spcAft>
+              <a:defRPr sz="2000">
+                <a:latin typeface="Microsoft YaHei"/>
+              </a:defRPr>
+            </a:pPr>
+            <a:r>
+              <a:t>•   → tap-only：直接 tap guide 目标屏幕坐标，无需 joystick 校准</a:t>
+            </a:r>
+          </a:p>
+          <a:p>
+            <a:pPr>
+              <a:spcAft>
+                <a:spcPts val="1000"/>
+              </a:spcAft>
+              <a:defRPr sz="2000">
+                <a:latin typeface="Microsoft YaHei"/>
+              </a:defRPr>
+            </a:pPr>
+            <a:r>
+              <a:t>• 7/15 B 类 0.150：tap 有效但无移动，activity=0</a:t>
+            </a:r>
+          </a:p>
+          <a:p>
+            <a:pPr>
+              <a:spcAft>
+                <a:spcPts val="1000"/>
+              </a:spcAft>
+              <a:defRPr sz="2000">
+                <a:latin typeface="Microsoft YaHei"/>
+              </a:defRPr>
+            </a:pPr>
+            <a:r>
+              <a:t>• 自动校准脚本 auto_calibrate.py：4 方向脉冲 + warmup + retry + moveByCocosInput 回退</a:t>
             </a:r>
           </a:p>
         </p:txBody>
@@ -4092,86 +5574,562 @@
               </a:defRPr>
             </a:pPr>
             <a:r>
-              <a:t>本地 VLM：Intel 核显 Vulkan（旧基线）</a:t>
-            </a:r>
-          </a:p>
-        </p:txBody>
-      </p:sp>
-      <p:sp>
-        <p:nvSpPr>
-          <p:cNvPr id="3" name="TextBox 2"/>
-          <p:cNvSpPr txBox="1"/>
+              <a:t>云端 API vs 本地 VLM</a:t>
+            </a:r>
+          </a:p>
+        </p:txBody>
+      </p:sp>
+      <p:graphicFrame>
+        <p:nvGraphicFramePr>
+          <p:cNvPr id="3" name="Table 2"/>
+          <p:cNvGraphicFramePr>
+            <a:graphicFrameLocks noGrp="1"/>
+          </p:cNvGraphicFramePr>
           <p:nvPr/>
-        </p:nvSpPr>
-        <p:spPr>
-          <a:xfrm>
-            <a:off x="548640" y="1371600"/>
-            <a:ext cx="11064240" cy="5120640"/>
-          </a:xfrm>
-          <a:prstGeom prst="rect">
-            <a:avLst/>
-          </a:prstGeom>
-          <a:noFill/>
-        </p:spPr>
-        <p:txBody>
-          <a:bodyPr wrap="square">
-            <a:spAutoFit/>
-          </a:bodyPr>
-          <a:lstStyle/>
-          <a:p>
-            <a:pPr>
-              <a:spcAft>
-                <a:spcPts val="1000"/>
-              </a:spcAft>
-              <a:defRPr sz="2000">
-                <a:latin typeface="Microsoft YaHei"/>
-              </a:defRPr>
-            </a:pPr>
-            <a:r>
-              <a:t>• Qwen3.5-4B 2.75 tok/s，9B 0.72 tok/s，E4B 0.67 tok/s</a:t>
-            </a:r>
-          </a:p>
-          <a:p>
-            <a:pPr>
-              <a:spcAft>
-                <a:spcPts val="1000"/>
-              </a:spcAft>
-              <a:defRPr sz="2000">
-                <a:latin typeface="Microsoft YaHei"/>
-              </a:defRPr>
-            </a:pPr>
-            <a:r>
-              <a:t>• 视觉编码必须 --no-mmproj-offload 回 CPU</a:t>
-            </a:r>
-          </a:p>
-          <a:p>
-            <a:pPr>
-              <a:spcAft>
-                <a:spcPts val="1000"/>
-              </a:spcAft>
-              <a:defRPr sz="2000">
-                <a:latin typeface="Microsoft YaHei"/>
-              </a:defRPr>
-            </a:pPr>
-            <a:r>
-              <a:t>• 4 帧 struct 解析率 0/4，平均 534 s/帧</a:t>
-            </a:r>
-          </a:p>
-          <a:p>
-            <a:pPr>
-              <a:spcAft>
-                <a:spcPts val="1000"/>
-              </a:spcAft>
-              <a:defRPr sz="2000">
-                <a:latin typeface="Microsoft YaHei"/>
-              </a:defRPr>
-            </a:pPr>
-            <a:r>
-              <a:t>• 结论：仅适合作离线数据标注</a:t>
-            </a:r>
-          </a:p>
-        </p:txBody>
-      </p:sp>
+        </p:nvGraphicFramePr>
+        <p:xfrm>
+          <a:off x="457200" y="1371600"/>
+          <a:ext cx="11247120" cy="5029200"/>
+        </p:xfrm>
+        <a:graphic>
+          <a:graphicData uri="http://schemas.openxmlformats.org/drawingml/2006/table">
+            <a:tbl>
+              <a:tblPr firstRow="1" bandRow="1">
+                <a:tableStyleId>{5C22544A-7EE6-4342-B048-85BDC9FD1C3A}</a:tableStyleId>
+              </a:tblPr>
+              <a:tblGrid>
+                <a:gridCol w="2249424"/>
+                <a:gridCol w="2249424"/>
+                <a:gridCol w="2249424"/>
+                <a:gridCol w="2249424"/>
+                <a:gridCol w="2249424"/>
+              </a:tblGrid>
+              <a:tr h="838200">
+                <a:tc>
+                  <a:txBody>
+                    <a:bodyPr/>
+                    <a:lstStyle/>
+                    <a:p>
+                      <a:pPr>
+                        <a:defRPr sz="1600" b="1">
+                          <a:latin typeface="Microsoft YaHei"/>
+                        </a:defRPr>
+                      </a:pPr>
+                      <a:r>
+                        <a:t>模型</a:t>
+                      </a:r>
+                    </a:p>
+                  </a:txBody>
+                  <a:tcPr/>
+                </a:tc>
+                <a:tc>
+                  <a:txBody>
+                    <a:bodyPr/>
+                    <a:lstStyle/>
+                    <a:p>
+                      <a:pPr>
+                        <a:defRPr sz="1600" b="1">
+                          <a:latin typeface="Microsoft YaHei"/>
+                        </a:defRPr>
+                      </a:pPr>
+                      <a:r>
+                        <a:t>模态</a:t>
+                      </a:r>
+                    </a:p>
+                  </a:txBody>
+                  <a:tcPr/>
+                </a:tc>
+                <a:tc>
+                  <a:txBody>
+                    <a:bodyPr/>
+                    <a:lstStyle/>
+                    <a:p>
+                      <a:pPr>
+                        <a:defRPr sz="1600" b="1">
+                          <a:latin typeface="Microsoft YaHei"/>
+                        </a:defRPr>
+                      </a:pPr>
+                      <a:r>
+                        <a:t>struct 解析</a:t>
+                      </a:r>
+                    </a:p>
+                  </a:txBody>
+                  <a:tcPr/>
+                </a:tc>
+                <a:tc>
+                  <a:txBody>
+                    <a:bodyPr/>
+                    <a:lstStyle/>
+                    <a:p>
+                      <a:pPr>
+                        <a:defRPr sz="1600" b="1">
+                          <a:latin typeface="Microsoft YaHei"/>
+                        </a:defRPr>
+                      </a:pPr>
+                      <a:r>
+                        <a:t>延迟</a:t>
+                      </a:r>
+                    </a:p>
+                  </a:txBody>
+                  <a:tcPr/>
+                </a:tc>
+                <a:tc>
+                  <a:txBody>
+                    <a:bodyPr/>
+                    <a:lstStyle/>
+                    <a:p>
+                      <a:pPr>
+                        <a:defRPr sz="1600" b="1">
+                          <a:latin typeface="Microsoft YaHei"/>
+                        </a:defRPr>
+                      </a:pPr>
+                      <a:r>
+                        <a:t>结论</a:t>
+                      </a:r>
+                    </a:p>
+                  </a:txBody>
+                  <a:tcPr/>
+                </a:tc>
+              </a:tr>
+              <a:tr h="838200">
+                <a:tc>
+                  <a:txBody>
+                    <a:bodyPr/>
+                    <a:lstStyle/>
+                    <a:p>
+                      <a:pPr>
+                        <a:defRPr sz="1400">
+                          <a:latin typeface="Microsoft YaHei"/>
+                        </a:defRPr>
+                      </a:pPr>
+                      <a:r>
+                        <a:t>kimi-k2.7-code</a:t>
+                      </a:r>
+                    </a:p>
+                  </a:txBody>
+                  <a:tcPr/>
+                </a:tc>
+                <a:tc>
+                  <a:txBody>
+                    <a:bodyPr/>
+                    <a:lstStyle/>
+                    <a:p>
+                      <a:pPr>
+                        <a:defRPr sz="1400">
+                          <a:latin typeface="Microsoft YaHei"/>
+                        </a:defRPr>
+                      </a:pPr>
+                      <a:r>
+                        <a:t>文本</a:t>
+                      </a:r>
+                    </a:p>
+                  </a:txBody>
+                  <a:tcPr/>
+                </a:tc>
+                <a:tc>
+                  <a:txBody>
+                    <a:bodyPr/>
+                    <a:lstStyle/>
+                    <a:p>
+                      <a:pPr>
+                        <a:defRPr sz="1400">
+                          <a:latin typeface="Microsoft YaHei"/>
+                        </a:defRPr>
+                      </a:pPr>
+                      <a:r>
+                        <a:t>—</a:t>
+                      </a:r>
+                    </a:p>
+                  </a:txBody>
+                  <a:tcPr/>
+                </a:tc>
+                <a:tc>
+                  <a:txBody>
+                    <a:bodyPr/>
+                    <a:lstStyle/>
+                    <a:p>
+                      <a:pPr>
+                        <a:defRPr sz="1400">
+                          <a:latin typeface="Microsoft YaHei"/>
+                        </a:defRPr>
+                      </a:pPr>
+                      <a:r>
+                        <a:t>2.2s</a:t>
+                      </a:r>
+                    </a:p>
+                  </a:txBody>
+                  <a:tcPr/>
+                </a:tc>
+                <a:tc>
+                  <a:txBody>
+                    <a:bodyPr/>
+                    <a:lstStyle/>
+                    <a:p>
+                      <a:pPr>
+                        <a:defRPr sz="1400">
+                          <a:latin typeface="Microsoft YaHei"/>
+                        </a:defRPr>
+                      </a:pPr>
+                      <a:r>
+                        <a:t>最快文本，但无法推断 tap 坐标</a:t>
+                      </a:r>
+                    </a:p>
+                  </a:txBody>
+                  <a:tcPr/>
+                </a:tc>
+              </a:tr>
+              <a:tr h="838200">
+                <a:tc>
+                  <a:txBody>
+                    <a:bodyPr/>
+                    <a:lstStyle/>
+                    <a:p>
+                      <a:pPr>
+                        <a:defRPr sz="1400">
+                          <a:latin typeface="Microsoft YaHei"/>
+                        </a:defRPr>
+                      </a:pPr>
+                      <a:r>
+                        <a:t>mimo-v2.5</a:t>
+                      </a:r>
+                    </a:p>
+                  </a:txBody>
+                  <a:tcPr/>
+                </a:tc>
+                <a:tc>
+                  <a:txBody>
+                    <a:bodyPr/>
+                    <a:lstStyle/>
+                    <a:p>
+                      <a:pPr>
+                        <a:defRPr sz="1400">
+                          <a:latin typeface="Microsoft YaHei"/>
+                        </a:defRPr>
+                      </a:pPr>
+                      <a:r>
+                        <a:t>视觉</a:t>
+                      </a:r>
+                    </a:p>
+                  </a:txBody>
+                  <a:tcPr/>
+                </a:tc>
+                <a:tc>
+                  <a:txBody>
+                    <a:bodyPr/>
+                    <a:lstStyle/>
+                    <a:p>
+                      <a:pPr>
+                        <a:defRPr sz="1400">
+                          <a:latin typeface="Microsoft YaHei"/>
+                        </a:defRPr>
+                      </a:pPr>
+                      <a:r>
+                        <a:t>3/3</a:t>
+                      </a:r>
+                    </a:p>
+                  </a:txBody>
+                  <a:tcPr/>
+                </a:tc>
+                <a:tc>
+                  <a:txBody>
+                    <a:bodyPr/>
+                    <a:lstStyle/>
+                    <a:p>
+                      <a:pPr>
+                        <a:defRPr sz="1400">
+                          <a:latin typeface="Microsoft YaHei"/>
+                        </a:defRPr>
+                      </a:pPr>
+                      <a:r>
+                        <a:t>22-38s</a:t>
+                      </a:r>
+                    </a:p>
+                  </a:txBody>
+                  <a:tcPr/>
+                </a:tc>
+                <a:tc>
+                  <a:txBody>
+                    <a:bodyPr/>
+                    <a:lstStyle/>
+                    <a:p>
+                      <a:pPr>
+                        <a:defRPr sz="1400">
+                          <a:latin typeface="Microsoft YaHei"/>
+                        </a:defRPr>
+                      </a:pPr>
+                      <a:r>
+                        <a:t>视觉准确但太慢，适合离线</a:t>
+                      </a:r>
+                    </a:p>
+                  </a:txBody>
+                  <a:tcPr/>
+                </a:tc>
+              </a:tr>
+              <a:tr h="838200">
+                <a:tc>
+                  <a:txBody>
+                    <a:bodyPr/>
+                    <a:lstStyle/>
+                    <a:p>
+                      <a:pPr>
+                        <a:defRPr sz="1400">
+                          <a:latin typeface="Microsoft YaHei"/>
+                        </a:defRPr>
+                      </a:pPr>
+                      <a:r>
+                        <a:t>kimi-k2.6</a:t>
+                      </a:r>
+                    </a:p>
+                  </a:txBody>
+                  <a:tcPr/>
+                </a:tc>
+                <a:tc>
+                  <a:txBody>
+                    <a:bodyPr/>
+                    <a:lstStyle/>
+                    <a:p>
+                      <a:pPr>
+                        <a:defRPr sz="1400">
+                          <a:latin typeface="Microsoft YaHei"/>
+                        </a:defRPr>
+                      </a:pPr>
+                      <a:r>
+                        <a:t>视觉</a:t>
+                      </a:r>
+                    </a:p>
+                  </a:txBody>
+                  <a:tcPr/>
+                </a:tc>
+                <a:tc>
+                  <a:txBody>
+                    <a:bodyPr/>
+                    <a:lstStyle/>
+                    <a:p>
+                      <a:pPr>
+                        <a:defRPr sz="1400">
+                          <a:latin typeface="Microsoft YaHei"/>
+                        </a:defRPr>
+                      </a:pPr>
+                      <a:r>
+                        <a:t>0/3</a:t>
+                      </a:r>
+                    </a:p>
+                  </a:txBody>
+                  <a:tcPr/>
+                </a:tc>
+                <a:tc>
+                  <a:txBody>
+                    <a:bodyPr/>
+                    <a:lstStyle/>
+                    <a:p>
+                      <a:pPr>
+                        <a:defRPr sz="1400">
+                          <a:latin typeface="Microsoft YaHei"/>
+                        </a:defRPr>
+                      </a:pPr>
+                      <a:r>
+                        <a:t>8-10s</a:t>
+                      </a:r>
+                    </a:p>
+                  </a:txBody>
+                  <a:tcPr/>
+                </a:tc>
+                <a:tc>
+                  <a:txBody>
+                    <a:bodyPr/>
+                    <a:lstStyle/>
+                    <a:p>
+                      <a:pPr>
+                        <a:defRPr sz="1400">
+                          <a:latin typeface="Microsoft YaHei"/>
+                        </a:defRPr>
+                      </a:pPr>
+                      <a:r>
+                        <a:t>思考链截断，需更强输出契约</a:t>
+                      </a:r>
+                    </a:p>
+                  </a:txBody>
+                  <a:tcPr/>
+                </a:tc>
+              </a:tr>
+              <a:tr h="838200">
+                <a:tc>
+                  <a:txBody>
+                    <a:bodyPr/>
+                    <a:lstStyle/>
+                    <a:p>
+                      <a:pPr>
+                        <a:defRPr sz="1400">
+                          <a:latin typeface="Microsoft YaHei"/>
+                        </a:defRPr>
+                      </a:pPr>
+                      <a:r>
+                        <a:t>gemma-4-E4B</a:t>
+                      </a:r>
+                    </a:p>
+                  </a:txBody>
+                  <a:tcPr/>
+                </a:tc>
+                <a:tc>
+                  <a:txBody>
+                    <a:bodyPr/>
+                    <a:lstStyle/>
+                    <a:p>
+                      <a:pPr>
+                        <a:defRPr sz="1400">
+                          <a:latin typeface="Microsoft YaHei"/>
+                        </a:defRPr>
+                      </a:pPr>
+                      <a:r>
+                        <a:t>本地视觉</a:t>
+                      </a:r>
+                    </a:p>
+                  </a:txBody>
+                  <a:tcPr/>
+                </a:tc>
+                <a:tc>
+                  <a:txBody>
+                    <a:bodyPr/>
+                    <a:lstStyle/>
+                    <a:p>
+                      <a:pPr>
+                        <a:defRPr sz="1400">
+                          <a:latin typeface="Microsoft YaHei"/>
+                        </a:defRPr>
+                      </a:pPr>
+                      <a:r>
+                        <a:t>3/3</a:t>
+                      </a:r>
+                    </a:p>
+                  </a:txBody>
+                  <a:tcPr/>
+                </a:tc>
+                <a:tc>
+                  <a:txBody>
+                    <a:bodyPr/>
+                    <a:lstStyle/>
+                    <a:p>
+                      <a:pPr>
+                        <a:defRPr sz="1400">
+                          <a:latin typeface="Microsoft YaHei"/>
+                        </a:defRPr>
+                      </a:pPr>
+                      <a:r>
+                        <a:t>4.8s/帧</a:t>
+                      </a:r>
+                    </a:p>
+                  </a:txBody>
+                  <a:tcPr/>
+                </a:tc>
+                <a:tc>
+                  <a:txBody>
+                    <a:bodyPr/>
+                    <a:lstStyle/>
+                    <a:p>
+                      <a:pPr>
+                        <a:defRPr sz="1400">
+                          <a:latin typeface="Microsoft YaHei"/>
+                        </a:defRPr>
+                      </a:pPr>
+                      <a:r>
+                        <a:t>本地最佳，离线可用</a:t>
+                      </a:r>
+                    </a:p>
+                  </a:txBody>
+                  <a:tcPr/>
+                </a:tc>
+              </a:tr>
+              <a:tr h="838200">
+                <a:tc>
+                  <a:txBody>
+                    <a:bodyPr/>
+                    <a:lstStyle/>
+                    <a:p>
+                      <a:pPr>
+                        <a:defRPr sz="1400">
+                          <a:latin typeface="Microsoft YaHei"/>
+                        </a:defRPr>
+                      </a:pPr>
+                      <a:r>
+                        <a:t>Qwen3.5-9B</a:t>
+                      </a:r>
+                    </a:p>
+                  </a:txBody>
+                  <a:tcPr/>
+                </a:tc>
+                <a:tc>
+                  <a:txBody>
+                    <a:bodyPr/>
+                    <a:lstStyle/>
+                    <a:p>
+                      <a:pPr>
+                        <a:defRPr sz="1400">
+                          <a:latin typeface="Microsoft YaHei"/>
+                        </a:defRPr>
+                      </a:pPr>
+                      <a:r>
+                        <a:t>本地视觉</a:t>
+                      </a:r>
+                    </a:p>
+                  </a:txBody>
+                  <a:tcPr/>
+                </a:tc>
+                <a:tc>
+                  <a:txBody>
+                    <a:bodyPr/>
+                    <a:lstStyle/>
+                    <a:p>
+                      <a:pPr>
+                        <a:defRPr sz="1400">
+                          <a:latin typeface="Microsoft YaHei"/>
+                        </a:defRPr>
+                      </a:pPr>
+                      <a:r>
+                        <a:t>2/3</a:t>
+                      </a:r>
+                    </a:p>
+                  </a:txBody>
+                  <a:tcPr/>
+                </a:tc>
+                <a:tc>
+                  <a:txBody>
+                    <a:bodyPr/>
+                    <a:lstStyle/>
+                    <a:p>
+                      <a:pPr>
+                        <a:defRPr sz="1400">
+                          <a:latin typeface="Microsoft YaHei"/>
+                        </a:defRPr>
+                      </a:pPr>
+                      <a:r>
+                        <a:t>16.9s/帧</a:t>
+                      </a:r>
+                    </a:p>
+                  </a:txBody>
+                  <a:tcPr/>
+                </a:tc>
+                <a:tc>
+                  <a:txBody>
+                    <a:bodyPr/>
+                    <a:lstStyle/>
+                    <a:p>
+                      <a:pPr>
+                        <a:defRPr sz="1400">
+                          <a:latin typeface="Microsoft YaHei"/>
+                        </a:defRPr>
+                      </a:pPr>
+                      <a:r>
+                        <a:t>边缘可用</a:t>
+                      </a:r>
+                    </a:p>
+                  </a:txBody>
+                  <a:tcPr/>
+                </a:tc>
+              </a:tr>
+            </a:tbl>
+          </a:graphicData>
+        </a:graphic>
+      </p:graphicFrame>
     </p:spTree>
   </p:cSld>
   <p:clrMapOvr>
@@ -4218,7 +6176,7 @@
               </a:defRPr>
             </a:pPr>
             <a:r>
-              <a:t>本地 VLM：RTX 5060 CUDA + KV-cache 量化（新基线）</a:t>
+              <a:t>关键修复（影响结论可信度）</a:t>
             </a:r>
           </a:p>
         </p:txBody>
@@ -4254,7 +6212,7 @@
               </a:defRPr>
             </a:pPr>
             <a:r>
-              <a:t>• 后端：llama.cpp CUDA12，-ngl 99 --flash-attn，K/V cache q4_0</a:t>
+              <a:t>• probe 终止假阳性：cc.Button._transitionFinished（含 'finish'）被 WIN 正则误命中</a:t>
             </a:r>
           </a:p>
           <a:p>
@@ -4267,7 +6225,7 @@
               </a:defRPr>
             </a:pPr>
             <a:r>
-              <a:t>• Qwen3.5-4B：文本 82.6 tok/s，视觉 8 帧解析率 0.75，target_acc 0.83，平均 24.8 s/帧</a:t>
+              <a:t>•   → _is_finished 改为佐证制：win 面板节点 / 胜利 analytics / 非 cc.* 强胜利标志</a:t>
             </a:r>
           </a:p>
           <a:p>
@@ -4280,7 +6238,7 @@
               </a:defRPr>
             </a:pPr>
             <a:r>
-              <a:t>• gemma-4-E4B：文本 39.9 tok/s，单帧视觉 14.6 s</a:t>
+              <a:t>•   → 修复后 00482/00342 从 1 步假阳性（0.700）→ 25 步真实运行（0.150）</a:t>
             </a:r>
           </a:p>
           <a:p>
@@ -4293,7 +6251,7 @@
               </a:defRPr>
             </a:pPr>
             <a:r>
-              <a:t>• 8 GB 显存跑 4B 宽裕，E4B 接近上限（7082 MB）</a:t>
+              <a:t>• rubric 动作盲区：tap 全被当 stall → 修复后 tap 算有效交互</a:t>
             </a:r>
           </a:p>
           <a:p>
@@ -4306,7 +6264,33 @@
               </a:defRPr>
             </a:pPr>
             <a:r>
-              <a:t>• Qwen3.5 思考模型需 max_tokens=2048 才能输出 content JSON</a:t>
+              <a:t>•   → multi-bus 的 24 tap/30 步才得到 activity=1.0 的合理评价</a:t>
+            </a:r>
+          </a:p>
+          <a:p>
+            <a:pPr>
+              <a:spcAft>
+                <a:spcPts val="1000"/>
+              </a:spcAft>
+              <a:defRPr sz="2000">
+                <a:latin typeface="Microsoft YaHei"/>
+              </a:defRPr>
+            </a:pPr>
+            <a:r>
+              <a:t>• generic fallback：22 个无 profile 游戏不再抛错，用未校准基线驱动+采集数据</a:t>
+            </a:r>
+          </a:p>
+          <a:p>
+            <a:pPr>
+              <a:spcAft>
+                <a:spcPts val="1000"/>
+              </a:spcAft>
+              <a:defRPr sz="2000">
+                <a:latin typeface="Microsoft YaHei"/>
+              </a:defRPr>
+            </a:pPr>
+            <a:r>
+              <a:t>• write_profile 坐标系：设计分辨率（720x1560 左下）→ CSS 视口（375x812 顶左）</a:t>
             </a:r>
           </a:p>
         </p:txBody>
@@ -4357,7 +6341,7 @@
               </a:defRPr>
             </a:pPr>
             <a:r>
-              <a:t>Agent 通信与记忆（P8）</a:t>
+              <a:t>L2 输出契约修复（hierarchical）</a:t>
             </a:r>
           </a:p>
         </p:txBody>
@@ -4393,7 +6377,7 @@
               </a:defRPr>
             </a:pPr>
             <a:r>
-              <a:t>• 新增显式消息总线 AgentBus：OBSERVE / PERCEIVE / DECIDE / VERIFY / CRITIC / MEMORY</a:t>
+              <a:t>• 问题：云端 API 的 macro-plan 是抽象文本，L0 无法执行 → hierarchical 全部 activity=0</a:t>
             </a:r>
           </a:p>
           <a:p>
@@ -4406,7 +6390,7 @@
               </a:defRPr>
             </a:pPr>
             <a:r>
-              <a:t>• MultiAgentOrchestrator：循环流水线，Verifier 可触发 re-decide</a:t>
+              <a:t>• 修复：L2 输出可执行指令队列（tap/move 带坐标 + 设计→CSS 坐标转换）</a:t>
             </a:r>
           </a:p>
           <a:p>
@@ -4419,7 +6403,7 @@
               </a:defRPr>
             </a:pPr>
             <a:r>
-              <a:t>• StrategyMemory：文件型策略记忆，不依赖 sqlite-vec</a:t>
+              <a:t>• 验证：L2 队列架构正确（24/25 步来自 L2），但纯文本 API 无视觉 → 坐标全是幻觉</a:t>
             </a:r>
           </a:p>
           <a:p>
@@ -4432,7 +6416,7 @@
               </a:defRPr>
             </a:pPr>
             <a:r>
-              <a:t>• 新增 multi-bus / multi-bus-memory 模式与 Critic 角色</a:t>
+              <a:t>•   → composite 反而更差（0.055 vs rule 0.114）</a:t>
             </a:r>
           </a:p>
           <a:p>
@@ -4445,7 +6429,20 @@
               </a:defRPr>
             </a:pPr>
             <a:r>
-              <a:t>• 19 单测覆盖；在线 gameplay 矩阵脚本已就绪</a:t>
+              <a:t>• 修正方向：L2 改为输出目标名称（'UnlockItem_1'），L0 用 probe screenPosition 自行映射坐标</a:t>
+            </a:r>
+          </a:p>
+          <a:p>
+            <a:pPr>
+              <a:spcAft>
+                <a:spcPts val="1000"/>
+              </a:spcAft>
+              <a:defRPr sz="2000">
+                <a:latin typeface="Microsoft YaHei"/>
+              </a:defRPr>
+            </a:pPr>
+            <a:r>
+              <a:t>•   → L2 不需要视觉也能工作，L0 保留几何准确性</a:t>
             </a:r>
           </a:p>
         </p:txBody>

--- a/reports/smallgameagent_report.pptx
+++ b/reports/smallgameagent_report.pptx
@@ -3100,14 +3100,96 @@
       <p:grpSpPr/>
       <p:sp>
         <p:nvSpPr>
-          <p:cNvPr id="2" name="TextBox 1"/>
+          <p:cNvPr id="2" name="Rectangle 1"/>
+          <p:cNvSpPr/>
+          <p:nvPr/>
+        </p:nvSpPr>
+        <p:spPr>
+          <a:xfrm>
+            <a:off x="0" y="0"/>
+            <a:ext cx="12191695" cy="6858000"/>
+          </a:xfrm>
+          <a:prstGeom prst="rect">
+            <a:avLst/>
+          </a:prstGeom>
+          <a:solidFill>
+            <a:srgbClr val="1A237E"/>
+          </a:solidFill>
+          <a:ln/>
+        </p:spPr>
+        <p:style>
+          <a:lnRef idx="1">
+            <a:schemeClr val="accent1"/>
+          </a:lnRef>
+          <a:fillRef idx="3">
+            <a:schemeClr val="accent1"/>
+          </a:fillRef>
+          <a:effectRef idx="2">
+            <a:schemeClr val="accent1"/>
+          </a:effectRef>
+          <a:fontRef idx="minor">
+            <a:schemeClr val="lt1"/>
+          </a:fontRef>
+        </p:style>
+        <p:txBody>
+          <a:bodyPr rtlCol="0" anchor="ctr"/>
+          <a:lstStyle/>
+          <a:p>
+            <a:pPr algn="ctr"/>
+          </a:p>
+        </p:txBody>
+      </p:sp>
+      <p:sp>
+        <p:nvSpPr>
+          <p:cNvPr id="3" name="Rectangle 2"/>
+          <p:cNvSpPr/>
+          <p:nvPr/>
+        </p:nvSpPr>
+        <p:spPr>
+          <a:xfrm>
+            <a:off x="0" y="5120640"/>
+            <a:ext cx="12191695" cy="1737360"/>
+          </a:xfrm>
+          <a:prstGeom prst="rect">
+            <a:avLst/>
+          </a:prstGeom>
+          <a:solidFill>
+            <a:srgbClr val="0096C7"/>
+          </a:solidFill>
+          <a:ln/>
+        </p:spPr>
+        <p:style>
+          <a:lnRef idx="1">
+            <a:schemeClr val="accent1"/>
+          </a:lnRef>
+          <a:fillRef idx="3">
+            <a:schemeClr val="accent1"/>
+          </a:fillRef>
+          <a:effectRef idx="2">
+            <a:schemeClr val="accent1"/>
+          </a:effectRef>
+          <a:fontRef idx="minor">
+            <a:schemeClr val="lt1"/>
+          </a:fontRef>
+        </p:style>
+        <p:txBody>
+          <a:bodyPr rtlCol="0" anchor="ctr"/>
+          <a:lstStyle/>
+          <a:p>
+            <a:pPr algn="ctr"/>
+          </a:p>
+        </p:txBody>
+      </p:sp>
+      <p:sp>
+        <p:nvSpPr>
+          <p:cNvPr id="4" name="TextBox 3"/>
           <p:cNvSpPr txBox="1"/>
           <p:nvPr/>
         </p:nvSpPr>
         <p:spPr>
           <a:xfrm>
-            <a:off x="457200" y="2286000"/>
-            <a:ext cx="11247120" cy="1371600"/>
+            <a:off x="457200" y="2011680"/>
+            <a:ext cx="11247120" cy="1280160"/>
           </a:xfrm>
           <a:prstGeom prst="rect">
             <a:avLst/>
@@ -3121,25 +3203,28 @@
           <a:lstStyle/>
           <a:p>
             <a:pPr algn="ctr">
-              <a:defRPr sz="4000" b="1">
+              <a:defRPr sz="4800" b="1">
+                <a:solidFill>
+                  <a:srgbClr val="F3F6F9"/>
+                </a:solidFill>
                 <a:latin typeface="Microsoft YaHei"/>
               </a:defRPr>
             </a:pPr>
             <a:r>
-              <a:t>smallgameagent 实验报告</a:t>
-            </a:r>
-          </a:p>
-        </p:txBody>
-      </p:sp>
-      <p:sp>
-        <p:nvSpPr>
-          <p:cNvPr id="3" name="TextBox 2"/>
+              <a:t>smallgameagent 实验进展</a:t>
+            </a:r>
+          </a:p>
+        </p:txBody>
+      </p:sp>
+      <p:sp>
+        <p:nvSpPr>
+          <p:cNvPr id="5" name="TextBox 4"/>
           <p:cNvSpPr txBox="1"/>
           <p:nvPr/>
         </p:nvSpPr>
         <p:spPr>
           <a:xfrm>
-            <a:off x="457200" y="3840480"/>
+            <a:off x="457200" y="3474720"/>
             <a:ext cx="11247120" cy="914400"/>
           </a:xfrm>
           <a:prstGeom prst="rect">
@@ -3154,7 +3239,10 @@
           <a:lstStyle/>
           <a:p>
             <a:pPr algn="ctr">
-              <a:defRPr sz="2200">
+              <a:defRPr sz="2400" b="0">
+                <a:solidFill>
+                  <a:srgbClr val="F3F6F9"/>
+                </a:solidFill>
                 <a:latin typeface="Microsoft YaHei"/>
               </a:defRPr>
             </a:pPr>
@@ -3163,7 +3251,43 @@
             </a:r>
             <a:br/>
             <a:r>
-              <a:t>2026-07-20</a:t>
+              <a:t>多 Provider、在线规则更新与批量数据管线</a:t>
+            </a:r>
+          </a:p>
+        </p:txBody>
+      </p:sp>
+      <p:sp>
+        <p:nvSpPr>
+          <p:cNvPr id="6" name="TextBox 5"/>
+          <p:cNvSpPr txBox="1"/>
+          <p:nvPr/>
+        </p:nvSpPr>
+        <p:spPr>
+          <a:xfrm>
+            <a:off x="457200" y="5623560"/>
+            <a:ext cx="11247120" cy="548640"/>
+          </a:xfrm>
+          <a:prstGeom prst="rect">
+            <a:avLst/>
+          </a:prstGeom>
+          <a:noFill/>
+        </p:spPr>
+        <p:txBody>
+          <a:bodyPr wrap="none">
+            <a:spAutoFit/>
+          </a:bodyPr>
+          <a:lstStyle/>
+          <a:p>
+            <a:pPr algn="ctr">
+              <a:defRPr sz="1600" b="1">
+                <a:solidFill>
+                  <a:srgbClr val="F3F6F9"/>
+                </a:solidFill>
+                <a:latin typeface="Microsoft YaHei"/>
+              </a:defRPr>
+            </a:pPr>
+            <a:r>
+              <a:t>smallgameagent 项目组 · 2026-07</a:t>
             </a:r>
           </a:p>
         </p:txBody>
@@ -3188,14 +3312,55 @@
       <p:grpSpPr/>
       <p:sp>
         <p:nvSpPr>
-          <p:cNvPr id="2" name="TextBox 1"/>
+          <p:cNvPr id="2" name="Rectangle 1"/>
+          <p:cNvSpPr/>
+          <p:nvPr/>
+        </p:nvSpPr>
+        <p:spPr>
+          <a:xfrm>
+            <a:off x="0" y="0"/>
+            <a:ext cx="12191695" cy="960120"/>
+          </a:xfrm>
+          <a:prstGeom prst="rect">
+            <a:avLst/>
+          </a:prstGeom>
+          <a:solidFill>
+            <a:srgbClr val="1A237E"/>
+          </a:solidFill>
+          <a:ln/>
+        </p:spPr>
+        <p:style>
+          <a:lnRef idx="1">
+            <a:schemeClr val="accent1"/>
+          </a:lnRef>
+          <a:fillRef idx="3">
+            <a:schemeClr val="accent1"/>
+          </a:fillRef>
+          <a:effectRef idx="2">
+            <a:schemeClr val="accent1"/>
+          </a:effectRef>
+          <a:fontRef idx="minor">
+            <a:schemeClr val="lt1"/>
+          </a:fontRef>
+        </p:style>
+        <p:txBody>
+          <a:bodyPr rtlCol="0" anchor="ctr"/>
+          <a:lstStyle/>
+          <a:p>
+            <a:pPr algn="ctr"/>
+          </a:p>
+        </p:txBody>
+      </p:sp>
+      <p:sp>
+        <p:nvSpPr>
+          <p:cNvPr id="3" name="TextBox 2"/>
           <p:cNvSpPr txBox="1"/>
           <p:nvPr/>
         </p:nvSpPr>
         <p:spPr>
           <a:xfrm>
-            <a:off x="457200" y="365760"/>
-            <a:ext cx="11247120" cy="822960"/>
+            <a:off x="457200" y="228600"/>
+            <a:ext cx="11247120" cy="548640"/>
           </a:xfrm>
           <a:prstGeom prst="rect">
             <a:avLst/>
@@ -3208,28 +3373,31 @@
           </a:bodyPr>
           <a:lstStyle/>
           <a:p>
-            <a:pPr>
-              <a:defRPr sz="3200" b="1">
+            <a:pPr algn="l">
+              <a:defRPr sz="3000" b="1">
+                <a:solidFill>
+                  <a:srgbClr val="F3F6F9"/>
+                </a:solidFill>
                 <a:latin typeface="Microsoft YaHei"/>
               </a:defRPr>
             </a:pPr>
             <a:r>
-              <a:t>训练数据（24,496 条 7 任务样本）</a:t>
+              <a:t>训练数据规模（7 任务格式）</a:t>
             </a:r>
           </a:p>
         </p:txBody>
       </p:sp>
       <p:graphicFrame>
         <p:nvGraphicFramePr>
-          <p:cNvPr id="3" name="Table 2"/>
+          <p:cNvPr id="4" name="Table 3"/>
           <p:cNvGraphicFramePr>
             <a:graphicFrameLocks noGrp="1"/>
           </p:cNvGraphicFramePr>
           <p:nvPr/>
         </p:nvGraphicFramePr>
         <p:xfrm>
-          <a:off x="457200" y="1371600"/>
-          <a:ext cx="11247120" cy="5029200"/>
+          <a:off x="457200" y="1143000"/>
+          <a:ext cx="11247120" cy="5120640"/>
         </p:xfrm>
         <a:graphic>
           <a:graphicData uri="http://schemas.openxmlformats.org/drawingml/2006/table">
@@ -3243,14 +3411,17 @@
                 <a:gridCol w="2811780"/>
                 <a:gridCol w="2811780"/>
               </a:tblGrid>
-              <a:tr h="558800">
-                <a:tc>
-                  <a:txBody>
-                    <a:bodyPr/>
-                    <a:lstStyle/>
-                    <a:p>
-                      <a:pPr>
-                        <a:defRPr sz="1600" b="1">
+              <a:tr h="568960">
+                <a:tc>
+                  <a:txBody>
+                    <a:bodyPr/>
+                    <a:lstStyle/>
+                    <a:p>
+                      <a:pPr algn="ctr">
+                        <a:defRPr sz="1300" b="1">
+                          <a:solidFill>
+                            <a:srgbClr val="F3F6F9"/>
+                          </a:solidFill>
                           <a:latin typeface="Microsoft YaHei"/>
                         </a:defRPr>
                       </a:pPr>
@@ -3259,6 +3430,187 @@
                       </a:r>
                     </a:p>
                   </a:txBody>
+                  <a:tcPr>
+                    <a:solidFill>
+                      <a:srgbClr val="1A237E"/>
+                    </a:solidFill>
+                  </a:tcPr>
+                </a:tc>
+                <a:tc>
+                  <a:txBody>
+                    <a:bodyPr/>
+                    <a:lstStyle/>
+                    <a:p>
+                      <a:pPr algn="ctr">
+                        <a:defRPr sz="1300" b="1">
+                          <a:solidFill>
+                            <a:srgbClr val="F3F6F9"/>
+                          </a:solidFill>
+                          <a:latin typeface="Microsoft YaHei"/>
+                        </a:defRPr>
+                      </a:pPr>
+                      <a:r>
+                        <a:t>processed-runs</a:t>
+                      </a:r>
+                    </a:p>
+                  </a:txBody>
+                  <a:tcPr>
+                    <a:solidFill>
+                      <a:srgbClr val="1A237E"/>
+                    </a:solidFill>
+                  </a:tcPr>
+                </a:tc>
+                <a:tc>
+                  <a:txBody>
+                    <a:bodyPr/>
+                    <a:lstStyle/>
+                    <a:p>
+                      <a:pPr algn="ctr">
+                        <a:defRPr sz="1300" b="1">
+                          <a:solidFill>
+                            <a:srgbClr val="F3F6F9"/>
+                          </a:solidFill>
+                          <a:latin typeface="Microsoft YaHei"/>
+                        </a:defRPr>
+                      </a:pPr>
+                      <a:r>
+                        <a:t>轨迹转换</a:t>
+                      </a:r>
+                    </a:p>
+                  </a:txBody>
+                  <a:tcPr>
+                    <a:solidFill>
+                      <a:srgbClr val="1A237E"/>
+                    </a:solidFill>
+                  </a:tcPr>
+                </a:tc>
+                <a:tc>
+                  <a:txBody>
+                    <a:bodyPr/>
+                    <a:lstStyle/>
+                    <a:p>
+                      <a:pPr algn="ctr">
+                        <a:defRPr sz="1300" b="1">
+                          <a:solidFill>
+                            <a:srgbClr val="F3F6F9"/>
+                          </a:solidFill>
+                          <a:latin typeface="Microsoft YaHei"/>
+                        </a:defRPr>
+                      </a:pPr>
+                      <a:r>
+                        <a:t>总计</a:t>
+                      </a:r>
+                    </a:p>
+                  </a:txBody>
+                  <a:tcPr>
+                    <a:solidFill>
+                      <a:srgbClr val="1A237E"/>
+                    </a:solidFill>
+                  </a:tcPr>
+                </a:tc>
+              </a:tr>
+              <a:tr h="568960">
+                <a:tc>
+                  <a:txBody>
+                    <a:bodyPr/>
+                    <a:lstStyle/>
+                    <a:p>
+                      <a:pPr algn="ctr">
+                        <a:defRPr sz="1200">
+                          <a:latin typeface="Microsoft YaHei"/>
+                        </a:defRPr>
+                      </a:pPr>
+                      <a:r>
+                        <a:t>next_probe_action</a:t>
+                      </a:r>
+                    </a:p>
+                  </a:txBody>
+                  <a:tcPr>
+                    <a:solidFill>
+                      <a:srgbClr val="F3F6F9"/>
+                    </a:solidFill>
+                  </a:tcPr>
+                </a:tc>
+                <a:tc>
+                  <a:txBody>
+                    <a:bodyPr/>
+                    <a:lstStyle/>
+                    <a:p>
+                      <a:pPr algn="ctr">
+                        <a:defRPr sz="1200">
+                          <a:latin typeface="Microsoft YaHei"/>
+                        </a:defRPr>
+                      </a:pPr>
+                      <a:r>
+                        <a:t>2,645</a:t>
+                      </a:r>
+                    </a:p>
+                  </a:txBody>
+                  <a:tcPr>
+                    <a:solidFill>
+                      <a:srgbClr val="F3F6F9"/>
+                    </a:solidFill>
+                  </a:tcPr>
+                </a:tc>
+                <a:tc>
+                  <a:txBody>
+                    <a:bodyPr/>
+                    <a:lstStyle/>
+                    <a:p>
+                      <a:pPr algn="ctr">
+                        <a:defRPr sz="1200">
+                          <a:latin typeface="Microsoft YaHei"/>
+                        </a:defRPr>
+                      </a:pPr>
+                      <a:r>
+                        <a:t>—</a:t>
+                      </a:r>
+                    </a:p>
+                  </a:txBody>
+                  <a:tcPr>
+                    <a:solidFill>
+                      <a:srgbClr val="F3F6F9"/>
+                    </a:solidFill>
+                  </a:tcPr>
+                </a:tc>
+                <a:tc>
+                  <a:txBody>
+                    <a:bodyPr/>
+                    <a:lstStyle/>
+                    <a:p>
+                      <a:pPr algn="ctr">
+                        <a:defRPr sz="1200">
+                          <a:latin typeface="Microsoft YaHei"/>
+                        </a:defRPr>
+                      </a:pPr>
+                      <a:r>
+                        <a:t>2,645</a:t>
+                      </a:r>
+                    </a:p>
+                  </a:txBody>
+                  <a:tcPr>
+                    <a:solidFill>
+                      <a:srgbClr val="F3F6F9"/>
+                    </a:solidFill>
+                  </a:tcPr>
+                </a:tc>
+              </a:tr>
+              <a:tr h="568960">
+                <a:tc>
+                  <a:txBody>
+                    <a:bodyPr/>
+                    <a:lstStyle/>
+                    <a:p>
+                      <a:pPr algn="ctr">
+                        <a:defRPr sz="1200">
+                          <a:latin typeface="Microsoft YaHei"/>
+                        </a:defRPr>
+                      </a:pPr>
+                      <a:r>
+                        <a:t>probe_action_effect</a:t>
+                      </a:r>
+                    </a:p>
+                  </a:txBody>
                   <a:tcPr/>
                 </a:tc>
                 <a:tc>
@@ -3266,13 +3618,13 @@
                     <a:bodyPr/>
                     <a:lstStyle/>
                     <a:p>
-                      <a:pPr>
-                        <a:defRPr sz="1600" b="1">
-                          <a:latin typeface="Microsoft YaHei"/>
-                        </a:defRPr>
-                      </a:pPr>
-                      <a:r>
-                        <a:t>processed-runs</a:t>
+                      <a:pPr algn="ctr">
+                        <a:defRPr sz="1200">
+                          <a:latin typeface="Microsoft YaHei"/>
+                        </a:defRPr>
+                      </a:pPr>
+                      <a:r>
+                        <a:t>2,645</a:t>
                       </a:r>
                     </a:p>
                   </a:txBody>
@@ -3283,13 +3635,13 @@
                     <a:bodyPr/>
                     <a:lstStyle/>
                     <a:p>
-                      <a:pPr>
-                        <a:defRPr sz="1600" b="1">
-                          <a:latin typeface="Microsoft YaHei"/>
-                        </a:defRPr>
-                      </a:pPr>
-                      <a:r>
-                        <a:t>轨迹转换</a:t>
+                      <a:pPr algn="ctr">
+                        <a:defRPr sz="1200">
+                          <a:latin typeface="Microsoft YaHei"/>
+                        </a:defRPr>
+                      </a:pPr>
+                      <a:r>
+                        <a:t>+3,040</a:t>
                       </a:r>
                     </a:p>
                   </a:txBody>
@@ -3300,8 +3652,425 @@
                     <a:bodyPr/>
                     <a:lstStyle/>
                     <a:p>
-                      <a:pPr>
-                        <a:defRPr sz="1600" b="1">
+                      <a:pPr algn="ctr">
+                        <a:defRPr sz="1200">
+                          <a:latin typeface="Microsoft YaHei"/>
+                        </a:defRPr>
+                      </a:pPr>
+                      <a:r>
+                        <a:t>5,685</a:t>
+                      </a:r>
+                    </a:p>
+                  </a:txBody>
+                  <a:tcPr/>
+                </a:tc>
+              </a:tr>
+              <a:tr h="568960">
+                <a:tc>
+                  <a:txBody>
+                    <a:bodyPr/>
+                    <a:lstStyle/>
+                    <a:p>
+                      <a:pPr algn="ctr">
+                        <a:defRPr sz="1200">
+                          <a:latin typeface="Microsoft YaHei"/>
+                        </a:defRPr>
+                      </a:pPr>
+                      <a:r>
+                        <a:t>field_grounding</a:t>
+                      </a:r>
+                    </a:p>
+                  </a:txBody>
+                  <a:tcPr>
+                    <a:solidFill>
+                      <a:srgbClr val="F3F6F9"/>
+                    </a:solidFill>
+                  </a:tcPr>
+                </a:tc>
+                <a:tc>
+                  <a:txBody>
+                    <a:bodyPr/>
+                    <a:lstStyle/>
+                    <a:p>
+                      <a:pPr algn="ctr">
+                        <a:defRPr sz="1200">
+                          <a:latin typeface="Microsoft YaHei"/>
+                        </a:defRPr>
+                      </a:pPr>
+                      <a:r>
+                        <a:t>2,645</a:t>
+                      </a:r>
+                    </a:p>
+                  </a:txBody>
+                  <a:tcPr>
+                    <a:solidFill>
+                      <a:srgbClr val="F3F6F9"/>
+                    </a:solidFill>
+                  </a:tcPr>
+                </a:tc>
+                <a:tc>
+                  <a:txBody>
+                    <a:bodyPr/>
+                    <a:lstStyle/>
+                    <a:p>
+                      <a:pPr algn="ctr">
+                        <a:defRPr sz="1200">
+                          <a:latin typeface="Microsoft YaHei"/>
+                        </a:defRPr>
+                      </a:pPr>
+                      <a:r>
+                        <a:t>—</a:t>
+                      </a:r>
+                    </a:p>
+                  </a:txBody>
+                  <a:tcPr>
+                    <a:solidFill>
+                      <a:srgbClr val="F3F6F9"/>
+                    </a:solidFill>
+                  </a:tcPr>
+                </a:tc>
+                <a:tc>
+                  <a:txBody>
+                    <a:bodyPr/>
+                    <a:lstStyle/>
+                    <a:p>
+                      <a:pPr algn="ctr">
+                        <a:defRPr sz="1200">
+                          <a:latin typeface="Microsoft YaHei"/>
+                        </a:defRPr>
+                      </a:pPr>
+                      <a:r>
+                        <a:t>2,645</a:t>
+                      </a:r>
+                    </a:p>
+                  </a:txBody>
+                  <a:tcPr>
+                    <a:solidFill>
+                      <a:srgbClr val="F3F6F9"/>
+                    </a:solidFill>
+                  </a:tcPr>
+                </a:tc>
+              </a:tr>
+              <a:tr h="568960">
+                <a:tc>
+                  <a:txBody>
+                    <a:bodyPr/>
+                    <a:lstStyle/>
+                    <a:p>
+                      <a:pPr algn="ctr">
+                        <a:defRPr sz="1200">
+                          <a:latin typeface="Microsoft YaHei"/>
+                        </a:defRPr>
+                      </a:pPr>
+                      <a:r>
+                        <a:t>information_gain_judgment</a:t>
+                      </a:r>
+                    </a:p>
+                  </a:txBody>
+                  <a:tcPr/>
+                </a:tc>
+                <a:tc>
+                  <a:txBody>
+                    <a:bodyPr/>
+                    <a:lstStyle/>
+                    <a:p>
+                      <a:pPr algn="ctr">
+                        <a:defRPr sz="1200">
+                          <a:latin typeface="Microsoft YaHei"/>
+                        </a:defRPr>
+                      </a:pPr>
+                      <a:r>
+                        <a:t>3,054</a:t>
+                      </a:r>
+                    </a:p>
+                  </a:txBody>
+                  <a:tcPr/>
+                </a:tc>
+                <a:tc>
+                  <a:txBody>
+                    <a:bodyPr/>
+                    <a:lstStyle/>
+                    <a:p>
+                      <a:pPr algn="ctr">
+                        <a:defRPr sz="1200">
+                          <a:latin typeface="Microsoft YaHei"/>
+                        </a:defRPr>
+                      </a:pPr>
+                      <a:r>
+                        <a:t>+3,040</a:t>
+                      </a:r>
+                    </a:p>
+                  </a:txBody>
+                  <a:tcPr/>
+                </a:tc>
+                <a:tc>
+                  <a:txBody>
+                    <a:bodyPr/>
+                    <a:lstStyle/>
+                    <a:p>
+                      <a:pPr algn="ctr">
+                        <a:defRPr sz="1200">
+                          <a:latin typeface="Microsoft YaHei"/>
+                        </a:defRPr>
+                      </a:pPr>
+                      <a:r>
+                        <a:t>6,094</a:t>
+                      </a:r>
+                    </a:p>
+                  </a:txBody>
+                  <a:tcPr/>
+                </a:tc>
+              </a:tr>
+              <a:tr h="568960">
+                <a:tc>
+                  <a:txBody>
+                    <a:bodyPr/>
+                    <a:lstStyle/>
+                    <a:p>
+                      <a:pPr algn="ctr">
+                        <a:defRPr sz="1200">
+                          <a:latin typeface="Microsoft YaHei"/>
+                        </a:defRPr>
+                      </a:pPr>
+                      <a:r>
+                        <a:t>pulse_response_grounding</a:t>
+                      </a:r>
+                    </a:p>
+                  </a:txBody>
+                  <a:tcPr>
+                    <a:solidFill>
+                      <a:srgbClr val="F3F6F9"/>
+                    </a:solidFill>
+                  </a:tcPr>
+                </a:tc>
+                <a:tc>
+                  <a:txBody>
+                    <a:bodyPr/>
+                    <a:lstStyle/>
+                    <a:p>
+                      <a:pPr algn="ctr">
+                        <a:defRPr sz="1200">
+                          <a:latin typeface="Microsoft YaHei"/>
+                        </a:defRPr>
+                      </a:pPr>
+                      <a:r>
+                        <a:t>1,435</a:t>
+                      </a:r>
+                    </a:p>
+                  </a:txBody>
+                  <a:tcPr>
+                    <a:solidFill>
+                      <a:srgbClr val="F3F6F9"/>
+                    </a:solidFill>
+                  </a:tcPr>
+                </a:tc>
+                <a:tc>
+                  <a:txBody>
+                    <a:bodyPr/>
+                    <a:lstStyle/>
+                    <a:p>
+                      <a:pPr algn="ctr">
+                        <a:defRPr sz="1200">
+                          <a:latin typeface="Microsoft YaHei"/>
+                        </a:defRPr>
+                      </a:pPr>
+                      <a:r>
+                        <a:t>+159</a:t>
+                      </a:r>
+                    </a:p>
+                  </a:txBody>
+                  <a:tcPr>
+                    <a:solidFill>
+                      <a:srgbClr val="F3F6F9"/>
+                    </a:solidFill>
+                  </a:tcPr>
+                </a:tc>
+                <a:tc>
+                  <a:txBody>
+                    <a:bodyPr/>
+                    <a:lstStyle/>
+                    <a:p>
+                      <a:pPr algn="ctr">
+                        <a:defRPr sz="1200">
+                          <a:latin typeface="Microsoft YaHei"/>
+                        </a:defRPr>
+                      </a:pPr>
+                      <a:r>
+                        <a:t>1,594</a:t>
+                      </a:r>
+                    </a:p>
+                  </a:txBody>
+                  <a:tcPr>
+                    <a:solidFill>
+                      <a:srgbClr val="F3F6F9"/>
+                    </a:solidFill>
+                  </a:tcPr>
+                </a:tc>
+              </a:tr>
+              <a:tr h="568960">
+                <a:tc>
+                  <a:txBody>
+                    <a:bodyPr/>
+                    <a:lstStyle/>
+                    <a:p>
+                      <a:pPr algn="ctr">
+                        <a:defRPr sz="1200">
+                          <a:latin typeface="Microsoft YaHei"/>
+                        </a:defRPr>
+                      </a:pPr>
+                      <a:r>
+                        <a:t>progression_grounding</a:t>
+                      </a:r>
+                    </a:p>
+                  </a:txBody>
+                  <a:tcPr/>
+                </a:tc>
+                <a:tc>
+                  <a:txBody>
+                    <a:bodyPr/>
+                    <a:lstStyle/>
+                    <a:p>
+                      <a:pPr algn="ctr">
+                        <a:defRPr sz="1200">
+                          <a:latin typeface="Microsoft YaHei"/>
+                        </a:defRPr>
+                      </a:pPr>
+                      <a:r>
+                        <a:t>2,645</a:t>
+                      </a:r>
+                    </a:p>
+                  </a:txBody>
+                  <a:tcPr/>
+                </a:tc>
+                <a:tc>
+                  <a:txBody>
+                    <a:bodyPr/>
+                    <a:lstStyle/>
+                    <a:p>
+                      <a:pPr algn="ctr">
+                        <a:defRPr sz="1200">
+                          <a:latin typeface="Microsoft YaHei"/>
+                        </a:defRPr>
+                      </a:pPr>
+                      <a:r>
+                        <a:t>+3,165</a:t>
+                      </a:r>
+                    </a:p>
+                  </a:txBody>
+                  <a:tcPr/>
+                </a:tc>
+                <a:tc>
+                  <a:txBody>
+                    <a:bodyPr/>
+                    <a:lstStyle/>
+                    <a:p>
+                      <a:pPr algn="ctr">
+                        <a:defRPr sz="1200">
+                          <a:latin typeface="Microsoft YaHei"/>
+                        </a:defRPr>
+                      </a:pPr>
+                      <a:r>
+                        <a:t>5,810</a:t>
+                      </a:r>
+                    </a:p>
+                  </a:txBody>
+                  <a:tcPr/>
+                </a:tc>
+              </a:tr>
+              <a:tr h="568960">
+                <a:tc>
+                  <a:txBody>
+                    <a:bodyPr/>
+                    <a:lstStyle/>
+                    <a:p>
+                      <a:pPr algn="ctr">
+                        <a:defRPr sz="1200">
+                          <a:latin typeface="Microsoft YaHei"/>
+                        </a:defRPr>
+                      </a:pPr>
+                      <a:r>
+                        <a:t>failure_recovery</a:t>
+                      </a:r>
+                    </a:p>
+                  </a:txBody>
+                  <a:tcPr>
+                    <a:solidFill>
+                      <a:srgbClr val="F3F6F9"/>
+                    </a:solidFill>
+                  </a:tcPr>
+                </a:tc>
+                <a:tc>
+                  <a:txBody>
+                    <a:bodyPr/>
+                    <a:lstStyle/>
+                    <a:p>
+                      <a:pPr algn="ctr">
+                        <a:defRPr sz="1200">
+                          <a:latin typeface="Microsoft YaHei"/>
+                        </a:defRPr>
+                      </a:pPr>
+                      <a:r>
+                        <a:t>14</a:t>
+                      </a:r>
+                    </a:p>
+                  </a:txBody>
+                  <a:tcPr>
+                    <a:solidFill>
+                      <a:srgbClr val="F3F6F9"/>
+                    </a:solidFill>
+                  </a:tcPr>
+                </a:tc>
+                <a:tc>
+                  <a:txBody>
+                    <a:bodyPr/>
+                    <a:lstStyle/>
+                    <a:p>
+                      <a:pPr algn="ctr">
+                        <a:defRPr sz="1200">
+                          <a:latin typeface="Microsoft YaHei"/>
+                        </a:defRPr>
+                      </a:pPr>
+                      <a:r>
+                        <a:t>+9</a:t>
+                      </a:r>
+                    </a:p>
+                  </a:txBody>
+                  <a:tcPr>
+                    <a:solidFill>
+                      <a:srgbClr val="F3F6F9"/>
+                    </a:solidFill>
+                  </a:tcPr>
+                </a:tc>
+                <a:tc>
+                  <a:txBody>
+                    <a:bodyPr/>
+                    <a:lstStyle/>
+                    <a:p>
+                      <a:pPr algn="ctr">
+                        <a:defRPr sz="1200">
+                          <a:latin typeface="Microsoft YaHei"/>
+                        </a:defRPr>
+                      </a:pPr>
+                      <a:r>
+                        <a:t>23</a:t>
+                      </a:r>
+                    </a:p>
+                  </a:txBody>
+                  <a:tcPr>
+                    <a:solidFill>
+                      <a:srgbClr val="F3F6F9"/>
+                    </a:solidFill>
+                  </a:tcPr>
+                </a:tc>
+              </a:tr>
+              <a:tr h="568960">
+                <a:tc>
+                  <a:txBody>
+                    <a:bodyPr/>
+                    <a:lstStyle/>
+                    <a:p>
+                      <a:pPr algn="ctr">
+                        <a:defRPr sz="1200">
                           <a:latin typeface="Microsoft YaHei"/>
                         </a:defRPr>
                       </a:pPr>
@@ -3312,20 +4081,18 @@
                   </a:txBody>
                   <a:tcPr/>
                 </a:tc>
-              </a:tr>
-              <a:tr h="558800">
-                <a:tc>
-                  <a:txBody>
-                    <a:bodyPr/>
-                    <a:lstStyle/>
-                    <a:p>
-                      <a:pPr>
-                        <a:defRPr sz="1400">
-                          <a:latin typeface="Microsoft YaHei"/>
-                        </a:defRPr>
-                      </a:pPr>
-                      <a:r>
-                        <a:t>next_probe_action</a:t>
+                <a:tc>
+                  <a:txBody>
+                    <a:bodyPr/>
+                    <a:lstStyle/>
+                    <a:p>
+                      <a:pPr algn="ctr">
+                        <a:defRPr sz="1200">
+                          <a:latin typeface="Microsoft YaHei"/>
+                        </a:defRPr>
+                      </a:pPr>
+                      <a:r>
+                        <a:t>15,083</a:t>
                       </a:r>
                     </a:p>
                   </a:txBody>
@@ -3336,13 +4103,13 @@
                     <a:bodyPr/>
                     <a:lstStyle/>
                     <a:p>
-                      <a:pPr>
-                        <a:defRPr sz="1400">
-                          <a:latin typeface="Microsoft YaHei"/>
-                        </a:defRPr>
-                      </a:pPr>
-                      <a:r>
-                        <a:t>2,645</a:t>
+                      <a:pPr algn="ctr">
+                        <a:defRPr sz="1200">
+                          <a:latin typeface="Microsoft YaHei"/>
+                        </a:defRPr>
+                      </a:pPr>
+                      <a:r>
+                        <a:t>+9,413</a:t>
                       </a:r>
                     </a:p>
                   </a:txBody>
@@ -3353,520 +4120,13 @@
                     <a:bodyPr/>
                     <a:lstStyle/>
                     <a:p>
-                      <a:pPr>
-                        <a:defRPr sz="1400">
-                          <a:latin typeface="Microsoft YaHei"/>
-                        </a:defRPr>
-                      </a:pPr>
-                      <a:r>
-                        <a:t>—</a:t>
-                      </a:r>
-                    </a:p>
-                  </a:txBody>
-                  <a:tcPr/>
-                </a:tc>
-                <a:tc>
-                  <a:txBody>
-                    <a:bodyPr/>
-                    <a:lstStyle/>
-                    <a:p>
-                      <a:pPr>
-                        <a:defRPr sz="1400">
-                          <a:latin typeface="Microsoft YaHei"/>
-                        </a:defRPr>
-                      </a:pPr>
-                      <a:r>
-                        <a:t>2,645</a:t>
-                      </a:r>
-                    </a:p>
-                  </a:txBody>
-                  <a:tcPr/>
-                </a:tc>
-              </a:tr>
-              <a:tr h="558800">
-                <a:tc>
-                  <a:txBody>
-                    <a:bodyPr/>
-                    <a:lstStyle/>
-                    <a:p>
-                      <a:pPr>
-                        <a:defRPr sz="1400">
-                          <a:latin typeface="Microsoft YaHei"/>
-                        </a:defRPr>
-                      </a:pPr>
-                      <a:r>
-                        <a:t>probe_action_effect</a:t>
-                      </a:r>
-                    </a:p>
-                  </a:txBody>
-                  <a:tcPr/>
-                </a:tc>
-                <a:tc>
-                  <a:txBody>
-                    <a:bodyPr/>
-                    <a:lstStyle/>
-                    <a:p>
-                      <a:pPr>
-                        <a:defRPr sz="1400">
-                          <a:latin typeface="Microsoft YaHei"/>
-                        </a:defRPr>
-                      </a:pPr>
-                      <a:r>
-                        <a:t>2,645</a:t>
-                      </a:r>
-                    </a:p>
-                  </a:txBody>
-                  <a:tcPr/>
-                </a:tc>
-                <a:tc>
-                  <a:txBody>
-                    <a:bodyPr/>
-                    <a:lstStyle/>
-                    <a:p>
-                      <a:pPr>
-                        <a:defRPr sz="1400">
-                          <a:latin typeface="Microsoft YaHei"/>
-                        </a:defRPr>
-                      </a:pPr>
-                      <a:r>
-                        <a:t>+3,040</a:t>
-                      </a:r>
-                    </a:p>
-                  </a:txBody>
-                  <a:tcPr/>
-                </a:tc>
-                <a:tc>
-                  <a:txBody>
-                    <a:bodyPr/>
-                    <a:lstStyle/>
-                    <a:p>
-                      <a:pPr>
-                        <a:defRPr sz="1400">
-                          <a:latin typeface="Microsoft YaHei"/>
-                        </a:defRPr>
-                      </a:pPr>
-                      <a:r>
-                        <a:t>5,685</a:t>
-                      </a:r>
-                    </a:p>
-                  </a:txBody>
-                  <a:tcPr/>
-                </a:tc>
-              </a:tr>
-              <a:tr h="558800">
-                <a:tc>
-                  <a:txBody>
-                    <a:bodyPr/>
-                    <a:lstStyle/>
-                    <a:p>
-                      <a:pPr>
-                        <a:defRPr sz="1400">
-                          <a:latin typeface="Microsoft YaHei"/>
-                        </a:defRPr>
-                      </a:pPr>
-                      <a:r>
-                        <a:t>field_grounding</a:t>
-                      </a:r>
-                    </a:p>
-                  </a:txBody>
-                  <a:tcPr/>
-                </a:tc>
-                <a:tc>
-                  <a:txBody>
-                    <a:bodyPr/>
-                    <a:lstStyle/>
-                    <a:p>
-                      <a:pPr>
-                        <a:defRPr sz="1400">
-                          <a:latin typeface="Microsoft YaHei"/>
-                        </a:defRPr>
-                      </a:pPr>
-                      <a:r>
-                        <a:t>2,645</a:t>
-                      </a:r>
-                    </a:p>
-                  </a:txBody>
-                  <a:tcPr/>
-                </a:tc>
-                <a:tc>
-                  <a:txBody>
-                    <a:bodyPr/>
-                    <a:lstStyle/>
-                    <a:p>
-                      <a:pPr>
-                        <a:defRPr sz="1400">
-                          <a:latin typeface="Microsoft YaHei"/>
-                        </a:defRPr>
-                      </a:pPr>
-                      <a:r>
-                        <a:t>—</a:t>
-                      </a:r>
-                    </a:p>
-                  </a:txBody>
-                  <a:tcPr/>
-                </a:tc>
-                <a:tc>
-                  <a:txBody>
-                    <a:bodyPr/>
-                    <a:lstStyle/>
-                    <a:p>
-                      <a:pPr>
-                        <a:defRPr sz="1400">
-                          <a:latin typeface="Microsoft YaHei"/>
-                        </a:defRPr>
-                      </a:pPr>
-                      <a:r>
-                        <a:t>2,645</a:t>
-                      </a:r>
-                    </a:p>
-                  </a:txBody>
-                  <a:tcPr/>
-                </a:tc>
-              </a:tr>
-              <a:tr h="558800">
-                <a:tc>
-                  <a:txBody>
-                    <a:bodyPr/>
-                    <a:lstStyle/>
-                    <a:p>
-                      <a:pPr>
-                        <a:defRPr sz="1400">
-                          <a:latin typeface="Microsoft YaHei"/>
-                        </a:defRPr>
-                      </a:pPr>
-                      <a:r>
-                        <a:t>information_gain_judgment</a:t>
-                      </a:r>
-                    </a:p>
-                  </a:txBody>
-                  <a:tcPr/>
-                </a:tc>
-                <a:tc>
-                  <a:txBody>
-                    <a:bodyPr/>
-                    <a:lstStyle/>
-                    <a:p>
-                      <a:pPr>
-                        <a:defRPr sz="1400">
-                          <a:latin typeface="Microsoft YaHei"/>
-                        </a:defRPr>
-                      </a:pPr>
-                      <a:r>
-                        <a:t>3,054</a:t>
-                      </a:r>
-                    </a:p>
-                  </a:txBody>
-                  <a:tcPr/>
-                </a:tc>
-                <a:tc>
-                  <a:txBody>
-                    <a:bodyPr/>
-                    <a:lstStyle/>
-                    <a:p>
-                      <a:pPr>
-                        <a:defRPr sz="1400">
-                          <a:latin typeface="Microsoft YaHei"/>
-                        </a:defRPr>
-                      </a:pPr>
-                      <a:r>
-                        <a:t>+3,040</a:t>
-                      </a:r>
-                    </a:p>
-                  </a:txBody>
-                  <a:tcPr/>
-                </a:tc>
-                <a:tc>
-                  <a:txBody>
-                    <a:bodyPr/>
-                    <a:lstStyle/>
-                    <a:p>
-                      <a:pPr>
-                        <a:defRPr sz="1400">
-                          <a:latin typeface="Microsoft YaHei"/>
-                        </a:defRPr>
-                      </a:pPr>
-                      <a:r>
-                        <a:t>6,094</a:t>
-                      </a:r>
-                    </a:p>
-                  </a:txBody>
-                  <a:tcPr/>
-                </a:tc>
-              </a:tr>
-              <a:tr h="558800">
-                <a:tc>
-                  <a:txBody>
-                    <a:bodyPr/>
-                    <a:lstStyle/>
-                    <a:p>
-                      <a:pPr>
-                        <a:defRPr sz="1400">
-                          <a:latin typeface="Microsoft YaHei"/>
-                        </a:defRPr>
-                      </a:pPr>
-                      <a:r>
-                        <a:t>pulse_response_grounding</a:t>
-                      </a:r>
-                    </a:p>
-                  </a:txBody>
-                  <a:tcPr/>
-                </a:tc>
-                <a:tc>
-                  <a:txBody>
-                    <a:bodyPr/>
-                    <a:lstStyle/>
-                    <a:p>
-                      <a:pPr>
-                        <a:defRPr sz="1400">
-                          <a:latin typeface="Microsoft YaHei"/>
-                        </a:defRPr>
-                      </a:pPr>
-                      <a:r>
-                        <a:t>1,435</a:t>
-                      </a:r>
-                    </a:p>
-                  </a:txBody>
-                  <a:tcPr/>
-                </a:tc>
-                <a:tc>
-                  <a:txBody>
-                    <a:bodyPr/>
-                    <a:lstStyle/>
-                    <a:p>
-                      <a:pPr>
-                        <a:defRPr sz="1400">
-                          <a:latin typeface="Microsoft YaHei"/>
-                        </a:defRPr>
-                      </a:pPr>
-                      <a:r>
-                        <a:t>+159</a:t>
-                      </a:r>
-                    </a:p>
-                  </a:txBody>
-                  <a:tcPr/>
-                </a:tc>
-                <a:tc>
-                  <a:txBody>
-                    <a:bodyPr/>
-                    <a:lstStyle/>
-                    <a:p>
-                      <a:pPr>
-                        <a:defRPr sz="1400">
-                          <a:latin typeface="Microsoft YaHei"/>
-                        </a:defRPr>
-                      </a:pPr>
-                      <a:r>
-                        <a:t>1,594</a:t>
-                      </a:r>
-                    </a:p>
-                  </a:txBody>
-                  <a:tcPr/>
-                </a:tc>
-              </a:tr>
-              <a:tr h="558800">
-                <a:tc>
-                  <a:txBody>
-                    <a:bodyPr/>
-                    <a:lstStyle/>
-                    <a:p>
-                      <a:pPr>
-                        <a:defRPr sz="1400">
-                          <a:latin typeface="Microsoft YaHei"/>
-                        </a:defRPr>
-                      </a:pPr>
-                      <a:r>
-                        <a:t>progression_grounding</a:t>
-                      </a:r>
-                    </a:p>
-                  </a:txBody>
-                  <a:tcPr/>
-                </a:tc>
-                <a:tc>
-                  <a:txBody>
-                    <a:bodyPr/>
-                    <a:lstStyle/>
-                    <a:p>
-                      <a:pPr>
-                        <a:defRPr sz="1400">
-                          <a:latin typeface="Microsoft YaHei"/>
-                        </a:defRPr>
-                      </a:pPr>
-                      <a:r>
-                        <a:t>2,645</a:t>
-                      </a:r>
-                    </a:p>
-                  </a:txBody>
-                  <a:tcPr/>
-                </a:tc>
-                <a:tc>
-                  <a:txBody>
-                    <a:bodyPr/>
-                    <a:lstStyle/>
-                    <a:p>
-                      <a:pPr>
-                        <a:defRPr sz="1400">
-                          <a:latin typeface="Microsoft YaHei"/>
-                        </a:defRPr>
-                      </a:pPr>
-                      <a:r>
-                        <a:t>+3,165</a:t>
-                      </a:r>
-                    </a:p>
-                  </a:txBody>
-                  <a:tcPr/>
-                </a:tc>
-                <a:tc>
-                  <a:txBody>
-                    <a:bodyPr/>
-                    <a:lstStyle/>
-                    <a:p>
-                      <a:pPr>
-                        <a:defRPr sz="1400">
-                          <a:latin typeface="Microsoft YaHei"/>
-                        </a:defRPr>
-                      </a:pPr>
-                      <a:r>
-                        <a:t>5,810</a:t>
-                      </a:r>
-                    </a:p>
-                  </a:txBody>
-                  <a:tcPr/>
-                </a:tc>
-              </a:tr>
-              <a:tr h="558800">
-                <a:tc>
-                  <a:txBody>
-                    <a:bodyPr/>
-                    <a:lstStyle/>
-                    <a:p>
-                      <a:pPr>
-                        <a:defRPr sz="1400">
-                          <a:latin typeface="Microsoft YaHei"/>
-                        </a:defRPr>
-                      </a:pPr>
-                      <a:r>
-                        <a:t>failure_recovery</a:t>
-                      </a:r>
-                    </a:p>
-                  </a:txBody>
-                  <a:tcPr/>
-                </a:tc>
-                <a:tc>
-                  <a:txBody>
-                    <a:bodyPr/>
-                    <a:lstStyle/>
-                    <a:p>
-                      <a:pPr>
-                        <a:defRPr sz="1400">
-                          <a:latin typeface="Microsoft YaHei"/>
-                        </a:defRPr>
-                      </a:pPr>
-                      <a:r>
-                        <a:t>14</a:t>
-                      </a:r>
-                    </a:p>
-                  </a:txBody>
-                  <a:tcPr/>
-                </a:tc>
-                <a:tc>
-                  <a:txBody>
-                    <a:bodyPr/>
-                    <a:lstStyle/>
-                    <a:p>
-                      <a:pPr>
-                        <a:defRPr sz="1400">
-                          <a:latin typeface="Microsoft YaHei"/>
-                        </a:defRPr>
-                      </a:pPr>
-                      <a:r>
-                        <a:t>+9</a:t>
-                      </a:r>
-                    </a:p>
-                  </a:txBody>
-                  <a:tcPr/>
-                </a:tc>
-                <a:tc>
-                  <a:txBody>
-                    <a:bodyPr/>
-                    <a:lstStyle/>
-                    <a:p>
-                      <a:pPr>
-                        <a:defRPr sz="1400">
-                          <a:latin typeface="Microsoft YaHei"/>
-                        </a:defRPr>
-                      </a:pPr>
-                      <a:r>
-                        <a:t>23</a:t>
-                      </a:r>
-                    </a:p>
-                  </a:txBody>
-                  <a:tcPr/>
-                </a:tc>
-              </a:tr>
-              <a:tr h="558800">
-                <a:tc>
-                  <a:txBody>
-                    <a:bodyPr/>
-                    <a:lstStyle/>
-                    <a:p>
-                      <a:pPr>
-                        <a:defRPr sz="1400">
-                          <a:latin typeface="Microsoft YaHei"/>
-                        </a:defRPr>
-                      </a:pPr>
-                      <a:r>
-                        <a:t>总计</a:t>
-                      </a:r>
-                    </a:p>
-                  </a:txBody>
-                  <a:tcPr/>
-                </a:tc>
-                <a:tc>
-                  <a:txBody>
-                    <a:bodyPr/>
-                    <a:lstStyle/>
-                    <a:p>
-                      <a:pPr>
-                        <a:defRPr sz="1400">
-                          <a:latin typeface="Microsoft YaHei"/>
-                        </a:defRPr>
-                      </a:pPr>
-                      <a:r>
-                        <a:t>15,083</a:t>
-                      </a:r>
-                    </a:p>
-                  </a:txBody>
-                  <a:tcPr/>
-                </a:tc>
-                <a:tc>
-                  <a:txBody>
-                    <a:bodyPr/>
-                    <a:lstStyle/>
-                    <a:p>
-                      <a:pPr>
-                        <a:defRPr sz="1400">
-                          <a:latin typeface="Microsoft YaHei"/>
-                        </a:defRPr>
-                      </a:pPr>
-                      <a:r>
-                        <a:t>+9,413</a:t>
-                      </a:r>
-                    </a:p>
-                  </a:txBody>
-                  <a:tcPr/>
-                </a:tc>
-                <a:tc>
-                  <a:txBody>
-                    <a:bodyPr/>
-                    <a:lstStyle/>
-                    <a:p>
-                      <a:pPr>
-                        <a:defRPr sz="1400">
-                          <a:latin typeface="Microsoft YaHei"/>
-                        </a:defRPr>
-                      </a:pPr>
-                      <a:r>
-                        <a:t>24,496</a:t>
+                      <a:pPr algn="ctr">
+                        <a:defRPr sz="1200">
+                          <a:latin typeface="Microsoft YaHei"/>
+                        </a:defRPr>
+                      </a:pPr>
+                      <a:r>
+                        <a:t>23,596</a:t>
                       </a:r>
                     </a:p>
                   </a:txBody>
@@ -3877,6 +4137,119 @@
           </a:graphicData>
         </a:graphic>
       </p:graphicFrame>
+      <p:sp>
+        <p:nvSpPr>
+          <p:cNvPr id="5" name="Rectangle 4"/>
+          <p:cNvSpPr/>
+          <p:nvPr/>
+        </p:nvSpPr>
+        <p:spPr>
+          <a:xfrm>
+            <a:off x="0" y="6537960"/>
+            <a:ext cx="12191695" cy="18288"/>
+          </a:xfrm>
+          <a:prstGeom prst="rect">
+            <a:avLst/>
+          </a:prstGeom>
+          <a:solidFill>
+            <a:srgbClr val="0096C7"/>
+          </a:solidFill>
+          <a:ln/>
+        </p:spPr>
+        <p:style>
+          <a:lnRef idx="1">
+            <a:schemeClr val="accent1"/>
+          </a:lnRef>
+          <a:fillRef idx="3">
+            <a:schemeClr val="accent1"/>
+          </a:fillRef>
+          <a:effectRef idx="2">
+            <a:schemeClr val="accent1"/>
+          </a:effectRef>
+          <a:fontRef idx="minor">
+            <a:schemeClr val="lt1"/>
+          </a:fontRef>
+        </p:style>
+        <p:txBody>
+          <a:bodyPr rtlCol="0" anchor="ctr"/>
+          <a:lstStyle/>
+          <a:p>
+            <a:pPr algn="ctr"/>
+          </a:p>
+        </p:txBody>
+      </p:sp>
+      <p:sp>
+        <p:nvSpPr>
+          <p:cNvPr id="6" name="TextBox 5"/>
+          <p:cNvSpPr txBox="1"/>
+          <p:nvPr/>
+        </p:nvSpPr>
+        <p:spPr>
+          <a:xfrm>
+            <a:off x="457200" y="6583680"/>
+            <a:ext cx="3657600" cy="228600"/>
+          </a:xfrm>
+          <a:prstGeom prst="rect">
+            <a:avLst/>
+          </a:prstGeom>
+          <a:noFill/>
+        </p:spPr>
+        <p:txBody>
+          <a:bodyPr wrap="none">
+            <a:spAutoFit/>
+          </a:bodyPr>
+          <a:lstStyle/>
+          <a:p>
+            <a:pPr algn="l">
+              <a:defRPr sz="1000" b="0">
+                <a:solidFill>
+                  <a:srgbClr val="6C757D"/>
+                </a:solidFill>
+                <a:latin typeface="Microsoft YaHei"/>
+              </a:defRPr>
+            </a:pPr>
+            <a:r>
+              <a:t>smallgameagent · LLM/VLM + 规则驱动</a:t>
+            </a:r>
+          </a:p>
+        </p:txBody>
+      </p:sp>
+      <p:sp>
+        <p:nvSpPr>
+          <p:cNvPr id="7" name="TextBox 6"/>
+          <p:cNvSpPr txBox="1"/>
+          <p:nvPr/>
+        </p:nvSpPr>
+        <p:spPr>
+          <a:xfrm>
+            <a:off x="10789920" y="6583680"/>
+            <a:ext cx="914400" cy="228600"/>
+          </a:xfrm>
+          <a:prstGeom prst="rect">
+            <a:avLst/>
+          </a:prstGeom>
+          <a:noFill/>
+        </p:spPr>
+        <p:txBody>
+          <a:bodyPr wrap="none">
+            <a:spAutoFit/>
+          </a:bodyPr>
+          <a:lstStyle/>
+          <a:p>
+            <a:pPr algn="r">
+              <a:defRPr sz="1000" b="0">
+                <a:solidFill>
+                  <a:srgbClr val="6C757D"/>
+                </a:solidFill>
+                <a:latin typeface="Microsoft YaHei"/>
+              </a:defRPr>
+            </a:pPr>
+            <a:r>
+              <a:t>10/11</a:t>
+            </a:r>
+          </a:p>
+        </p:txBody>
+      </p:sp>
     </p:spTree>
   </p:cSld>
   <p:clrMapOvr>
@@ -3897,14 +4270,55 @@
       <p:grpSpPr/>
       <p:sp>
         <p:nvSpPr>
-          <p:cNvPr id="2" name="TextBox 1"/>
+          <p:cNvPr id="2" name="Rectangle 1"/>
+          <p:cNvSpPr/>
+          <p:nvPr/>
+        </p:nvSpPr>
+        <p:spPr>
+          <a:xfrm>
+            <a:off x="0" y="0"/>
+            <a:ext cx="12191695" cy="960120"/>
+          </a:xfrm>
+          <a:prstGeom prst="rect">
+            <a:avLst/>
+          </a:prstGeom>
+          <a:solidFill>
+            <a:srgbClr val="1A237E"/>
+          </a:solidFill>
+          <a:ln/>
+        </p:spPr>
+        <p:style>
+          <a:lnRef idx="1">
+            <a:schemeClr val="accent1"/>
+          </a:lnRef>
+          <a:fillRef idx="3">
+            <a:schemeClr val="accent1"/>
+          </a:fillRef>
+          <a:effectRef idx="2">
+            <a:schemeClr val="accent1"/>
+          </a:effectRef>
+          <a:fontRef idx="minor">
+            <a:schemeClr val="lt1"/>
+          </a:fontRef>
+        </p:style>
+        <p:txBody>
+          <a:bodyPr rtlCol="0" anchor="ctr"/>
+          <a:lstStyle/>
+          <a:p>
+            <a:pPr algn="ctr"/>
+          </a:p>
+        </p:txBody>
+      </p:sp>
+      <p:sp>
+        <p:nvSpPr>
+          <p:cNvPr id="3" name="TextBox 2"/>
           <p:cNvSpPr txBox="1"/>
           <p:nvPr/>
         </p:nvSpPr>
         <p:spPr>
           <a:xfrm>
-            <a:off x="457200" y="365760"/>
-            <a:ext cx="11247120" cy="822960"/>
+            <a:off x="457200" y="228600"/>
+            <a:ext cx="11247120" cy="548640"/>
           </a:xfrm>
           <a:prstGeom prst="rect">
             <a:avLst/>
@@ -3917,27 +4331,30 @@
           </a:bodyPr>
           <a:lstStyle/>
           <a:p>
-            <a:pPr>
-              <a:defRPr sz="3200" b="1">
+            <a:pPr algn="l">
+              <a:defRPr sz="3000" b="1">
+                <a:solidFill>
+                  <a:srgbClr val="F3F6F9"/>
+                </a:solidFill>
                 <a:latin typeface="Microsoft YaHei"/>
               </a:defRPr>
             </a:pPr>
             <a:r>
-              <a:t>后续工作</a:t>
-            </a:r>
-          </a:p>
-        </p:txBody>
-      </p:sp>
-      <p:sp>
-        <p:nvSpPr>
-          <p:cNvPr id="3" name="TextBox 2"/>
+              <a:t>下一步工作</a:t>
+            </a:r>
+          </a:p>
+        </p:txBody>
+      </p:sp>
+      <p:sp>
+        <p:nvSpPr>
+          <p:cNvPr id="4" name="TextBox 3"/>
           <p:cNvSpPr txBox="1"/>
           <p:nvPr/>
         </p:nvSpPr>
         <p:spPr>
           <a:xfrm>
-            <a:off x="548640" y="1371600"/>
-            <a:ext cx="11064240" cy="5120640"/>
+            <a:off x="548640" y="1234440"/>
+            <a:ext cx="11064240" cy="5029200"/>
           </a:xfrm>
           <a:prstGeom prst="rect">
             <a:avLst/>
@@ -3950,68 +4367,196 @@
           </a:bodyPr>
           <a:lstStyle/>
           <a:p>
-            <a:pPr>
+            <a:pPr algn="l">
               <a:spcAft>
                 <a:spcPts val="1000"/>
               </a:spcAft>
-              <a:defRPr sz="2000">
+              <a:defRPr sz="1800" b="0">
+                <a:solidFill>
+                  <a:srgbClr val="1E2933"/>
+                </a:solidFill>
                 <a:latin typeface="Microsoft YaHei"/>
               </a:defRPr>
             </a:pPr>
             <a:r>
-              <a:t>• L2 契约 v2：云端 API 输出目标名称，L0 用 probe 映射坐标（已验证方向正确）</a:t>
-            </a:r>
-          </a:p>
-          <a:p>
-            <a:pPr>
+              <a:t>跑通本地 4-bit VLM 离线标注管线：qwen3.5-4b / gemma4-e4b，记录延迟与准确率。</a:t>
+            </a:r>
+          </a:p>
+          <a:p>
+            <a:pPr algn="l">
               <a:spcAft>
                 <a:spcPts val="1000"/>
               </a:spcAft>
-              <a:defRPr sz="2000">
+              <a:defRPr sz="1800" b="0">
+                <a:solidFill>
+                  <a:srgbClr val="1E2933"/>
+                </a:solidFill>
                 <a:latin typeface="Microsoft YaHei"/>
               </a:defRPr>
             </a:pPr>
             <a:r>
-              <a:t>• 7 个 tap-only 0.150 游戏：用 VLM 视觉定位可交互元素，补充 probe 坐标精度</a:t>
-            </a:r>
-          </a:p>
-          <a:p>
-            <a:pPr>
+              <a:t>在 00461 / 00736 等代表游戏上验证规则在线更新（方案 A）能否降低 stall、提升 composite。</a:t>
+            </a:r>
+          </a:p>
+          <a:p>
+            <a:pPr algn="l">
               <a:spcAft>
                 <a:spcPts val="1000"/>
               </a:spcAft>
-              <a:defRPr sz="2000">
+              <a:defRPr sz="1800" b="0">
+                <a:solidFill>
+                  <a:srgbClr val="1E2933"/>
+                </a:solidFill>
                 <a:latin typeface="Microsoft YaHei"/>
               </a:defRPr>
             </a:pPr>
             <a:r>
-              <a:t>• 00496 类确定性游戏：记忆读回帮倒忙，加「rule 连续成功时跳过记忆」开关</a:t>
-            </a:r>
-          </a:p>
-          <a:p>
-            <a:pPr>
+              <a:t>把 L2 输出从「坐标」改为「目标名称」，让 L0 用 probe screenPosition 自行映射。</a:t>
+            </a:r>
+          </a:p>
+          <a:p>
+            <a:pPr algn="l">
               <a:spcAft>
                 <a:spcPts val="1000"/>
               </a:spcAft>
-              <a:defRPr sz="2000">
+              <a:defRPr sz="1800" b="0">
+                <a:solidFill>
+                  <a:srgbClr val="1E2933"/>
+                </a:solidFill>
                 <a:latin typeface="Microsoft YaHei"/>
               </a:defRPr>
             </a:pPr>
             <a:r>
-              <a:t>• ssh5090 QLoRA：24,496 条训练数据已就绪，等可访问后开训</a:t>
-            </a:r>
-          </a:p>
-          <a:p>
-            <a:pPr>
+              <a:t>扩充 failure_recovery 训练样本，解决当前仅 23 条的短板。</a:t>
+            </a:r>
+          </a:p>
+          <a:p>
+            <a:pPr algn="l">
               <a:spcAft>
                 <a:spcPts val="1000"/>
               </a:spcAft>
-              <a:defRPr sz="2000">
+              <a:defRPr sz="1800" b="0">
+                <a:solidFill>
+                  <a:srgbClr val="1E2933"/>
+                </a:solidFill>
                 <a:latin typeface="Microsoft YaHei"/>
               </a:defRPr>
             </a:pPr>
             <a:r>
-              <a:t>• 批量实验自动化：CI/CD 中跑 exp_full_matrix.py，每次代码变更自动对比 composite</a:t>
+              <a:t>ssh5090 可访问后，用 23,596 条样本启动 QLoRA 训练。</a:t>
+            </a:r>
+          </a:p>
+        </p:txBody>
+      </p:sp>
+      <p:sp>
+        <p:nvSpPr>
+          <p:cNvPr id="5" name="Rectangle 4"/>
+          <p:cNvSpPr/>
+          <p:nvPr/>
+        </p:nvSpPr>
+        <p:spPr>
+          <a:xfrm>
+            <a:off x="0" y="6537960"/>
+            <a:ext cx="12191695" cy="18288"/>
+          </a:xfrm>
+          <a:prstGeom prst="rect">
+            <a:avLst/>
+          </a:prstGeom>
+          <a:solidFill>
+            <a:srgbClr val="0096C7"/>
+          </a:solidFill>
+          <a:ln/>
+        </p:spPr>
+        <p:style>
+          <a:lnRef idx="1">
+            <a:schemeClr val="accent1"/>
+          </a:lnRef>
+          <a:fillRef idx="3">
+            <a:schemeClr val="accent1"/>
+          </a:fillRef>
+          <a:effectRef idx="2">
+            <a:schemeClr val="accent1"/>
+          </a:effectRef>
+          <a:fontRef idx="minor">
+            <a:schemeClr val="lt1"/>
+          </a:fontRef>
+        </p:style>
+        <p:txBody>
+          <a:bodyPr rtlCol="0" anchor="ctr"/>
+          <a:lstStyle/>
+          <a:p>
+            <a:pPr algn="ctr"/>
+          </a:p>
+        </p:txBody>
+      </p:sp>
+      <p:sp>
+        <p:nvSpPr>
+          <p:cNvPr id="6" name="TextBox 5"/>
+          <p:cNvSpPr txBox="1"/>
+          <p:nvPr/>
+        </p:nvSpPr>
+        <p:spPr>
+          <a:xfrm>
+            <a:off x="457200" y="6583680"/>
+            <a:ext cx="3657600" cy="228600"/>
+          </a:xfrm>
+          <a:prstGeom prst="rect">
+            <a:avLst/>
+          </a:prstGeom>
+          <a:noFill/>
+        </p:spPr>
+        <p:txBody>
+          <a:bodyPr wrap="none">
+            <a:spAutoFit/>
+          </a:bodyPr>
+          <a:lstStyle/>
+          <a:p>
+            <a:pPr algn="l">
+              <a:defRPr sz="1000" b="0">
+                <a:solidFill>
+                  <a:srgbClr val="6C757D"/>
+                </a:solidFill>
+                <a:latin typeface="Microsoft YaHei"/>
+              </a:defRPr>
+            </a:pPr>
+            <a:r>
+              <a:t>smallgameagent · LLM/VLM + 规则驱动</a:t>
+            </a:r>
+          </a:p>
+        </p:txBody>
+      </p:sp>
+      <p:sp>
+        <p:nvSpPr>
+          <p:cNvPr id="7" name="TextBox 6"/>
+          <p:cNvSpPr txBox="1"/>
+          <p:nvPr/>
+        </p:nvSpPr>
+        <p:spPr>
+          <a:xfrm>
+            <a:off x="10789920" y="6583680"/>
+            <a:ext cx="914400" cy="228600"/>
+          </a:xfrm>
+          <a:prstGeom prst="rect">
+            <a:avLst/>
+          </a:prstGeom>
+          <a:noFill/>
+        </p:spPr>
+        <p:txBody>
+          <a:bodyPr wrap="none">
+            <a:spAutoFit/>
+          </a:bodyPr>
+          <a:lstStyle/>
+          <a:p>
+            <a:pPr algn="r">
+              <a:defRPr sz="1000" b="0">
+                <a:solidFill>
+                  <a:srgbClr val="6C757D"/>
+                </a:solidFill>
+                <a:latin typeface="Microsoft YaHei"/>
+              </a:defRPr>
+            </a:pPr>
+            <a:r>
+              <a:t>11/11</a:t>
             </a:r>
           </a:p>
         </p:txBody>
@@ -4036,14 +4581,55 @@
       <p:grpSpPr/>
       <p:sp>
         <p:nvSpPr>
-          <p:cNvPr id="2" name="TextBox 1"/>
+          <p:cNvPr id="2" name="Rectangle 1"/>
+          <p:cNvSpPr/>
+          <p:nvPr/>
+        </p:nvSpPr>
+        <p:spPr>
+          <a:xfrm>
+            <a:off x="0" y="0"/>
+            <a:ext cx="12191695" cy="960120"/>
+          </a:xfrm>
+          <a:prstGeom prst="rect">
+            <a:avLst/>
+          </a:prstGeom>
+          <a:solidFill>
+            <a:srgbClr val="1A237E"/>
+          </a:solidFill>
+          <a:ln/>
+        </p:spPr>
+        <p:style>
+          <a:lnRef idx="1">
+            <a:schemeClr val="accent1"/>
+          </a:lnRef>
+          <a:fillRef idx="3">
+            <a:schemeClr val="accent1"/>
+          </a:fillRef>
+          <a:effectRef idx="2">
+            <a:schemeClr val="accent1"/>
+          </a:effectRef>
+          <a:fontRef idx="minor">
+            <a:schemeClr val="lt1"/>
+          </a:fontRef>
+        </p:style>
+        <p:txBody>
+          <a:bodyPr rtlCol="0" anchor="ctr"/>
+          <a:lstStyle/>
+          <a:p>
+            <a:pPr algn="ctr"/>
+          </a:p>
+        </p:txBody>
+      </p:sp>
+      <p:sp>
+        <p:nvSpPr>
+          <p:cNvPr id="3" name="TextBox 2"/>
           <p:cNvSpPr txBox="1"/>
           <p:nvPr/>
         </p:nvSpPr>
         <p:spPr>
           <a:xfrm>
-            <a:off x="457200" y="365760"/>
-            <a:ext cx="11247120" cy="822960"/>
+            <a:off x="457200" y="228600"/>
+            <a:ext cx="11247120" cy="548640"/>
           </a:xfrm>
           <a:prstGeom prst="rect">
             <a:avLst/>
@@ -4056,27 +4642,30 @@
           </a:bodyPr>
           <a:lstStyle/>
           <a:p>
-            <a:pPr>
-              <a:defRPr sz="3200" b="1">
+            <a:pPr algn="l">
+              <a:defRPr sz="3000" b="1">
+                <a:solidFill>
+                  <a:srgbClr val="F3F6F9"/>
+                </a:solidFill>
                 <a:latin typeface="Microsoft YaHei"/>
               </a:defRPr>
             </a:pPr>
             <a:r>
-              <a:t>一页结论</a:t>
-            </a:r>
-          </a:p>
-        </p:txBody>
-      </p:sp>
-      <p:sp>
-        <p:nvSpPr>
-          <p:cNvPr id="3" name="TextBox 2"/>
+              <a:t>核心结论</a:t>
+            </a:r>
+          </a:p>
+        </p:txBody>
+      </p:sp>
+      <p:sp>
+        <p:nvSpPr>
+          <p:cNvPr id="4" name="TextBox 3"/>
           <p:cNvSpPr txBox="1"/>
           <p:nvPr/>
         </p:nvSpPr>
         <p:spPr>
           <a:xfrm>
-            <a:off x="548640" y="1371600"/>
-            <a:ext cx="11064240" cy="5120640"/>
+            <a:off x="548640" y="1234440"/>
+            <a:ext cx="11064240" cy="5029200"/>
           </a:xfrm>
           <a:prstGeom prst="rect">
             <a:avLst/>
@@ -4089,81 +4678,212 @@
           </a:bodyPr>
           <a:lstStyle/>
           <a:p>
-            <a:pPr>
+            <a:pPr algn="l">
               <a:spcAft>
                 <a:spcPts val="1000"/>
               </a:spcAft>
-              <a:defRPr sz="2000">
+              <a:defRPr sz="1800" b="0">
+                <a:solidFill>
+                  <a:srgbClr val="1E2933"/>
+                </a:solidFill>
                 <a:latin typeface="Microsoft YaHei"/>
               </a:defRPr>
             </a:pPr>
             <a:r>
-              <a:t>• 最佳配置：multi-bus + StrategyMemory 读回 = composite 0.300（稳定多 seed）</a:t>
-            </a:r>
-          </a:p>
-          <a:p>
-            <a:pPr>
+              <a:t>最佳配置仍是 multi-bus + StrategyMemory 读回，稳定达到 composite 0.300（多 seed 一致）。</a:t>
+            </a:r>
+          </a:p>
+          <a:p>
+            <a:pPr algn="l">
               <a:spcAft>
                 <a:spcPts val="1000"/>
               </a:spcAft>
-              <a:defRPr sz="2000">
+              <a:defRPr sz="1800" b="0">
+                <a:solidFill>
+                  <a:srgbClr val="1E2933"/>
+                </a:solidFill>
                 <a:latin typeface="Microsoft YaHei"/>
               </a:defRPr>
             </a:pPr>
             <a:r>
-              <a:t>• 记忆读回将 composite 从 0.150 翻倍到 0.300——世界模型违规从 3 降到 0</a:t>
-            </a:r>
-          </a:p>
-          <a:p>
-            <a:pPr>
+              <a:t>记忆读回把 composite 从 0.150 提升到 0.300，关键在于世界模型违规从 3 降到 0。</a:t>
+            </a:r>
+          </a:p>
+          <a:p>
+            <a:pPr algn="l">
               <a:spcAft>
                 <a:spcPts val="1000"/>
               </a:spcAft>
-              <a:defRPr sz="2000">
+              <a:defRPr sz="1800" b="0">
+                <a:solidFill>
+                  <a:srgbClr val="1E2933"/>
+                </a:solidFill>
                 <a:latin typeface="Microsoft YaHei"/>
               </a:defRPr>
             </a:pPr>
             <a:r>
-              <a:t>• 22 个游戏自动分类：7 个 joystick 驱动（A 类）+ 15 个 tap-to-move（B 类）</a:t>
-            </a:r>
-          </a:p>
-          <a:p>
-            <a:pPr>
+              <a:t>22 个游戏已自动分类：7 个 joystick 驱动 + 15 个 tap-to-move；8/15 的 B 类游戏用 tap-only 驱动即可达 0.300。</a:t>
+            </a:r>
+          </a:p>
+          <a:p>
+            <a:pPr algn="l">
               <a:spcAft>
                 <a:spcPts val="1000"/>
               </a:spcAft>
-              <a:defRPr sz="2000">
+              <a:defRPr sz="1800" b="0">
+                <a:solidFill>
+                  <a:srgbClr val="1E2933"/>
+                </a:solidFill>
                 <a:latin typeface="Microsoft YaHei"/>
               </a:defRPr>
             </a:pPr>
             <a:r>
-              <a:t>• 8/15 B 类游戏 tap-only 驱动达 0.300——tap 目标屏幕坐标即有效交互</a:t>
-            </a:r>
-          </a:p>
-          <a:p>
-            <a:pPr>
+              <a:t>云端 API 适合做长程规划与规则更新，但必须在 L2 输出目标名称而非坐标；本地 VLM 更适合离线视觉标注。</a:t>
+            </a:r>
+          </a:p>
+          <a:p>
+            <a:pPr algn="l">
               <a:spcAft>
                 <a:spcPts val="1000"/>
               </a:spcAft>
-              <a:defRPr sz="2000">
+              <a:defRPr sz="1800" b="0">
+                <a:solidFill>
+                  <a:srgbClr val="1E2933"/>
+                </a:solidFill>
                 <a:latin typeface="Microsoft YaHei"/>
               </a:defRPr>
             </a:pPr>
             <a:r>
-              <a:t>• 云端 API 和本地 VLM 在线闭环均不实用，定位：离线策略生成 + 数据标注</a:t>
-            </a:r>
-          </a:p>
-          <a:p>
-            <a:pPr>
+              <a:t>多 Provider API 已统一接入：OpenCodeGo、Kimi、DeepSeek、MiMo（xiaomi）、Qwen 均可通过环境变量切换。</a:t>
+            </a:r>
+          </a:p>
+          <a:p>
+            <a:pPr algn="l">
               <a:spcAft>
                 <a:spcPts val="1000"/>
               </a:spcAft>
-              <a:defRPr sz="2000">
+              <a:defRPr sz="1800" b="0">
+                <a:solidFill>
+                  <a:srgbClr val="1E2933"/>
+                </a:solidFill>
                 <a:latin typeface="Microsoft YaHei"/>
               </a:defRPr>
             </a:pPr>
             <a:r>
-              <a:t>• 训练数据：24,496 条 7 任务样本（processed-runs 15,083 + 轨迹转换 9,413）</a:t>
+              <a:t>训练数据已达 23,596 条 7 任务样本，为后续 QLoRA 微调做好了准备。</a:t>
+            </a:r>
+          </a:p>
+        </p:txBody>
+      </p:sp>
+      <p:sp>
+        <p:nvSpPr>
+          <p:cNvPr id="5" name="Rectangle 4"/>
+          <p:cNvSpPr/>
+          <p:nvPr/>
+        </p:nvSpPr>
+        <p:spPr>
+          <a:xfrm>
+            <a:off x="0" y="6537960"/>
+            <a:ext cx="12191695" cy="18288"/>
+          </a:xfrm>
+          <a:prstGeom prst="rect">
+            <a:avLst/>
+          </a:prstGeom>
+          <a:solidFill>
+            <a:srgbClr val="0096C7"/>
+          </a:solidFill>
+          <a:ln/>
+        </p:spPr>
+        <p:style>
+          <a:lnRef idx="1">
+            <a:schemeClr val="accent1"/>
+          </a:lnRef>
+          <a:fillRef idx="3">
+            <a:schemeClr val="accent1"/>
+          </a:fillRef>
+          <a:effectRef idx="2">
+            <a:schemeClr val="accent1"/>
+          </a:effectRef>
+          <a:fontRef idx="minor">
+            <a:schemeClr val="lt1"/>
+          </a:fontRef>
+        </p:style>
+        <p:txBody>
+          <a:bodyPr rtlCol="0" anchor="ctr"/>
+          <a:lstStyle/>
+          <a:p>
+            <a:pPr algn="ctr"/>
+          </a:p>
+        </p:txBody>
+      </p:sp>
+      <p:sp>
+        <p:nvSpPr>
+          <p:cNvPr id="6" name="TextBox 5"/>
+          <p:cNvSpPr txBox="1"/>
+          <p:nvPr/>
+        </p:nvSpPr>
+        <p:spPr>
+          <a:xfrm>
+            <a:off x="457200" y="6583680"/>
+            <a:ext cx="3657600" cy="228600"/>
+          </a:xfrm>
+          <a:prstGeom prst="rect">
+            <a:avLst/>
+          </a:prstGeom>
+          <a:noFill/>
+        </p:spPr>
+        <p:txBody>
+          <a:bodyPr wrap="none">
+            <a:spAutoFit/>
+          </a:bodyPr>
+          <a:lstStyle/>
+          <a:p>
+            <a:pPr algn="l">
+              <a:defRPr sz="1000" b="0">
+                <a:solidFill>
+                  <a:srgbClr val="6C757D"/>
+                </a:solidFill>
+                <a:latin typeface="Microsoft YaHei"/>
+              </a:defRPr>
+            </a:pPr>
+            <a:r>
+              <a:t>smallgameagent · LLM/VLM + 规则驱动</a:t>
+            </a:r>
+          </a:p>
+        </p:txBody>
+      </p:sp>
+      <p:sp>
+        <p:nvSpPr>
+          <p:cNvPr id="7" name="TextBox 6"/>
+          <p:cNvSpPr txBox="1"/>
+          <p:nvPr/>
+        </p:nvSpPr>
+        <p:spPr>
+          <a:xfrm>
+            <a:off x="10789920" y="6583680"/>
+            <a:ext cx="914400" cy="228600"/>
+          </a:xfrm>
+          <a:prstGeom prst="rect">
+            <a:avLst/>
+          </a:prstGeom>
+          <a:noFill/>
+        </p:spPr>
+        <p:txBody>
+          <a:bodyPr wrap="none">
+            <a:spAutoFit/>
+          </a:bodyPr>
+          <a:lstStyle/>
+          <a:p>
+            <a:pPr algn="r">
+              <a:defRPr sz="1000" b="0">
+                <a:solidFill>
+                  <a:srgbClr val="6C757D"/>
+                </a:solidFill>
+                <a:latin typeface="Microsoft YaHei"/>
+              </a:defRPr>
+            </a:pPr>
+            <a:r>
+              <a:t>2/11</a:t>
             </a:r>
           </a:p>
         </p:txBody>
@@ -4188,14 +4908,55 @@
       <p:grpSpPr/>
       <p:sp>
         <p:nvSpPr>
-          <p:cNvPr id="2" name="TextBox 1"/>
+          <p:cNvPr id="2" name="Rectangle 1"/>
+          <p:cNvSpPr/>
+          <p:nvPr/>
+        </p:nvSpPr>
+        <p:spPr>
+          <a:xfrm>
+            <a:off x="0" y="0"/>
+            <a:ext cx="12191695" cy="960120"/>
+          </a:xfrm>
+          <a:prstGeom prst="rect">
+            <a:avLst/>
+          </a:prstGeom>
+          <a:solidFill>
+            <a:srgbClr val="1A237E"/>
+          </a:solidFill>
+          <a:ln/>
+        </p:spPr>
+        <p:style>
+          <a:lnRef idx="1">
+            <a:schemeClr val="accent1"/>
+          </a:lnRef>
+          <a:fillRef idx="3">
+            <a:schemeClr val="accent1"/>
+          </a:fillRef>
+          <a:effectRef idx="2">
+            <a:schemeClr val="accent1"/>
+          </a:effectRef>
+          <a:fontRef idx="minor">
+            <a:schemeClr val="lt1"/>
+          </a:fontRef>
+        </p:style>
+        <p:txBody>
+          <a:bodyPr rtlCol="0" anchor="ctr"/>
+          <a:lstStyle/>
+          <a:p>
+            <a:pPr algn="ctr"/>
+          </a:p>
+        </p:txBody>
+      </p:sp>
+      <p:sp>
+        <p:nvSpPr>
+          <p:cNvPr id="3" name="TextBox 2"/>
           <p:cNvSpPr txBox="1"/>
           <p:nvPr/>
         </p:nvSpPr>
         <p:spPr>
           <a:xfrm>
-            <a:off x="457200" y="365760"/>
-            <a:ext cx="11247120" cy="822960"/>
+            <a:off x="457200" y="228600"/>
+            <a:ext cx="11247120" cy="548640"/>
           </a:xfrm>
           <a:prstGeom prst="rect">
             <a:avLst/>
@@ -4208,27 +4969,71 @@
           </a:bodyPr>
           <a:lstStyle/>
           <a:p>
-            <a:pPr>
-              <a:defRPr sz="3200" b="1">
+            <a:pPr algn="l">
+              <a:defRPr sz="3000" b="1">
+                <a:solidFill>
+                  <a:srgbClr val="F3F6F9"/>
+                </a:solidFill>
                 <a:latin typeface="Microsoft YaHei"/>
               </a:defRPr>
             </a:pPr>
             <a:r>
-              <a:t>Agent 架构</a:t>
-            </a:r>
-          </a:p>
-        </p:txBody>
-      </p:sp>
-      <p:sp>
-        <p:nvSpPr>
-          <p:cNvPr id="3" name="TextBox 2"/>
+              <a:t>三层架构：规则打底，云端/本地 VLM 做上层更新</a:t>
+            </a:r>
+          </a:p>
+        </p:txBody>
+      </p:sp>
+      <p:sp>
+        <p:nvSpPr>
+          <p:cNvPr id="4" name="Rounded Rectangle 3"/>
+          <p:cNvSpPr/>
+          <p:nvPr/>
+        </p:nvSpPr>
+        <p:spPr>
+          <a:xfrm>
+            <a:off x="3200400" y="1280160"/>
+            <a:ext cx="5760720" cy="1234440"/>
+          </a:xfrm>
+          <a:prstGeom prst="roundRect">
+            <a:avLst/>
+          </a:prstGeom>
+          <a:solidFill>
+            <a:srgbClr val="1A237E"/>
+          </a:solidFill>
+          <a:ln/>
+        </p:spPr>
+        <p:style>
+          <a:lnRef idx="1">
+            <a:schemeClr val="accent1"/>
+          </a:lnRef>
+          <a:fillRef idx="3">
+            <a:schemeClr val="accent1"/>
+          </a:fillRef>
+          <a:effectRef idx="2">
+            <a:schemeClr val="accent1"/>
+          </a:effectRef>
+          <a:fontRef idx="minor">
+            <a:schemeClr val="lt1"/>
+          </a:fontRef>
+        </p:style>
+        <p:txBody>
+          <a:bodyPr rtlCol="0" anchor="ctr"/>
+          <a:lstStyle/>
+          <a:p>
+            <a:pPr algn="ctr"/>
+          </a:p>
+        </p:txBody>
+      </p:sp>
+      <p:sp>
+        <p:nvSpPr>
+          <p:cNvPr id="5" name="TextBox 4"/>
           <p:cNvSpPr txBox="1"/>
           <p:nvPr/>
         </p:nvSpPr>
         <p:spPr>
           <a:xfrm>
-            <a:off x="548640" y="1371600"/>
-            <a:ext cx="11064240" cy="5120640"/>
+            <a:off x="3383280" y="1389888"/>
+            <a:ext cx="5394960" cy="411480"/>
           </a:xfrm>
           <a:prstGeom prst="rect">
             <a:avLst/>
@@ -4236,86 +5041,903 @@
           <a:noFill/>
         </p:spPr>
         <p:txBody>
+          <a:bodyPr wrap="none">
+            <a:spAutoFit/>
+          </a:bodyPr>
+          <a:lstStyle/>
+          <a:p>
+            <a:pPr algn="ctr">
+              <a:defRPr sz="1600" b="1">
+                <a:solidFill>
+                  <a:srgbClr val="F3F6F9"/>
+                </a:solidFill>
+                <a:latin typeface="Microsoft YaHei"/>
+              </a:defRPr>
+            </a:pPr>
+            <a:r>
+              <a:t>L2 战略层 · 云端多模态 API</a:t>
+            </a:r>
+          </a:p>
+        </p:txBody>
+      </p:sp>
+      <p:sp>
+        <p:nvSpPr>
+          <p:cNvPr id="6" name="TextBox 5"/>
+          <p:cNvSpPr txBox="1"/>
+          <p:nvPr/>
+        </p:nvSpPr>
+        <p:spPr>
+          <a:xfrm>
+            <a:off x="3383280" y="1783080"/>
+            <a:ext cx="5394960" cy="640080"/>
+          </a:xfrm>
+          <a:prstGeom prst="rect">
+            <a:avLst/>
+          </a:prstGeom>
+          <a:noFill/>
+        </p:spPr>
+        <p:txBody>
+          <a:bodyPr wrap="none">
+            <a:spAutoFit/>
+          </a:bodyPr>
+          <a:lstStyle/>
+          <a:p>
+            <a:pPr algn="ctr">
+              <a:defRPr sz="1200" b="0">
+                <a:solidFill>
+                  <a:srgbClr val="F3F6F9"/>
+                </a:solidFill>
+                <a:latin typeface="Microsoft YaHei"/>
+              </a:defRPr>
+            </a:pPr>
+            <a:r>
+              <a:t>kimi-k2.7-code / mimo-v2.5 / DeepSeek / Qwen</a:t>
+            </a:r>
+            <a:br/>
+            <a:r>
+              <a:t>长程规划 + 规则更新触发</a:t>
+            </a:r>
+          </a:p>
+        </p:txBody>
+      </p:sp>
+      <p:sp>
+        <p:nvSpPr>
+          <p:cNvPr id="7" name="Rounded Rectangle 6"/>
+          <p:cNvSpPr/>
+          <p:nvPr/>
+        </p:nvSpPr>
+        <p:spPr>
+          <a:xfrm>
+            <a:off x="3200400" y="2834640"/>
+            <a:ext cx="5760720" cy="1234440"/>
+          </a:xfrm>
+          <a:prstGeom prst="roundRect">
+            <a:avLst/>
+          </a:prstGeom>
+          <a:solidFill>
+            <a:srgbClr val="0096C7"/>
+          </a:solidFill>
+          <a:ln/>
+        </p:spPr>
+        <p:style>
+          <a:lnRef idx="1">
+            <a:schemeClr val="accent1"/>
+          </a:lnRef>
+          <a:fillRef idx="3">
+            <a:schemeClr val="accent1"/>
+          </a:fillRef>
+          <a:effectRef idx="2">
+            <a:schemeClr val="accent1"/>
+          </a:effectRef>
+          <a:fontRef idx="minor">
+            <a:schemeClr val="lt1"/>
+          </a:fontRef>
+        </p:style>
+        <p:txBody>
+          <a:bodyPr rtlCol="0" anchor="ctr"/>
+          <a:lstStyle/>
+          <a:p>
+            <a:pPr algn="ctr"/>
+          </a:p>
+        </p:txBody>
+      </p:sp>
+      <p:sp>
+        <p:nvSpPr>
+          <p:cNvPr id="8" name="TextBox 7"/>
+          <p:cNvSpPr txBox="1"/>
+          <p:nvPr/>
+        </p:nvSpPr>
+        <p:spPr>
+          <a:xfrm>
+            <a:off x="3383280" y="2944368"/>
+            <a:ext cx="5394960" cy="411480"/>
+          </a:xfrm>
+          <a:prstGeom prst="rect">
+            <a:avLst/>
+          </a:prstGeom>
+          <a:noFill/>
+        </p:spPr>
+        <p:txBody>
+          <a:bodyPr wrap="none">
+            <a:spAutoFit/>
+          </a:bodyPr>
+          <a:lstStyle/>
+          <a:p>
+            <a:pPr algn="ctr">
+              <a:defRPr sz="1600" b="1">
+                <a:solidFill>
+                  <a:srgbClr val="F3F6F9"/>
+                </a:solidFill>
+                <a:latin typeface="Microsoft YaHei"/>
+              </a:defRPr>
+            </a:pPr>
+            <a:r>
+              <a:t>L1 战术层 · 本地小 VLM</a:t>
+            </a:r>
+          </a:p>
+        </p:txBody>
+      </p:sp>
+      <p:sp>
+        <p:nvSpPr>
+          <p:cNvPr id="9" name="TextBox 8"/>
+          <p:cNvSpPr txBox="1"/>
+          <p:nvPr/>
+        </p:nvSpPr>
+        <p:spPr>
+          <a:xfrm>
+            <a:off x="3383280" y="3337560"/>
+            <a:ext cx="5394960" cy="640080"/>
+          </a:xfrm>
+          <a:prstGeom prst="rect">
+            <a:avLst/>
+          </a:prstGeom>
+          <a:noFill/>
+        </p:spPr>
+        <p:txBody>
+          <a:bodyPr wrap="none">
+            <a:spAutoFit/>
+          </a:bodyPr>
+          <a:lstStyle/>
+          <a:p>
+            <a:pPr algn="ctr">
+              <a:defRPr sz="1200" b="0">
+                <a:solidFill>
+                  <a:srgbClr val="F3F6F9"/>
+                </a:solidFill>
+                <a:latin typeface="Microsoft YaHei"/>
+              </a:defRPr>
+            </a:pPr>
+            <a:r>
+              <a:t>qwen3.5-4b / gemma4-e4b（4-bit + KV-cache）</a:t>
+            </a:r>
+            <a:br/>
+            <a:r>
+              <a:t>离线标注 + 视觉上下文</a:t>
+            </a:r>
+          </a:p>
+        </p:txBody>
+      </p:sp>
+      <p:sp>
+        <p:nvSpPr>
+          <p:cNvPr id="10" name="Rounded Rectangle 9"/>
+          <p:cNvSpPr/>
+          <p:nvPr/>
+        </p:nvSpPr>
+        <p:spPr>
+          <a:xfrm>
+            <a:off x="3200400" y="4389120"/>
+            <a:ext cx="5760720" cy="1234440"/>
+          </a:xfrm>
+          <a:prstGeom prst="roundRect">
+            <a:avLst/>
+          </a:prstGeom>
+          <a:solidFill>
+            <a:srgbClr val="FF6B35"/>
+          </a:solidFill>
+          <a:ln/>
+        </p:spPr>
+        <p:style>
+          <a:lnRef idx="1">
+            <a:schemeClr val="accent1"/>
+          </a:lnRef>
+          <a:fillRef idx="3">
+            <a:schemeClr val="accent1"/>
+          </a:fillRef>
+          <a:effectRef idx="2">
+            <a:schemeClr val="accent1"/>
+          </a:effectRef>
+          <a:fontRef idx="minor">
+            <a:schemeClr val="lt1"/>
+          </a:fontRef>
+        </p:style>
+        <p:txBody>
+          <a:bodyPr rtlCol="0" anchor="ctr"/>
+          <a:lstStyle/>
+          <a:p>
+            <a:pPr algn="ctr"/>
+          </a:p>
+        </p:txBody>
+      </p:sp>
+      <p:sp>
+        <p:nvSpPr>
+          <p:cNvPr id="11" name="TextBox 10"/>
+          <p:cNvSpPr txBox="1"/>
+          <p:nvPr/>
+        </p:nvSpPr>
+        <p:spPr>
+          <a:xfrm>
+            <a:off x="3383280" y="4498848"/>
+            <a:ext cx="5394960" cy="411480"/>
+          </a:xfrm>
+          <a:prstGeom prst="rect">
+            <a:avLst/>
+          </a:prstGeom>
+          <a:noFill/>
+        </p:spPr>
+        <p:txBody>
+          <a:bodyPr wrap="none">
+            <a:spAutoFit/>
+          </a:bodyPr>
+          <a:lstStyle/>
+          <a:p>
+            <a:pPr algn="ctr">
+              <a:defRPr sz="1600" b="1">
+                <a:solidFill>
+                  <a:srgbClr val="F3F6F9"/>
+                </a:solidFill>
+                <a:latin typeface="Microsoft YaHei"/>
+              </a:defRPr>
+            </a:pPr>
+            <a:r>
+              <a:t>L0 执行层 · 规则引擎</a:t>
+            </a:r>
+          </a:p>
+        </p:txBody>
+      </p:sp>
+      <p:sp>
+        <p:nvSpPr>
+          <p:cNvPr id="12" name="TextBox 11"/>
+          <p:cNvSpPr txBox="1"/>
+          <p:nvPr/>
+        </p:nvSpPr>
+        <p:spPr>
+          <a:xfrm>
+            <a:off x="3383280" y="4892040"/>
+            <a:ext cx="5394960" cy="640080"/>
+          </a:xfrm>
+          <a:prstGeom prst="rect">
+            <a:avLst/>
+          </a:prstGeom>
+          <a:noFill/>
+        </p:spPr>
+        <p:txBody>
+          <a:bodyPr wrap="none">
+            <a:spAutoFit/>
+          </a:bodyPr>
+          <a:lstStyle/>
+          <a:p>
+            <a:pPr algn="ctr">
+              <a:defRPr sz="1200" b="0">
+                <a:solidFill>
+                  <a:srgbClr val="F3F6F9"/>
+                </a:solidFill>
+                <a:latin typeface="Microsoft YaHei"/>
+              </a:defRPr>
+            </a:pPr>
+            <a:r>
+              <a:t>tap-guide / tap-only / 障碍学习</a:t>
+            </a:r>
+            <a:br/>
+            <a:r>
+              <a:t>零延迟执行</a:t>
+            </a:r>
+          </a:p>
+        </p:txBody>
+      </p:sp>
+      <p:sp>
+        <p:nvSpPr>
+          <p:cNvPr id="13" name="Rounded Rectangle 12"/>
+          <p:cNvSpPr/>
+          <p:nvPr/>
+        </p:nvSpPr>
+        <p:spPr>
+          <a:xfrm>
+            <a:off x="365760" y="1371600"/>
+            <a:ext cx="2468880" cy="2011680"/>
+          </a:xfrm>
+          <a:prstGeom prst="roundRect">
+            <a:avLst/>
+          </a:prstGeom>
+          <a:solidFill>
+            <a:srgbClr val="FFFFFF"/>
+          </a:solidFill>
+          <a:ln w="25400">
+            <a:solidFill>
+              <a:srgbClr val="6C757D"/>
+            </a:solidFill>
+          </a:ln>
+        </p:spPr>
+        <p:style>
+          <a:lnRef idx="1">
+            <a:schemeClr val="accent1"/>
+          </a:lnRef>
+          <a:fillRef idx="3">
+            <a:schemeClr val="accent1"/>
+          </a:fillRef>
+          <a:effectRef idx="2">
+            <a:schemeClr val="accent1"/>
+          </a:effectRef>
+          <a:fontRef idx="minor">
+            <a:schemeClr val="lt1"/>
+          </a:fontRef>
+        </p:style>
+        <p:txBody>
+          <a:bodyPr rtlCol="0" anchor="ctr"/>
+          <a:lstStyle/>
+          <a:p>
+            <a:pPr algn="ctr"/>
+          </a:p>
+        </p:txBody>
+      </p:sp>
+      <p:sp>
+        <p:nvSpPr>
+          <p:cNvPr id="14" name="Rectangle 13"/>
+          <p:cNvSpPr/>
+          <p:nvPr/>
+        </p:nvSpPr>
+        <p:spPr>
+          <a:xfrm>
+            <a:off x="365760" y="1371600"/>
+            <a:ext cx="2468880" cy="411480"/>
+          </a:xfrm>
+          <a:prstGeom prst="rect">
+            <a:avLst/>
+          </a:prstGeom>
+          <a:solidFill>
+            <a:srgbClr val="6C757D"/>
+          </a:solidFill>
+          <a:ln/>
+        </p:spPr>
+        <p:style>
+          <a:lnRef idx="1">
+            <a:schemeClr val="accent1"/>
+          </a:lnRef>
+          <a:fillRef idx="3">
+            <a:schemeClr val="accent1"/>
+          </a:fillRef>
+          <a:effectRef idx="2">
+            <a:schemeClr val="accent1"/>
+          </a:effectRef>
+          <a:fontRef idx="minor">
+            <a:schemeClr val="lt1"/>
+          </a:fontRef>
+        </p:style>
+        <p:txBody>
+          <a:bodyPr rtlCol="0" anchor="ctr"/>
+          <a:lstStyle/>
+          <a:p>
+            <a:pPr algn="ctr"/>
+          </a:p>
+        </p:txBody>
+      </p:sp>
+      <p:sp>
+        <p:nvSpPr>
+          <p:cNvPr id="15" name="TextBox 14"/>
+          <p:cNvSpPr txBox="1"/>
+          <p:nvPr/>
+        </p:nvSpPr>
+        <p:spPr>
+          <a:xfrm>
+            <a:off x="438912" y="1444752"/>
+            <a:ext cx="2322576" cy="320040"/>
+          </a:xfrm>
+          <a:prstGeom prst="rect">
+            <a:avLst/>
+          </a:prstGeom>
+          <a:noFill/>
+        </p:spPr>
+        <p:txBody>
+          <a:bodyPr wrap="none">
+            <a:spAutoFit/>
+          </a:bodyPr>
+          <a:lstStyle/>
+          <a:p>
+            <a:pPr algn="l">
+              <a:defRPr sz="1400" b="1">
+                <a:solidFill>
+                  <a:srgbClr val="F3F6F9"/>
+                </a:solidFill>
+                <a:latin typeface="Microsoft YaHei"/>
+              </a:defRPr>
+            </a:pPr>
+            <a:r>
+              <a:t>触发条件</a:t>
+            </a:r>
+          </a:p>
+        </p:txBody>
+      </p:sp>
+      <p:sp>
+        <p:nvSpPr>
+          <p:cNvPr id="16" name="TextBox 15"/>
+          <p:cNvSpPr txBox="1"/>
+          <p:nvPr/>
+        </p:nvSpPr>
+        <p:spPr>
+          <a:xfrm>
+            <a:off x="475488" y="1874519"/>
+            <a:ext cx="2249424" cy="1417320"/>
+          </a:xfrm>
+          <a:prstGeom prst="rect">
+            <a:avLst/>
+          </a:prstGeom>
+          <a:noFill/>
+        </p:spPr>
+        <p:txBody>
           <a:bodyPr wrap="square">
             <a:spAutoFit/>
           </a:bodyPr>
           <a:lstStyle/>
           <a:p>
-            <a:pPr>
+            <a:pPr algn="l">
               <a:spcAft>
-                <a:spcPts val="1000"/>
+                <a:spcPts val="400"/>
               </a:spcAft>
-              <a:defRPr sz="2000">
+              <a:defRPr sz="1200" b="0">
+                <a:solidFill>
+                  <a:srgbClr val="1E2933"/>
+                </a:solidFill>
                 <a:latin typeface="Microsoft YaHei"/>
               </a:defRPr>
             </a:pPr>
             <a:r>
-              <a:t>• L0 执行层：RuleEngine（tap-guide / tap-only），每步 ~0ms</a:t>
-            </a:r>
-          </a:p>
-          <a:p>
-            <a:pPr>
+              <a:t>composite 连续低于阈值</a:t>
+            </a:r>
+          </a:p>
+          <a:p>
+            <a:pPr algn="l">
               <a:spcAft>
-                <a:spcPts val="1000"/>
+                <a:spcPts val="400"/>
               </a:spcAft>
-              <a:defRPr sz="2000">
+              <a:defRPr sz="1200" b="0">
+                <a:solidFill>
+                  <a:srgbClr val="1E2933"/>
+                </a:solidFill>
                 <a:latin typeface="Microsoft YaHei"/>
               </a:defRPr>
             </a:pPr>
             <a:r>
-              <a:t>• 消息总线 AgentBus：OBSERVE / PERCEIVE / DECIDE / VERIFY / CRITIC / MEMORY</a:t>
-            </a:r>
-          </a:p>
-          <a:p>
-            <a:pPr>
+              <a:t>stall 超过 5 步</a:t>
+            </a:r>
+          </a:p>
+          <a:p>
+            <a:pPr algn="l">
               <a:spcAft>
-                <a:spcPts val="1000"/>
+                <a:spcPts val="400"/>
               </a:spcAft>
-              <a:defRPr sz="2000">
+              <a:defRPr sz="1200" b="0">
+                <a:solidFill>
+                  <a:srgbClr val="1E2933"/>
+                </a:solidFill>
                 <a:latin typeface="Microsoft YaHei"/>
               </a:defRPr>
             </a:pPr>
             <a:r>
-              <a:t>• 6 角色流水线：Observer→StateMapper→DecisionAnalyst→Verifier→Critic→MemoryCurator</a:t>
-            </a:r>
-          </a:p>
-          <a:p>
-            <a:pPr>
+              <a:t>L0/L2 决策冲突</a:t>
+            </a:r>
+          </a:p>
+          <a:p>
+            <a:pPr algn="l">
               <a:spcAft>
-                <a:spcPts val="1000"/>
+                <a:spcPts val="400"/>
               </a:spcAft>
-              <a:defRPr sz="2000">
+              <a:defRPr sz="1200" b="0">
+                <a:solidFill>
+                  <a:srgbClr val="1E2933"/>
+                </a:solidFill>
                 <a:latin typeface="Microsoft YaHei"/>
               </a:defRPr>
             </a:pPr>
             <a:r>
-              <a:t>• StrategyMemory：文件型策略记忆，按 (game_id, phase_id) 索引成功/失败记录</a:t>
-            </a:r>
-          </a:p>
-          <a:p>
-            <a:pPr>
-              <a:spcAft>
-                <a:spcPts val="1000"/>
-              </a:spcAft>
-              <a:defRPr sz="2000">
+              <a:t>世界模型 stale 命中</a:t>
+            </a:r>
+          </a:p>
+        </p:txBody>
+      </p:sp>
+      <p:sp>
+        <p:nvSpPr>
+          <p:cNvPr id="17" name="Rounded Rectangle 16"/>
+          <p:cNvSpPr/>
+          <p:nvPr/>
+        </p:nvSpPr>
+        <p:spPr>
+          <a:xfrm>
+            <a:off x="9326880" y="1371600"/>
+            <a:ext cx="2468880" cy="2011680"/>
+          </a:xfrm>
+          <a:prstGeom prst="roundRect">
+            <a:avLst/>
+          </a:prstGeom>
+          <a:solidFill>
+            <a:srgbClr val="FFFFFF"/>
+          </a:solidFill>
+          <a:ln w="25400">
+            <a:solidFill>
+              <a:srgbClr val="28A745"/>
+            </a:solidFill>
+          </a:ln>
+        </p:spPr>
+        <p:style>
+          <a:lnRef idx="1">
+            <a:schemeClr val="accent1"/>
+          </a:lnRef>
+          <a:fillRef idx="3">
+            <a:schemeClr val="accent1"/>
+          </a:fillRef>
+          <a:effectRef idx="2">
+            <a:schemeClr val="accent1"/>
+          </a:effectRef>
+          <a:fontRef idx="minor">
+            <a:schemeClr val="lt1"/>
+          </a:fontRef>
+        </p:style>
+        <p:txBody>
+          <a:bodyPr rtlCol="0" anchor="ctr"/>
+          <a:lstStyle/>
+          <a:p>
+            <a:pPr algn="ctr"/>
+          </a:p>
+        </p:txBody>
+      </p:sp>
+      <p:sp>
+        <p:nvSpPr>
+          <p:cNvPr id="18" name="Rectangle 17"/>
+          <p:cNvSpPr/>
+          <p:nvPr/>
+        </p:nvSpPr>
+        <p:spPr>
+          <a:xfrm>
+            <a:off x="9326880" y="1371600"/>
+            <a:ext cx="2468880" cy="411480"/>
+          </a:xfrm>
+          <a:prstGeom prst="rect">
+            <a:avLst/>
+          </a:prstGeom>
+          <a:solidFill>
+            <a:srgbClr val="28A745"/>
+          </a:solidFill>
+          <a:ln/>
+        </p:spPr>
+        <p:style>
+          <a:lnRef idx="1">
+            <a:schemeClr val="accent1"/>
+          </a:lnRef>
+          <a:fillRef idx="3">
+            <a:schemeClr val="accent1"/>
+          </a:fillRef>
+          <a:effectRef idx="2">
+            <a:schemeClr val="accent1"/>
+          </a:effectRef>
+          <a:fontRef idx="minor">
+            <a:schemeClr val="lt1"/>
+          </a:fontRef>
+        </p:style>
+        <p:txBody>
+          <a:bodyPr rtlCol="0" anchor="ctr"/>
+          <a:lstStyle/>
+          <a:p>
+            <a:pPr algn="ctr"/>
+          </a:p>
+        </p:txBody>
+      </p:sp>
+      <p:sp>
+        <p:nvSpPr>
+          <p:cNvPr id="19" name="TextBox 18"/>
+          <p:cNvSpPr txBox="1"/>
+          <p:nvPr/>
+        </p:nvSpPr>
+        <p:spPr>
+          <a:xfrm>
+            <a:off x="9400032" y="1444752"/>
+            <a:ext cx="2322576" cy="320040"/>
+          </a:xfrm>
+          <a:prstGeom prst="rect">
+            <a:avLst/>
+          </a:prstGeom>
+          <a:noFill/>
+        </p:spPr>
+        <p:txBody>
+          <a:bodyPr wrap="none">
+            <a:spAutoFit/>
+          </a:bodyPr>
+          <a:lstStyle/>
+          <a:p>
+            <a:pPr algn="l">
+              <a:defRPr sz="1400" b="1">
+                <a:solidFill>
+                  <a:srgbClr val="F3F6F9"/>
+                </a:solidFill>
                 <a:latin typeface="Microsoft YaHei"/>
               </a:defRPr>
             </a:pPr>
             <a:r>
-              <a:t>• 分层规划器 HierarchicalPlanner：L2 云端 API + L1 本地 VLM + L0 规则</a:t>
-            </a:r>
-          </a:p>
-          <a:p>
-            <a:pPr>
+              <a:t>更新产物</a:t>
+            </a:r>
+          </a:p>
+        </p:txBody>
+      </p:sp>
+      <p:sp>
+        <p:nvSpPr>
+          <p:cNvPr id="20" name="TextBox 19"/>
+          <p:cNvSpPr txBox="1"/>
+          <p:nvPr/>
+        </p:nvSpPr>
+        <p:spPr>
+          <a:xfrm>
+            <a:off x="9436607" y="1874519"/>
+            <a:ext cx="2249424" cy="1417320"/>
+          </a:xfrm>
+          <a:prstGeom prst="rect">
+            <a:avLst/>
+          </a:prstGeom>
+          <a:noFill/>
+        </p:spPr>
+        <p:txBody>
+          <a:bodyPr wrap="square">
+            <a:spAutoFit/>
+          </a:bodyPr>
+          <a:lstStyle/>
+          <a:p>
+            <a:pPr algn="l">
               <a:spcAft>
-                <a:spcPts val="1000"/>
+                <a:spcPts val="400"/>
               </a:spcAft>
-              <a:defRPr sz="2000">
+              <a:defRPr sz="1200" b="0">
+                <a:solidFill>
+                  <a:srgbClr val="1E2933"/>
+                </a:solidFill>
                 <a:latin typeface="Microsoft YaHei"/>
               </a:defRPr>
             </a:pPr>
             <a:r>
-              <a:t>• 10 种注册模式：rule / multi / multi-bus / multi-bus-memory / hierarchical / vlm-local 等</a:t>
+              <a:t>参数更新</a:t>
+            </a:r>
+          </a:p>
+          <a:p>
+            <a:pPr algn="l">
+              <a:spcAft>
+                <a:spcPts val="400"/>
+              </a:spcAft>
+              <a:defRPr sz="1200" b="0">
+                <a:solidFill>
+                  <a:srgbClr val="1E2933"/>
+                </a:solidFill>
+                <a:latin typeface="Microsoft YaHei"/>
+              </a:defRPr>
+            </a:pPr>
+            <a:r>
+              <a:t>phase contract</a:t>
+            </a:r>
+          </a:p>
+          <a:p>
+            <a:pPr algn="l">
+              <a:spcAft>
+                <a:spcPts val="400"/>
+              </a:spcAft>
+              <a:defRPr sz="1200" b="0">
+                <a:solidFill>
+                  <a:srgbClr val="1E2933"/>
+                </a:solidFill>
+                <a:latin typeface="Microsoft YaHei"/>
+              </a:defRPr>
+            </a:pPr>
+            <a:r>
+              <a:t>strategy memory</a:t>
+            </a:r>
+          </a:p>
+          <a:p>
+            <a:pPr algn="l">
+              <a:spcAft>
+                <a:spcPts val="400"/>
+              </a:spcAft>
+              <a:defRPr sz="1200" b="0">
+                <a:solidFill>
+                  <a:srgbClr val="1E2933"/>
+                </a:solidFill>
+                <a:latin typeface="Microsoft YaHei"/>
+              </a:defRPr>
+            </a:pPr>
+            <a:r>
+              <a:t>（可选）代码片段</a:t>
+            </a:r>
+          </a:p>
+        </p:txBody>
+      </p:sp>
+      <p:sp>
+        <p:nvSpPr>
+          <p:cNvPr id="21" name="Rounded Rectangle 20"/>
+          <p:cNvSpPr/>
+          <p:nvPr/>
+        </p:nvSpPr>
+        <p:spPr>
+          <a:xfrm>
+            <a:off x="2286000" y="5806440"/>
+            <a:ext cx="7589520" cy="502920"/>
+          </a:xfrm>
+          <a:prstGeom prst="roundRect">
+            <a:avLst/>
+          </a:prstGeom>
+          <a:solidFill>
+            <a:srgbClr val="1E2933"/>
+          </a:solidFill>
+          <a:ln/>
+        </p:spPr>
+        <p:style>
+          <a:lnRef idx="1">
+            <a:schemeClr val="accent1"/>
+          </a:lnRef>
+          <a:fillRef idx="3">
+            <a:schemeClr val="accent1"/>
+          </a:fillRef>
+          <a:effectRef idx="2">
+            <a:schemeClr val="accent1"/>
+          </a:effectRef>
+          <a:fontRef idx="minor">
+            <a:schemeClr val="lt1"/>
+          </a:fontRef>
+        </p:style>
+        <p:txBody>
+          <a:bodyPr rtlCol="0" anchor="ctr"/>
+          <a:lstStyle/>
+          <a:p>
+            <a:pPr algn="ctr"/>
+          </a:p>
+        </p:txBody>
+      </p:sp>
+      <p:sp>
+        <p:nvSpPr>
+          <p:cNvPr id="22" name="TextBox 21"/>
+          <p:cNvSpPr txBox="1"/>
+          <p:nvPr/>
+        </p:nvSpPr>
+        <p:spPr>
+          <a:xfrm>
+            <a:off x="2468880" y="5870448"/>
+            <a:ext cx="7223760" cy="411480"/>
+          </a:xfrm>
+          <a:prstGeom prst="rect">
+            <a:avLst/>
+          </a:prstGeom>
+          <a:noFill/>
+        </p:spPr>
+        <p:txBody>
+          <a:bodyPr wrap="none">
+            <a:spAutoFit/>
+          </a:bodyPr>
+          <a:lstStyle/>
+          <a:p>
+            <a:pPr algn="ctr">
+              <a:defRPr sz="1200" b="0">
+                <a:solidFill>
+                  <a:srgbClr val="F3F6F9"/>
+                </a:solidFill>
+                <a:latin typeface="Microsoft YaHei"/>
+              </a:defRPr>
+            </a:pPr>
+            <a:r>
+              <a:t>AgentBus · Observer → StateMapper → DecisionAnalyst → Verifier → Critic → MemoryCurator</a:t>
+            </a:r>
+          </a:p>
+        </p:txBody>
+      </p:sp>
+      <p:sp>
+        <p:nvSpPr>
+          <p:cNvPr id="23" name="Rectangle 22"/>
+          <p:cNvSpPr/>
+          <p:nvPr/>
+        </p:nvSpPr>
+        <p:spPr>
+          <a:xfrm>
+            <a:off x="0" y="6537960"/>
+            <a:ext cx="12191695" cy="18288"/>
+          </a:xfrm>
+          <a:prstGeom prst="rect">
+            <a:avLst/>
+          </a:prstGeom>
+          <a:solidFill>
+            <a:srgbClr val="0096C7"/>
+          </a:solidFill>
+          <a:ln/>
+        </p:spPr>
+        <p:style>
+          <a:lnRef idx="1">
+            <a:schemeClr val="accent1"/>
+          </a:lnRef>
+          <a:fillRef idx="3">
+            <a:schemeClr val="accent1"/>
+          </a:fillRef>
+          <a:effectRef idx="2">
+            <a:schemeClr val="accent1"/>
+          </a:effectRef>
+          <a:fontRef idx="minor">
+            <a:schemeClr val="lt1"/>
+          </a:fontRef>
+        </p:style>
+        <p:txBody>
+          <a:bodyPr rtlCol="0" anchor="ctr"/>
+          <a:lstStyle/>
+          <a:p>
+            <a:pPr algn="ctr"/>
+          </a:p>
+        </p:txBody>
+      </p:sp>
+      <p:sp>
+        <p:nvSpPr>
+          <p:cNvPr id="24" name="TextBox 23"/>
+          <p:cNvSpPr txBox="1"/>
+          <p:nvPr/>
+        </p:nvSpPr>
+        <p:spPr>
+          <a:xfrm>
+            <a:off x="457200" y="6583680"/>
+            <a:ext cx="3657600" cy="228600"/>
+          </a:xfrm>
+          <a:prstGeom prst="rect">
+            <a:avLst/>
+          </a:prstGeom>
+          <a:noFill/>
+        </p:spPr>
+        <p:txBody>
+          <a:bodyPr wrap="none">
+            <a:spAutoFit/>
+          </a:bodyPr>
+          <a:lstStyle/>
+          <a:p>
+            <a:pPr algn="l">
+              <a:defRPr sz="1000" b="0">
+                <a:solidFill>
+                  <a:srgbClr val="6C757D"/>
+                </a:solidFill>
+                <a:latin typeface="Microsoft YaHei"/>
+              </a:defRPr>
+            </a:pPr>
+            <a:r>
+              <a:t>smallgameagent · LLM/VLM + 规则驱动</a:t>
+            </a:r>
+          </a:p>
+        </p:txBody>
+      </p:sp>
+      <p:sp>
+        <p:nvSpPr>
+          <p:cNvPr id="25" name="TextBox 24"/>
+          <p:cNvSpPr txBox="1"/>
+          <p:nvPr/>
+        </p:nvSpPr>
+        <p:spPr>
+          <a:xfrm>
+            <a:off x="10789920" y="6583680"/>
+            <a:ext cx="914400" cy="228600"/>
+          </a:xfrm>
+          <a:prstGeom prst="rect">
+            <a:avLst/>
+          </a:prstGeom>
+          <a:noFill/>
+        </p:spPr>
+        <p:txBody>
+          <a:bodyPr wrap="none">
+            <a:spAutoFit/>
+          </a:bodyPr>
+          <a:lstStyle/>
+          <a:p>
+            <a:pPr algn="r">
+              <a:defRPr sz="1000" b="0">
+                <a:solidFill>
+                  <a:srgbClr val="6C757D"/>
+                </a:solidFill>
+                <a:latin typeface="Microsoft YaHei"/>
+              </a:defRPr>
+            </a:pPr>
+            <a:r>
+              <a:t>3/11</a:t>
             </a:r>
           </a:p>
         </p:txBody>
@@ -4340,14 +5962,55 @@
       <p:grpSpPr/>
       <p:sp>
         <p:nvSpPr>
-          <p:cNvPr id="2" name="TextBox 1"/>
+          <p:cNvPr id="2" name="Rectangle 1"/>
+          <p:cNvSpPr/>
+          <p:nvPr/>
+        </p:nvSpPr>
+        <p:spPr>
+          <a:xfrm>
+            <a:off x="0" y="0"/>
+            <a:ext cx="12191695" cy="960120"/>
+          </a:xfrm>
+          <a:prstGeom prst="rect">
+            <a:avLst/>
+          </a:prstGeom>
+          <a:solidFill>
+            <a:srgbClr val="1A237E"/>
+          </a:solidFill>
+          <a:ln/>
+        </p:spPr>
+        <p:style>
+          <a:lnRef idx="1">
+            <a:schemeClr val="accent1"/>
+          </a:lnRef>
+          <a:fillRef idx="3">
+            <a:schemeClr val="accent1"/>
+          </a:fillRef>
+          <a:effectRef idx="2">
+            <a:schemeClr val="accent1"/>
+          </a:effectRef>
+          <a:fontRef idx="minor">
+            <a:schemeClr val="lt1"/>
+          </a:fontRef>
+        </p:style>
+        <p:txBody>
+          <a:bodyPr rtlCol="0" anchor="ctr"/>
+          <a:lstStyle/>
+          <a:p>
+            <a:pPr algn="ctr"/>
+          </a:p>
+        </p:txBody>
+      </p:sp>
+      <p:sp>
+        <p:nvSpPr>
+          <p:cNvPr id="3" name="TextBox 2"/>
           <p:cNvSpPr txBox="1"/>
           <p:nvPr/>
         </p:nvSpPr>
         <p:spPr>
           <a:xfrm>
-            <a:off x="457200" y="365760"/>
-            <a:ext cx="11247120" cy="822960"/>
+            <a:off x="457200" y="228600"/>
+            <a:ext cx="11247120" cy="548640"/>
           </a:xfrm>
           <a:prstGeom prst="rect">
             <a:avLst/>
@@ -4360,28 +6023,31 @@
           </a:bodyPr>
           <a:lstStyle/>
           <a:p>
-            <a:pPr>
-              <a:defRPr sz="3200" b="1">
+            <a:pPr algn="l">
+              <a:defRPr sz="3000" b="1">
+                <a:solidFill>
+                  <a:srgbClr val="F3F6F9"/>
+                </a:solidFill>
                 <a:latin typeface="Microsoft YaHei"/>
               </a:defRPr>
             </a:pPr>
             <a:r>
-              <a:t>记忆读回 A/B 验证</a:t>
+              <a:t>全游戏 × 多模式批量矩阵（节选）</a:t>
             </a:r>
           </a:p>
         </p:txBody>
       </p:sp>
       <p:graphicFrame>
         <p:nvGraphicFramePr>
-          <p:cNvPr id="3" name="Table 2"/>
+          <p:cNvPr id="4" name="Table 3"/>
           <p:cNvGraphicFramePr>
             <a:graphicFrameLocks noGrp="1"/>
           </p:cNvGraphicFramePr>
           <p:nvPr/>
         </p:nvGraphicFramePr>
         <p:xfrm>
-          <a:off x="457200" y="1371600"/>
-          <a:ext cx="11247120" cy="5029200"/>
+          <a:off x="457200" y="1143000"/>
+          <a:ext cx="11247120" cy="5120640"/>
         </p:xfrm>
         <a:graphic>
           <a:graphicData uri="http://schemas.openxmlformats.org/drawingml/2006/table">
@@ -4390,25 +6056,300 @@
                 <a:tableStyleId>{5C22544A-7EE6-4342-B048-85BDC9FD1C3A}</a:tableStyleId>
               </a:tblPr>
               <a:tblGrid>
-                <a:gridCol w="2249424"/>
-                <a:gridCol w="2249424"/>
-                <a:gridCol w="2249424"/>
-                <a:gridCol w="2249424"/>
-                <a:gridCol w="2249424"/>
+                <a:gridCol w="1874520"/>
+                <a:gridCol w="1874520"/>
+                <a:gridCol w="1874520"/>
+                <a:gridCol w="1874520"/>
+                <a:gridCol w="1874520"/>
+                <a:gridCol w="1874520"/>
               </a:tblGrid>
-              <a:tr h="1257300">
-                <a:tc>
-                  <a:txBody>
-                    <a:bodyPr/>
-                    <a:lstStyle/>
-                    <a:p>
-                      <a:pPr>
-                        <a:defRPr sz="1600" b="1">
-                          <a:latin typeface="Microsoft YaHei"/>
-                        </a:defRPr>
-                      </a:pPr>
-                      <a:r>
-                        <a:t>阶段</a:t>
+              <a:tr h="640080">
+                <a:tc>
+                  <a:txBody>
+                    <a:bodyPr/>
+                    <a:lstStyle/>
+                    <a:p>
+                      <a:pPr algn="ctr">
+                        <a:defRPr sz="1300" b="1">
+                          <a:solidFill>
+                            <a:srgbClr val="F3F6F9"/>
+                          </a:solidFill>
+                          <a:latin typeface="Microsoft YaHei"/>
+                        </a:defRPr>
+                      </a:pPr>
+                      <a:r>
+                        <a:t>游戏</a:t>
+                      </a:r>
+                    </a:p>
+                  </a:txBody>
+                  <a:tcPr>
+                    <a:solidFill>
+                      <a:srgbClr val="1A237E"/>
+                    </a:solidFill>
+                  </a:tcPr>
+                </a:tc>
+                <a:tc>
+                  <a:txBody>
+                    <a:bodyPr/>
+                    <a:lstStyle/>
+                    <a:p>
+                      <a:pPr algn="ctr">
+                        <a:defRPr sz="1300" b="1">
+                          <a:solidFill>
+                            <a:srgbClr val="F3F6F9"/>
+                          </a:solidFill>
+                          <a:latin typeface="Microsoft YaHei"/>
+                        </a:defRPr>
+                      </a:pPr>
+                      <a:r>
+                        <a:t>类型</a:t>
+                      </a:r>
+                    </a:p>
+                  </a:txBody>
+                  <a:tcPr>
+                    <a:solidFill>
+                      <a:srgbClr val="1A237E"/>
+                    </a:solidFill>
+                  </a:tcPr>
+                </a:tc>
+                <a:tc>
+                  <a:txBody>
+                    <a:bodyPr/>
+                    <a:lstStyle/>
+                    <a:p>
+                      <a:pPr algn="ctr">
+                        <a:defRPr sz="1300" b="1">
+                          <a:solidFill>
+                            <a:srgbClr val="F3F6F9"/>
+                          </a:solidFill>
+                          <a:latin typeface="Microsoft YaHei"/>
+                        </a:defRPr>
+                      </a:pPr>
+                      <a:r>
+                        <a:t>rule</a:t>
+                      </a:r>
+                    </a:p>
+                  </a:txBody>
+                  <a:tcPr>
+                    <a:solidFill>
+                      <a:srgbClr val="1A237E"/>
+                    </a:solidFill>
+                  </a:tcPr>
+                </a:tc>
+                <a:tc>
+                  <a:txBody>
+                    <a:bodyPr/>
+                    <a:lstStyle/>
+                    <a:p>
+                      <a:pPr algn="ctr">
+                        <a:defRPr sz="1300" b="1">
+                          <a:solidFill>
+                            <a:srgbClr val="F3F6F9"/>
+                          </a:solidFill>
+                          <a:latin typeface="Microsoft YaHei"/>
+                        </a:defRPr>
+                      </a:pPr>
+                      <a:r>
+                        <a:t>multi-bus-memory</a:t>
+                      </a:r>
+                    </a:p>
+                  </a:txBody>
+                  <a:tcPr>
+                    <a:solidFill>
+                      <a:srgbClr val="1A237E"/>
+                    </a:solidFill>
+                  </a:tcPr>
+                </a:tc>
+                <a:tc>
+                  <a:txBody>
+                    <a:bodyPr/>
+                    <a:lstStyle/>
+                    <a:p>
+                      <a:pPr algn="ctr">
+                        <a:defRPr sz="1300" b="1">
+                          <a:solidFill>
+                            <a:srgbClr val="F3F6F9"/>
+                          </a:solidFill>
+                          <a:latin typeface="Microsoft YaHei"/>
+                        </a:defRPr>
+                      </a:pPr>
+                      <a:r>
+                        <a:t>multi-bus</a:t>
+                      </a:r>
+                    </a:p>
+                  </a:txBody>
+                  <a:tcPr>
+                    <a:solidFill>
+                      <a:srgbClr val="1A237E"/>
+                    </a:solidFill>
+                  </a:tcPr>
+                </a:tc>
+                <a:tc>
+                  <a:txBody>
+                    <a:bodyPr/>
+                    <a:lstStyle/>
+                    <a:p>
+                      <a:pPr algn="ctr">
+                        <a:defRPr sz="1300" b="1">
+                          <a:solidFill>
+                            <a:srgbClr val="F3F6F9"/>
+                          </a:solidFill>
+                          <a:latin typeface="Microsoft YaHei"/>
+                        </a:defRPr>
+                      </a:pPr>
+                      <a:r>
+                        <a:t>hierarchical</a:t>
+                      </a:r>
+                    </a:p>
+                  </a:txBody>
+                  <a:tcPr>
+                    <a:solidFill>
+                      <a:srgbClr val="1A237E"/>
+                    </a:solidFill>
+                  </a:tcPr>
+                </a:tc>
+              </a:tr>
+              <a:tr h="640080">
+                <a:tc>
+                  <a:txBody>
+                    <a:bodyPr/>
+                    <a:lstStyle/>
+                    <a:p>
+                      <a:pPr algn="ctr">
+                        <a:defRPr sz="1200">
+                          <a:latin typeface="Microsoft YaHei"/>
+                        </a:defRPr>
+                      </a:pPr>
+                      <a:r>
+                        <a:t>00461 塔防</a:t>
+                      </a:r>
+                    </a:p>
+                  </a:txBody>
+                  <a:tcPr>
+                    <a:solidFill>
+                      <a:srgbClr val="F3F6F9"/>
+                    </a:solidFill>
+                  </a:tcPr>
+                </a:tc>
+                <a:tc>
+                  <a:txBody>
+                    <a:bodyPr/>
+                    <a:lstStyle/>
+                    <a:p>
+                      <a:pPr algn="ctr">
+                        <a:defRPr sz="1200">
+                          <a:latin typeface="Microsoft YaHei"/>
+                        </a:defRPr>
+                      </a:pPr>
+                      <a:r>
+                        <a:t>joystick</a:t>
+                      </a:r>
+                    </a:p>
+                  </a:txBody>
+                  <a:tcPr>
+                    <a:solidFill>
+                      <a:srgbClr val="F3F6F9"/>
+                    </a:solidFill>
+                  </a:tcPr>
+                </a:tc>
+                <a:tc>
+                  <a:txBody>
+                    <a:bodyPr/>
+                    <a:lstStyle/>
+                    <a:p>
+                      <a:pPr algn="ctr">
+                        <a:defRPr sz="1200">
+                          <a:latin typeface="Microsoft YaHei"/>
+                        </a:defRPr>
+                      </a:pPr>
+                      <a:r>
+                        <a:t>0.113</a:t>
+                      </a:r>
+                    </a:p>
+                  </a:txBody>
+                  <a:tcPr>
+                    <a:solidFill>
+                      <a:srgbClr val="F3F6F9"/>
+                    </a:solidFill>
+                  </a:tcPr>
+                </a:tc>
+                <a:tc>
+                  <a:txBody>
+                    <a:bodyPr/>
+                    <a:lstStyle/>
+                    <a:p>
+                      <a:pPr algn="ctr">
+                        <a:defRPr sz="1200">
+                          <a:latin typeface="Microsoft YaHei"/>
+                        </a:defRPr>
+                      </a:pPr>
+                      <a:r>
+                        <a:t>0.300</a:t>
+                      </a:r>
+                    </a:p>
+                  </a:txBody>
+                  <a:tcPr>
+                    <a:solidFill>
+                      <a:srgbClr val="F3F6F9"/>
+                    </a:solidFill>
+                  </a:tcPr>
+                </a:tc>
+                <a:tc>
+                  <a:txBody>
+                    <a:bodyPr/>
+                    <a:lstStyle/>
+                    <a:p>
+                      <a:pPr algn="ctr">
+                        <a:defRPr sz="1200">
+                          <a:latin typeface="Microsoft YaHei"/>
+                        </a:defRPr>
+                      </a:pPr>
+                      <a:r>
+                        <a:t>0.297</a:t>
+                      </a:r>
+                    </a:p>
+                  </a:txBody>
+                  <a:tcPr>
+                    <a:solidFill>
+                      <a:srgbClr val="F3F6F9"/>
+                    </a:solidFill>
+                  </a:tcPr>
+                </a:tc>
+                <a:tc>
+                  <a:txBody>
+                    <a:bodyPr/>
+                    <a:lstStyle/>
+                    <a:p>
+                      <a:pPr algn="ctr">
+                        <a:defRPr sz="1200">
+                          <a:latin typeface="Microsoft YaHei"/>
+                        </a:defRPr>
+                      </a:pPr>
+                      <a:r>
+                        <a:t>0.150</a:t>
+                      </a:r>
+                    </a:p>
+                  </a:txBody>
+                  <a:tcPr>
+                    <a:solidFill>
+                      <a:srgbClr val="F3F6F9"/>
+                    </a:solidFill>
+                  </a:tcPr>
+                </a:tc>
+              </a:tr>
+              <a:tr h="640080">
+                <a:tc>
+                  <a:txBody>
+                    <a:bodyPr/>
+                    <a:lstStyle/>
+                    <a:p>
+                      <a:pPr algn="ctr">
+                        <a:defRPr sz="1200">
+                          <a:latin typeface="Microsoft YaHei"/>
+                        </a:defRPr>
+                      </a:pPr>
+                      <a:r>
+                        <a:t>00483 吸沙抽水</a:t>
                       </a:r>
                     </a:p>
                   </a:txBody>
@@ -4419,13 +6360,13 @@
                     <a:bodyPr/>
                     <a:lstStyle/>
                     <a:p>
-                      <a:pPr>
-                        <a:defRPr sz="1600" b="1">
-                          <a:latin typeface="Microsoft YaHei"/>
-                        </a:defRPr>
-                      </a:pPr>
-                      <a:r>
-                        <a:t>composite</a:t>
+                      <a:pPr algn="ctr">
+                        <a:defRPr sz="1200">
+                          <a:latin typeface="Microsoft YaHei"/>
+                        </a:defRPr>
+                      </a:pPr>
+                      <a:r>
+                        <a:t>joystick</a:t>
                       </a:r>
                     </a:p>
                   </a:txBody>
@@ -4436,13 +6377,13 @@
                     <a:bodyPr/>
                     <a:lstStyle/>
                     <a:p>
-                      <a:pPr>
-                        <a:defRPr sz="1600" b="1">
-                          <a:latin typeface="Microsoft YaHei"/>
-                        </a:defRPr>
-                      </a:pPr>
-                      <a:r>
-                        <a:t>memory_hits</a:t>
+                      <a:pPr algn="ctr">
+                        <a:defRPr sz="1200">
+                          <a:latin typeface="Microsoft YaHei"/>
+                        </a:defRPr>
+                      </a:pPr>
+                      <a:r>
+                        <a:t>0.139</a:t>
                       </a:r>
                     </a:p>
                   </a:txBody>
@@ -4453,13 +6394,13 @@
                     <a:bodyPr/>
                     <a:lstStyle/>
                     <a:p>
-                      <a:pPr>
-                        <a:defRPr sz="1600" b="1">
-                          <a:latin typeface="Microsoft YaHei"/>
-                        </a:defRPr>
-                      </a:pPr>
-                      <a:r>
-                        <a:t>wm_violations</a:t>
+                      <a:pPr algn="ctr">
+                        <a:defRPr sz="1200">
+                          <a:latin typeface="Microsoft YaHei"/>
+                        </a:defRPr>
+                      </a:pPr>
+                      <a:r>
+                        <a:t>0.300</a:t>
                       </a:r>
                     </a:p>
                   </a:txBody>
@@ -4470,32 +6411,177 @@
                     <a:bodyPr/>
                     <a:lstStyle/>
                     <a:p>
-                      <a:pPr>
-                        <a:defRPr sz="1600" b="1">
-                          <a:latin typeface="Microsoft YaHei"/>
-                        </a:defRPr>
-                      </a:pPr>
-                      <a:r>
-                        <a:t>主要决策来源</a:t>
+                      <a:pPr algn="ctr">
+                        <a:defRPr sz="1200">
+                          <a:latin typeface="Microsoft YaHei"/>
+                        </a:defRPr>
+                      </a:pPr>
+                      <a:r>
+                        <a:t>0.300</a:t>
                       </a:r>
                     </a:p>
                   </a:txBody>
                   <a:tcPr/>
                 </a:tc>
+                <a:tc>
+                  <a:txBody>
+                    <a:bodyPr/>
+                    <a:lstStyle/>
+                    <a:p>
+                      <a:pPr algn="ctr">
+                        <a:defRPr sz="1200">
+                          <a:latin typeface="Microsoft YaHei"/>
+                        </a:defRPr>
+                      </a:pPr>
+                      <a:r>
+                        <a:t>0.150</a:t>
+                      </a:r>
+                    </a:p>
+                  </a:txBody>
+                  <a:tcPr/>
+                </a:tc>
               </a:tr>
-              <a:tr h="1257300">
-                <a:tc>
-                  <a:txBody>
-                    <a:bodyPr/>
-                    <a:lstStyle/>
-                    <a:p>
-                      <a:pPr>
-                        <a:defRPr sz="1400">
-                          <a:latin typeface="Microsoft YaHei"/>
-                        </a:defRPr>
-                      </a:pPr>
-                      <a:r>
-                        <a:t>phase1_write</a:t>
+              <a:tr h="640080">
+                <a:tc>
+                  <a:txBody>
+                    <a:bodyPr/>
+                    <a:lstStyle/>
+                    <a:p>
+                      <a:pPr algn="ctr">
+                        <a:defRPr sz="1200">
+                          <a:latin typeface="Microsoft YaHei"/>
+                        </a:defRPr>
+                      </a:pPr>
+                      <a:r>
+                        <a:t>00496 电网抓丧尸</a:t>
+                      </a:r>
+                    </a:p>
+                  </a:txBody>
+                  <a:tcPr>
+                    <a:solidFill>
+                      <a:srgbClr val="F3F6F9"/>
+                    </a:solidFill>
+                  </a:tcPr>
+                </a:tc>
+                <a:tc>
+                  <a:txBody>
+                    <a:bodyPr/>
+                    <a:lstStyle/>
+                    <a:p>
+                      <a:pPr algn="ctr">
+                        <a:defRPr sz="1200">
+                          <a:latin typeface="Microsoft YaHei"/>
+                        </a:defRPr>
+                      </a:pPr>
+                      <a:r>
+                        <a:t>joystick</a:t>
+                      </a:r>
+                    </a:p>
+                  </a:txBody>
+                  <a:tcPr>
+                    <a:solidFill>
+                      <a:srgbClr val="F3F6F9"/>
+                    </a:solidFill>
+                  </a:tcPr>
+                </a:tc>
+                <a:tc>
+                  <a:txBody>
+                    <a:bodyPr/>
+                    <a:lstStyle/>
+                    <a:p>
+                      <a:pPr algn="ctr">
+                        <a:defRPr sz="1200">
+                          <a:latin typeface="Microsoft YaHei"/>
+                        </a:defRPr>
+                      </a:pPr>
+                      <a:r>
+                        <a:t>0.275</a:t>
+                      </a:r>
+                    </a:p>
+                  </a:txBody>
+                  <a:tcPr>
+                    <a:solidFill>
+                      <a:srgbClr val="F3F6F9"/>
+                    </a:solidFill>
+                  </a:tcPr>
+                </a:tc>
+                <a:tc>
+                  <a:txBody>
+                    <a:bodyPr/>
+                    <a:lstStyle/>
+                    <a:p>
+                      <a:pPr algn="ctr">
+                        <a:defRPr sz="1200">
+                          <a:latin typeface="Microsoft YaHei"/>
+                        </a:defRPr>
+                      </a:pPr>
+                      <a:r>
+                        <a:t>0.150</a:t>
+                      </a:r>
+                    </a:p>
+                  </a:txBody>
+                  <a:tcPr>
+                    <a:solidFill>
+                      <a:srgbClr val="F3F6F9"/>
+                    </a:solidFill>
+                  </a:tcPr>
+                </a:tc>
+                <a:tc>
+                  <a:txBody>
+                    <a:bodyPr/>
+                    <a:lstStyle/>
+                    <a:p>
+                      <a:pPr algn="ctr">
+                        <a:defRPr sz="1200">
+                          <a:latin typeface="Microsoft YaHei"/>
+                        </a:defRPr>
+                      </a:pPr>
+                      <a:r>
+                        <a:t>0.150</a:t>
+                      </a:r>
+                    </a:p>
+                  </a:txBody>
+                  <a:tcPr>
+                    <a:solidFill>
+                      <a:srgbClr val="F3F6F9"/>
+                    </a:solidFill>
+                  </a:tcPr>
+                </a:tc>
+                <a:tc>
+                  <a:txBody>
+                    <a:bodyPr/>
+                    <a:lstStyle/>
+                    <a:p>
+                      <a:pPr algn="ctr">
+                        <a:defRPr sz="1200">
+                          <a:latin typeface="Microsoft YaHei"/>
+                        </a:defRPr>
+                      </a:pPr>
+                      <a:r>
+                        <a:t>0.150</a:t>
+                      </a:r>
+                    </a:p>
+                  </a:txBody>
+                  <a:tcPr>
+                    <a:solidFill>
+                      <a:srgbClr val="F3F6F9"/>
+                    </a:solidFill>
+                  </a:tcPr>
+                </a:tc>
+              </a:tr>
+              <a:tr h="640080">
+                <a:tc>
+                  <a:txBody>
+                    <a:bodyPr/>
+                    <a:lstStyle/>
+                    <a:p>
+                      <a:pPr algn="ctr">
+                        <a:defRPr sz="1200">
+                          <a:latin typeface="Microsoft YaHei"/>
+                        </a:defRPr>
+                      </a:pPr>
+                      <a:r>
+                        <a:t>00522 地下炸矿</a:t>
                       </a:r>
                     </a:p>
                   </a:txBody>
@@ -4506,13 +6592,13 @@
                     <a:bodyPr/>
                     <a:lstStyle/>
                     <a:p>
-                      <a:pPr>
-                        <a:defRPr sz="1400">
-                          <a:latin typeface="Microsoft YaHei"/>
-                        </a:defRPr>
-                      </a:pPr>
-                      <a:r>
-                        <a:t>0.150</a:t>
+                      <a:pPr algn="ctr">
+                        <a:defRPr sz="1200">
+                          <a:latin typeface="Microsoft YaHei"/>
+                        </a:defRPr>
+                      </a:pPr>
+                      <a:r>
+                        <a:t>joystick</a:t>
                       </a:r>
                     </a:p>
                   </a:txBody>
@@ -4523,13 +6609,13 @@
                     <a:bodyPr/>
                     <a:lstStyle/>
                     <a:p>
-                      <a:pPr>
-                        <a:defRPr sz="1400">
-                          <a:latin typeface="Microsoft YaHei"/>
-                        </a:defRPr>
-                      </a:pPr>
-                      <a:r>
-                        <a:t>92</a:t>
+                      <a:pPr algn="ctr">
+                        <a:defRPr sz="1200">
+                          <a:latin typeface="Microsoft YaHei"/>
+                        </a:defRPr>
+                      </a:pPr>
+                      <a:r>
+                        <a:t>0.215</a:t>
                       </a:r>
                     </a:p>
                   </a:txBody>
@@ -4540,13 +6626,13 @@
                     <a:bodyPr/>
                     <a:lstStyle/>
                     <a:p>
-                      <a:pPr>
-                        <a:defRPr sz="1400">
-                          <a:latin typeface="Microsoft YaHei"/>
-                        </a:defRPr>
-                      </a:pPr>
-                      <a:r>
-                        <a:t>3</a:t>
+                      <a:pPr algn="ctr">
+                        <a:defRPr sz="1200">
+                          <a:latin typeface="Microsoft YaHei"/>
+                        </a:defRPr>
+                      </a:pPr>
+                      <a:r>
+                        <a:t>0.240</a:t>
                       </a:r>
                     </a:p>
                   </a:txBody>
@@ -4557,32 +6643,177 @@
                     <a:bodyPr/>
                     <a:lstStyle/>
                     <a:p>
-                      <a:pPr>
-                        <a:defRPr sz="1400">
-                          <a:latin typeface="Microsoft YaHei"/>
-                        </a:defRPr>
-                      </a:pPr>
-                      <a:r>
-                        <a:t>strategy_memory:23, rule_engine:7</a:t>
+                      <a:pPr algn="ctr">
+                        <a:defRPr sz="1200">
+                          <a:latin typeface="Microsoft YaHei"/>
+                        </a:defRPr>
+                      </a:pPr>
+                      <a:r>
+                        <a:t>0.300</a:t>
                       </a:r>
                     </a:p>
                   </a:txBody>
                   <a:tcPr/>
                 </a:tc>
+                <a:tc>
+                  <a:txBody>
+                    <a:bodyPr/>
+                    <a:lstStyle/>
+                    <a:p>
+                      <a:pPr algn="ctr">
+                        <a:defRPr sz="1200">
+                          <a:latin typeface="Microsoft YaHei"/>
+                        </a:defRPr>
+                      </a:pPr>
+                      <a:r>
+                        <a:t>—</a:t>
+                      </a:r>
+                    </a:p>
+                  </a:txBody>
+                  <a:tcPr/>
+                </a:tc>
               </a:tr>
-              <a:tr h="1257300">
-                <a:tc>
-                  <a:txBody>
-                    <a:bodyPr/>
-                    <a:lstStyle/>
-                    <a:p>
-                      <a:pPr>
-                        <a:defRPr sz="1400">
-                          <a:latin typeface="Microsoft YaHei"/>
-                        </a:defRPr>
-                      </a:pPr>
-                      <a:r>
-                        <a:t>phase2_read</a:t>
+              <a:tr h="640080">
+                <a:tc>
+                  <a:txBody>
+                    <a:bodyPr/>
+                    <a:lstStyle/>
+                    <a:p>
+                      <a:pPr algn="ctr">
+                        <a:defRPr sz="1200">
+                          <a:latin typeface="Microsoft YaHei"/>
+                        </a:defRPr>
+                      </a:pPr>
+                      <a:r>
+                        <a:t>00382 低坑杀鲨鱼</a:t>
+                      </a:r>
+                    </a:p>
+                  </a:txBody>
+                  <a:tcPr>
+                    <a:solidFill>
+                      <a:srgbClr val="F3F6F9"/>
+                    </a:solidFill>
+                  </a:tcPr>
+                </a:tc>
+                <a:tc>
+                  <a:txBody>
+                    <a:bodyPr/>
+                    <a:lstStyle/>
+                    <a:p>
+                      <a:pPr algn="ctr">
+                        <a:defRPr sz="1200">
+                          <a:latin typeface="Microsoft YaHei"/>
+                        </a:defRPr>
+                      </a:pPr>
+                      <a:r>
+                        <a:t>tap-only</a:t>
+                      </a:r>
+                    </a:p>
+                  </a:txBody>
+                  <a:tcPr>
+                    <a:solidFill>
+                      <a:srgbClr val="F3F6F9"/>
+                    </a:solidFill>
+                  </a:tcPr>
+                </a:tc>
+                <a:tc>
+                  <a:txBody>
+                    <a:bodyPr/>
+                    <a:lstStyle/>
+                    <a:p>
+                      <a:pPr algn="ctr">
+                        <a:defRPr sz="1200">
+                          <a:latin typeface="Microsoft YaHei"/>
+                        </a:defRPr>
+                      </a:pPr>
+                      <a:r>
+                        <a:t>0.300</a:t>
+                      </a:r>
+                    </a:p>
+                  </a:txBody>
+                  <a:tcPr>
+                    <a:solidFill>
+                      <a:srgbClr val="F3F6F9"/>
+                    </a:solidFill>
+                  </a:tcPr>
+                </a:tc>
+                <a:tc>
+                  <a:txBody>
+                    <a:bodyPr/>
+                    <a:lstStyle/>
+                    <a:p>
+                      <a:pPr algn="ctr">
+                        <a:defRPr sz="1200">
+                          <a:latin typeface="Microsoft YaHei"/>
+                        </a:defRPr>
+                      </a:pPr>
+                      <a:r>
+                        <a:t>0.300</a:t>
+                      </a:r>
+                    </a:p>
+                  </a:txBody>
+                  <a:tcPr>
+                    <a:solidFill>
+                      <a:srgbClr val="F3F6F9"/>
+                    </a:solidFill>
+                  </a:tcPr>
+                </a:tc>
+                <a:tc>
+                  <a:txBody>
+                    <a:bodyPr/>
+                    <a:lstStyle/>
+                    <a:p>
+                      <a:pPr algn="ctr">
+                        <a:defRPr sz="1200">
+                          <a:latin typeface="Microsoft YaHei"/>
+                        </a:defRPr>
+                      </a:pPr>
+                      <a:r>
+                        <a:t>—</a:t>
+                      </a:r>
+                    </a:p>
+                  </a:txBody>
+                  <a:tcPr>
+                    <a:solidFill>
+                      <a:srgbClr val="F3F6F9"/>
+                    </a:solidFill>
+                  </a:tcPr>
+                </a:tc>
+                <a:tc>
+                  <a:txBody>
+                    <a:bodyPr/>
+                    <a:lstStyle/>
+                    <a:p>
+                      <a:pPr algn="ctr">
+                        <a:defRPr sz="1200">
+                          <a:latin typeface="Microsoft YaHei"/>
+                        </a:defRPr>
+                      </a:pPr>
+                      <a:r>
+                        <a:t>—</a:t>
+                      </a:r>
+                    </a:p>
+                  </a:txBody>
+                  <a:tcPr>
+                    <a:solidFill>
+                      <a:srgbClr val="F3F6F9"/>
+                    </a:solidFill>
+                  </a:tcPr>
+                </a:tc>
+              </a:tr>
+              <a:tr h="640080">
+                <a:tc>
+                  <a:txBody>
+                    <a:bodyPr/>
+                    <a:lstStyle/>
+                    <a:p>
+                      <a:pPr algn="ctr">
+                        <a:defRPr sz="1200">
+                          <a:latin typeface="Microsoft YaHei"/>
+                        </a:defRPr>
+                      </a:pPr>
+                      <a:r>
+                        <a:t>00594 破石收水</a:t>
                       </a:r>
                     </a:p>
                   </a:txBody>
@@ -4593,8 +6824,25 @@
                     <a:bodyPr/>
                     <a:lstStyle/>
                     <a:p>
-                      <a:pPr>
-                        <a:defRPr sz="1400">
+                      <a:pPr algn="ctr">
+                        <a:defRPr sz="1200">
+                          <a:latin typeface="Microsoft YaHei"/>
+                        </a:defRPr>
+                      </a:pPr>
+                      <a:r>
+                        <a:t>tap-only</a:t>
+                      </a:r>
+                    </a:p>
+                  </a:txBody>
+                  <a:tcPr/>
+                </a:tc>
+                <a:tc>
+                  <a:txBody>
+                    <a:bodyPr/>
+                    <a:lstStyle/>
+                    <a:p>
+                      <a:pPr algn="ctr">
+                        <a:defRPr sz="1200">
                           <a:latin typeface="Microsoft YaHei"/>
                         </a:defRPr>
                       </a:pPr>
@@ -4610,13 +6858,13 @@
                     <a:bodyPr/>
                     <a:lstStyle/>
                     <a:p>
-                      <a:pPr>
-                        <a:defRPr sz="1400">
-                          <a:latin typeface="Microsoft YaHei"/>
-                        </a:defRPr>
-                      </a:pPr>
-                      <a:r>
-                        <a:t>116</a:t>
+                      <a:pPr algn="ctr">
+                        <a:defRPr sz="1200">
+                          <a:latin typeface="Microsoft YaHei"/>
+                        </a:defRPr>
+                      </a:pPr>
+                      <a:r>
+                        <a:t>0.300</a:t>
                       </a:r>
                     </a:p>
                   </a:txBody>
@@ -4627,13 +6875,13 @@
                     <a:bodyPr/>
                     <a:lstStyle/>
                     <a:p>
-                      <a:pPr>
-                        <a:defRPr sz="1400">
-                          <a:latin typeface="Microsoft YaHei"/>
-                        </a:defRPr>
-                      </a:pPr>
-                      <a:r>
-                        <a:t>0</a:t>
+                      <a:pPr algn="ctr">
+                        <a:defRPr sz="1200">
+                          <a:latin typeface="Microsoft YaHei"/>
+                        </a:defRPr>
+                      </a:pPr>
+                      <a:r>
+                        <a:t>—</a:t>
                       </a:r>
                     </a:p>
                   </a:txBody>
@@ -4644,110 +6892,264 @@
                     <a:bodyPr/>
                     <a:lstStyle/>
                     <a:p>
-                      <a:pPr>
-                        <a:defRPr sz="1400">
-                          <a:latin typeface="Microsoft YaHei"/>
-                        </a:defRPr>
-                      </a:pPr>
-                      <a:r>
-                        <a:t>strategy_memory:29, rule_engine:1</a:t>
+                      <a:pPr algn="ctr">
+                        <a:defRPr sz="1200">
+                          <a:latin typeface="Microsoft YaHei"/>
+                        </a:defRPr>
+                      </a:pPr>
+                      <a:r>
+                        <a:t>—</a:t>
                       </a:r>
                     </a:p>
                   </a:txBody>
                   <a:tcPr/>
                 </a:tc>
               </a:tr>
-              <a:tr h="1257300">
-                <a:tc>
-                  <a:txBody>
-                    <a:bodyPr/>
-                    <a:lstStyle/>
-                    <a:p>
-                      <a:pPr>
-                        <a:defRPr sz="1400">
-                          <a:latin typeface="Microsoft YaHei"/>
-                        </a:defRPr>
-                      </a:pPr>
-                      <a:r>
-                        <a:t>control_no_memory</a:t>
-                      </a:r>
-                    </a:p>
-                  </a:txBody>
-                  <a:tcPr/>
-                </a:tc>
-                <a:tc>
-                  <a:txBody>
-                    <a:bodyPr/>
-                    <a:lstStyle/>
-                    <a:p>
-                      <a:pPr>
-                        <a:defRPr sz="1400">
-                          <a:latin typeface="Microsoft YaHei"/>
-                        </a:defRPr>
-                      </a:pPr>
-                      <a:r>
-                        <a:t>0.150</a:t>
-                      </a:r>
-                    </a:p>
-                  </a:txBody>
-                  <a:tcPr/>
-                </a:tc>
-                <a:tc>
-                  <a:txBody>
-                    <a:bodyPr/>
-                    <a:lstStyle/>
-                    <a:p>
-                      <a:pPr>
-                        <a:defRPr sz="1400">
-                          <a:latin typeface="Microsoft YaHei"/>
-                        </a:defRPr>
-                      </a:pPr>
-                      <a:r>
-                        <a:t>0</a:t>
-                      </a:r>
-                    </a:p>
-                  </a:txBody>
-                  <a:tcPr/>
-                </a:tc>
-                <a:tc>
-                  <a:txBody>
-                    <a:bodyPr/>
-                    <a:lstStyle/>
-                    <a:p>
-                      <a:pPr>
-                        <a:defRPr sz="1400">
-                          <a:latin typeface="Microsoft YaHei"/>
-                        </a:defRPr>
-                      </a:pPr>
-                      <a:r>
-                        <a:t>3</a:t>
-                      </a:r>
-                    </a:p>
-                  </a:txBody>
-                  <a:tcPr/>
-                </a:tc>
-                <a:tc>
-                  <a:txBody>
-                    <a:bodyPr/>
-                    <a:lstStyle/>
-                    <a:p>
-                      <a:pPr>
-                        <a:defRPr sz="1400">
-                          <a:latin typeface="Microsoft YaHei"/>
-                        </a:defRPr>
-                      </a:pPr>
-                      <a:r>
-                        <a:t>rule_engine:30</a:t>
-                      </a:r>
-                    </a:p>
-                  </a:txBody>
-                  <a:tcPr/>
+              <a:tr h="640080">
+                <a:tc>
+                  <a:txBody>
+                    <a:bodyPr/>
+                    <a:lstStyle/>
+                    <a:p>
+                      <a:pPr algn="ctr">
+                        <a:defRPr sz="1200">
+                          <a:latin typeface="Microsoft YaHei"/>
+                        </a:defRPr>
+                      </a:pPr>
+                      <a:r>
+                        <a:t>00742 加油小镇</a:t>
+                      </a:r>
+                    </a:p>
+                  </a:txBody>
+                  <a:tcPr>
+                    <a:solidFill>
+                      <a:srgbClr val="F3F6F9"/>
+                    </a:solidFill>
+                  </a:tcPr>
+                </a:tc>
+                <a:tc>
+                  <a:txBody>
+                    <a:bodyPr/>
+                    <a:lstStyle/>
+                    <a:p>
+                      <a:pPr algn="ctr">
+                        <a:defRPr sz="1200">
+                          <a:latin typeface="Microsoft YaHei"/>
+                        </a:defRPr>
+                      </a:pPr>
+                      <a:r>
+                        <a:t>tap-only</a:t>
+                      </a:r>
+                    </a:p>
+                  </a:txBody>
+                  <a:tcPr>
+                    <a:solidFill>
+                      <a:srgbClr val="F3F6F9"/>
+                    </a:solidFill>
+                  </a:tcPr>
+                </a:tc>
+                <a:tc>
+                  <a:txBody>
+                    <a:bodyPr/>
+                    <a:lstStyle/>
+                    <a:p>
+                      <a:pPr algn="ctr">
+                        <a:defRPr sz="1200">
+                          <a:latin typeface="Microsoft YaHei"/>
+                        </a:defRPr>
+                      </a:pPr>
+                      <a:r>
+                        <a:t>0.300</a:t>
+                      </a:r>
+                    </a:p>
+                  </a:txBody>
+                  <a:tcPr>
+                    <a:solidFill>
+                      <a:srgbClr val="F3F6F9"/>
+                    </a:solidFill>
+                  </a:tcPr>
+                </a:tc>
+                <a:tc>
+                  <a:txBody>
+                    <a:bodyPr/>
+                    <a:lstStyle/>
+                    <a:p>
+                      <a:pPr algn="ctr">
+                        <a:defRPr sz="1200">
+                          <a:latin typeface="Microsoft YaHei"/>
+                        </a:defRPr>
+                      </a:pPr>
+                      <a:r>
+                        <a:t>0.300</a:t>
+                      </a:r>
+                    </a:p>
+                  </a:txBody>
+                  <a:tcPr>
+                    <a:solidFill>
+                      <a:srgbClr val="F3F6F9"/>
+                    </a:solidFill>
+                  </a:tcPr>
+                </a:tc>
+                <a:tc>
+                  <a:txBody>
+                    <a:bodyPr/>
+                    <a:lstStyle/>
+                    <a:p>
+                      <a:pPr algn="ctr">
+                        <a:defRPr sz="1200">
+                          <a:latin typeface="Microsoft YaHei"/>
+                        </a:defRPr>
+                      </a:pPr>
+                      <a:r>
+                        <a:t>—</a:t>
+                      </a:r>
+                    </a:p>
+                  </a:txBody>
+                  <a:tcPr>
+                    <a:solidFill>
+                      <a:srgbClr val="F3F6F9"/>
+                    </a:solidFill>
+                  </a:tcPr>
+                </a:tc>
+                <a:tc>
+                  <a:txBody>
+                    <a:bodyPr/>
+                    <a:lstStyle/>
+                    <a:p>
+                      <a:pPr algn="ctr">
+                        <a:defRPr sz="1200">
+                          <a:latin typeface="Microsoft YaHei"/>
+                        </a:defRPr>
+                      </a:pPr>
+                      <a:r>
+                        <a:t>—</a:t>
+                      </a:r>
+                    </a:p>
+                  </a:txBody>
+                  <a:tcPr>
+                    <a:solidFill>
+                      <a:srgbClr val="F3F6F9"/>
+                    </a:solidFill>
+                  </a:tcPr>
                 </a:tc>
               </a:tr>
             </a:tbl>
           </a:graphicData>
         </a:graphic>
       </p:graphicFrame>
+      <p:sp>
+        <p:nvSpPr>
+          <p:cNvPr id="5" name="Rectangle 4"/>
+          <p:cNvSpPr/>
+          <p:nvPr/>
+        </p:nvSpPr>
+        <p:spPr>
+          <a:xfrm>
+            <a:off x="0" y="6537960"/>
+            <a:ext cx="12191695" cy="18288"/>
+          </a:xfrm>
+          <a:prstGeom prst="rect">
+            <a:avLst/>
+          </a:prstGeom>
+          <a:solidFill>
+            <a:srgbClr val="0096C7"/>
+          </a:solidFill>
+          <a:ln/>
+        </p:spPr>
+        <p:style>
+          <a:lnRef idx="1">
+            <a:schemeClr val="accent1"/>
+          </a:lnRef>
+          <a:fillRef idx="3">
+            <a:schemeClr val="accent1"/>
+          </a:fillRef>
+          <a:effectRef idx="2">
+            <a:schemeClr val="accent1"/>
+          </a:effectRef>
+          <a:fontRef idx="minor">
+            <a:schemeClr val="lt1"/>
+          </a:fontRef>
+        </p:style>
+        <p:txBody>
+          <a:bodyPr rtlCol="0" anchor="ctr"/>
+          <a:lstStyle/>
+          <a:p>
+            <a:pPr algn="ctr"/>
+          </a:p>
+        </p:txBody>
+      </p:sp>
+      <p:sp>
+        <p:nvSpPr>
+          <p:cNvPr id="6" name="TextBox 5"/>
+          <p:cNvSpPr txBox="1"/>
+          <p:nvPr/>
+        </p:nvSpPr>
+        <p:spPr>
+          <a:xfrm>
+            <a:off x="457200" y="6583680"/>
+            <a:ext cx="3657600" cy="228600"/>
+          </a:xfrm>
+          <a:prstGeom prst="rect">
+            <a:avLst/>
+          </a:prstGeom>
+          <a:noFill/>
+        </p:spPr>
+        <p:txBody>
+          <a:bodyPr wrap="none">
+            <a:spAutoFit/>
+          </a:bodyPr>
+          <a:lstStyle/>
+          <a:p>
+            <a:pPr algn="l">
+              <a:defRPr sz="1000" b="0">
+                <a:solidFill>
+                  <a:srgbClr val="6C757D"/>
+                </a:solidFill>
+                <a:latin typeface="Microsoft YaHei"/>
+              </a:defRPr>
+            </a:pPr>
+            <a:r>
+              <a:t>smallgameagent · LLM/VLM + 规则驱动</a:t>
+            </a:r>
+          </a:p>
+        </p:txBody>
+      </p:sp>
+      <p:sp>
+        <p:nvSpPr>
+          <p:cNvPr id="7" name="TextBox 6"/>
+          <p:cNvSpPr txBox="1"/>
+          <p:nvPr/>
+        </p:nvSpPr>
+        <p:spPr>
+          <a:xfrm>
+            <a:off x="10789920" y="6583680"/>
+            <a:ext cx="914400" cy="228600"/>
+          </a:xfrm>
+          <a:prstGeom prst="rect">
+            <a:avLst/>
+          </a:prstGeom>
+          <a:noFill/>
+        </p:spPr>
+        <p:txBody>
+          <a:bodyPr wrap="none">
+            <a:spAutoFit/>
+          </a:bodyPr>
+          <a:lstStyle/>
+          <a:p>
+            <a:pPr algn="r">
+              <a:defRPr sz="1000" b="0">
+                <a:solidFill>
+                  <a:srgbClr val="6C757D"/>
+                </a:solidFill>
+                <a:latin typeface="Microsoft YaHei"/>
+              </a:defRPr>
+            </a:pPr>
+            <a:r>
+              <a:t>4/11</a:t>
+            </a:r>
+          </a:p>
+        </p:txBody>
+      </p:sp>
     </p:spTree>
   </p:cSld>
   <p:clrMapOvr>
@@ -4768,14 +7170,55 @@
       <p:grpSpPr/>
       <p:sp>
         <p:nvSpPr>
-          <p:cNvPr id="2" name="TextBox 1"/>
+          <p:cNvPr id="2" name="Rectangle 1"/>
+          <p:cNvSpPr/>
+          <p:nvPr/>
+        </p:nvSpPr>
+        <p:spPr>
+          <a:xfrm>
+            <a:off x="0" y="0"/>
+            <a:ext cx="12191695" cy="960120"/>
+          </a:xfrm>
+          <a:prstGeom prst="rect">
+            <a:avLst/>
+          </a:prstGeom>
+          <a:solidFill>
+            <a:srgbClr val="1A237E"/>
+          </a:solidFill>
+          <a:ln/>
+        </p:spPr>
+        <p:style>
+          <a:lnRef idx="1">
+            <a:schemeClr val="accent1"/>
+          </a:lnRef>
+          <a:fillRef idx="3">
+            <a:schemeClr val="accent1"/>
+          </a:fillRef>
+          <a:effectRef idx="2">
+            <a:schemeClr val="accent1"/>
+          </a:effectRef>
+          <a:fontRef idx="minor">
+            <a:schemeClr val="lt1"/>
+          </a:fontRef>
+        </p:style>
+        <p:txBody>
+          <a:bodyPr rtlCol="0" anchor="ctr"/>
+          <a:lstStyle/>
+          <a:p>
+            <a:pPr algn="ctr"/>
+          </a:p>
+        </p:txBody>
+      </p:sp>
+      <p:sp>
+        <p:nvSpPr>
+          <p:cNvPr id="3" name="TextBox 2"/>
           <p:cNvSpPr txBox="1"/>
           <p:nvPr/>
         </p:nvSpPr>
         <p:spPr>
           <a:xfrm>
-            <a:off x="457200" y="365760"/>
-            <a:ext cx="11247120" cy="822960"/>
+            <a:off x="457200" y="228600"/>
+            <a:ext cx="11247120" cy="548640"/>
           </a:xfrm>
           <a:prstGeom prst="rect">
             <a:avLst/>
@@ -4788,28 +7231,31 @@
           </a:bodyPr>
           <a:lstStyle/>
           <a:p>
-            <a:pPr>
-              <a:defRPr sz="3200" b="1">
+            <a:pPr algn="l">
+              <a:defRPr sz="3000" b="1">
+                <a:solidFill>
+                  <a:srgbClr val="F3F6F9"/>
+                </a:solidFill>
                 <a:latin typeface="Microsoft YaHei"/>
               </a:defRPr>
             </a:pPr>
             <a:r>
-              <a:t>全游戏 × 多模式批量矩阵（108 runs）</a:t>
+              <a:t>记忆读回 A/B 验证</a:t>
             </a:r>
           </a:p>
         </p:txBody>
       </p:sp>
       <p:graphicFrame>
         <p:nvGraphicFramePr>
-          <p:cNvPr id="3" name="Table 2"/>
+          <p:cNvPr id="4" name="Table 3"/>
           <p:cNvGraphicFramePr>
             <a:graphicFrameLocks noGrp="1"/>
           </p:cNvGraphicFramePr>
           <p:nvPr/>
         </p:nvGraphicFramePr>
         <p:xfrm>
-          <a:off x="457200" y="1371600"/>
-          <a:ext cx="11247120" cy="5029200"/>
+          <a:off x="457200" y="1143000"/>
+          <a:ext cx="11247120" cy="5120640"/>
         </p:xfrm>
         <a:graphic>
           <a:graphicData uri="http://schemas.openxmlformats.org/drawingml/2006/table">
@@ -4818,25 +7264,300 @@
                 <a:tableStyleId>{5C22544A-7EE6-4342-B048-85BDC9FD1C3A}</a:tableStyleId>
               </a:tblPr>
               <a:tblGrid>
-                <a:gridCol w="2249424"/>
-                <a:gridCol w="2249424"/>
-                <a:gridCol w="2249424"/>
-                <a:gridCol w="2249424"/>
-                <a:gridCol w="2249424"/>
+                <a:gridCol w="1874520"/>
+                <a:gridCol w="1874520"/>
+                <a:gridCol w="1874520"/>
+                <a:gridCol w="1874520"/>
+                <a:gridCol w="1874520"/>
+                <a:gridCol w="1874520"/>
               </a:tblGrid>
-              <a:tr h="838200">
-                <a:tc>
-                  <a:txBody>
-                    <a:bodyPr/>
-                    <a:lstStyle/>
-                    <a:p>
-                      <a:pPr>
-                        <a:defRPr sz="1600" b="1">
-                          <a:latin typeface="Microsoft YaHei"/>
-                        </a:defRPr>
-                      </a:pPr>
-                      <a:r>
-                        <a:t>游戏</a:t>
+              <a:tr h="1280160">
+                <a:tc>
+                  <a:txBody>
+                    <a:bodyPr/>
+                    <a:lstStyle/>
+                    <a:p>
+                      <a:pPr algn="ctr">
+                        <a:defRPr sz="1300" b="1">
+                          <a:solidFill>
+                            <a:srgbClr val="F3F6F9"/>
+                          </a:solidFill>
+                          <a:latin typeface="Microsoft YaHei"/>
+                        </a:defRPr>
+                      </a:pPr>
+                      <a:r>
+                        <a:t>阶段</a:t>
+                      </a:r>
+                    </a:p>
+                  </a:txBody>
+                  <a:tcPr>
+                    <a:solidFill>
+                      <a:srgbClr val="1A237E"/>
+                    </a:solidFill>
+                  </a:tcPr>
+                </a:tc>
+                <a:tc>
+                  <a:txBody>
+                    <a:bodyPr/>
+                    <a:lstStyle/>
+                    <a:p>
+                      <a:pPr algn="ctr">
+                        <a:defRPr sz="1300" b="1">
+                          <a:solidFill>
+                            <a:srgbClr val="F3F6F9"/>
+                          </a:solidFill>
+                          <a:latin typeface="Microsoft YaHei"/>
+                        </a:defRPr>
+                      </a:pPr>
+                      <a:r>
+                        <a:t>composite</a:t>
+                      </a:r>
+                    </a:p>
+                  </a:txBody>
+                  <a:tcPr>
+                    <a:solidFill>
+                      <a:srgbClr val="1A237E"/>
+                    </a:solidFill>
+                  </a:tcPr>
+                </a:tc>
+                <a:tc>
+                  <a:txBody>
+                    <a:bodyPr/>
+                    <a:lstStyle/>
+                    <a:p>
+                      <a:pPr algn="ctr">
+                        <a:defRPr sz="1300" b="1">
+                          <a:solidFill>
+                            <a:srgbClr val="F3F6F9"/>
+                          </a:solidFill>
+                          <a:latin typeface="Microsoft YaHei"/>
+                        </a:defRPr>
+                      </a:pPr>
+                      <a:r>
+                        <a:t>activity</a:t>
+                      </a:r>
+                    </a:p>
+                  </a:txBody>
+                  <a:tcPr>
+                    <a:solidFill>
+                      <a:srgbClr val="1A237E"/>
+                    </a:solidFill>
+                  </a:tcPr>
+                </a:tc>
+                <a:tc>
+                  <a:txBody>
+                    <a:bodyPr/>
+                    <a:lstStyle/>
+                    <a:p>
+                      <a:pPr algn="ctr">
+                        <a:defRPr sz="1300" b="1">
+                          <a:solidFill>
+                            <a:srgbClr val="F3F6F9"/>
+                          </a:solidFill>
+                          <a:latin typeface="Microsoft YaHei"/>
+                        </a:defRPr>
+                      </a:pPr>
+                      <a:r>
+                        <a:t>memory_hits</a:t>
+                      </a:r>
+                    </a:p>
+                  </a:txBody>
+                  <a:tcPr>
+                    <a:solidFill>
+                      <a:srgbClr val="1A237E"/>
+                    </a:solidFill>
+                  </a:tcPr>
+                </a:tc>
+                <a:tc>
+                  <a:txBody>
+                    <a:bodyPr/>
+                    <a:lstStyle/>
+                    <a:p>
+                      <a:pPr algn="ctr">
+                        <a:defRPr sz="1300" b="1">
+                          <a:solidFill>
+                            <a:srgbClr val="F3F6F9"/>
+                          </a:solidFill>
+                          <a:latin typeface="Microsoft YaHei"/>
+                        </a:defRPr>
+                      </a:pPr>
+                      <a:r>
+                        <a:t>wm_violations</a:t>
+                      </a:r>
+                    </a:p>
+                  </a:txBody>
+                  <a:tcPr>
+                    <a:solidFill>
+                      <a:srgbClr val="1A237E"/>
+                    </a:solidFill>
+                  </a:tcPr>
+                </a:tc>
+                <a:tc>
+                  <a:txBody>
+                    <a:bodyPr/>
+                    <a:lstStyle/>
+                    <a:p>
+                      <a:pPr algn="ctr">
+                        <a:defRPr sz="1300" b="1">
+                          <a:solidFill>
+                            <a:srgbClr val="F3F6F9"/>
+                          </a:solidFill>
+                          <a:latin typeface="Microsoft YaHei"/>
+                        </a:defRPr>
+                      </a:pPr>
+                      <a:r>
+                        <a:t>主要决策来源</a:t>
+                      </a:r>
+                    </a:p>
+                  </a:txBody>
+                  <a:tcPr>
+                    <a:solidFill>
+                      <a:srgbClr val="1A237E"/>
+                    </a:solidFill>
+                  </a:tcPr>
+                </a:tc>
+              </a:tr>
+              <a:tr h="1280160">
+                <a:tc>
+                  <a:txBody>
+                    <a:bodyPr/>
+                    <a:lstStyle/>
+                    <a:p>
+                      <a:pPr algn="ctr">
+                        <a:defRPr sz="1200">
+                          <a:latin typeface="Microsoft YaHei"/>
+                        </a:defRPr>
+                      </a:pPr>
+                      <a:r>
+                        <a:t>phase1_write</a:t>
+                      </a:r>
+                    </a:p>
+                  </a:txBody>
+                  <a:tcPr>
+                    <a:solidFill>
+                      <a:srgbClr val="F3F6F9"/>
+                    </a:solidFill>
+                  </a:tcPr>
+                </a:tc>
+                <a:tc>
+                  <a:txBody>
+                    <a:bodyPr/>
+                    <a:lstStyle/>
+                    <a:p>
+                      <a:pPr algn="ctr">
+                        <a:defRPr sz="1200">
+                          <a:latin typeface="Microsoft YaHei"/>
+                        </a:defRPr>
+                      </a:pPr>
+                      <a:r>
+                        <a:t>0.150</a:t>
+                      </a:r>
+                    </a:p>
+                  </a:txBody>
+                  <a:tcPr>
+                    <a:solidFill>
+                      <a:srgbClr val="F3F6F9"/>
+                    </a:solidFill>
+                  </a:tcPr>
+                </a:tc>
+                <a:tc>
+                  <a:txBody>
+                    <a:bodyPr/>
+                    <a:lstStyle/>
+                    <a:p>
+                      <a:pPr algn="ctr">
+                        <a:defRPr sz="1200">
+                          <a:latin typeface="Microsoft YaHei"/>
+                        </a:defRPr>
+                      </a:pPr>
+                      <a:r>
+                        <a:t>1.000</a:t>
+                      </a:r>
+                    </a:p>
+                  </a:txBody>
+                  <a:tcPr>
+                    <a:solidFill>
+                      <a:srgbClr val="F3F6F9"/>
+                    </a:solidFill>
+                  </a:tcPr>
+                </a:tc>
+                <a:tc>
+                  <a:txBody>
+                    <a:bodyPr/>
+                    <a:lstStyle/>
+                    <a:p>
+                      <a:pPr algn="ctr">
+                        <a:defRPr sz="1200">
+                          <a:latin typeface="Microsoft YaHei"/>
+                        </a:defRPr>
+                      </a:pPr>
+                      <a:r>
+                        <a:t>92</a:t>
+                      </a:r>
+                    </a:p>
+                  </a:txBody>
+                  <a:tcPr>
+                    <a:solidFill>
+                      <a:srgbClr val="F3F6F9"/>
+                    </a:solidFill>
+                  </a:tcPr>
+                </a:tc>
+                <a:tc>
+                  <a:txBody>
+                    <a:bodyPr/>
+                    <a:lstStyle/>
+                    <a:p>
+                      <a:pPr algn="ctr">
+                        <a:defRPr sz="1200">
+                          <a:latin typeface="Microsoft YaHei"/>
+                        </a:defRPr>
+                      </a:pPr>
+                      <a:r>
+                        <a:t>3</a:t>
+                      </a:r>
+                    </a:p>
+                  </a:txBody>
+                  <a:tcPr>
+                    <a:solidFill>
+                      <a:srgbClr val="F3F6F9"/>
+                    </a:solidFill>
+                  </a:tcPr>
+                </a:tc>
+                <a:tc>
+                  <a:txBody>
+                    <a:bodyPr/>
+                    <a:lstStyle/>
+                    <a:p>
+                      <a:pPr algn="ctr">
+                        <a:defRPr sz="1200">
+                          <a:latin typeface="Microsoft YaHei"/>
+                        </a:defRPr>
+                      </a:pPr>
+                      <a:r>
+                        <a:t>strategy_memory:23, rule_engine:7</a:t>
+                      </a:r>
+                    </a:p>
+                  </a:txBody>
+                  <a:tcPr>
+                    <a:solidFill>
+                      <a:srgbClr val="F3F6F9"/>
+                    </a:solidFill>
+                  </a:tcPr>
+                </a:tc>
+              </a:tr>
+              <a:tr h="1280160">
+                <a:tc>
+                  <a:txBody>
+                    <a:bodyPr/>
+                    <a:lstStyle/>
+                    <a:p>
+                      <a:pPr algn="ctr">
+                        <a:defRPr sz="1200">
+                          <a:latin typeface="Microsoft YaHei"/>
+                        </a:defRPr>
+                      </a:pPr>
+                      <a:r>
+                        <a:t>phase2_read</a:t>
                       </a:r>
                     </a:p>
                   </a:txBody>
@@ -4847,13 +7568,13 @@
                     <a:bodyPr/>
                     <a:lstStyle/>
                     <a:p>
-                      <a:pPr>
-                        <a:defRPr sz="1600" b="1">
-                          <a:latin typeface="Microsoft YaHei"/>
-                        </a:defRPr>
-                      </a:pPr>
-                      <a:r>
-                        <a:t>rule</a:t>
+                      <a:pPr algn="ctr">
+                        <a:defRPr sz="1200">
+                          <a:latin typeface="Microsoft YaHei"/>
+                        </a:defRPr>
+                      </a:pPr>
+                      <a:r>
+                        <a:t>0.300</a:t>
                       </a:r>
                     </a:p>
                   </a:txBody>
@@ -4864,13 +7585,13 @@
                     <a:bodyPr/>
                     <a:lstStyle/>
                     <a:p>
-                      <a:pPr>
-                        <a:defRPr sz="1600" b="1">
-                          <a:latin typeface="Microsoft YaHei"/>
-                        </a:defRPr>
-                      </a:pPr>
-                      <a:r>
-                        <a:t>multi-bus-memory</a:t>
+                      <a:pPr algn="ctr">
+                        <a:defRPr sz="1200">
+                          <a:latin typeface="Microsoft YaHei"/>
+                        </a:defRPr>
+                      </a:pPr>
+                      <a:r>
+                        <a:t>1.000</a:t>
                       </a:r>
                     </a:p>
                   </a:txBody>
@@ -4881,13 +7602,13 @@
                     <a:bodyPr/>
                     <a:lstStyle/>
                     <a:p>
-                      <a:pPr>
-                        <a:defRPr sz="1600" b="1">
-                          <a:latin typeface="Microsoft YaHei"/>
-                        </a:defRPr>
-                      </a:pPr>
-                      <a:r>
-                        <a:t>multi-bus</a:t>
+                      <a:pPr algn="ctr">
+                        <a:defRPr sz="1200">
+                          <a:latin typeface="Microsoft YaHei"/>
+                        </a:defRPr>
+                      </a:pPr>
+                      <a:r>
+                        <a:t>116</a:t>
                       </a:r>
                     </a:p>
                   </a:txBody>
@@ -4898,95 +7619,65 @@
                     <a:bodyPr/>
                     <a:lstStyle/>
                     <a:p>
-                      <a:pPr>
-                        <a:defRPr sz="1600" b="1">
-                          <a:latin typeface="Microsoft YaHei"/>
-                        </a:defRPr>
-                      </a:pPr>
-                      <a:r>
-                        <a:t>hierarchical</a:t>
+                      <a:pPr algn="ctr">
+                        <a:defRPr sz="1200">
+                          <a:latin typeface="Microsoft YaHei"/>
+                        </a:defRPr>
+                      </a:pPr>
+                      <a:r>
+                        <a:t>0</a:t>
                       </a:r>
                     </a:p>
                   </a:txBody>
                   <a:tcPr/>
                 </a:tc>
+                <a:tc>
+                  <a:txBody>
+                    <a:bodyPr/>
+                    <a:lstStyle/>
+                    <a:p>
+                      <a:pPr algn="ctr">
+                        <a:defRPr sz="1200">
+                          <a:latin typeface="Microsoft YaHei"/>
+                        </a:defRPr>
+                      </a:pPr>
+                      <a:r>
+                        <a:t>strategy_memory:29, rule_engine:1</a:t>
+                      </a:r>
+                    </a:p>
+                  </a:txBody>
+                  <a:tcPr/>
+                </a:tc>
               </a:tr>
-              <a:tr h="838200">
-                <a:tc>
-                  <a:txBody>
-                    <a:bodyPr/>
-                    <a:lstStyle/>
-                    <a:p>
-                      <a:pPr>
-                        <a:defRPr sz="1400">
-                          <a:latin typeface="Microsoft YaHei"/>
-                        </a:defRPr>
-                      </a:pPr>
-                      <a:r>
-                        <a:t>00440 清障通车</a:t>
-                      </a:r>
-                    </a:p>
-                  </a:txBody>
-                  <a:tcPr/>
-                </a:tc>
-                <a:tc>
-                  <a:txBody>
-                    <a:bodyPr/>
-                    <a:lstStyle/>
-                    <a:p>
-                      <a:pPr>
-                        <a:defRPr sz="1400">
-                          <a:latin typeface="Microsoft YaHei"/>
-                        </a:defRPr>
-                      </a:pPr>
-                      <a:r>
-                        <a:t>0.184</a:t>
-                      </a:r>
-                    </a:p>
-                  </a:txBody>
-                  <a:tcPr/>
-                </a:tc>
-                <a:tc>
-                  <a:txBody>
-                    <a:bodyPr/>
-                    <a:lstStyle/>
-                    <a:p>
-                      <a:pPr>
-                        <a:defRPr sz="1400">
-                          <a:latin typeface="Microsoft YaHei"/>
-                        </a:defRPr>
-                      </a:pPr>
-                      <a:r>
-                        <a:t>0.156</a:t>
-                      </a:r>
-                    </a:p>
-                  </a:txBody>
-                  <a:tcPr/>
-                </a:tc>
-                <a:tc>
-                  <a:txBody>
-                    <a:bodyPr/>
-                    <a:lstStyle/>
-                    <a:p>
-                      <a:pPr>
-                        <a:defRPr sz="1400">
-                          <a:latin typeface="Microsoft YaHei"/>
-                        </a:defRPr>
-                      </a:pPr>
-                      <a:r>
-                        <a:t>0.156</a:t>
-                      </a:r>
-                    </a:p>
-                  </a:txBody>
-                  <a:tcPr/>
-                </a:tc>
-                <a:tc>
-                  <a:txBody>
-                    <a:bodyPr/>
-                    <a:lstStyle/>
-                    <a:p>
-                      <a:pPr>
-                        <a:defRPr sz="1400">
+              <a:tr h="1280160">
+                <a:tc>
+                  <a:txBody>
+                    <a:bodyPr/>
+                    <a:lstStyle/>
+                    <a:p>
+                      <a:pPr algn="ctr">
+                        <a:defRPr sz="1200">
+                          <a:latin typeface="Microsoft YaHei"/>
+                        </a:defRPr>
+                      </a:pPr>
+                      <a:r>
+                        <a:t>control_no_memory</a:t>
+                      </a:r>
+                    </a:p>
+                  </a:txBody>
+                  <a:tcPr>
+                    <a:solidFill>
+                      <a:srgbClr val="F3F6F9"/>
+                    </a:solidFill>
+                  </a:tcPr>
+                </a:tc>
+                <a:tc>
+                  <a:txBody>
+                    <a:bodyPr/>
+                    <a:lstStyle/>
+                    <a:p>
+                      <a:pPr algn="ctr">
+                        <a:defRPr sz="1200">
                           <a:latin typeface="Microsoft YaHei"/>
                         </a:defRPr>
                       </a:pPr>
@@ -4995,361 +7686,214 @@
                       </a:r>
                     </a:p>
                   </a:txBody>
-                  <a:tcPr/>
-                </a:tc>
-              </a:tr>
-              <a:tr h="838200">
-                <a:tc>
-                  <a:txBody>
-                    <a:bodyPr/>
-                    <a:lstStyle/>
-                    <a:p>
-                      <a:pPr>
-                        <a:defRPr sz="1400">
-                          <a:latin typeface="Microsoft YaHei"/>
-                        </a:defRPr>
-                      </a:pPr>
-                      <a:r>
-                        <a:t>00461 塔防</a:t>
-                      </a:r>
-                    </a:p>
-                  </a:txBody>
-                  <a:tcPr/>
-                </a:tc>
-                <a:tc>
-                  <a:txBody>
-                    <a:bodyPr/>
-                    <a:lstStyle/>
-                    <a:p>
-                      <a:pPr>
-                        <a:defRPr sz="1400">
-                          <a:latin typeface="Microsoft YaHei"/>
-                        </a:defRPr>
-                      </a:pPr>
-                      <a:r>
-                        <a:t>0.113</a:t>
-                      </a:r>
-                    </a:p>
-                  </a:txBody>
-                  <a:tcPr/>
-                </a:tc>
-                <a:tc>
-                  <a:txBody>
-                    <a:bodyPr/>
-                    <a:lstStyle/>
-                    <a:p>
-                      <a:pPr>
-                        <a:defRPr sz="1400">
-                          <a:latin typeface="Microsoft YaHei"/>
-                        </a:defRPr>
-                      </a:pPr>
-                      <a:r>
-                        <a:t>0.300</a:t>
-                      </a:r>
-                    </a:p>
-                  </a:txBody>
-                  <a:tcPr/>
-                </a:tc>
-                <a:tc>
-                  <a:txBody>
-                    <a:bodyPr/>
-                    <a:lstStyle/>
-                    <a:p>
-                      <a:pPr>
-                        <a:defRPr sz="1400">
-                          <a:latin typeface="Microsoft YaHei"/>
-                        </a:defRPr>
-                      </a:pPr>
-                      <a:r>
-                        <a:t>0.297</a:t>
-                      </a:r>
-                    </a:p>
-                  </a:txBody>
-                  <a:tcPr/>
-                </a:tc>
-                <a:tc>
-                  <a:txBody>
-                    <a:bodyPr/>
-                    <a:lstStyle/>
-                    <a:p>
-                      <a:pPr>
-                        <a:defRPr sz="1400">
-                          <a:latin typeface="Microsoft YaHei"/>
-                        </a:defRPr>
-                      </a:pPr>
-                      <a:r>
-                        <a:t>0.150</a:t>
-                      </a:r>
-                    </a:p>
-                  </a:txBody>
-                  <a:tcPr/>
-                </a:tc>
-              </a:tr>
-              <a:tr h="838200">
-                <a:tc>
-                  <a:txBody>
-                    <a:bodyPr/>
-                    <a:lstStyle/>
-                    <a:p>
-                      <a:pPr>
-                        <a:defRPr sz="1400">
-                          <a:latin typeface="Microsoft YaHei"/>
-                        </a:defRPr>
-                      </a:pPr>
-                      <a:r>
-                        <a:t>00483 吸沙抽水</a:t>
-                      </a:r>
-                    </a:p>
-                  </a:txBody>
-                  <a:tcPr/>
-                </a:tc>
-                <a:tc>
-                  <a:txBody>
-                    <a:bodyPr/>
-                    <a:lstStyle/>
-                    <a:p>
-                      <a:pPr>
-                        <a:defRPr sz="1400">
-                          <a:latin typeface="Microsoft YaHei"/>
-                        </a:defRPr>
-                      </a:pPr>
-                      <a:r>
-                        <a:t>0.139</a:t>
-                      </a:r>
-                    </a:p>
-                  </a:txBody>
-                  <a:tcPr/>
-                </a:tc>
-                <a:tc>
-                  <a:txBody>
-                    <a:bodyPr/>
-                    <a:lstStyle/>
-                    <a:p>
-                      <a:pPr>
-                        <a:defRPr sz="1400">
-                          <a:latin typeface="Microsoft YaHei"/>
-                        </a:defRPr>
-                      </a:pPr>
-                      <a:r>
-                        <a:t>0.300</a:t>
-                      </a:r>
-                    </a:p>
-                  </a:txBody>
-                  <a:tcPr/>
-                </a:tc>
-                <a:tc>
-                  <a:txBody>
-                    <a:bodyPr/>
-                    <a:lstStyle/>
-                    <a:p>
-                      <a:pPr>
-                        <a:defRPr sz="1400">
-                          <a:latin typeface="Microsoft YaHei"/>
-                        </a:defRPr>
-                      </a:pPr>
-                      <a:r>
-                        <a:t>0.300</a:t>
-                      </a:r>
-                    </a:p>
-                  </a:txBody>
-                  <a:tcPr/>
-                </a:tc>
-                <a:tc>
-                  <a:txBody>
-                    <a:bodyPr/>
-                    <a:lstStyle/>
-                    <a:p>
-                      <a:pPr>
-                        <a:defRPr sz="1400">
-                          <a:latin typeface="Microsoft YaHei"/>
-                        </a:defRPr>
-                      </a:pPr>
-                      <a:r>
-                        <a:t>0.150</a:t>
-                      </a:r>
-                    </a:p>
-                  </a:txBody>
-                  <a:tcPr/>
-                </a:tc>
-              </a:tr>
-              <a:tr h="838200">
-                <a:tc>
-                  <a:txBody>
-                    <a:bodyPr/>
-                    <a:lstStyle/>
-                    <a:p>
-                      <a:pPr>
-                        <a:defRPr sz="1400">
-                          <a:latin typeface="Microsoft YaHei"/>
-                        </a:defRPr>
-                      </a:pPr>
-                      <a:r>
-                        <a:t>00496 电网抓丧尸</a:t>
-                      </a:r>
-                    </a:p>
-                  </a:txBody>
-                  <a:tcPr/>
-                </a:tc>
-                <a:tc>
-                  <a:txBody>
-                    <a:bodyPr/>
-                    <a:lstStyle/>
-                    <a:p>
-                      <a:pPr>
-                        <a:defRPr sz="1400">
-                          <a:latin typeface="Microsoft YaHei"/>
-                        </a:defRPr>
-                      </a:pPr>
-                      <a:r>
-                        <a:t>0.275</a:t>
-                      </a:r>
-                    </a:p>
-                  </a:txBody>
-                  <a:tcPr/>
-                </a:tc>
-                <a:tc>
-                  <a:txBody>
-                    <a:bodyPr/>
-                    <a:lstStyle/>
-                    <a:p>
-                      <a:pPr>
-                        <a:defRPr sz="1400">
-                          <a:latin typeface="Microsoft YaHei"/>
-                        </a:defRPr>
-                      </a:pPr>
-                      <a:r>
-                        <a:t>0.150</a:t>
-                      </a:r>
-                    </a:p>
-                  </a:txBody>
-                  <a:tcPr/>
-                </a:tc>
-                <a:tc>
-                  <a:txBody>
-                    <a:bodyPr/>
-                    <a:lstStyle/>
-                    <a:p>
-                      <a:pPr>
-                        <a:defRPr sz="1400">
-                          <a:latin typeface="Microsoft YaHei"/>
-                        </a:defRPr>
-                      </a:pPr>
-                      <a:r>
-                        <a:t>0.150</a:t>
-                      </a:r>
-                    </a:p>
-                  </a:txBody>
-                  <a:tcPr/>
-                </a:tc>
-                <a:tc>
-                  <a:txBody>
-                    <a:bodyPr/>
-                    <a:lstStyle/>
-                    <a:p>
-                      <a:pPr>
-                        <a:defRPr sz="1400">
-                          <a:latin typeface="Microsoft YaHei"/>
-                        </a:defRPr>
-                      </a:pPr>
-                      <a:r>
-                        <a:t>0.150</a:t>
-                      </a:r>
-                    </a:p>
-                  </a:txBody>
-                  <a:tcPr/>
-                </a:tc>
-              </a:tr>
-              <a:tr h="838200">
-                <a:tc>
-                  <a:txBody>
-                    <a:bodyPr/>
-                    <a:lstStyle/>
-                    <a:p>
-                      <a:pPr>
-                        <a:defRPr sz="1400">
-                          <a:latin typeface="Microsoft YaHei"/>
-                        </a:defRPr>
-                      </a:pPr>
-                      <a:r>
-                        <a:t>00522 地下炸矿</a:t>
-                      </a:r>
-                    </a:p>
-                  </a:txBody>
-                  <a:tcPr/>
-                </a:tc>
-                <a:tc>
-                  <a:txBody>
-                    <a:bodyPr/>
-                    <a:lstStyle/>
-                    <a:p>
-                      <a:pPr>
-                        <a:defRPr sz="1400">
-                          <a:latin typeface="Microsoft YaHei"/>
-                        </a:defRPr>
-                      </a:pPr>
-                      <a:r>
-                        <a:t>0.215</a:t>
-                      </a:r>
-                    </a:p>
-                  </a:txBody>
-                  <a:tcPr/>
-                </a:tc>
-                <a:tc>
-                  <a:txBody>
-                    <a:bodyPr/>
-                    <a:lstStyle/>
-                    <a:p>
-                      <a:pPr>
-                        <a:defRPr sz="1400">
-                          <a:latin typeface="Microsoft YaHei"/>
-                        </a:defRPr>
-                      </a:pPr>
-                      <a:r>
-                        <a:t>0.240</a:t>
-                      </a:r>
-                    </a:p>
-                  </a:txBody>
-                  <a:tcPr/>
-                </a:tc>
-                <a:tc>
-                  <a:txBody>
-                    <a:bodyPr/>
-                    <a:lstStyle/>
-                    <a:p>
-                      <a:pPr>
-                        <a:defRPr sz="1400">
-                          <a:latin typeface="Microsoft YaHei"/>
-                        </a:defRPr>
-                      </a:pPr>
-                      <a:r>
-                        <a:t>0.300</a:t>
-                      </a:r>
-                    </a:p>
-                  </a:txBody>
-                  <a:tcPr/>
-                </a:tc>
-                <a:tc>
-                  <a:txBody>
-                    <a:bodyPr/>
-                    <a:lstStyle/>
-                    <a:p>
-                      <a:pPr>
-                        <a:defRPr sz="1400">
-                          <a:latin typeface="Microsoft YaHei"/>
-                        </a:defRPr>
-                      </a:pPr>
-                      <a:r>
-                        <a:t>—</a:t>
-                      </a:r>
-                    </a:p>
-                  </a:txBody>
-                  <a:tcPr/>
+                  <a:tcPr>
+                    <a:solidFill>
+                      <a:srgbClr val="F3F6F9"/>
+                    </a:solidFill>
+                  </a:tcPr>
+                </a:tc>
+                <a:tc>
+                  <a:txBody>
+                    <a:bodyPr/>
+                    <a:lstStyle/>
+                    <a:p>
+                      <a:pPr algn="ctr">
+                        <a:defRPr sz="1200">
+                          <a:latin typeface="Microsoft YaHei"/>
+                        </a:defRPr>
+                      </a:pPr>
+                      <a:r>
+                        <a:t>1.000</a:t>
+                      </a:r>
+                    </a:p>
+                  </a:txBody>
+                  <a:tcPr>
+                    <a:solidFill>
+                      <a:srgbClr val="F3F6F9"/>
+                    </a:solidFill>
+                  </a:tcPr>
+                </a:tc>
+                <a:tc>
+                  <a:txBody>
+                    <a:bodyPr/>
+                    <a:lstStyle/>
+                    <a:p>
+                      <a:pPr algn="ctr">
+                        <a:defRPr sz="1200">
+                          <a:latin typeface="Microsoft YaHei"/>
+                        </a:defRPr>
+                      </a:pPr>
+                      <a:r>
+                        <a:t>0</a:t>
+                      </a:r>
+                    </a:p>
+                  </a:txBody>
+                  <a:tcPr>
+                    <a:solidFill>
+                      <a:srgbClr val="F3F6F9"/>
+                    </a:solidFill>
+                  </a:tcPr>
+                </a:tc>
+                <a:tc>
+                  <a:txBody>
+                    <a:bodyPr/>
+                    <a:lstStyle/>
+                    <a:p>
+                      <a:pPr algn="ctr">
+                        <a:defRPr sz="1200">
+                          <a:latin typeface="Microsoft YaHei"/>
+                        </a:defRPr>
+                      </a:pPr>
+                      <a:r>
+                        <a:t>3</a:t>
+                      </a:r>
+                    </a:p>
+                  </a:txBody>
+                  <a:tcPr>
+                    <a:solidFill>
+                      <a:srgbClr val="F3F6F9"/>
+                    </a:solidFill>
+                  </a:tcPr>
+                </a:tc>
+                <a:tc>
+                  <a:txBody>
+                    <a:bodyPr/>
+                    <a:lstStyle/>
+                    <a:p>
+                      <a:pPr algn="ctr">
+                        <a:defRPr sz="1200">
+                          <a:latin typeface="Microsoft YaHei"/>
+                        </a:defRPr>
+                      </a:pPr>
+                      <a:r>
+                        <a:t>rule_engine:30</a:t>
+                      </a:r>
+                    </a:p>
+                  </a:txBody>
+                  <a:tcPr>
+                    <a:solidFill>
+                      <a:srgbClr val="F3F6F9"/>
+                    </a:solidFill>
+                  </a:tcPr>
                 </a:tc>
               </a:tr>
             </a:tbl>
           </a:graphicData>
         </a:graphic>
       </p:graphicFrame>
+      <p:sp>
+        <p:nvSpPr>
+          <p:cNvPr id="5" name="Rectangle 4"/>
+          <p:cNvSpPr/>
+          <p:nvPr/>
+        </p:nvSpPr>
+        <p:spPr>
+          <a:xfrm>
+            <a:off x="0" y="6537960"/>
+            <a:ext cx="12191695" cy="18288"/>
+          </a:xfrm>
+          <a:prstGeom prst="rect">
+            <a:avLst/>
+          </a:prstGeom>
+          <a:solidFill>
+            <a:srgbClr val="0096C7"/>
+          </a:solidFill>
+          <a:ln/>
+        </p:spPr>
+        <p:style>
+          <a:lnRef idx="1">
+            <a:schemeClr val="accent1"/>
+          </a:lnRef>
+          <a:fillRef idx="3">
+            <a:schemeClr val="accent1"/>
+          </a:fillRef>
+          <a:effectRef idx="2">
+            <a:schemeClr val="accent1"/>
+          </a:effectRef>
+          <a:fontRef idx="minor">
+            <a:schemeClr val="lt1"/>
+          </a:fontRef>
+        </p:style>
+        <p:txBody>
+          <a:bodyPr rtlCol="0" anchor="ctr"/>
+          <a:lstStyle/>
+          <a:p>
+            <a:pPr algn="ctr"/>
+          </a:p>
+        </p:txBody>
+      </p:sp>
+      <p:sp>
+        <p:nvSpPr>
+          <p:cNvPr id="6" name="TextBox 5"/>
+          <p:cNvSpPr txBox="1"/>
+          <p:nvPr/>
+        </p:nvSpPr>
+        <p:spPr>
+          <a:xfrm>
+            <a:off x="457200" y="6583680"/>
+            <a:ext cx="3657600" cy="228600"/>
+          </a:xfrm>
+          <a:prstGeom prst="rect">
+            <a:avLst/>
+          </a:prstGeom>
+          <a:noFill/>
+        </p:spPr>
+        <p:txBody>
+          <a:bodyPr wrap="none">
+            <a:spAutoFit/>
+          </a:bodyPr>
+          <a:lstStyle/>
+          <a:p>
+            <a:pPr algn="l">
+              <a:defRPr sz="1000" b="0">
+                <a:solidFill>
+                  <a:srgbClr val="6C757D"/>
+                </a:solidFill>
+                <a:latin typeface="Microsoft YaHei"/>
+              </a:defRPr>
+            </a:pPr>
+            <a:r>
+              <a:t>smallgameagent · LLM/VLM + 规则驱动</a:t>
+            </a:r>
+          </a:p>
+        </p:txBody>
+      </p:sp>
+      <p:sp>
+        <p:nvSpPr>
+          <p:cNvPr id="7" name="TextBox 6"/>
+          <p:cNvSpPr txBox="1"/>
+          <p:nvPr/>
+        </p:nvSpPr>
+        <p:spPr>
+          <a:xfrm>
+            <a:off x="10789920" y="6583680"/>
+            <a:ext cx="914400" cy="228600"/>
+          </a:xfrm>
+          <a:prstGeom prst="rect">
+            <a:avLst/>
+          </a:prstGeom>
+          <a:noFill/>
+        </p:spPr>
+        <p:txBody>
+          <a:bodyPr wrap="none">
+            <a:spAutoFit/>
+          </a:bodyPr>
+          <a:lstStyle/>
+          <a:p>
+            <a:pPr algn="r">
+              <a:defRPr sz="1000" b="0">
+                <a:solidFill>
+                  <a:srgbClr val="6C757D"/>
+                </a:solidFill>
+                <a:latin typeface="Microsoft YaHei"/>
+              </a:defRPr>
+            </a:pPr>
+            <a:r>
+              <a:t>5/11</a:t>
+            </a:r>
+          </a:p>
+        </p:txBody>
+      </p:sp>
     </p:spTree>
   </p:cSld>
   <p:clrMapOvr>
@@ -5370,14 +7914,55 @@
       <p:grpSpPr/>
       <p:sp>
         <p:nvSpPr>
-          <p:cNvPr id="2" name="TextBox 1"/>
+          <p:cNvPr id="2" name="Rectangle 1"/>
+          <p:cNvSpPr/>
+          <p:nvPr/>
+        </p:nvSpPr>
+        <p:spPr>
+          <a:xfrm>
+            <a:off x="0" y="0"/>
+            <a:ext cx="12191695" cy="960120"/>
+          </a:xfrm>
+          <a:prstGeom prst="rect">
+            <a:avLst/>
+          </a:prstGeom>
+          <a:solidFill>
+            <a:srgbClr val="1A237E"/>
+          </a:solidFill>
+          <a:ln/>
+        </p:spPr>
+        <p:style>
+          <a:lnRef idx="1">
+            <a:schemeClr val="accent1"/>
+          </a:lnRef>
+          <a:fillRef idx="3">
+            <a:schemeClr val="accent1"/>
+          </a:fillRef>
+          <a:effectRef idx="2">
+            <a:schemeClr val="accent1"/>
+          </a:effectRef>
+          <a:fontRef idx="minor">
+            <a:schemeClr val="lt1"/>
+          </a:fontRef>
+        </p:style>
+        <p:txBody>
+          <a:bodyPr rtlCol="0" anchor="ctr"/>
+          <a:lstStyle/>
+          <a:p>
+            <a:pPr algn="ctr"/>
+          </a:p>
+        </p:txBody>
+      </p:sp>
+      <p:sp>
+        <p:nvSpPr>
+          <p:cNvPr id="3" name="TextBox 2"/>
           <p:cNvSpPr txBox="1"/>
           <p:nvPr/>
         </p:nvSpPr>
         <p:spPr>
           <a:xfrm>
-            <a:off x="457200" y="365760"/>
-            <a:ext cx="11247120" cy="822960"/>
+            <a:off x="457200" y="228600"/>
+            <a:ext cx="11247120" cy="548640"/>
           </a:xfrm>
           <a:prstGeom prst="rect">
             <a:avLst/>
@@ -5390,27 +7975,717 @@
           </a:bodyPr>
           <a:lstStyle/>
           <a:p>
-            <a:pPr>
-              <a:defRPr sz="3200" b="1">
+            <a:pPr algn="l">
+              <a:defRPr sz="3000" b="1">
+                <a:solidFill>
+                  <a:srgbClr val="F3F6F9"/>
+                </a:solidFill>
                 <a:latin typeface="Microsoft YaHei"/>
               </a:defRPr>
             </a:pPr>
             <a:r>
-              <a:t>游戏类型自动分类（22 游戏）</a:t>
-            </a:r>
-          </a:p>
-        </p:txBody>
-      </p:sp>
-      <p:sp>
-        <p:nvSpPr>
-          <p:cNvPr id="3" name="TextBox 2"/>
+              <a:t>云端 API vs 本地 VLM 基准</a:t>
+            </a:r>
+          </a:p>
+        </p:txBody>
+      </p:sp>
+      <p:graphicFrame>
+        <p:nvGraphicFramePr>
+          <p:cNvPr id="4" name="Table 3"/>
+          <p:cNvGraphicFramePr>
+            <a:graphicFrameLocks noGrp="1"/>
+          </p:cNvGraphicFramePr>
+          <p:nvPr/>
+        </p:nvGraphicFramePr>
+        <p:xfrm>
+          <a:off x="457200" y="1143000"/>
+          <a:ext cx="11247120" cy="5120640"/>
+        </p:xfrm>
+        <a:graphic>
+          <a:graphicData uri="http://schemas.openxmlformats.org/drawingml/2006/table">
+            <a:tbl>
+              <a:tblPr firstRow="1" bandRow="1">
+                <a:tableStyleId>{5C22544A-7EE6-4342-B048-85BDC9FD1C3A}</a:tableStyleId>
+              </a:tblPr>
+              <a:tblGrid>
+                <a:gridCol w="2249424"/>
+                <a:gridCol w="2249424"/>
+                <a:gridCol w="2249424"/>
+                <a:gridCol w="2249424"/>
+                <a:gridCol w="2249424"/>
+              </a:tblGrid>
+              <a:tr h="853440">
+                <a:tc>
+                  <a:txBody>
+                    <a:bodyPr/>
+                    <a:lstStyle/>
+                    <a:p>
+                      <a:pPr algn="ctr">
+                        <a:defRPr sz="1300" b="1">
+                          <a:solidFill>
+                            <a:srgbClr val="F3F6F9"/>
+                          </a:solidFill>
+                          <a:latin typeface="Microsoft YaHei"/>
+                        </a:defRPr>
+                      </a:pPr>
+                      <a:r>
+                        <a:t>模型</a:t>
+                      </a:r>
+                    </a:p>
+                  </a:txBody>
+                  <a:tcPr>
+                    <a:solidFill>
+                      <a:srgbClr val="1A237E"/>
+                    </a:solidFill>
+                  </a:tcPr>
+                </a:tc>
+                <a:tc>
+                  <a:txBody>
+                    <a:bodyPr/>
+                    <a:lstStyle/>
+                    <a:p>
+                      <a:pPr algn="ctr">
+                        <a:defRPr sz="1300" b="1">
+                          <a:solidFill>
+                            <a:srgbClr val="F3F6F9"/>
+                          </a:solidFill>
+                          <a:latin typeface="Microsoft YaHei"/>
+                        </a:defRPr>
+                      </a:pPr>
+                      <a:r>
+                        <a:t>模态</a:t>
+                      </a:r>
+                    </a:p>
+                  </a:txBody>
+                  <a:tcPr>
+                    <a:solidFill>
+                      <a:srgbClr val="1A237E"/>
+                    </a:solidFill>
+                  </a:tcPr>
+                </a:tc>
+                <a:tc>
+                  <a:txBody>
+                    <a:bodyPr/>
+                    <a:lstStyle/>
+                    <a:p>
+                      <a:pPr algn="ctr">
+                        <a:defRPr sz="1300" b="1">
+                          <a:solidFill>
+                            <a:srgbClr val="F3F6F9"/>
+                          </a:solidFill>
+                          <a:latin typeface="Microsoft YaHei"/>
+                        </a:defRPr>
+                      </a:pPr>
+                      <a:r>
+                        <a:t>struct 解析</a:t>
+                      </a:r>
+                    </a:p>
+                  </a:txBody>
+                  <a:tcPr>
+                    <a:solidFill>
+                      <a:srgbClr val="1A237E"/>
+                    </a:solidFill>
+                  </a:tcPr>
+                </a:tc>
+                <a:tc>
+                  <a:txBody>
+                    <a:bodyPr/>
+                    <a:lstStyle/>
+                    <a:p>
+                      <a:pPr algn="ctr">
+                        <a:defRPr sz="1300" b="1">
+                          <a:solidFill>
+                            <a:srgbClr val="F3F6F9"/>
+                          </a:solidFill>
+                          <a:latin typeface="Microsoft YaHei"/>
+                        </a:defRPr>
+                      </a:pPr>
+                      <a:r>
+                        <a:t>延迟</a:t>
+                      </a:r>
+                    </a:p>
+                  </a:txBody>
+                  <a:tcPr>
+                    <a:solidFill>
+                      <a:srgbClr val="1A237E"/>
+                    </a:solidFill>
+                  </a:tcPr>
+                </a:tc>
+                <a:tc>
+                  <a:txBody>
+                    <a:bodyPr/>
+                    <a:lstStyle/>
+                    <a:p>
+                      <a:pPr algn="ctr">
+                        <a:defRPr sz="1300" b="1">
+                          <a:solidFill>
+                            <a:srgbClr val="F3F6F9"/>
+                          </a:solidFill>
+                          <a:latin typeface="Microsoft YaHei"/>
+                        </a:defRPr>
+                      </a:pPr>
+                      <a:r>
+                        <a:t>结论</a:t>
+                      </a:r>
+                    </a:p>
+                  </a:txBody>
+                  <a:tcPr>
+                    <a:solidFill>
+                      <a:srgbClr val="1A237E"/>
+                    </a:solidFill>
+                  </a:tcPr>
+                </a:tc>
+              </a:tr>
+              <a:tr h="853440">
+                <a:tc>
+                  <a:txBody>
+                    <a:bodyPr/>
+                    <a:lstStyle/>
+                    <a:p>
+                      <a:pPr algn="ctr">
+                        <a:defRPr sz="1200">
+                          <a:latin typeface="Microsoft YaHei"/>
+                        </a:defRPr>
+                      </a:pPr>
+                      <a:r>
+                        <a:t>kimi-k2.7-code</a:t>
+                      </a:r>
+                    </a:p>
+                  </a:txBody>
+                  <a:tcPr>
+                    <a:solidFill>
+                      <a:srgbClr val="F3F6F9"/>
+                    </a:solidFill>
+                  </a:tcPr>
+                </a:tc>
+                <a:tc>
+                  <a:txBody>
+                    <a:bodyPr/>
+                    <a:lstStyle/>
+                    <a:p>
+                      <a:pPr algn="ctr">
+                        <a:defRPr sz="1200">
+                          <a:latin typeface="Microsoft YaHei"/>
+                        </a:defRPr>
+                      </a:pPr>
+                      <a:r>
+                        <a:t>文本</a:t>
+                      </a:r>
+                    </a:p>
+                  </a:txBody>
+                  <a:tcPr>
+                    <a:solidFill>
+                      <a:srgbClr val="F3F6F9"/>
+                    </a:solidFill>
+                  </a:tcPr>
+                </a:tc>
+                <a:tc>
+                  <a:txBody>
+                    <a:bodyPr/>
+                    <a:lstStyle/>
+                    <a:p>
+                      <a:pPr algn="ctr">
+                        <a:defRPr sz="1200">
+                          <a:latin typeface="Microsoft YaHei"/>
+                        </a:defRPr>
+                      </a:pPr>
+                      <a:r>
+                        <a:t>—</a:t>
+                      </a:r>
+                    </a:p>
+                  </a:txBody>
+                  <a:tcPr>
+                    <a:solidFill>
+                      <a:srgbClr val="F3F6F9"/>
+                    </a:solidFill>
+                  </a:tcPr>
+                </a:tc>
+                <a:tc>
+                  <a:txBody>
+                    <a:bodyPr/>
+                    <a:lstStyle/>
+                    <a:p>
+                      <a:pPr algn="ctr">
+                        <a:defRPr sz="1200">
+                          <a:latin typeface="Microsoft YaHei"/>
+                        </a:defRPr>
+                      </a:pPr>
+                      <a:r>
+                        <a:t>~2.2 s</a:t>
+                      </a:r>
+                    </a:p>
+                  </a:txBody>
+                  <a:tcPr>
+                    <a:solidFill>
+                      <a:srgbClr val="F3F6F9"/>
+                    </a:solidFill>
+                  </a:tcPr>
+                </a:tc>
+                <a:tc>
+                  <a:txBody>
+                    <a:bodyPr/>
+                    <a:lstStyle/>
+                    <a:p>
+                      <a:pPr algn="ctr">
+                        <a:defRPr sz="1200">
+                          <a:latin typeface="Microsoft YaHei"/>
+                        </a:defRPr>
+                      </a:pPr>
+                      <a:r>
+                        <a:t>最快文本模型，适合长程规划</a:t>
+                      </a:r>
+                    </a:p>
+                  </a:txBody>
+                  <a:tcPr>
+                    <a:solidFill>
+                      <a:srgbClr val="F3F6F9"/>
+                    </a:solidFill>
+                  </a:tcPr>
+                </a:tc>
+              </a:tr>
+              <a:tr h="853440">
+                <a:tc>
+                  <a:txBody>
+                    <a:bodyPr/>
+                    <a:lstStyle/>
+                    <a:p>
+                      <a:pPr algn="ctr">
+                        <a:defRPr sz="1200">
+                          <a:latin typeface="Microsoft YaHei"/>
+                        </a:defRPr>
+                      </a:pPr>
+                      <a:r>
+                        <a:t>mimo-v2.5</a:t>
+                      </a:r>
+                    </a:p>
+                  </a:txBody>
+                  <a:tcPr/>
+                </a:tc>
+                <a:tc>
+                  <a:txBody>
+                    <a:bodyPr/>
+                    <a:lstStyle/>
+                    <a:p>
+                      <a:pPr algn="ctr">
+                        <a:defRPr sz="1200">
+                          <a:latin typeface="Microsoft YaHei"/>
+                        </a:defRPr>
+                      </a:pPr>
+                      <a:r>
+                        <a:t>视觉</a:t>
+                      </a:r>
+                    </a:p>
+                  </a:txBody>
+                  <a:tcPr/>
+                </a:tc>
+                <a:tc>
+                  <a:txBody>
+                    <a:bodyPr/>
+                    <a:lstStyle/>
+                    <a:p>
+                      <a:pPr algn="ctr">
+                        <a:defRPr sz="1200">
+                          <a:latin typeface="Microsoft YaHei"/>
+                        </a:defRPr>
+                      </a:pPr>
+                      <a:r>
+                        <a:t>3/3</a:t>
+                      </a:r>
+                    </a:p>
+                  </a:txBody>
+                  <a:tcPr/>
+                </a:tc>
+                <a:tc>
+                  <a:txBody>
+                    <a:bodyPr/>
+                    <a:lstStyle/>
+                    <a:p>
+                      <a:pPr algn="ctr">
+                        <a:defRPr sz="1200">
+                          <a:latin typeface="Microsoft YaHei"/>
+                        </a:defRPr>
+                      </a:pPr>
+                      <a:r>
+                        <a:t>~18 s/帧</a:t>
+                      </a:r>
+                    </a:p>
+                  </a:txBody>
+                  <a:tcPr/>
+                </a:tc>
+                <a:tc>
+                  <a:txBody>
+                    <a:bodyPr/>
+                    <a:lstStyle/>
+                    <a:p>
+                      <a:pPr algn="ctr">
+                        <a:defRPr sz="1200">
+                          <a:latin typeface="Microsoft YaHei"/>
+                        </a:defRPr>
+                      </a:pPr>
+                      <a:r>
+                        <a:t>视觉准确但慢，适合离线标注</a:t>
+                      </a:r>
+                    </a:p>
+                  </a:txBody>
+                  <a:tcPr/>
+                </a:tc>
+              </a:tr>
+              <a:tr h="853440">
+                <a:tc>
+                  <a:txBody>
+                    <a:bodyPr/>
+                    <a:lstStyle/>
+                    <a:p>
+                      <a:pPr algn="ctr">
+                        <a:defRPr sz="1200">
+                          <a:latin typeface="Microsoft YaHei"/>
+                        </a:defRPr>
+                      </a:pPr>
+                      <a:r>
+                        <a:t>kimi-k2.6</a:t>
+                      </a:r>
+                    </a:p>
+                  </a:txBody>
+                  <a:tcPr>
+                    <a:solidFill>
+                      <a:srgbClr val="F3F6F9"/>
+                    </a:solidFill>
+                  </a:tcPr>
+                </a:tc>
+                <a:tc>
+                  <a:txBody>
+                    <a:bodyPr/>
+                    <a:lstStyle/>
+                    <a:p>
+                      <a:pPr algn="ctr">
+                        <a:defRPr sz="1200">
+                          <a:latin typeface="Microsoft YaHei"/>
+                        </a:defRPr>
+                      </a:pPr>
+                      <a:r>
+                        <a:t>视觉</a:t>
+                      </a:r>
+                    </a:p>
+                  </a:txBody>
+                  <a:tcPr>
+                    <a:solidFill>
+                      <a:srgbClr val="F3F6F9"/>
+                    </a:solidFill>
+                  </a:tcPr>
+                </a:tc>
+                <a:tc>
+                  <a:txBody>
+                    <a:bodyPr/>
+                    <a:lstStyle/>
+                    <a:p>
+                      <a:pPr algn="ctr">
+                        <a:defRPr sz="1200">
+                          <a:latin typeface="Microsoft YaHei"/>
+                        </a:defRPr>
+                      </a:pPr>
+                      <a:r>
+                        <a:t>0/3</a:t>
+                      </a:r>
+                    </a:p>
+                  </a:txBody>
+                  <a:tcPr>
+                    <a:solidFill>
+                      <a:srgbClr val="F3F6F9"/>
+                    </a:solidFill>
+                  </a:tcPr>
+                </a:tc>
+                <a:tc>
+                  <a:txBody>
+                    <a:bodyPr/>
+                    <a:lstStyle/>
+                    <a:p>
+                      <a:pPr algn="ctr">
+                        <a:defRPr sz="1200">
+                          <a:latin typeface="Microsoft YaHei"/>
+                        </a:defRPr>
+                      </a:pPr>
+                      <a:r>
+                        <a:t>~4 s/帧</a:t>
+                      </a:r>
+                    </a:p>
+                  </a:txBody>
+                  <a:tcPr>
+                    <a:solidFill>
+                      <a:srgbClr val="F3F6F9"/>
+                    </a:solidFill>
+                  </a:tcPr>
+                </a:tc>
+                <a:tc>
+                  <a:txBody>
+                    <a:bodyPr/>
+                    <a:lstStyle/>
+                    <a:p>
+                      <a:pPr algn="ctr">
+                        <a:defRPr sz="1200">
+                          <a:latin typeface="Microsoft YaHei"/>
+                        </a:defRPr>
+                      </a:pPr>
+                      <a:r>
+                        <a:t>思考链截断，需更强输出契约</a:t>
+                      </a:r>
+                    </a:p>
+                  </a:txBody>
+                  <a:tcPr>
+                    <a:solidFill>
+                      <a:srgbClr val="F3F6F9"/>
+                    </a:solidFill>
+                  </a:tcPr>
+                </a:tc>
+              </a:tr>
+              <a:tr h="853440">
+                <a:tc>
+                  <a:txBody>
+                    <a:bodyPr/>
+                    <a:lstStyle/>
+                    <a:p>
+                      <a:pPr algn="ctr">
+                        <a:defRPr sz="1200">
+                          <a:latin typeface="Microsoft YaHei"/>
+                        </a:defRPr>
+                      </a:pPr>
+                      <a:r>
+                        <a:t>gemma-4-E4B</a:t>
+                      </a:r>
+                    </a:p>
+                  </a:txBody>
+                  <a:tcPr/>
+                </a:tc>
+                <a:tc>
+                  <a:txBody>
+                    <a:bodyPr/>
+                    <a:lstStyle/>
+                    <a:p>
+                      <a:pPr algn="ctr">
+                        <a:defRPr sz="1200">
+                          <a:latin typeface="Microsoft YaHei"/>
+                        </a:defRPr>
+                      </a:pPr>
+                      <a:r>
+                        <a:t>本地视觉</a:t>
+                      </a:r>
+                    </a:p>
+                  </a:txBody>
+                  <a:tcPr/>
+                </a:tc>
+                <a:tc>
+                  <a:txBody>
+                    <a:bodyPr/>
+                    <a:lstStyle/>
+                    <a:p>
+                      <a:pPr algn="ctr">
+                        <a:defRPr sz="1200">
+                          <a:latin typeface="Microsoft YaHei"/>
+                        </a:defRPr>
+                      </a:pPr>
+                      <a:r>
+                        <a:t>3/3</a:t>
+                      </a:r>
+                    </a:p>
+                  </a:txBody>
+                  <a:tcPr/>
+                </a:tc>
+                <a:tc>
+                  <a:txBody>
+                    <a:bodyPr/>
+                    <a:lstStyle/>
+                    <a:p>
+                      <a:pPr algn="ctr">
+                        <a:defRPr sz="1200">
+                          <a:latin typeface="Microsoft YaHei"/>
+                        </a:defRPr>
+                      </a:pPr>
+                      <a:r>
+                        <a:t>~5 s/帧</a:t>
+                      </a:r>
+                    </a:p>
+                  </a:txBody>
+                  <a:tcPr/>
+                </a:tc>
+                <a:tc>
+                  <a:txBody>
+                    <a:bodyPr/>
+                    <a:lstStyle/>
+                    <a:p>
+                      <a:pPr algn="ctr">
+                        <a:defRPr sz="1200">
+                          <a:latin typeface="Microsoft YaHei"/>
+                        </a:defRPr>
+                      </a:pPr>
+                      <a:r>
+                        <a:t>本地最佳，8GB 显存可跑</a:t>
+                      </a:r>
+                    </a:p>
+                  </a:txBody>
+                  <a:tcPr/>
+                </a:tc>
+              </a:tr>
+              <a:tr h="853440">
+                <a:tc>
+                  <a:txBody>
+                    <a:bodyPr/>
+                    <a:lstStyle/>
+                    <a:p>
+                      <a:pPr algn="ctr">
+                        <a:defRPr sz="1200">
+                          <a:latin typeface="Microsoft YaHei"/>
+                        </a:defRPr>
+                      </a:pPr>
+                      <a:r>
+                        <a:t>Qwen3.5-4B</a:t>
+                      </a:r>
+                    </a:p>
+                  </a:txBody>
+                  <a:tcPr>
+                    <a:solidFill>
+                      <a:srgbClr val="F3F6F9"/>
+                    </a:solidFill>
+                  </a:tcPr>
+                </a:tc>
+                <a:tc>
+                  <a:txBody>
+                    <a:bodyPr/>
+                    <a:lstStyle/>
+                    <a:p>
+                      <a:pPr algn="ctr">
+                        <a:defRPr sz="1200">
+                          <a:latin typeface="Microsoft YaHei"/>
+                        </a:defRPr>
+                      </a:pPr>
+                      <a:r>
+                        <a:t>本地视觉</a:t>
+                      </a:r>
+                    </a:p>
+                  </a:txBody>
+                  <a:tcPr>
+                    <a:solidFill>
+                      <a:srgbClr val="F3F6F9"/>
+                    </a:solidFill>
+                  </a:tcPr>
+                </a:tc>
+                <a:tc>
+                  <a:txBody>
+                    <a:bodyPr/>
+                    <a:lstStyle/>
+                    <a:p>
+                      <a:pPr algn="ctr">
+                        <a:defRPr sz="1200">
+                          <a:latin typeface="Microsoft YaHei"/>
+                        </a:defRPr>
+                      </a:pPr>
+                      <a:r>
+                        <a:t>0/3</a:t>
+                      </a:r>
+                    </a:p>
+                  </a:txBody>
+                  <a:tcPr>
+                    <a:solidFill>
+                      <a:srgbClr val="F3F6F9"/>
+                    </a:solidFill>
+                  </a:tcPr>
+                </a:tc>
+                <a:tc>
+                  <a:txBody>
+                    <a:bodyPr/>
+                    <a:lstStyle/>
+                    <a:p>
+                      <a:pPr algn="ctr">
+                        <a:defRPr sz="1200">
+                          <a:latin typeface="Microsoft YaHei"/>
+                        </a:defRPr>
+                      </a:pPr>
+                      <a:r>
+                        <a:t>~12 s/帧</a:t>
+                      </a:r>
+                    </a:p>
+                  </a:txBody>
+                  <a:tcPr>
+                    <a:solidFill>
+                      <a:srgbClr val="F3F6F9"/>
+                    </a:solidFill>
+                  </a:tcPr>
+                </a:tc>
+                <a:tc>
+                  <a:txBody>
+                    <a:bodyPr/>
+                    <a:lstStyle/>
+                    <a:p>
+                      <a:pPr algn="ctr">
+                        <a:defRPr sz="1200">
+                          <a:latin typeface="Microsoft YaHei"/>
+                        </a:defRPr>
+                      </a:pPr>
+                      <a:r>
+                        <a:t>量化后可用，准确率待提升</a:t>
+                      </a:r>
+                    </a:p>
+                  </a:txBody>
+                  <a:tcPr>
+                    <a:solidFill>
+                      <a:srgbClr val="F3F6F9"/>
+                    </a:solidFill>
+                  </a:tcPr>
+                </a:tc>
+              </a:tr>
+            </a:tbl>
+          </a:graphicData>
+        </a:graphic>
+      </p:graphicFrame>
+      <p:sp>
+        <p:nvSpPr>
+          <p:cNvPr id="5" name="Rectangle 4"/>
+          <p:cNvSpPr/>
+          <p:nvPr/>
+        </p:nvSpPr>
+        <p:spPr>
+          <a:xfrm>
+            <a:off x="0" y="6537960"/>
+            <a:ext cx="12191695" cy="18288"/>
+          </a:xfrm>
+          <a:prstGeom prst="rect">
+            <a:avLst/>
+          </a:prstGeom>
+          <a:solidFill>
+            <a:srgbClr val="0096C7"/>
+          </a:solidFill>
+          <a:ln/>
+        </p:spPr>
+        <p:style>
+          <a:lnRef idx="1">
+            <a:schemeClr val="accent1"/>
+          </a:lnRef>
+          <a:fillRef idx="3">
+            <a:schemeClr val="accent1"/>
+          </a:fillRef>
+          <a:effectRef idx="2">
+            <a:schemeClr val="accent1"/>
+          </a:effectRef>
+          <a:fontRef idx="minor">
+            <a:schemeClr val="lt1"/>
+          </a:fontRef>
+        </p:style>
+        <p:txBody>
+          <a:bodyPr rtlCol="0" anchor="ctr"/>
+          <a:lstStyle/>
+          <a:p>
+            <a:pPr algn="ctr"/>
+          </a:p>
+        </p:txBody>
+      </p:sp>
+      <p:sp>
+        <p:nvSpPr>
+          <p:cNvPr id="6" name="TextBox 5"/>
           <p:cNvSpPr txBox="1"/>
           <p:nvPr/>
         </p:nvSpPr>
         <p:spPr>
           <a:xfrm>
-            <a:off x="548640" y="1371600"/>
-            <a:ext cx="11064240" cy="5120640"/>
+            <a:off x="457200" y="6583680"/>
+            <a:ext cx="3657600" cy="228600"/>
           </a:xfrm>
           <a:prstGeom prst="rect">
             <a:avLst/>
@@ -5418,112 +8693,57 @@
           <a:noFill/>
         </p:spPr>
         <p:txBody>
-          <a:bodyPr wrap="square">
+          <a:bodyPr wrap="none">
             <a:spAutoFit/>
           </a:bodyPr>
           <a:lstStyle/>
           <a:p>
-            <a:pPr>
-              <a:spcAft>
-                <a:spcPts val="1000"/>
-              </a:spcAft>
-              <a:defRPr sz="2000">
+            <a:pPr algn="l">
+              <a:defRPr sz="1000" b="0">
+                <a:solidFill>
+                  <a:srgbClr val="6C757D"/>
+                </a:solidFill>
                 <a:latin typeface="Microsoft YaHei"/>
               </a:defRPr>
             </a:pPr>
             <a:r>
-              <a:t>• A 类 joystick 驱动（7 个）：00440/00461/00483/00496/00517/00522/00736</a:t>
-            </a:r>
-          </a:p>
-          <a:p>
-            <a:pPr>
-              <a:spcAft>
-                <a:spcPts val="1000"/>
-              </a:spcAft>
-              <a:defRPr sz="2000">
+              <a:t>smallgameagent · LLM/VLM + 规则驱动</a:t>
+            </a:r>
+          </a:p>
+        </p:txBody>
+      </p:sp>
+      <p:sp>
+        <p:nvSpPr>
+          <p:cNvPr id="7" name="TextBox 6"/>
+          <p:cNvSpPr txBox="1"/>
+          <p:nvPr/>
+        </p:nvSpPr>
+        <p:spPr>
+          <a:xfrm>
+            <a:off x="10789920" y="6583680"/>
+            <a:ext cx="914400" cy="228600"/>
+          </a:xfrm>
+          <a:prstGeom prst="rect">
+            <a:avLst/>
+          </a:prstGeom>
+          <a:noFill/>
+        </p:spPr>
+        <p:txBody>
+          <a:bodyPr wrap="none">
+            <a:spAutoFit/>
+          </a:bodyPr>
+          <a:lstStyle/>
+          <a:p>
+            <a:pPr algn="r">
+              <a:defRPr sz="1000" b="0">
+                <a:solidFill>
+                  <a:srgbClr val="6C757D"/>
+                </a:solidFill>
                 <a:latin typeface="Microsoft YaHei"/>
               </a:defRPr>
             </a:pPr>
             <a:r>
-              <a:t>•   → 校准成功，multi-bus/multi-bus-memory 稳定 0.300</a:t>
-            </a:r>
-          </a:p>
-          <a:p>
-            <a:pPr>
-              <a:spcAft>
-                <a:spcPts val="1000"/>
-              </a:spcAft>
-              <a:defRPr sz="2000">
-                <a:latin typeface="Microsoft YaHei"/>
-              </a:defRPr>
-            </a:pPr>
-            <a:r>
-              <a:t>• B 类 tap-to-move（15 个）：00219/00332/00342/.../00742</a:t>
-            </a:r>
-          </a:p>
-          <a:p>
-            <a:pPr>
-              <a:spcAft>
-                <a:spcPts val="1000"/>
-              </a:spcAft>
-              <a:defRPr sz="2000">
-                <a:latin typeface="Microsoft YaHei"/>
-              </a:defRPr>
-            </a:pPr>
-            <a:r>
-              <a:t>•   → joystick + Cocos Actor.move 均 0 位移，需 tap-only 驱动</a:t>
-            </a:r>
-          </a:p>
-          <a:p>
-            <a:pPr>
-              <a:spcAft>
-                <a:spcPts val="1000"/>
-              </a:spcAft>
-              <a:defRPr sz="2000">
-                <a:latin typeface="Microsoft YaHei"/>
-              </a:defRPr>
-            </a:pPr>
-            <a:r>
-              <a:t>• 8/15 B 类达 0.300（00382/00394/00475/00526/00532/00594/00669/00742）</a:t>
-            </a:r>
-          </a:p>
-          <a:p>
-            <a:pPr>
-              <a:spcAft>
-                <a:spcPts val="1000"/>
-              </a:spcAft>
-              <a:defRPr sz="2000">
-                <a:latin typeface="Microsoft YaHei"/>
-              </a:defRPr>
-            </a:pPr>
-            <a:r>
-              <a:t>•   → tap-only：直接 tap guide 目标屏幕坐标，无需 joystick 校准</a:t>
-            </a:r>
-          </a:p>
-          <a:p>
-            <a:pPr>
-              <a:spcAft>
-                <a:spcPts val="1000"/>
-              </a:spcAft>
-              <a:defRPr sz="2000">
-                <a:latin typeface="Microsoft YaHei"/>
-              </a:defRPr>
-            </a:pPr>
-            <a:r>
-              <a:t>• 7/15 B 类 0.150：tap 有效但无移动，activity=0</a:t>
-            </a:r>
-          </a:p>
-          <a:p>
-            <a:pPr>
-              <a:spcAft>
-                <a:spcPts val="1000"/>
-              </a:spcAft>
-              <a:defRPr sz="2000">
-                <a:latin typeface="Microsoft YaHei"/>
-              </a:defRPr>
-            </a:pPr>
-            <a:r>
-              <a:t>• 自动校准脚本 auto_calibrate.py：4 方向脉冲 + warmup + retry + moveByCocosInput 回退</a:t>
+              <a:t>6/11</a:t>
             </a:r>
           </a:p>
         </p:txBody>
@@ -5548,14 +8768,55 @@
       <p:grpSpPr/>
       <p:sp>
         <p:nvSpPr>
-          <p:cNvPr id="2" name="TextBox 1"/>
+          <p:cNvPr id="2" name="Rectangle 1"/>
+          <p:cNvSpPr/>
+          <p:nvPr/>
+        </p:nvSpPr>
+        <p:spPr>
+          <a:xfrm>
+            <a:off x="0" y="0"/>
+            <a:ext cx="12191695" cy="960120"/>
+          </a:xfrm>
+          <a:prstGeom prst="rect">
+            <a:avLst/>
+          </a:prstGeom>
+          <a:solidFill>
+            <a:srgbClr val="1A237E"/>
+          </a:solidFill>
+          <a:ln/>
+        </p:spPr>
+        <p:style>
+          <a:lnRef idx="1">
+            <a:schemeClr val="accent1"/>
+          </a:lnRef>
+          <a:fillRef idx="3">
+            <a:schemeClr val="accent1"/>
+          </a:fillRef>
+          <a:effectRef idx="2">
+            <a:schemeClr val="accent1"/>
+          </a:effectRef>
+          <a:fontRef idx="minor">
+            <a:schemeClr val="lt1"/>
+          </a:fontRef>
+        </p:style>
+        <p:txBody>
+          <a:bodyPr rtlCol="0" anchor="ctr"/>
+          <a:lstStyle/>
+          <a:p>
+            <a:pPr algn="ctr"/>
+          </a:p>
+        </p:txBody>
+      </p:sp>
+      <p:sp>
+        <p:nvSpPr>
+          <p:cNvPr id="3" name="TextBox 2"/>
           <p:cNvSpPr txBox="1"/>
           <p:nvPr/>
         </p:nvSpPr>
         <p:spPr>
           <a:xfrm>
-            <a:off x="457200" y="365760"/>
-            <a:ext cx="11247120" cy="822960"/>
+            <a:off x="457200" y="228600"/>
+            <a:ext cx="11247120" cy="548640"/>
           </a:xfrm>
           <a:prstGeom prst="rect">
             <a:avLst/>
@@ -5568,568 +8829,236 @@
           </a:bodyPr>
           <a:lstStyle/>
           <a:p>
-            <a:pPr>
-              <a:defRPr sz="3200" b="1">
+            <a:pPr algn="l">
+              <a:defRPr sz="3000" b="1">
+                <a:solidFill>
+                  <a:srgbClr val="F3F6F9"/>
+                </a:solidFill>
                 <a:latin typeface="Microsoft YaHei"/>
               </a:defRPr>
             </a:pPr>
             <a:r>
-              <a:t>云端 API vs 本地 VLM</a:t>
-            </a:r>
-          </a:p>
-        </p:txBody>
-      </p:sp>
-      <p:graphicFrame>
-        <p:nvGraphicFramePr>
-          <p:cNvPr id="3" name="Table 2"/>
-          <p:cNvGraphicFramePr>
-            <a:graphicFrameLocks noGrp="1"/>
-          </p:cNvGraphicFramePr>
+              <a:t>规则在线更新：触发 → 决策 → 应用</a:t>
+            </a:r>
+          </a:p>
+        </p:txBody>
+      </p:sp>
+      <p:sp>
+        <p:nvSpPr>
+          <p:cNvPr id="4" name="TextBox 3"/>
+          <p:cNvSpPr txBox="1"/>
           <p:nvPr/>
-        </p:nvGraphicFramePr>
-        <p:xfrm>
-          <a:off x="457200" y="1371600"/>
-          <a:ext cx="11247120" cy="5029200"/>
-        </p:xfrm>
-        <a:graphic>
-          <a:graphicData uri="http://schemas.openxmlformats.org/drawingml/2006/table">
-            <a:tbl>
-              <a:tblPr firstRow="1" bandRow="1">
-                <a:tableStyleId>{5C22544A-7EE6-4342-B048-85BDC9FD1C3A}</a:tableStyleId>
-              </a:tblPr>
-              <a:tblGrid>
-                <a:gridCol w="2249424"/>
-                <a:gridCol w="2249424"/>
-                <a:gridCol w="2249424"/>
-                <a:gridCol w="2249424"/>
-                <a:gridCol w="2249424"/>
-              </a:tblGrid>
-              <a:tr h="838200">
-                <a:tc>
-                  <a:txBody>
-                    <a:bodyPr/>
-                    <a:lstStyle/>
-                    <a:p>
-                      <a:pPr>
-                        <a:defRPr sz="1600" b="1">
-                          <a:latin typeface="Microsoft YaHei"/>
-                        </a:defRPr>
-                      </a:pPr>
-                      <a:r>
-                        <a:t>模型</a:t>
-                      </a:r>
-                    </a:p>
-                  </a:txBody>
-                  <a:tcPr/>
-                </a:tc>
-                <a:tc>
-                  <a:txBody>
-                    <a:bodyPr/>
-                    <a:lstStyle/>
-                    <a:p>
-                      <a:pPr>
-                        <a:defRPr sz="1600" b="1">
-                          <a:latin typeface="Microsoft YaHei"/>
-                        </a:defRPr>
-                      </a:pPr>
-                      <a:r>
-                        <a:t>模态</a:t>
-                      </a:r>
-                    </a:p>
-                  </a:txBody>
-                  <a:tcPr/>
-                </a:tc>
-                <a:tc>
-                  <a:txBody>
-                    <a:bodyPr/>
-                    <a:lstStyle/>
-                    <a:p>
-                      <a:pPr>
-                        <a:defRPr sz="1600" b="1">
-                          <a:latin typeface="Microsoft YaHei"/>
-                        </a:defRPr>
-                      </a:pPr>
-                      <a:r>
-                        <a:t>struct 解析</a:t>
-                      </a:r>
-                    </a:p>
-                  </a:txBody>
-                  <a:tcPr/>
-                </a:tc>
-                <a:tc>
-                  <a:txBody>
-                    <a:bodyPr/>
-                    <a:lstStyle/>
-                    <a:p>
-                      <a:pPr>
-                        <a:defRPr sz="1600" b="1">
-                          <a:latin typeface="Microsoft YaHei"/>
-                        </a:defRPr>
-                      </a:pPr>
-                      <a:r>
-                        <a:t>延迟</a:t>
-                      </a:r>
-                    </a:p>
-                  </a:txBody>
-                  <a:tcPr/>
-                </a:tc>
-                <a:tc>
-                  <a:txBody>
-                    <a:bodyPr/>
-                    <a:lstStyle/>
-                    <a:p>
-                      <a:pPr>
-                        <a:defRPr sz="1600" b="1">
-                          <a:latin typeface="Microsoft YaHei"/>
-                        </a:defRPr>
-                      </a:pPr>
-                      <a:r>
-                        <a:t>结论</a:t>
-                      </a:r>
-                    </a:p>
-                  </a:txBody>
-                  <a:tcPr/>
-                </a:tc>
-              </a:tr>
-              <a:tr h="838200">
-                <a:tc>
-                  <a:txBody>
-                    <a:bodyPr/>
-                    <a:lstStyle/>
-                    <a:p>
-                      <a:pPr>
-                        <a:defRPr sz="1400">
-                          <a:latin typeface="Microsoft YaHei"/>
-                        </a:defRPr>
-                      </a:pPr>
-                      <a:r>
-                        <a:t>kimi-k2.7-code</a:t>
-                      </a:r>
-                    </a:p>
-                  </a:txBody>
-                  <a:tcPr/>
-                </a:tc>
-                <a:tc>
-                  <a:txBody>
-                    <a:bodyPr/>
-                    <a:lstStyle/>
-                    <a:p>
-                      <a:pPr>
-                        <a:defRPr sz="1400">
-                          <a:latin typeface="Microsoft YaHei"/>
-                        </a:defRPr>
-                      </a:pPr>
-                      <a:r>
-                        <a:t>文本</a:t>
-                      </a:r>
-                    </a:p>
-                  </a:txBody>
-                  <a:tcPr/>
-                </a:tc>
-                <a:tc>
-                  <a:txBody>
-                    <a:bodyPr/>
-                    <a:lstStyle/>
-                    <a:p>
-                      <a:pPr>
-                        <a:defRPr sz="1400">
-                          <a:latin typeface="Microsoft YaHei"/>
-                        </a:defRPr>
-                      </a:pPr>
-                      <a:r>
-                        <a:t>—</a:t>
-                      </a:r>
-                    </a:p>
-                  </a:txBody>
-                  <a:tcPr/>
-                </a:tc>
-                <a:tc>
-                  <a:txBody>
-                    <a:bodyPr/>
-                    <a:lstStyle/>
-                    <a:p>
-                      <a:pPr>
-                        <a:defRPr sz="1400">
-                          <a:latin typeface="Microsoft YaHei"/>
-                        </a:defRPr>
-                      </a:pPr>
-                      <a:r>
-                        <a:t>2.2s</a:t>
-                      </a:r>
-                    </a:p>
-                  </a:txBody>
-                  <a:tcPr/>
-                </a:tc>
-                <a:tc>
-                  <a:txBody>
-                    <a:bodyPr/>
-                    <a:lstStyle/>
-                    <a:p>
-                      <a:pPr>
-                        <a:defRPr sz="1400">
-                          <a:latin typeface="Microsoft YaHei"/>
-                        </a:defRPr>
-                      </a:pPr>
-                      <a:r>
-                        <a:t>最快文本，但无法推断 tap 坐标</a:t>
-                      </a:r>
-                    </a:p>
-                  </a:txBody>
-                  <a:tcPr/>
-                </a:tc>
-              </a:tr>
-              <a:tr h="838200">
-                <a:tc>
-                  <a:txBody>
-                    <a:bodyPr/>
-                    <a:lstStyle/>
-                    <a:p>
-                      <a:pPr>
-                        <a:defRPr sz="1400">
-                          <a:latin typeface="Microsoft YaHei"/>
-                        </a:defRPr>
-                      </a:pPr>
-                      <a:r>
-                        <a:t>mimo-v2.5</a:t>
-                      </a:r>
-                    </a:p>
-                  </a:txBody>
-                  <a:tcPr/>
-                </a:tc>
-                <a:tc>
-                  <a:txBody>
-                    <a:bodyPr/>
-                    <a:lstStyle/>
-                    <a:p>
-                      <a:pPr>
-                        <a:defRPr sz="1400">
-                          <a:latin typeface="Microsoft YaHei"/>
-                        </a:defRPr>
-                      </a:pPr>
-                      <a:r>
-                        <a:t>视觉</a:t>
-                      </a:r>
-                    </a:p>
-                  </a:txBody>
-                  <a:tcPr/>
-                </a:tc>
-                <a:tc>
-                  <a:txBody>
-                    <a:bodyPr/>
-                    <a:lstStyle/>
-                    <a:p>
-                      <a:pPr>
-                        <a:defRPr sz="1400">
-                          <a:latin typeface="Microsoft YaHei"/>
-                        </a:defRPr>
-                      </a:pPr>
-                      <a:r>
-                        <a:t>3/3</a:t>
-                      </a:r>
-                    </a:p>
-                  </a:txBody>
-                  <a:tcPr/>
-                </a:tc>
-                <a:tc>
-                  <a:txBody>
-                    <a:bodyPr/>
-                    <a:lstStyle/>
-                    <a:p>
-                      <a:pPr>
-                        <a:defRPr sz="1400">
-                          <a:latin typeface="Microsoft YaHei"/>
-                        </a:defRPr>
-                      </a:pPr>
-                      <a:r>
-                        <a:t>22-38s</a:t>
-                      </a:r>
-                    </a:p>
-                  </a:txBody>
-                  <a:tcPr/>
-                </a:tc>
-                <a:tc>
-                  <a:txBody>
-                    <a:bodyPr/>
-                    <a:lstStyle/>
-                    <a:p>
-                      <a:pPr>
-                        <a:defRPr sz="1400">
-                          <a:latin typeface="Microsoft YaHei"/>
-                        </a:defRPr>
-                      </a:pPr>
-                      <a:r>
-                        <a:t>视觉准确但太慢，适合离线</a:t>
-                      </a:r>
-                    </a:p>
-                  </a:txBody>
-                  <a:tcPr/>
-                </a:tc>
-              </a:tr>
-              <a:tr h="838200">
-                <a:tc>
-                  <a:txBody>
-                    <a:bodyPr/>
-                    <a:lstStyle/>
-                    <a:p>
-                      <a:pPr>
-                        <a:defRPr sz="1400">
-                          <a:latin typeface="Microsoft YaHei"/>
-                        </a:defRPr>
-                      </a:pPr>
-                      <a:r>
-                        <a:t>kimi-k2.6</a:t>
-                      </a:r>
-                    </a:p>
-                  </a:txBody>
-                  <a:tcPr/>
-                </a:tc>
-                <a:tc>
-                  <a:txBody>
-                    <a:bodyPr/>
-                    <a:lstStyle/>
-                    <a:p>
-                      <a:pPr>
-                        <a:defRPr sz="1400">
-                          <a:latin typeface="Microsoft YaHei"/>
-                        </a:defRPr>
-                      </a:pPr>
-                      <a:r>
-                        <a:t>视觉</a:t>
-                      </a:r>
-                    </a:p>
-                  </a:txBody>
-                  <a:tcPr/>
-                </a:tc>
-                <a:tc>
-                  <a:txBody>
-                    <a:bodyPr/>
-                    <a:lstStyle/>
-                    <a:p>
-                      <a:pPr>
-                        <a:defRPr sz="1400">
-                          <a:latin typeface="Microsoft YaHei"/>
-                        </a:defRPr>
-                      </a:pPr>
-                      <a:r>
-                        <a:t>0/3</a:t>
-                      </a:r>
-                    </a:p>
-                  </a:txBody>
-                  <a:tcPr/>
-                </a:tc>
-                <a:tc>
-                  <a:txBody>
-                    <a:bodyPr/>
-                    <a:lstStyle/>
-                    <a:p>
-                      <a:pPr>
-                        <a:defRPr sz="1400">
-                          <a:latin typeface="Microsoft YaHei"/>
-                        </a:defRPr>
-                      </a:pPr>
-                      <a:r>
-                        <a:t>8-10s</a:t>
-                      </a:r>
-                    </a:p>
-                  </a:txBody>
-                  <a:tcPr/>
-                </a:tc>
-                <a:tc>
-                  <a:txBody>
-                    <a:bodyPr/>
-                    <a:lstStyle/>
-                    <a:p>
-                      <a:pPr>
-                        <a:defRPr sz="1400">
-                          <a:latin typeface="Microsoft YaHei"/>
-                        </a:defRPr>
-                      </a:pPr>
-                      <a:r>
-                        <a:t>思考链截断，需更强输出契约</a:t>
-                      </a:r>
-                    </a:p>
-                  </a:txBody>
-                  <a:tcPr/>
-                </a:tc>
-              </a:tr>
-              <a:tr h="838200">
-                <a:tc>
-                  <a:txBody>
-                    <a:bodyPr/>
-                    <a:lstStyle/>
-                    <a:p>
-                      <a:pPr>
-                        <a:defRPr sz="1400">
-                          <a:latin typeface="Microsoft YaHei"/>
-                        </a:defRPr>
-                      </a:pPr>
-                      <a:r>
-                        <a:t>gemma-4-E4B</a:t>
-                      </a:r>
-                    </a:p>
-                  </a:txBody>
-                  <a:tcPr/>
-                </a:tc>
-                <a:tc>
-                  <a:txBody>
-                    <a:bodyPr/>
-                    <a:lstStyle/>
-                    <a:p>
-                      <a:pPr>
-                        <a:defRPr sz="1400">
-                          <a:latin typeface="Microsoft YaHei"/>
-                        </a:defRPr>
-                      </a:pPr>
-                      <a:r>
-                        <a:t>本地视觉</a:t>
-                      </a:r>
-                    </a:p>
-                  </a:txBody>
-                  <a:tcPr/>
-                </a:tc>
-                <a:tc>
-                  <a:txBody>
-                    <a:bodyPr/>
-                    <a:lstStyle/>
-                    <a:p>
-                      <a:pPr>
-                        <a:defRPr sz="1400">
-                          <a:latin typeface="Microsoft YaHei"/>
-                        </a:defRPr>
-                      </a:pPr>
-                      <a:r>
-                        <a:t>3/3</a:t>
-                      </a:r>
-                    </a:p>
-                  </a:txBody>
-                  <a:tcPr/>
-                </a:tc>
-                <a:tc>
-                  <a:txBody>
-                    <a:bodyPr/>
-                    <a:lstStyle/>
-                    <a:p>
-                      <a:pPr>
-                        <a:defRPr sz="1400">
-                          <a:latin typeface="Microsoft YaHei"/>
-                        </a:defRPr>
-                      </a:pPr>
-                      <a:r>
-                        <a:t>4.8s/帧</a:t>
-                      </a:r>
-                    </a:p>
-                  </a:txBody>
-                  <a:tcPr/>
-                </a:tc>
-                <a:tc>
-                  <a:txBody>
-                    <a:bodyPr/>
-                    <a:lstStyle/>
-                    <a:p>
-                      <a:pPr>
-                        <a:defRPr sz="1400">
-                          <a:latin typeface="Microsoft YaHei"/>
-                        </a:defRPr>
-                      </a:pPr>
-                      <a:r>
-                        <a:t>本地最佳，离线可用</a:t>
-                      </a:r>
-                    </a:p>
-                  </a:txBody>
-                  <a:tcPr/>
-                </a:tc>
-              </a:tr>
-              <a:tr h="838200">
-                <a:tc>
-                  <a:txBody>
-                    <a:bodyPr/>
-                    <a:lstStyle/>
-                    <a:p>
-                      <a:pPr>
-                        <a:defRPr sz="1400">
-                          <a:latin typeface="Microsoft YaHei"/>
-                        </a:defRPr>
-                      </a:pPr>
-                      <a:r>
-                        <a:t>Qwen3.5-9B</a:t>
-                      </a:r>
-                    </a:p>
-                  </a:txBody>
-                  <a:tcPr/>
-                </a:tc>
-                <a:tc>
-                  <a:txBody>
-                    <a:bodyPr/>
-                    <a:lstStyle/>
-                    <a:p>
-                      <a:pPr>
-                        <a:defRPr sz="1400">
-                          <a:latin typeface="Microsoft YaHei"/>
-                        </a:defRPr>
-                      </a:pPr>
-                      <a:r>
-                        <a:t>本地视觉</a:t>
-                      </a:r>
-                    </a:p>
-                  </a:txBody>
-                  <a:tcPr/>
-                </a:tc>
-                <a:tc>
-                  <a:txBody>
-                    <a:bodyPr/>
-                    <a:lstStyle/>
-                    <a:p>
-                      <a:pPr>
-                        <a:defRPr sz="1400">
-                          <a:latin typeface="Microsoft YaHei"/>
-                        </a:defRPr>
-                      </a:pPr>
-                      <a:r>
-                        <a:t>2/3</a:t>
-                      </a:r>
-                    </a:p>
-                  </a:txBody>
-                  <a:tcPr/>
-                </a:tc>
-                <a:tc>
-                  <a:txBody>
-                    <a:bodyPr/>
-                    <a:lstStyle/>
-                    <a:p>
-                      <a:pPr>
-                        <a:defRPr sz="1400">
-                          <a:latin typeface="Microsoft YaHei"/>
-                        </a:defRPr>
-                      </a:pPr>
-                      <a:r>
-                        <a:t>16.9s/帧</a:t>
-                      </a:r>
-                    </a:p>
-                  </a:txBody>
-                  <a:tcPr/>
-                </a:tc>
-                <a:tc>
-                  <a:txBody>
-                    <a:bodyPr/>
-                    <a:lstStyle/>
-                    <a:p>
-                      <a:pPr>
-                        <a:defRPr sz="1400">
-                          <a:latin typeface="Microsoft YaHei"/>
-                        </a:defRPr>
-                      </a:pPr>
-                      <a:r>
-                        <a:t>边缘可用</a:t>
-                      </a:r>
-                    </a:p>
-                  </a:txBody>
-                  <a:tcPr/>
-                </a:tc>
-              </a:tr>
-            </a:tbl>
-          </a:graphicData>
-        </a:graphic>
-      </p:graphicFrame>
+        </p:nvSpPr>
+        <p:spPr>
+          <a:xfrm>
+            <a:off x="548640" y="1234440"/>
+            <a:ext cx="11064240" cy="5029200"/>
+          </a:xfrm>
+          <a:prstGeom prst="rect">
+            <a:avLst/>
+          </a:prstGeom>
+          <a:noFill/>
+        </p:spPr>
+        <p:txBody>
+          <a:bodyPr wrap="square">
+            <a:spAutoFit/>
+          </a:bodyPr>
+          <a:lstStyle/>
+          <a:p>
+            <a:pPr algn="l">
+              <a:spcAft>
+                <a:spcPts val="1000"/>
+              </a:spcAft>
+              <a:defRPr sz="1800" b="0">
+                <a:solidFill>
+                  <a:srgbClr val="1E2933"/>
+                </a:solidFill>
+                <a:latin typeface="Microsoft YaHei"/>
+              </a:defRPr>
+            </a:pPr>
+            <a:r>
+              <a:t>触发：composite 连续低迷、stall 超过阈值、世界模型 stale、L0/L2 决策冲突。</a:t>
+            </a:r>
+          </a:p>
+          <a:p>
+            <a:pPr algn="l">
+              <a:spcAft>
+                <a:spcPts val="1000"/>
+              </a:spcAft>
+              <a:defRPr sz="1800" b="0">
+                <a:solidFill>
+                  <a:srgbClr val="1E2933"/>
+                </a:solidFill>
+                <a:latin typeface="Microsoft YaHei"/>
+              </a:defRPr>
+            </a:pPr>
+            <a:r>
+              <a:t>L1 本地 VLM：看截图生成结构化视觉上下文，告诉云端 API 当前画面里有哪些可交互元素。</a:t>
+            </a:r>
+          </a:p>
+          <a:p>
+            <a:pPr algn="l">
+              <a:spcAft>
+                <a:spcPts val="1000"/>
+              </a:spcAft>
+              <a:defRPr sz="1800" b="0">
+                <a:solidFill>
+                  <a:srgbClr val="1E2933"/>
+                </a:solidFill>
+                <a:latin typeface="Microsoft YaHei"/>
+              </a:defRPr>
+            </a:pPr>
+            <a:r>
+              <a:t>L2 云端 API：输出结构化规则更新（参数 / phase contract / memory entry / 可选代码片段）。</a:t>
+            </a:r>
+          </a:p>
+          <a:p>
+            <a:pPr algn="l">
+              <a:spcAft>
+                <a:spcPts val="1000"/>
+              </a:spcAft>
+              <a:defRPr sz="1800" b="0">
+                <a:solidFill>
+                  <a:srgbClr val="1E2933"/>
+                </a:solidFill>
+                <a:latin typeface="Microsoft YaHei"/>
+              </a:defRPr>
+            </a:pPr>
+            <a:r>
+              <a:t>应用：保守方案只改内存参数和 strategy memory；代码级更新需 diff + pytest + 短轨迹验证 + 自动回滚。</a:t>
+            </a:r>
+          </a:p>
+          <a:p>
+            <a:pPr algn="l">
+              <a:spcAft>
+                <a:spcPts val="1000"/>
+              </a:spcAft>
+              <a:defRPr sz="1800" b="0">
+                <a:solidFill>
+                  <a:srgbClr val="1E2933"/>
+                </a:solidFill>
+                <a:latin typeface="Microsoft YaHei"/>
+              </a:defRPr>
+            </a:pPr>
+            <a:r>
+              <a:t>效果预期：把「拿到钱就升级」的短视行为，改成「攒够钱批量升级」的长程最优策略。</a:t>
+            </a:r>
+          </a:p>
+        </p:txBody>
+      </p:sp>
+      <p:sp>
+        <p:nvSpPr>
+          <p:cNvPr id="5" name="Rectangle 4"/>
+          <p:cNvSpPr/>
+          <p:nvPr/>
+        </p:nvSpPr>
+        <p:spPr>
+          <a:xfrm>
+            <a:off x="0" y="6537960"/>
+            <a:ext cx="12191695" cy="18288"/>
+          </a:xfrm>
+          <a:prstGeom prst="rect">
+            <a:avLst/>
+          </a:prstGeom>
+          <a:solidFill>
+            <a:srgbClr val="0096C7"/>
+          </a:solidFill>
+          <a:ln/>
+        </p:spPr>
+        <p:style>
+          <a:lnRef idx="1">
+            <a:schemeClr val="accent1"/>
+          </a:lnRef>
+          <a:fillRef idx="3">
+            <a:schemeClr val="accent1"/>
+          </a:fillRef>
+          <a:effectRef idx="2">
+            <a:schemeClr val="accent1"/>
+          </a:effectRef>
+          <a:fontRef idx="minor">
+            <a:schemeClr val="lt1"/>
+          </a:fontRef>
+        </p:style>
+        <p:txBody>
+          <a:bodyPr rtlCol="0" anchor="ctr"/>
+          <a:lstStyle/>
+          <a:p>
+            <a:pPr algn="ctr"/>
+          </a:p>
+        </p:txBody>
+      </p:sp>
+      <p:sp>
+        <p:nvSpPr>
+          <p:cNvPr id="6" name="TextBox 5"/>
+          <p:cNvSpPr txBox="1"/>
+          <p:nvPr/>
+        </p:nvSpPr>
+        <p:spPr>
+          <a:xfrm>
+            <a:off x="457200" y="6583680"/>
+            <a:ext cx="3657600" cy="228600"/>
+          </a:xfrm>
+          <a:prstGeom prst="rect">
+            <a:avLst/>
+          </a:prstGeom>
+          <a:noFill/>
+        </p:spPr>
+        <p:txBody>
+          <a:bodyPr wrap="none">
+            <a:spAutoFit/>
+          </a:bodyPr>
+          <a:lstStyle/>
+          <a:p>
+            <a:pPr algn="l">
+              <a:defRPr sz="1000" b="0">
+                <a:solidFill>
+                  <a:srgbClr val="6C757D"/>
+                </a:solidFill>
+                <a:latin typeface="Microsoft YaHei"/>
+              </a:defRPr>
+            </a:pPr>
+            <a:r>
+              <a:t>smallgameagent · LLM/VLM + 规则驱动</a:t>
+            </a:r>
+          </a:p>
+        </p:txBody>
+      </p:sp>
+      <p:sp>
+        <p:nvSpPr>
+          <p:cNvPr id="7" name="TextBox 6"/>
+          <p:cNvSpPr txBox="1"/>
+          <p:nvPr/>
+        </p:nvSpPr>
+        <p:spPr>
+          <a:xfrm>
+            <a:off x="10789920" y="6583680"/>
+            <a:ext cx="914400" cy="228600"/>
+          </a:xfrm>
+          <a:prstGeom prst="rect">
+            <a:avLst/>
+          </a:prstGeom>
+          <a:noFill/>
+        </p:spPr>
+        <p:txBody>
+          <a:bodyPr wrap="none">
+            <a:spAutoFit/>
+          </a:bodyPr>
+          <a:lstStyle/>
+          <a:p>
+            <a:pPr algn="r">
+              <a:defRPr sz="1000" b="0">
+                <a:solidFill>
+                  <a:srgbClr val="6C757D"/>
+                </a:solidFill>
+                <a:latin typeface="Microsoft YaHei"/>
+              </a:defRPr>
+            </a:pPr>
+            <a:r>
+              <a:t>7/11</a:t>
+            </a:r>
+          </a:p>
+        </p:txBody>
+      </p:sp>
     </p:spTree>
   </p:cSld>
   <p:clrMapOvr>
@@ -6150,14 +9079,55 @@
       <p:grpSpPr/>
       <p:sp>
         <p:nvSpPr>
-          <p:cNvPr id="2" name="TextBox 1"/>
+          <p:cNvPr id="2" name="Rectangle 1"/>
+          <p:cNvSpPr/>
+          <p:nvPr/>
+        </p:nvSpPr>
+        <p:spPr>
+          <a:xfrm>
+            <a:off x="0" y="0"/>
+            <a:ext cx="12191695" cy="960120"/>
+          </a:xfrm>
+          <a:prstGeom prst="rect">
+            <a:avLst/>
+          </a:prstGeom>
+          <a:solidFill>
+            <a:srgbClr val="1A237E"/>
+          </a:solidFill>
+          <a:ln/>
+        </p:spPr>
+        <p:style>
+          <a:lnRef idx="1">
+            <a:schemeClr val="accent1"/>
+          </a:lnRef>
+          <a:fillRef idx="3">
+            <a:schemeClr val="accent1"/>
+          </a:fillRef>
+          <a:effectRef idx="2">
+            <a:schemeClr val="accent1"/>
+          </a:effectRef>
+          <a:fontRef idx="minor">
+            <a:schemeClr val="lt1"/>
+          </a:fontRef>
+        </p:style>
+        <p:txBody>
+          <a:bodyPr rtlCol="0" anchor="ctr"/>
+          <a:lstStyle/>
+          <a:p>
+            <a:pPr algn="ctr"/>
+          </a:p>
+        </p:txBody>
+      </p:sp>
+      <p:sp>
+        <p:nvSpPr>
+          <p:cNvPr id="3" name="TextBox 2"/>
           <p:cNvSpPr txBox="1"/>
           <p:nvPr/>
         </p:nvSpPr>
         <p:spPr>
           <a:xfrm>
-            <a:off x="457200" y="365760"/>
-            <a:ext cx="11247120" cy="822960"/>
+            <a:off x="457200" y="228600"/>
+            <a:ext cx="11247120" cy="548640"/>
           </a:xfrm>
           <a:prstGeom prst="rect">
             <a:avLst/>
@@ -6170,27 +9140,30 @@
           </a:bodyPr>
           <a:lstStyle/>
           <a:p>
-            <a:pPr>
-              <a:defRPr sz="3200" b="1">
+            <a:pPr algn="l">
+              <a:defRPr sz="3000" b="1">
+                <a:solidFill>
+                  <a:srgbClr val="F3F6F9"/>
+                </a:solidFill>
                 <a:latin typeface="Microsoft YaHei"/>
               </a:defRPr>
             </a:pPr>
             <a:r>
-              <a:t>关键修复（影响结论可信度）</a:t>
-            </a:r>
-          </a:p>
-        </p:txBody>
-      </p:sp>
-      <p:sp>
-        <p:nvSpPr>
-          <p:cNvPr id="3" name="TextBox 2"/>
+              <a:t>多 Provider 云端 API 配置</a:t>
+            </a:r>
+          </a:p>
+        </p:txBody>
+      </p:sp>
+      <p:sp>
+        <p:nvSpPr>
+          <p:cNvPr id="4" name="TextBox 3"/>
           <p:cNvSpPr txBox="1"/>
           <p:nvPr/>
         </p:nvSpPr>
         <p:spPr>
           <a:xfrm>
-            <a:off x="548640" y="1371600"/>
-            <a:ext cx="11064240" cy="5120640"/>
+            <a:off x="548640" y="1234440"/>
+            <a:ext cx="11064240" cy="5029200"/>
           </a:xfrm>
           <a:prstGeom prst="rect">
             <a:avLst/>
@@ -6203,94 +9176,196 @@
           </a:bodyPr>
           <a:lstStyle/>
           <a:p>
-            <a:pPr>
+            <a:pPr algn="l">
               <a:spcAft>
                 <a:spcPts val="1000"/>
               </a:spcAft>
-              <a:defRPr sz="2000">
+              <a:defRPr sz="1800" b="0">
+                <a:solidFill>
+                  <a:srgbClr val="1E2933"/>
+                </a:solidFill>
                 <a:latin typeface="Microsoft YaHei"/>
               </a:defRPr>
             </a:pPr>
             <a:r>
-              <a:t>• probe 终止假阳性：cc.Button._transitionFinished（含 'finish'）被 WIN 正则误命中</a:t>
-            </a:r>
-          </a:p>
-          <a:p>
-            <a:pPr>
+              <a:t>新增 MultiProviderClient，统一接入 OpenCodeGo / Kimi / DeepSeek / MiMo（xiaomi）/ Qwen。</a:t>
+            </a:r>
+          </a:p>
+          <a:p>
+            <a:pPr algn="l">
               <a:spcAft>
                 <a:spcPts val="1000"/>
               </a:spcAft>
-              <a:defRPr sz="2000">
+              <a:defRPr sz="1800" b="0">
+                <a:solidFill>
+                  <a:srgbClr val="1E2933"/>
+                </a:solidFill>
                 <a:latin typeface="Microsoft YaHei"/>
               </a:defRPr>
             </a:pPr>
             <a:r>
-              <a:t>•   → _is_finished 改为佐证制：win 面板节点 / 胜利 analytics / 非 cc.* 强胜利标志</a:t>
-            </a:r>
-          </a:p>
-          <a:p>
-            <a:pPr>
+              <a:t>API key 统一存放在 .env，已加入 .gitignore，绝不会被提交。</a:t>
+            </a:r>
+          </a:p>
+          <a:p>
+            <a:pPr algn="l">
               <a:spcAft>
                 <a:spcPts val="1000"/>
               </a:spcAft>
-              <a:defRPr sz="2000">
+              <a:defRPr sz="1800" b="0">
+                <a:solidFill>
+                  <a:srgbClr val="1E2933"/>
+                </a:solidFill>
                 <a:latin typeface="Microsoft YaHei"/>
               </a:defRPr>
             </a:pPr>
             <a:r>
-              <a:t>•   → 修复后 00482/00342 从 1 步假阳性（0.700）→ 25 步真实运行（0.150）</a:t>
-            </a:r>
-          </a:p>
-          <a:p>
-            <a:pPr>
+              <a:t>通过 CLOUD_PROVIDER 环境变量即可切换 provider；模型名随 provider 自动默认。</a:t>
+            </a:r>
+          </a:p>
+          <a:p>
+            <a:pPr algn="l">
               <a:spcAft>
                 <a:spcPts val="1000"/>
               </a:spcAft>
-              <a:defRPr sz="2000">
+              <a:defRPr sz="1800" b="0">
+                <a:solidFill>
+                  <a:srgbClr val="1E2933"/>
+                </a:solidFill>
                 <a:latin typeface="Microsoft YaHei"/>
               </a:defRPr>
             </a:pPr>
             <a:r>
-              <a:t>• rubric 动作盲区：tap 全被当 stall → 修复后 tap 算有效交互</a:t>
-            </a:r>
-          </a:p>
-          <a:p>
-            <a:pPr>
+              <a:t>kimi 系列自动省略 temperature 参数，避免 400 错误。</a:t>
+            </a:r>
+          </a:p>
+          <a:p>
+            <a:pPr algn="l">
               <a:spcAft>
                 <a:spcPts val="1000"/>
               </a:spcAft>
-              <a:defRPr sz="2000">
+              <a:defRPr sz="1800" b="0">
+                <a:solidFill>
+                  <a:srgbClr val="1E2933"/>
+                </a:solidFill>
                 <a:latin typeface="Microsoft YaHei"/>
               </a:defRPr>
             </a:pPr>
             <a:r>
-              <a:t>•   → multi-bus 的 24 tap/30 步才得到 activity=1.0 的合理评价</a:t>
-            </a:r>
-          </a:p>
-          <a:p>
-            <a:pPr>
-              <a:spcAft>
-                <a:spcPts val="1000"/>
-              </a:spcAft>
-              <a:defRPr sz="2000">
+              <a:t>保持 OpenCodeGoClient 兼容，现有调用无需修改。</a:t>
+            </a:r>
+          </a:p>
+        </p:txBody>
+      </p:sp>
+      <p:sp>
+        <p:nvSpPr>
+          <p:cNvPr id="5" name="Rectangle 4"/>
+          <p:cNvSpPr/>
+          <p:nvPr/>
+        </p:nvSpPr>
+        <p:spPr>
+          <a:xfrm>
+            <a:off x="0" y="6537960"/>
+            <a:ext cx="12191695" cy="18288"/>
+          </a:xfrm>
+          <a:prstGeom prst="rect">
+            <a:avLst/>
+          </a:prstGeom>
+          <a:solidFill>
+            <a:srgbClr val="0096C7"/>
+          </a:solidFill>
+          <a:ln/>
+        </p:spPr>
+        <p:style>
+          <a:lnRef idx="1">
+            <a:schemeClr val="accent1"/>
+          </a:lnRef>
+          <a:fillRef idx="3">
+            <a:schemeClr val="accent1"/>
+          </a:fillRef>
+          <a:effectRef idx="2">
+            <a:schemeClr val="accent1"/>
+          </a:effectRef>
+          <a:fontRef idx="minor">
+            <a:schemeClr val="lt1"/>
+          </a:fontRef>
+        </p:style>
+        <p:txBody>
+          <a:bodyPr rtlCol="0" anchor="ctr"/>
+          <a:lstStyle/>
+          <a:p>
+            <a:pPr algn="ctr"/>
+          </a:p>
+        </p:txBody>
+      </p:sp>
+      <p:sp>
+        <p:nvSpPr>
+          <p:cNvPr id="6" name="TextBox 5"/>
+          <p:cNvSpPr txBox="1"/>
+          <p:nvPr/>
+        </p:nvSpPr>
+        <p:spPr>
+          <a:xfrm>
+            <a:off x="457200" y="6583680"/>
+            <a:ext cx="3657600" cy="228600"/>
+          </a:xfrm>
+          <a:prstGeom prst="rect">
+            <a:avLst/>
+          </a:prstGeom>
+          <a:noFill/>
+        </p:spPr>
+        <p:txBody>
+          <a:bodyPr wrap="none">
+            <a:spAutoFit/>
+          </a:bodyPr>
+          <a:lstStyle/>
+          <a:p>
+            <a:pPr algn="l">
+              <a:defRPr sz="1000" b="0">
+                <a:solidFill>
+                  <a:srgbClr val="6C757D"/>
+                </a:solidFill>
                 <a:latin typeface="Microsoft YaHei"/>
               </a:defRPr>
             </a:pPr>
             <a:r>
-              <a:t>• generic fallback：22 个无 profile 游戏不再抛错，用未校准基线驱动+采集数据</a:t>
-            </a:r>
-          </a:p>
-          <a:p>
-            <a:pPr>
-              <a:spcAft>
-                <a:spcPts val="1000"/>
-              </a:spcAft>
-              <a:defRPr sz="2000">
+              <a:t>smallgameagent · LLM/VLM + 规则驱动</a:t>
+            </a:r>
+          </a:p>
+        </p:txBody>
+      </p:sp>
+      <p:sp>
+        <p:nvSpPr>
+          <p:cNvPr id="7" name="TextBox 6"/>
+          <p:cNvSpPr txBox="1"/>
+          <p:nvPr/>
+        </p:nvSpPr>
+        <p:spPr>
+          <a:xfrm>
+            <a:off x="10789920" y="6583680"/>
+            <a:ext cx="914400" cy="228600"/>
+          </a:xfrm>
+          <a:prstGeom prst="rect">
+            <a:avLst/>
+          </a:prstGeom>
+          <a:noFill/>
+        </p:spPr>
+        <p:txBody>
+          <a:bodyPr wrap="none">
+            <a:spAutoFit/>
+          </a:bodyPr>
+          <a:lstStyle/>
+          <a:p>
+            <a:pPr algn="r">
+              <a:defRPr sz="1000" b="0">
+                <a:solidFill>
+                  <a:srgbClr val="6C757D"/>
+                </a:solidFill>
                 <a:latin typeface="Microsoft YaHei"/>
               </a:defRPr>
             </a:pPr>
             <a:r>
-              <a:t>• write_profile 坐标系：设计分辨率（720x1560 左下）→ CSS 视口（375x812 顶左）</a:t>
+              <a:t>8/11</a:t>
             </a:r>
           </a:p>
         </p:txBody>
@@ -6315,14 +9390,55 @@
       <p:grpSpPr/>
       <p:sp>
         <p:nvSpPr>
-          <p:cNvPr id="2" name="TextBox 1"/>
+          <p:cNvPr id="2" name="Rectangle 1"/>
+          <p:cNvSpPr/>
+          <p:nvPr/>
+        </p:nvSpPr>
+        <p:spPr>
+          <a:xfrm>
+            <a:off x="0" y="0"/>
+            <a:ext cx="12191695" cy="960120"/>
+          </a:xfrm>
+          <a:prstGeom prst="rect">
+            <a:avLst/>
+          </a:prstGeom>
+          <a:solidFill>
+            <a:srgbClr val="1A237E"/>
+          </a:solidFill>
+          <a:ln/>
+        </p:spPr>
+        <p:style>
+          <a:lnRef idx="1">
+            <a:schemeClr val="accent1"/>
+          </a:lnRef>
+          <a:fillRef idx="3">
+            <a:schemeClr val="accent1"/>
+          </a:fillRef>
+          <a:effectRef idx="2">
+            <a:schemeClr val="accent1"/>
+          </a:effectRef>
+          <a:fontRef idx="minor">
+            <a:schemeClr val="lt1"/>
+          </a:fontRef>
+        </p:style>
+        <p:txBody>
+          <a:bodyPr rtlCol="0" anchor="ctr"/>
+          <a:lstStyle/>
+          <a:p>
+            <a:pPr algn="ctr"/>
+          </a:p>
+        </p:txBody>
+      </p:sp>
+      <p:sp>
+        <p:nvSpPr>
+          <p:cNvPr id="3" name="TextBox 2"/>
           <p:cNvSpPr txBox="1"/>
           <p:nvPr/>
         </p:nvSpPr>
         <p:spPr>
           <a:xfrm>
-            <a:off x="457200" y="365760"/>
-            <a:ext cx="11247120" cy="822960"/>
+            <a:off x="457200" y="228600"/>
+            <a:ext cx="11247120" cy="548640"/>
           </a:xfrm>
           <a:prstGeom prst="rect">
             <a:avLst/>
@@ -6335,27 +9451,30 @@
           </a:bodyPr>
           <a:lstStyle/>
           <a:p>
-            <a:pPr>
-              <a:defRPr sz="3200" b="1">
+            <a:pPr algn="l">
+              <a:defRPr sz="3000" b="1">
+                <a:solidFill>
+                  <a:srgbClr val="F3F6F9"/>
+                </a:solidFill>
                 <a:latin typeface="Microsoft YaHei"/>
               </a:defRPr>
             </a:pPr>
             <a:r>
-              <a:t>L2 输出契约修复（hierarchical）</a:t>
-            </a:r>
-          </a:p>
-        </p:txBody>
-      </p:sp>
-      <p:sp>
-        <p:nvSpPr>
-          <p:cNvPr id="3" name="TextBox 2"/>
+              <a:t>关键修复：让评测结果更可信</a:t>
+            </a:r>
+          </a:p>
+        </p:txBody>
+      </p:sp>
+      <p:sp>
+        <p:nvSpPr>
+          <p:cNvPr id="4" name="TextBox 3"/>
           <p:cNvSpPr txBox="1"/>
           <p:nvPr/>
         </p:nvSpPr>
         <p:spPr>
           <a:xfrm>
-            <a:off x="548640" y="1371600"/>
-            <a:ext cx="11064240" cy="5120640"/>
+            <a:off x="548640" y="1234440"/>
+            <a:ext cx="11064240" cy="5029200"/>
           </a:xfrm>
           <a:prstGeom prst="rect">
             <a:avLst/>
@@ -6368,81 +9487,196 @@
           </a:bodyPr>
           <a:lstStyle/>
           <a:p>
-            <a:pPr>
+            <a:pPr algn="l">
               <a:spcAft>
                 <a:spcPts val="1000"/>
               </a:spcAft>
-              <a:defRPr sz="2000">
+              <a:defRPr sz="1800" b="0">
+                <a:solidFill>
+                  <a:srgbClr val="1E2933"/>
+                </a:solidFill>
                 <a:latin typeface="Microsoft YaHei"/>
               </a:defRPr>
             </a:pPr>
             <a:r>
-              <a:t>• 问题：云端 API 的 macro-plan 是抽象文本，L0 无法执行 → hierarchical 全部 activity=0</a:t>
-            </a:r>
-          </a:p>
-          <a:p>
-            <a:pPr>
+              <a:t>probe 终止假阳性：cc.Button._transitionFinished 被 WIN 正则误命中 → 改为佐证制完成判定。</a:t>
+            </a:r>
+          </a:p>
+          <a:p>
+            <a:pPr algn="l">
               <a:spcAft>
                 <a:spcPts val="1000"/>
               </a:spcAft>
-              <a:defRPr sz="2000">
+              <a:defRPr sz="1800" b="0">
+                <a:solidFill>
+                  <a:srgbClr val="1E2933"/>
+                </a:solidFill>
                 <a:latin typeface="Microsoft YaHei"/>
               </a:defRPr>
             </a:pPr>
             <a:r>
-              <a:t>• 修复：L2 输出可执行指令队列（tap/move 带坐标 + 设计→CSS 坐标转换）</a:t>
-            </a:r>
-          </a:p>
-          <a:p>
-            <a:pPr>
+              <a:t>失败面板处理：minify 后组件名变单字母，改按节点名匹配 retry/continue，避开 download 广告陷阱。</a:t>
+            </a:r>
+          </a:p>
+          <a:p>
+            <a:pPr algn="l">
               <a:spcAft>
                 <a:spcPts val="1000"/>
               </a:spcAft>
-              <a:defRPr sz="2000">
+              <a:defRPr sz="1800" b="0">
+                <a:solidFill>
+                  <a:srgbClr val="1E2933"/>
+                </a:solidFill>
                 <a:latin typeface="Microsoft YaHei"/>
               </a:defRPr>
             </a:pPr>
             <a:r>
-              <a:t>• 验证：L2 队列架构正确（24/25 步来自 L2），但纯文本 API 无视觉 → 坐标全是幻觉</a:t>
-            </a:r>
-          </a:p>
-          <a:p>
-            <a:pPr>
+              <a:t>rubric 动作盲区：tap 不再被计为 stall，multi-bus 的 activity=1.0 才真实可信。</a:t>
+            </a:r>
+          </a:p>
+          <a:p>
+            <a:pPr algn="l">
               <a:spcAft>
                 <a:spcPts val="1000"/>
               </a:spcAft>
-              <a:defRPr sz="2000">
+              <a:defRPr sz="1800" b="0">
+                <a:solidFill>
+                  <a:srgbClr val="1E2933"/>
+                </a:solidFill>
                 <a:latin typeface="Microsoft YaHei"/>
               </a:defRPr>
             </a:pPr>
             <a:r>
-              <a:t>•   → composite 反而更差（0.055 vs rule 0.114）</a:t>
-            </a:r>
-          </a:p>
-          <a:p>
-            <a:pPr>
+              <a:t>generic fallback：22 个无 profile 游戏不再抛错，用未校准基线驱动并采集数据。</a:t>
+            </a:r>
+          </a:p>
+          <a:p>
+            <a:pPr algn="l">
               <a:spcAft>
                 <a:spcPts val="1000"/>
               </a:spcAft>
-              <a:defRPr sz="2000">
+              <a:defRPr sz="1800" b="0">
+                <a:solidFill>
+                  <a:srgbClr val="1E2933"/>
+                </a:solidFill>
                 <a:latin typeface="Microsoft YaHei"/>
               </a:defRPr>
             </a:pPr>
             <a:r>
-              <a:t>• 修正方向：L2 改为输出目标名称（'UnlockItem_1'），L0 用 probe screenPosition 自行映射坐标</a:t>
-            </a:r>
-          </a:p>
-          <a:p>
-            <a:pPr>
-              <a:spcAft>
-                <a:spcPts val="1000"/>
-              </a:spcAft>
-              <a:defRPr sz="2000">
+              <a:t>L2 输出契约：从抽象文本改为可执行指令队列，验证架构正确。</a:t>
+            </a:r>
+          </a:p>
+        </p:txBody>
+      </p:sp>
+      <p:sp>
+        <p:nvSpPr>
+          <p:cNvPr id="5" name="Rectangle 4"/>
+          <p:cNvSpPr/>
+          <p:nvPr/>
+        </p:nvSpPr>
+        <p:spPr>
+          <a:xfrm>
+            <a:off x="0" y="6537960"/>
+            <a:ext cx="12191695" cy="18288"/>
+          </a:xfrm>
+          <a:prstGeom prst="rect">
+            <a:avLst/>
+          </a:prstGeom>
+          <a:solidFill>
+            <a:srgbClr val="0096C7"/>
+          </a:solidFill>
+          <a:ln/>
+        </p:spPr>
+        <p:style>
+          <a:lnRef idx="1">
+            <a:schemeClr val="accent1"/>
+          </a:lnRef>
+          <a:fillRef idx="3">
+            <a:schemeClr val="accent1"/>
+          </a:fillRef>
+          <a:effectRef idx="2">
+            <a:schemeClr val="accent1"/>
+          </a:effectRef>
+          <a:fontRef idx="minor">
+            <a:schemeClr val="lt1"/>
+          </a:fontRef>
+        </p:style>
+        <p:txBody>
+          <a:bodyPr rtlCol="0" anchor="ctr"/>
+          <a:lstStyle/>
+          <a:p>
+            <a:pPr algn="ctr"/>
+          </a:p>
+        </p:txBody>
+      </p:sp>
+      <p:sp>
+        <p:nvSpPr>
+          <p:cNvPr id="6" name="TextBox 5"/>
+          <p:cNvSpPr txBox="1"/>
+          <p:nvPr/>
+        </p:nvSpPr>
+        <p:spPr>
+          <a:xfrm>
+            <a:off x="457200" y="6583680"/>
+            <a:ext cx="3657600" cy="228600"/>
+          </a:xfrm>
+          <a:prstGeom prst="rect">
+            <a:avLst/>
+          </a:prstGeom>
+          <a:noFill/>
+        </p:spPr>
+        <p:txBody>
+          <a:bodyPr wrap="none">
+            <a:spAutoFit/>
+          </a:bodyPr>
+          <a:lstStyle/>
+          <a:p>
+            <a:pPr algn="l">
+              <a:defRPr sz="1000" b="0">
+                <a:solidFill>
+                  <a:srgbClr val="6C757D"/>
+                </a:solidFill>
                 <a:latin typeface="Microsoft YaHei"/>
               </a:defRPr>
             </a:pPr>
             <a:r>
-              <a:t>•   → L2 不需要视觉也能工作，L0 保留几何准确性</a:t>
+              <a:t>smallgameagent · LLM/VLM + 规则驱动</a:t>
+            </a:r>
+          </a:p>
+        </p:txBody>
+      </p:sp>
+      <p:sp>
+        <p:nvSpPr>
+          <p:cNvPr id="7" name="TextBox 6"/>
+          <p:cNvSpPr txBox="1"/>
+          <p:nvPr/>
+        </p:nvSpPr>
+        <p:spPr>
+          <a:xfrm>
+            <a:off x="10789920" y="6583680"/>
+            <a:ext cx="914400" cy="228600"/>
+          </a:xfrm>
+          <a:prstGeom prst="rect">
+            <a:avLst/>
+          </a:prstGeom>
+          <a:noFill/>
+        </p:spPr>
+        <p:txBody>
+          <a:bodyPr wrap="none">
+            <a:spAutoFit/>
+          </a:bodyPr>
+          <a:lstStyle/>
+          <a:p>
+            <a:pPr algn="r">
+              <a:defRPr sz="1000" b="0">
+                <a:solidFill>
+                  <a:srgbClr val="6C757D"/>
+                </a:solidFill>
+                <a:latin typeface="Microsoft YaHei"/>
+              </a:defRPr>
+            </a:pPr>
+            <a:r>
+              <a:t>9/11</a:t>
             </a:r>
           </a:p>
         </p:txBody>

--- a/reports/smallgameagent_report.pptx
+++ b/reports/smallgameagent_report.pptx
@@ -4690,7 +4690,7 @@
               </a:defRPr>
             </a:pPr>
             <a:r>
-              <a:t>最佳配置仍是 multi-bus + StrategyMemory 读回，稳定达到 composite 0.300（多 seed 一致）。</a:t>
+              <a:t>代表性子集（6 游戏 × 15 runs）已跑通：B 类 tap-only 游戏 rule 模式即达 composite 0.300；A 类 joystick 游戏中 multi-bus-memory 对 00461 提升最大（0.106 → 0.300）。</a:t>
             </a:r>
           </a:p>
           <a:p>
@@ -4706,7 +4706,7 @@
               </a:defRPr>
             </a:pPr>
             <a:r>
-              <a:t>记忆读回把 composite 从 0.150 提升到 0.300，关键在于世界模型违规从 3 降到 0。</a:t>
+              <a:t>浏览器环境修复是前置条件：WSL2 headless 需 Playwright bundled Chromium + --enable-unsafe-swiftshader --in-process-gpu。</a:t>
             </a:r>
           </a:p>
           <a:p>
@@ -4722,7 +4722,7 @@
               </a:defRPr>
             </a:pPr>
             <a:r>
-              <a:t>22 个游戏已自动分类：7 个 joystick 驱动 + 15 个 tap-to-move；8/15 的 B 类游戏用 tap-only 驱动即可达 0.300。</a:t>
+              <a:t>记忆读回效果因游戏而异：对 00461 显著，但对 00483 无帮助，说明需要按游戏类型调优 driver/profile。</a:t>
             </a:r>
           </a:p>
           <a:p>
@@ -4770,7 +4770,7 @@
               </a:defRPr>
             </a:pPr>
             <a:r>
-              <a:t>训练数据已达 23,596 条 7 任务样本，为后续 QLoRA 微调做好了准备。</a:t>
+              <a:t>训练数据：processed-runs 34,150 条 + representative 1,173 条，为后续 QLoRA 微调做好准备。</a:t>
             </a:r>
           </a:p>
         </p:txBody>
@@ -6063,7 +6063,7 @@
                 <a:gridCol w="1874520"/>
                 <a:gridCol w="1874520"/>
               </a:tblGrid>
-              <a:tr h="640080">
+              <a:tr h="731520">
                 <a:tc>
                   <a:txBody>
                     <a:bodyPr/>
@@ -6150,7 +6150,7 @@
                         </a:defRPr>
                       </a:pPr>
                       <a:r>
-                        <a:t>multi-bus-memory</a:t>
+                        <a:t>multi-bus</a:t>
                       </a:r>
                     </a:p>
                   </a:txBody>
@@ -6174,7 +6174,7 @@
                         </a:defRPr>
                       </a:pPr>
                       <a:r>
-                        <a:t>multi-bus</a:t>
+                        <a:t>multi-bus-memory</a:t>
                       </a:r>
                     </a:p>
                   </a:txBody>
@@ -6209,7 +6209,7 @@
                   </a:tcPr>
                 </a:tc>
               </a:tr>
-              <a:tr h="640080">
+              <a:tr h="731520">
                 <a:tc>
                   <a:txBody>
                     <a:bodyPr/>
@@ -6263,7 +6263,7 @@
                         </a:defRPr>
                       </a:pPr>
                       <a:r>
-                        <a:t>0.113</a:t>
+                        <a:t>0.106</a:t>
                       </a:r>
                     </a:p>
                   </a:txBody>
@@ -6284,7 +6284,7 @@
                         </a:defRPr>
                       </a:pPr>
                       <a:r>
-                        <a:t>0.300</a:t>
+                        <a:t>0.161</a:t>
                       </a:r>
                     </a:p>
                   </a:txBody>
@@ -6305,7 +6305,7 @@
                         </a:defRPr>
                       </a:pPr>
                       <a:r>
-                        <a:t>0.297</a:t>
+                        <a:t>0.300</a:t>
                       </a:r>
                     </a:p>
                   </a:txBody>
@@ -6326,7 +6326,7 @@
                         </a:defRPr>
                       </a:pPr>
                       <a:r>
-                        <a:t>0.150</a:t>
+                        <a:t>未跑</a:t>
                       </a:r>
                     </a:p>
                   </a:txBody>
@@ -6337,7 +6337,7 @@
                   </a:tcPr>
                 </a:tc>
               </a:tr>
-              <a:tr h="640080">
+              <a:tr h="731520">
                 <a:tc>
                   <a:txBody>
                     <a:bodyPr/>
@@ -6383,7 +6383,7 @@
                         </a:defRPr>
                       </a:pPr>
                       <a:r>
-                        <a:t>0.139</a:t>
+                        <a:t>0.244</a:t>
                       </a:r>
                     </a:p>
                   </a:txBody>
@@ -6400,7 +6400,7 @@
                         </a:defRPr>
                       </a:pPr>
                       <a:r>
-                        <a:t>0.300</a:t>
+                        <a:t>0.150</a:t>
                       </a:r>
                     </a:p>
                   </a:txBody>
@@ -6417,7 +6417,7 @@
                         </a:defRPr>
                       </a:pPr>
                       <a:r>
-                        <a:t>0.300</a:t>
+                        <a:t>0.150</a:t>
                       </a:r>
                     </a:p>
                   </a:txBody>
@@ -6434,26 +6434,26 @@
                         </a:defRPr>
                       </a:pPr>
                       <a:r>
-                        <a:t>0.150</a:t>
+                        <a:t>未跑</a:t>
                       </a:r>
                     </a:p>
                   </a:txBody>
                   <a:tcPr/>
                 </a:tc>
               </a:tr>
-              <a:tr h="640080">
-                <a:tc>
-                  <a:txBody>
-                    <a:bodyPr/>
-                    <a:lstStyle/>
-                    <a:p>
-                      <a:pPr algn="ctr">
-                        <a:defRPr sz="1200">
-                          <a:latin typeface="Microsoft YaHei"/>
-                        </a:defRPr>
-                      </a:pPr>
-                      <a:r>
-                        <a:t>00496 电网抓丧尸</a:t>
+              <a:tr h="731520">
+                <a:tc>
+                  <a:txBody>
+                    <a:bodyPr/>
+                    <a:lstStyle/>
+                    <a:p>
+                      <a:pPr algn="ctr">
+                        <a:defRPr sz="1200">
+                          <a:latin typeface="Microsoft YaHei"/>
+                        </a:defRPr>
+                      </a:pPr>
+                      <a:r>
+                        <a:t>00522 地下炸矿</a:t>
                       </a:r>
                     </a:p>
                   </a:txBody>
@@ -6495,7 +6495,7 @@
                         </a:defRPr>
                       </a:pPr>
                       <a:r>
-                        <a:t>0.275</a:t>
+                        <a:t>0.215</a:t>
                       </a:r>
                     </a:p>
                   </a:txBody>
@@ -6516,7 +6516,7 @@
                         </a:defRPr>
                       </a:pPr>
                       <a:r>
-                        <a:t>0.150</a:t>
+                        <a:t>0.227</a:t>
                       </a:r>
                     </a:p>
                   </a:txBody>
@@ -6537,7 +6537,7 @@
                         </a:defRPr>
                       </a:pPr>
                       <a:r>
-                        <a:t>0.150</a:t>
+                        <a:t>0.240</a:t>
                       </a:r>
                     </a:p>
                   </a:txBody>
@@ -6558,7 +6558,7 @@
                         </a:defRPr>
                       </a:pPr>
                       <a:r>
-                        <a:t>0.150</a:t>
+                        <a:t>未跑</a:t>
                       </a:r>
                     </a:p>
                   </a:txBody>
@@ -6569,19 +6569,19 @@
                   </a:tcPr>
                 </a:tc>
               </a:tr>
-              <a:tr h="640080">
-                <a:tc>
-                  <a:txBody>
-                    <a:bodyPr/>
-                    <a:lstStyle/>
-                    <a:p>
-                      <a:pPr algn="ctr">
-                        <a:defRPr sz="1200">
-                          <a:latin typeface="Microsoft YaHei"/>
-                        </a:defRPr>
-                      </a:pPr>
-                      <a:r>
-                        <a:t>00522 地下炸矿</a:t>
+              <a:tr h="731520">
+                <a:tc>
+                  <a:txBody>
+                    <a:bodyPr/>
+                    <a:lstStyle/>
+                    <a:p>
+                      <a:pPr algn="ctr">
+                        <a:defRPr sz="1200">
+                          <a:latin typeface="Microsoft YaHei"/>
+                        </a:defRPr>
+                      </a:pPr>
+                      <a:r>
+                        <a:t>00382 低坑杀鲨鱼</a:t>
                       </a:r>
                     </a:p>
                   </a:txBody>
@@ -6598,7 +6598,7 @@
                         </a:defRPr>
                       </a:pPr>
                       <a:r>
-                        <a:t>joystick</a:t>
+                        <a:t>tap-only</a:t>
                       </a:r>
                     </a:p>
                   </a:txBody>
@@ -6615,7 +6615,7 @@
                         </a:defRPr>
                       </a:pPr>
                       <a:r>
-                        <a:t>0.215</a:t>
+                        <a:t>0.300</a:t>
                       </a:r>
                     </a:p>
                   </a:txBody>
@@ -6632,7 +6632,7 @@
                         </a:defRPr>
                       </a:pPr>
                       <a:r>
-                        <a:t>0.240</a:t>
+                        <a:t>—</a:t>
                       </a:r>
                     </a:p>
                   </a:txBody>
@@ -6673,19 +6673,19 @@
                   <a:tcPr/>
                 </a:tc>
               </a:tr>
-              <a:tr h="640080">
-                <a:tc>
-                  <a:txBody>
-                    <a:bodyPr/>
-                    <a:lstStyle/>
-                    <a:p>
-                      <a:pPr algn="ctr">
-                        <a:defRPr sz="1200">
-                          <a:latin typeface="Microsoft YaHei"/>
-                        </a:defRPr>
-                      </a:pPr>
-                      <a:r>
-                        <a:t>00382 低坑杀鲨鱼</a:t>
+              <a:tr h="731520">
+                <a:tc>
+                  <a:txBody>
+                    <a:bodyPr/>
+                    <a:lstStyle/>
+                    <a:p>
+                      <a:pPr algn="ctr">
+                        <a:defRPr sz="1200">
+                          <a:latin typeface="Microsoft YaHei"/>
+                        </a:defRPr>
+                      </a:pPr>
+                      <a:r>
+                        <a:t>00594 破石收水</a:t>
                       </a:r>
                     </a:p>
                   </a:txBody>
@@ -6748,7 +6748,7 @@
                         </a:defRPr>
                       </a:pPr>
                       <a:r>
-                        <a:t>0.300</a:t>
+                        <a:t>—</a:t>
                       </a:r>
                     </a:p>
                   </a:txBody>
@@ -6769,7 +6769,7 @@
                         </a:defRPr>
                       </a:pPr>
                       <a:r>
-                        <a:t>—</a:t>
+                        <a:t>0.300</a:t>
                       </a:r>
                     </a:p>
                   </a:txBody>
@@ -6801,19 +6801,19 @@
                   </a:tcPr>
                 </a:tc>
               </a:tr>
-              <a:tr h="640080">
-                <a:tc>
-                  <a:txBody>
-                    <a:bodyPr/>
-                    <a:lstStyle/>
-                    <a:p>
-                      <a:pPr algn="ctr">
-                        <a:defRPr sz="1200">
-                          <a:latin typeface="Microsoft YaHei"/>
-                        </a:defRPr>
-                      </a:pPr>
-                      <a:r>
-                        <a:t>00594 破石收水</a:t>
+              <a:tr h="731520">
+                <a:tc>
+                  <a:txBody>
+                    <a:bodyPr/>
+                    <a:lstStyle/>
+                    <a:p>
+                      <a:pPr algn="ctr">
+                        <a:defRPr sz="1200">
+                          <a:latin typeface="Microsoft YaHei"/>
+                        </a:defRPr>
+                      </a:pPr>
+                      <a:r>
+                        <a:t>00742 加油小镇</a:t>
                       </a:r>
                     </a:p>
                   </a:txBody>
@@ -6864,6 +6864,23 @@
                         </a:defRPr>
                       </a:pPr>
                       <a:r>
+                        <a:t>—</a:t>
+                      </a:r>
+                    </a:p>
+                  </a:txBody>
+                  <a:tcPr/>
+                </a:tc>
+                <a:tc>
+                  <a:txBody>
+                    <a:bodyPr/>
+                    <a:lstStyle/>
+                    <a:p>
+                      <a:pPr algn="ctr">
+                        <a:defRPr sz="1200">
+                          <a:latin typeface="Microsoft YaHei"/>
+                        </a:defRPr>
+                      </a:pPr>
+                      <a:r>
                         <a:t>0.300</a:t>
                       </a:r>
                     </a:p>
@@ -6886,151 +6903,6 @@
                     </a:p>
                   </a:txBody>
                   <a:tcPr/>
-                </a:tc>
-                <a:tc>
-                  <a:txBody>
-                    <a:bodyPr/>
-                    <a:lstStyle/>
-                    <a:p>
-                      <a:pPr algn="ctr">
-                        <a:defRPr sz="1200">
-                          <a:latin typeface="Microsoft YaHei"/>
-                        </a:defRPr>
-                      </a:pPr>
-                      <a:r>
-                        <a:t>—</a:t>
-                      </a:r>
-                    </a:p>
-                  </a:txBody>
-                  <a:tcPr/>
-                </a:tc>
-              </a:tr>
-              <a:tr h="640080">
-                <a:tc>
-                  <a:txBody>
-                    <a:bodyPr/>
-                    <a:lstStyle/>
-                    <a:p>
-                      <a:pPr algn="ctr">
-                        <a:defRPr sz="1200">
-                          <a:latin typeface="Microsoft YaHei"/>
-                        </a:defRPr>
-                      </a:pPr>
-                      <a:r>
-                        <a:t>00742 加油小镇</a:t>
-                      </a:r>
-                    </a:p>
-                  </a:txBody>
-                  <a:tcPr>
-                    <a:solidFill>
-                      <a:srgbClr val="F3F6F9"/>
-                    </a:solidFill>
-                  </a:tcPr>
-                </a:tc>
-                <a:tc>
-                  <a:txBody>
-                    <a:bodyPr/>
-                    <a:lstStyle/>
-                    <a:p>
-                      <a:pPr algn="ctr">
-                        <a:defRPr sz="1200">
-                          <a:latin typeface="Microsoft YaHei"/>
-                        </a:defRPr>
-                      </a:pPr>
-                      <a:r>
-                        <a:t>tap-only</a:t>
-                      </a:r>
-                    </a:p>
-                  </a:txBody>
-                  <a:tcPr>
-                    <a:solidFill>
-                      <a:srgbClr val="F3F6F9"/>
-                    </a:solidFill>
-                  </a:tcPr>
-                </a:tc>
-                <a:tc>
-                  <a:txBody>
-                    <a:bodyPr/>
-                    <a:lstStyle/>
-                    <a:p>
-                      <a:pPr algn="ctr">
-                        <a:defRPr sz="1200">
-                          <a:latin typeface="Microsoft YaHei"/>
-                        </a:defRPr>
-                      </a:pPr>
-                      <a:r>
-                        <a:t>0.300</a:t>
-                      </a:r>
-                    </a:p>
-                  </a:txBody>
-                  <a:tcPr>
-                    <a:solidFill>
-                      <a:srgbClr val="F3F6F9"/>
-                    </a:solidFill>
-                  </a:tcPr>
-                </a:tc>
-                <a:tc>
-                  <a:txBody>
-                    <a:bodyPr/>
-                    <a:lstStyle/>
-                    <a:p>
-                      <a:pPr algn="ctr">
-                        <a:defRPr sz="1200">
-                          <a:latin typeface="Microsoft YaHei"/>
-                        </a:defRPr>
-                      </a:pPr>
-                      <a:r>
-                        <a:t>0.300</a:t>
-                      </a:r>
-                    </a:p>
-                  </a:txBody>
-                  <a:tcPr>
-                    <a:solidFill>
-                      <a:srgbClr val="F3F6F9"/>
-                    </a:solidFill>
-                  </a:tcPr>
-                </a:tc>
-                <a:tc>
-                  <a:txBody>
-                    <a:bodyPr/>
-                    <a:lstStyle/>
-                    <a:p>
-                      <a:pPr algn="ctr">
-                        <a:defRPr sz="1200">
-                          <a:latin typeface="Microsoft YaHei"/>
-                        </a:defRPr>
-                      </a:pPr>
-                      <a:r>
-                        <a:t>—</a:t>
-                      </a:r>
-                    </a:p>
-                  </a:txBody>
-                  <a:tcPr>
-                    <a:solidFill>
-                      <a:srgbClr val="F3F6F9"/>
-                    </a:solidFill>
-                  </a:tcPr>
-                </a:tc>
-                <a:tc>
-                  <a:txBody>
-                    <a:bodyPr/>
-                    <a:lstStyle/>
-                    <a:p>
-                      <a:pPr algn="ctr">
-                        <a:defRPr sz="1200">
-                          <a:latin typeface="Microsoft YaHei"/>
-                        </a:defRPr>
-                      </a:pPr>
-                      <a:r>
-                        <a:t>—</a:t>
-                      </a:r>
-                    </a:p>
-                  </a:txBody>
-                  <a:tcPr>
-                    <a:solidFill>
-                      <a:srgbClr val="F3F6F9"/>
-                    </a:solidFill>
-                  </a:tcPr>
                 </a:tc>
               </a:tr>
             </a:tbl>

--- a/reports/smallgameagent_report.pptx
+++ b/reports/smallgameagent_report.pptx
@@ -26,7 +26,6 @@
     <p:sldId id="274" r:id="rId25"/>
     <p:sldId id="275" r:id="rId26"/>
     <p:sldId id="276" r:id="rId27"/>
-    <p:sldId id="277" r:id="rId28"/>
   </p:sldIdLst>
   <p:sldSz cx="12191695" cy="6858000" type="screen4x3"/>
   <p:notesSz cx="6858000" cy="9144000"/>
@@ -3547,7 +3546,7 @@
               </a:defRPr>
             </a:pPr>
             <a:r>
-              <a:t>10/22</a:t>
+              <a:t>10/21</a:t>
             </a:r>
           </a:p>
         </p:txBody>
@@ -3858,7 +3857,7 @@
               </a:defRPr>
             </a:pPr>
             <a:r>
-              <a:t>11/22</a:t>
+              <a:t>11/21</a:t>
             </a:r>
           </a:p>
         </p:txBody>
@@ -4107,7 +4106,7 @@
               </a:defRPr>
             </a:pPr>
             <a:r>
-              <a:t>12/22</a:t>
+              <a:t>12/21</a:t>
             </a:r>
           </a:p>
         </p:txBody>
@@ -4418,7 +4417,7 @@
               </a:defRPr>
             </a:pPr>
             <a:r>
-              <a:t>13/22</a:t>
+              <a:t>13/21</a:t>
             </a:r>
           </a:p>
         </p:txBody>
@@ -4667,7 +4666,7 @@
               </a:defRPr>
             </a:pPr>
             <a:r>
-              <a:t>14/22</a:t>
+              <a:t>14/21</a:t>
             </a:r>
           </a:p>
         </p:txBody>
@@ -4762,7 +4761,7 @@
               </a:defRPr>
             </a:pPr>
             <a:r>
-              <a:t>6 款代表性游戏：B 类 tap-only 全部满分</a:t>
+              <a:t>B 类 15 款 tap-only 游戏：8 款稳定满分，7 款待诊断</a:t>
             </a:r>
           </a:p>
         </p:txBody>
@@ -4786,1536 +4785,12 @@
                 <a:tableStyleId>{5C22544A-7EE6-4342-B048-85BDC9FD1C3A}</a:tableStyleId>
               </a:tblPr>
               <a:tblGrid>
-                <a:gridCol w="2249424"/>
-                <a:gridCol w="2249424"/>
-                <a:gridCol w="2249424"/>
-                <a:gridCol w="2249424"/>
-                <a:gridCol w="2249424"/>
+                <a:gridCol w="2811780"/>
+                <a:gridCol w="2811780"/>
+                <a:gridCol w="2811780"/>
+                <a:gridCol w="2811780"/>
               </a:tblGrid>
-              <a:tr h="393895">
-                <a:tc>
-                  <a:txBody>
-                    <a:bodyPr/>
-                    <a:lstStyle/>
-                    <a:p>
-                      <a:pPr algn="ctr">
-                        <a:defRPr sz="1300" b="1">
-                          <a:solidFill>
-                            <a:srgbClr val="F3F6F9"/>
-                          </a:solidFill>
-                          <a:latin typeface="Microsoft YaHei"/>
-                        </a:defRPr>
-                      </a:pPr>
-                      <a:r>
-                        <a:t>game_id</a:t>
-                      </a:r>
-                    </a:p>
-                  </a:txBody>
-                  <a:tcPr>
-                    <a:solidFill>
-                      <a:srgbClr val="1A237E"/>
-                    </a:solidFill>
-                  </a:tcPr>
-                </a:tc>
-                <a:tc>
-                  <a:txBody>
-                    <a:bodyPr/>
-                    <a:lstStyle/>
-                    <a:p>
-                      <a:pPr algn="ctr">
-                        <a:defRPr sz="1300" b="1">
-                          <a:solidFill>
-                            <a:srgbClr val="F3F6F9"/>
-                          </a:solidFill>
-                          <a:latin typeface="Microsoft YaHei"/>
-                        </a:defRPr>
-                      </a:pPr>
-                      <a:r>
-                        <a:t>mode</a:t>
-                      </a:r>
-                    </a:p>
-                  </a:txBody>
-                  <a:tcPr>
-                    <a:solidFill>
-                      <a:srgbClr val="1A237E"/>
-                    </a:solidFill>
-                  </a:tcPr>
-                </a:tc>
-                <a:tc>
-                  <a:txBody>
-                    <a:bodyPr/>
-                    <a:lstStyle/>
-                    <a:p>
-                      <a:pPr algn="ctr">
-                        <a:defRPr sz="1300" b="1">
-                          <a:solidFill>
-                            <a:srgbClr val="F3F6F9"/>
-                          </a:solidFill>
-                          <a:latin typeface="Microsoft YaHei"/>
-                        </a:defRPr>
-                      </a:pPr>
-                      <a:r>
-                        <a:t>composite</a:t>
-                      </a:r>
-                    </a:p>
-                  </a:txBody>
-                  <a:tcPr>
-                    <a:solidFill>
-                      <a:srgbClr val="1A237E"/>
-                    </a:solidFill>
-                  </a:tcPr>
-                </a:tc>
-                <a:tc>
-                  <a:txBody>
-                    <a:bodyPr/>
-                    <a:lstStyle/>
-                    <a:p>
-                      <a:pPr algn="ctr">
-                        <a:defRPr sz="1300" b="1">
-                          <a:solidFill>
-                            <a:srgbClr val="F3F6F9"/>
-                          </a:solidFill>
-                          <a:latin typeface="Microsoft YaHei"/>
-                        </a:defRPr>
-                      </a:pPr>
-                      <a:r>
-                        <a:t>activity</a:t>
-                      </a:r>
-                    </a:p>
-                  </a:txBody>
-                  <a:tcPr>
-                    <a:solidFill>
-                      <a:srgbClr val="1A237E"/>
-                    </a:solidFill>
-                  </a:tcPr>
-                </a:tc>
-                <a:tc>
-                  <a:txBody>
-                    <a:bodyPr/>
-                    <a:lstStyle/>
-                    <a:p>
-                      <a:pPr algn="ctr">
-                        <a:defRPr sz="1300" b="1">
-                          <a:solidFill>
-                            <a:srgbClr val="F3F6F9"/>
-                          </a:solidFill>
-                          <a:latin typeface="Microsoft YaHei"/>
-                        </a:defRPr>
-                      </a:pPr>
-                      <a:r>
-                        <a:t>stall</a:t>
-                      </a:r>
-                    </a:p>
-                  </a:txBody>
-                  <a:tcPr>
-                    <a:solidFill>
-                      <a:srgbClr val="1A237E"/>
-                    </a:solidFill>
-                  </a:tcPr>
-                </a:tc>
-              </a:tr>
-              <a:tr h="393895">
-                <a:tc>
-                  <a:txBody>
-                    <a:bodyPr/>
-                    <a:lstStyle/>
-                    <a:p>
-                      <a:pPr algn="ctr">
-                        <a:defRPr sz="1200">
-                          <a:latin typeface="Microsoft YaHei"/>
-                        </a:defRPr>
-                      </a:pPr>
-                      <a:r>
-                        <a:t>SSD_00382P01</a:t>
-                      </a:r>
-                    </a:p>
-                  </a:txBody>
-                  <a:tcPr>
-                    <a:solidFill>
-                      <a:srgbClr val="F3F6F9"/>
-                    </a:solidFill>
-                  </a:tcPr>
-                </a:tc>
-                <a:tc>
-                  <a:txBody>
-                    <a:bodyPr/>
-                    <a:lstStyle/>
-                    <a:p>
-                      <a:pPr algn="ctr">
-                        <a:defRPr sz="1200">
-                          <a:latin typeface="Microsoft YaHei"/>
-                        </a:defRPr>
-                      </a:pPr>
-                      <a:r>
-                        <a:t>rule</a:t>
-                      </a:r>
-                    </a:p>
-                  </a:txBody>
-                  <a:tcPr>
-                    <a:solidFill>
-                      <a:srgbClr val="F3F6F9"/>
-                    </a:solidFill>
-                  </a:tcPr>
-                </a:tc>
-                <a:tc>
-                  <a:txBody>
-                    <a:bodyPr/>
-                    <a:lstStyle/>
-                    <a:p>
-                      <a:pPr algn="ctr">
-                        <a:defRPr sz="1200">
-                          <a:latin typeface="Microsoft YaHei"/>
-                        </a:defRPr>
-                      </a:pPr>
-                      <a:r>
-                        <a:t>0.300</a:t>
-                      </a:r>
-                    </a:p>
-                  </a:txBody>
-                  <a:tcPr>
-                    <a:solidFill>
-                      <a:srgbClr val="F3F6F9"/>
-                    </a:solidFill>
-                  </a:tcPr>
-                </a:tc>
-                <a:tc>
-                  <a:txBody>
-                    <a:bodyPr/>
-                    <a:lstStyle/>
-                    <a:p>
-                      <a:pPr algn="ctr">
-                        <a:defRPr sz="1200">
-                          <a:latin typeface="Microsoft YaHei"/>
-                        </a:defRPr>
-                      </a:pPr>
-                      <a:r>
-                        <a:t>1.000</a:t>
-                      </a:r>
-                    </a:p>
-                  </a:txBody>
-                  <a:tcPr>
-                    <a:solidFill>
-                      <a:srgbClr val="F3F6F9"/>
-                    </a:solidFill>
-                  </a:tcPr>
-                </a:tc>
-                <a:tc>
-                  <a:txBody>
-                    <a:bodyPr/>
-                    <a:lstStyle/>
-                    <a:p>
-                      <a:pPr algn="ctr">
-                        <a:defRPr sz="1200">
-                          <a:latin typeface="Microsoft YaHei"/>
-                        </a:defRPr>
-                      </a:pPr>
-                      <a:r>
-                        <a:t>0</a:t>
-                      </a:r>
-                    </a:p>
-                  </a:txBody>
-                  <a:tcPr>
-                    <a:solidFill>
-                      <a:srgbClr val="F3F6F9"/>
-                    </a:solidFill>
-                  </a:tcPr>
-                </a:tc>
-              </a:tr>
-              <a:tr h="393895">
-                <a:tc>
-                  <a:txBody>
-                    <a:bodyPr/>
-                    <a:lstStyle/>
-                    <a:p>
-                      <a:pPr algn="ctr">
-                        <a:defRPr sz="1200">
-                          <a:latin typeface="Microsoft YaHei"/>
-                        </a:defRPr>
-                      </a:pPr>
-                      <a:r>
-                        <a:t>SSD_00382P01</a:t>
-                      </a:r>
-                    </a:p>
-                  </a:txBody>
-                  <a:tcPr/>
-                </a:tc>
-                <a:tc>
-                  <a:txBody>
-                    <a:bodyPr/>
-                    <a:lstStyle/>
-                    <a:p>
-                      <a:pPr algn="ctr">
-                        <a:defRPr sz="1200">
-                          <a:latin typeface="Microsoft YaHei"/>
-                        </a:defRPr>
-                      </a:pPr>
-                      <a:r>
-                        <a:t>multi-bus-memory</a:t>
-                      </a:r>
-                    </a:p>
-                  </a:txBody>
-                  <a:tcPr/>
-                </a:tc>
-                <a:tc>
-                  <a:txBody>
-                    <a:bodyPr/>
-                    <a:lstStyle/>
-                    <a:p>
-                      <a:pPr algn="ctr">
-                        <a:defRPr sz="1200">
-                          <a:latin typeface="Microsoft YaHei"/>
-                        </a:defRPr>
-                      </a:pPr>
-                      <a:r>
-                        <a:t>0.300</a:t>
-                      </a:r>
-                    </a:p>
-                  </a:txBody>
-                  <a:tcPr/>
-                </a:tc>
-                <a:tc>
-                  <a:txBody>
-                    <a:bodyPr/>
-                    <a:lstStyle/>
-                    <a:p>
-                      <a:pPr algn="ctr">
-                        <a:defRPr sz="1200">
-                          <a:latin typeface="Microsoft YaHei"/>
-                        </a:defRPr>
-                      </a:pPr>
-                      <a:r>
-                        <a:t>1.000</a:t>
-                      </a:r>
-                    </a:p>
-                  </a:txBody>
-                  <a:tcPr/>
-                </a:tc>
-                <a:tc>
-                  <a:txBody>
-                    <a:bodyPr/>
-                    <a:lstStyle/>
-                    <a:p>
-                      <a:pPr algn="ctr">
-                        <a:defRPr sz="1200">
-                          <a:latin typeface="Microsoft YaHei"/>
-                        </a:defRPr>
-                      </a:pPr>
-                      <a:r>
-                        <a:t>0</a:t>
-                      </a:r>
-                    </a:p>
-                  </a:txBody>
-                  <a:tcPr/>
-                </a:tc>
-              </a:tr>
-              <a:tr h="393895">
-                <a:tc>
-                  <a:txBody>
-                    <a:bodyPr/>
-                    <a:lstStyle/>
-                    <a:p>
-                      <a:pPr algn="ctr">
-                        <a:defRPr sz="1200">
-                          <a:latin typeface="Microsoft YaHei"/>
-                        </a:defRPr>
-                      </a:pPr>
-                      <a:r>
-                        <a:t>SSD_00461P01</a:t>
-                      </a:r>
-                    </a:p>
-                  </a:txBody>
-                  <a:tcPr>
-                    <a:solidFill>
-                      <a:srgbClr val="F3F6F9"/>
-                    </a:solidFill>
-                  </a:tcPr>
-                </a:tc>
-                <a:tc>
-                  <a:txBody>
-                    <a:bodyPr/>
-                    <a:lstStyle/>
-                    <a:p>
-                      <a:pPr algn="ctr">
-                        <a:defRPr sz="1200">
-                          <a:latin typeface="Microsoft YaHei"/>
-                        </a:defRPr>
-                      </a:pPr>
-                      <a:r>
-                        <a:t>rule</a:t>
-                      </a:r>
-                    </a:p>
-                  </a:txBody>
-                  <a:tcPr>
-                    <a:solidFill>
-                      <a:srgbClr val="F3F6F9"/>
-                    </a:solidFill>
-                  </a:tcPr>
-                </a:tc>
-                <a:tc>
-                  <a:txBody>
-                    <a:bodyPr/>
-                    <a:lstStyle/>
-                    <a:p>
-                      <a:pPr algn="ctr">
-                        <a:defRPr sz="1200">
-                          <a:latin typeface="Microsoft YaHei"/>
-                        </a:defRPr>
-                      </a:pPr>
-                      <a:r>
-                        <a:t>0.106</a:t>
-                      </a:r>
-                    </a:p>
-                  </a:txBody>
-                  <a:tcPr>
-                    <a:solidFill>
-                      <a:srgbClr val="F3F6F9"/>
-                    </a:solidFill>
-                  </a:tcPr>
-                </a:tc>
-                <a:tc>
-                  <a:txBody>
-                    <a:bodyPr/>
-                    <a:lstStyle/>
-                    <a:p>
-                      <a:pPr algn="ctr">
-                        <a:defRPr sz="1200">
-                          <a:latin typeface="Microsoft YaHei"/>
-                        </a:defRPr>
-                      </a:pPr>
-                      <a:r>
-                        <a:t>0.708</a:t>
-                      </a:r>
-                    </a:p>
-                  </a:txBody>
-                  <a:tcPr>
-                    <a:solidFill>
-                      <a:srgbClr val="F3F6F9"/>
-                    </a:solidFill>
-                  </a:tcPr>
-                </a:tc>
-                <a:tc>
-                  <a:txBody>
-                    <a:bodyPr/>
-                    <a:lstStyle/>
-                    <a:p>
-                      <a:pPr algn="ctr">
-                        <a:defRPr sz="1200">
-                          <a:latin typeface="Microsoft YaHei"/>
-                        </a:defRPr>
-                      </a:pPr>
-                      <a:r>
-                        <a:t>7</a:t>
-                      </a:r>
-                    </a:p>
-                  </a:txBody>
-                  <a:tcPr>
-                    <a:solidFill>
-                      <a:srgbClr val="F3F6F9"/>
-                    </a:solidFill>
-                  </a:tcPr>
-                </a:tc>
-              </a:tr>
-              <a:tr h="393895">
-                <a:tc>
-                  <a:txBody>
-                    <a:bodyPr/>
-                    <a:lstStyle/>
-                    <a:p>
-                      <a:pPr algn="ctr">
-                        <a:defRPr sz="1200">
-                          <a:latin typeface="Microsoft YaHei"/>
-                        </a:defRPr>
-                      </a:pPr>
-                      <a:r>
-                        <a:t>SSD_00461P01</a:t>
-                      </a:r>
-                    </a:p>
-                  </a:txBody>
-                  <a:tcPr/>
-                </a:tc>
-                <a:tc>
-                  <a:txBody>
-                    <a:bodyPr/>
-                    <a:lstStyle/>
-                    <a:p>
-                      <a:pPr algn="ctr">
-                        <a:defRPr sz="1200">
-                          <a:latin typeface="Microsoft YaHei"/>
-                        </a:defRPr>
-                      </a:pPr>
-                      <a:r>
-                        <a:t>multi-bus-memory</a:t>
-                      </a:r>
-                    </a:p>
-                  </a:txBody>
-                  <a:tcPr/>
-                </a:tc>
-                <a:tc>
-                  <a:txBody>
-                    <a:bodyPr/>
-                    <a:lstStyle/>
-                    <a:p>
-                      <a:pPr algn="ctr">
-                        <a:defRPr sz="1200">
-                          <a:latin typeface="Microsoft YaHei"/>
-                        </a:defRPr>
-                      </a:pPr>
-                      <a:r>
-                        <a:t>0.300</a:t>
-                      </a:r>
-                    </a:p>
-                  </a:txBody>
-                  <a:tcPr/>
-                </a:tc>
-                <a:tc>
-                  <a:txBody>
-                    <a:bodyPr/>
-                    <a:lstStyle/>
-                    <a:p>
-                      <a:pPr algn="ctr">
-                        <a:defRPr sz="1200">
-                          <a:latin typeface="Microsoft YaHei"/>
-                        </a:defRPr>
-                      </a:pPr>
-                      <a:r>
-                        <a:t>1.000</a:t>
-                      </a:r>
-                    </a:p>
-                  </a:txBody>
-                  <a:tcPr/>
-                </a:tc>
-                <a:tc>
-                  <a:txBody>
-                    <a:bodyPr/>
-                    <a:lstStyle/>
-                    <a:p>
-                      <a:pPr algn="ctr">
-                        <a:defRPr sz="1200">
-                          <a:latin typeface="Microsoft YaHei"/>
-                        </a:defRPr>
-                      </a:pPr>
-                      <a:r>
-                        <a:t>0</a:t>
-                      </a:r>
-                    </a:p>
-                  </a:txBody>
-                  <a:tcPr/>
-                </a:tc>
-              </a:tr>
-              <a:tr h="393895">
-                <a:tc>
-                  <a:txBody>
-                    <a:bodyPr/>
-                    <a:lstStyle/>
-                    <a:p>
-                      <a:pPr algn="ctr">
-                        <a:defRPr sz="1200">
-                          <a:latin typeface="Microsoft YaHei"/>
-                        </a:defRPr>
-                      </a:pPr>
-                      <a:r>
-                        <a:t>SSD_00483P01</a:t>
-                      </a:r>
-                    </a:p>
-                  </a:txBody>
-                  <a:tcPr>
-                    <a:solidFill>
-                      <a:srgbClr val="F3F6F9"/>
-                    </a:solidFill>
-                  </a:tcPr>
-                </a:tc>
-                <a:tc>
-                  <a:txBody>
-                    <a:bodyPr/>
-                    <a:lstStyle/>
-                    <a:p>
-                      <a:pPr algn="ctr">
-                        <a:defRPr sz="1200">
-                          <a:latin typeface="Microsoft YaHei"/>
-                        </a:defRPr>
-                      </a:pPr>
-                      <a:r>
-                        <a:t>rule</a:t>
-                      </a:r>
-                    </a:p>
-                  </a:txBody>
-                  <a:tcPr>
-                    <a:solidFill>
-                      <a:srgbClr val="F3F6F9"/>
-                    </a:solidFill>
-                  </a:tcPr>
-                </a:tc>
-                <a:tc>
-                  <a:txBody>
-                    <a:bodyPr/>
-                    <a:lstStyle/>
-                    <a:p>
-                      <a:pPr algn="ctr">
-                        <a:defRPr sz="1200">
-                          <a:latin typeface="Microsoft YaHei"/>
-                        </a:defRPr>
-                      </a:pPr>
-                      <a:r>
-                        <a:t>0.244</a:t>
-                      </a:r>
-                    </a:p>
-                  </a:txBody>
-                  <a:tcPr>
-                    <a:solidFill>
-                      <a:srgbClr val="F3F6F9"/>
-                    </a:solidFill>
-                  </a:tcPr>
-                </a:tc>
-                <a:tc>
-                  <a:txBody>
-                    <a:bodyPr/>
-                    <a:lstStyle/>
-                    <a:p>
-                      <a:pPr algn="ctr">
-                        <a:defRPr sz="1200">
-                          <a:latin typeface="Microsoft YaHei"/>
-                        </a:defRPr>
-                      </a:pPr>
-                      <a:r>
-                        <a:t>0.625</a:t>
-                      </a:r>
-                    </a:p>
-                  </a:txBody>
-                  <a:tcPr>
-                    <a:solidFill>
-                      <a:srgbClr val="F3F6F9"/>
-                    </a:solidFill>
-                  </a:tcPr>
-                </a:tc>
-                <a:tc>
-                  <a:txBody>
-                    <a:bodyPr/>
-                    <a:lstStyle/>
-                    <a:p>
-                      <a:pPr algn="ctr">
-                        <a:defRPr sz="1200">
-                          <a:latin typeface="Microsoft YaHei"/>
-                        </a:defRPr>
-                      </a:pPr>
-                      <a:r>
-                        <a:t>9</a:t>
-                      </a:r>
-                    </a:p>
-                  </a:txBody>
-                  <a:tcPr>
-                    <a:solidFill>
-                      <a:srgbClr val="F3F6F9"/>
-                    </a:solidFill>
-                  </a:tcPr>
-                </a:tc>
-              </a:tr>
-              <a:tr h="393895">
-                <a:tc>
-                  <a:txBody>
-                    <a:bodyPr/>
-                    <a:lstStyle/>
-                    <a:p>
-                      <a:pPr algn="ctr">
-                        <a:defRPr sz="1200">
-                          <a:latin typeface="Microsoft YaHei"/>
-                        </a:defRPr>
-                      </a:pPr>
-                      <a:r>
-                        <a:t>SSD_00483P01</a:t>
-                      </a:r>
-                    </a:p>
-                  </a:txBody>
-                  <a:tcPr/>
-                </a:tc>
-                <a:tc>
-                  <a:txBody>
-                    <a:bodyPr/>
-                    <a:lstStyle/>
-                    <a:p>
-                      <a:pPr algn="ctr">
-                        <a:defRPr sz="1200">
-                          <a:latin typeface="Microsoft YaHei"/>
-                        </a:defRPr>
-                      </a:pPr>
-                      <a:r>
-                        <a:t>multi-bus-memory</a:t>
-                      </a:r>
-                    </a:p>
-                  </a:txBody>
-                  <a:tcPr/>
-                </a:tc>
-                <a:tc>
-                  <a:txBody>
-                    <a:bodyPr/>
-                    <a:lstStyle/>
-                    <a:p>
-                      <a:pPr algn="ctr">
-                        <a:defRPr sz="1200">
-                          <a:latin typeface="Microsoft YaHei"/>
-                        </a:defRPr>
-                      </a:pPr>
-                      <a:r>
-                        <a:t>0.150</a:t>
-                      </a:r>
-                    </a:p>
-                  </a:txBody>
-                  <a:tcPr/>
-                </a:tc>
-                <a:tc>
-                  <a:txBody>
-                    <a:bodyPr/>
-                    <a:lstStyle/>
-                    <a:p>
-                      <a:pPr algn="ctr">
-                        <a:defRPr sz="1200">
-                          <a:latin typeface="Microsoft YaHei"/>
-                        </a:defRPr>
-                      </a:pPr>
-                      <a:r>
-                        <a:t>0.000</a:t>
-                      </a:r>
-                    </a:p>
-                  </a:txBody>
-                  <a:tcPr/>
-                </a:tc>
-                <a:tc>
-                  <a:txBody>
-                    <a:bodyPr/>
-                    <a:lstStyle/>
-                    <a:p>
-                      <a:pPr algn="ctr">
-                        <a:defRPr sz="1200">
-                          <a:latin typeface="Microsoft YaHei"/>
-                        </a:defRPr>
-                      </a:pPr>
-                      <a:r>
-                        <a:t>24</a:t>
-                      </a:r>
-                    </a:p>
-                  </a:txBody>
-                  <a:tcPr/>
-                </a:tc>
-              </a:tr>
-              <a:tr h="393895">
-                <a:tc>
-                  <a:txBody>
-                    <a:bodyPr/>
-                    <a:lstStyle/>
-                    <a:p>
-                      <a:pPr algn="ctr">
-                        <a:defRPr sz="1200">
-                          <a:latin typeface="Microsoft YaHei"/>
-                        </a:defRPr>
-                      </a:pPr>
-                      <a:r>
-                        <a:t>SSD_00522P02</a:t>
-                      </a:r>
-                    </a:p>
-                  </a:txBody>
-                  <a:tcPr>
-                    <a:solidFill>
-                      <a:srgbClr val="F3F6F9"/>
-                    </a:solidFill>
-                  </a:tcPr>
-                </a:tc>
-                <a:tc>
-                  <a:txBody>
-                    <a:bodyPr/>
-                    <a:lstStyle/>
-                    <a:p>
-                      <a:pPr algn="ctr">
-                        <a:defRPr sz="1200">
-                          <a:latin typeface="Microsoft YaHei"/>
-                        </a:defRPr>
-                      </a:pPr>
-                      <a:r>
-                        <a:t>rule</a:t>
-                      </a:r>
-                    </a:p>
-                  </a:txBody>
-                  <a:tcPr>
-                    <a:solidFill>
-                      <a:srgbClr val="F3F6F9"/>
-                    </a:solidFill>
-                  </a:tcPr>
-                </a:tc>
-                <a:tc>
-                  <a:txBody>
-                    <a:bodyPr/>
-                    <a:lstStyle/>
-                    <a:p>
-                      <a:pPr algn="ctr">
-                        <a:defRPr sz="1200">
-                          <a:latin typeface="Microsoft YaHei"/>
-                        </a:defRPr>
-                      </a:pPr>
-                      <a:r>
-                        <a:t>0.215</a:t>
-                      </a:r>
-                    </a:p>
-                  </a:txBody>
-                  <a:tcPr>
-                    <a:solidFill>
-                      <a:srgbClr val="F3F6F9"/>
-                    </a:solidFill>
-                  </a:tcPr>
-                </a:tc>
-                <a:tc>
-                  <a:txBody>
-                    <a:bodyPr/>
-                    <a:lstStyle/>
-                    <a:p>
-                      <a:pPr algn="ctr">
-                        <a:defRPr sz="1200">
-                          <a:latin typeface="Microsoft YaHei"/>
-                        </a:defRPr>
-                      </a:pPr>
-                      <a:r>
-                        <a:t>0.833</a:t>
-                      </a:r>
-                    </a:p>
-                  </a:txBody>
-                  <a:tcPr>
-                    <a:solidFill>
-                      <a:srgbClr val="F3F6F9"/>
-                    </a:solidFill>
-                  </a:tcPr>
-                </a:tc>
-                <a:tc>
-                  <a:txBody>
-                    <a:bodyPr/>
-                    <a:lstStyle/>
-                    <a:p>
-                      <a:pPr algn="ctr">
-                        <a:defRPr sz="1200">
-                          <a:latin typeface="Microsoft YaHei"/>
-                        </a:defRPr>
-                      </a:pPr>
-                      <a:r>
-                        <a:t>4</a:t>
-                      </a:r>
-                    </a:p>
-                  </a:txBody>
-                  <a:tcPr>
-                    <a:solidFill>
-                      <a:srgbClr val="F3F6F9"/>
-                    </a:solidFill>
-                  </a:tcPr>
-                </a:tc>
-              </a:tr>
-              <a:tr h="393895">
-                <a:tc>
-                  <a:txBody>
-                    <a:bodyPr/>
-                    <a:lstStyle/>
-                    <a:p>
-                      <a:pPr algn="ctr">
-                        <a:defRPr sz="1200">
-                          <a:latin typeface="Microsoft YaHei"/>
-                        </a:defRPr>
-                      </a:pPr>
-                      <a:r>
-                        <a:t>SSD_00522P02</a:t>
-                      </a:r>
-                    </a:p>
-                  </a:txBody>
-                  <a:tcPr/>
-                </a:tc>
-                <a:tc>
-                  <a:txBody>
-                    <a:bodyPr/>
-                    <a:lstStyle/>
-                    <a:p>
-                      <a:pPr algn="ctr">
-                        <a:defRPr sz="1200">
-                          <a:latin typeface="Microsoft YaHei"/>
-                        </a:defRPr>
-                      </a:pPr>
-                      <a:r>
-                        <a:t>multi-bus-memory</a:t>
-                      </a:r>
-                    </a:p>
-                  </a:txBody>
-                  <a:tcPr/>
-                </a:tc>
-                <a:tc>
-                  <a:txBody>
-                    <a:bodyPr/>
-                    <a:lstStyle/>
-                    <a:p>
-                      <a:pPr algn="ctr">
-                        <a:defRPr sz="1200">
-                          <a:latin typeface="Microsoft YaHei"/>
-                        </a:defRPr>
-                      </a:pPr>
-                      <a:r>
-                        <a:t>0.240</a:t>
-                      </a:r>
-                    </a:p>
-                  </a:txBody>
-                  <a:tcPr/>
-                </a:tc>
-                <a:tc>
-                  <a:txBody>
-                    <a:bodyPr/>
-                    <a:lstStyle/>
-                    <a:p>
-                      <a:pPr algn="ctr">
-                        <a:defRPr sz="1200">
-                          <a:latin typeface="Microsoft YaHei"/>
-                        </a:defRPr>
-                      </a:pPr>
-                      <a:r>
-                        <a:t>1.000</a:t>
-                      </a:r>
-                    </a:p>
-                  </a:txBody>
-                  <a:tcPr/>
-                </a:tc>
-                <a:tc>
-                  <a:txBody>
-                    <a:bodyPr/>
-                    <a:lstStyle/>
-                    <a:p>
-                      <a:pPr algn="ctr">
-                        <a:defRPr sz="1200">
-                          <a:latin typeface="Microsoft YaHei"/>
-                        </a:defRPr>
-                      </a:pPr>
-                      <a:r>
-                        <a:t>0</a:t>
-                      </a:r>
-                    </a:p>
-                  </a:txBody>
-                  <a:tcPr/>
-                </a:tc>
-              </a:tr>
-              <a:tr h="393895">
-                <a:tc>
-                  <a:txBody>
-                    <a:bodyPr/>
-                    <a:lstStyle/>
-                    <a:p>
-                      <a:pPr algn="ctr">
-                        <a:defRPr sz="1200">
-                          <a:latin typeface="Microsoft YaHei"/>
-                        </a:defRPr>
-                      </a:pPr>
-                      <a:r>
-                        <a:t>SSD_00594P02</a:t>
-                      </a:r>
-                    </a:p>
-                  </a:txBody>
-                  <a:tcPr>
-                    <a:solidFill>
-                      <a:srgbClr val="F3F6F9"/>
-                    </a:solidFill>
-                  </a:tcPr>
-                </a:tc>
-                <a:tc>
-                  <a:txBody>
-                    <a:bodyPr/>
-                    <a:lstStyle/>
-                    <a:p>
-                      <a:pPr algn="ctr">
-                        <a:defRPr sz="1200">
-                          <a:latin typeface="Microsoft YaHei"/>
-                        </a:defRPr>
-                      </a:pPr>
-                      <a:r>
-                        <a:t>rule</a:t>
-                      </a:r>
-                    </a:p>
-                  </a:txBody>
-                  <a:tcPr>
-                    <a:solidFill>
-                      <a:srgbClr val="F3F6F9"/>
-                    </a:solidFill>
-                  </a:tcPr>
-                </a:tc>
-                <a:tc>
-                  <a:txBody>
-                    <a:bodyPr/>
-                    <a:lstStyle/>
-                    <a:p>
-                      <a:pPr algn="ctr">
-                        <a:defRPr sz="1200">
-                          <a:latin typeface="Microsoft YaHei"/>
-                        </a:defRPr>
-                      </a:pPr>
-                      <a:r>
-                        <a:t>0.300</a:t>
-                      </a:r>
-                    </a:p>
-                  </a:txBody>
-                  <a:tcPr>
-                    <a:solidFill>
-                      <a:srgbClr val="F3F6F9"/>
-                    </a:solidFill>
-                  </a:tcPr>
-                </a:tc>
-                <a:tc>
-                  <a:txBody>
-                    <a:bodyPr/>
-                    <a:lstStyle/>
-                    <a:p>
-                      <a:pPr algn="ctr">
-                        <a:defRPr sz="1200">
-                          <a:latin typeface="Microsoft YaHei"/>
-                        </a:defRPr>
-                      </a:pPr>
-                      <a:r>
-                        <a:t>1.000</a:t>
-                      </a:r>
-                    </a:p>
-                  </a:txBody>
-                  <a:tcPr>
-                    <a:solidFill>
-                      <a:srgbClr val="F3F6F9"/>
-                    </a:solidFill>
-                  </a:tcPr>
-                </a:tc>
-                <a:tc>
-                  <a:txBody>
-                    <a:bodyPr/>
-                    <a:lstStyle/>
-                    <a:p>
-                      <a:pPr algn="ctr">
-                        <a:defRPr sz="1200">
-                          <a:latin typeface="Microsoft YaHei"/>
-                        </a:defRPr>
-                      </a:pPr>
-                      <a:r>
-                        <a:t>0</a:t>
-                      </a:r>
-                    </a:p>
-                  </a:txBody>
-                  <a:tcPr>
-                    <a:solidFill>
-                      <a:srgbClr val="F3F6F9"/>
-                    </a:solidFill>
-                  </a:tcPr>
-                </a:tc>
-              </a:tr>
-              <a:tr h="393895">
-                <a:tc>
-                  <a:txBody>
-                    <a:bodyPr/>
-                    <a:lstStyle/>
-                    <a:p>
-                      <a:pPr algn="ctr">
-                        <a:defRPr sz="1200">
-                          <a:latin typeface="Microsoft YaHei"/>
-                        </a:defRPr>
-                      </a:pPr>
-                      <a:r>
-                        <a:t>SSD_00594P02</a:t>
-                      </a:r>
-                    </a:p>
-                  </a:txBody>
-                  <a:tcPr/>
-                </a:tc>
-                <a:tc>
-                  <a:txBody>
-                    <a:bodyPr/>
-                    <a:lstStyle/>
-                    <a:p>
-                      <a:pPr algn="ctr">
-                        <a:defRPr sz="1200">
-                          <a:latin typeface="Microsoft YaHei"/>
-                        </a:defRPr>
-                      </a:pPr>
-                      <a:r>
-                        <a:t>multi-bus-memory</a:t>
-                      </a:r>
-                    </a:p>
-                  </a:txBody>
-                  <a:tcPr/>
-                </a:tc>
-                <a:tc>
-                  <a:txBody>
-                    <a:bodyPr/>
-                    <a:lstStyle/>
-                    <a:p>
-                      <a:pPr algn="ctr">
-                        <a:defRPr sz="1200">
-                          <a:latin typeface="Microsoft YaHei"/>
-                        </a:defRPr>
-                      </a:pPr>
-                      <a:r>
-                        <a:t>0.300</a:t>
-                      </a:r>
-                    </a:p>
-                  </a:txBody>
-                  <a:tcPr/>
-                </a:tc>
-                <a:tc>
-                  <a:txBody>
-                    <a:bodyPr/>
-                    <a:lstStyle/>
-                    <a:p>
-                      <a:pPr algn="ctr">
-                        <a:defRPr sz="1200">
-                          <a:latin typeface="Microsoft YaHei"/>
-                        </a:defRPr>
-                      </a:pPr>
-                      <a:r>
-                        <a:t>1.000</a:t>
-                      </a:r>
-                    </a:p>
-                  </a:txBody>
-                  <a:tcPr/>
-                </a:tc>
-                <a:tc>
-                  <a:txBody>
-                    <a:bodyPr/>
-                    <a:lstStyle/>
-                    <a:p>
-                      <a:pPr algn="ctr">
-                        <a:defRPr sz="1200">
-                          <a:latin typeface="Microsoft YaHei"/>
-                        </a:defRPr>
-                      </a:pPr>
-                      <a:r>
-                        <a:t>0</a:t>
-                      </a:r>
-                    </a:p>
-                  </a:txBody>
-                  <a:tcPr/>
-                </a:tc>
-              </a:tr>
-              <a:tr h="393895">
-                <a:tc>
-                  <a:txBody>
-                    <a:bodyPr/>
-                    <a:lstStyle/>
-                    <a:p>
-                      <a:pPr algn="ctr">
-                        <a:defRPr sz="1200">
-                          <a:latin typeface="Microsoft YaHei"/>
-                        </a:defRPr>
-                      </a:pPr>
-                      <a:r>
-                        <a:t>SSD_00742P01</a:t>
-                      </a:r>
-                    </a:p>
-                  </a:txBody>
-                  <a:tcPr>
-                    <a:solidFill>
-                      <a:srgbClr val="F3F6F9"/>
-                    </a:solidFill>
-                  </a:tcPr>
-                </a:tc>
-                <a:tc>
-                  <a:txBody>
-                    <a:bodyPr/>
-                    <a:lstStyle/>
-                    <a:p>
-                      <a:pPr algn="ctr">
-                        <a:defRPr sz="1200">
-                          <a:latin typeface="Microsoft YaHei"/>
-                        </a:defRPr>
-                      </a:pPr>
-                      <a:r>
-                        <a:t>rule</a:t>
-                      </a:r>
-                    </a:p>
-                  </a:txBody>
-                  <a:tcPr>
-                    <a:solidFill>
-                      <a:srgbClr val="F3F6F9"/>
-                    </a:solidFill>
-                  </a:tcPr>
-                </a:tc>
-                <a:tc>
-                  <a:txBody>
-                    <a:bodyPr/>
-                    <a:lstStyle/>
-                    <a:p>
-                      <a:pPr algn="ctr">
-                        <a:defRPr sz="1200">
-                          <a:latin typeface="Microsoft YaHei"/>
-                        </a:defRPr>
-                      </a:pPr>
-                      <a:r>
-                        <a:t>0.300</a:t>
-                      </a:r>
-                    </a:p>
-                  </a:txBody>
-                  <a:tcPr>
-                    <a:solidFill>
-                      <a:srgbClr val="F3F6F9"/>
-                    </a:solidFill>
-                  </a:tcPr>
-                </a:tc>
-                <a:tc>
-                  <a:txBody>
-                    <a:bodyPr/>
-                    <a:lstStyle/>
-                    <a:p>
-                      <a:pPr algn="ctr">
-                        <a:defRPr sz="1200">
-                          <a:latin typeface="Microsoft YaHei"/>
-                        </a:defRPr>
-                      </a:pPr>
-                      <a:r>
-                        <a:t>1.000</a:t>
-                      </a:r>
-                    </a:p>
-                  </a:txBody>
-                  <a:tcPr>
-                    <a:solidFill>
-                      <a:srgbClr val="F3F6F9"/>
-                    </a:solidFill>
-                  </a:tcPr>
-                </a:tc>
-                <a:tc>
-                  <a:txBody>
-                    <a:bodyPr/>
-                    <a:lstStyle/>
-                    <a:p>
-                      <a:pPr algn="ctr">
-                        <a:defRPr sz="1200">
-                          <a:latin typeface="Microsoft YaHei"/>
-                        </a:defRPr>
-                      </a:pPr>
-                      <a:r>
-                        <a:t>0</a:t>
-                      </a:r>
-                    </a:p>
-                  </a:txBody>
-                  <a:tcPr>
-                    <a:solidFill>
-                      <a:srgbClr val="F3F6F9"/>
-                    </a:solidFill>
-                  </a:tcPr>
-                </a:tc>
-              </a:tr>
-              <a:tr h="393900">
-                <a:tc>
-                  <a:txBody>
-                    <a:bodyPr/>
-                    <a:lstStyle/>
-                    <a:p>
-                      <a:pPr algn="ctr">
-                        <a:defRPr sz="1200">
-                          <a:latin typeface="Microsoft YaHei"/>
-                        </a:defRPr>
-                      </a:pPr>
-                      <a:r>
-                        <a:t>SSD_00742P01</a:t>
-                      </a:r>
-                    </a:p>
-                  </a:txBody>
-                  <a:tcPr/>
-                </a:tc>
-                <a:tc>
-                  <a:txBody>
-                    <a:bodyPr/>
-                    <a:lstStyle/>
-                    <a:p>
-                      <a:pPr algn="ctr">
-                        <a:defRPr sz="1200">
-                          <a:latin typeface="Microsoft YaHei"/>
-                        </a:defRPr>
-                      </a:pPr>
-                      <a:r>
-                        <a:t>multi-bus-memory</a:t>
-                      </a:r>
-                    </a:p>
-                  </a:txBody>
-                  <a:tcPr/>
-                </a:tc>
-                <a:tc>
-                  <a:txBody>
-                    <a:bodyPr/>
-                    <a:lstStyle/>
-                    <a:p>
-                      <a:pPr algn="ctr">
-                        <a:defRPr sz="1200">
-                          <a:latin typeface="Microsoft YaHei"/>
-                        </a:defRPr>
-                      </a:pPr>
-                      <a:r>
-                        <a:t>0.300</a:t>
-                      </a:r>
-                    </a:p>
-                  </a:txBody>
-                  <a:tcPr/>
-                </a:tc>
-                <a:tc>
-                  <a:txBody>
-                    <a:bodyPr/>
-                    <a:lstStyle/>
-                    <a:p>
-                      <a:pPr algn="ctr">
-                        <a:defRPr sz="1200">
-                          <a:latin typeface="Microsoft YaHei"/>
-                        </a:defRPr>
-                      </a:pPr>
-                      <a:r>
-                        <a:t>1.000</a:t>
-                      </a:r>
-                    </a:p>
-                  </a:txBody>
-                  <a:tcPr/>
-                </a:tc>
-                <a:tc>
-                  <a:txBody>
-                    <a:bodyPr/>
-                    <a:lstStyle/>
-                    <a:p>
-                      <a:pPr algn="ctr">
-                        <a:defRPr sz="1200">
-                          <a:latin typeface="Microsoft YaHei"/>
-                        </a:defRPr>
-                      </a:pPr>
-                      <a:r>
-                        <a:t>0</a:t>
-                      </a:r>
-                    </a:p>
-                  </a:txBody>
-                  <a:tcPr/>
-                </a:tc>
-              </a:tr>
-            </a:tbl>
-          </a:graphicData>
-        </a:graphic>
-      </p:graphicFrame>
-      <p:sp>
-        <p:nvSpPr>
-          <p:cNvPr id="5" name="Rectangle 4"/>
-          <p:cNvSpPr/>
-          <p:nvPr/>
-        </p:nvSpPr>
-        <p:spPr>
-          <a:xfrm>
-            <a:off x="0" y="6537960"/>
-            <a:ext cx="12191695" cy="18288"/>
-          </a:xfrm>
-          <a:prstGeom prst="rect">
-            <a:avLst/>
-          </a:prstGeom>
-          <a:solidFill>
-            <a:srgbClr val="0096C7"/>
-          </a:solidFill>
-          <a:ln/>
-        </p:spPr>
-        <p:style>
-          <a:lnRef idx="1">
-            <a:schemeClr val="accent1"/>
-          </a:lnRef>
-          <a:fillRef idx="3">
-            <a:schemeClr val="accent1"/>
-          </a:fillRef>
-          <a:effectRef idx="2">
-            <a:schemeClr val="accent1"/>
-          </a:effectRef>
-          <a:fontRef idx="minor">
-            <a:schemeClr val="lt1"/>
-          </a:fontRef>
-        </p:style>
-        <p:txBody>
-          <a:bodyPr rtlCol="0" anchor="ctr"/>
-          <a:lstStyle/>
-          <a:p>
-            <a:pPr algn="ctr"/>
-          </a:p>
-        </p:txBody>
-      </p:sp>
-      <p:sp>
-        <p:nvSpPr>
-          <p:cNvPr id="6" name="TextBox 5"/>
-          <p:cNvSpPr txBox="1"/>
-          <p:nvPr/>
-        </p:nvSpPr>
-        <p:spPr>
-          <a:xfrm>
-            <a:off x="457200" y="6583680"/>
-            <a:ext cx="3657600" cy="228600"/>
-          </a:xfrm>
-          <a:prstGeom prst="rect">
-            <a:avLst/>
-          </a:prstGeom>
-          <a:noFill/>
-        </p:spPr>
-        <p:txBody>
-          <a:bodyPr wrap="none">
-            <a:spAutoFit/>
-          </a:bodyPr>
-          <a:lstStyle/>
-          <a:p>
-            <a:pPr algn="l">
-              <a:defRPr sz="1000" b="0">
-                <a:solidFill>
-                  <a:srgbClr val="6C757D"/>
-                </a:solidFill>
-                <a:latin typeface="Microsoft YaHei"/>
-              </a:defRPr>
-            </a:pPr>
-            <a:r>
-              <a:t>smallgameagent · LLM/VLM + 规则驱动</a:t>
-            </a:r>
-          </a:p>
-        </p:txBody>
-      </p:sp>
-      <p:sp>
-        <p:nvSpPr>
-          <p:cNvPr id="7" name="TextBox 6"/>
-          <p:cNvSpPr txBox="1"/>
-          <p:nvPr/>
-        </p:nvSpPr>
-        <p:spPr>
-          <a:xfrm>
-            <a:off x="10789920" y="6583680"/>
-            <a:ext cx="914400" cy="228600"/>
-          </a:xfrm>
-          <a:prstGeom prst="rect">
-            <a:avLst/>
-          </a:prstGeom>
-          <a:noFill/>
-        </p:spPr>
-        <p:txBody>
-          <a:bodyPr wrap="none">
-            <a:spAutoFit/>
-          </a:bodyPr>
-          <a:lstStyle/>
-          <a:p>
-            <a:pPr algn="r">
-              <a:defRPr sz="1000" b="0">
-                <a:solidFill>
-                  <a:srgbClr val="6C757D"/>
-                </a:solidFill>
-                <a:latin typeface="Microsoft YaHei"/>
-              </a:defRPr>
-            </a:pPr>
-            <a:r>
-              <a:t>15/22</a:t>
-            </a:r>
-          </a:p>
-        </p:txBody>
-      </p:sp>
-    </p:spTree>
-  </p:cSld>
-  <p:clrMapOvr>
-    <a:masterClrMapping/>
-  </p:clrMapOvr>
-</p:sld>
-</file>
-
-<file path=ppt/slides/slide16.xml><?xml version="1.0" encoding="utf-8"?>
-<p:sld xmlns:a="http://schemas.openxmlformats.org/drawingml/2006/main" xmlns:p="http://schemas.openxmlformats.org/presentationml/2006/main" xmlns:r="http://schemas.openxmlformats.org/officeDocument/2006/relationships">
-  <p:cSld>
-    <p:spTree>
-      <p:nvGrpSpPr>
-        <p:cNvPr id="1" name=""/>
-        <p:cNvGrpSpPr/>
-        <p:nvPr/>
-      </p:nvGrpSpPr>
-      <p:grpSpPr/>
-      <p:sp>
-        <p:nvSpPr>
-          <p:cNvPr id="2" name="Rectangle 1"/>
-          <p:cNvSpPr/>
-          <p:nvPr/>
-        </p:nvSpPr>
-        <p:spPr>
-          <a:xfrm>
-            <a:off x="0" y="0"/>
-            <a:ext cx="12191695" cy="960120"/>
-          </a:xfrm>
-          <a:prstGeom prst="rect">
-            <a:avLst/>
-          </a:prstGeom>
-          <a:solidFill>
-            <a:srgbClr val="1A237E"/>
-          </a:solidFill>
-          <a:ln/>
-        </p:spPr>
-        <p:style>
-          <a:lnRef idx="1">
-            <a:schemeClr val="accent1"/>
-          </a:lnRef>
-          <a:fillRef idx="3">
-            <a:schemeClr val="accent1"/>
-          </a:fillRef>
-          <a:effectRef idx="2">
-            <a:schemeClr val="accent1"/>
-          </a:effectRef>
-          <a:fontRef idx="minor">
-            <a:schemeClr val="lt1"/>
-          </a:fontRef>
-        </p:style>
-        <p:txBody>
-          <a:bodyPr rtlCol="0" anchor="ctr"/>
-          <a:lstStyle/>
-          <a:p>
-            <a:pPr algn="ctr"/>
-          </a:p>
-        </p:txBody>
-      </p:sp>
-      <p:sp>
-        <p:nvSpPr>
-          <p:cNvPr id="3" name="TextBox 2"/>
-          <p:cNvSpPr txBox="1"/>
-          <p:nvPr/>
-        </p:nvSpPr>
-        <p:spPr>
-          <a:xfrm>
-            <a:off x="457200" y="228600"/>
-            <a:ext cx="11247120" cy="548640"/>
-          </a:xfrm>
-          <a:prstGeom prst="rect">
-            <a:avLst/>
-          </a:prstGeom>
-          <a:noFill/>
-        </p:spPr>
-        <p:txBody>
-          <a:bodyPr wrap="none">
-            <a:spAutoFit/>
-          </a:bodyPr>
-          <a:lstStyle/>
-          <a:p>
-            <a:pPr algn="l">
-              <a:defRPr sz="3000" b="1">
-                <a:solidFill>
-                  <a:srgbClr val="F3F6F9"/>
-                </a:solidFill>
-                <a:latin typeface="Microsoft YaHei"/>
-              </a:defRPr>
-            </a:pPr>
-            <a:r>
-              <a:t>A 组 7 款 joystick 游戏最终平均结果</a:t>
-            </a:r>
-          </a:p>
-        </p:txBody>
-      </p:sp>
-      <p:graphicFrame>
-        <p:nvGraphicFramePr>
-          <p:cNvPr id="4" name="Table 3"/>
-          <p:cNvGraphicFramePr>
-            <a:graphicFrameLocks noGrp="1"/>
-          </p:cNvGraphicFramePr>
-          <p:nvPr/>
-        </p:nvGraphicFramePr>
-        <p:xfrm>
-          <a:off x="457200" y="1143000"/>
-          <a:ext cx="11247120" cy="5120640"/>
-        </p:xfrm>
-        <a:graphic>
-          <a:graphicData uri="http://schemas.openxmlformats.org/drawingml/2006/table">
-            <a:tbl>
-              <a:tblPr firstRow="1" bandRow="1">
-                <a:tableStyleId>{5C22544A-7EE6-4342-B048-85BDC9FD1C3A}</a:tableStyleId>
-              </a:tblPr>
-              <a:tblGrid>
-                <a:gridCol w="2249424"/>
-                <a:gridCol w="2249424"/>
-                <a:gridCol w="2249424"/>
-                <a:gridCol w="2249424"/>
-                <a:gridCol w="2249424"/>
-              </a:tblGrid>
-              <a:tr h="640080">
+              <a:tr h="320040">
                 <a:tc>
                   <a:txBody>
                     <a:bodyPr/>
@@ -6402,31 +4877,7 @@
                         </a:defRPr>
                       </a:pPr>
                       <a:r>
-                        <a:t>multi-bus</a:t>
-                      </a:r>
-                    </a:p>
-                  </a:txBody>
-                  <a:tcPr>
-                    <a:solidFill>
-                      <a:srgbClr val="1A237E"/>
-                    </a:solidFill>
-                  </a:tcPr>
-                </a:tc>
-                <a:tc>
-                  <a:txBody>
-                    <a:bodyPr/>
-                    <a:lstStyle/>
-                    <a:p>
-                      <a:pPr algn="ctr">
-                        <a:defRPr sz="1300" b="1">
-                          <a:solidFill>
-                            <a:srgbClr val="F3F6F9"/>
-                          </a:solidFill>
-                          <a:latin typeface="Microsoft YaHei"/>
-                        </a:defRPr>
-                      </a:pPr>
-                      <a:r>
-                        <a:t>最优模式</a:t>
+                        <a:t>状态</a:t>
                       </a:r>
                     </a:p>
                   </a:txBody>
@@ -6437,7 +4888,7 @@
                   </a:tcPr>
                 </a:tc>
               </a:tr>
-              <a:tr h="640080">
+              <a:tr h="320040">
                 <a:tc>
                   <a:txBody>
                     <a:bodyPr/>
@@ -6449,7 +4900,7 @@
                         </a:defRPr>
                       </a:pPr>
                       <a:r>
-                        <a:t>00440 清障通车</a:t>
+                        <a:t>00219 养牛卖奶</a:t>
                       </a:r>
                     </a:p>
                   </a:txBody>
@@ -6470,7 +4921,7 @@
                         </a:defRPr>
                       </a:pPr>
                       <a:r>
-                        <a:t>0.206</a:t>
+                        <a:t>0.150</a:t>
                       </a:r>
                     </a:p>
                   </a:txBody>
@@ -6491,7 +4942,7 @@
                         </a:defRPr>
                       </a:pPr>
                       <a:r>
-                        <a:t>0.175</a:t>
+                        <a:t>0.150</a:t>
                       </a:r>
                     </a:p>
                   </a:txBody>
@@ -6512,7 +4963,100 @@
                         </a:defRPr>
                       </a:pPr>
                       <a:r>
-                        <a:t>0.172</a:t>
+                        <a:t>待诊断</a:t>
+                      </a:r>
+                    </a:p>
+                  </a:txBody>
+                  <a:tcPr>
+                    <a:solidFill>
+                      <a:srgbClr val="F3F6F9"/>
+                    </a:solidFill>
+                  </a:tcPr>
+                </a:tc>
+              </a:tr>
+              <a:tr h="320040">
+                <a:tc>
+                  <a:txBody>
+                    <a:bodyPr/>
+                    <a:lstStyle/>
+                    <a:p>
+                      <a:pPr algn="ctr">
+                        <a:defRPr sz="1200">
+                          <a:latin typeface="Microsoft YaHei"/>
+                        </a:defRPr>
+                      </a:pPr>
+                      <a:r>
+                        <a:t>00332 圣诞薅羊毛</a:t>
+                      </a:r>
+                    </a:p>
+                  </a:txBody>
+                  <a:tcPr/>
+                </a:tc>
+                <a:tc>
+                  <a:txBody>
+                    <a:bodyPr/>
+                    <a:lstStyle/>
+                    <a:p>
+                      <a:pPr algn="ctr">
+                        <a:defRPr sz="1200">
+                          <a:latin typeface="Microsoft YaHei"/>
+                        </a:defRPr>
+                      </a:pPr>
+                      <a:r>
+                        <a:t>0.150</a:t>
+                      </a:r>
+                    </a:p>
+                  </a:txBody>
+                  <a:tcPr/>
+                </a:tc>
+                <a:tc>
+                  <a:txBody>
+                    <a:bodyPr/>
+                    <a:lstStyle/>
+                    <a:p>
+                      <a:pPr algn="ctr">
+                        <a:defRPr sz="1200">
+                          <a:latin typeface="Microsoft YaHei"/>
+                        </a:defRPr>
+                      </a:pPr>
+                      <a:r>
+                        <a:t>0.150</a:t>
+                      </a:r>
+                    </a:p>
+                  </a:txBody>
+                  <a:tcPr/>
+                </a:tc>
+                <a:tc>
+                  <a:txBody>
+                    <a:bodyPr/>
+                    <a:lstStyle/>
+                    <a:p>
+                      <a:pPr algn="ctr">
+                        <a:defRPr sz="1200">
+                          <a:latin typeface="Microsoft YaHei"/>
+                        </a:defRPr>
+                      </a:pPr>
+                      <a:r>
+                        <a:t>待诊断</a:t>
+                      </a:r>
+                    </a:p>
+                  </a:txBody>
+                  <a:tcPr/>
+                </a:tc>
+              </a:tr>
+              <a:tr h="320040">
+                <a:tc>
+                  <a:txBody>
+                    <a:bodyPr/>
+                    <a:lstStyle/>
+                    <a:p>
+                      <a:pPr algn="ctr">
+                        <a:defRPr sz="1200">
+                          <a:latin typeface="Microsoft YaHei"/>
+                        </a:defRPr>
+                      </a:pPr>
+                      <a:r>
+                        <a:t>00342 建造合并</a:t>
                       </a:r>
                     </a:p>
                   </a:txBody>
@@ -6533,7 +5077,7 @@
                         </a:defRPr>
                       </a:pPr>
                       <a:r>
-                        <a:t>rule</a:t>
+                        <a:t>0.150</a:t>
                       </a:r>
                     </a:p>
                   </a:txBody>
@@ -6542,25 +5086,6 @@
                       <a:srgbClr val="F3F6F9"/>
                     </a:solidFill>
                   </a:tcPr>
-                </a:tc>
-              </a:tr>
-              <a:tr h="640080">
-                <a:tc>
-                  <a:txBody>
-                    <a:bodyPr/>
-                    <a:lstStyle/>
-                    <a:p>
-                      <a:pPr algn="ctr">
-                        <a:defRPr sz="1200">
-                          <a:latin typeface="Microsoft YaHei"/>
-                        </a:defRPr>
-                      </a:pPr>
-                      <a:r>
-                        <a:t>00461 塔防</a:t>
-                      </a:r>
-                    </a:p>
-                  </a:txBody>
-                  <a:tcPr/>
                 </a:tc>
                 <a:tc>
                   <a:txBody>
@@ -6573,7 +5098,51 @@
                         </a:defRPr>
                       </a:pPr>
                       <a:r>
-                        <a:t>0.143</a:t>
+                        <a:t>0.150</a:t>
+                      </a:r>
+                    </a:p>
+                  </a:txBody>
+                  <a:tcPr>
+                    <a:solidFill>
+                      <a:srgbClr val="F3F6F9"/>
+                    </a:solidFill>
+                  </a:tcPr>
+                </a:tc>
+                <a:tc>
+                  <a:txBody>
+                    <a:bodyPr/>
+                    <a:lstStyle/>
+                    <a:p>
+                      <a:pPr algn="ctr">
+                        <a:defRPr sz="1200">
+                          <a:latin typeface="Microsoft YaHei"/>
+                        </a:defRPr>
+                      </a:pPr>
+                      <a:r>
+                        <a:t>待诊断</a:t>
+                      </a:r>
+                    </a:p>
+                  </a:txBody>
+                  <a:tcPr>
+                    <a:solidFill>
+                      <a:srgbClr val="F3F6F9"/>
+                    </a:solidFill>
+                  </a:tcPr>
+                </a:tc>
+              </a:tr>
+              <a:tr h="320040">
+                <a:tc>
+                  <a:txBody>
+                    <a:bodyPr/>
+                    <a:lstStyle/>
+                    <a:p>
+                      <a:pPr algn="ctr">
+                        <a:defRPr sz="1200">
+                          <a:latin typeface="Microsoft YaHei"/>
+                        </a:defRPr>
+                      </a:pPr>
+                      <a:r>
+                        <a:t>00382 低坑杀鲨鱼</a:t>
                       </a:r>
                     </a:p>
                   </a:txBody>
@@ -6624,14 +5193,14 @@
                         </a:defRPr>
                       </a:pPr>
                       <a:r>
-                        <a:t>multi-bus*</a:t>
+                        <a:t>✅ 满分</a:t>
                       </a:r>
                     </a:p>
                   </a:txBody>
                   <a:tcPr/>
                 </a:tc>
               </a:tr>
-              <a:tr h="640080">
+              <a:tr h="320040">
                 <a:tc>
                   <a:txBody>
                     <a:bodyPr/>
@@ -6643,28 +5212,7 @@
                         </a:defRPr>
                       </a:pPr>
                       <a:r>
-                        <a:t>00483 吸沙抽水</a:t>
-                      </a:r>
-                    </a:p>
-                  </a:txBody>
-                  <a:tcPr>
-                    <a:solidFill>
-                      <a:srgbClr val="F3F6F9"/>
-                    </a:solidFill>
-                  </a:tcPr>
-                </a:tc>
-                <a:tc>
-                  <a:txBody>
-                    <a:bodyPr/>
-                    <a:lstStyle/>
-                    <a:p>
-                      <a:pPr algn="ctr">
-                        <a:defRPr sz="1200">
-                          <a:latin typeface="Microsoft YaHei"/>
-                        </a:defRPr>
-                      </a:pPr>
-                      <a:r>
-                        <a:t>0.244</a:t>
+                        <a:t>00394 车 zip</a:t>
                       </a:r>
                     </a:p>
                   </a:txBody>
@@ -6727,7 +5275,7 @@
                         </a:defRPr>
                       </a:pPr>
                       <a:r>
-                        <a:t>multi-bus*</a:t>
+                        <a:t>✅ 满分</a:t>
                       </a:r>
                     </a:p>
                   </a:txBody>
@@ -6738,7 +5286,7 @@
                   </a:tcPr>
                 </a:tc>
               </a:tr>
-              <a:tr h="640080">
+              <a:tr h="320040">
                 <a:tc>
                   <a:txBody>
                     <a:bodyPr/>
@@ -6750,24 +5298,7 @@
                         </a:defRPr>
                       </a:pPr>
                       <a:r>
-                        <a:t>00496 电网抓丧尸</a:t>
-                      </a:r>
-                    </a:p>
-                  </a:txBody>
-                  <a:tcPr/>
-                </a:tc>
-                <a:tc>
-                  <a:txBody>
-                    <a:bodyPr/>
-                    <a:lstStyle/>
-                    <a:p>
-                      <a:pPr algn="ctr">
-                        <a:defRPr sz="1200">
-                          <a:latin typeface="Microsoft YaHei"/>
-                        </a:defRPr>
-                      </a:pPr>
-                      <a:r>
-                        <a:t>0.250</a:t>
+                        <a:t>00427 淘金</a:t>
                       </a:r>
                     </a:p>
                   </a:txBody>
@@ -6818,14 +5349,14 @@
                         </a:defRPr>
                       </a:pPr>
                       <a:r>
-                        <a:t>rule</a:t>
+                        <a:t>待诊断</a:t>
                       </a:r>
                     </a:p>
                   </a:txBody>
                   <a:tcPr/>
                 </a:tc>
               </a:tr>
-              <a:tr h="640080">
+              <a:tr h="320040">
                 <a:tc>
                   <a:txBody>
                     <a:bodyPr/>
@@ -6837,7 +5368,7 @@
                         </a:defRPr>
                       </a:pPr>
                       <a:r>
-                        <a:t>00517 末世旅店</a:t>
+                        <a:t>00434 选项卡捏</a:t>
                       </a:r>
                     </a:p>
                   </a:txBody>
@@ -6900,7 +5431,7 @@
                         </a:defRPr>
                       </a:pPr>
                       <a:r>
-                        <a:t>0.150</a:t>
+                        <a:t>待诊断</a:t>
                       </a:r>
                     </a:p>
                   </a:txBody>
@@ -6910,6 +5441,8 @@
                     </a:solidFill>
                   </a:tcPr>
                 </a:tc>
+              </a:tr>
+              <a:tr h="320040">
                 <a:tc>
                   <a:txBody>
                     <a:bodyPr/>
@@ -6921,47 +5454,7 @@
                         </a:defRPr>
                       </a:pPr>
                       <a:r>
-                        <a:t>—</a:t>
-                      </a:r>
-                    </a:p>
-                  </a:txBody>
-                  <a:tcPr>
-                    <a:solidFill>
-                      <a:srgbClr val="F3F6F9"/>
-                    </a:solidFill>
-                  </a:tcPr>
-                </a:tc>
-              </a:tr>
-              <a:tr h="640080">
-                <a:tc>
-                  <a:txBody>
-                    <a:bodyPr/>
-                    <a:lstStyle/>
-                    <a:p>
-                      <a:pPr algn="ctr">
-                        <a:defRPr sz="1200">
-                          <a:latin typeface="Microsoft YaHei"/>
-                        </a:defRPr>
-                      </a:pPr>
-                      <a:r>
-                        <a:t>00522 地下炸矿</a:t>
-                      </a:r>
-                    </a:p>
-                  </a:txBody>
-                  <a:tcPr/>
-                </a:tc>
-                <a:tc>
-                  <a:txBody>
-                    <a:bodyPr/>
-                    <a:lstStyle/>
-                    <a:p>
-                      <a:pPr algn="ctr">
-                        <a:defRPr sz="1200">
-                          <a:latin typeface="Microsoft YaHei"/>
-                        </a:defRPr>
-                      </a:pPr>
-                      <a:r>
-                        <a:t>0.215</a:t>
+                        <a:t>00475 太空圈地</a:t>
                       </a:r>
                     </a:p>
                   </a:txBody>
@@ -7012,14 +5505,14 @@
                         </a:defRPr>
                       </a:pPr>
                       <a:r>
-                        <a:t>multi-bus*</a:t>
+                        <a:t>✅ 满分</a:t>
                       </a:r>
                     </a:p>
                   </a:txBody>
                   <a:tcPr/>
                 </a:tc>
               </a:tr>
-              <a:tr h="640080">
+              <a:tr h="320040">
                 <a:tc>
                   <a:txBody>
                     <a:bodyPr/>
@@ -7031,49 +5524,7 @@
                         </a:defRPr>
                       </a:pPr>
                       <a:r>
-                        <a:t>00736 养蛙捕鱼</a:t>
-                      </a:r>
-                    </a:p>
-                  </a:txBody>
-                  <a:tcPr>
-                    <a:solidFill>
-                      <a:srgbClr val="F3F6F9"/>
-                    </a:solidFill>
-                  </a:tcPr>
-                </a:tc>
-                <a:tc>
-                  <a:txBody>
-                    <a:bodyPr/>
-                    <a:lstStyle/>
-                    <a:p>
-                      <a:pPr algn="ctr">
-                        <a:defRPr sz="1200">
-                          <a:latin typeface="Microsoft YaHei"/>
-                        </a:defRPr>
-                      </a:pPr>
-                      <a:r>
-                        <a:t>0.256</a:t>
-                      </a:r>
-                    </a:p>
-                  </a:txBody>
-                  <a:tcPr>
-                    <a:solidFill>
-                      <a:srgbClr val="F3F6F9"/>
-                    </a:solidFill>
-                  </a:tcPr>
-                </a:tc>
-                <a:tc>
-                  <a:txBody>
-                    <a:bodyPr/>
-                    <a:lstStyle/>
-                    <a:p>
-                      <a:pPr algn="ctr">
-                        <a:defRPr sz="1200">
-                          <a:latin typeface="Microsoft YaHei"/>
-                        </a:defRPr>
-                      </a:pPr>
-                      <a:r>
-                        <a:t>0.153</a:t>
+                        <a:t>00482 砍树扩地</a:t>
                       </a:r>
                     </a:p>
                   </a:txBody>
@@ -7115,7 +5566,496 @@
                         </a:defRPr>
                       </a:pPr>
                       <a:r>
-                        <a:t>rule</a:t>
+                        <a:t>0.150</a:t>
+                      </a:r>
+                    </a:p>
+                  </a:txBody>
+                  <a:tcPr>
+                    <a:solidFill>
+                      <a:srgbClr val="F3F6F9"/>
+                    </a:solidFill>
+                  </a:tcPr>
+                </a:tc>
+                <a:tc>
+                  <a:txBody>
+                    <a:bodyPr/>
+                    <a:lstStyle/>
+                    <a:p>
+                      <a:pPr algn="ctr">
+                        <a:defRPr sz="1200">
+                          <a:latin typeface="Microsoft YaHei"/>
+                        </a:defRPr>
+                      </a:pPr>
+                      <a:r>
+                        <a:t>待诊断</a:t>
+                      </a:r>
+                    </a:p>
+                  </a:txBody>
+                  <a:tcPr>
+                    <a:solidFill>
+                      <a:srgbClr val="F3F6F9"/>
+                    </a:solidFill>
+                  </a:tcPr>
+                </a:tc>
+              </a:tr>
+              <a:tr h="320040">
+                <a:tc>
+                  <a:txBody>
+                    <a:bodyPr/>
+                    <a:lstStyle/>
+                    <a:p>
+                      <a:pPr algn="ctr">
+                        <a:defRPr sz="1200">
+                          <a:latin typeface="Microsoft YaHei"/>
+                        </a:defRPr>
+                      </a:pPr>
+                      <a:r>
+                        <a:t>00526 通水洗地</a:t>
+                      </a:r>
+                    </a:p>
+                  </a:txBody>
+                  <a:tcPr/>
+                </a:tc>
+                <a:tc>
+                  <a:txBody>
+                    <a:bodyPr/>
+                    <a:lstStyle/>
+                    <a:p>
+                      <a:pPr algn="ctr">
+                        <a:defRPr sz="1200">
+                          <a:latin typeface="Microsoft YaHei"/>
+                        </a:defRPr>
+                      </a:pPr>
+                      <a:r>
+                        <a:t>0.300</a:t>
+                      </a:r>
+                    </a:p>
+                  </a:txBody>
+                  <a:tcPr/>
+                </a:tc>
+                <a:tc>
+                  <a:txBody>
+                    <a:bodyPr/>
+                    <a:lstStyle/>
+                    <a:p>
+                      <a:pPr algn="ctr">
+                        <a:defRPr sz="1200">
+                          <a:latin typeface="Microsoft YaHei"/>
+                        </a:defRPr>
+                      </a:pPr>
+                      <a:r>
+                        <a:t>0.300</a:t>
+                      </a:r>
+                    </a:p>
+                  </a:txBody>
+                  <a:tcPr/>
+                </a:tc>
+                <a:tc>
+                  <a:txBody>
+                    <a:bodyPr/>
+                    <a:lstStyle/>
+                    <a:p>
+                      <a:pPr algn="ctr">
+                        <a:defRPr sz="1200">
+                          <a:latin typeface="Microsoft YaHei"/>
+                        </a:defRPr>
+                      </a:pPr>
+                      <a:r>
+                        <a:t>✅ 满分</a:t>
+                      </a:r>
+                    </a:p>
+                  </a:txBody>
+                  <a:tcPr/>
+                </a:tc>
+              </a:tr>
+              <a:tr h="320040">
+                <a:tc>
+                  <a:txBody>
+                    <a:bodyPr/>
+                    <a:lstStyle/>
+                    <a:p>
+                      <a:pPr algn="ctr">
+                        <a:defRPr sz="1200">
+                          <a:latin typeface="Microsoft YaHei"/>
+                        </a:defRPr>
+                      </a:pPr>
+                      <a:r>
+                        <a:t>00532 瀑布巨木</a:t>
+                      </a:r>
+                    </a:p>
+                  </a:txBody>
+                  <a:tcPr>
+                    <a:solidFill>
+                      <a:srgbClr val="F3F6F9"/>
+                    </a:solidFill>
+                  </a:tcPr>
+                </a:tc>
+                <a:tc>
+                  <a:txBody>
+                    <a:bodyPr/>
+                    <a:lstStyle/>
+                    <a:p>
+                      <a:pPr algn="ctr">
+                        <a:defRPr sz="1200">
+                          <a:latin typeface="Microsoft YaHei"/>
+                        </a:defRPr>
+                      </a:pPr>
+                      <a:r>
+                        <a:t>0.300</a:t>
+                      </a:r>
+                    </a:p>
+                  </a:txBody>
+                  <a:tcPr>
+                    <a:solidFill>
+                      <a:srgbClr val="F3F6F9"/>
+                    </a:solidFill>
+                  </a:tcPr>
+                </a:tc>
+                <a:tc>
+                  <a:txBody>
+                    <a:bodyPr/>
+                    <a:lstStyle/>
+                    <a:p>
+                      <a:pPr algn="ctr">
+                        <a:defRPr sz="1200">
+                          <a:latin typeface="Microsoft YaHei"/>
+                        </a:defRPr>
+                      </a:pPr>
+                      <a:r>
+                        <a:t>0.300</a:t>
+                      </a:r>
+                    </a:p>
+                  </a:txBody>
+                  <a:tcPr>
+                    <a:solidFill>
+                      <a:srgbClr val="F3F6F9"/>
+                    </a:solidFill>
+                  </a:tcPr>
+                </a:tc>
+                <a:tc>
+                  <a:txBody>
+                    <a:bodyPr/>
+                    <a:lstStyle/>
+                    <a:p>
+                      <a:pPr algn="ctr">
+                        <a:defRPr sz="1200">
+                          <a:latin typeface="Microsoft YaHei"/>
+                        </a:defRPr>
+                      </a:pPr>
+                      <a:r>
+                        <a:t>✅ 满分</a:t>
+                      </a:r>
+                    </a:p>
+                  </a:txBody>
+                  <a:tcPr>
+                    <a:solidFill>
+                      <a:srgbClr val="F3F6F9"/>
+                    </a:solidFill>
+                  </a:tcPr>
+                </a:tc>
+              </a:tr>
+              <a:tr h="320040">
+                <a:tc>
+                  <a:txBody>
+                    <a:bodyPr/>
+                    <a:lstStyle/>
+                    <a:p>
+                      <a:pPr algn="ctr">
+                        <a:defRPr sz="1200">
+                          <a:latin typeface="Microsoft YaHei"/>
+                        </a:defRPr>
+                      </a:pPr>
+                      <a:r>
+                        <a:t>00594 破石收水</a:t>
+                      </a:r>
+                    </a:p>
+                  </a:txBody>
+                  <a:tcPr/>
+                </a:tc>
+                <a:tc>
+                  <a:txBody>
+                    <a:bodyPr/>
+                    <a:lstStyle/>
+                    <a:p>
+                      <a:pPr algn="ctr">
+                        <a:defRPr sz="1200">
+                          <a:latin typeface="Microsoft YaHei"/>
+                        </a:defRPr>
+                      </a:pPr>
+                      <a:r>
+                        <a:t>0.300</a:t>
+                      </a:r>
+                    </a:p>
+                  </a:txBody>
+                  <a:tcPr/>
+                </a:tc>
+                <a:tc>
+                  <a:txBody>
+                    <a:bodyPr/>
+                    <a:lstStyle/>
+                    <a:p>
+                      <a:pPr algn="ctr">
+                        <a:defRPr sz="1200">
+                          <a:latin typeface="Microsoft YaHei"/>
+                        </a:defRPr>
+                      </a:pPr>
+                      <a:r>
+                        <a:t>0.300</a:t>
+                      </a:r>
+                    </a:p>
+                  </a:txBody>
+                  <a:tcPr/>
+                </a:tc>
+                <a:tc>
+                  <a:txBody>
+                    <a:bodyPr/>
+                    <a:lstStyle/>
+                    <a:p>
+                      <a:pPr algn="ctr">
+                        <a:defRPr sz="1200">
+                          <a:latin typeface="Microsoft YaHei"/>
+                        </a:defRPr>
+                      </a:pPr>
+                      <a:r>
+                        <a:t>✅ 满分</a:t>
+                      </a:r>
+                    </a:p>
+                  </a:txBody>
+                  <a:tcPr/>
+                </a:tc>
+              </a:tr>
+              <a:tr h="320040">
+                <a:tc>
+                  <a:txBody>
+                    <a:bodyPr/>
+                    <a:lstStyle/>
+                    <a:p>
+                      <a:pPr algn="ctr">
+                        <a:defRPr sz="1200">
+                          <a:latin typeface="Microsoft YaHei"/>
+                        </a:defRPr>
+                      </a:pPr>
+                      <a:r>
+                        <a:t>00669 斜挖订单</a:t>
+                      </a:r>
+                    </a:p>
+                  </a:txBody>
+                  <a:tcPr>
+                    <a:solidFill>
+                      <a:srgbClr val="F3F6F9"/>
+                    </a:solidFill>
+                  </a:tcPr>
+                </a:tc>
+                <a:tc>
+                  <a:txBody>
+                    <a:bodyPr/>
+                    <a:lstStyle/>
+                    <a:p>
+                      <a:pPr algn="ctr">
+                        <a:defRPr sz="1200">
+                          <a:latin typeface="Microsoft YaHei"/>
+                        </a:defRPr>
+                      </a:pPr>
+                      <a:r>
+                        <a:t>0.300</a:t>
+                      </a:r>
+                    </a:p>
+                  </a:txBody>
+                  <a:tcPr>
+                    <a:solidFill>
+                      <a:srgbClr val="F3F6F9"/>
+                    </a:solidFill>
+                  </a:tcPr>
+                </a:tc>
+                <a:tc>
+                  <a:txBody>
+                    <a:bodyPr/>
+                    <a:lstStyle/>
+                    <a:p>
+                      <a:pPr algn="ctr">
+                        <a:defRPr sz="1200">
+                          <a:latin typeface="Microsoft YaHei"/>
+                        </a:defRPr>
+                      </a:pPr>
+                      <a:r>
+                        <a:t>0.300</a:t>
+                      </a:r>
+                    </a:p>
+                  </a:txBody>
+                  <a:tcPr>
+                    <a:solidFill>
+                      <a:srgbClr val="F3F6F9"/>
+                    </a:solidFill>
+                  </a:tcPr>
+                </a:tc>
+                <a:tc>
+                  <a:txBody>
+                    <a:bodyPr/>
+                    <a:lstStyle/>
+                    <a:p>
+                      <a:pPr algn="ctr">
+                        <a:defRPr sz="1200">
+                          <a:latin typeface="Microsoft YaHei"/>
+                        </a:defRPr>
+                      </a:pPr>
+                      <a:r>
+                        <a:t>✅ 满分</a:t>
+                      </a:r>
+                    </a:p>
+                  </a:txBody>
+                  <a:tcPr>
+                    <a:solidFill>
+                      <a:srgbClr val="F3F6F9"/>
+                    </a:solidFill>
+                  </a:tcPr>
+                </a:tc>
+              </a:tr>
+              <a:tr h="320040">
+                <a:tc>
+                  <a:txBody>
+                    <a:bodyPr/>
+                    <a:lstStyle/>
+                    <a:p>
+                      <a:pPr algn="ctr">
+                        <a:defRPr sz="1200">
+                          <a:latin typeface="Microsoft YaHei"/>
+                        </a:defRPr>
+                      </a:pPr>
+                      <a:r>
+                        <a:t>00733 海洋回收</a:t>
+                      </a:r>
+                    </a:p>
+                  </a:txBody>
+                  <a:tcPr/>
+                </a:tc>
+                <a:tc>
+                  <a:txBody>
+                    <a:bodyPr/>
+                    <a:lstStyle/>
+                    <a:p>
+                      <a:pPr algn="ctr">
+                        <a:defRPr sz="1200">
+                          <a:latin typeface="Microsoft YaHei"/>
+                        </a:defRPr>
+                      </a:pPr>
+                      <a:r>
+                        <a:t>0.150</a:t>
+                      </a:r>
+                    </a:p>
+                  </a:txBody>
+                  <a:tcPr/>
+                </a:tc>
+                <a:tc>
+                  <a:txBody>
+                    <a:bodyPr/>
+                    <a:lstStyle/>
+                    <a:p>
+                      <a:pPr algn="ctr">
+                        <a:defRPr sz="1200">
+                          <a:latin typeface="Microsoft YaHei"/>
+                        </a:defRPr>
+                      </a:pPr>
+                      <a:r>
+                        <a:t>0.150</a:t>
+                      </a:r>
+                    </a:p>
+                  </a:txBody>
+                  <a:tcPr/>
+                </a:tc>
+                <a:tc>
+                  <a:txBody>
+                    <a:bodyPr/>
+                    <a:lstStyle/>
+                    <a:p>
+                      <a:pPr algn="ctr">
+                        <a:defRPr sz="1200">
+                          <a:latin typeface="Microsoft YaHei"/>
+                        </a:defRPr>
+                      </a:pPr>
+                      <a:r>
+                        <a:t>待诊断</a:t>
+                      </a:r>
+                    </a:p>
+                  </a:txBody>
+                  <a:tcPr/>
+                </a:tc>
+              </a:tr>
+              <a:tr h="320040">
+                <a:tc>
+                  <a:txBody>
+                    <a:bodyPr/>
+                    <a:lstStyle/>
+                    <a:p>
+                      <a:pPr algn="ctr">
+                        <a:defRPr sz="1200">
+                          <a:latin typeface="Microsoft YaHei"/>
+                        </a:defRPr>
+                      </a:pPr>
+                      <a:r>
+                        <a:t>00742 加油小镇</a:t>
+                      </a:r>
+                    </a:p>
+                  </a:txBody>
+                  <a:tcPr>
+                    <a:solidFill>
+                      <a:srgbClr val="F3F6F9"/>
+                    </a:solidFill>
+                  </a:tcPr>
+                </a:tc>
+                <a:tc>
+                  <a:txBody>
+                    <a:bodyPr/>
+                    <a:lstStyle/>
+                    <a:p>
+                      <a:pPr algn="ctr">
+                        <a:defRPr sz="1200">
+                          <a:latin typeface="Microsoft YaHei"/>
+                        </a:defRPr>
+                      </a:pPr>
+                      <a:r>
+                        <a:t>0.300</a:t>
+                      </a:r>
+                    </a:p>
+                  </a:txBody>
+                  <a:tcPr>
+                    <a:solidFill>
+                      <a:srgbClr val="F3F6F9"/>
+                    </a:solidFill>
+                  </a:tcPr>
+                </a:tc>
+                <a:tc>
+                  <a:txBody>
+                    <a:bodyPr/>
+                    <a:lstStyle/>
+                    <a:p>
+                      <a:pPr algn="ctr">
+                        <a:defRPr sz="1200">
+                          <a:latin typeface="Microsoft YaHei"/>
+                        </a:defRPr>
+                      </a:pPr>
+                      <a:r>
+                        <a:t>0.300</a:t>
+                      </a:r>
+                    </a:p>
+                  </a:txBody>
+                  <a:tcPr>
+                    <a:solidFill>
+                      <a:srgbClr val="F3F6F9"/>
+                    </a:solidFill>
+                  </a:tcPr>
+                </a:tc>
+                <a:tc>
+                  <a:txBody>
+                    <a:bodyPr/>
+                    <a:lstStyle/>
+                    <a:p>
+                      <a:pPr algn="ctr">
+                        <a:defRPr sz="1200">
+                          <a:latin typeface="Microsoft YaHei"/>
+                        </a:defRPr>
+                      </a:pPr>
+                      <a:r>
+                        <a:t>✅ 满分</a:t>
                       </a:r>
                     </a:p>
                   </a:txBody>
@@ -7238,7 +6178,318 @@
               </a:defRPr>
             </a:pPr>
             <a:r>
-              <a:t>16/22</a:t>
+              <a:t>15/21</a:t>
+            </a:r>
+          </a:p>
+        </p:txBody>
+      </p:sp>
+    </p:spTree>
+  </p:cSld>
+  <p:clrMapOvr>
+    <a:masterClrMapping/>
+  </p:clrMapOvr>
+</p:sld>
+</file>
+
+<file path=ppt/slides/slide16.xml><?xml version="1.0" encoding="utf-8"?>
+<p:sld xmlns:a="http://schemas.openxmlformats.org/drawingml/2006/main" xmlns:p="http://schemas.openxmlformats.org/presentationml/2006/main" xmlns:r="http://schemas.openxmlformats.org/officeDocument/2006/relationships">
+  <p:cSld>
+    <p:spTree>
+      <p:nvGrpSpPr>
+        <p:cNvPr id="1" name=""/>
+        <p:cNvGrpSpPr/>
+        <p:nvPr/>
+      </p:nvGrpSpPr>
+      <p:grpSpPr/>
+      <p:sp>
+        <p:nvSpPr>
+          <p:cNvPr id="2" name="Rectangle 1"/>
+          <p:cNvSpPr/>
+          <p:nvPr/>
+        </p:nvSpPr>
+        <p:spPr>
+          <a:xfrm>
+            <a:off x="0" y="0"/>
+            <a:ext cx="12191695" cy="960120"/>
+          </a:xfrm>
+          <a:prstGeom prst="rect">
+            <a:avLst/>
+          </a:prstGeom>
+          <a:solidFill>
+            <a:srgbClr val="1A237E"/>
+          </a:solidFill>
+          <a:ln/>
+        </p:spPr>
+        <p:style>
+          <a:lnRef idx="1">
+            <a:schemeClr val="accent1"/>
+          </a:lnRef>
+          <a:fillRef idx="3">
+            <a:schemeClr val="accent1"/>
+          </a:fillRef>
+          <a:effectRef idx="2">
+            <a:schemeClr val="accent1"/>
+          </a:effectRef>
+          <a:fontRef idx="minor">
+            <a:schemeClr val="lt1"/>
+          </a:fontRef>
+        </p:style>
+        <p:txBody>
+          <a:bodyPr rtlCol="0" anchor="ctr"/>
+          <a:lstStyle/>
+          <a:p>
+            <a:pPr algn="ctr"/>
+          </a:p>
+        </p:txBody>
+      </p:sp>
+      <p:sp>
+        <p:nvSpPr>
+          <p:cNvPr id="3" name="TextBox 2"/>
+          <p:cNvSpPr txBox="1"/>
+          <p:nvPr/>
+        </p:nvSpPr>
+        <p:spPr>
+          <a:xfrm>
+            <a:off x="457200" y="228600"/>
+            <a:ext cx="11247120" cy="548640"/>
+          </a:xfrm>
+          <a:prstGeom prst="rect">
+            <a:avLst/>
+          </a:prstGeom>
+          <a:noFill/>
+        </p:spPr>
+        <p:txBody>
+          <a:bodyPr wrap="none">
+            <a:spAutoFit/>
+          </a:bodyPr>
+          <a:lstStyle/>
+          <a:p>
+            <a:pPr algn="l">
+              <a:defRPr sz="3000" b="1">
+                <a:solidFill>
+                  <a:srgbClr val="F3F6F9"/>
+                </a:solidFill>
+                <a:latin typeface="Microsoft YaHei"/>
+              </a:defRPr>
+            </a:pPr>
+            <a:r>
+              <a:t>关键发现</a:t>
+            </a:r>
+          </a:p>
+        </p:txBody>
+      </p:sp>
+      <p:sp>
+        <p:nvSpPr>
+          <p:cNvPr id="4" name="TextBox 3"/>
+          <p:cNvSpPr txBox="1"/>
+          <p:nvPr/>
+        </p:nvSpPr>
+        <p:spPr>
+          <a:xfrm>
+            <a:off x="548640" y="1234440"/>
+            <a:ext cx="11064240" cy="5029200"/>
+          </a:xfrm>
+          <a:prstGeom prst="rect">
+            <a:avLst/>
+          </a:prstGeom>
+          <a:noFill/>
+        </p:spPr>
+        <p:txBody>
+          <a:bodyPr wrap="square">
+            <a:spAutoFit/>
+          </a:bodyPr>
+          <a:lstStyle/>
+          <a:p>
+            <a:pPr algn="l">
+              <a:spcAft>
+                <a:spcPts val="1000"/>
+              </a:spcAft>
+              <a:defRPr sz="1800" b="0">
+                <a:solidFill>
+                  <a:srgbClr val="1E2933"/>
+                </a:solidFill>
+                <a:latin typeface="Microsoft YaHei"/>
+              </a:defRPr>
+            </a:pPr>
+            <a:r>
+              <a:t>A 类 joystick：00461 / 00483 / 00522 在 multi-bus* 下稳定 0.300，记忆读回是决定性收益</a:t>
+            </a:r>
+          </a:p>
+          <a:p>
+            <a:pPr algn="l">
+              <a:spcAft>
+                <a:spcPts val="1000"/>
+              </a:spcAft>
+              <a:defRPr sz="1800" b="0">
+                <a:solidFill>
+                  <a:srgbClr val="1E2933"/>
+                </a:solidFill>
+                <a:latin typeface="Microsoft YaHei"/>
+              </a:defRPr>
+            </a:pPr>
+            <a:r>
+              <a:t>A 类短板：00496 / 00517 / 00736 的 multi-bus activity=0，driver 需要按游戏类型再调优</a:t>
+            </a:r>
+          </a:p>
+          <a:p>
+            <a:pPr algn="l">
+              <a:spcAft>
+                <a:spcPts val="1000"/>
+              </a:spcAft>
+              <a:defRPr sz="1800" b="0">
+                <a:solidFill>
+                  <a:srgbClr val="1E2933"/>
+                </a:solidFill>
+                <a:latin typeface="Microsoft YaHei"/>
+              </a:defRPr>
+            </a:pPr>
+            <a:r>
+              <a:t>B 类 tap-only：8/15 游戏 rule 即可 0.300，说明点击目标屏幕坐标的策略本身可行</a:t>
+            </a:r>
+          </a:p>
+          <a:p>
+            <a:pPr algn="l">
+              <a:spcAft>
+                <a:spcPts val="1000"/>
+              </a:spcAft>
+              <a:defRPr sz="1800" b="0">
+                <a:solidFill>
+                  <a:srgbClr val="1E2933"/>
+                </a:solidFill>
+                <a:latin typeface="Microsoft YaHei"/>
+              </a:defRPr>
+            </a:pPr>
+            <a:r>
+              <a:t>B 类待诊断：7/15 游戏 0.150（activity=0），可能是目标被遮挡、需要拖拽，或坐标映射偏差</a:t>
+            </a:r>
+          </a:p>
+          <a:p>
+            <a:pPr algn="l">
+              <a:spcAft>
+                <a:spcPts val="1000"/>
+              </a:spcAft>
+              <a:defRPr sz="1800" b="0">
+                <a:solidFill>
+                  <a:srgbClr val="1E2933"/>
+                </a:solidFill>
+                <a:latin typeface="Microsoft YaHei"/>
+              </a:defRPr>
+            </a:pPr>
+            <a:r>
+              <a:t>22 游戏全部可驱动、可采集轨迹，为后续 QLoRA 提供了 27,693 条合并样本</a:t>
+            </a:r>
+          </a:p>
+        </p:txBody>
+      </p:sp>
+      <p:sp>
+        <p:nvSpPr>
+          <p:cNvPr id="5" name="Rectangle 4"/>
+          <p:cNvSpPr/>
+          <p:nvPr/>
+        </p:nvSpPr>
+        <p:spPr>
+          <a:xfrm>
+            <a:off x="0" y="6537960"/>
+            <a:ext cx="12191695" cy="18288"/>
+          </a:xfrm>
+          <a:prstGeom prst="rect">
+            <a:avLst/>
+          </a:prstGeom>
+          <a:solidFill>
+            <a:srgbClr val="0096C7"/>
+          </a:solidFill>
+          <a:ln/>
+        </p:spPr>
+        <p:style>
+          <a:lnRef idx="1">
+            <a:schemeClr val="accent1"/>
+          </a:lnRef>
+          <a:fillRef idx="3">
+            <a:schemeClr val="accent1"/>
+          </a:fillRef>
+          <a:effectRef idx="2">
+            <a:schemeClr val="accent1"/>
+          </a:effectRef>
+          <a:fontRef idx="minor">
+            <a:schemeClr val="lt1"/>
+          </a:fontRef>
+        </p:style>
+        <p:txBody>
+          <a:bodyPr rtlCol="0" anchor="ctr"/>
+          <a:lstStyle/>
+          <a:p>
+            <a:pPr algn="ctr"/>
+          </a:p>
+        </p:txBody>
+      </p:sp>
+      <p:sp>
+        <p:nvSpPr>
+          <p:cNvPr id="6" name="TextBox 5"/>
+          <p:cNvSpPr txBox="1"/>
+          <p:nvPr/>
+        </p:nvSpPr>
+        <p:spPr>
+          <a:xfrm>
+            <a:off x="457200" y="6583680"/>
+            <a:ext cx="3657600" cy="228600"/>
+          </a:xfrm>
+          <a:prstGeom prst="rect">
+            <a:avLst/>
+          </a:prstGeom>
+          <a:noFill/>
+        </p:spPr>
+        <p:txBody>
+          <a:bodyPr wrap="none">
+            <a:spAutoFit/>
+          </a:bodyPr>
+          <a:lstStyle/>
+          <a:p>
+            <a:pPr algn="l">
+              <a:defRPr sz="1000" b="0">
+                <a:solidFill>
+                  <a:srgbClr val="6C757D"/>
+                </a:solidFill>
+                <a:latin typeface="Microsoft YaHei"/>
+              </a:defRPr>
+            </a:pPr>
+            <a:r>
+              <a:t>smallgameagent · LLM/VLM + 规则驱动</a:t>
+            </a:r>
+          </a:p>
+        </p:txBody>
+      </p:sp>
+      <p:sp>
+        <p:nvSpPr>
+          <p:cNvPr id="7" name="TextBox 6"/>
+          <p:cNvSpPr txBox="1"/>
+          <p:nvPr/>
+        </p:nvSpPr>
+        <p:spPr>
+          <a:xfrm>
+            <a:off x="10789920" y="6583680"/>
+            <a:ext cx="914400" cy="228600"/>
+          </a:xfrm>
+          <a:prstGeom prst="rect">
+            <a:avLst/>
+          </a:prstGeom>
+          <a:noFill/>
+        </p:spPr>
+        <p:txBody>
+          <a:bodyPr wrap="none">
+            <a:spAutoFit/>
+          </a:bodyPr>
+          <a:lstStyle/>
+          <a:p>
+            <a:pPr algn="r">
+              <a:defRPr sz="1000" b="0">
+                <a:solidFill>
+                  <a:srgbClr val="6C757D"/>
+                </a:solidFill>
+                <a:latin typeface="Microsoft YaHei"/>
+              </a:defRPr>
+            </a:pPr>
+            <a:r>
+              <a:t>16/21</a:t>
             </a:r>
           </a:p>
         </p:txBody>
@@ -7270,7 +6521,7 @@
         <p:spPr>
           <a:xfrm>
             <a:off x="0" y="0"/>
-            <a:ext cx="12191695" cy="960120"/>
+            <a:ext cx="12191695" cy="6858000"/>
           </a:xfrm>
           <a:prstGeom prst="rect">
             <a:avLst/>
@@ -7310,8 +6561,8 @@
         </p:nvSpPr>
         <p:spPr>
           <a:xfrm>
-            <a:off x="457200" y="228600"/>
-            <a:ext cx="11247120" cy="548640"/>
+            <a:off x="548640" y="2468880"/>
+            <a:ext cx="11064240" cy="1097280"/>
           </a:xfrm>
           <a:prstGeom prst="rect">
             <a:avLst/>
@@ -7325,7 +6576,7 @@
           <a:lstStyle/>
           <a:p>
             <a:pPr algn="l">
-              <a:defRPr sz="3000" b="1">
+              <a:defRPr sz="4400" b="1">
                 <a:solidFill>
                   <a:srgbClr val="F3F6F9"/>
                 </a:solidFill>
@@ -7333,130 +6584,27 @@
               </a:defRPr>
             </a:pPr>
             <a:r>
-              <a:t>关键发现</a:t>
-            </a:r>
-          </a:p>
-        </p:txBody>
-      </p:sp>
-      <p:sp>
-        <p:nvSpPr>
-          <p:cNvPr id="4" name="TextBox 3"/>
-          <p:cNvSpPr txBox="1"/>
-          <p:nvPr/>
-        </p:nvSpPr>
-        <p:spPr>
-          <a:xfrm>
-            <a:off x="548640" y="1234440"/>
-            <a:ext cx="11064240" cy="5029200"/>
-          </a:xfrm>
-          <a:prstGeom prst="rect">
-            <a:avLst/>
-          </a:prstGeom>
-          <a:noFill/>
-        </p:spPr>
-        <p:txBody>
-          <a:bodyPr wrap="square">
-            <a:spAutoFit/>
-          </a:bodyPr>
-          <a:lstStyle/>
-          <a:p>
-            <a:pPr algn="l">
-              <a:spcAft>
-                <a:spcPts val="1000"/>
-              </a:spcAft>
-              <a:defRPr sz="1800" b="0">
-                <a:solidFill>
-                  <a:srgbClr val="1E2933"/>
-                </a:solidFill>
-                <a:latin typeface="Microsoft YaHei"/>
-              </a:defRPr>
-            </a:pPr>
-            <a:r>
-              <a:t>B 类 tap-only 游戏 rule 模式即可达到 composite 0.300，tap 坐标映射已稳定</a:t>
-            </a:r>
-          </a:p>
-          <a:p>
-            <a:pPr algn="l">
-              <a:spcAft>
-                <a:spcPts val="1000"/>
-              </a:spcAft>
-              <a:defRPr sz="1800" b="0">
-                <a:solidFill>
-                  <a:srgbClr val="1E2933"/>
-                </a:solidFill>
-                <a:latin typeface="Microsoft YaHei"/>
-              </a:defRPr>
-            </a:pPr>
-            <a:r>
-              <a:t>multi-bus 在 00461 / 00483 / 00522 上稳定满分，说明 bus + memory 对这类游戏有决定性收益</a:t>
-            </a:r>
-          </a:p>
-          <a:p>
-            <a:pPr algn="l">
-              <a:spcAft>
-                <a:spcPts val="1000"/>
-              </a:spcAft>
-              <a:defRPr sz="1800" b="0">
-                <a:solidFill>
-                  <a:srgbClr val="1E2933"/>
-                </a:solidFill>
-                <a:latin typeface="Microsoft YaHei"/>
-              </a:defRPr>
-            </a:pPr>
-            <a:r>
-              <a:t>00496 / 00517 / 00736 的 multi-bus activity=0，driver 在这些游戏上选错了动作，需要按游戏调优</a:t>
-            </a:r>
-          </a:p>
-          <a:p>
-            <a:pPr algn="l">
-              <a:spcAft>
-                <a:spcPts val="1000"/>
-              </a:spcAft>
-              <a:defRPr sz="1800" b="0">
-                <a:solidFill>
-                  <a:srgbClr val="1E2933"/>
-                </a:solidFill>
-                <a:latin typeface="Microsoft YaHei"/>
-              </a:defRPr>
-            </a:pPr>
-            <a:r>
-              <a:t>A 组整体平均：rule 0.209、multi-bus 0.217、multi-bus-memory 0.218，差异被少数游戏拉满</a:t>
-            </a:r>
-          </a:p>
-          <a:p>
-            <a:pPr algn="l">
-              <a:spcAft>
-                <a:spcPts val="1000"/>
-              </a:spcAft>
-              <a:defRPr sz="1800" b="0">
-                <a:solidFill>
-                  <a:srgbClr val="1E2933"/>
-                </a:solidFill>
-                <a:latin typeface="Microsoft YaHei"/>
-              </a:defRPr>
-            </a:pPr>
-            <a:r>
-              <a:t>浏览器修复是前置条件：WSL2 headless 需 bundled Chromium + swiftshader 参数</a:t>
-            </a:r>
-          </a:p>
-        </p:txBody>
-      </p:sp>
-      <p:sp>
-        <p:nvSpPr>
-          <p:cNvPr id="5" name="Rectangle 4"/>
+              <a:t>07 训练数据管线</a:t>
+            </a:r>
+          </a:p>
+        </p:txBody>
+      </p:sp>
+      <p:sp>
+        <p:nvSpPr>
+          <p:cNvPr id="4" name="Rectangle 3"/>
           <p:cNvSpPr/>
           <p:nvPr/>
         </p:nvSpPr>
         <p:spPr>
           <a:xfrm>
-            <a:off x="0" y="6537960"/>
-            <a:ext cx="12191695" cy="18288"/>
+            <a:off x="548640" y="3657600"/>
+            <a:ext cx="1828800" cy="73152"/>
           </a:xfrm>
           <a:prstGeom prst="rect">
             <a:avLst/>
           </a:prstGeom>
           <a:solidFill>
-            <a:srgbClr val="0096C7"/>
+            <a:srgbClr val="FF6B35"/>
           </a:solidFill>
           <a:ln/>
         </p:spPr>
@@ -7484,6 +6632,47 @@
       </p:sp>
       <p:sp>
         <p:nvSpPr>
+          <p:cNvPr id="5" name="Rectangle 4"/>
+          <p:cNvSpPr/>
+          <p:nvPr/>
+        </p:nvSpPr>
+        <p:spPr>
+          <a:xfrm>
+            <a:off x="0" y="6537960"/>
+            <a:ext cx="12191695" cy="18288"/>
+          </a:xfrm>
+          <a:prstGeom prst="rect">
+            <a:avLst/>
+          </a:prstGeom>
+          <a:solidFill>
+            <a:srgbClr val="0096C7"/>
+          </a:solidFill>
+          <a:ln/>
+        </p:spPr>
+        <p:style>
+          <a:lnRef idx="1">
+            <a:schemeClr val="accent1"/>
+          </a:lnRef>
+          <a:fillRef idx="3">
+            <a:schemeClr val="accent1"/>
+          </a:fillRef>
+          <a:effectRef idx="2">
+            <a:schemeClr val="accent1"/>
+          </a:effectRef>
+          <a:fontRef idx="minor">
+            <a:schemeClr val="lt1"/>
+          </a:fontRef>
+        </p:style>
+        <p:txBody>
+          <a:bodyPr rtlCol="0" anchor="ctr"/>
+          <a:lstStyle/>
+          <a:p>
+            <a:pPr algn="ctr"/>
+          </a:p>
+        </p:txBody>
+      </p:sp>
+      <p:sp>
+        <p:nvSpPr>
           <p:cNvPr id="6" name="TextBox 5"/>
           <p:cNvSpPr txBox="1"/>
           <p:nvPr/>
@@ -7549,7 +6738,7 @@
               </a:defRPr>
             </a:pPr>
             <a:r>
-              <a:t>17/22</a:t>
+              <a:t>17/21</a:t>
             </a:r>
           </a:p>
         </p:txBody>
@@ -7581,7 +6770,7 @@
         <p:spPr>
           <a:xfrm>
             <a:off x="0" y="0"/>
-            <a:ext cx="12191695" cy="6858000"/>
+            <a:ext cx="12191695" cy="960120"/>
           </a:xfrm>
           <a:prstGeom prst="rect">
             <a:avLst/>
@@ -7621,8 +6810,8 @@
         </p:nvSpPr>
         <p:spPr>
           <a:xfrm>
-            <a:off x="548640" y="2468880"/>
-            <a:ext cx="11064240" cy="1097280"/>
+            <a:off x="457200" y="228600"/>
+            <a:ext cx="11247120" cy="548640"/>
           </a:xfrm>
           <a:prstGeom prst="rect">
             <a:avLst/>
@@ -7636,7 +6825,7 @@
           <a:lstStyle/>
           <a:p>
             <a:pPr algn="l">
-              <a:defRPr sz="4400" b="1">
+              <a:defRPr sz="3000" b="1">
                 <a:solidFill>
                   <a:srgbClr val="F3F6F9"/>
                 </a:solidFill>
@@ -7644,27 +6833,114 @@
               </a:defRPr>
             </a:pPr>
             <a:r>
-              <a:t>07 训练数据管线</a:t>
-            </a:r>
-          </a:p>
-        </p:txBody>
-      </p:sp>
-      <p:sp>
-        <p:nvSpPr>
-          <p:cNvPr id="4" name="Rectangle 3"/>
+              <a:t>跑过的轨迹 = 可复用的训练数据</a:t>
+            </a:r>
+          </a:p>
+        </p:txBody>
+      </p:sp>
+      <p:sp>
+        <p:nvSpPr>
+          <p:cNvPr id="4" name="TextBox 3"/>
+          <p:cNvSpPr txBox="1"/>
+          <p:nvPr/>
+        </p:nvSpPr>
+        <p:spPr>
+          <a:xfrm>
+            <a:off x="548640" y="1234440"/>
+            <a:ext cx="11064240" cy="5029200"/>
+          </a:xfrm>
+          <a:prstGeom prst="rect">
+            <a:avLst/>
+          </a:prstGeom>
+          <a:noFill/>
+        </p:spPr>
+        <p:txBody>
+          <a:bodyPr wrap="square">
+            <a:spAutoFit/>
+          </a:bodyPr>
+          <a:lstStyle/>
+          <a:p>
+            <a:pPr algn="l">
+              <a:spcAft>
+                <a:spcPts val="1000"/>
+              </a:spcAft>
+              <a:defRPr sz="1800" b="0">
+                <a:solidFill>
+                  <a:srgbClr val="1E2933"/>
+                </a:solidFill>
+                <a:latin typeface="Microsoft YaHei"/>
+              </a:defRPr>
+            </a:pPr>
+            <a:r>
+              <a:t>batch_runner 每步记录 state / action / keyNumbers / reason</a:t>
+            </a:r>
+          </a:p>
+          <a:p>
+            <a:pPr algn="l">
+              <a:spcAft>
+                <a:spcPts val="1000"/>
+              </a:spcAft>
+              <a:defRPr sz="1800" b="0">
+                <a:solidFill>
+                  <a:srgbClr val="1E2933"/>
+                </a:solidFill>
+                <a:latin typeface="Microsoft YaHei"/>
+              </a:defRPr>
+            </a:pPr>
+            <a:r>
+              <a:t>trajectory_converter 离线生成 7 任务样本：next_probe_action、information_gain_judgment 等</a:t>
+            </a:r>
+          </a:p>
+          <a:p>
+            <a:pPr algn="l">
+              <a:spcAft>
+                <a:spcPts val="1000"/>
+              </a:spcAft>
+              <a:defRPr sz="1800" b="0">
+                <a:solidFill>
+                  <a:srgbClr val="1E2933"/>
+                </a:solidFill>
+                <a:latin typeface="Microsoft YaHei"/>
+              </a:defRPr>
+            </a:pPr>
+            <a:r>
+              <a:t>已累积 27,693 条合并样本（去重后），覆盖 22 个游戏、rule / multi-bus-memory / multi-bus</a:t>
+            </a:r>
+          </a:p>
+          <a:p>
+            <a:pPr algn="l">
+              <a:spcAft>
+                <a:spcPts val="1000"/>
+              </a:spcAft>
+              <a:defRPr sz="1800" b="0">
+                <a:solidFill>
+                  <a:srgbClr val="1E2933"/>
+                </a:solidFill>
+                <a:latin typeface="Microsoft YaHei"/>
+              </a:defRPr>
+            </a:pPr>
+            <a:r>
+              <a:t>可直接喂给 Qwen3.5-4B/9B 与 Gemma-4-E4B 的 QLoRA 微调脚本</a:t>
+            </a:r>
+          </a:p>
+        </p:txBody>
+      </p:sp>
+      <p:sp>
+        <p:nvSpPr>
+          <p:cNvPr id="5" name="Rectangle 4"/>
           <p:cNvSpPr/>
           <p:nvPr/>
         </p:nvSpPr>
         <p:spPr>
           <a:xfrm>
-            <a:off x="548640" y="3657600"/>
-            <a:ext cx="1828800" cy="73152"/>
+            <a:off x="0" y="6537960"/>
+            <a:ext cx="12191695" cy="18288"/>
           </a:xfrm>
           <a:prstGeom prst="rect">
             <a:avLst/>
           </a:prstGeom>
           <a:solidFill>
-            <a:srgbClr val="FF6B35"/>
+            <a:srgbClr val="0096C7"/>
           </a:solidFill>
           <a:ln/>
         </p:spPr>
@@ -7692,47 +6968,6 @@
       </p:sp>
       <p:sp>
         <p:nvSpPr>
-          <p:cNvPr id="5" name="Rectangle 4"/>
-          <p:cNvSpPr/>
-          <p:nvPr/>
-        </p:nvSpPr>
-        <p:spPr>
-          <a:xfrm>
-            <a:off x="0" y="6537960"/>
-            <a:ext cx="12191695" cy="18288"/>
-          </a:xfrm>
-          <a:prstGeom prst="rect">
-            <a:avLst/>
-          </a:prstGeom>
-          <a:solidFill>
-            <a:srgbClr val="0096C7"/>
-          </a:solidFill>
-          <a:ln/>
-        </p:spPr>
-        <p:style>
-          <a:lnRef idx="1">
-            <a:schemeClr val="accent1"/>
-          </a:lnRef>
-          <a:fillRef idx="3">
-            <a:schemeClr val="accent1"/>
-          </a:fillRef>
-          <a:effectRef idx="2">
-            <a:schemeClr val="accent1"/>
-          </a:effectRef>
-          <a:fontRef idx="minor">
-            <a:schemeClr val="lt1"/>
-          </a:fontRef>
-        </p:style>
-        <p:txBody>
-          <a:bodyPr rtlCol="0" anchor="ctr"/>
-          <a:lstStyle/>
-          <a:p>
-            <a:pPr algn="ctr"/>
-          </a:p>
-        </p:txBody>
-      </p:sp>
-      <p:sp>
-        <p:nvSpPr>
           <p:cNvPr id="6" name="TextBox 5"/>
           <p:cNvSpPr txBox="1"/>
           <p:nvPr/>
@@ -7798,7 +7033,7 @@
               </a:defRPr>
             </a:pPr>
             <a:r>
-              <a:t>18/22</a:t>
+              <a:t>18/21</a:t>
             </a:r>
           </a:p>
         </p:txBody>
@@ -7830,7 +7065,7 @@
         <p:spPr>
           <a:xfrm>
             <a:off x="0" y="0"/>
-            <a:ext cx="12191695" cy="960120"/>
+            <a:ext cx="12191695" cy="6858000"/>
           </a:xfrm>
           <a:prstGeom prst="rect">
             <a:avLst/>
@@ -7870,8 +7105,8 @@
         </p:nvSpPr>
         <p:spPr>
           <a:xfrm>
-            <a:off x="457200" y="228600"/>
-            <a:ext cx="11247120" cy="548640"/>
+            <a:off x="548640" y="2468880"/>
+            <a:ext cx="11064240" cy="1097280"/>
           </a:xfrm>
           <a:prstGeom prst="rect">
             <a:avLst/>
@@ -7885,7 +7120,7 @@
           <a:lstStyle/>
           <a:p>
             <a:pPr algn="l">
-              <a:defRPr sz="3000" b="1">
+              <a:defRPr sz="4400" b="1">
                 <a:solidFill>
                   <a:srgbClr val="F3F6F9"/>
                 </a:solidFill>
@@ -7893,114 +7128,27 @@
               </a:defRPr>
             </a:pPr>
             <a:r>
-              <a:t>跑过的轨迹 = 可复用的训练数据</a:t>
-            </a:r>
-          </a:p>
-        </p:txBody>
-      </p:sp>
-      <p:sp>
-        <p:nvSpPr>
-          <p:cNvPr id="4" name="TextBox 3"/>
-          <p:cNvSpPr txBox="1"/>
-          <p:nvPr/>
-        </p:nvSpPr>
-        <p:spPr>
-          <a:xfrm>
-            <a:off x="548640" y="1234440"/>
-            <a:ext cx="11064240" cy="5029200"/>
-          </a:xfrm>
-          <a:prstGeom prst="rect">
-            <a:avLst/>
-          </a:prstGeom>
-          <a:noFill/>
-        </p:spPr>
-        <p:txBody>
-          <a:bodyPr wrap="square">
-            <a:spAutoFit/>
-          </a:bodyPr>
-          <a:lstStyle/>
-          <a:p>
-            <a:pPr algn="l">
-              <a:spcAft>
-                <a:spcPts val="1000"/>
-              </a:spcAft>
-              <a:defRPr sz="1800" b="0">
-                <a:solidFill>
-                  <a:srgbClr val="1E2933"/>
-                </a:solidFill>
-                <a:latin typeface="Microsoft YaHei"/>
-              </a:defRPr>
-            </a:pPr>
-            <a:r>
-              <a:t>batch_runner 每步记录 state / action / keyNumbers / reason</a:t>
-            </a:r>
-          </a:p>
-          <a:p>
-            <a:pPr algn="l">
-              <a:spcAft>
-                <a:spcPts val="1000"/>
-              </a:spcAft>
-              <a:defRPr sz="1800" b="0">
-                <a:solidFill>
-                  <a:srgbClr val="1E2933"/>
-                </a:solidFill>
-                <a:latin typeface="Microsoft YaHei"/>
-              </a:defRPr>
-            </a:pPr>
-            <a:r>
-              <a:t>trajectory_converter 离线生成 7 任务样本：next_probe_action、information_gain_judgment 等</a:t>
-            </a:r>
-          </a:p>
-          <a:p>
-            <a:pPr algn="l">
-              <a:spcAft>
-                <a:spcPts val="1000"/>
-              </a:spcAft>
-              <a:defRPr sz="1800" b="0">
-                <a:solidFill>
-                  <a:srgbClr val="1E2933"/>
-                </a:solidFill>
-                <a:latin typeface="Microsoft YaHei"/>
-              </a:defRPr>
-            </a:pPr>
-            <a:r>
-              <a:t>已累积 33,250 条样本，覆盖 rule / multi-bus-memory / hierarchical</a:t>
-            </a:r>
-          </a:p>
-          <a:p>
-            <a:pPr algn="l">
-              <a:spcAft>
-                <a:spcPts val="1000"/>
-              </a:spcAft>
-              <a:defRPr sz="1800" b="0">
-                <a:solidFill>
-                  <a:srgbClr val="1E2933"/>
-                </a:solidFill>
-                <a:latin typeface="Microsoft YaHei"/>
-              </a:defRPr>
-            </a:pPr>
-            <a:r>
-              <a:t>可直接喂给 Qwen3.5-4B/9B 与 Gemma-4-E4B 的 QLoRA 微调脚本</a:t>
-            </a:r>
-          </a:p>
-        </p:txBody>
-      </p:sp>
-      <p:sp>
-        <p:nvSpPr>
-          <p:cNvPr id="5" name="Rectangle 4"/>
+              <a:t>08 下一步</a:t>
+            </a:r>
+          </a:p>
+        </p:txBody>
+      </p:sp>
+      <p:sp>
+        <p:nvSpPr>
+          <p:cNvPr id="4" name="Rectangle 3"/>
           <p:cNvSpPr/>
           <p:nvPr/>
         </p:nvSpPr>
         <p:spPr>
           <a:xfrm>
-            <a:off x="0" y="6537960"/>
-            <a:ext cx="12191695" cy="18288"/>
+            <a:off x="548640" y="3657600"/>
+            <a:ext cx="1828800" cy="73152"/>
           </a:xfrm>
           <a:prstGeom prst="rect">
             <a:avLst/>
           </a:prstGeom>
           <a:solidFill>
-            <a:srgbClr val="0096C7"/>
+            <a:srgbClr val="FF6B35"/>
           </a:solidFill>
           <a:ln/>
         </p:spPr>
@@ -8028,6 +7176,47 @@
       </p:sp>
       <p:sp>
         <p:nvSpPr>
+          <p:cNvPr id="5" name="Rectangle 4"/>
+          <p:cNvSpPr/>
+          <p:nvPr/>
+        </p:nvSpPr>
+        <p:spPr>
+          <a:xfrm>
+            <a:off x="0" y="6537960"/>
+            <a:ext cx="12191695" cy="18288"/>
+          </a:xfrm>
+          <a:prstGeom prst="rect">
+            <a:avLst/>
+          </a:prstGeom>
+          <a:solidFill>
+            <a:srgbClr val="0096C7"/>
+          </a:solidFill>
+          <a:ln/>
+        </p:spPr>
+        <p:style>
+          <a:lnRef idx="1">
+            <a:schemeClr val="accent1"/>
+          </a:lnRef>
+          <a:fillRef idx="3">
+            <a:schemeClr val="accent1"/>
+          </a:fillRef>
+          <a:effectRef idx="2">
+            <a:schemeClr val="accent1"/>
+          </a:effectRef>
+          <a:fontRef idx="minor">
+            <a:schemeClr val="lt1"/>
+          </a:fontRef>
+        </p:style>
+        <p:txBody>
+          <a:bodyPr rtlCol="0" anchor="ctr"/>
+          <a:lstStyle/>
+          <a:p>
+            <a:pPr algn="ctr"/>
+          </a:p>
+        </p:txBody>
+      </p:sp>
+      <p:sp>
+        <p:nvSpPr>
           <p:cNvPr id="6" name="TextBox 5"/>
           <p:cNvSpPr txBox="1"/>
           <p:nvPr/>
@@ -8093,7 +7282,7 @@
               </a:defRPr>
             </a:pPr>
             <a:r>
-              <a:t>19/22</a:t>
+              <a:t>19/21</a:t>
             </a:r>
           </a:p>
         </p:txBody>
@@ -8420,7 +7609,7 @@
               </a:defRPr>
             </a:pPr>
             <a:r>
-              <a:t>2/22</a:t>
+              <a:t>2/21</a:t>
             </a:r>
           </a:p>
         </p:txBody>
@@ -8452,7 +7641,7 @@
         <p:spPr>
           <a:xfrm>
             <a:off x="0" y="0"/>
-            <a:ext cx="12191695" cy="6858000"/>
+            <a:ext cx="12191695" cy="960120"/>
           </a:xfrm>
           <a:prstGeom prst="rect">
             <a:avLst/>
@@ -8492,8 +7681,8 @@
         </p:nvSpPr>
         <p:spPr>
           <a:xfrm>
-            <a:off x="548640" y="2468880"/>
-            <a:ext cx="11064240" cy="1097280"/>
+            <a:off x="457200" y="228600"/>
+            <a:ext cx="11247120" cy="548640"/>
           </a:xfrm>
           <a:prstGeom prst="rect">
             <a:avLst/>
@@ -8507,7 +7696,7 @@
           <a:lstStyle/>
           <a:p>
             <a:pPr algn="l">
-              <a:defRPr sz="4400" b="1">
+              <a:defRPr sz="3000" b="1">
                 <a:solidFill>
                   <a:srgbClr val="F3F6F9"/>
                 </a:solidFill>
@@ -8515,27 +7704,114 @@
               </a:defRPr>
             </a:pPr>
             <a:r>
-              <a:t>08 下一步</a:t>
-            </a:r>
-          </a:p>
-        </p:txBody>
-      </p:sp>
-      <p:sp>
-        <p:nvSpPr>
-          <p:cNvPr id="4" name="Rectangle 3"/>
+              <a:t>接下来要攻的几件事</a:t>
+            </a:r>
+          </a:p>
+        </p:txBody>
+      </p:sp>
+      <p:sp>
+        <p:nvSpPr>
+          <p:cNvPr id="4" name="TextBox 3"/>
+          <p:cNvSpPr txBox="1"/>
+          <p:nvPr/>
+        </p:nvSpPr>
+        <p:spPr>
+          <a:xfrm>
+            <a:off x="548640" y="1234440"/>
+            <a:ext cx="11064240" cy="5029200"/>
+          </a:xfrm>
+          <a:prstGeom prst="rect">
+            <a:avLst/>
+          </a:prstGeom>
+          <a:noFill/>
+        </p:spPr>
+        <p:txBody>
+          <a:bodyPr wrap="square">
+            <a:spAutoFit/>
+          </a:bodyPr>
+          <a:lstStyle/>
+          <a:p>
+            <a:pPr algn="l">
+              <a:spcAft>
+                <a:spcPts val="1000"/>
+              </a:spcAft>
+              <a:defRPr sz="1800" b="0">
+                <a:solidFill>
+                  <a:srgbClr val="1E2933"/>
+                </a:solidFill>
+                <a:latin typeface="Microsoft YaHei"/>
+              </a:defRPr>
+            </a:pPr>
+            <a:r>
+              <a:t>跑完 B 组 15 游戏 × 2 模式 × 2 seeds，拿到完整 22 游戏矩阵</a:t>
+            </a:r>
+          </a:p>
+          <a:p>
+            <a:pPr algn="l">
+              <a:spcAft>
+                <a:spcPts val="1000"/>
+              </a:spcAft>
+              <a:defRPr sz="1800" b="0">
+                <a:solidFill>
+                  <a:srgbClr val="1E2933"/>
+                </a:solidFill>
+                <a:latin typeface="Microsoft YaHei"/>
+              </a:defRPr>
+            </a:pPr>
+            <a:r>
+              <a:t>定位并修复 00483 multi-bus / multi-bus-memory activity=0 的问题</a:t>
+            </a:r>
+          </a:p>
+          <a:p>
+            <a:pPr algn="l">
+              <a:spcAft>
+                <a:spcPts val="1000"/>
+              </a:spcAft>
+              <a:defRPr sz="1800" b="0">
+                <a:solidFill>
+                  <a:srgbClr val="1E2933"/>
+                </a:solidFill>
+                <a:latin typeface="Microsoft YaHei"/>
+              </a:defRPr>
+            </a:pPr>
+            <a:r>
+              <a:t>让本地 VLM 常驻，验证 hierarchical 三层协同的真实收益</a:t>
+            </a:r>
+          </a:p>
+          <a:p>
+            <a:pPr algn="l">
+              <a:spcAft>
+                <a:spcPts val="1000"/>
+              </a:spcAft>
+              <a:defRPr sz="1800" b="0">
+                <a:solidFill>
+                  <a:srgbClr val="1E2933"/>
+                </a:solidFill>
+                <a:latin typeface="Microsoft YaHei"/>
+              </a:defRPr>
+            </a:pPr>
+            <a:r>
+              <a:t>在 5090 服务器上跑 QLoRA 微调，把 VLM 变成专用的画面理解器</a:t>
+            </a:r>
+          </a:p>
+        </p:txBody>
+      </p:sp>
+      <p:sp>
+        <p:nvSpPr>
+          <p:cNvPr id="5" name="Rectangle 4"/>
           <p:cNvSpPr/>
           <p:nvPr/>
         </p:nvSpPr>
         <p:spPr>
           <a:xfrm>
-            <a:off x="548640" y="3657600"/>
-            <a:ext cx="1828800" cy="73152"/>
+            <a:off x="0" y="6537960"/>
+            <a:ext cx="12191695" cy="18288"/>
           </a:xfrm>
           <a:prstGeom prst="rect">
             <a:avLst/>
           </a:prstGeom>
           <a:solidFill>
-            <a:srgbClr val="FF6B35"/>
+            <a:srgbClr val="0096C7"/>
           </a:solidFill>
           <a:ln/>
         </p:spPr>
@@ -8563,47 +7839,6 @@
       </p:sp>
       <p:sp>
         <p:nvSpPr>
-          <p:cNvPr id="5" name="Rectangle 4"/>
-          <p:cNvSpPr/>
-          <p:nvPr/>
-        </p:nvSpPr>
-        <p:spPr>
-          <a:xfrm>
-            <a:off x="0" y="6537960"/>
-            <a:ext cx="12191695" cy="18288"/>
-          </a:xfrm>
-          <a:prstGeom prst="rect">
-            <a:avLst/>
-          </a:prstGeom>
-          <a:solidFill>
-            <a:srgbClr val="0096C7"/>
-          </a:solidFill>
-          <a:ln/>
-        </p:spPr>
-        <p:style>
-          <a:lnRef idx="1">
-            <a:schemeClr val="accent1"/>
-          </a:lnRef>
-          <a:fillRef idx="3">
-            <a:schemeClr val="accent1"/>
-          </a:fillRef>
-          <a:effectRef idx="2">
-            <a:schemeClr val="accent1"/>
-          </a:effectRef>
-          <a:fontRef idx="minor">
-            <a:schemeClr val="lt1"/>
-          </a:fontRef>
-        </p:style>
-        <p:txBody>
-          <a:bodyPr rtlCol="0" anchor="ctr"/>
-          <a:lstStyle/>
-          <a:p>
-            <a:pPr algn="ctr"/>
-          </a:p>
-        </p:txBody>
-      </p:sp>
-      <p:sp>
-        <p:nvSpPr>
           <p:cNvPr id="6" name="TextBox 5"/>
           <p:cNvSpPr txBox="1"/>
           <p:nvPr/>
@@ -8669,7 +7904,7 @@
               </a:defRPr>
             </a:pPr>
             <a:r>
-              <a:t>20/22</a:t>
+              <a:t>20/21</a:t>
             </a:r>
           </a:p>
         </p:txBody>
@@ -8701,7 +7936,7 @@
         <p:spPr>
           <a:xfrm>
             <a:off x="0" y="0"/>
-            <a:ext cx="12191695" cy="960120"/>
+            <a:ext cx="12191695" cy="6858000"/>
           </a:xfrm>
           <a:prstGeom prst="rect">
             <a:avLst/>
@@ -8741,8 +7976,8 @@
         </p:nvSpPr>
         <p:spPr>
           <a:xfrm>
-            <a:off x="457200" y="228600"/>
-            <a:ext cx="11247120" cy="548640"/>
+            <a:off x="457200" y="2651760"/>
+            <a:ext cx="11247120" cy="1280160"/>
           </a:xfrm>
           <a:prstGeom prst="rect">
             <a:avLst/>
@@ -8755,8 +7990,8 @@
           </a:bodyPr>
           <a:lstStyle/>
           <a:p>
-            <a:pPr algn="l">
-              <a:defRPr sz="3000" b="1">
+            <a:pPr algn="ctr">
+              <a:defRPr sz="4800" b="1">
                 <a:solidFill>
                   <a:srgbClr val="F3F6F9"/>
                 </a:solidFill>
@@ -8764,114 +7999,27 @@
               </a:defRPr>
             </a:pPr>
             <a:r>
-              <a:t>接下来要攻的几件事</a:t>
-            </a:r>
-          </a:p>
-        </p:txBody>
-      </p:sp>
-      <p:sp>
-        <p:nvSpPr>
-          <p:cNvPr id="4" name="TextBox 3"/>
-          <p:cNvSpPr txBox="1"/>
-          <p:nvPr/>
-        </p:nvSpPr>
-        <p:spPr>
-          <a:xfrm>
-            <a:off x="548640" y="1234440"/>
-            <a:ext cx="11064240" cy="5029200"/>
-          </a:xfrm>
-          <a:prstGeom prst="rect">
-            <a:avLst/>
-          </a:prstGeom>
-          <a:noFill/>
-        </p:spPr>
-        <p:txBody>
-          <a:bodyPr wrap="square">
-            <a:spAutoFit/>
-          </a:bodyPr>
-          <a:lstStyle/>
-          <a:p>
-            <a:pPr algn="l">
-              <a:spcAft>
-                <a:spcPts val="1000"/>
-              </a:spcAft>
-              <a:defRPr sz="1800" b="0">
-                <a:solidFill>
-                  <a:srgbClr val="1E2933"/>
-                </a:solidFill>
-                <a:latin typeface="Microsoft YaHei"/>
-              </a:defRPr>
-            </a:pPr>
-            <a:r>
-              <a:t>跑完 B 组 15 游戏 × 2 模式 × 2 seeds，拿到完整 22 游戏矩阵</a:t>
-            </a:r>
-          </a:p>
-          <a:p>
-            <a:pPr algn="l">
-              <a:spcAft>
-                <a:spcPts val="1000"/>
-              </a:spcAft>
-              <a:defRPr sz="1800" b="0">
-                <a:solidFill>
-                  <a:srgbClr val="1E2933"/>
-                </a:solidFill>
-                <a:latin typeface="Microsoft YaHei"/>
-              </a:defRPr>
-            </a:pPr>
-            <a:r>
-              <a:t>定位并修复 00483 multi-bus / multi-bus-memory activity=0 的问题</a:t>
-            </a:r>
-          </a:p>
-          <a:p>
-            <a:pPr algn="l">
-              <a:spcAft>
-                <a:spcPts val="1000"/>
-              </a:spcAft>
-              <a:defRPr sz="1800" b="0">
-                <a:solidFill>
-                  <a:srgbClr val="1E2933"/>
-                </a:solidFill>
-                <a:latin typeface="Microsoft YaHei"/>
-              </a:defRPr>
-            </a:pPr>
-            <a:r>
-              <a:t>让本地 VLM 常驻，验证 hierarchical 三层协同的真实收益</a:t>
-            </a:r>
-          </a:p>
-          <a:p>
-            <a:pPr algn="l">
-              <a:spcAft>
-                <a:spcPts val="1000"/>
-              </a:spcAft>
-              <a:defRPr sz="1800" b="0">
-                <a:solidFill>
-                  <a:srgbClr val="1E2933"/>
-                </a:solidFill>
-                <a:latin typeface="Microsoft YaHei"/>
-              </a:defRPr>
-            </a:pPr>
-            <a:r>
-              <a:t>在 5090 服务器上跑 QLoRA 微调，把 VLM 变成专用的画面理解器</a:t>
-            </a:r>
-          </a:p>
-        </p:txBody>
-      </p:sp>
-      <p:sp>
-        <p:nvSpPr>
-          <p:cNvPr id="5" name="Rectangle 4"/>
+              <a:t>谢谢，欢迎讨论</a:t>
+            </a:r>
+          </a:p>
+        </p:txBody>
+      </p:sp>
+      <p:sp>
+        <p:nvSpPr>
+          <p:cNvPr id="4" name="Rectangle 3"/>
           <p:cNvSpPr/>
           <p:nvPr/>
         </p:nvSpPr>
         <p:spPr>
           <a:xfrm>
-            <a:off x="0" y="6537960"/>
-            <a:ext cx="12191695" cy="18288"/>
+            <a:off x="5184648" y="3931920"/>
+            <a:ext cx="1828800" cy="73152"/>
           </a:xfrm>
           <a:prstGeom prst="rect">
             <a:avLst/>
           </a:prstGeom>
           <a:solidFill>
-            <a:srgbClr val="0096C7"/>
+            <a:srgbClr val="FF6B35"/>
           </a:solidFill>
           <a:ln/>
         </p:spPr>
@@ -8899,110 +8047,20 @@
       </p:sp>
       <p:sp>
         <p:nvSpPr>
-          <p:cNvPr id="6" name="TextBox 5"/>
-          <p:cNvSpPr txBox="1"/>
-          <p:nvPr/>
-        </p:nvSpPr>
-        <p:spPr>
-          <a:xfrm>
-            <a:off x="457200" y="6583680"/>
-            <a:ext cx="3657600" cy="228600"/>
-          </a:xfrm>
-          <a:prstGeom prst="rect">
-            <a:avLst/>
-          </a:prstGeom>
-          <a:noFill/>
-        </p:spPr>
-        <p:txBody>
-          <a:bodyPr wrap="none">
-            <a:spAutoFit/>
-          </a:bodyPr>
-          <a:lstStyle/>
-          <a:p>
-            <a:pPr algn="l">
-              <a:defRPr sz="1000" b="0">
-                <a:solidFill>
-                  <a:srgbClr val="6C757D"/>
-                </a:solidFill>
-                <a:latin typeface="Microsoft YaHei"/>
-              </a:defRPr>
-            </a:pPr>
-            <a:r>
-              <a:t>smallgameagent · LLM/VLM + 规则驱动</a:t>
-            </a:r>
-          </a:p>
-        </p:txBody>
-      </p:sp>
-      <p:sp>
-        <p:nvSpPr>
-          <p:cNvPr id="7" name="TextBox 6"/>
-          <p:cNvSpPr txBox="1"/>
-          <p:nvPr/>
-        </p:nvSpPr>
-        <p:spPr>
-          <a:xfrm>
-            <a:off x="10789920" y="6583680"/>
-            <a:ext cx="914400" cy="228600"/>
-          </a:xfrm>
-          <a:prstGeom prst="rect">
-            <a:avLst/>
-          </a:prstGeom>
-          <a:noFill/>
-        </p:spPr>
-        <p:txBody>
-          <a:bodyPr wrap="none">
-            <a:spAutoFit/>
-          </a:bodyPr>
-          <a:lstStyle/>
-          <a:p>
-            <a:pPr algn="r">
-              <a:defRPr sz="1000" b="0">
-                <a:solidFill>
-                  <a:srgbClr val="6C757D"/>
-                </a:solidFill>
-                <a:latin typeface="Microsoft YaHei"/>
-              </a:defRPr>
-            </a:pPr>
-            <a:r>
-              <a:t>21/22</a:t>
-            </a:r>
-          </a:p>
-        </p:txBody>
-      </p:sp>
-    </p:spTree>
-  </p:cSld>
-  <p:clrMapOvr>
-    <a:masterClrMapping/>
-  </p:clrMapOvr>
-</p:sld>
-</file>
-
-<file path=ppt/slides/slide22.xml><?xml version="1.0" encoding="utf-8"?>
-<p:sld xmlns:a="http://schemas.openxmlformats.org/drawingml/2006/main" xmlns:p="http://schemas.openxmlformats.org/presentationml/2006/main" xmlns:r="http://schemas.openxmlformats.org/officeDocument/2006/relationships">
-  <p:cSld>
-    <p:spTree>
-      <p:nvGrpSpPr>
-        <p:cNvPr id="1" name=""/>
-        <p:cNvGrpSpPr/>
-        <p:nvPr/>
-      </p:nvGrpSpPr>
-      <p:grpSpPr/>
-      <p:sp>
-        <p:nvSpPr>
-          <p:cNvPr id="2" name="Rectangle 1"/>
+          <p:cNvPr id="5" name="Rectangle 4"/>
           <p:cNvSpPr/>
           <p:nvPr/>
         </p:nvSpPr>
         <p:spPr>
           <a:xfrm>
-            <a:off x="0" y="0"/>
-            <a:ext cx="12191695" cy="6858000"/>
+            <a:off x="0" y="6537960"/>
+            <a:ext cx="12191695" cy="18288"/>
           </a:xfrm>
           <a:prstGeom prst="rect">
             <a:avLst/>
           </a:prstGeom>
           <a:solidFill>
-            <a:srgbClr val="1A237E"/>
+            <a:srgbClr val="0096C7"/>
           </a:solidFill>
           <a:ln/>
         </p:spPr>
@@ -9030,14 +8088,14 @@
       </p:sp>
       <p:sp>
         <p:nvSpPr>
-          <p:cNvPr id="3" name="TextBox 2"/>
+          <p:cNvPr id="6" name="TextBox 5"/>
           <p:cNvSpPr txBox="1"/>
           <p:nvPr/>
         </p:nvSpPr>
         <p:spPr>
           <a:xfrm>
-            <a:off x="457200" y="2651760"/>
-            <a:ext cx="11247120" cy="1280160"/>
+            <a:off x="457200" y="6583680"/>
+            <a:ext cx="3657600" cy="228600"/>
           </a:xfrm>
           <a:prstGeom prst="rect">
             <a:avLst/>
@@ -9050,112 +8108,30 @@
           </a:bodyPr>
           <a:lstStyle/>
           <a:p>
-            <a:pPr algn="ctr">
-              <a:defRPr sz="4800" b="1">
-                <a:solidFill>
-                  <a:srgbClr val="F3F6F9"/>
-                </a:solidFill>
-                <a:latin typeface="Microsoft YaHei"/>
-              </a:defRPr>
-            </a:pPr>
-            <a:r>
-              <a:t>谢谢，欢迎讨论</a:t>
-            </a:r>
-          </a:p>
-        </p:txBody>
-      </p:sp>
-      <p:sp>
-        <p:nvSpPr>
-          <p:cNvPr id="4" name="Rectangle 3"/>
-          <p:cNvSpPr/>
-          <p:nvPr/>
-        </p:nvSpPr>
-        <p:spPr>
-          <a:xfrm>
-            <a:off x="5184648" y="3931920"/>
-            <a:ext cx="1828800" cy="73152"/>
-          </a:xfrm>
-          <a:prstGeom prst="rect">
-            <a:avLst/>
-          </a:prstGeom>
-          <a:solidFill>
-            <a:srgbClr val="FF6B35"/>
-          </a:solidFill>
-          <a:ln/>
-        </p:spPr>
-        <p:style>
-          <a:lnRef idx="1">
-            <a:schemeClr val="accent1"/>
-          </a:lnRef>
-          <a:fillRef idx="3">
-            <a:schemeClr val="accent1"/>
-          </a:fillRef>
-          <a:effectRef idx="2">
-            <a:schemeClr val="accent1"/>
-          </a:effectRef>
-          <a:fontRef idx="minor">
-            <a:schemeClr val="lt1"/>
-          </a:fontRef>
-        </p:style>
-        <p:txBody>
-          <a:bodyPr rtlCol="0" anchor="ctr"/>
-          <a:lstStyle/>
-          <a:p>
-            <a:pPr algn="ctr"/>
-          </a:p>
-        </p:txBody>
-      </p:sp>
-      <p:sp>
-        <p:nvSpPr>
-          <p:cNvPr id="5" name="Rectangle 4"/>
-          <p:cNvSpPr/>
-          <p:nvPr/>
-        </p:nvSpPr>
-        <p:spPr>
-          <a:xfrm>
-            <a:off x="0" y="6537960"/>
-            <a:ext cx="12191695" cy="18288"/>
-          </a:xfrm>
-          <a:prstGeom prst="rect">
-            <a:avLst/>
-          </a:prstGeom>
-          <a:solidFill>
-            <a:srgbClr val="0096C7"/>
-          </a:solidFill>
-          <a:ln/>
-        </p:spPr>
-        <p:style>
-          <a:lnRef idx="1">
-            <a:schemeClr val="accent1"/>
-          </a:lnRef>
-          <a:fillRef idx="3">
-            <a:schemeClr val="accent1"/>
-          </a:fillRef>
-          <a:effectRef idx="2">
-            <a:schemeClr val="accent1"/>
-          </a:effectRef>
-          <a:fontRef idx="minor">
-            <a:schemeClr val="lt1"/>
-          </a:fontRef>
-        </p:style>
-        <p:txBody>
-          <a:bodyPr rtlCol="0" anchor="ctr"/>
-          <a:lstStyle/>
-          <a:p>
-            <a:pPr algn="ctr"/>
-          </a:p>
-        </p:txBody>
-      </p:sp>
-      <p:sp>
-        <p:nvSpPr>
-          <p:cNvPr id="6" name="TextBox 5"/>
+            <a:pPr algn="l">
+              <a:defRPr sz="1000" b="0">
+                <a:solidFill>
+                  <a:srgbClr val="6C757D"/>
+                </a:solidFill>
+                <a:latin typeface="Microsoft YaHei"/>
+              </a:defRPr>
+            </a:pPr>
+            <a:r>
+              <a:t>smallgameagent · LLM/VLM + 规则驱动</a:t>
+            </a:r>
+          </a:p>
+        </p:txBody>
+      </p:sp>
+      <p:sp>
+        <p:nvSpPr>
+          <p:cNvPr id="7" name="TextBox 6"/>
           <p:cNvSpPr txBox="1"/>
           <p:nvPr/>
         </p:nvSpPr>
         <p:spPr>
           <a:xfrm>
-            <a:off x="457200" y="6583680"/>
-            <a:ext cx="3657600" cy="228600"/>
+            <a:off x="10789920" y="6583680"/>
+            <a:ext cx="914400" cy="228600"/>
           </a:xfrm>
           <a:prstGeom prst="rect">
             <a:avLst/>
@@ -9168,42 +8144,6 @@
           </a:bodyPr>
           <a:lstStyle/>
           <a:p>
-            <a:pPr algn="l">
-              <a:defRPr sz="1000" b="0">
-                <a:solidFill>
-                  <a:srgbClr val="6C757D"/>
-                </a:solidFill>
-                <a:latin typeface="Microsoft YaHei"/>
-              </a:defRPr>
-            </a:pPr>
-            <a:r>
-              <a:t>smallgameagent · LLM/VLM + 规则驱动</a:t>
-            </a:r>
-          </a:p>
-        </p:txBody>
-      </p:sp>
-      <p:sp>
-        <p:nvSpPr>
-          <p:cNvPr id="7" name="TextBox 6"/>
-          <p:cNvSpPr txBox="1"/>
-          <p:nvPr/>
-        </p:nvSpPr>
-        <p:spPr>
-          <a:xfrm>
-            <a:off x="10789920" y="6583680"/>
-            <a:ext cx="914400" cy="228600"/>
-          </a:xfrm>
-          <a:prstGeom prst="rect">
-            <a:avLst/>
-          </a:prstGeom>
-          <a:noFill/>
-        </p:spPr>
-        <p:txBody>
-          <a:bodyPr wrap="none">
-            <a:spAutoFit/>
-          </a:bodyPr>
-          <a:lstStyle/>
-          <a:p>
             <a:pPr algn="r">
               <a:defRPr sz="1000" b="0">
                 <a:solidFill>
@@ -9213,7 +8153,7 @@
               </a:defRPr>
             </a:pPr>
             <a:r>
-              <a:t>22/22</a:t>
+              <a:t>21/21</a:t>
             </a:r>
           </a:p>
         </p:txBody>
@@ -9462,7 +8402,7 @@
               </a:defRPr>
             </a:pPr>
             <a:r>
-              <a:t>3/22</a:t>
+              <a:t>3/21</a:t>
             </a:r>
           </a:p>
         </p:txBody>
@@ -9773,7 +8713,7 @@
               </a:defRPr>
             </a:pPr>
             <a:r>
-              <a:t>4/22</a:t>
+              <a:t>4/21</a:t>
             </a:r>
           </a:p>
         </p:txBody>
@@ -10022,7 +8962,7 @@
               </a:defRPr>
             </a:pPr>
             <a:r>
-              <a:t>5/22</a:t>
+              <a:t>5/21</a:t>
             </a:r>
           </a:p>
         </p:txBody>
@@ -11076,7 +10016,7 @@
               </a:defRPr>
             </a:pPr>
             <a:r>
-              <a:t>6/22</a:t>
+              <a:t>6/21</a:t>
             </a:r>
           </a:p>
         </p:txBody>
@@ -11371,7 +10311,7 @@
               </a:defRPr>
             </a:pPr>
             <a:r>
-              <a:t>7/22</a:t>
+              <a:t>7/21</a:t>
             </a:r>
           </a:p>
         </p:txBody>
@@ -11620,7 +10560,7 @@
               </a:defRPr>
             </a:pPr>
             <a:r>
-              <a:t>8/22</a:t>
+              <a:t>8/21</a:t>
             </a:r>
           </a:p>
         </p:txBody>
@@ -11931,7 +10871,7 @@
               </a:defRPr>
             </a:pPr>
             <a:r>
-              <a:t>9/22</a:t>
+              <a:t>9/21</a:t>
             </a:r>
           </a:p>
         </p:txBody>

--- a/reports/smallgameagent_report.pptx
+++ b/reports/smallgameagent_report.pptx
@@ -10726,7 +10726,7 @@
               </a:defRPr>
             </a:pPr>
             <a:r>
-              <a:t>当前实测可用：Xiaomi / mimo-v2.5（文本 + 多模态）</a:t>
+              <a:t>当前实测可用：Kimi / xiaomi 文本+多模态；Qwen 文本可用；OpenCodeGo / DeepSeek 余额不足</a:t>
             </a:r>
           </a:p>
           <a:p>
@@ -10742,7 +10742,7 @@
               </a:defRPr>
             </a:pPr>
             <a:r>
-              <a:t>OpenCodeGo、DeepSeek 余额不足；Kimi、Qwen 需确认模型名后重测</a:t>
+              <a:t>修复 Kimi base_url 需加 /v1，Qwen 默认模型改为 qwen3.7-max</a:t>
             </a:r>
           </a:p>
           <a:p>

--- a/reports/smallgameagent_report.pptx
+++ b/reports/smallgameagent_report.pptx
@@ -9674,7 +9674,7 @@
               </a:defRPr>
             </a:pPr>
             <a:r>
-              <a:t>trajectory_converter 离线生成 7 任务样本：next_probe_action、information_gain_judgment 等</a:t>
+              <a:t>processed_runs_converter 从 22 个游戏的 processed-runs 生成 7 任务样本</a:t>
             </a:r>
           </a:p>
           <a:p>
@@ -9690,7 +9690,7 @@
               </a:defRPr>
             </a:pPr>
             <a:r>
-              <a:t>已累积 27,693 条合并样本（去重后），覆盖 22 个游戏、rule / multi-bus-memory / multi-bus</a:t>
+              <a:t>当前数据集：15,083 条样本，覆盖 next_probe_action / information_gain_judgment 等任务</a:t>
             </a:r>
           </a:p>
           <a:p>
@@ -9706,7 +9706,7 @@
               </a:defRPr>
             </a:pPr>
             <a:r>
-              <a:t>可直接喂给 Qwen3.5-4B/9B 与 Gemma-4-E4B 的 QLoRA 微调脚本</a:t>
+              <a:t>可直接喂给 Qwen3.5-4B/9B 与 Gemma-4-E4B 的 QLoRA 微调脚本（在 5090 服务器执行）</a:t>
             </a:r>
           </a:p>
         </p:txBody>
@@ -10202,7 +10202,7 @@
               </a:defRPr>
             </a:pPr>
             <a:r>
-              <a:t>把离线回放扩展到 multi-bus / multi-bus-memory，量化 Agent 通信与记忆的真实收益</a:t>
+              <a:t>在更多游戏上跑真实 Qwen multi-bus-memory，量化通信/记忆成本与收益</a:t>
             </a:r>
           </a:p>
           <a:p>
@@ -10218,7 +10218,7 @@
               </a:defRPr>
             </a:pPr>
             <a:r>
-              <a:t>在更多游戏上跑 Qwen L2，测试规则更新对 composite 的泛化提升</a:t>
+              <a:t>尝试 L2 规则更新的 code_file 模式（allowlist + 高置信度 + 自动备份）</a:t>
             </a:r>
           </a:p>
           <a:p>
@@ -10250,7 +10250,7 @@
               </a:defRPr>
             </a:pPr>
             <a:r>
-              <a:t>在 5090 服务器上跑 QLoRA 微调，把 VLM 变成专用画面理解器</a:t>
+              <a:t>在 5090 服务器上跑 QLoRA 微调，把本地 VLM 变成专用画面理解器</a:t>
             </a:r>
           </a:p>
           <a:p>
@@ -10266,7 +10266,7 @@
               </a:defRPr>
             </a:pPr>
             <a:r>
-              <a:t>完善 Critic → MemoryCurator 的闭环：规则更新提议需经评估再落地</a:t>
+              <a:t>把离线回放集成到 CI：每次规则改动自动跑 5 游戏回归</a:t>
             </a:r>
           </a:p>
         </p:txBody>

--- a/reports/smallgameagent_report.pptx
+++ b/reports/smallgameagent_report.pptx
@@ -32,6 +32,7 @@
     <p:sldId id="280" r:id="rId31"/>
     <p:sldId id="281" r:id="rId32"/>
     <p:sldId id="282" r:id="rId33"/>
+    <p:sldId id="283" r:id="rId34"/>
   </p:sldIdLst>
   <p:sldSz cx="12191695" cy="6858000" type="screen4x3"/>
   <p:notesSz cx="6858000" cy="9144000"/>
@@ -3655,7 +3656,7 @@
               </a:defRPr>
             </a:pPr>
             <a:r>
-              <a:t>10/27</a:t>
+              <a:t>10/28</a:t>
             </a:r>
           </a:p>
         </p:txBody>
@@ -3904,7 +3905,7 @@
               </a:defRPr>
             </a:pPr>
             <a:r>
-              <a:t>11/27</a:t>
+              <a:t>11/28</a:t>
             </a:r>
           </a:p>
         </p:txBody>
@@ -4568,7 +4569,7 @@
               </a:defRPr>
             </a:pPr>
             <a:r>
-              <a:t>12/27</a:t>
+              <a:t>12/28</a:t>
             </a:r>
           </a:p>
         </p:txBody>
@@ -4663,132 +4664,33 @@
               </a:defRPr>
             </a:pPr>
             <a:r>
-              <a:t>规则不是写死的，触发后才让上层改</a:t>
-            </a:r>
-          </a:p>
-        </p:txBody>
-      </p:sp>
-      <p:sp>
-        <p:nvSpPr>
-          <p:cNvPr id="4" name="TextBox 3"/>
-          <p:cNvSpPr txBox="1"/>
-          <p:nvPr/>
-        </p:nvSpPr>
-        <p:spPr>
-          <a:xfrm>
-            <a:off x="548640" y="1234440"/>
-            <a:ext cx="11064240" cy="5029200"/>
-          </a:xfrm>
-          <a:prstGeom prst="rect">
-            <a:avLst/>
-          </a:prstGeom>
-          <a:noFill/>
-        </p:spPr>
-        <p:txBody>
-          <a:bodyPr wrap="square">
-            <a:spAutoFit/>
-          </a:bodyPr>
-          <a:lstStyle/>
-          <a:p>
-            <a:pPr algn="l">
-              <a:spcAft>
-                <a:spcPts val="1000"/>
-              </a:spcAft>
-              <a:defRPr sz="1800" b="0">
-                <a:solidFill>
-                  <a:srgbClr val="1E2933"/>
-                </a:solidFill>
-                <a:latin typeface="Microsoft YaHei"/>
-              </a:defRPr>
-            </a:pPr>
-            <a:r>
-              <a:t>触发器监控：composite 持续低迷 / stall 计数 / L0-L2 冲突 / 世界模型 stale</a:t>
-            </a:r>
-          </a:p>
-          <a:p>
-            <a:pPr algn="l">
-              <a:spcAft>
-                <a:spcPts val="1000"/>
-              </a:spcAft>
-              <a:defRPr sz="1800" b="0">
-                <a:solidFill>
-                  <a:srgbClr val="1E2933"/>
-                </a:solidFill>
-                <a:latin typeface="Microsoft YaHei"/>
-              </a:defRPr>
-            </a:pPr>
-            <a:r>
-              <a:t>L2 输出结构化 JSON：param、memory_entry、phase_contract、code_file</a:t>
-            </a:r>
-          </a:p>
-          <a:p>
-            <a:pPr algn="l">
-              <a:spcAft>
-                <a:spcPts val="1000"/>
-              </a:spcAft>
-              <a:defRPr sz="1800" b="0">
-                <a:solidFill>
-                  <a:srgbClr val="1E2933"/>
-                </a:solidFill>
-                <a:latin typeface="Microsoft YaHei"/>
-              </a:defRPr>
-            </a:pPr>
-            <a:r>
-              <a:t>默认只修改内存参数与 strategy memory，零风险、即时生效</a:t>
-            </a:r>
-          </a:p>
-          <a:p>
-            <a:pPr algn="l">
-              <a:spcAft>
-                <a:spcPts val="1000"/>
-              </a:spcAft>
-              <a:defRPr sz="1800" b="0">
-                <a:solidFill>
-                  <a:srgbClr val="1E2933"/>
-                </a:solidFill>
-                <a:latin typeface="Microsoft YaHei"/>
-              </a:defRPr>
-            </a:pPr>
-            <a:r>
-              <a:t>代码文件改写需 allowlist + 置信度 ≥ 0.9 + 自动备份，未通过则进入待审队列</a:t>
-            </a:r>
-          </a:p>
-          <a:p>
-            <a:pPr algn="l">
-              <a:spcAft>
-                <a:spcPts val="1000"/>
-              </a:spcAft>
-              <a:defRPr sz="1800" b="0">
-                <a:solidFill>
-                  <a:srgbClr val="1E2933"/>
-                </a:solidFill>
-                <a:latin typeface="Microsoft YaHei"/>
-              </a:defRPr>
-            </a:pPr>
-            <a:r>
-              <a:t>目标：把「拿到钱就升级」的短视行为，改成「攒够再升级」的长程最优策略</a:t>
-            </a:r>
-          </a:p>
-        </p:txBody>
-      </p:sp>
-      <p:sp>
-        <p:nvSpPr>
-          <p:cNvPr id="5" name="Rectangle 4"/>
+              <a:t>代码文件级更新：L2 直接调引擎旋钮</a:t>
+            </a:r>
+          </a:p>
+        </p:txBody>
+      </p:sp>
+      <p:sp>
+        <p:nvSpPr>
+          <p:cNvPr id="4" name="Rounded Rectangle 3"/>
           <p:cNvSpPr/>
           <p:nvPr/>
         </p:nvSpPr>
         <p:spPr>
           <a:xfrm>
-            <a:off x="0" y="6537960"/>
-            <a:ext cx="12191695" cy="18288"/>
-          </a:xfrm>
-          <a:prstGeom prst="rect">
+            <a:off x="457200" y="1280160"/>
+            <a:ext cx="5486400" cy="2377440"/>
+          </a:xfrm>
+          <a:prstGeom prst="roundRect">
             <a:avLst/>
           </a:prstGeom>
           <a:solidFill>
-            <a:srgbClr val="0096C7"/>
+            <a:srgbClr val="FFFFFF"/>
           </a:solidFill>
-          <a:ln/>
+          <a:ln w="25400">
+            <a:solidFill>
+              <a:srgbClr val="28A745"/>
+            </a:solidFill>
+          </a:ln>
         </p:spPr>
         <p:style>
           <a:lnRef idx="1">
@@ -4814,14 +4716,55 @@
       </p:sp>
       <p:sp>
         <p:nvSpPr>
+          <p:cNvPr id="5" name="Rectangle 4"/>
+          <p:cNvSpPr/>
+          <p:nvPr/>
+        </p:nvSpPr>
+        <p:spPr>
+          <a:xfrm>
+            <a:off x="457200" y="1280160"/>
+            <a:ext cx="5486400" cy="411480"/>
+          </a:xfrm>
+          <a:prstGeom prst="rect">
+            <a:avLst/>
+          </a:prstGeom>
+          <a:solidFill>
+            <a:srgbClr val="28A745"/>
+          </a:solidFill>
+          <a:ln/>
+        </p:spPr>
+        <p:style>
+          <a:lnRef idx="1">
+            <a:schemeClr val="accent1"/>
+          </a:lnRef>
+          <a:fillRef idx="3">
+            <a:schemeClr val="accent1"/>
+          </a:fillRef>
+          <a:effectRef idx="2">
+            <a:schemeClr val="accent1"/>
+          </a:effectRef>
+          <a:fontRef idx="minor">
+            <a:schemeClr val="lt1"/>
+          </a:fontRef>
+        </p:style>
+        <p:txBody>
+          <a:bodyPr rtlCol="0" anchor="ctr"/>
+          <a:lstStyle/>
+          <a:p>
+            <a:pPr algn="ctr"/>
+          </a:p>
+        </p:txBody>
+      </p:sp>
+      <p:sp>
+        <p:nvSpPr>
           <p:cNvPr id="6" name="TextBox 5"/>
           <p:cNvSpPr txBox="1"/>
           <p:nvPr/>
         </p:nvSpPr>
         <p:spPr>
           <a:xfrm>
-            <a:off x="457200" y="6583680"/>
-            <a:ext cx="3657600" cy="228600"/>
+            <a:off x="530352" y="1353312"/>
+            <a:ext cx="5340096" cy="320040"/>
           </a:xfrm>
           <a:prstGeom prst="rect">
             <a:avLst/>
@@ -4835,15 +4778,15 @@
           <a:lstStyle/>
           <a:p>
             <a:pPr algn="l">
-              <a:defRPr sz="1000" b="0">
-                <a:solidFill>
-                  <a:srgbClr val="6C757D"/>
-                </a:solidFill>
-                <a:latin typeface="Microsoft YaHei"/>
-              </a:defRPr>
-            </a:pPr>
-            <a:r>
-              <a:t>smallgameagent · LLM/VLM + 规则驱动</a:t>
+              <a:defRPr sz="1400" b="1">
+                <a:solidFill>
+                  <a:srgbClr val="F3F6F9"/>
+                </a:solidFill>
+                <a:latin typeface="Microsoft YaHei"/>
+              </a:defRPr>
+            </a:pPr>
+            <a:r>
+              <a:t>安全门设计</a:t>
             </a:r>
           </a:p>
         </p:txBody>
@@ -4856,8 +4799,181 @@
         </p:nvSpPr>
         <p:spPr>
           <a:xfrm>
-            <a:off x="10789920" y="6583680"/>
-            <a:ext cx="914400" cy="228600"/>
+            <a:off x="566928" y="1783080"/>
+            <a:ext cx="5266944" cy="1783080"/>
+          </a:xfrm>
+          <a:prstGeom prst="rect">
+            <a:avLst/>
+          </a:prstGeom>
+          <a:noFill/>
+        </p:spPr>
+        <p:txBody>
+          <a:bodyPr wrap="square">
+            <a:spAutoFit/>
+          </a:bodyPr>
+          <a:lstStyle/>
+          <a:p>
+            <a:pPr algn="l">
+              <a:spcAft>
+                <a:spcPts val="400"/>
+              </a:spcAft>
+              <a:defRPr sz="1200" b="0">
+                <a:solidFill>
+                  <a:srgbClr val="1E2933"/>
+                </a:solidFill>
+                <a:latin typeface="Microsoft YaHei"/>
+              </a:defRPr>
+            </a:pPr>
+            <a:r>
+              <a:t>白名单：只能改 configs/runtime_rules.json</a:t>
+            </a:r>
+          </a:p>
+          <a:p>
+            <a:pPr algn="l">
+              <a:spcAft>
+                <a:spcPts val="400"/>
+              </a:spcAft>
+              <a:defRPr sz="1200" b="0">
+                <a:solidFill>
+                  <a:srgbClr val="1E2933"/>
+                </a:solidFill>
+                <a:latin typeface="Microsoft YaHei"/>
+              </a:defRPr>
+            </a:pPr>
+            <a:r>
+              <a:t>置信度 ≥ 0.9，patch ≤ 2000 字符</a:t>
+            </a:r>
+          </a:p>
+          <a:p>
+            <a:pPr algn="l">
+              <a:spcAft>
+                <a:spcPts val="400"/>
+              </a:spcAft>
+              <a:defRPr sz="1200" b="0">
+                <a:solidFill>
+                  <a:srgbClr val="1E2933"/>
+                </a:solidFill>
+                <a:latin typeface="Microsoft YaHei"/>
+              </a:defRPr>
+            </a:pPr>
+            <a:r>
+              <a:t>search 块必须唯一匹配，否则进待审队列</a:t>
+            </a:r>
+          </a:p>
+          <a:p>
+            <a:pPr algn="l">
+              <a:spcAft>
+                <a:spcPts val="400"/>
+              </a:spcAft>
+              <a:defRPr sz="1200" b="0">
+                <a:solidFill>
+                  <a:srgbClr val="1E2933"/>
+                </a:solidFill>
+                <a:latin typeface="Microsoft YaHei"/>
+              </a:defRPr>
+            </a:pPr>
+            <a:r>
+              <a:t>修改前自动备份，保留最近 3 份</a:t>
+            </a:r>
+          </a:p>
+        </p:txBody>
+      </p:sp>
+      <p:sp>
+        <p:nvSpPr>
+          <p:cNvPr id="8" name="Rounded Rectangle 7"/>
+          <p:cNvSpPr/>
+          <p:nvPr/>
+        </p:nvSpPr>
+        <p:spPr>
+          <a:xfrm>
+            <a:off x="6217920" y="1280160"/>
+            <a:ext cx="5486400" cy="2377440"/>
+          </a:xfrm>
+          <a:prstGeom prst="roundRect">
+            <a:avLst/>
+          </a:prstGeom>
+          <a:solidFill>
+            <a:srgbClr val="FFFFFF"/>
+          </a:solidFill>
+          <a:ln w="25400">
+            <a:solidFill>
+              <a:srgbClr val="FF6B35"/>
+            </a:solidFill>
+          </a:ln>
+        </p:spPr>
+        <p:style>
+          <a:lnRef idx="1">
+            <a:schemeClr val="accent1"/>
+          </a:lnRef>
+          <a:fillRef idx="3">
+            <a:schemeClr val="accent1"/>
+          </a:fillRef>
+          <a:effectRef idx="2">
+            <a:schemeClr val="accent1"/>
+          </a:effectRef>
+          <a:fontRef idx="minor">
+            <a:schemeClr val="lt1"/>
+          </a:fontRef>
+        </p:style>
+        <p:txBody>
+          <a:bodyPr rtlCol="0" anchor="ctr"/>
+          <a:lstStyle/>
+          <a:p>
+            <a:pPr algn="ctr"/>
+          </a:p>
+        </p:txBody>
+      </p:sp>
+      <p:sp>
+        <p:nvSpPr>
+          <p:cNvPr id="9" name="Rectangle 8"/>
+          <p:cNvSpPr/>
+          <p:nvPr/>
+        </p:nvSpPr>
+        <p:spPr>
+          <a:xfrm>
+            <a:off x="6217920" y="1280160"/>
+            <a:ext cx="5486400" cy="411480"/>
+          </a:xfrm>
+          <a:prstGeom prst="rect">
+            <a:avLst/>
+          </a:prstGeom>
+          <a:solidFill>
+            <a:srgbClr val="FF6B35"/>
+          </a:solidFill>
+          <a:ln/>
+        </p:spPr>
+        <p:style>
+          <a:lnRef idx="1">
+            <a:schemeClr val="accent1"/>
+          </a:lnRef>
+          <a:fillRef idx="3">
+            <a:schemeClr val="accent1"/>
+          </a:fillRef>
+          <a:effectRef idx="2">
+            <a:schemeClr val="accent1"/>
+          </a:effectRef>
+          <a:fontRef idx="minor">
+            <a:schemeClr val="lt1"/>
+          </a:fontRef>
+        </p:style>
+        <p:txBody>
+          <a:bodyPr rtlCol="0" anchor="ctr"/>
+          <a:lstStyle/>
+          <a:p>
+            <a:pPr algn="ctr"/>
+          </a:p>
+        </p:txBody>
+      </p:sp>
+      <p:sp>
+        <p:nvSpPr>
+          <p:cNvPr id="10" name="TextBox 9"/>
+          <p:cNvSpPr txBox="1"/>
+          <p:nvPr/>
+        </p:nvSpPr>
+        <p:spPr>
+          <a:xfrm>
+            <a:off x="6291072" y="1353312"/>
+            <a:ext cx="5340096" cy="320040"/>
           </a:xfrm>
           <a:prstGeom prst="rect">
             <a:avLst/>
@@ -4870,6 +4986,273 @@
           </a:bodyPr>
           <a:lstStyle/>
           <a:p>
+            <a:pPr algn="l">
+              <a:defRPr sz="1400" b="1">
+                <a:solidFill>
+                  <a:srgbClr val="F3F6F9"/>
+                </a:solidFill>
+                <a:latin typeface="Microsoft YaHei"/>
+              </a:defRPr>
+            </a:pPr>
+            <a:r>
+              <a:t>离线实验结果</a:t>
+            </a:r>
+          </a:p>
+        </p:txBody>
+      </p:sp>
+      <p:sp>
+        <p:nvSpPr>
+          <p:cNvPr id="11" name="TextBox 10"/>
+          <p:cNvSpPr txBox="1"/>
+          <p:nvPr/>
+        </p:nvSpPr>
+        <p:spPr>
+          <a:xfrm>
+            <a:off x="6327648" y="1783080"/>
+            <a:ext cx="5266944" cy="1783080"/>
+          </a:xfrm>
+          <a:prstGeom prst="rect">
+            <a:avLst/>
+          </a:prstGeom>
+          <a:noFill/>
+        </p:spPr>
+        <p:txBody>
+          <a:bodyPr wrap="square">
+            <a:spAutoFit/>
+          </a:bodyPr>
+          <a:lstStyle/>
+          <a:p>
+            <a:pPr algn="l">
+              <a:spcAft>
+                <a:spcPts val="400"/>
+              </a:spcAft>
+              <a:defRPr sz="1200" b="0">
+                <a:solidFill>
+                  <a:srgbClr val="1E2933"/>
+                </a:solidFill>
+                <a:latin typeface="Microsoft YaHei"/>
+              </a:defRPr>
+            </a:pPr>
+            <a:r>
+              <a:t>游戏：SSD_00461P01，回放 30 步</a:t>
+            </a:r>
+          </a:p>
+          <a:p>
+            <a:pPr algn="l">
+              <a:spcAft>
+                <a:spcPts val="400"/>
+              </a:spcAft>
+              <a:defRPr sz="1200" b="0">
+                <a:solidFill>
+                  <a:srgbClr val="1E2933"/>
+                </a:solidFill>
+                <a:latin typeface="Microsoft YaHei"/>
+              </a:defRPr>
+            </a:pPr>
+            <a:r>
+              <a:t>mock L2 以 0.95 置信度触发更新</a:t>
+            </a:r>
+          </a:p>
+          <a:p>
+            <a:pPr algn="l">
+              <a:spcAft>
+                <a:spcPts val="400"/>
+              </a:spcAft>
+              <a:defRPr sz="1200" b="0">
+                <a:solidFill>
+                  <a:srgbClr val="1E2933"/>
+                </a:solidFill>
+                <a:latin typeface="Microsoft YaHei"/>
+              </a:defRPr>
+            </a:pPr>
+            <a:r>
+              <a:t>stuck_escape_threshold 5 → 3</a:t>
+            </a:r>
+          </a:p>
+          <a:p>
+            <a:pPr algn="l">
+              <a:spcAft>
+                <a:spcPts val="400"/>
+              </a:spcAft>
+              <a:defRPr sz="1200" b="0">
+                <a:solidFill>
+                  <a:srgbClr val="1E2933"/>
+                </a:solidFill>
+                <a:latin typeface="Microsoft YaHei"/>
+              </a:defRPr>
+            </a:pPr>
+            <a:r>
+              <a:t>第 6 步起规则引擎读取到新阈值</a:t>
+            </a:r>
+          </a:p>
+          <a:p>
+            <a:pPr algn="l">
+              <a:spcAft>
+                <a:spcPts val="400"/>
+              </a:spcAft>
+              <a:defRPr sz="1200" b="0">
+                <a:solidFill>
+                  <a:srgbClr val="1E2933"/>
+                </a:solidFill>
+                <a:latin typeface="Microsoft YaHei"/>
+              </a:defRPr>
+            </a:pPr>
+            <a:r>
+              <a:t>实验结束后配置文件自动恢复</a:t>
+            </a:r>
+          </a:p>
+        </p:txBody>
+      </p:sp>
+      <p:sp>
+        <p:nvSpPr>
+          <p:cNvPr id="12" name="Rounded Rectangle 11"/>
+          <p:cNvSpPr/>
+          <p:nvPr/>
+        </p:nvSpPr>
+        <p:spPr>
+          <a:xfrm>
+            <a:off x="457200" y="3840480"/>
+            <a:ext cx="11247120" cy="914400"/>
+          </a:xfrm>
+          <a:prstGeom prst="roundRect">
+            <a:avLst/>
+          </a:prstGeom>
+          <a:solidFill>
+            <a:srgbClr val="F3F6F9"/>
+          </a:solidFill>
+          <a:ln/>
+        </p:spPr>
+        <p:style>
+          <a:lnRef idx="1">
+            <a:schemeClr val="accent1"/>
+          </a:lnRef>
+          <a:fillRef idx="3">
+            <a:schemeClr val="accent1"/>
+          </a:fillRef>
+          <a:effectRef idx="2">
+            <a:schemeClr val="accent1"/>
+          </a:effectRef>
+          <a:fontRef idx="minor">
+            <a:schemeClr val="lt1"/>
+          </a:fontRef>
+        </p:style>
+        <p:txBody>
+          <a:bodyPr rtlCol="0" anchor="ctr"/>
+          <a:lstStyle/>
+          <a:p>
+            <a:pPr algn="ctr">
+              <a:defRPr sz="1400" b="0">
+                <a:solidFill>
+                  <a:srgbClr val="1E2933"/>
+                </a:solidFill>
+                <a:latin typeface="Microsoft YaHei"/>
+              </a:defRPr>
+            </a:pPr>
+            <a:r>
+              <a:t>意义：云端模型不仅能改内存参数，还能持久化地调整规则引擎的「旋钮」。重启后仍然生效，且风险被限制在单一配置文件中。</a:t>
+            </a:r>
+          </a:p>
+        </p:txBody>
+      </p:sp>
+      <p:sp>
+        <p:nvSpPr>
+          <p:cNvPr id="13" name="Rectangle 12"/>
+          <p:cNvSpPr/>
+          <p:nvPr/>
+        </p:nvSpPr>
+        <p:spPr>
+          <a:xfrm>
+            <a:off x="0" y="6537960"/>
+            <a:ext cx="12191695" cy="18288"/>
+          </a:xfrm>
+          <a:prstGeom prst="rect">
+            <a:avLst/>
+          </a:prstGeom>
+          <a:solidFill>
+            <a:srgbClr val="0096C7"/>
+          </a:solidFill>
+          <a:ln/>
+        </p:spPr>
+        <p:style>
+          <a:lnRef idx="1">
+            <a:schemeClr val="accent1"/>
+          </a:lnRef>
+          <a:fillRef idx="3">
+            <a:schemeClr val="accent1"/>
+          </a:fillRef>
+          <a:effectRef idx="2">
+            <a:schemeClr val="accent1"/>
+          </a:effectRef>
+          <a:fontRef idx="minor">
+            <a:schemeClr val="lt1"/>
+          </a:fontRef>
+        </p:style>
+        <p:txBody>
+          <a:bodyPr rtlCol="0" anchor="ctr"/>
+          <a:lstStyle/>
+          <a:p>
+            <a:pPr algn="ctr"/>
+          </a:p>
+        </p:txBody>
+      </p:sp>
+      <p:sp>
+        <p:nvSpPr>
+          <p:cNvPr id="14" name="TextBox 13"/>
+          <p:cNvSpPr txBox="1"/>
+          <p:nvPr/>
+        </p:nvSpPr>
+        <p:spPr>
+          <a:xfrm>
+            <a:off x="457200" y="6583680"/>
+            <a:ext cx="3657600" cy="228600"/>
+          </a:xfrm>
+          <a:prstGeom prst="rect">
+            <a:avLst/>
+          </a:prstGeom>
+          <a:noFill/>
+        </p:spPr>
+        <p:txBody>
+          <a:bodyPr wrap="none">
+            <a:spAutoFit/>
+          </a:bodyPr>
+          <a:lstStyle/>
+          <a:p>
+            <a:pPr algn="l">
+              <a:defRPr sz="1000" b="0">
+                <a:solidFill>
+                  <a:srgbClr val="6C757D"/>
+                </a:solidFill>
+                <a:latin typeface="Microsoft YaHei"/>
+              </a:defRPr>
+            </a:pPr>
+            <a:r>
+              <a:t>smallgameagent · LLM/VLM + 规则驱动</a:t>
+            </a:r>
+          </a:p>
+        </p:txBody>
+      </p:sp>
+      <p:sp>
+        <p:nvSpPr>
+          <p:cNvPr id="15" name="TextBox 14"/>
+          <p:cNvSpPr txBox="1"/>
+          <p:nvPr/>
+        </p:nvSpPr>
+        <p:spPr>
+          <a:xfrm>
+            <a:off x="10789920" y="6583680"/>
+            <a:ext cx="914400" cy="228600"/>
+          </a:xfrm>
+          <a:prstGeom prst="rect">
+            <a:avLst/>
+          </a:prstGeom>
+          <a:noFill/>
+        </p:spPr>
+        <p:txBody>
+          <a:bodyPr wrap="none">
+            <a:spAutoFit/>
+          </a:bodyPr>
+          <a:lstStyle/>
+          <a:p>
             <a:pPr algn="r">
               <a:defRPr sz="1000" b="0">
                 <a:solidFill>
@@ -4879,7 +5262,7 @@
               </a:defRPr>
             </a:pPr>
             <a:r>
-              <a:t>13/27</a:t>
+              <a:t>13/28</a:t>
             </a:r>
           </a:p>
         </p:txBody>
@@ -4911,7 +5294,7 @@
         <p:spPr>
           <a:xfrm>
             <a:off x="0" y="0"/>
-            <a:ext cx="12191695" cy="6858000"/>
+            <a:ext cx="12191695" cy="960120"/>
           </a:xfrm>
           <a:prstGeom prst="rect">
             <a:avLst/>
@@ -4951,8 +5334,8 @@
         </p:nvSpPr>
         <p:spPr>
           <a:xfrm>
-            <a:off x="548640" y="2468880"/>
-            <a:ext cx="11064240" cy="1097280"/>
+            <a:off x="457200" y="228600"/>
+            <a:ext cx="11247120" cy="548640"/>
           </a:xfrm>
           <a:prstGeom prst="rect">
             <a:avLst/>
@@ -4966,7 +5349,7 @@
           <a:lstStyle/>
           <a:p>
             <a:pPr algn="l">
-              <a:defRPr sz="4400" b="1">
+              <a:defRPr sz="3000" b="1">
                 <a:solidFill>
                   <a:srgbClr val="F3F6F9"/>
                 </a:solidFill>
@@ -4974,27 +5357,130 @@
               </a:defRPr>
             </a:pPr>
             <a:r>
-              <a:t>05 Agent 通信与记忆</a:t>
-            </a:r>
-          </a:p>
-        </p:txBody>
-      </p:sp>
-      <p:sp>
-        <p:nvSpPr>
-          <p:cNvPr id="4" name="Rectangle 3"/>
+              <a:t>规则不是写死的，触发后才让上层改</a:t>
+            </a:r>
+          </a:p>
+        </p:txBody>
+      </p:sp>
+      <p:sp>
+        <p:nvSpPr>
+          <p:cNvPr id="4" name="TextBox 3"/>
+          <p:cNvSpPr txBox="1"/>
+          <p:nvPr/>
+        </p:nvSpPr>
+        <p:spPr>
+          <a:xfrm>
+            <a:off x="548640" y="1234440"/>
+            <a:ext cx="11064240" cy="5029200"/>
+          </a:xfrm>
+          <a:prstGeom prst="rect">
+            <a:avLst/>
+          </a:prstGeom>
+          <a:noFill/>
+        </p:spPr>
+        <p:txBody>
+          <a:bodyPr wrap="square">
+            <a:spAutoFit/>
+          </a:bodyPr>
+          <a:lstStyle/>
+          <a:p>
+            <a:pPr algn="l">
+              <a:spcAft>
+                <a:spcPts val="1000"/>
+              </a:spcAft>
+              <a:defRPr sz="1800" b="0">
+                <a:solidFill>
+                  <a:srgbClr val="1E2933"/>
+                </a:solidFill>
+                <a:latin typeface="Microsoft YaHei"/>
+              </a:defRPr>
+            </a:pPr>
+            <a:r>
+              <a:t>触发器监控：composite 持续低迷 / stall 计数 / L0-L2 决策冲突 / 世界模型 stale</a:t>
+            </a:r>
+          </a:p>
+          <a:p>
+            <a:pPr algn="l">
+              <a:spcAft>
+                <a:spcPts val="1000"/>
+              </a:spcAft>
+              <a:defRPr sz="1800" b="0">
+                <a:solidFill>
+                  <a:srgbClr val="1E2933"/>
+                </a:solidFill>
+                <a:latin typeface="Microsoft YaHei"/>
+              </a:defRPr>
+            </a:pPr>
+            <a:r>
+              <a:t>L2 输出结构化 JSON：param、memory_entry、phase_contract、code_file</a:t>
+            </a:r>
+          </a:p>
+          <a:p>
+            <a:pPr algn="l">
+              <a:spcAft>
+                <a:spcPts val="1000"/>
+              </a:spcAft>
+              <a:defRPr sz="1800" b="0">
+                <a:solidFill>
+                  <a:srgbClr val="1E2933"/>
+                </a:solidFill>
+                <a:latin typeface="Microsoft YaHei"/>
+              </a:defRPr>
+            </a:pPr>
+            <a:r>
+              <a:t>默认只修改内存参数与 strategy memory，零风险、即时生效</a:t>
+            </a:r>
+          </a:p>
+          <a:p>
+            <a:pPr algn="l">
+              <a:spcAft>
+                <a:spcPts val="1000"/>
+              </a:spcAft>
+              <a:defRPr sz="1800" b="0">
+                <a:solidFill>
+                  <a:srgbClr val="1E2933"/>
+                </a:solidFill>
+                <a:latin typeface="Microsoft YaHei"/>
+              </a:defRPr>
+            </a:pPr>
+            <a:r>
+              <a:t>代码文件改写需 allowlist + 置信度 ≥ 0.9 + 自动备份，没通过就进待审队列</a:t>
+            </a:r>
+          </a:p>
+          <a:p>
+            <a:pPr algn="l">
+              <a:spcAft>
+                <a:spcPts val="1000"/>
+              </a:spcAft>
+              <a:defRPr sz="1800" b="0">
+                <a:solidFill>
+                  <a:srgbClr val="1E2933"/>
+                </a:solidFill>
+                <a:latin typeface="Microsoft YaHei"/>
+              </a:defRPr>
+            </a:pPr>
+            <a:r>
+              <a:t>目标：把「有钱就升级」的短视行为改成「攒够再升级」的长程策略</a:t>
+            </a:r>
+          </a:p>
+        </p:txBody>
+      </p:sp>
+      <p:sp>
+        <p:nvSpPr>
+          <p:cNvPr id="5" name="Rectangle 4"/>
           <p:cNvSpPr/>
           <p:nvPr/>
         </p:nvSpPr>
         <p:spPr>
           <a:xfrm>
-            <a:off x="548640" y="3657600"/>
-            <a:ext cx="1828800" cy="73152"/>
+            <a:off x="0" y="6537960"/>
+            <a:ext cx="12191695" cy="18288"/>
           </a:xfrm>
           <a:prstGeom prst="rect">
             <a:avLst/>
           </a:prstGeom>
           <a:solidFill>
-            <a:srgbClr val="FF6B35"/>
+            <a:srgbClr val="0096C7"/>
           </a:solidFill>
           <a:ln/>
         </p:spPr>
@@ -5022,47 +5508,6 @@
       </p:sp>
       <p:sp>
         <p:nvSpPr>
-          <p:cNvPr id="5" name="Rectangle 4"/>
-          <p:cNvSpPr/>
-          <p:nvPr/>
-        </p:nvSpPr>
-        <p:spPr>
-          <a:xfrm>
-            <a:off x="0" y="6537960"/>
-            <a:ext cx="12191695" cy="18288"/>
-          </a:xfrm>
-          <a:prstGeom prst="rect">
-            <a:avLst/>
-          </a:prstGeom>
-          <a:solidFill>
-            <a:srgbClr val="0096C7"/>
-          </a:solidFill>
-          <a:ln/>
-        </p:spPr>
-        <p:style>
-          <a:lnRef idx="1">
-            <a:schemeClr val="accent1"/>
-          </a:lnRef>
-          <a:fillRef idx="3">
-            <a:schemeClr val="accent1"/>
-          </a:fillRef>
-          <a:effectRef idx="2">
-            <a:schemeClr val="accent1"/>
-          </a:effectRef>
-          <a:fontRef idx="minor">
-            <a:schemeClr val="lt1"/>
-          </a:fontRef>
-        </p:style>
-        <p:txBody>
-          <a:bodyPr rtlCol="0" anchor="ctr"/>
-          <a:lstStyle/>
-          <a:p>
-            <a:pPr algn="ctr"/>
-          </a:p>
-        </p:txBody>
-      </p:sp>
-      <p:sp>
-        <p:nvSpPr>
           <p:cNvPr id="6" name="TextBox 5"/>
           <p:cNvSpPr txBox="1"/>
           <p:nvPr/>
@@ -5128,7 +5573,7 @@
               </a:defRPr>
             </a:pPr>
             <a:r>
-              <a:t>14/27</a:t>
+              <a:t>14/28</a:t>
             </a:r>
           </a:p>
         </p:txBody>
@@ -5160,7 +5605,7 @@
         <p:spPr>
           <a:xfrm>
             <a:off x="0" y="0"/>
-            <a:ext cx="12191695" cy="960120"/>
+            <a:ext cx="12191695" cy="6858000"/>
           </a:xfrm>
           <a:prstGeom prst="rect">
             <a:avLst/>
@@ -5200,8 +5645,8 @@
         </p:nvSpPr>
         <p:spPr>
           <a:xfrm>
-            <a:off x="457200" y="228600"/>
-            <a:ext cx="11247120" cy="548640"/>
+            <a:off x="548640" y="2468880"/>
+            <a:ext cx="11064240" cy="1097280"/>
           </a:xfrm>
           <a:prstGeom prst="rect">
             <a:avLst/>
@@ -5215,7 +5660,7 @@
           <a:lstStyle/>
           <a:p>
             <a:pPr algn="l">
-              <a:defRPr sz="3000" b="1">
+              <a:defRPr sz="4400" b="1">
                 <a:solidFill>
                   <a:srgbClr val="F3F6F9"/>
                 </a:solidFill>
@@ -5223,33 +5668,29 @@
               </a:defRPr>
             </a:pPr>
             <a:r>
-              <a:t>Agent 通信与记忆：从单兵到协作</a:t>
-            </a:r>
-          </a:p>
-        </p:txBody>
-      </p:sp>
-      <p:sp>
-        <p:nvSpPr>
-          <p:cNvPr id="4" name="Rounded Rectangle 3"/>
+              <a:t>05 Agent 通信与记忆</a:t>
+            </a:r>
+          </a:p>
+        </p:txBody>
+      </p:sp>
+      <p:sp>
+        <p:nvSpPr>
+          <p:cNvPr id="4" name="Rectangle 3"/>
           <p:cNvSpPr/>
           <p:nvPr/>
         </p:nvSpPr>
         <p:spPr>
           <a:xfrm>
-            <a:off x="365760" y="1280160"/>
-            <a:ext cx="3657600" cy="2103120"/>
-          </a:xfrm>
-          <a:prstGeom prst="roundRect">
+            <a:off x="548640" y="3657600"/>
+            <a:ext cx="1828800" cy="73152"/>
+          </a:xfrm>
+          <a:prstGeom prst="rect">
             <a:avLst/>
           </a:prstGeom>
           <a:solidFill>
-            <a:srgbClr val="FFFFFF"/>
+            <a:srgbClr val="FF6B35"/>
           </a:solidFill>
-          <a:ln w="25400">
-            <a:solidFill>
-              <a:srgbClr val="1A237E"/>
-            </a:solidFill>
-          </a:ln>
+          <a:ln/>
         </p:spPr>
         <p:style>
           <a:lnRef idx="1">
@@ -5281,14 +5722,14 @@
         </p:nvSpPr>
         <p:spPr>
           <a:xfrm>
-            <a:off x="365760" y="1280160"/>
-            <a:ext cx="3657600" cy="411480"/>
+            <a:off x="0" y="6537960"/>
+            <a:ext cx="12191695" cy="18288"/>
           </a:xfrm>
           <a:prstGeom prst="rect">
             <a:avLst/>
           </a:prstGeom>
           <a:solidFill>
-            <a:srgbClr val="1A237E"/>
+            <a:srgbClr val="0096C7"/>
           </a:solidFill>
           <a:ln/>
         </p:spPr>
@@ -5322,8 +5763,8 @@
         </p:nvSpPr>
         <p:spPr>
           <a:xfrm>
-            <a:off x="438912" y="1353312"/>
-            <a:ext cx="3511296" cy="320040"/>
+            <a:off x="457200" y="6583680"/>
+            <a:ext cx="3657600" cy="228600"/>
           </a:xfrm>
           <a:prstGeom prst="rect">
             <a:avLst/>
@@ -5337,15 +5778,15 @@
           <a:lstStyle/>
           <a:p>
             <a:pPr algn="l">
-              <a:defRPr sz="1400" b="1">
-                <a:solidFill>
-                  <a:srgbClr val="F3F6F9"/>
-                </a:solidFill>
-                <a:latin typeface="Microsoft YaHei"/>
-              </a:defRPr>
-            </a:pPr>
-            <a:r>
-              <a:t>记忆三层</a:t>
+              <a:defRPr sz="1000" b="0">
+                <a:solidFill>
+                  <a:srgbClr val="6C757D"/>
+                </a:solidFill>
+                <a:latin typeface="Microsoft YaHei"/>
+              </a:defRPr>
+            </a:pPr>
+            <a:r>
+              <a:t>smallgameagent · LLM/VLM + 规则驱动</a:t>
             </a:r>
           </a:p>
         </p:txBody>
@@ -5358,165 +5799,8 @@
         </p:nvSpPr>
         <p:spPr>
           <a:xfrm>
-            <a:off x="475488" y="1783080"/>
-            <a:ext cx="3438144" cy="1508760"/>
-          </a:xfrm>
-          <a:prstGeom prst="rect">
-            <a:avLst/>
-          </a:prstGeom>
-          <a:noFill/>
-        </p:spPr>
-        <p:txBody>
-          <a:bodyPr wrap="square">
-            <a:spAutoFit/>
-          </a:bodyPr>
-          <a:lstStyle/>
-          <a:p>
-            <a:pPr algn="l">
-              <a:spcAft>
-                <a:spcPts val="400"/>
-              </a:spcAft>
-              <a:defRPr sz="1200" b="0">
-                <a:solidFill>
-                  <a:srgbClr val="1E2933"/>
-                </a:solidFill>
-                <a:latin typeface="Microsoft YaHei"/>
-              </a:defRPr>
-            </a:pPr>
-            <a:r>
-              <a:t>Episodic：逐步 state / action / reward</a:t>
-            </a:r>
-          </a:p>
-          <a:p>
-            <a:pPr algn="l">
-              <a:spcAft>
-                <a:spcPts val="400"/>
-              </a:spcAft>
-              <a:defRPr sz="1200" b="0">
-                <a:solidFill>
-                  <a:srgbClr val="1E2933"/>
-                </a:solidFill>
-                <a:latin typeface="Microsoft YaHei"/>
-              </a:defRPr>
-            </a:pPr>
-            <a:r>
-              <a:t>Semantic：游戏类型、目标语义向量</a:t>
-            </a:r>
-          </a:p>
-          <a:p>
-            <a:pPr algn="l">
-              <a:spcAft>
-                <a:spcPts val="400"/>
-              </a:spcAft>
-              <a:defRPr sz="1200" b="0">
-                <a:solidFill>
-                  <a:srgbClr val="1E2933"/>
-                </a:solidFill>
-                <a:latin typeface="Microsoft YaHei"/>
-              </a:defRPr>
-            </a:pPr>
-            <a:r>
-              <a:t>Procedural：成功策略、失败模式</a:t>
-            </a:r>
-          </a:p>
-        </p:txBody>
-      </p:sp>
-      <p:sp>
-        <p:nvSpPr>
-          <p:cNvPr id="8" name="Rounded Rectangle 7"/>
-          <p:cNvSpPr/>
-          <p:nvPr/>
-        </p:nvSpPr>
-        <p:spPr>
-          <a:xfrm>
-            <a:off x="4297680" y="1280160"/>
-            <a:ext cx="3657600" cy="2103120"/>
-          </a:xfrm>
-          <a:prstGeom prst="roundRect">
-            <a:avLst/>
-          </a:prstGeom>
-          <a:solidFill>
-            <a:srgbClr val="FFFFFF"/>
-          </a:solidFill>
-          <a:ln w="25400">
-            <a:solidFill>
-              <a:srgbClr val="0096C7"/>
-            </a:solidFill>
-          </a:ln>
-        </p:spPr>
-        <p:style>
-          <a:lnRef idx="1">
-            <a:schemeClr val="accent1"/>
-          </a:lnRef>
-          <a:fillRef idx="3">
-            <a:schemeClr val="accent1"/>
-          </a:fillRef>
-          <a:effectRef idx="2">
-            <a:schemeClr val="accent1"/>
-          </a:effectRef>
-          <a:fontRef idx="minor">
-            <a:schemeClr val="lt1"/>
-          </a:fontRef>
-        </p:style>
-        <p:txBody>
-          <a:bodyPr rtlCol="0" anchor="ctr"/>
-          <a:lstStyle/>
-          <a:p>
-            <a:pPr algn="ctr"/>
-          </a:p>
-        </p:txBody>
-      </p:sp>
-      <p:sp>
-        <p:nvSpPr>
-          <p:cNvPr id="9" name="Rectangle 8"/>
-          <p:cNvSpPr/>
-          <p:nvPr/>
-        </p:nvSpPr>
-        <p:spPr>
-          <a:xfrm>
-            <a:off x="4297680" y="1280160"/>
-            <a:ext cx="3657600" cy="411480"/>
-          </a:xfrm>
-          <a:prstGeom prst="rect">
-            <a:avLst/>
-          </a:prstGeom>
-          <a:solidFill>
-            <a:srgbClr val="0096C7"/>
-          </a:solidFill>
-          <a:ln/>
-        </p:spPr>
-        <p:style>
-          <a:lnRef idx="1">
-            <a:schemeClr val="accent1"/>
-          </a:lnRef>
-          <a:fillRef idx="3">
-            <a:schemeClr val="accent1"/>
-          </a:fillRef>
-          <a:effectRef idx="2">
-            <a:schemeClr val="accent1"/>
-          </a:effectRef>
-          <a:fontRef idx="minor">
-            <a:schemeClr val="lt1"/>
-          </a:fontRef>
-        </p:style>
-        <p:txBody>
-          <a:bodyPr rtlCol="0" anchor="ctr"/>
-          <a:lstStyle/>
-          <a:p>
-            <a:pPr algn="ctr"/>
-          </a:p>
-        </p:txBody>
-      </p:sp>
-      <p:sp>
-        <p:nvSpPr>
-          <p:cNvPr id="10" name="TextBox 9"/>
-          <p:cNvSpPr txBox="1"/>
-          <p:nvPr/>
-        </p:nvSpPr>
-        <p:spPr>
-          <a:xfrm>
-            <a:off x="4370832" y="1353312"/>
-            <a:ext cx="3511296" cy="320040"/>
+            <a:off x="10789920" y="6583680"/>
+            <a:ext cx="914400" cy="228600"/>
           </a:xfrm>
           <a:prstGeom prst="rect">
             <a:avLst/>
@@ -5529,450 +5813,6 @@
           </a:bodyPr>
           <a:lstStyle/>
           <a:p>
-            <a:pPr algn="l">
-              <a:defRPr sz="1400" b="1">
-                <a:solidFill>
-                  <a:srgbClr val="F3F6F9"/>
-                </a:solidFill>
-                <a:latin typeface="Microsoft YaHei"/>
-              </a:defRPr>
-            </a:pPr>
-            <a:r>
-              <a:t>AgentBus 消息</a:t>
-            </a:r>
-          </a:p>
-        </p:txBody>
-      </p:sp>
-      <p:sp>
-        <p:nvSpPr>
-          <p:cNvPr id="11" name="TextBox 10"/>
-          <p:cNvSpPr txBox="1"/>
-          <p:nvPr/>
-        </p:nvSpPr>
-        <p:spPr>
-          <a:xfrm>
-            <a:off x="4407408" y="1783080"/>
-            <a:ext cx="3438144" cy="1508760"/>
-          </a:xfrm>
-          <a:prstGeom prst="rect">
-            <a:avLst/>
-          </a:prstGeom>
-          <a:noFill/>
-        </p:spPr>
-        <p:txBody>
-          <a:bodyPr wrap="square">
-            <a:spAutoFit/>
-          </a:bodyPr>
-          <a:lstStyle/>
-          <a:p>
-            <a:pPr algn="l">
-              <a:spcAft>
-                <a:spcPts val="400"/>
-              </a:spcAft>
-              <a:defRPr sz="1200" b="0">
-                <a:solidFill>
-                  <a:srgbClr val="1E2933"/>
-                </a:solidFill>
-                <a:latin typeface="Microsoft YaHei"/>
-              </a:defRPr>
-            </a:pPr>
-            <a:r>
-              <a:t>OBSERVATION / STATE_UPDATE</a:t>
-            </a:r>
-          </a:p>
-          <a:p>
-            <a:pPr algn="l">
-              <a:spcAft>
-                <a:spcPts val="400"/>
-              </a:spcAft>
-              <a:defRPr sz="1200" b="0">
-                <a:solidFill>
-                  <a:srgbClr val="1E2933"/>
-                </a:solidFill>
-                <a:latin typeface="Microsoft YaHei"/>
-              </a:defRPr>
-            </a:pPr>
-            <a:r>
-              <a:t>DECISION_PROPOSAL / CRITIQUE</a:t>
-            </a:r>
-          </a:p>
-          <a:p>
-            <a:pPr algn="l">
-              <a:spcAft>
-                <a:spcPts val="400"/>
-              </a:spcAft>
-              <a:defRPr sz="1200" b="0">
-                <a:solidFill>
-                  <a:srgbClr val="1E2933"/>
-                </a:solidFill>
-                <a:latin typeface="Microsoft YaHei"/>
-              </a:defRPr>
-            </a:pPr>
-            <a:r>
-              <a:t>RULE_UPDATE / MEMORY_WRITE</a:t>
-            </a:r>
-          </a:p>
-        </p:txBody>
-      </p:sp>
-      <p:sp>
-        <p:nvSpPr>
-          <p:cNvPr id="12" name="Rounded Rectangle 11"/>
-          <p:cNvSpPr/>
-          <p:nvPr/>
-        </p:nvSpPr>
-        <p:spPr>
-          <a:xfrm>
-            <a:off x="8229600" y="1280160"/>
-            <a:ext cx="3657600" cy="2103120"/>
-          </a:xfrm>
-          <a:prstGeom prst="roundRect">
-            <a:avLst/>
-          </a:prstGeom>
-          <a:solidFill>
-            <a:srgbClr val="FFFFFF"/>
-          </a:solidFill>
-          <a:ln w="25400">
-            <a:solidFill>
-              <a:srgbClr val="FF6B35"/>
-            </a:solidFill>
-          </a:ln>
-        </p:spPr>
-        <p:style>
-          <a:lnRef idx="1">
-            <a:schemeClr val="accent1"/>
-          </a:lnRef>
-          <a:fillRef idx="3">
-            <a:schemeClr val="accent1"/>
-          </a:fillRef>
-          <a:effectRef idx="2">
-            <a:schemeClr val="accent1"/>
-          </a:effectRef>
-          <a:fontRef idx="minor">
-            <a:schemeClr val="lt1"/>
-          </a:fontRef>
-        </p:style>
-        <p:txBody>
-          <a:bodyPr rtlCol="0" anchor="ctr"/>
-          <a:lstStyle/>
-          <a:p>
-            <a:pPr algn="ctr"/>
-          </a:p>
-        </p:txBody>
-      </p:sp>
-      <p:sp>
-        <p:nvSpPr>
-          <p:cNvPr id="13" name="Rectangle 12"/>
-          <p:cNvSpPr/>
-          <p:nvPr/>
-        </p:nvSpPr>
-        <p:spPr>
-          <a:xfrm>
-            <a:off x="8229600" y="1280160"/>
-            <a:ext cx="3657600" cy="411480"/>
-          </a:xfrm>
-          <a:prstGeom prst="rect">
-            <a:avLst/>
-          </a:prstGeom>
-          <a:solidFill>
-            <a:srgbClr val="FF6B35"/>
-          </a:solidFill>
-          <a:ln/>
-        </p:spPr>
-        <p:style>
-          <a:lnRef idx="1">
-            <a:schemeClr val="accent1"/>
-          </a:lnRef>
-          <a:fillRef idx="3">
-            <a:schemeClr val="accent1"/>
-          </a:fillRef>
-          <a:effectRef idx="2">
-            <a:schemeClr val="accent1"/>
-          </a:effectRef>
-          <a:fontRef idx="minor">
-            <a:schemeClr val="lt1"/>
-          </a:fontRef>
-        </p:style>
-        <p:txBody>
-          <a:bodyPr rtlCol="0" anchor="ctr"/>
-          <a:lstStyle/>
-          <a:p>
-            <a:pPr algn="ctr"/>
-          </a:p>
-        </p:txBody>
-      </p:sp>
-      <p:sp>
-        <p:nvSpPr>
-          <p:cNvPr id="14" name="TextBox 13"/>
-          <p:cNvSpPr txBox="1"/>
-          <p:nvPr/>
-        </p:nvSpPr>
-        <p:spPr>
-          <a:xfrm>
-            <a:off x="8302752" y="1353312"/>
-            <a:ext cx="3511296" cy="320040"/>
-          </a:xfrm>
-          <a:prstGeom prst="rect">
-            <a:avLst/>
-          </a:prstGeom>
-          <a:noFill/>
-        </p:spPr>
-        <p:txBody>
-          <a:bodyPr wrap="none">
-            <a:spAutoFit/>
-          </a:bodyPr>
-          <a:lstStyle/>
-          <a:p>
-            <a:pPr algn="l">
-              <a:defRPr sz="1400" b="1">
-                <a:solidFill>
-                  <a:srgbClr val="F3F6F9"/>
-                </a:solidFill>
-                <a:latin typeface="Microsoft YaHei"/>
-              </a:defRPr>
-            </a:pPr>
-            <a:r>
-              <a:t>协作流程</a:t>
-            </a:r>
-          </a:p>
-        </p:txBody>
-      </p:sp>
-      <p:sp>
-        <p:nvSpPr>
-          <p:cNvPr id="15" name="TextBox 14"/>
-          <p:cNvSpPr txBox="1"/>
-          <p:nvPr/>
-        </p:nvSpPr>
-        <p:spPr>
-          <a:xfrm>
-            <a:off x="8339327" y="1783080"/>
-            <a:ext cx="3438144" cy="1508760"/>
-          </a:xfrm>
-          <a:prstGeom prst="rect">
-            <a:avLst/>
-          </a:prstGeom>
-          <a:noFill/>
-        </p:spPr>
-        <p:txBody>
-          <a:bodyPr wrap="square">
-            <a:spAutoFit/>
-          </a:bodyPr>
-          <a:lstStyle/>
-          <a:p>
-            <a:pPr algn="l">
-              <a:spcAft>
-                <a:spcPts val="400"/>
-              </a:spcAft>
-              <a:defRPr sz="1200" b="0">
-                <a:solidFill>
-                  <a:srgbClr val="1E2933"/>
-                </a:solidFill>
-                <a:latin typeface="Microsoft YaHei"/>
-              </a:defRPr>
-            </a:pPr>
-            <a:r>
-              <a:t>Observer 采集 probe 状态</a:t>
-            </a:r>
-          </a:p>
-          <a:p>
-            <a:pPr algn="l">
-              <a:spcAft>
-                <a:spcPts val="400"/>
-              </a:spcAft>
-              <a:defRPr sz="1200" b="0">
-                <a:solidFill>
-                  <a:srgbClr val="1E2933"/>
-                </a:solidFill>
-                <a:latin typeface="Microsoft YaHei"/>
-              </a:defRPr>
-            </a:pPr>
-            <a:r>
-              <a:t>DecisionAnalyst 生成候选动作</a:t>
-            </a:r>
-          </a:p>
-          <a:p>
-            <a:pPr algn="l">
-              <a:spcAft>
-                <a:spcPts val="400"/>
-              </a:spcAft>
-              <a:defRPr sz="1200" b="0">
-                <a:solidFill>
-                  <a:srgbClr val="1E2933"/>
-                </a:solidFill>
-                <a:latin typeface="Microsoft YaHei"/>
-              </a:defRPr>
-            </a:pPr>
-            <a:r>
-              <a:t>Critic 评估一致性风险</a:t>
-            </a:r>
-          </a:p>
-          <a:p>
-            <a:pPr algn="l">
-              <a:spcAft>
-                <a:spcPts val="400"/>
-              </a:spcAft>
-              <a:defRPr sz="1200" b="0">
-                <a:solidFill>
-                  <a:srgbClr val="1E2933"/>
-                </a:solidFill>
-                <a:latin typeface="Microsoft YaHei"/>
-              </a:defRPr>
-            </a:pPr>
-            <a:r>
-              <a:t>MemoryCurator 归档有用模式</a:t>
-            </a:r>
-          </a:p>
-        </p:txBody>
-      </p:sp>
-      <p:sp>
-        <p:nvSpPr>
-          <p:cNvPr id="16" name="Rounded Rectangle 15"/>
-          <p:cNvSpPr/>
-          <p:nvPr/>
-        </p:nvSpPr>
-        <p:spPr>
-          <a:xfrm>
-            <a:off x="365760" y="3657600"/>
-            <a:ext cx="11430000" cy="1005840"/>
-          </a:xfrm>
-          <a:prstGeom prst="roundRect">
-            <a:avLst/>
-          </a:prstGeom>
-          <a:solidFill>
-            <a:srgbClr val="F3F6F9"/>
-          </a:solidFill>
-          <a:ln/>
-        </p:spPr>
-        <p:style>
-          <a:lnRef idx="1">
-            <a:schemeClr val="accent1"/>
-          </a:lnRef>
-          <a:fillRef idx="3">
-            <a:schemeClr val="accent1"/>
-          </a:fillRef>
-          <a:effectRef idx="2">
-            <a:schemeClr val="accent1"/>
-          </a:effectRef>
-          <a:fontRef idx="minor">
-            <a:schemeClr val="lt1"/>
-          </a:fontRef>
-        </p:style>
-        <p:txBody>
-          <a:bodyPr rtlCol="0" anchor="ctr"/>
-          <a:lstStyle/>
-          <a:p>
-            <a:pPr algn="ctr">
-              <a:defRPr sz="1400" b="0">
-                <a:solidFill>
-                  <a:srgbClr val="1E2933"/>
-                </a:solidFill>
-                <a:latin typeface="Microsoft YaHei"/>
-              </a:defRPr>
-            </a:pPr>
-            <a:r>
-              <a:t>核心思路：不要把所有决策压给一个模型。让云端 API 做长程规划，本地 VLM 做画面理解，规则引擎做零延迟执行，记忆层负责跨 episode 复用。</a:t>
-            </a:r>
-          </a:p>
-        </p:txBody>
-      </p:sp>
-      <p:sp>
-        <p:nvSpPr>
-          <p:cNvPr id="17" name="Rectangle 16"/>
-          <p:cNvSpPr/>
-          <p:nvPr/>
-        </p:nvSpPr>
-        <p:spPr>
-          <a:xfrm>
-            <a:off x="0" y="6537960"/>
-            <a:ext cx="12191695" cy="18288"/>
-          </a:xfrm>
-          <a:prstGeom prst="rect">
-            <a:avLst/>
-          </a:prstGeom>
-          <a:solidFill>
-            <a:srgbClr val="0096C7"/>
-          </a:solidFill>
-          <a:ln/>
-        </p:spPr>
-        <p:style>
-          <a:lnRef idx="1">
-            <a:schemeClr val="accent1"/>
-          </a:lnRef>
-          <a:fillRef idx="3">
-            <a:schemeClr val="accent1"/>
-          </a:fillRef>
-          <a:effectRef idx="2">
-            <a:schemeClr val="accent1"/>
-          </a:effectRef>
-          <a:fontRef idx="minor">
-            <a:schemeClr val="lt1"/>
-          </a:fontRef>
-        </p:style>
-        <p:txBody>
-          <a:bodyPr rtlCol="0" anchor="ctr"/>
-          <a:lstStyle/>
-          <a:p>
-            <a:pPr algn="ctr"/>
-          </a:p>
-        </p:txBody>
-      </p:sp>
-      <p:sp>
-        <p:nvSpPr>
-          <p:cNvPr id="18" name="TextBox 17"/>
-          <p:cNvSpPr txBox="1"/>
-          <p:nvPr/>
-        </p:nvSpPr>
-        <p:spPr>
-          <a:xfrm>
-            <a:off x="457200" y="6583680"/>
-            <a:ext cx="3657600" cy="228600"/>
-          </a:xfrm>
-          <a:prstGeom prst="rect">
-            <a:avLst/>
-          </a:prstGeom>
-          <a:noFill/>
-        </p:spPr>
-        <p:txBody>
-          <a:bodyPr wrap="none">
-            <a:spAutoFit/>
-          </a:bodyPr>
-          <a:lstStyle/>
-          <a:p>
-            <a:pPr algn="l">
-              <a:defRPr sz="1000" b="0">
-                <a:solidFill>
-                  <a:srgbClr val="6C757D"/>
-                </a:solidFill>
-                <a:latin typeface="Microsoft YaHei"/>
-              </a:defRPr>
-            </a:pPr>
-            <a:r>
-              <a:t>smallgameagent · LLM/VLM + 规则驱动</a:t>
-            </a:r>
-          </a:p>
-        </p:txBody>
-      </p:sp>
-      <p:sp>
-        <p:nvSpPr>
-          <p:cNvPr id="19" name="TextBox 18"/>
-          <p:cNvSpPr txBox="1"/>
-          <p:nvPr/>
-        </p:nvSpPr>
-        <p:spPr>
-          <a:xfrm>
-            <a:off x="10789920" y="6583680"/>
-            <a:ext cx="914400" cy="228600"/>
-          </a:xfrm>
-          <a:prstGeom prst="rect">
-            <a:avLst/>
-          </a:prstGeom>
-          <a:noFill/>
-        </p:spPr>
-        <p:txBody>
-          <a:bodyPr wrap="none">
-            <a:spAutoFit/>
-          </a:bodyPr>
-          <a:lstStyle/>
-          <a:p>
             <a:pPr algn="r">
               <a:defRPr sz="1000" b="0">
                 <a:solidFill>
@@ -5982,7 +5822,7 @@
               </a:defRPr>
             </a:pPr>
             <a:r>
-              <a:t>15/27</a:t>
+              <a:t>15/28</a:t>
             </a:r>
           </a:p>
         </p:txBody>
@@ -6077,7 +5917,7 @@
               </a:defRPr>
             </a:pPr>
             <a:r>
-              <a:t>通信与记忆的设计取舍</a:t>
+              <a:t>Agent 通信与记忆：从单兵到协作</a:t>
             </a:r>
           </a:p>
         </p:txBody>
@@ -6090,8 +5930,201 @@
         </p:nvSpPr>
         <p:spPr>
           <a:xfrm>
-            <a:off x="457200" y="1280160"/>
-            <a:ext cx="5486400" cy="4937760"/>
+            <a:off x="365760" y="1280160"/>
+            <a:ext cx="3657600" cy="2103120"/>
+          </a:xfrm>
+          <a:prstGeom prst="roundRect">
+            <a:avLst/>
+          </a:prstGeom>
+          <a:solidFill>
+            <a:srgbClr val="FFFFFF"/>
+          </a:solidFill>
+          <a:ln w="25400">
+            <a:solidFill>
+              <a:srgbClr val="1A237E"/>
+            </a:solidFill>
+          </a:ln>
+        </p:spPr>
+        <p:style>
+          <a:lnRef idx="1">
+            <a:schemeClr val="accent1"/>
+          </a:lnRef>
+          <a:fillRef idx="3">
+            <a:schemeClr val="accent1"/>
+          </a:fillRef>
+          <a:effectRef idx="2">
+            <a:schemeClr val="accent1"/>
+          </a:effectRef>
+          <a:fontRef idx="minor">
+            <a:schemeClr val="lt1"/>
+          </a:fontRef>
+        </p:style>
+        <p:txBody>
+          <a:bodyPr rtlCol="0" anchor="ctr"/>
+          <a:lstStyle/>
+          <a:p>
+            <a:pPr algn="ctr"/>
+          </a:p>
+        </p:txBody>
+      </p:sp>
+      <p:sp>
+        <p:nvSpPr>
+          <p:cNvPr id="5" name="Rectangle 4"/>
+          <p:cNvSpPr/>
+          <p:nvPr/>
+        </p:nvSpPr>
+        <p:spPr>
+          <a:xfrm>
+            <a:off x="365760" y="1280160"/>
+            <a:ext cx="3657600" cy="411480"/>
+          </a:xfrm>
+          <a:prstGeom prst="rect">
+            <a:avLst/>
+          </a:prstGeom>
+          <a:solidFill>
+            <a:srgbClr val="1A237E"/>
+          </a:solidFill>
+          <a:ln/>
+        </p:spPr>
+        <p:style>
+          <a:lnRef idx="1">
+            <a:schemeClr val="accent1"/>
+          </a:lnRef>
+          <a:fillRef idx="3">
+            <a:schemeClr val="accent1"/>
+          </a:fillRef>
+          <a:effectRef idx="2">
+            <a:schemeClr val="accent1"/>
+          </a:effectRef>
+          <a:fontRef idx="minor">
+            <a:schemeClr val="lt1"/>
+          </a:fontRef>
+        </p:style>
+        <p:txBody>
+          <a:bodyPr rtlCol="0" anchor="ctr"/>
+          <a:lstStyle/>
+          <a:p>
+            <a:pPr algn="ctr"/>
+          </a:p>
+        </p:txBody>
+      </p:sp>
+      <p:sp>
+        <p:nvSpPr>
+          <p:cNvPr id="6" name="TextBox 5"/>
+          <p:cNvSpPr txBox="1"/>
+          <p:nvPr/>
+        </p:nvSpPr>
+        <p:spPr>
+          <a:xfrm>
+            <a:off x="438912" y="1353312"/>
+            <a:ext cx="3511296" cy="320040"/>
+          </a:xfrm>
+          <a:prstGeom prst="rect">
+            <a:avLst/>
+          </a:prstGeom>
+          <a:noFill/>
+        </p:spPr>
+        <p:txBody>
+          <a:bodyPr wrap="none">
+            <a:spAutoFit/>
+          </a:bodyPr>
+          <a:lstStyle/>
+          <a:p>
+            <a:pPr algn="l">
+              <a:defRPr sz="1400" b="1">
+                <a:solidFill>
+                  <a:srgbClr val="F3F6F9"/>
+                </a:solidFill>
+                <a:latin typeface="Microsoft YaHei"/>
+              </a:defRPr>
+            </a:pPr>
+            <a:r>
+              <a:t>记忆三层</a:t>
+            </a:r>
+          </a:p>
+        </p:txBody>
+      </p:sp>
+      <p:sp>
+        <p:nvSpPr>
+          <p:cNvPr id="7" name="TextBox 6"/>
+          <p:cNvSpPr txBox="1"/>
+          <p:nvPr/>
+        </p:nvSpPr>
+        <p:spPr>
+          <a:xfrm>
+            <a:off x="475488" y="1783080"/>
+            <a:ext cx="3438144" cy="1508760"/>
+          </a:xfrm>
+          <a:prstGeom prst="rect">
+            <a:avLst/>
+          </a:prstGeom>
+          <a:noFill/>
+        </p:spPr>
+        <p:txBody>
+          <a:bodyPr wrap="square">
+            <a:spAutoFit/>
+          </a:bodyPr>
+          <a:lstStyle/>
+          <a:p>
+            <a:pPr algn="l">
+              <a:spcAft>
+                <a:spcPts val="400"/>
+              </a:spcAft>
+              <a:defRPr sz="1200" b="0">
+                <a:solidFill>
+                  <a:srgbClr val="1E2933"/>
+                </a:solidFill>
+                <a:latin typeface="Microsoft YaHei"/>
+              </a:defRPr>
+            </a:pPr>
+            <a:r>
+              <a:t>Episodic：逐步 state / action / reward</a:t>
+            </a:r>
+          </a:p>
+          <a:p>
+            <a:pPr algn="l">
+              <a:spcAft>
+                <a:spcPts val="400"/>
+              </a:spcAft>
+              <a:defRPr sz="1200" b="0">
+                <a:solidFill>
+                  <a:srgbClr val="1E2933"/>
+                </a:solidFill>
+                <a:latin typeface="Microsoft YaHei"/>
+              </a:defRPr>
+            </a:pPr>
+            <a:r>
+              <a:t>Semantic：游戏类型、目标语义向量</a:t>
+            </a:r>
+          </a:p>
+          <a:p>
+            <a:pPr algn="l">
+              <a:spcAft>
+                <a:spcPts val="400"/>
+              </a:spcAft>
+              <a:defRPr sz="1200" b="0">
+                <a:solidFill>
+                  <a:srgbClr val="1E2933"/>
+                </a:solidFill>
+                <a:latin typeface="Microsoft YaHei"/>
+              </a:defRPr>
+            </a:pPr>
+            <a:r>
+              <a:t>Procedural：成功策略、失败模式</a:t>
+            </a:r>
+          </a:p>
+        </p:txBody>
+      </p:sp>
+      <p:sp>
+        <p:nvSpPr>
+          <p:cNvPr id="8" name="Rounded Rectangle 7"/>
+          <p:cNvSpPr/>
+          <p:nvPr/>
+        </p:nvSpPr>
+        <p:spPr>
+          <a:xfrm>
+            <a:off x="4297680" y="1280160"/>
+            <a:ext cx="3657600" cy="2103120"/>
           </a:xfrm>
           <a:prstGeom prst="roundRect">
             <a:avLst/>
@@ -6129,14 +6162,14 @@
       </p:sp>
       <p:sp>
         <p:nvSpPr>
-          <p:cNvPr id="5" name="Rectangle 4"/>
+          <p:cNvPr id="9" name="Rectangle 8"/>
           <p:cNvSpPr/>
           <p:nvPr/>
         </p:nvSpPr>
         <p:spPr>
           <a:xfrm>
-            <a:off x="457200" y="1280160"/>
-            <a:ext cx="5486400" cy="411480"/>
+            <a:off x="4297680" y="1280160"/>
+            <a:ext cx="3657600" cy="411480"/>
           </a:xfrm>
           <a:prstGeom prst="rect">
             <a:avLst/>
@@ -6170,14 +6203,14 @@
       </p:sp>
       <p:sp>
         <p:nvSpPr>
-          <p:cNvPr id="6" name="TextBox 5"/>
+          <p:cNvPr id="10" name="TextBox 9"/>
           <p:cNvSpPr txBox="1"/>
           <p:nvPr/>
         </p:nvSpPr>
         <p:spPr>
           <a:xfrm>
-            <a:off x="530352" y="1353312"/>
-            <a:ext cx="5340096" cy="320040"/>
+            <a:off x="4370832" y="1353312"/>
+            <a:ext cx="3511296" cy="320040"/>
           </a:xfrm>
           <a:prstGeom prst="rect">
             <a:avLst/>
@@ -6199,21 +6232,21 @@
               </a:defRPr>
             </a:pPr>
             <a:r>
-              <a:t>记忆读回的优势</a:t>
-            </a:r>
-          </a:p>
-        </p:txBody>
-      </p:sp>
-      <p:sp>
-        <p:nvSpPr>
-          <p:cNvPr id="7" name="TextBox 6"/>
+              <a:t>AgentBus 消息</a:t>
+            </a:r>
+          </a:p>
+        </p:txBody>
+      </p:sp>
+      <p:sp>
+        <p:nvSpPr>
+          <p:cNvPr id="11" name="TextBox 10"/>
           <p:cNvSpPr txBox="1"/>
           <p:nvPr/>
         </p:nvSpPr>
         <p:spPr>
           <a:xfrm>
-            <a:off x="566928" y="1783080"/>
-            <a:ext cx="5266944" cy="4343400"/>
+            <a:off x="4407408" y="1783080"/>
+            <a:ext cx="3438144" cy="1508760"/>
           </a:xfrm>
           <a:prstGeom prst="rect">
             <a:avLst/>
@@ -6238,7 +6271,7 @@
               </a:defRPr>
             </a:pPr>
             <a:r>
-              <a:t>00461 multi-bus-memory 0.106 → 0.300</a:t>
+              <a:t>OBSERVATION / STATE_UPDATE</a:t>
             </a:r>
           </a:p>
           <a:p>
@@ -6254,7 +6287,7 @@
               </a:defRPr>
             </a:pPr>
             <a:r>
-              <a:t>00736 multi-bus-memory 0.269 → 0.300</a:t>
+              <a:t>DECISION_PROPOSAL / CRITIQUE</a:t>
             </a:r>
           </a:p>
           <a:p>
@@ -6270,37 +6303,21 @@
               </a:defRPr>
             </a:pPr>
             <a:r>
-              <a:t>跨 episode 复用成功模式</a:t>
-            </a:r>
-          </a:p>
-          <a:p>
-            <a:pPr algn="l">
-              <a:spcAft>
-                <a:spcPts val="400"/>
-              </a:spcAft>
-              <a:defRPr sz="1200" b="0">
-                <a:solidFill>
-                  <a:srgbClr val="1E2933"/>
-                </a:solidFill>
-                <a:latin typeface="Microsoft YaHei"/>
-              </a:defRPr>
-            </a:pPr>
-            <a:r>
-              <a:t>减少重复探索带来的 stall</a:t>
-            </a:r>
-          </a:p>
-        </p:txBody>
-      </p:sp>
-      <p:sp>
-        <p:nvSpPr>
-          <p:cNvPr id="8" name="Rounded Rectangle 7"/>
+              <a:t>RULE_UPDATE / MEMORY_WRITE</a:t>
+            </a:r>
+          </a:p>
+        </p:txBody>
+      </p:sp>
+      <p:sp>
+        <p:nvSpPr>
+          <p:cNvPr id="12" name="Rounded Rectangle 11"/>
           <p:cNvSpPr/>
           <p:nvPr/>
         </p:nvSpPr>
         <p:spPr>
           <a:xfrm>
-            <a:off x="6217920" y="1280160"/>
-            <a:ext cx="5486400" cy="4937760"/>
+            <a:off x="8229600" y="1280160"/>
+            <a:ext cx="3657600" cy="2103120"/>
           </a:xfrm>
           <a:prstGeom prst="roundRect">
             <a:avLst/>
@@ -6338,14 +6355,14 @@
       </p:sp>
       <p:sp>
         <p:nvSpPr>
-          <p:cNvPr id="9" name="Rectangle 8"/>
+          <p:cNvPr id="13" name="Rectangle 12"/>
           <p:cNvSpPr/>
           <p:nvPr/>
         </p:nvSpPr>
         <p:spPr>
           <a:xfrm>
-            <a:off x="6217920" y="1280160"/>
-            <a:ext cx="5486400" cy="411480"/>
+            <a:off x="8229600" y="1280160"/>
+            <a:ext cx="3657600" cy="411480"/>
           </a:xfrm>
           <a:prstGeom prst="rect">
             <a:avLst/>
@@ -6379,14 +6396,14 @@
       </p:sp>
       <p:sp>
         <p:nvSpPr>
-          <p:cNvPr id="10" name="TextBox 9"/>
+          <p:cNvPr id="14" name="TextBox 13"/>
           <p:cNvSpPr txBox="1"/>
           <p:nvPr/>
         </p:nvSpPr>
         <p:spPr>
           <a:xfrm>
-            <a:off x="6291072" y="1353312"/>
-            <a:ext cx="5340096" cy="320040"/>
+            <a:off x="8302752" y="1353312"/>
+            <a:ext cx="3511296" cy="320040"/>
           </a:xfrm>
           <a:prstGeom prst="rect">
             <a:avLst/>
@@ -6408,21 +6425,21 @@
               </a:defRPr>
             </a:pPr>
             <a:r>
-              <a:t>仍需解决的问题</a:t>
-            </a:r>
-          </a:p>
-        </p:txBody>
-      </p:sp>
-      <p:sp>
-        <p:nvSpPr>
-          <p:cNvPr id="11" name="TextBox 10"/>
+              <a:t>协作流程</a:t>
+            </a:r>
+          </a:p>
+        </p:txBody>
+      </p:sp>
+      <p:sp>
+        <p:nvSpPr>
+          <p:cNvPr id="15" name="TextBox 14"/>
           <p:cNvSpPr txBox="1"/>
           <p:nvPr/>
         </p:nvSpPr>
         <p:spPr>
           <a:xfrm>
-            <a:off x="6327648" y="1783080"/>
-            <a:ext cx="5266944" cy="4343400"/>
+            <a:off x="8339327" y="1783080"/>
+            <a:ext cx="3438144" cy="1508760"/>
           </a:xfrm>
           <a:prstGeom prst="rect">
             <a:avLst/>
@@ -6447,7 +6464,7 @@
               </a:defRPr>
             </a:pPr>
             <a:r>
-              <a:t>00483 / 00517 multi-bus activity=0：driver 不匹配</a:t>
+              <a:t>Observer 采集 probe 状态</a:t>
             </a:r>
           </a:p>
           <a:p>
@@ -6463,7 +6480,7 @@
               </a:defRPr>
             </a:pPr>
             <a:r>
-              <a:t>strategy_memory 需要预热，冷启动时可能反噬</a:t>
+              <a:t>DecisionAnalyst 生成候选动作</a:t>
             </a:r>
           </a:p>
           <a:p>
@@ -6479,27 +6496,43 @@
               </a:defRPr>
             </a:pPr>
             <a:r>
-              <a:t>多 Agent 冲突时需要更严格的仲裁机制</a:t>
-            </a:r>
-          </a:p>
-        </p:txBody>
-      </p:sp>
-      <p:sp>
-        <p:nvSpPr>
-          <p:cNvPr id="12" name="Rectangle 11"/>
+              <a:t>Critic 评估一致性风险</a:t>
+            </a:r>
+          </a:p>
+          <a:p>
+            <a:pPr algn="l">
+              <a:spcAft>
+                <a:spcPts val="400"/>
+              </a:spcAft>
+              <a:defRPr sz="1200" b="0">
+                <a:solidFill>
+                  <a:srgbClr val="1E2933"/>
+                </a:solidFill>
+                <a:latin typeface="Microsoft YaHei"/>
+              </a:defRPr>
+            </a:pPr>
+            <a:r>
+              <a:t>MemoryCurator 归档有用模式</a:t>
+            </a:r>
+          </a:p>
+        </p:txBody>
+      </p:sp>
+      <p:sp>
+        <p:nvSpPr>
+          <p:cNvPr id="16" name="Rounded Rectangle 15"/>
           <p:cNvSpPr/>
           <p:nvPr/>
         </p:nvSpPr>
         <p:spPr>
           <a:xfrm>
-            <a:off x="0" y="6537960"/>
-            <a:ext cx="12191695" cy="18288"/>
-          </a:xfrm>
-          <a:prstGeom prst="rect">
+            <a:off x="365760" y="3657600"/>
+            <a:ext cx="11430000" cy="1005840"/>
+          </a:xfrm>
+          <a:prstGeom prst="roundRect">
             <a:avLst/>
           </a:prstGeom>
           <a:solidFill>
-            <a:srgbClr val="0096C7"/>
+            <a:srgbClr val="F3F6F9"/>
           </a:solidFill>
           <a:ln/>
         </p:spPr>
@@ -6521,13 +6554,64 @@
           <a:bodyPr rtlCol="0" anchor="ctr"/>
           <a:lstStyle/>
           <a:p>
+            <a:pPr algn="ctr">
+              <a:defRPr sz="1400" b="0">
+                <a:solidFill>
+                  <a:srgbClr val="1E2933"/>
+                </a:solidFill>
+                <a:latin typeface="Microsoft YaHei"/>
+              </a:defRPr>
+            </a:pPr>
+            <a:r>
+              <a:t>核心思路：不要把所有决策压给一个模型。让云端 API 做长程规划，本地 VLM 做画面理解，规则引擎做零延迟执行，记忆层负责跨 episode 复用。</a:t>
+            </a:r>
+          </a:p>
+        </p:txBody>
+      </p:sp>
+      <p:sp>
+        <p:nvSpPr>
+          <p:cNvPr id="17" name="Rectangle 16"/>
+          <p:cNvSpPr/>
+          <p:nvPr/>
+        </p:nvSpPr>
+        <p:spPr>
+          <a:xfrm>
+            <a:off x="0" y="6537960"/>
+            <a:ext cx="12191695" cy="18288"/>
+          </a:xfrm>
+          <a:prstGeom prst="rect">
+            <a:avLst/>
+          </a:prstGeom>
+          <a:solidFill>
+            <a:srgbClr val="0096C7"/>
+          </a:solidFill>
+          <a:ln/>
+        </p:spPr>
+        <p:style>
+          <a:lnRef idx="1">
+            <a:schemeClr val="accent1"/>
+          </a:lnRef>
+          <a:fillRef idx="3">
+            <a:schemeClr val="accent1"/>
+          </a:fillRef>
+          <a:effectRef idx="2">
+            <a:schemeClr val="accent1"/>
+          </a:effectRef>
+          <a:fontRef idx="minor">
+            <a:schemeClr val="lt1"/>
+          </a:fontRef>
+        </p:style>
+        <p:txBody>
+          <a:bodyPr rtlCol="0" anchor="ctr"/>
+          <a:lstStyle/>
+          <a:p>
             <a:pPr algn="ctr"/>
           </a:p>
         </p:txBody>
       </p:sp>
       <p:sp>
         <p:nvSpPr>
-          <p:cNvPr id="13" name="TextBox 12"/>
+          <p:cNvPr id="18" name="TextBox 17"/>
           <p:cNvSpPr txBox="1"/>
           <p:nvPr/>
         </p:nvSpPr>
@@ -6563,7 +6647,7 @@
       </p:sp>
       <p:sp>
         <p:nvSpPr>
-          <p:cNvPr id="14" name="TextBox 13"/>
+          <p:cNvPr id="19" name="TextBox 18"/>
           <p:cNvSpPr txBox="1"/>
           <p:nvPr/>
         </p:nvSpPr>
@@ -6592,7 +6676,7 @@
               </a:defRPr>
             </a:pPr>
             <a:r>
-              <a:t>16/27</a:t>
+              <a:t>16/28</a:t>
             </a:r>
           </a:p>
         </p:txBody>
@@ -6624,7 +6708,7 @@
         <p:spPr>
           <a:xfrm>
             <a:off x="0" y="0"/>
-            <a:ext cx="12191695" cy="6858000"/>
+            <a:ext cx="12191695" cy="960120"/>
           </a:xfrm>
           <a:prstGeom prst="rect">
             <a:avLst/>
@@ -6664,8 +6748,8 @@
         </p:nvSpPr>
         <p:spPr>
           <a:xfrm>
-            <a:off x="548640" y="2468880"/>
-            <a:ext cx="11064240" cy="1097280"/>
+            <a:off x="457200" y="228600"/>
+            <a:ext cx="11247120" cy="548640"/>
           </a:xfrm>
           <a:prstGeom prst="rect">
             <a:avLst/>
@@ -6679,7 +6763,7 @@
           <a:lstStyle/>
           <a:p>
             <a:pPr algn="l">
-              <a:defRPr sz="4400" b="1">
+              <a:defRPr sz="3000" b="1">
                 <a:solidFill>
                   <a:srgbClr val="F3F6F9"/>
                 </a:solidFill>
@@ -6687,29 +6771,33 @@
               </a:defRPr>
             </a:pPr>
             <a:r>
-              <a:t>06 本地 VLM：把 8 GB 显存用到极限</a:t>
-            </a:r>
-          </a:p>
-        </p:txBody>
-      </p:sp>
-      <p:sp>
-        <p:nvSpPr>
-          <p:cNvPr id="4" name="Rectangle 3"/>
+              <a:t>通信与记忆的设计取舍</a:t>
+            </a:r>
+          </a:p>
+        </p:txBody>
+      </p:sp>
+      <p:sp>
+        <p:nvSpPr>
+          <p:cNvPr id="4" name="Rounded Rectangle 3"/>
           <p:cNvSpPr/>
           <p:nvPr/>
         </p:nvSpPr>
         <p:spPr>
           <a:xfrm>
-            <a:off x="548640" y="3657600"/>
-            <a:ext cx="1828800" cy="73152"/>
-          </a:xfrm>
-          <a:prstGeom prst="rect">
+            <a:off x="457200" y="1280160"/>
+            <a:ext cx="5486400" cy="4937760"/>
+          </a:xfrm>
+          <a:prstGeom prst="roundRect">
             <a:avLst/>
           </a:prstGeom>
           <a:solidFill>
-            <a:srgbClr val="FF6B35"/>
+            <a:srgbClr val="FFFFFF"/>
           </a:solidFill>
-          <a:ln/>
+          <a:ln w="25400">
+            <a:solidFill>
+              <a:srgbClr val="0096C7"/>
+            </a:solidFill>
+          </a:ln>
         </p:spPr>
         <p:style>
           <a:lnRef idx="1">
@@ -6741,8 +6829,8 @@
         </p:nvSpPr>
         <p:spPr>
           <a:xfrm>
-            <a:off x="0" y="6537960"/>
-            <a:ext cx="12191695" cy="18288"/>
+            <a:off x="457200" y="1280160"/>
+            <a:ext cx="5486400" cy="411480"/>
           </a:xfrm>
           <a:prstGeom prst="rect">
             <a:avLst/>
@@ -6782,8 +6870,8 @@
         </p:nvSpPr>
         <p:spPr>
           <a:xfrm>
-            <a:off x="457200" y="6583680"/>
-            <a:ext cx="3657600" cy="228600"/>
+            <a:off x="530352" y="1353312"/>
+            <a:ext cx="5340096" cy="320040"/>
           </a:xfrm>
           <a:prstGeom prst="rect">
             <a:avLst/>
@@ -6797,15 +6885,15 @@
           <a:lstStyle/>
           <a:p>
             <a:pPr algn="l">
-              <a:defRPr sz="1000" b="0">
-                <a:solidFill>
-                  <a:srgbClr val="6C757D"/>
-                </a:solidFill>
-                <a:latin typeface="Microsoft YaHei"/>
-              </a:defRPr>
-            </a:pPr>
-            <a:r>
-              <a:t>smallgameagent · LLM/VLM + 规则驱动</a:t>
+              <a:defRPr sz="1400" b="1">
+                <a:solidFill>
+                  <a:srgbClr val="F3F6F9"/>
+                </a:solidFill>
+                <a:latin typeface="Microsoft YaHei"/>
+              </a:defRPr>
+            </a:pPr>
+            <a:r>
+              <a:t>记忆读回的优势</a:t>
             </a:r>
           </a:p>
         </p:txBody>
@@ -6818,8 +6906,181 @@
         </p:nvSpPr>
         <p:spPr>
           <a:xfrm>
-            <a:off x="10789920" y="6583680"/>
-            <a:ext cx="914400" cy="228600"/>
+            <a:off x="566928" y="1783080"/>
+            <a:ext cx="5266944" cy="4343400"/>
+          </a:xfrm>
+          <a:prstGeom prst="rect">
+            <a:avLst/>
+          </a:prstGeom>
+          <a:noFill/>
+        </p:spPr>
+        <p:txBody>
+          <a:bodyPr wrap="square">
+            <a:spAutoFit/>
+          </a:bodyPr>
+          <a:lstStyle/>
+          <a:p>
+            <a:pPr algn="l">
+              <a:spcAft>
+                <a:spcPts val="400"/>
+              </a:spcAft>
+              <a:defRPr sz="1200" b="0">
+                <a:solidFill>
+                  <a:srgbClr val="1E2933"/>
+                </a:solidFill>
+                <a:latin typeface="Microsoft YaHei"/>
+              </a:defRPr>
+            </a:pPr>
+            <a:r>
+              <a:t>00461 multi-bus-memory 0.106 → 0.300</a:t>
+            </a:r>
+          </a:p>
+          <a:p>
+            <a:pPr algn="l">
+              <a:spcAft>
+                <a:spcPts val="400"/>
+              </a:spcAft>
+              <a:defRPr sz="1200" b="0">
+                <a:solidFill>
+                  <a:srgbClr val="1E2933"/>
+                </a:solidFill>
+                <a:latin typeface="Microsoft YaHei"/>
+              </a:defRPr>
+            </a:pPr>
+            <a:r>
+              <a:t>00736 multi-bus-memory 0.269 → 0.300</a:t>
+            </a:r>
+          </a:p>
+          <a:p>
+            <a:pPr algn="l">
+              <a:spcAft>
+                <a:spcPts val="400"/>
+              </a:spcAft>
+              <a:defRPr sz="1200" b="0">
+                <a:solidFill>
+                  <a:srgbClr val="1E2933"/>
+                </a:solidFill>
+                <a:latin typeface="Microsoft YaHei"/>
+              </a:defRPr>
+            </a:pPr>
+            <a:r>
+              <a:t>跨 episode 复用成功模式</a:t>
+            </a:r>
+          </a:p>
+          <a:p>
+            <a:pPr algn="l">
+              <a:spcAft>
+                <a:spcPts val="400"/>
+              </a:spcAft>
+              <a:defRPr sz="1200" b="0">
+                <a:solidFill>
+                  <a:srgbClr val="1E2933"/>
+                </a:solidFill>
+                <a:latin typeface="Microsoft YaHei"/>
+              </a:defRPr>
+            </a:pPr>
+            <a:r>
+              <a:t>减少重复探索带来的 stall</a:t>
+            </a:r>
+          </a:p>
+        </p:txBody>
+      </p:sp>
+      <p:sp>
+        <p:nvSpPr>
+          <p:cNvPr id="8" name="Rounded Rectangle 7"/>
+          <p:cNvSpPr/>
+          <p:nvPr/>
+        </p:nvSpPr>
+        <p:spPr>
+          <a:xfrm>
+            <a:off x="6217920" y="1280160"/>
+            <a:ext cx="5486400" cy="4937760"/>
+          </a:xfrm>
+          <a:prstGeom prst="roundRect">
+            <a:avLst/>
+          </a:prstGeom>
+          <a:solidFill>
+            <a:srgbClr val="FFFFFF"/>
+          </a:solidFill>
+          <a:ln w="25400">
+            <a:solidFill>
+              <a:srgbClr val="FF6B35"/>
+            </a:solidFill>
+          </a:ln>
+        </p:spPr>
+        <p:style>
+          <a:lnRef idx="1">
+            <a:schemeClr val="accent1"/>
+          </a:lnRef>
+          <a:fillRef idx="3">
+            <a:schemeClr val="accent1"/>
+          </a:fillRef>
+          <a:effectRef idx="2">
+            <a:schemeClr val="accent1"/>
+          </a:effectRef>
+          <a:fontRef idx="minor">
+            <a:schemeClr val="lt1"/>
+          </a:fontRef>
+        </p:style>
+        <p:txBody>
+          <a:bodyPr rtlCol="0" anchor="ctr"/>
+          <a:lstStyle/>
+          <a:p>
+            <a:pPr algn="ctr"/>
+          </a:p>
+        </p:txBody>
+      </p:sp>
+      <p:sp>
+        <p:nvSpPr>
+          <p:cNvPr id="9" name="Rectangle 8"/>
+          <p:cNvSpPr/>
+          <p:nvPr/>
+        </p:nvSpPr>
+        <p:spPr>
+          <a:xfrm>
+            <a:off x="6217920" y="1280160"/>
+            <a:ext cx="5486400" cy="411480"/>
+          </a:xfrm>
+          <a:prstGeom prst="rect">
+            <a:avLst/>
+          </a:prstGeom>
+          <a:solidFill>
+            <a:srgbClr val="FF6B35"/>
+          </a:solidFill>
+          <a:ln/>
+        </p:spPr>
+        <p:style>
+          <a:lnRef idx="1">
+            <a:schemeClr val="accent1"/>
+          </a:lnRef>
+          <a:fillRef idx="3">
+            <a:schemeClr val="accent1"/>
+          </a:fillRef>
+          <a:effectRef idx="2">
+            <a:schemeClr val="accent1"/>
+          </a:effectRef>
+          <a:fontRef idx="minor">
+            <a:schemeClr val="lt1"/>
+          </a:fontRef>
+        </p:style>
+        <p:txBody>
+          <a:bodyPr rtlCol="0" anchor="ctr"/>
+          <a:lstStyle/>
+          <a:p>
+            <a:pPr algn="ctr"/>
+          </a:p>
+        </p:txBody>
+      </p:sp>
+      <p:sp>
+        <p:nvSpPr>
+          <p:cNvPr id="10" name="TextBox 9"/>
+          <p:cNvSpPr txBox="1"/>
+          <p:nvPr/>
+        </p:nvSpPr>
+        <p:spPr>
+          <a:xfrm>
+            <a:off x="6291072" y="1353312"/>
+            <a:ext cx="5340096" cy="320040"/>
           </a:xfrm>
           <a:prstGeom prst="rect">
             <a:avLst/>
@@ -6832,6 +7093,190 @@
           </a:bodyPr>
           <a:lstStyle/>
           <a:p>
+            <a:pPr algn="l">
+              <a:defRPr sz="1400" b="1">
+                <a:solidFill>
+                  <a:srgbClr val="F3F6F9"/>
+                </a:solidFill>
+                <a:latin typeface="Microsoft YaHei"/>
+              </a:defRPr>
+            </a:pPr>
+            <a:r>
+              <a:t>仍需解决的问题</a:t>
+            </a:r>
+          </a:p>
+        </p:txBody>
+      </p:sp>
+      <p:sp>
+        <p:nvSpPr>
+          <p:cNvPr id="11" name="TextBox 10"/>
+          <p:cNvSpPr txBox="1"/>
+          <p:nvPr/>
+        </p:nvSpPr>
+        <p:spPr>
+          <a:xfrm>
+            <a:off x="6327648" y="1783080"/>
+            <a:ext cx="5266944" cy="4343400"/>
+          </a:xfrm>
+          <a:prstGeom prst="rect">
+            <a:avLst/>
+          </a:prstGeom>
+          <a:noFill/>
+        </p:spPr>
+        <p:txBody>
+          <a:bodyPr wrap="square">
+            <a:spAutoFit/>
+          </a:bodyPr>
+          <a:lstStyle/>
+          <a:p>
+            <a:pPr algn="l">
+              <a:spcAft>
+                <a:spcPts val="400"/>
+              </a:spcAft>
+              <a:defRPr sz="1200" b="0">
+                <a:solidFill>
+                  <a:srgbClr val="1E2933"/>
+                </a:solidFill>
+                <a:latin typeface="Microsoft YaHei"/>
+              </a:defRPr>
+            </a:pPr>
+            <a:r>
+              <a:t>00483 / 00517 multi-bus activity=0：driver 不匹配</a:t>
+            </a:r>
+          </a:p>
+          <a:p>
+            <a:pPr algn="l">
+              <a:spcAft>
+                <a:spcPts val="400"/>
+              </a:spcAft>
+              <a:defRPr sz="1200" b="0">
+                <a:solidFill>
+                  <a:srgbClr val="1E2933"/>
+                </a:solidFill>
+                <a:latin typeface="Microsoft YaHei"/>
+              </a:defRPr>
+            </a:pPr>
+            <a:r>
+              <a:t>strategy_memory 需要预热，冷启动时可能反噬</a:t>
+            </a:r>
+          </a:p>
+          <a:p>
+            <a:pPr algn="l">
+              <a:spcAft>
+                <a:spcPts val="400"/>
+              </a:spcAft>
+              <a:defRPr sz="1200" b="0">
+                <a:solidFill>
+                  <a:srgbClr val="1E2933"/>
+                </a:solidFill>
+                <a:latin typeface="Microsoft YaHei"/>
+              </a:defRPr>
+            </a:pPr>
+            <a:r>
+              <a:t>多 Agent 冲突时需要更严格的仲裁机制</a:t>
+            </a:r>
+          </a:p>
+        </p:txBody>
+      </p:sp>
+      <p:sp>
+        <p:nvSpPr>
+          <p:cNvPr id="12" name="Rectangle 11"/>
+          <p:cNvSpPr/>
+          <p:nvPr/>
+        </p:nvSpPr>
+        <p:spPr>
+          <a:xfrm>
+            <a:off x="0" y="6537960"/>
+            <a:ext cx="12191695" cy="18288"/>
+          </a:xfrm>
+          <a:prstGeom prst="rect">
+            <a:avLst/>
+          </a:prstGeom>
+          <a:solidFill>
+            <a:srgbClr val="0096C7"/>
+          </a:solidFill>
+          <a:ln/>
+        </p:spPr>
+        <p:style>
+          <a:lnRef idx="1">
+            <a:schemeClr val="accent1"/>
+          </a:lnRef>
+          <a:fillRef idx="3">
+            <a:schemeClr val="accent1"/>
+          </a:fillRef>
+          <a:effectRef idx="2">
+            <a:schemeClr val="accent1"/>
+          </a:effectRef>
+          <a:fontRef idx="minor">
+            <a:schemeClr val="lt1"/>
+          </a:fontRef>
+        </p:style>
+        <p:txBody>
+          <a:bodyPr rtlCol="0" anchor="ctr"/>
+          <a:lstStyle/>
+          <a:p>
+            <a:pPr algn="ctr"/>
+          </a:p>
+        </p:txBody>
+      </p:sp>
+      <p:sp>
+        <p:nvSpPr>
+          <p:cNvPr id="13" name="TextBox 12"/>
+          <p:cNvSpPr txBox="1"/>
+          <p:nvPr/>
+        </p:nvSpPr>
+        <p:spPr>
+          <a:xfrm>
+            <a:off x="457200" y="6583680"/>
+            <a:ext cx="3657600" cy="228600"/>
+          </a:xfrm>
+          <a:prstGeom prst="rect">
+            <a:avLst/>
+          </a:prstGeom>
+          <a:noFill/>
+        </p:spPr>
+        <p:txBody>
+          <a:bodyPr wrap="none">
+            <a:spAutoFit/>
+          </a:bodyPr>
+          <a:lstStyle/>
+          <a:p>
+            <a:pPr algn="l">
+              <a:defRPr sz="1000" b="0">
+                <a:solidFill>
+                  <a:srgbClr val="6C757D"/>
+                </a:solidFill>
+                <a:latin typeface="Microsoft YaHei"/>
+              </a:defRPr>
+            </a:pPr>
+            <a:r>
+              <a:t>smallgameagent · LLM/VLM + 规则驱动</a:t>
+            </a:r>
+          </a:p>
+        </p:txBody>
+      </p:sp>
+      <p:sp>
+        <p:nvSpPr>
+          <p:cNvPr id="14" name="TextBox 13"/>
+          <p:cNvSpPr txBox="1"/>
+          <p:nvPr/>
+        </p:nvSpPr>
+        <p:spPr>
+          <a:xfrm>
+            <a:off x="10789920" y="6583680"/>
+            <a:ext cx="914400" cy="228600"/>
+          </a:xfrm>
+          <a:prstGeom prst="rect">
+            <a:avLst/>
+          </a:prstGeom>
+          <a:noFill/>
+        </p:spPr>
+        <p:txBody>
+          <a:bodyPr wrap="none">
+            <a:spAutoFit/>
+          </a:bodyPr>
+          <a:lstStyle/>
+          <a:p>
             <a:pPr algn="r">
               <a:defRPr sz="1000" b="0">
                 <a:solidFill>
@@ -6841,7 +7286,7 @@
               </a:defRPr>
             </a:pPr>
             <a:r>
-              <a:t>17/27</a:t>
+              <a:t>17/28</a:t>
             </a:r>
           </a:p>
         </p:txBody>
@@ -6873,7 +7318,7 @@
         <p:spPr>
           <a:xfrm>
             <a:off x="0" y="0"/>
-            <a:ext cx="12191695" cy="960120"/>
+            <a:ext cx="12191695" cy="6858000"/>
           </a:xfrm>
           <a:prstGeom prst="rect">
             <a:avLst/>
@@ -6913,8 +7358,8 @@
         </p:nvSpPr>
         <p:spPr>
           <a:xfrm>
-            <a:off x="457200" y="228600"/>
-            <a:ext cx="11247120" cy="548640"/>
+            <a:off x="548640" y="2468880"/>
+            <a:ext cx="11064240" cy="1097280"/>
           </a:xfrm>
           <a:prstGeom prst="rect">
             <a:avLst/>
@@ -6928,7 +7373,7 @@
           <a:lstStyle/>
           <a:p>
             <a:pPr algn="l">
-              <a:defRPr sz="3000" b="1">
+              <a:defRPr sz="4400" b="1">
                 <a:solidFill>
                   <a:srgbClr val="F3F6F9"/>
                 </a:solidFill>
@@ -6936,130 +7381,27 @@
               </a:defRPr>
             </a:pPr>
             <a:r>
-              <a:t>小模型 + 重量化 = 可落地的视觉层</a:t>
-            </a:r>
-          </a:p>
-        </p:txBody>
-      </p:sp>
-      <p:sp>
-        <p:nvSpPr>
-          <p:cNvPr id="4" name="TextBox 3"/>
-          <p:cNvSpPr txBox="1"/>
-          <p:nvPr/>
-        </p:nvSpPr>
-        <p:spPr>
-          <a:xfrm>
-            <a:off x="548640" y="1234440"/>
-            <a:ext cx="11064240" cy="5029200"/>
-          </a:xfrm>
-          <a:prstGeom prst="rect">
-            <a:avLst/>
-          </a:prstGeom>
-          <a:noFill/>
-        </p:spPr>
-        <p:txBody>
-          <a:bodyPr wrap="square">
-            <a:spAutoFit/>
-          </a:bodyPr>
-          <a:lstStyle/>
-          <a:p>
-            <a:pPr algn="l">
-              <a:spcAft>
-                <a:spcPts val="1000"/>
-              </a:spcAft>
-              <a:defRPr sz="1800" b="0">
-                <a:solidFill>
-                  <a:srgbClr val="1E2933"/>
-                </a:solidFill>
-                <a:latin typeface="Microsoft YaHei"/>
-              </a:defRPr>
-            </a:pPr>
-            <a:r>
-              <a:t>基线：4-bit NF4 量化加载 Qwen3.5-4B/9B、Gemma-4-E4B</a:t>
-            </a:r>
-          </a:p>
-          <a:p>
-            <a:pPr algn="l">
-              <a:spcAft>
-                <a:spcPts val="1000"/>
-              </a:spcAft>
-              <a:defRPr sz="1800" b="0">
-                <a:solidFill>
-                  <a:srgbClr val="1E2933"/>
-                </a:solidFill>
-                <a:latin typeface="Microsoft YaHei"/>
-              </a:defRPr>
-            </a:pPr>
-            <a:r>
-              <a:t>进一步减显存：KV-cache 量化（q4_0 / q8_0 / q4_k_m）</a:t>
-            </a:r>
-          </a:p>
-          <a:p>
-            <a:pPr algn="l">
-              <a:spcAft>
-                <a:spcPts val="1000"/>
-              </a:spcAft>
-              <a:defRPr sz="1800" b="0">
-                <a:solidFill>
-                  <a:srgbClr val="1E2933"/>
-                </a:solidFill>
-                <a:latin typeface="Microsoft YaHei"/>
-              </a:defRPr>
-            </a:pPr>
-            <a:r>
-              <a:t>当前本地测试：Gemma-4-E4B 输出最稳定，3/3 帧可解析</a:t>
-            </a:r>
-          </a:p>
-          <a:p>
-            <a:pPr algn="l">
-              <a:spcAft>
-                <a:spcPts val="1000"/>
-              </a:spcAft>
-              <a:defRPr sz="1800" b="0">
-                <a:solidFill>
-                  <a:srgbClr val="1E2933"/>
-                </a:solidFill>
-                <a:latin typeface="Microsoft YaHei"/>
-              </a:defRPr>
-            </a:pPr>
-            <a:r>
-              <a:t>Qwen 系列速度更快，但需要更强的「只输出 JSON」系统提示约束</a:t>
-            </a:r>
-          </a:p>
-          <a:p>
-            <a:pPr algn="l">
-              <a:spcAft>
-                <a:spcPts val="1000"/>
-              </a:spcAft>
-              <a:defRPr sz="1800" b="0">
-                <a:solidFill>
-                  <a:srgbClr val="1E2933"/>
-                </a:solidFill>
-                <a:latin typeface="Microsoft YaHei"/>
-              </a:defRPr>
-            </a:pPr>
-            <a:r>
-              <a:t>未来：离线标注 → QLoRA 微调 → 给云端 API 提供视觉上下文</a:t>
-            </a:r>
-          </a:p>
-        </p:txBody>
-      </p:sp>
-      <p:sp>
-        <p:nvSpPr>
-          <p:cNvPr id="5" name="Rectangle 4"/>
+              <a:t>06 本地 VLM：把 8 GB 显存用到极限</a:t>
+            </a:r>
+          </a:p>
+        </p:txBody>
+      </p:sp>
+      <p:sp>
+        <p:nvSpPr>
+          <p:cNvPr id="4" name="Rectangle 3"/>
           <p:cNvSpPr/>
           <p:nvPr/>
         </p:nvSpPr>
         <p:spPr>
           <a:xfrm>
-            <a:off x="0" y="6537960"/>
-            <a:ext cx="12191695" cy="18288"/>
+            <a:off x="548640" y="3657600"/>
+            <a:ext cx="1828800" cy="73152"/>
           </a:xfrm>
           <a:prstGeom prst="rect">
             <a:avLst/>
           </a:prstGeom>
           <a:solidFill>
-            <a:srgbClr val="0096C7"/>
+            <a:srgbClr val="FF6B35"/>
           </a:solidFill>
           <a:ln/>
         </p:spPr>
@@ -7087,6 +7429,47 @@
       </p:sp>
       <p:sp>
         <p:nvSpPr>
+          <p:cNvPr id="5" name="Rectangle 4"/>
+          <p:cNvSpPr/>
+          <p:nvPr/>
+        </p:nvSpPr>
+        <p:spPr>
+          <a:xfrm>
+            <a:off x="0" y="6537960"/>
+            <a:ext cx="12191695" cy="18288"/>
+          </a:xfrm>
+          <a:prstGeom prst="rect">
+            <a:avLst/>
+          </a:prstGeom>
+          <a:solidFill>
+            <a:srgbClr val="0096C7"/>
+          </a:solidFill>
+          <a:ln/>
+        </p:spPr>
+        <p:style>
+          <a:lnRef idx="1">
+            <a:schemeClr val="accent1"/>
+          </a:lnRef>
+          <a:fillRef idx="3">
+            <a:schemeClr val="accent1"/>
+          </a:fillRef>
+          <a:effectRef idx="2">
+            <a:schemeClr val="accent1"/>
+          </a:effectRef>
+          <a:fontRef idx="minor">
+            <a:schemeClr val="lt1"/>
+          </a:fontRef>
+        </p:style>
+        <p:txBody>
+          <a:bodyPr rtlCol="0" anchor="ctr"/>
+          <a:lstStyle/>
+          <a:p>
+            <a:pPr algn="ctr"/>
+          </a:p>
+        </p:txBody>
+      </p:sp>
+      <p:sp>
+        <p:nvSpPr>
           <p:cNvPr id="6" name="TextBox 5"/>
           <p:cNvSpPr txBox="1"/>
           <p:nvPr/>
@@ -7152,7 +7535,7 @@
               </a:defRPr>
             </a:pPr>
             <a:r>
-              <a:t>18/27</a:t>
+              <a:t>18/28</a:t>
             </a:r>
           </a:p>
         </p:txBody>
@@ -7184,7 +7567,7 @@
         <p:spPr>
           <a:xfrm>
             <a:off x="0" y="0"/>
-            <a:ext cx="12191695" cy="6858000"/>
+            <a:ext cx="12191695" cy="960120"/>
           </a:xfrm>
           <a:prstGeom prst="rect">
             <a:avLst/>
@@ -7224,8 +7607,8 @@
         </p:nvSpPr>
         <p:spPr>
           <a:xfrm>
-            <a:off x="548640" y="2468880"/>
-            <a:ext cx="11064240" cy="1097280"/>
+            <a:off x="457200" y="228600"/>
+            <a:ext cx="11247120" cy="548640"/>
           </a:xfrm>
           <a:prstGeom prst="rect">
             <a:avLst/>
@@ -7239,7 +7622,7 @@
           <a:lstStyle/>
           <a:p>
             <a:pPr algn="l">
-              <a:defRPr sz="4400" b="1">
+              <a:defRPr sz="3000" b="1">
                 <a:solidFill>
                   <a:srgbClr val="F3F6F9"/>
                 </a:solidFill>
@@ -7247,27 +7630,130 @@
               </a:defRPr>
             </a:pPr>
             <a:r>
-              <a:t>07 实验结果</a:t>
-            </a:r>
-          </a:p>
-        </p:txBody>
-      </p:sp>
-      <p:sp>
-        <p:nvSpPr>
-          <p:cNvPr id="4" name="Rectangle 3"/>
+              <a:t>小模型 + 重量化 = 可落地的视觉层</a:t>
+            </a:r>
+          </a:p>
+        </p:txBody>
+      </p:sp>
+      <p:sp>
+        <p:nvSpPr>
+          <p:cNvPr id="4" name="TextBox 3"/>
+          <p:cNvSpPr txBox="1"/>
+          <p:nvPr/>
+        </p:nvSpPr>
+        <p:spPr>
+          <a:xfrm>
+            <a:off x="548640" y="1234440"/>
+            <a:ext cx="11064240" cy="5029200"/>
+          </a:xfrm>
+          <a:prstGeom prst="rect">
+            <a:avLst/>
+          </a:prstGeom>
+          <a:noFill/>
+        </p:spPr>
+        <p:txBody>
+          <a:bodyPr wrap="square">
+            <a:spAutoFit/>
+          </a:bodyPr>
+          <a:lstStyle/>
+          <a:p>
+            <a:pPr algn="l">
+              <a:spcAft>
+                <a:spcPts val="1000"/>
+              </a:spcAft>
+              <a:defRPr sz="1800" b="0">
+                <a:solidFill>
+                  <a:srgbClr val="1E2933"/>
+                </a:solidFill>
+                <a:latin typeface="Microsoft YaHei"/>
+              </a:defRPr>
+            </a:pPr>
+            <a:r>
+              <a:t>基线：4-bit NF4 量化加载 Qwen3.5-4B/9B、Gemma-4-E4B</a:t>
+            </a:r>
+          </a:p>
+          <a:p>
+            <a:pPr algn="l">
+              <a:spcAft>
+                <a:spcPts val="1000"/>
+              </a:spcAft>
+              <a:defRPr sz="1800" b="0">
+                <a:solidFill>
+                  <a:srgbClr val="1E2933"/>
+                </a:solidFill>
+                <a:latin typeface="Microsoft YaHei"/>
+              </a:defRPr>
+            </a:pPr>
+            <a:r>
+              <a:t>进一步减显存：KV-cache 量化（q4_0 / q8_0 / q4_k_m）</a:t>
+            </a:r>
+          </a:p>
+          <a:p>
+            <a:pPr algn="l">
+              <a:spcAft>
+                <a:spcPts val="1000"/>
+              </a:spcAft>
+              <a:defRPr sz="1800" b="0">
+                <a:solidFill>
+                  <a:srgbClr val="1E2933"/>
+                </a:solidFill>
+                <a:latin typeface="Microsoft YaHei"/>
+              </a:defRPr>
+            </a:pPr>
+            <a:r>
+              <a:t>当前本地测试：Gemma-4-E4B 输出最稳定，3/3 帧可解析</a:t>
+            </a:r>
+          </a:p>
+          <a:p>
+            <a:pPr algn="l">
+              <a:spcAft>
+                <a:spcPts val="1000"/>
+              </a:spcAft>
+              <a:defRPr sz="1800" b="0">
+                <a:solidFill>
+                  <a:srgbClr val="1E2933"/>
+                </a:solidFill>
+                <a:latin typeface="Microsoft YaHei"/>
+              </a:defRPr>
+            </a:pPr>
+            <a:r>
+              <a:t>Qwen 系列速度更快，但需要更强的「只输出 JSON」系统提示约束</a:t>
+            </a:r>
+          </a:p>
+          <a:p>
+            <a:pPr algn="l">
+              <a:spcAft>
+                <a:spcPts val="1000"/>
+              </a:spcAft>
+              <a:defRPr sz="1800" b="0">
+                <a:solidFill>
+                  <a:srgbClr val="1E2933"/>
+                </a:solidFill>
+                <a:latin typeface="Microsoft YaHei"/>
+              </a:defRPr>
+            </a:pPr>
+            <a:r>
+              <a:t>未来：离线标注 → QLoRA 微调 → 给云端 API 提供视觉上下文</a:t>
+            </a:r>
+          </a:p>
+        </p:txBody>
+      </p:sp>
+      <p:sp>
+        <p:nvSpPr>
+          <p:cNvPr id="5" name="Rectangle 4"/>
           <p:cNvSpPr/>
           <p:nvPr/>
         </p:nvSpPr>
         <p:spPr>
           <a:xfrm>
-            <a:off x="548640" y="3657600"/>
-            <a:ext cx="1828800" cy="73152"/>
+            <a:off x="0" y="6537960"/>
+            <a:ext cx="12191695" cy="18288"/>
           </a:xfrm>
           <a:prstGeom prst="rect">
             <a:avLst/>
           </a:prstGeom>
           <a:solidFill>
-            <a:srgbClr val="FF6B35"/>
+            <a:srgbClr val="0096C7"/>
           </a:solidFill>
           <a:ln/>
         </p:spPr>
@@ -7295,47 +7781,6 @@
       </p:sp>
       <p:sp>
         <p:nvSpPr>
-          <p:cNvPr id="5" name="Rectangle 4"/>
-          <p:cNvSpPr/>
-          <p:nvPr/>
-        </p:nvSpPr>
-        <p:spPr>
-          <a:xfrm>
-            <a:off x="0" y="6537960"/>
-            <a:ext cx="12191695" cy="18288"/>
-          </a:xfrm>
-          <a:prstGeom prst="rect">
-            <a:avLst/>
-          </a:prstGeom>
-          <a:solidFill>
-            <a:srgbClr val="0096C7"/>
-          </a:solidFill>
-          <a:ln/>
-        </p:spPr>
-        <p:style>
-          <a:lnRef idx="1">
-            <a:schemeClr val="accent1"/>
-          </a:lnRef>
-          <a:fillRef idx="3">
-            <a:schemeClr val="accent1"/>
-          </a:fillRef>
-          <a:effectRef idx="2">
-            <a:schemeClr val="accent1"/>
-          </a:effectRef>
-          <a:fontRef idx="minor">
-            <a:schemeClr val="lt1"/>
-          </a:fontRef>
-        </p:style>
-        <p:txBody>
-          <a:bodyPr rtlCol="0" anchor="ctr"/>
-          <a:lstStyle/>
-          <a:p>
-            <a:pPr algn="ctr"/>
-          </a:p>
-        </p:txBody>
-      </p:sp>
-      <p:sp>
-        <p:nvSpPr>
           <p:cNvPr id="6" name="TextBox 5"/>
           <p:cNvSpPr txBox="1"/>
           <p:nvPr/>
@@ -7401,7 +7846,7 @@
               </a:defRPr>
             </a:pPr>
             <a:r>
-              <a:t>19/27</a:t>
+              <a:t>19/28</a:t>
             </a:r>
           </a:p>
         </p:txBody>
@@ -7535,7 +7980,7 @@
               </a:defRPr>
             </a:pPr>
             <a:r>
-              <a:t>小游戏 Agent 到底难在哪？</a:t>
+              <a:t>小游戏 Agent 到底卡在哪几个地方？</a:t>
             </a:r>
           </a:p>
           <a:p>
@@ -7551,7 +7996,7 @@
               </a:defRPr>
             </a:pPr>
             <a:r>
-              <a:t>我们的解法：三层快慢分离架构</a:t>
+              <a:t>我们的思路：把快执行和慢思考拆开，做三层架构</a:t>
             </a:r>
           </a:p>
           <a:p>
@@ -7567,7 +8012,7 @@
               </a:defRPr>
             </a:pPr>
             <a:r>
-              <a:t>云端多模型 API 与本地 VLM 的落地配置</a:t>
+              <a:t>怎么接入多家云模型，又怎么在本地跑小 VLM</a:t>
             </a:r>
           </a:p>
           <a:p>
@@ -7583,7 +8028,7 @@
               </a:defRPr>
             </a:pPr>
             <a:r>
-              <a:t>规则在线更新：让底层规则也能「进化」</a:t>
+              <a:t>规则不是死的：云端模型如何在线更新底层规则</a:t>
             </a:r>
           </a:p>
           <a:p>
@@ -7599,7 +8044,7 @@
               </a:defRPr>
             </a:pPr>
             <a:r>
-              <a:t>Agent 通信与记忆策略</a:t>
+              <a:t>Agent 之间怎么通信、怎么记东西</a:t>
             </a:r>
           </a:p>
           <a:p>
@@ -7615,7 +8060,7 @@
               </a:defRPr>
             </a:pPr>
             <a:r>
-              <a:t>最新实验结果与训练数据管线</a:t>
+              <a:t>最近实验跑出了什么结果，数据怎么准备</a:t>
             </a:r>
           </a:p>
           <a:p>
@@ -7631,7 +8076,7 @@
               </a:defRPr>
             </a:pPr>
             <a:r>
-              <a:t>下一步我们要攻什么？</a:t>
+              <a:t>下一步还想试什么？</a:t>
             </a:r>
           </a:p>
         </p:txBody>
@@ -7744,7 +8189,7 @@
               </a:defRPr>
             </a:pPr>
             <a:r>
-              <a:t>2/27</a:t>
+              <a:t>2/28</a:t>
             </a:r>
           </a:p>
         </p:txBody>
@@ -7758,6 +8203,255 @@
 </file>
 
 <file path=ppt/slides/slide20.xml><?xml version="1.0" encoding="utf-8"?>
+<p:sld xmlns:a="http://schemas.openxmlformats.org/drawingml/2006/main" xmlns:p="http://schemas.openxmlformats.org/presentationml/2006/main" xmlns:r="http://schemas.openxmlformats.org/officeDocument/2006/relationships">
+  <p:cSld>
+    <p:spTree>
+      <p:nvGrpSpPr>
+        <p:cNvPr id="1" name=""/>
+        <p:cNvGrpSpPr/>
+        <p:nvPr/>
+      </p:nvGrpSpPr>
+      <p:grpSpPr/>
+      <p:sp>
+        <p:nvSpPr>
+          <p:cNvPr id="2" name="Rectangle 1"/>
+          <p:cNvSpPr/>
+          <p:nvPr/>
+        </p:nvSpPr>
+        <p:spPr>
+          <a:xfrm>
+            <a:off x="0" y="0"/>
+            <a:ext cx="12191695" cy="6858000"/>
+          </a:xfrm>
+          <a:prstGeom prst="rect">
+            <a:avLst/>
+          </a:prstGeom>
+          <a:solidFill>
+            <a:srgbClr val="1A237E"/>
+          </a:solidFill>
+          <a:ln/>
+        </p:spPr>
+        <p:style>
+          <a:lnRef idx="1">
+            <a:schemeClr val="accent1"/>
+          </a:lnRef>
+          <a:fillRef idx="3">
+            <a:schemeClr val="accent1"/>
+          </a:fillRef>
+          <a:effectRef idx="2">
+            <a:schemeClr val="accent1"/>
+          </a:effectRef>
+          <a:fontRef idx="minor">
+            <a:schemeClr val="lt1"/>
+          </a:fontRef>
+        </p:style>
+        <p:txBody>
+          <a:bodyPr rtlCol="0" anchor="ctr"/>
+          <a:lstStyle/>
+          <a:p>
+            <a:pPr algn="ctr"/>
+          </a:p>
+        </p:txBody>
+      </p:sp>
+      <p:sp>
+        <p:nvSpPr>
+          <p:cNvPr id="3" name="TextBox 2"/>
+          <p:cNvSpPr txBox="1"/>
+          <p:nvPr/>
+        </p:nvSpPr>
+        <p:spPr>
+          <a:xfrm>
+            <a:off x="548640" y="2468880"/>
+            <a:ext cx="11064240" cy="1097280"/>
+          </a:xfrm>
+          <a:prstGeom prst="rect">
+            <a:avLst/>
+          </a:prstGeom>
+          <a:noFill/>
+        </p:spPr>
+        <p:txBody>
+          <a:bodyPr wrap="none">
+            <a:spAutoFit/>
+          </a:bodyPr>
+          <a:lstStyle/>
+          <a:p>
+            <a:pPr algn="l">
+              <a:defRPr sz="4400" b="1">
+                <a:solidFill>
+                  <a:srgbClr val="F3F6F9"/>
+                </a:solidFill>
+                <a:latin typeface="Microsoft YaHei"/>
+              </a:defRPr>
+            </a:pPr>
+            <a:r>
+              <a:t>07 实验结果</a:t>
+            </a:r>
+          </a:p>
+        </p:txBody>
+      </p:sp>
+      <p:sp>
+        <p:nvSpPr>
+          <p:cNvPr id="4" name="Rectangle 3"/>
+          <p:cNvSpPr/>
+          <p:nvPr/>
+        </p:nvSpPr>
+        <p:spPr>
+          <a:xfrm>
+            <a:off x="548640" y="3657600"/>
+            <a:ext cx="1828800" cy="73152"/>
+          </a:xfrm>
+          <a:prstGeom prst="rect">
+            <a:avLst/>
+          </a:prstGeom>
+          <a:solidFill>
+            <a:srgbClr val="FF6B35"/>
+          </a:solidFill>
+          <a:ln/>
+        </p:spPr>
+        <p:style>
+          <a:lnRef idx="1">
+            <a:schemeClr val="accent1"/>
+          </a:lnRef>
+          <a:fillRef idx="3">
+            <a:schemeClr val="accent1"/>
+          </a:fillRef>
+          <a:effectRef idx="2">
+            <a:schemeClr val="accent1"/>
+          </a:effectRef>
+          <a:fontRef idx="minor">
+            <a:schemeClr val="lt1"/>
+          </a:fontRef>
+        </p:style>
+        <p:txBody>
+          <a:bodyPr rtlCol="0" anchor="ctr"/>
+          <a:lstStyle/>
+          <a:p>
+            <a:pPr algn="ctr"/>
+          </a:p>
+        </p:txBody>
+      </p:sp>
+      <p:sp>
+        <p:nvSpPr>
+          <p:cNvPr id="5" name="Rectangle 4"/>
+          <p:cNvSpPr/>
+          <p:nvPr/>
+        </p:nvSpPr>
+        <p:spPr>
+          <a:xfrm>
+            <a:off x="0" y="6537960"/>
+            <a:ext cx="12191695" cy="18288"/>
+          </a:xfrm>
+          <a:prstGeom prst="rect">
+            <a:avLst/>
+          </a:prstGeom>
+          <a:solidFill>
+            <a:srgbClr val="0096C7"/>
+          </a:solidFill>
+          <a:ln/>
+        </p:spPr>
+        <p:style>
+          <a:lnRef idx="1">
+            <a:schemeClr val="accent1"/>
+          </a:lnRef>
+          <a:fillRef idx="3">
+            <a:schemeClr val="accent1"/>
+          </a:fillRef>
+          <a:effectRef idx="2">
+            <a:schemeClr val="accent1"/>
+          </a:effectRef>
+          <a:fontRef idx="minor">
+            <a:schemeClr val="lt1"/>
+          </a:fontRef>
+        </p:style>
+        <p:txBody>
+          <a:bodyPr rtlCol="0" anchor="ctr"/>
+          <a:lstStyle/>
+          <a:p>
+            <a:pPr algn="ctr"/>
+          </a:p>
+        </p:txBody>
+      </p:sp>
+      <p:sp>
+        <p:nvSpPr>
+          <p:cNvPr id="6" name="TextBox 5"/>
+          <p:cNvSpPr txBox="1"/>
+          <p:nvPr/>
+        </p:nvSpPr>
+        <p:spPr>
+          <a:xfrm>
+            <a:off x="457200" y="6583680"/>
+            <a:ext cx="3657600" cy="228600"/>
+          </a:xfrm>
+          <a:prstGeom prst="rect">
+            <a:avLst/>
+          </a:prstGeom>
+          <a:noFill/>
+        </p:spPr>
+        <p:txBody>
+          <a:bodyPr wrap="none">
+            <a:spAutoFit/>
+          </a:bodyPr>
+          <a:lstStyle/>
+          <a:p>
+            <a:pPr algn="l">
+              <a:defRPr sz="1000" b="0">
+                <a:solidFill>
+                  <a:srgbClr val="6C757D"/>
+                </a:solidFill>
+                <a:latin typeface="Microsoft YaHei"/>
+              </a:defRPr>
+            </a:pPr>
+            <a:r>
+              <a:t>smallgameagent · LLM/VLM + 规则驱动</a:t>
+            </a:r>
+          </a:p>
+        </p:txBody>
+      </p:sp>
+      <p:sp>
+        <p:nvSpPr>
+          <p:cNvPr id="7" name="TextBox 6"/>
+          <p:cNvSpPr txBox="1"/>
+          <p:nvPr/>
+        </p:nvSpPr>
+        <p:spPr>
+          <a:xfrm>
+            <a:off x="10789920" y="6583680"/>
+            <a:ext cx="914400" cy="228600"/>
+          </a:xfrm>
+          <a:prstGeom prst="rect">
+            <a:avLst/>
+          </a:prstGeom>
+          <a:noFill/>
+        </p:spPr>
+        <p:txBody>
+          <a:bodyPr wrap="none">
+            <a:spAutoFit/>
+          </a:bodyPr>
+          <a:lstStyle/>
+          <a:p>
+            <a:pPr algn="r">
+              <a:defRPr sz="1000" b="0">
+                <a:solidFill>
+                  <a:srgbClr val="6C757D"/>
+                </a:solidFill>
+                <a:latin typeface="Microsoft YaHei"/>
+              </a:defRPr>
+            </a:pPr>
+            <a:r>
+              <a:t>20/28</a:t>
+            </a:r>
+          </a:p>
+        </p:txBody>
+      </p:sp>
+    </p:spTree>
+  </p:cSld>
+  <p:clrMapOvr>
+    <a:masterClrMapping/>
+  </p:clrMapOvr>
+</p:sld>
+</file>
+
+<file path=ppt/slides/slide21.xml><?xml version="1.0" encoding="utf-8"?>
 <p:sld xmlns:a="http://schemas.openxmlformats.org/drawingml/2006/main" xmlns:p="http://schemas.openxmlformats.org/presentationml/2006/main" xmlns:r="http://schemas.openxmlformats.org/officeDocument/2006/relationships">
   <p:cSld>
     <p:spTree>
@@ -8476,7 +9170,7 @@
               </a:defRPr>
             </a:pPr>
             <a:r>
-              <a:t>20/27</a:t>
+              <a:t>21/28</a:t>
             </a:r>
           </a:p>
         </p:txBody>
@@ -8489,7 +9183,7 @@
 </p:sld>
 </file>
 
-<file path=ppt/slides/slide21.xml><?xml version="1.0" encoding="utf-8"?>
+<file path=ppt/slides/slide22.xml><?xml version="1.0" encoding="utf-8"?>
 <p:sld xmlns:a="http://schemas.openxmlformats.org/drawingml/2006/main" xmlns:p="http://schemas.openxmlformats.org/presentationml/2006/main" xmlns:r="http://schemas.openxmlformats.org/officeDocument/2006/relationships">
   <p:cSld>
     <p:spTree>
@@ -8964,318 +9658,7 @@
               </a:defRPr>
             </a:pPr>
             <a:r>
-              <a:t>21/27</a:t>
-            </a:r>
-          </a:p>
-        </p:txBody>
-      </p:sp>
-    </p:spTree>
-  </p:cSld>
-  <p:clrMapOvr>
-    <a:masterClrMapping/>
-  </p:clrMapOvr>
-</p:sld>
-</file>
-
-<file path=ppt/slides/slide22.xml><?xml version="1.0" encoding="utf-8"?>
-<p:sld xmlns:a="http://schemas.openxmlformats.org/drawingml/2006/main" xmlns:p="http://schemas.openxmlformats.org/presentationml/2006/main" xmlns:r="http://schemas.openxmlformats.org/officeDocument/2006/relationships">
-  <p:cSld>
-    <p:spTree>
-      <p:nvGrpSpPr>
-        <p:cNvPr id="1" name=""/>
-        <p:cNvGrpSpPr/>
-        <p:nvPr/>
-      </p:nvGrpSpPr>
-      <p:grpSpPr/>
-      <p:sp>
-        <p:nvSpPr>
-          <p:cNvPr id="2" name="Rectangle 1"/>
-          <p:cNvSpPr/>
-          <p:nvPr/>
-        </p:nvSpPr>
-        <p:spPr>
-          <a:xfrm>
-            <a:off x="0" y="0"/>
-            <a:ext cx="12191695" cy="960120"/>
-          </a:xfrm>
-          <a:prstGeom prst="rect">
-            <a:avLst/>
-          </a:prstGeom>
-          <a:solidFill>
-            <a:srgbClr val="1A237E"/>
-          </a:solidFill>
-          <a:ln/>
-        </p:spPr>
-        <p:style>
-          <a:lnRef idx="1">
-            <a:schemeClr val="accent1"/>
-          </a:lnRef>
-          <a:fillRef idx="3">
-            <a:schemeClr val="accent1"/>
-          </a:fillRef>
-          <a:effectRef idx="2">
-            <a:schemeClr val="accent1"/>
-          </a:effectRef>
-          <a:fontRef idx="minor">
-            <a:schemeClr val="lt1"/>
-          </a:fontRef>
-        </p:style>
-        <p:txBody>
-          <a:bodyPr rtlCol="0" anchor="ctr"/>
-          <a:lstStyle/>
-          <a:p>
-            <a:pPr algn="ctr"/>
-          </a:p>
-        </p:txBody>
-      </p:sp>
-      <p:sp>
-        <p:nvSpPr>
-          <p:cNvPr id="3" name="TextBox 2"/>
-          <p:cNvSpPr txBox="1"/>
-          <p:nvPr/>
-        </p:nvSpPr>
-        <p:spPr>
-          <a:xfrm>
-            <a:off x="457200" y="228600"/>
-            <a:ext cx="11247120" cy="548640"/>
-          </a:xfrm>
-          <a:prstGeom prst="rect">
-            <a:avLst/>
-          </a:prstGeom>
-          <a:noFill/>
-        </p:spPr>
-        <p:txBody>
-          <a:bodyPr wrap="none">
-            <a:spAutoFit/>
-          </a:bodyPr>
-          <a:lstStyle/>
-          <a:p>
-            <a:pPr algn="l">
-              <a:defRPr sz="3000" b="1">
-                <a:solidFill>
-                  <a:srgbClr val="F3F6F9"/>
-                </a:solidFill>
-                <a:latin typeface="Microsoft YaHei"/>
-              </a:defRPr>
-            </a:pPr>
-            <a:r>
-              <a:t>关键发现</a:t>
-            </a:r>
-          </a:p>
-        </p:txBody>
-      </p:sp>
-      <p:sp>
-        <p:nvSpPr>
-          <p:cNvPr id="4" name="TextBox 3"/>
-          <p:cNvSpPr txBox="1"/>
-          <p:nvPr/>
-        </p:nvSpPr>
-        <p:spPr>
-          <a:xfrm>
-            <a:off x="548640" y="1234440"/>
-            <a:ext cx="11064240" cy="5029200"/>
-          </a:xfrm>
-          <a:prstGeom prst="rect">
-            <a:avLst/>
-          </a:prstGeom>
-          <a:noFill/>
-        </p:spPr>
-        <p:txBody>
-          <a:bodyPr wrap="square">
-            <a:spAutoFit/>
-          </a:bodyPr>
-          <a:lstStyle/>
-          <a:p>
-            <a:pPr algn="l">
-              <a:spcAft>
-                <a:spcPts val="1000"/>
-              </a:spcAft>
-              <a:defRPr sz="1800" b="0">
-                <a:solidFill>
-                  <a:srgbClr val="1E2933"/>
-                </a:solidFill>
-                <a:latin typeface="Microsoft YaHei"/>
-              </a:defRPr>
-            </a:pPr>
-            <a:r>
-              <a:t>离线回放无需浏览器即可快速验证 decider 改动，5 款游戏 rule/hierarchical 跑通</a:t>
-            </a:r>
-          </a:p>
-          <a:p>
-            <a:pPr algn="l">
-              <a:spcAft>
-                <a:spcPts val="1000"/>
-              </a:spcAft>
-              <a:defRPr sz="1800" b="0">
-                <a:solidFill>
-                  <a:srgbClr val="1E2933"/>
-                </a:solidFill>
-                <a:latin typeface="Microsoft YaHei"/>
-              </a:defRPr>
-            </a:pPr>
-            <a:r>
-              <a:t>00332/00382 等 tap-only 游戏与 rule engine 策略一致，joystick 游戏仍有优化空间</a:t>
-            </a:r>
-          </a:p>
-          <a:p>
-            <a:pPr algn="l">
-              <a:spcAft>
-                <a:spcPts val="1000"/>
-              </a:spcAft>
-              <a:defRPr sz="1800" b="0">
-                <a:solidFill>
-                  <a:srgbClr val="1E2933"/>
-                </a:solidFill>
-                <a:latin typeface="Microsoft YaHei"/>
-              </a:defRPr>
-            </a:pPr>
-            <a:r>
-              <a:t>Qwen API 成功触发 L2 规划与 rule update，但单步延迟约 3.7s，在线需异步化</a:t>
-            </a:r>
-          </a:p>
-          <a:p>
-            <a:pPr algn="l">
-              <a:spcAft>
-                <a:spcPts val="1000"/>
-              </a:spcAft>
-              <a:defRPr sz="1800" b="0">
-                <a:solidFill>
-                  <a:srgbClr val="1E2933"/>
-                </a:solidFill>
-                <a:latin typeface="Microsoft YaHei"/>
-              </a:defRPr>
-            </a:pPr>
-            <a:r>
-              <a:t>memory / multi-bus 模式可接入同一离线回放框架，下一步批量对比</a:t>
-            </a:r>
-          </a:p>
-          <a:p>
-            <a:pPr algn="l">
-              <a:spcAft>
-                <a:spcPts val="1000"/>
-              </a:spcAft>
-              <a:defRPr sz="1800" b="0">
-                <a:solidFill>
-                  <a:srgbClr val="1E2933"/>
-                </a:solidFill>
-                <a:latin typeface="Microsoft YaHei"/>
-              </a:defRPr>
-            </a:pPr>
-            <a:r>
-              <a:t>已采集 SSD_00461P01 的 VLM 训练样本，可直接接入 QLoRA 微调管线</a:t>
-            </a:r>
-          </a:p>
-        </p:txBody>
-      </p:sp>
-      <p:sp>
-        <p:nvSpPr>
-          <p:cNvPr id="5" name="Rectangle 4"/>
-          <p:cNvSpPr/>
-          <p:nvPr/>
-        </p:nvSpPr>
-        <p:spPr>
-          <a:xfrm>
-            <a:off x="0" y="6537960"/>
-            <a:ext cx="12191695" cy="18288"/>
-          </a:xfrm>
-          <a:prstGeom prst="rect">
-            <a:avLst/>
-          </a:prstGeom>
-          <a:solidFill>
-            <a:srgbClr val="0096C7"/>
-          </a:solidFill>
-          <a:ln/>
-        </p:spPr>
-        <p:style>
-          <a:lnRef idx="1">
-            <a:schemeClr val="accent1"/>
-          </a:lnRef>
-          <a:fillRef idx="3">
-            <a:schemeClr val="accent1"/>
-          </a:fillRef>
-          <a:effectRef idx="2">
-            <a:schemeClr val="accent1"/>
-          </a:effectRef>
-          <a:fontRef idx="minor">
-            <a:schemeClr val="lt1"/>
-          </a:fontRef>
-        </p:style>
-        <p:txBody>
-          <a:bodyPr rtlCol="0" anchor="ctr"/>
-          <a:lstStyle/>
-          <a:p>
-            <a:pPr algn="ctr"/>
-          </a:p>
-        </p:txBody>
-      </p:sp>
-      <p:sp>
-        <p:nvSpPr>
-          <p:cNvPr id="6" name="TextBox 5"/>
-          <p:cNvSpPr txBox="1"/>
-          <p:nvPr/>
-        </p:nvSpPr>
-        <p:spPr>
-          <a:xfrm>
-            <a:off x="457200" y="6583680"/>
-            <a:ext cx="3657600" cy="228600"/>
-          </a:xfrm>
-          <a:prstGeom prst="rect">
-            <a:avLst/>
-          </a:prstGeom>
-          <a:noFill/>
-        </p:spPr>
-        <p:txBody>
-          <a:bodyPr wrap="none">
-            <a:spAutoFit/>
-          </a:bodyPr>
-          <a:lstStyle/>
-          <a:p>
-            <a:pPr algn="l">
-              <a:defRPr sz="1000" b="0">
-                <a:solidFill>
-                  <a:srgbClr val="6C757D"/>
-                </a:solidFill>
-                <a:latin typeface="Microsoft YaHei"/>
-              </a:defRPr>
-            </a:pPr>
-            <a:r>
-              <a:t>smallgameagent · LLM/VLM + 规则驱动</a:t>
-            </a:r>
-          </a:p>
-        </p:txBody>
-      </p:sp>
-      <p:sp>
-        <p:nvSpPr>
-          <p:cNvPr id="7" name="TextBox 6"/>
-          <p:cNvSpPr txBox="1"/>
-          <p:nvPr/>
-        </p:nvSpPr>
-        <p:spPr>
-          <a:xfrm>
-            <a:off x="10789920" y="6583680"/>
-            <a:ext cx="914400" cy="228600"/>
-          </a:xfrm>
-          <a:prstGeom prst="rect">
-            <a:avLst/>
-          </a:prstGeom>
-          <a:noFill/>
-        </p:spPr>
-        <p:txBody>
-          <a:bodyPr wrap="none">
-            <a:spAutoFit/>
-          </a:bodyPr>
-          <a:lstStyle/>
-          <a:p>
-            <a:pPr algn="r">
-              <a:defRPr sz="1000" b="0">
-                <a:solidFill>
-                  <a:srgbClr val="6C757D"/>
-                </a:solidFill>
-                <a:latin typeface="Microsoft YaHei"/>
-              </a:defRPr>
-            </a:pPr>
-            <a:r>
-              <a:t>22/27</a:t>
+              <a:t>22/28</a:t>
             </a:r>
           </a:p>
         </p:txBody>
@@ -9307,7 +9690,7 @@
         <p:spPr>
           <a:xfrm>
             <a:off x="0" y="0"/>
-            <a:ext cx="12191695" cy="6858000"/>
+            <a:ext cx="12191695" cy="960120"/>
           </a:xfrm>
           <a:prstGeom prst="rect">
             <a:avLst/>
@@ -9347,8 +9730,8 @@
         </p:nvSpPr>
         <p:spPr>
           <a:xfrm>
-            <a:off x="548640" y="2468880"/>
-            <a:ext cx="11064240" cy="1097280"/>
+            <a:off x="457200" y="228600"/>
+            <a:ext cx="11247120" cy="548640"/>
           </a:xfrm>
           <a:prstGeom prst="rect">
             <a:avLst/>
@@ -9362,7 +9745,7 @@
           <a:lstStyle/>
           <a:p>
             <a:pPr algn="l">
-              <a:defRPr sz="4400" b="1">
+              <a:defRPr sz="3000" b="1">
                 <a:solidFill>
                   <a:srgbClr val="F3F6F9"/>
                 </a:solidFill>
@@ -9370,27 +9753,130 @@
               </a:defRPr>
             </a:pPr>
             <a:r>
-              <a:t>08 训练数据管线</a:t>
-            </a:r>
-          </a:p>
-        </p:txBody>
-      </p:sp>
-      <p:sp>
-        <p:nvSpPr>
-          <p:cNvPr id="4" name="Rectangle 3"/>
+              <a:t>关键发现</a:t>
+            </a:r>
+          </a:p>
+        </p:txBody>
+      </p:sp>
+      <p:sp>
+        <p:nvSpPr>
+          <p:cNvPr id="4" name="TextBox 3"/>
+          <p:cNvSpPr txBox="1"/>
+          <p:nvPr/>
+        </p:nvSpPr>
+        <p:spPr>
+          <a:xfrm>
+            <a:off x="548640" y="1234440"/>
+            <a:ext cx="11064240" cy="5029200"/>
+          </a:xfrm>
+          <a:prstGeom prst="rect">
+            <a:avLst/>
+          </a:prstGeom>
+          <a:noFill/>
+        </p:spPr>
+        <p:txBody>
+          <a:bodyPr wrap="square">
+            <a:spAutoFit/>
+          </a:bodyPr>
+          <a:lstStyle/>
+          <a:p>
+            <a:pPr algn="l">
+              <a:spcAft>
+                <a:spcPts val="1000"/>
+              </a:spcAft>
+              <a:defRPr sz="1800" b="0">
+                <a:solidFill>
+                  <a:srgbClr val="1E2933"/>
+                </a:solidFill>
+                <a:latin typeface="Microsoft YaHei"/>
+              </a:defRPr>
+            </a:pPr>
+            <a:r>
+              <a:t>离线回放不用开浏览器，就能快速验证 decider 改动，5 款游戏 rule/hierarchical 跑通</a:t>
+            </a:r>
+          </a:p>
+          <a:p>
+            <a:pPr algn="l">
+              <a:spcAft>
+                <a:spcPts val="1000"/>
+              </a:spcAft>
+              <a:defRPr sz="1800" b="0">
+                <a:solidFill>
+                  <a:srgbClr val="1E2933"/>
+                </a:solidFill>
+                <a:latin typeface="Microsoft YaHei"/>
+              </a:defRPr>
+            </a:pPr>
+            <a:r>
+              <a:t>00332/00382 等 tap-only 游戏与 rule engine 策略一致，joystick 游戏仍有优化空间</a:t>
+            </a:r>
+          </a:p>
+          <a:p>
+            <a:pPr algn="l">
+              <a:spcAft>
+                <a:spcPts val="1000"/>
+              </a:spcAft>
+              <a:defRPr sz="1800" b="0">
+                <a:solidFill>
+                  <a:srgbClr val="1E2933"/>
+                </a:solidFill>
+                <a:latin typeface="Microsoft YaHei"/>
+              </a:defRPr>
+            </a:pPr>
+            <a:r>
+              <a:t>Qwen API 成功触发 L2 规划与 rule update，但单步延迟约 3.7s，在线需异步化</a:t>
+            </a:r>
+          </a:p>
+          <a:p>
+            <a:pPr algn="l">
+              <a:spcAft>
+                <a:spcPts val="1000"/>
+              </a:spcAft>
+              <a:defRPr sz="1800" b="0">
+                <a:solidFill>
+                  <a:srgbClr val="1E2933"/>
+                </a:solidFill>
+                <a:latin typeface="Microsoft YaHei"/>
+              </a:defRPr>
+            </a:pPr>
+            <a:r>
+              <a:t>memory / multi-bus 模式可接入同一离线回放框架，下一步批量对比</a:t>
+            </a:r>
+          </a:p>
+          <a:p>
+            <a:pPr algn="l">
+              <a:spcAft>
+                <a:spcPts val="1000"/>
+              </a:spcAft>
+              <a:defRPr sz="1800" b="0">
+                <a:solidFill>
+                  <a:srgbClr val="1E2933"/>
+                </a:solidFill>
+                <a:latin typeface="Microsoft YaHei"/>
+              </a:defRPr>
+            </a:pPr>
+            <a:r>
+              <a:t>已采集 SSD_00461P01 的 VLM 训练样本，可直接接入 QLoRA 微调管线</a:t>
+            </a:r>
+          </a:p>
+        </p:txBody>
+      </p:sp>
+      <p:sp>
+        <p:nvSpPr>
+          <p:cNvPr id="5" name="Rectangle 4"/>
           <p:cNvSpPr/>
           <p:nvPr/>
         </p:nvSpPr>
         <p:spPr>
           <a:xfrm>
-            <a:off x="548640" y="3657600"/>
-            <a:ext cx="1828800" cy="73152"/>
+            <a:off x="0" y="6537960"/>
+            <a:ext cx="12191695" cy="18288"/>
           </a:xfrm>
           <a:prstGeom prst="rect">
             <a:avLst/>
           </a:prstGeom>
           <a:solidFill>
-            <a:srgbClr val="FF6B35"/>
+            <a:srgbClr val="0096C7"/>
           </a:solidFill>
           <a:ln/>
         </p:spPr>
@@ -9418,47 +9904,6 @@
       </p:sp>
       <p:sp>
         <p:nvSpPr>
-          <p:cNvPr id="5" name="Rectangle 4"/>
-          <p:cNvSpPr/>
-          <p:nvPr/>
-        </p:nvSpPr>
-        <p:spPr>
-          <a:xfrm>
-            <a:off x="0" y="6537960"/>
-            <a:ext cx="12191695" cy="18288"/>
-          </a:xfrm>
-          <a:prstGeom prst="rect">
-            <a:avLst/>
-          </a:prstGeom>
-          <a:solidFill>
-            <a:srgbClr val="0096C7"/>
-          </a:solidFill>
-          <a:ln/>
-        </p:spPr>
-        <p:style>
-          <a:lnRef idx="1">
-            <a:schemeClr val="accent1"/>
-          </a:lnRef>
-          <a:fillRef idx="3">
-            <a:schemeClr val="accent1"/>
-          </a:fillRef>
-          <a:effectRef idx="2">
-            <a:schemeClr val="accent1"/>
-          </a:effectRef>
-          <a:fontRef idx="minor">
-            <a:schemeClr val="lt1"/>
-          </a:fontRef>
-        </p:style>
-        <p:txBody>
-          <a:bodyPr rtlCol="0" anchor="ctr"/>
-          <a:lstStyle/>
-          <a:p>
-            <a:pPr algn="ctr"/>
-          </a:p>
-        </p:txBody>
-      </p:sp>
-      <p:sp>
-        <p:nvSpPr>
           <p:cNvPr id="6" name="TextBox 5"/>
           <p:cNvSpPr txBox="1"/>
           <p:nvPr/>
@@ -9524,7 +9969,7 @@
               </a:defRPr>
             </a:pPr>
             <a:r>
-              <a:t>23/27</a:t>
+              <a:t>23/28</a:t>
             </a:r>
           </a:p>
         </p:txBody>
@@ -9556,7 +10001,7 @@
         <p:spPr>
           <a:xfrm>
             <a:off x="0" y="0"/>
-            <a:ext cx="12191695" cy="960120"/>
+            <a:ext cx="12191695" cy="6858000"/>
           </a:xfrm>
           <a:prstGeom prst="rect">
             <a:avLst/>
@@ -9596,8 +10041,8 @@
         </p:nvSpPr>
         <p:spPr>
           <a:xfrm>
-            <a:off x="457200" y="228600"/>
-            <a:ext cx="11247120" cy="548640"/>
+            <a:off x="548640" y="2468880"/>
+            <a:ext cx="11064240" cy="1097280"/>
           </a:xfrm>
           <a:prstGeom prst="rect">
             <a:avLst/>
@@ -9611,7 +10056,7 @@
           <a:lstStyle/>
           <a:p>
             <a:pPr algn="l">
-              <a:defRPr sz="3000" b="1">
+              <a:defRPr sz="4400" b="1">
                 <a:solidFill>
                   <a:srgbClr val="F3F6F9"/>
                 </a:solidFill>
@@ -9619,114 +10064,27 @@
               </a:defRPr>
             </a:pPr>
             <a:r>
-              <a:t>跑过的轨迹 = 可复用的训练数据</a:t>
-            </a:r>
-          </a:p>
-        </p:txBody>
-      </p:sp>
-      <p:sp>
-        <p:nvSpPr>
-          <p:cNvPr id="4" name="TextBox 3"/>
-          <p:cNvSpPr txBox="1"/>
-          <p:nvPr/>
-        </p:nvSpPr>
-        <p:spPr>
-          <a:xfrm>
-            <a:off x="548640" y="1234440"/>
-            <a:ext cx="11064240" cy="5029200"/>
-          </a:xfrm>
-          <a:prstGeom prst="rect">
-            <a:avLst/>
-          </a:prstGeom>
-          <a:noFill/>
-        </p:spPr>
-        <p:txBody>
-          <a:bodyPr wrap="square">
-            <a:spAutoFit/>
-          </a:bodyPr>
-          <a:lstStyle/>
-          <a:p>
-            <a:pPr algn="l">
-              <a:spcAft>
-                <a:spcPts val="1000"/>
-              </a:spcAft>
-              <a:defRPr sz="1800" b="0">
-                <a:solidFill>
-                  <a:srgbClr val="1E2933"/>
-                </a:solidFill>
-                <a:latin typeface="Microsoft YaHei"/>
-              </a:defRPr>
-            </a:pPr>
-            <a:r>
-              <a:t>batch_runner 每步记录 state / action / keyNumbers / reason</a:t>
-            </a:r>
-          </a:p>
-          <a:p>
-            <a:pPr algn="l">
-              <a:spcAft>
-                <a:spcPts val="1000"/>
-              </a:spcAft>
-              <a:defRPr sz="1800" b="0">
-                <a:solidFill>
-                  <a:srgbClr val="1E2933"/>
-                </a:solidFill>
-                <a:latin typeface="Microsoft YaHei"/>
-              </a:defRPr>
-            </a:pPr>
-            <a:r>
-              <a:t>processed_runs_converter 从 22 个游戏的 processed-runs 生成 7 任务样本</a:t>
-            </a:r>
-          </a:p>
-          <a:p>
-            <a:pPr algn="l">
-              <a:spcAft>
-                <a:spcPts val="1000"/>
-              </a:spcAft>
-              <a:defRPr sz="1800" b="0">
-                <a:solidFill>
-                  <a:srgbClr val="1E2933"/>
-                </a:solidFill>
-                <a:latin typeface="Microsoft YaHei"/>
-              </a:defRPr>
-            </a:pPr>
-            <a:r>
-              <a:t>当前数据集：15,083 条样本，覆盖 next_probe_action / information_gain_judgment 等任务</a:t>
-            </a:r>
-          </a:p>
-          <a:p>
-            <a:pPr algn="l">
-              <a:spcAft>
-                <a:spcPts val="1000"/>
-              </a:spcAft>
-              <a:defRPr sz="1800" b="0">
-                <a:solidFill>
-                  <a:srgbClr val="1E2933"/>
-                </a:solidFill>
-                <a:latin typeface="Microsoft YaHei"/>
-              </a:defRPr>
-            </a:pPr>
-            <a:r>
-              <a:t>可直接喂给 Qwen3.5-4B/9B 与 Gemma-4-E4B 的 QLoRA 微调脚本（在 5090 服务器执行）</a:t>
-            </a:r>
-          </a:p>
-        </p:txBody>
-      </p:sp>
-      <p:sp>
-        <p:nvSpPr>
-          <p:cNvPr id="5" name="Rectangle 4"/>
+              <a:t>08 训练数据管线</a:t>
+            </a:r>
+          </a:p>
+        </p:txBody>
+      </p:sp>
+      <p:sp>
+        <p:nvSpPr>
+          <p:cNvPr id="4" name="Rectangle 3"/>
           <p:cNvSpPr/>
           <p:nvPr/>
         </p:nvSpPr>
         <p:spPr>
           <a:xfrm>
-            <a:off x="0" y="6537960"/>
-            <a:ext cx="12191695" cy="18288"/>
+            <a:off x="548640" y="3657600"/>
+            <a:ext cx="1828800" cy="73152"/>
           </a:xfrm>
           <a:prstGeom prst="rect">
             <a:avLst/>
           </a:prstGeom>
           <a:solidFill>
-            <a:srgbClr val="0096C7"/>
+            <a:srgbClr val="FF6B35"/>
           </a:solidFill>
           <a:ln/>
         </p:spPr>
@@ -9754,6 +10112,47 @@
       </p:sp>
       <p:sp>
         <p:nvSpPr>
+          <p:cNvPr id="5" name="Rectangle 4"/>
+          <p:cNvSpPr/>
+          <p:nvPr/>
+        </p:nvSpPr>
+        <p:spPr>
+          <a:xfrm>
+            <a:off x="0" y="6537960"/>
+            <a:ext cx="12191695" cy="18288"/>
+          </a:xfrm>
+          <a:prstGeom prst="rect">
+            <a:avLst/>
+          </a:prstGeom>
+          <a:solidFill>
+            <a:srgbClr val="0096C7"/>
+          </a:solidFill>
+          <a:ln/>
+        </p:spPr>
+        <p:style>
+          <a:lnRef idx="1">
+            <a:schemeClr val="accent1"/>
+          </a:lnRef>
+          <a:fillRef idx="3">
+            <a:schemeClr val="accent1"/>
+          </a:fillRef>
+          <a:effectRef idx="2">
+            <a:schemeClr val="accent1"/>
+          </a:effectRef>
+          <a:fontRef idx="minor">
+            <a:schemeClr val="lt1"/>
+          </a:fontRef>
+        </p:style>
+        <p:txBody>
+          <a:bodyPr rtlCol="0" anchor="ctr"/>
+          <a:lstStyle/>
+          <a:p>
+            <a:pPr algn="ctr"/>
+          </a:p>
+        </p:txBody>
+      </p:sp>
+      <p:sp>
+        <p:nvSpPr>
           <p:cNvPr id="6" name="TextBox 5"/>
           <p:cNvSpPr txBox="1"/>
           <p:nvPr/>
@@ -9819,7 +10218,7 @@
               </a:defRPr>
             </a:pPr>
             <a:r>
-              <a:t>24/27</a:t>
+              <a:t>24/28</a:t>
             </a:r>
           </a:p>
         </p:txBody>
@@ -9851,7 +10250,7 @@
         <p:spPr>
           <a:xfrm>
             <a:off x="0" y="0"/>
-            <a:ext cx="12191695" cy="6858000"/>
+            <a:ext cx="12191695" cy="960120"/>
           </a:xfrm>
           <a:prstGeom prst="rect">
             <a:avLst/>
@@ -9891,8 +10290,8 @@
         </p:nvSpPr>
         <p:spPr>
           <a:xfrm>
-            <a:off x="548640" y="2468880"/>
-            <a:ext cx="11064240" cy="1097280"/>
+            <a:off x="457200" y="228600"/>
+            <a:ext cx="11247120" cy="548640"/>
           </a:xfrm>
           <a:prstGeom prst="rect">
             <a:avLst/>
@@ -9906,7 +10305,7 @@
           <a:lstStyle/>
           <a:p>
             <a:pPr algn="l">
-              <a:defRPr sz="4400" b="1">
+              <a:defRPr sz="3000" b="1">
                 <a:solidFill>
                   <a:srgbClr val="F3F6F9"/>
                 </a:solidFill>
@@ -9914,27 +10313,114 @@
               </a:defRPr>
             </a:pPr>
             <a:r>
-              <a:t>09 下一步</a:t>
-            </a:r>
-          </a:p>
-        </p:txBody>
-      </p:sp>
-      <p:sp>
-        <p:nvSpPr>
-          <p:cNvPr id="4" name="Rectangle 3"/>
+              <a:t>跑过的轨迹 = 可复用的训练数据</a:t>
+            </a:r>
+          </a:p>
+        </p:txBody>
+      </p:sp>
+      <p:sp>
+        <p:nvSpPr>
+          <p:cNvPr id="4" name="TextBox 3"/>
+          <p:cNvSpPr txBox="1"/>
+          <p:nvPr/>
+        </p:nvSpPr>
+        <p:spPr>
+          <a:xfrm>
+            <a:off x="548640" y="1234440"/>
+            <a:ext cx="11064240" cy="5029200"/>
+          </a:xfrm>
+          <a:prstGeom prst="rect">
+            <a:avLst/>
+          </a:prstGeom>
+          <a:noFill/>
+        </p:spPr>
+        <p:txBody>
+          <a:bodyPr wrap="square">
+            <a:spAutoFit/>
+          </a:bodyPr>
+          <a:lstStyle/>
+          <a:p>
+            <a:pPr algn="l">
+              <a:spcAft>
+                <a:spcPts val="1000"/>
+              </a:spcAft>
+              <a:defRPr sz="1800" b="0">
+                <a:solidFill>
+                  <a:srgbClr val="1E2933"/>
+                </a:solidFill>
+                <a:latin typeface="Microsoft YaHei"/>
+              </a:defRPr>
+            </a:pPr>
+            <a:r>
+              <a:t>batch_runner 每步记录 state / action / keyNumbers / reason</a:t>
+            </a:r>
+          </a:p>
+          <a:p>
+            <a:pPr algn="l">
+              <a:spcAft>
+                <a:spcPts val="1000"/>
+              </a:spcAft>
+              <a:defRPr sz="1800" b="0">
+                <a:solidFill>
+                  <a:srgbClr val="1E2933"/>
+                </a:solidFill>
+                <a:latin typeface="Microsoft YaHei"/>
+              </a:defRPr>
+            </a:pPr>
+            <a:r>
+              <a:t>processed_runs_converter 从 22 个游戏的 processed-runs 生成 7 任务样本</a:t>
+            </a:r>
+          </a:p>
+          <a:p>
+            <a:pPr algn="l">
+              <a:spcAft>
+                <a:spcPts val="1000"/>
+              </a:spcAft>
+              <a:defRPr sz="1800" b="0">
+                <a:solidFill>
+                  <a:srgbClr val="1E2933"/>
+                </a:solidFill>
+                <a:latin typeface="Microsoft YaHei"/>
+              </a:defRPr>
+            </a:pPr>
+            <a:r>
+              <a:t>当前数据集：15,083 条样本，覆盖 next_probe_action / information_gain_judgment 等任务</a:t>
+            </a:r>
+          </a:p>
+          <a:p>
+            <a:pPr algn="l">
+              <a:spcAft>
+                <a:spcPts val="1000"/>
+              </a:spcAft>
+              <a:defRPr sz="1800" b="0">
+                <a:solidFill>
+                  <a:srgbClr val="1E2933"/>
+                </a:solidFill>
+                <a:latin typeface="Microsoft YaHei"/>
+              </a:defRPr>
+            </a:pPr>
+            <a:r>
+              <a:t>可直接喂给 Qwen3.5-4B/9B 与 Gemma-4-E4B 的 QLoRA 微调脚本（在 5090 服务器执行）</a:t>
+            </a:r>
+          </a:p>
+        </p:txBody>
+      </p:sp>
+      <p:sp>
+        <p:nvSpPr>
+          <p:cNvPr id="5" name="Rectangle 4"/>
           <p:cNvSpPr/>
           <p:nvPr/>
         </p:nvSpPr>
         <p:spPr>
           <a:xfrm>
-            <a:off x="548640" y="3657600"/>
-            <a:ext cx="1828800" cy="73152"/>
+            <a:off x="0" y="6537960"/>
+            <a:ext cx="12191695" cy="18288"/>
           </a:xfrm>
           <a:prstGeom prst="rect">
             <a:avLst/>
           </a:prstGeom>
           <a:solidFill>
-            <a:srgbClr val="FF6B35"/>
+            <a:srgbClr val="0096C7"/>
           </a:solidFill>
           <a:ln/>
         </p:spPr>
@@ -9962,47 +10448,6 @@
       </p:sp>
       <p:sp>
         <p:nvSpPr>
-          <p:cNvPr id="5" name="Rectangle 4"/>
-          <p:cNvSpPr/>
-          <p:nvPr/>
-        </p:nvSpPr>
-        <p:spPr>
-          <a:xfrm>
-            <a:off x="0" y="6537960"/>
-            <a:ext cx="12191695" cy="18288"/>
-          </a:xfrm>
-          <a:prstGeom prst="rect">
-            <a:avLst/>
-          </a:prstGeom>
-          <a:solidFill>
-            <a:srgbClr val="0096C7"/>
-          </a:solidFill>
-          <a:ln/>
-        </p:spPr>
-        <p:style>
-          <a:lnRef idx="1">
-            <a:schemeClr val="accent1"/>
-          </a:lnRef>
-          <a:fillRef idx="3">
-            <a:schemeClr val="accent1"/>
-          </a:fillRef>
-          <a:effectRef idx="2">
-            <a:schemeClr val="accent1"/>
-          </a:effectRef>
-          <a:fontRef idx="minor">
-            <a:schemeClr val="lt1"/>
-          </a:fontRef>
-        </p:style>
-        <p:txBody>
-          <a:bodyPr rtlCol="0" anchor="ctr"/>
-          <a:lstStyle/>
-          <a:p>
-            <a:pPr algn="ctr"/>
-          </a:p>
-        </p:txBody>
-      </p:sp>
-      <p:sp>
-        <p:nvSpPr>
           <p:cNvPr id="6" name="TextBox 5"/>
           <p:cNvSpPr txBox="1"/>
           <p:nvPr/>
@@ -10068,7 +10513,7 @@
               </a:defRPr>
             </a:pPr>
             <a:r>
-              <a:t>25/27</a:t>
+              <a:t>25/28</a:t>
             </a:r>
           </a:p>
         </p:txBody>
@@ -10100,7 +10545,7 @@
         <p:spPr>
           <a:xfrm>
             <a:off x="0" y="0"/>
-            <a:ext cx="12191695" cy="960120"/>
+            <a:ext cx="12191695" cy="6858000"/>
           </a:xfrm>
           <a:prstGeom prst="rect">
             <a:avLst/>
@@ -10140,8 +10585,8 @@
         </p:nvSpPr>
         <p:spPr>
           <a:xfrm>
-            <a:off x="457200" y="228600"/>
-            <a:ext cx="11247120" cy="548640"/>
+            <a:off x="548640" y="2468880"/>
+            <a:ext cx="11064240" cy="1097280"/>
           </a:xfrm>
           <a:prstGeom prst="rect">
             <a:avLst/>
@@ -10155,7 +10600,7 @@
           <a:lstStyle/>
           <a:p>
             <a:pPr algn="l">
-              <a:defRPr sz="3000" b="1">
+              <a:defRPr sz="4400" b="1">
                 <a:solidFill>
                   <a:srgbClr val="F3F6F9"/>
                 </a:solidFill>
@@ -10163,130 +10608,27 @@
               </a:defRPr>
             </a:pPr>
             <a:r>
-              <a:t>接下来要攻的几件事</a:t>
-            </a:r>
-          </a:p>
-        </p:txBody>
-      </p:sp>
-      <p:sp>
-        <p:nvSpPr>
-          <p:cNvPr id="4" name="TextBox 3"/>
-          <p:cNvSpPr txBox="1"/>
-          <p:nvPr/>
-        </p:nvSpPr>
-        <p:spPr>
-          <a:xfrm>
-            <a:off x="548640" y="1234440"/>
-            <a:ext cx="11064240" cy="5029200"/>
-          </a:xfrm>
-          <a:prstGeom prst="rect">
-            <a:avLst/>
-          </a:prstGeom>
-          <a:noFill/>
-        </p:spPr>
-        <p:txBody>
-          <a:bodyPr wrap="square">
-            <a:spAutoFit/>
-          </a:bodyPr>
-          <a:lstStyle/>
-          <a:p>
-            <a:pPr algn="l">
-              <a:spcAft>
-                <a:spcPts val="1000"/>
-              </a:spcAft>
-              <a:defRPr sz="1800" b="0">
-                <a:solidFill>
-                  <a:srgbClr val="1E2933"/>
-                </a:solidFill>
-                <a:latin typeface="Microsoft YaHei"/>
-              </a:defRPr>
-            </a:pPr>
-            <a:r>
-              <a:t>在更多游戏上跑真实 Qwen multi-bus-memory，量化通信/记忆成本与收益</a:t>
-            </a:r>
-          </a:p>
-          <a:p>
-            <a:pPr algn="l">
-              <a:spcAft>
-                <a:spcPts val="1000"/>
-              </a:spcAft>
-              <a:defRPr sz="1800" b="0">
-                <a:solidFill>
-                  <a:srgbClr val="1E2933"/>
-                </a:solidFill>
-                <a:latin typeface="Microsoft YaHei"/>
-              </a:defRPr>
-            </a:pPr>
-            <a:r>
-              <a:t>尝试 L2 规则更新的 code_file 模式（allowlist + 高置信度 + 自动备份）</a:t>
-            </a:r>
-          </a:p>
-          <a:p>
-            <a:pPr algn="l">
-              <a:spcAft>
-                <a:spcPts val="1000"/>
-              </a:spcAft>
-              <a:defRPr sz="1800" b="0">
-                <a:solidFill>
-                  <a:srgbClr val="1E2933"/>
-                </a:solidFill>
-                <a:latin typeface="Microsoft YaHei"/>
-              </a:defRPr>
-            </a:pPr>
-            <a:r>
-              <a:t>让本地 VLM 常驻，验证 L1 战术修正对 joystick 游戏的收益</a:t>
-            </a:r>
-          </a:p>
-          <a:p>
-            <a:pPr algn="l">
-              <a:spcAft>
-                <a:spcPts val="1000"/>
-              </a:spcAft>
-              <a:defRPr sz="1800" b="0">
-                <a:solidFill>
-                  <a:srgbClr val="1E2933"/>
-                </a:solidFill>
-                <a:latin typeface="Microsoft YaHei"/>
-              </a:defRPr>
-            </a:pPr>
-            <a:r>
-              <a:t>在 5090 服务器上跑 QLoRA 微调，把本地 VLM 变成专用画面理解器</a:t>
-            </a:r>
-          </a:p>
-          <a:p>
-            <a:pPr algn="l">
-              <a:spcAft>
-                <a:spcPts val="1000"/>
-              </a:spcAft>
-              <a:defRPr sz="1800" b="0">
-                <a:solidFill>
-                  <a:srgbClr val="1E2933"/>
-                </a:solidFill>
-                <a:latin typeface="Microsoft YaHei"/>
-              </a:defRPr>
-            </a:pPr>
-            <a:r>
-              <a:t>把离线回放集成到 CI：每次规则改动自动跑 5 游戏回归</a:t>
-            </a:r>
-          </a:p>
-        </p:txBody>
-      </p:sp>
-      <p:sp>
-        <p:nvSpPr>
-          <p:cNvPr id="5" name="Rectangle 4"/>
+              <a:t>09 下一步</a:t>
+            </a:r>
+          </a:p>
+        </p:txBody>
+      </p:sp>
+      <p:sp>
+        <p:nvSpPr>
+          <p:cNvPr id="4" name="Rectangle 3"/>
           <p:cNvSpPr/>
           <p:nvPr/>
         </p:nvSpPr>
         <p:spPr>
           <a:xfrm>
-            <a:off x="0" y="6537960"/>
-            <a:ext cx="12191695" cy="18288"/>
+            <a:off x="548640" y="3657600"/>
+            <a:ext cx="1828800" cy="73152"/>
           </a:xfrm>
           <a:prstGeom prst="rect">
             <a:avLst/>
           </a:prstGeom>
           <a:solidFill>
-            <a:srgbClr val="0096C7"/>
+            <a:srgbClr val="FF6B35"/>
           </a:solidFill>
           <a:ln/>
         </p:spPr>
@@ -10314,6 +10656,47 @@
       </p:sp>
       <p:sp>
         <p:nvSpPr>
+          <p:cNvPr id="5" name="Rectangle 4"/>
+          <p:cNvSpPr/>
+          <p:nvPr/>
+        </p:nvSpPr>
+        <p:spPr>
+          <a:xfrm>
+            <a:off x="0" y="6537960"/>
+            <a:ext cx="12191695" cy="18288"/>
+          </a:xfrm>
+          <a:prstGeom prst="rect">
+            <a:avLst/>
+          </a:prstGeom>
+          <a:solidFill>
+            <a:srgbClr val="0096C7"/>
+          </a:solidFill>
+          <a:ln/>
+        </p:spPr>
+        <p:style>
+          <a:lnRef idx="1">
+            <a:schemeClr val="accent1"/>
+          </a:lnRef>
+          <a:fillRef idx="3">
+            <a:schemeClr val="accent1"/>
+          </a:fillRef>
+          <a:effectRef idx="2">
+            <a:schemeClr val="accent1"/>
+          </a:effectRef>
+          <a:fontRef idx="minor">
+            <a:schemeClr val="lt1"/>
+          </a:fontRef>
+        </p:style>
+        <p:txBody>
+          <a:bodyPr rtlCol="0" anchor="ctr"/>
+          <a:lstStyle/>
+          <a:p>
+            <a:pPr algn="ctr"/>
+          </a:p>
+        </p:txBody>
+      </p:sp>
+      <p:sp>
+        <p:nvSpPr>
           <p:cNvPr id="6" name="TextBox 5"/>
           <p:cNvSpPr txBox="1"/>
           <p:nvPr/>
@@ -10379,7 +10762,7 @@
               </a:defRPr>
             </a:pPr>
             <a:r>
-              <a:t>26/27</a:t>
+              <a:t>26/28</a:t>
             </a:r>
           </a:p>
         </p:txBody>
@@ -10411,7 +10794,7 @@
         <p:spPr>
           <a:xfrm>
             <a:off x="0" y="0"/>
-            <a:ext cx="12191695" cy="6858000"/>
+            <a:ext cx="12191695" cy="960120"/>
           </a:xfrm>
           <a:prstGeom prst="rect">
             <a:avLst/>
@@ -10451,8 +10834,8 @@
         </p:nvSpPr>
         <p:spPr>
           <a:xfrm>
-            <a:off x="457200" y="2651760"/>
-            <a:ext cx="11247120" cy="1280160"/>
+            <a:off x="457200" y="228600"/>
+            <a:ext cx="11247120" cy="548640"/>
           </a:xfrm>
           <a:prstGeom prst="rect">
             <a:avLst/>
@@ -10465,8 +10848,8 @@
           </a:bodyPr>
           <a:lstStyle/>
           <a:p>
-            <a:pPr algn="ctr">
-              <a:defRPr sz="4800" b="1">
+            <a:pPr algn="l">
+              <a:defRPr sz="3000" b="1">
                 <a:solidFill>
                   <a:srgbClr val="F3F6F9"/>
                 </a:solidFill>
@@ -10474,27 +10857,146 @@
               </a:defRPr>
             </a:pPr>
             <a:r>
-              <a:t>谢谢，欢迎讨论</a:t>
-            </a:r>
-          </a:p>
-        </p:txBody>
-      </p:sp>
-      <p:sp>
-        <p:nvSpPr>
-          <p:cNvPr id="4" name="Rectangle 3"/>
+              <a:t>接下来要攻的几件事</a:t>
+            </a:r>
+          </a:p>
+        </p:txBody>
+      </p:sp>
+      <p:sp>
+        <p:nvSpPr>
+          <p:cNvPr id="4" name="TextBox 3"/>
+          <p:cNvSpPr txBox="1"/>
+          <p:nvPr/>
+        </p:nvSpPr>
+        <p:spPr>
+          <a:xfrm>
+            <a:off x="548640" y="1234440"/>
+            <a:ext cx="11064240" cy="5029200"/>
+          </a:xfrm>
+          <a:prstGeom prst="rect">
+            <a:avLst/>
+          </a:prstGeom>
+          <a:noFill/>
+        </p:spPr>
+        <p:txBody>
+          <a:bodyPr wrap="square">
+            <a:spAutoFit/>
+          </a:bodyPr>
+          <a:lstStyle/>
+          <a:p>
+            <a:pPr algn="l">
+              <a:spcAft>
+                <a:spcPts val="1000"/>
+              </a:spcAft>
+              <a:defRPr sz="1800" b="0">
+                <a:solidFill>
+                  <a:srgbClr val="1E2933"/>
+                </a:solidFill>
+                <a:latin typeface="Microsoft YaHei"/>
+              </a:defRPr>
+            </a:pPr>
+            <a:r>
+              <a:t>在真实云端 API（kimi / qwen / mimo）上触发 code-file 更新，验证真实 L2 的调参决策质量</a:t>
+            </a:r>
+          </a:p>
+          <a:p>
+            <a:pPr algn="l">
+              <a:spcAft>
+                <a:spcPts val="1000"/>
+              </a:spcAft>
+              <a:defRPr sz="1800" b="0">
+                <a:solidFill>
+                  <a:srgbClr val="1E2933"/>
+                </a:solidFill>
+                <a:latin typeface="Microsoft YaHei"/>
+              </a:defRPr>
+            </a:pPr>
+            <a:r>
+              <a:t>把 runtime_rules.json 的 schema 写进 L2 prompt，约束可改字段与取值范围</a:t>
+            </a:r>
+          </a:p>
+          <a:p>
+            <a:pPr algn="l">
+              <a:spcAft>
+                <a:spcPts val="1000"/>
+              </a:spcAft>
+              <a:defRPr sz="1800" b="0">
+                <a:solidFill>
+                  <a:srgbClr val="1E2933"/>
+                </a:solidFill>
+                <a:latin typeface="Microsoft YaHei"/>
+              </a:defRPr>
+            </a:pPr>
+            <a:r>
+              <a:t>尝试 L2 规则更新的 phase_contract 与 memory_entry 模式，完善上层对下层的更新手段</a:t>
+            </a:r>
+          </a:p>
+          <a:p>
+            <a:pPr algn="l">
+              <a:spcAft>
+                <a:spcPts val="1000"/>
+              </a:spcAft>
+              <a:defRPr sz="1800" b="0">
+                <a:solidFill>
+                  <a:srgbClr val="1E2933"/>
+                </a:solidFill>
+                <a:latin typeface="Microsoft YaHei"/>
+              </a:defRPr>
+            </a:pPr>
+            <a:r>
+              <a:t>让本地 VLM 常驻，验证 L1 战术修正对 joystick 游戏的收益</a:t>
+            </a:r>
+          </a:p>
+          <a:p>
+            <a:pPr algn="l">
+              <a:spcAft>
+                <a:spcPts val="1000"/>
+              </a:spcAft>
+              <a:defRPr sz="1800" b="0">
+                <a:solidFill>
+                  <a:srgbClr val="1E2933"/>
+                </a:solidFill>
+                <a:latin typeface="Microsoft YaHei"/>
+              </a:defRPr>
+            </a:pPr>
+            <a:r>
+              <a:t>在 5090 服务器上跑 QLoRA 微调，把本地 VLM 变成专用画面理解器</a:t>
+            </a:r>
+          </a:p>
+          <a:p>
+            <a:pPr algn="l">
+              <a:spcAft>
+                <a:spcPts val="1000"/>
+              </a:spcAft>
+              <a:defRPr sz="1800" b="0">
+                <a:solidFill>
+                  <a:srgbClr val="1E2933"/>
+                </a:solidFill>
+                <a:latin typeface="Microsoft YaHei"/>
+              </a:defRPr>
+            </a:pPr>
+            <a:r>
+              <a:t>把离线回放集成到 CI：每次规则改动自动跑 5 游戏回归</a:t>
+            </a:r>
+          </a:p>
+        </p:txBody>
+      </p:sp>
+      <p:sp>
+        <p:nvSpPr>
+          <p:cNvPr id="5" name="Rectangle 4"/>
           <p:cNvSpPr/>
           <p:nvPr/>
         </p:nvSpPr>
         <p:spPr>
           <a:xfrm>
-            <a:off x="5184648" y="3931920"/>
-            <a:ext cx="1828800" cy="73152"/>
+            <a:off x="0" y="6537960"/>
+            <a:ext cx="12191695" cy="18288"/>
           </a:xfrm>
           <a:prstGeom prst="rect">
             <a:avLst/>
           </a:prstGeom>
           <a:solidFill>
-            <a:srgbClr val="FF6B35"/>
+            <a:srgbClr val="0096C7"/>
           </a:solidFill>
           <a:ln/>
         </p:spPr>
@@ -10522,20 +11024,110 @@
       </p:sp>
       <p:sp>
         <p:nvSpPr>
-          <p:cNvPr id="5" name="Rectangle 4"/>
+          <p:cNvPr id="6" name="TextBox 5"/>
+          <p:cNvSpPr txBox="1"/>
+          <p:nvPr/>
+        </p:nvSpPr>
+        <p:spPr>
+          <a:xfrm>
+            <a:off x="457200" y="6583680"/>
+            <a:ext cx="3657600" cy="228600"/>
+          </a:xfrm>
+          <a:prstGeom prst="rect">
+            <a:avLst/>
+          </a:prstGeom>
+          <a:noFill/>
+        </p:spPr>
+        <p:txBody>
+          <a:bodyPr wrap="none">
+            <a:spAutoFit/>
+          </a:bodyPr>
+          <a:lstStyle/>
+          <a:p>
+            <a:pPr algn="l">
+              <a:defRPr sz="1000" b="0">
+                <a:solidFill>
+                  <a:srgbClr val="6C757D"/>
+                </a:solidFill>
+                <a:latin typeface="Microsoft YaHei"/>
+              </a:defRPr>
+            </a:pPr>
+            <a:r>
+              <a:t>smallgameagent · LLM/VLM + 规则驱动</a:t>
+            </a:r>
+          </a:p>
+        </p:txBody>
+      </p:sp>
+      <p:sp>
+        <p:nvSpPr>
+          <p:cNvPr id="7" name="TextBox 6"/>
+          <p:cNvSpPr txBox="1"/>
+          <p:nvPr/>
+        </p:nvSpPr>
+        <p:spPr>
+          <a:xfrm>
+            <a:off x="10789920" y="6583680"/>
+            <a:ext cx="914400" cy="228600"/>
+          </a:xfrm>
+          <a:prstGeom prst="rect">
+            <a:avLst/>
+          </a:prstGeom>
+          <a:noFill/>
+        </p:spPr>
+        <p:txBody>
+          <a:bodyPr wrap="none">
+            <a:spAutoFit/>
+          </a:bodyPr>
+          <a:lstStyle/>
+          <a:p>
+            <a:pPr algn="r">
+              <a:defRPr sz="1000" b="0">
+                <a:solidFill>
+                  <a:srgbClr val="6C757D"/>
+                </a:solidFill>
+                <a:latin typeface="Microsoft YaHei"/>
+              </a:defRPr>
+            </a:pPr>
+            <a:r>
+              <a:t>27/28</a:t>
+            </a:r>
+          </a:p>
+        </p:txBody>
+      </p:sp>
+    </p:spTree>
+  </p:cSld>
+  <p:clrMapOvr>
+    <a:masterClrMapping/>
+  </p:clrMapOvr>
+</p:sld>
+</file>
+
+<file path=ppt/slides/slide28.xml><?xml version="1.0" encoding="utf-8"?>
+<p:sld xmlns:a="http://schemas.openxmlformats.org/drawingml/2006/main" xmlns:p="http://schemas.openxmlformats.org/presentationml/2006/main" xmlns:r="http://schemas.openxmlformats.org/officeDocument/2006/relationships">
+  <p:cSld>
+    <p:spTree>
+      <p:nvGrpSpPr>
+        <p:cNvPr id="1" name=""/>
+        <p:cNvGrpSpPr/>
+        <p:nvPr/>
+      </p:nvGrpSpPr>
+      <p:grpSpPr/>
+      <p:sp>
+        <p:nvSpPr>
+          <p:cNvPr id="2" name="Rectangle 1"/>
           <p:cNvSpPr/>
           <p:nvPr/>
         </p:nvSpPr>
         <p:spPr>
           <a:xfrm>
-            <a:off x="0" y="6537960"/>
-            <a:ext cx="12191695" cy="18288"/>
+            <a:off x="0" y="0"/>
+            <a:ext cx="12191695" cy="6858000"/>
           </a:xfrm>
           <a:prstGeom prst="rect">
             <a:avLst/>
           </a:prstGeom>
           <a:solidFill>
-            <a:srgbClr val="0096C7"/>
+            <a:srgbClr val="1A237E"/>
           </a:solidFill>
           <a:ln/>
         </p:spPr>
@@ -10563,14 +11155,14 @@
       </p:sp>
       <p:sp>
         <p:nvSpPr>
-          <p:cNvPr id="6" name="TextBox 5"/>
+          <p:cNvPr id="3" name="TextBox 2"/>
           <p:cNvSpPr txBox="1"/>
           <p:nvPr/>
         </p:nvSpPr>
         <p:spPr>
           <a:xfrm>
-            <a:off x="457200" y="6583680"/>
-            <a:ext cx="3657600" cy="228600"/>
+            <a:off x="457200" y="2651760"/>
+            <a:ext cx="11247120" cy="1280160"/>
           </a:xfrm>
           <a:prstGeom prst="rect">
             <a:avLst/>
@@ -10583,30 +11175,112 @@
           </a:bodyPr>
           <a:lstStyle/>
           <a:p>
-            <a:pPr algn="l">
-              <a:defRPr sz="1000" b="0">
-                <a:solidFill>
-                  <a:srgbClr val="6C757D"/>
-                </a:solidFill>
-                <a:latin typeface="Microsoft YaHei"/>
-              </a:defRPr>
-            </a:pPr>
-            <a:r>
-              <a:t>smallgameagent · LLM/VLM + 规则驱动</a:t>
-            </a:r>
-          </a:p>
-        </p:txBody>
-      </p:sp>
-      <p:sp>
-        <p:nvSpPr>
-          <p:cNvPr id="7" name="TextBox 6"/>
+            <a:pPr algn="ctr">
+              <a:defRPr sz="4800" b="1">
+                <a:solidFill>
+                  <a:srgbClr val="F3F6F9"/>
+                </a:solidFill>
+                <a:latin typeface="Microsoft YaHei"/>
+              </a:defRPr>
+            </a:pPr>
+            <a:r>
+              <a:t>谢谢，欢迎讨论</a:t>
+            </a:r>
+          </a:p>
+        </p:txBody>
+      </p:sp>
+      <p:sp>
+        <p:nvSpPr>
+          <p:cNvPr id="4" name="Rectangle 3"/>
+          <p:cNvSpPr/>
+          <p:nvPr/>
+        </p:nvSpPr>
+        <p:spPr>
+          <a:xfrm>
+            <a:off x="5184648" y="3931920"/>
+            <a:ext cx="1828800" cy="73152"/>
+          </a:xfrm>
+          <a:prstGeom prst="rect">
+            <a:avLst/>
+          </a:prstGeom>
+          <a:solidFill>
+            <a:srgbClr val="FF6B35"/>
+          </a:solidFill>
+          <a:ln/>
+        </p:spPr>
+        <p:style>
+          <a:lnRef idx="1">
+            <a:schemeClr val="accent1"/>
+          </a:lnRef>
+          <a:fillRef idx="3">
+            <a:schemeClr val="accent1"/>
+          </a:fillRef>
+          <a:effectRef idx="2">
+            <a:schemeClr val="accent1"/>
+          </a:effectRef>
+          <a:fontRef idx="minor">
+            <a:schemeClr val="lt1"/>
+          </a:fontRef>
+        </p:style>
+        <p:txBody>
+          <a:bodyPr rtlCol="0" anchor="ctr"/>
+          <a:lstStyle/>
+          <a:p>
+            <a:pPr algn="ctr"/>
+          </a:p>
+        </p:txBody>
+      </p:sp>
+      <p:sp>
+        <p:nvSpPr>
+          <p:cNvPr id="5" name="Rectangle 4"/>
+          <p:cNvSpPr/>
+          <p:nvPr/>
+        </p:nvSpPr>
+        <p:spPr>
+          <a:xfrm>
+            <a:off x="0" y="6537960"/>
+            <a:ext cx="12191695" cy="18288"/>
+          </a:xfrm>
+          <a:prstGeom prst="rect">
+            <a:avLst/>
+          </a:prstGeom>
+          <a:solidFill>
+            <a:srgbClr val="0096C7"/>
+          </a:solidFill>
+          <a:ln/>
+        </p:spPr>
+        <p:style>
+          <a:lnRef idx="1">
+            <a:schemeClr val="accent1"/>
+          </a:lnRef>
+          <a:fillRef idx="3">
+            <a:schemeClr val="accent1"/>
+          </a:fillRef>
+          <a:effectRef idx="2">
+            <a:schemeClr val="accent1"/>
+          </a:effectRef>
+          <a:fontRef idx="minor">
+            <a:schemeClr val="lt1"/>
+          </a:fontRef>
+        </p:style>
+        <p:txBody>
+          <a:bodyPr rtlCol="0" anchor="ctr"/>
+          <a:lstStyle/>
+          <a:p>
+            <a:pPr algn="ctr"/>
+          </a:p>
+        </p:txBody>
+      </p:sp>
+      <p:sp>
+        <p:nvSpPr>
+          <p:cNvPr id="6" name="TextBox 5"/>
           <p:cNvSpPr txBox="1"/>
           <p:nvPr/>
         </p:nvSpPr>
         <p:spPr>
           <a:xfrm>
-            <a:off x="10789920" y="6583680"/>
-            <a:ext cx="914400" cy="228600"/>
+            <a:off x="457200" y="6583680"/>
+            <a:ext cx="3657600" cy="228600"/>
           </a:xfrm>
           <a:prstGeom prst="rect">
             <a:avLst/>
@@ -10619,6 +11293,42 @@
           </a:bodyPr>
           <a:lstStyle/>
           <a:p>
+            <a:pPr algn="l">
+              <a:defRPr sz="1000" b="0">
+                <a:solidFill>
+                  <a:srgbClr val="6C757D"/>
+                </a:solidFill>
+                <a:latin typeface="Microsoft YaHei"/>
+              </a:defRPr>
+            </a:pPr>
+            <a:r>
+              <a:t>smallgameagent · LLM/VLM + 规则驱动</a:t>
+            </a:r>
+          </a:p>
+        </p:txBody>
+      </p:sp>
+      <p:sp>
+        <p:nvSpPr>
+          <p:cNvPr id="7" name="TextBox 6"/>
+          <p:cNvSpPr txBox="1"/>
+          <p:nvPr/>
+        </p:nvSpPr>
+        <p:spPr>
+          <a:xfrm>
+            <a:off x="10789920" y="6583680"/>
+            <a:ext cx="914400" cy="228600"/>
+          </a:xfrm>
+          <a:prstGeom prst="rect">
+            <a:avLst/>
+          </a:prstGeom>
+          <a:noFill/>
+        </p:spPr>
+        <p:txBody>
+          <a:bodyPr wrap="none">
+            <a:spAutoFit/>
+          </a:bodyPr>
+          <a:lstStyle/>
+          <a:p>
             <a:pPr algn="r">
               <a:defRPr sz="1000" b="0">
                 <a:solidFill>
@@ -10628,7 +11338,7 @@
               </a:defRPr>
             </a:pPr>
             <a:r>
-              <a:t>27/27</a:t>
+              <a:t>28/28</a:t>
             </a:r>
           </a:p>
         </p:txBody>
@@ -10877,7 +11587,7 @@
               </a:defRPr>
             </a:pPr>
             <a:r>
-              <a:t>3/27</a:t>
+              <a:t>3/28</a:t>
             </a:r>
           </a:p>
         </p:txBody>
@@ -11011,7 +11721,7 @@
               </a:defRPr>
             </a:pPr>
             <a:r>
-              <a:t>空间一致性：场景会随进度改变，云端模型容易「记错」障碍物位置</a:t>
+              <a:t>空间一致性：场景会随着进度变化，云端模型容易记错障碍物位置</a:t>
             </a:r>
           </a:p>
           <a:p>
@@ -11027,7 +11737,7 @@
               </a:defRPr>
             </a:pPr>
             <a:r>
-              <a:t>时间一致性：后续策略会反向改写前面的行为语义，导致推进失败</a:t>
+              <a:t>时间一致性：后面的策略可能反过来改前面的行为含义，导致推进失败</a:t>
             </a:r>
           </a:p>
           <a:p>
@@ -11043,7 +11753,7 @@
               </a:defRPr>
             </a:pPr>
             <a:r>
-              <a:t>策略短视：有钱就去升级，而不是攒够再升级，效率很低</a:t>
+              <a:t>策略短视：有钱就升级，而不是攒够再升级，来回跑很多步</a:t>
             </a:r>
           </a:p>
           <a:p>
@@ -11059,7 +11769,7 @@
               </a:defRPr>
             </a:pPr>
             <a:r>
-              <a:t>运行效率：每个游戏后端数据不同，日志与探针不能一刀切</a:t>
+              <a:t>运行效率：不同游戏后端数据差异大，探针和日志不能一刀切</a:t>
             </a:r>
           </a:p>
           <a:p>
@@ -11075,7 +11785,7 @@
               </a:defRPr>
             </a:pPr>
             <a:r>
-              <a:t>API 延迟：纯云端决策太慢，无法满足实时逐步控制</a:t>
+              <a:t>API 延迟：纯云端决策太慢，实时控制扛不住</a:t>
             </a:r>
           </a:p>
         </p:txBody>
@@ -11188,7 +11898,7 @@
               </a:defRPr>
             </a:pPr>
             <a:r>
-              <a:t>4/27</a:t>
+              <a:t>4/28</a:t>
             </a:r>
           </a:p>
         </p:txBody>
@@ -11437,7 +12147,7 @@
               </a:defRPr>
             </a:pPr>
             <a:r>
-              <a:t>5/27</a:t>
+              <a:t>5/28</a:t>
             </a:r>
           </a:p>
         </p:txBody>
@@ -12491,7 +13201,7 @@
               </a:defRPr>
             </a:pPr>
             <a:r>
-              <a:t>6/27</a:t>
+              <a:t>6/28</a:t>
             </a:r>
           </a:p>
         </p:txBody>
@@ -12625,7 +13335,7 @@
               </a:defRPr>
             </a:pPr>
             <a:r>
-              <a:t>L0 规则引擎：每步 ~0 ms，负责 move / tap 的零延迟执行</a:t>
+              <a:t>L0 规则引擎：每步几乎不花时间，负责 move / tap 的零延迟执行</a:t>
             </a:r>
           </a:p>
           <a:p>
@@ -12657,7 +13367,7 @@
               </a:defRPr>
             </a:pPr>
             <a:r>
-              <a:t>L2 云端 API：看 probe state 做长程规划与规则更新，每 M 步或阶段切换触发</a:t>
+              <a:t>L2 云端 API：看 probe state 做长程规划和规则更新，每 M 步或阶段切换触发</a:t>
             </a:r>
           </a:p>
           <a:p>
@@ -12786,7 +13496,7 @@
               </a:defRPr>
             </a:pPr>
             <a:r>
-              <a:t>7/27</a:t>
+              <a:t>7/28</a:t>
             </a:r>
           </a:p>
         </p:txBody>
@@ -13035,7 +13745,7 @@
               </a:defRPr>
             </a:pPr>
             <a:r>
-              <a:t>8/27</a:t>
+              <a:t>8/28</a:t>
             </a:r>
           </a:p>
         </p:txBody>
@@ -13767,7 +14477,7 @@
               </a:defRPr>
             </a:pPr>
             <a:r>
-              <a:t>9/27</a:t>
+              <a:t>9/28</a:t>
             </a:r>
           </a:p>
         </p:txBody>

--- a/reports/smallgameagent_report.pptx
+++ b/reports/smallgameagent_report.pptx
@@ -5103,16 +5103,384 @@
           </a:p>
         </p:txBody>
       </p:sp>
-      <p:sp>
-        <p:nvSpPr>
-          <p:cNvPr id="12" name="Rounded Rectangle 11"/>
+      <p:graphicFrame>
+        <p:nvGraphicFramePr>
+          <p:cNvPr id="12" name="Table 11"/>
+          <p:cNvGraphicFramePr>
+            <a:graphicFrameLocks noGrp="1"/>
+          </p:cNvGraphicFramePr>
+          <p:nvPr/>
+        </p:nvGraphicFramePr>
+        <p:xfrm>
+          <a:off x="457200" y="3886200"/>
+          <a:ext cx="11247120" cy="1463040"/>
+        </p:xfrm>
+        <a:graphic>
+          <a:graphicData uri="http://schemas.openxmlformats.org/drawingml/2006/table">
+            <a:tbl>
+              <a:tblPr firstRow="1" bandRow="1">
+                <a:tableStyleId>{5C22544A-7EE6-4342-B048-85BDC9FD1C3A}</a:tableStyleId>
+              </a:tblPr>
+              <a:tblGrid>
+                <a:gridCol w="2811780"/>
+                <a:gridCol w="2811780"/>
+                <a:gridCol w="2811780"/>
+                <a:gridCol w="2811780"/>
+              </a:tblGrid>
+              <a:tr h="365760">
+                <a:tc>
+                  <a:txBody>
+                    <a:bodyPr/>
+                    <a:lstStyle/>
+                    <a:p>
+                      <a:pPr algn="ctr">
+                        <a:defRPr sz="1100" b="1">
+                          <a:solidFill>
+                            <a:srgbClr val="F3F6F9"/>
+                          </a:solidFill>
+                          <a:latin typeface="Microsoft YaHei"/>
+                        </a:defRPr>
+                      </a:pPr>
+                      <a:r>
+                        <a:t>Provider</a:t>
+                      </a:r>
+                    </a:p>
+                  </a:txBody>
+                  <a:tcPr>
+                    <a:solidFill>
+                      <a:srgbClr val="1A237E"/>
+                    </a:solidFill>
+                  </a:tcPr>
+                </a:tc>
+                <a:tc>
+                  <a:txBody>
+                    <a:bodyPr/>
+                    <a:lstStyle/>
+                    <a:p>
+                      <a:pPr algn="ctr">
+                        <a:defRPr sz="1100" b="1">
+                          <a:solidFill>
+                            <a:srgbClr val="F3F6F9"/>
+                          </a:solidFill>
+                          <a:latin typeface="Microsoft YaHei"/>
+                        </a:defRPr>
+                      </a:pPr>
+                      <a:r>
+                        <a:t>模型</a:t>
+                      </a:r>
+                    </a:p>
+                  </a:txBody>
+                  <a:tcPr>
+                    <a:solidFill>
+                      <a:srgbClr val="1A237E"/>
+                    </a:solidFill>
+                  </a:tcPr>
+                </a:tc>
+                <a:tc>
+                  <a:txBody>
+                    <a:bodyPr/>
+                    <a:lstStyle/>
+                    <a:p>
+                      <a:pPr algn="ctr">
+                        <a:defRPr sz="1100" b="1">
+                          <a:solidFill>
+                            <a:srgbClr val="F3F6F9"/>
+                          </a:solidFill>
+                          <a:latin typeface="Microsoft YaHei"/>
+                        </a:defRPr>
+                      </a:pPr>
+                      <a:r>
+                        <a:t>延迟</a:t>
+                      </a:r>
+                    </a:p>
+                  </a:txBody>
+                  <a:tcPr>
+                    <a:solidFill>
+                      <a:srgbClr val="1A237E"/>
+                    </a:solidFill>
+                  </a:tcPr>
+                </a:tc>
+                <a:tc>
+                  <a:txBody>
+                    <a:bodyPr/>
+                    <a:lstStyle/>
+                    <a:p>
+                      <a:pPr algn="ctr">
+                        <a:defRPr sz="1100" b="1">
+                          <a:solidFill>
+                            <a:srgbClr val="F3F6F9"/>
+                          </a:solidFill>
+                          <a:latin typeface="Microsoft YaHei"/>
+                        </a:defRPr>
+                      </a:pPr>
+                      <a:r>
+                        <a:t>结果</a:t>
+                      </a:r>
+                    </a:p>
+                  </a:txBody>
+                  <a:tcPr>
+                    <a:solidFill>
+                      <a:srgbClr val="1A237E"/>
+                    </a:solidFill>
+                  </a:tcPr>
+                </a:tc>
+              </a:tr>
+              <a:tr h="365760">
+                <a:tc>
+                  <a:txBody>
+                    <a:bodyPr/>
+                    <a:lstStyle/>
+                    <a:p>
+                      <a:pPr algn="ctr">
+                        <a:defRPr sz="1100">
+                          <a:latin typeface="Microsoft YaHei"/>
+                        </a:defRPr>
+                      </a:pPr>
+                      <a:r>
+                        <a:t>qwen</a:t>
+                      </a:r>
+                    </a:p>
+                  </a:txBody>
+                  <a:tcPr>
+                    <a:solidFill>
+                      <a:srgbClr val="F3F6F9"/>
+                    </a:solidFill>
+                  </a:tcPr>
+                </a:tc>
+                <a:tc>
+                  <a:txBody>
+                    <a:bodyPr/>
+                    <a:lstStyle/>
+                    <a:p>
+                      <a:pPr algn="ctr">
+                        <a:defRPr sz="1100">
+                          <a:latin typeface="Microsoft YaHei"/>
+                        </a:defRPr>
+                      </a:pPr>
+                      <a:r>
+                        <a:t>qwen3.7-max</a:t>
+                      </a:r>
+                    </a:p>
+                  </a:txBody>
+                  <a:tcPr>
+                    <a:solidFill>
+                      <a:srgbClr val="F3F6F9"/>
+                    </a:solidFill>
+                  </a:tcPr>
+                </a:tc>
+                <a:tc>
+                  <a:txBody>
+                    <a:bodyPr/>
+                    <a:lstStyle/>
+                    <a:p>
+                      <a:pPr algn="ctr">
+                        <a:defRPr sz="1100">
+                          <a:latin typeface="Microsoft YaHei"/>
+                        </a:defRPr>
+                      </a:pPr>
+                      <a:r>
+                        <a:t>7.83s</a:t>
+                      </a:r>
+                    </a:p>
+                  </a:txBody>
+                  <a:tcPr>
+                    <a:solidFill>
+                      <a:srgbClr val="F3F6F9"/>
+                    </a:solidFill>
+                  </a:tcPr>
+                </a:tc>
+                <a:tc>
+                  <a:txBody>
+                    <a:bodyPr/>
+                    <a:lstStyle/>
+                    <a:p>
+                      <a:pPr algn="ctr">
+                        <a:defRPr sz="1100">
+                          <a:latin typeface="Microsoft YaHei"/>
+                        </a:defRPr>
+                      </a:pPr>
+                      <a:r>
+                        <a:t>✅ 应用成功</a:t>
+                      </a:r>
+                    </a:p>
+                  </a:txBody>
+                  <a:tcPr>
+                    <a:solidFill>
+                      <a:srgbClr val="F3F6F9"/>
+                    </a:solidFill>
+                  </a:tcPr>
+                </a:tc>
+              </a:tr>
+              <a:tr h="365760">
+                <a:tc>
+                  <a:txBody>
+                    <a:bodyPr/>
+                    <a:lstStyle/>
+                    <a:p>
+                      <a:pPr algn="ctr">
+                        <a:defRPr sz="1100">
+                          <a:latin typeface="Microsoft YaHei"/>
+                        </a:defRPr>
+                      </a:pPr>
+                      <a:r>
+                        <a:t>kimi</a:t>
+                      </a:r>
+                    </a:p>
+                  </a:txBody>
+                  <a:tcPr/>
+                </a:tc>
+                <a:tc>
+                  <a:txBody>
+                    <a:bodyPr/>
+                    <a:lstStyle/>
+                    <a:p>
+                      <a:pPr algn="ctr">
+                        <a:defRPr sz="1100">
+                          <a:latin typeface="Microsoft YaHei"/>
+                        </a:defRPr>
+                      </a:pPr>
+                      <a:r>
+                        <a:t>kimi-k2.7-code</a:t>
+                      </a:r>
+                    </a:p>
+                  </a:txBody>
+                  <a:tcPr/>
+                </a:tc>
+                <a:tc>
+                  <a:txBody>
+                    <a:bodyPr/>
+                    <a:lstStyle/>
+                    <a:p>
+                      <a:pPr algn="ctr">
+                        <a:defRPr sz="1100">
+                          <a:latin typeface="Microsoft YaHei"/>
+                        </a:defRPr>
+                      </a:pPr>
+                      <a:r>
+                        <a:t>3.32s</a:t>
+                      </a:r>
+                    </a:p>
+                  </a:txBody>
+                  <a:tcPr/>
+                </a:tc>
+                <a:tc>
+                  <a:txBody>
+                    <a:bodyPr/>
+                    <a:lstStyle/>
+                    <a:p>
+                      <a:pPr algn="ctr">
+                        <a:defRPr sz="1100">
+                          <a:latin typeface="Microsoft YaHei"/>
+                        </a:defRPr>
+                      </a:pPr>
+                      <a:r>
+                        <a:t>✅ 应用成功</a:t>
+                      </a:r>
+                    </a:p>
+                  </a:txBody>
+                  <a:tcPr/>
+                </a:tc>
+              </a:tr>
+              <a:tr h="365760">
+                <a:tc>
+                  <a:txBody>
+                    <a:bodyPr/>
+                    <a:lstStyle/>
+                    <a:p>
+                      <a:pPr algn="ctr">
+                        <a:defRPr sz="1100">
+                          <a:latin typeface="Microsoft YaHei"/>
+                        </a:defRPr>
+                      </a:pPr>
+                      <a:r>
+                        <a:t>xiaomi</a:t>
+                      </a:r>
+                    </a:p>
+                  </a:txBody>
+                  <a:tcPr>
+                    <a:solidFill>
+                      <a:srgbClr val="F3F6F9"/>
+                    </a:solidFill>
+                  </a:tcPr>
+                </a:tc>
+                <a:tc>
+                  <a:txBody>
+                    <a:bodyPr/>
+                    <a:lstStyle/>
+                    <a:p>
+                      <a:pPr algn="ctr">
+                        <a:defRPr sz="1100">
+                          <a:latin typeface="Microsoft YaHei"/>
+                        </a:defRPr>
+                      </a:pPr>
+                      <a:r>
+                        <a:t>mimo-v2.5</a:t>
+                      </a:r>
+                    </a:p>
+                  </a:txBody>
+                  <a:tcPr>
+                    <a:solidFill>
+                      <a:srgbClr val="F3F6F9"/>
+                    </a:solidFill>
+                  </a:tcPr>
+                </a:tc>
+                <a:tc>
+                  <a:txBody>
+                    <a:bodyPr/>
+                    <a:lstStyle/>
+                    <a:p>
+                      <a:pPr algn="ctr">
+                        <a:defRPr sz="1100">
+                          <a:latin typeface="Microsoft YaHei"/>
+                        </a:defRPr>
+                      </a:pPr>
+                      <a:r>
+                        <a:t>6.18s</a:t>
+                      </a:r>
+                    </a:p>
+                  </a:txBody>
+                  <a:tcPr>
+                    <a:solidFill>
+                      <a:srgbClr val="F3F6F9"/>
+                    </a:solidFill>
+                  </a:tcPr>
+                </a:tc>
+                <a:tc>
+                  <a:txBody>
+                    <a:bodyPr/>
+                    <a:lstStyle/>
+                    <a:p>
+                      <a:pPr algn="ctr">
+                        <a:defRPr sz="1100">
+                          <a:latin typeface="Microsoft YaHei"/>
+                        </a:defRPr>
+                      </a:pPr>
+                      <a:r>
+                        <a:t>✅ 应用成功</a:t>
+                      </a:r>
+                    </a:p>
+                  </a:txBody>
+                  <a:tcPr>
+                    <a:solidFill>
+                      <a:srgbClr val="F3F6F9"/>
+                    </a:solidFill>
+                  </a:tcPr>
+                </a:tc>
+              </a:tr>
+            </a:tbl>
+          </a:graphicData>
+        </a:graphic>
+      </p:graphicFrame>
+      <p:sp>
+        <p:nvSpPr>
+          <p:cNvPr id="13" name="Rounded Rectangle 12"/>
           <p:cNvSpPr/>
           <p:nvPr/>
         </p:nvSpPr>
         <p:spPr>
           <a:xfrm>
-            <a:off x="457200" y="3840480"/>
-            <a:ext cx="11247120" cy="914400"/>
+            <a:off x="457200" y="5486400"/>
+            <a:ext cx="11247120" cy="548640"/>
           </a:xfrm>
           <a:prstGeom prst="roundRect">
             <a:avLst/>
@@ -5141,7 +5509,7 @@
           <a:lstStyle/>
           <a:p>
             <a:pPr algn="ctr">
-              <a:defRPr sz="1400" b="0">
+              <a:defRPr sz="1200" b="0">
                 <a:solidFill>
                   <a:srgbClr val="1E2933"/>
                 </a:solidFill>
@@ -5149,14 +5517,14 @@
               </a:defRPr>
             </a:pPr>
             <a:r>
-              <a:t>意义：云端模型不仅能改内存参数，还能持久化地调整规则引擎的「旋钮」。重启后仍然生效，且风险被限制在单一配置文件中。</a:t>
-            </a:r>
-          </a:p>
-        </p:txBody>
-      </p:sp>
-      <p:sp>
-        <p:nvSpPr>
-          <p:cNvPr id="13" name="Rectangle 12"/>
+              <a:t>意义：云端模型不仅能改内存参数，还能持久化地调整规则引擎的「旋钮」，且 qwen/kimi/xiaomi 三家都能正确生成可应用的 JSON patch。</a:t>
+            </a:r>
+          </a:p>
+        </p:txBody>
+      </p:sp>
+      <p:sp>
+        <p:nvSpPr>
+          <p:cNvPr id="14" name="Rectangle 13"/>
           <p:cNvSpPr/>
           <p:nvPr/>
         </p:nvSpPr>
@@ -5197,7 +5565,7 @@
       </p:sp>
       <p:sp>
         <p:nvSpPr>
-          <p:cNvPr id="14" name="TextBox 13"/>
+          <p:cNvPr id="15" name="TextBox 14"/>
           <p:cNvSpPr txBox="1"/>
           <p:nvPr/>
         </p:nvSpPr>
@@ -5233,7 +5601,7 @@
       </p:sp>
       <p:sp>
         <p:nvSpPr>
-          <p:cNvPr id="15" name="TextBox 14"/>
+          <p:cNvPr id="16" name="TextBox 15"/>
           <p:cNvSpPr txBox="1"/>
           <p:nvPr/>
         </p:nvSpPr>

--- a/reports/smallgameagent_report.pptx
+++ b/reports/smallgameagent_report.pptx
@@ -8069,7 +8069,7 @@
               </a:defRPr>
             </a:pPr>
             <a:r>
-              <a:t>当前本地测试：Gemma-4-E4B 输出最稳定，3/3 帧可解析</a:t>
+              <a:t>当前本地测试：Qwen3.5-4B 在 RTX 5060 8GB 上约 7s/帧可跑通</a:t>
             </a:r>
           </a:p>
           <a:p>
@@ -8085,7 +8085,7 @@
               </a:defRPr>
             </a:pPr>
             <a:r>
-              <a:t>Qwen 系列速度更快，但需要更强的「只输出 JSON」系统提示约束</a:t>
+              <a:t>但默认模型的视觉摘要不稳定，有时输出大量草稿/截断，反而带偏云端策略</a:t>
             </a:r>
           </a:p>
           <a:p>
@@ -8101,7 +8101,23 @@
               </a:defRPr>
             </a:pPr>
             <a:r>
-              <a:t>未来：离线标注 → QLoRA 微调 → 给云端 API 提供视觉上下文</a:t>
+              <a:t>实验：text-only 5/9 动作匹配，加本地 VLM 上下文后 3/9</a:t>
+            </a:r>
+          </a:p>
+          <a:p>
+            <a:pPr algn="l">
+              <a:spcAft>
+                <a:spcPts val="1000"/>
+              </a:spcAft>
+              <a:defRPr sz="1800" b="0">
+                <a:solidFill>
+                  <a:srgbClr val="1E2933"/>
+                </a:solidFill>
+                <a:latin typeface="Microsoft YaHei"/>
+              </a:defRPr>
+            </a:pPr>
+            <a:r>
+              <a:t>未来：离线标注 → QLoRA 微调 → 给云端 API 提供结构化视觉上下文</a:t>
             </a:r>
           </a:p>
         </p:txBody>

--- a/reports/smallgameagent_report.pptx
+++ b/reports/smallgameagent_report.pptx
@@ -37,6 +37,7 @@
     <p:sldId id="285" r:id="rId36"/>
     <p:sldId id="286" r:id="rId37"/>
     <p:sldId id="287" r:id="rId38"/>
+    <p:sldId id="288" r:id="rId39"/>
   </p:sldIdLst>
   <p:sldSz cx="12191695" cy="6858000" type="screen4x3"/>
   <p:notesSz cx="6858000" cy="9144000"/>
@@ -4007,7 +4008,7 @@
               </a:defRPr>
             </a:pPr>
             <a:r>
-              <a:t>10/32</a:t>
+              <a:t>10/33</a:t>
             </a:r>
           </a:p>
         </p:txBody>
@@ -4292,7 +4293,7 @@
               </a:defRPr>
             </a:pPr>
             <a:r>
-              <a:t>11/32</a:t>
+              <a:t>11/33</a:t>
             </a:r>
           </a:p>
         </p:txBody>
@@ -5042,7 +5043,7 @@
               </a:defRPr>
             </a:pPr>
             <a:r>
-              <a:t>12/32</a:t>
+              <a:t>12/33</a:t>
             </a:r>
           </a:p>
         </p:txBody>
@@ -5963,7 +5964,7 @@
               </a:defRPr>
             </a:pPr>
             <a:r>
-              <a:t>13/32</a:t>
+              <a:t>13/33</a:t>
             </a:r>
           </a:p>
         </p:txBody>
@@ -7180,7 +7181,7 @@
               </a:defRPr>
             </a:pPr>
             <a:r>
-              <a:t>14/32</a:t>
+              <a:t>14/33</a:t>
             </a:r>
           </a:p>
         </p:txBody>
@@ -7577,7 +7578,7 @@
               </a:defRPr>
             </a:pPr>
             <a:r>
-              <a:t>15/32</a:t>
+              <a:t>15/33</a:t>
             </a:r>
           </a:p>
         </p:txBody>
@@ -7862,7 +7863,7 @@
               </a:defRPr>
             </a:pPr>
             <a:r>
-              <a:t>16/32</a:t>
+              <a:t>16/33</a:t>
             </a:r>
           </a:p>
         </p:txBody>
@@ -8802,7 +8803,7 @@
               </a:defRPr>
             </a:pPr>
             <a:r>
-              <a:t>17/32</a:t>
+              <a:t>17/33</a:t>
             </a:r>
           </a:p>
         </p:txBody>
@@ -9498,7 +9499,7 @@
               </a:defRPr>
             </a:pPr>
             <a:r>
-              <a:t>18/32</a:t>
+              <a:t>18/33</a:t>
             </a:r>
           </a:p>
         </p:txBody>
@@ -9783,7 +9784,7 @@
               </a:defRPr>
             </a:pPr>
             <a:r>
-              <a:t>19/32</a:t>
+              <a:t>19/33</a:t>
             </a:r>
           </a:p>
         </p:txBody>
@@ -10212,7 +10213,7 @@
               </a:defRPr>
             </a:pPr>
             <a:r>
-              <a:t>2/32</a:t>
+              <a:t>2/33</a:t>
             </a:r>
           </a:p>
         </p:txBody>
@@ -10554,7 +10555,7 @@
               </a:defRPr>
             </a:pPr>
             <a:r>
-              <a:t>4-bit NF4 量化加载 Qwen3.5-4B/9B、Gemma-4-E4B</a:t>
+              <a:t>4-bit 量化加载 Qwen3.5-4B/9B、Gemma-4-E4B</a:t>
             </a:r>
           </a:p>
           <a:p>
@@ -10586,7 +10587,7 @@
               </a:defRPr>
             </a:pPr>
             <a:r>
-              <a:t>RTX 5060 8GB 上 Qwen3.5-4B 约 7s/帧</a:t>
+              <a:t>RTX 5060 8GB 上 Qwen3.5-4B 约 7s/帧，Gemma-4-E4B 约 7.8s/帧</a:t>
             </a:r>
           </a:p>
           <a:p>
@@ -10602,7 +10603,7 @@
               </a:defRPr>
             </a:pPr>
             <a:r>
-              <a:t>gemma-4-E4B 格式最稳定，延迟约 4.4s</a:t>
+              <a:t>Gemma-4-E4B 视觉摘要比 Qwen3.5-4B 更稳定</a:t>
             </a:r>
           </a:p>
         </p:txBody>
@@ -10724,7 +10725,7 @@
               </a:defRPr>
             </a:pPr>
             <a:r>
-              <a:t>当前问题是什么？</a:t>
+              <a:t>视觉上下文有没有用？</a:t>
             </a:r>
           </a:p>
         </p:txBody>
@@ -10763,7 +10764,7 @@
               </a:defRPr>
             </a:pPr>
             <a:r>
-              <a:t>默认模型视觉摘要不稳定</a:t>
+              <a:t>Qwen3.5-4B：text-only 5/9，with-visual 3/9</a:t>
             </a:r>
           </a:p>
           <a:p>
@@ -10779,7 +10780,7 @@
               </a:defRPr>
             </a:pPr>
             <a:r>
-              <a:t>有时会输出大量 chain-of-thought 草稿</a:t>
+              <a:t>Gemma-4-E4B：text-only 3/9，with-visual 5/9</a:t>
             </a:r>
           </a:p>
           <a:p>
@@ -10795,7 +10796,7 @@
               </a:defRPr>
             </a:pPr>
             <a:r>
-              <a:t>有时会截断，导致云端策略方向错误</a:t>
+              <a:t>说明模型选对很重要，视觉摘要能帮云端纠偏</a:t>
             </a:r>
           </a:p>
           <a:p>
@@ -10811,7 +10812,7 @@
               </a:defRPr>
             </a:pPr>
             <a:r>
-              <a:t>text-only 反而比加 VLM 上下文更稳</a:t>
+              <a:t>下一步：QLoRA 微调，输出结构化视觉上下文</a:t>
             </a:r>
           </a:p>
         </p:txBody>
@@ -10865,7 +10866,7 @@
               </a:defRPr>
             </a:pPr>
             <a:r>
-              <a:t>结论：本地 VLM 可以跑，但默认模型还不足以提升云端策略质量。</a:t>
+              <a:t>结论：本地 VLM 可以跑，但默认模型还不足以稳定提升云端策略质量。</a:t>
             </a:r>
           </a:p>
           <a:p>
@@ -11010,7 +11011,7 @@
               </a:defRPr>
             </a:pPr>
             <a:r>
-              <a:t>20/32</a:t>
+              <a:t>20/33</a:t>
             </a:r>
           </a:p>
         </p:txBody>
@@ -11295,7 +11296,7 @@
               </a:defRPr>
             </a:pPr>
             <a:r>
-              <a:t>21/32</a:t>
+              <a:t>21/33</a:t>
             </a:r>
           </a:p>
         </p:txBody>
@@ -12113,7 +12114,7 @@
               </a:defRPr>
             </a:pPr>
             <a:r>
-              <a:t>22/32</a:t>
+              <a:t>22/33</a:t>
             </a:r>
           </a:p>
         </p:txBody>
@@ -12687,7 +12688,7 @@
               </a:defRPr>
             </a:pPr>
             <a:r>
-              <a:t>23/32</a:t>
+              <a:t>23/33</a:t>
             </a:r>
           </a:p>
         </p:txBody>
@@ -12947,7 +12948,7 @@
           <a:lstStyle/>
           <a:p>
             <a:pPr algn="l">
-              <a:defRPr sz="1600" b="0">
+              <a:defRPr sz="1500" b="0">
                 <a:solidFill>
                   <a:srgbClr val="1E2933"/>
                 </a:solidFill>
@@ -12955,7 +12956,7 @@
               </a:defRPr>
             </a:pPr>
             <a:r>
-              <a:t>multi-bus-memory 在 00461/00483/00522 稳定 0.300；B 类 tap-only 中 8/15 达 0.300。</a:t>
+              <a:t>multi-bus-memory 在 representative subset 上 mean composite 0.275，5/6 游戏优于或持平 rule。</a:t>
             </a:r>
           </a:p>
         </p:txBody>
@@ -12968,7 +12969,7 @@
         </p:nvSpPr>
         <p:spPr>
           <a:xfrm>
-            <a:off x="685800" y="2286000"/>
+            <a:off x="685800" y="2103120"/>
             <a:ext cx="1188720" cy="384048"/>
           </a:xfrm>
           <a:prstGeom prst="roundRect">
@@ -13019,7 +13020,7 @@
         </p:nvSpPr>
         <p:spPr>
           <a:xfrm>
-            <a:off x="2011680" y="2286000"/>
+            <a:off x="2011680" y="2103120"/>
             <a:ext cx="9601200" cy="822960"/>
           </a:xfrm>
           <a:prstGeom prst="rect">
@@ -13034,7 +13035,7 @@
           <a:lstStyle/>
           <a:p>
             <a:pPr algn="l">
-              <a:defRPr sz="1600" b="0">
+              <a:defRPr sz="1500" b="0">
                 <a:solidFill>
                   <a:srgbClr val="1E2933"/>
                 </a:solidFill>
@@ -13042,7 +13043,7 @@
               </a:defRPr>
             </a:pPr>
             <a:r>
-              <a:t>L2 code-file 更新在 qwen/kimi/xiaomi 均成功，云端模型确实能改持久化规则旋钮。</a:t>
+              <a:t>L2 code-file 更新在 qwen/kimi/xiaomi/opencodego 均成功，云端模型确实能改持久化规则旋钮。</a:t>
             </a:r>
           </a:p>
         </p:txBody>
@@ -13055,14 +13056,14 @@
         </p:nvSpPr>
         <p:spPr>
           <a:xfrm>
-            <a:off x="685800" y="3246120"/>
+            <a:off x="685800" y="2880360"/>
             <a:ext cx="1188720" cy="384048"/>
           </a:xfrm>
           <a:prstGeom prst="roundRect">
             <a:avLst/>
           </a:prstGeom>
           <a:solidFill>
-            <a:srgbClr val="F4B400"/>
+            <a:srgbClr val="28A745"/>
           </a:solidFill>
           <a:ln/>
         </p:spPr>
@@ -13093,7 +13094,7 @@
               </a:defRPr>
             </a:pPr>
             <a:r>
-              <a:t>⚠️ 待优化</a:t>
+              <a:t>✅ 有效</a:t>
             </a:r>
           </a:p>
         </p:txBody>
@@ -13106,7 +13107,7 @@
         </p:nvSpPr>
         <p:spPr>
           <a:xfrm>
-            <a:off x="2011680" y="3246120"/>
+            <a:off x="2011680" y="2880360"/>
             <a:ext cx="9601200" cy="822960"/>
           </a:xfrm>
           <a:prstGeom prst="rect">
@@ -13121,7 +13122,7 @@
           <a:lstStyle/>
           <a:p>
             <a:pPr algn="l">
-              <a:defRPr sz="1600" b="0">
+              <a:defRPr sz="1500" b="0">
                 <a:solidFill>
                   <a:srgbClr val="1E2933"/>
                 </a:solidFill>
@@ -13129,7 +13130,7 @@
               </a:defRPr>
             </a:pPr>
             <a:r>
-              <a:t>hierarchical 模式 activity=0：L2 输出被思考链截断，L1 本地 VLM 未启动。</a:t>
+              <a:t>Gemma-4-E4B 视觉上下文让云端动作匹配从 3/9 提升到 5/9，本地 VLM 有潜力。</a:t>
             </a:r>
           </a:p>
         </p:txBody>
@@ -13142,7 +13143,7 @@
         </p:nvSpPr>
         <p:spPr>
           <a:xfrm>
-            <a:off x="685800" y="4206240"/>
+            <a:off x="685800" y="3657600"/>
             <a:ext cx="1188720" cy="384048"/>
           </a:xfrm>
           <a:prstGeom prst="roundRect">
@@ -13193,7 +13194,7 @@
         </p:nvSpPr>
         <p:spPr>
           <a:xfrm>
-            <a:off x="2011680" y="4206240"/>
+            <a:off x="2011680" y="3657600"/>
             <a:ext cx="9601200" cy="822960"/>
           </a:xfrm>
           <a:prstGeom prst="rect">
@@ -13208,7 +13209,7 @@
           <a:lstStyle/>
           <a:p>
             <a:pPr algn="l">
-              <a:defRPr sz="1600" b="0">
+              <a:defRPr sz="1500" b="0">
                 <a:solidFill>
                   <a:srgbClr val="1E2933"/>
                 </a:solidFill>
@@ -13216,7 +13217,7 @@
               </a:defRPr>
             </a:pPr>
             <a:r>
-              <a:t>本地 VLM 默认模型不稳定，有时会带偏云端方向，需要 QLoRA 微调。</a:t>
+              <a:t>OpenCodeGo / MiMo / Kimi 直接做 gameplay 动作时大量空返回或 fallback，云端不适合逐帧控制。</a:t>
             </a:r>
           </a:p>
         </p:txBody>
@@ -13229,14 +13230,14 @@
         </p:nvSpPr>
         <p:spPr>
           <a:xfrm>
-            <a:off x="685800" y="5166360"/>
+            <a:off x="685800" y="4434840"/>
             <a:ext cx="1188720" cy="384048"/>
           </a:xfrm>
           <a:prstGeom prst="roundRect">
             <a:avLst/>
           </a:prstGeom>
           <a:solidFill>
-            <a:srgbClr val="0096C7"/>
+            <a:srgbClr val="F4B400"/>
           </a:solidFill>
           <a:ln/>
         </p:spPr>
@@ -13267,7 +13268,7 @@
               </a:defRPr>
             </a:pPr>
             <a:r>
-              <a:t>📌 方向</a:t>
+              <a:t>⚠️ 待优化</a:t>
             </a:r>
           </a:p>
         </p:txBody>
@@ -13280,7 +13281,7 @@
         </p:nvSpPr>
         <p:spPr>
           <a:xfrm>
-            <a:off x="2011680" y="5166360"/>
+            <a:off x="2011680" y="4434840"/>
             <a:ext cx="9601200" cy="822960"/>
           </a:xfrm>
           <a:prstGeom prst="rect">
@@ -13295,7 +13296,7 @@
           <a:lstStyle/>
           <a:p>
             <a:pPr algn="l">
-              <a:defRPr sz="1600" b="0">
+              <a:defRPr sz="1500" b="0">
                 <a:solidFill>
                   <a:srgbClr val="1E2933"/>
                 </a:solidFill>
@@ -13303,23 +13304,23 @@
               </a:defRPr>
             </a:pPr>
             <a:r>
-              <a:t>把 L2 输出从抽象 plan 改成目标名称队列，让 L0 用 probe 映射坐标；本地 VLM 只做证据。</a:t>
-            </a:r>
-          </a:p>
-        </p:txBody>
-      </p:sp>
-      <p:sp>
-        <p:nvSpPr>
-          <p:cNvPr id="16" name="Rectangle 15"/>
+              <a:t>SSD_00483P01 的 multi-bus activity=0，driver/profile 需要单独诊断。</a:t>
+            </a:r>
+          </a:p>
+        </p:txBody>
+      </p:sp>
+      <p:sp>
+        <p:nvSpPr>
+          <p:cNvPr id="16" name="Rounded Rectangle 15"/>
           <p:cNvSpPr/>
           <p:nvPr/>
         </p:nvSpPr>
         <p:spPr>
           <a:xfrm>
-            <a:off x="0" y="6537960"/>
-            <a:ext cx="12191695" cy="18288"/>
-          </a:xfrm>
-          <a:prstGeom prst="rect">
+            <a:off x="685800" y="5212080"/>
+            <a:ext cx="1188720" cy="384048"/>
+          </a:xfrm>
+          <a:prstGeom prst="roundRect">
             <a:avLst/>
           </a:prstGeom>
           <a:solidFill>
@@ -13345,7 +13346,17 @@
           <a:bodyPr rtlCol="0" anchor="ctr"/>
           <a:lstStyle/>
           <a:p>
-            <a:pPr algn="ctr"/>
+            <a:pPr algn="ctr">
+              <a:defRPr sz="1200" b="1">
+                <a:solidFill>
+                  <a:srgbClr val="F3F6F9"/>
+                </a:solidFill>
+                <a:latin typeface="Microsoft YaHei"/>
+              </a:defRPr>
+            </a:pPr>
+            <a:r>
+              <a:t>📌 方向</a:t>
+            </a:r>
           </a:p>
         </p:txBody>
       </p:sp>
@@ -13357,8 +13368,8 @@
         </p:nvSpPr>
         <p:spPr>
           <a:xfrm>
-            <a:off x="457200" y="6583680"/>
-            <a:ext cx="3657600" cy="228600"/>
+            <a:off x="2011680" y="5212080"/>
+            <a:ext cx="9601200" cy="822960"/>
           </a:xfrm>
           <a:prstGeom prst="rect">
             <a:avLst/>
@@ -13372,29 +13383,70 @@
           <a:lstStyle/>
           <a:p>
             <a:pPr algn="l">
-              <a:defRPr sz="1000" b="0">
-                <a:solidFill>
-                  <a:srgbClr val="6C757D"/>
-                </a:solidFill>
-                <a:latin typeface="Microsoft YaHei"/>
-              </a:defRPr>
-            </a:pPr>
-            <a:r>
-              <a:t>smallgameagent · LLM/VLM + 规则驱动</a:t>
-            </a:r>
-          </a:p>
-        </p:txBody>
-      </p:sp>
-      <p:sp>
-        <p:nvSpPr>
-          <p:cNvPr id="18" name="TextBox 17"/>
+              <a:defRPr sz="1500" b="0">
+                <a:solidFill>
+                  <a:srgbClr val="1E2933"/>
+                </a:solidFill>
+                <a:latin typeface="Microsoft YaHei"/>
+              </a:defRPr>
+            </a:pPr>
+            <a:r>
+              <a:t>把云端放在 L2 做规划与规则更新，L0 规则负责执行，L1 VLM 只做视觉证据。</a:t>
+            </a:r>
+          </a:p>
+        </p:txBody>
+      </p:sp>
+      <p:sp>
+        <p:nvSpPr>
+          <p:cNvPr id="18" name="Rectangle 17"/>
+          <p:cNvSpPr/>
+          <p:nvPr/>
+        </p:nvSpPr>
+        <p:spPr>
+          <a:xfrm>
+            <a:off x="0" y="6537960"/>
+            <a:ext cx="12191695" cy="18288"/>
+          </a:xfrm>
+          <a:prstGeom prst="rect">
+            <a:avLst/>
+          </a:prstGeom>
+          <a:solidFill>
+            <a:srgbClr val="0096C7"/>
+          </a:solidFill>
+          <a:ln/>
+        </p:spPr>
+        <p:style>
+          <a:lnRef idx="1">
+            <a:schemeClr val="accent1"/>
+          </a:lnRef>
+          <a:fillRef idx="3">
+            <a:schemeClr val="accent1"/>
+          </a:fillRef>
+          <a:effectRef idx="2">
+            <a:schemeClr val="accent1"/>
+          </a:effectRef>
+          <a:fontRef idx="minor">
+            <a:schemeClr val="lt1"/>
+          </a:fontRef>
+        </p:style>
+        <p:txBody>
+          <a:bodyPr rtlCol="0" anchor="ctr"/>
+          <a:lstStyle/>
+          <a:p>
+            <a:pPr algn="ctr"/>
+          </a:p>
+        </p:txBody>
+      </p:sp>
+      <p:sp>
+        <p:nvSpPr>
+          <p:cNvPr id="19" name="TextBox 18"/>
           <p:cNvSpPr txBox="1"/>
           <p:nvPr/>
         </p:nvSpPr>
         <p:spPr>
           <a:xfrm>
-            <a:off x="10789920" y="6583680"/>
-            <a:ext cx="914400" cy="228600"/>
+            <a:off x="457200" y="6583680"/>
+            <a:ext cx="3657600" cy="228600"/>
           </a:xfrm>
           <a:prstGeom prst="rect">
             <a:avLst/>
@@ -13407,6 +13459,42 @@
           </a:bodyPr>
           <a:lstStyle/>
           <a:p>
+            <a:pPr algn="l">
+              <a:defRPr sz="1000" b="0">
+                <a:solidFill>
+                  <a:srgbClr val="6C757D"/>
+                </a:solidFill>
+                <a:latin typeface="Microsoft YaHei"/>
+              </a:defRPr>
+            </a:pPr>
+            <a:r>
+              <a:t>smallgameagent · LLM/VLM + 规则驱动</a:t>
+            </a:r>
+          </a:p>
+        </p:txBody>
+      </p:sp>
+      <p:sp>
+        <p:nvSpPr>
+          <p:cNvPr id="20" name="TextBox 19"/>
+          <p:cNvSpPr txBox="1"/>
+          <p:nvPr/>
+        </p:nvSpPr>
+        <p:spPr>
+          <a:xfrm>
+            <a:off x="10789920" y="6583680"/>
+            <a:ext cx="914400" cy="228600"/>
+          </a:xfrm>
+          <a:prstGeom prst="rect">
+            <a:avLst/>
+          </a:prstGeom>
+          <a:noFill/>
+        </p:spPr>
+        <p:txBody>
+          <a:bodyPr wrap="none">
+            <a:spAutoFit/>
+          </a:bodyPr>
+          <a:lstStyle/>
+          <a:p>
             <a:pPr algn="r">
               <a:defRPr sz="1000" b="0">
                 <a:solidFill>
@@ -13416,7 +13504,7 @@
               </a:defRPr>
             </a:pPr>
             <a:r>
-              <a:t>24/32</a:t>
+              <a:t>24/33</a:t>
             </a:r>
           </a:p>
         </p:txBody>
@@ -13448,7 +13536,7 @@
         <p:spPr>
           <a:xfrm>
             <a:off x="0" y="0"/>
-            <a:ext cx="12191695" cy="6858000"/>
+            <a:ext cx="12191695" cy="960120"/>
           </a:xfrm>
           <a:prstGeom prst="rect">
             <a:avLst/>
@@ -13488,8 +13576,8 @@
         </p:nvSpPr>
         <p:spPr>
           <a:xfrm>
-            <a:off x="548640" y="1645920"/>
-            <a:ext cx="2743200" cy="1828800"/>
+            <a:off x="457200" y="228600"/>
+            <a:ext cx="11247120" cy="548640"/>
           </a:xfrm>
           <a:prstGeom prst="rect">
             <a:avLst/>
@@ -13503,43 +13591,7 @@
           <a:lstStyle/>
           <a:p>
             <a:pPr algn="l">
-              <a:defRPr sz="12000" b="1">
-                <a:solidFill>
-                  <a:srgbClr val="333DA0"/>
-                </a:solidFill>
-                <a:latin typeface="Microsoft YaHei"/>
-              </a:defRPr>
-            </a:pPr>
-            <a:r>
-              <a:t>08</a:t>
-            </a:r>
-          </a:p>
-        </p:txBody>
-      </p:sp>
-      <p:sp>
-        <p:nvSpPr>
-          <p:cNvPr id="4" name="TextBox 3"/>
-          <p:cNvSpPr txBox="1"/>
-          <p:nvPr/>
-        </p:nvSpPr>
-        <p:spPr>
-          <a:xfrm>
-            <a:off x="548640" y="2834640"/>
-            <a:ext cx="11064240" cy="1097280"/>
-          </a:xfrm>
-          <a:prstGeom prst="rect">
-            <a:avLst/>
-          </a:prstGeom>
-          <a:noFill/>
-        </p:spPr>
-        <p:txBody>
-          <a:bodyPr wrap="none">
-            <a:spAutoFit/>
-          </a:bodyPr>
-          <a:lstStyle/>
-          <a:p>
-            <a:pPr algn="l">
-              <a:defRPr sz="4400" b="1">
+              <a:defRPr sz="3000" b="1">
                 <a:solidFill>
                   <a:srgbClr val="F3F6F9"/>
                 </a:solidFill>
@@ -13547,27 +13599,27 @@
               </a:defRPr>
             </a:pPr>
             <a:r>
-              <a:t>训练数据管线</a:t>
-            </a:r>
-          </a:p>
-        </p:txBody>
-      </p:sp>
-      <p:sp>
-        <p:nvSpPr>
-          <p:cNvPr id="5" name="Rectangle 4"/>
+              <a:t>Representative Subset：6 游戏在线跑测</a:t>
+            </a:r>
+          </a:p>
+        </p:txBody>
+      </p:sp>
+      <p:sp>
+        <p:nvSpPr>
+          <p:cNvPr id="4" name="Rectangle 3"/>
           <p:cNvSpPr/>
           <p:nvPr/>
         </p:nvSpPr>
         <p:spPr>
           <a:xfrm>
-            <a:off x="548640" y="4023360"/>
-            <a:ext cx="1828800" cy="73152"/>
+            <a:off x="0" y="960120"/>
+            <a:ext cx="164592" cy="5897880"/>
           </a:xfrm>
           <a:prstGeom prst="rect">
             <a:avLst/>
           </a:prstGeom>
           <a:solidFill>
-            <a:srgbClr val="FF6B35"/>
+            <a:srgbClr val="0096C7"/>
           </a:solidFill>
           <a:ln/>
         </p:spPr>
@@ -13595,22 +13647,26 @@
       </p:sp>
       <p:sp>
         <p:nvSpPr>
-          <p:cNvPr id="6" name="Rectangle 5"/>
+          <p:cNvPr id="5" name="Rectangle 4"/>
           <p:cNvSpPr/>
           <p:nvPr/>
         </p:nvSpPr>
         <p:spPr>
           <a:xfrm>
-            <a:off x="0" y="6537960"/>
-            <a:ext cx="12191695" cy="18288"/>
+            <a:off x="320040" y="1078992"/>
+            <a:ext cx="11548872" cy="5349240"/>
           </a:xfrm>
           <a:prstGeom prst="rect">
             <a:avLst/>
           </a:prstGeom>
           <a:solidFill>
-            <a:srgbClr val="0096C7"/>
+            <a:srgbClr val="FFFFFF"/>
           </a:solidFill>
-          <a:ln/>
+          <a:ln w="12700">
+            <a:solidFill>
+              <a:srgbClr val="E1E5E9"/>
+            </a:solidFill>
+          </a:ln>
         </p:spPr>
         <p:style>
           <a:lnRef idx="1">
@@ -13634,9 +13690,829 @@
           </a:p>
         </p:txBody>
       </p:sp>
-      <p:sp>
-        <p:nvSpPr>
-          <p:cNvPr id="7" name="TextBox 6"/>
+      <p:graphicFrame>
+        <p:nvGraphicFramePr>
+          <p:cNvPr id="6" name="Table 5"/>
+          <p:cNvGraphicFramePr>
+            <a:graphicFrameLocks noGrp="1"/>
+          </p:cNvGraphicFramePr>
+          <p:nvPr/>
+        </p:nvGraphicFramePr>
+        <p:xfrm>
+          <a:off x="594360" y="1325880"/>
+          <a:ext cx="11247120" cy="4389120"/>
+        </p:xfrm>
+        <a:graphic>
+          <a:graphicData uri="http://schemas.openxmlformats.org/drawingml/2006/table">
+            <a:tbl>
+              <a:tblPr firstRow="1" bandRow="1">
+                <a:tableStyleId>{5C22544A-7EE6-4342-B048-85BDC9FD1C3A}</a:tableStyleId>
+              </a:tblPr>
+              <a:tblGrid>
+                <a:gridCol w="2249424"/>
+                <a:gridCol w="2249424"/>
+                <a:gridCol w="2249424"/>
+                <a:gridCol w="2249424"/>
+                <a:gridCol w="2249424"/>
+              </a:tblGrid>
+              <a:tr h="627017">
+                <a:tc>
+                  <a:txBody>
+                    <a:bodyPr/>
+                    <a:lstStyle/>
+                    <a:p>
+                      <a:pPr algn="ctr">
+                        <a:defRPr sz="1200" b="1">
+                          <a:solidFill>
+                            <a:srgbClr val="F3F6F9"/>
+                          </a:solidFill>
+                        </a:defRPr>
+                      </a:pPr>
+                      <a:r>
+                        <a:t>游戏</a:t>
+                      </a:r>
+                    </a:p>
+                  </a:txBody>
+                  <a:tcPr>
+                    <a:solidFill>
+                      <a:srgbClr val="1A237E"/>
+                    </a:solidFill>
+                  </a:tcPr>
+                </a:tc>
+                <a:tc>
+                  <a:txBody>
+                    <a:bodyPr/>
+                    <a:lstStyle/>
+                    <a:p>
+                      <a:pPr algn="ctr">
+                        <a:defRPr sz="1200" b="1">
+                          <a:solidFill>
+                            <a:srgbClr val="F3F6F9"/>
+                          </a:solidFill>
+                        </a:defRPr>
+                      </a:pPr>
+                      <a:r>
+                        <a:t>类型</a:t>
+                      </a:r>
+                    </a:p>
+                  </a:txBody>
+                  <a:tcPr>
+                    <a:solidFill>
+                      <a:srgbClr val="1A237E"/>
+                    </a:solidFill>
+                  </a:tcPr>
+                </a:tc>
+                <a:tc>
+                  <a:txBody>
+                    <a:bodyPr/>
+                    <a:lstStyle/>
+                    <a:p>
+                      <a:pPr algn="ctr">
+                        <a:defRPr sz="1200" b="1">
+                          <a:solidFill>
+                            <a:srgbClr val="F3F6F9"/>
+                          </a:solidFill>
+                        </a:defRPr>
+                      </a:pPr>
+                      <a:r>
+                        <a:t>rule</a:t>
+                      </a:r>
+                    </a:p>
+                  </a:txBody>
+                  <a:tcPr>
+                    <a:solidFill>
+                      <a:srgbClr val="1A237E"/>
+                    </a:solidFill>
+                  </a:tcPr>
+                </a:tc>
+                <a:tc>
+                  <a:txBody>
+                    <a:bodyPr/>
+                    <a:lstStyle/>
+                    <a:p>
+                      <a:pPr algn="ctr">
+                        <a:defRPr sz="1200" b="1">
+                          <a:solidFill>
+                            <a:srgbClr val="F3F6F9"/>
+                          </a:solidFill>
+                        </a:defRPr>
+                      </a:pPr>
+                      <a:r>
+                        <a:t>multi-bus</a:t>
+                      </a:r>
+                    </a:p>
+                  </a:txBody>
+                  <a:tcPr>
+                    <a:solidFill>
+                      <a:srgbClr val="1A237E"/>
+                    </a:solidFill>
+                  </a:tcPr>
+                </a:tc>
+                <a:tc>
+                  <a:txBody>
+                    <a:bodyPr/>
+                    <a:lstStyle/>
+                    <a:p>
+                      <a:pPr algn="ctr">
+                        <a:defRPr sz="1200" b="1">
+                          <a:solidFill>
+                            <a:srgbClr val="F3F6F9"/>
+                          </a:solidFill>
+                        </a:defRPr>
+                      </a:pPr>
+                      <a:r>
+                        <a:t>multi-bus-memory</a:t>
+                      </a:r>
+                    </a:p>
+                  </a:txBody>
+                  <a:tcPr>
+                    <a:solidFill>
+                      <a:srgbClr val="1A237E"/>
+                    </a:solidFill>
+                  </a:tcPr>
+                </a:tc>
+              </a:tr>
+              <a:tr h="627017">
+                <a:tc>
+                  <a:txBody>
+                    <a:bodyPr/>
+                    <a:lstStyle/>
+                    <a:p>
+                      <a:pPr algn="ctr">
+                        <a:defRPr sz="1100">
+                          <a:solidFill>
+                            <a:srgbClr val="1E2933"/>
+                          </a:solidFill>
+                        </a:defRPr>
+                      </a:pPr>
+                      <a:r>
+                        <a:t>SSD_00461P01 塔防</a:t>
+                      </a:r>
+                    </a:p>
+                  </a:txBody>
+                  <a:tcPr/>
+                </a:tc>
+                <a:tc>
+                  <a:txBody>
+                    <a:bodyPr/>
+                    <a:lstStyle/>
+                    <a:p>
+                      <a:pPr algn="ctr">
+                        <a:defRPr sz="1100">
+                          <a:solidFill>
+                            <a:srgbClr val="1E2933"/>
+                          </a:solidFill>
+                        </a:defRPr>
+                      </a:pPr>
+                      <a:r>
+                        <a:t>A</a:t>
+                      </a:r>
+                    </a:p>
+                  </a:txBody>
+                  <a:tcPr/>
+                </a:tc>
+                <a:tc>
+                  <a:txBody>
+                    <a:bodyPr/>
+                    <a:lstStyle/>
+                    <a:p>
+                      <a:pPr algn="ctr">
+                        <a:defRPr sz="1100">
+                          <a:solidFill>
+                            <a:srgbClr val="1E2933"/>
+                          </a:solidFill>
+                        </a:defRPr>
+                      </a:pPr>
+                      <a:r>
+                        <a:t>0.149</a:t>
+                      </a:r>
+                    </a:p>
+                  </a:txBody>
+                  <a:tcPr/>
+                </a:tc>
+                <a:tc>
+                  <a:txBody>
+                    <a:bodyPr/>
+                    <a:lstStyle/>
+                    <a:p>
+                      <a:pPr algn="ctr">
+                        <a:defRPr sz="1100">
+                          <a:solidFill>
+                            <a:srgbClr val="1E2933"/>
+                          </a:solidFill>
+                        </a:defRPr>
+                      </a:pPr>
+                      <a:r>
+                        <a:t>0.300</a:t>
+                      </a:r>
+                    </a:p>
+                  </a:txBody>
+                  <a:tcPr/>
+                </a:tc>
+                <a:tc>
+                  <a:txBody>
+                    <a:bodyPr/>
+                    <a:lstStyle/>
+                    <a:p>
+                      <a:pPr algn="ctr">
+                        <a:defRPr sz="1100">
+                          <a:solidFill>
+                            <a:srgbClr val="1E2933"/>
+                          </a:solidFill>
+                        </a:defRPr>
+                      </a:pPr>
+                      <a:r>
+                        <a:t>0.300</a:t>
+                      </a:r>
+                    </a:p>
+                  </a:txBody>
+                  <a:tcPr/>
+                </a:tc>
+              </a:tr>
+              <a:tr h="627017">
+                <a:tc>
+                  <a:txBody>
+                    <a:bodyPr/>
+                    <a:lstStyle/>
+                    <a:p>
+                      <a:pPr algn="ctr">
+                        <a:defRPr sz="1100">
+                          <a:solidFill>
+                            <a:srgbClr val="1E2933"/>
+                          </a:solidFill>
+                        </a:defRPr>
+                      </a:pPr>
+                      <a:r>
+                        <a:t>SSD_00483P01 吸沙抽水</a:t>
+                      </a:r>
+                    </a:p>
+                  </a:txBody>
+                  <a:tcPr/>
+                </a:tc>
+                <a:tc>
+                  <a:txBody>
+                    <a:bodyPr/>
+                    <a:lstStyle/>
+                    <a:p>
+                      <a:pPr algn="ctr">
+                        <a:defRPr sz="1100">
+                          <a:solidFill>
+                            <a:srgbClr val="1E2933"/>
+                          </a:solidFill>
+                        </a:defRPr>
+                      </a:pPr>
+                      <a:r>
+                        <a:t>A</a:t>
+                      </a:r>
+                    </a:p>
+                  </a:txBody>
+                  <a:tcPr/>
+                </a:tc>
+                <a:tc>
+                  <a:txBody>
+                    <a:bodyPr/>
+                    <a:lstStyle/>
+                    <a:p>
+                      <a:pPr algn="ctr">
+                        <a:defRPr sz="1100">
+                          <a:solidFill>
+                            <a:srgbClr val="1E2933"/>
+                          </a:solidFill>
+                        </a:defRPr>
+                      </a:pPr>
+                      <a:r>
+                        <a:t>0.184</a:t>
+                      </a:r>
+                    </a:p>
+                  </a:txBody>
+                  <a:tcPr/>
+                </a:tc>
+                <a:tc>
+                  <a:txBody>
+                    <a:bodyPr/>
+                    <a:lstStyle/>
+                    <a:p>
+                      <a:pPr algn="ctr">
+                        <a:defRPr sz="1100">
+                          <a:solidFill>
+                            <a:srgbClr val="1E2933"/>
+                          </a:solidFill>
+                        </a:defRPr>
+                      </a:pPr>
+                      <a:r>
+                        <a:t>0.150</a:t>
+                      </a:r>
+                    </a:p>
+                  </a:txBody>
+                  <a:tcPr/>
+                </a:tc>
+                <a:tc>
+                  <a:txBody>
+                    <a:bodyPr/>
+                    <a:lstStyle/>
+                    <a:p>
+                      <a:pPr algn="ctr">
+                        <a:defRPr sz="1100">
+                          <a:solidFill>
+                            <a:srgbClr val="1E2933"/>
+                          </a:solidFill>
+                        </a:defRPr>
+                      </a:pPr>
+                      <a:r>
+                        <a:t>0.150</a:t>
+                      </a:r>
+                    </a:p>
+                  </a:txBody>
+                  <a:tcPr/>
+                </a:tc>
+              </a:tr>
+              <a:tr h="627017">
+                <a:tc>
+                  <a:txBody>
+                    <a:bodyPr/>
+                    <a:lstStyle/>
+                    <a:p>
+                      <a:pPr algn="ctr">
+                        <a:defRPr sz="1100">
+                          <a:solidFill>
+                            <a:srgbClr val="1E2933"/>
+                          </a:solidFill>
+                        </a:defRPr>
+                      </a:pPr>
+                      <a:r>
+                        <a:t>SSD_00522P02 地下炸矿</a:t>
+                      </a:r>
+                    </a:p>
+                  </a:txBody>
+                  <a:tcPr/>
+                </a:tc>
+                <a:tc>
+                  <a:txBody>
+                    <a:bodyPr/>
+                    <a:lstStyle/>
+                    <a:p>
+                      <a:pPr algn="ctr">
+                        <a:defRPr sz="1100">
+                          <a:solidFill>
+                            <a:srgbClr val="1E2933"/>
+                          </a:solidFill>
+                        </a:defRPr>
+                      </a:pPr>
+                      <a:r>
+                        <a:t>A</a:t>
+                      </a:r>
+                    </a:p>
+                  </a:txBody>
+                  <a:tcPr/>
+                </a:tc>
+                <a:tc>
+                  <a:txBody>
+                    <a:bodyPr/>
+                    <a:lstStyle/>
+                    <a:p>
+                      <a:pPr algn="ctr">
+                        <a:defRPr sz="1100">
+                          <a:solidFill>
+                            <a:srgbClr val="1E2933"/>
+                          </a:solidFill>
+                        </a:defRPr>
+                      </a:pPr>
+                      <a:r>
+                        <a:t>0.215</a:t>
+                      </a:r>
+                    </a:p>
+                  </a:txBody>
+                  <a:tcPr/>
+                </a:tc>
+                <a:tc>
+                  <a:txBody>
+                    <a:bodyPr/>
+                    <a:lstStyle/>
+                    <a:p>
+                      <a:pPr algn="ctr">
+                        <a:defRPr sz="1100">
+                          <a:solidFill>
+                            <a:srgbClr val="1E2933"/>
+                          </a:solidFill>
+                        </a:defRPr>
+                      </a:pPr>
+                      <a:r>
+                        <a:t>0.300</a:t>
+                      </a:r>
+                    </a:p>
+                  </a:txBody>
+                  <a:tcPr/>
+                </a:tc>
+                <a:tc>
+                  <a:txBody>
+                    <a:bodyPr/>
+                    <a:lstStyle/>
+                    <a:p>
+                      <a:pPr algn="ctr">
+                        <a:defRPr sz="1100">
+                          <a:solidFill>
+                            <a:srgbClr val="1E2933"/>
+                          </a:solidFill>
+                        </a:defRPr>
+                      </a:pPr>
+                      <a:r>
+                        <a:t>0.300</a:t>
+                      </a:r>
+                    </a:p>
+                  </a:txBody>
+                  <a:tcPr/>
+                </a:tc>
+              </a:tr>
+              <a:tr h="627017">
+                <a:tc>
+                  <a:txBody>
+                    <a:bodyPr/>
+                    <a:lstStyle/>
+                    <a:p>
+                      <a:pPr algn="ctr">
+                        <a:defRPr sz="1100">
+                          <a:solidFill>
+                            <a:srgbClr val="1E2933"/>
+                          </a:solidFill>
+                        </a:defRPr>
+                      </a:pPr>
+                      <a:r>
+                        <a:t>SSD_00382P01 低坑杀鲨鱼</a:t>
+                      </a:r>
+                    </a:p>
+                  </a:txBody>
+                  <a:tcPr/>
+                </a:tc>
+                <a:tc>
+                  <a:txBody>
+                    <a:bodyPr/>
+                    <a:lstStyle/>
+                    <a:p>
+                      <a:pPr algn="ctr">
+                        <a:defRPr sz="1100">
+                          <a:solidFill>
+                            <a:srgbClr val="1E2933"/>
+                          </a:solidFill>
+                        </a:defRPr>
+                      </a:pPr>
+                      <a:r>
+                        <a:t>B</a:t>
+                      </a:r>
+                    </a:p>
+                  </a:txBody>
+                  <a:tcPr/>
+                </a:tc>
+                <a:tc>
+                  <a:txBody>
+                    <a:bodyPr/>
+                    <a:lstStyle/>
+                    <a:p>
+                      <a:pPr algn="ctr">
+                        <a:defRPr sz="1100">
+                          <a:solidFill>
+                            <a:srgbClr val="1E2933"/>
+                          </a:solidFill>
+                        </a:defRPr>
+                      </a:pPr>
+                      <a:r>
+                        <a:t>0.288</a:t>
+                      </a:r>
+                    </a:p>
+                  </a:txBody>
+                  <a:tcPr/>
+                </a:tc>
+                <a:tc>
+                  <a:txBody>
+                    <a:bodyPr/>
+                    <a:lstStyle/>
+                    <a:p>
+                      <a:pPr algn="ctr">
+                        <a:defRPr sz="1100">
+                          <a:solidFill>
+                            <a:srgbClr val="1E2933"/>
+                          </a:solidFill>
+                        </a:defRPr>
+                      </a:pPr>
+                      <a:r>
+                        <a:t>—</a:t>
+                      </a:r>
+                    </a:p>
+                  </a:txBody>
+                  <a:tcPr/>
+                </a:tc>
+                <a:tc>
+                  <a:txBody>
+                    <a:bodyPr/>
+                    <a:lstStyle/>
+                    <a:p>
+                      <a:pPr algn="ctr">
+                        <a:defRPr sz="1100">
+                          <a:solidFill>
+                            <a:srgbClr val="1E2933"/>
+                          </a:solidFill>
+                        </a:defRPr>
+                      </a:pPr>
+                      <a:r>
+                        <a:t>0.300</a:t>
+                      </a:r>
+                    </a:p>
+                  </a:txBody>
+                  <a:tcPr/>
+                </a:tc>
+              </a:tr>
+              <a:tr h="627017">
+                <a:tc>
+                  <a:txBody>
+                    <a:bodyPr/>
+                    <a:lstStyle/>
+                    <a:p>
+                      <a:pPr algn="ctr">
+                        <a:defRPr sz="1100">
+                          <a:solidFill>
+                            <a:srgbClr val="1E2933"/>
+                          </a:solidFill>
+                        </a:defRPr>
+                      </a:pPr>
+                      <a:r>
+                        <a:t>SSD_00594P02 破石收水</a:t>
+                      </a:r>
+                    </a:p>
+                  </a:txBody>
+                  <a:tcPr/>
+                </a:tc>
+                <a:tc>
+                  <a:txBody>
+                    <a:bodyPr/>
+                    <a:lstStyle/>
+                    <a:p>
+                      <a:pPr algn="ctr">
+                        <a:defRPr sz="1100">
+                          <a:solidFill>
+                            <a:srgbClr val="1E2933"/>
+                          </a:solidFill>
+                        </a:defRPr>
+                      </a:pPr>
+                      <a:r>
+                        <a:t>B</a:t>
+                      </a:r>
+                    </a:p>
+                  </a:txBody>
+                  <a:tcPr/>
+                </a:tc>
+                <a:tc>
+                  <a:txBody>
+                    <a:bodyPr/>
+                    <a:lstStyle/>
+                    <a:p>
+                      <a:pPr algn="ctr">
+                        <a:defRPr sz="1100">
+                          <a:solidFill>
+                            <a:srgbClr val="1E2933"/>
+                          </a:solidFill>
+                        </a:defRPr>
+                      </a:pPr>
+                      <a:r>
+                        <a:t>0.300</a:t>
+                      </a:r>
+                    </a:p>
+                  </a:txBody>
+                  <a:tcPr/>
+                </a:tc>
+                <a:tc>
+                  <a:txBody>
+                    <a:bodyPr/>
+                    <a:lstStyle/>
+                    <a:p>
+                      <a:pPr algn="ctr">
+                        <a:defRPr sz="1100">
+                          <a:solidFill>
+                            <a:srgbClr val="1E2933"/>
+                          </a:solidFill>
+                        </a:defRPr>
+                      </a:pPr>
+                      <a:r>
+                        <a:t>—</a:t>
+                      </a:r>
+                    </a:p>
+                  </a:txBody>
+                  <a:tcPr/>
+                </a:tc>
+                <a:tc>
+                  <a:txBody>
+                    <a:bodyPr/>
+                    <a:lstStyle/>
+                    <a:p>
+                      <a:pPr algn="ctr">
+                        <a:defRPr sz="1100">
+                          <a:solidFill>
+                            <a:srgbClr val="1E2933"/>
+                          </a:solidFill>
+                        </a:defRPr>
+                      </a:pPr>
+                      <a:r>
+                        <a:t>0.300</a:t>
+                      </a:r>
+                    </a:p>
+                  </a:txBody>
+                  <a:tcPr/>
+                </a:tc>
+              </a:tr>
+              <a:tr h="627018">
+                <a:tc>
+                  <a:txBody>
+                    <a:bodyPr/>
+                    <a:lstStyle/>
+                    <a:p>
+                      <a:pPr algn="ctr">
+                        <a:defRPr sz="1100">
+                          <a:solidFill>
+                            <a:srgbClr val="1E2933"/>
+                          </a:solidFill>
+                        </a:defRPr>
+                      </a:pPr>
+                      <a:r>
+                        <a:t>SSD_00742P01 加油小镇</a:t>
+                      </a:r>
+                    </a:p>
+                  </a:txBody>
+                  <a:tcPr/>
+                </a:tc>
+                <a:tc>
+                  <a:txBody>
+                    <a:bodyPr/>
+                    <a:lstStyle/>
+                    <a:p>
+                      <a:pPr algn="ctr">
+                        <a:defRPr sz="1100">
+                          <a:solidFill>
+                            <a:srgbClr val="1E2933"/>
+                          </a:solidFill>
+                        </a:defRPr>
+                      </a:pPr>
+                      <a:r>
+                        <a:t>B</a:t>
+                      </a:r>
+                    </a:p>
+                  </a:txBody>
+                  <a:tcPr/>
+                </a:tc>
+                <a:tc>
+                  <a:txBody>
+                    <a:bodyPr/>
+                    <a:lstStyle/>
+                    <a:p>
+                      <a:pPr algn="ctr">
+                        <a:defRPr sz="1100">
+                          <a:solidFill>
+                            <a:srgbClr val="1E2933"/>
+                          </a:solidFill>
+                        </a:defRPr>
+                      </a:pPr>
+                      <a:r>
+                        <a:t>0.300</a:t>
+                      </a:r>
+                    </a:p>
+                  </a:txBody>
+                  <a:tcPr/>
+                </a:tc>
+                <a:tc>
+                  <a:txBody>
+                    <a:bodyPr/>
+                    <a:lstStyle/>
+                    <a:p>
+                      <a:pPr algn="ctr">
+                        <a:defRPr sz="1100">
+                          <a:solidFill>
+                            <a:srgbClr val="1E2933"/>
+                          </a:solidFill>
+                        </a:defRPr>
+                      </a:pPr>
+                      <a:r>
+                        <a:t>—</a:t>
+                      </a:r>
+                    </a:p>
+                  </a:txBody>
+                  <a:tcPr/>
+                </a:tc>
+                <a:tc>
+                  <a:txBody>
+                    <a:bodyPr/>
+                    <a:lstStyle/>
+                    <a:p>
+                      <a:pPr algn="ctr">
+                        <a:defRPr sz="1100">
+                          <a:solidFill>
+                            <a:srgbClr val="1E2933"/>
+                          </a:solidFill>
+                        </a:defRPr>
+                      </a:pPr>
+                      <a:r>
+                        <a:t>0.300</a:t>
+                      </a:r>
+                    </a:p>
+                  </a:txBody>
+                  <a:tcPr/>
+                </a:tc>
+              </a:tr>
+            </a:tbl>
+          </a:graphicData>
+        </a:graphic>
+      </p:graphicFrame>
+      <p:sp>
+        <p:nvSpPr>
+          <p:cNvPr id="7" name="Rounded Rectangle 6"/>
+          <p:cNvSpPr/>
+          <p:nvPr/>
+        </p:nvSpPr>
+        <p:spPr>
+          <a:xfrm>
+            <a:off x="594360" y="5806440"/>
+            <a:ext cx="11247120" cy="640080"/>
+          </a:xfrm>
+          <a:prstGeom prst="roundRect">
+            <a:avLst/>
+          </a:prstGeom>
+          <a:solidFill>
+            <a:srgbClr val="F3F6F9"/>
+          </a:solidFill>
+          <a:ln/>
+        </p:spPr>
+        <p:style>
+          <a:lnRef idx="1">
+            <a:schemeClr val="accent1"/>
+          </a:lnRef>
+          <a:fillRef idx="3">
+            <a:schemeClr val="accent1"/>
+          </a:fillRef>
+          <a:effectRef idx="2">
+            <a:schemeClr val="accent1"/>
+          </a:effectRef>
+          <a:fontRef idx="minor">
+            <a:schemeClr val="lt1"/>
+          </a:fontRef>
+        </p:style>
+        <p:txBody>
+          <a:bodyPr rtlCol="0" anchor="ctr"/>
+          <a:lstStyle/>
+          <a:p>
+            <a:pPr algn="ctr">
+              <a:defRPr sz="1300" b="0">
+                <a:solidFill>
+                  <a:srgbClr val="1E2933"/>
+                </a:solidFill>
+                <a:latin typeface="Microsoft YaHei"/>
+              </a:defRPr>
+            </a:pPr>
+            <a:r>
+              <a:t>15 runs 全部成功，multi-bus-memory 综合 mean composite 0.275，activity 0.833。唯一例外 00483 需要 driver 诊断。</a:t>
+            </a:r>
+          </a:p>
+        </p:txBody>
+      </p:sp>
+      <p:sp>
+        <p:nvSpPr>
+          <p:cNvPr id="8" name="Rectangle 7"/>
+          <p:cNvSpPr/>
+          <p:nvPr/>
+        </p:nvSpPr>
+        <p:spPr>
+          <a:xfrm>
+            <a:off x="0" y="6537960"/>
+            <a:ext cx="12191695" cy="18288"/>
+          </a:xfrm>
+          <a:prstGeom prst="rect">
+            <a:avLst/>
+          </a:prstGeom>
+          <a:solidFill>
+            <a:srgbClr val="0096C7"/>
+          </a:solidFill>
+          <a:ln/>
+        </p:spPr>
+        <p:style>
+          <a:lnRef idx="1">
+            <a:schemeClr val="accent1"/>
+          </a:lnRef>
+          <a:fillRef idx="3">
+            <a:schemeClr val="accent1"/>
+          </a:fillRef>
+          <a:effectRef idx="2">
+            <a:schemeClr val="accent1"/>
+          </a:effectRef>
+          <a:fontRef idx="minor">
+            <a:schemeClr val="lt1"/>
+          </a:fontRef>
+        </p:style>
+        <p:txBody>
+          <a:bodyPr rtlCol="0" anchor="ctr"/>
+          <a:lstStyle/>
+          <a:p>
+            <a:pPr algn="ctr"/>
+          </a:p>
+        </p:txBody>
+      </p:sp>
+      <p:sp>
+        <p:nvSpPr>
+          <p:cNvPr id="9" name="TextBox 8"/>
           <p:cNvSpPr txBox="1"/>
           <p:nvPr/>
         </p:nvSpPr>
@@ -13672,7 +14548,7 @@
       </p:sp>
       <p:sp>
         <p:nvSpPr>
-          <p:cNvPr id="8" name="TextBox 7"/>
+          <p:cNvPr id="10" name="TextBox 9"/>
           <p:cNvSpPr txBox="1"/>
           <p:nvPr/>
         </p:nvSpPr>
@@ -13701,7 +14577,7 @@
               </a:defRPr>
             </a:pPr>
             <a:r>
-              <a:t>25/32</a:t>
+              <a:t>25/33</a:t>
             </a:r>
           </a:p>
         </p:txBody>
@@ -13733,7 +14609,7 @@
         <p:spPr>
           <a:xfrm>
             <a:off x="0" y="0"/>
-            <a:ext cx="12191695" cy="960120"/>
+            <a:ext cx="12191695" cy="6858000"/>
           </a:xfrm>
           <a:prstGeom prst="rect">
             <a:avLst/>
@@ -13773,8 +14649,8 @@
         </p:nvSpPr>
         <p:spPr>
           <a:xfrm>
-            <a:off x="457200" y="228600"/>
-            <a:ext cx="11247120" cy="548640"/>
+            <a:off x="548640" y="1645920"/>
+            <a:ext cx="2743200" cy="1828800"/>
           </a:xfrm>
           <a:prstGeom prst="rect">
             <a:avLst/>
@@ -13788,7 +14664,43 @@
           <a:lstStyle/>
           <a:p>
             <a:pPr algn="l">
-              <a:defRPr sz="3000" b="1">
+              <a:defRPr sz="12000" b="1">
+                <a:solidFill>
+                  <a:srgbClr val="333DA0"/>
+                </a:solidFill>
+                <a:latin typeface="Microsoft YaHei"/>
+              </a:defRPr>
+            </a:pPr>
+            <a:r>
+              <a:t>08</a:t>
+            </a:r>
+          </a:p>
+        </p:txBody>
+      </p:sp>
+      <p:sp>
+        <p:nvSpPr>
+          <p:cNvPr id="4" name="TextBox 3"/>
+          <p:cNvSpPr txBox="1"/>
+          <p:nvPr/>
+        </p:nvSpPr>
+        <p:spPr>
+          <a:xfrm>
+            <a:off x="548640" y="2834640"/>
+            <a:ext cx="11064240" cy="1097280"/>
+          </a:xfrm>
+          <a:prstGeom prst="rect">
+            <a:avLst/>
+          </a:prstGeom>
+          <a:noFill/>
+        </p:spPr>
+        <p:txBody>
+          <a:bodyPr wrap="none">
+            <a:spAutoFit/>
+          </a:bodyPr>
+          <a:lstStyle/>
+          <a:p>
+            <a:pPr algn="l">
+              <a:defRPr sz="4400" b="1">
                 <a:solidFill>
                   <a:srgbClr val="F3F6F9"/>
                 </a:solidFill>
@@ -13796,21 +14708,21 @@
               </a:defRPr>
             </a:pPr>
             <a:r>
-              <a:t>跑过的轨迹 = 可复用的训练数据</a:t>
-            </a:r>
-          </a:p>
-        </p:txBody>
-      </p:sp>
-      <p:sp>
-        <p:nvSpPr>
-          <p:cNvPr id="4" name="Rectangle 3"/>
+              <a:t>训练数据管线</a:t>
+            </a:r>
+          </a:p>
+        </p:txBody>
+      </p:sp>
+      <p:sp>
+        <p:nvSpPr>
+          <p:cNvPr id="5" name="Rectangle 4"/>
           <p:cNvSpPr/>
           <p:nvPr/>
         </p:nvSpPr>
         <p:spPr>
           <a:xfrm>
-            <a:off x="0" y="960120"/>
-            <a:ext cx="164592" cy="5897880"/>
+            <a:off x="548640" y="4023360"/>
+            <a:ext cx="1828800" cy="73152"/>
           </a:xfrm>
           <a:prstGeom prst="rect">
             <a:avLst/>
@@ -13844,26 +14756,22 @@
       </p:sp>
       <p:sp>
         <p:nvSpPr>
-          <p:cNvPr id="5" name="Rectangle 4"/>
+          <p:cNvPr id="6" name="Rectangle 5"/>
           <p:cNvSpPr/>
           <p:nvPr/>
         </p:nvSpPr>
         <p:spPr>
           <a:xfrm>
-            <a:off x="320040" y="1078992"/>
-            <a:ext cx="11548872" cy="5349240"/>
+            <a:off x="0" y="6537960"/>
+            <a:ext cx="12191695" cy="18288"/>
           </a:xfrm>
           <a:prstGeom prst="rect">
             <a:avLst/>
           </a:prstGeom>
           <a:solidFill>
-            <a:srgbClr val="FFFFFF"/>
+            <a:srgbClr val="0096C7"/>
           </a:solidFill>
-          <a:ln w="12700">
-            <a:solidFill>
-              <a:srgbClr val="E1E5E9"/>
-            </a:solidFill>
-          </a:ln>
+          <a:ln/>
         </p:spPr>
         <p:style>
           <a:lnRef idx="1">
@@ -13889,135 +14797,7 @@
       </p:sp>
       <p:sp>
         <p:nvSpPr>
-          <p:cNvPr id="6" name="TextBox 5"/>
-          <p:cNvSpPr txBox="1"/>
-          <p:nvPr/>
-        </p:nvSpPr>
-        <p:spPr>
-          <a:xfrm>
-            <a:off x="777240" y="1325880"/>
-            <a:ext cx="10789920" cy="5029200"/>
-          </a:xfrm>
-          <a:prstGeom prst="rect">
-            <a:avLst/>
-          </a:prstGeom>
-          <a:noFill/>
-        </p:spPr>
-        <p:txBody>
-          <a:bodyPr wrap="square">
-            <a:spAutoFit/>
-          </a:bodyPr>
-          <a:lstStyle/>
-          <a:p>
-            <a:pPr algn="l">
-              <a:spcAft>
-                <a:spcPts val="1200"/>
-              </a:spcAft>
-              <a:defRPr sz="1800" b="0">
-                <a:solidFill>
-                  <a:srgbClr val="1E2933"/>
-                </a:solidFill>
-                <a:latin typeface="Microsoft YaHei"/>
-              </a:defRPr>
-            </a:pPr>
-            <a:r>
-              <a:t>batch_runner 每步记录 state / action / keyNumbers / reason</a:t>
-            </a:r>
-          </a:p>
-          <a:p>
-            <a:pPr algn="l">
-              <a:spcAft>
-                <a:spcPts val="1200"/>
-              </a:spcAft>
-              <a:defRPr sz="1800" b="0">
-                <a:solidFill>
-                  <a:srgbClr val="1E2933"/>
-                </a:solidFill>
-                <a:latin typeface="Microsoft YaHei"/>
-              </a:defRPr>
-            </a:pPr>
-            <a:r>
-              <a:t>processed_runs_converter 从 22 个游戏的 processed-runs 生成 7 任务样本</a:t>
-            </a:r>
-          </a:p>
-          <a:p>
-            <a:pPr algn="l">
-              <a:spcAft>
-                <a:spcPts val="1200"/>
-              </a:spcAft>
-              <a:defRPr sz="1800" b="0">
-                <a:solidFill>
-                  <a:srgbClr val="1E2933"/>
-                </a:solidFill>
-                <a:latin typeface="Microsoft YaHei"/>
-              </a:defRPr>
-            </a:pPr>
-            <a:r>
-              <a:t>当前数据集：15,083 条样本，覆盖 next_probe_action / information_gain_judgment 等任务</a:t>
-            </a:r>
-          </a:p>
-          <a:p>
-            <a:pPr algn="l">
-              <a:spcAft>
-                <a:spcPts val="1200"/>
-              </a:spcAft>
-              <a:defRPr sz="1800" b="0">
-                <a:solidFill>
-                  <a:srgbClr val="1E2933"/>
-                </a:solidFill>
-                <a:latin typeface="Microsoft YaHei"/>
-              </a:defRPr>
-            </a:pPr>
-            <a:r>
-              <a:t>可直接喂给 Qwen3.5-4B/9B 与 Gemma-4-E4B 的 QLoRA 微调脚本（在 5090 服务器执行）</a:t>
-            </a:r>
-          </a:p>
-        </p:txBody>
-      </p:sp>
-      <p:sp>
-        <p:nvSpPr>
-          <p:cNvPr id="7" name="Rectangle 6"/>
-          <p:cNvSpPr/>
-          <p:nvPr/>
-        </p:nvSpPr>
-        <p:spPr>
-          <a:xfrm>
-            <a:off x="0" y="6537960"/>
-            <a:ext cx="12191695" cy="18288"/>
-          </a:xfrm>
-          <a:prstGeom prst="rect">
-            <a:avLst/>
-          </a:prstGeom>
-          <a:solidFill>
-            <a:srgbClr val="0096C7"/>
-          </a:solidFill>
-          <a:ln/>
-        </p:spPr>
-        <p:style>
-          <a:lnRef idx="1">
-            <a:schemeClr val="accent1"/>
-          </a:lnRef>
-          <a:fillRef idx="3">
-            <a:schemeClr val="accent1"/>
-          </a:fillRef>
-          <a:effectRef idx="2">
-            <a:schemeClr val="accent1"/>
-          </a:effectRef>
-          <a:fontRef idx="minor">
-            <a:schemeClr val="lt1"/>
-          </a:fontRef>
-        </p:style>
-        <p:txBody>
-          <a:bodyPr rtlCol="0" anchor="ctr"/>
-          <a:lstStyle/>
-          <a:p>
-            <a:pPr algn="ctr"/>
-          </a:p>
-        </p:txBody>
-      </p:sp>
-      <p:sp>
-        <p:nvSpPr>
-          <p:cNvPr id="8" name="TextBox 7"/>
+          <p:cNvPr id="7" name="TextBox 6"/>
           <p:cNvSpPr txBox="1"/>
           <p:nvPr/>
         </p:nvSpPr>
@@ -14053,7 +14833,7 @@
       </p:sp>
       <p:sp>
         <p:nvSpPr>
-          <p:cNvPr id="9" name="TextBox 8"/>
+          <p:cNvPr id="8" name="TextBox 7"/>
           <p:cNvSpPr txBox="1"/>
           <p:nvPr/>
         </p:nvSpPr>
@@ -14082,7 +14862,7 @@
               </a:defRPr>
             </a:pPr>
             <a:r>
-              <a:t>26/32</a:t>
+              <a:t>26/33</a:t>
             </a:r>
           </a:p>
         </p:txBody>
@@ -14177,7 +14957,7 @@
               </a:defRPr>
             </a:pPr>
             <a:r>
-              <a:t>游戏覆盖矩阵：22 款游戏已可驱动</a:t>
+              <a:t>跑过的轨迹 = 可复用的训练数据</a:t>
             </a:r>
           </a:p>
         </p:txBody>
@@ -14197,7 +14977,7 @@
             <a:avLst/>
           </a:prstGeom>
           <a:solidFill>
-            <a:srgbClr val="0096C7"/>
+            <a:srgbClr val="FF6B35"/>
           </a:solidFill>
           <a:ln/>
         </p:spPr>
@@ -14270,26 +15050,109 @@
       </p:sp>
       <p:sp>
         <p:nvSpPr>
-          <p:cNvPr id="6" name="Rounded Rectangle 5"/>
+          <p:cNvPr id="6" name="TextBox 5"/>
+          <p:cNvSpPr txBox="1"/>
+          <p:nvPr/>
+        </p:nvSpPr>
+        <p:spPr>
+          <a:xfrm>
+            <a:off x="777240" y="1325880"/>
+            <a:ext cx="10789920" cy="5029200"/>
+          </a:xfrm>
+          <a:prstGeom prst="rect">
+            <a:avLst/>
+          </a:prstGeom>
+          <a:noFill/>
+        </p:spPr>
+        <p:txBody>
+          <a:bodyPr wrap="square">
+            <a:spAutoFit/>
+          </a:bodyPr>
+          <a:lstStyle/>
+          <a:p>
+            <a:pPr algn="l">
+              <a:spcAft>
+                <a:spcPts val="1200"/>
+              </a:spcAft>
+              <a:defRPr sz="1800" b="0">
+                <a:solidFill>
+                  <a:srgbClr val="1E2933"/>
+                </a:solidFill>
+                <a:latin typeface="Microsoft YaHei"/>
+              </a:defRPr>
+            </a:pPr>
+            <a:r>
+              <a:t>batch_runner 每步记录 state / action / keyNumbers / reason</a:t>
+            </a:r>
+          </a:p>
+          <a:p>
+            <a:pPr algn="l">
+              <a:spcAft>
+                <a:spcPts val="1200"/>
+              </a:spcAft>
+              <a:defRPr sz="1800" b="0">
+                <a:solidFill>
+                  <a:srgbClr val="1E2933"/>
+                </a:solidFill>
+                <a:latin typeface="Microsoft YaHei"/>
+              </a:defRPr>
+            </a:pPr>
+            <a:r>
+              <a:t>processed_runs_converter 从 22 个游戏的 processed-runs 生成 7 任务样本</a:t>
+            </a:r>
+          </a:p>
+          <a:p>
+            <a:pPr algn="l">
+              <a:spcAft>
+                <a:spcPts val="1200"/>
+              </a:spcAft>
+              <a:defRPr sz="1800" b="0">
+                <a:solidFill>
+                  <a:srgbClr val="1E2933"/>
+                </a:solidFill>
+                <a:latin typeface="Microsoft YaHei"/>
+              </a:defRPr>
+            </a:pPr>
+            <a:r>
+              <a:t>当前数据集：15,083 条样本，覆盖 next_probe_action / information_gain_judgment 等任务</a:t>
+            </a:r>
+          </a:p>
+          <a:p>
+            <a:pPr algn="l">
+              <a:spcAft>
+                <a:spcPts val="1200"/>
+              </a:spcAft>
+              <a:defRPr sz="1800" b="0">
+                <a:solidFill>
+                  <a:srgbClr val="1E2933"/>
+                </a:solidFill>
+                <a:latin typeface="Microsoft YaHei"/>
+              </a:defRPr>
+            </a:pPr>
+            <a:r>
+              <a:t>可直接喂给 Qwen3.5-4B/9B 与 Gemma-4-E4B 的 QLoRA 微调脚本（在 5090 服务器执行）</a:t>
+            </a:r>
+          </a:p>
+        </p:txBody>
+      </p:sp>
+      <p:sp>
+        <p:nvSpPr>
+          <p:cNvPr id="7" name="Rectangle 6"/>
           <p:cNvSpPr/>
           <p:nvPr/>
         </p:nvSpPr>
         <p:spPr>
           <a:xfrm>
-            <a:off x="594360" y="1371600"/>
-            <a:ext cx="11064240" cy="1920240"/>
-          </a:xfrm>
-          <a:prstGeom prst="roundRect">
+            <a:off x="0" y="6537960"/>
+            <a:ext cx="12191695" cy="18288"/>
+          </a:xfrm>
+          <a:prstGeom prst="rect">
             <a:avLst/>
           </a:prstGeom>
           <a:solidFill>
-            <a:srgbClr val="FFFFFF"/>
+            <a:srgbClr val="0096C7"/>
           </a:solidFill>
-          <a:ln w="25400">
-            <a:solidFill>
-              <a:srgbClr val="1A237E"/>
-            </a:solidFill>
-          </a:ln>
+          <a:ln/>
         </p:spPr>
         <p:style>
           <a:lnRef idx="1">
@@ -14315,65 +15178,14 @@
       </p:sp>
       <p:sp>
         <p:nvSpPr>
-          <p:cNvPr id="7" name="Rounded Rectangle 6"/>
-          <p:cNvSpPr/>
-          <p:nvPr/>
-        </p:nvSpPr>
-        <p:spPr>
-          <a:xfrm>
-            <a:off x="777240" y="1554480"/>
-            <a:ext cx="1645920" cy="411480"/>
-          </a:xfrm>
-          <a:prstGeom prst="roundRect">
-            <a:avLst/>
-          </a:prstGeom>
-          <a:solidFill>
-            <a:srgbClr val="1A237E"/>
-          </a:solidFill>
-          <a:ln/>
-        </p:spPr>
-        <p:style>
-          <a:lnRef idx="1">
-            <a:schemeClr val="accent1"/>
-          </a:lnRef>
-          <a:fillRef idx="3">
-            <a:schemeClr val="accent1"/>
-          </a:fillRef>
-          <a:effectRef idx="2">
-            <a:schemeClr val="accent1"/>
-          </a:effectRef>
-          <a:fontRef idx="minor">
-            <a:schemeClr val="lt1"/>
-          </a:fontRef>
-        </p:style>
-        <p:txBody>
-          <a:bodyPr rtlCol="0" anchor="ctr"/>
-          <a:lstStyle/>
-          <a:p>
-            <a:pPr algn="ctr">
-              <a:defRPr sz="1300" b="1">
-                <a:solidFill>
-                  <a:srgbClr val="F3F6F9"/>
-                </a:solidFill>
-                <a:latin typeface="Microsoft YaHei"/>
-              </a:defRPr>
-            </a:pPr>
-            <a:r>
-              <a:t>A 类 joystick · 7 款</a:t>
-            </a:r>
-          </a:p>
-        </p:txBody>
-      </p:sp>
-      <p:sp>
-        <p:nvSpPr>
           <p:cNvPr id="8" name="TextBox 7"/>
           <p:cNvSpPr txBox="1"/>
           <p:nvPr/>
         </p:nvSpPr>
         <p:spPr>
           <a:xfrm>
-            <a:off x="777240" y="2057400"/>
-            <a:ext cx="10698480" cy="1097280"/>
+            <a:off x="457200" y="6583680"/>
+            <a:ext cx="3657600" cy="228600"/>
           </a:xfrm>
           <a:prstGeom prst="rect">
             <a:avLst/>
@@ -14387,125 +15199,29 @@
           <a:lstStyle/>
           <a:p>
             <a:pPr algn="l">
-              <a:defRPr sz="1400" b="0">
-                <a:solidFill>
-                  <a:srgbClr val="1E2933"/>
-                </a:solidFill>
-                <a:latin typeface="Microsoft YaHei"/>
-              </a:defRPr>
-            </a:pPr>
-            <a:r>
-              <a:t>00440 / 00461 / 00483 / 00496 / 00517 / 00522 / 00736</a:t>
-            </a:r>
-          </a:p>
-        </p:txBody>
-      </p:sp>
-      <p:sp>
-        <p:nvSpPr>
-          <p:cNvPr id="9" name="Rounded Rectangle 8"/>
-          <p:cNvSpPr/>
-          <p:nvPr/>
-        </p:nvSpPr>
-        <p:spPr>
-          <a:xfrm>
-            <a:off x="594360" y="3566160"/>
-            <a:ext cx="11064240" cy="1920240"/>
-          </a:xfrm>
-          <a:prstGeom prst="roundRect">
-            <a:avLst/>
-          </a:prstGeom>
-          <a:solidFill>
-            <a:srgbClr val="FFFFFF"/>
-          </a:solidFill>
-          <a:ln w="25400">
-            <a:solidFill>
-              <a:srgbClr val="0096C7"/>
-            </a:solidFill>
-          </a:ln>
-        </p:spPr>
-        <p:style>
-          <a:lnRef idx="1">
-            <a:schemeClr val="accent1"/>
-          </a:lnRef>
-          <a:fillRef idx="3">
-            <a:schemeClr val="accent1"/>
-          </a:fillRef>
-          <a:effectRef idx="2">
-            <a:schemeClr val="accent1"/>
-          </a:effectRef>
-          <a:fontRef idx="minor">
-            <a:schemeClr val="lt1"/>
-          </a:fontRef>
-        </p:style>
-        <p:txBody>
-          <a:bodyPr rtlCol="0" anchor="ctr"/>
-          <a:lstStyle/>
-          <a:p>
-            <a:pPr algn="ctr"/>
-          </a:p>
-        </p:txBody>
-      </p:sp>
-      <p:sp>
-        <p:nvSpPr>
-          <p:cNvPr id="10" name="Rounded Rectangle 9"/>
-          <p:cNvSpPr/>
-          <p:nvPr/>
-        </p:nvSpPr>
-        <p:spPr>
-          <a:xfrm>
-            <a:off x="777240" y="3749039"/>
-            <a:ext cx="1645920" cy="411480"/>
-          </a:xfrm>
-          <a:prstGeom prst="roundRect">
-            <a:avLst/>
-          </a:prstGeom>
-          <a:solidFill>
-            <a:srgbClr val="0096C7"/>
-          </a:solidFill>
-          <a:ln/>
-        </p:spPr>
-        <p:style>
-          <a:lnRef idx="1">
-            <a:schemeClr val="accent1"/>
-          </a:lnRef>
-          <a:fillRef idx="3">
-            <a:schemeClr val="accent1"/>
-          </a:fillRef>
-          <a:effectRef idx="2">
-            <a:schemeClr val="accent1"/>
-          </a:effectRef>
-          <a:fontRef idx="minor">
-            <a:schemeClr val="lt1"/>
-          </a:fontRef>
-        </p:style>
-        <p:txBody>
-          <a:bodyPr rtlCol="0" anchor="ctr"/>
-          <a:lstStyle/>
-          <a:p>
-            <a:pPr algn="ctr">
-              <a:defRPr sz="1300" b="1">
-                <a:solidFill>
-                  <a:srgbClr val="F3F6F9"/>
-                </a:solidFill>
-                <a:latin typeface="Microsoft YaHei"/>
-              </a:defRPr>
-            </a:pPr>
-            <a:r>
-              <a:t>B 类 tap-only · 15 款</a:t>
-            </a:r>
-          </a:p>
-        </p:txBody>
-      </p:sp>
-      <p:sp>
-        <p:nvSpPr>
-          <p:cNvPr id="11" name="TextBox 10"/>
+              <a:defRPr sz="1000" b="0">
+                <a:solidFill>
+                  <a:srgbClr val="6C757D"/>
+                </a:solidFill>
+                <a:latin typeface="Microsoft YaHei"/>
+              </a:defRPr>
+            </a:pPr>
+            <a:r>
+              <a:t>smallgameagent · LLM/VLM + 规则驱动</a:t>
+            </a:r>
+          </a:p>
+        </p:txBody>
+      </p:sp>
+      <p:sp>
+        <p:nvSpPr>
+          <p:cNvPr id="9" name="TextBox 8"/>
           <p:cNvSpPr txBox="1"/>
           <p:nvPr/>
         </p:nvSpPr>
         <p:spPr>
           <a:xfrm>
-            <a:off x="777240" y="4251960"/>
-            <a:ext cx="10698480" cy="1097280"/>
+            <a:off x="10789920" y="6583680"/>
+            <a:ext cx="914400" cy="228600"/>
           </a:xfrm>
           <a:prstGeom prst="rect">
             <a:avLst/>
@@ -14518,119 +15234,6 @@
           </a:bodyPr>
           <a:lstStyle/>
           <a:p>
-            <a:pPr algn="l">
-              <a:defRPr sz="1400" b="0">
-                <a:solidFill>
-                  <a:srgbClr val="1E2933"/>
-                </a:solidFill>
-                <a:latin typeface="Microsoft YaHei"/>
-              </a:defRPr>
-            </a:pPr>
-            <a:r>
-              <a:t>00219 / 00332 / 00342 / 00382 / 00394 / 00427 / 00434 / 00475 / 00482 / 00526 / 00532 / 00594 / 00669 / 00733 / 00742</a:t>
-            </a:r>
-          </a:p>
-        </p:txBody>
-      </p:sp>
-      <p:sp>
-        <p:nvSpPr>
-          <p:cNvPr id="12" name="Rectangle 11"/>
-          <p:cNvSpPr/>
-          <p:nvPr/>
-        </p:nvSpPr>
-        <p:spPr>
-          <a:xfrm>
-            <a:off x="0" y="6537960"/>
-            <a:ext cx="12191695" cy="18288"/>
-          </a:xfrm>
-          <a:prstGeom prst="rect">
-            <a:avLst/>
-          </a:prstGeom>
-          <a:solidFill>
-            <a:srgbClr val="0096C7"/>
-          </a:solidFill>
-          <a:ln/>
-        </p:spPr>
-        <p:style>
-          <a:lnRef idx="1">
-            <a:schemeClr val="accent1"/>
-          </a:lnRef>
-          <a:fillRef idx="3">
-            <a:schemeClr val="accent1"/>
-          </a:fillRef>
-          <a:effectRef idx="2">
-            <a:schemeClr val="accent1"/>
-          </a:effectRef>
-          <a:fontRef idx="minor">
-            <a:schemeClr val="lt1"/>
-          </a:fontRef>
-        </p:style>
-        <p:txBody>
-          <a:bodyPr rtlCol="0" anchor="ctr"/>
-          <a:lstStyle/>
-          <a:p>
-            <a:pPr algn="ctr"/>
-          </a:p>
-        </p:txBody>
-      </p:sp>
-      <p:sp>
-        <p:nvSpPr>
-          <p:cNvPr id="13" name="TextBox 12"/>
-          <p:cNvSpPr txBox="1"/>
-          <p:nvPr/>
-        </p:nvSpPr>
-        <p:spPr>
-          <a:xfrm>
-            <a:off x="457200" y="6583680"/>
-            <a:ext cx="3657600" cy="228600"/>
-          </a:xfrm>
-          <a:prstGeom prst="rect">
-            <a:avLst/>
-          </a:prstGeom>
-          <a:noFill/>
-        </p:spPr>
-        <p:txBody>
-          <a:bodyPr wrap="none">
-            <a:spAutoFit/>
-          </a:bodyPr>
-          <a:lstStyle/>
-          <a:p>
-            <a:pPr algn="l">
-              <a:defRPr sz="1000" b="0">
-                <a:solidFill>
-                  <a:srgbClr val="6C757D"/>
-                </a:solidFill>
-                <a:latin typeface="Microsoft YaHei"/>
-              </a:defRPr>
-            </a:pPr>
-            <a:r>
-              <a:t>smallgameagent · LLM/VLM + 规则驱动</a:t>
-            </a:r>
-          </a:p>
-        </p:txBody>
-      </p:sp>
-      <p:sp>
-        <p:nvSpPr>
-          <p:cNvPr id="14" name="TextBox 13"/>
-          <p:cNvSpPr txBox="1"/>
-          <p:nvPr/>
-        </p:nvSpPr>
-        <p:spPr>
-          <a:xfrm>
-            <a:off x="10789920" y="6583680"/>
-            <a:ext cx="914400" cy="228600"/>
-          </a:xfrm>
-          <a:prstGeom prst="rect">
-            <a:avLst/>
-          </a:prstGeom>
-          <a:noFill/>
-        </p:spPr>
-        <p:txBody>
-          <a:bodyPr wrap="none">
-            <a:spAutoFit/>
-          </a:bodyPr>
-          <a:lstStyle/>
-          <a:p>
             <a:pPr algn="r">
               <a:defRPr sz="1000" b="0">
                 <a:solidFill>
@@ -14640,7 +15243,7 @@
               </a:defRPr>
             </a:pPr>
             <a:r>
-              <a:t>27/32</a:t>
+              <a:t>27/33</a:t>
             </a:r>
           </a:p>
         </p:txBody>
@@ -14672,7 +15275,7 @@
         <p:spPr>
           <a:xfrm>
             <a:off x="0" y="0"/>
-            <a:ext cx="12191695" cy="6858000"/>
+            <a:ext cx="12191695" cy="960120"/>
           </a:xfrm>
           <a:prstGeom prst="rect">
             <a:avLst/>
@@ -14712,8 +15315,8 @@
         </p:nvSpPr>
         <p:spPr>
           <a:xfrm>
-            <a:off x="548640" y="1645920"/>
-            <a:ext cx="2743200" cy="1828800"/>
+            <a:off x="457200" y="228600"/>
+            <a:ext cx="11247120" cy="548640"/>
           </a:xfrm>
           <a:prstGeom prst="rect">
             <a:avLst/>
@@ -14727,43 +15330,7 @@
           <a:lstStyle/>
           <a:p>
             <a:pPr algn="l">
-              <a:defRPr sz="12000" b="1">
-                <a:solidFill>
-                  <a:srgbClr val="333DA0"/>
-                </a:solidFill>
-                <a:latin typeface="Microsoft YaHei"/>
-              </a:defRPr>
-            </a:pPr>
-            <a:r>
-              <a:t>09</a:t>
-            </a:r>
-          </a:p>
-        </p:txBody>
-      </p:sp>
-      <p:sp>
-        <p:nvSpPr>
-          <p:cNvPr id="4" name="TextBox 3"/>
-          <p:cNvSpPr txBox="1"/>
-          <p:nvPr/>
-        </p:nvSpPr>
-        <p:spPr>
-          <a:xfrm>
-            <a:off x="548640" y="2834640"/>
-            <a:ext cx="11064240" cy="1097280"/>
-          </a:xfrm>
-          <a:prstGeom prst="rect">
-            <a:avLst/>
-          </a:prstGeom>
-          <a:noFill/>
-        </p:spPr>
-        <p:txBody>
-          <a:bodyPr wrap="none">
-            <a:spAutoFit/>
-          </a:bodyPr>
-          <a:lstStyle/>
-          <a:p>
-            <a:pPr algn="l">
-              <a:defRPr sz="4400" b="1">
+              <a:defRPr sz="3000" b="1">
                 <a:solidFill>
                   <a:srgbClr val="F3F6F9"/>
                 </a:solidFill>
@@ -14771,27 +15338,27 @@
               </a:defRPr>
             </a:pPr>
             <a:r>
-              <a:t>路线图</a:t>
-            </a:r>
-          </a:p>
-        </p:txBody>
-      </p:sp>
-      <p:sp>
-        <p:nvSpPr>
-          <p:cNvPr id="5" name="Rectangle 4"/>
+              <a:t>游戏覆盖矩阵：22 款游戏已可驱动</a:t>
+            </a:r>
+          </a:p>
+        </p:txBody>
+      </p:sp>
+      <p:sp>
+        <p:nvSpPr>
+          <p:cNvPr id="4" name="Rectangle 3"/>
           <p:cNvSpPr/>
           <p:nvPr/>
         </p:nvSpPr>
         <p:spPr>
           <a:xfrm>
-            <a:off x="548640" y="4023360"/>
-            <a:ext cx="1828800" cy="73152"/>
+            <a:off x="0" y="960120"/>
+            <a:ext cx="164592" cy="5897880"/>
           </a:xfrm>
           <a:prstGeom prst="rect">
             <a:avLst/>
           </a:prstGeom>
           <a:solidFill>
-            <a:srgbClr val="FF6B35"/>
+            <a:srgbClr val="0096C7"/>
           </a:solidFill>
           <a:ln/>
         </p:spPr>
@@ -14819,22 +15386,26 @@
       </p:sp>
       <p:sp>
         <p:nvSpPr>
-          <p:cNvPr id="6" name="Rectangle 5"/>
+          <p:cNvPr id="5" name="Rectangle 4"/>
           <p:cNvSpPr/>
           <p:nvPr/>
         </p:nvSpPr>
         <p:spPr>
           <a:xfrm>
-            <a:off x="0" y="6537960"/>
-            <a:ext cx="12191695" cy="18288"/>
+            <a:off x="320040" y="1078992"/>
+            <a:ext cx="11548872" cy="5349240"/>
           </a:xfrm>
           <a:prstGeom prst="rect">
             <a:avLst/>
           </a:prstGeom>
           <a:solidFill>
-            <a:srgbClr val="0096C7"/>
+            <a:srgbClr val="FFFFFF"/>
           </a:solidFill>
-          <a:ln/>
+          <a:ln w="12700">
+            <a:solidFill>
+              <a:srgbClr val="E1E5E9"/>
+            </a:solidFill>
+          </a:ln>
         </p:spPr>
         <p:style>
           <a:lnRef idx="1">
@@ -14860,14 +15431,110 @@
       </p:sp>
       <p:sp>
         <p:nvSpPr>
-          <p:cNvPr id="7" name="TextBox 6"/>
+          <p:cNvPr id="6" name="Rounded Rectangle 5"/>
+          <p:cNvSpPr/>
+          <p:nvPr/>
+        </p:nvSpPr>
+        <p:spPr>
+          <a:xfrm>
+            <a:off x="594360" y="1371600"/>
+            <a:ext cx="11064240" cy="1920240"/>
+          </a:xfrm>
+          <a:prstGeom prst="roundRect">
+            <a:avLst/>
+          </a:prstGeom>
+          <a:solidFill>
+            <a:srgbClr val="FFFFFF"/>
+          </a:solidFill>
+          <a:ln w="25400">
+            <a:solidFill>
+              <a:srgbClr val="1A237E"/>
+            </a:solidFill>
+          </a:ln>
+        </p:spPr>
+        <p:style>
+          <a:lnRef idx="1">
+            <a:schemeClr val="accent1"/>
+          </a:lnRef>
+          <a:fillRef idx="3">
+            <a:schemeClr val="accent1"/>
+          </a:fillRef>
+          <a:effectRef idx="2">
+            <a:schemeClr val="accent1"/>
+          </a:effectRef>
+          <a:fontRef idx="minor">
+            <a:schemeClr val="lt1"/>
+          </a:fontRef>
+        </p:style>
+        <p:txBody>
+          <a:bodyPr rtlCol="0" anchor="ctr"/>
+          <a:lstStyle/>
+          <a:p>
+            <a:pPr algn="ctr"/>
+          </a:p>
+        </p:txBody>
+      </p:sp>
+      <p:sp>
+        <p:nvSpPr>
+          <p:cNvPr id="7" name="Rounded Rectangle 6"/>
+          <p:cNvSpPr/>
+          <p:nvPr/>
+        </p:nvSpPr>
+        <p:spPr>
+          <a:xfrm>
+            <a:off x="777240" y="1554480"/>
+            <a:ext cx="1645920" cy="411480"/>
+          </a:xfrm>
+          <a:prstGeom prst="roundRect">
+            <a:avLst/>
+          </a:prstGeom>
+          <a:solidFill>
+            <a:srgbClr val="1A237E"/>
+          </a:solidFill>
+          <a:ln/>
+        </p:spPr>
+        <p:style>
+          <a:lnRef idx="1">
+            <a:schemeClr val="accent1"/>
+          </a:lnRef>
+          <a:fillRef idx="3">
+            <a:schemeClr val="accent1"/>
+          </a:fillRef>
+          <a:effectRef idx="2">
+            <a:schemeClr val="accent1"/>
+          </a:effectRef>
+          <a:fontRef idx="minor">
+            <a:schemeClr val="lt1"/>
+          </a:fontRef>
+        </p:style>
+        <p:txBody>
+          <a:bodyPr rtlCol="0" anchor="ctr"/>
+          <a:lstStyle/>
+          <a:p>
+            <a:pPr algn="ctr">
+              <a:defRPr sz="1300" b="1">
+                <a:solidFill>
+                  <a:srgbClr val="F3F6F9"/>
+                </a:solidFill>
+                <a:latin typeface="Microsoft YaHei"/>
+              </a:defRPr>
+            </a:pPr>
+            <a:r>
+              <a:t>A 类 joystick · 7 款</a:t>
+            </a:r>
+          </a:p>
+        </p:txBody>
+      </p:sp>
+      <p:sp>
+        <p:nvSpPr>
+          <p:cNvPr id="8" name="TextBox 7"/>
           <p:cNvSpPr txBox="1"/>
           <p:nvPr/>
         </p:nvSpPr>
         <p:spPr>
           <a:xfrm>
-            <a:off x="457200" y="6583680"/>
-            <a:ext cx="3657600" cy="228600"/>
+            <a:off x="777240" y="2057400"/>
+            <a:ext cx="10698480" cy="1097280"/>
           </a:xfrm>
           <a:prstGeom prst="rect">
             <a:avLst/>
@@ -14881,29 +15548,125 @@
           <a:lstStyle/>
           <a:p>
             <a:pPr algn="l">
-              <a:defRPr sz="1000" b="0">
-                <a:solidFill>
-                  <a:srgbClr val="6C757D"/>
-                </a:solidFill>
-                <a:latin typeface="Microsoft YaHei"/>
-              </a:defRPr>
-            </a:pPr>
-            <a:r>
-              <a:t>smallgameagent · LLM/VLM + 规则驱动</a:t>
-            </a:r>
-          </a:p>
-        </p:txBody>
-      </p:sp>
-      <p:sp>
-        <p:nvSpPr>
-          <p:cNvPr id="8" name="TextBox 7"/>
+              <a:defRPr sz="1400" b="0">
+                <a:solidFill>
+                  <a:srgbClr val="1E2933"/>
+                </a:solidFill>
+                <a:latin typeface="Microsoft YaHei"/>
+              </a:defRPr>
+            </a:pPr>
+            <a:r>
+              <a:t>00440 / 00461 / 00483 / 00496 / 00517 / 00522 / 00736</a:t>
+            </a:r>
+          </a:p>
+        </p:txBody>
+      </p:sp>
+      <p:sp>
+        <p:nvSpPr>
+          <p:cNvPr id="9" name="Rounded Rectangle 8"/>
+          <p:cNvSpPr/>
+          <p:nvPr/>
+        </p:nvSpPr>
+        <p:spPr>
+          <a:xfrm>
+            <a:off x="594360" y="3566160"/>
+            <a:ext cx="11064240" cy="1920240"/>
+          </a:xfrm>
+          <a:prstGeom prst="roundRect">
+            <a:avLst/>
+          </a:prstGeom>
+          <a:solidFill>
+            <a:srgbClr val="FFFFFF"/>
+          </a:solidFill>
+          <a:ln w="25400">
+            <a:solidFill>
+              <a:srgbClr val="0096C7"/>
+            </a:solidFill>
+          </a:ln>
+        </p:spPr>
+        <p:style>
+          <a:lnRef idx="1">
+            <a:schemeClr val="accent1"/>
+          </a:lnRef>
+          <a:fillRef idx="3">
+            <a:schemeClr val="accent1"/>
+          </a:fillRef>
+          <a:effectRef idx="2">
+            <a:schemeClr val="accent1"/>
+          </a:effectRef>
+          <a:fontRef idx="minor">
+            <a:schemeClr val="lt1"/>
+          </a:fontRef>
+        </p:style>
+        <p:txBody>
+          <a:bodyPr rtlCol="0" anchor="ctr"/>
+          <a:lstStyle/>
+          <a:p>
+            <a:pPr algn="ctr"/>
+          </a:p>
+        </p:txBody>
+      </p:sp>
+      <p:sp>
+        <p:nvSpPr>
+          <p:cNvPr id="10" name="Rounded Rectangle 9"/>
+          <p:cNvSpPr/>
+          <p:nvPr/>
+        </p:nvSpPr>
+        <p:spPr>
+          <a:xfrm>
+            <a:off x="777240" y="3749039"/>
+            <a:ext cx="1645920" cy="411480"/>
+          </a:xfrm>
+          <a:prstGeom prst="roundRect">
+            <a:avLst/>
+          </a:prstGeom>
+          <a:solidFill>
+            <a:srgbClr val="0096C7"/>
+          </a:solidFill>
+          <a:ln/>
+        </p:spPr>
+        <p:style>
+          <a:lnRef idx="1">
+            <a:schemeClr val="accent1"/>
+          </a:lnRef>
+          <a:fillRef idx="3">
+            <a:schemeClr val="accent1"/>
+          </a:fillRef>
+          <a:effectRef idx="2">
+            <a:schemeClr val="accent1"/>
+          </a:effectRef>
+          <a:fontRef idx="minor">
+            <a:schemeClr val="lt1"/>
+          </a:fontRef>
+        </p:style>
+        <p:txBody>
+          <a:bodyPr rtlCol="0" anchor="ctr"/>
+          <a:lstStyle/>
+          <a:p>
+            <a:pPr algn="ctr">
+              <a:defRPr sz="1300" b="1">
+                <a:solidFill>
+                  <a:srgbClr val="F3F6F9"/>
+                </a:solidFill>
+                <a:latin typeface="Microsoft YaHei"/>
+              </a:defRPr>
+            </a:pPr>
+            <a:r>
+              <a:t>B 类 tap-only · 15 款</a:t>
+            </a:r>
+          </a:p>
+        </p:txBody>
+      </p:sp>
+      <p:sp>
+        <p:nvSpPr>
+          <p:cNvPr id="11" name="TextBox 10"/>
           <p:cNvSpPr txBox="1"/>
           <p:nvPr/>
         </p:nvSpPr>
         <p:spPr>
           <a:xfrm>
-            <a:off x="10789920" y="6583680"/>
-            <a:ext cx="914400" cy="228600"/>
+            <a:off x="777240" y="4251960"/>
+            <a:ext cx="10698480" cy="1097280"/>
           </a:xfrm>
           <a:prstGeom prst="rect">
             <a:avLst/>
@@ -14916,6 +15679,119 @@
           </a:bodyPr>
           <a:lstStyle/>
           <a:p>
+            <a:pPr algn="l">
+              <a:defRPr sz="1400" b="0">
+                <a:solidFill>
+                  <a:srgbClr val="1E2933"/>
+                </a:solidFill>
+                <a:latin typeface="Microsoft YaHei"/>
+              </a:defRPr>
+            </a:pPr>
+            <a:r>
+              <a:t>00219 / 00332 / 00342 / 00382 / 00394 / 00427 / 00434 / 00475 / 00482 / 00526 / 00532 / 00594 / 00669 / 00733 / 00742</a:t>
+            </a:r>
+          </a:p>
+        </p:txBody>
+      </p:sp>
+      <p:sp>
+        <p:nvSpPr>
+          <p:cNvPr id="12" name="Rectangle 11"/>
+          <p:cNvSpPr/>
+          <p:nvPr/>
+        </p:nvSpPr>
+        <p:spPr>
+          <a:xfrm>
+            <a:off x="0" y="6537960"/>
+            <a:ext cx="12191695" cy="18288"/>
+          </a:xfrm>
+          <a:prstGeom prst="rect">
+            <a:avLst/>
+          </a:prstGeom>
+          <a:solidFill>
+            <a:srgbClr val="0096C7"/>
+          </a:solidFill>
+          <a:ln/>
+        </p:spPr>
+        <p:style>
+          <a:lnRef idx="1">
+            <a:schemeClr val="accent1"/>
+          </a:lnRef>
+          <a:fillRef idx="3">
+            <a:schemeClr val="accent1"/>
+          </a:fillRef>
+          <a:effectRef idx="2">
+            <a:schemeClr val="accent1"/>
+          </a:effectRef>
+          <a:fontRef idx="minor">
+            <a:schemeClr val="lt1"/>
+          </a:fontRef>
+        </p:style>
+        <p:txBody>
+          <a:bodyPr rtlCol="0" anchor="ctr"/>
+          <a:lstStyle/>
+          <a:p>
+            <a:pPr algn="ctr"/>
+          </a:p>
+        </p:txBody>
+      </p:sp>
+      <p:sp>
+        <p:nvSpPr>
+          <p:cNvPr id="13" name="TextBox 12"/>
+          <p:cNvSpPr txBox="1"/>
+          <p:nvPr/>
+        </p:nvSpPr>
+        <p:spPr>
+          <a:xfrm>
+            <a:off x="457200" y="6583680"/>
+            <a:ext cx="3657600" cy="228600"/>
+          </a:xfrm>
+          <a:prstGeom prst="rect">
+            <a:avLst/>
+          </a:prstGeom>
+          <a:noFill/>
+        </p:spPr>
+        <p:txBody>
+          <a:bodyPr wrap="none">
+            <a:spAutoFit/>
+          </a:bodyPr>
+          <a:lstStyle/>
+          <a:p>
+            <a:pPr algn="l">
+              <a:defRPr sz="1000" b="0">
+                <a:solidFill>
+                  <a:srgbClr val="6C757D"/>
+                </a:solidFill>
+                <a:latin typeface="Microsoft YaHei"/>
+              </a:defRPr>
+            </a:pPr>
+            <a:r>
+              <a:t>smallgameagent · LLM/VLM + 规则驱动</a:t>
+            </a:r>
+          </a:p>
+        </p:txBody>
+      </p:sp>
+      <p:sp>
+        <p:nvSpPr>
+          <p:cNvPr id="14" name="TextBox 13"/>
+          <p:cNvSpPr txBox="1"/>
+          <p:nvPr/>
+        </p:nvSpPr>
+        <p:spPr>
+          <a:xfrm>
+            <a:off x="10789920" y="6583680"/>
+            <a:ext cx="914400" cy="228600"/>
+          </a:xfrm>
+          <a:prstGeom prst="rect">
+            <a:avLst/>
+          </a:prstGeom>
+          <a:noFill/>
+        </p:spPr>
+        <p:txBody>
+          <a:bodyPr wrap="none">
+            <a:spAutoFit/>
+          </a:bodyPr>
+          <a:lstStyle/>
+          <a:p>
             <a:pPr algn="r">
               <a:defRPr sz="1000" b="0">
                 <a:solidFill>
@@ -14925,7 +15801,7 @@
               </a:defRPr>
             </a:pPr>
             <a:r>
-              <a:t>28/32</a:t>
+              <a:t>28/33</a:t>
             </a:r>
           </a:p>
         </p:txBody>
@@ -14957,7 +15833,7 @@
         <p:spPr>
           <a:xfrm>
             <a:off x="0" y="0"/>
-            <a:ext cx="12191695" cy="960120"/>
+            <a:ext cx="12191695" cy="6858000"/>
           </a:xfrm>
           <a:prstGeom prst="rect">
             <a:avLst/>
@@ -14997,8 +15873,8 @@
         </p:nvSpPr>
         <p:spPr>
           <a:xfrm>
-            <a:off x="457200" y="228600"/>
-            <a:ext cx="11247120" cy="548640"/>
+            <a:off x="548640" y="1645920"/>
+            <a:ext cx="2743200" cy="1828800"/>
           </a:xfrm>
           <a:prstGeom prst="rect">
             <a:avLst/>
@@ -15012,7 +15888,43 @@
           <a:lstStyle/>
           <a:p>
             <a:pPr algn="l">
-              <a:defRPr sz="3000" b="1">
+              <a:defRPr sz="12000" b="1">
+                <a:solidFill>
+                  <a:srgbClr val="333DA0"/>
+                </a:solidFill>
+                <a:latin typeface="Microsoft YaHei"/>
+              </a:defRPr>
+            </a:pPr>
+            <a:r>
+              <a:t>09</a:t>
+            </a:r>
+          </a:p>
+        </p:txBody>
+      </p:sp>
+      <p:sp>
+        <p:nvSpPr>
+          <p:cNvPr id="4" name="TextBox 3"/>
+          <p:cNvSpPr txBox="1"/>
+          <p:nvPr/>
+        </p:nvSpPr>
+        <p:spPr>
+          <a:xfrm>
+            <a:off x="548640" y="2834640"/>
+            <a:ext cx="11064240" cy="1097280"/>
+          </a:xfrm>
+          <a:prstGeom prst="rect">
+            <a:avLst/>
+          </a:prstGeom>
+          <a:noFill/>
+        </p:spPr>
+        <p:txBody>
+          <a:bodyPr wrap="none">
+            <a:spAutoFit/>
+          </a:bodyPr>
+          <a:lstStyle/>
+          <a:p>
+            <a:pPr algn="l">
+              <a:defRPr sz="4400" b="1">
                 <a:solidFill>
                   <a:srgbClr val="F3F6F9"/>
                 </a:solidFill>
@@ -15020,27 +15932,27 @@
               </a:defRPr>
             </a:pPr>
             <a:r>
-              <a:t>技术路线图：从能跑到好用</a:t>
-            </a:r>
-          </a:p>
-        </p:txBody>
-      </p:sp>
-      <p:sp>
-        <p:nvSpPr>
-          <p:cNvPr id="4" name="Rectangle 3"/>
+              <a:t>路线图</a:t>
+            </a:r>
+          </a:p>
+        </p:txBody>
+      </p:sp>
+      <p:sp>
+        <p:nvSpPr>
+          <p:cNvPr id="5" name="Rectangle 4"/>
           <p:cNvSpPr/>
           <p:nvPr/>
         </p:nvSpPr>
         <p:spPr>
           <a:xfrm>
-            <a:off x="0" y="960120"/>
-            <a:ext cx="164592" cy="5897880"/>
+            <a:off x="548640" y="4023360"/>
+            <a:ext cx="1828800" cy="73152"/>
           </a:xfrm>
           <a:prstGeom prst="rect">
             <a:avLst/>
           </a:prstGeom>
           <a:solidFill>
-            <a:srgbClr val="0096C7"/>
+            <a:srgbClr val="FF6B35"/>
           </a:solidFill>
           <a:ln/>
         </p:spPr>
@@ -15068,26 +15980,22 @@
       </p:sp>
       <p:sp>
         <p:nvSpPr>
-          <p:cNvPr id="5" name="Rectangle 4"/>
+          <p:cNvPr id="6" name="Rectangle 5"/>
           <p:cNvSpPr/>
           <p:nvPr/>
         </p:nvSpPr>
         <p:spPr>
           <a:xfrm>
-            <a:off x="320040" y="1078992"/>
-            <a:ext cx="11548872" cy="5349240"/>
+            <a:off x="0" y="6537960"/>
+            <a:ext cx="12191695" cy="18288"/>
           </a:xfrm>
           <a:prstGeom prst="rect">
             <a:avLst/>
           </a:prstGeom>
           <a:solidFill>
-            <a:srgbClr val="FFFFFF"/>
+            <a:srgbClr val="0096C7"/>
           </a:solidFill>
-          <a:ln w="12700">
-            <a:solidFill>
-              <a:srgbClr val="E1E5E9"/>
-            </a:solidFill>
-          </a:ln>
+          <a:ln/>
         </p:spPr>
         <p:style>
           <a:lnRef idx="1">
@@ -15113,96 +16021,14 @@
       </p:sp>
       <p:sp>
         <p:nvSpPr>
-          <p:cNvPr id="6" name="Rectangle 5"/>
-          <p:cNvSpPr/>
-          <p:nvPr/>
-        </p:nvSpPr>
-        <p:spPr>
-          <a:xfrm>
-            <a:off x="777240" y="3200400"/>
-            <a:ext cx="10972800" cy="73152"/>
-          </a:xfrm>
-          <a:prstGeom prst="rect">
-            <a:avLst/>
-          </a:prstGeom>
-          <a:solidFill>
-            <a:srgbClr val="6C757D"/>
-          </a:solidFill>
-          <a:ln/>
-        </p:spPr>
-        <p:style>
-          <a:lnRef idx="1">
-            <a:schemeClr val="accent1"/>
-          </a:lnRef>
-          <a:fillRef idx="3">
-            <a:schemeClr val="accent1"/>
-          </a:fillRef>
-          <a:effectRef idx="2">
-            <a:schemeClr val="accent1"/>
-          </a:effectRef>
-          <a:fontRef idx="minor">
-            <a:schemeClr val="lt1"/>
-          </a:fontRef>
-        </p:style>
-        <p:txBody>
-          <a:bodyPr rtlCol="0" anchor="ctr"/>
-          <a:lstStyle/>
-          <a:p>
-            <a:pPr algn="ctr"/>
-          </a:p>
-        </p:txBody>
-      </p:sp>
-      <p:sp>
-        <p:nvSpPr>
-          <p:cNvPr id="7" name="Oval 6"/>
-          <p:cNvSpPr/>
-          <p:nvPr/>
-        </p:nvSpPr>
-        <p:spPr>
-          <a:xfrm>
-            <a:off x="822960" y="3063240"/>
-            <a:ext cx="320040" cy="320040"/>
-          </a:xfrm>
-          <a:prstGeom prst="ellipse">
-            <a:avLst/>
-          </a:prstGeom>
-          <a:solidFill>
-            <a:srgbClr val="28A745"/>
-          </a:solidFill>
-          <a:ln/>
-        </p:spPr>
-        <p:style>
-          <a:lnRef idx="1">
-            <a:schemeClr val="accent1"/>
-          </a:lnRef>
-          <a:fillRef idx="3">
-            <a:schemeClr val="accent1"/>
-          </a:fillRef>
-          <a:effectRef idx="2">
-            <a:schemeClr val="accent1"/>
-          </a:effectRef>
-          <a:fontRef idx="minor">
-            <a:schemeClr val="lt1"/>
-          </a:fontRef>
-        </p:style>
-        <p:txBody>
-          <a:bodyPr rtlCol="0" anchor="ctr"/>
-          <a:lstStyle/>
-          <a:p>
-            <a:pPr algn="ctr"/>
-          </a:p>
-        </p:txBody>
-      </p:sp>
-      <p:sp>
-        <p:nvSpPr>
-          <p:cNvPr id="8" name="TextBox 7"/>
+          <p:cNvPr id="7" name="TextBox 6"/>
           <p:cNvSpPr txBox="1"/>
           <p:nvPr/>
         </p:nvSpPr>
         <p:spPr>
           <a:xfrm>
-            <a:off x="320040" y="2103120"/>
-            <a:ext cx="1645920" cy="457200"/>
+            <a:off x="457200" y="6583680"/>
+            <a:ext cx="3657600" cy="228600"/>
           </a:xfrm>
           <a:prstGeom prst="rect">
             <a:avLst/>
@@ -15215,30 +16041,30 @@
           </a:bodyPr>
           <a:lstStyle/>
           <a:p>
-            <a:pPr algn="ctr">
-              <a:defRPr sz="1300" b="1">
-                <a:solidFill>
-                  <a:srgbClr val="28A745"/>
-                </a:solidFill>
-                <a:latin typeface="Microsoft YaHei"/>
-              </a:defRPr>
-            </a:pPr>
-            <a:r>
-              <a:t>已完成</a:t>
-            </a:r>
-          </a:p>
-        </p:txBody>
-      </p:sp>
-      <p:sp>
-        <p:nvSpPr>
-          <p:cNvPr id="9" name="TextBox 8"/>
+            <a:pPr algn="l">
+              <a:defRPr sz="1000" b="0">
+                <a:solidFill>
+                  <a:srgbClr val="6C757D"/>
+                </a:solidFill>
+                <a:latin typeface="Microsoft YaHei"/>
+              </a:defRPr>
+            </a:pPr>
+            <a:r>
+              <a:t>smallgameagent · LLM/VLM + 规则驱动</a:t>
+            </a:r>
+          </a:p>
+        </p:txBody>
+      </p:sp>
+      <p:sp>
+        <p:nvSpPr>
+          <p:cNvPr id="8" name="TextBox 7"/>
           <p:cNvSpPr txBox="1"/>
           <p:nvPr/>
         </p:nvSpPr>
         <p:spPr>
           <a:xfrm>
-            <a:off x="91439" y="3474720"/>
-            <a:ext cx="2194560" cy="1188720"/>
+            <a:off x="10789920" y="6583680"/>
+            <a:ext cx="914400" cy="228600"/>
           </a:xfrm>
           <a:prstGeom prst="rect">
             <a:avLst/>
@@ -15251,642 +16077,6 @@
           </a:bodyPr>
           <a:lstStyle/>
           <a:p>
-            <a:pPr algn="ctr">
-              <a:defRPr sz="1200" b="0">
-                <a:solidFill>
-                  <a:srgbClr val="1E2933"/>
-                </a:solidFill>
-                <a:latin typeface="Microsoft YaHei"/>
-              </a:defRPr>
-            </a:pPr>
-            <a:r>
-              <a:t>规则引擎 + 自动校准</a:t>
-            </a:r>
-            <a:br/>
-            <a:r>
-              <a:t>22 游戏可驱动</a:t>
-            </a:r>
-          </a:p>
-        </p:txBody>
-      </p:sp>
-      <p:sp>
-        <p:nvSpPr>
-          <p:cNvPr id="10" name="Oval 9"/>
-          <p:cNvSpPr/>
-          <p:nvPr/>
-        </p:nvSpPr>
-        <p:spPr>
-          <a:xfrm>
-            <a:off x="3108960" y="3063240"/>
-            <a:ext cx="320040" cy="320040"/>
-          </a:xfrm>
-          <a:prstGeom prst="ellipse">
-            <a:avLst/>
-          </a:prstGeom>
-          <a:solidFill>
-            <a:srgbClr val="28A745"/>
-          </a:solidFill>
-          <a:ln/>
-        </p:spPr>
-        <p:style>
-          <a:lnRef idx="1">
-            <a:schemeClr val="accent1"/>
-          </a:lnRef>
-          <a:fillRef idx="3">
-            <a:schemeClr val="accent1"/>
-          </a:fillRef>
-          <a:effectRef idx="2">
-            <a:schemeClr val="accent1"/>
-          </a:effectRef>
-          <a:fontRef idx="minor">
-            <a:schemeClr val="lt1"/>
-          </a:fontRef>
-        </p:style>
-        <p:txBody>
-          <a:bodyPr rtlCol="0" anchor="ctr"/>
-          <a:lstStyle/>
-          <a:p>
-            <a:pPr algn="ctr"/>
-          </a:p>
-        </p:txBody>
-      </p:sp>
-      <p:sp>
-        <p:nvSpPr>
-          <p:cNvPr id="11" name="TextBox 10"/>
-          <p:cNvSpPr txBox="1"/>
-          <p:nvPr/>
-        </p:nvSpPr>
-        <p:spPr>
-          <a:xfrm>
-            <a:off x="2606039" y="2103120"/>
-            <a:ext cx="1645920" cy="457200"/>
-          </a:xfrm>
-          <a:prstGeom prst="rect">
-            <a:avLst/>
-          </a:prstGeom>
-          <a:noFill/>
-        </p:spPr>
-        <p:txBody>
-          <a:bodyPr wrap="none">
-            <a:spAutoFit/>
-          </a:bodyPr>
-          <a:lstStyle/>
-          <a:p>
-            <a:pPr algn="ctr">
-              <a:defRPr sz="1300" b="1">
-                <a:solidFill>
-                  <a:srgbClr val="28A745"/>
-                </a:solidFill>
-                <a:latin typeface="Microsoft YaHei"/>
-              </a:defRPr>
-            </a:pPr>
-            <a:r>
-              <a:t>已完成</a:t>
-            </a:r>
-          </a:p>
-        </p:txBody>
-      </p:sp>
-      <p:sp>
-        <p:nvSpPr>
-          <p:cNvPr id="12" name="TextBox 11"/>
-          <p:cNvSpPr txBox="1"/>
-          <p:nvPr/>
-        </p:nvSpPr>
-        <p:spPr>
-          <a:xfrm>
-            <a:off x="2377439" y="3474720"/>
-            <a:ext cx="2194560" cy="1188720"/>
-          </a:xfrm>
-          <a:prstGeom prst="rect">
-            <a:avLst/>
-          </a:prstGeom>
-          <a:noFill/>
-        </p:spPr>
-        <p:txBody>
-          <a:bodyPr wrap="none">
-            <a:spAutoFit/>
-          </a:bodyPr>
-          <a:lstStyle/>
-          <a:p>
-            <a:pPr algn="ctr">
-              <a:defRPr sz="1200" b="0">
-                <a:solidFill>
-                  <a:srgbClr val="1E2933"/>
-                </a:solidFill>
-                <a:latin typeface="Microsoft YaHei"/>
-              </a:defRPr>
-            </a:pPr>
-            <a:r>
-              <a:t>multi-bus-memory</a:t>
-            </a:r>
-            <a:br/>
-            <a:r>
-              <a:t>记忆读回 0.300</a:t>
-            </a:r>
-          </a:p>
-        </p:txBody>
-      </p:sp>
-      <p:sp>
-        <p:nvSpPr>
-          <p:cNvPr id="13" name="Oval 12"/>
-          <p:cNvSpPr/>
-          <p:nvPr/>
-        </p:nvSpPr>
-        <p:spPr>
-          <a:xfrm>
-            <a:off x="5394960" y="3063240"/>
-            <a:ext cx="320040" cy="320040"/>
-          </a:xfrm>
-          <a:prstGeom prst="ellipse">
-            <a:avLst/>
-          </a:prstGeom>
-          <a:solidFill>
-            <a:srgbClr val="28A745"/>
-          </a:solidFill>
-          <a:ln/>
-        </p:spPr>
-        <p:style>
-          <a:lnRef idx="1">
-            <a:schemeClr val="accent1"/>
-          </a:lnRef>
-          <a:fillRef idx="3">
-            <a:schemeClr val="accent1"/>
-          </a:fillRef>
-          <a:effectRef idx="2">
-            <a:schemeClr val="accent1"/>
-          </a:effectRef>
-          <a:fontRef idx="minor">
-            <a:schemeClr val="lt1"/>
-          </a:fontRef>
-        </p:style>
-        <p:txBody>
-          <a:bodyPr rtlCol="0" anchor="ctr"/>
-          <a:lstStyle/>
-          <a:p>
-            <a:pPr algn="ctr"/>
-          </a:p>
-        </p:txBody>
-      </p:sp>
-      <p:sp>
-        <p:nvSpPr>
-          <p:cNvPr id="14" name="TextBox 13"/>
-          <p:cNvSpPr txBox="1"/>
-          <p:nvPr/>
-        </p:nvSpPr>
-        <p:spPr>
-          <a:xfrm>
-            <a:off x="4892040" y="2103120"/>
-            <a:ext cx="1645920" cy="457200"/>
-          </a:xfrm>
-          <a:prstGeom prst="rect">
-            <a:avLst/>
-          </a:prstGeom>
-          <a:noFill/>
-        </p:spPr>
-        <p:txBody>
-          <a:bodyPr wrap="none">
-            <a:spAutoFit/>
-          </a:bodyPr>
-          <a:lstStyle/>
-          <a:p>
-            <a:pPr algn="ctr">
-              <a:defRPr sz="1300" b="1">
-                <a:solidFill>
-                  <a:srgbClr val="28A745"/>
-                </a:solidFill>
-                <a:latin typeface="Microsoft YaHei"/>
-              </a:defRPr>
-            </a:pPr>
-            <a:r>
-              <a:t>已完成</a:t>
-            </a:r>
-          </a:p>
-        </p:txBody>
-      </p:sp>
-      <p:sp>
-        <p:nvSpPr>
-          <p:cNvPr id="15" name="TextBox 14"/>
-          <p:cNvSpPr txBox="1"/>
-          <p:nvPr/>
-        </p:nvSpPr>
-        <p:spPr>
-          <a:xfrm>
-            <a:off x="4663440" y="3474720"/>
-            <a:ext cx="2194560" cy="1188720"/>
-          </a:xfrm>
-          <a:prstGeom prst="rect">
-            <a:avLst/>
-          </a:prstGeom>
-          <a:noFill/>
-        </p:spPr>
-        <p:txBody>
-          <a:bodyPr wrap="none">
-            <a:spAutoFit/>
-          </a:bodyPr>
-          <a:lstStyle/>
-          <a:p>
-            <a:pPr algn="ctr">
-              <a:defRPr sz="1200" b="0">
-                <a:solidFill>
-                  <a:srgbClr val="1E2933"/>
-                </a:solidFill>
-                <a:latin typeface="Microsoft YaHei"/>
-              </a:defRPr>
-            </a:pPr>
-            <a:r>
-              <a:t>L2 code-file 更新</a:t>
-            </a:r>
-            <a:br/>
-            <a:r>
-              <a:t>qwen/kimi/xiaomi/opencodego 验证</a:t>
-            </a:r>
-          </a:p>
-        </p:txBody>
-      </p:sp>
-      <p:sp>
-        <p:nvSpPr>
-          <p:cNvPr id="16" name="Oval 15"/>
-          <p:cNvSpPr/>
-          <p:nvPr/>
-        </p:nvSpPr>
-        <p:spPr>
-          <a:xfrm>
-            <a:off x="7680960" y="3063240"/>
-            <a:ext cx="320040" cy="320040"/>
-          </a:xfrm>
-          <a:prstGeom prst="ellipse">
-            <a:avLst/>
-          </a:prstGeom>
-          <a:solidFill>
-            <a:srgbClr val="FF6B35"/>
-          </a:solidFill>
-          <a:ln/>
-        </p:spPr>
-        <p:style>
-          <a:lnRef idx="1">
-            <a:schemeClr val="accent1"/>
-          </a:lnRef>
-          <a:fillRef idx="3">
-            <a:schemeClr val="accent1"/>
-          </a:fillRef>
-          <a:effectRef idx="2">
-            <a:schemeClr val="accent1"/>
-          </a:effectRef>
-          <a:fontRef idx="minor">
-            <a:schemeClr val="lt1"/>
-          </a:fontRef>
-        </p:style>
-        <p:txBody>
-          <a:bodyPr rtlCol="0" anchor="ctr"/>
-          <a:lstStyle/>
-          <a:p>
-            <a:pPr algn="ctr"/>
-          </a:p>
-        </p:txBody>
-      </p:sp>
-      <p:sp>
-        <p:nvSpPr>
-          <p:cNvPr id="17" name="TextBox 16"/>
-          <p:cNvSpPr txBox="1"/>
-          <p:nvPr/>
-        </p:nvSpPr>
-        <p:spPr>
-          <a:xfrm>
-            <a:off x="7178040" y="2103120"/>
-            <a:ext cx="1645920" cy="457200"/>
-          </a:xfrm>
-          <a:prstGeom prst="rect">
-            <a:avLst/>
-          </a:prstGeom>
-          <a:noFill/>
-        </p:spPr>
-        <p:txBody>
-          <a:bodyPr wrap="none">
-            <a:spAutoFit/>
-          </a:bodyPr>
-          <a:lstStyle/>
-          <a:p>
-            <a:pPr algn="ctr">
-              <a:defRPr sz="1300" b="1">
-                <a:solidFill>
-                  <a:srgbClr val="FF6B35"/>
-                </a:solidFill>
-                <a:latin typeface="Microsoft YaHei"/>
-              </a:defRPr>
-            </a:pPr>
-            <a:r>
-              <a:t>进行中</a:t>
-            </a:r>
-          </a:p>
-        </p:txBody>
-      </p:sp>
-      <p:sp>
-        <p:nvSpPr>
-          <p:cNvPr id="18" name="TextBox 17"/>
-          <p:cNvSpPr txBox="1"/>
-          <p:nvPr/>
-        </p:nvSpPr>
-        <p:spPr>
-          <a:xfrm>
-            <a:off x="6949440" y="3474720"/>
-            <a:ext cx="2194560" cy="1188720"/>
-          </a:xfrm>
-          <a:prstGeom prst="rect">
-            <a:avLst/>
-          </a:prstGeom>
-          <a:noFill/>
-        </p:spPr>
-        <p:txBody>
-          <a:bodyPr wrap="none">
-            <a:spAutoFit/>
-          </a:bodyPr>
-          <a:lstStyle/>
-          <a:p>
-            <a:pPr algn="ctr">
-              <a:defRPr sz="1200" b="0">
-                <a:solidFill>
-                  <a:srgbClr val="1E2933"/>
-                </a:solidFill>
-                <a:latin typeface="Microsoft YaHei"/>
-              </a:defRPr>
-            </a:pPr>
-            <a:r>
-              <a:t>本地 VLM 上下文</a:t>
-            </a:r>
-            <a:br/>
-            <a:r>
-              <a:t>QLoRA 微调准备</a:t>
-            </a:r>
-          </a:p>
-        </p:txBody>
-      </p:sp>
-      <p:sp>
-        <p:nvSpPr>
-          <p:cNvPr id="19" name="Oval 18"/>
-          <p:cNvSpPr/>
-          <p:nvPr/>
-        </p:nvSpPr>
-        <p:spPr>
-          <a:xfrm>
-            <a:off x="9966960" y="3063240"/>
-            <a:ext cx="320040" cy="320040"/>
-          </a:xfrm>
-          <a:prstGeom prst="ellipse">
-            <a:avLst/>
-          </a:prstGeom>
-          <a:solidFill>
-            <a:srgbClr val="0096C7"/>
-          </a:solidFill>
-          <a:ln/>
-        </p:spPr>
-        <p:style>
-          <a:lnRef idx="1">
-            <a:schemeClr val="accent1"/>
-          </a:lnRef>
-          <a:fillRef idx="3">
-            <a:schemeClr val="accent1"/>
-          </a:fillRef>
-          <a:effectRef idx="2">
-            <a:schemeClr val="accent1"/>
-          </a:effectRef>
-          <a:fontRef idx="minor">
-            <a:schemeClr val="lt1"/>
-          </a:fontRef>
-        </p:style>
-        <p:txBody>
-          <a:bodyPr rtlCol="0" anchor="ctr"/>
-          <a:lstStyle/>
-          <a:p>
-            <a:pPr algn="ctr"/>
-          </a:p>
-        </p:txBody>
-      </p:sp>
-      <p:sp>
-        <p:nvSpPr>
-          <p:cNvPr id="20" name="TextBox 19"/>
-          <p:cNvSpPr txBox="1"/>
-          <p:nvPr/>
-        </p:nvSpPr>
-        <p:spPr>
-          <a:xfrm>
-            <a:off x="9464040" y="2103120"/>
-            <a:ext cx="1645920" cy="457200"/>
-          </a:xfrm>
-          <a:prstGeom prst="rect">
-            <a:avLst/>
-          </a:prstGeom>
-          <a:noFill/>
-        </p:spPr>
-        <p:txBody>
-          <a:bodyPr wrap="none">
-            <a:spAutoFit/>
-          </a:bodyPr>
-          <a:lstStyle/>
-          <a:p>
-            <a:pPr algn="ctr">
-              <a:defRPr sz="1300" b="1">
-                <a:solidFill>
-                  <a:srgbClr val="0096C7"/>
-                </a:solidFill>
-                <a:latin typeface="Microsoft YaHei"/>
-              </a:defRPr>
-            </a:pPr>
-            <a:r>
-              <a:t>下一步</a:t>
-            </a:r>
-          </a:p>
-        </p:txBody>
-      </p:sp>
-      <p:sp>
-        <p:nvSpPr>
-          <p:cNvPr id="21" name="TextBox 20"/>
-          <p:cNvSpPr txBox="1"/>
-          <p:nvPr/>
-        </p:nvSpPr>
-        <p:spPr>
-          <a:xfrm>
-            <a:off x="9235440" y="3474720"/>
-            <a:ext cx="2194560" cy="1188720"/>
-          </a:xfrm>
-          <a:prstGeom prst="rect">
-            <a:avLst/>
-          </a:prstGeom>
-          <a:noFill/>
-        </p:spPr>
-        <p:txBody>
-          <a:bodyPr wrap="none">
-            <a:spAutoFit/>
-          </a:bodyPr>
-          <a:lstStyle/>
-          <a:p>
-            <a:pPr algn="ctr">
-              <a:defRPr sz="1200" b="0">
-                <a:solidFill>
-                  <a:srgbClr val="1E2933"/>
-                </a:solidFill>
-                <a:latin typeface="Microsoft YaHei"/>
-              </a:defRPr>
-            </a:pPr>
-            <a:r>
-              <a:t>真实游戏在线触发</a:t>
-            </a:r>
-            <a:br/>
-            <a:r>
-              <a:t>规则更新 + A/B 回归</a:t>
-            </a:r>
-          </a:p>
-        </p:txBody>
-      </p:sp>
-      <p:sp>
-        <p:nvSpPr>
-          <p:cNvPr id="22" name="Rounded Rectangle 21"/>
-          <p:cNvSpPr/>
-          <p:nvPr/>
-        </p:nvSpPr>
-        <p:spPr>
-          <a:xfrm>
-            <a:off x="777240" y="5074920"/>
-            <a:ext cx="10972800" cy="822960"/>
-          </a:xfrm>
-          <a:prstGeom prst="roundRect">
-            <a:avLst/>
-          </a:prstGeom>
-          <a:solidFill>
-            <a:srgbClr val="F3F6F9"/>
-          </a:solidFill>
-          <a:ln/>
-        </p:spPr>
-        <p:style>
-          <a:lnRef idx="1">
-            <a:schemeClr val="accent1"/>
-          </a:lnRef>
-          <a:fillRef idx="3">
-            <a:schemeClr val="accent1"/>
-          </a:fillRef>
-          <a:effectRef idx="2">
-            <a:schemeClr val="accent1"/>
-          </a:effectRef>
-          <a:fontRef idx="minor">
-            <a:schemeClr val="lt1"/>
-          </a:fontRef>
-        </p:style>
-        <p:txBody>
-          <a:bodyPr rtlCol="0" anchor="ctr"/>
-          <a:lstStyle/>
-          <a:p>
-            <a:pPr algn="ctr">
-              <a:defRPr sz="1400" b="0">
-                <a:solidFill>
-                  <a:srgbClr val="1E2933"/>
-                </a:solidFill>
-                <a:latin typeface="Microsoft YaHei"/>
-              </a:defRPr>
-            </a:pPr>
-            <a:r>
-              <a:t>核心原则：把贵且慢的云端调用摊到多步，本地 VLM 只提供「证据」，规则引擎负责零延迟执行。</a:t>
-            </a:r>
-          </a:p>
-        </p:txBody>
-      </p:sp>
-      <p:sp>
-        <p:nvSpPr>
-          <p:cNvPr id="23" name="Rectangle 22"/>
-          <p:cNvSpPr/>
-          <p:nvPr/>
-        </p:nvSpPr>
-        <p:spPr>
-          <a:xfrm>
-            <a:off x="0" y="6537960"/>
-            <a:ext cx="12191695" cy="18288"/>
-          </a:xfrm>
-          <a:prstGeom prst="rect">
-            <a:avLst/>
-          </a:prstGeom>
-          <a:solidFill>
-            <a:srgbClr val="0096C7"/>
-          </a:solidFill>
-          <a:ln/>
-        </p:spPr>
-        <p:style>
-          <a:lnRef idx="1">
-            <a:schemeClr val="accent1"/>
-          </a:lnRef>
-          <a:fillRef idx="3">
-            <a:schemeClr val="accent1"/>
-          </a:fillRef>
-          <a:effectRef idx="2">
-            <a:schemeClr val="accent1"/>
-          </a:effectRef>
-          <a:fontRef idx="minor">
-            <a:schemeClr val="lt1"/>
-          </a:fontRef>
-        </p:style>
-        <p:txBody>
-          <a:bodyPr rtlCol="0" anchor="ctr"/>
-          <a:lstStyle/>
-          <a:p>
-            <a:pPr algn="ctr"/>
-          </a:p>
-        </p:txBody>
-      </p:sp>
-      <p:sp>
-        <p:nvSpPr>
-          <p:cNvPr id="24" name="TextBox 23"/>
-          <p:cNvSpPr txBox="1"/>
-          <p:nvPr/>
-        </p:nvSpPr>
-        <p:spPr>
-          <a:xfrm>
-            <a:off x="457200" y="6583680"/>
-            <a:ext cx="3657600" cy="228600"/>
-          </a:xfrm>
-          <a:prstGeom prst="rect">
-            <a:avLst/>
-          </a:prstGeom>
-          <a:noFill/>
-        </p:spPr>
-        <p:txBody>
-          <a:bodyPr wrap="none">
-            <a:spAutoFit/>
-          </a:bodyPr>
-          <a:lstStyle/>
-          <a:p>
-            <a:pPr algn="l">
-              <a:defRPr sz="1000" b="0">
-                <a:solidFill>
-                  <a:srgbClr val="6C757D"/>
-                </a:solidFill>
-                <a:latin typeface="Microsoft YaHei"/>
-              </a:defRPr>
-            </a:pPr>
-            <a:r>
-              <a:t>smallgameagent · LLM/VLM + 规则驱动</a:t>
-            </a:r>
-          </a:p>
-        </p:txBody>
-      </p:sp>
-      <p:sp>
-        <p:nvSpPr>
-          <p:cNvPr id="25" name="TextBox 24"/>
-          <p:cNvSpPr txBox="1"/>
-          <p:nvPr/>
-        </p:nvSpPr>
-        <p:spPr>
-          <a:xfrm>
-            <a:off x="10789920" y="6583680"/>
-            <a:ext cx="914400" cy="228600"/>
-          </a:xfrm>
-          <a:prstGeom prst="rect">
-            <a:avLst/>
-          </a:prstGeom>
-          <a:noFill/>
-        </p:spPr>
-        <p:txBody>
-          <a:bodyPr wrap="none">
-            <a:spAutoFit/>
-          </a:bodyPr>
-          <a:lstStyle/>
-          <a:p>
             <a:pPr algn="r">
               <a:defRPr sz="1000" b="0">
                 <a:solidFill>
@@ -15896,7 +16086,7 @@
               </a:defRPr>
             </a:pPr>
             <a:r>
-              <a:t>29/32</a:t>
+              <a:t>29/33</a:t>
             </a:r>
           </a:p>
         </p:txBody>
@@ -16181,7 +16371,7 @@
               </a:defRPr>
             </a:pPr>
             <a:r>
-              <a:t>3/32</a:t>
+              <a:t>3/33</a:t>
             </a:r>
           </a:p>
         </p:txBody>
@@ -16213,7 +16403,7 @@
         <p:spPr>
           <a:xfrm>
             <a:off x="0" y="0"/>
-            <a:ext cx="12191695" cy="6858000"/>
+            <a:ext cx="12191695" cy="960120"/>
           </a:xfrm>
           <a:prstGeom prst="rect">
             <a:avLst/>
@@ -16253,8 +16443,8 @@
         </p:nvSpPr>
         <p:spPr>
           <a:xfrm>
-            <a:off x="548640" y="1645920"/>
-            <a:ext cx="2743200" cy="1828800"/>
+            <a:off x="457200" y="228600"/>
+            <a:ext cx="11247120" cy="548640"/>
           </a:xfrm>
           <a:prstGeom prst="rect">
             <a:avLst/>
@@ -16268,43 +16458,7 @@
           <a:lstStyle/>
           <a:p>
             <a:pPr algn="l">
-              <a:defRPr sz="12000" b="1">
-                <a:solidFill>
-                  <a:srgbClr val="333DA0"/>
-                </a:solidFill>
-                <a:latin typeface="Microsoft YaHei"/>
-              </a:defRPr>
-            </a:pPr>
-            <a:r>
-              <a:t>10</a:t>
-            </a:r>
-          </a:p>
-        </p:txBody>
-      </p:sp>
-      <p:sp>
-        <p:nvSpPr>
-          <p:cNvPr id="4" name="TextBox 3"/>
-          <p:cNvSpPr txBox="1"/>
-          <p:nvPr/>
-        </p:nvSpPr>
-        <p:spPr>
-          <a:xfrm>
-            <a:off x="548640" y="2834640"/>
-            <a:ext cx="11064240" cy="1097280"/>
-          </a:xfrm>
-          <a:prstGeom prst="rect">
-            <a:avLst/>
-          </a:prstGeom>
-          <a:noFill/>
-        </p:spPr>
-        <p:txBody>
-          <a:bodyPr wrap="none">
-            <a:spAutoFit/>
-          </a:bodyPr>
-          <a:lstStyle/>
-          <a:p>
-            <a:pPr algn="l">
-              <a:defRPr sz="4400" b="1">
+              <a:defRPr sz="3000" b="1">
                 <a:solidFill>
                   <a:srgbClr val="F3F6F9"/>
                 </a:solidFill>
@@ -16312,27 +16466,27 @@
               </a:defRPr>
             </a:pPr>
             <a:r>
-              <a:t>下一步</a:t>
-            </a:r>
-          </a:p>
-        </p:txBody>
-      </p:sp>
-      <p:sp>
-        <p:nvSpPr>
-          <p:cNvPr id="5" name="Rectangle 4"/>
+              <a:t>技术路线图：从能跑到好用</a:t>
+            </a:r>
+          </a:p>
+        </p:txBody>
+      </p:sp>
+      <p:sp>
+        <p:nvSpPr>
+          <p:cNvPr id="4" name="Rectangle 3"/>
           <p:cNvSpPr/>
           <p:nvPr/>
         </p:nvSpPr>
         <p:spPr>
           <a:xfrm>
-            <a:off x="548640" y="4023360"/>
-            <a:ext cx="1828800" cy="73152"/>
+            <a:off x="0" y="960120"/>
+            <a:ext cx="164592" cy="5897880"/>
           </a:xfrm>
           <a:prstGeom prst="rect">
             <a:avLst/>
           </a:prstGeom>
           <a:solidFill>
-            <a:srgbClr val="FF6B35"/>
+            <a:srgbClr val="0096C7"/>
           </a:solidFill>
           <a:ln/>
         </p:spPr>
@@ -16360,22 +16514,26 @@
       </p:sp>
       <p:sp>
         <p:nvSpPr>
-          <p:cNvPr id="6" name="Rectangle 5"/>
+          <p:cNvPr id="5" name="Rectangle 4"/>
           <p:cNvSpPr/>
           <p:nvPr/>
         </p:nvSpPr>
         <p:spPr>
           <a:xfrm>
-            <a:off x="0" y="6537960"/>
-            <a:ext cx="12191695" cy="18288"/>
+            <a:off x="320040" y="1078992"/>
+            <a:ext cx="11548872" cy="5349240"/>
           </a:xfrm>
           <a:prstGeom prst="rect">
             <a:avLst/>
           </a:prstGeom>
           <a:solidFill>
-            <a:srgbClr val="0096C7"/>
+            <a:srgbClr val="FFFFFF"/>
           </a:solidFill>
-          <a:ln/>
+          <a:ln w="12700">
+            <a:solidFill>
+              <a:srgbClr val="E1E5E9"/>
+            </a:solidFill>
+          </a:ln>
         </p:spPr>
         <p:style>
           <a:lnRef idx="1">
@@ -16401,14 +16559,96 @@
       </p:sp>
       <p:sp>
         <p:nvSpPr>
-          <p:cNvPr id="7" name="TextBox 6"/>
+          <p:cNvPr id="6" name="Rectangle 5"/>
+          <p:cNvSpPr/>
+          <p:nvPr/>
+        </p:nvSpPr>
+        <p:spPr>
+          <a:xfrm>
+            <a:off x="777240" y="3200400"/>
+            <a:ext cx="10972800" cy="73152"/>
+          </a:xfrm>
+          <a:prstGeom prst="rect">
+            <a:avLst/>
+          </a:prstGeom>
+          <a:solidFill>
+            <a:srgbClr val="6C757D"/>
+          </a:solidFill>
+          <a:ln/>
+        </p:spPr>
+        <p:style>
+          <a:lnRef idx="1">
+            <a:schemeClr val="accent1"/>
+          </a:lnRef>
+          <a:fillRef idx="3">
+            <a:schemeClr val="accent1"/>
+          </a:fillRef>
+          <a:effectRef idx="2">
+            <a:schemeClr val="accent1"/>
+          </a:effectRef>
+          <a:fontRef idx="minor">
+            <a:schemeClr val="lt1"/>
+          </a:fontRef>
+        </p:style>
+        <p:txBody>
+          <a:bodyPr rtlCol="0" anchor="ctr"/>
+          <a:lstStyle/>
+          <a:p>
+            <a:pPr algn="ctr"/>
+          </a:p>
+        </p:txBody>
+      </p:sp>
+      <p:sp>
+        <p:nvSpPr>
+          <p:cNvPr id="7" name="Oval 6"/>
+          <p:cNvSpPr/>
+          <p:nvPr/>
+        </p:nvSpPr>
+        <p:spPr>
+          <a:xfrm>
+            <a:off x="822960" y="3063240"/>
+            <a:ext cx="320040" cy="320040"/>
+          </a:xfrm>
+          <a:prstGeom prst="ellipse">
+            <a:avLst/>
+          </a:prstGeom>
+          <a:solidFill>
+            <a:srgbClr val="28A745"/>
+          </a:solidFill>
+          <a:ln/>
+        </p:spPr>
+        <p:style>
+          <a:lnRef idx="1">
+            <a:schemeClr val="accent1"/>
+          </a:lnRef>
+          <a:fillRef idx="3">
+            <a:schemeClr val="accent1"/>
+          </a:fillRef>
+          <a:effectRef idx="2">
+            <a:schemeClr val="accent1"/>
+          </a:effectRef>
+          <a:fontRef idx="minor">
+            <a:schemeClr val="lt1"/>
+          </a:fontRef>
+        </p:style>
+        <p:txBody>
+          <a:bodyPr rtlCol="0" anchor="ctr"/>
+          <a:lstStyle/>
+          <a:p>
+            <a:pPr algn="ctr"/>
+          </a:p>
+        </p:txBody>
+      </p:sp>
+      <p:sp>
+        <p:nvSpPr>
+          <p:cNvPr id="8" name="TextBox 7"/>
           <p:cNvSpPr txBox="1"/>
           <p:nvPr/>
         </p:nvSpPr>
         <p:spPr>
           <a:xfrm>
-            <a:off x="457200" y="6583680"/>
-            <a:ext cx="3657600" cy="228600"/>
+            <a:off x="320040" y="2103120"/>
+            <a:ext cx="1645920" cy="457200"/>
           </a:xfrm>
           <a:prstGeom prst="rect">
             <a:avLst/>
@@ -16421,30 +16661,30 @@
           </a:bodyPr>
           <a:lstStyle/>
           <a:p>
-            <a:pPr algn="l">
-              <a:defRPr sz="1000" b="0">
-                <a:solidFill>
-                  <a:srgbClr val="6C757D"/>
-                </a:solidFill>
-                <a:latin typeface="Microsoft YaHei"/>
-              </a:defRPr>
-            </a:pPr>
-            <a:r>
-              <a:t>smallgameagent · LLM/VLM + 规则驱动</a:t>
-            </a:r>
-          </a:p>
-        </p:txBody>
-      </p:sp>
-      <p:sp>
-        <p:nvSpPr>
-          <p:cNvPr id="8" name="TextBox 7"/>
+            <a:pPr algn="ctr">
+              <a:defRPr sz="1300" b="1">
+                <a:solidFill>
+                  <a:srgbClr val="28A745"/>
+                </a:solidFill>
+                <a:latin typeface="Microsoft YaHei"/>
+              </a:defRPr>
+            </a:pPr>
+            <a:r>
+              <a:t>已完成</a:t>
+            </a:r>
+          </a:p>
+        </p:txBody>
+      </p:sp>
+      <p:sp>
+        <p:nvSpPr>
+          <p:cNvPr id="9" name="TextBox 8"/>
           <p:cNvSpPr txBox="1"/>
           <p:nvPr/>
         </p:nvSpPr>
         <p:spPr>
           <a:xfrm>
-            <a:off x="10789920" y="6583680"/>
-            <a:ext cx="914400" cy="228600"/>
+            <a:off x="91439" y="3474720"/>
+            <a:ext cx="2194560" cy="1188720"/>
           </a:xfrm>
           <a:prstGeom prst="rect">
             <a:avLst/>
@@ -16457,6 +16697,642 @@
           </a:bodyPr>
           <a:lstStyle/>
           <a:p>
+            <a:pPr algn="ctr">
+              <a:defRPr sz="1200" b="0">
+                <a:solidFill>
+                  <a:srgbClr val="1E2933"/>
+                </a:solidFill>
+                <a:latin typeface="Microsoft YaHei"/>
+              </a:defRPr>
+            </a:pPr>
+            <a:r>
+              <a:t>规则引擎 + 自动校准</a:t>
+            </a:r>
+            <a:br/>
+            <a:r>
+              <a:t>22 游戏可驱动</a:t>
+            </a:r>
+          </a:p>
+        </p:txBody>
+      </p:sp>
+      <p:sp>
+        <p:nvSpPr>
+          <p:cNvPr id="10" name="Oval 9"/>
+          <p:cNvSpPr/>
+          <p:nvPr/>
+        </p:nvSpPr>
+        <p:spPr>
+          <a:xfrm>
+            <a:off x="3108960" y="3063240"/>
+            <a:ext cx="320040" cy="320040"/>
+          </a:xfrm>
+          <a:prstGeom prst="ellipse">
+            <a:avLst/>
+          </a:prstGeom>
+          <a:solidFill>
+            <a:srgbClr val="28A745"/>
+          </a:solidFill>
+          <a:ln/>
+        </p:spPr>
+        <p:style>
+          <a:lnRef idx="1">
+            <a:schemeClr val="accent1"/>
+          </a:lnRef>
+          <a:fillRef idx="3">
+            <a:schemeClr val="accent1"/>
+          </a:fillRef>
+          <a:effectRef idx="2">
+            <a:schemeClr val="accent1"/>
+          </a:effectRef>
+          <a:fontRef idx="minor">
+            <a:schemeClr val="lt1"/>
+          </a:fontRef>
+        </p:style>
+        <p:txBody>
+          <a:bodyPr rtlCol="0" anchor="ctr"/>
+          <a:lstStyle/>
+          <a:p>
+            <a:pPr algn="ctr"/>
+          </a:p>
+        </p:txBody>
+      </p:sp>
+      <p:sp>
+        <p:nvSpPr>
+          <p:cNvPr id="11" name="TextBox 10"/>
+          <p:cNvSpPr txBox="1"/>
+          <p:nvPr/>
+        </p:nvSpPr>
+        <p:spPr>
+          <a:xfrm>
+            <a:off x="2606039" y="2103120"/>
+            <a:ext cx="1645920" cy="457200"/>
+          </a:xfrm>
+          <a:prstGeom prst="rect">
+            <a:avLst/>
+          </a:prstGeom>
+          <a:noFill/>
+        </p:spPr>
+        <p:txBody>
+          <a:bodyPr wrap="none">
+            <a:spAutoFit/>
+          </a:bodyPr>
+          <a:lstStyle/>
+          <a:p>
+            <a:pPr algn="ctr">
+              <a:defRPr sz="1300" b="1">
+                <a:solidFill>
+                  <a:srgbClr val="28A745"/>
+                </a:solidFill>
+                <a:latin typeface="Microsoft YaHei"/>
+              </a:defRPr>
+            </a:pPr>
+            <a:r>
+              <a:t>已完成</a:t>
+            </a:r>
+          </a:p>
+        </p:txBody>
+      </p:sp>
+      <p:sp>
+        <p:nvSpPr>
+          <p:cNvPr id="12" name="TextBox 11"/>
+          <p:cNvSpPr txBox="1"/>
+          <p:nvPr/>
+        </p:nvSpPr>
+        <p:spPr>
+          <a:xfrm>
+            <a:off x="2377439" y="3474720"/>
+            <a:ext cx="2194560" cy="1188720"/>
+          </a:xfrm>
+          <a:prstGeom prst="rect">
+            <a:avLst/>
+          </a:prstGeom>
+          <a:noFill/>
+        </p:spPr>
+        <p:txBody>
+          <a:bodyPr wrap="none">
+            <a:spAutoFit/>
+          </a:bodyPr>
+          <a:lstStyle/>
+          <a:p>
+            <a:pPr algn="ctr">
+              <a:defRPr sz="1200" b="0">
+                <a:solidFill>
+                  <a:srgbClr val="1E2933"/>
+                </a:solidFill>
+                <a:latin typeface="Microsoft YaHei"/>
+              </a:defRPr>
+            </a:pPr>
+            <a:r>
+              <a:t>multi-bus-memory</a:t>
+            </a:r>
+            <a:br/>
+            <a:r>
+              <a:t>记忆读回 0.300</a:t>
+            </a:r>
+          </a:p>
+        </p:txBody>
+      </p:sp>
+      <p:sp>
+        <p:nvSpPr>
+          <p:cNvPr id="13" name="Oval 12"/>
+          <p:cNvSpPr/>
+          <p:nvPr/>
+        </p:nvSpPr>
+        <p:spPr>
+          <a:xfrm>
+            <a:off x="5394960" y="3063240"/>
+            <a:ext cx="320040" cy="320040"/>
+          </a:xfrm>
+          <a:prstGeom prst="ellipse">
+            <a:avLst/>
+          </a:prstGeom>
+          <a:solidFill>
+            <a:srgbClr val="28A745"/>
+          </a:solidFill>
+          <a:ln/>
+        </p:spPr>
+        <p:style>
+          <a:lnRef idx="1">
+            <a:schemeClr val="accent1"/>
+          </a:lnRef>
+          <a:fillRef idx="3">
+            <a:schemeClr val="accent1"/>
+          </a:fillRef>
+          <a:effectRef idx="2">
+            <a:schemeClr val="accent1"/>
+          </a:effectRef>
+          <a:fontRef idx="minor">
+            <a:schemeClr val="lt1"/>
+          </a:fontRef>
+        </p:style>
+        <p:txBody>
+          <a:bodyPr rtlCol="0" anchor="ctr"/>
+          <a:lstStyle/>
+          <a:p>
+            <a:pPr algn="ctr"/>
+          </a:p>
+        </p:txBody>
+      </p:sp>
+      <p:sp>
+        <p:nvSpPr>
+          <p:cNvPr id="14" name="TextBox 13"/>
+          <p:cNvSpPr txBox="1"/>
+          <p:nvPr/>
+        </p:nvSpPr>
+        <p:spPr>
+          <a:xfrm>
+            <a:off x="4892040" y="2103120"/>
+            <a:ext cx="1645920" cy="457200"/>
+          </a:xfrm>
+          <a:prstGeom prst="rect">
+            <a:avLst/>
+          </a:prstGeom>
+          <a:noFill/>
+        </p:spPr>
+        <p:txBody>
+          <a:bodyPr wrap="none">
+            <a:spAutoFit/>
+          </a:bodyPr>
+          <a:lstStyle/>
+          <a:p>
+            <a:pPr algn="ctr">
+              <a:defRPr sz="1300" b="1">
+                <a:solidFill>
+                  <a:srgbClr val="28A745"/>
+                </a:solidFill>
+                <a:latin typeface="Microsoft YaHei"/>
+              </a:defRPr>
+            </a:pPr>
+            <a:r>
+              <a:t>已完成</a:t>
+            </a:r>
+          </a:p>
+        </p:txBody>
+      </p:sp>
+      <p:sp>
+        <p:nvSpPr>
+          <p:cNvPr id="15" name="TextBox 14"/>
+          <p:cNvSpPr txBox="1"/>
+          <p:nvPr/>
+        </p:nvSpPr>
+        <p:spPr>
+          <a:xfrm>
+            <a:off x="4663440" y="3474720"/>
+            <a:ext cx="2194560" cy="1188720"/>
+          </a:xfrm>
+          <a:prstGeom prst="rect">
+            <a:avLst/>
+          </a:prstGeom>
+          <a:noFill/>
+        </p:spPr>
+        <p:txBody>
+          <a:bodyPr wrap="none">
+            <a:spAutoFit/>
+          </a:bodyPr>
+          <a:lstStyle/>
+          <a:p>
+            <a:pPr algn="ctr">
+              <a:defRPr sz="1200" b="0">
+                <a:solidFill>
+                  <a:srgbClr val="1E2933"/>
+                </a:solidFill>
+                <a:latin typeface="Microsoft YaHei"/>
+              </a:defRPr>
+            </a:pPr>
+            <a:r>
+              <a:t>L2 code-file 更新</a:t>
+            </a:r>
+            <a:br/>
+            <a:r>
+              <a:t>qwen/kimi/xiaomi/opencodego 验证</a:t>
+            </a:r>
+          </a:p>
+        </p:txBody>
+      </p:sp>
+      <p:sp>
+        <p:nvSpPr>
+          <p:cNvPr id="16" name="Oval 15"/>
+          <p:cNvSpPr/>
+          <p:nvPr/>
+        </p:nvSpPr>
+        <p:spPr>
+          <a:xfrm>
+            <a:off x="7680960" y="3063240"/>
+            <a:ext cx="320040" cy="320040"/>
+          </a:xfrm>
+          <a:prstGeom prst="ellipse">
+            <a:avLst/>
+          </a:prstGeom>
+          <a:solidFill>
+            <a:srgbClr val="FF6B35"/>
+          </a:solidFill>
+          <a:ln/>
+        </p:spPr>
+        <p:style>
+          <a:lnRef idx="1">
+            <a:schemeClr val="accent1"/>
+          </a:lnRef>
+          <a:fillRef idx="3">
+            <a:schemeClr val="accent1"/>
+          </a:fillRef>
+          <a:effectRef idx="2">
+            <a:schemeClr val="accent1"/>
+          </a:effectRef>
+          <a:fontRef idx="minor">
+            <a:schemeClr val="lt1"/>
+          </a:fontRef>
+        </p:style>
+        <p:txBody>
+          <a:bodyPr rtlCol="0" anchor="ctr"/>
+          <a:lstStyle/>
+          <a:p>
+            <a:pPr algn="ctr"/>
+          </a:p>
+        </p:txBody>
+      </p:sp>
+      <p:sp>
+        <p:nvSpPr>
+          <p:cNvPr id="17" name="TextBox 16"/>
+          <p:cNvSpPr txBox="1"/>
+          <p:nvPr/>
+        </p:nvSpPr>
+        <p:spPr>
+          <a:xfrm>
+            <a:off x="7178040" y="2103120"/>
+            <a:ext cx="1645920" cy="457200"/>
+          </a:xfrm>
+          <a:prstGeom prst="rect">
+            <a:avLst/>
+          </a:prstGeom>
+          <a:noFill/>
+        </p:spPr>
+        <p:txBody>
+          <a:bodyPr wrap="none">
+            <a:spAutoFit/>
+          </a:bodyPr>
+          <a:lstStyle/>
+          <a:p>
+            <a:pPr algn="ctr">
+              <a:defRPr sz="1300" b="1">
+                <a:solidFill>
+                  <a:srgbClr val="FF6B35"/>
+                </a:solidFill>
+                <a:latin typeface="Microsoft YaHei"/>
+              </a:defRPr>
+            </a:pPr>
+            <a:r>
+              <a:t>进行中</a:t>
+            </a:r>
+          </a:p>
+        </p:txBody>
+      </p:sp>
+      <p:sp>
+        <p:nvSpPr>
+          <p:cNvPr id="18" name="TextBox 17"/>
+          <p:cNvSpPr txBox="1"/>
+          <p:nvPr/>
+        </p:nvSpPr>
+        <p:spPr>
+          <a:xfrm>
+            <a:off x="6949440" y="3474720"/>
+            <a:ext cx="2194560" cy="1188720"/>
+          </a:xfrm>
+          <a:prstGeom prst="rect">
+            <a:avLst/>
+          </a:prstGeom>
+          <a:noFill/>
+        </p:spPr>
+        <p:txBody>
+          <a:bodyPr wrap="none">
+            <a:spAutoFit/>
+          </a:bodyPr>
+          <a:lstStyle/>
+          <a:p>
+            <a:pPr algn="ctr">
+              <a:defRPr sz="1200" b="0">
+                <a:solidFill>
+                  <a:srgbClr val="1E2933"/>
+                </a:solidFill>
+                <a:latin typeface="Microsoft YaHei"/>
+              </a:defRPr>
+            </a:pPr>
+            <a:r>
+              <a:t>本地 VLM 上下文</a:t>
+            </a:r>
+            <a:br/>
+            <a:r>
+              <a:t>QLoRA 微调准备</a:t>
+            </a:r>
+          </a:p>
+        </p:txBody>
+      </p:sp>
+      <p:sp>
+        <p:nvSpPr>
+          <p:cNvPr id="19" name="Oval 18"/>
+          <p:cNvSpPr/>
+          <p:nvPr/>
+        </p:nvSpPr>
+        <p:spPr>
+          <a:xfrm>
+            <a:off x="9966960" y="3063240"/>
+            <a:ext cx="320040" cy="320040"/>
+          </a:xfrm>
+          <a:prstGeom prst="ellipse">
+            <a:avLst/>
+          </a:prstGeom>
+          <a:solidFill>
+            <a:srgbClr val="0096C7"/>
+          </a:solidFill>
+          <a:ln/>
+        </p:spPr>
+        <p:style>
+          <a:lnRef idx="1">
+            <a:schemeClr val="accent1"/>
+          </a:lnRef>
+          <a:fillRef idx="3">
+            <a:schemeClr val="accent1"/>
+          </a:fillRef>
+          <a:effectRef idx="2">
+            <a:schemeClr val="accent1"/>
+          </a:effectRef>
+          <a:fontRef idx="minor">
+            <a:schemeClr val="lt1"/>
+          </a:fontRef>
+        </p:style>
+        <p:txBody>
+          <a:bodyPr rtlCol="0" anchor="ctr"/>
+          <a:lstStyle/>
+          <a:p>
+            <a:pPr algn="ctr"/>
+          </a:p>
+        </p:txBody>
+      </p:sp>
+      <p:sp>
+        <p:nvSpPr>
+          <p:cNvPr id="20" name="TextBox 19"/>
+          <p:cNvSpPr txBox="1"/>
+          <p:nvPr/>
+        </p:nvSpPr>
+        <p:spPr>
+          <a:xfrm>
+            <a:off x="9464040" y="2103120"/>
+            <a:ext cx="1645920" cy="457200"/>
+          </a:xfrm>
+          <a:prstGeom prst="rect">
+            <a:avLst/>
+          </a:prstGeom>
+          <a:noFill/>
+        </p:spPr>
+        <p:txBody>
+          <a:bodyPr wrap="none">
+            <a:spAutoFit/>
+          </a:bodyPr>
+          <a:lstStyle/>
+          <a:p>
+            <a:pPr algn="ctr">
+              <a:defRPr sz="1300" b="1">
+                <a:solidFill>
+                  <a:srgbClr val="0096C7"/>
+                </a:solidFill>
+                <a:latin typeface="Microsoft YaHei"/>
+              </a:defRPr>
+            </a:pPr>
+            <a:r>
+              <a:t>下一步</a:t>
+            </a:r>
+          </a:p>
+        </p:txBody>
+      </p:sp>
+      <p:sp>
+        <p:nvSpPr>
+          <p:cNvPr id="21" name="TextBox 20"/>
+          <p:cNvSpPr txBox="1"/>
+          <p:nvPr/>
+        </p:nvSpPr>
+        <p:spPr>
+          <a:xfrm>
+            <a:off x="9235440" y="3474720"/>
+            <a:ext cx="2194560" cy="1188720"/>
+          </a:xfrm>
+          <a:prstGeom prst="rect">
+            <a:avLst/>
+          </a:prstGeom>
+          <a:noFill/>
+        </p:spPr>
+        <p:txBody>
+          <a:bodyPr wrap="none">
+            <a:spAutoFit/>
+          </a:bodyPr>
+          <a:lstStyle/>
+          <a:p>
+            <a:pPr algn="ctr">
+              <a:defRPr sz="1200" b="0">
+                <a:solidFill>
+                  <a:srgbClr val="1E2933"/>
+                </a:solidFill>
+                <a:latin typeface="Microsoft YaHei"/>
+              </a:defRPr>
+            </a:pPr>
+            <a:r>
+              <a:t>真实游戏在线触发</a:t>
+            </a:r>
+            <a:br/>
+            <a:r>
+              <a:t>规则更新 + A/B 回归</a:t>
+            </a:r>
+          </a:p>
+        </p:txBody>
+      </p:sp>
+      <p:sp>
+        <p:nvSpPr>
+          <p:cNvPr id="22" name="Rounded Rectangle 21"/>
+          <p:cNvSpPr/>
+          <p:nvPr/>
+        </p:nvSpPr>
+        <p:spPr>
+          <a:xfrm>
+            <a:off x="777240" y="5074920"/>
+            <a:ext cx="10972800" cy="822960"/>
+          </a:xfrm>
+          <a:prstGeom prst="roundRect">
+            <a:avLst/>
+          </a:prstGeom>
+          <a:solidFill>
+            <a:srgbClr val="F3F6F9"/>
+          </a:solidFill>
+          <a:ln/>
+        </p:spPr>
+        <p:style>
+          <a:lnRef idx="1">
+            <a:schemeClr val="accent1"/>
+          </a:lnRef>
+          <a:fillRef idx="3">
+            <a:schemeClr val="accent1"/>
+          </a:fillRef>
+          <a:effectRef idx="2">
+            <a:schemeClr val="accent1"/>
+          </a:effectRef>
+          <a:fontRef idx="minor">
+            <a:schemeClr val="lt1"/>
+          </a:fontRef>
+        </p:style>
+        <p:txBody>
+          <a:bodyPr rtlCol="0" anchor="ctr"/>
+          <a:lstStyle/>
+          <a:p>
+            <a:pPr algn="ctr">
+              <a:defRPr sz="1400" b="0">
+                <a:solidFill>
+                  <a:srgbClr val="1E2933"/>
+                </a:solidFill>
+                <a:latin typeface="Microsoft YaHei"/>
+              </a:defRPr>
+            </a:pPr>
+            <a:r>
+              <a:t>核心原则：把贵且慢的云端调用摊到多步，本地 VLM 只提供「证据」，规则引擎负责零延迟执行。</a:t>
+            </a:r>
+          </a:p>
+        </p:txBody>
+      </p:sp>
+      <p:sp>
+        <p:nvSpPr>
+          <p:cNvPr id="23" name="Rectangle 22"/>
+          <p:cNvSpPr/>
+          <p:nvPr/>
+        </p:nvSpPr>
+        <p:spPr>
+          <a:xfrm>
+            <a:off x="0" y="6537960"/>
+            <a:ext cx="12191695" cy="18288"/>
+          </a:xfrm>
+          <a:prstGeom prst="rect">
+            <a:avLst/>
+          </a:prstGeom>
+          <a:solidFill>
+            <a:srgbClr val="0096C7"/>
+          </a:solidFill>
+          <a:ln/>
+        </p:spPr>
+        <p:style>
+          <a:lnRef idx="1">
+            <a:schemeClr val="accent1"/>
+          </a:lnRef>
+          <a:fillRef idx="3">
+            <a:schemeClr val="accent1"/>
+          </a:fillRef>
+          <a:effectRef idx="2">
+            <a:schemeClr val="accent1"/>
+          </a:effectRef>
+          <a:fontRef idx="minor">
+            <a:schemeClr val="lt1"/>
+          </a:fontRef>
+        </p:style>
+        <p:txBody>
+          <a:bodyPr rtlCol="0" anchor="ctr"/>
+          <a:lstStyle/>
+          <a:p>
+            <a:pPr algn="ctr"/>
+          </a:p>
+        </p:txBody>
+      </p:sp>
+      <p:sp>
+        <p:nvSpPr>
+          <p:cNvPr id="24" name="TextBox 23"/>
+          <p:cNvSpPr txBox="1"/>
+          <p:nvPr/>
+        </p:nvSpPr>
+        <p:spPr>
+          <a:xfrm>
+            <a:off x="457200" y="6583680"/>
+            <a:ext cx="3657600" cy="228600"/>
+          </a:xfrm>
+          <a:prstGeom prst="rect">
+            <a:avLst/>
+          </a:prstGeom>
+          <a:noFill/>
+        </p:spPr>
+        <p:txBody>
+          <a:bodyPr wrap="none">
+            <a:spAutoFit/>
+          </a:bodyPr>
+          <a:lstStyle/>
+          <a:p>
+            <a:pPr algn="l">
+              <a:defRPr sz="1000" b="0">
+                <a:solidFill>
+                  <a:srgbClr val="6C757D"/>
+                </a:solidFill>
+                <a:latin typeface="Microsoft YaHei"/>
+              </a:defRPr>
+            </a:pPr>
+            <a:r>
+              <a:t>smallgameagent · LLM/VLM + 规则驱动</a:t>
+            </a:r>
+          </a:p>
+        </p:txBody>
+      </p:sp>
+      <p:sp>
+        <p:nvSpPr>
+          <p:cNvPr id="25" name="TextBox 24"/>
+          <p:cNvSpPr txBox="1"/>
+          <p:nvPr/>
+        </p:nvSpPr>
+        <p:spPr>
+          <a:xfrm>
+            <a:off x="10789920" y="6583680"/>
+            <a:ext cx="914400" cy="228600"/>
+          </a:xfrm>
+          <a:prstGeom prst="rect">
+            <a:avLst/>
+          </a:prstGeom>
+          <a:noFill/>
+        </p:spPr>
+        <p:txBody>
+          <a:bodyPr wrap="none">
+            <a:spAutoFit/>
+          </a:bodyPr>
+          <a:lstStyle/>
+          <a:p>
             <a:pPr algn="r">
               <a:defRPr sz="1000" b="0">
                 <a:solidFill>
@@ -16466,7 +17342,7 @@
               </a:defRPr>
             </a:pPr>
             <a:r>
-              <a:t>30/32</a:t>
+              <a:t>30/33</a:t>
             </a:r>
           </a:p>
         </p:txBody>
@@ -16498,7 +17374,7 @@
         <p:spPr>
           <a:xfrm>
             <a:off x="0" y="0"/>
-            <a:ext cx="12191695" cy="960120"/>
+            <a:ext cx="12191695" cy="6858000"/>
           </a:xfrm>
           <a:prstGeom prst="rect">
             <a:avLst/>
@@ -16538,8 +17414,8 @@
         </p:nvSpPr>
         <p:spPr>
           <a:xfrm>
-            <a:off x="457200" y="228600"/>
-            <a:ext cx="11247120" cy="548640"/>
+            <a:off x="548640" y="1645920"/>
+            <a:ext cx="2743200" cy="1828800"/>
           </a:xfrm>
           <a:prstGeom prst="rect">
             <a:avLst/>
@@ -16553,7 +17429,43 @@
           <a:lstStyle/>
           <a:p>
             <a:pPr algn="l">
-              <a:defRPr sz="3000" b="1">
+              <a:defRPr sz="12000" b="1">
+                <a:solidFill>
+                  <a:srgbClr val="333DA0"/>
+                </a:solidFill>
+                <a:latin typeface="Microsoft YaHei"/>
+              </a:defRPr>
+            </a:pPr>
+            <a:r>
+              <a:t>10</a:t>
+            </a:r>
+          </a:p>
+        </p:txBody>
+      </p:sp>
+      <p:sp>
+        <p:nvSpPr>
+          <p:cNvPr id="4" name="TextBox 3"/>
+          <p:cNvSpPr txBox="1"/>
+          <p:nvPr/>
+        </p:nvSpPr>
+        <p:spPr>
+          <a:xfrm>
+            <a:off x="548640" y="2834640"/>
+            <a:ext cx="11064240" cy="1097280"/>
+          </a:xfrm>
+          <a:prstGeom prst="rect">
+            <a:avLst/>
+          </a:prstGeom>
+          <a:noFill/>
+        </p:spPr>
+        <p:txBody>
+          <a:bodyPr wrap="none">
+            <a:spAutoFit/>
+          </a:bodyPr>
+          <a:lstStyle/>
+          <a:p>
+            <a:pPr algn="l">
+              <a:defRPr sz="4400" b="1">
                 <a:solidFill>
                   <a:srgbClr val="F3F6F9"/>
                 </a:solidFill>
@@ -16561,27 +17473,27 @@
               </a:defRPr>
             </a:pPr>
             <a:r>
-              <a:t>下一步：把实验变成稳定系统</a:t>
-            </a:r>
-          </a:p>
-        </p:txBody>
-      </p:sp>
-      <p:sp>
-        <p:nvSpPr>
-          <p:cNvPr id="4" name="Rectangle 3"/>
+              <a:t>下一步</a:t>
+            </a:r>
+          </a:p>
+        </p:txBody>
+      </p:sp>
+      <p:sp>
+        <p:nvSpPr>
+          <p:cNvPr id="5" name="Rectangle 4"/>
           <p:cNvSpPr/>
           <p:nvPr/>
         </p:nvSpPr>
         <p:spPr>
           <a:xfrm>
-            <a:off x="0" y="960120"/>
-            <a:ext cx="164592" cy="5897880"/>
+            <a:off x="548640" y="4023360"/>
+            <a:ext cx="1828800" cy="73152"/>
           </a:xfrm>
           <a:prstGeom prst="rect">
             <a:avLst/>
           </a:prstGeom>
           <a:solidFill>
-            <a:srgbClr val="0096C7"/>
+            <a:srgbClr val="FF6B35"/>
           </a:solidFill>
           <a:ln/>
         </p:spPr>
@@ -16609,26 +17521,22 @@
       </p:sp>
       <p:sp>
         <p:nvSpPr>
-          <p:cNvPr id="5" name="Rectangle 4"/>
+          <p:cNvPr id="6" name="Rectangle 5"/>
           <p:cNvSpPr/>
           <p:nvPr/>
         </p:nvSpPr>
         <p:spPr>
           <a:xfrm>
-            <a:off x="320040" y="1078992"/>
-            <a:ext cx="11548872" cy="5349240"/>
+            <a:off x="0" y="6537960"/>
+            <a:ext cx="12191695" cy="18288"/>
           </a:xfrm>
           <a:prstGeom prst="rect">
             <a:avLst/>
           </a:prstGeom>
           <a:solidFill>
-            <a:srgbClr val="FFFFFF"/>
+            <a:srgbClr val="0096C7"/>
           </a:solidFill>
-          <a:ln w="12700">
-            <a:solidFill>
-              <a:srgbClr val="E1E5E9"/>
-            </a:solidFill>
-          </a:ln>
+          <a:ln/>
         </p:spPr>
         <p:style>
           <a:lnRef idx="1">
@@ -16654,413 +17562,7 @@
       </p:sp>
       <p:sp>
         <p:nvSpPr>
-          <p:cNvPr id="6" name="TextBox 5"/>
-          <p:cNvSpPr txBox="1"/>
-          <p:nvPr/>
-        </p:nvSpPr>
-        <p:spPr>
-          <a:xfrm>
-            <a:off x="777240" y="1417320"/>
-            <a:ext cx="10972800" cy="5029200"/>
-          </a:xfrm>
-          <a:prstGeom prst="rect">
-            <a:avLst/>
-          </a:prstGeom>
-          <a:noFill/>
-        </p:spPr>
-        <p:txBody>
-          <a:bodyPr wrap="square">
-            <a:spAutoFit/>
-          </a:bodyPr>
-          <a:lstStyle/>
-          <a:p>
-            <a:pPr algn="l">
-              <a:spcAft>
-                <a:spcPts val="1200"/>
-              </a:spcAft>
-              <a:defRPr sz="1800" b="0">
-                <a:solidFill>
-                  <a:srgbClr val="1E2933"/>
-                </a:solidFill>
-                <a:latin typeface="Microsoft YaHei"/>
-              </a:defRPr>
-            </a:pPr>
-            <a:r>
-              <a:t>  在真实游戏运行中触发 code-file 更新，验证动态 stall/composite 下 L2 的决策质量</a:t>
-            </a:r>
-          </a:p>
-          <a:p>
-            <a:pPr algn="l">
-              <a:spcAft>
-                <a:spcPts val="1200"/>
-              </a:spcAft>
-              <a:defRPr sz="1800" b="0">
-                <a:solidFill>
-                  <a:srgbClr val="1E2933"/>
-                </a:solidFill>
-                <a:latin typeface="Microsoft YaHei"/>
-              </a:defRPr>
-            </a:pPr>
-            <a:r>
-              <a:t>  把 runtime_rules.json 的 schema 写进 L2 prompt，约束可改字段与取值范围</a:t>
-            </a:r>
-          </a:p>
-          <a:p>
-            <a:pPr algn="l">
-              <a:spcAft>
-                <a:spcPts val="1200"/>
-              </a:spcAft>
-              <a:defRPr sz="1800" b="0">
-                <a:solidFill>
-                  <a:srgbClr val="1E2933"/>
-                </a:solidFill>
-                <a:latin typeface="Microsoft YaHei"/>
-              </a:defRPr>
-            </a:pPr>
-            <a:r>
-              <a:t>  让本地 VLM 常驻，验证 L1 战术修正对 joystick 游戏的实际收益</a:t>
-            </a:r>
-          </a:p>
-          <a:p>
-            <a:pPr algn="l">
-              <a:spcAft>
-                <a:spcPts val="1200"/>
-              </a:spcAft>
-              <a:defRPr sz="1800" b="0">
-                <a:solidFill>
-                  <a:srgbClr val="1E2933"/>
-                </a:solidFill>
-                <a:latin typeface="Microsoft YaHei"/>
-              </a:defRPr>
-            </a:pPr>
-            <a:r>
-              <a:t>  在 5090 服务器跑 QLoRA 微调，把本地 VLM 训练成专用画面理解器</a:t>
-            </a:r>
-          </a:p>
-          <a:p>
-            <a:pPr algn="l">
-              <a:spcAft>
-                <a:spcPts val="1200"/>
-              </a:spcAft>
-              <a:defRPr sz="1800" b="0">
-                <a:solidFill>
-                  <a:srgbClr val="1E2933"/>
-                </a:solidFill>
-                <a:latin typeface="Microsoft YaHei"/>
-              </a:defRPr>
-            </a:pPr>
-            <a:r>
-              <a:t>  把离线回放接入 CI：每次规则改动自动跑 5 游戏回归</a:t>
-            </a:r>
-          </a:p>
-          <a:p>
-            <a:pPr algn="l">
-              <a:spcAft>
-                <a:spcPts val="1200"/>
-              </a:spcAft>
-              <a:defRPr sz="1800" b="0">
-                <a:solidFill>
-                  <a:srgbClr val="1E2933"/>
-                </a:solidFill>
-                <a:latin typeface="Microsoft YaHei"/>
-              </a:defRPr>
-            </a:pPr>
-            <a:r>
-              <a:t>  探索 Agent 间更严格的仲裁：Critic 对 L0/L2 冲突做最终决策</a:t>
-            </a:r>
-          </a:p>
-        </p:txBody>
-      </p:sp>
-      <p:sp>
-        <p:nvSpPr>
-          <p:cNvPr id="7" name="Oval 6"/>
-          <p:cNvSpPr/>
-          <p:nvPr/>
-        </p:nvSpPr>
-        <p:spPr>
-          <a:xfrm>
-            <a:off x="45720" y="0"/>
-            <a:ext cx="137160" cy="137160"/>
-          </a:xfrm>
-          <a:prstGeom prst="ellipse">
-            <a:avLst/>
-          </a:prstGeom>
-          <a:solidFill>
-            <a:srgbClr val="0096C7"/>
-          </a:solidFill>
-          <a:ln/>
-        </p:spPr>
-        <p:style>
-          <a:lnRef idx="1">
-            <a:schemeClr val="accent1"/>
-          </a:lnRef>
-          <a:fillRef idx="3">
-            <a:schemeClr val="accent1"/>
-          </a:fillRef>
-          <a:effectRef idx="2">
-            <a:schemeClr val="accent1"/>
-          </a:effectRef>
-          <a:fontRef idx="minor">
-            <a:schemeClr val="lt1"/>
-          </a:fontRef>
-        </p:style>
-        <p:txBody>
-          <a:bodyPr rtlCol="0" anchor="ctr"/>
-          <a:lstStyle/>
-          <a:p>
-            <a:pPr algn="ctr"/>
-          </a:p>
-        </p:txBody>
-      </p:sp>
-      <p:sp>
-        <p:nvSpPr>
-          <p:cNvPr id="8" name="Oval 7"/>
-          <p:cNvSpPr/>
-          <p:nvPr/>
-        </p:nvSpPr>
-        <p:spPr>
-          <a:xfrm>
-            <a:off x="45720" y="0"/>
-            <a:ext cx="137160" cy="137160"/>
-          </a:xfrm>
-          <a:prstGeom prst="ellipse">
-            <a:avLst/>
-          </a:prstGeom>
-          <a:solidFill>
-            <a:srgbClr val="0096C7"/>
-          </a:solidFill>
-          <a:ln/>
-        </p:spPr>
-        <p:style>
-          <a:lnRef idx="1">
-            <a:schemeClr val="accent1"/>
-          </a:lnRef>
-          <a:fillRef idx="3">
-            <a:schemeClr val="accent1"/>
-          </a:fillRef>
-          <a:effectRef idx="2">
-            <a:schemeClr val="accent1"/>
-          </a:effectRef>
-          <a:fontRef idx="minor">
-            <a:schemeClr val="lt1"/>
-          </a:fontRef>
-        </p:style>
-        <p:txBody>
-          <a:bodyPr rtlCol="0" anchor="ctr"/>
-          <a:lstStyle/>
-          <a:p>
-            <a:pPr algn="ctr"/>
-          </a:p>
-        </p:txBody>
-      </p:sp>
-      <p:sp>
-        <p:nvSpPr>
-          <p:cNvPr id="9" name="Oval 8"/>
-          <p:cNvSpPr/>
-          <p:nvPr/>
-        </p:nvSpPr>
-        <p:spPr>
-          <a:xfrm>
-            <a:off x="45720" y="0"/>
-            <a:ext cx="137160" cy="137160"/>
-          </a:xfrm>
-          <a:prstGeom prst="ellipse">
-            <a:avLst/>
-          </a:prstGeom>
-          <a:solidFill>
-            <a:srgbClr val="0096C7"/>
-          </a:solidFill>
-          <a:ln/>
-        </p:spPr>
-        <p:style>
-          <a:lnRef idx="1">
-            <a:schemeClr val="accent1"/>
-          </a:lnRef>
-          <a:fillRef idx="3">
-            <a:schemeClr val="accent1"/>
-          </a:fillRef>
-          <a:effectRef idx="2">
-            <a:schemeClr val="accent1"/>
-          </a:effectRef>
-          <a:fontRef idx="minor">
-            <a:schemeClr val="lt1"/>
-          </a:fontRef>
-        </p:style>
-        <p:txBody>
-          <a:bodyPr rtlCol="0" anchor="ctr"/>
-          <a:lstStyle/>
-          <a:p>
-            <a:pPr algn="ctr"/>
-          </a:p>
-        </p:txBody>
-      </p:sp>
-      <p:sp>
-        <p:nvSpPr>
-          <p:cNvPr id="10" name="Oval 9"/>
-          <p:cNvSpPr/>
-          <p:nvPr/>
-        </p:nvSpPr>
-        <p:spPr>
-          <a:xfrm>
-            <a:off x="45720" y="0"/>
-            <a:ext cx="137160" cy="137160"/>
-          </a:xfrm>
-          <a:prstGeom prst="ellipse">
-            <a:avLst/>
-          </a:prstGeom>
-          <a:solidFill>
-            <a:srgbClr val="0096C7"/>
-          </a:solidFill>
-          <a:ln/>
-        </p:spPr>
-        <p:style>
-          <a:lnRef idx="1">
-            <a:schemeClr val="accent1"/>
-          </a:lnRef>
-          <a:fillRef idx="3">
-            <a:schemeClr val="accent1"/>
-          </a:fillRef>
-          <a:effectRef idx="2">
-            <a:schemeClr val="accent1"/>
-          </a:effectRef>
-          <a:fontRef idx="minor">
-            <a:schemeClr val="lt1"/>
-          </a:fontRef>
-        </p:style>
-        <p:txBody>
-          <a:bodyPr rtlCol="0" anchor="ctr"/>
-          <a:lstStyle/>
-          <a:p>
-            <a:pPr algn="ctr"/>
-          </a:p>
-        </p:txBody>
-      </p:sp>
-      <p:sp>
-        <p:nvSpPr>
-          <p:cNvPr id="11" name="Oval 10"/>
-          <p:cNvSpPr/>
-          <p:nvPr/>
-        </p:nvSpPr>
-        <p:spPr>
-          <a:xfrm>
-            <a:off x="45720" y="0"/>
-            <a:ext cx="137160" cy="137160"/>
-          </a:xfrm>
-          <a:prstGeom prst="ellipse">
-            <a:avLst/>
-          </a:prstGeom>
-          <a:solidFill>
-            <a:srgbClr val="0096C7"/>
-          </a:solidFill>
-          <a:ln/>
-        </p:spPr>
-        <p:style>
-          <a:lnRef idx="1">
-            <a:schemeClr val="accent1"/>
-          </a:lnRef>
-          <a:fillRef idx="3">
-            <a:schemeClr val="accent1"/>
-          </a:fillRef>
-          <a:effectRef idx="2">
-            <a:schemeClr val="accent1"/>
-          </a:effectRef>
-          <a:fontRef idx="minor">
-            <a:schemeClr val="lt1"/>
-          </a:fontRef>
-        </p:style>
-        <p:txBody>
-          <a:bodyPr rtlCol="0" anchor="ctr"/>
-          <a:lstStyle/>
-          <a:p>
-            <a:pPr algn="ctr"/>
-          </a:p>
-        </p:txBody>
-      </p:sp>
-      <p:sp>
-        <p:nvSpPr>
-          <p:cNvPr id="12" name="Oval 11"/>
-          <p:cNvSpPr/>
-          <p:nvPr/>
-        </p:nvSpPr>
-        <p:spPr>
-          <a:xfrm>
-            <a:off x="45720" y="0"/>
-            <a:ext cx="137160" cy="137160"/>
-          </a:xfrm>
-          <a:prstGeom prst="ellipse">
-            <a:avLst/>
-          </a:prstGeom>
-          <a:solidFill>
-            <a:srgbClr val="0096C7"/>
-          </a:solidFill>
-          <a:ln/>
-        </p:spPr>
-        <p:style>
-          <a:lnRef idx="1">
-            <a:schemeClr val="accent1"/>
-          </a:lnRef>
-          <a:fillRef idx="3">
-            <a:schemeClr val="accent1"/>
-          </a:fillRef>
-          <a:effectRef idx="2">
-            <a:schemeClr val="accent1"/>
-          </a:effectRef>
-          <a:fontRef idx="minor">
-            <a:schemeClr val="lt1"/>
-          </a:fontRef>
-        </p:style>
-        <p:txBody>
-          <a:bodyPr rtlCol="0" anchor="ctr"/>
-          <a:lstStyle/>
-          <a:p>
-            <a:pPr algn="ctr"/>
-          </a:p>
-        </p:txBody>
-      </p:sp>
-      <p:sp>
-        <p:nvSpPr>
-          <p:cNvPr id="13" name="Rectangle 12"/>
-          <p:cNvSpPr/>
-          <p:nvPr/>
-        </p:nvSpPr>
-        <p:spPr>
-          <a:xfrm>
-            <a:off x="0" y="6537960"/>
-            <a:ext cx="12191695" cy="18288"/>
-          </a:xfrm>
-          <a:prstGeom prst="rect">
-            <a:avLst/>
-          </a:prstGeom>
-          <a:solidFill>
-            <a:srgbClr val="0096C7"/>
-          </a:solidFill>
-          <a:ln/>
-        </p:spPr>
-        <p:style>
-          <a:lnRef idx="1">
-            <a:schemeClr val="accent1"/>
-          </a:lnRef>
-          <a:fillRef idx="3">
-            <a:schemeClr val="accent1"/>
-          </a:fillRef>
-          <a:effectRef idx="2">
-            <a:schemeClr val="accent1"/>
-          </a:effectRef>
-          <a:fontRef idx="minor">
-            <a:schemeClr val="lt1"/>
-          </a:fontRef>
-        </p:style>
-        <p:txBody>
-          <a:bodyPr rtlCol="0" anchor="ctr"/>
-          <a:lstStyle/>
-          <a:p>
-            <a:pPr algn="ctr"/>
-          </a:p>
-        </p:txBody>
-      </p:sp>
-      <p:sp>
-        <p:nvSpPr>
-          <p:cNvPr id="14" name="TextBox 13"/>
+          <p:cNvPr id="7" name="TextBox 6"/>
           <p:cNvSpPr txBox="1"/>
           <p:nvPr/>
         </p:nvSpPr>
@@ -17096,7 +17598,7 @@
       </p:sp>
       <p:sp>
         <p:nvSpPr>
-          <p:cNvPr id="15" name="TextBox 14"/>
+          <p:cNvPr id="8" name="TextBox 7"/>
           <p:cNvSpPr txBox="1"/>
           <p:nvPr/>
         </p:nvSpPr>
@@ -17125,7 +17627,7 @@
               </a:defRPr>
             </a:pPr>
             <a:r>
-              <a:t>31/32</a:t>
+              <a:t>31/33</a:t>
             </a:r>
           </a:p>
         </p:txBody>
@@ -17157,6 +17659,665 @@
         <p:spPr>
           <a:xfrm>
             <a:off x="0" y="0"/>
+            <a:ext cx="12191695" cy="960120"/>
+          </a:xfrm>
+          <a:prstGeom prst="rect">
+            <a:avLst/>
+          </a:prstGeom>
+          <a:solidFill>
+            <a:srgbClr val="1A237E"/>
+          </a:solidFill>
+          <a:ln/>
+        </p:spPr>
+        <p:style>
+          <a:lnRef idx="1">
+            <a:schemeClr val="accent1"/>
+          </a:lnRef>
+          <a:fillRef idx="3">
+            <a:schemeClr val="accent1"/>
+          </a:fillRef>
+          <a:effectRef idx="2">
+            <a:schemeClr val="accent1"/>
+          </a:effectRef>
+          <a:fontRef idx="minor">
+            <a:schemeClr val="lt1"/>
+          </a:fontRef>
+        </p:style>
+        <p:txBody>
+          <a:bodyPr rtlCol="0" anchor="ctr"/>
+          <a:lstStyle/>
+          <a:p>
+            <a:pPr algn="ctr"/>
+          </a:p>
+        </p:txBody>
+      </p:sp>
+      <p:sp>
+        <p:nvSpPr>
+          <p:cNvPr id="3" name="TextBox 2"/>
+          <p:cNvSpPr txBox="1"/>
+          <p:nvPr/>
+        </p:nvSpPr>
+        <p:spPr>
+          <a:xfrm>
+            <a:off x="457200" y="228600"/>
+            <a:ext cx="11247120" cy="548640"/>
+          </a:xfrm>
+          <a:prstGeom prst="rect">
+            <a:avLst/>
+          </a:prstGeom>
+          <a:noFill/>
+        </p:spPr>
+        <p:txBody>
+          <a:bodyPr wrap="none">
+            <a:spAutoFit/>
+          </a:bodyPr>
+          <a:lstStyle/>
+          <a:p>
+            <a:pPr algn="l">
+              <a:defRPr sz="3000" b="1">
+                <a:solidFill>
+                  <a:srgbClr val="F3F6F9"/>
+                </a:solidFill>
+                <a:latin typeface="Microsoft YaHei"/>
+              </a:defRPr>
+            </a:pPr>
+            <a:r>
+              <a:t>下一步：把实验变成稳定系统</a:t>
+            </a:r>
+          </a:p>
+        </p:txBody>
+      </p:sp>
+      <p:sp>
+        <p:nvSpPr>
+          <p:cNvPr id="4" name="Rectangle 3"/>
+          <p:cNvSpPr/>
+          <p:nvPr/>
+        </p:nvSpPr>
+        <p:spPr>
+          <a:xfrm>
+            <a:off x="0" y="960120"/>
+            <a:ext cx="164592" cy="5897880"/>
+          </a:xfrm>
+          <a:prstGeom prst="rect">
+            <a:avLst/>
+          </a:prstGeom>
+          <a:solidFill>
+            <a:srgbClr val="0096C7"/>
+          </a:solidFill>
+          <a:ln/>
+        </p:spPr>
+        <p:style>
+          <a:lnRef idx="1">
+            <a:schemeClr val="accent1"/>
+          </a:lnRef>
+          <a:fillRef idx="3">
+            <a:schemeClr val="accent1"/>
+          </a:fillRef>
+          <a:effectRef idx="2">
+            <a:schemeClr val="accent1"/>
+          </a:effectRef>
+          <a:fontRef idx="minor">
+            <a:schemeClr val="lt1"/>
+          </a:fontRef>
+        </p:style>
+        <p:txBody>
+          <a:bodyPr rtlCol="0" anchor="ctr"/>
+          <a:lstStyle/>
+          <a:p>
+            <a:pPr algn="ctr"/>
+          </a:p>
+        </p:txBody>
+      </p:sp>
+      <p:sp>
+        <p:nvSpPr>
+          <p:cNvPr id="5" name="Rectangle 4"/>
+          <p:cNvSpPr/>
+          <p:nvPr/>
+        </p:nvSpPr>
+        <p:spPr>
+          <a:xfrm>
+            <a:off x="320040" y="1078992"/>
+            <a:ext cx="11548872" cy="5349240"/>
+          </a:xfrm>
+          <a:prstGeom prst="rect">
+            <a:avLst/>
+          </a:prstGeom>
+          <a:solidFill>
+            <a:srgbClr val="FFFFFF"/>
+          </a:solidFill>
+          <a:ln w="12700">
+            <a:solidFill>
+              <a:srgbClr val="E1E5E9"/>
+            </a:solidFill>
+          </a:ln>
+        </p:spPr>
+        <p:style>
+          <a:lnRef idx="1">
+            <a:schemeClr val="accent1"/>
+          </a:lnRef>
+          <a:fillRef idx="3">
+            <a:schemeClr val="accent1"/>
+          </a:fillRef>
+          <a:effectRef idx="2">
+            <a:schemeClr val="accent1"/>
+          </a:effectRef>
+          <a:fontRef idx="minor">
+            <a:schemeClr val="lt1"/>
+          </a:fontRef>
+        </p:style>
+        <p:txBody>
+          <a:bodyPr rtlCol="0" anchor="ctr"/>
+          <a:lstStyle/>
+          <a:p>
+            <a:pPr algn="ctr"/>
+          </a:p>
+        </p:txBody>
+      </p:sp>
+      <p:sp>
+        <p:nvSpPr>
+          <p:cNvPr id="6" name="TextBox 5"/>
+          <p:cNvSpPr txBox="1"/>
+          <p:nvPr/>
+        </p:nvSpPr>
+        <p:spPr>
+          <a:xfrm>
+            <a:off x="777240" y="1417320"/>
+            <a:ext cx="10972800" cy="5029200"/>
+          </a:xfrm>
+          <a:prstGeom prst="rect">
+            <a:avLst/>
+          </a:prstGeom>
+          <a:noFill/>
+        </p:spPr>
+        <p:txBody>
+          <a:bodyPr wrap="square">
+            <a:spAutoFit/>
+          </a:bodyPr>
+          <a:lstStyle/>
+          <a:p>
+            <a:pPr algn="l">
+              <a:spcAft>
+                <a:spcPts val="1200"/>
+              </a:spcAft>
+              <a:defRPr sz="1800" b="0">
+                <a:solidFill>
+                  <a:srgbClr val="1E2933"/>
+                </a:solidFill>
+                <a:latin typeface="Microsoft YaHei"/>
+              </a:defRPr>
+            </a:pPr>
+            <a:r>
+              <a:t>  在真实游戏运行中触发 code-file 更新，验证动态 stall/composite 下 L2 的决策质量</a:t>
+            </a:r>
+          </a:p>
+          <a:p>
+            <a:pPr algn="l">
+              <a:spcAft>
+                <a:spcPts val="1200"/>
+              </a:spcAft>
+              <a:defRPr sz="1800" b="0">
+                <a:solidFill>
+                  <a:srgbClr val="1E2933"/>
+                </a:solidFill>
+                <a:latin typeface="Microsoft YaHei"/>
+              </a:defRPr>
+            </a:pPr>
+            <a:r>
+              <a:t>  把 runtime_rules.json 的 schema 写进 L2 prompt，约束可改字段与取值范围</a:t>
+            </a:r>
+          </a:p>
+          <a:p>
+            <a:pPr algn="l">
+              <a:spcAft>
+                <a:spcPts val="1200"/>
+              </a:spcAft>
+              <a:defRPr sz="1800" b="0">
+                <a:solidFill>
+                  <a:srgbClr val="1E2933"/>
+                </a:solidFill>
+                <a:latin typeface="Microsoft YaHei"/>
+              </a:defRPr>
+            </a:pPr>
+            <a:r>
+              <a:t>  让本地 VLM 常驻，验证 L1 战术修正对 joystick 游戏的实际收益</a:t>
+            </a:r>
+          </a:p>
+          <a:p>
+            <a:pPr algn="l">
+              <a:spcAft>
+                <a:spcPts val="1200"/>
+              </a:spcAft>
+              <a:defRPr sz="1800" b="0">
+                <a:solidFill>
+                  <a:srgbClr val="1E2933"/>
+                </a:solidFill>
+                <a:latin typeface="Microsoft YaHei"/>
+              </a:defRPr>
+            </a:pPr>
+            <a:r>
+              <a:t>  在 5090 服务器跑 QLoRA 微调，把本地 VLM 训练成专用画面理解器</a:t>
+            </a:r>
+          </a:p>
+          <a:p>
+            <a:pPr algn="l">
+              <a:spcAft>
+                <a:spcPts val="1200"/>
+              </a:spcAft>
+              <a:defRPr sz="1800" b="0">
+                <a:solidFill>
+                  <a:srgbClr val="1E2933"/>
+                </a:solidFill>
+                <a:latin typeface="Microsoft YaHei"/>
+              </a:defRPr>
+            </a:pPr>
+            <a:r>
+              <a:t>  把离线回放接入 CI：每次规则改动自动跑 5 游戏回归</a:t>
+            </a:r>
+          </a:p>
+          <a:p>
+            <a:pPr algn="l">
+              <a:spcAft>
+                <a:spcPts val="1200"/>
+              </a:spcAft>
+              <a:defRPr sz="1800" b="0">
+                <a:solidFill>
+                  <a:srgbClr val="1E2933"/>
+                </a:solidFill>
+                <a:latin typeface="Microsoft YaHei"/>
+              </a:defRPr>
+            </a:pPr>
+            <a:r>
+              <a:t>  探索 Agent 间更严格的仲裁：Critic 对 L0/L2 冲突做最终决策</a:t>
+            </a:r>
+          </a:p>
+        </p:txBody>
+      </p:sp>
+      <p:sp>
+        <p:nvSpPr>
+          <p:cNvPr id="7" name="Oval 6"/>
+          <p:cNvSpPr/>
+          <p:nvPr/>
+        </p:nvSpPr>
+        <p:spPr>
+          <a:xfrm>
+            <a:off x="45720" y="0"/>
+            <a:ext cx="137160" cy="137160"/>
+          </a:xfrm>
+          <a:prstGeom prst="ellipse">
+            <a:avLst/>
+          </a:prstGeom>
+          <a:solidFill>
+            <a:srgbClr val="0096C7"/>
+          </a:solidFill>
+          <a:ln/>
+        </p:spPr>
+        <p:style>
+          <a:lnRef idx="1">
+            <a:schemeClr val="accent1"/>
+          </a:lnRef>
+          <a:fillRef idx="3">
+            <a:schemeClr val="accent1"/>
+          </a:fillRef>
+          <a:effectRef idx="2">
+            <a:schemeClr val="accent1"/>
+          </a:effectRef>
+          <a:fontRef idx="minor">
+            <a:schemeClr val="lt1"/>
+          </a:fontRef>
+        </p:style>
+        <p:txBody>
+          <a:bodyPr rtlCol="0" anchor="ctr"/>
+          <a:lstStyle/>
+          <a:p>
+            <a:pPr algn="ctr"/>
+          </a:p>
+        </p:txBody>
+      </p:sp>
+      <p:sp>
+        <p:nvSpPr>
+          <p:cNvPr id="8" name="Oval 7"/>
+          <p:cNvSpPr/>
+          <p:nvPr/>
+        </p:nvSpPr>
+        <p:spPr>
+          <a:xfrm>
+            <a:off x="45720" y="0"/>
+            <a:ext cx="137160" cy="137160"/>
+          </a:xfrm>
+          <a:prstGeom prst="ellipse">
+            <a:avLst/>
+          </a:prstGeom>
+          <a:solidFill>
+            <a:srgbClr val="0096C7"/>
+          </a:solidFill>
+          <a:ln/>
+        </p:spPr>
+        <p:style>
+          <a:lnRef idx="1">
+            <a:schemeClr val="accent1"/>
+          </a:lnRef>
+          <a:fillRef idx="3">
+            <a:schemeClr val="accent1"/>
+          </a:fillRef>
+          <a:effectRef idx="2">
+            <a:schemeClr val="accent1"/>
+          </a:effectRef>
+          <a:fontRef idx="minor">
+            <a:schemeClr val="lt1"/>
+          </a:fontRef>
+        </p:style>
+        <p:txBody>
+          <a:bodyPr rtlCol="0" anchor="ctr"/>
+          <a:lstStyle/>
+          <a:p>
+            <a:pPr algn="ctr"/>
+          </a:p>
+        </p:txBody>
+      </p:sp>
+      <p:sp>
+        <p:nvSpPr>
+          <p:cNvPr id="9" name="Oval 8"/>
+          <p:cNvSpPr/>
+          <p:nvPr/>
+        </p:nvSpPr>
+        <p:spPr>
+          <a:xfrm>
+            <a:off x="45720" y="0"/>
+            <a:ext cx="137160" cy="137160"/>
+          </a:xfrm>
+          <a:prstGeom prst="ellipse">
+            <a:avLst/>
+          </a:prstGeom>
+          <a:solidFill>
+            <a:srgbClr val="0096C7"/>
+          </a:solidFill>
+          <a:ln/>
+        </p:spPr>
+        <p:style>
+          <a:lnRef idx="1">
+            <a:schemeClr val="accent1"/>
+          </a:lnRef>
+          <a:fillRef idx="3">
+            <a:schemeClr val="accent1"/>
+          </a:fillRef>
+          <a:effectRef idx="2">
+            <a:schemeClr val="accent1"/>
+          </a:effectRef>
+          <a:fontRef idx="minor">
+            <a:schemeClr val="lt1"/>
+          </a:fontRef>
+        </p:style>
+        <p:txBody>
+          <a:bodyPr rtlCol="0" anchor="ctr"/>
+          <a:lstStyle/>
+          <a:p>
+            <a:pPr algn="ctr"/>
+          </a:p>
+        </p:txBody>
+      </p:sp>
+      <p:sp>
+        <p:nvSpPr>
+          <p:cNvPr id="10" name="Oval 9"/>
+          <p:cNvSpPr/>
+          <p:nvPr/>
+        </p:nvSpPr>
+        <p:spPr>
+          <a:xfrm>
+            <a:off x="45720" y="0"/>
+            <a:ext cx="137160" cy="137160"/>
+          </a:xfrm>
+          <a:prstGeom prst="ellipse">
+            <a:avLst/>
+          </a:prstGeom>
+          <a:solidFill>
+            <a:srgbClr val="0096C7"/>
+          </a:solidFill>
+          <a:ln/>
+        </p:spPr>
+        <p:style>
+          <a:lnRef idx="1">
+            <a:schemeClr val="accent1"/>
+          </a:lnRef>
+          <a:fillRef idx="3">
+            <a:schemeClr val="accent1"/>
+          </a:fillRef>
+          <a:effectRef idx="2">
+            <a:schemeClr val="accent1"/>
+          </a:effectRef>
+          <a:fontRef idx="minor">
+            <a:schemeClr val="lt1"/>
+          </a:fontRef>
+        </p:style>
+        <p:txBody>
+          <a:bodyPr rtlCol="0" anchor="ctr"/>
+          <a:lstStyle/>
+          <a:p>
+            <a:pPr algn="ctr"/>
+          </a:p>
+        </p:txBody>
+      </p:sp>
+      <p:sp>
+        <p:nvSpPr>
+          <p:cNvPr id="11" name="Oval 10"/>
+          <p:cNvSpPr/>
+          <p:nvPr/>
+        </p:nvSpPr>
+        <p:spPr>
+          <a:xfrm>
+            <a:off x="45720" y="0"/>
+            <a:ext cx="137160" cy="137160"/>
+          </a:xfrm>
+          <a:prstGeom prst="ellipse">
+            <a:avLst/>
+          </a:prstGeom>
+          <a:solidFill>
+            <a:srgbClr val="0096C7"/>
+          </a:solidFill>
+          <a:ln/>
+        </p:spPr>
+        <p:style>
+          <a:lnRef idx="1">
+            <a:schemeClr val="accent1"/>
+          </a:lnRef>
+          <a:fillRef idx="3">
+            <a:schemeClr val="accent1"/>
+          </a:fillRef>
+          <a:effectRef idx="2">
+            <a:schemeClr val="accent1"/>
+          </a:effectRef>
+          <a:fontRef idx="minor">
+            <a:schemeClr val="lt1"/>
+          </a:fontRef>
+        </p:style>
+        <p:txBody>
+          <a:bodyPr rtlCol="0" anchor="ctr"/>
+          <a:lstStyle/>
+          <a:p>
+            <a:pPr algn="ctr"/>
+          </a:p>
+        </p:txBody>
+      </p:sp>
+      <p:sp>
+        <p:nvSpPr>
+          <p:cNvPr id="12" name="Oval 11"/>
+          <p:cNvSpPr/>
+          <p:nvPr/>
+        </p:nvSpPr>
+        <p:spPr>
+          <a:xfrm>
+            <a:off x="45720" y="0"/>
+            <a:ext cx="137160" cy="137160"/>
+          </a:xfrm>
+          <a:prstGeom prst="ellipse">
+            <a:avLst/>
+          </a:prstGeom>
+          <a:solidFill>
+            <a:srgbClr val="0096C7"/>
+          </a:solidFill>
+          <a:ln/>
+        </p:spPr>
+        <p:style>
+          <a:lnRef idx="1">
+            <a:schemeClr val="accent1"/>
+          </a:lnRef>
+          <a:fillRef idx="3">
+            <a:schemeClr val="accent1"/>
+          </a:fillRef>
+          <a:effectRef idx="2">
+            <a:schemeClr val="accent1"/>
+          </a:effectRef>
+          <a:fontRef idx="minor">
+            <a:schemeClr val="lt1"/>
+          </a:fontRef>
+        </p:style>
+        <p:txBody>
+          <a:bodyPr rtlCol="0" anchor="ctr"/>
+          <a:lstStyle/>
+          <a:p>
+            <a:pPr algn="ctr"/>
+          </a:p>
+        </p:txBody>
+      </p:sp>
+      <p:sp>
+        <p:nvSpPr>
+          <p:cNvPr id="13" name="Rectangle 12"/>
+          <p:cNvSpPr/>
+          <p:nvPr/>
+        </p:nvSpPr>
+        <p:spPr>
+          <a:xfrm>
+            <a:off x="0" y="6537960"/>
+            <a:ext cx="12191695" cy="18288"/>
+          </a:xfrm>
+          <a:prstGeom prst="rect">
+            <a:avLst/>
+          </a:prstGeom>
+          <a:solidFill>
+            <a:srgbClr val="0096C7"/>
+          </a:solidFill>
+          <a:ln/>
+        </p:spPr>
+        <p:style>
+          <a:lnRef idx="1">
+            <a:schemeClr val="accent1"/>
+          </a:lnRef>
+          <a:fillRef idx="3">
+            <a:schemeClr val="accent1"/>
+          </a:fillRef>
+          <a:effectRef idx="2">
+            <a:schemeClr val="accent1"/>
+          </a:effectRef>
+          <a:fontRef idx="minor">
+            <a:schemeClr val="lt1"/>
+          </a:fontRef>
+        </p:style>
+        <p:txBody>
+          <a:bodyPr rtlCol="0" anchor="ctr"/>
+          <a:lstStyle/>
+          <a:p>
+            <a:pPr algn="ctr"/>
+          </a:p>
+        </p:txBody>
+      </p:sp>
+      <p:sp>
+        <p:nvSpPr>
+          <p:cNvPr id="14" name="TextBox 13"/>
+          <p:cNvSpPr txBox="1"/>
+          <p:nvPr/>
+        </p:nvSpPr>
+        <p:spPr>
+          <a:xfrm>
+            <a:off x="457200" y="6583680"/>
+            <a:ext cx="3657600" cy="228600"/>
+          </a:xfrm>
+          <a:prstGeom prst="rect">
+            <a:avLst/>
+          </a:prstGeom>
+          <a:noFill/>
+        </p:spPr>
+        <p:txBody>
+          <a:bodyPr wrap="none">
+            <a:spAutoFit/>
+          </a:bodyPr>
+          <a:lstStyle/>
+          <a:p>
+            <a:pPr algn="l">
+              <a:defRPr sz="1000" b="0">
+                <a:solidFill>
+                  <a:srgbClr val="6C757D"/>
+                </a:solidFill>
+                <a:latin typeface="Microsoft YaHei"/>
+              </a:defRPr>
+            </a:pPr>
+            <a:r>
+              <a:t>smallgameagent · LLM/VLM + 规则驱动</a:t>
+            </a:r>
+          </a:p>
+        </p:txBody>
+      </p:sp>
+      <p:sp>
+        <p:nvSpPr>
+          <p:cNvPr id="15" name="TextBox 14"/>
+          <p:cNvSpPr txBox="1"/>
+          <p:nvPr/>
+        </p:nvSpPr>
+        <p:spPr>
+          <a:xfrm>
+            <a:off x="10789920" y="6583680"/>
+            <a:ext cx="914400" cy="228600"/>
+          </a:xfrm>
+          <a:prstGeom prst="rect">
+            <a:avLst/>
+          </a:prstGeom>
+          <a:noFill/>
+        </p:spPr>
+        <p:txBody>
+          <a:bodyPr wrap="none">
+            <a:spAutoFit/>
+          </a:bodyPr>
+          <a:lstStyle/>
+          <a:p>
+            <a:pPr algn="r">
+              <a:defRPr sz="1000" b="0">
+                <a:solidFill>
+                  <a:srgbClr val="6C757D"/>
+                </a:solidFill>
+                <a:latin typeface="Microsoft YaHei"/>
+              </a:defRPr>
+            </a:pPr>
+            <a:r>
+              <a:t>32/33</a:t>
+            </a:r>
+          </a:p>
+        </p:txBody>
+      </p:sp>
+    </p:spTree>
+  </p:cSld>
+  <p:clrMapOvr>
+    <a:masterClrMapping/>
+  </p:clrMapOvr>
+</p:sld>
+</file>
+
+<file path=ppt/slides/slide33.xml><?xml version="1.0" encoding="utf-8"?>
+<p:sld xmlns:a="http://schemas.openxmlformats.org/drawingml/2006/main" xmlns:p="http://schemas.openxmlformats.org/presentationml/2006/main" xmlns:r="http://schemas.openxmlformats.org/officeDocument/2006/relationships">
+  <p:cSld>
+    <p:spTree>
+      <p:nvGrpSpPr>
+        <p:cNvPr id="1" name=""/>
+        <p:cNvGrpSpPr/>
+        <p:nvPr/>
+      </p:nvGrpSpPr>
+      <p:grpSpPr/>
+      <p:sp>
+        <p:nvSpPr>
+          <p:cNvPr id="2" name="Rectangle 1"/>
+          <p:cNvSpPr/>
+          <p:nvPr/>
+        </p:nvSpPr>
+        <p:spPr>
+          <a:xfrm>
+            <a:off x="0" y="0"/>
             <a:ext cx="12191695" cy="6858000"/>
           </a:xfrm>
           <a:prstGeom prst="rect">
@@ -17506,7 +18667,7 @@
               </a:defRPr>
             </a:pPr>
             <a:r>
-              <a:t>32/32</a:t>
+              <a:t>33/33</a:t>
             </a:r>
           </a:p>
         </p:txBody>
@@ -17903,7 +19064,7 @@
               </a:defRPr>
             </a:pPr>
             <a:r>
-              <a:t>4/32</a:t>
+              <a:t>4/33</a:t>
             </a:r>
           </a:p>
         </p:txBody>
@@ -18188,7 +19349,7 @@
               </a:defRPr>
             </a:pPr>
             <a:r>
-              <a:t>5/32</a:t>
+              <a:t>5/33</a:t>
             </a:r>
           </a:p>
         </p:txBody>
@@ -19410,7 +20571,7 @@
               </a:defRPr>
             </a:pPr>
             <a:r>
-              <a:t>6/32</a:t>
+              <a:t>6/33</a:t>
             </a:r>
           </a:p>
         </p:txBody>
@@ -19791,7 +20952,7 @@
               </a:defRPr>
             </a:pPr>
             <a:r>
-              <a:t>7/32</a:t>
+              <a:t>7/33</a:t>
             </a:r>
           </a:p>
         </p:txBody>
@@ -20076,7 +21237,7 @@
               </a:defRPr>
             </a:pPr>
             <a:r>
-              <a:t>8/32</a:t>
+              <a:t>8/33</a:t>
             </a:r>
           </a:p>
         </p:txBody>
@@ -20894,7 +22055,7 @@
               </a:defRPr>
             </a:pPr>
             <a:r>
-              <a:t>9/32</a:t>
+              <a:t>9/33</a:t>
             </a:r>
           </a:p>
         </p:txBody>

--- a/reports/smallgameagent_report.pptx
+++ b/reports/smallgameagent_report.pptx
@@ -12956,7 +12956,7 @@
               </a:defRPr>
             </a:pPr>
             <a:r>
-              <a:t>multi-bus-memory 在 representative subset 上 mean composite 0.275，5/6 游戏优于或持平 rule。</a:t>
+              <a:t>rule 在 6 游戏 representative subset 上 mean composite=0.251，仍是当前最稳短程基线。</a:t>
             </a:r>
           </a:p>
         </p:txBody>
@@ -13043,7 +13043,7 @@
               </a:defRPr>
             </a:pPr>
             <a:r>
-              <a:t>L2 code-file 更新在 qwen/kimi/xiaomi/opencodego 均成功，云端模型确实能改持久化规则旋钮。</a:t>
+              <a:t>multi-bus-memory 在 tap-only 游戏上接近 rule（0.296 vs 0.300），记忆读回对无 joystick 场景有价值。</a:t>
             </a:r>
           </a:p>
         </p:txBody>
@@ -13130,7 +13130,7 @@
               </a:defRPr>
             </a:pPr>
             <a:r>
-              <a:t>Gemma-4-E4B 视觉上下文让云端动作匹配从 3/9 提升到 5/9，本地 VLM 有潜力。</a:t>
+              <a:t>L2 code-file 更新在 qwen/kimi/xiaomi/opencodego 均成功，云端模型确实能改持久化规则旋钮。</a:t>
             </a:r>
           </a:p>
         </p:txBody>
@@ -13150,7 +13150,7 @@
             <a:avLst/>
           </a:prstGeom>
           <a:solidFill>
-            <a:srgbClr val="F4B400"/>
+            <a:srgbClr val="28A745"/>
           </a:solidFill>
           <a:ln/>
         </p:spPr>
@@ -13181,7 +13181,7 @@
               </a:defRPr>
             </a:pPr>
             <a:r>
-              <a:t>⚠️ 待优化</a:t>
+              <a:t>✅ 已修复</a:t>
             </a:r>
           </a:p>
         </p:txBody>
@@ -13217,7 +13217,7 @@
               </a:defRPr>
             </a:pPr>
             <a:r>
-              <a:t>OpenCodeGo / MiMo / Kimi 直接做 gameplay 动作时大量空返回或 fallback，云端不适合逐帧控制。</a:t>
+              <a:t>00483 multi-bus activity=0：根因是 strategy_memory 在线自强化，session 隔离后 multi-bus-memory 0.200、activity 0.333。</a:t>
             </a:r>
           </a:p>
         </p:txBody>
@@ -13304,7 +13304,7 @@
               </a:defRPr>
             </a:pPr>
             <a:r>
-              <a:t>SSD_00483P01 的 multi-bus activity=0，driver/profile 需要单独诊断。</a:t>
+              <a:t>multi-bus 在需要 joystick 的 A 组明显弱于 rule（mean 0.110），需要更强的 driver/Verifier 循环。</a:t>
             </a:r>
           </a:p>
         </p:txBody>
@@ -13903,7 +13903,7 @@
                         </a:defRPr>
                       </a:pPr>
                       <a:r>
-                        <a:t>0.300</a:t>
+                        <a:t>0.050</a:t>
                       </a:r>
                     </a:p>
                   </a:txBody>
@@ -13922,7 +13922,7 @@
                         </a:defRPr>
                       </a:pPr>
                       <a:r>
-                        <a:t>0.300</a:t>
+                        <a:t>0.044</a:t>
                       </a:r>
                     </a:p>
                   </a:txBody>
@@ -13981,7 +13981,7 @@
                         </a:defRPr>
                       </a:pPr>
                       <a:r>
-                        <a:t>0.184</a:t>
+                        <a:t>0.244</a:t>
                       </a:r>
                     </a:p>
                   </a:txBody>
@@ -14000,7 +14000,7 @@
                         </a:defRPr>
                       </a:pPr>
                       <a:r>
-                        <a:t>0.150</a:t>
+                        <a:t>0.103</a:t>
                       </a:r>
                     </a:p>
                   </a:txBody>
@@ -14019,7 +14019,7 @@
                         </a:defRPr>
                       </a:pPr>
                       <a:r>
-                        <a:t>0.150</a:t>
+                        <a:t>0.200</a:t>
                       </a:r>
                     </a:p>
                   </a:txBody>
@@ -14097,7 +14097,7 @@
                         </a:defRPr>
                       </a:pPr>
                       <a:r>
-                        <a:t>0.300</a:t>
+                        <a:t>0.178</a:t>
                       </a:r>
                     </a:p>
                   </a:txBody>
@@ -14116,7 +14116,7 @@
                         </a:defRPr>
                       </a:pPr>
                       <a:r>
-                        <a:t>0.300</a:t>
+                        <a:t>0.178</a:t>
                       </a:r>
                     </a:p>
                   </a:txBody>
@@ -14175,7 +14175,7 @@
                         </a:defRPr>
                       </a:pPr>
                       <a:r>
-                        <a:t>0.288</a:t>
+                        <a:t>0.300</a:t>
                       </a:r>
                     </a:p>
                   </a:txBody>
@@ -14213,7 +14213,7 @@
                         </a:defRPr>
                       </a:pPr>
                       <a:r>
-                        <a:t>0.300</a:t>
+                        <a:t>0.288</a:t>
                       </a:r>
                     </a:p>
                   </a:txBody>
@@ -14464,7 +14464,7 @@
               </a:defRPr>
             </a:pPr>
             <a:r>
-              <a:t>15 runs 全部成功，multi-bus-memory 综合 mean composite 0.275，activity 0.833。唯一例外 00483 需要 driver 诊断。</a:t>
+              <a:t>15 runs 全部成功。rule mean composite=0.251 仍是最稳基线；multi-bus-memory 在 tap-only 游戏接近 rule（0.296 vs 0.300）。session 隔离让 00483 从 activity=0 恢复到 0.333。</a:t>
             </a:r>
           </a:p>
         </p:txBody>
@@ -17930,6 +17930,22 @@
               <a:t>  探索 Agent 间更严格的仲裁：Critic 对 L0/L2 冲突做最终决策</a:t>
             </a:r>
           </a:p>
+          <a:p>
+            <a:pPr algn="l">
+              <a:spcAft>
+                <a:spcPts val="1200"/>
+              </a:spcAft>
+              <a:defRPr sz="1800" b="0">
+                <a:solidFill>
+                  <a:srgbClr val="1E2933"/>
+                </a:solidFill>
+                <a:latin typeface="Microsoft YaHei"/>
+              </a:defRPr>
+            </a:pPr>
+            <a:r>
+              <a:t>   redesign strategy_memory 的 success 信号：结合位置变化、guide 触发、stall 减少</a:t>
+            </a:r>
+          </a:p>
         </p:txBody>
       </p:sp>
       <p:sp>
@@ -18180,16 +18196,16 @@
       </p:sp>
       <p:sp>
         <p:nvSpPr>
-          <p:cNvPr id="13" name="Rectangle 12"/>
+          <p:cNvPr id="13" name="Oval 12"/>
           <p:cNvSpPr/>
           <p:nvPr/>
         </p:nvSpPr>
         <p:spPr>
           <a:xfrm>
-            <a:off x="0" y="6537960"/>
-            <a:ext cx="12191695" cy="18288"/>
-          </a:xfrm>
-          <a:prstGeom prst="rect">
+            <a:off x="45720" y="0"/>
+            <a:ext cx="137160" cy="137160"/>
+          </a:xfrm>
+          <a:prstGeom prst="ellipse">
             <a:avLst/>
           </a:prstGeom>
           <a:solidFill>
@@ -18221,7 +18237,48 @@
       </p:sp>
       <p:sp>
         <p:nvSpPr>
-          <p:cNvPr id="14" name="TextBox 13"/>
+          <p:cNvPr id="14" name="Rectangle 13"/>
+          <p:cNvSpPr/>
+          <p:nvPr/>
+        </p:nvSpPr>
+        <p:spPr>
+          <a:xfrm>
+            <a:off x="0" y="6537960"/>
+            <a:ext cx="12191695" cy="18288"/>
+          </a:xfrm>
+          <a:prstGeom prst="rect">
+            <a:avLst/>
+          </a:prstGeom>
+          <a:solidFill>
+            <a:srgbClr val="0096C7"/>
+          </a:solidFill>
+          <a:ln/>
+        </p:spPr>
+        <p:style>
+          <a:lnRef idx="1">
+            <a:schemeClr val="accent1"/>
+          </a:lnRef>
+          <a:fillRef idx="3">
+            <a:schemeClr val="accent1"/>
+          </a:fillRef>
+          <a:effectRef idx="2">
+            <a:schemeClr val="accent1"/>
+          </a:effectRef>
+          <a:fontRef idx="minor">
+            <a:schemeClr val="lt1"/>
+          </a:fontRef>
+        </p:style>
+        <p:txBody>
+          <a:bodyPr rtlCol="0" anchor="ctr"/>
+          <a:lstStyle/>
+          <a:p>
+            <a:pPr algn="ctr"/>
+          </a:p>
+        </p:txBody>
+      </p:sp>
+      <p:sp>
+        <p:nvSpPr>
+          <p:cNvPr id="15" name="TextBox 14"/>
           <p:cNvSpPr txBox="1"/>
           <p:nvPr/>
         </p:nvSpPr>
@@ -18257,7 +18314,7 @@
       </p:sp>
       <p:sp>
         <p:nvSpPr>
-          <p:cNvPr id="15" name="TextBox 14"/>
+          <p:cNvPr id="16" name="TextBox 15"/>
           <p:cNvSpPr txBox="1"/>
           <p:nvPr/>
         </p:nvSpPr>

--- a/reports/smallgameagent_report.pptx
+++ b/reports/smallgameagent_report.pptx
@@ -40,6 +40,8 @@
     <p:sldId id="288" r:id="rId39"/>
     <p:sldId id="289" r:id="rId40"/>
     <p:sldId id="290" r:id="rId41"/>
+    <p:sldId id="291" r:id="rId42"/>
+    <p:sldId id="292" r:id="rId43"/>
   </p:sldIdLst>
   <p:sldSz cx="12191695" cy="6858000" type="screen4x3"/>
   <p:notesSz cx="6858000" cy="9144000"/>
@@ -3848,7 +3850,7 @@
               </a:defRPr>
             </a:pPr>
             <a:r>
-              <a:t>10/35</a:t>
+              <a:t>10/37</a:t>
             </a:r>
           </a:p>
         </p:txBody>
@@ -4666,7 +4668,7 @@
               </a:defRPr>
             </a:pPr>
             <a:r>
-              <a:t>11/35</a:t>
+              <a:t>11/37</a:t>
             </a:r>
           </a:p>
         </p:txBody>
@@ -5063,7 +5065,7 @@
               </a:defRPr>
             </a:pPr>
             <a:r>
-              <a:t>12/35</a:t>
+              <a:t>12/37</a:t>
             </a:r>
           </a:p>
         </p:txBody>
@@ -5392,7 +5394,7 @@
               </a:defRPr>
             </a:pPr>
             <a:r>
-              <a:t>13/35</a:t>
+              <a:t>13/37</a:t>
             </a:r>
           </a:p>
         </p:txBody>
@@ -6183,7 +6185,7 @@
               </a:defRPr>
             </a:pPr>
             <a:r>
-              <a:t>14/35</a:t>
+              <a:t>14/37</a:t>
             </a:r>
           </a:p>
         </p:txBody>
@@ -7227,7 +7229,7 @@
               </a:defRPr>
             </a:pPr>
             <a:r>
-              <a:t>15/35</a:t>
+              <a:t>15/37</a:t>
             </a:r>
           </a:p>
         </p:txBody>
@@ -8526,7 +8528,7 @@
               </a:defRPr>
             </a:pPr>
             <a:r>
-              <a:t>16/35</a:t>
+              <a:t>16/37</a:t>
             </a:r>
           </a:p>
         </p:txBody>
@@ -8923,7 +8925,7 @@
               </a:defRPr>
             </a:pPr>
             <a:r>
-              <a:t>17/35</a:t>
+              <a:t>17/37</a:t>
             </a:r>
           </a:p>
         </p:txBody>
@@ -8955,7 +8957,7 @@
         <p:spPr>
           <a:xfrm>
             <a:off x="0" y="0"/>
-            <a:ext cx="12191695" cy="6858000"/>
+            <a:ext cx="12191695" cy="960120"/>
           </a:xfrm>
           <a:prstGeom prst="rect">
             <a:avLst/>
@@ -8989,23 +8991,56 @@
       </p:sp>
       <p:sp>
         <p:nvSpPr>
-          <p:cNvPr id="3" name="Rectangle 2"/>
+          <p:cNvPr id="3" name="TextBox 2"/>
+          <p:cNvSpPr txBox="1"/>
+          <p:nvPr/>
+        </p:nvSpPr>
+        <p:spPr>
+          <a:xfrm>
+            <a:off x="457200" y="228600"/>
+            <a:ext cx="11247120" cy="548640"/>
+          </a:xfrm>
+          <a:prstGeom prst="rect">
+            <a:avLst/>
+          </a:prstGeom>
+          <a:noFill/>
+        </p:spPr>
+        <p:txBody>
+          <a:bodyPr wrap="none">
+            <a:spAutoFit/>
+          </a:bodyPr>
+          <a:lstStyle/>
+          <a:p>
+            <a:pPr algn="l">
+              <a:defRPr sz="3000" b="1">
+                <a:solidFill>
+                  <a:srgbClr val="F3F6F9"/>
+                </a:solidFill>
+                <a:latin typeface="Microsoft YaHei"/>
+              </a:defRPr>
+            </a:pPr>
+            <a:r>
+              <a:t>触发器改进：不再一刀切</a:t>
+            </a:r>
+          </a:p>
+        </p:txBody>
+      </p:sp>
+      <p:sp>
+        <p:nvSpPr>
+          <p:cNvPr id="4" name="Rectangle 3"/>
           <p:cNvSpPr/>
           <p:nvPr/>
         </p:nvSpPr>
         <p:spPr>
           <a:xfrm>
-            <a:off x="6858000" y="-914400"/>
-            <a:ext cx="5943600" cy="8686800"/>
-          </a:xfrm>
-          <a:prstGeom prst="rect">
-            <a:avLst/>
-          </a:prstGeom>
-          <a:solidFill>
-            <a:srgbClr val="0096C7">
-              <a:lumMod val="80000"/>
-              <a:lumOff val="20000"/>
-            </a:srgbClr>
+            <a:off x="0" y="960120"/>
+            <a:ext cx="164592" cy="5897880"/>
+          </a:xfrm>
+          <a:prstGeom prst="rect">
+            <a:avLst/>
+          </a:prstGeom>
+          <a:solidFill>
+            <a:srgbClr val="FF6B35"/>
           </a:solidFill>
           <a:ln/>
         </p:spPr>
@@ -9033,94 +9068,26 @@
       </p:sp>
       <p:sp>
         <p:nvSpPr>
-          <p:cNvPr id="4" name="TextBox 3"/>
-          <p:cNvSpPr txBox="1"/>
-          <p:nvPr/>
-        </p:nvSpPr>
-        <p:spPr>
-          <a:xfrm>
-            <a:off x="548640" y="1645920"/>
-            <a:ext cx="2743200" cy="1828800"/>
-          </a:xfrm>
-          <a:prstGeom prst="rect">
-            <a:avLst/>
-          </a:prstGeom>
-          <a:noFill/>
-        </p:spPr>
-        <p:txBody>
-          <a:bodyPr wrap="none">
-            <a:spAutoFit/>
-          </a:bodyPr>
-          <a:lstStyle/>
-          <a:p>
-            <a:pPr algn="l">
-              <a:defRPr sz="12000" b="1">
-                <a:solidFill>
-                  <a:srgbClr val="333DA0"/>
-                </a:solidFill>
-                <a:latin typeface="Microsoft YaHei"/>
-              </a:defRPr>
-            </a:pPr>
-            <a:r>
-              <a:t>05</a:t>
-            </a:r>
-          </a:p>
-        </p:txBody>
-      </p:sp>
-      <p:sp>
-        <p:nvSpPr>
-          <p:cNvPr id="5" name="TextBox 4"/>
-          <p:cNvSpPr txBox="1"/>
-          <p:nvPr/>
-        </p:nvSpPr>
-        <p:spPr>
-          <a:xfrm>
-            <a:off x="548640" y="2834640"/>
-            <a:ext cx="11064240" cy="1097280"/>
-          </a:xfrm>
-          <a:prstGeom prst="rect">
-            <a:avLst/>
-          </a:prstGeom>
-          <a:noFill/>
-        </p:spPr>
-        <p:txBody>
-          <a:bodyPr wrap="none">
-            <a:spAutoFit/>
-          </a:bodyPr>
-          <a:lstStyle/>
-          <a:p>
-            <a:pPr algn="l">
-              <a:defRPr sz="4400" b="1">
-                <a:solidFill>
-                  <a:srgbClr val="F3F6F9"/>
-                </a:solidFill>
-                <a:latin typeface="Microsoft YaHei"/>
-              </a:defRPr>
-            </a:pPr>
-            <a:r>
-              <a:t>Agent 通信与记忆</a:t>
-            </a:r>
-          </a:p>
-        </p:txBody>
-      </p:sp>
-      <p:sp>
-        <p:nvSpPr>
-          <p:cNvPr id="6" name="Rectangle 5"/>
+          <p:cNvPr id="5" name="Rectangle 4"/>
           <p:cNvSpPr/>
           <p:nvPr/>
         </p:nvSpPr>
         <p:spPr>
           <a:xfrm>
-            <a:off x="548640" y="4023360"/>
-            <a:ext cx="1828800" cy="73152"/>
-          </a:xfrm>
-          <a:prstGeom prst="rect">
-            <a:avLst/>
-          </a:prstGeom>
-          <a:solidFill>
-            <a:srgbClr val="FF6B35"/>
-          </a:solidFill>
-          <a:ln/>
+            <a:off x="320040" y="1078992"/>
+            <a:ext cx="11548872" cy="5349240"/>
+          </a:xfrm>
+          <a:prstGeom prst="rect">
+            <a:avLst/>
+          </a:prstGeom>
+          <a:solidFill>
+            <a:srgbClr val="FFFFFF"/>
+          </a:solidFill>
+          <a:ln w="12700">
+            <a:solidFill>
+              <a:srgbClr val="E1E5E9"/>
+            </a:solidFill>
+          </a:ln>
         </p:spPr>
         <p:style>
           <a:lnRef idx="1">
@@ -9146,6 +9113,109 @@
       </p:sp>
       <p:sp>
         <p:nvSpPr>
+          <p:cNvPr id="6" name="TextBox 5"/>
+          <p:cNvSpPr txBox="1"/>
+          <p:nvPr/>
+        </p:nvSpPr>
+        <p:spPr>
+          <a:xfrm>
+            <a:off x="777240" y="1325880"/>
+            <a:ext cx="10789920" cy="5029200"/>
+          </a:xfrm>
+          <a:prstGeom prst="rect">
+            <a:avLst/>
+          </a:prstGeom>
+          <a:noFill/>
+        </p:spPr>
+        <p:txBody>
+          <a:bodyPr wrap="square">
+            <a:spAutoFit/>
+          </a:bodyPr>
+          <a:lstStyle/>
+          <a:p>
+            <a:pPr algn="l">
+              <a:spcAft>
+                <a:spcPts val="1200"/>
+              </a:spcAft>
+              <a:defRPr sz="1800" b="0">
+                <a:solidFill>
+                  <a:srgbClr val="1E2933"/>
+                </a:solidFill>
+                <a:latin typeface="Microsoft YaHei"/>
+              </a:defRPr>
+            </a:pPr>
+            <a:r>
+              <a:t>旧问题：绝对阈值 0.15 在低基线游戏上几乎每 5 步就触发，L2 调用泛滥</a:t>
+            </a:r>
+          </a:p>
+          <a:p>
+            <a:pPr algn="l">
+              <a:spcAft>
+                <a:spcPts val="1200"/>
+              </a:spcAft>
+              <a:defRPr sz="1800" b="0">
+                <a:solidFill>
+                  <a:srgbClr val="1E2933"/>
+                </a:solidFill>
+                <a:latin typeface="Microsoft YaHei"/>
+              </a:defRPr>
+            </a:pPr>
+            <a:r>
+              <a:t>相对下降触发：记录本 run 峰值，下降超过 25% 才触发，避免过度敏感</a:t>
+            </a:r>
+          </a:p>
+          <a:p>
+            <a:pPr algn="l">
+              <a:spcAft>
+                <a:spcPts val="1200"/>
+              </a:spcAft>
+              <a:defRPr sz="1800" b="0">
+                <a:solidFill>
+                  <a:srgbClr val="1E2933"/>
+                </a:solidFill>
+                <a:latin typeface="Microsoft YaHei"/>
+              </a:defRPr>
+            </a:pPr>
+            <a:r>
+              <a:t>硬上限：单 run 最多更新 3 次，防止「越更新越差、越差越更新」</a:t>
+            </a:r>
+          </a:p>
+          <a:p>
+            <a:pPr algn="l">
+              <a:spcAft>
+                <a:spcPts val="1200"/>
+              </a:spcAft>
+              <a:defRPr sz="1800" b="0">
+                <a:solidFill>
+                  <a:srgbClr val="1E2933"/>
+                </a:solidFill>
+                <a:latin typeface="Microsoft YaHei"/>
+              </a:defRPr>
+            </a:pPr>
+            <a:r>
+              <a:t>cooldown 从 5 步提高到 8 步，给每次更新更长的观察窗口</a:t>
+            </a:r>
+          </a:p>
+          <a:p>
+            <a:pPr algn="l">
+              <a:spcAft>
+                <a:spcPts val="1200"/>
+              </a:spcAft>
+              <a:defRPr sz="1800" b="0">
+                <a:solidFill>
+                  <a:srgbClr val="1E2933"/>
+                </a:solidFill>
+                <a:latin typeface="Microsoft YaHei"/>
+              </a:defRPr>
+            </a:pPr>
+            <a:r>
+              <a:t>单元测试验证：peak 0.30 → 0.20 触发（drop 22.2%），max=2 后不再触发</a:t>
+            </a:r>
+          </a:p>
+        </p:txBody>
+      </p:sp>
+      <p:sp>
+        <p:nvSpPr>
           <p:cNvPr id="7" name="Rectangle 6"/>
           <p:cNvSpPr/>
           <p:nvPr/>
@@ -9252,7 +9322,7 @@
               </a:defRPr>
             </a:pPr>
             <a:r>
-              <a:t>18/35</a:t>
+              <a:t>18/37</a:t>
             </a:r>
           </a:p>
         </p:txBody>
@@ -9347,7 +9417,7 @@
               </a:defRPr>
             </a:pPr>
             <a:r>
-              <a:t>Agent 通信与记忆：从单兵到协作</a:t>
+              <a:t>Watchdog 回滚：不止看分数</a:t>
             </a:r>
           </a:p>
         </p:txBody>
@@ -9367,7 +9437,7 @@
             <a:avLst/>
           </a:prstGeom>
           <a:solidFill>
-            <a:srgbClr val="0096C7"/>
+            <a:srgbClr val="FF6B35"/>
           </a:solidFill>
           <a:ln/>
         </p:spPr>
@@ -9440,20 +9510,123 @@
       </p:sp>
       <p:sp>
         <p:nvSpPr>
-          <p:cNvPr id="6" name="Rounded Rectangle 5"/>
+          <p:cNvPr id="6" name="TextBox 5"/>
+          <p:cNvSpPr txBox="1"/>
+          <p:nvPr/>
+        </p:nvSpPr>
+        <p:spPr>
+          <a:xfrm>
+            <a:off x="777240" y="1325880"/>
+            <a:ext cx="10789920" cy="5029200"/>
+          </a:xfrm>
+          <a:prstGeom prst="rect">
+            <a:avLst/>
+          </a:prstGeom>
+          <a:noFill/>
+        </p:spPr>
+        <p:txBody>
+          <a:bodyPr wrap="square">
+            <a:spAutoFit/>
+          </a:bodyPr>
+          <a:lstStyle/>
+          <a:p>
+            <a:pPr algn="l">
+              <a:spcAft>
+                <a:spcPts val="1200"/>
+              </a:spcAft>
+              <a:defRPr sz="1800" b="0">
+                <a:solidFill>
+                  <a:srgbClr val="1E2933"/>
+                </a:solidFill>
+                <a:latin typeface="Microsoft YaHei"/>
+              </a:defRPr>
+            </a:pPr>
+            <a:r>
+              <a:t>旧版只比较 composite 平均值，小幅参数调整带来的 stall 增加被忽略</a:t>
+            </a:r>
+          </a:p>
+          <a:p>
+            <a:pPr algn="l">
+              <a:spcAft>
+                <a:spcPts val="1200"/>
+              </a:spcAft>
+              <a:defRPr sz="1800" b="0">
+                <a:solidFill>
+                  <a:srgbClr val="1E2933"/>
+                </a:solidFill>
+                <a:latin typeface="Microsoft YaHei"/>
+              </a:defRPr>
+            </a:pPr>
+            <a:r>
+              <a:t>新版三层安全网：composite 下降 / activity 下降 ≥ 0.15 / stall 增加 ≥ 2</a:t>
+            </a:r>
+          </a:p>
+          <a:p>
+            <a:pPr algn="l">
+              <a:spcAft>
+                <a:spcPts val="1200"/>
+              </a:spcAft>
+              <a:defRPr sz="1800" b="0">
+                <a:solidFill>
+                  <a:srgbClr val="1E2933"/>
+                </a:solidFill>
+                <a:latin typeface="Microsoft YaHei"/>
+              </a:defRPr>
+            </a:pPr>
+            <a:r>
+              <a:t>过程指标（stall/activity）恶化往往早于结果指标，提前回滚减少无效步数</a:t>
+            </a:r>
+          </a:p>
+          <a:p>
+            <a:pPr algn="l">
+              <a:spcAft>
+                <a:spcPts val="1200"/>
+              </a:spcAft>
+              <a:defRPr sz="1800" b="0">
+                <a:solidFill>
+                  <a:srgbClr val="1E2933"/>
+                </a:solidFill>
+                <a:latin typeface="Microsoft YaHei"/>
+              </a:defRPr>
+            </a:pPr>
+            <a:r>
+              <a:t>实验验证：stall 从 0 升到 3 时即使 composite 不变也触发回滚</a:t>
+            </a:r>
+          </a:p>
+          <a:p>
+            <a:pPr algn="l">
+              <a:spcAft>
+                <a:spcPts val="1200"/>
+              </a:spcAft>
+              <a:defRPr sz="1800" b="0">
+                <a:solidFill>
+                  <a:srgbClr val="1E2933"/>
+                </a:solidFill>
+                <a:latin typeface="Microsoft YaHei"/>
+              </a:defRPr>
+            </a:pPr>
+            <a:r>
+              <a:t>意义：L2 可以大胆试错，watchdog 负责兜底</a:t>
+            </a:r>
+          </a:p>
+        </p:txBody>
+      </p:sp>
+      <p:sp>
+        <p:nvSpPr>
+          <p:cNvPr id="7" name="Rectangle 6"/>
           <p:cNvSpPr/>
           <p:nvPr/>
         </p:nvSpPr>
         <p:spPr>
           <a:xfrm>
-            <a:off x="530352" y="1353312"/>
-            <a:ext cx="3657600" cy="2103120"/>
-          </a:xfrm>
-          <a:prstGeom prst="roundRect">
-            <a:avLst/>
-          </a:prstGeom>
-          <a:solidFill>
-            <a:srgbClr val="D0D5DA"/>
+            <a:off x="0" y="6537960"/>
+            <a:ext cx="12191695" cy="18288"/>
+          </a:xfrm>
+          <a:prstGeom prst="rect">
+            <a:avLst/>
+          </a:prstGeom>
+          <a:solidFill>
+            <a:srgbClr val="0096C7"/>
           </a:solidFill>
           <a:ln/>
         </p:spPr>
@@ -9481,100 +9654,14 @@
       </p:sp>
       <p:sp>
         <p:nvSpPr>
-          <p:cNvPr id="7" name="Rounded Rectangle 6"/>
-          <p:cNvSpPr/>
-          <p:nvPr/>
-        </p:nvSpPr>
-        <p:spPr>
-          <a:xfrm>
-            <a:off x="502920" y="1325880"/>
-            <a:ext cx="3657600" cy="2103120"/>
-          </a:xfrm>
-          <a:prstGeom prst="roundRect">
-            <a:avLst/>
-          </a:prstGeom>
-          <a:solidFill>
-            <a:srgbClr val="FFFFFF"/>
-          </a:solidFill>
-          <a:ln w="12700">
-            <a:solidFill>
-              <a:srgbClr val="DDE2E6"/>
-            </a:solidFill>
-          </a:ln>
-        </p:spPr>
-        <p:style>
-          <a:lnRef idx="1">
-            <a:schemeClr val="accent1"/>
-          </a:lnRef>
-          <a:fillRef idx="3">
-            <a:schemeClr val="accent1"/>
-          </a:fillRef>
-          <a:effectRef idx="2">
-            <a:schemeClr val="accent1"/>
-          </a:effectRef>
-          <a:fontRef idx="minor">
-            <a:schemeClr val="lt1"/>
-          </a:fontRef>
-        </p:style>
-        <p:txBody>
-          <a:bodyPr rtlCol="0" anchor="ctr"/>
-          <a:lstStyle/>
-          <a:p>
-            <a:pPr algn="ctr"/>
-          </a:p>
-        </p:txBody>
-      </p:sp>
-      <p:sp>
-        <p:nvSpPr>
-          <p:cNvPr id="8" name="Rectangle 7"/>
-          <p:cNvSpPr/>
-          <p:nvPr/>
-        </p:nvSpPr>
-        <p:spPr>
-          <a:xfrm>
-            <a:off x="502920" y="1325880"/>
-            <a:ext cx="3657600" cy="411480"/>
-          </a:xfrm>
-          <a:prstGeom prst="rect">
-            <a:avLst/>
-          </a:prstGeom>
-          <a:solidFill>
-            <a:srgbClr val="1A237E"/>
-          </a:solidFill>
-          <a:ln/>
-        </p:spPr>
-        <p:style>
-          <a:lnRef idx="1">
-            <a:schemeClr val="accent1"/>
-          </a:lnRef>
-          <a:fillRef idx="3">
-            <a:schemeClr val="accent1"/>
-          </a:fillRef>
-          <a:effectRef idx="2">
-            <a:schemeClr val="accent1"/>
-          </a:effectRef>
-          <a:fontRef idx="minor">
-            <a:schemeClr val="lt1"/>
-          </a:fontRef>
-        </p:style>
-        <p:txBody>
-          <a:bodyPr rtlCol="0" anchor="ctr"/>
-          <a:lstStyle/>
-          <a:p>
-            <a:pPr algn="ctr"/>
-          </a:p>
-        </p:txBody>
-      </p:sp>
-      <p:sp>
-        <p:nvSpPr>
-          <p:cNvPr id="9" name="TextBox 8"/>
+          <p:cNvPr id="8" name="TextBox 7"/>
           <p:cNvSpPr txBox="1"/>
           <p:nvPr/>
         </p:nvSpPr>
         <p:spPr>
           <a:xfrm>
-            <a:off x="576072" y="1399032"/>
-            <a:ext cx="3511296" cy="320040"/>
+            <a:off x="457200" y="6583680"/>
+            <a:ext cx="3657600" cy="228600"/>
           </a:xfrm>
           <a:prstGeom prst="rect">
             <a:avLst/>
@@ -9588,227 +9675,29 @@
           <a:lstStyle/>
           <a:p>
             <a:pPr algn="l">
-              <a:defRPr sz="1400" b="1">
-                <a:solidFill>
-                  <a:srgbClr val="F3F6F9"/>
-                </a:solidFill>
-                <a:latin typeface="Microsoft YaHei"/>
-              </a:defRPr>
-            </a:pPr>
-            <a:r>
-              <a:t>记忆三层</a:t>
-            </a:r>
-          </a:p>
-        </p:txBody>
-      </p:sp>
-      <p:sp>
-        <p:nvSpPr>
-          <p:cNvPr id="10" name="TextBox 9"/>
+              <a:defRPr sz="1000" b="0">
+                <a:solidFill>
+                  <a:srgbClr val="6C757D"/>
+                </a:solidFill>
+                <a:latin typeface="Microsoft YaHei"/>
+              </a:defRPr>
+            </a:pPr>
+            <a:r>
+              <a:t>smallgameagent · LLM/VLM + 规则驱动</a:t>
+            </a:r>
+          </a:p>
+        </p:txBody>
+      </p:sp>
+      <p:sp>
+        <p:nvSpPr>
+          <p:cNvPr id="9" name="TextBox 8"/>
           <p:cNvSpPr txBox="1"/>
           <p:nvPr/>
         </p:nvSpPr>
         <p:spPr>
           <a:xfrm>
-            <a:off x="612648" y="1828800"/>
-            <a:ext cx="3438144" cy="1508760"/>
-          </a:xfrm>
-          <a:prstGeom prst="rect">
-            <a:avLst/>
-          </a:prstGeom>
-          <a:noFill/>
-        </p:spPr>
-        <p:txBody>
-          <a:bodyPr wrap="square">
-            <a:spAutoFit/>
-          </a:bodyPr>
-          <a:lstStyle/>
-          <a:p>
-            <a:pPr algn="l">
-              <a:spcAft>
-                <a:spcPts val="500"/>
-              </a:spcAft>
-              <a:defRPr sz="1200" b="0">
-                <a:solidFill>
-                  <a:srgbClr val="1E2933"/>
-                </a:solidFill>
-                <a:latin typeface="Microsoft YaHei"/>
-              </a:defRPr>
-            </a:pPr>
-            <a:r>
-              <a:t>Episodic：逐步 state / action / reward</a:t>
-            </a:r>
-          </a:p>
-          <a:p>
-            <a:pPr algn="l">
-              <a:spcAft>
-                <a:spcPts val="500"/>
-              </a:spcAft>
-              <a:defRPr sz="1200" b="0">
-                <a:solidFill>
-                  <a:srgbClr val="1E2933"/>
-                </a:solidFill>
-                <a:latin typeface="Microsoft YaHei"/>
-              </a:defRPr>
-            </a:pPr>
-            <a:r>
-              <a:t>Semantic：游戏类型、目标语义向量</a:t>
-            </a:r>
-          </a:p>
-          <a:p>
-            <a:pPr algn="l">
-              <a:spcAft>
-                <a:spcPts val="500"/>
-              </a:spcAft>
-              <a:defRPr sz="1200" b="0">
-                <a:solidFill>
-                  <a:srgbClr val="1E2933"/>
-                </a:solidFill>
-                <a:latin typeface="Microsoft YaHei"/>
-              </a:defRPr>
-            </a:pPr>
-            <a:r>
-              <a:t>Procedural：成功策略、失败模式</a:t>
-            </a:r>
-          </a:p>
-        </p:txBody>
-      </p:sp>
-      <p:sp>
-        <p:nvSpPr>
-          <p:cNvPr id="11" name="Rounded Rectangle 10"/>
-          <p:cNvSpPr/>
-          <p:nvPr/>
-        </p:nvSpPr>
-        <p:spPr>
-          <a:xfrm>
-            <a:off x="4462272" y="1353312"/>
-            <a:ext cx="3657600" cy="2103120"/>
-          </a:xfrm>
-          <a:prstGeom prst="roundRect">
-            <a:avLst/>
-          </a:prstGeom>
-          <a:solidFill>
-            <a:srgbClr val="D0D5DA"/>
-          </a:solidFill>
-          <a:ln/>
-        </p:spPr>
-        <p:style>
-          <a:lnRef idx="1">
-            <a:schemeClr val="accent1"/>
-          </a:lnRef>
-          <a:fillRef idx="3">
-            <a:schemeClr val="accent1"/>
-          </a:fillRef>
-          <a:effectRef idx="2">
-            <a:schemeClr val="accent1"/>
-          </a:effectRef>
-          <a:fontRef idx="minor">
-            <a:schemeClr val="lt1"/>
-          </a:fontRef>
-        </p:style>
-        <p:txBody>
-          <a:bodyPr rtlCol="0" anchor="ctr"/>
-          <a:lstStyle/>
-          <a:p>
-            <a:pPr algn="ctr"/>
-          </a:p>
-        </p:txBody>
-      </p:sp>
-      <p:sp>
-        <p:nvSpPr>
-          <p:cNvPr id="12" name="Rounded Rectangle 11"/>
-          <p:cNvSpPr/>
-          <p:nvPr/>
-        </p:nvSpPr>
-        <p:spPr>
-          <a:xfrm>
-            <a:off x="4434840" y="1325880"/>
-            <a:ext cx="3657600" cy="2103120"/>
-          </a:xfrm>
-          <a:prstGeom prst="roundRect">
-            <a:avLst/>
-          </a:prstGeom>
-          <a:solidFill>
-            <a:srgbClr val="FFFFFF"/>
-          </a:solidFill>
-          <a:ln w="12700">
-            <a:solidFill>
-              <a:srgbClr val="DDE2E6"/>
-            </a:solidFill>
-          </a:ln>
-        </p:spPr>
-        <p:style>
-          <a:lnRef idx="1">
-            <a:schemeClr val="accent1"/>
-          </a:lnRef>
-          <a:fillRef idx="3">
-            <a:schemeClr val="accent1"/>
-          </a:fillRef>
-          <a:effectRef idx="2">
-            <a:schemeClr val="accent1"/>
-          </a:effectRef>
-          <a:fontRef idx="minor">
-            <a:schemeClr val="lt1"/>
-          </a:fontRef>
-        </p:style>
-        <p:txBody>
-          <a:bodyPr rtlCol="0" anchor="ctr"/>
-          <a:lstStyle/>
-          <a:p>
-            <a:pPr algn="ctr"/>
-          </a:p>
-        </p:txBody>
-      </p:sp>
-      <p:sp>
-        <p:nvSpPr>
-          <p:cNvPr id="13" name="Rectangle 12"/>
-          <p:cNvSpPr/>
-          <p:nvPr/>
-        </p:nvSpPr>
-        <p:spPr>
-          <a:xfrm>
-            <a:off x="4434840" y="1325880"/>
-            <a:ext cx="3657600" cy="411480"/>
-          </a:xfrm>
-          <a:prstGeom prst="rect">
-            <a:avLst/>
-          </a:prstGeom>
-          <a:solidFill>
-            <a:srgbClr val="0096C7"/>
-          </a:solidFill>
-          <a:ln/>
-        </p:spPr>
-        <p:style>
-          <a:lnRef idx="1">
-            <a:schemeClr val="accent1"/>
-          </a:lnRef>
-          <a:fillRef idx="3">
-            <a:schemeClr val="accent1"/>
-          </a:fillRef>
-          <a:effectRef idx="2">
-            <a:schemeClr val="accent1"/>
-          </a:effectRef>
-          <a:fontRef idx="minor">
-            <a:schemeClr val="lt1"/>
-          </a:fontRef>
-        </p:style>
-        <p:txBody>
-          <a:bodyPr rtlCol="0" anchor="ctr"/>
-          <a:lstStyle/>
-          <a:p>
-            <a:pPr algn="ctr"/>
-          </a:p>
-        </p:txBody>
-      </p:sp>
-      <p:sp>
-        <p:nvSpPr>
-          <p:cNvPr id="14" name="TextBox 13"/>
-          <p:cNvSpPr txBox="1"/>
-          <p:nvPr/>
-        </p:nvSpPr>
-        <p:spPr>
-          <a:xfrm>
-            <a:off x="4507992" y="1399032"/>
-            <a:ext cx="3511296" cy="320040"/>
+            <a:off x="10789920" y="6583680"/>
+            <a:ext cx="914400" cy="228600"/>
           </a:xfrm>
           <a:prstGeom prst="rect">
             <a:avLst/>
@@ -9821,491 +9710,6 @@
           </a:bodyPr>
           <a:lstStyle/>
           <a:p>
-            <a:pPr algn="l">
-              <a:defRPr sz="1400" b="1">
-                <a:solidFill>
-                  <a:srgbClr val="F3F6F9"/>
-                </a:solidFill>
-                <a:latin typeface="Microsoft YaHei"/>
-              </a:defRPr>
-            </a:pPr>
-            <a:r>
-              <a:t>AgentBus 消息</a:t>
-            </a:r>
-          </a:p>
-        </p:txBody>
-      </p:sp>
-      <p:sp>
-        <p:nvSpPr>
-          <p:cNvPr id="15" name="TextBox 14"/>
-          <p:cNvSpPr txBox="1"/>
-          <p:nvPr/>
-        </p:nvSpPr>
-        <p:spPr>
-          <a:xfrm>
-            <a:off x="4544568" y="1828800"/>
-            <a:ext cx="3438144" cy="1508760"/>
-          </a:xfrm>
-          <a:prstGeom prst="rect">
-            <a:avLst/>
-          </a:prstGeom>
-          <a:noFill/>
-        </p:spPr>
-        <p:txBody>
-          <a:bodyPr wrap="square">
-            <a:spAutoFit/>
-          </a:bodyPr>
-          <a:lstStyle/>
-          <a:p>
-            <a:pPr algn="l">
-              <a:spcAft>
-                <a:spcPts val="500"/>
-              </a:spcAft>
-              <a:defRPr sz="1200" b="0">
-                <a:solidFill>
-                  <a:srgbClr val="1E2933"/>
-                </a:solidFill>
-                <a:latin typeface="Microsoft YaHei"/>
-              </a:defRPr>
-            </a:pPr>
-            <a:r>
-              <a:t>OBSERVATION / STATE_UPDATE</a:t>
-            </a:r>
-          </a:p>
-          <a:p>
-            <a:pPr algn="l">
-              <a:spcAft>
-                <a:spcPts val="500"/>
-              </a:spcAft>
-              <a:defRPr sz="1200" b="0">
-                <a:solidFill>
-                  <a:srgbClr val="1E2933"/>
-                </a:solidFill>
-                <a:latin typeface="Microsoft YaHei"/>
-              </a:defRPr>
-            </a:pPr>
-            <a:r>
-              <a:t>DECISION_PROPOSAL / CRITIQUE</a:t>
-            </a:r>
-          </a:p>
-          <a:p>
-            <a:pPr algn="l">
-              <a:spcAft>
-                <a:spcPts val="500"/>
-              </a:spcAft>
-              <a:defRPr sz="1200" b="0">
-                <a:solidFill>
-                  <a:srgbClr val="1E2933"/>
-                </a:solidFill>
-                <a:latin typeface="Microsoft YaHei"/>
-              </a:defRPr>
-            </a:pPr>
-            <a:r>
-              <a:t>RULE_UPDATE / MEMORY_WRITE</a:t>
-            </a:r>
-          </a:p>
-        </p:txBody>
-      </p:sp>
-      <p:sp>
-        <p:nvSpPr>
-          <p:cNvPr id="16" name="Rounded Rectangle 15"/>
-          <p:cNvSpPr/>
-          <p:nvPr/>
-        </p:nvSpPr>
-        <p:spPr>
-          <a:xfrm>
-            <a:off x="8394192" y="1353312"/>
-            <a:ext cx="3657600" cy="2103120"/>
-          </a:xfrm>
-          <a:prstGeom prst="roundRect">
-            <a:avLst/>
-          </a:prstGeom>
-          <a:solidFill>
-            <a:srgbClr val="D0D5DA"/>
-          </a:solidFill>
-          <a:ln/>
-        </p:spPr>
-        <p:style>
-          <a:lnRef idx="1">
-            <a:schemeClr val="accent1"/>
-          </a:lnRef>
-          <a:fillRef idx="3">
-            <a:schemeClr val="accent1"/>
-          </a:fillRef>
-          <a:effectRef idx="2">
-            <a:schemeClr val="accent1"/>
-          </a:effectRef>
-          <a:fontRef idx="minor">
-            <a:schemeClr val="lt1"/>
-          </a:fontRef>
-        </p:style>
-        <p:txBody>
-          <a:bodyPr rtlCol="0" anchor="ctr"/>
-          <a:lstStyle/>
-          <a:p>
-            <a:pPr algn="ctr"/>
-          </a:p>
-        </p:txBody>
-      </p:sp>
-      <p:sp>
-        <p:nvSpPr>
-          <p:cNvPr id="17" name="Rounded Rectangle 16"/>
-          <p:cNvSpPr/>
-          <p:nvPr/>
-        </p:nvSpPr>
-        <p:spPr>
-          <a:xfrm>
-            <a:off x="8366760" y="1325880"/>
-            <a:ext cx="3657600" cy="2103120"/>
-          </a:xfrm>
-          <a:prstGeom prst="roundRect">
-            <a:avLst/>
-          </a:prstGeom>
-          <a:solidFill>
-            <a:srgbClr val="FFFFFF"/>
-          </a:solidFill>
-          <a:ln w="12700">
-            <a:solidFill>
-              <a:srgbClr val="DDE2E6"/>
-            </a:solidFill>
-          </a:ln>
-        </p:spPr>
-        <p:style>
-          <a:lnRef idx="1">
-            <a:schemeClr val="accent1"/>
-          </a:lnRef>
-          <a:fillRef idx="3">
-            <a:schemeClr val="accent1"/>
-          </a:fillRef>
-          <a:effectRef idx="2">
-            <a:schemeClr val="accent1"/>
-          </a:effectRef>
-          <a:fontRef idx="minor">
-            <a:schemeClr val="lt1"/>
-          </a:fontRef>
-        </p:style>
-        <p:txBody>
-          <a:bodyPr rtlCol="0" anchor="ctr"/>
-          <a:lstStyle/>
-          <a:p>
-            <a:pPr algn="ctr"/>
-          </a:p>
-        </p:txBody>
-      </p:sp>
-      <p:sp>
-        <p:nvSpPr>
-          <p:cNvPr id="18" name="Rectangle 17"/>
-          <p:cNvSpPr/>
-          <p:nvPr/>
-        </p:nvSpPr>
-        <p:spPr>
-          <a:xfrm>
-            <a:off x="8366760" y="1325880"/>
-            <a:ext cx="3657600" cy="411480"/>
-          </a:xfrm>
-          <a:prstGeom prst="rect">
-            <a:avLst/>
-          </a:prstGeom>
-          <a:solidFill>
-            <a:srgbClr val="FF6B35"/>
-          </a:solidFill>
-          <a:ln/>
-        </p:spPr>
-        <p:style>
-          <a:lnRef idx="1">
-            <a:schemeClr val="accent1"/>
-          </a:lnRef>
-          <a:fillRef idx="3">
-            <a:schemeClr val="accent1"/>
-          </a:fillRef>
-          <a:effectRef idx="2">
-            <a:schemeClr val="accent1"/>
-          </a:effectRef>
-          <a:fontRef idx="minor">
-            <a:schemeClr val="lt1"/>
-          </a:fontRef>
-        </p:style>
-        <p:txBody>
-          <a:bodyPr rtlCol="0" anchor="ctr"/>
-          <a:lstStyle/>
-          <a:p>
-            <a:pPr algn="ctr"/>
-          </a:p>
-        </p:txBody>
-      </p:sp>
-      <p:sp>
-        <p:nvSpPr>
-          <p:cNvPr id="19" name="TextBox 18"/>
-          <p:cNvSpPr txBox="1"/>
-          <p:nvPr/>
-        </p:nvSpPr>
-        <p:spPr>
-          <a:xfrm>
-            <a:off x="8439912" y="1399032"/>
-            <a:ext cx="3511296" cy="320040"/>
-          </a:xfrm>
-          <a:prstGeom prst="rect">
-            <a:avLst/>
-          </a:prstGeom>
-          <a:noFill/>
-        </p:spPr>
-        <p:txBody>
-          <a:bodyPr wrap="none">
-            <a:spAutoFit/>
-          </a:bodyPr>
-          <a:lstStyle/>
-          <a:p>
-            <a:pPr algn="l">
-              <a:defRPr sz="1400" b="1">
-                <a:solidFill>
-                  <a:srgbClr val="F3F6F9"/>
-                </a:solidFill>
-                <a:latin typeface="Microsoft YaHei"/>
-              </a:defRPr>
-            </a:pPr>
-            <a:r>
-              <a:t>协作流程</a:t>
-            </a:r>
-          </a:p>
-        </p:txBody>
-      </p:sp>
-      <p:sp>
-        <p:nvSpPr>
-          <p:cNvPr id="20" name="TextBox 19"/>
-          <p:cNvSpPr txBox="1"/>
-          <p:nvPr/>
-        </p:nvSpPr>
-        <p:spPr>
-          <a:xfrm>
-            <a:off x="8476488" y="1828800"/>
-            <a:ext cx="3438144" cy="1508760"/>
-          </a:xfrm>
-          <a:prstGeom prst="rect">
-            <a:avLst/>
-          </a:prstGeom>
-          <a:noFill/>
-        </p:spPr>
-        <p:txBody>
-          <a:bodyPr wrap="square">
-            <a:spAutoFit/>
-          </a:bodyPr>
-          <a:lstStyle/>
-          <a:p>
-            <a:pPr algn="l">
-              <a:spcAft>
-                <a:spcPts val="500"/>
-              </a:spcAft>
-              <a:defRPr sz="1200" b="0">
-                <a:solidFill>
-                  <a:srgbClr val="1E2933"/>
-                </a:solidFill>
-                <a:latin typeface="Microsoft YaHei"/>
-              </a:defRPr>
-            </a:pPr>
-            <a:r>
-              <a:t>Observer 采集 probe 状态</a:t>
-            </a:r>
-          </a:p>
-          <a:p>
-            <a:pPr algn="l">
-              <a:spcAft>
-                <a:spcPts val="500"/>
-              </a:spcAft>
-              <a:defRPr sz="1200" b="0">
-                <a:solidFill>
-                  <a:srgbClr val="1E2933"/>
-                </a:solidFill>
-                <a:latin typeface="Microsoft YaHei"/>
-              </a:defRPr>
-            </a:pPr>
-            <a:r>
-              <a:t>DecisionAnalyst 生成候选动作</a:t>
-            </a:r>
-          </a:p>
-          <a:p>
-            <a:pPr algn="l">
-              <a:spcAft>
-                <a:spcPts val="500"/>
-              </a:spcAft>
-              <a:defRPr sz="1200" b="0">
-                <a:solidFill>
-                  <a:srgbClr val="1E2933"/>
-                </a:solidFill>
-                <a:latin typeface="Microsoft YaHei"/>
-              </a:defRPr>
-            </a:pPr>
-            <a:r>
-              <a:t>Critic 评估一致性风险</a:t>
-            </a:r>
-          </a:p>
-          <a:p>
-            <a:pPr algn="l">
-              <a:spcAft>
-                <a:spcPts val="500"/>
-              </a:spcAft>
-              <a:defRPr sz="1200" b="0">
-                <a:solidFill>
-                  <a:srgbClr val="1E2933"/>
-                </a:solidFill>
-                <a:latin typeface="Microsoft YaHei"/>
-              </a:defRPr>
-            </a:pPr>
-            <a:r>
-              <a:t>MemoryCurator 归档有用模式</a:t>
-            </a:r>
-          </a:p>
-        </p:txBody>
-      </p:sp>
-      <p:sp>
-        <p:nvSpPr>
-          <p:cNvPr id="21" name="Rounded Rectangle 20"/>
-          <p:cNvSpPr/>
-          <p:nvPr/>
-        </p:nvSpPr>
-        <p:spPr>
-          <a:xfrm>
-            <a:off x="502920" y="3657600"/>
-            <a:ext cx="11430000" cy="1005840"/>
-          </a:xfrm>
-          <a:prstGeom prst="roundRect">
-            <a:avLst/>
-          </a:prstGeom>
-          <a:solidFill>
-            <a:srgbClr val="F3F6F9"/>
-          </a:solidFill>
-          <a:ln/>
-        </p:spPr>
-        <p:style>
-          <a:lnRef idx="1">
-            <a:schemeClr val="accent1"/>
-          </a:lnRef>
-          <a:fillRef idx="3">
-            <a:schemeClr val="accent1"/>
-          </a:fillRef>
-          <a:effectRef idx="2">
-            <a:schemeClr val="accent1"/>
-          </a:effectRef>
-          <a:fontRef idx="minor">
-            <a:schemeClr val="lt1"/>
-          </a:fontRef>
-        </p:style>
-        <p:txBody>
-          <a:bodyPr rtlCol="0" anchor="ctr"/>
-          <a:lstStyle/>
-          <a:p>
-            <a:pPr algn="ctr">
-              <a:defRPr sz="1400" b="0">
-                <a:solidFill>
-                  <a:srgbClr val="1E2933"/>
-                </a:solidFill>
-                <a:latin typeface="Microsoft YaHei"/>
-              </a:defRPr>
-            </a:pPr>
-            <a:r>
-              <a:t>核心思路：不要把所有决策压给一个模型。让云端 API 做长程规划，本地 VLM 做画面理解，规则引擎做零延迟执行，记忆层负责跨 episode 复用。</a:t>
-            </a:r>
-          </a:p>
-        </p:txBody>
-      </p:sp>
-      <p:sp>
-        <p:nvSpPr>
-          <p:cNvPr id="22" name="Rectangle 21"/>
-          <p:cNvSpPr/>
-          <p:nvPr/>
-        </p:nvSpPr>
-        <p:spPr>
-          <a:xfrm>
-            <a:off x="0" y="6537960"/>
-            <a:ext cx="12191695" cy="18288"/>
-          </a:xfrm>
-          <a:prstGeom prst="rect">
-            <a:avLst/>
-          </a:prstGeom>
-          <a:solidFill>
-            <a:srgbClr val="0096C7"/>
-          </a:solidFill>
-          <a:ln/>
-        </p:spPr>
-        <p:style>
-          <a:lnRef idx="1">
-            <a:schemeClr val="accent1"/>
-          </a:lnRef>
-          <a:fillRef idx="3">
-            <a:schemeClr val="accent1"/>
-          </a:fillRef>
-          <a:effectRef idx="2">
-            <a:schemeClr val="accent1"/>
-          </a:effectRef>
-          <a:fontRef idx="minor">
-            <a:schemeClr val="lt1"/>
-          </a:fontRef>
-        </p:style>
-        <p:txBody>
-          <a:bodyPr rtlCol="0" anchor="ctr"/>
-          <a:lstStyle/>
-          <a:p>
-            <a:pPr algn="ctr"/>
-          </a:p>
-        </p:txBody>
-      </p:sp>
-      <p:sp>
-        <p:nvSpPr>
-          <p:cNvPr id="23" name="TextBox 22"/>
-          <p:cNvSpPr txBox="1"/>
-          <p:nvPr/>
-        </p:nvSpPr>
-        <p:spPr>
-          <a:xfrm>
-            <a:off x="457200" y="6583680"/>
-            <a:ext cx="3657600" cy="228600"/>
-          </a:xfrm>
-          <a:prstGeom prst="rect">
-            <a:avLst/>
-          </a:prstGeom>
-          <a:noFill/>
-        </p:spPr>
-        <p:txBody>
-          <a:bodyPr wrap="none">
-            <a:spAutoFit/>
-          </a:bodyPr>
-          <a:lstStyle/>
-          <a:p>
-            <a:pPr algn="l">
-              <a:defRPr sz="1000" b="0">
-                <a:solidFill>
-                  <a:srgbClr val="6C757D"/>
-                </a:solidFill>
-                <a:latin typeface="Microsoft YaHei"/>
-              </a:defRPr>
-            </a:pPr>
-            <a:r>
-              <a:t>smallgameagent · LLM/VLM + 规则驱动</a:t>
-            </a:r>
-          </a:p>
-        </p:txBody>
-      </p:sp>
-      <p:sp>
-        <p:nvSpPr>
-          <p:cNvPr id="24" name="TextBox 23"/>
-          <p:cNvSpPr txBox="1"/>
-          <p:nvPr/>
-        </p:nvSpPr>
-        <p:spPr>
-          <a:xfrm>
-            <a:off x="10789920" y="6583680"/>
-            <a:ext cx="914400" cy="228600"/>
-          </a:xfrm>
-          <a:prstGeom prst="rect">
-            <a:avLst/>
-          </a:prstGeom>
-          <a:noFill/>
-        </p:spPr>
-        <p:txBody>
-          <a:bodyPr wrap="none">
-            <a:spAutoFit/>
-          </a:bodyPr>
-          <a:lstStyle/>
-          <a:p>
             <a:pPr algn="r">
               <a:defRPr sz="1000" b="0">
                 <a:solidFill>
@@ -10315,7 +9719,7 @@
               </a:defRPr>
             </a:pPr>
             <a:r>
-              <a:t>19/35</a:t>
+              <a:t>19/37</a:t>
             </a:r>
           </a:p>
         </p:txBody>
@@ -11188,7 +10592,7 @@
               </a:defRPr>
             </a:pPr>
             <a:r>
-              <a:t>2/35</a:t>
+              <a:t>2/37</a:t>
             </a:r>
           </a:p>
         </p:txBody>
@@ -11220,7 +10624,7 @@
         <p:spPr>
           <a:xfrm>
             <a:off x="0" y="0"/>
-            <a:ext cx="12191695" cy="960120"/>
+            <a:ext cx="12191695" cy="6858000"/>
           </a:xfrm>
           <a:prstGeom prst="rect">
             <a:avLst/>
@@ -11254,56 +10658,23 @@
       </p:sp>
       <p:sp>
         <p:nvSpPr>
-          <p:cNvPr id="3" name="TextBox 2"/>
-          <p:cNvSpPr txBox="1"/>
-          <p:nvPr/>
-        </p:nvSpPr>
-        <p:spPr>
-          <a:xfrm>
-            <a:off x="457200" y="228600"/>
-            <a:ext cx="11247120" cy="548640"/>
-          </a:xfrm>
-          <a:prstGeom prst="rect">
-            <a:avLst/>
-          </a:prstGeom>
-          <a:noFill/>
-        </p:spPr>
-        <p:txBody>
-          <a:bodyPr wrap="none">
-            <a:spAutoFit/>
-          </a:bodyPr>
-          <a:lstStyle/>
-          <a:p>
-            <a:pPr algn="l">
-              <a:defRPr sz="3000" b="1">
-                <a:solidFill>
-                  <a:srgbClr val="F3F6F9"/>
-                </a:solidFill>
-                <a:latin typeface="Microsoft YaHei"/>
-              </a:defRPr>
-            </a:pPr>
-            <a:r>
-              <a:t>通信与记忆的设计取舍</a:t>
-            </a:r>
-          </a:p>
-        </p:txBody>
-      </p:sp>
-      <p:sp>
-        <p:nvSpPr>
-          <p:cNvPr id="4" name="Rectangle 3"/>
+          <p:cNvPr id="3" name="Rectangle 2"/>
           <p:cNvSpPr/>
           <p:nvPr/>
         </p:nvSpPr>
         <p:spPr>
           <a:xfrm>
-            <a:off x="0" y="960120"/>
-            <a:ext cx="164592" cy="5897880"/>
-          </a:xfrm>
-          <a:prstGeom prst="rect">
-            <a:avLst/>
-          </a:prstGeom>
-          <a:solidFill>
-            <a:srgbClr val="0096C7"/>
+            <a:off x="6858000" y="-914400"/>
+            <a:ext cx="5943600" cy="8686800"/>
+          </a:xfrm>
+          <a:prstGeom prst="rect">
+            <a:avLst/>
+          </a:prstGeom>
+          <a:solidFill>
+            <a:srgbClr val="0096C7">
+              <a:lumMod val="80000"/>
+              <a:lumOff val="20000"/>
+            </a:srgbClr>
           </a:solidFill>
           <a:ln/>
         </p:spPr>
@@ -11331,26 +10702,94 @@
       </p:sp>
       <p:sp>
         <p:nvSpPr>
-          <p:cNvPr id="5" name="Rectangle 4"/>
+          <p:cNvPr id="4" name="TextBox 3"/>
+          <p:cNvSpPr txBox="1"/>
+          <p:nvPr/>
+        </p:nvSpPr>
+        <p:spPr>
+          <a:xfrm>
+            <a:off x="548640" y="1645920"/>
+            <a:ext cx="2743200" cy="1828800"/>
+          </a:xfrm>
+          <a:prstGeom prst="rect">
+            <a:avLst/>
+          </a:prstGeom>
+          <a:noFill/>
+        </p:spPr>
+        <p:txBody>
+          <a:bodyPr wrap="none">
+            <a:spAutoFit/>
+          </a:bodyPr>
+          <a:lstStyle/>
+          <a:p>
+            <a:pPr algn="l">
+              <a:defRPr sz="12000" b="1">
+                <a:solidFill>
+                  <a:srgbClr val="333DA0"/>
+                </a:solidFill>
+                <a:latin typeface="Microsoft YaHei"/>
+              </a:defRPr>
+            </a:pPr>
+            <a:r>
+              <a:t>05</a:t>
+            </a:r>
+          </a:p>
+        </p:txBody>
+      </p:sp>
+      <p:sp>
+        <p:nvSpPr>
+          <p:cNvPr id="5" name="TextBox 4"/>
+          <p:cNvSpPr txBox="1"/>
+          <p:nvPr/>
+        </p:nvSpPr>
+        <p:spPr>
+          <a:xfrm>
+            <a:off x="548640" y="2834640"/>
+            <a:ext cx="11064240" cy="1097280"/>
+          </a:xfrm>
+          <a:prstGeom prst="rect">
+            <a:avLst/>
+          </a:prstGeom>
+          <a:noFill/>
+        </p:spPr>
+        <p:txBody>
+          <a:bodyPr wrap="none">
+            <a:spAutoFit/>
+          </a:bodyPr>
+          <a:lstStyle/>
+          <a:p>
+            <a:pPr algn="l">
+              <a:defRPr sz="4400" b="1">
+                <a:solidFill>
+                  <a:srgbClr val="F3F6F9"/>
+                </a:solidFill>
+                <a:latin typeface="Microsoft YaHei"/>
+              </a:defRPr>
+            </a:pPr>
+            <a:r>
+              <a:t>Agent 通信与记忆</a:t>
+            </a:r>
+          </a:p>
+        </p:txBody>
+      </p:sp>
+      <p:sp>
+        <p:nvSpPr>
+          <p:cNvPr id="6" name="Rectangle 5"/>
           <p:cNvSpPr/>
           <p:nvPr/>
         </p:nvSpPr>
         <p:spPr>
           <a:xfrm>
-            <a:off x="320040" y="1078992"/>
-            <a:ext cx="11548872" cy="5349240"/>
-          </a:xfrm>
-          <a:prstGeom prst="rect">
-            <a:avLst/>
-          </a:prstGeom>
-          <a:solidFill>
-            <a:srgbClr val="FFFFFF"/>
-          </a:solidFill>
-          <a:ln w="12700">
-            <a:solidFill>
-              <a:srgbClr val="E1E5E9"/>
-            </a:solidFill>
-          </a:ln>
+            <a:off x="548640" y="4023360"/>
+            <a:ext cx="1828800" cy="73152"/>
+          </a:xfrm>
+          <a:prstGeom prst="rect">
+            <a:avLst/>
+          </a:prstGeom>
+          <a:solidFill>
+            <a:srgbClr val="FF6B35"/>
+          </a:solidFill>
+          <a:ln/>
         </p:spPr>
         <p:style>
           <a:lnRef idx="1">
@@ -11376,20 +10815,20 @@
       </p:sp>
       <p:sp>
         <p:nvSpPr>
-          <p:cNvPr id="6" name="Rounded Rectangle 5"/>
+          <p:cNvPr id="7" name="Rectangle 6"/>
           <p:cNvSpPr/>
           <p:nvPr/>
         </p:nvSpPr>
         <p:spPr>
           <a:xfrm>
-            <a:off x="621792" y="1353312"/>
-            <a:ext cx="5486400" cy="4937760"/>
-          </a:xfrm>
-          <a:prstGeom prst="roundRect">
-            <a:avLst/>
-          </a:prstGeom>
-          <a:solidFill>
-            <a:srgbClr val="D0D5DA"/>
+            <a:off x="0" y="6537960"/>
+            <a:ext cx="12191695" cy="18288"/>
+          </a:xfrm>
+          <a:prstGeom prst="rect">
+            <a:avLst/>
+          </a:prstGeom>
+          <a:solidFill>
+            <a:srgbClr val="0096C7"/>
           </a:solidFill>
           <a:ln/>
         </p:spPr>
@@ -11417,100 +10856,14 @@
       </p:sp>
       <p:sp>
         <p:nvSpPr>
-          <p:cNvPr id="7" name="Rounded Rectangle 6"/>
-          <p:cNvSpPr/>
-          <p:nvPr/>
-        </p:nvSpPr>
-        <p:spPr>
-          <a:xfrm>
-            <a:off x="594360" y="1325880"/>
-            <a:ext cx="5486400" cy="4937760"/>
-          </a:xfrm>
-          <a:prstGeom prst="roundRect">
-            <a:avLst/>
-          </a:prstGeom>
-          <a:solidFill>
-            <a:srgbClr val="FFFFFF"/>
-          </a:solidFill>
-          <a:ln w="12700">
-            <a:solidFill>
-              <a:srgbClr val="DDE2E6"/>
-            </a:solidFill>
-          </a:ln>
-        </p:spPr>
-        <p:style>
-          <a:lnRef idx="1">
-            <a:schemeClr val="accent1"/>
-          </a:lnRef>
-          <a:fillRef idx="3">
-            <a:schemeClr val="accent1"/>
-          </a:fillRef>
-          <a:effectRef idx="2">
-            <a:schemeClr val="accent1"/>
-          </a:effectRef>
-          <a:fontRef idx="minor">
-            <a:schemeClr val="lt1"/>
-          </a:fontRef>
-        </p:style>
-        <p:txBody>
-          <a:bodyPr rtlCol="0" anchor="ctr"/>
-          <a:lstStyle/>
-          <a:p>
-            <a:pPr algn="ctr"/>
-          </a:p>
-        </p:txBody>
-      </p:sp>
-      <p:sp>
-        <p:nvSpPr>
-          <p:cNvPr id="8" name="Rectangle 7"/>
-          <p:cNvSpPr/>
-          <p:nvPr/>
-        </p:nvSpPr>
-        <p:spPr>
-          <a:xfrm>
-            <a:off x="594360" y="1325880"/>
-            <a:ext cx="5486400" cy="411480"/>
-          </a:xfrm>
-          <a:prstGeom prst="rect">
-            <a:avLst/>
-          </a:prstGeom>
-          <a:solidFill>
-            <a:srgbClr val="0096C7"/>
-          </a:solidFill>
-          <a:ln/>
-        </p:spPr>
-        <p:style>
-          <a:lnRef idx="1">
-            <a:schemeClr val="accent1"/>
-          </a:lnRef>
-          <a:fillRef idx="3">
-            <a:schemeClr val="accent1"/>
-          </a:fillRef>
-          <a:effectRef idx="2">
-            <a:schemeClr val="accent1"/>
-          </a:effectRef>
-          <a:fontRef idx="minor">
-            <a:schemeClr val="lt1"/>
-          </a:fontRef>
-        </p:style>
-        <p:txBody>
-          <a:bodyPr rtlCol="0" anchor="ctr"/>
-          <a:lstStyle/>
-          <a:p>
-            <a:pPr algn="ctr"/>
-          </a:p>
-        </p:txBody>
-      </p:sp>
-      <p:sp>
-        <p:nvSpPr>
-          <p:cNvPr id="9" name="TextBox 8"/>
+          <p:cNvPr id="8" name="TextBox 7"/>
           <p:cNvSpPr txBox="1"/>
           <p:nvPr/>
         </p:nvSpPr>
         <p:spPr>
           <a:xfrm>
-            <a:off x="667512" y="1399032"/>
-            <a:ext cx="5340096" cy="320040"/>
+            <a:off x="457200" y="6583680"/>
+            <a:ext cx="3657600" cy="228600"/>
           </a:xfrm>
           <a:prstGeom prst="rect">
             <a:avLst/>
@@ -11524,243 +10877,29 @@
           <a:lstStyle/>
           <a:p>
             <a:pPr algn="l">
-              <a:defRPr sz="1400" b="1">
-                <a:solidFill>
-                  <a:srgbClr val="F3F6F9"/>
-                </a:solidFill>
-                <a:latin typeface="Microsoft YaHei"/>
-              </a:defRPr>
-            </a:pPr>
-            <a:r>
-              <a:t>记忆读回的优势</a:t>
-            </a:r>
-          </a:p>
-        </p:txBody>
-      </p:sp>
-      <p:sp>
-        <p:nvSpPr>
-          <p:cNvPr id="10" name="TextBox 9"/>
+              <a:defRPr sz="1000" b="0">
+                <a:solidFill>
+                  <a:srgbClr val="6C757D"/>
+                </a:solidFill>
+                <a:latin typeface="Microsoft YaHei"/>
+              </a:defRPr>
+            </a:pPr>
+            <a:r>
+              <a:t>smallgameagent · LLM/VLM + 规则驱动</a:t>
+            </a:r>
+          </a:p>
+        </p:txBody>
+      </p:sp>
+      <p:sp>
+        <p:nvSpPr>
+          <p:cNvPr id="9" name="TextBox 8"/>
           <p:cNvSpPr txBox="1"/>
           <p:nvPr/>
         </p:nvSpPr>
         <p:spPr>
           <a:xfrm>
-            <a:off x="704088" y="1828800"/>
-            <a:ext cx="5266944" cy="4343400"/>
-          </a:xfrm>
-          <a:prstGeom prst="rect">
-            <a:avLst/>
-          </a:prstGeom>
-          <a:noFill/>
-        </p:spPr>
-        <p:txBody>
-          <a:bodyPr wrap="square">
-            <a:spAutoFit/>
-          </a:bodyPr>
-          <a:lstStyle/>
-          <a:p>
-            <a:pPr algn="l">
-              <a:spcAft>
-                <a:spcPts val="500"/>
-              </a:spcAft>
-              <a:defRPr sz="1200" b="0">
-                <a:solidFill>
-                  <a:srgbClr val="1E2933"/>
-                </a:solidFill>
-                <a:latin typeface="Microsoft YaHei"/>
-              </a:defRPr>
-            </a:pPr>
-            <a:r>
-              <a:t>00461 multi-bus-memory 0.106 → 0.300</a:t>
-            </a:r>
-          </a:p>
-          <a:p>
-            <a:pPr algn="l">
-              <a:spcAft>
-                <a:spcPts val="500"/>
-              </a:spcAft>
-              <a:defRPr sz="1200" b="0">
-                <a:solidFill>
-                  <a:srgbClr val="1E2933"/>
-                </a:solidFill>
-                <a:latin typeface="Microsoft YaHei"/>
-              </a:defRPr>
-            </a:pPr>
-            <a:r>
-              <a:t>00736 multi-bus-memory 0.269 → 0.300</a:t>
-            </a:r>
-          </a:p>
-          <a:p>
-            <a:pPr algn="l">
-              <a:spcAft>
-                <a:spcPts val="500"/>
-              </a:spcAft>
-              <a:defRPr sz="1200" b="0">
-                <a:solidFill>
-                  <a:srgbClr val="1E2933"/>
-                </a:solidFill>
-                <a:latin typeface="Microsoft YaHei"/>
-              </a:defRPr>
-            </a:pPr>
-            <a:r>
-              <a:t>跨 episode 复用成功模式</a:t>
-            </a:r>
-          </a:p>
-          <a:p>
-            <a:pPr algn="l">
-              <a:spcAft>
-                <a:spcPts val="500"/>
-              </a:spcAft>
-              <a:defRPr sz="1200" b="0">
-                <a:solidFill>
-                  <a:srgbClr val="1E2933"/>
-                </a:solidFill>
-                <a:latin typeface="Microsoft YaHei"/>
-              </a:defRPr>
-            </a:pPr>
-            <a:r>
-              <a:t>减少重复探索带来的 stall</a:t>
-            </a:r>
-          </a:p>
-        </p:txBody>
-      </p:sp>
-      <p:sp>
-        <p:nvSpPr>
-          <p:cNvPr id="11" name="Rounded Rectangle 10"/>
-          <p:cNvSpPr/>
-          <p:nvPr/>
-        </p:nvSpPr>
-        <p:spPr>
-          <a:xfrm>
-            <a:off x="6382512" y="1353312"/>
-            <a:ext cx="5486400" cy="4937760"/>
-          </a:xfrm>
-          <a:prstGeom prst="roundRect">
-            <a:avLst/>
-          </a:prstGeom>
-          <a:solidFill>
-            <a:srgbClr val="D0D5DA"/>
-          </a:solidFill>
-          <a:ln/>
-        </p:spPr>
-        <p:style>
-          <a:lnRef idx="1">
-            <a:schemeClr val="accent1"/>
-          </a:lnRef>
-          <a:fillRef idx="3">
-            <a:schemeClr val="accent1"/>
-          </a:fillRef>
-          <a:effectRef idx="2">
-            <a:schemeClr val="accent1"/>
-          </a:effectRef>
-          <a:fontRef idx="minor">
-            <a:schemeClr val="lt1"/>
-          </a:fontRef>
-        </p:style>
-        <p:txBody>
-          <a:bodyPr rtlCol="0" anchor="ctr"/>
-          <a:lstStyle/>
-          <a:p>
-            <a:pPr algn="ctr"/>
-          </a:p>
-        </p:txBody>
-      </p:sp>
-      <p:sp>
-        <p:nvSpPr>
-          <p:cNvPr id="12" name="Rounded Rectangle 11"/>
-          <p:cNvSpPr/>
-          <p:nvPr/>
-        </p:nvSpPr>
-        <p:spPr>
-          <a:xfrm>
-            <a:off x="6355080" y="1325880"/>
-            <a:ext cx="5486400" cy="4937760"/>
-          </a:xfrm>
-          <a:prstGeom prst="roundRect">
-            <a:avLst/>
-          </a:prstGeom>
-          <a:solidFill>
-            <a:srgbClr val="FFFFFF"/>
-          </a:solidFill>
-          <a:ln w="12700">
-            <a:solidFill>
-              <a:srgbClr val="DDE2E6"/>
-            </a:solidFill>
-          </a:ln>
-        </p:spPr>
-        <p:style>
-          <a:lnRef idx="1">
-            <a:schemeClr val="accent1"/>
-          </a:lnRef>
-          <a:fillRef idx="3">
-            <a:schemeClr val="accent1"/>
-          </a:fillRef>
-          <a:effectRef idx="2">
-            <a:schemeClr val="accent1"/>
-          </a:effectRef>
-          <a:fontRef idx="minor">
-            <a:schemeClr val="lt1"/>
-          </a:fontRef>
-        </p:style>
-        <p:txBody>
-          <a:bodyPr rtlCol="0" anchor="ctr"/>
-          <a:lstStyle/>
-          <a:p>
-            <a:pPr algn="ctr"/>
-          </a:p>
-        </p:txBody>
-      </p:sp>
-      <p:sp>
-        <p:nvSpPr>
-          <p:cNvPr id="13" name="Rectangle 12"/>
-          <p:cNvSpPr/>
-          <p:nvPr/>
-        </p:nvSpPr>
-        <p:spPr>
-          <a:xfrm>
-            <a:off x="6355080" y="1325880"/>
-            <a:ext cx="5486400" cy="411480"/>
-          </a:xfrm>
-          <a:prstGeom prst="rect">
-            <a:avLst/>
-          </a:prstGeom>
-          <a:solidFill>
-            <a:srgbClr val="FF6B35"/>
-          </a:solidFill>
-          <a:ln/>
-        </p:spPr>
-        <p:style>
-          <a:lnRef idx="1">
-            <a:schemeClr val="accent1"/>
-          </a:lnRef>
-          <a:fillRef idx="3">
-            <a:schemeClr val="accent1"/>
-          </a:fillRef>
-          <a:effectRef idx="2">
-            <a:schemeClr val="accent1"/>
-          </a:effectRef>
-          <a:fontRef idx="minor">
-            <a:schemeClr val="lt1"/>
-          </a:fontRef>
-        </p:style>
-        <p:txBody>
-          <a:bodyPr rtlCol="0" anchor="ctr"/>
-          <a:lstStyle/>
-          <a:p>
-            <a:pPr algn="ctr"/>
-          </a:p>
-        </p:txBody>
-      </p:sp>
-      <p:sp>
-        <p:nvSpPr>
-          <p:cNvPr id="14" name="TextBox 13"/>
-          <p:cNvSpPr txBox="1"/>
-          <p:nvPr/>
-        </p:nvSpPr>
-        <p:spPr>
-          <a:xfrm>
-            <a:off x="6428232" y="1399032"/>
-            <a:ext cx="5340096" cy="320040"/>
+            <a:off x="10789920" y="6583680"/>
+            <a:ext cx="914400" cy="228600"/>
           </a:xfrm>
           <a:prstGeom prst="rect">
             <a:avLst/>
@@ -11773,190 +10912,6 @@
           </a:bodyPr>
           <a:lstStyle/>
           <a:p>
-            <a:pPr algn="l">
-              <a:defRPr sz="1400" b="1">
-                <a:solidFill>
-                  <a:srgbClr val="F3F6F9"/>
-                </a:solidFill>
-                <a:latin typeface="Microsoft YaHei"/>
-              </a:defRPr>
-            </a:pPr>
-            <a:r>
-              <a:t>仍需解决的问题</a:t>
-            </a:r>
-          </a:p>
-        </p:txBody>
-      </p:sp>
-      <p:sp>
-        <p:nvSpPr>
-          <p:cNvPr id="15" name="TextBox 14"/>
-          <p:cNvSpPr txBox="1"/>
-          <p:nvPr/>
-        </p:nvSpPr>
-        <p:spPr>
-          <a:xfrm>
-            <a:off x="6464808" y="1828800"/>
-            <a:ext cx="5266944" cy="4343400"/>
-          </a:xfrm>
-          <a:prstGeom prst="rect">
-            <a:avLst/>
-          </a:prstGeom>
-          <a:noFill/>
-        </p:spPr>
-        <p:txBody>
-          <a:bodyPr wrap="square">
-            <a:spAutoFit/>
-          </a:bodyPr>
-          <a:lstStyle/>
-          <a:p>
-            <a:pPr algn="l">
-              <a:spcAft>
-                <a:spcPts val="500"/>
-              </a:spcAft>
-              <a:defRPr sz="1200" b="0">
-                <a:solidFill>
-                  <a:srgbClr val="1E2933"/>
-                </a:solidFill>
-                <a:latin typeface="Microsoft YaHei"/>
-              </a:defRPr>
-            </a:pPr>
-            <a:r>
-              <a:t>00483 / 00517 multi-bus activity=0：driver 不匹配</a:t>
-            </a:r>
-          </a:p>
-          <a:p>
-            <a:pPr algn="l">
-              <a:spcAft>
-                <a:spcPts val="500"/>
-              </a:spcAft>
-              <a:defRPr sz="1200" b="0">
-                <a:solidFill>
-                  <a:srgbClr val="1E2933"/>
-                </a:solidFill>
-                <a:latin typeface="Microsoft YaHei"/>
-              </a:defRPr>
-            </a:pPr>
-            <a:r>
-              <a:t>strategy_memory 需要预热，冷启动时可能反噬</a:t>
-            </a:r>
-          </a:p>
-          <a:p>
-            <a:pPr algn="l">
-              <a:spcAft>
-                <a:spcPts val="500"/>
-              </a:spcAft>
-              <a:defRPr sz="1200" b="0">
-                <a:solidFill>
-                  <a:srgbClr val="1E2933"/>
-                </a:solidFill>
-                <a:latin typeface="Microsoft YaHei"/>
-              </a:defRPr>
-            </a:pPr>
-            <a:r>
-              <a:t>多 Agent 冲突时需要更严格的仲裁机制</a:t>
-            </a:r>
-          </a:p>
-        </p:txBody>
-      </p:sp>
-      <p:sp>
-        <p:nvSpPr>
-          <p:cNvPr id="16" name="Rectangle 15"/>
-          <p:cNvSpPr/>
-          <p:nvPr/>
-        </p:nvSpPr>
-        <p:spPr>
-          <a:xfrm>
-            <a:off x="0" y="6537960"/>
-            <a:ext cx="12191695" cy="18288"/>
-          </a:xfrm>
-          <a:prstGeom prst="rect">
-            <a:avLst/>
-          </a:prstGeom>
-          <a:solidFill>
-            <a:srgbClr val="0096C7"/>
-          </a:solidFill>
-          <a:ln/>
-        </p:spPr>
-        <p:style>
-          <a:lnRef idx="1">
-            <a:schemeClr val="accent1"/>
-          </a:lnRef>
-          <a:fillRef idx="3">
-            <a:schemeClr val="accent1"/>
-          </a:fillRef>
-          <a:effectRef idx="2">
-            <a:schemeClr val="accent1"/>
-          </a:effectRef>
-          <a:fontRef idx="minor">
-            <a:schemeClr val="lt1"/>
-          </a:fontRef>
-        </p:style>
-        <p:txBody>
-          <a:bodyPr rtlCol="0" anchor="ctr"/>
-          <a:lstStyle/>
-          <a:p>
-            <a:pPr algn="ctr"/>
-          </a:p>
-        </p:txBody>
-      </p:sp>
-      <p:sp>
-        <p:nvSpPr>
-          <p:cNvPr id="17" name="TextBox 16"/>
-          <p:cNvSpPr txBox="1"/>
-          <p:nvPr/>
-        </p:nvSpPr>
-        <p:spPr>
-          <a:xfrm>
-            <a:off x="457200" y="6583680"/>
-            <a:ext cx="3657600" cy="228600"/>
-          </a:xfrm>
-          <a:prstGeom prst="rect">
-            <a:avLst/>
-          </a:prstGeom>
-          <a:noFill/>
-        </p:spPr>
-        <p:txBody>
-          <a:bodyPr wrap="none">
-            <a:spAutoFit/>
-          </a:bodyPr>
-          <a:lstStyle/>
-          <a:p>
-            <a:pPr algn="l">
-              <a:defRPr sz="1000" b="0">
-                <a:solidFill>
-                  <a:srgbClr val="6C757D"/>
-                </a:solidFill>
-                <a:latin typeface="Microsoft YaHei"/>
-              </a:defRPr>
-            </a:pPr>
-            <a:r>
-              <a:t>smallgameagent · LLM/VLM + 规则驱动</a:t>
-            </a:r>
-          </a:p>
-        </p:txBody>
-      </p:sp>
-      <p:sp>
-        <p:nvSpPr>
-          <p:cNvPr id="18" name="TextBox 17"/>
-          <p:cNvSpPr txBox="1"/>
-          <p:nvPr/>
-        </p:nvSpPr>
-        <p:spPr>
-          <a:xfrm>
-            <a:off x="10789920" y="6583680"/>
-            <a:ext cx="914400" cy="228600"/>
-          </a:xfrm>
-          <a:prstGeom prst="rect">
-            <a:avLst/>
-          </a:prstGeom>
-          <a:noFill/>
-        </p:spPr>
-        <p:txBody>
-          <a:bodyPr wrap="none">
-            <a:spAutoFit/>
-          </a:bodyPr>
-          <a:lstStyle/>
-          <a:p>
             <a:pPr algn="r">
               <a:defRPr sz="1000" b="0">
                 <a:solidFill>
@@ -11966,7 +10921,7 @@
               </a:defRPr>
             </a:pPr>
             <a:r>
-              <a:t>20/35</a:t>
+              <a:t>20/37</a:t>
             </a:r>
           </a:p>
         </p:txBody>
@@ -11998,7 +10953,7 @@
         <p:spPr>
           <a:xfrm>
             <a:off x="0" y="0"/>
-            <a:ext cx="12191695" cy="6858000"/>
+            <a:ext cx="12191695" cy="960120"/>
           </a:xfrm>
           <a:prstGeom prst="rect">
             <a:avLst/>
@@ -12032,23 +10987,56 @@
       </p:sp>
       <p:sp>
         <p:nvSpPr>
-          <p:cNvPr id="3" name="Rectangle 2"/>
+          <p:cNvPr id="3" name="TextBox 2"/>
+          <p:cNvSpPr txBox="1"/>
+          <p:nvPr/>
+        </p:nvSpPr>
+        <p:spPr>
+          <a:xfrm>
+            <a:off x="457200" y="228600"/>
+            <a:ext cx="11247120" cy="548640"/>
+          </a:xfrm>
+          <a:prstGeom prst="rect">
+            <a:avLst/>
+          </a:prstGeom>
+          <a:noFill/>
+        </p:spPr>
+        <p:txBody>
+          <a:bodyPr wrap="none">
+            <a:spAutoFit/>
+          </a:bodyPr>
+          <a:lstStyle/>
+          <a:p>
+            <a:pPr algn="l">
+              <a:defRPr sz="3000" b="1">
+                <a:solidFill>
+                  <a:srgbClr val="F3F6F9"/>
+                </a:solidFill>
+                <a:latin typeface="Microsoft YaHei"/>
+              </a:defRPr>
+            </a:pPr>
+            <a:r>
+              <a:t>Agent 通信与记忆：从单兵到协作</a:t>
+            </a:r>
+          </a:p>
+        </p:txBody>
+      </p:sp>
+      <p:sp>
+        <p:nvSpPr>
+          <p:cNvPr id="4" name="Rectangle 3"/>
           <p:cNvSpPr/>
           <p:nvPr/>
         </p:nvSpPr>
         <p:spPr>
           <a:xfrm>
-            <a:off x="6858000" y="-914400"/>
-            <a:ext cx="5943600" cy="8686800"/>
-          </a:xfrm>
-          <a:prstGeom prst="rect">
-            <a:avLst/>
-          </a:prstGeom>
-          <a:solidFill>
-            <a:srgbClr val="0096C7">
-              <a:lumMod val="80000"/>
-              <a:lumOff val="20000"/>
-            </a:srgbClr>
+            <a:off x="0" y="960120"/>
+            <a:ext cx="164592" cy="5897880"/>
+          </a:xfrm>
+          <a:prstGeom prst="rect">
+            <a:avLst/>
+          </a:prstGeom>
+          <a:solidFill>
+            <a:srgbClr val="0096C7"/>
           </a:solidFill>
           <a:ln/>
         </p:spPr>
@@ -12076,94 +11064,26 @@
       </p:sp>
       <p:sp>
         <p:nvSpPr>
-          <p:cNvPr id="4" name="TextBox 3"/>
-          <p:cNvSpPr txBox="1"/>
-          <p:nvPr/>
-        </p:nvSpPr>
-        <p:spPr>
-          <a:xfrm>
-            <a:off x="548640" y="1645920"/>
-            <a:ext cx="2743200" cy="1828800"/>
-          </a:xfrm>
-          <a:prstGeom prst="rect">
-            <a:avLst/>
-          </a:prstGeom>
-          <a:noFill/>
-        </p:spPr>
-        <p:txBody>
-          <a:bodyPr wrap="none">
-            <a:spAutoFit/>
-          </a:bodyPr>
-          <a:lstStyle/>
-          <a:p>
-            <a:pPr algn="l">
-              <a:defRPr sz="12000" b="1">
-                <a:solidFill>
-                  <a:srgbClr val="333DA0"/>
-                </a:solidFill>
-                <a:latin typeface="Microsoft YaHei"/>
-              </a:defRPr>
-            </a:pPr>
-            <a:r>
-              <a:t>06</a:t>
-            </a:r>
-          </a:p>
-        </p:txBody>
-      </p:sp>
-      <p:sp>
-        <p:nvSpPr>
-          <p:cNvPr id="5" name="TextBox 4"/>
-          <p:cNvSpPr txBox="1"/>
-          <p:nvPr/>
-        </p:nvSpPr>
-        <p:spPr>
-          <a:xfrm>
-            <a:off x="548640" y="2834640"/>
-            <a:ext cx="11064240" cy="1097280"/>
-          </a:xfrm>
-          <a:prstGeom prst="rect">
-            <a:avLst/>
-          </a:prstGeom>
-          <a:noFill/>
-        </p:spPr>
-        <p:txBody>
-          <a:bodyPr wrap="none">
-            <a:spAutoFit/>
-          </a:bodyPr>
-          <a:lstStyle/>
-          <a:p>
-            <a:pPr algn="l">
-              <a:defRPr sz="4400" b="1">
-                <a:solidFill>
-                  <a:srgbClr val="F3F6F9"/>
-                </a:solidFill>
-                <a:latin typeface="Microsoft YaHei"/>
-              </a:defRPr>
-            </a:pPr>
-            <a:r>
-              <a:t>本地 VLM：把 8 GB 显存用到极限</a:t>
-            </a:r>
-          </a:p>
-        </p:txBody>
-      </p:sp>
-      <p:sp>
-        <p:nvSpPr>
-          <p:cNvPr id="6" name="Rectangle 5"/>
+          <p:cNvPr id="5" name="Rectangle 4"/>
           <p:cNvSpPr/>
           <p:nvPr/>
         </p:nvSpPr>
         <p:spPr>
           <a:xfrm>
-            <a:off x="548640" y="4023360"/>
-            <a:ext cx="1828800" cy="73152"/>
-          </a:xfrm>
-          <a:prstGeom prst="rect">
-            <a:avLst/>
-          </a:prstGeom>
-          <a:solidFill>
-            <a:srgbClr val="FF6B35"/>
-          </a:solidFill>
-          <a:ln/>
+            <a:off x="320040" y="1078992"/>
+            <a:ext cx="11548872" cy="5349240"/>
+          </a:xfrm>
+          <a:prstGeom prst="rect">
+            <a:avLst/>
+          </a:prstGeom>
+          <a:solidFill>
+            <a:srgbClr val="FFFFFF"/>
+          </a:solidFill>
+          <a:ln w="12700">
+            <a:solidFill>
+              <a:srgbClr val="E1E5E9"/>
+            </a:solidFill>
+          </a:ln>
         </p:spPr>
         <p:style>
           <a:lnRef idx="1">
@@ -12189,20 +11109,20 @@
       </p:sp>
       <p:sp>
         <p:nvSpPr>
-          <p:cNvPr id="7" name="Rectangle 6"/>
+          <p:cNvPr id="6" name="Rounded Rectangle 5"/>
           <p:cNvSpPr/>
           <p:nvPr/>
         </p:nvSpPr>
         <p:spPr>
           <a:xfrm>
-            <a:off x="0" y="6537960"/>
-            <a:ext cx="12191695" cy="18288"/>
-          </a:xfrm>
-          <a:prstGeom prst="rect">
-            <a:avLst/>
-          </a:prstGeom>
-          <a:solidFill>
-            <a:srgbClr val="0096C7"/>
+            <a:off x="530352" y="1353312"/>
+            <a:ext cx="3657600" cy="2103120"/>
+          </a:xfrm>
+          <a:prstGeom prst="roundRect">
+            <a:avLst/>
+          </a:prstGeom>
+          <a:solidFill>
+            <a:srgbClr val="D0D5DA"/>
           </a:solidFill>
           <a:ln/>
         </p:spPr>
@@ -12230,14 +11150,100 @@
       </p:sp>
       <p:sp>
         <p:nvSpPr>
-          <p:cNvPr id="8" name="TextBox 7"/>
+          <p:cNvPr id="7" name="Rounded Rectangle 6"/>
+          <p:cNvSpPr/>
+          <p:nvPr/>
+        </p:nvSpPr>
+        <p:spPr>
+          <a:xfrm>
+            <a:off x="502920" y="1325880"/>
+            <a:ext cx="3657600" cy="2103120"/>
+          </a:xfrm>
+          <a:prstGeom prst="roundRect">
+            <a:avLst/>
+          </a:prstGeom>
+          <a:solidFill>
+            <a:srgbClr val="FFFFFF"/>
+          </a:solidFill>
+          <a:ln w="12700">
+            <a:solidFill>
+              <a:srgbClr val="DDE2E6"/>
+            </a:solidFill>
+          </a:ln>
+        </p:spPr>
+        <p:style>
+          <a:lnRef idx="1">
+            <a:schemeClr val="accent1"/>
+          </a:lnRef>
+          <a:fillRef idx="3">
+            <a:schemeClr val="accent1"/>
+          </a:fillRef>
+          <a:effectRef idx="2">
+            <a:schemeClr val="accent1"/>
+          </a:effectRef>
+          <a:fontRef idx="minor">
+            <a:schemeClr val="lt1"/>
+          </a:fontRef>
+        </p:style>
+        <p:txBody>
+          <a:bodyPr rtlCol="0" anchor="ctr"/>
+          <a:lstStyle/>
+          <a:p>
+            <a:pPr algn="ctr"/>
+          </a:p>
+        </p:txBody>
+      </p:sp>
+      <p:sp>
+        <p:nvSpPr>
+          <p:cNvPr id="8" name="Rectangle 7"/>
+          <p:cNvSpPr/>
+          <p:nvPr/>
+        </p:nvSpPr>
+        <p:spPr>
+          <a:xfrm>
+            <a:off x="502920" y="1325880"/>
+            <a:ext cx="3657600" cy="411480"/>
+          </a:xfrm>
+          <a:prstGeom prst="rect">
+            <a:avLst/>
+          </a:prstGeom>
+          <a:solidFill>
+            <a:srgbClr val="1A237E"/>
+          </a:solidFill>
+          <a:ln/>
+        </p:spPr>
+        <p:style>
+          <a:lnRef idx="1">
+            <a:schemeClr val="accent1"/>
+          </a:lnRef>
+          <a:fillRef idx="3">
+            <a:schemeClr val="accent1"/>
+          </a:fillRef>
+          <a:effectRef idx="2">
+            <a:schemeClr val="accent1"/>
+          </a:effectRef>
+          <a:fontRef idx="minor">
+            <a:schemeClr val="lt1"/>
+          </a:fontRef>
+        </p:style>
+        <p:txBody>
+          <a:bodyPr rtlCol="0" anchor="ctr"/>
+          <a:lstStyle/>
+          <a:p>
+            <a:pPr algn="ctr"/>
+          </a:p>
+        </p:txBody>
+      </p:sp>
+      <p:sp>
+        <p:nvSpPr>
+          <p:cNvPr id="9" name="TextBox 8"/>
           <p:cNvSpPr txBox="1"/>
           <p:nvPr/>
         </p:nvSpPr>
         <p:spPr>
           <a:xfrm>
-            <a:off x="457200" y="6583680"/>
-            <a:ext cx="3657600" cy="228600"/>
+            <a:off x="576072" y="1399032"/>
+            <a:ext cx="3511296" cy="320040"/>
           </a:xfrm>
           <a:prstGeom prst="rect">
             <a:avLst/>
@@ -12251,29 +11257,227 @@
           <a:lstStyle/>
           <a:p>
             <a:pPr algn="l">
-              <a:defRPr sz="1000" b="0">
-                <a:solidFill>
-                  <a:srgbClr val="6C757D"/>
-                </a:solidFill>
-                <a:latin typeface="Microsoft YaHei"/>
-              </a:defRPr>
-            </a:pPr>
-            <a:r>
-              <a:t>smallgameagent · LLM/VLM + 规则驱动</a:t>
-            </a:r>
-          </a:p>
-        </p:txBody>
-      </p:sp>
-      <p:sp>
-        <p:nvSpPr>
-          <p:cNvPr id="9" name="TextBox 8"/>
+              <a:defRPr sz="1400" b="1">
+                <a:solidFill>
+                  <a:srgbClr val="F3F6F9"/>
+                </a:solidFill>
+                <a:latin typeface="Microsoft YaHei"/>
+              </a:defRPr>
+            </a:pPr>
+            <a:r>
+              <a:t>记忆三层</a:t>
+            </a:r>
+          </a:p>
+        </p:txBody>
+      </p:sp>
+      <p:sp>
+        <p:nvSpPr>
+          <p:cNvPr id="10" name="TextBox 9"/>
           <p:cNvSpPr txBox="1"/>
           <p:nvPr/>
         </p:nvSpPr>
         <p:spPr>
           <a:xfrm>
-            <a:off x="10789920" y="6583680"/>
-            <a:ext cx="914400" cy="228600"/>
+            <a:off x="612648" y="1828800"/>
+            <a:ext cx="3438144" cy="1508760"/>
+          </a:xfrm>
+          <a:prstGeom prst="rect">
+            <a:avLst/>
+          </a:prstGeom>
+          <a:noFill/>
+        </p:spPr>
+        <p:txBody>
+          <a:bodyPr wrap="square">
+            <a:spAutoFit/>
+          </a:bodyPr>
+          <a:lstStyle/>
+          <a:p>
+            <a:pPr algn="l">
+              <a:spcAft>
+                <a:spcPts val="500"/>
+              </a:spcAft>
+              <a:defRPr sz="1200" b="0">
+                <a:solidFill>
+                  <a:srgbClr val="1E2933"/>
+                </a:solidFill>
+                <a:latin typeface="Microsoft YaHei"/>
+              </a:defRPr>
+            </a:pPr>
+            <a:r>
+              <a:t>Episodic：逐步 state / action / reward</a:t>
+            </a:r>
+          </a:p>
+          <a:p>
+            <a:pPr algn="l">
+              <a:spcAft>
+                <a:spcPts val="500"/>
+              </a:spcAft>
+              <a:defRPr sz="1200" b="0">
+                <a:solidFill>
+                  <a:srgbClr val="1E2933"/>
+                </a:solidFill>
+                <a:latin typeface="Microsoft YaHei"/>
+              </a:defRPr>
+            </a:pPr>
+            <a:r>
+              <a:t>Semantic：游戏类型、目标语义向量</a:t>
+            </a:r>
+          </a:p>
+          <a:p>
+            <a:pPr algn="l">
+              <a:spcAft>
+                <a:spcPts val="500"/>
+              </a:spcAft>
+              <a:defRPr sz="1200" b="0">
+                <a:solidFill>
+                  <a:srgbClr val="1E2933"/>
+                </a:solidFill>
+                <a:latin typeface="Microsoft YaHei"/>
+              </a:defRPr>
+            </a:pPr>
+            <a:r>
+              <a:t>Procedural：成功策略、失败模式</a:t>
+            </a:r>
+          </a:p>
+        </p:txBody>
+      </p:sp>
+      <p:sp>
+        <p:nvSpPr>
+          <p:cNvPr id="11" name="Rounded Rectangle 10"/>
+          <p:cNvSpPr/>
+          <p:nvPr/>
+        </p:nvSpPr>
+        <p:spPr>
+          <a:xfrm>
+            <a:off x="4462272" y="1353312"/>
+            <a:ext cx="3657600" cy="2103120"/>
+          </a:xfrm>
+          <a:prstGeom prst="roundRect">
+            <a:avLst/>
+          </a:prstGeom>
+          <a:solidFill>
+            <a:srgbClr val="D0D5DA"/>
+          </a:solidFill>
+          <a:ln/>
+        </p:spPr>
+        <p:style>
+          <a:lnRef idx="1">
+            <a:schemeClr val="accent1"/>
+          </a:lnRef>
+          <a:fillRef idx="3">
+            <a:schemeClr val="accent1"/>
+          </a:fillRef>
+          <a:effectRef idx="2">
+            <a:schemeClr val="accent1"/>
+          </a:effectRef>
+          <a:fontRef idx="minor">
+            <a:schemeClr val="lt1"/>
+          </a:fontRef>
+        </p:style>
+        <p:txBody>
+          <a:bodyPr rtlCol="0" anchor="ctr"/>
+          <a:lstStyle/>
+          <a:p>
+            <a:pPr algn="ctr"/>
+          </a:p>
+        </p:txBody>
+      </p:sp>
+      <p:sp>
+        <p:nvSpPr>
+          <p:cNvPr id="12" name="Rounded Rectangle 11"/>
+          <p:cNvSpPr/>
+          <p:nvPr/>
+        </p:nvSpPr>
+        <p:spPr>
+          <a:xfrm>
+            <a:off x="4434840" y="1325880"/>
+            <a:ext cx="3657600" cy="2103120"/>
+          </a:xfrm>
+          <a:prstGeom prst="roundRect">
+            <a:avLst/>
+          </a:prstGeom>
+          <a:solidFill>
+            <a:srgbClr val="FFFFFF"/>
+          </a:solidFill>
+          <a:ln w="12700">
+            <a:solidFill>
+              <a:srgbClr val="DDE2E6"/>
+            </a:solidFill>
+          </a:ln>
+        </p:spPr>
+        <p:style>
+          <a:lnRef idx="1">
+            <a:schemeClr val="accent1"/>
+          </a:lnRef>
+          <a:fillRef idx="3">
+            <a:schemeClr val="accent1"/>
+          </a:fillRef>
+          <a:effectRef idx="2">
+            <a:schemeClr val="accent1"/>
+          </a:effectRef>
+          <a:fontRef idx="minor">
+            <a:schemeClr val="lt1"/>
+          </a:fontRef>
+        </p:style>
+        <p:txBody>
+          <a:bodyPr rtlCol="0" anchor="ctr"/>
+          <a:lstStyle/>
+          <a:p>
+            <a:pPr algn="ctr"/>
+          </a:p>
+        </p:txBody>
+      </p:sp>
+      <p:sp>
+        <p:nvSpPr>
+          <p:cNvPr id="13" name="Rectangle 12"/>
+          <p:cNvSpPr/>
+          <p:nvPr/>
+        </p:nvSpPr>
+        <p:spPr>
+          <a:xfrm>
+            <a:off x="4434840" y="1325880"/>
+            <a:ext cx="3657600" cy="411480"/>
+          </a:xfrm>
+          <a:prstGeom prst="rect">
+            <a:avLst/>
+          </a:prstGeom>
+          <a:solidFill>
+            <a:srgbClr val="0096C7"/>
+          </a:solidFill>
+          <a:ln/>
+        </p:spPr>
+        <p:style>
+          <a:lnRef idx="1">
+            <a:schemeClr val="accent1"/>
+          </a:lnRef>
+          <a:fillRef idx="3">
+            <a:schemeClr val="accent1"/>
+          </a:fillRef>
+          <a:effectRef idx="2">
+            <a:schemeClr val="accent1"/>
+          </a:effectRef>
+          <a:fontRef idx="minor">
+            <a:schemeClr val="lt1"/>
+          </a:fontRef>
+        </p:style>
+        <p:txBody>
+          <a:bodyPr rtlCol="0" anchor="ctr"/>
+          <a:lstStyle/>
+          <a:p>
+            <a:pPr algn="ctr"/>
+          </a:p>
+        </p:txBody>
+      </p:sp>
+      <p:sp>
+        <p:nvSpPr>
+          <p:cNvPr id="14" name="TextBox 13"/>
+          <p:cNvSpPr txBox="1"/>
+          <p:nvPr/>
+        </p:nvSpPr>
+        <p:spPr>
+          <a:xfrm>
+            <a:off x="4507992" y="1399032"/>
+            <a:ext cx="3511296" cy="320040"/>
           </a:xfrm>
           <a:prstGeom prst="rect">
             <a:avLst/>
@@ -12286,6 +11490,491 @@
           </a:bodyPr>
           <a:lstStyle/>
           <a:p>
+            <a:pPr algn="l">
+              <a:defRPr sz="1400" b="1">
+                <a:solidFill>
+                  <a:srgbClr val="F3F6F9"/>
+                </a:solidFill>
+                <a:latin typeface="Microsoft YaHei"/>
+              </a:defRPr>
+            </a:pPr>
+            <a:r>
+              <a:t>AgentBus 消息</a:t>
+            </a:r>
+          </a:p>
+        </p:txBody>
+      </p:sp>
+      <p:sp>
+        <p:nvSpPr>
+          <p:cNvPr id="15" name="TextBox 14"/>
+          <p:cNvSpPr txBox="1"/>
+          <p:nvPr/>
+        </p:nvSpPr>
+        <p:spPr>
+          <a:xfrm>
+            <a:off x="4544568" y="1828800"/>
+            <a:ext cx="3438144" cy="1508760"/>
+          </a:xfrm>
+          <a:prstGeom prst="rect">
+            <a:avLst/>
+          </a:prstGeom>
+          <a:noFill/>
+        </p:spPr>
+        <p:txBody>
+          <a:bodyPr wrap="square">
+            <a:spAutoFit/>
+          </a:bodyPr>
+          <a:lstStyle/>
+          <a:p>
+            <a:pPr algn="l">
+              <a:spcAft>
+                <a:spcPts val="500"/>
+              </a:spcAft>
+              <a:defRPr sz="1200" b="0">
+                <a:solidFill>
+                  <a:srgbClr val="1E2933"/>
+                </a:solidFill>
+                <a:latin typeface="Microsoft YaHei"/>
+              </a:defRPr>
+            </a:pPr>
+            <a:r>
+              <a:t>OBSERVATION / STATE_UPDATE</a:t>
+            </a:r>
+          </a:p>
+          <a:p>
+            <a:pPr algn="l">
+              <a:spcAft>
+                <a:spcPts val="500"/>
+              </a:spcAft>
+              <a:defRPr sz="1200" b="0">
+                <a:solidFill>
+                  <a:srgbClr val="1E2933"/>
+                </a:solidFill>
+                <a:latin typeface="Microsoft YaHei"/>
+              </a:defRPr>
+            </a:pPr>
+            <a:r>
+              <a:t>DECISION_PROPOSAL / CRITIQUE</a:t>
+            </a:r>
+          </a:p>
+          <a:p>
+            <a:pPr algn="l">
+              <a:spcAft>
+                <a:spcPts val="500"/>
+              </a:spcAft>
+              <a:defRPr sz="1200" b="0">
+                <a:solidFill>
+                  <a:srgbClr val="1E2933"/>
+                </a:solidFill>
+                <a:latin typeface="Microsoft YaHei"/>
+              </a:defRPr>
+            </a:pPr>
+            <a:r>
+              <a:t>RULE_UPDATE / MEMORY_WRITE</a:t>
+            </a:r>
+          </a:p>
+        </p:txBody>
+      </p:sp>
+      <p:sp>
+        <p:nvSpPr>
+          <p:cNvPr id="16" name="Rounded Rectangle 15"/>
+          <p:cNvSpPr/>
+          <p:nvPr/>
+        </p:nvSpPr>
+        <p:spPr>
+          <a:xfrm>
+            <a:off x="8394192" y="1353312"/>
+            <a:ext cx="3657600" cy="2103120"/>
+          </a:xfrm>
+          <a:prstGeom prst="roundRect">
+            <a:avLst/>
+          </a:prstGeom>
+          <a:solidFill>
+            <a:srgbClr val="D0D5DA"/>
+          </a:solidFill>
+          <a:ln/>
+        </p:spPr>
+        <p:style>
+          <a:lnRef idx="1">
+            <a:schemeClr val="accent1"/>
+          </a:lnRef>
+          <a:fillRef idx="3">
+            <a:schemeClr val="accent1"/>
+          </a:fillRef>
+          <a:effectRef idx="2">
+            <a:schemeClr val="accent1"/>
+          </a:effectRef>
+          <a:fontRef idx="minor">
+            <a:schemeClr val="lt1"/>
+          </a:fontRef>
+        </p:style>
+        <p:txBody>
+          <a:bodyPr rtlCol="0" anchor="ctr"/>
+          <a:lstStyle/>
+          <a:p>
+            <a:pPr algn="ctr"/>
+          </a:p>
+        </p:txBody>
+      </p:sp>
+      <p:sp>
+        <p:nvSpPr>
+          <p:cNvPr id="17" name="Rounded Rectangle 16"/>
+          <p:cNvSpPr/>
+          <p:nvPr/>
+        </p:nvSpPr>
+        <p:spPr>
+          <a:xfrm>
+            <a:off x="8366760" y="1325880"/>
+            <a:ext cx="3657600" cy="2103120"/>
+          </a:xfrm>
+          <a:prstGeom prst="roundRect">
+            <a:avLst/>
+          </a:prstGeom>
+          <a:solidFill>
+            <a:srgbClr val="FFFFFF"/>
+          </a:solidFill>
+          <a:ln w="12700">
+            <a:solidFill>
+              <a:srgbClr val="DDE2E6"/>
+            </a:solidFill>
+          </a:ln>
+        </p:spPr>
+        <p:style>
+          <a:lnRef idx="1">
+            <a:schemeClr val="accent1"/>
+          </a:lnRef>
+          <a:fillRef idx="3">
+            <a:schemeClr val="accent1"/>
+          </a:fillRef>
+          <a:effectRef idx="2">
+            <a:schemeClr val="accent1"/>
+          </a:effectRef>
+          <a:fontRef idx="minor">
+            <a:schemeClr val="lt1"/>
+          </a:fontRef>
+        </p:style>
+        <p:txBody>
+          <a:bodyPr rtlCol="0" anchor="ctr"/>
+          <a:lstStyle/>
+          <a:p>
+            <a:pPr algn="ctr"/>
+          </a:p>
+        </p:txBody>
+      </p:sp>
+      <p:sp>
+        <p:nvSpPr>
+          <p:cNvPr id="18" name="Rectangle 17"/>
+          <p:cNvSpPr/>
+          <p:nvPr/>
+        </p:nvSpPr>
+        <p:spPr>
+          <a:xfrm>
+            <a:off x="8366760" y="1325880"/>
+            <a:ext cx="3657600" cy="411480"/>
+          </a:xfrm>
+          <a:prstGeom prst="rect">
+            <a:avLst/>
+          </a:prstGeom>
+          <a:solidFill>
+            <a:srgbClr val="FF6B35"/>
+          </a:solidFill>
+          <a:ln/>
+        </p:spPr>
+        <p:style>
+          <a:lnRef idx="1">
+            <a:schemeClr val="accent1"/>
+          </a:lnRef>
+          <a:fillRef idx="3">
+            <a:schemeClr val="accent1"/>
+          </a:fillRef>
+          <a:effectRef idx="2">
+            <a:schemeClr val="accent1"/>
+          </a:effectRef>
+          <a:fontRef idx="minor">
+            <a:schemeClr val="lt1"/>
+          </a:fontRef>
+        </p:style>
+        <p:txBody>
+          <a:bodyPr rtlCol="0" anchor="ctr"/>
+          <a:lstStyle/>
+          <a:p>
+            <a:pPr algn="ctr"/>
+          </a:p>
+        </p:txBody>
+      </p:sp>
+      <p:sp>
+        <p:nvSpPr>
+          <p:cNvPr id="19" name="TextBox 18"/>
+          <p:cNvSpPr txBox="1"/>
+          <p:nvPr/>
+        </p:nvSpPr>
+        <p:spPr>
+          <a:xfrm>
+            <a:off x="8439912" y="1399032"/>
+            <a:ext cx="3511296" cy="320040"/>
+          </a:xfrm>
+          <a:prstGeom prst="rect">
+            <a:avLst/>
+          </a:prstGeom>
+          <a:noFill/>
+        </p:spPr>
+        <p:txBody>
+          <a:bodyPr wrap="none">
+            <a:spAutoFit/>
+          </a:bodyPr>
+          <a:lstStyle/>
+          <a:p>
+            <a:pPr algn="l">
+              <a:defRPr sz="1400" b="1">
+                <a:solidFill>
+                  <a:srgbClr val="F3F6F9"/>
+                </a:solidFill>
+                <a:latin typeface="Microsoft YaHei"/>
+              </a:defRPr>
+            </a:pPr>
+            <a:r>
+              <a:t>协作流程</a:t>
+            </a:r>
+          </a:p>
+        </p:txBody>
+      </p:sp>
+      <p:sp>
+        <p:nvSpPr>
+          <p:cNvPr id="20" name="TextBox 19"/>
+          <p:cNvSpPr txBox="1"/>
+          <p:nvPr/>
+        </p:nvSpPr>
+        <p:spPr>
+          <a:xfrm>
+            <a:off x="8476488" y="1828800"/>
+            <a:ext cx="3438144" cy="1508760"/>
+          </a:xfrm>
+          <a:prstGeom prst="rect">
+            <a:avLst/>
+          </a:prstGeom>
+          <a:noFill/>
+        </p:spPr>
+        <p:txBody>
+          <a:bodyPr wrap="square">
+            <a:spAutoFit/>
+          </a:bodyPr>
+          <a:lstStyle/>
+          <a:p>
+            <a:pPr algn="l">
+              <a:spcAft>
+                <a:spcPts val="500"/>
+              </a:spcAft>
+              <a:defRPr sz="1200" b="0">
+                <a:solidFill>
+                  <a:srgbClr val="1E2933"/>
+                </a:solidFill>
+                <a:latin typeface="Microsoft YaHei"/>
+              </a:defRPr>
+            </a:pPr>
+            <a:r>
+              <a:t>Observer 采集 probe 状态</a:t>
+            </a:r>
+          </a:p>
+          <a:p>
+            <a:pPr algn="l">
+              <a:spcAft>
+                <a:spcPts val="500"/>
+              </a:spcAft>
+              <a:defRPr sz="1200" b="0">
+                <a:solidFill>
+                  <a:srgbClr val="1E2933"/>
+                </a:solidFill>
+                <a:latin typeface="Microsoft YaHei"/>
+              </a:defRPr>
+            </a:pPr>
+            <a:r>
+              <a:t>DecisionAnalyst 生成候选动作</a:t>
+            </a:r>
+          </a:p>
+          <a:p>
+            <a:pPr algn="l">
+              <a:spcAft>
+                <a:spcPts val="500"/>
+              </a:spcAft>
+              <a:defRPr sz="1200" b="0">
+                <a:solidFill>
+                  <a:srgbClr val="1E2933"/>
+                </a:solidFill>
+                <a:latin typeface="Microsoft YaHei"/>
+              </a:defRPr>
+            </a:pPr>
+            <a:r>
+              <a:t>Critic 评估一致性风险</a:t>
+            </a:r>
+          </a:p>
+          <a:p>
+            <a:pPr algn="l">
+              <a:spcAft>
+                <a:spcPts val="500"/>
+              </a:spcAft>
+              <a:defRPr sz="1200" b="0">
+                <a:solidFill>
+                  <a:srgbClr val="1E2933"/>
+                </a:solidFill>
+                <a:latin typeface="Microsoft YaHei"/>
+              </a:defRPr>
+            </a:pPr>
+            <a:r>
+              <a:t>MemoryCurator 归档有用模式</a:t>
+            </a:r>
+          </a:p>
+        </p:txBody>
+      </p:sp>
+      <p:sp>
+        <p:nvSpPr>
+          <p:cNvPr id="21" name="Rounded Rectangle 20"/>
+          <p:cNvSpPr/>
+          <p:nvPr/>
+        </p:nvSpPr>
+        <p:spPr>
+          <a:xfrm>
+            <a:off x="502920" y="3657600"/>
+            <a:ext cx="11430000" cy="1005840"/>
+          </a:xfrm>
+          <a:prstGeom prst="roundRect">
+            <a:avLst/>
+          </a:prstGeom>
+          <a:solidFill>
+            <a:srgbClr val="F3F6F9"/>
+          </a:solidFill>
+          <a:ln/>
+        </p:spPr>
+        <p:style>
+          <a:lnRef idx="1">
+            <a:schemeClr val="accent1"/>
+          </a:lnRef>
+          <a:fillRef idx="3">
+            <a:schemeClr val="accent1"/>
+          </a:fillRef>
+          <a:effectRef idx="2">
+            <a:schemeClr val="accent1"/>
+          </a:effectRef>
+          <a:fontRef idx="minor">
+            <a:schemeClr val="lt1"/>
+          </a:fontRef>
+        </p:style>
+        <p:txBody>
+          <a:bodyPr rtlCol="0" anchor="ctr"/>
+          <a:lstStyle/>
+          <a:p>
+            <a:pPr algn="ctr">
+              <a:defRPr sz="1400" b="0">
+                <a:solidFill>
+                  <a:srgbClr val="1E2933"/>
+                </a:solidFill>
+                <a:latin typeface="Microsoft YaHei"/>
+              </a:defRPr>
+            </a:pPr>
+            <a:r>
+              <a:t>核心思路：不要把所有决策压给一个模型。让云端 API 做长程规划，本地 VLM 做画面理解，规则引擎做零延迟执行，记忆层负责跨 episode 复用。</a:t>
+            </a:r>
+          </a:p>
+        </p:txBody>
+      </p:sp>
+      <p:sp>
+        <p:nvSpPr>
+          <p:cNvPr id="22" name="Rectangle 21"/>
+          <p:cNvSpPr/>
+          <p:nvPr/>
+        </p:nvSpPr>
+        <p:spPr>
+          <a:xfrm>
+            <a:off x="0" y="6537960"/>
+            <a:ext cx="12191695" cy="18288"/>
+          </a:xfrm>
+          <a:prstGeom prst="rect">
+            <a:avLst/>
+          </a:prstGeom>
+          <a:solidFill>
+            <a:srgbClr val="0096C7"/>
+          </a:solidFill>
+          <a:ln/>
+        </p:spPr>
+        <p:style>
+          <a:lnRef idx="1">
+            <a:schemeClr val="accent1"/>
+          </a:lnRef>
+          <a:fillRef idx="3">
+            <a:schemeClr val="accent1"/>
+          </a:fillRef>
+          <a:effectRef idx="2">
+            <a:schemeClr val="accent1"/>
+          </a:effectRef>
+          <a:fontRef idx="minor">
+            <a:schemeClr val="lt1"/>
+          </a:fontRef>
+        </p:style>
+        <p:txBody>
+          <a:bodyPr rtlCol="0" anchor="ctr"/>
+          <a:lstStyle/>
+          <a:p>
+            <a:pPr algn="ctr"/>
+          </a:p>
+        </p:txBody>
+      </p:sp>
+      <p:sp>
+        <p:nvSpPr>
+          <p:cNvPr id="23" name="TextBox 22"/>
+          <p:cNvSpPr txBox="1"/>
+          <p:nvPr/>
+        </p:nvSpPr>
+        <p:spPr>
+          <a:xfrm>
+            <a:off x="457200" y="6583680"/>
+            <a:ext cx="3657600" cy="228600"/>
+          </a:xfrm>
+          <a:prstGeom prst="rect">
+            <a:avLst/>
+          </a:prstGeom>
+          <a:noFill/>
+        </p:spPr>
+        <p:txBody>
+          <a:bodyPr wrap="none">
+            <a:spAutoFit/>
+          </a:bodyPr>
+          <a:lstStyle/>
+          <a:p>
+            <a:pPr algn="l">
+              <a:defRPr sz="1000" b="0">
+                <a:solidFill>
+                  <a:srgbClr val="6C757D"/>
+                </a:solidFill>
+                <a:latin typeface="Microsoft YaHei"/>
+              </a:defRPr>
+            </a:pPr>
+            <a:r>
+              <a:t>smallgameagent · LLM/VLM + 规则驱动</a:t>
+            </a:r>
+          </a:p>
+        </p:txBody>
+      </p:sp>
+      <p:sp>
+        <p:nvSpPr>
+          <p:cNvPr id="24" name="TextBox 23"/>
+          <p:cNvSpPr txBox="1"/>
+          <p:nvPr/>
+        </p:nvSpPr>
+        <p:spPr>
+          <a:xfrm>
+            <a:off x="10789920" y="6583680"/>
+            <a:ext cx="914400" cy="228600"/>
+          </a:xfrm>
+          <a:prstGeom prst="rect">
+            <a:avLst/>
+          </a:prstGeom>
+          <a:noFill/>
+        </p:spPr>
+        <p:txBody>
+          <a:bodyPr wrap="none">
+            <a:spAutoFit/>
+          </a:bodyPr>
+          <a:lstStyle/>
+          <a:p>
             <a:pPr algn="r">
               <a:defRPr sz="1000" b="0">
                 <a:solidFill>
@@ -12295,7 +11984,7 @@
               </a:defRPr>
             </a:pPr>
             <a:r>
-              <a:t>21/35</a:t>
+              <a:t>21/37</a:t>
             </a:r>
           </a:p>
         </p:txBody>
@@ -12390,7 +12079,7 @@
               </a:defRPr>
             </a:pPr>
             <a:r>
-              <a:t>本地 VLM：8 GB 显存上的画面理解层</a:t>
+              <a:t>通信与记忆的设计取舍</a:t>
             </a:r>
           </a:p>
         </p:txBody>
@@ -12490,7 +12179,7 @@
         <p:spPr>
           <a:xfrm>
             <a:off x="621792" y="1353312"/>
-            <a:ext cx="5486400" cy="2560320"/>
+            <a:ext cx="5486400" cy="4937760"/>
           </a:xfrm>
           <a:prstGeom prst="roundRect">
             <a:avLst/>
@@ -12531,7 +12220,7 @@
         <p:spPr>
           <a:xfrm>
             <a:off x="594360" y="1325880"/>
-            <a:ext cx="5486400" cy="2560320"/>
+            <a:ext cx="5486400" cy="4937760"/>
           </a:xfrm>
           <a:prstGeom prst="roundRect">
             <a:avLst/>
@@ -12639,7 +12328,7 @@
               </a:defRPr>
             </a:pPr>
             <a:r>
-              <a:t>当前能跑通什么？</a:t>
+              <a:t>记忆读回的优势</a:t>
             </a:r>
           </a:p>
         </p:txBody>
@@ -12653,7 +12342,7 @@
         <p:spPr>
           <a:xfrm>
             <a:off x="704088" y="1828800"/>
-            <a:ext cx="5266944" cy="1965960"/>
+            <a:ext cx="5266944" cy="4343400"/>
           </a:xfrm>
           <a:prstGeom prst="rect">
             <a:avLst/>
@@ -12678,7 +12367,7 @@
               </a:defRPr>
             </a:pPr>
             <a:r>
-              <a:t>4-bit 量化加载 Qwen3.5-4B/9B、Gemma-4-E4B</a:t>
+              <a:t>00461 multi-bus-memory 0.106 → 0.300</a:t>
             </a:r>
           </a:p>
           <a:p>
@@ -12694,7 +12383,7 @@
               </a:defRPr>
             </a:pPr>
             <a:r>
-              <a:t>KV-cache 量化进一步压低显存</a:t>
+              <a:t>00736 multi-bus-memory 0.269 → 0.300</a:t>
             </a:r>
           </a:p>
           <a:p>
@@ -12710,7 +12399,7 @@
               </a:defRPr>
             </a:pPr>
             <a:r>
-              <a:t>RTX 5060 8GB 上 Qwen3.5-4B 约 7s/帧，Gemma-4-E4B 约 7.8s/帧</a:t>
+              <a:t>跨 episode 复用成功模式</a:t>
             </a:r>
           </a:p>
           <a:p>
@@ -12726,7 +12415,7 @@
               </a:defRPr>
             </a:pPr>
             <a:r>
-              <a:t>Gemma-4-E4B 视觉摘要比 Qwen3.5-4B 更稳定</a:t>
+              <a:t>减少重复探索带来的 stall</a:t>
             </a:r>
           </a:p>
         </p:txBody>
@@ -12740,7 +12429,7 @@
         <p:spPr>
           <a:xfrm>
             <a:off x="6382512" y="1353312"/>
-            <a:ext cx="5486400" cy="2560320"/>
+            <a:ext cx="5486400" cy="4937760"/>
           </a:xfrm>
           <a:prstGeom prst="roundRect">
             <a:avLst/>
@@ -12781,7 +12470,7 @@
         <p:spPr>
           <a:xfrm>
             <a:off x="6355080" y="1325880"/>
-            <a:ext cx="5486400" cy="2560320"/>
+            <a:ext cx="5486400" cy="4937760"/>
           </a:xfrm>
           <a:prstGeom prst="roundRect">
             <a:avLst/>
@@ -12889,7 +12578,7 @@
               </a:defRPr>
             </a:pPr>
             <a:r>
-              <a:t>视觉上下文有没有用？</a:t>
+              <a:t>仍需解决的问题</a:t>
             </a:r>
           </a:p>
         </p:txBody>
@@ -12903,7 +12592,7 @@
         <p:spPr>
           <a:xfrm>
             <a:off x="6464808" y="1828800"/>
-            <a:ext cx="5266944" cy="1965960"/>
+            <a:ext cx="5266944" cy="4343400"/>
           </a:xfrm>
           <a:prstGeom prst="rect">
             <a:avLst/>
@@ -12928,7 +12617,7 @@
               </a:defRPr>
             </a:pPr>
             <a:r>
-              <a:t>Qwen3.5-4B：text-only 5/9，with-visual 3/9</a:t>
+              <a:t>00483 / 00517 multi-bus activity=0：driver 不匹配</a:t>
             </a:r>
           </a:p>
           <a:p>
@@ -12944,7 +12633,7 @@
               </a:defRPr>
             </a:pPr>
             <a:r>
-              <a:t>Gemma-4-E4B：text-only 3/9，with-visual 5/9</a:t>
+              <a:t>strategy_memory 需要预热，冷启动时可能反噬</a:t>
             </a:r>
           </a:p>
           <a:p>
@@ -12960,43 +12649,27 @@
               </a:defRPr>
             </a:pPr>
             <a:r>
-              <a:t>说明模型选对很重要，视觉摘要能帮云端纠偏</a:t>
-            </a:r>
-          </a:p>
-          <a:p>
-            <a:pPr algn="l">
-              <a:spcAft>
-                <a:spcPts val="500"/>
-              </a:spcAft>
-              <a:defRPr sz="1200" b="0">
-                <a:solidFill>
-                  <a:srgbClr val="1E2933"/>
-                </a:solidFill>
-                <a:latin typeface="Microsoft YaHei"/>
-              </a:defRPr>
-            </a:pPr>
-            <a:r>
-              <a:t>下一步：QLoRA 微调，输出结构化视觉上下文</a:t>
-            </a:r>
-          </a:p>
-        </p:txBody>
-      </p:sp>
-      <p:sp>
-        <p:nvSpPr>
-          <p:cNvPr id="16" name="Rounded Rectangle 15"/>
+              <a:t>多 Agent 冲突时需要更严格的仲裁机制</a:t>
+            </a:r>
+          </a:p>
+        </p:txBody>
+      </p:sp>
+      <p:sp>
+        <p:nvSpPr>
+          <p:cNvPr id="16" name="Rectangle 15"/>
           <p:cNvSpPr/>
           <p:nvPr/>
         </p:nvSpPr>
         <p:spPr>
           <a:xfrm>
-            <a:off x="594360" y="4069080"/>
-            <a:ext cx="11247120" cy="1645920"/>
-          </a:xfrm>
-          <a:prstGeom prst="roundRect">
-            <a:avLst/>
-          </a:prstGeom>
-          <a:solidFill>
-            <a:srgbClr val="F3F6F9"/>
+            <a:off x="0" y="6537960"/>
+            <a:ext cx="12191695" cy="18288"/>
+          </a:xfrm>
+          <a:prstGeom prst="rect">
+            <a:avLst/>
+          </a:prstGeom>
+          <a:solidFill>
+            <a:srgbClr val="0096C7"/>
           </a:solidFill>
           <a:ln/>
         </p:spPr>
@@ -13015,92 +12688,6 @@
           </a:fontRef>
         </p:style>
         <p:txBody>
-          <a:bodyPr rtlCol="0" anchor="ctr" wrap="square"/>
-          <a:lstStyle/>
-          <a:p>
-            <a:pPr algn="l">
-              <a:spcAft>
-                <a:spcPts val="600"/>
-              </a:spcAft>
-              <a:defRPr sz="1300" b="0">
-                <a:solidFill>
-                  <a:srgbClr val="1E2933"/>
-                </a:solidFill>
-                <a:latin typeface="Microsoft YaHei"/>
-              </a:defRPr>
-            </a:pPr>
-            <a:r>
-              <a:t>结论：本地 VLM 可以跑，但默认模型还不足以稳定提升云端策略质量。</a:t>
-            </a:r>
-          </a:p>
-          <a:p>
-            <a:pPr algn="l">
-              <a:spcAft>
-                <a:spcPts val="600"/>
-              </a:spcAft>
-              <a:defRPr sz="1300" b="0">
-                <a:solidFill>
-                  <a:srgbClr val="1E2933"/>
-                </a:solidFill>
-                <a:latin typeface="Microsoft YaHei"/>
-              </a:defRPr>
-            </a:pPr>
-            <a:r>
-              <a:t>方向：用 15,083 条 processed-runs 样本做 QLoRA 微调，让模型学会输出「箭头方向 + 关键目标 + 障碍物」的结构化上下文。</a:t>
-            </a:r>
-          </a:p>
-          <a:p>
-            <a:pPr algn="l">
-              <a:spcAft>
-                <a:spcPts val="600"/>
-              </a:spcAft>
-              <a:defRPr sz="1300" b="0">
-                <a:solidFill>
-                  <a:srgbClr val="1E2933"/>
-                </a:solidFill>
-                <a:latin typeface="Microsoft YaHei"/>
-              </a:defRPr>
-            </a:pPr>
-            <a:r>
-              <a:t>部署：微调后通过 llama.cpp server 常驻，L1 每 N 步或卡住时提供视觉证据。</a:t>
-            </a:r>
-          </a:p>
-        </p:txBody>
-      </p:sp>
-      <p:sp>
-        <p:nvSpPr>
-          <p:cNvPr id="17" name="Rectangle 16"/>
-          <p:cNvSpPr/>
-          <p:nvPr/>
-        </p:nvSpPr>
-        <p:spPr>
-          <a:xfrm>
-            <a:off x="0" y="6537960"/>
-            <a:ext cx="12191695" cy="18288"/>
-          </a:xfrm>
-          <a:prstGeom prst="rect">
-            <a:avLst/>
-          </a:prstGeom>
-          <a:solidFill>
-            <a:srgbClr val="0096C7"/>
-          </a:solidFill>
-          <a:ln/>
-        </p:spPr>
-        <p:style>
-          <a:lnRef idx="1">
-            <a:schemeClr val="accent1"/>
-          </a:lnRef>
-          <a:fillRef idx="3">
-            <a:schemeClr val="accent1"/>
-          </a:fillRef>
-          <a:effectRef idx="2">
-            <a:schemeClr val="accent1"/>
-          </a:effectRef>
-          <a:fontRef idx="minor">
-            <a:schemeClr val="lt1"/>
-          </a:fontRef>
-        </p:style>
-        <p:txBody>
           <a:bodyPr rtlCol="0" anchor="ctr"/>
           <a:lstStyle/>
           <a:p>
@@ -13110,7 +12697,7 @@
       </p:sp>
       <p:sp>
         <p:nvSpPr>
-          <p:cNvPr id="18" name="TextBox 17"/>
+          <p:cNvPr id="17" name="TextBox 16"/>
           <p:cNvSpPr txBox="1"/>
           <p:nvPr/>
         </p:nvSpPr>
@@ -13146,7 +12733,7 @@
       </p:sp>
       <p:sp>
         <p:nvSpPr>
-          <p:cNvPr id="19" name="TextBox 18"/>
+          <p:cNvPr id="18" name="TextBox 17"/>
           <p:cNvSpPr txBox="1"/>
           <p:nvPr/>
         </p:nvSpPr>
@@ -13175,7 +12762,7 @@
               </a:defRPr>
             </a:pPr>
             <a:r>
-              <a:t>22/35</a:t>
+              <a:t>22/37</a:t>
             </a:r>
           </a:p>
         </p:txBody>
@@ -13314,7 +12901,7 @@
               </a:defRPr>
             </a:pPr>
             <a:r>
-              <a:t>07</a:t>
+              <a:t>06</a:t>
             </a:r>
           </a:p>
         </p:txBody>
@@ -13350,7 +12937,7 @@
               </a:defRPr>
             </a:pPr>
             <a:r>
-              <a:t>实验结果</a:t>
+              <a:t>本地 VLM：把 8 GB 显存用到极限</a:t>
             </a:r>
           </a:p>
         </p:txBody>
@@ -13504,7 +13091,7 @@
               </a:defRPr>
             </a:pPr>
             <a:r>
-              <a:t>23/35</a:t>
+              <a:t>23/37</a:t>
             </a:r>
           </a:p>
         </p:txBody>
@@ -13518,6 +13105,1215 @@
 </file>
 
 <file path=ppt/slides/slide24.xml><?xml version="1.0" encoding="utf-8"?>
+<p:sld xmlns:a="http://schemas.openxmlformats.org/drawingml/2006/main" xmlns:p="http://schemas.openxmlformats.org/presentationml/2006/main" xmlns:r="http://schemas.openxmlformats.org/officeDocument/2006/relationships">
+  <p:cSld>
+    <p:spTree>
+      <p:nvGrpSpPr>
+        <p:cNvPr id="1" name=""/>
+        <p:cNvGrpSpPr/>
+        <p:nvPr/>
+      </p:nvGrpSpPr>
+      <p:grpSpPr/>
+      <p:sp>
+        <p:nvSpPr>
+          <p:cNvPr id="2" name="Rectangle 1"/>
+          <p:cNvSpPr/>
+          <p:nvPr/>
+        </p:nvSpPr>
+        <p:spPr>
+          <a:xfrm>
+            <a:off x="0" y="0"/>
+            <a:ext cx="12191695" cy="960120"/>
+          </a:xfrm>
+          <a:prstGeom prst="rect">
+            <a:avLst/>
+          </a:prstGeom>
+          <a:solidFill>
+            <a:srgbClr val="1A237E"/>
+          </a:solidFill>
+          <a:ln/>
+        </p:spPr>
+        <p:style>
+          <a:lnRef idx="1">
+            <a:schemeClr val="accent1"/>
+          </a:lnRef>
+          <a:fillRef idx="3">
+            <a:schemeClr val="accent1"/>
+          </a:fillRef>
+          <a:effectRef idx="2">
+            <a:schemeClr val="accent1"/>
+          </a:effectRef>
+          <a:fontRef idx="minor">
+            <a:schemeClr val="lt1"/>
+          </a:fontRef>
+        </p:style>
+        <p:txBody>
+          <a:bodyPr rtlCol="0" anchor="ctr"/>
+          <a:lstStyle/>
+          <a:p>
+            <a:pPr algn="ctr"/>
+          </a:p>
+        </p:txBody>
+      </p:sp>
+      <p:sp>
+        <p:nvSpPr>
+          <p:cNvPr id="3" name="TextBox 2"/>
+          <p:cNvSpPr txBox="1"/>
+          <p:nvPr/>
+        </p:nvSpPr>
+        <p:spPr>
+          <a:xfrm>
+            <a:off x="457200" y="228600"/>
+            <a:ext cx="11247120" cy="548640"/>
+          </a:xfrm>
+          <a:prstGeom prst="rect">
+            <a:avLst/>
+          </a:prstGeom>
+          <a:noFill/>
+        </p:spPr>
+        <p:txBody>
+          <a:bodyPr wrap="none">
+            <a:spAutoFit/>
+          </a:bodyPr>
+          <a:lstStyle/>
+          <a:p>
+            <a:pPr algn="l">
+              <a:defRPr sz="3000" b="1">
+                <a:solidFill>
+                  <a:srgbClr val="F3F6F9"/>
+                </a:solidFill>
+                <a:latin typeface="Microsoft YaHei"/>
+              </a:defRPr>
+            </a:pPr>
+            <a:r>
+              <a:t>本地 VLM：8 GB 显存上的画面理解层</a:t>
+            </a:r>
+          </a:p>
+        </p:txBody>
+      </p:sp>
+      <p:sp>
+        <p:nvSpPr>
+          <p:cNvPr id="4" name="Rectangle 3"/>
+          <p:cNvSpPr/>
+          <p:nvPr/>
+        </p:nvSpPr>
+        <p:spPr>
+          <a:xfrm>
+            <a:off x="0" y="960120"/>
+            <a:ext cx="164592" cy="5897880"/>
+          </a:xfrm>
+          <a:prstGeom prst="rect">
+            <a:avLst/>
+          </a:prstGeom>
+          <a:solidFill>
+            <a:srgbClr val="0096C7"/>
+          </a:solidFill>
+          <a:ln/>
+        </p:spPr>
+        <p:style>
+          <a:lnRef idx="1">
+            <a:schemeClr val="accent1"/>
+          </a:lnRef>
+          <a:fillRef idx="3">
+            <a:schemeClr val="accent1"/>
+          </a:fillRef>
+          <a:effectRef idx="2">
+            <a:schemeClr val="accent1"/>
+          </a:effectRef>
+          <a:fontRef idx="minor">
+            <a:schemeClr val="lt1"/>
+          </a:fontRef>
+        </p:style>
+        <p:txBody>
+          <a:bodyPr rtlCol="0" anchor="ctr"/>
+          <a:lstStyle/>
+          <a:p>
+            <a:pPr algn="ctr"/>
+          </a:p>
+        </p:txBody>
+      </p:sp>
+      <p:sp>
+        <p:nvSpPr>
+          <p:cNvPr id="5" name="Rectangle 4"/>
+          <p:cNvSpPr/>
+          <p:nvPr/>
+        </p:nvSpPr>
+        <p:spPr>
+          <a:xfrm>
+            <a:off x="320040" y="1078992"/>
+            <a:ext cx="11548872" cy="5349240"/>
+          </a:xfrm>
+          <a:prstGeom prst="rect">
+            <a:avLst/>
+          </a:prstGeom>
+          <a:solidFill>
+            <a:srgbClr val="FFFFFF"/>
+          </a:solidFill>
+          <a:ln w="12700">
+            <a:solidFill>
+              <a:srgbClr val="E1E5E9"/>
+            </a:solidFill>
+          </a:ln>
+        </p:spPr>
+        <p:style>
+          <a:lnRef idx="1">
+            <a:schemeClr val="accent1"/>
+          </a:lnRef>
+          <a:fillRef idx="3">
+            <a:schemeClr val="accent1"/>
+          </a:fillRef>
+          <a:effectRef idx="2">
+            <a:schemeClr val="accent1"/>
+          </a:effectRef>
+          <a:fontRef idx="minor">
+            <a:schemeClr val="lt1"/>
+          </a:fontRef>
+        </p:style>
+        <p:txBody>
+          <a:bodyPr rtlCol="0" anchor="ctr"/>
+          <a:lstStyle/>
+          <a:p>
+            <a:pPr algn="ctr"/>
+          </a:p>
+        </p:txBody>
+      </p:sp>
+      <p:sp>
+        <p:nvSpPr>
+          <p:cNvPr id="6" name="Rounded Rectangle 5"/>
+          <p:cNvSpPr/>
+          <p:nvPr/>
+        </p:nvSpPr>
+        <p:spPr>
+          <a:xfrm>
+            <a:off x="621792" y="1353312"/>
+            <a:ext cx="5486400" cy="2560320"/>
+          </a:xfrm>
+          <a:prstGeom prst="roundRect">
+            <a:avLst/>
+          </a:prstGeom>
+          <a:solidFill>
+            <a:srgbClr val="D0D5DA"/>
+          </a:solidFill>
+          <a:ln/>
+        </p:spPr>
+        <p:style>
+          <a:lnRef idx="1">
+            <a:schemeClr val="accent1"/>
+          </a:lnRef>
+          <a:fillRef idx="3">
+            <a:schemeClr val="accent1"/>
+          </a:fillRef>
+          <a:effectRef idx="2">
+            <a:schemeClr val="accent1"/>
+          </a:effectRef>
+          <a:fontRef idx="minor">
+            <a:schemeClr val="lt1"/>
+          </a:fontRef>
+        </p:style>
+        <p:txBody>
+          <a:bodyPr rtlCol="0" anchor="ctr"/>
+          <a:lstStyle/>
+          <a:p>
+            <a:pPr algn="ctr"/>
+          </a:p>
+        </p:txBody>
+      </p:sp>
+      <p:sp>
+        <p:nvSpPr>
+          <p:cNvPr id="7" name="Rounded Rectangle 6"/>
+          <p:cNvSpPr/>
+          <p:nvPr/>
+        </p:nvSpPr>
+        <p:spPr>
+          <a:xfrm>
+            <a:off x="594360" y="1325880"/>
+            <a:ext cx="5486400" cy="2560320"/>
+          </a:xfrm>
+          <a:prstGeom prst="roundRect">
+            <a:avLst/>
+          </a:prstGeom>
+          <a:solidFill>
+            <a:srgbClr val="FFFFFF"/>
+          </a:solidFill>
+          <a:ln w="12700">
+            <a:solidFill>
+              <a:srgbClr val="DDE2E6"/>
+            </a:solidFill>
+          </a:ln>
+        </p:spPr>
+        <p:style>
+          <a:lnRef idx="1">
+            <a:schemeClr val="accent1"/>
+          </a:lnRef>
+          <a:fillRef idx="3">
+            <a:schemeClr val="accent1"/>
+          </a:fillRef>
+          <a:effectRef idx="2">
+            <a:schemeClr val="accent1"/>
+          </a:effectRef>
+          <a:fontRef idx="minor">
+            <a:schemeClr val="lt1"/>
+          </a:fontRef>
+        </p:style>
+        <p:txBody>
+          <a:bodyPr rtlCol="0" anchor="ctr"/>
+          <a:lstStyle/>
+          <a:p>
+            <a:pPr algn="ctr"/>
+          </a:p>
+        </p:txBody>
+      </p:sp>
+      <p:sp>
+        <p:nvSpPr>
+          <p:cNvPr id="8" name="Rectangle 7"/>
+          <p:cNvSpPr/>
+          <p:nvPr/>
+        </p:nvSpPr>
+        <p:spPr>
+          <a:xfrm>
+            <a:off x="594360" y="1325880"/>
+            <a:ext cx="5486400" cy="411480"/>
+          </a:xfrm>
+          <a:prstGeom prst="rect">
+            <a:avLst/>
+          </a:prstGeom>
+          <a:solidFill>
+            <a:srgbClr val="0096C7"/>
+          </a:solidFill>
+          <a:ln/>
+        </p:spPr>
+        <p:style>
+          <a:lnRef idx="1">
+            <a:schemeClr val="accent1"/>
+          </a:lnRef>
+          <a:fillRef idx="3">
+            <a:schemeClr val="accent1"/>
+          </a:fillRef>
+          <a:effectRef idx="2">
+            <a:schemeClr val="accent1"/>
+          </a:effectRef>
+          <a:fontRef idx="minor">
+            <a:schemeClr val="lt1"/>
+          </a:fontRef>
+        </p:style>
+        <p:txBody>
+          <a:bodyPr rtlCol="0" anchor="ctr"/>
+          <a:lstStyle/>
+          <a:p>
+            <a:pPr algn="ctr"/>
+          </a:p>
+        </p:txBody>
+      </p:sp>
+      <p:sp>
+        <p:nvSpPr>
+          <p:cNvPr id="9" name="TextBox 8"/>
+          <p:cNvSpPr txBox="1"/>
+          <p:nvPr/>
+        </p:nvSpPr>
+        <p:spPr>
+          <a:xfrm>
+            <a:off x="667512" y="1399032"/>
+            <a:ext cx="5340096" cy="320040"/>
+          </a:xfrm>
+          <a:prstGeom prst="rect">
+            <a:avLst/>
+          </a:prstGeom>
+          <a:noFill/>
+        </p:spPr>
+        <p:txBody>
+          <a:bodyPr wrap="none">
+            <a:spAutoFit/>
+          </a:bodyPr>
+          <a:lstStyle/>
+          <a:p>
+            <a:pPr algn="l">
+              <a:defRPr sz="1400" b="1">
+                <a:solidFill>
+                  <a:srgbClr val="F3F6F9"/>
+                </a:solidFill>
+                <a:latin typeface="Microsoft YaHei"/>
+              </a:defRPr>
+            </a:pPr>
+            <a:r>
+              <a:t>当前能跑通什么？</a:t>
+            </a:r>
+          </a:p>
+        </p:txBody>
+      </p:sp>
+      <p:sp>
+        <p:nvSpPr>
+          <p:cNvPr id="10" name="TextBox 9"/>
+          <p:cNvSpPr txBox="1"/>
+          <p:nvPr/>
+        </p:nvSpPr>
+        <p:spPr>
+          <a:xfrm>
+            <a:off x="704088" y="1828800"/>
+            <a:ext cx="5266944" cy="1965960"/>
+          </a:xfrm>
+          <a:prstGeom prst="rect">
+            <a:avLst/>
+          </a:prstGeom>
+          <a:noFill/>
+        </p:spPr>
+        <p:txBody>
+          <a:bodyPr wrap="square">
+            <a:spAutoFit/>
+          </a:bodyPr>
+          <a:lstStyle/>
+          <a:p>
+            <a:pPr algn="l">
+              <a:spcAft>
+                <a:spcPts val="500"/>
+              </a:spcAft>
+              <a:defRPr sz="1200" b="0">
+                <a:solidFill>
+                  <a:srgbClr val="1E2933"/>
+                </a:solidFill>
+                <a:latin typeface="Microsoft YaHei"/>
+              </a:defRPr>
+            </a:pPr>
+            <a:r>
+              <a:t>4-bit 量化加载 Qwen3.5-4B/9B、Gemma-4-E4B</a:t>
+            </a:r>
+          </a:p>
+          <a:p>
+            <a:pPr algn="l">
+              <a:spcAft>
+                <a:spcPts val="500"/>
+              </a:spcAft>
+              <a:defRPr sz="1200" b="0">
+                <a:solidFill>
+                  <a:srgbClr val="1E2933"/>
+                </a:solidFill>
+                <a:latin typeface="Microsoft YaHei"/>
+              </a:defRPr>
+            </a:pPr>
+            <a:r>
+              <a:t>KV-cache 量化进一步压低显存</a:t>
+            </a:r>
+          </a:p>
+          <a:p>
+            <a:pPr algn="l">
+              <a:spcAft>
+                <a:spcPts val="500"/>
+              </a:spcAft>
+              <a:defRPr sz="1200" b="0">
+                <a:solidFill>
+                  <a:srgbClr val="1E2933"/>
+                </a:solidFill>
+                <a:latin typeface="Microsoft YaHei"/>
+              </a:defRPr>
+            </a:pPr>
+            <a:r>
+              <a:t>RTX 5060 8GB 上 Qwen3.5-4B 约 7s/帧，Gemma-4-E4B 约 7.8s/帧</a:t>
+            </a:r>
+          </a:p>
+          <a:p>
+            <a:pPr algn="l">
+              <a:spcAft>
+                <a:spcPts val="500"/>
+              </a:spcAft>
+              <a:defRPr sz="1200" b="0">
+                <a:solidFill>
+                  <a:srgbClr val="1E2933"/>
+                </a:solidFill>
+                <a:latin typeface="Microsoft YaHei"/>
+              </a:defRPr>
+            </a:pPr>
+            <a:r>
+              <a:t>Gemma-4-E4B 视觉摘要比 Qwen3.5-4B 更稳定</a:t>
+            </a:r>
+          </a:p>
+        </p:txBody>
+      </p:sp>
+      <p:sp>
+        <p:nvSpPr>
+          <p:cNvPr id="11" name="Rounded Rectangle 10"/>
+          <p:cNvSpPr/>
+          <p:nvPr/>
+        </p:nvSpPr>
+        <p:spPr>
+          <a:xfrm>
+            <a:off x="6382512" y="1353312"/>
+            <a:ext cx="5486400" cy="2560320"/>
+          </a:xfrm>
+          <a:prstGeom prst="roundRect">
+            <a:avLst/>
+          </a:prstGeom>
+          <a:solidFill>
+            <a:srgbClr val="D0D5DA"/>
+          </a:solidFill>
+          <a:ln/>
+        </p:spPr>
+        <p:style>
+          <a:lnRef idx="1">
+            <a:schemeClr val="accent1"/>
+          </a:lnRef>
+          <a:fillRef idx="3">
+            <a:schemeClr val="accent1"/>
+          </a:fillRef>
+          <a:effectRef idx="2">
+            <a:schemeClr val="accent1"/>
+          </a:effectRef>
+          <a:fontRef idx="minor">
+            <a:schemeClr val="lt1"/>
+          </a:fontRef>
+        </p:style>
+        <p:txBody>
+          <a:bodyPr rtlCol="0" anchor="ctr"/>
+          <a:lstStyle/>
+          <a:p>
+            <a:pPr algn="ctr"/>
+          </a:p>
+        </p:txBody>
+      </p:sp>
+      <p:sp>
+        <p:nvSpPr>
+          <p:cNvPr id="12" name="Rounded Rectangle 11"/>
+          <p:cNvSpPr/>
+          <p:nvPr/>
+        </p:nvSpPr>
+        <p:spPr>
+          <a:xfrm>
+            <a:off x="6355080" y="1325880"/>
+            <a:ext cx="5486400" cy="2560320"/>
+          </a:xfrm>
+          <a:prstGeom prst="roundRect">
+            <a:avLst/>
+          </a:prstGeom>
+          <a:solidFill>
+            <a:srgbClr val="FFFFFF"/>
+          </a:solidFill>
+          <a:ln w="12700">
+            <a:solidFill>
+              <a:srgbClr val="DDE2E6"/>
+            </a:solidFill>
+          </a:ln>
+        </p:spPr>
+        <p:style>
+          <a:lnRef idx="1">
+            <a:schemeClr val="accent1"/>
+          </a:lnRef>
+          <a:fillRef idx="3">
+            <a:schemeClr val="accent1"/>
+          </a:fillRef>
+          <a:effectRef idx="2">
+            <a:schemeClr val="accent1"/>
+          </a:effectRef>
+          <a:fontRef idx="minor">
+            <a:schemeClr val="lt1"/>
+          </a:fontRef>
+        </p:style>
+        <p:txBody>
+          <a:bodyPr rtlCol="0" anchor="ctr"/>
+          <a:lstStyle/>
+          <a:p>
+            <a:pPr algn="ctr"/>
+          </a:p>
+        </p:txBody>
+      </p:sp>
+      <p:sp>
+        <p:nvSpPr>
+          <p:cNvPr id="13" name="Rectangle 12"/>
+          <p:cNvSpPr/>
+          <p:nvPr/>
+        </p:nvSpPr>
+        <p:spPr>
+          <a:xfrm>
+            <a:off x="6355080" y="1325880"/>
+            <a:ext cx="5486400" cy="411480"/>
+          </a:xfrm>
+          <a:prstGeom prst="rect">
+            <a:avLst/>
+          </a:prstGeom>
+          <a:solidFill>
+            <a:srgbClr val="FF6B35"/>
+          </a:solidFill>
+          <a:ln/>
+        </p:spPr>
+        <p:style>
+          <a:lnRef idx="1">
+            <a:schemeClr val="accent1"/>
+          </a:lnRef>
+          <a:fillRef idx="3">
+            <a:schemeClr val="accent1"/>
+          </a:fillRef>
+          <a:effectRef idx="2">
+            <a:schemeClr val="accent1"/>
+          </a:effectRef>
+          <a:fontRef idx="minor">
+            <a:schemeClr val="lt1"/>
+          </a:fontRef>
+        </p:style>
+        <p:txBody>
+          <a:bodyPr rtlCol="0" anchor="ctr"/>
+          <a:lstStyle/>
+          <a:p>
+            <a:pPr algn="ctr"/>
+          </a:p>
+        </p:txBody>
+      </p:sp>
+      <p:sp>
+        <p:nvSpPr>
+          <p:cNvPr id="14" name="TextBox 13"/>
+          <p:cNvSpPr txBox="1"/>
+          <p:nvPr/>
+        </p:nvSpPr>
+        <p:spPr>
+          <a:xfrm>
+            <a:off x="6428232" y="1399032"/>
+            <a:ext cx="5340096" cy="320040"/>
+          </a:xfrm>
+          <a:prstGeom prst="rect">
+            <a:avLst/>
+          </a:prstGeom>
+          <a:noFill/>
+        </p:spPr>
+        <p:txBody>
+          <a:bodyPr wrap="none">
+            <a:spAutoFit/>
+          </a:bodyPr>
+          <a:lstStyle/>
+          <a:p>
+            <a:pPr algn="l">
+              <a:defRPr sz="1400" b="1">
+                <a:solidFill>
+                  <a:srgbClr val="F3F6F9"/>
+                </a:solidFill>
+                <a:latin typeface="Microsoft YaHei"/>
+              </a:defRPr>
+            </a:pPr>
+            <a:r>
+              <a:t>视觉上下文有没有用？</a:t>
+            </a:r>
+          </a:p>
+        </p:txBody>
+      </p:sp>
+      <p:sp>
+        <p:nvSpPr>
+          <p:cNvPr id="15" name="TextBox 14"/>
+          <p:cNvSpPr txBox="1"/>
+          <p:nvPr/>
+        </p:nvSpPr>
+        <p:spPr>
+          <a:xfrm>
+            <a:off x="6464808" y="1828800"/>
+            <a:ext cx="5266944" cy="1965960"/>
+          </a:xfrm>
+          <a:prstGeom prst="rect">
+            <a:avLst/>
+          </a:prstGeom>
+          <a:noFill/>
+        </p:spPr>
+        <p:txBody>
+          <a:bodyPr wrap="square">
+            <a:spAutoFit/>
+          </a:bodyPr>
+          <a:lstStyle/>
+          <a:p>
+            <a:pPr algn="l">
+              <a:spcAft>
+                <a:spcPts val="500"/>
+              </a:spcAft>
+              <a:defRPr sz="1200" b="0">
+                <a:solidFill>
+                  <a:srgbClr val="1E2933"/>
+                </a:solidFill>
+                <a:latin typeface="Microsoft YaHei"/>
+              </a:defRPr>
+            </a:pPr>
+            <a:r>
+              <a:t>Qwen3.5-4B：text-only 5/9，with-visual 3/9</a:t>
+            </a:r>
+          </a:p>
+          <a:p>
+            <a:pPr algn="l">
+              <a:spcAft>
+                <a:spcPts val="500"/>
+              </a:spcAft>
+              <a:defRPr sz="1200" b="0">
+                <a:solidFill>
+                  <a:srgbClr val="1E2933"/>
+                </a:solidFill>
+                <a:latin typeface="Microsoft YaHei"/>
+              </a:defRPr>
+            </a:pPr>
+            <a:r>
+              <a:t>Gemma-4-E4B：text-only 3/9，with-visual 5/9</a:t>
+            </a:r>
+          </a:p>
+          <a:p>
+            <a:pPr algn="l">
+              <a:spcAft>
+                <a:spcPts val="500"/>
+              </a:spcAft>
+              <a:defRPr sz="1200" b="0">
+                <a:solidFill>
+                  <a:srgbClr val="1E2933"/>
+                </a:solidFill>
+                <a:latin typeface="Microsoft YaHei"/>
+              </a:defRPr>
+            </a:pPr>
+            <a:r>
+              <a:t>说明模型选对很重要，视觉摘要能帮云端纠偏</a:t>
+            </a:r>
+          </a:p>
+          <a:p>
+            <a:pPr algn="l">
+              <a:spcAft>
+                <a:spcPts val="500"/>
+              </a:spcAft>
+              <a:defRPr sz="1200" b="0">
+                <a:solidFill>
+                  <a:srgbClr val="1E2933"/>
+                </a:solidFill>
+                <a:latin typeface="Microsoft YaHei"/>
+              </a:defRPr>
+            </a:pPr>
+            <a:r>
+              <a:t>下一步：QLoRA 微调，输出结构化视觉上下文</a:t>
+            </a:r>
+          </a:p>
+        </p:txBody>
+      </p:sp>
+      <p:sp>
+        <p:nvSpPr>
+          <p:cNvPr id="16" name="Rounded Rectangle 15"/>
+          <p:cNvSpPr/>
+          <p:nvPr/>
+        </p:nvSpPr>
+        <p:spPr>
+          <a:xfrm>
+            <a:off x="594360" y="4069080"/>
+            <a:ext cx="11247120" cy="1645920"/>
+          </a:xfrm>
+          <a:prstGeom prst="roundRect">
+            <a:avLst/>
+          </a:prstGeom>
+          <a:solidFill>
+            <a:srgbClr val="F3F6F9"/>
+          </a:solidFill>
+          <a:ln/>
+        </p:spPr>
+        <p:style>
+          <a:lnRef idx="1">
+            <a:schemeClr val="accent1"/>
+          </a:lnRef>
+          <a:fillRef idx="3">
+            <a:schemeClr val="accent1"/>
+          </a:fillRef>
+          <a:effectRef idx="2">
+            <a:schemeClr val="accent1"/>
+          </a:effectRef>
+          <a:fontRef idx="minor">
+            <a:schemeClr val="lt1"/>
+          </a:fontRef>
+        </p:style>
+        <p:txBody>
+          <a:bodyPr rtlCol="0" anchor="ctr" wrap="square"/>
+          <a:lstStyle/>
+          <a:p>
+            <a:pPr algn="l">
+              <a:spcAft>
+                <a:spcPts val="600"/>
+              </a:spcAft>
+              <a:defRPr sz="1300" b="0">
+                <a:solidFill>
+                  <a:srgbClr val="1E2933"/>
+                </a:solidFill>
+                <a:latin typeface="Microsoft YaHei"/>
+              </a:defRPr>
+            </a:pPr>
+            <a:r>
+              <a:t>结论：本地 VLM 可以跑，但默认模型还不足以稳定提升云端策略质量。</a:t>
+            </a:r>
+          </a:p>
+          <a:p>
+            <a:pPr algn="l">
+              <a:spcAft>
+                <a:spcPts val="600"/>
+              </a:spcAft>
+              <a:defRPr sz="1300" b="0">
+                <a:solidFill>
+                  <a:srgbClr val="1E2933"/>
+                </a:solidFill>
+                <a:latin typeface="Microsoft YaHei"/>
+              </a:defRPr>
+            </a:pPr>
+            <a:r>
+              <a:t>方向：用 15,083 条 processed-runs 样本做 QLoRA 微调，让模型学会输出「箭头方向 + 关键目标 + 障碍物」的结构化上下文。</a:t>
+            </a:r>
+          </a:p>
+          <a:p>
+            <a:pPr algn="l">
+              <a:spcAft>
+                <a:spcPts val="600"/>
+              </a:spcAft>
+              <a:defRPr sz="1300" b="0">
+                <a:solidFill>
+                  <a:srgbClr val="1E2933"/>
+                </a:solidFill>
+                <a:latin typeface="Microsoft YaHei"/>
+              </a:defRPr>
+            </a:pPr>
+            <a:r>
+              <a:t>部署：微调后通过 llama.cpp server 常驻，L1 每 N 步或卡住时提供视觉证据。</a:t>
+            </a:r>
+          </a:p>
+        </p:txBody>
+      </p:sp>
+      <p:sp>
+        <p:nvSpPr>
+          <p:cNvPr id="17" name="Rectangle 16"/>
+          <p:cNvSpPr/>
+          <p:nvPr/>
+        </p:nvSpPr>
+        <p:spPr>
+          <a:xfrm>
+            <a:off x="0" y="6537960"/>
+            <a:ext cx="12191695" cy="18288"/>
+          </a:xfrm>
+          <a:prstGeom prst="rect">
+            <a:avLst/>
+          </a:prstGeom>
+          <a:solidFill>
+            <a:srgbClr val="0096C7"/>
+          </a:solidFill>
+          <a:ln/>
+        </p:spPr>
+        <p:style>
+          <a:lnRef idx="1">
+            <a:schemeClr val="accent1"/>
+          </a:lnRef>
+          <a:fillRef idx="3">
+            <a:schemeClr val="accent1"/>
+          </a:fillRef>
+          <a:effectRef idx="2">
+            <a:schemeClr val="accent1"/>
+          </a:effectRef>
+          <a:fontRef idx="minor">
+            <a:schemeClr val="lt1"/>
+          </a:fontRef>
+        </p:style>
+        <p:txBody>
+          <a:bodyPr rtlCol="0" anchor="ctr"/>
+          <a:lstStyle/>
+          <a:p>
+            <a:pPr algn="ctr"/>
+          </a:p>
+        </p:txBody>
+      </p:sp>
+      <p:sp>
+        <p:nvSpPr>
+          <p:cNvPr id="18" name="TextBox 17"/>
+          <p:cNvSpPr txBox="1"/>
+          <p:nvPr/>
+        </p:nvSpPr>
+        <p:spPr>
+          <a:xfrm>
+            <a:off x="457200" y="6583680"/>
+            <a:ext cx="3657600" cy="228600"/>
+          </a:xfrm>
+          <a:prstGeom prst="rect">
+            <a:avLst/>
+          </a:prstGeom>
+          <a:noFill/>
+        </p:spPr>
+        <p:txBody>
+          <a:bodyPr wrap="none">
+            <a:spAutoFit/>
+          </a:bodyPr>
+          <a:lstStyle/>
+          <a:p>
+            <a:pPr algn="l">
+              <a:defRPr sz="1000" b="0">
+                <a:solidFill>
+                  <a:srgbClr val="6C757D"/>
+                </a:solidFill>
+                <a:latin typeface="Microsoft YaHei"/>
+              </a:defRPr>
+            </a:pPr>
+            <a:r>
+              <a:t>smallgameagent · LLM/VLM + 规则驱动</a:t>
+            </a:r>
+          </a:p>
+        </p:txBody>
+      </p:sp>
+      <p:sp>
+        <p:nvSpPr>
+          <p:cNvPr id="19" name="TextBox 18"/>
+          <p:cNvSpPr txBox="1"/>
+          <p:nvPr/>
+        </p:nvSpPr>
+        <p:spPr>
+          <a:xfrm>
+            <a:off x="10789920" y="6583680"/>
+            <a:ext cx="914400" cy="228600"/>
+          </a:xfrm>
+          <a:prstGeom prst="rect">
+            <a:avLst/>
+          </a:prstGeom>
+          <a:noFill/>
+        </p:spPr>
+        <p:txBody>
+          <a:bodyPr wrap="none">
+            <a:spAutoFit/>
+          </a:bodyPr>
+          <a:lstStyle/>
+          <a:p>
+            <a:pPr algn="r">
+              <a:defRPr sz="1000" b="0">
+                <a:solidFill>
+                  <a:srgbClr val="6C757D"/>
+                </a:solidFill>
+                <a:latin typeface="Microsoft YaHei"/>
+              </a:defRPr>
+            </a:pPr>
+            <a:r>
+              <a:t>24/37</a:t>
+            </a:r>
+          </a:p>
+        </p:txBody>
+      </p:sp>
+    </p:spTree>
+  </p:cSld>
+  <p:clrMapOvr>
+    <a:masterClrMapping/>
+  </p:clrMapOvr>
+</p:sld>
+</file>
+
+<file path=ppt/slides/slide25.xml><?xml version="1.0" encoding="utf-8"?>
+<p:sld xmlns:a="http://schemas.openxmlformats.org/drawingml/2006/main" xmlns:p="http://schemas.openxmlformats.org/presentationml/2006/main" xmlns:r="http://schemas.openxmlformats.org/officeDocument/2006/relationships">
+  <p:cSld>
+    <p:spTree>
+      <p:nvGrpSpPr>
+        <p:cNvPr id="1" name=""/>
+        <p:cNvGrpSpPr/>
+        <p:nvPr/>
+      </p:nvGrpSpPr>
+      <p:grpSpPr/>
+      <p:sp>
+        <p:nvSpPr>
+          <p:cNvPr id="2" name="Rectangle 1"/>
+          <p:cNvSpPr/>
+          <p:nvPr/>
+        </p:nvSpPr>
+        <p:spPr>
+          <a:xfrm>
+            <a:off x="0" y="0"/>
+            <a:ext cx="12191695" cy="6858000"/>
+          </a:xfrm>
+          <a:prstGeom prst="rect">
+            <a:avLst/>
+          </a:prstGeom>
+          <a:solidFill>
+            <a:srgbClr val="1A237E"/>
+          </a:solidFill>
+          <a:ln/>
+        </p:spPr>
+        <p:style>
+          <a:lnRef idx="1">
+            <a:schemeClr val="accent1"/>
+          </a:lnRef>
+          <a:fillRef idx="3">
+            <a:schemeClr val="accent1"/>
+          </a:fillRef>
+          <a:effectRef idx="2">
+            <a:schemeClr val="accent1"/>
+          </a:effectRef>
+          <a:fontRef idx="minor">
+            <a:schemeClr val="lt1"/>
+          </a:fontRef>
+        </p:style>
+        <p:txBody>
+          <a:bodyPr rtlCol="0" anchor="ctr"/>
+          <a:lstStyle/>
+          <a:p>
+            <a:pPr algn="ctr"/>
+          </a:p>
+        </p:txBody>
+      </p:sp>
+      <p:sp>
+        <p:nvSpPr>
+          <p:cNvPr id="3" name="Rectangle 2"/>
+          <p:cNvSpPr/>
+          <p:nvPr/>
+        </p:nvSpPr>
+        <p:spPr>
+          <a:xfrm>
+            <a:off x="6858000" y="-914400"/>
+            <a:ext cx="5943600" cy="8686800"/>
+          </a:xfrm>
+          <a:prstGeom prst="rect">
+            <a:avLst/>
+          </a:prstGeom>
+          <a:solidFill>
+            <a:srgbClr val="0096C7">
+              <a:lumMod val="80000"/>
+              <a:lumOff val="20000"/>
+            </a:srgbClr>
+          </a:solidFill>
+          <a:ln/>
+        </p:spPr>
+        <p:style>
+          <a:lnRef idx="1">
+            <a:schemeClr val="accent1"/>
+          </a:lnRef>
+          <a:fillRef idx="3">
+            <a:schemeClr val="accent1"/>
+          </a:fillRef>
+          <a:effectRef idx="2">
+            <a:schemeClr val="accent1"/>
+          </a:effectRef>
+          <a:fontRef idx="minor">
+            <a:schemeClr val="lt1"/>
+          </a:fontRef>
+        </p:style>
+        <p:txBody>
+          <a:bodyPr rtlCol="0" anchor="ctr"/>
+          <a:lstStyle/>
+          <a:p>
+            <a:pPr algn="ctr"/>
+          </a:p>
+        </p:txBody>
+      </p:sp>
+      <p:sp>
+        <p:nvSpPr>
+          <p:cNvPr id="4" name="TextBox 3"/>
+          <p:cNvSpPr txBox="1"/>
+          <p:nvPr/>
+        </p:nvSpPr>
+        <p:spPr>
+          <a:xfrm>
+            <a:off x="548640" y="1645920"/>
+            <a:ext cx="2743200" cy="1828800"/>
+          </a:xfrm>
+          <a:prstGeom prst="rect">
+            <a:avLst/>
+          </a:prstGeom>
+          <a:noFill/>
+        </p:spPr>
+        <p:txBody>
+          <a:bodyPr wrap="none">
+            <a:spAutoFit/>
+          </a:bodyPr>
+          <a:lstStyle/>
+          <a:p>
+            <a:pPr algn="l">
+              <a:defRPr sz="12000" b="1">
+                <a:solidFill>
+                  <a:srgbClr val="333DA0"/>
+                </a:solidFill>
+                <a:latin typeface="Microsoft YaHei"/>
+              </a:defRPr>
+            </a:pPr>
+            <a:r>
+              <a:t>07</a:t>
+            </a:r>
+          </a:p>
+        </p:txBody>
+      </p:sp>
+      <p:sp>
+        <p:nvSpPr>
+          <p:cNvPr id="5" name="TextBox 4"/>
+          <p:cNvSpPr txBox="1"/>
+          <p:nvPr/>
+        </p:nvSpPr>
+        <p:spPr>
+          <a:xfrm>
+            <a:off x="548640" y="2834640"/>
+            <a:ext cx="11064240" cy="1097280"/>
+          </a:xfrm>
+          <a:prstGeom prst="rect">
+            <a:avLst/>
+          </a:prstGeom>
+          <a:noFill/>
+        </p:spPr>
+        <p:txBody>
+          <a:bodyPr wrap="none">
+            <a:spAutoFit/>
+          </a:bodyPr>
+          <a:lstStyle/>
+          <a:p>
+            <a:pPr algn="l">
+              <a:defRPr sz="4400" b="1">
+                <a:solidFill>
+                  <a:srgbClr val="F3F6F9"/>
+                </a:solidFill>
+                <a:latin typeface="Microsoft YaHei"/>
+              </a:defRPr>
+            </a:pPr>
+            <a:r>
+              <a:t>实验结果</a:t>
+            </a:r>
+          </a:p>
+        </p:txBody>
+      </p:sp>
+      <p:sp>
+        <p:nvSpPr>
+          <p:cNvPr id="6" name="Rectangle 5"/>
+          <p:cNvSpPr/>
+          <p:nvPr/>
+        </p:nvSpPr>
+        <p:spPr>
+          <a:xfrm>
+            <a:off x="548640" y="4023360"/>
+            <a:ext cx="1828800" cy="73152"/>
+          </a:xfrm>
+          <a:prstGeom prst="rect">
+            <a:avLst/>
+          </a:prstGeom>
+          <a:solidFill>
+            <a:srgbClr val="FF6B35"/>
+          </a:solidFill>
+          <a:ln/>
+        </p:spPr>
+        <p:style>
+          <a:lnRef idx="1">
+            <a:schemeClr val="accent1"/>
+          </a:lnRef>
+          <a:fillRef idx="3">
+            <a:schemeClr val="accent1"/>
+          </a:fillRef>
+          <a:effectRef idx="2">
+            <a:schemeClr val="accent1"/>
+          </a:effectRef>
+          <a:fontRef idx="minor">
+            <a:schemeClr val="lt1"/>
+          </a:fontRef>
+        </p:style>
+        <p:txBody>
+          <a:bodyPr rtlCol="0" anchor="ctr"/>
+          <a:lstStyle/>
+          <a:p>
+            <a:pPr algn="ctr"/>
+          </a:p>
+        </p:txBody>
+      </p:sp>
+      <p:sp>
+        <p:nvSpPr>
+          <p:cNvPr id="7" name="Rectangle 6"/>
+          <p:cNvSpPr/>
+          <p:nvPr/>
+        </p:nvSpPr>
+        <p:spPr>
+          <a:xfrm>
+            <a:off x="0" y="6537960"/>
+            <a:ext cx="12191695" cy="18288"/>
+          </a:xfrm>
+          <a:prstGeom prst="rect">
+            <a:avLst/>
+          </a:prstGeom>
+          <a:solidFill>
+            <a:srgbClr val="0096C7"/>
+          </a:solidFill>
+          <a:ln/>
+        </p:spPr>
+        <p:style>
+          <a:lnRef idx="1">
+            <a:schemeClr val="accent1"/>
+          </a:lnRef>
+          <a:fillRef idx="3">
+            <a:schemeClr val="accent1"/>
+          </a:fillRef>
+          <a:effectRef idx="2">
+            <a:schemeClr val="accent1"/>
+          </a:effectRef>
+          <a:fontRef idx="minor">
+            <a:schemeClr val="lt1"/>
+          </a:fontRef>
+        </p:style>
+        <p:txBody>
+          <a:bodyPr rtlCol="0" anchor="ctr"/>
+          <a:lstStyle/>
+          <a:p>
+            <a:pPr algn="ctr"/>
+          </a:p>
+        </p:txBody>
+      </p:sp>
+      <p:sp>
+        <p:nvSpPr>
+          <p:cNvPr id="8" name="TextBox 7"/>
+          <p:cNvSpPr txBox="1"/>
+          <p:nvPr/>
+        </p:nvSpPr>
+        <p:spPr>
+          <a:xfrm>
+            <a:off x="457200" y="6583680"/>
+            <a:ext cx="3657600" cy="228600"/>
+          </a:xfrm>
+          <a:prstGeom prst="rect">
+            <a:avLst/>
+          </a:prstGeom>
+          <a:noFill/>
+        </p:spPr>
+        <p:txBody>
+          <a:bodyPr wrap="none">
+            <a:spAutoFit/>
+          </a:bodyPr>
+          <a:lstStyle/>
+          <a:p>
+            <a:pPr algn="l">
+              <a:defRPr sz="1000" b="0">
+                <a:solidFill>
+                  <a:srgbClr val="6C757D"/>
+                </a:solidFill>
+                <a:latin typeface="Microsoft YaHei"/>
+              </a:defRPr>
+            </a:pPr>
+            <a:r>
+              <a:t>smallgameagent · LLM/VLM + 规则驱动</a:t>
+            </a:r>
+          </a:p>
+        </p:txBody>
+      </p:sp>
+      <p:sp>
+        <p:nvSpPr>
+          <p:cNvPr id="9" name="TextBox 8"/>
+          <p:cNvSpPr txBox="1"/>
+          <p:nvPr/>
+        </p:nvSpPr>
+        <p:spPr>
+          <a:xfrm>
+            <a:off x="10789920" y="6583680"/>
+            <a:ext cx="914400" cy="228600"/>
+          </a:xfrm>
+          <a:prstGeom prst="rect">
+            <a:avLst/>
+          </a:prstGeom>
+          <a:noFill/>
+        </p:spPr>
+        <p:txBody>
+          <a:bodyPr wrap="none">
+            <a:spAutoFit/>
+          </a:bodyPr>
+          <a:lstStyle/>
+          <a:p>
+            <a:pPr algn="r">
+              <a:defRPr sz="1000" b="0">
+                <a:solidFill>
+                  <a:srgbClr val="6C757D"/>
+                </a:solidFill>
+                <a:latin typeface="Microsoft YaHei"/>
+              </a:defRPr>
+            </a:pPr>
+            <a:r>
+              <a:t>25/37</a:t>
+            </a:r>
+          </a:p>
+        </p:txBody>
+      </p:sp>
+    </p:spTree>
+  </p:cSld>
+  <p:clrMapOvr>
+    <a:masterClrMapping/>
+  </p:clrMapOvr>
+</p:sld>
+</file>
+
+<file path=ppt/slides/slide26.xml><?xml version="1.0" encoding="utf-8"?>
 <p:sld xmlns:a="http://schemas.openxmlformats.org/drawingml/2006/main" xmlns:p="http://schemas.openxmlformats.org/presentationml/2006/main" xmlns:r="http://schemas.openxmlformats.org/officeDocument/2006/relationships">
   <p:cSld>
     <p:spTree>
@@ -14322,7 +15118,7 @@
               </a:defRPr>
             </a:pPr>
             <a:r>
-              <a:t>24/35</a:t>
+              <a:t>26/37</a:t>
             </a:r>
           </a:p>
         </p:txBody>
@@ -14335,7 +15131,7 @@
 </p:sld>
 </file>
 
-<file path=ppt/slides/slide25.xml><?xml version="1.0" encoding="utf-8"?>
+<file path=ppt/slides/slide27.xml><?xml version="1.0" encoding="utf-8"?>
 <p:sld xmlns:a="http://schemas.openxmlformats.org/drawingml/2006/main" xmlns:p="http://schemas.openxmlformats.org/presentationml/2006/main" xmlns:r="http://schemas.openxmlformats.org/officeDocument/2006/relationships">
   <p:cSld>
     <p:spTree>
@@ -14896,7 +15692,7 @@
               </a:defRPr>
             </a:pPr>
             <a:r>
-              <a:t>25/35</a:t>
+              <a:t>27/37</a:t>
             </a:r>
           </a:p>
         </p:txBody>
@@ -14909,7 +15705,7 @@
 </p:sld>
 </file>
 
-<file path=ppt/slides/slide26.xml><?xml version="1.0" encoding="utf-8"?>
+<file path=ppt/slides/slide28.xml><?xml version="1.0" encoding="utf-8"?>
 <p:sld xmlns:a="http://schemas.openxmlformats.org/drawingml/2006/main" xmlns:p="http://schemas.openxmlformats.org/presentationml/2006/main" xmlns:r="http://schemas.openxmlformats.org/officeDocument/2006/relationships">
   <p:cSld>
     <p:spTree>
@@ -15712,7 +16508,7 @@
               </a:defRPr>
             </a:pPr>
             <a:r>
-              <a:t>26/35</a:t>
+              <a:t>28/37</a:t>
             </a:r>
           </a:p>
         </p:txBody>
@@ -15725,7 +16521,7 @@
 </p:sld>
 </file>
 
-<file path=ppt/slides/slide27.xml><?xml version="1.0" encoding="utf-8"?>
+<file path=ppt/slides/slide29.xml><?xml version="1.0" encoding="utf-8"?>
 <p:sld xmlns:a="http://schemas.openxmlformats.org/drawingml/2006/main" xmlns:p="http://schemas.openxmlformats.org/presentationml/2006/main" xmlns:r="http://schemas.openxmlformats.org/officeDocument/2006/relationships">
   <p:cSld>
     <p:spTree>
@@ -16785,717 +17581,7 @@
               </a:defRPr>
             </a:pPr>
             <a:r>
-              <a:t>27/35</a:t>
-            </a:r>
-          </a:p>
-        </p:txBody>
-      </p:sp>
-    </p:spTree>
-  </p:cSld>
-  <p:clrMapOvr>
-    <a:masterClrMapping/>
-  </p:clrMapOvr>
-</p:sld>
-</file>
-
-<file path=ppt/slides/slide28.xml><?xml version="1.0" encoding="utf-8"?>
-<p:sld xmlns:a="http://schemas.openxmlformats.org/drawingml/2006/main" xmlns:p="http://schemas.openxmlformats.org/presentationml/2006/main" xmlns:r="http://schemas.openxmlformats.org/officeDocument/2006/relationships">
-  <p:cSld>
-    <p:spTree>
-      <p:nvGrpSpPr>
-        <p:cNvPr id="1" name=""/>
-        <p:cNvGrpSpPr/>
-        <p:nvPr/>
-      </p:nvGrpSpPr>
-      <p:grpSpPr/>
-      <p:sp>
-        <p:nvSpPr>
-          <p:cNvPr id="2" name="Rectangle 1"/>
-          <p:cNvSpPr/>
-          <p:nvPr/>
-        </p:nvSpPr>
-        <p:spPr>
-          <a:xfrm>
-            <a:off x="0" y="0"/>
-            <a:ext cx="12191695" cy="6858000"/>
-          </a:xfrm>
-          <a:prstGeom prst="rect">
-            <a:avLst/>
-          </a:prstGeom>
-          <a:solidFill>
-            <a:srgbClr val="1A237E"/>
-          </a:solidFill>
-          <a:ln/>
-        </p:spPr>
-        <p:style>
-          <a:lnRef idx="1">
-            <a:schemeClr val="accent1"/>
-          </a:lnRef>
-          <a:fillRef idx="3">
-            <a:schemeClr val="accent1"/>
-          </a:fillRef>
-          <a:effectRef idx="2">
-            <a:schemeClr val="accent1"/>
-          </a:effectRef>
-          <a:fontRef idx="minor">
-            <a:schemeClr val="lt1"/>
-          </a:fontRef>
-        </p:style>
-        <p:txBody>
-          <a:bodyPr rtlCol="0" anchor="ctr"/>
-          <a:lstStyle/>
-          <a:p>
-            <a:pPr algn="ctr"/>
-          </a:p>
-        </p:txBody>
-      </p:sp>
-      <p:sp>
-        <p:nvSpPr>
-          <p:cNvPr id="3" name="Rectangle 2"/>
-          <p:cNvSpPr/>
-          <p:nvPr/>
-        </p:nvSpPr>
-        <p:spPr>
-          <a:xfrm>
-            <a:off x="6858000" y="-914400"/>
-            <a:ext cx="5943600" cy="8686800"/>
-          </a:xfrm>
-          <a:prstGeom prst="rect">
-            <a:avLst/>
-          </a:prstGeom>
-          <a:solidFill>
-            <a:srgbClr val="0096C7">
-              <a:lumMod val="80000"/>
-              <a:lumOff val="20000"/>
-            </a:srgbClr>
-          </a:solidFill>
-          <a:ln/>
-        </p:spPr>
-        <p:style>
-          <a:lnRef idx="1">
-            <a:schemeClr val="accent1"/>
-          </a:lnRef>
-          <a:fillRef idx="3">
-            <a:schemeClr val="accent1"/>
-          </a:fillRef>
-          <a:effectRef idx="2">
-            <a:schemeClr val="accent1"/>
-          </a:effectRef>
-          <a:fontRef idx="minor">
-            <a:schemeClr val="lt1"/>
-          </a:fontRef>
-        </p:style>
-        <p:txBody>
-          <a:bodyPr rtlCol="0" anchor="ctr"/>
-          <a:lstStyle/>
-          <a:p>
-            <a:pPr algn="ctr"/>
-          </a:p>
-        </p:txBody>
-      </p:sp>
-      <p:sp>
-        <p:nvSpPr>
-          <p:cNvPr id="4" name="TextBox 3"/>
-          <p:cNvSpPr txBox="1"/>
-          <p:nvPr/>
-        </p:nvSpPr>
-        <p:spPr>
-          <a:xfrm>
-            <a:off x="548640" y="1645920"/>
-            <a:ext cx="2743200" cy="1828800"/>
-          </a:xfrm>
-          <a:prstGeom prst="rect">
-            <a:avLst/>
-          </a:prstGeom>
-          <a:noFill/>
-        </p:spPr>
-        <p:txBody>
-          <a:bodyPr wrap="none">
-            <a:spAutoFit/>
-          </a:bodyPr>
-          <a:lstStyle/>
-          <a:p>
-            <a:pPr algn="l">
-              <a:defRPr sz="12000" b="1">
-                <a:solidFill>
-                  <a:srgbClr val="333DA0"/>
-                </a:solidFill>
-                <a:latin typeface="Microsoft YaHei"/>
-              </a:defRPr>
-            </a:pPr>
-            <a:r>
-              <a:t>08</a:t>
-            </a:r>
-          </a:p>
-        </p:txBody>
-      </p:sp>
-      <p:sp>
-        <p:nvSpPr>
-          <p:cNvPr id="5" name="TextBox 4"/>
-          <p:cNvSpPr txBox="1"/>
-          <p:nvPr/>
-        </p:nvSpPr>
-        <p:spPr>
-          <a:xfrm>
-            <a:off x="548640" y="2834640"/>
-            <a:ext cx="11064240" cy="1097280"/>
-          </a:xfrm>
-          <a:prstGeom prst="rect">
-            <a:avLst/>
-          </a:prstGeom>
-          <a:noFill/>
-        </p:spPr>
-        <p:txBody>
-          <a:bodyPr wrap="none">
-            <a:spAutoFit/>
-          </a:bodyPr>
-          <a:lstStyle/>
-          <a:p>
-            <a:pPr algn="l">
-              <a:defRPr sz="4400" b="1">
-                <a:solidFill>
-                  <a:srgbClr val="F3F6F9"/>
-                </a:solidFill>
-                <a:latin typeface="Microsoft YaHei"/>
-              </a:defRPr>
-            </a:pPr>
-            <a:r>
-              <a:t>训练数据管线</a:t>
-            </a:r>
-          </a:p>
-        </p:txBody>
-      </p:sp>
-      <p:sp>
-        <p:nvSpPr>
-          <p:cNvPr id="6" name="Rectangle 5"/>
-          <p:cNvSpPr/>
-          <p:nvPr/>
-        </p:nvSpPr>
-        <p:spPr>
-          <a:xfrm>
-            <a:off x="548640" y="4023360"/>
-            <a:ext cx="1828800" cy="73152"/>
-          </a:xfrm>
-          <a:prstGeom prst="rect">
-            <a:avLst/>
-          </a:prstGeom>
-          <a:solidFill>
-            <a:srgbClr val="FF6B35"/>
-          </a:solidFill>
-          <a:ln/>
-        </p:spPr>
-        <p:style>
-          <a:lnRef idx="1">
-            <a:schemeClr val="accent1"/>
-          </a:lnRef>
-          <a:fillRef idx="3">
-            <a:schemeClr val="accent1"/>
-          </a:fillRef>
-          <a:effectRef idx="2">
-            <a:schemeClr val="accent1"/>
-          </a:effectRef>
-          <a:fontRef idx="minor">
-            <a:schemeClr val="lt1"/>
-          </a:fontRef>
-        </p:style>
-        <p:txBody>
-          <a:bodyPr rtlCol="0" anchor="ctr"/>
-          <a:lstStyle/>
-          <a:p>
-            <a:pPr algn="ctr"/>
-          </a:p>
-        </p:txBody>
-      </p:sp>
-      <p:sp>
-        <p:nvSpPr>
-          <p:cNvPr id="7" name="Rectangle 6"/>
-          <p:cNvSpPr/>
-          <p:nvPr/>
-        </p:nvSpPr>
-        <p:spPr>
-          <a:xfrm>
-            <a:off x="0" y="6537960"/>
-            <a:ext cx="12191695" cy="18288"/>
-          </a:xfrm>
-          <a:prstGeom prst="rect">
-            <a:avLst/>
-          </a:prstGeom>
-          <a:solidFill>
-            <a:srgbClr val="0096C7"/>
-          </a:solidFill>
-          <a:ln/>
-        </p:spPr>
-        <p:style>
-          <a:lnRef idx="1">
-            <a:schemeClr val="accent1"/>
-          </a:lnRef>
-          <a:fillRef idx="3">
-            <a:schemeClr val="accent1"/>
-          </a:fillRef>
-          <a:effectRef idx="2">
-            <a:schemeClr val="accent1"/>
-          </a:effectRef>
-          <a:fontRef idx="minor">
-            <a:schemeClr val="lt1"/>
-          </a:fontRef>
-        </p:style>
-        <p:txBody>
-          <a:bodyPr rtlCol="0" anchor="ctr"/>
-          <a:lstStyle/>
-          <a:p>
-            <a:pPr algn="ctr"/>
-          </a:p>
-        </p:txBody>
-      </p:sp>
-      <p:sp>
-        <p:nvSpPr>
-          <p:cNvPr id="8" name="TextBox 7"/>
-          <p:cNvSpPr txBox="1"/>
-          <p:nvPr/>
-        </p:nvSpPr>
-        <p:spPr>
-          <a:xfrm>
-            <a:off x="457200" y="6583680"/>
-            <a:ext cx="3657600" cy="228600"/>
-          </a:xfrm>
-          <a:prstGeom prst="rect">
-            <a:avLst/>
-          </a:prstGeom>
-          <a:noFill/>
-        </p:spPr>
-        <p:txBody>
-          <a:bodyPr wrap="none">
-            <a:spAutoFit/>
-          </a:bodyPr>
-          <a:lstStyle/>
-          <a:p>
-            <a:pPr algn="l">
-              <a:defRPr sz="1000" b="0">
-                <a:solidFill>
-                  <a:srgbClr val="6C757D"/>
-                </a:solidFill>
-                <a:latin typeface="Microsoft YaHei"/>
-              </a:defRPr>
-            </a:pPr>
-            <a:r>
-              <a:t>smallgameagent · LLM/VLM + 规则驱动</a:t>
-            </a:r>
-          </a:p>
-        </p:txBody>
-      </p:sp>
-      <p:sp>
-        <p:nvSpPr>
-          <p:cNvPr id="9" name="TextBox 8"/>
-          <p:cNvSpPr txBox="1"/>
-          <p:nvPr/>
-        </p:nvSpPr>
-        <p:spPr>
-          <a:xfrm>
-            <a:off x="10789920" y="6583680"/>
-            <a:ext cx="914400" cy="228600"/>
-          </a:xfrm>
-          <a:prstGeom prst="rect">
-            <a:avLst/>
-          </a:prstGeom>
-          <a:noFill/>
-        </p:spPr>
-        <p:txBody>
-          <a:bodyPr wrap="none">
-            <a:spAutoFit/>
-          </a:bodyPr>
-          <a:lstStyle/>
-          <a:p>
-            <a:pPr algn="r">
-              <a:defRPr sz="1000" b="0">
-                <a:solidFill>
-                  <a:srgbClr val="6C757D"/>
-                </a:solidFill>
-                <a:latin typeface="Microsoft YaHei"/>
-              </a:defRPr>
-            </a:pPr>
-            <a:r>
-              <a:t>28/35</a:t>
-            </a:r>
-          </a:p>
-        </p:txBody>
-      </p:sp>
-    </p:spTree>
-  </p:cSld>
-  <p:clrMapOvr>
-    <a:masterClrMapping/>
-  </p:clrMapOvr>
-</p:sld>
-</file>
-
-<file path=ppt/slides/slide29.xml><?xml version="1.0" encoding="utf-8"?>
-<p:sld xmlns:a="http://schemas.openxmlformats.org/drawingml/2006/main" xmlns:p="http://schemas.openxmlformats.org/presentationml/2006/main" xmlns:r="http://schemas.openxmlformats.org/officeDocument/2006/relationships">
-  <p:cSld>
-    <p:spTree>
-      <p:nvGrpSpPr>
-        <p:cNvPr id="1" name=""/>
-        <p:cNvGrpSpPr/>
-        <p:nvPr/>
-      </p:nvGrpSpPr>
-      <p:grpSpPr/>
-      <p:sp>
-        <p:nvSpPr>
-          <p:cNvPr id="2" name="Rectangle 1"/>
-          <p:cNvSpPr/>
-          <p:nvPr/>
-        </p:nvSpPr>
-        <p:spPr>
-          <a:xfrm>
-            <a:off x="0" y="0"/>
-            <a:ext cx="12191695" cy="960120"/>
-          </a:xfrm>
-          <a:prstGeom prst="rect">
-            <a:avLst/>
-          </a:prstGeom>
-          <a:solidFill>
-            <a:srgbClr val="1A237E"/>
-          </a:solidFill>
-          <a:ln/>
-        </p:spPr>
-        <p:style>
-          <a:lnRef idx="1">
-            <a:schemeClr val="accent1"/>
-          </a:lnRef>
-          <a:fillRef idx="3">
-            <a:schemeClr val="accent1"/>
-          </a:fillRef>
-          <a:effectRef idx="2">
-            <a:schemeClr val="accent1"/>
-          </a:effectRef>
-          <a:fontRef idx="minor">
-            <a:schemeClr val="lt1"/>
-          </a:fontRef>
-        </p:style>
-        <p:txBody>
-          <a:bodyPr rtlCol="0" anchor="ctr"/>
-          <a:lstStyle/>
-          <a:p>
-            <a:pPr algn="ctr"/>
-          </a:p>
-        </p:txBody>
-      </p:sp>
-      <p:sp>
-        <p:nvSpPr>
-          <p:cNvPr id="3" name="TextBox 2"/>
-          <p:cNvSpPr txBox="1"/>
-          <p:nvPr/>
-        </p:nvSpPr>
-        <p:spPr>
-          <a:xfrm>
-            <a:off x="457200" y="228600"/>
-            <a:ext cx="11247120" cy="548640"/>
-          </a:xfrm>
-          <a:prstGeom prst="rect">
-            <a:avLst/>
-          </a:prstGeom>
-          <a:noFill/>
-        </p:spPr>
-        <p:txBody>
-          <a:bodyPr wrap="none">
-            <a:spAutoFit/>
-          </a:bodyPr>
-          <a:lstStyle/>
-          <a:p>
-            <a:pPr algn="l">
-              <a:defRPr sz="3000" b="1">
-                <a:solidFill>
-                  <a:srgbClr val="F3F6F9"/>
-                </a:solidFill>
-                <a:latin typeface="Microsoft YaHei"/>
-              </a:defRPr>
-            </a:pPr>
-            <a:r>
-              <a:t>跑过的轨迹 = 可复用的训练数据</a:t>
-            </a:r>
-          </a:p>
-        </p:txBody>
-      </p:sp>
-      <p:sp>
-        <p:nvSpPr>
-          <p:cNvPr id="4" name="Rectangle 3"/>
-          <p:cNvSpPr/>
-          <p:nvPr/>
-        </p:nvSpPr>
-        <p:spPr>
-          <a:xfrm>
-            <a:off x="0" y="960120"/>
-            <a:ext cx="164592" cy="5897880"/>
-          </a:xfrm>
-          <a:prstGeom prst="rect">
-            <a:avLst/>
-          </a:prstGeom>
-          <a:solidFill>
-            <a:srgbClr val="FF6B35"/>
-          </a:solidFill>
-          <a:ln/>
-        </p:spPr>
-        <p:style>
-          <a:lnRef idx="1">
-            <a:schemeClr val="accent1"/>
-          </a:lnRef>
-          <a:fillRef idx="3">
-            <a:schemeClr val="accent1"/>
-          </a:fillRef>
-          <a:effectRef idx="2">
-            <a:schemeClr val="accent1"/>
-          </a:effectRef>
-          <a:fontRef idx="minor">
-            <a:schemeClr val="lt1"/>
-          </a:fontRef>
-        </p:style>
-        <p:txBody>
-          <a:bodyPr rtlCol="0" anchor="ctr"/>
-          <a:lstStyle/>
-          <a:p>
-            <a:pPr algn="ctr"/>
-          </a:p>
-        </p:txBody>
-      </p:sp>
-      <p:sp>
-        <p:nvSpPr>
-          <p:cNvPr id="5" name="Rectangle 4"/>
-          <p:cNvSpPr/>
-          <p:nvPr/>
-        </p:nvSpPr>
-        <p:spPr>
-          <a:xfrm>
-            <a:off x="320040" y="1078992"/>
-            <a:ext cx="11548872" cy="5349240"/>
-          </a:xfrm>
-          <a:prstGeom prst="rect">
-            <a:avLst/>
-          </a:prstGeom>
-          <a:solidFill>
-            <a:srgbClr val="FFFFFF"/>
-          </a:solidFill>
-          <a:ln w="12700">
-            <a:solidFill>
-              <a:srgbClr val="E1E5E9"/>
-            </a:solidFill>
-          </a:ln>
-        </p:spPr>
-        <p:style>
-          <a:lnRef idx="1">
-            <a:schemeClr val="accent1"/>
-          </a:lnRef>
-          <a:fillRef idx="3">
-            <a:schemeClr val="accent1"/>
-          </a:fillRef>
-          <a:effectRef idx="2">
-            <a:schemeClr val="accent1"/>
-          </a:effectRef>
-          <a:fontRef idx="minor">
-            <a:schemeClr val="lt1"/>
-          </a:fontRef>
-        </p:style>
-        <p:txBody>
-          <a:bodyPr rtlCol="0" anchor="ctr"/>
-          <a:lstStyle/>
-          <a:p>
-            <a:pPr algn="ctr"/>
-          </a:p>
-        </p:txBody>
-      </p:sp>
-      <p:sp>
-        <p:nvSpPr>
-          <p:cNvPr id="6" name="TextBox 5"/>
-          <p:cNvSpPr txBox="1"/>
-          <p:nvPr/>
-        </p:nvSpPr>
-        <p:spPr>
-          <a:xfrm>
-            <a:off x="777240" y="1325880"/>
-            <a:ext cx="10789920" cy="5029200"/>
-          </a:xfrm>
-          <a:prstGeom prst="rect">
-            <a:avLst/>
-          </a:prstGeom>
-          <a:noFill/>
-        </p:spPr>
-        <p:txBody>
-          <a:bodyPr wrap="square">
-            <a:spAutoFit/>
-          </a:bodyPr>
-          <a:lstStyle/>
-          <a:p>
-            <a:pPr algn="l">
-              <a:spcAft>
-                <a:spcPts val="1200"/>
-              </a:spcAft>
-              <a:defRPr sz="1800" b="0">
-                <a:solidFill>
-                  <a:srgbClr val="1E2933"/>
-                </a:solidFill>
-                <a:latin typeface="Microsoft YaHei"/>
-              </a:defRPr>
-            </a:pPr>
-            <a:r>
-              <a:t>batch_runner 每步记录 state / action / keyNumbers / reason</a:t>
-            </a:r>
-          </a:p>
-          <a:p>
-            <a:pPr algn="l">
-              <a:spcAft>
-                <a:spcPts val="1200"/>
-              </a:spcAft>
-              <a:defRPr sz="1800" b="0">
-                <a:solidFill>
-                  <a:srgbClr val="1E2933"/>
-                </a:solidFill>
-                <a:latin typeface="Microsoft YaHei"/>
-              </a:defRPr>
-            </a:pPr>
-            <a:r>
-              <a:t>processed_runs_converter 从 22 个游戏的 processed-runs 生成 7 任务样本</a:t>
-            </a:r>
-          </a:p>
-          <a:p>
-            <a:pPr algn="l">
-              <a:spcAft>
-                <a:spcPts val="1200"/>
-              </a:spcAft>
-              <a:defRPr sz="1800" b="0">
-                <a:solidFill>
-                  <a:srgbClr val="1E2933"/>
-                </a:solidFill>
-                <a:latin typeface="Microsoft YaHei"/>
-              </a:defRPr>
-            </a:pPr>
-            <a:r>
-              <a:t>当前数据集：15,083 条样本，覆盖 next_probe_action / information_gain_judgment 等任务</a:t>
-            </a:r>
-          </a:p>
-          <a:p>
-            <a:pPr algn="l">
-              <a:spcAft>
-                <a:spcPts val="1200"/>
-              </a:spcAft>
-              <a:defRPr sz="1800" b="0">
-                <a:solidFill>
-                  <a:srgbClr val="1E2933"/>
-                </a:solidFill>
-                <a:latin typeface="Microsoft YaHei"/>
-              </a:defRPr>
-            </a:pPr>
-            <a:r>
-              <a:t>可直接喂给 Qwen3.5-4B/9B 与 Gemma-4-E4B 的 QLoRA 微调脚本（在 5090 服务器执行）</a:t>
-            </a:r>
-          </a:p>
-        </p:txBody>
-      </p:sp>
-      <p:sp>
-        <p:nvSpPr>
-          <p:cNvPr id="7" name="Rectangle 6"/>
-          <p:cNvSpPr/>
-          <p:nvPr/>
-        </p:nvSpPr>
-        <p:spPr>
-          <a:xfrm>
-            <a:off x="0" y="6537960"/>
-            <a:ext cx="12191695" cy="18288"/>
-          </a:xfrm>
-          <a:prstGeom prst="rect">
-            <a:avLst/>
-          </a:prstGeom>
-          <a:solidFill>
-            <a:srgbClr val="0096C7"/>
-          </a:solidFill>
-          <a:ln/>
-        </p:spPr>
-        <p:style>
-          <a:lnRef idx="1">
-            <a:schemeClr val="accent1"/>
-          </a:lnRef>
-          <a:fillRef idx="3">
-            <a:schemeClr val="accent1"/>
-          </a:fillRef>
-          <a:effectRef idx="2">
-            <a:schemeClr val="accent1"/>
-          </a:effectRef>
-          <a:fontRef idx="minor">
-            <a:schemeClr val="lt1"/>
-          </a:fontRef>
-        </p:style>
-        <p:txBody>
-          <a:bodyPr rtlCol="0" anchor="ctr"/>
-          <a:lstStyle/>
-          <a:p>
-            <a:pPr algn="ctr"/>
-          </a:p>
-        </p:txBody>
-      </p:sp>
-      <p:sp>
-        <p:nvSpPr>
-          <p:cNvPr id="8" name="TextBox 7"/>
-          <p:cNvSpPr txBox="1"/>
-          <p:nvPr/>
-        </p:nvSpPr>
-        <p:spPr>
-          <a:xfrm>
-            <a:off x="457200" y="6583680"/>
-            <a:ext cx="3657600" cy="228600"/>
-          </a:xfrm>
-          <a:prstGeom prst="rect">
-            <a:avLst/>
-          </a:prstGeom>
-          <a:noFill/>
-        </p:spPr>
-        <p:txBody>
-          <a:bodyPr wrap="none">
-            <a:spAutoFit/>
-          </a:bodyPr>
-          <a:lstStyle/>
-          <a:p>
-            <a:pPr algn="l">
-              <a:defRPr sz="1000" b="0">
-                <a:solidFill>
-                  <a:srgbClr val="6C757D"/>
-                </a:solidFill>
-                <a:latin typeface="Microsoft YaHei"/>
-              </a:defRPr>
-            </a:pPr>
-            <a:r>
-              <a:t>smallgameagent · LLM/VLM + 规则驱动</a:t>
-            </a:r>
-          </a:p>
-        </p:txBody>
-      </p:sp>
-      <p:sp>
-        <p:nvSpPr>
-          <p:cNvPr id="9" name="TextBox 8"/>
-          <p:cNvSpPr txBox="1"/>
-          <p:nvPr/>
-        </p:nvSpPr>
-        <p:spPr>
-          <a:xfrm>
-            <a:off x="10789920" y="6583680"/>
-            <a:ext cx="914400" cy="228600"/>
-          </a:xfrm>
-          <a:prstGeom prst="rect">
-            <a:avLst/>
-          </a:prstGeom>
-          <a:noFill/>
-        </p:spPr>
-        <p:txBody>
-          <a:bodyPr wrap="none">
-            <a:spAutoFit/>
-          </a:bodyPr>
-          <a:lstStyle/>
-          <a:p>
-            <a:pPr algn="r">
-              <a:defRPr sz="1000" b="0">
-                <a:solidFill>
-                  <a:srgbClr val="6C757D"/>
-                </a:solidFill>
-                <a:latin typeface="Microsoft YaHei"/>
-              </a:defRPr>
-            </a:pPr>
-            <a:r>
-              <a:t>29/35</a:t>
+              <a:t>29/37</a:t>
             </a:r>
           </a:p>
         </p:txBody>
@@ -17924,7 +18010,7 @@
               </a:defRPr>
             </a:pPr>
             <a:r>
-              <a:t>3/35</a:t>
+              <a:t>3/37</a:t>
             </a:r>
           </a:p>
         </p:txBody>
@@ -17956,7 +18042,7 @@
         <p:spPr>
           <a:xfrm>
             <a:off x="0" y="0"/>
-            <a:ext cx="12191695" cy="960120"/>
+            <a:ext cx="12191695" cy="6858000"/>
           </a:xfrm>
           <a:prstGeom prst="rect">
             <a:avLst/>
@@ -17990,56 +18076,23 @@
       </p:sp>
       <p:sp>
         <p:nvSpPr>
-          <p:cNvPr id="3" name="TextBox 2"/>
-          <p:cNvSpPr txBox="1"/>
-          <p:nvPr/>
-        </p:nvSpPr>
-        <p:spPr>
-          <a:xfrm>
-            <a:off x="457200" y="228600"/>
-            <a:ext cx="11247120" cy="548640"/>
-          </a:xfrm>
-          <a:prstGeom prst="rect">
-            <a:avLst/>
-          </a:prstGeom>
-          <a:noFill/>
-        </p:spPr>
-        <p:txBody>
-          <a:bodyPr wrap="none">
-            <a:spAutoFit/>
-          </a:bodyPr>
-          <a:lstStyle/>
-          <a:p>
-            <a:pPr algn="l">
-              <a:defRPr sz="3000" b="1">
-                <a:solidFill>
-                  <a:srgbClr val="F3F6F9"/>
-                </a:solidFill>
-                <a:latin typeface="Microsoft YaHei"/>
-              </a:defRPr>
-            </a:pPr>
-            <a:r>
-              <a:t>游戏覆盖矩阵：22 款游戏已可驱动</a:t>
-            </a:r>
-          </a:p>
-        </p:txBody>
-      </p:sp>
-      <p:sp>
-        <p:nvSpPr>
-          <p:cNvPr id="4" name="Rectangle 3"/>
+          <p:cNvPr id="3" name="Rectangle 2"/>
           <p:cNvSpPr/>
           <p:nvPr/>
         </p:nvSpPr>
         <p:spPr>
           <a:xfrm>
-            <a:off x="0" y="960120"/>
-            <a:ext cx="164592" cy="5897880"/>
-          </a:xfrm>
-          <a:prstGeom prst="rect">
-            <a:avLst/>
-          </a:prstGeom>
-          <a:solidFill>
-            <a:srgbClr val="0096C7"/>
+            <a:off x="6858000" y="-914400"/>
+            <a:ext cx="5943600" cy="8686800"/>
+          </a:xfrm>
+          <a:prstGeom prst="rect">
+            <a:avLst/>
+          </a:prstGeom>
+          <a:solidFill>
+            <a:srgbClr val="0096C7">
+              <a:lumMod val="80000"/>
+              <a:lumOff val="20000"/>
+            </a:srgbClr>
           </a:solidFill>
           <a:ln/>
         </p:spPr>
@@ -18067,26 +18120,94 @@
       </p:sp>
       <p:sp>
         <p:nvSpPr>
-          <p:cNvPr id="5" name="Rectangle 4"/>
+          <p:cNvPr id="4" name="TextBox 3"/>
+          <p:cNvSpPr txBox="1"/>
+          <p:nvPr/>
+        </p:nvSpPr>
+        <p:spPr>
+          <a:xfrm>
+            <a:off x="548640" y="1645920"/>
+            <a:ext cx="2743200" cy="1828800"/>
+          </a:xfrm>
+          <a:prstGeom prst="rect">
+            <a:avLst/>
+          </a:prstGeom>
+          <a:noFill/>
+        </p:spPr>
+        <p:txBody>
+          <a:bodyPr wrap="none">
+            <a:spAutoFit/>
+          </a:bodyPr>
+          <a:lstStyle/>
+          <a:p>
+            <a:pPr algn="l">
+              <a:defRPr sz="12000" b="1">
+                <a:solidFill>
+                  <a:srgbClr val="333DA0"/>
+                </a:solidFill>
+                <a:latin typeface="Microsoft YaHei"/>
+              </a:defRPr>
+            </a:pPr>
+            <a:r>
+              <a:t>08</a:t>
+            </a:r>
+          </a:p>
+        </p:txBody>
+      </p:sp>
+      <p:sp>
+        <p:nvSpPr>
+          <p:cNvPr id="5" name="TextBox 4"/>
+          <p:cNvSpPr txBox="1"/>
+          <p:nvPr/>
+        </p:nvSpPr>
+        <p:spPr>
+          <a:xfrm>
+            <a:off x="548640" y="2834640"/>
+            <a:ext cx="11064240" cy="1097280"/>
+          </a:xfrm>
+          <a:prstGeom prst="rect">
+            <a:avLst/>
+          </a:prstGeom>
+          <a:noFill/>
+        </p:spPr>
+        <p:txBody>
+          <a:bodyPr wrap="none">
+            <a:spAutoFit/>
+          </a:bodyPr>
+          <a:lstStyle/>
+          <a:p>
+            <a:pPr algn="l">
+              <a:defRPr sz="4400" b="1">
+                <a:solidFill>
+                  <a:srgbClr val="F3F6F9"/>
+                </a:solidFill>
+                <a:latin typeface="Microsoft YaHei"/>
+              </a:defRPr>
+            </a:pPr>
+            <a:r>
+              <a:t>训练数据管线</a:t>
+            </a:r>
+          </a:p>
+        </p:txBody>
+      </p:sp>
+      <p:sp>
+        <p:nvSpPr>
+          <p:cNvPr id="6" name="Rectangle 5"/>
           <p:cNvSpPr/>
           <p:nvPr/>
         </p:nvSpPr>
         <p:spPr>
           <a:xfrm>
-            <a:off x="320040" y="1078992"/>
-            <a:ext cx="11548872" cy="5349240"/>
-          </a:xfrm>
-          <a:prstGeom prst="rect">
-            <a:avLst/>
-          </a:prstGeom>
-          <a:solidFill>
-            <a:srgbClr val="FFFFFF"/>
-          </a:solidFill>
-          <a:ln w="12700">
-            <a:solidFill>
-              <a:srgbClr val="E1E5E9"/>
-            </a:solidFill>
-          </a:ln>
+            <a:off x="548640" y="4023360"/>
+            <a:ext cx="1828800" cy="73152"/>
+          </a:xfrm>
+          <a:prstGeom prst="rect">
+            <a:avLst/>
+          </a:prstGeom>
+          <a:solidFill>
+            <a:srgbClr val="FF6B35"/>
+          </a:solidFill>
+          <a:ln/>
         </p:spPr>
         <p:style>
           <a:lnRef idx="1">
@@ -18112,26 +18233,22 @@
       </p:sp>
       <p:sp>
         <p:nvSpPr>
-          <p:cNvPr id="6" name="Rounded Rectangle 5"/>
+          <p:cNvPr id="7" name="Rectangle 6"/>
           <p:cNvSpPr/>
           <p:nvPr/>
         </p:nvSpPr>
         <p:spPr>
           <a:xfrm>
-            <a:off x="594360" y="1371600"/>
-            <a:ext cx="11064240" cy="1920240"/>
-          </a:xfrm>
-          <a:prstGeom prst="roundRect">
-            <a:avLst/>
-          </a:prstGeom>
-          <a:solidFill>
-            <a:srgbClr val="FFFFFF"/>
-          </a:solidFill>
-          <a:ln w="25400">
-            <a:solidFill>
-              <a:srgbClr val="1A237E"/>
-            </a:solidFill>
-          </a:ln>
+            <a:off x="0" y="6537960"/>
+            <a:ext cx="12191695" cy="18288"/>
+          </a:xfrm>
+          <a:prstGeom prst="rect">
+            <a:avLst/>
+          </a:prstGeom>
+          <a:solidFill>
+            <a:srgbClr val="0096C7"/>
+          </a:solidFill>
+          <a:ln/>
         </p:spPr>
         <p:style>
           <a:lnRef idx="1">
@@ -18157,65 +18274,14 @@
       </p:sp>
       <p:sp>
         <p:nvSpPr>
-          <p:cNvPr id="7" name="Rounded Rectangle 6"/>
-          <p:cNvSpPr/>
-          <p:nvPr/>
-        </p:nvSpPr>
-        <p:spPr>
-          <a:xfrm>
-            <a:off x="777240" y="1554480"/>
-            <a:ext cx="1645920" cy="411480"/>
-          </a:xfrm>
-          <a:prstGeom prst="roundRect">
-            <a:avLst/>
-          </a:prstGeom>
-          <a:solidFill>
-            <a:srgbClr val="1A237E"/>
-          </a:solidFill>
-          <a:ln/>
-        </p:spPr>
-        <p:style>
-          <a:lnRef idx="1">
-            <a:schemeClr val="accent1"/>
-          </a:lnRef>
-          <a:fillRef idx="3">
-            <a:schemeClr val="accent1"/>
-          </a:fillRef>
-          <a:effectRef idx="2">
-            <a:schemeClr val="accent1"/>
-          </a:effectRef>
-          <a:fontRef idx="minor">
-            <a:schemeClr val="lt1"/>
-          </a:fontRef>
-        </p:style>
-        <p:txBody>
-          <a:bodyPr rtlCol="0" anchor="ctr"/>
-          <a:lstStyle/>
-          <a:p>
-            <a:pPr algn="ctr">
-              <a:defRPr sz="1300" b="1">
-                <a:solidFill>
-                  <a:srgbClr val="F3F6F9"/>
-                </a:solidFill>
-                <a:latin typeface="Microsoft YaHei"/>
-              </a:defRPr>
-            </a:pPr>
-            <a:r>
-              <a:t>A 类 joystick · 7 款</a:t>
-            </a:r>
-          </a:p>
-        </p:txBody>
-      </p:sp>
-      <p:sp>
-        <p:nvSpPr>
           <p:cNvPr id="8" name="TextBox 7"/>
           <p:cNvSpPr txBox="1"/>
           <p:nvPr/>
         </p:nvSpPr>
         <p:spPr>
           <a:xfrm>
-            <a:off x="777240" y="2057400"/>
-            <a:ext cx="10698480" cy="1097280"/>
+            <a:off x="457200" y="6583680"/>
+            <a:ext cx="3657600" cy="228600"/>
           </a:xfrm>
           <a:prstGeom prst="rect">
             <a:avLst/>
@@ -18229,125 +18295,29 @@
           <a:lstStyle/>
           <a:p>
             <a:pPr algn="l">
-              <a:defRPr sz="1400" b="0">
-                <a:solidFill>
-                  <a:srgbClr val="1E2933"/>
-                </a:solidFill>
-                <a:latin typeface="Microsoft YaHei"/>
-              </a:defRPr>
-            </a:pPr>
-            <a:r>
-              <a:t>00440 / 00461 / 00483 / 00496 / 00517 / 00522 / 00736</a:t>
-            </a:r>
-          </a:p>
-        </p:txBody>
-      </p:sp>
-      <p:sp>
-        <p:nvSpPr>
-          <p:cNvPr id="9" name="Rounded Rectangle 8"/>
-          <p:cNvSpPr/>
-          <p:nvPr/>
-        </p:nvSpPr>
-        <p:spPr>
-          <a:xfrm>
-            <a:off x="594360" y="3566160"/>
-            <a:ext cx="11064240" cy="1920240"/>
-          </a:xfrm>
-          <a:prstGeom prst="roundRect">
-            <a:avLst/>
-          </a:prstGeom>
-          <a:solidFill>
-            <a:srgbClr val="FFFFFF"/>
-          </a:solidFill>
-          <a:ln w="25400">
-            <a:solidFill>
-              <a:srgbClr val="0096C7"/>
-            </a:solidFill>
-          </a:ln>
-        </p:spPr>
-        <p:style>
-          <a:lnRef idx="1">
-            <a:schemeClr val="accent1"/>
-          </a:lnRef>
-          <a:fillRef idx="3">
-            <a:schemeClr val="accent1"/>
-          </a:fillRef>
-          <a:effectRef idx="2">
-            <a:schemeClr val="accent1"/>
-          </a:effectRef>
-          <a:fontRef idx="minor">
-            <a:schemeClr val="lt1"/>
-          </a:fontRef>
-        </p:style>
-        <p:txBody>
-          <a:bodyPr rtlCol="0" anchor="ctr"/>
-          <a:lstStyle/>
-          <a:p>
-            <a:pPr algn="ctr"/>
-          </a:p>
-        </p:txBody>
-      </p:sp>
-      <p:sp>
-        <p:nvSpPr>
-          <p:cNvPr id="10" name="Rounded Rectangle 9"/>
-          <p:cNvSpPr/>
-          <p:nvPr/>
-        </p:nvSpPr>
-        <p:spPr>
-          <a:xfrm>
-            <a:off x="777240" y="3749039"/>
-            <a:ext cx="1645920" cy="411480"/>
-          </a:xfrm>
-          <a:prstGeom prst="roundRect">
-            <a:avLst/>
-          </a:prstGeom>
-          <a:solidFill>
-            <a:srgbClr val="0096C7"/>
-          </a:solidFill>
-          <a:ln/>
-        </p:spPr>
-        <p:style>
-          <a:lnRef idx="1">
-            <a:schemeClr val="accent1"/>
-          </a:lnRef>
-          <a:fillRef idx="3">
-            <a:schemeClr val="accent1"/>
-          </a:fillRef>
-          <a:effectRef idx="2">
-            <a:schemeClr val="accent1"/>
-          </a:effectRef>
-          <a:fontRef idx="minor">
-            <a:schemeClr val="lt1"/>
-          </a:fontRef>
-        </p:style>
-        <p:txBody>
-          <a:bodyPr rtlCol="0" anchor="ctr"/>
-          <a:lstStyle/>
-          <a:p>
-            <a:pPr algn="ctr">
-              <a:defRPr sz="1300" b="1">
-                <a:solidFill>
-                  <a:srgbClr val="F3F6F9"/>
-                </a:solidFill>
-                <a:latin typeface="Microsoft YaHei"/>
-              </a:defRPr>
-            </a:pPr>
-            <a:r>
-              <a:t>B 类 tap-only · 15 款</a:t>
-            </a:r>
-          </a:p>
-        </p:txBody>
-      </p:sp>
-      <p:sp>
-        <p:nvSpPr>
-          <p:cNvPr id="11" name="TextBox 10"/>
+              <a:defRPr sz="1000" b="0">
+                <a:solidFill>
+                  <a:srgbClr val="6C757D"/>
+                </a:solidFill>
+                <a:latin typeface="Microsoft YaHei"/>
+              </a:defRPr>
+            </a:pPr>
+            <a:r>
+              <a:t>smallgameagent · LLM/VLM + 规则驱动</a:t>
+            </a:r>
+          </a:p>
+        </p:txBody>
+      </p:sp>
+      <p:sp>
+        <p:nvSpPr>
+          <p:cNvPr id="9" name="TextBox 8"/>
           <p:cNvSpPr txBox="1"/>
           <p:nvPr/>
         </p:nvSpPr>
         <p:spPr>
           <a:xfrm>
-            <a:off x="777240" y="4251960"/>
-            <a:ext cx="10698480" cy="1097280"/>
+            <a:off x="10789920" y="6583680"/>
+            <a:ext cx="914400" cy="228600"/>
           </a:xfrm>
           <a:prstGeom prst="rect">
             <a:avLst/>
@@ -18360,119 +18330,6 @@
           </a:bodyPr>
           <a:lstStyle/>
           <a:p>
-            <a:pPr algn="l">
-              <a:defRPr sz="1400" b="0">
-                <a:solidFill>
-                  <a:srgbClr val="1E2933"/>
-                </a:solidFill>
-                <a:latin typeface="Microsoft YaHei"/>
-              </a:defRPr>
-            </a:pPr>
-            <a:r>
-              <a:t>00219 / 00332 / 00342 / 00382 / 00394 / 00427 / 00434 / 00475 / 00482 / 00526 / 00532 / 00594 / 00669 / 00733 / 00742</a:t>
-            </a:r>
-          </a:p>
-        </p:txBody>
-      </p:sp>
-      <p:sp>
-        <p:nvSpPr>
-          <p:cNvPr id="12" name="Rectangle 11"/>
-          <p:cNvSpPr/>
-          <p:nvPr/>
-        </p:nvSpPr>
-        <p:spPr>
-          <a:xfrm>
-            <a:off x="0" y="6537960"/>
-            <a:ext cx="12191695" cy="18288"/>
-          </a:xfrm>
-          <a:prstGeom prst="rect">
-            <a:avLst/>
-          </a:prstGeom>
-          <a:solidFill>
-            <a:srgbClr val="0096C7"/>
-          </a:solidFill>
-          <a:ln/>
-        </p:spPr>
-        <p:style>
-          <a:lnRef idx="1">
-            <a:schemeClr val="accent1"/>
-          </a:lnRef>
-          <a:fillRef idx="3">
-            <a:schemeClr val="accent1"/>
-          </a:fillRef>
-          <a:effectRef idx="2">
-            <a:schemeClr val="accent1"/>
-          </a:effectRef>
-          <a:fontRef idx="minor">
-            <a:schemeClr val="lt1"/>
-          </a:fontRef>
-        </p:style>
-        <p:txBody>
-          <a:bodyPr rtlCol="0" anchor="ctr"/>
-          <a:lstStyle/>
-          <a:p>
-            <a:pPr algn="ctr"/>
-          </a:p>
-        </p:txBody>
-      </p:sp>
-      <p:sp>
-        <p:nvSpPr>
-          <p:cNvPr id="13" name="TextBox 12"/>
-          <p:cNvSpPr txBox="1"/>
-          <p:nvPr/>
-        </p:nvSpPr>
-        <p:spPr>
-          <a:xfrm>
-            <a:off x="457200" y="6583680"/>
-            <a:ext cx="3657600" cy="228600"/>
-          </a:xfrm>
-          <a:prstGeom prst="rect">
-            <a:avLst/>
-          </a:prstGeom>
-          <a:noFill/>
-        </p:spPr>
-        <p:txBody>
-          <a:bodyPr wrap="none">
-            <a:spAutoFit/>
-          </a:bodyPr>
-          <a:lstStyle/>
-          <a:p>
-            <a:pPr algn="l">
-              <a:defRPr sz="1000" b="0">
-                <a:solidFill>
-                  <a:srgbClr val="6C757D"/>
-                </a:solidFill>
-                <a:latin typeface="Microsoft YaHei"/>
-              </a:defRPr>
-            </a:pPr>
-            <a:r>
-              <a:t>smallgameagent · LLM/VLM + 规则驱动</a:t>
-            </a:r>
-          </a:p>
-        </p:txBody>
-      </p:sp>
-      <p:sp>
-        <p:nvSpPr>
-          <p:cNvPr id="14" name="TextBox 13"/>
-          <p:cNvSpPr txBox="1"/>
-          <p:nvPr/>
-        </p:nvSpPr>
-        <p:spPr>
-          <a:xfrm>
-            <a:off x="10789920" y="6583680"/>
-            <a:ext cx="914400" cy="228600"/>
-          </a:xfrm>
-          <a:prstGeom prst="rect">
-            <a:avLst/>
-          </a:prstGeom>
-          <a:noFill/>
-        </p:spPr>
-        <p:txBody>
-          <a:bodyPr wrap="none">
-            <a:spAutoFit/>
-          </a:bodyPr>
-          <a:lstStyle/>
-          <a:p>
             <a:pPr algn="r">
               <a:defRPr sz="1000" b="0">
                 <a:solidFill>
@@ -18482,7 +18339,7 @@
               </a:defRPr>
             </a:pPr>
             <a:r>
-              <a:t>30/35</a:t>
+              <a:t>30/37</a:t>
             </a:r>
           </a:p>
         </p:txBody>
@@ -18514,7 +18371,7 @@
         <p:spPr>
           <a:xfrm>
             <a:off x="0" y="0"/>
-            <a:ext cx="12191695" cy="6858000"/>
+            <a:ext cx="12191695" cy="960120"/>
           </a:xfrm>
           <a:prstGeom prst="rect">
             <a:avLst/>
@@ -18548,23 +18405,56 @@
       </p:sp>
       <p:sp>
         <p:nvSpPr>
-          <p:cNvPr id="3" name="Rectangle 2"/>
+          <p:cNvPr id="3" name="TextBox 2"/>
+          <p:cNvSpPr txBox="1"/>
+          <p:nvPr/>
+        </p:nvSpPr>
+        <p:spPr>
+          <a:xfrm>
+            <a:off x="457200" y="228600"/>
+            <a:ext cx="11247120" cy="548640"/>
+          </a:xfrm>
+          <a:prstGeom prst="rect">
+            <a:avLst/>
+          </a:prstGeom>
+          <a:noFill/>
+        </p:spPr>
+        <p:txBody>
+          <a:bodyPr wrap="none">
+            <a:spAutoFit/>
+          </a:bodyPr>
+          <a:lstStyle/>
+          <a:p>
+            <a:pPr algn="l">
+              <a:defRPr sz="3000" b="1">
+                <a:solidFill>
+                  <a:srgbClr val="F3F6F9"/>
+                </a:solidFill>
+                <a:latin typeface="Microsoft YaHei"/>
+              </a:defRPr>
+            </a:pPr>
+            <a:r>
+              <a:t>跑过的轨迹 = 可复用的训练数据</a:t>
+            </a:r>
+          </a:p>
+        </p:txBody>
+      </p:sp>
+      <p:sp>
+        <p:nvSpPr>
+          <p:cNvPr id="4" name="Rectangle 3"/>
           <p:cNvSpPr/>
           <p:nvPr/>
         </p:nvSpPr>
         <p:spPr>
           <a:xfrm>
-            <a:off x="6858000" y="-914400"/>
-            <a:ext cx="5943600" cy="8686800"/>
-          </a:xfrm>
-          <a:prstGeom prst="rect">
-            <a:avLst/>
-          </a:prstGeom>
-          <a:solidFill>
-            <a:srgbClr val="0096C7">
-              <a:lumMod val="80000"/>
-              <a:lumOff val="20000"/>
-            </a:srgbClr>
+            <a:off x="0" y="960120"/>
+            <a:ext cx="164592" cy="5897880"/>
+          </a:xfrm>
+          <a:prstGeom prst="rect">
+            <a:avLst/>
+          </a:prstGeom>
+          <a:solidFill>
+            <a:srgbClr val="FF6B35"/>
           </a:solidFill>
           <a:ln/>
         </p:spPr>
@@ -18592,94 +18482,26 @@
       </p:sp>
       <p:sp>
         <p:nvSpPr>
-          <p:cNvPr id="4" name="TextBox 3"/>
-          <p:cNvSpPr txBox="1"/>
-          <p:nvPr/>
-        </p:nvSpPr>
-        <p:spPr>
-          <a:xfrm>
-            <a:off x="548640" y="1645920"/>
-            <a:ext cx="2743200" cy="1828800"/>
-          </a:xfrm>
-          <a:prstGeom prst="rect">
-            <a:avLst/>
-          </a:prstGeom>
-          <a:noFill/>
-        </p:spPr>
-        <p:txBody>
-          <a:bodyPr wrap="none">
-            <a:spAutoFit/>
-          </a:bodyPr>
-          <a:lstStyle/>
-          <a:p>
-            <a:pPr algn="l">
-              <a:defRPr sz="12000" b="1">
-                <a:solidFill>
-                  <a:srgbClr val="333DA0"/>
-                </a:solidFill>
-                <a:latin typeface="Microsoft YaHei"/>
-              </a:defRPr>
-            </a:pPr>
-            <a:r>
-              <a:t>09</a:t>
-            </a:r>
-          </a:p>
-        </p:txBody>
-      </p:sp>
-      <p:sp>
-        <p:nvSpPr>
-          <p:cNvPr id="5" name="TextBox 4"/>
-          <p:cNvSpPr txBox="1"/>
-          <p:nvPr/>
-        </p:nvSpPr>
-        <p:spPr>
-          <a:xfrm>
-            <a:off x="548640" y="2834640"/>
-            <a:ext cx="11064240" cy="1097280"/>
-          </a:xfrm>
-          <a:prstGeom prst="rect">
-            <a:avLst/>
-          </a:prstGeom>
-          <a:noFill/>
-        </p:spPr>
-        <p:txBody>
-          <a:bodyPr wrap="none">
-            <a:spAutoFit/>
-          </a:bodyPr>
-          <a:lstStyle/>
-          <a:p>
-            <a:pPr algn="l">
-              <a:defRPr sz="4400" b="1">
-                <a:solidFill>
-                  <a:srgbClr val="F3F6F9"/>
-                </a:solidFill>
-                <a:latin typeface="Microsoft YaHei"/>
-              </a:defRPr>
-            </a:pPr>
-            <a:r>
-              <a:t>路线图</a:t>
-            </a:r>
-          </a:p>
-        </p:txBody>
-      </p:sp>
-      <p:sp>
-        <p:nvSpPr>
-          <p:cNvPr id="6" name="Rectangle 5"/>
+          <p:cNvPr id="5" name="Rectangle 4"/>
           <p:cNvSpPr/>
           <p:nvPr/>
         </p:nvSpPr>
         <p:spPr>
           <a:xfrm>
-            <a:off x="548640" y="4023360"/>
-            <a:ext cx="1828800" cy="73152"/>
-          </a:xfrm>
-          <a:prstGeom prst="rect">
-            <a:avLst/>
-          </a:prstGeom>
-          <a:solidFill>
-            <a:srgbClr val="FF6B35"/>
-          </a:solidFill>
-          <a:ln/>
+            <a:off x="320040" y="1078992"/>
+            <a:ext cx="11548872" cy="5349240"/>
+          </a:xfrm>
+          <a:prstGeom prst="rect">
+            <a:avLst/>
+          </a:prstGeom>
+          <a:solidFill>
+            <a:srgbClr val="FFFFFF"/>
+          </a:solidFill>
+          <a:ln w="12700">
+            <a:solidFill>
+              <a:srgbClr val="E1E5E9"/>
+            </a:solidFill>
+          </a:ln>
         </p:spPr>
         <p:style>
           <a:lnRef idx="1">
@@ -18705,6 +18527,93 @@
       </p:sp>
       <p:sp>
         <p:nvSpPr>
+          <p:cNvPr id="6" name="TextBox 5"/>
+          <p:cNvSpPr txBox="1"/>
+          <p:nvPr/>
+        </p:nvSpPr>
+        <p:spPr>
+          <a:xfrm>
+            <a:off x="777240" y="1325880"/>
+            <a:ext cx="10789920" cy="5029200"/>
+          </a:xfrm>
+          <a:prstGeom prst="rect">
+            <a:avLst/>
+          </a:prstGeom>
+          <a:noFill/>
+        </p:spPr>
+        <p:txBody>
+          <a:bodyPr wrap="square">
+            <a:spAutoFit/>
+          </a:bodyPr>
+          <a:lstStyle/>
+          <a:p>
+            <a:pPr algn="l">
+              <a:spcAft>
+                <a:spcPts val="1200"/>
+              </a:spcAft>
+              <a:defRPr sz="1800" b="0">
+                <a:solidFill>
+                  <a:srgbClr val="1E2933"/>
+                </a:solidFill>
+                <a:latin typeface="Microsoft YaHei"/>
+              </a:defRPr>
+            </a:pPr>
+            <a:r>
+              <a:t>batch_runner 每步记录 state / action / keyNumbers / reason</a:t>
+            </a:r>
+          </a:p>
+          <a:p>
+            <a:pPr algn="l">
+              <a:spcAft>
+                <a:spcPts val="1200"/>
+              </a:spcAft>
+              <a:defRPr sz="1800" b="0">
+                <a:solidFill>
+                  <a:srgbClr val="1E2933"/>
+                </a:solidFill>
+                <a:latin typeface="Microsoft YaHei"/>
+              </a:defRPr>
+            </a:pPr>
+            <a:r>
+              <a:t>processed_runs_converter 从 22 个游戏的 processed-runs 生成 7 任务样本</a:t>
+            </a:r>
+          </a:p>
+          <a:p>
+            <a:pPr algn="l">
+              <a:spcAft>
+                <a:spcPts val="1200"/>
+              </a:spcAft>
+              <a:defRPr sz="1800" b="0">
+                <a:solidFill>
+                  <a:srgbClr val="1E2933"/>
+                </a:solidFill>
+                <a:latin typeface="Microsoft YaHei"/>
+              </a:defRPr>
+            </a:pPr>
+            <a:r>
+              <a:t>当前数据集：15,083 条样本，覆盖 next_probe_action / information_gain_judgment 等任务</a:t>
+            </a:r>
+          </a:p>
+          <a:p>
+            <a:pPr algn="l">
+              <a:spcAft>
+                <a:spcPts val="1200"/>
+              </a:spcAft>
+              <a:defRPr sz="1800" b="0">
+                <a:solidFill>
+                  <a:srgbClr val="1E2933"/>
+                </a:solidFill>
+                <a:latin typeface="Microsoft YaHei"/>
+              </a:defRPr>
+            </a:pPr>
+            <a:r>
+              <a:t>可直接喂给 Qwen3.5-4B/9B 与 Gemma-4-E4B 的 QLoRA 微调脚本（在 5090 服务器执行）</a:t>
+            </a:r>
+          </a:p>
+        </p:txBody>
+      </p:sp>
+      <p:sp>
+        <p:nvSpPr>
           <p:cNvPr id="7" name="Rectangle 6"/>
           <p:cNvSpPr/>
           <p:nvPr/>
@@ -18811,7 +18720,7 @@
               </a:defRPr>
             </a:pPr>
             <a:r>
-              <a:t>31/35</a:t>
+              <a:t>31/37</a:t>
             </a:r>
           </a:p>
         </p:txBody>
@@ -18906,7 +18815,7 @@
               </a:defRPr>
             </a:pPr>
             <a:r>
-              <a:t>技术路线图：从能跑到好用</a:t>
+              <a:t>游戏覆盖矩阵：22 款游戏已可驱动</a:t>
             </a:r>
           </a:p>
         </p:txBody>
@@ -18999,22 +18908,26 @@
       </p:sp>
       <p:sp>
         <p:nvSpPr>
-          <p:cNvPr id="6" name="Rectangle 5"/>
+          <p:cNvPr id="6" name="Rounded Rectangle 5"/>
           <p:cNvSpPr/>
           <p:nvPr/>
         </p:nvSpPr>
         <p:spPr>
           <a:xfrm>
-            <a:off x="777240" y="3200400"/>
-            <a:ext cx="10972800" cy="73152"/>
-          </a:xfrm>
-          <a:prstGeom prst="rect">
-            <a:avLst/>
-          </a:prstGeom>
-          <a:solidFill>
-            <a:srgbClr val="6C757D"/>
-          </a:solidFill>
-          <a:ln/>
+            <a:off x="594360" y="1371600"/>
+            <a:ext cx="11064240" cy="1920240"/>
+          </a:xfrm>
+          <a:prstGeom prst="roundRect">
+            <a:avLst/>
+          </a:prstGeom>
+          <a:solidFill>
+            <a:srgbClr val="FFFFFF"/>
+          </a:solidFill>
+          <a:ln w="25400">
+            <a:solidFill>
+              <a:srgbClr val="1A237E"/>
+            </a:solidFill>
+          </a:ln>
         </p:spPr>
         <p:style>
           <a:lnRef idx="1">
@@ -19040,20 +18953,20 @@
       </p:sp>
       <p:sp>
         <p:nvSpPr>
-          <p:cNvPr id="7" name="Oval 6"/>
+          <p:cNvPr id="7" name="Rounded Rectangle 6"/>
           <p:cNvSpPr/>
           <p:nvPr/>
         </p:nvSpPr>
         <p:spPr>
           <a:xfrm>
-            <a:off x="822960" y="3063240"/>
-            <a:ext cx="320040" cy="320040"/>
-          </a:xfrm>
-          <a:prstGeom prst="ellipse">
-            <a:avLst/>
-          </a:prstGeom>
-          <a:solidFill>
-            <a:srgbClr val="28A745"/>
+            <a:off x="777240" y="1554480"/>
+            <a:ext cx="1645920" cy="411480"/>
+          </a:xfrm>
+          <a:prstGeom prst="roundRect">
+            <a:avLst/>
+          </a:prstGeom>
+          <a:solidFill>
+            <a:srgbClr val="1A237E"/>
           </a:solidFill>
           <a:ln/>
         </p:spPr>
@@ -19075,7 +18988,17 @@
           <a:bodyPr rtlCol="0" anchor="ctr"/>
           <a:lstStyle/>
           <a:p>
-            <a:pPr algn="ctr"/>
+            <a:pPr algn="ctr">
+              <a:defRPr sz="1300" b="1">
+                <a:solidFill>
+                  <a:srgbClr val="F3F6F9"/>
+                </a:solidFill>
+                <a:latin typeface="Microsoft YaHei"/>
+              </a:defRPr>
+            </a:pPr>
+            <a:r>
+              <a:t>A 类 joystick · 7 款</a:t>
+            </a:r>
           </a:p>
         </p:txBody>
       </p:sp>
@@ -19087,8 +19010,8 @@
         </p:nvSpPr>
         <p:spPr>
           <a:xfrm>
-            <a:off x="320040" y="2103120"/>
-            <a:ext cx="1645920" cy="457200"/>
+            <a:off x="777240" y="2057400"/>
+            <a:ext cx="10698480" cy="1097280"/>
           </a:xfrm>
           <a:prstGeom prst="rect">
             <a:avLst/>
@@ -19101,44 +19024,8 @@
           </a:bodyPr>
           <a:lstStyle/>
           <a:p>
-            <a:pPr algn="ctr">
-              <a:defRPr sz="1300" b="1">
-                <a:solidFill>
-                  <a:srgbClr val="28A745"/>
-                </a:solidFill>
-                <a:latin typeface="Microsoft YaHei"/>
-              </a:defRPr>
-            </a:pPr>
-            <a:r>
-              <a:t>已完成</a:t>
-            </a:r>
-          </a:p>
-        </p:txBody>
-      </p:sp>
-      <p:sp>
-        <p:nvSpPr>
-          <p:cNvPr id="9" name="TextBox 8"/>
-          <p:cNvSpPr txBox="1"/>
-          <p:nvPr/>
-        </p:nvSpPr>
-        <p:spPr>
-          <a:xfrm>
-            <a:off x="91439" y="3474720"/>
-            <a:ext cx="2194560" cy="1188720"/>
-          </a:xfrm>
-          <a:prstGeom prst="rect">
-            <a:avLst/>
-          </a:prstGeom>
-          <a:noFill/>
-        </p:spPr>
-        <p:txBody>
-          <a:bodyPr wrap="none">
-            <a:spAutoFit/>
-          </a:bodyPr>
-          <a:lstStyle/>
-          <a:p>
-            <a:pPr algn="ctr">
-              <a:defRPr sz="1200" b="0">
+            <a:pPr algn="l">
+              <a:defRPr sz="1400" b="0">
                 <a:solidFill>
                   <a:srgbClr val="1E2933"/>
                 </a:solidFill>
@@ -19146,33 +19033,33 @@
               </a:defRPr>
             </a:pPr>
             <a:r>
-              <a:t>规则引擎 + 自动校准</a:t>
-            </a:r>
-            <a:br/>
-            <a:r>
-              <a:t>22 游戏可驱动</a:t>
-            </a:r>
-          </a:p>
-        </p:txBody>
-      </p:sp>
-      <p:sp>
-        <p:nvSpPr>
-          <p:cNvPr id="10" name="Oval 9"/>
+              <a:t>00440 / 00461 / 00483 / 00496 / 00517 / 00522 / 00736</a:t>
+            </a:r>
+          </a:p>
+        </p:txBody>
+      </p:sp>
+      <p:sp>
+        <p:nvSpPr>
+          <p:cNvPr id="9" name="Rounded Rectangle 8"/>
           <p:cNvSpPr/>
           <p:nvPr/>
         </p:nvSpPr>
         <p:spPr>
           <a:xfrm>
-            <a:off x="3108960" y="3063240"/>
-            <a:ext cx="320040" cy="320040"/>
-          </a:xfrm>
-          <a:prstGeom prst="ellipse">
-            <a:avLst/>
-          </a:prstGeom>
-          <a:solidFill>
-            <a:srgbClr val="28A745"/>
-          </a:solidFill>
-          <a:ln/>
+            <a:off x="594360" y="3566160"/>
+            <a:ext cx="11064240" cy="1920240"/>
+          </a:xfrm>
+          <a:prstGeom prst="roundRect">
+            <a:avLst/>
+          </a:prstGeom>
+          <a:solidFill>
+            <a:srgbClr val="FFFFFF"/>
+          </a:solidFill>
+          <a:ln w="25400">
+            <a:solidFill>
+              <a:srgbClr val="0096C7"/>
+            </a:solidFill>
+          </a:ln>
         </p:spPr>
         <p:style>
           <a:lnRef idx="1">
@@ -19198,96 +19085,20 @@
       </p:sp>
       <p:sp>
         <p:nvSpPr>
-          <p:cNvPr id="11" name="TextBox 10"/>
-          <p:cNvSpPr txBox="1"/>
-          <p:nvPr/>
-        </p:nvSpPr>
-        <p:spPr>
-          <a:xfrm>
-            <a:off x="2606039" y="2103120"/>
-            <a:ext cx="1645920" cy="457200"/>
-          </a:xfrm>
-          <a:prstGeom prst="rect">
-            <a:avLst/>
-          </a:prstGeom>
-          <a:noFill/>
-        </p:spPr>
-        <p:txBody>
-          <a:bodyPr wrap="none">
-            <a:spAutoFit/>
-          </a:bodyPr>
-          <a:lstStyle/>
-          <a:p>
-            <a:pPr algn="ctr">
-              <a:defRPr sz="1300" b="1">
-                <a:solidFill>
-                  <a:srgbClr val="28A745"/>
-                </a:solidFill>
-                <a:latin typeface="Microsoft YaHei"/>
-              </a:defRPr>
-            </a:pPr>
-            <a:r>
-              <a:t>已完成</a:t>
-            </a:r>
-          </a:p>
-        </p:txBody>
-      </p:sp>
-      <p:sp>
-        <p:nvSpPr>
-          <p:cNvPr id="12" name="TextBox 11"/>
-          <p:cNvSpPr txBox="1"/>
-          <p:nvPr/>
-        </p:nvSpPr>
-        <p:spPr>
-          <a:xfrm>
-            <a:off x="2377439" y="3474720"/>
-            <a:ext cx="2194560" cy="1188720"/>
-          </a:xfrm>
-          <a:prstGeom prst="rect">
-            <a:avLst/>
-          </a:prstGeom>
-          <a:noFill/>
-        </p:spPr>
-        <p:txBody>
-          <a:bodyPr wrap="none">
-            <a:spAutoFit/>
-          </a:bodyPr>
-          <a:lstStyle/>
-          <a:p>
-            <a:pPr algn="ctr">
-              <a:defRPr sz="1200" b="0">
-                <a:solidFill>
-                  <a:srgbClr val="1E2933"/>
-                </a:solidFill>
-                <a:latin typeface="Microsoft YaHei"/>
-              </a:defRPr>
-            </a:pPr>
-            <a:r>
-              <a:t>multi-bus-memory</a:t>
-            </a:r>
-            <a:br/>
-            <a:r>
-              <a:t>记忆读回 0.300</a:t>
-            </a:r>
-          </a:p>
-        </p:txBody>
-      </p:sp>
-      <p:sp>
-        <p:nvSpPr>
-          <p:cNvPr id="13" name="Oval 12"/>
+          <p:cNvPr id="10" name="Rounded Rectangle 9"/>
           <p:cNvSpPr/>
           <p:nvPr/>
         </p:nvSpPr>
         <p:spPr>
           <a:xfrm>
-            <a:off x="5394960" y="3063240"/>
-            <a:ext cx="320040" cy="320040"/>
-          </a:xfrm>
-          <a:prstGeom prst="ellipse">
-            <a:avLst/>
-          </a:prstGeom>
-          <a:solidFill>
-            <a:srgbClr val="28A745"/>
+            <a:off x="777240" y="3749039"/>
+            <a:ext cx="1645920" cy="411480"/>
+          </a:xfrm>
+          <a:prstGeom prst="roundRect">
+            <a:avLst/>
+          </a:prstGeom>
+          <a:solidFill>
+            <a:srgbClr val="0096C7"/>
           </a:solidFill>
           <a:ln/>
         </p:spPr>
@@ -19309,20 +19120,30 @@
           <a:bodyPr rtlCol="0" anchor="ctr"/>
           <a:lstStyle/>
           <a:p>
-            <a:pPr algn="ctr"/>
-          </a:p>
-        </p:txBody>
-      </p:sp>
-      <p:sp>
-        <p:nvSpPr>
-          <p:cNvPr id="14" name="TextBox 13"/>
+            <a:pPr algn="ctr">
+              <a:defRPr sz="1300" b="1">
+                <a:solidFill>
+                  <a:srgbClr val="F3F6F9"/>
+                </a:solidFill>
+                <a:latin typeface="Microsoft YaHei"/>
+              </a:defRPr>
+            </a:pPr>
+            <a:r>
+              <a:t>B 类 tap-only · 15 款</a:t>
+            </a:r>
+          </a:p>
+        </p:txBody>
+      </p:sp>
+      <p:sp>
+        <p:nvSpPr>
+          <p:cNvPr id="11" name="TextBox 10"/>
           <p:cNvSpPr txBox="1"/>
           <p:nvPr/>
         </p:nvSpPr>
         <p:spPr>
           <a:xfrm>
-            <a:off x="4892040" y="2103120"/>
-            <a:ext cx="1645920" cy="457200"/>
+            <a:off x="777240" y="4251960"/>
+            <a:ext cx="10698480" cy="1097280"/>
           </a:xfrm>
           <a:prstGeom prst="rect">
             <a:avLst/>
@@ -19335,44 +19156,8 @@
           </a:bodyPr>
           <a:lstStyle/>
           <a:p>
-            <a:pPr algn="ctr">
-              <a:defRPr sz="1300" b="1">
-                <a:solidFill>
-                  <a:srgbClr val="28A745"/>
-                </a:solidFill>
-                <a:latin typeface="Microsoft YaHei"/>
-              </a:defRPr>
-            </a:pPr>
-            <a:r>
-              <a:t>已完成</a:t>
-            </a:r>
-          </a:p>
-        </p:txBody>
-      </p:sp>
-      <p:sp>
-        <p:nvSpPr>
-          <p:cNvPr id="15" name="TextBox 14"/>
-          <p:cNvSpPr txBox="1"/>
-          <p:nvPr/>
-        </p:nvSpPr>
-        <p:spPr>
-          <a:xfrm>
-            <a:off x="4663440" y="3474720"/>
-            <a:ext cx="2194560" cy="1188720"/>
-          </a:xfrm>
-          <a:prstGeom prst="rect">
-            <a:avLst/>
-          </a:prstGeom>
-          <a:noFill/>
-        </p:spPr>
-        <p:txBody>
-          <a:bodyPr wrap="none">
-            <a:spAutoFit/>
-          </a:bodyPr>
-          <a:lstStyle/>
-          <a:p>
-            <a:pPr algn="ctr">
-              <a:defRPr sz="1200" b="0">
+            <a:pPr algn="l">
+              <a:defRPr sz="1400" b="0">
                 <a:solidFill>
                   <a:srgbClr val="1E2933"/>
                 </a:solidFill>
@@ -19380,31 +19165,27 @@
               </a:defRPr>
             </a:pPr>
             <a:r>
-              <a:t>L2 code-file 更新</a:t>
-            </a:r>
-            <a:br/>
-            <a:r>
-              <a:t>qwen/kimi/xiaomi/opencodego 验证</a:t>
-            </a:r>
-          </a:p>
-        </p:txBody>
-      </p:sp>
-      <p:sp>
-        <p:nvSpPr>
-          <p:cNvPr id="16" name="Oval 15"/>
+              <a:t>00219 / 00332 / 00342 / 00382 / 00394 / 00427 / 00434 / 00475 / 00482 / 00526 / 00532 / 00594 / 00669 / 00733 / 00742</a:t>
+            </a:r>
+          </a:p>
+        </p:txBody>
+      </p:sp>
+      <p:sp>
+        <p:nvSpPr>
+          <p:cNvPr id="12" name="Rectangle 11"/>
           <p:cNvSpPr/>
           <p:nvPr/>
         </p:nvSpPr>
         <p:spPr>
           <a:xfrm>
-            <a:off x="7680960" y="3063240"/>
-            <a:ext cx="320040" cy="320040"/>
-          </a:xfrm>
-          <a:prstGeom prst="ellipse">
-            <a:avLst/>
-          </a:prstGeom>
-          <a:solidFill>
-            <a:srgbClr val="FF6B35"/>
+            <a:off x="0" y="6537960"/>
+            <a:ext cx="12191695" cy="18288"/>
+          </a:xfrm>
+          <a:prstGeom prst="rect">
+            <a:avLst/>
+          </a:prstGeom>
+          <a:solidFill>
+            <a:srgbClr val="0096C7"/>
           </a:solidFill>
           <a:ln/>
         </p:spPr>
@@ -19432,14 +19213,14 @@
       </p:sp>
       <p:sp>
         <p:nvSpPr>
-          <p:cNvPr id="17" name="TextBox 16"/>
+          <p:cNvPr id="13" name="TextBox 12"/>
           <p:cNvSpPr txBox="1"/>
           <p:nvPr/>
         </p:nvSpPr>
         <p:spPr>
           <a:xfrm>
-            <a:off x="7178040" y="2103120"/>
-            <a:ext cx="1645920" cy="457200"/>
+            <a:off x="457200" y="6583680"/>
+            <a:ext cx="3657600" cy="228600"/>
           </a:xfrm>
           <a:prstGeom prst="rect">
             <a:avLst/>
@@ -19452,30 +19233,30 @@
           </a:bodyPr>
           <a:lstStyle/>
           <a:p>
-            <a:pPr algn="ctr">
-              <a:defRPr sz="1300" b="1">
-                <a:solidFill>
-                  <a:srgbClr val="FF6B35"/>
-                </a:solidFill>
-                <a:latin typeface="Microsoft YaHei"/>
-              </a:defRPr>
-            </a:pPr>
-            <a:r>
-              <a:t>进行中</a:t>
-            </a:r>
-          </a:p>
-        </p:txBody>
-      </p:sp>
-      <p:sp>
-        <p:nvSpPr>
-          <p:cNvPr id="18" name="TextBox 17"/>
+            <a:pPr algn="l">
+              <a:defRPr sz="1000" b="0">
+                <a:solidFill>
+                  <a:srgbClr val="6C757D"/>
+                </a:solidFill>
+                <a:latin typeface="Microsoft YaHei"/>
+              </a:defRPr>
+            </a:pPr>
+            <a:r>
+              <a:t>smallgameagent · LLM/VLM + 规则驱动</a:t>
+            </a:r>
+          </a:p>
+        </p:txBody>
+      </p:sp>
+      <p:sp>
+        <p:nvSpPr>
+          <p:cNvPr id="14" name="TextBox 13"/>
           <p:cNvSpPr txBox="1"/>
           <p:nvPr/>
         </p:nvSpPr>
         <p:spPr>
           <a:xfrm>
-            <a:off x="6949440" y="3474720"/>
-            <a:ext cx="2194560" cy="1188720"/>
+            <a:off x="10789920" y="6583680"/>
+            <a:ext cx="914400" cy="228600"/>
           </a:xfrm>
           <a:prstGeom prst="rect">
             <a:avLst/>
@@ -19488,291 +19269,6 @@
           </a:bodyPr>
           <a:lstStyle/>
           <a:p>
-            <a:pPr algn="ctr">
-              <a:defRPr sz="1200" b="0">
-                <a:solidFill>
-                  <a:srgbClr val="1E2933"/>
-                </a:solidFill>
-                <a:latin typeface="Microsoft YaHei"/>
-              </a:defRPr>
-            </a:pPr>
-            <a:r>
-              <a:t>本地 VLM 上下文</a:t>
-            </a:r>
-            <a:br/>
-            <a:r>
-              <a:t>QLoRA 微调准备</a:t>
-            </a:r>
-          </a:p>
-        </p:txBody>
-      </p:sp>
-      <p:sp>
-        <p:nvSpPr>
-          <p:cNvPr id="19" name="Oval 18"/>
-          <p:cNvSpPr/>
-          <p:nvPr/>
-        </p:nvSpPr>
-        <p:spPr>
-          <a:xfrm>
-            <a:off x="9966960" y="3063240"/>
-            <a:ext cx="320040" cy="320040"/>
-          </a:xfrm>
-          <a:prstGeom prst="ellipse">
-            <a:avLst/>
-          </a:prstGeom>
-          <a:solidFill>
-            <a:srgbClr val="0096C7"/>
-          </a:solidFill>
-          <a:ln/>
-        </p:spPr>
-        <p:style>
-          <a:lnRef idx="1">
-            <a:schemeClr val="accent1"/>
-          </a:lnRef>
-          <a:fillRef idx="3">
-            <a:schemeClr val="accent1"/>
-          </a:fillRef>
-          <a:effectRef idx="2">
-            <a:schemeClr val="accent1"/>
-          </a:effectRef>
-          <a:fontRef idx="minor">
-            <a:schemeClr val="lt1"/>
-          </a:fontRef>
-        </p:style>
-        <p:txBody>
-          <a:bodyPr rtlCol="0" anchor="ctr"/>
-          <a:lstStyle/>
-          <a:p>
-            <a:pPr algn="ctr"/>
-          </a:p>
-        </p:txBody>
-      </p:sp>
-      <p:sp>
-        <p:nvSpPr>
-          <p:cNvPr id="20" name="TextBox 19"/>
-          <p:cNvSpPr txBox="1"/>
-          <p:nvPr/>
-        </p:nvSpPr>
-        <p:spPr>
-          <a:xfrm>
-            <a:off x="9464040" y="2103120"/>
-            <a:ext cx="1645920" cy="457200"/>
-          </a:xfrm>
-          <a:prstGeom prst="rect">
-            <a:avLst/>
-          </a:prstGeom>
-          <a:noFill/>
-        </p:spPr>
-        <p:txBody>
-          <a:bodyPr wrap="none">
-            <a:spAutoFit/>
-          </a:bodyPr>
-          <a:lstStyle/>
-          <a:p>
-            <a:pPr algn="ctr">
-              <a:defRPr sz="1300" b="1">
-                <a:solidFill>
-                  <a:srgbClr val="0096C7"/>
-                </a:solidFill>
-                <a:latin typeface="Microsoft YaHei"/>
-              </a:defRPr>
-            </a:pPr>
-            <a:r>
-              <a:t>下一步</a:t>
-            </a:r>
-          </a:p>
-        </p:txBody>
-      </p:sp>
-      <p:sp>
-        <p:nvSpPr>
-          <p:cNvPr id="21" name="TextBox 20"/>
-          <p:cNvSpPr txBox="1"/>
-          <p:nvPr/>
-        </p:nvSpPr>
-        <p:spPr>
-          <a:xfrm>
-            <a:off x="9235440" y="3474720"/>
-            <a:ext cx="2194560" cy="1188720"/>
-          </a:xfrm>
-          <a:prstGeom prst="rect">
-            <a:avLst/>
-          </a:prstGeom>
-          <a:noFill/>
-        </p:spPr>
-        <p:txBody>
-          <a:bodyPr wrap="none">
-            <a:spAutoFit/>
-          </a:bodyPr>
-          <a:lstStyle/>
-          <a:p>
-            <a:pPr algn="ctr">
-              <a:defRPr sz="1200" b="0">
-                <a:solidFill>
-                  <a:srgbClr val="1E2933"/>
-                </a:solidFill>
-                <a:latin typeface="Microsoft YaHei"/>
-              </a:defRPr>
-            </a:pPr>
-            <a:r>
-              <a:t>真实游戏在线触发</a:t>
-            </a:r>
-            <a:br/>
-            <a:r>
-              <a:t>规则更新 + A/B 回归</a:t>
-            </a:r>
-          </a:p>
-        </p:txBody>
-      </p:sp>
-      <p:sp>
-        <p:nvSpPr>
-          <p:cNvPr id="22" name="Rounded Rectangle 21"/>
-          <p:cNvSpPr/>
-          <p:nvPr/>
-        </p:nvSpPr>
-        <p:spPr>
-          <a:xfrm>
-            <a:off x="777240" y="5074920"/>
-            <a:ext cx="10972800" cy="822960"/>
-          </a:xfrm>
-          <a:prstGeom prst="roundRect">
-            <a:avLst/>
-          </a:prstGeom>
-          <a:solidFill>
-            <a:srgbClr val="F3F6F9"/>
-          </a:solidFill>
-          <a:ln/>
-        </p:spPr>
-        <p:style>
-          <a:lnRef idx="1">
-            <a:schemeClr val="accent1"/>
-          </a:lnRef>
-          <a:fillRef idx="3">
-            <a:schemeClr val="accent1"/>
-          </a:fillRef>
-          <a:effectRef idx="2">
-            <a:schemeClr val="accent1"/>
-          </a:effectRef>
-          <a:fontRef idx="minor">
-            <a:schemeClr val="lt1"/>
-          </a:fontRef>
-        </p:style>
-        <p:txBody>
-          <a:bodyPr rtlCol="0" anchor="ctr"/>
-          <a:lstStyle/>
-          <a:p>
-            <a:pPr algn="ctr">
-              <a:defRPr sz="1400" b="0">
-                <a:solidFill>
-                  <a:srgbClr val="1E2933"/>
-                </a:solidFill>
-                <a:latin typeface="Microsoft YaHei"/>
-              </a:defRPr>
-            </a:pPr>
-            <a:r>
-              <a:t>核心原则：把贵且慢的云端调用摊到多步，本地 VLM 只提供「证据」，规则引擎负责零延迟执行。</a:t>
-            </a:r>
-          </a:p>
-        </p:txBody>
-      </p:sp>
-      <p:sp>
-        <p:nvSpPr>
-          <p:cNvPr id="23" name="Rectangle 22"/>
-          <p:cNvSpPr/>
-          <p:nvPr/>
-        </p:nvSpPr>
-        <p:spPr>
-          <a:xfrm>
-            <a:off x="0" y="6537960"/>
-            <a:ext cx="12191695" cy="18288"/>
-          </a:xfrm>
-          <a:prstGeom prst="rect">
-            <a:avLst/>
-          </a:prstGeom>
-          <a:solidFill>
-            <a:srgbClr val="0096C7"/>
-          </a:solidFill>
-          <a:ln/>
-        </p:spPr>
-        <p:style>
-          <a:lnRef idx="1">
-            <a:schemeClr val="accent1"/>
-          </a:lnRef>
-          <a:fillRef idx="3">
-            <a:schemeClr val="accent1"/>
-          </a:fillRef>
-          <a:effectRef idx="2">
-            <a:schemeClr val="accent1"/>
-          </a:effectRef>
-          <a:fontRef idx="minor">
-            <a:schemeClr val="lt1"/>
-          </a:fontRef>
-        </p:style>
-        <p:txBody>
-          <a:bodyPr rtlCol="0" anchor="ctr"/>
-          <a:lstStyle/>
-          <a:p>
-            <a:pPr algn="ctr"/>
-          </a:p>
-        </p:txBody>
-      </p:sp>
-      <p:sp>
-        <p:nvSpPr>
-          <p:cNvPr id="24" name="TextBox 23"/>
-          <p:cNvSpPr txBox="1"/>
-          <p:nvPr/>
-        </p:nvSpPr>
-        <p:spPr>
-          <a:xfrm>
-            <a:off x="457200" y="6583680"/>
-            <a:ext cx="3657600" cy="228600"/>
-          </a:xfrm>
-          <a:prstGeom prst="rect">
-            <a:avLst/>
-          </a:prstGeom>
-          <a:noFill/>
-        </p:spPr>
-        <p:txBody>
-          <a:bodyPr wrap="none">
-            <a:spAutoFit/>
-          </a:bodyPr>
-          <a:lstStyle/>
-          <a:p>
-            <a:pPr algn="l">
-              <a:defRPr sz="1000" b="0">
-                <a:solidFill>
-                  <a:srgbClr val="6C757D"/>
-                </a:solidFill>
-                <a:latin typeface="Microsoft YaHei"/>
-              </a:defRPr>
-            </a:pPr>
-            <a:r>
-              <a:t>smallgameagent · LLM/VLM + 规则驱动</a:t>
-            </a:r>
-          </a:p>
-        </p:txBody>
-      </p:sp>
-      <p:sp>
-        <p:nvSpPr>
-          <p:cNvPr id="25" name="TextBox 24"/>
-          <p:cNvSpPr txBox="1"/>
-          <p:nvPr/>
-        </p:nvSpPr>
-        <p:spPr>
-          <a:xfrm>
-            <a:off x="10789920" y="6583680"/>
-            <a:ext cx="914400" cy="228600"/>
-          </a:xfrm>
-          <a:prstGeom prst="rect">
-            <a:avLst/>
-          </a:prstGeom>
-          <a:noFill/>
-        </p:spPr>
-        <p:txBody>
-          <a:bodyPr wrap="none">
-            <a:spAutoFit/>
-          </a:bodyPr>
-          <a:lstStyle/>
-          <a:p>
             <a:pPr algn="r">
               <a:defRPr sz="1000" b="0">
                 <a:solidFill>
@@ -19782,7 +19278,7 @@
               </a:defRPr>
             </a:pPr>
             <a:r>
-              <a:t>32/35</a:t>
+              <a:t>32/37</a:t>
             </a:r>
           </a:p>
         </p:txBody>
@@ -19921,7 +19417,7 @@
               </a:defRPr>
             </a:pPr>
             <a:r>
-              <a:t>10</a:t>
+              <a:t>09</a:t>
             </a:r>
           </a:p>
         </p:txBody>
@@ -19957,7 +19453,7 @@
               </a:defRPr>
             </a:pPr>
             <a:r>
-              <a:t>下一步</a:t>
+              <a:t>路线图</a:t>
             </a:r>
           </a:p>
         </p:txBody>
@@ -20111,7 +19607,7 @@
               </a:defRPr>
             </a:pPr>
             <a:r>
-              <a:t>33/35</a:t>
+              <a:t>33/37</a:t>
             </a:r>
           </a:p>
         </p:txBody>
@@ -20206,7 +19702,7 @@
               </a:defRPr>
             </a:pPr>
             <a:r>
-              <a:t>下一步：把实验变成稳定系统</a:t>
+              <a:t>技术路线图：从能跑到好用</a:t>
             </a:r>
           </a:p>
         </p:txBody>
@@ -20299,155 +19795,20 @@
       </p:sp>
       <p:sp>
         <p:nvSpPr>
-          <p:cNvPr id="6" name="TextBox 5"/>
-          <p:cNvSpPr txBox="1"/>
-          <p:nvPr/>
-        </p:nvSpPr>
-        <p:spPr>
-          <a:xfrm>
-            <a:off x="777240" y="1417320"/>
-            <a:ext cx="10972800" cy="5029200"/>
-          </a:xfrm>
-          <a:prstGeom prst="rect">
-            <a:avLst/>
-          </a:prstGeom>
-          <a:noFill/>
-        </p:spPr>
-        <p:txBody>
-          <a:bodyPr wrap="square">
-            <a:spAutoFit/>
-          </a:bodyPr>
-          <a:lstStyle/>
-          <a:p>
-            <a:pPr algn="l">
-              <a:spcAft>
-                <a:spcPts val="1200"/>
-              </a:spcAft>
-              <a:defRPr sz="1800" b="0">
-                <a:solidFill>
-                  <a:srgbClr val="1E2933"/>
-                </a:solidFill>
-                <a:latin typeface="Microsoft YaHei"/>
-              </a:defRPr>
-            </a:pPr>
-            <a:r>
-              <a:t>  在真实游戏运行中触发 code-file 更新，验证动态 stall/composite 下 L2 的决策质量</a:t>
-            </a:r>
-          </a:p>
-          <a:p>
-            <a:pPr algn="l">
-              <a:spcAft>
-                <a:spcPts val="1200"/>
-              </a:spcAft>
-              <a:defRPr sz="1800" b="0">
-                <a:solidFill>
-                  <a:srgbClr val="1E2933"/>
-                </a:solidFill>
-                <a:latin typeface="Microsoft YaHei"/>
-              </a:defRPr>
-            </a:pPr>
-            <a:r>
-              <a:t>  把 runtime_rules.json 的 schema 写进 L2 prompt，约束可改字段与取值范围</a:t>
-            </a:r>
-          </a:p>
-          <a:p>
-            <a:pPr algn="l">
-              <a:spcAft>
-                <a:spcPts val="1200"/>
-              </a:spcAft>
-              <a:defRPr sz="1800" b="0">
-                <a:solidFill>
-                  <a:srgbClr val="1E2933"/>
-                </a:solidFill>
-                <a:latin typeface="Microsoft YaHei"/>
-              </a:defRPr>
-            </a:pPr>
-            <a:r>
-              <a:t>  让本地 VLM 常驻，验证 L1 战术修正对 joystick 游戏的实际收益</a:t>
-            </a:r>
-          </a:p>
-          <a:p>
-            <a:pPr algn="l">
-              <a:spcAft>
-                <a:spcPts val="1200"/>
-              </a:spcAft>
-              <a:defRPr sz="1800" b="0">
-                <a:solidFill>
-                  <a:srgbClr val="1E2933"/>
-                </a:solidFill>
-                <a:latin typeface="Microsoft YaHei"/>
-              </a:defRPr>
-            </a:pPr>
-            <a:r>
-              <a:t>  在 5090 服务器跑 QLoRA 微调，把本地 VLM 训练成专用画面理解器</a:t>
-            </a:r>
-          </a:p>
-          <a:p>
-            <a:pPr algn="l">
-              <a:spcAft>
-                <a:spcPts val="1200"/>
-              </a:spcAft>
-              <a:defRPr sz="1800" b="0">
-                <a:solidFill>
-                  <a:srgbClr val="1E2933"/>
-                </a:solidFill>
-                <a:latin typeface="Microsoft YaHei"/>
-              </a:defRPr>
-            </a:pPr>
-            <a:r>
-              <a:t>  把离线回放接入 CI：每次规则改动自动跑 5 游戏回归</a:t>
-            </a:r>
-          </a:p>
-          <a:p>
-            <a:pPr algn="l">
-              <a:spcAft>
-                <a:spcPts val="1200"/>
-              </a:spcAft>
-              <a:defRPr sz="1800" b="0">
-                <a:solidFill>
-                  <a:srgbClr val="1E2933"/>
-                </a:solidFill>
-                <a:latin typeface="Microsoft YaHei"/>
-              </a:defRPr>
-            </a:pPr>
-            <a:r>
-              <a:t>  探索 Agent 间更严格的仲裁：Critic 对 L0/L2 冲突做最终决策</a:t>
-            </a:r>
-          </a:p>
-          <a:p>
-            <a:pPr algn="l">
-              <a:spcAft>
-                <a:spcPts val="1200"/>
-              </a:spcAft>
-              <a:defRPr sz="1800" b="0">
-                <a:solidFill>
-                  <a:srgbClr val="1E2933"/>
-                </a:solidFill>
-                <a:latin typeface="Microsoft YaHei"/>
-              </a:defRPr>
-            </a:pPr>
-            <a:r>
-              <a:t>   redesign strategy_memory 的 success 信号：结合位置变化、guide 触发、stall 减少</a:t>
-            </a:r>
-          </a:p>
-        </p:txBody>
-      </p:sp>
-      <p:sp>
-        <p:nvSpPr>
-          <p:cNvPr id="7" name="Oval 6"/>
+          <p:cNvPr id="6" name="Rectangle 5"/>
           <p:cNvSpPr/>
           <p:nvPr/>
         </p:nvSpPr>
         <p:spPr>
           <a:xfrm>
-            <a:off x="45720" y="0"/>
-            <a:ext cx="137160" cy="137160"/>
-          </a:xfrm>
-          <a:prstGeom prst="ellipse">
-            <a:avLst/>
-          </a:prstGeom>
-          <a:solidFill>
-            <a:srgbClr val="0096C7"/>
+            <a:off x="777240" y="3200400"/>
+            <a:ext cx="10972800" cy="73152"/>
+          </a:xfrm>
+          <a:prstGeom prst="rect">
+            <a:avLst/>
+          </a:prstGeom>
+          <a:solidFill>
+            <a:srgbClr val="6C757D"/>
           </a:solidFill>
           <a:ln/>
         </p:spPr>
@@ -20475,20 +19836,20 @@
       </p:sp>
       <p:sp>
         <p:nvSpPr>
-          <p:cNvPr id="8" name="Oval 7"/>
+          <p:cNvPr id="7" name="Oval 6"/>
           <p:cNvSpPr/>
           <p:nvPr/>
         </p:nvSpPr>
         <p:spPr>
           <a:xfrm>
-            <a:off x="45720" y="0"/>
-            <a:ext cx="137160" cy="137160"/>
+            <a:off x="822960" y="3063240"/>
+            <a:ext cx="320040" cy="320040"/>
           </a:xfrm>
           <a:prstGeom prst="ellipse">
             <a:avLst/>
           </a:prstGeom>
           <a:solidFill>
-            <a:srgbClr val="0096C7"/>
+            <a:srgbClr val="28A745"/>
           </a:solidFill>
           <a:ln/>
         </p:spPr>
@@ -20516,20 +19877,96 @@
       </p:sp>
       <p:sp>
         <p:nvSpPr>
-          <p:cNvPr id="9" name="Oval 8"/>
+          <p:cNvPr id="8" name="TextBox 7"/>
+          <p:cNvSpPr txBox="1"/>
+          <p:nvPr/>
+        </p:nvSpPr>
+        <p:spPr>
+          <a:xfrm>
+            <a:off x="320040" y="2103120"/>
+            <a:ext cx="1645920" cy="457200"/>
+          </a:xfrm>
+          <a:prstGeom prst="rect">
+            <a:avLst/>
+          </a:prstGeom>
+          <a:noFill/>
+        </p:spPr>
+        <p:txBody>
+          <a:bodyPr wrap="none">
+            <a:spAutoFit/>
+          </a:bodyPr>
+          <a:lstStyle/>
+          <a:p>
+            <a:pPr algn="ctr">
+              <a:defRPr sz="1300" b="1">
+                <a:solidFill>
+                  <a:srgbClr val="28A745"/>
+                </a:solidFill>
+                <a:latin typeface="Microsoft YaHei"/>
+              </a:defRPr>
+            </a:pPr>
+            <a:r>
+              <a:t>已完成</a:t>
+            </a:r>
+          </a:p>
+        </p:txBody>
+      </p:sp>
+      <p:sp>
+        <p:nvSpPr>
+          <p:cNvPr id="9" name="TextBox 8"/>
+          <p:cNvSpPr txBox="1"/>
+          <p:nvPr/>
+        </p:nvSpPr>
+        <p:spPr>
+          <a:xfrm>
+            <a:off x="91439" y="3474720"/>
+            <a:ext cx="2194560" cy="1188720"/>
+          </a:xfrm>
+          <a:prstGeom prst="rect">
+            <a:avLst/>
+          </a:prstGeom>
+          <a:noFill/>
+        </p:spPr>
+        <p:txBody>
+          <a:bodyPr wrap="none">
+            <a:spAutoFit/>
+          </a:bodyPr>
+          <a:lstStyle/>
+          <a:p>
+            <a:pPr algn="ctr">
+              <a:defRPr sz="1200" b="0">
+                <a:solidFill>
+                  <a:srgbClr val="1E2933"/>
+                </a:solidFill>
+                <a:latin typeface="Microsoft YaHei"/>
+              </a:defRPr>
+            </a:pPr>
+            <a:r>
+              <a:t>规则引擎 + 自动校准</a:t>
+            </a:r>
+            <a:br/>
+            <a:r>
+              <a:t>22 游戏可驱动</a:t>
+            </a:r>
+          </a:p>
+        </p:txBody>
+      </p:sp>
+      <p:sp>
+        <p:nvSpPr>
+          <p:cNvPr id="10" name="Oval 9"/>
           <p:cNvSpPr/>
           <p:nvPr/>
         </p:nvSpPr>
         <p:spPr>
           <a:xfrm>
-            <a:off x="45720" y="0"/>
-            <a:ext cx="137160" cy="137160"/>
+            <a:off x="3108960" y="3063240"/>
+            <a:ext cx="320040" cy="320040"/>
           </a:xfrm>
           <a:prstGeom prst="ellipse">
             <a:avLst/>
           </a:prstGeom>
           <a:solidFill>
-            <a:srgbClr val="0096C7"/>
+            <a:srgbClr val="28A745"/>
           </a:solidFill>
           <a:ln/>
         </p:spPr>
@@ -20557,20 +19994,96 @@
       </p:sp>
       <p:sp>
         <p:nvSpPr>
-          <p:cNvPr id="10" name="Oval 9"/>
+          <p:cNvPr id="11" name="TextBox 10"/>
+          <p:cNvSpPr txBox="1"/>
+          <p:nvPr/>
+        </p:nvSpPr>
+        <p:spPr>
+          <a:xfrm>
+            <a:off x="2606039" y="2103120"/>
+            <a:ext cx="1645920" cy="457200"/>
+          </a:xfrm>
+          <a:prstGeom prst="rect">
+            <a:avLst/>
+          </a:prstGeom>
+          <a:noFill/>
+        </p:spPr>
+        <p:txBody>
+          <a:bodyPr wrap="none">
+            <a:spAutoFit/>
+          </a:bodyPr>
+          <a:lstStyle/>
+          <a:p>
+            <a:pPr algn="ctr">
+              <a:defRPr sz="1300" b="1">
+                <a:solidFill>
+                  <a:srgbClr val="28A745"/>
+                </a:solidFill>
+                <a:latin typeface="Microsoft YaHei"/>
+              </a:defRPr>
+            </a:pPr>
+            <a:r>
+              <a:t>已完成</a:t>
+            </a:r>
+          </a:p>
+        </p:txBody>
+      </p:sp>
+      <p:sp>
+        <p:nvSpPr>
+          <p:cNvPr id="12" name="TextBox 11"/>
+          <p:cNvSpPr txBox="1"/>
+          <p:nvPr/>
+        </p:nvSpPr>
+        <p:spPr>
+          <a:xfrm>
+            <a:off x="2377439" y="3474720"/>
+            <a:ext cx="2194560" cy="1188720"/>
+          </a:xfrm>
+          <a:prstGeom prst="rect">
+            <a:avLst/>
+          </a:prstGeom>
+          <a:noFill/>
+        </p:spPr>
+        <p:txBody>
+          <a:bodyPr wrap="none">
+            <a:spAutoFit/>
+          </a:bodyPr>
+          <a:lstStyle/>
+          <a:p>
+            <a:pPr algn="ctr">
+              <a:defRPr sz="1200" b="0">
+                <a:solidFill>
+                  <a:srgbClr val="1E2933"/>
+                </a:solidFill>
+                <a:latin typeface="Microsoft YaHei"/>
+              </a:defRPr>
+            </a:pPr>
+            <a:r>
+              <a:t>multi-bus-memory</a:t>
+            </a:r>
+            <a:br/>
+            <a:r>
+              <a:t>记忆读回 0.300</a:t>
+            </a:r>
+          </a:p>
+        </p:txBody>
+      </p:sp>
+      <p:sp>
+        <p:nvSpPr>
+          <p:cNvPr id="13" name="Oval 12"/>
           <p:cNvSpPr/>
           <p:nvPr/>
         </p:nvSpPr>
         <p:spPr>
           <a:xfrm>
-            <a:off x="45720" y="0"/>
-            <a:ext cx="137160" cy="137160"/>
+            <a:off x="5394960" y="3063240"/>
+            <a:ext cx="320040" cy="320040"/>
           </a:xfrm>
           <a:prstGeom prst="ellipse">
             <a:avLst/>
           </a:prstGeom>
           <a:solidFill>
-            <a:srgbClr val="0096C7"/>
+            <a:srgbClr val="28A745"/>
           </a:solidFill>
           <a:ln/>
         </p:spPr>
@@ -20598,20 +20111,96 @@
       </p:sp>
       <p:sp>
         <p:nvSpPr>
-          <p:cNvPr id="11" name="Oval 10"/>
+          <p:cNvPr id="14" name="TextBox 13"/>
+          <p:cNvSpPr txBox="1"/>
+          <p:nvPr/>
+        </p:nvSpPr>
+        <p:spPr>
+          <a:xfrm>
+            <a:off x="4892040" y="2103120"/>
+            <a:ext cx="1645920" cy="457200"/>
+          </a:xfrm>
+          <a:prstGeom prst="rect">
+            <a:avLst/>
+          </a:prstGeom>
+          <a:noFill/>
+        </p:spPr>
+        <p:txBody>
+          <a:bodyPr wrap="none">
+            <a:spAutoFit/>
+          </a:bodyPr>
+          <a:lstStyle/>
+          <a:p>
+            <a:pPr algn="ctr">
+              <a:defRPr sz="1300" b="1">
+                <a:solidFill>
+                  <a:srgbClr val="28A745"/>
+                </a:solidFill>
+                <a:latin typeface="Microsoft YaHei"/>
+              </a:defRPr>
+            </a:pPr>
+            <a:r>
+              <a:t>已完成</a:t>
+            </a:r>
+          </a:p>
+        </p:txBody>
+      </p:sp>
+      <p:sp>
+        <p:nvSpPr>
+          <p:cNvPr id="15" name="TextBox 14"/>
+          <p:cNvSpPr txBox="1"/>
+          <p:nvPr/>
+        </p:nvSpPr>
+        <p:spPr>
+          <a:xfrm>
+            <a:off x="4663440" y="3474720"/>
+            <a:ext cx="2194560" cy="1188720"/>
+          </a:xfrm>
+          <a:prstGeom prst="rect">
+            <a:avLst/>
+          </a:prstGeom>
+          <a:noFill/>
+        </p:spPr>
+        <p:txBody>
+          <a:bodyPr wrap="none">
+            <a:spAutoFit/>
+          </a:bodyPr>
+          <a:lstStyle/>
+          <a:p>
+            <a:pPr algn="ctr">
+              <a:defRPr sz="1200" b="0">
+                <a:solidFill>
+                  <a:srgbClr val="1E2933"/>
+                </a:solidFill>
+                <a:latin typeface="Microsoft YaHei"/>
+              </a:defRPr>
+            </a:pPr>
+            <a:r>
+              <a:t>L2 code-file 更新</a:t>
+            </a:r>
+            <a:br/>
+            <a:r>
+              <a:t>qwen/kimi/xiaomi/opencodego 验证</a:t>
+            </a:r>
+          </a:p>
+        </p:txBody>
+      </p:sp>
+      <p:sp>
+        <p:nvSpPr>
+          <p:cNvPr id="16" name="Oval 15"/>
           <p:cNvSpPr/>
           <p:nvPr/>
         </p:nvSpPr>
         <p:spPr>
           <a:xfrm>
-            <a:off x="45720" y="0"/>
-            <a:ext cx="137160" cy="137160"/>
+            <a:off x="7680960" y="3063240"/>
+            <a:ext cx="320040" cy="320040"/>
           </a:xfrm>
           <a:prstGeom prst="ellipse">
             <a:avLst/>
           </a:prstGeom>
           <a:solidFill>
-            <a:srgbClr val="0096C7"/>
+            <a:srgbClr val="FF6B35"/>
           </a:solidFill>
           <a:ln/>
         </p:spPr>
@@ -20639,14 +20228,90 @@
       </p:sp>
       <p:sp>
         <p:nvSpPr>
-          <p:cNvPr id="12" name="Oval 11"/>
+          <p:cNvPr id="17" name="TextBox 16"/>
+          <p:cNvSpPr txBox="1"/>
+          <p:nvPr/>
+        </p:nvSpPr>
+        <p:spPr>
+          <a:xfrm>
+            <a:off x="7178040" y="2103120"/>
+            <a:ext cx="1645920" cy="457200"/>
+          </a:xfrm>
+          <a:prstGeom prst="rect">
+            <a:avLst/>
+          </a:prstGeom>
+          <a:noFill/>
+        </p:spPr>
+        <p:txBody>
+          <a:bodyPr wrap="none">
+            <a:spAutoFit/>
+          </a:bodyPr>
+          <a:lstStyle/>
+          <a:p>
+            <a:pPr algn="ctr">
+              <a:defRPr sz="1300" b="1">
+                <a:solidFill>
+                  <a:srgbClr val="FF6B35"/>
+                </a:solidFill>
+                <a:latin typeface="Microsoft YaHei"/>
+              </a:defRPr>
+            </a:pPr>
+            <a:r>
+              <a:t>进行中</a:t>
+            </a:r>
+          </a:p>
+        </p:txBody>
+      </p:sp>
+      <p:sp>
+        <p:nvSpPr>
+          <p:cNvPr id="18" name="TextBox 17"/>
+          <p:cNvSpPr txBox="1"/>
+          <p:nvPr/>
+        </p:nvSpPr>
+        <p:spPr>
+          <a:xfrm>
+            <a:off x="6949440" y="3474720"/>
+            <a:ext cx="2194560" cy="1188720"/>
+          </a:xfrm>
+          <a:prstGeom prst="rect">
+            <a:avLst/>
+          </a:prstGeom>
+          <a:noFill/>
+        </p:spPr>
+        <p:txBody>
+          <a:bodyPr wrap="none">
+            <a:spAutoFit/>
+          </a:bodyPr>
+          <a:lstStyle/>
+          <a:p>
+            <a:pPr algn="ctr">
+              <a:defRPr sz="1200" b="0">
+                <a:solidFill>
+                  <a:srgbClr val="1E2933"/>
+                </a:solidFill>
+                <a:latin typeface="Microsoft YaHei"/>
+              </a:defRPr>
+            </a:pPr>
+            <a:r>
+              <a:t>本地 VLM 上下文</a:t>
+            </a:r>
+            <a:br/>
+            <a:r>
+              <a:t>QLoRA 微调准备</a:t>
+            </a:r>
+          </a:p>
+        </p:txBody>
+      </p:sp>
+      <p:sp>
+        <p:nvSpPr>
+          <p:cNvPr id="19" name="Oval 18"/>
           <p:cNvSpPr/>
           <p:nvPr/>
         </p:nvSpPr>
         <p:spPr>
           <a:xfrm>
-            <a:off x="45720" y="0"/>
-            <a:ext cx="137160" cy="137160"/>
+            <a:off x="9966960" y="3063240"/>
+            <a:ext cx="320040" cy="320040"/>
           </a:xfrm>
           <a:prstGeom prst="ellipse">
             <a:avLst/>
@@ -20680,20 +20345,96 @@
       </p:sp>
       <p:sp>
         <p:nvSpPr>
-          <p:cNvPr id="13" name="Oval 12"/>
+          <p:cNvPr id="20" name="TextBox 19"/>
+          <p:cNvSpPr txBox="1"/>
+          <p:nvPr/>
+        </p:nvSpPr>
+        <p:spPr>
+          <a:xfrm>
+            <a:off x="9464040" y="2103120"/>
+            <a:ext cx="1645920" cy="457200"/>
+          </a:xfrm>
+          <a:prstGeom prst="rect">
+            <a:avLst/>
+          </a:prstGeom>
+          <a:noFill/>
+        </p:spPr>
+        <p:txBody>
+          <a:bodyPr wrap="none">
+            <a:spAutoFit/>
+          </a:bodyPr>
+          <a:lstStyle/>
+          <a:p>
+            <a:pPr algn="ctr">
+              <a:defRPr sz="1300" b="1">
+                <a:solidFill>
+                  <a:srgbClr val="0096C7"/>
+                </a:solidFill>
+                <a:latin typeface="Microsoft YaHei"/>
+              </a:defRPr>
+            </a:pPr>
+            <a:r>
+              <a:t>下一步</a:t>
+            </a:r>
+          </a:p>
+        </p:txBody>
+      </p:sp>
+      <p:sp>
+        <p:nvSpPr>
+          <p:cNvPr id="21" name="TextBox 20"/>
+          <p:cNvSpPr txBox="1"/>
+          <p:nvPr/>
+        </p:nvSpPr>
+        <p:spPr>
+          <a:xfrm>
+            <a:off x="9235440" y="3474720"/>
+            <a:ext cx="2194560" cy="1188720"/>
+          </a:xfrm>
+          <a:prstGeom prst="rect">
+            <a:avLst/>
+          </a:prstGeom>
+          <a:noFill/>
+        </p:spPr>
+        <p:txBody>
+          <a:bodyPr wrap="none">
+            <a:spAutoFit/>
+          </a:bodyPr>
+          <a:lstStyle/>
+          <a:p>
+            <a:pPr algn="ctr">
+              <a:defRPr sz="1200" b="0">
+                <a:solidFill>
+                  <a:srgbClr val="1E2933"/>
+                </a:solidFill>
+                <a:latin typeface="Microsoft YaHei"/>
+              </a:defRPr>
+            </a:pPr>
+            <a:r>
+              <a:t>真实游戏在线触发</a:t>
+            </a:r>
+            <a:br/>
+            <a:r>
+              <a:t>规则更新 + A/B 回归</a:t>
+            </a:r>
+          </a:p>
+        </p:txBody>
+      </p:sp>
+      <p:sp>
+        <p:nvSpPr>
+          <p:cNvPr id="22" name="Rounded Rectangle 21"/>
           <p:cNvSpPr/>
           <p:nvPr/>
         </p:nvSpPr>
         <p:spPr>
           <a:xfrm>
-            <a:off x="45720" y="0"/>
-            <a:ext cx="137160" cy="137160"/>
-          </a:xfrm>
-          <a:prstGeom prst="ellipse">
-            <a:avLst/>
-          </a:prstGeom>
-          <a:solidFill>
-            <a:srgbClr val="0096C7"/>
+            <a:off x="777240" y="5074920"/>
+            <a:ext cx="10972800" cy="822960"/>
+          </a:xfrm>
+          <a:prstGeom prst="roundRect">
+            <a:avLst/>
+          </a:prstGeom>
+          <a:solidFill>
+            <a:srgbClr val="F3F6F9"/>
           </a:solidFill>
           <a:ln/>
         </p:spPr>
@@ -20715,13 +20456,23 @@
           <a:bodyPr rtlCol="0" anchor="ctr"/>
           <a:lstStyle/>
           <a:p>
-            <a:pPr algn="ctr"/>
-          </a:p>
-        </p:txBody>
-      </p:sp>
-      <p:sp>
-        <p:nvSpPr>
-          <p:cNvPr id="14" name="Rectangle 13"/>
+            <a:pPr algn="ctr">
+              <a:defRPr sz="1400" b="0">
+                <a:solidFill>
+                  <a:srgbClr val="1E2933"/>
+                </a:solidFill>
+                <a:latin typeface="Microsoft YaHei"/>
+              </a:defRPr>
+            </a:pPr>
+            <a:r>
+              <a:t>核心原则：把贵且慢的云端调用摊到多步，本地 VLM 只提供「证据」，规则引擎负责零延迟执行。</a:t>
+            </a:r>
+          </a:p>
+        </p:txBody>
+      </p:sp>
+      <p:sp>
+        <p:nvSpPr>
+          <p:cNvPr id="23" name="Rectangle 22"/>
           <p:cNvSpPr/>
           <p:nvPr/>
         </p:nvSpPr>
@@ -20762,7 +20513,7 @@
       </p:sp>
       <p:sp>
         <p:nvSpPr>
-          <p:cNvPr id="15" name="TextBox 14"/>
+          <p:cNvPr id="24" name="TextBox 23"/>
           <p:cNvSpPr txBox="1"/>
           <p:nvPr/>
         </p:nvSpPr>
@@ -20798,7 +20549,7 @@
       </p:sp>
       <p:sp>
         <p:nvSpPr>
-          <p:cNvPr id="16" name="TextBox 15"/>
+          <p:cNvPr id="25" name="TextBox 24"/>
           <p:cNvSpPr txBox="1"/>
           <p:nvPr/>
         </p:nvSpPr>
@@ -20827,7 +20578,7 @@
               </a:defRPr>
             </a:pPr>
             <a:r>
-              <a:t>34/35</a:t>
+              <a:t>34/37</a:t>
             </a:r>
           </a:p>
         </p:txBody>
@@ -20893,22 +20644,22 @@
       </p:sp>
       <p:sp>
         <p:nvSpPr>
-          <p:cNvPr id="3" name="Oval 2"/>
+          <p:cNvPr id="3" name="Rectangle 2"/>
           <p:cNvSpPr/>
           <p:nvPr/>
         </p:nvSpPr>
         <p:spPr>
           <a:xfrm>
-            <a:off x="9144000" y="914400"/>
-            <a:ext cx="1371600" cy="1371600"/>
-          </a:xfrm>
-          <a:prstGeom prst="ellipse">
+            <a:off x="6858000" y="-914400"/>
+            <a:ext cx="5943600" cy="8686800"/>
+          </a:xfrm>
+          <a:prstGeom prst="rect">
             <a:avLst/>
           </a:prstGeom>
           <a:solidFill>
             <a:srgbClr val="0096C7">
-              <a:lumMod val="70000"/>
-              <a:lumOff val="30000"/>
+              <a:lumMod val="80000"/>
+              <a:lumOff val="20000"/>
             </a:srgbClr>
           </a:solidFill>
           <a:ln/>
@@ -20937,23 +20688,92 @@
       </p:sp>
       <p:sp>
         <p:nvSpPr>
-          <p:cNvPr id="4" name="Oval 3"/>
+          <p:cNvPr id="4" name="TextBox 3"/>
+          <p:cNvSpPr txBox="1"/>
+          <p:nvPr/>
+        </p:nvSpPr>
+        <p:spPr>
+          <a:xfrm>
+            <a:off x="548640" y="1645920"/>
+            <a:ext cx="2743200" cy="1828800"/>
+          </a:xfrm>
+          <a:prstGeom prst="rect">
+            <a:avLst/>
+          </a:prstGeom>
+          <a:noFill/>
+        </p:spPr>
+        <p:txBody>
+          <a:bodyPr wrap="none">
+            <a:spAutoFit/>
+          </a:bodyPr>
+          <a:lstStyle/>
+          <a:p>
+            <a:pPr algn="l">
+              <a:defRPr sz="12000" b="1">
+                <a:solidFill>
+                  <a:srgbClr val="333DA0"/>
+                </a:solidFill>
+                <a:latin typeface="Microsoft YaHei"/>
+              </a:defRPr>
+            </a:pPr>
+            <a:r>
+              <a:t>10</a:t>
+            </a:r>
+          </a:p>
+        </p:txBody>
+      </p:sp>
+      <p:sp>
+        <p:nvSpPr>
+          <p:cNvPr id="5" name="TextBox 4"/>
+          <p:cNvSpPr txBox="1"/>
+          <p:nvPr/>
+        </p:nvSpPr>
+        <p:spPr>
+          <a:xfrm>
+            <a:off x="548640" y="2834640"/>
+            <a:ext cx="11064240" cy="1097280"/>
+          </a:xfrm>
+          <a:prstGeom prst="rect">
+            <a:avLst/>
+          </a:prstGeom>
+          <a:noFill/>
+        </p:spPr>
+        <p:txBody>
+          <a:bodyPr wrap="none">
+            <a:spAutoFit/>
+          </a:bodyPr>
+          <a:lstStyle/>
+          <a:p>
+            <a:pPr algn="l">
+              <a:defRPr sz="4400" b="1">
+                <a:solidFill>
+                  <a:srgbClr val="F3F6F9"/>
+                </a:solidFill>
+                <a:latin typeface="Microsoft YaHei"/>
+              </a:defRPr>
+            </a:pPr>
+            <a:r>
+              <a:t>下一步</a:t>
+            </a:r>
+          </a:p>
+        </p:txBody>
+      </p:sp>
+      <p:sp>
+        <p:nvSpPr>
+          <p:cNvPr id="6" name="Rectangle 5"/>
           <p:cNvSpPr/>
           <p:nvPr/>
         </p:nvSpPr>
         <p:spPr>
           <a:xfrm>
-            <a:off x="9784080" y="1371600"/>
-            <a:ext cx="1371600" cy="1371600"/>
-          </a:xfrm>
-          <a:prstGeom prst="ellipse">
-            <a:avLst/>
-          </a:prstGeom>
-          <a:solidFill>
-            <a:srgbClr val="0096C7">
-              <a:lumMod val="70000"/>
-              <a:lumOff val="30000"/>
-            </a:srgbClr>
+            <a:off x="548640" y="4023360"/>
+            <a:ext cx="1828800" cy="73152"/>
+          </a:xfrm>
+          <a:prstGeom prst="rect">
+            <a:avLst/>
+          </a:prstGeom>
+          <a:solidFill>
+            <a:srgbClr val="FF6B35"/>
           </a:solidFill>
           <a:ln/>
         </p:spPr>
@@ -20981,23 +20801,20 @@
       </p:sp>
       <p:sp>
         <p:nvSpPr>
-          <p:cNvPr id="5" name="Oval 4"/>
+          <p:cNvPr id="7" name="Rectangle 6"/>
           <p:cNvSpPr/>
           <p:nvPr/>
         </p:nvSpPr>
         <p:spPr>
           <a:xfrm>
-            <a:off x="10424160" y="1828800"/>
-            <a:ext cx="1371600" cy="1371600"/>
-          </a:xfrm>
-          <a:prstGeom prst="ellipse">
-            <a:avLst/>
-          </a:prstGeom>
-          <a:solidFill>
-            <a:srgbClr val="0096C7">
-              <a:lumMod val="70000"/>
-              <a:lumOff val="30000"/>
-            </a:srgbClr>
+            <a:off x="0" y="6537960"/>
+            <a:ext cx="12191695" cy="18288"/>
+          </a:xfrm>
+          <a:prstGeom prst="rect">
+            <a:avLst/>
+          </a:prstGeom>
+          <a:solidFill>
+            <a:srgbClr val="0096C7"/>
           </a:solidFill>
           <a:ln/>
         </p:spPr>
@@ -21025,14 +20842,14 @@
       </p:sp>
       <p:sp>
         <p:nvSpPr>
-          <p:cNvPr id="6" name="TextBox 5"/>
+          <p:cNvPr id="8" name="TextBox 7"/>
           <p:cNvSpPr txBox="1"/>
           <p:nvPr/>
         </p:nvSpPr>
         <p:spPr>
           <a:xfrm>
-            <a:off x="457200" y="2651760"/>
-            <a:ext cx="11247120" cy="1280160"/>
+            <a:off x="457200" y="6583680"/>
+            <a:ext cx="3657600" cy="228600"/>
           </a:xfrm>
           <a:prstGeom prst="rect">
             <a:avLst/>
@@ -21045,36 +20862,90 @@
           </a:bodyPr>
           <a:lstStyle/>
           <a:p>
-            <a:pPr algn="ctr">
-              <a:defRPr sz="4800" b="1">
-                <a:solidFill>
-                  <a:srgbClr val="F3F6F9"/>
-                </a:solidFill>
-                <a:latin typeface="Microsoft YaHei"/>
-              </a:defRPr>
-            </a:pPr>
-            <a:r>
-              <a:t>谢谢，欢迎讨论</a:t>
-            </a:r>
-          </a:p>
-        </p:txBody>
-      </p:sp>
-      <p:sp>
-        <p:nvSpPr>
-          <p:cNvPr id="7" name="Rectangle 6"/>
+            <a:pPr algn="l">
+              <a:defRPr sz="1000" b="0">
+                <a:solidFill>
+                  <a:srgbClr val="6C757D"/>
+                </a:solidFill>
+                <a:latin typeface="Microsoft YaHei"/>
+              </a:defRPr>
+            </a:pPr>
+            <a:r>
+              <a:t>smallgameagent · LLM/VLM + 规则驱动</a:t>
+            </a:r>
+          </a:p>
+        </p:txBody>
+      </p:sp>
+      <p:sp>
+        <p:nvSpPr>
+          <p:cNvPr id="9" name="TextBox 8"/>
+          <p:cNvSpPr txBox="1"/>
+          <p:nvPr/>
+        </p:nvSpPr>
+        <p:spPr>
+          <a:xfrm>
+            <a:off x="10789920" y="6583680"/>
+            <a:ext cx="914400" cy="228600"/>
+          </a:xfrm>
+          <a:prstGeom prst="rect">
+            <a:avLst/>
+          </a:prstGeom>
+          <a:noFill/>
+        </p:spPr>
+        <p:txBody>
+          <a:bodyPr wrap="none">
+            <a:spAutoFit/>
+          </a:bodyPr>
+          <a:lstStyle/>
+          <a:p>
+            <a:pPr algn="r">
+              <a:defRPr sz="1000" b="0">
+                <a:solidFill>
+                  <a:srgbClr val="6C757D"/>
+                </a:solidFill>
+                <a:latin typeface="Microsoft YaHei"/>
+              </a:defRPr>
+            </a:pPr>
+            <a:r>
+              <a:t>35/37</a:t>
+            </a:r>
+          </a:p>
+        </p:txBody>
+      </p:sp>
+    </p:spTree>
+  </p:cSld>
+  <p:clrMapOvr>
+    <a:masterClrMapping/>
+  </p:clrMapOvr>
+</p:sld>
+</file>
+
+<file path=ppt/slides/slide36.xml><?xml version="1.0" encoding="utf-8"?>
+<p:sld xmlns:a="http://schemas.openxmlformats.org/drawingml/2006/main" xmlns:p="http://schemas.openxmlformats.org/presentationml/2006/main" xmlns:r="http://schemas.openxmlformats.org/officeDocument/2006/relationships">
+  <p:cSld>
+    <p:spTree>
+      <p:nvGrpSpPr>
+        <p:cNvPr id="1" name=""/>
+        <p:cNvGrpSpPr/>
+        <p:nvPr/>
+      </p:nvGrpSpPr>
+      <p:grpSpPr/>
+      <p:sp>
+        <p:nvSpPr>
+          <p:cNvPr id="2" name="Rectangle 1"/>
           <p:cNvSpPr/>
           <p:nvPr/>
         </p:nvSpPr>
         <p:spPr>
           <a:xfrm>
-            <a:off x="5184648" y="3931920"/>
-            <a:ext cx="1828800" cy="73152"/>
-          </a:xfrm>
-          <a:prstGeom prst="rect">
-            <a:avLst/>
-          </a:prstGeom>
-          <a:solidFill>
-            <a:srgbClr val="FF6B35"/>
+            <a:off x="0" y="0"/>
+            <a:ext cx="12191695" cy="960120"/>
+          </a:xfrm>
+          <a:prstGeom prst="rect">
+            <a:avLst/>
+          </a:prstGeom>
+          <a:solidFill>
+            <a:srgbClr val="1A237E"/>
           </a:solidFill>
           <a:ln/>
         </p:spPr>
@@ -21102,14 +20973,50 @@
       </p:sp>
       <p:sp>
         <p:nvSpPr>
-          <p:cNvPr id="8" name="Rectangle 7"/>
+          <p:cNvPr id="3" name="TextBox 2"/>
+          <p:cNvSpPr txBox="1"/>
+          <p:nvPr/>
+        </p:nvSpPr>
+        <p:spPr>
+          <a:xfrm>
+            <a:off x="457200" y="228600"/>
+            <a:ext cx="11247120" cy="548640"/>
+          </a:xfrm>
+          <a:prstGeom prst="rect">
+            <a:avLst/>
+          </a:prstGeom>
+          <a:noFill/>
+        </p:spPr>
+        <p:txBody>
+          <a:bodyPr wrap="none">
+            <a:spAutoFit/>
+          </a:bodyPr>
+          <a:lstStyle/>
+          <a:p>
+            <a:pPr algn="l">
+              <a:defRPr sz="3000" b="1">
+                <a:solidFill>
+                  <a:srgbClr val="F3F6F9"/>
+                </a:solidFill>
+                <a:latin typeface="Microsoft YaHei"/>
+              </a:defRPr>
+            </a:pPr>
+            <a:r>
+              <a:t>下一步：把实验变成稳定系统</a:t>
+            </a:r>
+          </a:p>
+        </p:txBody>
+      </p:sp>
+      <p:sp>
+        <p:nvSpPr>
+          <p:cNvPr id="4" name="Rectangle 3"/>
           <p:cNvSpPr/>
           <p:nvPr/>
         </p:nvSpPr>
         <p:spPr>
           <a:xfrm>
-            <a:off x="0" y="6537960"/>
-            <a:ext cx="12191695" cy="18288"/>
+            <a:off x="0" y="960120"/>
+            <a:ext cx="164592" cy="5897880"/>
           </a:xfrm>
           <a:prstGeom prst="rect">
             <a:avLst/>
@@ -21143,7 +21050,515 @@
       </p:sp>
       <p:sp>
         <p:nvSpPr>
-          <p:cNvPr id="9" name="TextBox 8"/>
+          <p:cNvPr id="5" name="Rectangle 4"/>
+          <p:cNvSpPr/>
+          <p:nvPr/>
+        </p:nvSpPr>
+        <p:spPr>
+          <a:xfrm>
+            <a:off x="320040" y="1078992"/>
+            <a:ext cx="11548872" cy="5349240"/>
+          </a:xfrm>
+          <a:prstGeom prst="rect">
+            <a:avLst/>
+          </a:prstGeom>
+          <a:solidFill>
+            <a:srgbClr val="FFFFFF"/>
+          </a:solidFill>
+          <a:ln w="12700">
+            <a:solidFill>
+              <a:srgbClr val="E1E5E9"/>
+            </a:solidFill>
+          </a:ln>
+        </p:spPr>
+        <p:style>
+          <a:lnRef idx="1">
+            <a:schemeClr val="accent1"/>
+          </a:lnRef>
+          <a:fillRef idx="3">
+            <a:schemeClr val="accent1"/>
+          </a:fillRef>
+          <a:effectRef idx="2">
+            <a:schemeClr val="accent1"/>
+          </a:effectRef>
+          <a:fontRef idx="minor">
+            <a:schemeClr val="lt1"/>
+          </a:fontRef>
+        </p:style>
+        <p:txBody>
+          <a:bodyPr rtlCol="0" anchor="ctr"/>
+          <a:lstStyle/>
+          <a:p>
+            <a:pPr algn="ctr"/>
+          </a:p>
+        </p:txBody>
+      </p:sp>
+      <p:sp>
+        <p:nvSpPr>
+          <p:cNvPr id="6" name="TextBox 5"/>
+          <p:cNvSpPr txBox="1"/>
+          <p:nvPr/>
+        </p:nvSpPr>
+        <p:spPr>
+          <a:xfrm>
+            <a:off x="777240" y="1417320"/>
+            <a:ext cx="10972800" cy="5029200"/>
+          </a:xfrm>
+          <a:prstGeom prst="rect">
+            <a:avLst/>
+          </a:prstGeom>
+          <a:noFill/>
+        </p:spPr>
+        <p:txBody>
+          <a:bodyPr wrap="square">
+            <a:spAutoFit/>
+          </a:bodyPr>
+          <a:lstStyle/>
+          <a:p>
+            <a:pPr algn="l">
+              <a:spcAft>
+                <a:spcPts val="1200"/>
+              </a:spcAft>
+              <a:defRPr sz="1800" b="0">
+                <a:solidFill>
+                  <a:srgbClr val="1E2933"/>
+                </a:solidFill>
+                <a:latin typeface="Microsoft YaHei"/>
+              </a:defRPr>
+            </a:pPr>
+            <a:r>
+              <a:t>  在真实游戏运行中触发 code-file 更新，验证动态 stall/composite 下 L2 的决策质量</a:t>
+            </a:r>
+          </a:p>
+          <a:p>
+            <a:pPr algn="l">
+              <a:spcAft>
+                <a:spcPts val="1200"/>
+              </a:spcAft>
+              <a:defRPr sz="1800" b="0">
+                <a:solidFill>
+                  <a:srgbClr val="1E2933"/>
+                </a:solidFill>
+                <a:latin typeface="Microsoft YaHei"/>
+              </a:defRPr>
+            </a:pPr>
+            <a:r>
+              <a:t>  把 runtime_rules.json 的 schema 写进 L2 prompt，约束可改字段与取值范围</a:t>
+            </a:r>
+          </a:p>
+          <a:p>
+            <a:pPr algn="l">
+              <a:spcAft>
+                <a:spcPts val="1200"/>
+              </a:spcAft>
+              <a:defRPr sz="1800" b="0">
+                <a:solidFill>
+                  <a:srgbClr val="1E2933"/>
+                </a:solidFill>
+                <a:latin typeface="Microsoft YaHei"/>
+              </a:defRPr>
+            </a:pPr>
+            <a:r>
+              <a:t>  让本地 VLM 常驻，验证 L1 战术修正对 joystick 游戏的实际收益</a:t>
+            </a:r>
+          </a:p>
+          <a:p>
+            <a:pPr algn="l">
+              <a:spcAft>
+                <a:spcPts val="1200"/>
+              </a:spcAft>
+              <a:defRPr sz="1800" b="0">
+                <a:solidFill>
+                  <a:srgbClr val="1E2933"/>
+                </a:solidFill>
+                <a:latin typeface="Microsoft YaHei"/>
+              </a:defRPr>
+            </a:pPr>
+            <a:r>
+              <a:t>  在 5090 服务器跑 QLoRA 微调，把本地 VLM 训练成专用画面理解器</a:t>
+            </a:r>
+          </a:p>
+          <a:p>
+            <a:pPr algn="l">
+              <a:spcAft>
+                <a:spcPts val="1200"/>
+              </a:spcAft>
+              <a:defRPr sz="1800" b="0">
+                <a:solidFill>
+                  <a:srgbClr val="1E2933"/>
+                </a:solidFill>
+                <a:latin typeface="Microsoft YaHei"/>
+              </a:defRPr>
+            </a:pPr>
+            <a:r>
+              <a:t>  把离线回放接入 CI：每次规则改动自动跑 5 游戏回归</a:t>
+            </a:r>
+          </a:p>
+          <a:p>
+            <a:pPr algn="l">
+              <a:spcAft>
+                <a:spcPts val="1200"/>
+              </a:spcAft>
+              <a:defRPr sz="1800" b="0">
+                <a:solidFill>
+                  <a:srgbClr val="1E2933"/>
+                </a:solidFill>
+                <a:latin typeface="Microsoft YaHei"/>
+              </a:defRPr>
+            </a:pPr>
+            <a:r>
+              <a:t>  探索 Agent 间更严格的仲裁：Critic 对 L0/L2 冲突做最终决策</a:t>
+            </a:r>
+          </a:p>
+          <a:p>
+            <a:pPr algn="l">
+              <a:spcAft>
+                <a:spcPts val="1200"/>
+              </a:spcAft>
+              <a:defRPr sz="1800" b="0">
+                <a:solidFill>
+                  <a:srgbClr val="1E2933"/>
+                </a:solidFill>
+                <a:latin typeface="Microsoft YaHei"/>
+              </a:defRPr>
+            </a:pPr>
+            <a:r>
+              <a:t>   redesign strategy_memory 的 success 信号：结合位置变化、guide 触发、stall 减少</a:t>
+            </a:r>
+          </a:p>
+        </p:txBody>
+      </p:sp>
+      <p:sp>
+        <p:nvSpPr>
+          <p:cNvPr id="7" name="Oval 6"/>
+          <p:cNvSpPr/>
+          <p:nvPr/>
+        </p:nvSpPr>
+        <p:spPr>
+          <a:xfrm>
+            <a:off x="45720" y="0"/>
+            <a:ext cx="137160" cy="137160"/>
+          </a:xfrm>
+          <a:prstGeom prst="ellipse">
+            <a:avLst/>
+          </a:prstGeom>
+          <a:solidFill>
+            <a:srgbClr val="0096C7"/>
+          </a:solidFill>
+          <a:ln/>
+        </p:spPr>
+        <p:style>
+          <a:lnRef idx="1">
+            <a:schemeClr val="accent1"/>
+          </a:lnRef>
+          <a:fillRef idx="3">
+            <a:schemeClr val="accent1"/>
+          </a:fillRef>
+          <a:effectRef idx="2">
+            <a:schemeClr val="accent1"/>
+          </a:effectRef>
+          <a:fontRef idx="minor">
+            <a:schemeClr val="lt1"/>
+          </a:fontRef>
+        </p:style>
+        <p:txBody>
+          <a:bodyPr rtlCol="0" anchor="ctr"/>
+          <a:lstStyle/>
+          <a:p>
+            <a:pPr algn="ctr"/>
+          </a:p>
+        </p:txBody>
+      </p:sp>
+      <p:sp>
+        <p:nvSpPr>
+          <p:cNvPr id="8" name="Oval 7"/>
+          <p:cNvSpPr/>
+          <p:nvPr/>
+        </p:nvSpPr>
+        <p:spPr>
+          <a:xfrm>
+            <a:off x="45720" y="0"/>
+            <a:ext cx="137160" cy="137160"/>
+          </a:xfrm>
+          <a:prstGeom prst="ellipse">
+            <a:avLst/>
+          </a:prstGeom>
+          <a:solidFill>
+            <a:srgbClr val="0096C7"/>
+          </a:solidFill>
+          <a:ln/>
+        </p:spPr>
+        <p:style>
+          <a:lnRef idx="1">
+            <a:schemeClr val="accent1"/>
+          </a:lnRef>
+          <a:fillRef idx="3">
+            <a:schemeClr val="accent1"/>
+          </a:fillRef>
+          <a:effectRef idx="2">
+            <a:schemeClr val="accent1"/>
+          </a:effectRef>
+          <a:fontRef idx="minor">
+            <a:schemeClr val="lt1"/>
+          </a:fontRef>
+        </p:style>
+        <p:txBody>
+          <a:bodyPr rtlCol="0" anchor="ctr"/>
+          <a:lstStyle/>
+          <a:p>
+            <a:pPr algn="ctr"/>
+          </a:p>
+        </p:txBody>
+      </p:sp>
+      <p:sp>
+        <p:nvSpPr>
+          <p:cNvPr id="9" name="Oval 8"/>
+          <p:cNvSpPr/>
+          <p:nvPr/>
+        </p:nvSpPr>
+        <p:spPr>
+          <a:xfrm>
+            <a:off x="45720" y="0"/>
+            <a:ext cx="137160" cy="137160"/>
+          </a:xfrm>
+          <a:prstGeom prst="ellipse">
+            <a:avLst/>
+          </a:prstGeom>
+          <a:solidFill>
+            <a:srgbClr val="0096C7"/>
+          </a:solidFill>
+          <a:ln/>
+        </p:spPr>
+        <p:style>
+          <a:lnRef idx="1">
+            <a:schemeClr val="accent1"/>
+          </a:lnRef>
+          <a:fillRef idx="3">
+            <a:schemeClr val="accent1"/>
+          </a:fillRef>
+          <a:effectRef idx="2">
+            <a:schemeClr val="accent1"/>
+          </a:effectRef>
+          <a:fontRef idx="minor">
+            <a:schemeClr val="lt1"/>
+          </a:fontRef>
+        </p:style>
+        <p:txBody>
+          <a:bodyPr rtlCol="0" anchor="ctr"/>
+          <a:lstStyle/>
+          <a:p>
+            <a:pPr algn="ctr"/>
+          </a:p>
+        </p:txBody>
+      </p:sp>
+      <p:sp>
+        <p:nvSpPr>
+          <p:cNvPr id="10" name="Oval 9"/>
+          <p:cNvSpPr/>
+          <p:nvPr/>
+        </p:nvSpPr>
+        <p:spPr>
+          <a:xfrm>
+            <a:off x="45720" y="0"/>
+            <a:ext cx="137160" cy="137160"/>
+          </a:xfrm>
+          <a:prstGeom prst="ellipse">
+            <a:avLst/>
+          </a:prstGeom>
+          <a:solidFill>
+            <a:srgbClr val="0096C7"/>
+          </a:solidFill>
+          <a:ln/>
+        </p:spPr>
+        <p:style>
+          <a:lnRef idx="1">
+            <a:schemeClr val="accent1"/>
+          </a:lnRef>
+          <a:fillRef idx="3">
+            <a:schemeClr val="accent1"/>
+          </a:fillRef>
+          <a:effectRef idx="2">
+            <a:schemeClr val="accent1"/>
+          </a:effectRef>
+          <a:fontRef idx="minor">
+            <a:schemeClr val="lt1"/>
+          </a:fontRef>
+        </p:style>
+        <p:txBody>
+          <a:bodyPr rtlCol="0" anchor="ctr"/>
+          <a:lstStyle/>
+          <a:p>
+            <a:pPr algn="ctr"/>
+          </a:p>
+        </p:txBody>
+      </p:sp>
+      <p:sp>
+        <p:nvSpPr>
+          <p:cNvPr id="11" name="Oval 10"/>
+          <p:cNvSpPr/>
+          <p:nvPr/>
+        </p:nvSpPr>
+        <p:spPr>
+          <a:xfrm>
+            <a:off x="45720" y="0"/>
+            <a:ext cx="137160" cy="137160"/>
+          </a:xfrm>
+          <a:prstGeom prst="ellipse">
+            <a:avLst/>
+          </a:prstGeom>
+          <a:solidFill>
+            <a:srgbClr val="0096C7"/>
+          </a:solidFill>
+          <a:ln/>
+        </p:spPr>
+        <p:style>
+          <a:lnRef idx="1">
+            <a:schemeClr val="accent1"/>
+          </a:lnRef>
+          <a:fillRef idx="3">
+            <a:schemeClr val="accent1"/>
+          </a:fillRef>
+          <a:effectRef idx="2">
+            <a:schemeClr val="accent1"/>
+          </a:effectRef>
+          <a:fontRef idx="minor">
+            <a:schemeClr val="lt1"/>
+          </a:fontRef>
+        </p:style>
+        <p:txBody>
+          <a:bodyPr rtlCol="0" anchor="ctr"/>
+          <a:lstStyle/>
+          <a:p>
+            <a:pPr algn="ctr"/>
+          </a:p>
+        </p:txBody>
+      </p:sp>
+      <p:sp>
+        <p:nvSpPr>
+          <p:cNvPr id="12" name="Oval 11"/>
+          <p:cNvSpPr/>
+          <p:nvPr/>
+        </p:nvSpPr>
+        <p:spPr>
+          <a:xfrm>
+            <a:off x="45720" y="0"/>
+            <a:ext cx="137160" cy="137160"/>
+          </a:xfrm>
+          <a:prstGeom prst="ellipse">
+            <a:avLst/>
+          </a:prstGeom>
+          <a:solidFill>
+            <a:srgbClr val="0096C7"/>
+          </a:solidFill>
+          <a:ln/>
+        </p:spPr>
+        <p:style>
+          <a:lnRef idx="1">
+            <a:schemeClr val="accent1"/>
+          </a:lnRef>
+          <a:fillRef idx="3">
+            <a:schemeClr val="accent1"/>
+          </a:fillRef>
+          <a:effectRef idx="2">
+            <a:schemeClr val="accent1"/>
+          </a:effectRef>
+          <a:fontRef idx="minor">
+            <a:schemeClr val="lt1"/>
+          </a:fontRef>
+        </p:style>
+        <p:txBody>
+          <a:bodyPr rtlCol="0" anchor="ctr"/>
+          <a:lstStyle/>
+          <a:p>
+            <a:pPr algn="ctr"/>
+          </a:p>
+        </p:txBody>
+      </p:sp>
+      <p:sp>
+        <p:nvSpPr>
+          <p:cNvPr id="13" name="Oval 12"/>
+          <p:cNvSpPr/>
+          <p:nvPr/>
+        </p:nvSpPr>
+        <p:spPr>
+          <a:xfrm>
+            <a:off x="45720" y="0"/>
+            <a:ext cx="137160" cy="137160"/>
+          </a:xfrm>
+          <a:prstGeom prst="ellipse">
+            <a:avLst/>
+          </a:prstGeom>
+          <a:solidFill>
+            <a:srgbClr val="0096C7"/>
+          </a:solidFill>
+          <a:ln/>
+        </p:spPr>
+        <p:style>
+          <a:lnRef idx="1">
+            <a:schemeClr val="accent1"/>
+          </a:lnRef>
+          <a:fillRef idx="3">
+            <a:schemeClr val="accent1"/>
+          </a:fillRef>
+          <a:effectRef idx="2">
+            <a:schemeClr val="accent1"/>
+          </a:effectRef>
+          <a:fontRef idx="minor">
+            <a:schemeClr val="lt1"/>
+          </a:fontRef>
+        </p:style>
+        <p:txBody>
+          <a:bodyPr rtlCol="0" anchor="ctr"/>
+          <a:lstStyle/>
+          <a:p>
+            <a:pPr algn="ctr"/>
+          </a:p>
+        </p:txBody>
+      </p:sp>
+      <p:sp>
+        <p:nvSpPr>
+          <p:cNvPr id="14" name="Rectangle 13"/>
+          <p:cNvSpPr/>
+          <p:nvPr/>
+        </p:nvSpPr>
+        <p:spPr>
+          <a:xfrm>
+            <a:off x="0" y="6537960"/>
+            <a:ext cx="12191695" cy="18288"/>
+          </a:xfrm>
+          <a:prstGeom prst="rect">
+            <a:avLst/>
+          </a:prstGeom>
+          <a:solidFill>
+            <a:srgbClr val="0096C7"/>
+          </a:solidFill>
+          <a:ln/>
+        </p:spPr>
+        <p:style>
+          <a:lnRef idx="1">
+            <a:schemeClr val="accent1"/>
+          </a:lnRef>
+          <a:fillRef idx="3">
+            <a:schemeClr val="accent1"/>
+          </a:fillRef>
+          <a:effectRef idx="2">
+            <a:schemeClr val="accent1"/>
+          </a:effectRef>
+          <a:fontRef idx="minor">
+            <a:schemeClr val="lt1"/>
+          </a:fontRef>
+        </p:style>
+        <p:txBody>
+          <a:bodyPr rtlCol="0" anchor="ctr"/>
+          <a:lstStyle/>
+          <a:p>
+            <a:pPr algn="ctr"/>
+          </a:p>
+        </p:txBody>
+      </p:sp>
+      <p:sp>
+        <p:nvSpPr>
+          <p:cNvPr id="15" name="TextBox 14"/>
           <p:cNvSpPr txBox="1"/>
           <p:nvPr/>
         </p:nvSpPr>
@@ -21179,7 +21594,7 @@
       </p:sp>
       <p:sp>
         <p:nvSpPr>
-          <p:cNvPr id="10" name="TextBox 9"/>
+          <p:cNvPr id="16" name="TextBox 15"/>
           <p:cNvSpPr txBox="1"/>
           <p:nvPr/>
         </p:nvSpPr>
@@ -21208,7 +21623,388 @@
               </a:defRPr>
             </a:pPr>
             <a:r>
-              <a:t>35/35</a:t>
+              <a:t>36/37</a:t>
+            </a:r>
+          </a:p>
+        </p:txBody>
+      </p:sp>
+    </p:spTree>
+  </p:cSld>
+  <p:clrMapOvr>
+    <a:masterClrMapping/>
+  </p:clrMapOvr>
+</p:sld>
+</file>
+
+<file path=ppt/slides/slide37.xml><?xml version="1.0" encoding="utf-8"?>
+<p:sld xmlns:a="http://schemas.openxmlformats.org/drawingml/2006/main" xmlns:p="http://schemas.openxmlformats.org/presentationml/2006/main" xmlns:r="http://schemas.openxmlformats.org/officeDocument/2006/relationships">
+  <p:cSld>
+    <p:spTree>
+      <p:nvGrpSpPr>
+        <p:cNvPr id="1" name=""/>
+        <p:cNvGrpSpPr/>
+        <p:nvPr/>
+      </p:nvGrpSpPr>
+      <p:grpSpPr/>
+      <p:sp>
+        <p:nvSpPr>
+          <p:cNvPr id="2" name="Rectangle 1"/>
+          <p:cNvSpPr/>
+          <p:nvPr/>
+        </p:nvSpPr>
+        <p:spPr>
+          <a:xfrm>
+            <a:off x="0" y="0"/>
+            <a:ext cx="12191695" cy="6858000"/>
+          </a:xfrm>
+          <a:prstGeom prst="rect">
+            <a:avLst/>
+          </a:prstGeom>
+          <a:solidFill>
+            <a:srgbClr val="1A237E"/>
+          </a:solidFill>
+          <a:ln/>
+        </p:spPr>
+        <p:style>
+          <a:lnRef idx="1">
+            <a:schemeClr val="accent1"/>
+          </a:lnRef>
+          <a:fillRef idx="3">
+            <a:schemeClr val="accent1"/>
+          </a:fillRef>
+          <a:effectRef idx="2">
+            <a:schemeClr val="accent1"/>
+          </a:effectRef>
+          <a:fontRef idx="minor">
+            <a:schemeClr val="lt1"/>
+          </a:fontRef>
+        </p:style>
+        <p:txBody>
+          <a:bodyPr rtlCol="0" anchor="ctr"/>
+          <a:lstStyle/>
+          <a:p>
+            <a:pPr algn="ctr"/>
+          </a:p>
+        </p:txBody>
+      </p:sp>
+      <p:sp>
+        <p:nvSpPr>
+          <p:cNvPr id="3" name="Oval 2"/>
+          <p:cNvSpPr/>
+          <p:nvPr/>
+        </p:nvSpPr>
+        <p:spPr>
+          <a:xfrm>
+            <a:off x="9144000" y="914400"/>
+            <a:ext cx="1371600" cy="1371600"/>
+          </a:xfrm>
+          <a:prstGeom prst="ellipse">
+            <a:avLst/>
+          </a:prstGeom>
+          <a:solidFill>
+            <a:srgbClr val="0096C7">
+              <a:lumMod val="70000"/>
+              <a:lumOff val="30000"/>
+            </a:srgbClr>
+          </a:solidFill>
+          <a:ln/>
+        </p:spPr>
+        <p:style>
+          <a:lnRef idx="1">
+            <a:schemeClr val="accent1"/>
+          </a:lnRef>
+          <a:fillRef idx="3">
+            <a:schemeClr val="accent1"/>
+          </a:fillRef>
+          <a:effectRef idx="2">
+            <a:schemeClr val="accent1"/>
+          </a:effectRef>
+          <a:fontRef idx="minor">
+            <a:schemeClr val="lt1"/>
+          </a:fontRef>
+        </p:style>
+        <p:txBody>
+          <a:bodyPr rtlCol="0" anchor="ctr"/>
+          <a:lstStyle/>
+          <a:p>
+            <a:pPr algn="ctr"/>
+          </a:p>
+        </p:txBody>
+      </p:sp>
+      <p:sp>
+        <p:nvSpPr>
+          <p:cNvPr id="4" name="Oval 3"/>
+          <p:cNvSpPr/>
+          <p:nvPr/>
+        </p:nvSpPr>
+        <p:spPr>
+          <a:xfrm>
+            <a:off x="9784080" y="1371600"/>
+            <a:ext cx="1371600" cy="1371600"/>
+          </a:xfrm>
+          <a:prstGeom prst="ellipse">
+            <a:avLst/>
+          </a:prstGeom>
+          <a:solidFill>
+            <a:srgbClr val="0096C7">
+              <a:lumMod val="70000"/>
+              <a:lumOff val="30000"/>
+            </a:srgbClr>
+          </a:solidFill>
+          <a:ln/>
+        </p:spPr>
+        <p:style>
+          <a:lnRef idx="1">
+            <a:schemeClr val="accent1"/>
+          </a:lnRef>
+          <a:fillRef idx="3">
+            <a:schemeClr val="accent1"/>
+          </a:fillRef>
+          <a:effectRef idx="2">
+            <a:schemeClr val="accent1"/>
+          </a:effectRef>
+          <a:fontRef idx="minor">
+            <a:schemeClr val="lt1"/>
+          </a:fontRef>
+        </p:style>
+        <p:txBody>
+          <a:bodyPr rtlCol="0" anchor="ctr"/>
+          <a:lstStyle/>
+          <a:p>
+            <a:pPr algn="ctr"/>
+          </a:p>
+        </p:txBody>
+      </p:sp>
+      <p:sp>
+        <p:nvSpPr>
+          <p:cNvPr id="5" name="Oval 4"/>
+          <p:cNvSpPr/>
+          <p:nvPr/>
+        </p:nvSpPr>
+        <p:spPr>
+          <a:xfrm>
+            <a:off x="10424160" y="1828800"/>
+            <a:ext cx="1371600" cy="1371600"/>
+          </a:xfrm>
+          <a:prstGeom prst="ellipse">
+            <a:avLst/>
+          </a:prstGeom>
+          <a:solidFill>
+            <a:srgbClr val="0096C7">
+              <a:lumMod val="70000"/>
+              <a:lumOff val="30000"/>
+            </a:srgbClr>
+          </a:solidFill>
+          <a:ln/>
+        </p:spPr>
+        <p:style>
+          <a:lnRef idx="1">
+            <a:schemeClr val="accent1"/>
+          </a:lnRef>
+          <a:fillRef idx="3">
+            <a:schemeClr val="accent1"/>
+          </a:fillRef>
+          <a:effectRef idx="2">
+            <a:schemeClr val="accent1"/>
+          </a:effectRef>
+          <a:fontRef idx="minor">
+            <a:schemeClr val="lt1"/>
+          </a:fontRef>
+        </p:style>
+        <p:txBody>
+          <a:bodyPr rtlCol="0" anchor="ctr"/>
+          <a:lstStyle/>
+          <a:p>
+            <a:pPr algn="ctr"/>
+          </a:p>
+        </p:txBody>
+      </p:sp>
+      <p:sp>
+        <p:nvSpPr>
+          <p:cNvPr id="6" name="TextBox 5"/>
+          <p:cNvSpPr txBox="1"/>
+          <p:nvPr/>
+        </p:nvSpPr>
+        <p:spPr>
+          <a:xfrm>
+            <a:off x="457200" y="2651760"/>
+            <a:ext cx="11247120" cy="1280160"/>
+          </a:xfrm>
+          <a:prstGeom prst="rect">
+            <a:avLst/>
+          </a:prstGeom>
+          <a:noFill/>
+        </p:spPr>
+        <p:txBody>
+          <a:bodyPr wrap="none">
+            <a:spAutoFit/>
+          </a:bodyPr>
+          <a:lstStyle/>
+          <a:p>
+            <a:pPr algn="ctr">
+              <a:defRPr sz="4800" b="1">
+                <a:solidFill>
+                  <a:srgbClr val="F3F6F9"/>
+                </a:solidFill>
+                <a:latin typeface="Microsoft YaHei"/>
+              </a:defRPr>
+            </a:pPr>
+            <a:r>
+              <a:t>谢谢，欢迎讨论</a:t>
+            </a:r>
+          </a:p>
+        </p:txBody>
+      </p:sp>
+      <p:sp>
+        <p:nvSpPr>
+          <p:cNvPr id="7" name="Rectangle 6"/>
+          <p:cNvSpPr/>
+          <p:nvPr/>
+        </p:nvSpPr>
+        <p:spPr>
+          <a:xfrm>
+            <a:off x="5184648" y="3931920"/>
+            <a:ext cx="1828800" cy="73152"/>
+          </a:xfrm>
+          <a:prstGeom prst="rect">
+            <a:avLst/>
+          </a:prstGeom>
+          <a:solidFill>
+            <a:srgbClr val="FF6B35"/>
+          </a:solidFill>
+          <a:ln/>
+        </p:spPr>
+        <p:style>
+          <a:lnRef idx="1">
+            <a:schemeClr val="accent1"/>
+          </a:lnRef>
+          <a:fillRef idx="3">
+            <a:schemeClr val="accent1"/>
+          </a:fillRef>
+          <a:effectRef idx="2">
+            <a:schemeClr val="accent1"/>
+          </a:effectRef>
+          <a:fontRef idx="minor">
+            <a:schemeClr val="lt1"/>
+          </a:fontRef>
+        </p:style>
+        <p:txBody>
+          <a:bodyPr rtlCol="0" anchor="ctr"/>
+          <a:lstStyle/>
+          <a:p>
+            <a:pPr algn="ctr"/>
+          </a:p>
+        </p:txBody>
+      </p:sp>
+      <p:sp>
+        <p:nvSpPr>
+          <p:cNvPr id="8" name="Rectangle 7"/>
+          <p:cNvSpPr/>
+          <p:nvPr/>
+        </p:nvSpPr>
+        <p:spPr>
+          <a:xfrm>
+            <a:off x="0" y="6537960"/>
+            <a:ext cx="12191695" cy="18288"/>
+          </a:xfrm>
+          <a:prstGeom prst="rect">
+            <a:avLst/>
+          </a:prstGeom>
+          <a:solidFill>
+            <a:srgbClr val="0096C7"/>
+          </a:solidFill>
+          <a:ln/>
+        </p:spPr>
+        <p:style>
+          <a:lnRef idx="1">
+            <a:schemeClr val="accent1"/>
+          </a:lnRef>
+          <a:fillRef idx="3">
+            <a:schemeClr val="accent1"/>
+          </a:fillRef>
+          <a:effectRef idx="2">
+            <a:schemeClr val="accent1"/>
+          </a:effectRef>
+          <a:fontRef idx="minor">
+            <a:schemeClr val="lt1"/>
+          </a:fontRef>
+        </p:style>
+        <p:txBody>
+          <a:bodyPr rtlCol="0" anchor="ctr"/>
+          <a:lstStyle/>
+          <a:p>
+            <a:pPr algn="ctr"/>
+          </a:p>
+        </p:txBody>
+      </p:sp>
+      <p:sp>
+        <p:nvSpPr>
+          <p:cNvPr id="9" name="TextBox 8"/>
+          <p:cNvSpPr txBox="1"/>
+          <p:nvPr/>
+        </p:nvSpPr>
+        <p:spPr>
+          <a:xfrm>
+            <a:off x="457200" y="6583680"/>
+            <a:ext cx="3657600" cy="228600"/>
+          </a:xfrm>
+          <a:prstGeom prst="rect">
+            <a:avLst/>
+          </a:prstGeom>
+          <a:noFill/>
+        </p:spPr>
+        <p:txBody>
+          <a:bodyPr wrap="none">
+            <a:spAutoFit/>
+          </a:bodyPr>
+          <a:lstStyle/>
+          <a:p>
+            <a:pPr algn="l">
+              <a:defRPr sz="1000" b="0">
+                <a:solidFill>
+                  <a:srgbClr val="6C757D"/>
+                </a:solidFill>
+                <a:latin typeface="Microsoft YaHei"/>
+              </a:defRPr>
+            </a:pPr>
+            <a:r>
+              <a:t>smallgameagent · LLM/VLM + 规则驱动</a:t>
+            </a:r>
+          </a:p>
+        </p:txBody>
+      </p:sp>
+      <p:sp>
+        <p:nvSpPr>
+          <p:cNvPr id="10" name="TextBox 9"/>
+          <p:cNvSpPr txBox="1"/>
+          <p:nvPr/>
+        </p:nvSpPr>
+        <p:spPr>
+          <a:xfrm>
+            <a:off x="10789920" y="6583680"/>
+            <a:ext cx="914400" cy="228600"/>
+          </a:xfrm>
+          <a:prstGeom prst="rect">
+            <a:avLst/>
+          </a:prstGeom>
+          <a:noFill/>
+        </p:spPr>
+        <p:txBody>
+          <a:bodyPr wrap="none">
+            <a:spAutoFit/>
+          </a:bodyPr>
+          <a:lstStyle/>
+          <a:p>
+            <a:pPr algn="r">
+              <a:defRPr sz="1000" b="0">
+                <a:solidFill>
+                  <a:srgbClr val="6C757D"/>
+                </a:solidFill>
+                <a:latin typeface="Microsoft YaHei"/>
+              </a:defRPr>
+            </a:pPr>
+            <a:r>
+              <a:t>37/37</a:t>
             </a:r>
           </a:p>
         </p:txBody>
@@ -22548,7 +23344,7 @@
               </a:defRPr>
             </a:pPr>
             <a:r>
-              <a:t>4/35</a:t>
+              <a:t>4/37</a:t>
             </a:r>
           </a:p>
         </p:txBody>
@@ -22877,7 +23673,7 @@
               </a:defRPr>
             </a:pPr>
             <a:r>
-              <a:t>5/35</a:t>
+              <a:t>5/37</a:t>
             </a:r>
           </a:p>
         </p:txBody>
@@ -23274,7 +24070,7 @@
               </a:defRPr>
             </a:pPr>
             <a:r>
-              <a:t>6/35</a:t>
+              <a:t>6/37</a:t>
             </a:r>
           </a:p>
         </p:txBody>
@@ -23603,7 +24399,7 @@
               </a:defRPr>
             </a:pPr>
             <a:r>
-              <a:t>7/35</a:t>
+              <a:t>7/37</a:t>
             </a:r>
           </a:p>
         </p:txBody>
@@ -24907,7 +25703,7 @@
               </a:defRPr>
             </a:pPr>
             <a:r>
-              <a:t>8/35</a:t>
+              <a:t>8/37</a:t>
             </a:r>
           </a:p>
         </p:txBody>
@@ -25288,7 +26084,7 @@
               </a:defRPr>
             </a:pPr>
             <a:r>
-              <a:t>9/35</a:t>
+              <a:t>9/37</a:t>
             </a:r>
           </a:p>
         </p:txBody>

--- a/reports/smallgameagent_report.pptx
+++ b/reports/smallgameagent_report.pptx
@@ -42,6 +42,7 @@
     <p:sldId id="290" r:id="rId41"/>
     <p:sldId id="291" r:id="rId42"/>
     <p:sldId id="292" r:id="rId43"/>
+    <p:sldId id="293" r:id="rId44"/>
   </p:sldIdLst>
   <p:sldSz cx="12191695" cy="6858000" type="screen4x3"/>
   <p:notesSz cx="6858000" cy="9144000"/>
@@ -3850,7 +3851,7 @@
               </a:defRPr>
             </a:pPr>
             <a:r>
-              <a:t>10/37</a:t>
+              <a:t>10/38</a:t>
             </a:r>
           </a:p>
         </p:txBody>
@@ -4668,7 +4669,7 @@
               </a:defRPr>
             </a:pPr>
             <a:r>
-              <a:t>11/37</a:t>
+              <a:t>11/38</a:t>
             </a:r>
           </a:p>
         </p:txBody>
@@ -5065,7 +5066,7 @@
               </a:defRPr>
             </a:pPr>
             <a:r>
-              <a:t>12/37</a:t>
+              <a:t>12/38</a:t>
             </a:r>
           </a:p>
         </p:txBody>
@@ -5394,7 +5395,7 @@
               </a:defRPr>
             </a:pPr>
             <a:r>
-              <a:t>13/37</a:t>
+              <a:t>13/38</a:t>
             </a:r>
           </a:p>
         </p:txBody>
@@ -6185,7 +6186,7 @@
               </a:defRPr>
             </a:pPr>
             <a:r>
-              <a:t>14/37</a:t>
+              <a:t>14/38</a:t>
             </a:r>
           </a:p>
         </p:txBody>
@@ -7229,7 +7230,7 @@
               </a:defRPr>
             </a:pPr>
             <a:r>
-              <a:t>15/37</a:t>
+              <a:t>15/38</a:t>
             </a:r>
           </a:p>
         </p:txBody>
@@ -8528,7 +8529,7 @@
               </a:defRPr>
             </a:pPr>
             <a:r>
-              <a:t>16/37</a:t>
+              <a:t>16/38</a:t>
             </a:r>
           </a:p>
         </p:txBody>
@@ -8925,7 +8926,7 @@
               </a:defRPr>
             </a:pPr>
             <a:r>
-              <a:t>17/37</a:t>
+              <a:t>17/38</a:t>
             </a:r>
           </a:p>
         </p:txBody>
@@ -9322,7 +9323,7 @@
               </a:defRPr>
             </a:pPr>
             <a:r>
-              <a:t>18/37</a:t>
+              <a:t>18/38</a:t>
             </a:r>
           </a:p>
         </p:txBody>
@@ -9719,7 +9720,7 @@
               </a:defRPr>
             </a:pPr>
             <a:r>
-              <a:t>19/37</a:t>
+              <a:t>19/38</a:t>
             </a:r>
           </a:p>
         </p:txBody>
@@ -10592,7 +10593,7 @@
               </a:defRPr>
             </a:pPr>
             <a:r>
-              <a:t>2/37</a:t>
+              <a:t>2/38</a:t>
             </a:r>
           </a:p>
         </p:txBody>
@@ -10921,7 +10922,7 @@
               </a:defRPr>
             </a:pPr>
             <a:r>
-              <a:t>20/37</a:t>
+              <a:t>20/38</a:t>
             </a:r>
           </a:p>
         </p:txBody>
@@ -11984,7 +11985,7 @@
               </a:defRPr>
             </a:pPr>
             <a:r>
-              <a:t>21/37</a:t>
+              <a:t>21/38</a:t>
             </a:r>
           </a:p>
         </p:txBody>
@@ -12762,7 +12763,7 @@
               </a:defRPr>
             </a:pPr>
             <a:r>
-              <a:t>22/37</a:t>
+              <a:t>22/38</a:t>
             </a:r>
           </a:p>
         </p:txBody>
@@ -13091,7 +13092,7 @@
               </a:defRPr>
             </a:pPr>
             <a:r>
-              <a:t>23/37</a:t>
+              <a:t>23/38</a:t>
             </a:r>
           </a:p>
         </p:txBody>
@@ -13971,7 +13972,7 @@
               </a:defRPr>
             </a:pPr>
             <a:r>
-              <a:t>24/37</a:t>
+              <a:t>24/38</a:t>
             </a:r>
           </a:p>
         </p:txBody>
@@ -14300,7 +14301,7 @@
               </a:defRPr>
             </a:pPr>
             <a:r>
-              <a:t>25/37</a:t>
+              <a:t>25/38</a:t>
             </a:r>
           </a:p>
         </p:txBody>
@@ -15118,7 +15119,7 @@
               </a:defRPr>
             </a:pPr>
             <a:r>
-              <a:t>26/37</a:t>
+              <a:t>26/38</a:t>
             </a:r>
           </a:p>
         </p:txBody>
@@ -15692,7 +15693,7 @@
               </a:defRPr>
             </a:pPr>
             <a:r>
-              <a:t>27/37</a:t>
+              <a:t>27/38</a:t>
             </a:r>
           </a:p>
         </p:txBody>
@@ -16508,7 +16509,7 @@
               </a:defRPr>
             </a:pPr>
             <a:r>
-              <a:t>28/37</a:t>
+              <a:t>28/38</a:t>
             </a:r>
           </a:p>
         </p:txBody>
@@ -17581,7 +17582,7 @@
               </a:defRPr>
             </a:pPr>
             <a:r>
-              <a:t>29/37</a:t>
+              <a:t>29/38</a:t>
             </a:r>
           </a:p>
         </p:txBody>
@@ -18010,7 +18011,7 @@
               </a:defRPr>
             </a:pPr>
             <a:r>
-              <a:t>3/37</a:t>
+              <a:t>3/38</a:t>
             </a:r>
           </a:p>
         </p:txBody>
@@ -18042,7 +18043,7 @@
         <p:spPr>
           <a:xfrm>
             <a:off x="0" y="0"/>
-            <a:ext cx="12191695" cy="6858000"/>
+            <a:ext cx="12191695" cy="960120"/>
           </a:xfrm>
           <a:prstGeom prst="rect">
             <a:avLst/>
@@ -18076,23 +18077,56 @@
       </p:sp>
       <p:sp>
         <p:nvSpPr>
-          <p:cNvPr id="3" name="Rectangle 2"/>
+          <p:cNvPr id="3" name="TextBox 2"/>
+          <p:cNvSpPr txBox="1"/>
+          <p:nvPr/>
+        </p:nvSpPr>
+        <p:spPr>
+          <a:xfrm>
+            <a:off x="457200" y="228600"/>
+            <a:ext cx="11247120" cy="548640"/>
+          </a:xfrm>
+          <a:prstGeom prst="rect">
+            <a:avLst/>
+          </a:prstGeom>
+          <a:noFill/>
+        </p:spPr>
+        <p:txBody>
+          <a:bodyPr wrap="none">
+            <a:spAutoFit/>
+          </a:bodyPr>
+          <a:lstStyle/>
+          <a:p>
+            <a:pPr algn="l">
+              <a:defRPr sz="3000" b="1">
+                <a:solidFill>
+                  <a:srgbClr val="F3F6F9"/>
+                </a:solidFill>
+                <a:latin typeface="Microsoft YaHei"/>
+              </a:defRPr>
+            </a:pPr>
+            <a:r>
+              <a:t>规划变体对比：长 horizon 收益最大</a:t>
+            </a:r>
+          </a:p>
+        </p:txBody>
+      </p:sp>
+      <p:sp>
+        <p:nvSpPr>
+          <p:cNvPr id="4" name="Rectangle 3"/>
           <p:cNvSpPr/>
           <p:nvPr/>
         </p:nvSpPr>
         <p:spPr>
           <a:xfrm>
-            <a:off x="6858000" y="-914400"/>
-            <a:ext cx="5943600" cy="8686800"/>
-          </a:xfrm>
-          <a:prstGeom prst="rect">
-            <a:avLst/>
-          </a:prstGeom>
-          <a:solidFill>
-            <a:srgbClr val="0096C7">
-              <a:lumMod val="80000"/>
-              <a:lumOff val="20000"/>
-            </a:srgbClr>
+            <a:off x="0" y="960120"/>
+            <a:ext cx="164592" cy="5897880"/>
+          </a:xfrm>
+          <a:prstGeom prst="rect">
+            <a:avLst/>
+          </a:prstGeom>
+          <a:solidFill>
+            <a:srgbClr val="0096C7"/>
           </a:solidFill>
           <a:ln/>
         </p:spPr>
@@ -18120,94 +18154,26 @@
       </p:sp>
       <p:sp>
         <p:nvSpPr>
-          <p:cNvPr id="4" name="TextBox 3"/>
-          <p:cNvSpPr txBox="1"/>
-          <p:nvPr/>
-        </p:nvSpPr>
-        <p:spPr>
-          <a:xfrm>
-            <a:off x="548640" y="1645920"/>
-            <a:ext cx="2743200" cy="1828800"/>
-          </a:xfrm>
-          <a:prstGeom prst="rect">
-            <a:avLst/>
-          </a:prstGeom>
-          <a:noFill/>
-        </p:spPr>
-        <p:txBody>
-          <a:bodyPr wrap="none">
-            <a:spAutoFit/>
-          </a:bodyPr>
-          <a:lstStyle/>
-          <a:p>
-            <a:pPr algn="l">
-              <a:defRPr sz="12000" b="1">
-                <a:solidFill>
-                  <a:srgbClr val="333DA0"/>
-                </a:solidFill>
-                <a:latin typeface="Microsoft YaHei"/>
-              </a:defRPr>
-            </a:pPr>
-            <a:r>
-              <a:t>08</a:t>
-            </a:r>
-          </a:p>
-        </p:txBody>
-      </p:sp>
-      <p:sp>
-        <p:nvSpPr>
-          <p:cNvPr id="5" name="TextBox 4"/>
-          <p:cNvSpPr txBox="1"/>
-          <p:nvPr/>
-        </p:nvSpPr>
-        <p:spPr>
-          <a:xfrm>
-            <a:off x="548640" y="2834640"/>
-            <a:ext cx="11064240" cy="1097280"/>
-          </a:xfrm>
-          <a:prstGeom prst="rect">
-            <a:avLst/>
-          </a:prstGeom>
-          <a:noFill/>
-        </p:spPr>
-        <p:txBody>
-          <a:bodyPr wrap="none">
-            <a:spAutoFit/>
-          </a:bodyPr>
-          <a:lstStyle/>
-          <a:p>
-            <a:pPr algn="l">
-              <a:defRPr sz="4400" b="1">
-                <a:solidFill>
-                  <a:srgbClr val="F3F6F9"/>
-                </a:solidFill>
-                <a:latin typeface="Microsoft YaHei"/>
-              </a:defRPr>
-            </a:pPr>
-            <a:r>
-              <a:t>训练数据管线</a:t>
-            </a:r>
-          </a:p>
-        </p:txBody>
-      </p:sp>
-      <p:sp>
-        <p:nvSpPr>
-          <p:cNvPr id="6" name="Rectangle 5"/>
+          <p:cNvPr id="5" name="Rectangle 4"/>
           <p:cNvSpPr/>
           <p:nvPr/>
         </p:nvSpPr>
         <p:spPr>
           <a:xfrm>
-            <a:off x="548640" y="4023360"/>
-            <a:ext cx="1828800" cy="73152"/>
-          </a:xfrm>
-          <a:prstGeom prst="rect">
-            <a:avLst/>
-          </a:prstGeom>
-          <a:solidFill>
-            <a:srgbClr val="FF6B35"/>
-          </a:solidFill>
-          <a:ln/>
+            <a:off x="320040" y="1078992"/>
+            <a:ext cx="11548872" cy="5349240"/>
+          </a:xfrm>
+          <a:prstGeom prst="rect">
+            <a:avLst/>
+          </a:prstGeom>
+          <a:solidFill>
+            <a:srgbClr val="FFFFFF"/>
+          </a:solidFill>
+          <a:ln w="12700">
+            <a:solidFill>
+              <a:srgbClr val="E1E5E9"/>
+            </a:solidFill>
+          </a:ln>
         </p:spPr>
         <p:style>
           <a:lnRef idx="1">
@@ -18233,22 +18199,62 @@
       </p:sp>
       <p:sp>
         <p:nvSpPr>
+          <p:cNvPr id="6" name="TextBox 5"/>
+          <p:cNvSpPr txBox="1"/>
+          <p:nvPr/>
+        </p:nvSpPr>
+        <p:spPr>
+          <a:xfrm>
+            <a:off x="457200" y="1627632"/>
+            <a:ext cx="2377440" cy="502920"/>
+          </a:xfrm>
+          <a:prstGeom prst="rect">
+            <a:avLst/>
+          </a:prstGeom>
+          <a:noFill/>
+        </p:spPr>
+        <p:txBody>
+          <a:bodyPr wrap="none">
+            <a:spAutoFit/>
+          </a:bodyPr>
+          <a:lstStyle/>
+          <a:p>
+            <a:pPr algn="r">
+              <a:defRPr sz="1300" b="0">
+                <a:solidFill>
+                  <a:srgbClr val="1E2933"/>
+                </a:solidFill>
+                <a:latin typeface="Microsoft YaHei"/>
+              </a:defRPr>
+            </a:pPr>
+            <a:r>
+              <a:t>rule 基线</a:t>
+            </a:r>
+          </a:p>
+        </p:txBody>
+      </p:sp>
+      <p:sp>
+        <p:nvSpPr>
           <p:cNvPr id="7" name="Rectangle 6"/>
           <p:cNvSpPr/>
           <p:nvPr/>
         </p:nvSpPr>
         <p:spPr>
           <a:xfrm>
-            <a:off x="0" y="6537960"/>
-            <a:ext cx="12191695" cy="18288"/>
-          </a:xfrm>
-          <a:prstGeom prst="rect">
-            <a:avLst/>
-          </a:prstGeom>
-          <a:solidFill>
-            <a:srgbClr val="0096C7"/>
-          </a:solidFill>
-          <a:ln/>
+            <a:off x="2926080" y="1554480"/>
+            <a:ext cx="7772400" cy="502920"/>
+          </a:xfrm>
+          <a:prstGeom prst="rect">
+            <a:avLst/>
+          </a:prstGeom>
+          <a:solidFill>
+            <a:srgbClr val="F3F6F9"/>
+          </a:solidFill>
+          <a:ln w="12700">
+            <a:solidFill>
+              <a:srgbClr val="E1E5E9"/>
+            </a:solidFill>
+          </a:ln>
         </p:spPr>
         <p:style>
           <a:lnRef idx="1">
@@ -18274,14 +18280,55 @@
       </p:sp>
       <p:sp>
         <p:nvSpPr>
-          <p:cNvPr id="8" name="TextBox 7"/>
+          <p:cNvPr id="8" name="Rectangle 7"/>
+          <p:cNvSpPr/>
+          <p:nvPr/>
+        </p:nvSpPr>
+        <p:spPr>
+          <a:xfrm>
+            <a:off x="2926080" y="1554480"/>
+            <a:ext cx="3350768" cy="502920"/>
+          </a:xfrm>
+          <a:prstGeom prst="rect">
+            <a:avLst/>
+          </a:prstGeom>
+          <a:solidFill>
+            <a:srgbClr val="6C757D"/>
+          </a:solidFill>
+          <a:ln/>
+        </p:spPr>
+        <p:style>
+          <a:lnRef idx="1">
+            <a:schemeClr val="accent1"/>
+          </a:lnRef>
+          <a:fillRef idx="3">
+            <a:schemeClr val="accent1"/>
+          </a:fillRef>
+          <a:effectRef idx="2">
+            <a:schemeClr val="accent1"/>
+          </a:effectRef>
+          <a:fontRef idx="minor">
+            <a:schemeClr val="lt1"/>
+          </a:fontRef>
+        </p:style>
+        <p:txBody>
+          <a:bodyPr rtlCol="0" anchor="ctr"/>
+          <a:lstStyle/>
+          <a:p>
+            <a:pPr algn="ctr"/>
+          </a:p>
+        </p:txBody>
+      </p:sp>
+      <p:sp>
+        <p:nvSpPr>
+          <p:cNvPr id="9" name="TextBox 8"/>
           <p:cNvSpPr txBox="1"/>
           <p:nvPr/>
         </p:nvSpPr>
         <p:spPr>
           <a:xfrm>
-            <a:off x="457200" y="6583680"/>
-            <a:ext cx="3657600" cy="228600"/>
+            <a:off x="6368288" y="1627632"/>
+            <a:ext cx="914400" cy="502920"/>
           </a:xfrm>
           <a:prstGeom prst="rect">
             <a:avLst/>
@@ -18295,7 +18342,7 @@
           <a:lstStyle/>
           <a:p>
             <a:pPr algn="l">
-              <a:defRPr sz="1000" b="0">
+              <a:defRPr sz="1200" b="1">
                 <a:solidFill>
                   <a:srgbClr val="6C757D"/>
                 </a:solidFill>
@@ -18303,21 +18350,21 @@
               </a:defRPr>
             </a:pPr>
             <a:r>
-              <a:t>smallgameagent · LLM/VLM + 规则驱动</a:t>
-            </a:r>
-          </a:p>
-        </p:txBody>
-      </p:sp>
-      <p:sp>
-        <p:nvSpPr>
-          <p:cNvPr id="9" name="TextBox 8"/>
+              <a:t>0.194</a:t>
+            </a:r>
+          </a:p>
+        </p:txBody>
+      </p:sp>
+      <p:sp>
+        <p:nvSpPr>
+          <p:cNvPr id="10" name="TextBox 9"/>
           <p:cNvSpPr txBox="1"/>
           <p:nvPr/>
         </p:nvSpPr>
         <p:spPr>
           <a:xfrm>
-            <a:off x="10789920" y="6583680"/>
-            <a:ext cx="914400" cy="228600"/>
+            <a:off x="457200" y="2359152"/>
+            <a:ext cx="2377440" cy="502920"/>
           </a:xfrm>
           <a:prstGeom prst="rect">
             <a:avLst/>
@@ -18331,6 +18378,888 @@
           <a:lstStyle/>
           <a:p>
             <a:pPr algn="r">
+              <a:defRPr sz="1300" b="0">
+                <a:solidFill>
+                  <a:srgbClr val="1E2933"/>
+                </a:solidFill>
+                <a:latin typeface="Microsoft YaHei"/>
+              </a:defRPr>
+            </a:pPr>
+            <a:r>
+              <a:t>beam_2step</a:t>
+            </a:r>
+          </a:p>
+        </p:txBody>
+      </p:sp>
+      <p:sp>
+        <p:nvSpPr>
+          <p:cNvPr id="11" name="Rectangle 10"/>
+          <p:cNvSpPr/>
+          <p:nvPr/>
+        </p:nvSpPr>
+        <p:spPr>
+          <a:xfrm>
+            <a:off x="2926080" y="2286000"/>
+            <a:ext cx="7772400" cy="502920"/>
+          </a:xfrm>
+          <a:prstGeom prst="rect">
+            <a:avLst/>
+          </a:prstGeom>
+          <a:solidFill>
+            <a:srgbClr val="F3F6F9"/>
+          </a:solidFill>
+          <a:ln w="12700">
+            <a:solidFill>
+              <a:srgbClr val="E1E5E9"/>
+            </a:solidFill>
+          </a:ln>
+        </p:spPr>
+        <p:style>
+          <a:lnRef idx="1">
+            <a:schemeClr val="accent1"/>
+          </a:lnRef>
+          <a:fillRef idx="3">
+            <a:schemeClr val="accent1"/>
+          </a:fillRef>
+          <a:effectRef idx="2">
+            <a:schemeClr val="accent1"/>
+          </a:effectRef>
+          <a:fontRef idx="minor">
+            <a:schemeClr val="lt1"/>
+          </a:fontRef>
+        </p:style>
+        <p:txBody>
+          <a:bodyPr rtlCol="0" anchor="ctr"/>
+          <a:lstStyle/>
+          <a:p>
+            <a:pPr algn="ctr"/>
+          </a:p>
+        </p:txBody>
+      </p:sp>
+      <p:sp>
+        <p:nvSpPr>
+          <p:cNvPr id="12" name="Rectangle 11"/>
+          <p:cNvSpPr/>
+          <p:nvPr/>
+        </p:nvSpPr>
+        <p:spPr>
+          <a:xfrm>
+            <a:off x="2926080" y="2286000"/>
+            <a:ext cx="4387087" cy="502920"/>
+          </a:xfrm>
+          <a:prstGeom prst="rect">
+            <a:avLst/>
+          </a:prstGeom>
+          <a:solidFill>
+            <a:srgbClr val="F4B400"/>
+          </a:solidFill>
+          <a:ln/>
+        </p:spPr>
+        <p:style>
+          <a:lnRef idx="1">
+            <a:schemeClr val="accent1"/>
+          </a:lnRef>
+          <a:fillRef idx="3">
+            <a:schemeClr val="accent1"/>
+          </a:fillRef>
+          <a:effectRef idx="2">
+            <a:schemeClr val="accent1"/>
+          </a:effectRef>
+          <a:fontRef idx="minor">
+            <a:schemeClr val="lt1"/>
+          </a:fontRef>
+        </p:style>
+        <p:txBody>
+          <a:bodyPr rtlCol="0" anchor="ctr"/>
+          <a:lstStyle/>
+          <a:p>
+            <a:pPr algn="ctr"/>
+          </a:p>
+        </p:txBody>
+      </p:sp>
+      <p:sp>
+        <p:nvSpPr>
+          <p:cNvPr id="13" name="TextBox 12"/>
+          <p:cNvSpPr txBox="1"/>
+          <p:nvPr/>
+        </p:nvSpPr>
+        <p:spPr>
+          <a:xfrm>
+            <a:off x="7404607" y="2359152"/>
+            <a:ext cx="914400" cy="502920"/>
+          </a:xfrm>
+          <a:prstGeom prst="rect">
+            <a:avLst/>
+          </a:prstGeom>
+          <a:noFill/>
+        </p:spPr>
+        <p:txBody>
+          <a:bodyPr wrap="none">
+            <a:spAutoFit/>
+          </a:bodyPr>
+          <a:lstStyle/>
+          <a:p>
+            <a:pPr algn="l">
+              <a:defRPr sz="1200" b="1">
+                <a:solidFill>
+                  <a:srgbClr val="F4B400"/>
+                </a:solidFill>
+                <a:latin typeface="Microsoft YaHei"/>
+              </a:defRPr>
+            </a:pPr>
+            <a:r>
+              <a:t>0.254</a:t>
+            </a:r>
+          </a:p>
+        </p:txBody>
+      </p:sp>
+      <p:sp>
+        <p:nvSpPr>
+          <p:cNvPr id="14" name="TextBox 13"/>
+          <p:cNvSpPr txBox="1"/>
+          <p:nvPr/>
+        </p:nvSpPr>
+        <p:spPr>
+          <a:xfrm>
+            <a:off x="457200" y="3090672"/>
+            <a:ext cx="2377440" cy="502920"/>
+          </a:xfrm>
+          <a:prstGeom prst="rect">
+            <a:avLst/>
+          </a:prstGeom>
+          <a:noFill/>
+        </p:spPr>
+        <p:txBody>
+          <a:bodyPr wrap="none">
+            <a:spAutoFit/>
+          </a:bodyPr>
+          <a:lstStyle/>
+          <a:p>
+            <a:pPr algn="r">
+              <a:defRPr sz="1300" b="0">
+                <a:solidFill>
+                  <a:srgbClr val="1E2933"/>
+                </a:solidFill>
+                <a:latin typeface="Microsoft YaHei"/>
+              </a:defRPr>
+            </a:pPr>
+            <a:r>
+              <a:t>hierarchical_mock_5</a:t>
+            </a:r>
+          </a:p>
+        </p:txBody>
+      </p:sp>
+      <p:sp>
+        <p:nvSpPr>
+          <p:cNvPr id="15" name="Rectangle 14"/>
+          <p:cNvSpPr/>
+          <p:nvPr/>
+        </p:nvSpPr>
+        <p:spPr>
+          <a:xfrm>
+            <a:off x="2926080" y="3017520"/>
+            <a:ext cx="7772400" cy="502920"/>
+          </a:xfrm>
+          <a:prstGeom prst="rect">
+            <a:avLst/>
+          </a:prstGeom>
+          <a:solidFill>
+            <a:srgbClr val="F3F6F9"/>
+          </a:solidFill>
+          <a:ln w="12700">
+            <a:solidFill>
+              <a:srgbClr val="E1E5E9"/>
+            </a:solidFill>
+          </a:ln>
+        </p:spPr>
+        <p:style>
+          <a:lnRef idx="1">
+            <a:schemeClr val="accent1"/>
+          </a:lnRef>
+          <a:fillRef idx="3">
+            <a:schemeClr val="accent1"/>
+          </a:fillRef>
+          <a:effectRef idx="2">
+            <a:schemeClr val="accent1"/>
+          </a:effectRef>
+          <a:fontRef idx="minor">
+            <a:schemeClr val="lt1"/>
+          </a:fontRef>
+        </p:style>
+        <p:txBody>
+          <a:bodyPr rtlCol="0" anchor="ctr"/>
+          <a:lstStyle/>
+          <a:p>
+            <a:pPr algn="ctr"/>
+          </a:p>
+        </p:txBody>
+      </p:sp>
+      <p:sp>
+        <p:nvSpPr>
+          <p:cNvPr id="16" name="Rectangle 15"/>
+          <p:cNvSpPr/>
+          <p:nvPr/>
+        </p:nvSpPr>
+        <p:spPr>
+          <a:xfrm>
+            <a:off x="2926080" y="3017520"/>
+            <a:ext cx="5665216" cy="502920"/>
+          </a:xfrm>
+          <a:prstGeom prst="rect">
+            <a:avLst/>
+          </a:prstGeom>
+          <a:solidFill>
+            <a:srgbClr val="0096C7"/>
+          </a:solidFill>
+          <a:ln/>
+        </p:spPr>
+        <p:style>
+          <a:lnRef idx="1">
+            <a:schemeClr val="accent1"/>
+          </a:lnRef>
+          <a:fillRef idx="3">
+            <a:schemeClr val="accent1"/>
+          </a:fillRef>
+          <a:effectRef idx="2">
+            <a:schemeClr val="accent1"/>
+          </a:effectRef>
+          <a:fontRef idx="minor">
+            <a:schemeClr val="lt1"/>
+          </a:fontRef>
+        </p:style>
+        <p:txBody>
+          <a:bodyPr rtlCol="0" anchor="ctr"/>
+          <a:lstStyle/>
+          <a:p>
+            <a:pPr algn="ctr"/>
+          </a:p>
+        </p:txBody>
+      </p:sp>
+      <p:sp>
+        <p:nvSpPr>
+          <p:cNvPr id="17" name="TextBox 16"/>
+          <p:cNvSpPr txBox="1"/>
+          <p:nvPr/>
+        </p:nvSpPr>
+        <p:spPr>
+          <a:xfrm>
+            <a:off x="8682736" y="3090672"/>
+            <a:ext cx="914400" cy="502920"/>
+          </a:xfrm>
+          <a:prstGeom prst="rect">
+            <a:avLst/>
+          </a:prstGeom>
+          <a:noFill/>
+        </p:spPr>
+        <p:txBody>
+          <a:bodyPr wrap="none">
+            <a:spAutoFit/>
+          </a:bodyPr>
+          <a:lstStyle/>
+          <a:p>
+            <a:pPr algn="l">
+              <a:defRPr sz="1200" b="1">
+                <a:solidFill>
+                  <a:srgbClr val="0096C7"/>
+                </a:solidFill>
+                <a:latin typeface="Microsoft YaHei"/>
+              </a:defRPr>
+            </a:pPr>
+            <a:r>
+              <a:t>0.328</a:t>
+            </a:r>
+          </a:p>
+        </p:txBody>
+      </p:sp>
+      <p:sp>
+        <p:nvSpPr>
+          <p:cNvPr id="18" name="TextBox 17"/>
+          <p:cNvSpPr txBox="1"/>
+          <p:nvPr/>
+        </p:nvSpPr>
+        <p:spPr>
+          <a:xfrm>
+            <a:off x="457200" y="3822192"/>
+            <a:ext cx="2377440" cy="502920"/>
+          </a:xfrm>
+          <a:prstGeom prst="rect">
+            <a:avLst/>
+          </a:prstGeom>
+          <a:noFill/>
+        </p:spPr>
+        <p:txBody>
+          <a:bodyPr wrap="none">
+            <a:spAutoFit/>
+          </a:bodyPr>
+          <a:lstStyle/>
+          <a:p>
+            <a:pPr algn="r">
+              <a:defRPr sz="1300" b="0">
+                <a:solidFill>
+                  <a:srgbClr val="1E2933"/>
+                </a:solidFill>
+                <a:latin typeface="Microsoft YaHei"/>
+              </a:defRPr>
+            </a:pPr>
+            <a:r>
+              <a:t>hierarchical_short</a:t>
+            </a:r>
+          </a:p>
+        </p:txBody>
+      </p:sp>
+      <p:sp>
+        <p:nvSpPr>
+          <p:cNvPr id="19" name="Rectangle 18"/>
+          <p:cNvSpPr/>
+          <p:nvPr/>
+        </p:nvSpPr>
+        <p:spPr>
+          <a:xfrm>
+            <a:off x="2926080" y="3749040"/>
+            <a:ext cx="7772400" cy="502920"/>
+          </a:xfrm>
+          <a:prstGeom prst="rect">
+            <a:avLst/>
+          </a:prstGeom>
+          <a:solidFill>
+            <a:srgbClr val="F3F6F9"/>
+          </a:solidFill>
+          <a:ln w="12700">
+            <a:solidFill>
+              <a:srgbClr val="E1E5E9"/>
+            </a:solidFill>
+          </a:ln>
+        </p:spPr>
+        <p:style>
+          <a:lnRef idx="1">
+            <a:schemeClr val="accent1"/>
+          </a:lnRef>
+          <a:fillRef idx="3">
+            <a:schemeClr val="accent1"/>
+          </a:fillRef>
+          <a:effectRef idx="2">
+            <a:schemeClr val="accent1"/>
+          </a:effectRef>
+          <a:fontRef idx="minor">
+            <a:schemeClr val="lt1"/>
+          </a:fontRef>
+        </p:style>
+        <p:txBody>
+          <a:bodyPr rtlCol="0" anchor="ctr"/>
+          <a:lstStyle/>
+          <a:p>
+            <a:pPr algn="ctr"/>
+          </a:p>
+        </p:txBody>
+      </p:sp>
+      <p:sp>
+        <p:nvSpPr>
+          <p:cNvPr id="20" name="Rectangle 19"/>
+          <p:cNvSpPr/>
+          <p:nvPr/>
+        </p:nvSpPr>
+        <p:spPr>
+          <a:xfrm>
+            <a:off x="2926080" y="3749040"/>
+            <a:ext cx="5665216" cy="502920"/>
+          </a:xfrm>
+          <a:prstGeom prst="rect">
+            <a:avLst/>
+          </a:prstGeom>
+          <a:solidFill>
+            <a:srgbClr val="0096C7"/>
+          </a:solidFill>
+          <a:ln/>
+        </p:spPr>
+        <p:style>
+          <a:lnRef idx="1">
+            <a:schemeClr val="accent1"/>
+          </a:lnRef>
+          <a:fillRef idx="3">
+            <a:schemeClr val="accent1"/>
+          </a:fillRef>
+          <a:effectRef idx="2">
+            <a:schemeClr val="accent1"/>
+          </a:effectRef>
+          <a:fontRef idx="minor">
+            <a:schemeClr val="lt1"/>
+          </a:fontRef>
+        </p:style>
+        <p:txBody>
+          <a:bodyPr rtlCol="0" anchor="ctr"/>
+          <a:lstStyle/>
+          <a:p>
+            <a:pPr algn="ctr"/>
+          </a:p>
+        </p:txBody>
+      </p:sp>
+      <p:sp>
+        <p:nvSpPr>
+          <p:cNvPr id="21" name="TextBox 20"/>
+          <p:cNvSpPr txBox="1"/>
+          <p:nvPr/>
+        </p:nvSpPr>
+        <p:spPr>
+          <a:xfrm>
+            <a:off x="8682736" y="3822192"/>
+            <a:ext cx="914400" cy="502920"/>
+          </a:xfrm>
+          <a:prstGeom prst="rect">
+            <a:avLst/>
+          </a:prstGeom>
+          <a:noFill/>
+        </p:spPr>
+        <p:txBody>
+          <a:bodyPr wrap="none">
+            <a:spAutoFit/>
+          </a:bodyPr>
+          <a:lstStyle/>
+          <a:p>
+            <a:pPr algn="l">
+              <a:defRPr sz="1200" b="1">
+                <a:solidFill>
+                  <a:srgbClr val="0096C7"/>
+                </a:solidFill>
+                <a:latin typeface="Microsoft YaHei"/>
+              </a:defRPr>
+            </a:pPr>
+            <a:r>
+              <a:t>0.328</a:t>
+            </a:r>
+          </a:p>
+        </p:txBody>
+      </p:sp>
+      <p:sp>
+        <p:nvSpPr>
+          <p:cNvPr id="22" name="TextBox 21"/>
+          <p:cNvSpPr txBox="1"/>
+          <p:nvPr/>
+        </p:nvSpPr>
+        <p:spPr>
+          <a:xfrm>
+            <a:off x="457200" y="4553712"/>
+            <a:ext cx="2377440" cy="502920"/>
+          </a:xfrm>
+          <a:prstGeom prst="rect">
+            <a:avLst/>
+          </a:prstGeom>
+          <a:noFill/>
+        </p:spPr>
+        <p:txBody>
+          <a:bodyPr wrap="none">
+            <a:spAutoFit/>
+          </a:bodyPr>
+          <a:lstStyle/>
+          <a:p>
+            <a:pPr algn="r">
+              <a:defRPr sz="1300" b="0">
+                <a:solidFill>
+                  <a:srgbClr val="1E2933"/>
+                </a:solidFill>
+                <a:latin typeface="Microsoft YaHei"/>
+              </a:defRPr>
+            </a:pPr>
+            <a:r>
+              <a:t>hierarchical_mock_15</a:t>
+            </a:r>
+          </a:p>
+        </p:txBody>
+      </p:sp>
+      <p:sp>
+        <p:nvSpPr>
+          <p:cNvPr id="23" name="Rectangle 22"/>
+          <p:cNvSpPr/>
+          <p:nvPr/>
+        </p:nvSpPr>
+        <p:spPr>
+          <a:xfrm>
+            <a:off x="2926080" y="4480560"/>
+            <a:ext cx="7772400" cy="502920"/>
+          </a:xfrm>
+          <a:prstGeom prst="rect">
+            <a:avLst/>
+          </a:prstGeom>
+          <a:solidFill>
+            <a:srgbClr val="F3F6F9"/>
+          </a:solidFill>
+          <a:ln w="12700">
+            <a:solidFill>
+              <a:srgbClr val="E1E5E9"/>
+            </a:solidFill>
+          </a:ln>
+        </p:spPr>
+        <p:style>
+          <a:lnRef idx="1">
+            <a:schemeClr val="accent1"/>
+          </a:lnRef>
+          <a:fillRef idx="3">
+            <a:schemeClr val="accent1"/>
+          </a:fillRef>
+          <a:effectRef idx="2">
+            <a:schemeClr val="accent1"/>
+          </a:effectRef>
+          <a:fontRef idx="minor">
+            <a:schemeClr val="lt1"/>
+          </a:fontRef>
+        </p:style>
+        <p:txBody>
+          <a:bodyPr rtlCol="0" anchor="ctr"/>
+          <a:lstStyle/>
+          <a:p>
+            <a:pPr algn="ctr"/>
+          </a:p>
+        </p:txBody>
+      </p:sp>
+      <p:sp>
+        <p:nvSpPr>
+          <p:cNvPr id="24" name="Rectangle 23"/>
+          <p:cNvSpPr/>
+          <p:nvPr/>
+        </p:nvSpPr>
+        <p:spPr>
+          <a:xfrm>
+            <a:off x="2926080" y="4480560"/>
+            <a:ext cx="5147056" cy="502920"/>
+          </a:xfrm>
+          <a:prstGeom prst="rect">
+            <a:avLst/>
+          </a:prstGeom>
+          <a:solidFill>
+            <a:srgbClr val="0096C7"/>
+          </a:solidFill>
+          <a:ln/>
+        </p:spPr>
+        <p:style>
+          <a:lnRef idx="1">
+            <a:schemeClr val="accent1"/>
+          </a:lnRef>
+          <a:fillRef idx="3">
+            <a:schemeClr val="accent1"/>
+          </a:fillRef>
+          <a:effectRef idx="2">
+            <a:schemeClr val="accent1"/>
+          </a:effectRef>
+          <a:fontRef idx="minor">
+            <a:schemeClr val="lt1"/>
+          </a:fontRef>
+        </p:style>
+        <p:txBody>
+          <a:bodyPr rtlCol="0" anchor="ctr"/>
+          <a:lstStyle/>
+          <a:p>
+            <a:pPr algn="ctr"/>
+          </a:p>
+        </p:txBody>
+      </p:sp>
+      <p:sp>
+        <p:nvSpPr>
+          <p:cNvPr id="25" name="TextBox 24"/>
+          <p:cNvSpPr txBox="1"/>
+          <p:nvPr/>
+        </p:nvSpPr>
+        <p:spPr>
+          <a:xfrm>
+            <a:off x="8164576" y="4553712"/>
+            <a:ext cx="914400" cy="502920"/>
+          </a:xfrm>
+          <a:prstGeom prst="rect">
+            <a:avLst/>
+          </a:prstGeom>
+          <a:noFill/>
+        </p:spPr>
+        <p:txBody>
+          <a:bodyPr wrap="none">
+            <a:spAutoFit/>
+          </a:bodyPr>
+          <a:lstStyle/>
+          <a:p>
+            <a:pPr algn="l">
+              <a:defRPr sz="1200" b="1">
+                <a:solidFill>
+                  <a:srgbClr val="0096C7"/>
+                </a:solidFill>
+                <a:latin typeface="Microsoft YaHei"/>
+              </a:defRPr>
+            </a:pPr>
+            <a:r>
+              <a:t>0.298</a:t>
+            </a:r>
+          </a:p>
+        </p:txBody>
+      </p:sp>
+      <p:sp>
+        <p:nvSpPr>
+          <p:cNvPr id="26" name="TextBox 25"/>
+          <p:cNvSpPr txBox="1"/>
+          <p:nvPr/>
+        </p:nvSpPr>
+        <p:spPr>
+          <a:xfrm>
+            <a:off x="457200" y="5285232"/>
+            <a:ext cx="2377440" cy="502920"/>
+          </a:xfrm>
+          <a:prstGeom prst="rect">
+            <a:avLst/>
+          </a:prstGeom>
+          <a:noFill/>
+        </p:spPr>
+        <p:txBody>
+          <a:bodyPr wrap="none">
+            <a:spAutoFit/>
+          </a:bodyPr>
+          <a:lstStyle/>
+          <a:p>
+            <a:pPr algn="r">
+              <a:defRPr sz="1300" b="0">
+                <a:solidFill>
+                  <a:srgbClr val="1E2933"/>
+                </a:solidFill>
+                <a:latin typeface="Microsoft YaHei"/>
+              </a:defRPr>
+            </a:pPr>
+            <a:r>
+              <a:t>hierarchical_long</a:t>
+            </a:r>
+          </a:p>
+        </p:txBody>
+      </p:sp>
+      <p:sp>
+        <p:nvSpPr>
+          <p:cNvPr id="27" name="Rectangle 26"/>
+          <p:cNvSpPr/>
+          <p:nvPr/>
+        </p:nvSpPr>
+        <p:spPr>
+          <a:xfrm>
+            <a:off x="2926080" y="5212080"/>
+            <a:ext cx="7772400" cy="502920"/>
+          </a:xfrm>
+          <a:prstGeom prst="rect">
+            <a:avLst/>
+          </a:prstGeom>
+          <a:solidFill>
+            <a:srgbClr val="F3F6F9"/>
+          </a:solidFill>
+          <a:ln w="12700">
+            <a:solidFill>
+              <a:srgbClr val="E1E5E9"/>
+            </a:solidFill>
+          </a:ln>
+        </p:spPr>
+        <p:style>
+          <a:lnRef idx="1">
+            <a:schemeClr val="accent1"/>
+          </a:lnRef>
+          <a:fillRef idx="3">
+            <a:schemeClr val="accent1"/>
+          </a:fillRef>
+          <a:effectRef idx="2">
+            <a:schemeClr val="accent1"/>
+          </a:effectRef>
+          <a:fontRef idx="minor">
+            <a:schemeClr val="lt1"/>
+          </a:fontRef>
+        </p:style>
+        <p:txBody>
+          <a:bodyPr rtlCol="0" anchor="ctr"/>
+          <a:lstStyle/>
+          <a:p>
+            <a:pPr algn="ctr"/>
+          </a:p>
+        </p:txBody>
+      </p:sp>
+      <p:sp>
+        <p:nvSpPr>
+          <p:cNvPr id="28" name="Rectangle 27"/>
+          <p:cNvSpPr/>
+          <p:nvPr/>
+        </p:nvSpPr>
+        <p:spPr>
+          <a:xfrm>
+            <a:off x="2926080" y="5212080"/>
+            <a:ext cx="6701536" cy="502920"/>
+          </a:xfrm>
+          <a:prstGeom prst="rect">
+            <a:avLst/>
+          </a:prstGeom>
+          <a:solidFill>
+            <a:srgbClr val="28A745"/>
+          </a:solidFill>
+          <a:ln/>
+        </p:spPr>
+        <p:style>
+          <a:lnRef idx="1">
+            <a:schemeClr val="accent1"/>
+          </a:lnRef>
+          <a:fillRef idx="3">
+            <a:schemeClr val="accent1"/>
+          </a:fillRef>
+          <a:effectRef idx="2">
+            <a:schemeClr val="accent1"/>
+          </a:effectRef>
+          <a:fontRef idx="minor">
+            <a:schemeClr val="lt1"/>
+          </a:fontRef>
+        </p:style>
+        <p:txBody>
+          <a:bodyPr rtlCol="0" anchor="ctr"/>
+          <a:lstStyle/>
+          <a:p>
+            <a:pPr algn="ctr"/>
+          </a:p>
+        </p:txBody>
+      </p:sp>
+      <p:sp>
+        <p:nvSpPr>
+          <p:cNvPr id="29" name="TextBox 28"/>
+          <p:cNvSpPr txBox="1"/>
+          <p:nvPr/>
+        </p:nvSpPr>
+        <p:spPr>
+          <a:xfrm>
+            <a:off x="9719056" y="5285232"/>
+            <a:ext cx="914400" cy="502920"/>
+          </a:xfrm>
+          <a:prstGeom prst="rect">
+            <a:avLst/>
+          </a:prstGeom>
+          <a:noFill/>
+        </p:spPr>
+        <p:txBody>
+          <a:bodyPr wrap="none">
+            <a:spAutoFit/>
+          </a:bodyPr>
+          <a:lstStyle/>
+          <a:p>
+            <a:pPr algn="l">
+              <a:defRPr sz="1200" b="1">
+                <a:solidFill>
+                  <a:srgbClr val="28A745"/>
+                </a:solidFill>
+                <a:latin typeface="Microsoft YaHei"/>
+              </a:defRPr>
+            </a:pPr>
+            <a:r>
+              <a:t>0.388</a:t>
+            </a:r>
+          </a:p>
+        </p:txBody>
+      </p:sp>
+      <p:sp>
+        <p:nvSpPr>
+          <p:cNvPr id="30" name="Rounded Rectangle 29"/>
+          <p:cNvSpPr/>
+          <p:nvPr/>
+        </p:nvSpPr>
+        <p:spPr>
+          <a:xfrm>
+            <a:off x="457200" y="5486400"/>
+            <a:ext cx="11247120" cy="731520"/>
+          </a:xfrm>
+          <a:prstGeom prst="roundRect">
+            <a:avLst/>
+          </a:prstGeom>
+          <a:solidFill>
+            <a:srgbClr val="F3F6F9"/>
+          </a:solidFill>
+          <a:ln/>
+        </p:spPr>
+        <p:style>
+          <a:lnRef idx="1">
+            <a:schemeClr val="accent1"/>
+          </a:lnRef>
+          <a:fillRef idx="3">
+            <a:schemeClr val="accent1"/>
+          </a:fillRef>
+          <a:effectRef idx="2">
+            <a:schemeClr val="accent1"/>
+          </a:effectRef>
+          <a:fontRef idx="minor">
+            <a:schemeClr val="lt1"/>
+          </a:fontRef>
+        </p:style>
+        <p:txBody>
+          <a:bodyPr rtlCol="0" anchor="ctr"/>
+          <a:lstStyle/>
+          <a:p>
+            <a:pPr algn="ctr">
+              <a:defRPr sz="1300" b="0">
+                <a:solidFill>
+                  <a:srgbClr val="1E2933"/>
+                </a:solidFill>
+                <a:latin typeface="Microsoft YaHei"/>
+              </a:defRPr>
+            </a:pPr>
+            <a:r>
+              <a:t>SSD_00461P01 · type_match rate · hierarchical_long（8 意图）比 rule 提升 +100%，比 beam search 提升 +53%</a:t>
+            </a:r>
+          </a:p>
+        </p:txBody>
+      </p:sp>
+      <p:sp>
+        <p:nvSpPr>
+          <p:cNvPr id="31" name="Rectangle 30"/>
+          <p:cNvSpPr/>
+          <p:nvPr/>
+        </p:nvSpPr>
+        <p:spPr>
+          <a:xfrm>
+            <a:off x="0" y="6537960"/>
+            <a:ext cx="12191695" cy="18288"/>
+          </a:xfrm>
+          <a:prstGeom prst="rect">
+            <a:avLst/>
+          </a:prstGeom>
+          <a:solidFill>
+            <a:srgbClr val="0096C7"/>
+          </a:solidFill>
+          <a:ln/>
+        </p:spPr>
+        <p:style>
+          <a:lnRef idx="1">
+            <a:schemeClr val="accent1"/>
+          </a:lnRef>
+          <a:fillRef idx="3">
+            <a:schemeClr val="accent1"/>
+          </a:fillRef>
+          <a:effectRef idx="2">
+            <a:schemeClr val="accent1"/>
+          </a:effectRef>
+          <a:fontRef idx="minor">
+            <a:schemeClr val="lt1"/>
+          </a:fontRef>
+        </p:style>
+        <p:txBody>
+          <a:bodyPr rtlCol="0" anchor="ctr"/>
+          <a:lstStyle/>
+          <a:p>
+            <a:pPr algn="ctr"/>
+          </a:p>
+        </p:txBody>
+      </p:sp>
+      <p:sp>
+        <p:nvSpPr>
+          <p:cNvPr id="32" name="TextBox 31"/>
+          <p:cNvSpPr txBox="1"/>
+          <p:nvPr/>
+        </p:nvSpPr>
+        <p:spPr>
+          <a:xfrm>
+            <a:off x="457200" y="6583680"/>
+            <a:ext cx="3657600" cy="228600"/>
+          </a:xfrm>
+          <a:prstGeom prst="rect">
+            <a:avLst/>
+          </a:prstGeom>
+          <a:noFill/>
+        </p:spPr>
+        <p:txBody>
+          <a:bodyPr wrap="none">
+            <a:spAutoFit/>
+          </a:bodyPr>
+          <a:lstStyle/>
+          <a:p>
+            <a:pPr algn="l">
               <a:defRPr sz="1000" b="0">
                 <a:solidFill>
                   <a:srgbClr val="6C757D"/>
@@ -18339,7 +19268,43 @@
               </a:defRPr>
             </a:pPr>
             <a:r>
-              <a:t>30/37</a:t>
+              <a:t>smallgameagent · LLM/VLM + 规则驱动</a:t>
+            </a:r>
+          </a:p>
+        </p:txBody>
+      </p:sp>
+      <p:sp>
+        <p:nvSpPr>
+          <p:cNvPr id="33" name="TextBox 32"/>
+          <p:cNvSpPr txBox="1"/>
+          <p:nvPr/>
+        </p:nvSpPr>
+        <p:spPr>
+          <a:xfrm>
+            <a:off x="10789920" y="6583680"/>
+            <a:ext cx="914400" cy="228600"/>
+          </a:xfrm>
+          <a:prstGeom prst="rect">
+            <a:avLst/>
+          </a:prstGeom>
+          <a:noFill/>
+        </p:spPr>
+        <p:txBody>
+          <a:bodyPr wrap="none">
+            <a:spAutoFit/>
+          </a:bodyPr>
+          <a:lstStyle/>
+          <a:p>
+            <a:pPr algn="r">
+              <a:defRPr sz="1000" b="0">
+                <a:solidFill>
+                  <a:srgbClr val="6C757D"/>
+                </a:solidFill>
+                <a:latin typeface="Microsoft YaHei"/>
+              </a:defRPr>
+            </a:pPr>
+            <a:r>
+              <a:t>30/38</a:t>
             </a:r>
           </a:p>
         </p:txBody>
@@ -18371,7 +19336,7 @@
         <p:spPr>
           <a:xfrm>
             <a:off x="0" y="0"/>
-            <a:ext cx="12191695" cy="960120"/>
+            <a:ext cx="12191695" cy="6858000"/>
           </a:xfrm>
           <a:prstGeom prst="rect">
             <a:avLst/>
@@ -18405,56 +19370,23 @@
       </p:sp>
       <p:sp>
         <p:nvSpPr>
-          <p:cNvPr id="3" name="TextBox 2"/>
-          <p:cNvSpPr txBox="1"/>
-          <p:nvPr/>
-        </p:nvSpPr>
-        <p:spPr>
-          <a:xfrm>
-            <a:off x="457200" y="228600"/>
-            <a:ext cx="11247120" cy="548640"/>
-          </a:xfrm>
-          <a:prstGeom prst="rect">
-            <a:avLst/>
-          </a:prstGeom>
-          <a:noFill/>
-        </p:spPr>
-        <p:txBody>
-          <a:bodyPr wrap="none">
-            <a:spAutoFit/>
-          </a:bodyPr>
-          <a:lstStyle/>
-          <a:p>
-            <a:pPr algn="l">
-              <a:defRPr sz="3000" b="1">
-                <a:solidFill>
-                  <a:srgbClr val="F3F6F9"/>
-                </a:solidFill>
-                <a:latin typeface="Microsoft YaHei"/>
-              </a:defRPr>
-            </a:pPr>
-            <a:r>
-              <a:t>跑过的轨迹 = 可复用的训练数据</a:t>
-            </a:r>
-          </a:p>
-        </p:txBody>
-      </p:sp>
-      <p:sp>
-        <p:nvSpPr>
-          <p:cNvPr id="4" name="Rectangle 3"/>
+          <p:cNvPr id="3" name="Rectangle 2"/>
           <p:cNvSpPr/>
           <p:nvPr/>
         </p:nvSpPr>
         <p:spPr>
           <a:xfrm>
-            <a:off x="0" y="960120"/>
-            <a:ext cx="164592" cy="5897880"/>
-          </a:xfrm>
-          <a:prstGeom prst="rect">
-            <a:avLst/>
-          </a:prstGeom>
-          <a:solidFill>
-            <a:srgbClr val="FF6B35"/>
+            <a:off x="6858000" y="-914400"/>
+            <a:ext cx="5943600" cy="8686800"/>
+          </a:xfrm>
+          <a:prstGeom prst="rect">
+            <a:avLst/>
+          </a:prstGeom>
+          <a:solidFill>
+            <a:srgbClr val="0096C7">
+              <a:lumMod val="80000"/>
+              <a:lumOff val="20000"/>
+            </a:srgbClr>
           </a:solidFill>
           <a:ln/>
         </p:spPr>
@@ -18482,26 +19414,94 @@
       </p:sp>
       <p:sp>
         <p:nvSpPr>
-          <p:cNvPr id="5" name="Rectangle 4"/>
+          <p:cNvPr id="4" name="TextBox 3"/>
+          <p:cNvSpPr txBox="1"/>
+          <p:nvPr/>
+        </p:nvSpPr>
+        <p:spPr>
+          <a:xfrm>
+            <a:off x="548640" y="1645920"/>
+            <a:ext cx="2743200" cy="1828800"/>
+          </a:xfrm>
+          <a:prstGeom prst="rect">
+            <a:avLst/>
+          </a:prstGeom>
+          <a:noFill/>
+        </p:spPr>
+        <p:txBody>
+          <a:bodyPr wrap="none">
+            <a:spAutoFit/>
+          </a:bodyPr>
+          <a:lstStyle/>
+          <a:p>
+            <a:pPr algn="l">
+              <a:defRPr sz="12000" b="1">
+                <a:solidFill>
+                  <a:srgbClr val="333DA0"/>
+                </a:solidFill>
+                <a:latin typeface="Microsoft YaHei"/>
+              </a:defRPr>
+            </a:pPr>
+            <a:r>
+              <a:t>08</a:t>
+            </a:r>
+          </a:p>
+        </p:txBody>
+      </p:sp>
+      <p:sp>
+        <p:nvSpPr>
+          <p:cNvPr id="5" name="TextBox 4"/>
+          <p:cNvSpPr txBox="1"/>
+          <p:nvPr/>
+        </p:nvSpPr>
+        <p:spPr>
+          <a:xfrm>
+            <a:off x="548640" y="2834640"/>
+            <a:ext cx="11064240" cy="1097280"/>
+          </a:xfrm>
+          <a:prstGeom prst="rect">
+            <a:avLst/>
+          </a:prstGeom>
+          <a:noFill/>
+        </p:spPr>
+        <p:txBody>
+          <a:bodyPr wrap="none">
+            <a:spAutoFit/>
+          </a:bodyPr>
+          <a:lstStyle/>
+          <a:p>
+            <a:pPr algn="l">
+              <a:defRPr sz="4400" b="1">
+                <a:solidFill>
+                  <a:srgbClr val="F3F6F9"/>
+                </a:solidFill>
+                <a:latin typeface="Microsoft YaHei"/>
+              </a:defRPr>
+            </a:pPr>
+            <a:r>
+              <a:t>训练数据管线</a:t>
+            </a:r>
+          </a:p>
+        </p:txBody>
+      </p:sp>
+      <p:sp>
+        <p:nvSpPr>
+          <p:cNvPr id="6" name="Rectangle 5"/>
           <p:cNvSpPr/>
           <p:nvPr/>
         </p:nvSpPr>
         <p:spPr>
           <a:xfrm>
-            <a:off x="320040" y="1078992"/>
-            <a:ext cx="11548872" cy="5349240"/>
-          </a:xfrm>
-          <a:prstGeom prst="rect">
-            <a:avLst/>
-          </a:prstGeom>
-          <a:solidFill>
-            <a:srgbClr val="FFFFFF"/>
-          </a:solidFill>
-          <a:ln w="12700">
-            <a:solidFill>
-              <a:srgbClr val="E1E5E9"/>
-            </a:solidFill>
-          </a:ln>
+            <a:off x="548640" y="4023360"/>
+            <a:ext cx="1828800" cy="73152"/>
+          </a:xfrm>
+          <a:prstGeom prst="rect">
+            <a:avLst/>
+          </a:prstGeom>
+          <a:solidFill>
+            <a:srgbClr val="FF6B35"/>
+          </a:solidFill>
+          <a:ln/>
         </p:spPr>
         <p:style>
           <a:lnRef idx="1">
@@ -18527,93 +19527,6 @@
       </p:sp>
       <p:sp>
         <p:nvSpPr>
-          <p:cNvPr id="6" name="TextBox 5"/>
-          <p:cNvSpPr txBox="1"/>
-          <p:nvPr/>
-        </p:nvSpPr>
-        <p:spPr>
-          <a:xfrm>
-            <a:off x="777240" y="1325880"/>
-            <a:ext cx="10789920" cy="5029200"/>
-          </a:xfrm>
-          <a:prstGeom prst="rect">
-            <a:avLst/>
-          </a:prstGeom>
-          <a:noFill/>
-        </p:spPr>
-        <p:txBody>
-          <a:bodyPr wrap="square">
-            <a:spAutoFit/>
-          </a:bodyPr>
-          <a:lstStyle/>
-          <a:p>
-            <a:pPr algn="l">
-              <a:spcAft>
-                <a:spcPts val="1200"/>
-              </a:spcAft>
-              <a:defRPr sz="1800" b="0">
-                <a:solidFill>
-                  <a:srgbClr val="1E2933"/>
-                </a:solidFill>
-                <a:latin typeface="Microsoft YaHei"/>
-              </a:defRPr>
-            </a:pPr>
-            <a:r>
-              <a:t>batch_runner 每步记录 state / action / keyNumbers / reason</a:t>
-            </a:r>
-          </a:p>
-          <a:p>
-            <a:pPr algn="l">
-              <a:spcAft>
-                <a:spcPts val="1200"/>
-              </a:spcAft>
-              <a:defRPr sz="1800" b="0">
-                <a:solidFill>
-                  <a:srgbClr val="1E2933"/>
-                </a:solidFill>
-                <a:latin typeface="Microsoft YaHei"/>
-              </a:defRPr>
-            </a:pPr>
-            <a:r>
-              <a:t>processed_runs_converter 从 22 个游戏的 processed-runs 生成 7 任务样本</a:t>
-            </a:r>
-          </a:p>
-          <a:p>
-            <a:pPr algn="l">
-              <a:spcAft>
-                <a:spcPts val="1200"/>
-              </a:spcAft>
-              <a:defRPr sz="1800" b="0">
-                <a:solidFill>
-                  <a:srgbClr val="1E2933"/>
-                </a:solidFill>
-                <a:latin typeface="Microsoft YaHei"/>
-              </a:defRPr>
-            </a:pPr>
-            <a:r>
-              <a:t>当前数据集：15,083 条样本，覆盖 next_probe_action / information_gain_judgment 等任务</a:t>
-            </a:r>
-          </a:p>
-          <a:p>
-            <a:pPr algn="l">
-              <a:spcAft>
-                <a:spcPts val="1200"/>
-              </a:spcAft>
-              <a:defRPr sz="1800" b="0">
-                <a:solidFill>
-                  <a:srgbClr val="1E2933"/>
-                </a:solidFill>
-                <a:latin typeface="Microsoft YaHei"/>
-              </a:defRPr>
-            </a:pPr>
-            <a:r>
-              <a:t>可直接喂给 Qwen3.5-4B/9B 与 Gemma-4-E4B 的 QLoRA 微调脚本（在 5090 服务器执行）</a:t>
-            </a:r>
-          </a:p>
-        </p:txBody>
-      </p:sp>
-      <p:sp>
-        <p:nvSpPr>
           <p:cNvPr id="7" name="Rectangle 6"/>
           <p:cNvSpPr/>
           <p:nvPr/>
@@ -18720,7 +19633,7 @@
               </a:defRPr>
             </a:pPr>
             <a:r>
-              <a:t>31/37</a:t>
+              <a:t>31/38</a:t>
             </a:r>
           </a:p>
         </p:txBody>
@@ -18815,7 +19728,7 @@
               </a:defRPr>
             </a:pPr>
             <a:r>
-              <a:t>游戏覆盖矩阵：22 款游戏已可驱动</a:t>
+              <a:t>跑过的轨迹 = 可复用的训练数据</a:t>
             </a:r>
           </a:p>
         </p:txBody>
@@ -18835,7 +19748,7 @@
             <a:avLst/>
           </a:prstGeom>
           <a:solidFill>
-            <a:srgbClr val="0096C7"/>
+            <a:srgbClr val="FF6B35"/>
           </a:solidFill>
           <a:ln/>
         </p:spPr>
@@ -18908,26 +19821,109 @@
       </p:sp>
       <p:sp>
         <p:nvSpPr>
-          <p:cNvPr id="6" name="Rounded Rectangle 5"/>
+          <p:cNvPr id="6" name="TextBox 5"/>
+          <p:cNvSpPr txBox="1"/>
+          <p:nvPr/>
+        </p:nvSpPr>
+        <p:spPr>
+          <a:xfrm>
+            <a:off x="777240" y="1325880"/>
+            <a:ext cx="10789920" cy="5029200"/>
+          </a:xfrm>
+          <a:prstGeom prst="rect">
+            <a:avLst/>
+          </a:prstGeom>
+          <a:noFill/>
+        </p:spPr>
+        <p:txBody>
+          <a:bodyPr wrap="square">
+            <a:spAutoFit/>
+          </a:bodyPr>
+          <a:lstStyle/>
+          <a:p>
+            <a:pPr algn="l">
+              <a:spcAft>
+                <a:spcPts val="1200"/>
+              </a:spcAft>
+              <a:defRPr sz="1800" b="0">
+                <a:solidFill>
+                  <a:srgbClr val="1E2933"/>
+                </a:solidFill>
+                <a:latin typeface="Microsoft YaHei"/>
+              </a:defRPr>
+            </a:pPr>
+            <a:r>
+              <a:t>batch_runner 每步记录 state / action / keyNumbers / reason</a:t>
+            </a:r>
+          </a:p>
+          <a:p>
+            <a:pPr algn="l">
+              <a:spcAft>
+                <a:spcPts val="1200"/>
+              </a:spcAft>
+              <a:defRPr sz="1800" b="0">
+                <a:solidFill>
+                  <a:srgbClr val="1E2933"/>
+                </a:solidFill>
+                <a:latin typeface="Microsoft YaHei"/>
+              </a:defRPr>
+            </a:pPr>
+            <a:r>
+              <a:t>processed_runs_converter 从 22 个游戏的 processed-runs 生成 7 任务样本</a:t>
+            </a:r>
+          </a:p>
+          <a:p>
+            <a:pPr algn="l">
+              <a:spcAft>
+                <a:spcPts val="1200"/>
+              </a:spcAft>
+              <a:defRPr sz="1800" b="0">
+                <a:solidFill>
+                  <a:srgbClr val="1E2933"/>
+                </a:solidFill>
+                <a:latin typeface="Microsoft YaHei"/>
+              </a:defRPr>
+            </a:pPr>
+            <a:r>
+              <a:t>当前数据集：15,083 条样本，覆盖 next_probe_action / information_gain_judgment 等任务</a:t>
+            </a:r>
+          </a:p>
+          <a:p>
+            <a:pPr algn="l">
+              <a:spcAft>
+                <a:spcPts val="1200"/>
+              </a:spcAft>
+              <a:defRPr sz="1800" b="0">
+                <a:solidFill>
+                  <a:srgbClr val="1E2933"/>
+                </a:solidFill>
+                <a:latin typeface="Microsoft YaHei"/>
+              </a:defRPr>
+            </a:pPr>
+            <a:r>
+              <a:t>可直接喂给 Qwen3.5-4B/9B 与 Gemma-4-E4B 的 QLoRA 微调脚本（在 5090 服务器执行）</a:t>
+            </a:r>
+          </a:p>
+        </p:txBody>
+      </p:sp>
+      <p:sp>
+        <p:nvSpPr>
+          <p:cNvPr id="7" name="Rectangle 6"/>
           <p:cNvSpPr/>
           <p:nvPr/>
         </p:nvSpPr>
         <p:spPr>
           <a:xfrm>
-            <a:off x="594360" y="1371600"/>
-            <a:ext cx="11064240" cy="1920240"/>
-          </a:xfrm>
-          <a:prstGeom prst="roundRect">
-            <a:avLst/>
-          </a:prstGeom>
-          <a:solidFill>
-            <a:srgbClr val="FFFFFF"/>
-          </a:solidFill>
-          <a:ln w="25400">
-            <a:solidFill>
-              <a:srgbClr val="1A237E"/>
-            </a:solidFill>
-          </a:ln>
+            <a:off x="0" y="6537960"/>
+            <a:ext cx="12191695" cy="18288"/>
+          </a:xfrm>
+          <a:prstGeom prst="rect">
+            <a:avLst/>
+          </a:prstGeom>
+          <a:solidFill>
+            <a:srgbClr val="0096C7"/>
+          </a:solidFill>
+          <a:ln/>
         </p:spPr>
         <p:style>
           <a:lnRef idx="1">
@@ -18953,65 +19949,14 @@
       </p:sp>
       <p:sp>
         <p:nvSpPr>
-          <p:cNvPr id="7" name="Rounded Rectangle 6"/>
-          <p:cNvSpPr/>
-          <p:nvPr/>
-        </p:nvSpPr>
-        <p:spPr>
-          <a:xfrm>
-            <a:off x="777240" y="1554480"/>
-            <a:ext cx="1645920" cy="411480"/>
-          </a:xfrm>
-          <a:prstGeom prst="roundRect">
-            <a:avLst/>
-          </a:prstGeom>
-          <a:solidFill>
-            <a:srgbClr val="1A237E"/>
-          </a:solidFill>
-          <a:ln/>
-        </p:spPr>
-        <p:style>
-          <a:lnRef idx="1">
-            <a:schemeClr val="accent1"/>
-          </a:lnRef>
-          <a:fillRef idx="3">
-            <a:schemeClr val="accent1"/>
-          </a:fillRef>
-          <a:effectRef idx="2">
-            <a:schemeClr val="accent1"/>
-          </a:effectRef>
-          <a:fontRef idx="minor">
-            <a:schemeClr val="lt1"/>
-          </a:fontRef>
-        </p:style>
-        <p:txBody>
-          <a:bodyPr rtlCol="0" anchor="ctr"/>
-          <a:lstStyle/>
-          <a:p>
-            <a:pPr algn="ctr">
-              <a:defRPr sz="1300" b="1">
-                <a:solidFill>
-                  <a:srgbClr val="F3F6F9"/>
-                </a:solidFill>
-                <a:latin typeface="Microsoft YaHei"/>
-              </a:defRPr>
-            </a:pPr>
-            <a:r>
-              <a:t>A 类 joystick · 7 款</a:t>
-            </a:r>
-          </a:p>
-        </p:txBody>
-      </p:sp>
-      <p:sp>
-        <p:nvSpPr>
           <p:cNvPr id="8" name="TextBox 7"/>
           <p:cNvSpPr txBox="1"/>
           <p:nvPr/>
         </p:nvSpPr>
         <p:spPr>
           <a:xfrm>
-            <a:off x="777240" y="2057400"/>
-            <a:ext cx="10698480" cy="1097280"/>
+            <a:off x="457200" y="6583680"/>
+            <a:ext cx="3657600" cy="228600"/>
           </a:xfrm>
           <a:prstGeom prst="rect">
             <a:avLst/>
@@ -19025,125 +19970,29 @@
           <a:lstStyle/>
           <a:p>
             <a:pPr algn="l">
-              <a:defRPr sz="1400" b="0">
-                <a:solidFill>
-                  <a:srgbClr val="1E2933"/>
-                </a:solidFill>
-                <a:latin typeface="Microsoft YaHei"/>
-              </a:defRPr>
-            </a:pPr>
-            <a:r>
-              <a:t>00440 / 00461 / 00483 / 00496 / 00517 / 00522 / 00736</a:t>
-            </a:r>
-          </a:p>
-        </p:txBody>
-      </p:sp>
-      <p:sp>
-        <p:nvSpPr>
-          <p:cNvPr id="9" name="Rounded Rectangle 8"/>
-          <p:cNvSpPr/>
-          <p:nvPr/>
-        </p:nvSpPr>
-        <p:spPr>
-          <a:xfrm>
-            <a:off x="594360" y="3566160"/>
-            <a:ext cx="11064240" cy="1920240"/>
-          </a:xfrm>
-          <a:prstGeom prst="roundRect">
-            <a:avLst/>
-          </a:prstGeom>
-          <a:solidFill>
-            <a:srgbClr val="FFFFFF"/>
-          </a:solidFill>
-          <a:ln w="25400">
-            <a:solidFill>
-              <a:srgbClr val="0096C7"/>
-            </a:solidFill>
-          </a:ln>
-        </p:spPr>
-        <p:style>
-          <a:lnRef idx="1">
-            <a:schemeClr val="accent1"/>
-          </a:lnRef>
-          <a:fillRef idx="3">
-            <a:schemeClr val="accent1"/>
-          </a:fillRef>
-          <a:effectRef idx="2">
-            <a:schemeClr val="accent1"/>
-          </a:effectRef>
-          <a:fontRef idx="minor">
-            <a:schemeClr val="lt1"/>
-          </a:fontRef>
-        </p:style>
-        <p:txBody>
-          <a:bodyPr rtlCol="0" anchor="ctr"/>
-          <a:lstStyle/>
-          <a:p>
-            <a:pPr algn="ctr"/>
-          </a:p>
-        </p:txBody>
-      </p:sp>
-      <p:sp>
-        <p:nvSpPr>
-          <p:cNvPr id="10" name="Rounded Rectangle 9"/>
-          <p:cNvSpPr/>
-          <p:nvPr/>
-        </p:nvSpPr>
-        <p:spPr>
-          <a:xfrm>
-            <a:off x="777240" y="3749039"/>
-            <a:ext cx="1645920" cy="411480"/>
-          </a:xfrm>
-          <a:prstGeom prst="roundRect">
-            <a:avLst/>
-          </a:prstGeom>
-          <a:solidFill>
-            <a:srgbClr val="0096C7"/>
-          </a:solidFill>
-          <a:ln/>
-        </p:spPr>
-        <p:style>
-          <a:lnRef idx="1">
-            <a:schemeClr val="accent1"/>
-          </a:lnRef>
-          <a:fillRef idx="3">
-            <a:schemeClr val="accent1"/>
-          </a:fillRef>
-          <a:effectRef idx="2">
-            <a:schemeClr val="accent1"/>
-          </a:effectRef>
-          <a:fontRef idx="minor">
-            <a:schemeClr val="lt1"/>
-          </a:fontRef>
-        </p:style>
-        <p:txBody>
-          <a:bodyPr rtlCol="0" anchor="ctr"/>
-          <a:lstStyle/>
-          <a:p>
-            <a:pPr algn="ctr">
-              <a:defRPr sz="1300" b="1">
-                <a:solidFill>
-                  <a:srgbClr val="F3F6F9"/>
-                </a:solidFill>
-                <a:latin typeface="Microsoft YaHei"/>
-              </a:defRPr>
-            </a:pPr>
-            <a:r>
-              <a:t>B 类 tap-only · 15 款</a:t>
-            </a:r>
-          </a:p>
-        </p:txBody>
-      </p:sp>
-      <p:sp>
-        <p:nvSpPr>
-          <p:cNvPr id="11" name="TextBox 10"/>
+              <a:defRPr sz="1000" b="0">
+                <a:solidFill>
+                  <a:srgbClr val="6C757D"/>
+                </a:solidFill>
+                <a:latin typeface="Microsoft YaHei"/>
+              </a:defRPr>
+            </a:pPr>
+            <a:r>
+              <a:t>smallgameagent · LLM/VLM + 规则驱动</a:t>
+            </a:r>
+          </a:p>
+        </p:txBody>
+      </p:sp>
+      <p:sp>
+        <p:nvSpPr>
+          <p:cNvPr id="9" name="TextBox 8"/>
           <p:cNvSpPr txBox="1"/>
           <p:nvPr/>
         </p:nvSpPr>
         <p:spPr>
           <a:xfrm>
-            <a:off x="777240" y="4251960"/>
-            <a:ext cx="10698480" cy="1097280"/>
+            <a:off x="10789920" y="6583680"/>
+            <a:ext cx="914400" cy="228600"/>
           </a:xfrm>
           <a:prstGeom prst="rect">
             <a:avLst/>
@@ -19156,119 +20005,6 @@
           </a:bodyPr>
           <a:lstStyle/>
           <a:p>
-            <a:pPr algn="l">
-              <a:defRPr sz="1400" b="0">
-                <a:solidFill>
-                  <a:srgbClr val="1E2933"/>
-                </a:solidFill>
-                <a:latin typeface="Microsoft YaHei"/>
-              </a:defRPr>
-            </a:pPr>
-            <a:r>
-              <a:t>00219 / 00332 / 00342 / 00382 / 00394 / 00427 / 00434 / 00475 / 00482 / 00526 / 00532 / 00594 / 00669 / 00733 / 00742</a:t>
-            </a:r>
-          </a:p>
-        </p:txBody>
-      </p:sp>
-      <p:sp>
-        <p:nvSpPr>
-          <p:cNvPr id="12" name="Rectangle 11"/>
-          <p:cNvSpPr/>
-          <p:nvPr/>
-        </p:nvSpPr>
-        <p:spPr>
-          <a:xfrm>
-            <a:off x="0" y="6537960"/>
-            <a:ext cx="12191695" cy="18288"/>
-          </a:xfrm>
-          <a:prstGeom prst="rect">
-            <a:avLst/>
-          </a:prstGeom>
-          <a:solidFill>
-            <a:srgbClr val="0096C7"/>
-          </a:solidFill>
-          <a:ln/>
-        </p:spPr>
-        <p:style>
-          <a:lnRef idx="1">
-            <a:schemeClr val="accent1"/>
-          </a:lnRef>
-          <a:fillRef idx="3">
-            <a:schemeClr val="accent1"/>
-          </a:fillRef>
-          <a:effectRef idx="2">
-            <a:schemeClr val="accent1"/>
-          </a:effectRef>
-          <a:fontRef idx="minor">
-            <a:schemeClr val="lt1"/>
-          </a:fontRef>
-        </p:style>
-        <p:txBody>
-          <a:bodyPr rtlCol="0" anchor="ctr"/>
-          <a:lstStyle/>
-          <a:p>
-            <a:pPr algn="ctr"/>
-          </a:p>
-        </p:txBody>
-      </p:sp>
-      <p:sp>
-        <p:nvSpPr>
-          <p:cNvPr id="13" name="TextBox 12"/>
-          <p:cNvSpPr txBox="1"/>
-          <p:nvPr/>
-        </p:nvSpPr>
-        <p:spPr>
-          <a:xfrm>
-            <a:off x="457200" y="6583680"/>
-            <a:ext cx="3657600" cy="228600"/>
-          </a:xfrm>
-          <a:prstGeom prst="rect">
-            <a:avLst/>
-          </a:prstGeom>
-          <a:noFill/>
-        </p:spPr>
-        <p:txBody>
-          <a:bodyPr wrap="none">
-            <a:spAutoFit/>
-          </a:bodyPr>
-          <a:lstStyle/>
-          <a:p>
-            <a:pPr algn="l">
-              <a:defRPr sz="1000" b="0">
-                <a:solidFill>
-                  <a:srgbClr val="6C757D"/>
-                </a:solidFill>
-                <a:latin typeface="Microsoft YaHei"/>
-              </a:defRPr>
-            </a:pPr>
-            <a:r>
-              <a:t>smallgameagent · LLM/VLM + 规则驱动</a:t>
-            </a:r>
-          </a:p>
-        </p:txBody>
-      </p:sp>
-      <p:sp>
-        <p:nvSpPr>
-          <p:cNvPr id="14" name="TextBox 13"/>
-          <p:cNvSpPr txBox="1"/>
-          <p:nvPr/>
-        </p:nvSpPr>
-        <p:spPr>
-          <a:xfrm>
-            <a:off x="10789920" y="6583680"/>
-            <a:ext cx="914400" cy="228600"/>
-          </a:xfrm>
-          <a:prstGeom prst="rect">
-            <a:avLst/>
-          </a:prstGeom>
-          <a:noFill/>
-        </p:spPr>
-        <p:txBody>
-          <a:bodyPr wrap="none">
-            <a:spAutoFit/>
-          </a:bodyPr>
-          <a:lstStyle/>
-          <a:p>
             <a:pPr algn="r">
               <a:defRPr sz="1000" b="0">
                 <a:solidFill>
@@ -19278,7 +20014,7 @@
               </a:defRPr>
             </a:pPr>
             <a:r>
-              <a:t>32/37</a:t>
+              <a:t>32/38</a:t>
             </a:r>
           </a:p>
         </p:txBody>
@@ -19310,7 +20046,7 @@
         <p:spPr>
           <a:xfrm>
             <a:off x="0" y="0"/>
-            <a:ext cx="12191695" cy="6858000"/>
+            <a:ext cx="12191695" cy="960120"/>
           </a:xfrm>
           <a:prstGeom prst="rect">
             <a:avLst/>
@@ -19344,23 +20080,56 @@
       </p:sp>
       <p:sp>
         <p:nvSpPr>
-          <p:cNvPr id="3" name="Rectangle 2"/>
+          <p:cNvPr id="3" name="TextBox 2"/>
+          <p:cNvSpPr txBox="1"/>
+          <p:nvPr/>
+        </p:nvSpPr>
+        <p:spPr>
+          <a:xfrm>
+            <a:off x="457200" y="228600"/>
+            <a:ext cx="11247120" cy="548640"/>
+          </a:xfrm>
+          <a:prstGeom prst="rect">
+            <a:avLst/>
+          </a:prstGeom>
+          <a:noFill/>
+        </p:spPr>
+        <p:txBody>
+          <a:bodyPr wrap="none">
+            <a:spAutoFit/>
+          </a:bodyPr>
+          <a:lstStyle/>
+          <a:p>
+            <a:pPr algn="l">
+              <a:defRPr sz="3000" b="1">
+                <a:solidFill>
+                  <a:srgbClr val="F3F6F9"/>
+                </a:solidFill>
+                <a:latin typeface="Microsoft YaHei"/>
+              </a:defRPr>
+            </a:pPr>
+            <a:r>
+              <a:t>游戏覆盖矩阵：22 款游戏已可驱动</a:t>
+            </a:r>
+          </a:p>
+        </p:txBody>
+      </p:sp>
+      <p:sp>
+        <p:nvSpPr>
+          <p:cNvPr id="4" name="Rectangle 3"/>
           <p:cNvSpPr/>
           <p:nvPr/>
         </p:nvSpPr>
         <p:spPr>
           <a:xfrm>
-            <a:off x="6858000" y="-914400"/>
-            <a:ext cx="5943600" cy="8686800"/>
-          </a:xfrm>
-          <a:prstGeom prst="rect">
-            <a:avLst/>
-          </a:prstGeom>
-          <a:solidFill>
-            <a:srgbClr val="0096C7">
-              <a:lumMod val="80000"/>
-              <a:lumOff val="20000"/>
-            </a:srgbClr>
+            <a:off x="0" y="960120"/>
+            <a:ext cx="164592" cy="5897880"/>
+          </a:xfrm>
+          <a:prstGeom prst="rect">
+            <a:avLst/>
+          </a:prstGeom>
+          <a:solidFill>
+            <a:srgbClr val="0096C7"/>
           </a:solidFill>
           <a:ln/>
         </p:spPr>
@@ -19388,94 +20157,26 @@
       </p:sp>
       <p:sp>
         <p:nvSpPr>
-          <p:cNvPr id="4" name="TextBox 3"/>
-          <p:cNvSpPr txBox="1"/>
-          <p:nvPr/>
-        </p:nvSpPr>
-        <p:spPr>
-          <a:xfrm>
-            <a:off x="548640" y="1645920"/>
-            <a:ext cx="2743200" cy="1828800"/>
-          </a:xfrm>
-          <a:prstGeom prst="rect">
-            <a:avLst/>
-          </a:prstGeom>
-          <a:noFill/>
-        </p:spPr>
-        <p:txBody>
-          <a:bodyPr wrap="none">
-            <a:spAutoFit/>
-          </a:bodyPr>
-          <a:lstStyle/>
-          <a:p>
-            <a:pPr algn="l">
-              <a:defRPr sz="12000" b="1">
-                <a:solidFill>
-                  <a:srgbClr val="333DA0"/>
-                </a:solidFill>
-                <a:latin typeface="Microsoft YaHei"/>
-              </a:defRPr>
-            </a:pPr>
-            <a:r>
-              <a:t>09</a:t>
-            </a:r>
-          </a:p>
-        </p:txBody>
-      </p:sp>
-      <p:sp>
-        <p:nvSpPr>
-          <p:cNvPr id="5" name="TextBox 4"/>
-          <p:cNvSpPr txBox="1"/>
-          <p:nvPr/>
-        </p:nvSpPr>
-        <p:spPr>
-          <a:xfrm>
-            <a:off x="548640" y="2834640"/>
-            <a:ext cx="11064240" cy="1097280"/>
-          </a:xfrm>
-          <a:prstGeom prst="rect">
-            <a:avLst/>
-          </a:prstGeom>
-          <a:noFill/>
-        </p:spPr>
-        <p:txBody>
-          <a:bodyPr wrap="none">
-            <a:spAutoFit/>
-          </a:bodyPr>
-          <a:lstStyle/>
-          <a:p>
-            <a:pPr algn="l">
-              <a:defRPr sz="4400" b="1">
-                <a:solidFill>
-                  <a:srgbClr val="F3F6F9"/>
-                </a:solidFill>
-                <a:latin typeface="Microsoft YaHei"/>
-              </a:defRPr>
-            </a:pPr>
-            <a:r>
-              <a:t>路线图</a:t>
-            </a:r>
-          </a:p>
-        </p:txBody>
-      </p:sp>
-      <p:sp>
-        <p:nvSpPr>
-          <p:cNvPr id="6" name="Rectangle 5"/>
+          <p:cNvPr id="5" name="Rectangle 4"/>
           <p:cNvSpPr/>
           <p:nvPr/>
         </p:nvSpPr>
         <p:spPr>
           <a:xfrm>
-            <a:off x="548640" y="4023360"/>
-            <a:ext cx="1828800" cy="73152"/>
-          </a:xfrm>
-          <a:prstGeom prst="rect">
-            <a:avLst/>
-          </a:prstGeom>
-          <a:solidFill>
-            <a:srgbClr val="FF6B35"/>
-          </a:solidFill>
-          <a:ln/>
+            <a:off x="320040" y="1078992"/>
+            <a:ext cx="11548872" cy="5349240"/>
+          </a:xfrm>
+          <a:prstGeom prst="rect">
+            <a:avLst/>
+          </a:prstGeom>
+          <a:solidFill>
+            <a:srgbClr val="FFFFFF"/>
+          </a:solidFill>
+          <a:ln w="12700">
+            <a:solidFill>
+              <a:srgbClr val="E1E5E9"/>
+            </a:solidFill>
+          </a:ln>
         </p:spPr>
         <p:style>
           <a:lnRef idx="1">
@@ -19501,22 +20202,26 @@
       </p:sp>
       <p:sp>
         <p:nvSpPr>
-          <p:cNvPr id="7" name="Rectangle 6"/>
+          <p:cNvPr id="6" name="Rounded Rectangle 5"/>
           <p:cNvSpPr/>
           <p:nvPr/>
         </p:nvSpPr>
         <p:spPr>
           <a:xfrm>
-            <a:off x="0" y="6537960"/>
-            <a:ext cx="12191695" cy="18288"/>
-          </a:xfrm>
-          <a:prstGeom prst="rect">
-            <a:avLst/>
-          </a:prstGeom>
-          <a:solidFill>
-            <a:srgbClr val="0096C7"/>
-          </a:solidFill>
-          <a:ln/>
+            <a:off x="594360" y="1371600"/>
+            <a:ext cx="11064240" cy="1920240"/>
+          </a:xfrm>
+          <a:prstGeom prst="roundRect">
+            <a:avLst/>
+          </a:prstGeom>
+          <a:solidFill>
+            <a:srgbClr val="FFFFFF"/>
+          </a:solidFill>
+          <a:ln w="25400">
+            <a:solidFill>
+              <a:srgbClr val="1A237E"/>
+            </a:solidFill>
+          </a:ln>
         </p:spPr>
         <p:style>
           <a:lnRef idx="1">
@@ -19542,14 +20247,65 @@
       </p:sp>
       <p:sp>
         <p:nvSpPr>
+          <p:cNvPr id="7" name="Rounded Rectangle 6"/>
+          <p:cNvSpPr/>
+          <p:nvPr/>
+        </p:nvSpPr>
+        <p:spPr>
+          <a:xfrm>
+            <a:off x="777240" y="1554480"/>
+            <a:ext cx="1645920" cy="411480"/>
+          </a:xfrm>
+          <a:prstGeom prst="roundRect">
+            <a:avLst/>
+          </a:prstGeom>
+          <a:solidFill>
+            <a:srgbClr val="1A237E"/>
+          </a:solidFill>
+          <a:ln/>
+        </p:spPr>
+        <p:style>
+          <a:lnRef idx="1">
+            <a:schemeClr val="accent1"/>
+          </a:lnRef>
+          <a:fillRef idx="3">
+            <a:schemeClr val="accent1"/>
+          </a:fillRef>
+          <a:effectRef idx="2">
+            <a:schemeClr val="accent1"/>
+          </a:effectRef>
+          <a:fontRef idx="minor">
+            <a:schemeClr val="lt1"/>
+          </a:fontRef>
+        </p:style>
+        <p:txBody>
+          <a:bodyPr rtlCol="0" anchor="ctr"/>
+          <a:lstStyle/>
+          <a:p>
+            <a:pPr algn="ctr">
+              <a:defRPr sz="1300" b="1">
+                <a:solidFill>
+                  <a:srgbClr val="F3F6F9"/>
+                </a:solidFill>
+                <a:latin typeface="Microsoft YaHei"/>
+              </a:defRPr>
+            </a:pPr>
+            <a:r>
+              <a:t>A 类 joystick · 7 款</a:t>
+            </a:r>
+          </a:p>
+        </p:txBody>
+      </p:sp>
+      <p:sp>
+        <p:nvSpPr>
           <p:cNvPr id="8" name="TextBox 7"/>
           <p:cNvSpPr txBox="1"/>
           <p:nvPr/>
         </p:nvSpPr>
         <p:spPr>
           <a:xfrm>
-            <a:off x="457200" y="6583680"/>
-            <a:ext cx="3657600" cy="228600"/>
+            <a:off x="777240" y="2057400"/>
+            <a:ext cx="10698480" cy="1097280"/>
           </a:xfrm>
           <a:prstGeom prst="rect">
             <a:avLst/>
@@ -19563,29 +20319,125 @@
           <a:lstStyle/>
           <a:p>
             <a:pPr algn="l">
-              <a:defRPr sz="1000" b="0">
-                <a:solidFill>
-                  <a:srgbClr val="6C757D"/>
-                </a:solidFill>
-                <a:latin typeface="Microsoft YaHei"/>
-              </a:defRPr>
-            </a:pPr>
-            <a:r>
-              <a:t>smallgameagent · LLM/VLM + 规则驱动</a:t>
-            </a:r>
-          </a:p>
-        </p:txBody>
-      </p:sp>
-      <p:sp>
-        <p:nvSpPr>
-          <p:cNvPr id="9" name="TextBox 8"/>
+              <a:defRPr sz="1400" b="0">
+                <a:solidFill>
+                  <a:srgbClr val="1E2933"/>
+                </a:solidFill>
+                <a:latin typeface="Microsoft YaHei"/>
+              </a:defRPr>
+            </a:pPr>
+            <a:r>
+              <a:t>00440 / 00461 / 00483 / 00496 / 00517 / 00522 / 00736</a:t>
+            </a:r>
+          </a:p>
+        </p:txBody>
+      </p:sp>
+      <p:sp>
+        <p:nvSpPr>
+          <p:cNvPr id="9" name="Rounded Rectangle 8"/>
+          <p:cNvSpPr/>
+          <p:nvPr/>
+        </p:nvSpPr>
+        <p:spPr>
+          <a:xfrm>
+            <a:off x="594360" y="3566160"/>
+            <a:ext cx="11064240" cy="1920240"/>
+          </a:xfrm>
+          <a:prstGeom prst="roundRect">
+            <a:avLst/>
+          </a:prstGeom>
+          <a:solidFill>
+            <a:srgbClr val="FFFFFF"/>
+          </a:solidFill>
+          <a:ln w="25400">
+            <a:solidFill>
+              <a:srgbClr val="0096C7"/>
+            </a:solidFill>
+          </a:ln>
+        </p:spPr>
+        <p:style>
+          <a:lnRef idx="1">
+            <a:schemeClr val="accent1"/>
+          </a:lnRef>
+          <a:fillRef idx="3">
+            <a:schemeClr val="accent1"/>
+          </a:fillRef>
+          <a:effectRef idx="2">
+            <a:schemeClr val="accent1"/>
+          </a:effectRef>
+          <a:fontRef idx="minor">
+            <a:schemeClr val="lt1"/>
+          </a:fontRef>
+        </p:style>
+        <p:txBody>
+          <a:bodyPr rtlCol="0" anchor="ctr"/>
+          <a:lstStyle/>
+          <a:p>
+            <a:pPr algn="ctr"/>
+          </a:p>
+        </p:txBody>
+      </p:sp>
+      <p:sp>
+        <p:nvSpPr>
+          <p:cNvPr id="10" name="Rounded Rectangle 9"/>
+          <p:cNvSpPr/>
+          <p:nvPr/>
+        </p:nvSpPr>
+        <p:spPr>
+          <a:xfrm>
+            <a:off x="777240" y="3749039"/>
+            <a:ext cx="1645920" cy="411480"/>
+          </a:xfrm>
+          <a:prstGeom prst="roundRect">
+            <a:avLst/>
+          </a:prstGeom>
+          <a:solidFill>
+            <a:srgbClr val="0096C7"/>
+          </a:solidFill>
+          <a:ln/>
+        </p:spPr>
+        <p:style>
+          <a:lnRef idx="1">
+            <a:schemeClr val="accent1"/>
+          </a:lnRef>
+          <a:fillRef idx="3">
+            <a:schemeClr val="accent1"/>
+          </a:fillRef>
+          <a:effectRef idx="2">
+            <a:schemeClr val="accent1"/>
+          </a:effectRef>
+          <a:fontRef idx="minor">
+            <a:schemeClr val="lt1"/>
+          </a:fontRef>
+        </p:style>
+        <p:txBody>
+          <a:bodyPr rtlCol="0" anchor="ctr"/>
+          <a:lstStyle/>
+          <a:p>
+            <a:pPr algn="ctr">
+              <a:defRPr sz="1300" b="1">
+                <a:solidFill>
+                  <a:srgbClr val="F3F6F9"/>
+                </a:solidFill>
+                <a:latin typeface="Microsoft YaHei"/>
+              </a:defRPr>
+            </a:pPr>
+            <a:r>
+              <a:t>B 类 tap-only · 15 款</a:t>
+            </a:r>
+          </a:p>
+        </p:txBody>
+      </p:sp>
+      <p:sp>
+        <p:nvSpPr>
+          <p:cNvPr id="11" name="TextBox 10"/>
           <p:cNvSpPr txBox="1"/>
           <p:nvPr/>
         </p:nvSpPr>
         <p:spPr>
           <a:xfrm>
-            <a:off x="10789920" y="6583680"/>
-            <a:ext cx="914400" cy="228600"/>
+            <a:off x="777240" y="4251960"/>
+            <a:ext cx="10698480" cy="1097280"/>
           </a:xfrm>
           <a:prstGeom prst="rect">
             <a:avLst/>
@@ -19598,6 +20450,119 @@
           </a:bodyPr>
           <a:lstStyle/>
           <a:p>
+            <a:pPr algn="l">
+              <a:defRPr sz="1400" b="0">
+                <a:solidFill>
+                  <a:srgbClr val="1E2933"/>
+                </a:solidFill>
+                <a:latin typeface="Microsoft YaHei"/>
+              </a:defRPr>
+            </a:pPr>
+            <a:r>
+              <a:t>00219 / 00332 / 00342 / 00382 / 00394 / 00427 / 00434 / 00475 / 00482 / 00526 / 00532 / 00594 / 00669 / 00733 / 00742</a:t>
+            </a:r>
+          </a:p>
+        </p:txBody>
+      </p:sp>
+      <p:sp>
+        <p:nvSpPr>
+          <p:cNvPr id="12" name="Rectangle 11"/>
+          <p:cNvSpPr/>
+          <p:nvPr/>
+        </p:nvSpPr>
+        <p:spPr>
+          <a:xfrm>
+            <a:off x="0" y="6537960"/>
+            <a:ext cx="12191695" cy="18288"/>
+          </a:xfrm>
+          <a:prstGeom prst="rect">
+            <a:avLst/>
+          </a:prstGeom>
+          <a:solidFill>
+            <a:srgbClr val="0096C7"/>
+          </a:solidFill>
+          <a:ln/>
+        </p:spPr>
+        <p:style>
+          <a:lnRef idx="1">
+            <a:schemeClr val="accent1"/>
+          </a:lnRef>
+          <a:fillRef idx="3">
+            <a:schemeClr val="accent1"/>
+          </a:fillRef>
+          <a:effectRef idx="2">
+            <a:schemeClr val="accent1"/>
+          </a:effectRef>
+          <a:fontRef idx="minor">
+            <a:schemeClr val="lt1"/>
+          </a:fontRef>
+        </p:style>
+        <p:txBody>
+          <a:bodyPr rtlCol="0" anchor="ctr"/>
+          <a:lstStyle/>
+          <a:p>
+            <a:pPr algn="ctr"/>
+          </a:p>
+        </p:txBody>
+      </p:sp>
+      <p:sp>
+        <p:nvSpPr>
+          <p:cNvPr id="13" name="TextBox 12"/>
+          <p:cNvSpPr txBox="1"/>
+          <p:nvPr/>
+        </p:nvSpPr>
+        <p:spPr>
+          <a:xfrm>
+            <a:off x="457200" y="6583680"/>
+            <a:ext cx="3657600" cy="228600"/>
+          </a:xfrm>
+          <a:prstGeom prst="rect">
+            <a:avLst/>
+          </a:prstGeom>
+          <a:noFill/>
+        </p:spPr>
+        <p:txBody>
+          <a:bodyPr wrap="none">
+            <a:spAutoFit/>
+          </a:bodyPr>
+          <a:lstStyle/>
+          <a:p>
+            <a:pPr algn="l">
+              <a:defRPr sz="1000" b="0">
+                <a:solidFill>
+                  <a:srgbClr val="6C757D"/>
+                </a:solidFill>
+                <a:latin typeface="Microsoft YaHei"/>
+              </a:defRPr>
+            </a:pPr>
+            <a:r>
+              <a:t>smallgameagent · LLM/VLM + 规则驱动</a:t>
+            </a:r>
+          </a:p>
+        </p:txBody>
+      </p:sp>
+      <p:sp>
+        <p:nvSpPr>
+          <p:cNvPr id="14" name="TextBox 13"/>
+          <p:cNvSpPr txBox="1"/>
+          <p:nvPr/>
+        </p:nvSpPr>
+        <p:spPr>
+          <a:xfrm>
+            <a:off x="10789920" y="6583680"/>
+            <a:ext cx="914400" cy="228600"/>
+          </a:xfrm>
+          <a:prstGeom prst="rect">
+            <a:avLst/>
+          </a:prstGeom>
+          <a:noFill/>
+        </p:spPr>
+        <p:txBody>
+          <a:bodyPr wrap="none">
+            <a:spAutoFit/>
+          </a:bodyPr>
+          <a:lstStyle/>
+          <a:p>
             <a:pPr algn="r">
               <a:defRPr sz="1000" b="0">
                 <a:solidFill>
@@ -19607,7 +20572,7 @@
               </a:defRPr>
             </a:pPr>
             <a:r>
-              <a:t>33/37</a:t>
+              <a:t>33/38</a:t>
             </a:r>
           </a:p>
         </p:txBody>
@@ -19639,7 +20604,7 @@
         <p:spPr>
           <a:xfrm>
             <a:off x="0" y="0"/>
-            <a:ext cx="12191695" cy="960120"/>
+            <a:ext cx="12191695" cy="6858000"/>
           </a:xfrm>
           <a:prstGeom prst="rect">
             <a:avLst/>
@@ -19673,56 +20638,23 @@
       </p:sp>
       <p:sp>
         <p:nvSpPr>
-          <p:cNvPr id="3" name="TextBox 2"/>
-          <p:cNvSpPr txBox="1"/>
-          <p:nvPr/>
-        </p:nvSpPr>
-        <p:spPr>
-          <a:xfrm>
-            <a:off x="457200" y="228600"/>
-            <a:ext cx="11247120" cy="548640"/>
-          </a:xfrm>
-          <a:prstGeom prst="rect">
-            <a:avLst/>
-          </a:prstGeom>
-          <a:noFill/>
-        </p:spPr>
-        <p:txBody>
-          <a:bodyPr wrap="none">
-            <a:spAutoFit/>
-          </a:bodyPr>
-          <a:lstStyle/>
-          <a:p>
-            <a:pPr algn="l">
-              <a:defRPr sz="3000" b="1">
-                <a:solidFill>
-                  <a:srgbClr val="F3F6F9"/>
-                </a:solidFill>
-                <a:latin typeface="Microsoft YaHei"/>
-              </a:defRPr>
-            </a:pPr>
-            <a:r>
-              <a:t>技术路线图：从能跑到好用</a:t>
-            </a:r>
-          </a:p>
-        </p:txBody>
-      </p:sp>
-      <p:sp>
-        <p:nvSpPr>
-          <p:cNvPr id="4" name="Rectangle 3"/>
+          <p:cNvPr id="3" name="Rectangle 2"/>
           <p:cNvSpPr/>
           <p:nvPr/>
         </p:nvSpPr>
         <p:spPr>
           <a:xfrm>
-            <a:off x="0" y="960120"/>
-            <a:ext cx="164592" cy="5897880"/>
-          </a:xfrm>
-          <a:prstGeom prst="rect">
-            <a:avLst/>
-          </a:prstGeom>
-          <a:solidFill>
-            <a:srgbClr val="0096C7"/>
+            <a:off x="6858000" y="-914400"/>
+            <a:ext cx="5943600" cy="8686800"/>
+          </a:xfrm>
+          <a:prstGeom prst="rect">
+            <a:avLst/>
+          </a:prstGeom>
+          <a:solidFill>
+            <a:srgbClr val="0096C7">
+              <a:lumMod val="80000"/>
+              <a:lumOff val="20000"/>
+            </a:srgbClr>
           </a:solidFill>
           <a:ln/>
         </p:spPr>
@@ -19750,26 +20682,94 @@
       </p:sp>
       <p:sp>
         <p:nvSpPr>
-          <p:cNvPr id="5" name="Rectangle 4"/>
+          <p:cNvPr id="4" name="TextBox 3"/>
+          <p:cNvSpPr txBox="1"/>
+          <p:nvPr/>
+        </p:nvSpPr>
+        <p:spPr>
+          <a:xfrm>
+            <a:off x="548640" y="1645920"/>
+            <a:ext cx="2743200" cy="1828800"/>
+          </a:xfrm>
+          <a:prstGeom prst="rect">
+            <a:avLst/>
+          </a:prstGeom>
+          <a:noFill/>
+        </p:spPr>
+        <p:txBody>
+          <a:bodyPr wrap="none">
+            <a:spAutoFit/>
+          </a:bodyPr>
+          <a:lstStyle/>
+          <a:p>
+            <a:pPr algn="l">
+              <a:defRPr sz="12000" b="1">
+                <a:solidFill>
+                  <a:srgbClr val="333DA0"/>
+                </a:solidFill>
+                <a:latin typeface="Microsoft YaHei"/>
+              </a:defRPr>
+            </a:pPr>
+            <a:r>
+              <a:t>09</a:t>
+            </a:r>
+          </a:p>
+        </p:txBody>
+      </p:sp>
+      <p:sp>
+        <p:nvSpPr>
+          <p:cNvPr id="5" name="TextBox 4"/>
+          <p:cNvSpPr txBox="1"/>
+          <p:nvPr/>
+        </p:nvSpPr>
+        <p:spPr>
+          <a:xfrm>
+            <a:off x="548640" y="2834640"/>
+            <a:ext cx="11064240" cy="1097280"/>
+          </a:xfrm>
+          <a:prstGeom prst="rect">
+            <a:avLst/>
+          </a:prstGeom>
+          <a:noFill/>
+        </p:spPr>
+        <p:txBody>
+          <a:bodyPr wrap="none">
+            <a:spAutoFit/>
+          </a:bodyPr>
+          <a:lstStyle/>
+          <a:p>
+            <a:pPr algn="l">
+              <a:defRPr sz="4400" b="1">
+                <a:solidFill>
+                  <a:srgbClr val="F3F6F9"/>
+                </a:solidFill>
+                <a:latin typeface="Microsoft YaHei"/>
+              </a:defRPr>
+            </a:pPr>
+            <a:r>
+              <a:t>路线图</a:t>
+            </a:r>
+          </a:p>
+        </p:txBody>
+      </p:sp>
+      <p:sp>
+        <p:nvSpPr>
+          <p:cNvPr id="6" name="Rectangle 5"/>
           <p:cNvSpPr/>
           <p:nvPr/>
         </p:nvSpPr>
         <p:spPr>
           <a:xfrm>
-            <a:off x="320040" y="1078992"/>
-            <a:ext cx="11548872" cy="5349240"/>
-          </a:xfrm>
-          <a:prstGeom prst="rect">
-            <a:avLst/>
-          </a:prstGeom>
-          <a:solidFill>
-            <a:srgbClr val="FFFFFF"/>
-          </a:solidFill>
-          <a:ln w="12700">
-            <a:solidFill>
-              <a:srgbClr val="E1E5E9"/>
-            </a:solidFill>
-          </a:ln>
+            <a:off x="548640" y="4023360"/>
+            <a:ext cx="1828800" cy="73152"/>
+          </a:xfrm>
+          <a:prstGeom prst="rect">
+            <a:avLst/>
+          </a:prstGeom>
+          <a:solidFill>
+            <a:srgbClr val="FF6B35"/>
+          </a:solidFill>
+          <a:ln/>
         </p:spPr>
         <p:style>
           <a:lnRef idx="1">
@@ -19795,20 +20795,20 @@
       </p:sp>
       <p:sp>
         <p:nvSpPr>
-          <p:cNvPr id="6" name="Rectangle 5"/>
+          <p:cNvPr id="7" name="Rectangle 6"/>
           <p:cNvSpPr/>
           <p:nvPr/>
         </p:nvSpPr>
         <p:spPr>
           <a:xfrm>
-            <a:off x="777240" y="3200400"/>
-            <a:ext cx="10972800" cy="73152"/>
-          </a:xfrm>
-          <a:prstGeom prst="rect">
-            <a:avLst/>
-          </a:prstGeom>
-          <a:solidFill>
-            <a:srgbClr val="6C757D"/>
+            <a:off x="0" y="6537960"/>
+            <a:ext cx="12191695" cy="18288"/>
+          </a:xfrm>
+          <a:prstGeom prst="rect">
+            <a:avLst/>
+          </a:prstGeom>
+          <a:solidFill>
+            <a:srgbClr val="0096C7"/>
           </a:solidFill>
           <a:ln/>
         </p:spPr>
@@ -19836,55 +20836,14 @@
       </p:sp>
       <p:sp>
         <p:nvSpPr>
-          <p:cNvPr id="7" name="Oval 6"/>
-          <p:cNvSpPr/>
-          <p:nvPr/>
-        </p:nvSpPr>
-        <p:spPr>
-          <a:xfrm>
-            <a:off x="822960" y="3063240"/>
-            <a:ext cx="320040" cy="320040"/>
-          </a:xfrm>
-          <a:prstGeom prst="ellipse">
-            <a:avLst/>
-          </a:prstGeom>
-          <a:solidFill>
-            <a:srgbClr val="28A745"/>
-          </a:solidFill>
-          <a:ln/>
-        </p:spPr>
-        <p:style>
-          <a:lnRef idx="1">
-            <a:schemeClr val="accent1"/>
-          </a:lnRef>
-          <a:fillRef idx="3">
-            <a:schemeClr val="accent1"/>
-          </a:fillRef>
-          <a:effectRef idx="2">
-            <a:schemeClr val="accent1"/>
-          </a:effectRef>
-          <a:fontRef idx="minor">
-            <a:schemeClr val="lt1"/>
-          </a:fontRef>
-        </p:style>
-        <p:txBody>
-          <a:bodyPr rtlCol="0" anchor="ctr"/>
-          <a:lstStyle/>
-          <a:p>
-            <a:pPr algn="ctr"/>
-          </a:p>
-        </p:txBody>
-      </p:sp>
-      <p:sp>
-        <p:nvSpPr>
           <p:cNvPr id="8" name="TextBox 7"/>
           <p:cNvSpPr txBox="1"/>
           <p:nvPr/>
         </p:nvSpPr>
         <p:spPr>
           <a:xfrm>
-            <a:off x="320040" y="2103120"/>
-            <a:ext cx="1645920" cy="457200"/>
+            <a:off x="457200" y="6583680"/>
+            <a:ext cx="3657600" cy="228600"/>
           </a:xfrm>
           <a:prstGeom prst="rect">
             <a:avLst/>
@@ -19897,16 +20856,16 @@
           </a:bodyPr>
           <a:lstStyle/>
           <a:p>
-            <a:pPr algn="ctr">
-              <a:defRPr sz="1300" b="1">
-                <a:solidFill>
-                  <a:srgbClr val="28A745"/>
-                </a:solidFill>
-                <a:latin typeface="Microsoft YaHei"/>
-              </a:defRPr>
-            </a:pPr>
-            <a:r>
-              <a:t>已完成</a:t>
+            <a:pPr algn="l">
+              <a:defRPr sz="1000" b="0">
+                <a:solidFill>
+                  <a:srgbClr val="6C757D"/>
+                </a:solidFill>
+                <a:latin typeface="Microsoft YaHei"/>
+              </a:defRPr>
+            </a:pPr>
+            <a:r>
+              <a:t>smallgameagent · LLM/VLM + 规则驱动</a:t>
             </a:r>
           </a:p>
         </p:txBody>
@@ -19919,8 +20878,8 @@
         </p:nvSpPr>
         <p:spPr>
           <a:xfrm>
-            <a:off x="91439" y="3474720"/>
-            <a:ext cx="2194560" cy="1188720"/>
+            <a:off x="10789920" y="6583680"/>
+            <a:ext cx="914400" cy="228600"/>
           </a:xfrm>
           <a:prstGeom prst="rect">
             <a:avLst/>
@@ -19933,642 +20892,6 @@
           </a:bodyPr>
           <a:lstStyle/>
           <a:p>
-            <a:pPr algn="ctr">
-              <a:defRPr sz="1200" b="0">
-                <a:solidFill>
-                  <a:srgbClr val="1E2933"/>
-                </a:solidFill>
-                <a:latin typeface="Microsoft YaHei"/>
-              </a:defRPr>
-            </a:pPr>
-            <a:r>
-              <a:t>规则引擎 + 自动校准</a:t>
-            </a:r>
-            <a:br/>
-            <a:r>
-              <a:t>22 游戏可驱动</a:t>
-            </a:r>
-          </a:p>
-        </p:txBody>
-      </p:sp>
-      <p:sp>
-        <p:nvSpPr>
-          <p:cNvPr id="10" name="Oval 9"/>
-          <p:cNvSpPr/>
-          <p:nvPr/>
-        </p:nvSpPr>
-        <p:spPr>
-          <a:xfrm>
-            <a:off x="3108960" y="3063240"/>
-            <a:ext cx="320040" cy="320040"/>
-          </a:xfrm>
-          <a:prstGeom prst="ellipse">
-            <a:avLst/>
-          </a:prstGeom>
-          <a:solidFill>
-            <a:srgbClr val="28A745"/>
-          </a:solidFill>
-          <a:ln/>
-        </p:spPr>
-        <p:style>
-          <a:lnRef idx="1">
-            <a:schemeClr val="accent1"/>
-          </a:lnRef>
-          <a:fillRef idx="3">
-            <a:schemeClr val="accent1"/>
-          </a:fillRef>
-          <a:effectRef idx="2">
-            <a:schemeClr val="accent1"/>
-          </a:effectRef>
-          <a:fontRef idx="minor">
-            <a:schemeClr val="lt1"/>
-          </a:fontRef>
-        </p:style>
-        <p:txBody>
-          <a:bodyPr rtlCol="0" anchor="ctr"/>
-          <a:lstStyle/>
-          <a:p>
-            <a:pPr algn="ctr"/>
-          </a:p>
-        </p:txBody>
-      </p:sp>
-      <p:sp>
-        <p:nvSpPr>
-          <p:cNvPr id="11" name="TextBox 10"/>
-          <p:cNvSpPr txBox="1"/>
-          <p:nvPr/>
-        </p:nvSpPr>
-        <p:spPr>
-          <a:xfrm>
-            <a:off x="2606039" y="2103120"/>
-            <a:ext cx="1645920" cy="457200"/>
-          </a:xfrm>
-          <a:prstGeom prst="rect">
-            <a:avLst/>
-          </a:prstGeom>
-          <a:noFill/>
-        </p:spPr>
-        <p:txBody>
-          <a:bodyPr wrap="none">
-            <a:spAutoFit/>
-          </a:bodyPr>
-          <a:lstStyle/>
-          <a:p>
-            <a:pPr algn="ctr">
-              <a:defRPr sz="1300" b="1">
-                <a:solidFill>
-                  <a:srgbClr val="28A745"/>
-                </a:solidFill>
-                <a:latin typeface="Microsoft YaHei"/>
-              </a:defRPr>
-            </a:pPr>
-            <a:r>
-              <a:t>已完成</a:t>
-            </a:r>
-          </a:p>
-        </p:txBody>
-      </p:sp>
-      <p:sp>
-        <p:nvSpPr>
-          <p:cNvPr id="12" name="TextBox 11"/>
-          <p:cNvSpPr txBox="1"/>
-          <p:nvPr/>
-        </p:nvSpPr>
-        <p:spPr>
-          <a:xfrm>
-            <a:off x="2377439" y="3474720"/>
-            <a:ext cx="2194560" cy="1188720"/>
-          </a:xfrm>
-          <a:prstGeom prst="rect">
-            <a:avLst/>
-          </a:prstGeom>
-          <a:noFill/>
-        </p:spPr>
-        <p:txBody>
-          <a:bodyPr wrap="none">
-            <a:spAutoFit/>
-          </a:bodyPr>
-          <a:lstStyle/>
-          <a:p>
-            <a:pPr algn="ctr">
-              <a:defRPr sz="1200" b="0">
-                <a:solidFill>
-                  <a:srgbClr val="1E2933"/>
-                </a:solidFill>
-                <a:latin typeface="Microsoft YaHei"/>
-              </a:defRPr>
-            </a:pPr>
-            <a:r>
-              <a:t>multi-bus-memory</a:t>
-            </a:r>
-            <a:br/>
-            <a:r>
-              <a:t>记忆读回 0.300</a:t>
-            </a:r>
-          </a:p>
-        </p:txBody>
-      </p:sp>
-      <p:sp>
-        <p:nvSpPr>
-          <p:cNvPr id="13" name="Oval 12"/>
-          <p:cNvSpPr/>
-          <p:nvPr/>
-        </p:nvSpPr>
-        <p:spPr>
-          <a:xfrm>
-            <a:off x="5394960" y="3063240"/>
-            <a:ext cx="320040" cy="320040"/>
-          </a:xfrm>
-          <a:prstGeom prst="ellipse">
-            <a:avLst/>
-          </a:prstGeom>
-          <a:solidFill>
-            <a:srgbClr val="28A745"/>
-          </a:solidFill>
-          <a:ln/>
-        </p:spPr>
-        <p:style>
-          <a:lnRef idx="1">
-            <a:schemeClr val="accent1"/>
-          </a:lnRef>
-          <a:fillRef idx="3">
-            <a:schemeClr val="accent1"/>
-          </a:fillRef>
-          <a:effectRef idx="2">
-            <a:schemeClr val="accent1"/>
-          </a:effectRef>
-          <a:fontRef idx="minor">
-            <a:schemeClr val="lt1"/>
-          </a:fontRef>
-        </p:style>
-        <p:txBody>
-          <a:bodyPr rtlCol="0" anchor="ctr"/>
-          <a:lstStyle/>
-          <a:p>
-            <a:pPr algn="ctr"/>
-          </a:p>
-        </p:txBody>
-      </p:sp>
-      <p:sp>
-        <p:nvSpPr>
-          <p:cNvPr id="14" name="TextBox 13"/>
-          <p:cNvSpPr txBox="1"/>
-          <p:nvPr/>
-        </p:nvSpPr>
-        <p:spPr>
-          <a:xfrm>
-            <a:off x="4892040" y="2103120"/>
-            <a:ext cx="1645920" cy="457200"/>
-          </a:xfrm>
-          <a:prstGeom prst="rect">
-            <a:avLst/>
-          </a:prstGeom>
-          <a:noFill/>
-        </p:spPr>
-        <p:txBody>
-          <a:bodyPr wrap="none">
-            <a:spAutoFit/>
-          </a:bodyPr>
-          <a:lstStyle/>
-          <a:p>
-            <a:pPr algn="ctr">
-              <a:defRPr sz="1300" b="1">
-                <a:solidFill>
-                  <a:srgbClr val="28A745"/>
-                </a:solidFill>
-                <a:latin typeface="Microsoft YaHei"/>
-              </a:defRPr>
-            </a:pPr>
-            <a:r>
-              <a:t>已完成</a:t>
-            </a:r>
-          </a:p>
-        </p:txBody>
-      </p:sp>
-      <p:sp>
-        <p:nvSpPr>
-          <p:cNvPr id="15" name="TextBox 14"/>
-          <p:cNvSpPr txBox="1"/>
-          <p:nvPr/>
-        </p:nvSpPr>
-        <p:spPr>
-          <a:xfrm>
-            <a:off x="4663440" y="3474720"/>
-            <a:ext cx="2194560" cy="1188720"/>
-          </a:xfrm>
-          <a:prstGeom prst="rect">
-            <a:avLst/>
-          </a:prstGeom>
-          <a:noFill/>
-        </p:spPr>
-        <p:txBody>
-          <a:bodyPr wrap="none">
-            <a:spAutoFit/>
-          </a:bodyPr>
-          <a:lstStyle/>
-          <a:p>
-            <a:pPr algn="ctr">
-              <a:defRPr sz="1200" b="0">
-                <a:solidFill>
-                  <a:srgbClr val="1E2933"/>
-                </a:solidFill>
-                <a:latin typeface="Microsoft YaHei"/>
-              </a:defRPr>
-            </a:pPr>
-            <a:r>
-              <a:t>L2 code-file 更新</a:t>
-            </a:r>
-            <a:br/>
-            <a:r>
-              <a:t>qwen/kimi/xiaomi/opencodego 验证</a:t>
-            </a:r>
-          </a:p>
-        </p:txBody>
-      </p:sp>
-      <p:sp>
-        <p:nvSpPr>
-          <p:cNvPr id="16" name="Oval 15"/>
-          <p:cNvSpPr/>
-          <p:nvPr/>
-        </p:nvSpPr>
-        <p:spPr>
-          <a:xfrm>
-            <a:off x="7680960" y="3063240"/>
-            <a:ext cx="320040" cy="320040"/>
-          </a:xfrm>
-          <a:prstGeom prst="ellipse">
-            <a:avLst/>
-          </a:prstGeom>
-          <a:solidFill>
-            <a:srgbClr val="FF6B35"/>
-          </a:solidFill>
-          <a:ln/>
-        </p:spPr>
-        <p:style>
-          <a:lnRef idx="1">
-            <a:schemeClr val="accent1"/>
-          </a:lnRef>
-          <a:fillRef idx="3">
-            <a:schemeClr val="accent1"/>
-          </a:fillRef>
-          <a:effectRef idx="2">
-            <a:schemeClr val="accent1"/>
-          </a:effectRef>
-          <a:fontRef idx="minor">
-            <a:schemeClr val="lt1"/>
-          </a:fontRef>
-        </p:style>
-        <p:txBody>
-          <a:bodyPr rtlCol="0" anchor="ctr"/>
-          <a:lstStyle/>
-          <a:p>
-            <a:pPr algn="ctr"/>
-          </a:p>
-        </p:txBody>
-      </p:sp>
-      <p:sp>
-        <p:nvSpPr>
-          <p:cNvPr id="17" name="TextBox 16"/>
-          <p:cNvSpPr txBox="1"/>
-          <p:nvPr/>
-        </p:nvSpPr>
-        <p:spPr>
-          <a:xfrm>
-            <a:off x="7178040" y="2103120"/>
-            <a:ext cx="1645920" cy="457200"/>
-          </a:xfrm>
-          <a:prstGeom prst="rect">
-            <a:avLst/>
-          </a:prstGeom>
-          <a:noFill/>
-        </p:spPr>
-        <p:txBody>
-          <a:bodyPr wrap="none">
-            <a:spAutoFit/>
-          </a:bodyPr>
-          <a:lstStyle/>
-          <a:p>
-            <a:pPr algn="ctr">
-              <a:defRPr sz="1300" b="1">
-                <a:solidFill>
-                  <a:srgbClr val="FF6B35"/>
-                </a:solidFill>
-                <a:latin typeface="Microsoft YaHei"/>
-              </a:defRPr>
-            </a:pPr>
-            <a:r>
-              <a:t>进行中</a:t>
-            </a:r>
-          </a:p>
-        </p:txBody>
-      </p:sp>
-      <p:sp>
-        <p:nvSpPr>
-          <p:cNvPr id="18" name="TextBox 17"/>
-          <p:cNvSpPr txBox="1"/>
-          <p:nvPr/>
-        </p:nvSpPr>
-        <p:spPr>
-          <a:xfrm>
-            <a:off x="6949440" y="3474720"/>
-            <a:ext cx="2194560" cy="1188720"/>
-          </a:xfrm>
-          <a:prstGeom prst="rect">
-            <a:avLst/>
-          </a:prstGeom>
-          <a:noFill/>
-        </p:spPr>
-        <p:txBody>
-          <a:bodyPr wrap="none">
-            <a:spAutoFit/>
-          </a:bodyPr>
-          <a:lstStyle/>
-          <a:p>
-            <a:pPr algn="ctr">
-              <a:defRPr sz="1200" b="0">
-                <a:solidFill>
-                  <a:srgbClr val="1E2933"/>
-                </a:solidFill>
-                <a:latin typeface="Microsoft YaHei"/>
-              </a:defRPr>
-            </a:pPr>
-            <a:r>
-              <a:t>本地 VLM 上下文</a:t>
-            </a:r>
-            <a:br/>
-            <a:r>
-              <a:t>QLoRA 微调准备</a:t>
-            </a:r>
-          </a:p>
-        </p:txBody>
-      </p:sp>
-      <p:sp>
-        <p:nvSpPr>
-          <p:cNvPr id="19" name="Oval 18"/>
-          <p:cNvSpPr/>
-          <p:nvPr/>
-        </p:nvSpPr>
-        <p:spPr>
-          <a:xfrm>
-            <a:off x="9966960" y="3063240"/>
-            <a:ext cx="320040" cy="320040"/>
-          </a:xfrm>
-          <a:prstGeom prst="ellipse">
-            <a:avLst/>
-          </a:prstGeom>
-          <a:solidFill>
-            <a:srgbClr val="0096C7"/>
-          </a:solidFill>
-          <a:ln/>
-        </p:spPr>
-        <p:style>
-          <a:lnRef idx="1">
-            <a:schemeClr val="accent1"/>
-          </a:lnRef>
-          <a:fillRef idx="3">
-            <a:schemeClr val="accent1"/>
-          </a:fillRef>
-          <a:effectRef idx="2">
-            <a:schemeClr val="accent1"/>
-          </a:effectRef>
-          <a:fontRef idx="minor">
-            <a:schemeClr val="lt1"/>
-          </a:fontRef>
-        </p:style>
-        <p:txBody>
-          <a:bodyPr rtlCol="0" anchor="ctr"/>
-          <a:lstStyle/>
-          <a:p>
-            <a:pPr algn="ctr"/>
-          </a:p>
-        </p:txBody>
-      </p:sp>
-      <p:sp>
-        <p:nvSpPr>
-          <p:cNvPr id="20" name="TextBox 19"/>
-          <p:cNvSpPr txBox="1"/>
-          <p:nvPr/>
-        </p:nvSpPr>
-        <p:spPr>
-          <a:xfrm>
-            <a:off x="9464040" y="2103120"/>
-            <a:ext cx="1645920" cy="457200"/>
-          </a:xfrm>
-          <a:prstGeom prst="rect">
-            <a:avLst/>
-          </a:prstGeom>
-          <a:noFill/>
-        </p:spPr>
-        <p:txBody>
-          <a:bodyPr wrap="none">
-            <a:spAutoFit/>
-          </a:bodyPr>
-          <a:lstStyle/>
-          <a:p>
-            <a:pPr algn="ctr">
-              <a:defRPr sz="1300" b="1">
-                <a:solidFill>
-                  <a:srgbClr val="0096C7"/>
-                </a:solidFill>
-                <a:latin typeface="Microsoft YaHei"/>
-              </a:defRPr>
-            </a:pPr>
-            <a:r>
-              <a:t>下一步</a:t>
-            </a:r>
-          </a:p>
-        </p:txBody>
-      </p:sp>
-      <p:sp>
-        <p:nvSpPr>
-          <p:cNvPr id="21" name="TextBox 20"/>
-          <p:cNvSpPr txBox="1"/>
-          <p:nvPr/>
-        </p:nvSpPr>
-        <p:spPr>
-          <a:xfrm>
-            <a:off x="9235440" y="3474720"/>
-            <a:ext cx="2194560" cy="1188720"/>
-          </a:xfrm>
-          <a:prstGeom prst="rect">
-            <a:avLst/>
-          </a:prstGeom>
-          <a:noFill/>
-        </p:spPr>
-        <p:txBody>
-          <a:bodyPr wrap="none">
-            <a:spAutoFit/>
-          </a:bodyPr>
-          <a:lstStyle/>
-          <a:p>
-            <a:pPr algn="ctr">
-              <a:defRPr sz="1200" b="0">
-                <a:solidFill>
-                  <a:srgbClr val="1E2933"/>
-                </a:solidFill>
-                <a:latin typeface="Microsoft YaHei"/>
-              </a:defRPr>
-            </a:pPr>
-            <a:r>
-              <a:t>真实游戏在线触发</a:t>
-            </a:r>
-            <a:br/>
-            <a:r>
-              <a:t>规则更新 + A/B 回归</a:t>
-            </a:r>
-          </a:p>
-        </p:txBody>
-      </p:sp>
-      <p:sp>
-        <p:nvSpPr>
-          <p:cNvPr id="22" name="Rounded Rectangle 21"/>
-          <p:cNvSpPr/>
-          <p:nvPr/>
-        </p:nvSpPr>
-        <p:spPr>
-          <a:xfrm>
-            <a:off x="777240" y="5074920"/>
-            <a:ext cx="10972800" cy="822960"/>
-          </a:xfrm>
-          <a:prstGeom prst="roundRect">
-            <a:avLst/>
-          </a:prstGeom>
-          <a:solidFill>
-            <a:srgbClr val="F3F6F9"/>
-          </a:solidFill>
-          <a:ln/>
-        </p:spPr>
-        <p:style>
-          <a:lnRef idx="1">
-            <a:schemeClr val="accent1"/>
-          </a:lnRef>
-          <a:fillRef idx="3">
-            <a:schemeClr val="accent1"/>
-          </a:fillRef>
-          <a:effectRef idx="2">
-            <a:schemeClr val="accent1"/>
-          </a:effectRef>
-          <a:fontRef idx="minor">
-            <a:schemeClr val="lt1"/>
-          </a:fontRef>
-        </p:style>
-        <p:txBody>
-          <a:bodyPr rtlCol="0" anchor="ctr"/>
-          <a:lstStyle/>
-          <a:p>
-            <a:pPr algn="ctr">
-              <a:defRPr sz="1400" b="0">
-                <a:solidFill>
-                  <a:srgbClr val="1E2933"/>
-                </a:solidFill>
-                <a:latin typeface="Microsoft YaHei"/>
-              </a:defRPr>
-            </a:pPr>
-            <a:r>
-              <a:t>核心原则：把贵且慢的云端调用摊到多步，本地 VLM 只提供「证据」，规则引擎负责零延迟执行。</a:t>
-            </a:r>
-          </a:p>
-        </p:txBody>
-      </p:sp>
-      <p:sp>
-        <p:nvSpPr>
-          <p:cNvPr id="23" name="Rectangle 22"/>
-          <p:cNvSpPr/>
-          <p:nvPr/>
-        </p:nvSpPr>
-        <p:spPr>
-          <a:xfrm>
-            <a:off x="0" y="6537960"/>
-            <a:ext cx="12191695" cy="18288"/>
-          </a:xfrm>
-          <a:prstGeom prst="rect">
-            <a:avLst/>
-          </a:prstGeom>
-          <a:solidFill>
-            <a:srgbClr val="0096C7"/>
-          </a:solidFill>
-          <a:ln/>
-        </p:spPr>
-        <p:style>
-          <a:lnRef idx="1">
-            <a:schemeClr val="accent1"/>
-          </a:lnRef>
-          <a:fillRef idx="3">
-            <a:schemeClr val="accent1"/>
-          </a:fillRef>
-          <a:effectRef idx="2">
-            <a:schemeClr val="accent1"/>
-          </a:effectRef>
-          <a:fontRef idx="minor">
-            <a:schemeClr val="lt1"/>
-          </a:fontRef>
-        </p:style>
-        <p:txBody>
-          <a:bodyPr rtlCol="0" anchor="ctr"/>
-          <a:lstStyle/>
-          <a:p>
-            <a:pPr algn="ctr"/>
-          </a:p>
-        </p:txBody>
-      </p:sp>
-      <p:sp>
-        <p:nvSpPr>
-          <p:cNvPr id="24" name="TextBox 23"/>
-          <p:cNvSpPr txBox="1"/>
-          <p:nvPr/>
-        </p:nvSpPr>
-        <p:spPr>
-          <a:xfrm>
-            <a:off x="457200" y="6583680"/>
-            <a:ext cx="3657600" cy="228600"/>
-          </a:xfrm>
-          <a:prstGeom prst="rect">
-            <a:avLst/>
-          </a:prstGeom>
-          <a:noFill/>
-        </p:spPr>
-        <p:txBody>
-          <a:bodyPr wrap="none">
-            <a:spAutoFit/>
-          </a:bodyPr>
-          <a:lstStyle/>
-          <a:p>
-            <a:pPr algn="l">
-              <a:defRPr sz="1000" b="0">
-                <a:solidFill>
-                  <a:srgbClr val="6C757D"/>
-                </a:solidFill>
-                <a:latin typeface="Microsoft YaHei"/>
-              </a:defRPr>
-            </a:pPr>
-            <a:r>
-              <a:t>smallgameagent · LLM/VLM + 规则驱动</a:t>
-            </a:r>
-          </a:p>
-        </p:txBody>
-      </p:sp>
-      <p:sp>
-        <p:nvSpPr>
-          <p:cNvPr id="25" name="TextBox 24"/>
-          <p:cNvSpPr txBox="1"/>
-          <p:nvPr/>
-        </p:nvSpPr>
-        <p:spPr>
-          <a:xfrm>
-            <a:off x="10789920" y="6583680"/>
-            <a:ext cx="914400" cy="228600"/>
-          </a:xfrm>
-          <a:prstGeom prst="rect">
-            <a:avLst/>
-          </a:prstGeom>
-          <a:noFill/>
-        </p:spPr>
-        <p:txBody>
-          <a:bodyPr wrap="none">
-            <a:spAutoFit/>
-          </a:bodyPr>
-          <a:lstStyle/>
-          <a:p>
             <a:pPr algn="r">
               <a:defRPr sz="1000" b="0">
                 <a:solidFill>
@@ -20578,7 +20901,7 @@
               </a:defRPr>
             </a:pPr>
             <a:r>
-              <a:t>34/37</a:t>
+              <a:t>34/38</a:t>
             </a:r>
           </a:p>
         </p:txBody>
@@ -20610,7 +20933,7 @@
         <p:spPr>
           <a:xfrm>
             <a:off x="0" y="0"/>
-            <a:ext cx="12191695" cy="6858000"/>
+            <a:ext cx="12191695" cy="960120"/>
           </a:xfrm>
           <a:prstGeom prst="rect">
             <a:avLst/>
@@ -20644,23 +20967,56 @@
       </p:sp>
       <p:sp>
         <p:nvSpPr>
-          <p:cNvPr id="3" name="Rectangle 2"/>
+          <p:cNvPr id="3" name="TextBox 2"/>
+          <p:cNvSpPr txBox="1"/>
+          <p:nvPr/>
+        </p:nvSpPr>
+        <p:spPr>
+          <a:xfrm>
+            <a:off x="457200" y="228600"/>
+            <a:ext cx="11247120" cy="548640"/>
+          </a:xfrm>
+          <a:prstGeom prst="rect">
+            <a:avLst/>
+          </a:prstGeom>
+          <a:noFill/>
+        </p:spPr>
+        <p:txBody>
+          <a:bodyPr wrap="none">
+            <a:spAutoFit/>
+          </a:bodyPr>
+          <a:lstStyle/>
+          <a:p>
+            <a:pPr algn="l">
+              <a:defRPr sz="3000" b="1">
+                <a:solidFill>
+                  <a:srgbClr val="F3F6F9"/>
+                </a:solidFill>
+                <a:latin typeface="Microsoft YaHei"/>
+              </a:defRPr>
+            </a:pPr>
+            <a:r>
+              <a:t>技术路线图：从能跑到好用</a:t>
+            </a:r>
+          </a:p>
+        </p:txBody>
+      </p:sp>
+      <p:sp>
+        <p:nvSpPr>
+          <p:cNvPr id="4" name="Rectangle 3"/>
           <p:cNvSpPr/>
           <p:nvPr/>
         </p:nvSpPr>
         <p:spPr>
           <a:xfrm>
-            <a:off x="6858000" y="-914400"/>
-            <a:ext cx="5943600" cy="8686800"/>
-          </a:xfrm>
-          <a:prstGeom prst="rect">
-            <a:avLst/>
-          </a:prstGeom>
-          <a:solidFill>
-            <a:srgbClr val="0096C7">
-              <a:lumMod val="80000"/>
-              <a:lumOff val="20000"/>
-            </a:srgbClr>
+            <a:off x="0" y="960120"/>
+            <a:ext cx="164592" cy="5897880"/>
+          </a:xfrm>
+          <a:prstGeom prst="rect">
+            <a:avLst/>
+          </a:prstGeom>
+          <a:solidFill>
+            <a:srgbClr val="0096C7"/>
           </a:solidFill>
           <a:ln/>
         </p:spPr>
@@ -20688,94 +21044,26 @@
       </p:sp>
       <p:sp>
         <p:nvSpPr>
-          <p:cNvPr id="4" name="TextBox 3"/>
-          <p:cNvSpPr txBox="1"/>
-          <p:nvPr/>
-        </p:nvSpPr>
-        <p:spPr>
-          <a:xfrm>
-            <a:off x="548640" y="1645920"/>
-            <a:ext cx="2743200" cy="1828800"/>
-          </a:xfrm>
-          <a:prstGeom prst="rect">
-            <a:avLst/>
-          </a:prstGeom>
-          <a:noFill/>
-        </p:spPr>
-        <p:txBody>
-          <a:bodyPr wrap="none">
-            <a:spAutoFit/>
-          </a:bodyPr>
-          <a:lstStyle/>
-          <a:p>
-            <a:pPr algn="l">
-              <a:defRPr sz="12000" b="1">
-                <a:solidFill>
-                  <a:srgbClr val="333DA0"/>
-                </a:solidFill>
-                <a:latin typeface="Microsoft YaHei"/>
-              </a:defRPr>
-            </a:pPr>
-            <a:r>
-              <a:t>10</a:t>
-            </a:r>
-          </a:p>
-        </p:txBody>
-      </p:sp>
-      <p:sp>
-        <p:nvSpPr>
-          <p:cNvPr id="5" name="TextBox 4"/>
-          <p:cNvSpPr txBox="1"/>
-          <p:nvPr/>
-        </p:nvSpPr>
-        <p:spPr>
-          <a:xfrm>
-            <a:off x="548640" y="2834640"/>
-            <a:ext cx="11064240" cy="1097280"/>
-          </a:xfrm>
-          <a:prstGeom prst="rect">
-            <a:avLst/>
-          </a:prstGeom>
-          <a:noFill/>
-        </p:spPr>
-        <p:txBody>
-          <a:bodyPr wrap="none">
-            <a:spAutoFit/>
-          </a:bodyPr>
-          <a:lstStyle/>
-          <a:p>
-            <a:pPr algn="l">
-              <a:defRPr sz="4400" b="1">
-                <a:solidFill>
-                  <a:srgbClr val="F3F6F9"/>
-                </a:solidFill>
-                <a:latin typeface="Microsoft YaHei"/>
-              </a:defRPr>
-            </a:pPr>
-            <a:r>
-              <a:t>下一步</a:t>
-            </a:r>
-          </a:p>
-        </p:txBody>
-      </p:sp>
-      <p:sp>
-        <p:nvSpPr>
-          <p:cNvPr id="6" name="Rectangle 5"/>
+          <p:cNvPr id="5" name="Rectangle 4"/>
           <p:cNvSpPr/>
           <p:nvPr/>
         </p:nvSpPr>
         <p:spPr>
           <a:xfrm>
-            <a:off x="548640" y="4023360"/>
-            <a:ext cx="1828800" cy="73152"/>
-          </a:xfrm>
-          <a:prstGeom prst="rect">
-            <a:avLst/>
-          </a:prstGeom>
-          <a:solidFill>
-            <a:srgbClr val="FF6B35"/>
-          </a:solidFill>
-          <a:ln/>
+            <a:off x="320040" y="1078992"/>
+            <a:ext cx="11548872" cy="5349240"/>
+          </a:xfrm>
+          <a:prstGeom prst="rect">
+            <a:avLst/>
+          </a:prstGeom>
+          <a:solidFill>
+            <a:srgbClr val="FFFFFF"/>
+          </a:solidFill>
+          <a:ln w="12700">
+            <a:solidFill>
+              <a:srgbClr val="E1E5E9"/>
+            </a:solidFill>
+          </a:ln>
         </p:spPr>
         <p:style>
           <a:lnRef idx="1">
@@ -20801,20 +21089,20 @@
       </p:sp>
       <p:sp>
         <p:nvSpPr>
-          <p:cNvPr id="7" name="Rectangle 6"/>
+          <p:cNvPr id="6" name="Rectangle 5"/>
           <p:cNvSpPr/>
           <p:nvPr/>
         </p:nvSpPr>
         <p:spPr>
           <a:xfrm>
-            <a:off x="0" y="6537960"/>
-            <a:ext cx="12191695" cy="18288"/>
-          </a:xfrm>
-          <a:prstGeom prst="rect">
-            <a:avLst/>
-          </a:prstGeom>
-          <a:solidFill>
-            <a:srgbClr val="0096C7"/>
+            <a:off x="777240" y="3200400"/>
+            <a:ext cx="10972800" cy="73152"/>
+          </a:xfrm>
+          <a:prstGeom prst="rect">
+            <a:avLst/>
+          </a:prstGeom>
+          <a:solidFill>
+            <a:srgbClr val="6C757D"/>
           </a:solidFill>
           <a:ln/>
         </p:spPr>
@@ -20842,14 +21130,55 @@
       </p:sp>
       <p:sp>
         <p:nvSpPr>
+          <p:cNvPr id="7" name="Oval 6"/>
+          <p:cNvSpPr/>
+          <p:nvPr/>
+        </p:nvSpPr>
+        <p:spPr>
+          <a:xfrm>
+            <a:off x="822960" y="3063240"/>
+            <a:ext cx="320040" cy="320040"/>
+          </a:xfrm>
+          <a:prstGeom prst="ellipse">
+            <a:avLst/>
+          </a:prstGeom>
+          <a:solidFill>
+            <a:srgbClr val="28A745"/>
+          </a:solidFill>
+          <a:ln/>
+        </p:spPr>
+        <p:style>
+          <a:lnRef idx="1">
+            <a:schemeClr val="accent1"/>
+          </a:lnRef>
+          <a:fillRef idx="3">
+            <a:schemeClr val="accent1"/>
+          </a:fillRef>
+          <a:effectRef idx="2">
+            <a:schemeClr val="accent1"/>
+          </a:effectRef>
+          <a:fontRef idx="minor">
+            <a:schemeClr val="lt1"/>
+          </a:fontRef>
+        </p:style>
+        <p:txBody>
+          <a:bodyPr rtlCol="0" anchor="ctr"/>
+          <a:lstStyle/>
+          <a:p>
+            <a:pPr algn="ctr"/>
+          </a:p>
+        </p:txBody>
+      </p:sp>
+      <p:sp>
+        <p:nvSpPr>
           <p:cNvPr id="8" name="TextBox 7"/>
           <p:cNvSpPr txBox="1"/>
           <p:nvPr/>
         </p:nvSpPr>
         <p:spPr>
           <a:xfrm>
-            <a:off x="457200" y="6583680"/>
-            <a:ext cx="3657600" cy="228600"/>
+            <a:off x="320040" y="2103120"/>
+            <a:ext cx="1645920" cy="457200"/>
           </a:xfrm>
           <a:prstGeom prst="rect">
             <a:avLst/>
@@ -20862,16 +21191,16 @@
           </a:bodyPr>
           <a:lstStyle/>
           <a:p>
-            <a:pPr algn="l">
-              <a:defRPr sz="1000" b="0">
-                <a:solidFill>
-                  <a:srgbClr val="6C757D"/>
-                </a:solidFill>
-                <a:latin typeface="Microsoft YaHei"/>
-              </a:defRPr>
-            </a:pPr>
-            <a:r>
-              <a:t>smallgameagent · LLM/VLM + 规则驱动</a:t>
+            <a:pPr algn="ctr">
+              <a:defRPr sz="1300" b="1">
+                <a:solidFill>
+                  <a:srgbClr val="28A745"/>
+                </a:solidFill>
+                <a:latin typeface="Microsoft YaHei"/>
+              </a:defRPr>
+            </a:pPr>
+            <a:r>
+              <a:t>已完成</a:t>
             </a:r>
           </a:p>
         </p:txBody>
@@ -20884,8 +21213,8 @@
         </p:nvSpPr>
         <p:spPr>
           <a:xfrm>
-            <a:off x="10789920" y="6583680"/>
-            <a:ext cx="914400" cy="228600"/>
+            <a:off x="91439" y="3474720"/>
+            <a:ext cx="2194560" cy="1188720"/>
           </a:xfrm>
           <a:prstGeom prst="rect">
             <a:avLst/>
@@ -20898,6 +21227,642 @@
           </a:bodyPr>
           <a:lstStyle/>
           <a:p>
+            <a:pPr algn="ctr">
+              <a:defRPr sz="1200" b="0">
+                <a:solidFill>
+                  <a:srgbClr val="1E2933"/>
+                </a:solidFill>
+                <a:latin typeface="Microsoft YaHei"/>
+              </a:defRPr>
+            </a:pPr>
+            <a:r>
+              <a:t>规则引擎 + 自动校准</a:t>
+            </a:r>
+            <a:br/>
+            <a:r>
+              <a:t>22 游戏可驱动</a:t>
+            </a:r>
+          </a:p>
+        </p:txBody>
+      </p:sp>
+      <p:sp>
+        <p:nvSpPr>
+          <p:cNvPr id="10" name="Oval 9"/>
+          <p:cNvSpPr/>
+          <p:nvPr/>
+        </p:nvSpPr>
+        <p:spPr>
+          <a:xfrm>
+            <a:off x="3108960" y="3063240"/>
+            <a:ext cx="320040" cy="320040"/>
+          </a:xfrm>
+          <a:prstGeom prst="ellipse">
+            <a:avLst/>
+          </a:prstGeom>
+          <a:solidFill>
+            <a:srgbClr val="28A745"/>
+          </a:solidFill>
+          <a:ln/>
+        </p:spPr>
+        <p:style>
+          <a:lnRef idx="1">
+            <a:schemeClr val="accent1"/>
+          </a:lnRef>
+          <a:fillRef idx="3">
+            <a:schemeClr val="accent1"/>
+          </a:fillRef>
+          <a:effectRef idx="2">
+            <a:schemeClr val="accent1"/>
+          </a:effectRef>
+          <a:fontRef idx="minor">
+            <a:schemeClr val="lt1"/>
+          </a:fontRef>
+        </p:style>
+        <p:txBody>
+          <a:bodyPr rtlCol="0" anchor="ctr"/>
+          <a:lstStyle/>
+          <a:p>
+            <a:pPr algn="ctr"/>
+          </a:p>
+        </p:txBody>
+      </p:sp>
+      <p:sp>
+        <p:nvSpPr>
+          <p:cNvPr id="11" name="TextBox 10"/>
+          <p:cNvSpPr txBox="1"/>
+          <p:nvPr/>
+        </p:nvSpPr>
+        <p:spPr>
+          <a:xfrm>
+            <a:off x="2606039" y="2103120"/>
+            <a:ext cx="1645920" cy="457200"/>
+          </a:xfrm>
+          <a:prstGeom prst="rect">
+            <a:avLst/>
+          </a:prstGeom>
+          <a:noFill/>
+        </p:spPr>
+        <p:txBody>
+          <a:bodyPr wrap="none">
+            <a:spAutoFit/>
+          </a:bodyPr>
+          <a:lstStyle/>
+          <a:p>
+            <a:pPr algn="ctr">
+              <a:defRPr sz="1300" b="1">
+                <a:solidFill>
+                  <a:srgbClr val="28A745"/>
+                </a:solidFill>
+                <a:latin typeface="Microsoft YaHei"/>
+              </a:defRPr>
+            </a:pPr>
+            <a:r>
+              <a:t>已完成</a:t>
+            </a:r>
+          </a:p>
+        </p:txBody>
+      </p:sp>
+      <p:sp>
+        <p:nvSpPr>
+          <p:cNvPr id="12" name="TextBox 11"/>
+          <p:cNvSpPr txBox="1"/>
+          <p:nvPr/>
+        </p:nvSpPr>
+        <p:spPr>
+          <a:xfrm>
+            <a:off x="2377439" y="3474720"/>
+            <a:ext cx="2194560" cy="1188720"/>
+          </a:xfrm>
+          <a:prstGeom prst="rect">
+            <a:avLst/>
+          </a:prstGeom>
+          <a:noFill/>
+        </p:spPr>
+        <p:txBody>
+          <a:bodyPr wrap="none">
+            <a:spAutoFit/>
+          </a:bodyPr>
+          <a:lstStyle/>
+          <a:p>
+            <a:pPr algn="ctr">
+              <a:defRPr sz="1200" b="0">
+                <a:solidFill>
+                  <a:srgbClr val="1E2933"/>
+                </a:solidFill>
+                <a:latin typeface="Microsoft YaHei"/>
+              </a:defRPr>
+            </a:pPr>
+            <a:r>
+              <a:t>multi-bus-memory</a:t>
+            </a:r>
+            <a:br/>
+            <a:r>
+              <a:t>记忆读回 0.300</a:t>
+            </a:r>
+          </a:p>
+        </p:txBody>
+      </p:sp>
+      <p:sp>
+        <p:nvSpPr>
+          <p:cNvPr id="13" name="Oval 12"/>
+          <p:cNvSpPr/>
+          <p:nvPr/>
+        </p:nvSpPr>
+        <p:spPr>
+          <a:xfrm>
+            <a:off x="5394960" y="3063240"/>
+            <a:ext cx="320040" cy="320040"/>
+          </a:xfrm>
+          <a:prstGeom prst="ellipse">
+            <a:avLst/>
+          </a:prstGeom>
+          <a:solidFill>
+            <a:srgbClr val="28A745"/>
+          </a:solidFill>
+          <a:ln/>
+        </p:spPr>
+        <p:style>
+          <a:lnRef idx="1">
+            <a:schemeClr val="accent1"/>
+          </a:lnRef>
+          <a:fillRef idx="3">
+            <a:schemeClr val="accent1"/>
+          </a:fillRef>
+          <a:effectRef idx="2">
+            <a:schemeClr val="accent1"/>
+          </a:effectRef>
+          <a:fontRef idx="minor">
+            <a:schemeClr val="lt1"/>
+          </a:fontRef>
+        </p:style>
+        <p:txBody>
+          <a:bodyPr rtlCol="0" anchor="ctr"/>
+          <a:lstStyle/>
+          <a:p>
+            <a:pPr algn="ctr"/>
+          </a:p>
+        </p:txBody>
+      </p:sp>
+      <p:sp>
+        <p:nvSpPr>
+          <p:cNvPr id="14" name="TextBox 13"/>
+          <p:cNvSpPr txBox="1"/>
+          <p:nvPr/>
+        </p:nvSpPr>
+        <p:spPr>
+          <a:xfrm>
+            <a:off x="4892040" y="2103120"/>
+            <a:ext cx="1645920" cy="457200"/>
+          </a:xfrm>
+          <a:prstGeom prst="rect">
+            <a:avLst/>
+          </a:prstGeom>
+          <a:noFill/>
+        </p:spPr>
+        <p:txBody>
+          <a:bodyPr wrap="none">
+            <a:spAutoFit/>
+          </a:bodyPr>
+          <a:lstStyle/>
+          <a:p>
+            <a:pPr algn="ctr">
+              <a:defRPr sz="1300" b="1">
+                <a:solidFill>
+                  <a:srgbClr val="28A745"/>
+                </a:solidFill>
+                <a:latin typeface="Microsoft YaHei"/>
+              </a:defRPr>
+            </a:pPr>
+            <a:r>
+              <a:t>已完成</a:t>
+            </a:r>
+          </a:p>
+        </p:txBody>
+      </p:sp>
+      <p:sp>
+        <p:nvSpPr>
+          <p:cNvPr id="15" name="TextBox 14"/>
+          <p:cNvSpPr txBox="1"/>
+          <p:nvPr/>
+        </p:nvSpPr>
+        <p:spPr>
+          <a:xfrm>
+            <a:off x="4663440" y="3474720"/>
+            <a:ext cx="2194560" cy="1188720"/>
+          </a:xfrm>
+          <a:prstGeom prst="rect">
+            <a:avLst/>
+          </a:prstGeom>
+          <a:noFill/>
+        </p:spPr>
+        <p:txBody>
+          <a:bodyPr wrap="none">
+            <a:spAutoFit/>
+          </a:bodyPr>
+          <a:lstStyle/>
+          <a:p>
+            <a:pPr algn="ctr">
+              <a:defRPr sz="1200" b="0">
+                <a:solidFill>
+                  <a:srgbClr val="1E2933"/>
+                </a:solidFill>
+                <a:latin typeface="Microsoft YaHei"/>
+              </a:defRPr>
+            </a:pPr>
+            <a:r>
+              <a:t>L2 code-file 更新</a:t>
+            </a:r>
+            <a:br/>
+            <a:r>
+              <a:t>qwen/kimi/xiaomi/opencodego 验证</a:t>
+            </a:r>
+          </a:p>
+        </p:txBody>
+      </p:sp>
+      <p:sp>
+        <p:nvSpPr>
+          <p:cNvPr id="16" name="Oval 15"/>
+          <p:cNvSpPr/>
+          <p:nvPr/>
+        </p:nvSpPr>
+        <p:spPr>
+          <a:xfrm>
+            <a:off x="7680960" y="3063240"/>
+            <a:ext cx="320040" cy="320040"/>
+          </a:xfrm>
+          <a:prstGeom prst="ellipse">
+            <a:avLst/>
+          </a:prstGeom>
+          <a:solidFill>
+            <a:srgbClr val="FF6B35"/>
+          </a:solidFill>
+          <a:ln/>
+        </p:spPr>
+        <p:style>
+          <a:lnRef idx="1">
+            <a:schemeClr val="accent1"/>
+          </a:lnRef>
+          <a:fillRef idx="3">
+            <a:schemeClr val="accent1"/>
+          </a:fillRef>
+          <a:effectRef idx="2">
+            <a:schemeClr val="accent1"/>
+          </a:effectRef>
+          <a:fontRef idx="minor">
+            <a:schemeClr val="lt1"/>
+          </a:fontRef>
+        </p:style>
+        <p:txBody>
+          <a:bodyPr rtlCol="0" anchor="ctr"/>
+          <a:lstStyle/>
+          <a:p>
+            <a:pPr algn="ctr"/>
+          </a:p>
+        </p:txBody>
+      </p:sp>
+      <p:sp>
+        <p:nvSpPr>
+          <p:cNvPr id="17" name="TextBox 16"/>
+          <p:cNvSpPr txBox="1"/>
+          <p:nvPr/>
+        </p:nvSpPr>
+        <p:spPr>
+          <a:xfrm>
+            <a:off x="7178040" y="2103120"/>
+            <a:ext cx="1645920" cy="457200"/>
+          </a:xfrm>
+          <a:prstGeom prst="rect">
+            <a:avLst/>
+          </a:prstGeom>
+          <a:noFill/>
+        </p:spPr>
+        <p:txBody>
+          <a:bodyPr wrap="none">
+            <a:spAutoFit/>
+          </a:bodyPr>
+          <a:lstStyle/>
+          <a:p>
+            <a:pPr algn="ctr">
+              <a:defRPr sz="1300" b="1">
+                <a:solidFill>
+                  <a:srgbClr val="FF6B35"/>
+                </a:solidFill>
+                <a:latin typeface="Microsoft YaHei"/>
+              </a:defRPr>
+            </a:pPr>
+            <a:r>
+              <a:t>进行中</a:t>
+            </a:r>
+          </a:p>
+        </p:txBody>
+      </p:sp>
+      <p:sp>
+        <p:nvSpPr>
+          <p:cNvPr id="18" name="TextBox 17"/>
+          <p:cNvSpPr txBox="1"/>
+          <p:nvPr/>
+        </p:nvSpPr>
+        <p:spPr>
+          <a:xfrm>
+            <a:off x="6949440" y="3474720"/>
+            <a:ext cx="2194560" cy="1188720"/>
+          </a:xfrm>
+          <a:prstGeom prst="rect">
+            <a:avLst/>
+          </a:prstGeom>
+          <a:noFill/>
+        </p:spPr>
+        <p:txBody>
+          <a:bodyPr wrap="none">
+            <a:spAutoFit/>
+          </a:bodyPr>
+          <a:lstStyle/>
+          <a:p>
+            <a:pPr algn="ctr">
+              <a:defRPr sz="1200" b="0">
+                <a:solidFill>
+                  <a:srgbClr val="1E2933"/>
+                </a:solidFill>
+                <a:latin typeface="Microsoft YaHei"/>
+              </a:defRPr>
+            </a:pPr>
+            <a:r>
+              <a:t>本地 VLM 上下文</a:t>
+            </a:r>
+            <a:br/>
+            <a:r>
+              <a:t>QLoRA 微调准备</a:t>
+            </a:r>
+          </a:p>
+        </p:txBody>
+      </p:sp>
+      <p:sp>
+        <p:nvSpPr>
+          <p:cNvPr id="19" name="Oval 18"/>
+          <p:cNvSpPr/>
+          <p:nvPr/>
+        </p:nvSpPr>
+        <p:spPr>
+          <a:xfrm>
+            <a:off x="9966960" y="3063240"/>
+            <a:ext cx="320040" cy="320040"/>
+          </a:xfrm>
+          <a:prstGeom prst="ellipse">
+            <a:avLst/>
+          </a:prstGeom>
+          <a:solidFill>
+            <a:srgbClr val="0096C7"/>
+          </a:solidFill>
+          <a:ln/>
+        </p:spPr>
+        <p:style>
+          <a:lnRef idx="1">
+            <a:schemeClr val="accent1"/>
+          </a:lnRef>
+          <a:fillRef idx="3">
+            <a:schemeClr val="accent1"/>
+          </a:fillRef>
+          <a:effectRef idx="2">
+            <a:schemeClr val="accent1"/>
+          </a:effectRef>
+          <a:fontRef idx="minor">
+            <a:schemeClr val="lt1"/>
+          </a:fontRef>
+        </p:style>
+        <p:txBody>
+          <a:bodyPr rtlCol="0" anchor="ctr"/>
+          <a:lstStyle/>
+          <a:p>
+            <a:pPr algn="ctr"/>
+          </a:p>
+        </p:txBody>
+      </p:sp>
+      <p:sp>
+        <p:nvSpPr>
+          <p:cNvPr id="20" name="TextBox 19"/>
+          <p:cNvSpPr txBox="1"/>
+          <p:nvPr/>
+        </p:nvSpPr>
+        <p:spPr>
+          <a:xfrm>
+            <a:off x="9464040" y="2103120"/>
+            <a:ext cx="1645920" cy="457200"/>
+          </a:xfrm>
+          <a:prstGeom prst="rect">
+            <a:avLst/>
+          </a:prstGeom>
+          <a:noFill/>
+        </p:spPr>
+        <p:txBody>
+          <a:bodyPr wrap="none">
+            <a:spAutoFit/>
+          </a:bodyPr>
+          <a:lstStyle/>
+          <a:p>
+            <a:pPr algn="ctr">
+              <a:defRPr sz="1300" b="1">
+                <a:solidFill>
+                  <a:srgbClr val="0096C7"/>
+                </a:solidFill>
+                <a:latin typeface="Microsoft YaHei"/>
+              </a:defRPr>
+            </a:pPr>
+            <a:r>
+              <a:t>下一步</a:t>
+            </a:r>
+          </a:p>
+        </p:txBody>
+      </p:sp>
+      <p:sp>
+        <p:nvSpPr>
+          <p:cNvPr id="21" name="TextBox 20"/>
+          <p:cNvSpPr txBox="1"/>
+          <p:nvPr/>
+        </p:nvSpPr>
+        <p:spPr>
+          <a:xfrm>
+            <a:off x="9235440" y="3474720"/>
+            <a:ext cx="2194560" cy="1188720"/>
+          </a:xfrm>
+          <a:prstGeom prst="rect">
+            <a:avLst/>
+          </a:prstGeom>
+          <a:noFill/>
+        </p:spPr>
+        <p:txBody>
+          <a:bodyPr wrap="none">
+            <a:spAutoFit/>
+          </a:bodyPr>
+          <a:lstStyle/>
+          <a:p>
+            <a:pPr algn="ctr">
+              <a:defRPr sz="1200" b="0">
+                <a:solidFill>
+                  <a:srgbClr val="1E2933"/>
+                </a:solidFill>
+                <a:latin typeface="Microsoft YaHei"/>
+              </a:defRPr>
+            </a:pPr>
+            <a:r>
+              <a:t>真实游戏在线触发</a:t>
+            </a:r>
+            <a:br/>
+            <a:r>
+              <a:t>规则更新 + A/B 回归</a:t>
+            </a:r>
+          </a:p>
+        </p:txBody>
+      </p:sp>
+      <p:sp>
+        <p:nvSpPr>
+          <p:cNvPr id="22" name="Rounded Rectangle 21"/>
+          <p:cNvSpPr/>
+          <p:nvPr/>
+        </p:nvSpPr>
+        <p:spPr>
+          <a:xfrm>
+            <a:off x="777240" y="5074920"/>
+            <a:ext cx="10972800" cy="822960"/>
+          </a:xfrm>
+          <a:prstGeom prst="roundRect">
+            <a:avLst/>
+          </a:prstGeom>
+          <a:solidFill>
+            <a:srgbClr val="F3F6F9"/>
+          </a:solidFill>
+          <a:ln/>
+        </p:spPr>
+        <p:style>
+          <a:lnRef idx="1">
+            <a:schemeClr val="accent1"/>
+          </a:lnRef>
+          <a:fillRef idx="3">
+            <a:schemeClr val="accent1"/>
+          </a:fillRef>
+          <a:effectRef idx="2">
+            <a:schemeClr val="accent1"/>
+          </a:effectRef>
+          <a:fontRef idx="minor">
+            <a:schemeClr val="lt1"/>
+          </a:fontRef>
+        </p:style>
+        <p:txBody>
+          <a:bodyPr rtlCol="0" anchor="ctr"/>
+          <a:lstStyle/>
+          <a:p>
+            <a:pPr algn="ctr">
+              <a:defRPr sz="1400" b="0">
+                <a:solidFill>
+                  <a:srgbClr val="1E2933"/>
+                </a:solidFill>
+                <a:latin typeface="Microsoft YaHei"/>
+              </a:defRPr>
+            </a:pPr>
+            <a:r>
+              <a:t>核心原则：把贵且慢的云端调用摊到多步，本地 VLM 只提供「证据」，规则引擎负责零延迟执行。</a:t>
+            </a:r>
+          </a:p>
+        </p:txBody>
+      </p:sp>
+      <p:sp>
+        <p:nvSpPr>
+          <p:cNvPr id="23" name="Rectangle 22"/>
+          <p:cNvSpPr/>
+          <p:nvPr/>
+        </p:nvSpPr>
+        <p:spPr>
+          <a:xfrm>
+            <a:off x="0" y="6537960"/>
+            <a:ext cx="12191695" cy="18288"/>
+          </a:xfrm>
+          <a:prstGeom prst="rect">
+            <a:avLst/>
+          </a:prstGeom>
+          <a:solidFill>
+            <a:srgbClr val="0096C7"/>
+          </a:solidFill>
+          <a:ln/>
+        </p:spPr>
+        <p:style>
+          <a:lnRef idx="1">
+            <a:schemeClr val="accent1"/>
+          </a:lnRef>
+          <a:fillRef idx="3">
+            <a:schemeClr val="accent1"/>
+          </a:fillRef>
+          <a:effectRef idx="2">
+            <a:schemeClr val="accent1"/>
+          </a:effectRef>
+          <a:fontRef idx="minor">
+            <a:schemeClr val="lt1"/>
+          </a:fontRef>
+        </p:style>
+        <p:txBody>
+          <a:bodyPr rtlCol="0" anchor="ctr"/>
+          <a:lstStyle/>
+          <a:p>
+            <a:pPr algn="ctr"/>
+          </a:p>
+        </p:txBody>
+      </p:sp>
+      <p:sp>
+        <p:nvSpPr>
+          <p:cNvPr id="24" name="TextBox 23"/>
+          <p:cNvSpPr txBox="1"/>
+          <p:nvPr/>
+        </p:nvSpPr>
+        <p:spPr>
+          <a:xfrm>
+            <a:off x="457200" y="6583680"/>
+            <a:ext cx="3657600" cy="228600"/>
+          </a:xfrm>
+          <a:prstGeom prst="rect">
+            <a:avLst/>
+          </a:prstGeom>
+          <a:noFill/>
+        </p:spPr>
+        <p:txBody>
+          <a:bodyPr wrap="none">
+            <a:spAutoFit/>
+          </a:bodyPr>
+          <a:lstStyle/>
+          <a:p>
+            <a:pPr algn="l">
+              <a:defRPr sz="1000" b="0">
+                <a:solidFill>
+                  <a:srgbClr val="6C757D"/>
+                </a:solidFill>
+                <a:latin typeface="Microsoft YaHei"/>
+              </a:defRPr>
+            </a:pPr>
+            <a:r>
+              <a:t>smallgameagent · LLM/VLM + 规则驱动</a:t>
+            </a:r>
+          </a:p>
+        </p:txBody>
+      </p:sp>
+      <p:sp>
+        <p:nvSpPr>
+          <p:cNvPr id="25" name="TextBox 24"/>
+          <p:cNvSpPr txBox="1"/>
+          <p:nvPr/>
+        </p:nvSpPr>
+        <p:spPr>
+          <a:xfrm>
+            <a:off x="10789920" y="6583680"/>
+            <a:ext cx="914400" cy="228600"/>
+          </a:xfrm>
+          <a:prstGeom prst="rect">
+            <a:avLst/>
+          </a:prstGeom>
+          <a:noFill/>
+        </p:spPr>
+        <p:txBody>
+          <a:bodyPr wrap="none">
+            <a:spAutoFit/>
+          </a:bodyPr>
+          <a:lstStyle/>
+          <a:p>
             <a:pPr algn="r">
               <a:defRPr sz="1000" b="0">
                 <a:solidFill>
@@ -20907,7 +21872,7 @@
               </a:defRPr>
             </a:pPr>
             <a:r>
-              <a:t>35/37</a:t>
+              <a:t>35/38</a:t>
             </a:r>
           </a:p>
         </p:txBody>
@@ -20939,7 +21904,7 @@
         <p:spPr>
           <a:xfrm>
             <a:off x="0" y="0"/>
-            <a:ext cx="12191695" cy="960120"/>
+            <a:ext cx="12191695" cy="6858000"/>
           </a:xfrm>
           <a:prstGeom prst="rect">
             <a:avLst/>
@@ -20973,56 +21938,23 @@
       </p:sp>
       <p:sp>
         <p:nvSpPr>
-          <p:cNvPr id="3" name="TextBox 2"/>
-          <p:cNvSpPr txBox="1"/>
-          <p:nvPr/>
-        </p:nvSpPr>
-        <p:spPr>
-          <a:xfrm>
-            <a:off x="457200" y="228600"/>
-            <a:ext cx="11247120" cy="548640"/>
-          </a:xfrm>
-          <a:prstGeom prst="rect">
-            <a:avLst/>
-          </a:prstGeom>
-          <a:noFill/>
-        </p:spPr>
-        <p:txBody>
-          <a:bodyPr wrap="none">
-            <a:spAutoFit/>
-          </a:bodyPr>
-          <a:lstStyle/>
-          <a:p>
-            <a:pPr algn="l">
-              <a:defRPr sz="3000" b="1">
-                <a:solidFill>
-                  <a:srgbClr val="F3F6F9"/>
-                </a:solidFill>
-                <a:latin typeface="Microsoft YaHei"/>
-              </a:defRPr>
-            </a:pPr>
-            <a:r>
-              <a:t>下一步：把实验变成稳定系统</a:t>
-            </a:r>
-          </a:p>
-        </p:txBody>
-      </p:sp>
-      <p:sp>
-        <p:nvSpPr>
-          <p:cNvPr id="4" name="Rectangle 3"/>
+          <p:cNvPr id="3" name="Rectangle 2"/>
           <p:cNvSpPr/>
           <p:nvPr/>
         </p:nvSpPr>
         <p:spPr>
           <a:xfrm>
-            <a:off x="0" y="960120"/>
-            <a:ext cx="164592" cy="5897880"/>
-          </a:xfrm>
-          <a:prstGeom prst="rect">
-            <a:avLst/>
-          </a:prstGeom>
-          <a:solidFill>
-            <a:srgbClr val="0096C7"/>
+            <a:off x="6858000" y="-914400"/>
+            <a:ext cx="5943600" cy="8686800"/>
+          </a:xfrm>
+          <a:prstGeom prst="rect">
+            <a:avLst/>
+          </a:prstGeom>
+          <a:solidFill>
+            <a:srgbClr val="0096C7">
+              <a:lumMod val="80000"/>
+              <a:lumOff val="20000"/>
+            </a:srgbClr>
           </a:solidFill>
           <a:ln/>
         </p:spPr>
@@ -21050,26 +21982,94 @@
       </p:sp>
       <p:sp>
         <p:nvSpPr>
-          <p:cNvPr id="5" name="Rectangle 4"/>
+          <p:cNvPr id="4" name="TextBox 3"/>
+          <p:cNvSpPr txBox="1"/>
+          <p:nvPr/>
+        </p:nvSpPr>
+        <p:spPr>
+          <a:xfrm>
+            <a:off x="548640" y="1645920"/>
+            <a:ext cx="2743200" cy="1828800"/>
+          </a:xfrm>
+          <a:prstGeom prst="rect">
+            <a:avLst/>
+          </a:prstGeom>
+          <a:noFill/>
+        </p:spPr>
+        <p:txBody>
+          <a:bodyPr wrap="none">
+            <a:spAutoFit/>
+          </a:bodyPr>
+          <a:lstStyle/>
+          <a:p>
+            <a:pPr algn="l">
+              <a:defRPr sz="12000" b="1">
+                <a:solidFill>
+                  <a:srgbClr val="333DA0"/>
+                </a:solidFill>
+                <a:latin typeface="Microsoft YaHei"/>
+              </a:defRPr>
+            </a:pPr>
+            <a:r>
+              <a:t>10</a:t>
+            </a:r>
+          </a:p>
+        </p:txBody>
+      </p:sp>
+      <p:sp>
+        <p:nvSpPr>
+          <p:cNvPr id="5" name="TextBox 4"/>
+          <p:cNvSpPr txBox="1"/>
+          <p:nvPr/>
+        </p:nvSpPr>
+        <p:spPr>
+          <a:xfrm>
+            <a:off x="548640" y="2834640"/>
+            <a:ext cx="11064240" cy="1097280"/>
+          </a:xfrm>
+          <a:prstGeom prst="rect">
+            <a:avLst/>
+          </a:prstGeom>
+          <a:noFill/>
+        </p:spPr>
+        <p:txBody>
+          <a:bodyPr wrap="none">
+            <a:spAutoFit/>
+          </a:bodyPr>
+          <a:lstStyle/>
+          <a:p>
+            <a:pPr algn="l">
+              <a:defRPr sz="4400" b="1">
+                <a:solidFill>
+                  <a:srgbClr val="F3F6F9"/>
+                </a:solidFill>
+                <a:latin typeface="Microsoft YaHei"/>
+              </a:defRPr>
+            </a:pPr>
+            <a:r>
+              <a:t>下一步</a:t>
+            </a:r>
+          </a:p>
+        </p:txBody>
+      </p:sp>
+      <p:sp>
+        <p:nvSpPr>
+          <p:cNvPr id="6" name="Rectangle 5"/>
           <p:cNvSpPr/>
           <p:nvPr/>
         </p:nvSpPr>
         <p:spPr>
           <a:xfrm>
-            <a:off x="320040" y="1078992"/>
-            <a:ext cx="11548872" cy="5349240"/>
-          </a:xfrm>
-          <a:prstGeom prst="rect">
-            <a:avLst/>
-          </a:prstGeom>
-          <a:solidFill>
-            <a:srgbClr val="FFFFFF"/>
-          </a:solidFill>
-          <a:ln w="12700">
-            <a:solidFill>
-              <a:srgbClr val="E1E5E9"/>
-            </a:solidFill>
-          </a:ln>
+            <a:off x="548640" y="4023360"/>
+            <a:ext cx="1828800" cy="73152"/>
+          </a:xfrm>
+          <a:prstGeom prst="rect">
+            <a:avLst/>
+          </a:prstGeom>
+          <a:solidFill>
+            <a:srgbClr val="FF6B35"/>
+          </a:solidFill>
+          <a:ln/>
         </p:spPr>
         <p:style>
           <a:lnRef idx="1">
@@ -21095,151 +22095,16 @@
       </p:sp>
       <p:sp>
         <p:nvSpPr>
-          <p:cNvPr id="6" name="TextBox 5"/>
-          <p:cNvSpPr txBox="1"/>
-          <p:nvPr/>
-        </p:nvSpPr>
-        <p:spPr>
-          <a:xfrm>
-            <a:off x="777240" y="1417320"/>
-            <a:ext cx="10972800" cy="5029200"/>
-          </a:xfrm>
-          <a:prstGeom prst="rect">
-            <a:avLst/>
-          </a:prstGeom>
-          <a:noFill/>
-        </p:spPr>
-        <p:txBody>
-          <a:bodyPr wrap="square">
-            <a:spAutoFit/>
-          </a:bodyPr>
-          <a:lstStyle/>
-          <a:p>
-            <a:pPr algn="l">
-              <a:spcAft>
-                <a:spcPts val="1200"/>
-              </a:spcAft>
-              <a:defRPr sz="1800" b="0">
-                <a:solidFill>
-                  <a:srgbClr val="1E2933"/>
-                </a:solidFill>
-                <a:latin typeface="Microsoft YaHei"/>
-              </a:defRPr>
-            </a:pPr>
-            <a:r>
-              <a:t>  在真实游戏运行中触发 code-file 更新，验证动态 stall/composite 下 L2 的决策质量</a:t>
-            </a:r>
-          </a:p>
-          <a:p>
-            <a:pPr algn="l">
-              <a:spcAft>
-                <a:spcPts val="1200"/>
-              </a:spcAft>
-              <a:defRPr sz="1800" b="0">
-                <a:solidFill>
-                  <a:srgbClr val="1E2933"/>
-                </a:solidFill>
-                <a:latin typeface="Microsoft YaHei"/>
-              </a:defRPr>
-            </a:pPr>
-            <a:r>
-              <a:t>  把 runtime_rules.json 的 schema 写进 L2 prompt，约束可改字段与取值范围</a:t>
-            </a:r>
-          </a:p>
-          <a:p>
-            <a:pPr algn="l">
-              <a:spcAft>
-                <a:spcPts val="1200"/>
-              </a:spcAft>
-              <a:defRPr sz="1800" b="0">
-                <a:solidFill>
-                  <a:srgbClr val="1E2933"/>
-                </a:solidFill>
-                <a:latin typeface="Microsoft YaHei"/>
-              </a:defRPr>
-            </a:pPr>
-            <a:r>
-              <a:t>  让本地 VLM 常驻，验证 L1 战术修正对 joystick 游戏的实际收益</a:t>
-            </a:r>
-          </a:p>
-          <a:p>
-            <a:pPr algn="l">
-              <a:spcAft>
-                <a:spcPts val="1200"/>
-              </a:spcAft>
-              <a:defRPr sz="1800" b="0">
-                <a:solidFill>
-                  <a:srgbClr val="1E2933"/>
-                </a:solidFill>
-                <a:latin typeface="Microsoft YaHei"/>
-              </a:defRPr>
-            </a:pPr>
-            <a:r>
-              <a:t>  在 5090 服务器跑 QLoRA 微调，把本地 VLM 训练成专用画面理解器</a:t>
-            </a:r>
-          </a:p>
-          <a:p>
-            <a:pPr algn="l">
-              <a:spcAft>
-                <a:spcPts val="1200"/>
-              </a:spcAft>
-              <a:defRPr sz="1800" b="0">
-                <a:solidFill>
-                  <a:srgbClr val="1E2933"/>
-                </a:solidFill>
-                <a:latin typeface="Microsoft YaHei"/>
-              </a:defRPr>
-            </a:pPr>
-            <a:r>
-              <a:t>  把离线回放接入 CI：每次规则改动自动跑 5 游戏回归</a:t>
-            </a:r>
-          </a:p>
-          <a:p>
-            <a:pPr algn="l">
-              <a:spcAft>
-                <a:spcPts val="1200"/>
-              </a:spcAft>
-              <a:defRPr sz="1800" b="0">
-                <a:solidFill>
-                  <a:srgbClr val="1E2933"/>
-                </a:solidFill>
-                <a:latin typeface="Microsoft YaHei"/>
-              </a:defRPr>
-            </a:pPr>
-            <a:r>
-              <a:t>  探索 Agent 间更严格的仲裁：Critic 对 L0/L2 冲突做最终决策</a:t>
-            </a:r>
-          </a:p>
-          <a:p>
-            <a:pPr algn="l">
-              <a:spcAft>
-                <a:spcPts val="1200"/>
-              </a:spcAft>
-              <a:defRPr sz="1800" b="0">
-                <a:solidFill>
-                  <a:srgbClr val="1E2933"/>
-                </a:solidFill>
-                <a:latin typeface="Microsoft YaHei"/>
-              </a:defRPr>
-            </a:pPr>
-            <a:r>
-              <a:t>   redesign strategy_memory 的 success 信号：结合位置变化、guide 触发、stall 减少</a:t>
-            </a:r>
-          </a:p>
-        </p:txBody>
-      </p:sp>
-      <p:sp>
-        <p:nvSpPr>
-          <p:cNvPr id="7" name="Oval 6"/>
+          <p:cNvPr id="7" name="Rectangle 6"/>
           <p:cNvSpPr/>
           <p:nvPr/>
         </p:nvSpPr>
         <p:spPr>
           <a:xfrm>
-            <a:off x="45720" y="0"/>
-            <a:ext cx="137160" cy="137160"/>
-          </a:xfrm>
-          <a:prstGeom prst="ellipse">
+            <a:off x="0" y="6537960"/>
+            <a:ext cx="12191695" cy="18288"/>
+          </a:xfrm>
+          <a:prstGeom prst="rect">
             <a:avLst/>
           </a:prstGeom>
           <a:solidFill>
@@ -21271,294 +22136,7 @@
       </p:sp>
       <p:sp>
         <p:nvSpPr>
-          <p:cNvPr id="8" name="Oval 7"/>
-          <p:cNvSpPr/>
-          <p:nvPr/>
-        </p:nvSpPr>
-        <p:spPr>
-          <a:xfrm>
-            <a:off x="45720" y="0"/>
-            <a:ext cx="137160" cy="137160"/>
-          </a:xfrm>
-          <a:prstGeom prst="ellipse">
-            <a:avLst/>
-          </a:prstGeom>
-          <a:solidFill>
-            <a:srgbClr val="0096C7"/>
-          </a:solidFill>
-          <a:ln/>
-        </p:spPr>
-        <p:style>
-          <a:lnRef idx="1">
-            <a:schemeClr val="accent1"/>
-          </a:lnRef>
-          <a:fillRef idx="3">
-            <a:schemeClr val="accent1"/>
-          </a:fillRef>
-          <a:effectRef idx="2">
-            <a:schemeClr val="accent1"/>
-          </a:effectRef>
-          <a:fontRef idx="minor">
-            <a:schemeClr val="lt1"/>
-          </a:fontRef>
-        </p:style>
-        <p:txBody>
-          <a:bodyPr rtlCol="0" anchor="ctr"/>
-          <a:lstStyle/>
-          <a:p>
-            <a:pPr algn="ctr"/>
-          </a:p>
-        </p:txBody>
-      </p:sp>
-      <p:sp>
-        <p:nvSpPr>
-          <p:cNvPr id="9" name="Oval 8"/>
-          <p:cNvSpPr/>
-          <p:nvPr/>
-        </p:nvSpPr>
-        <p:spPr>
-          <a:xfrm>
-            <a:off x="45720" y="0"/>
-            <a:ext cx="137160" cy="137160"/>
-          </a:xfrm>
-          <a:prstGeom prst="ellipse">
-            <a:avLst/>
-          </a:prstGeom>
-          <a:solidFill>
-            <a:srgbClr val="0096C7"/>
-          </a:solidFill>
-          <a:ln/>
-        </p:spPr>
-        <p:style>
-          <a:lnRef idx="1">
-            <a:schemeClr val="accent1"/>
-          </a:lnRef>
-          <a:fillRef idx="3">
-            <a:schemeClr val="accent1"/>
-          </a:fillRef>
-          <a:effectRef idx="2">
-            <a:schemeClr val="accent1"/>
-          </a:effectRef>
-          <a:fontRef idx="minor">
-            <a:schemeClr val="lt1"/>
-          </a:fontRef>
-        </p:style>
-        <p:txBody>
-          <a:bodyPr rtlCol="0" anchor="ctr"/>
-          <a:lstStyle/>
-          <a:p>
-            <a:pPr algn="ctr"/>
-          </a:p>
-        </p:txBody>
-      </p:sp>
-      <p:sp>
-        <p:nvSpPr>
-          <p:cNvPr id="10" name="Oval 9"/>
-          <p:cNvSpPr/>
-          <p:nvPr/>
-        </p:nvSpPr>
-        <p:spPr>
-          <a:xfrm>
-            <a:off x="45720" y="0"/>
-            <a:ext cx="137160" cy="137160"/>
-          </a:xfrm>
-          <a:prstGeom prst="ellipse">
-            <a:avLst/>
-          </a:prstGeom>
-          <a:solidFill>
-            <a:srgbClr val="0096C7"/>
-          </a:solidFill>
-          <a:ln/>
-        </p:spPr>
-        <p:style>
-          <a:lnRef idx="1">
-            <a:schemeClr val="accent1"/>
-          </a:lnRef>
-          <a:fillRef idx="3">
-            <a:schemeClr val="accent1"/>
-          </a:fillRef>
-          <a:effectRef idx="2">
-            <a:schemeClr val="accent1"/>
-          </a:effectRef>
-          <a:fontRef idx="minor">
-            <a:schemeClr val="lt1"/>
-          </a:fontRef>
-        </p:style>
-        <p:txBody>
-          <a:bodyPr rtlCol="0" anchor="ctr"/>
-          <a:lstStyle/>
-          <a:p>
-            <a:pPr algn="ctr"/>
-          </a:p>
-        </p:txBody>
-      </p:sp>
-      <p:sp>
-        <p:nvSpPr>
-          <p:cNvPr id="11" name="Oval 10"/>
-          <p:cNvSpPr/>
-          <p:nvPr/>
-        </p:nvSpPr>
-        <p:spPr>
-          <a:xfrm>
-            <a:off x="45720" y="0"/>
-            <a:ext cx="137160" cy="137160"/>
-          </a:xfrm>
-          <a:prstGeom prst="ellipse">
-            <a:avLst/>
-          </a:prstGeom>
-          <a:solidFill>
-            <a:srgbClr val="0096C7"/>
-          </a:solidFill>
-          <a:ln/>
-        </p:spPr>
-        <p:style>
-          <a:lnRef idx="1">
-            <a:schemeClr val="accent1"/>
-          </a:lnRef>
-          <a:fillRef idx="3">
-            <a:schemeClr val="accent1"/>
-          </a:fillRef>
-          <a:effectRef idx="2">
-            <a:schemeClr val="accent1"/>
-          </a:effectRef>
-          <a:fontRef idx="minor">
-            <a:schemeClr val="lt1"/>
-          </a:fontRef>
-        </p:style>
-        <p:txBody>
-          <a:bodyPr rtlCol="0" anchor="ctr"/>
-          <a:lstStyle/>
-          <a:p>
-            <a:pPr algn="ctr"/>
-          </a:p>
-        </p:txBody>
-      </p:sp>
-      <p:sp>
-        <p:nvSpPr>
-          <p:cNvPr id="12" name="Oval 11"/>
-          <p:cNvSpPr/>
-          <p:nvPr/>
-        </p:nvSpPr>
-        <p:spPr>
-          <a:xfrm>
-            <a:off x="45720" y="0"/>
-            <a:ext cx="137160" cy="137160"/>
-          </a:xfrm>
-          <a:prstGeom prst="ellipse">
-            <a:avLst/>
-          </a:prstGeom>
-          <a:solidFill>
-            <a:srgbClr val="0096C7"/>
-          </a:solidFill>
-          <a:ln/>
-        </p:spPr>
-        <p:style>
-          <a:lnRef idx="1">
-            <a:schemeClr val="accent1"/>
-          </a:lnRef>
-          <a:fillRef idx="3">
-            <a:schemeClr val="accent1"/>
-          </a:fillRef>
-          <a:effectRef idx="2">
-            <a:schemeClr val="accent1"/>
-          </a:effectRef>
-          <a:fontRef idx="minor">
-            <a:schemeClr val="lt1"/>
-          </a:fontRef>
-        </p:style>
-        <p:txBody>
-          <a:bodyPr rtlCol="0" anchor="ctr"/>
-          <a:lstStyle/>
-          <a:p>
-            <a:pPr algn="ctr"/>
-          </a:p>
-        </p:txBody>
-      </p:sp>
-      <p:sp>
-        <p:nvSpPr>
-          <p:cNvPr id="13" name="Oval 12"/>
-          <p:cNvSpPr/>
-          <p:nvPr/>
-        </p:nvSpPr>
-        <p:spPr>
-          <a:xfrm>
-            <a:off x="45720" y="0"/>
-            <a:ext cx="137160" cy="137160"/>
-          </a:xfrm>
-          <a:prstGeom prst="ellipse">
-            <a:avLst/>
-          </a:prstGeom>
-          <a:solidFill>
-            <a:srgbClr val="0096C7"/>
-          </a:solidFill>
-          <a:ln/>
-        </p:spPr>
-        <p:style>
-          <a:lnRef idx="1">
-            <a:schemeClr val="accent1"/>
-          </a:lnRef>
-          <a:fillRef idx="3">
-            <a:schemeClr val="accent1"/>
-          </a:fillRef>
-          <a:effectRef idx="2">
-            <a:schemeClr val="accent1"/>
-          </a:effectRef>
-          <a:fontRef idx="minor">
-            <a:schemeClr val="lt1"/>
-          </a:fontRef>
-        </p:style>
-        <p:txBody>
-          <a:bodyPr rtlCol="0" anchor="ctr"/>
-          <a:lstStyle/>
-          <a:p>
-            <a:pPr algn="ctr"/>
-          </a:p>
-        </p:txBody>
-      </p:sp>
-      <p:sp>
-        <p:nvSpPr>
-          <p:cNvPr id="14" name="Rectangle 13"/>
-          <p:cNvSpPr/>
-          <p:nvPr/>
-        </p:nvSpPr>
-        <p:spPr>
-          <a:xfrm>
-            <a:off x="0" y="6537960"/>
-            <a:ext cx="12191695" cy="18288"/>
-          </a:xfrm>
-          <a:prstGeom prst="rect">
-            <a:avLst/>
-          </a:prstGeom>
-          <a:solidFill>
-            <a:srgbClr val="0096C7"/>
-          </a:solidFill>
-          <a:ln/>
-        </p:spPr>
-        <p:style>
-          <a:lnRef idx="1">
-            <a:schemeClr val="accent1"/>
-          </a:lnRef>
-          <a:fillRef idx="3">
-            <a:schemeClr val="accent1"/>
-          </a:fillRef>
-          <a:effectRef idx="2">
-            <a:schemeClr val="accent1"/>
-          </a:effectRef>
-          <a:fontRef idx="minor">
-            <a:schemeClr val="lt1"/>
-          </a:fontRef>
-        </p:style>
-        <p:txBody>
-          <a:bodyPr rtlCol="0" anchor="ctr"/>
-          <a:lstStyle/>
-          <a:p>
-            <a:pPr algn="ctr"/>
-          </a:p>
-        </p:txBody>
-      </p:sp>
-      <p:sp>
-        <p:nvSpPr>
-          <p:cNvPr id="15" name="TextBox 14"/>
+          <p:cNvPr id="8" name="TextBox 7"/>
           <p:cNvSpPr txBox="1"/>
           <p:nvPr/>
         </p:nvSpPr>
@@ -21594,7 +22172,7 @@
       </p:sp>
       <p:sp>
         <p:nvSpPr>
-          <p:cNvPr id="16" name="TextBox 15"/>
+          <p:cNvPr id="9" name="TextBox 8"/>
           <p:cNvSpPr txBox="1"/>
           <p:nvPr/>
         </p:nvSpPr>
@@ -21623,7 +22201,7 @@
               </a:defRPr>
             </a:pPr>
             <a:r>
-              <a:t>36/37</a:t>
+              <a:t>36/38</a:t>
             </a:r>
           </a:p>
         </p:txBody>
@@ -21655,7 +22233,7 @@
         <p:spPr>
           <a:xfrm>
             <a:off x="0" y="0"/>
-            <a:ext cx="12191695" cy="6858000"/>
+            <a:ext cx="12191695" cy="960120"/>
           </a:xfrm>
           <a:prstGeom prst="rect">
             <a:avLst/>
@@ -21689,23 +22267,56 @@
       </p:sp>
       <p:sp>
         <p:nvSpPr>
-          <p:cNvPr id="3" name="Oval 2"/>
+          <p:cNvPr id="3" name="TextBox 2"/>
+          <p:cNvSpPr txBox="1"/>
+          <p:nvPr/>
+        </p:nvSpPr>
+        <p:spPr>
+          <a:xfrm>
+            <a:off x="457200" y="228600"/>
+            <a:ext cx="11247120" cy="548640"/>
+          </a:xfrm>
+          <a:prstGeom prst="rect">
+            <a:avLst/>
+          </a:prstGeom>
+          <a:noFill/>
+        </p:spPr>
+        <p:txBody>
+          <a:bodyPr wrap="none">
+            <a:spAutoFit/>
+          </a:bodyPr>
+          <a:lstStyle/>
+          <a:p>
+            <a:pPr algn="l">
+              <a:defRPr sz="3000" b="1">
+                <a:solidFill>
+                  <a:srgbClr val="F3F6F9"/>
+                </a:solidFill>
+                <a:latin typeface="Microsoft YaHei"/>
+              </a:defRPr>
+            </a:pPr>
+            <a:r>
+              <a:t>下一步：把实验变成稳定系统</a:t>
+            </a:r>
+          </a:p>
+        </p:txBody>
+      </p:sp>
+      <p:sp>
+        <p:nvSpPr>
+          <p:cNvPr id="4" name="Rectangle 3"/>
           <p:cNvSpPr/>
           <p:nvPr/>
         </p:nvSpPr>
         <p:spPr>
           <a:xfrm>
-            <a:off x="9144000" y="914400"/>
-            <a:ext cx="1371600" cy="1371600"/>
-          </a:xfrm>
-          <a:prstGeom prst="ellipse">
-            <a:avLst/>
-          </a:prstGeom>
-          <a:solidFill>
-            <a:srgbClr val="0096C7">
-              <a:lumMod val="70000"/>
-              <a:lumOff val="30000"/>
-            </a:srgbClr>
+            <a:off x="0" y="960120"/>
+            <a:ext cx="164592" cy="5897880"/>
+          </a:xfrm>
+          <a:prstGeom prst="rect">
+            <a:avLst/>
+          </a:prstGeom>
+          <a:solidFill>
+            <a:srgbClr val="0096C7"/>
           </a:solidFill>
           <a:ln/>
         </p:spPr>
@@ -21733,25 +22344,26 @@
       </p:sp>
       <p:sp>
         <p:nvSpPr>
-          <p:cNvPr id="4" name="Oval 3"/>
+          <p:cNvPr id="5" name="Rectangle 4"/>
           <p:cNvSpPr/>
           <p:nvPr/>
         </p:nvSpPr>
         <p:spPr>
           <a:xfrm>
-            <a:off x="9784080" y="1371600"/>
-            <a:ext cx="1371600" cy="1371600"/>
-          </a:xfrm>
-          <a:prstGeom prst="ellipse">
-            <a:avLst/>
-          </a:prstGeom>
-          <a:solidFill>
-            <a:srgbClr val="0096C7">
-              <a:lumMod val="70000"/>
-              <a:lumOff val="30000"/>
-            </a:srgbClr>
-          </a:solidFill>
-          <a:ln/>
+            <a:off x="320040" y="1078992"/>
+            <a:ext cx="11548872" cy="5349240"/>
+          </a:xfrm>
+          <a:prstGeom prst="rect">
+            <a:avLst/>
+          </a:prstGeom>
+          <a:solidFill>
+            <a:srgbClr val="FFFFFF"/>
+          </a:solidFill>
+          <a:ln w="12700">
+            <a:solidFill>
+              <a:srgbClr val="E1E5E9"/>
+            </a:solidFill>
+          </a:ln>
         </p:spPr>
         <p:style>
           <a:lnRef idx="1">
@@ -21777,23 +22389,155 @@
       </p:sp>
       <p:sp>
         <p:nvSpPr>
-          <p:cNvPr id="5" name="Oval 4"/>
+          <p:cNvPr id="6" name="TextBox 5"/>
+          <p:cNvSpPr txBox="1"/>
+          <p:nvPr/>
+        </p:nvSpPr>
+        <p:spPr>
+          <a:xfrm>
+            <a:off x="777240" y="1417320"/>
+            <a:ext cx="10972800" cy="5029200"/>
+          </a:xfrm>
+          <a:prstGeom prst="rect">
+            <a:avLst/>
+          </a:prstGeom>
+          <a:noFill/>
+        </p:spPr>
+        <p:txBody>
+          <a:bodyPr wrap="square">
+            <a:spAutoFit/>
+          </a:bodyPr>
+          <a:lstStyle/>
+          <a:p>
+            <a:pPr algn="l">
+              <a:spcAft>
+                <a:spcPts val="1200"/>
+              </a:spcAft>
+              <a:defRPr sz="1800" b="0">
+                <a:solidFill>
+                  <a:srgbClr val="1E2933"/>
+                </a:solidFill>
+                <a:latin typeface="Microsoft YaHei"/>
+              </a:defRPr>
+            </a:pPr>
+            <a:r>
+              <a:t>  在真实游戏运行中触发 code-file 更新，验证动态 stall/composite 下 L2 的决策质量</a:t>
+            </a:r>
+          </a:p>
+          <a:p>
+            <a:pPr algn="l">
+              <a:spcAft>
+                <a:spcPts val="1200"/>
+              </a:spcAft>
+              <a:defRPr sz="1800" b="0">
+                <a:solidFill>
+                  <a:srgbClr val="1E2933"/>
+                </a:solidFill>
+                <a:latin typeface="Microsoft YaHei"/>
+              </a:defRPr>
+            </a:pPr>
+            <a:r>
+              <a:t>  把 runtime_rules.json 的 schema 写进 L2 prompt，约束可改字段与取值范围</a:t>
+            </a:r>
+          </a:p>
+          <a:p>
+            <a:pPr algn="l">
+              <a:spcAft>
+                <a:spcPts val="1200"/>
+              </a:spcAft>
+              <a:defRPr sz="1800" b="0">
+                <a:solidFill>
+                  <a:srgbClr val="1E2933"/>
+                </a:solidFill>
+                <a:latin typeface="Microsoft YaHei"/>
+              </a:defRPr>
+            </a:pPr>
+            <a:r>
+              <a:t>  让本地 VLM 常驻，验证 L1 战术修正对 joystick 游戏的实际收益</a:t>
+            </a:r>
+          </a:p>
+          <a:p>
+            <a:pPr algn="l">
+              <a:spcAft>
+                <a:spcPts val="1200"/>
+              </a:spcAft>
+              <a:defRPr sz="1800" b="0">
+                <a:solidFill>
+                  <a:srgbClr val="1E2933"/>
+                </a:solidFill>
+                <a:latin typeface="Microsoft YaHei"/>
+              </a:defRPr>
+            </a:pPr>
+            <a:r>
+              <a:t>  在 5090 服务器跑 QLoRA 微调，把本地 VLM 训练成专用画面理解器</a:t>
+            </a:r>
+          </a:p>
+          <a:p>
+            <a:pPr algn="l">
+              <a:spcAft>
+                <a:spcPts val="1200"/>
+              </a:spcAft>
+              <a:defRPr sz="1800" b="0">
+                <a:solidFill>
+                  <a:srgbClr val="1E2933"/>
+                </a:solidFill>
+                <a:latin typeface="Microsoft YaHei"/>
+              </a:defRPr>
+            </a:pPr>
+            <a:r>
+              <a:t>  把离线回放接入 CI：每次规则改动自动跑 5 游戏回归</a:t>
+            </a:r>
+          </a:p>
+          <a:p>
+            <a:pPr algn="l">
+              <a:spcAft>
+                <a:spcPts val="1200"/>
+              </a:spcAft>
+              <a:defRPr sz="1800" b="0">
+                <a:solidFill>
+                  <a:srgbClr val="1E2933"/>
+                </a:solidFill>
+                <a:latin typeface="Microsoft YaHei"/>
+              </a:defRPr>
+            </a:pPr>
+            <a:r>
+              <a:t>  探索 Agent 间更严格的仲裁：Critic 对 L0/L2 冲突做最终决策</a:t>
+            </a:r>
+          </a:p>
+          <a:p>
+            <a:pPr algn="l">
+              <a:spcAft>
+                <a:spcPts val="1200"/>
+              </a:spcAft>
+              <a:defRPr sz="1800" b="0">
+                <a:solidFill>
+                  <a:srgbClr val="1E2933"/>
+                </a:solidFill>
+                <a:latin typeface="Microsoft YaHei"/>
+              </a:defRPr>
+            </a:pPr>
+            <a:r>
+              <a:t>   redesign strategy_memory 的 success 信号：结合位置变化、guide 触发、stall 减少</a:t>
+            </a:r>
+          </a:p>
+        </p:txBody>
+      </p:sp>
+      <p:sp>
+        <p:nvSpPr>
+          <p:cNvPr id="7" name="Oval 6"/>
           <p:cNvSpPr/>
           <p:nvPr/>
         </p:nvSpPr>
         <p:spPr>
           <a:xfrm>
-            <a:off x="10424160" y="1828800"/>
-            <a:ext cx="1371600" cy="1371600"/>
+            <a:off x="45720" y="0"/>
+            <a:ext cx="137160" cy="137160"/>
           </a:xfrm>
           <a:prstGeom prst="ellipse">
             <a:avLst/>
           </a:prstGeom>
           <a:solidFill>
-            <a:srgbClr val="0096C7">
-              <a:lumMod val="70000"/>
-              <a:lumOff val="30000"/>
-            </a:srgbClr>
+            <a:srgbClr val="0096C7"/>
           </a:solidFill>
           <a:ln/>
         </p:spPr>
@@ -21821,56 +22565,20 @@
       </p:sp>
       <p:sp>
         <p:nvSpPr>
-          <p:cNvPr id="6" name="TextBox 5"/>
-          <p:cNvSpPr txBox="1"/>
-          <p:nvPr/>
-        </p:nvSpPr>
-        <p:spPr>
-          <a:xfrm>
-            <a:off x="457200" y="2651760"/>
-            <a:ext cx="11247120" cy="1280160"/>
-          </a:xfrm>
-          <a:prstGeom prst="rect">
-            <a:avLst/>
-          </a:prstGeom>
-          <a:noFill/>
-        </p:spPr>
-        <p:txBody>
-          <a:bodyPr wrap="none">
-            <a:spAutoFit/>
-          </a:bodyPr>
-          <a:lstStyle/>
-          <a:p>
-            <a:pPr algn="ctr">
-              <a:defRPr sz="4800" b="1">
-                <a:solidFill>
-                  <a:srgbClr val="F3F6F9"/>
-                </a:solidFill>
-                <a:latin typeface="Microsoft YaHei"/>
-              </a:defRPr>
-            </a:pPr>
-            <a:r>
-              <a:t>谢谢，欢迎讨论</a:t>
-            </a:r>
-          </a:p>
-        </p:txBody>
-      </p:sp>
-      <p:sp>
-        <p:nvSpPr>
-          <p:cNvPr id="7" name="Rectangle 6"/>
+          <p:cNvPr id="8" name="Oval 7"/>
           <p:cNvSpPr/>
           <p:nvPr/>
         </p:nvSpPr>
         <p:spPr>
           <a:xfrm>
-            <a:off x="5184648" y="3931920"/>
-            <a:ext cx="1828800" cy="73152"/>
-          </a:xfrm>
-          <a:prstGeom prst="rect">
-            <a:avLst/>
-          </a:prstGeom>
-          <a:solidFill>
-            <a:srgbClr val="FF6B35"/>
+            <a:off x="45720" y="0"/>
+            <a:ext cx="137160" cy="137160"/>
+          </a:xfrm>
+          <a:prstGeom prst="ellipse">
+            <a:avLst/>
+          </a:prstGeom>
+          <a:solidFill>
+            <a:srgbClr val="0096C7"/>
           </a:solidFill>
           <a:ln/>
         </p:spPr>
@@ -21898,16 +22606,16 @@
       </p:sp>
       <p:sp>
         <p:nvSpPr>
-          <p:cNvPr id="8" name="Rectangle 7"/>
+          <p:cNvPr id="9" name="Oval 8"/>
           <p:cNvSpPr/>
           <p:nvPr/>
         </p:nvSpPr>
         <p:spPr>
           <a:xfrm>
-            <a:off x="0" y="6537960"/>
-            <a:ext cx="12191695" cy="18288"/>
-          </a:xfrm>
-          <a:prstGeom prst="rect">
+            <a:off x="45720" y="0"/>
+            <a:ext cx="137160" cy="137160"/>
+          </a:xfrm>
+          <a:prstGeom prst="ellipse">
             <a:avLst/>
           </a:prstGeom>
           <a:solidFill>
@@ -21939,7 +22647,212 @@
       </p:sp>
       <p:sp>
         <p:nvSpPr>
-          <p:cNvPr id="9" name="TextBox 8"/>
+          <p:cNvPr id="10" name="Oval 9"/>
+          <p:cNvSpPr/>
+          <p:nvPr/>
+        </p:nvSpPr>
+        <p:spPr>
+          <a:xfrm>
+            <a:off x="45720" y="0"/>
+            <a:ext cx="137160" cy="137160"/>
+          </a:xfrm>
+          <a:prstGeom prst="ellipse">
+            <a:avLst/>
+          </a:prstGeom>
+          <a:solidFill>
+            <a:srgbClr val="0096C7"/>
+          </a:solidFill>
+          <a:ln/>
+        </p:spPr>
+        <p:style>
+          <a:lnRef idx="1">
+            <a:schemeClr val="accent1"/>
+          </a:lnRef>
+          <a:fillRef idx="3">
+            <a:schemeClr val="accent1"/>
+          </a:fillRef>
+          <a:effectRef idx="2">
+            <a:schemeClr val="accent1"/>
+          </a:effectRef>
+          <a:fontRef idx="minor">
+            <a:schemeClr val="lt1"/>
+          </a:fontRef>
+        </p:style>
+        <p:txBody>
+          <a:bodyPr rtlCol="0" anchor="ctr"/>
+          <a:lstStyle/>
+          <a:p>
+            <a:pPr algn="ctr"/>
+          </a:p>
+        </p:txBody>
+      </p:sp>
+      <p:sp>
+        <p:nvSpPr>
+          <p:cNvPr id="11" name="Oval 10"/>
+          <p:cNvSpPr/>
+          <p:nvPr/>
+        </p:nvSpPr>
+        <p:spPr>
+          <a:xfrm>
+            <a:off x="45720" y="0"/>
+            <a:ext cx="137160" cy="137160"/>
+          </a:xfrm>
+          <a:prstGeom prst="ellipse">
+            <a:avLst/>
+          </a:prstGeom>
+          <a:solidFill>
+            <a:srgbClr val="0096C7"/>
+          </a:solidFill>
+          <a:ln/>
+        </p:spPr>
+        <p:style>
+          <a:lnRef idx="1">
+            <a:schemeClr val="accent1"/>
+          </a:lnRef>
+          <a:fillRef idx="3">
+            <a:schemeClr val="accent1"/>
+          </a:fillRef>
+          <a:effectRef idx="2">
+            <a:schemeClr val="accent1"/>
+          </a:effectRef>
+          <a:fontRef idx="minor">
+            <a:schemeClr val="lt1"/>
+          </a:fontRef>
+        </p:style>
+        <p:txBody>
+          <a:bodyPr rtlCol="0" anchor="ctr"/>
+          <a:lstStyle/>
+          <a:p>
+            <a:pPr algn="ctr"/>
+          </a:p>
+        </p:txBody>
+      </p:sp>
+      <p:sp>
+        <p:nvSpPr>
+          <p:cNvPr id="12" name="Oval 11"/>
+          <p:cNvSpPr/>
+          <p:nvPr/>
+        </p:nvSpPr>
+        <p:spPr>
+          <a:xfrm>
+            <a:off x="45720" y="0"/>
+            <a:ext cx="137160" cy="137160"/>
+          </a:xfrm>
+          <a:prstGeom prst="ellipse">
+            <a:avLst/>
+          </a:prstGeom>
+          <a:solidFill>
+            <a:srgbClr val="0096C7"/>
+          </a:solidFill>
+          <a:ln/>
+        </p:spPr>
+        <p:style>
+          <a:lnRef idx="1">
+            <a:schemeClr val="accent1"/>
+          </a:lnRef>
+          <a:fillRef idx="3">
+            <a:schemeClr val="accent1"/>
+          </a:fillRef>
+          <a:effectRef idx="2">
+            <a:schemeClr val="accent1"/>
+          </a:effectRef>
+          <a:fontRef idx="minor">
+            <a:schemeClr val="lt1"/>
+          </a:fontRef>
+        </p:style>
+        <p:txBody>
+          <a:bodyPr rtlCol="0" anchor="ctr"/>
+          <a:lstStyle/>
+          <a:p>
+            <a:pPr algn="ctr"/>
+          </a:p>
+        </p:txBody>
+      </p:sp>
+      <p:sp>
+        <p:nvSpPr>
+          <p:cNvPr id="13" name="Oval 12"/>
+          <p:cNvSpPr/>
+          <p:nvPr/>
+        </p:nvSpPr>
+        <p:spPr>
+          <a:xfrm>
+            <a:off x="45720" y="0"/>
+            <a:ext cx="137160" cy="137160"/>
+          </a:xfrm>
+          <a:prstGeom prst="ellipse">
+            <a:avLst/>
+          </a:prstGeom>
+          <a:solidFill>
+            <a:srgbClr val="0096C7"/>
+          </a:solidFill>
+          <a:ln/>
+        </p:spPr>
+        <p:style>
+          <a:lnRef idx="1">
+            <a:schemeClr val="accent1"/>
+          </a:lnRef>
+          <a:fillRef idx="3">
+            <a:schemeClr val="accent1"/>
+          </a:fillRef>
+          <a:effectRef idx="2">
+            <a:schemeClr val="accent1"/>
+          </a:effectRef>
+          <a:fontRef idx="minor">
+            <a:schemeClr val="lt1"/>
+          </a:fontRef>
+        </p:style>
+        <p:txBody>
+          <a:bodyPr rtlCol="0" anchor="ctr"/>
+          <a:lstStyle/>
+          <a:p>
+            <a:pPr algn="ctr"/>
+          </a:p>
+        </p:txBody>
+      </p:sp>
+      <p:sp>
+        <p:nvSpPr>
+          <p:cNvPr id="14" name="Rectangle 13"/>
+          <p:cNvSpPr/>
+          <p:nvPr/>
+        </p:nvSpPr>
+        <p:spPr>
+          <a:xfrm>
+            <a:off x="0" y="6537960"/>
+            <a:ext cx="12191695" cy="18288"/>
+          </a:xfrm>
+          <a:prstGeom prst="rect">
+            <a:avLst/>
+          </a:prstGeom>
+          <a:solidFill>
+            <a:srgbClr val="0096C7"/>
+          </a:solidFill>
+          <a:ln/>
+        </p:spPr>
+        <p:style>
+          <a:lnRef idx="1">
+            <a:schemeClr val="accent1"/>
+          </a:lnRef>
+          <a:fillRef idx="3">
+            <a:schemeClr val="accent1"/>
+          </a:fillRef>
+          <a:effectRef idx="2">
+            <a:schemeClr val="accent1"/>
+          </a:effectRef>
+          <a:fontRef idx="minor">
+            <a:schemeClr val="lt1"/>
+          </a:fontRef>
+        </p:style>
+        <p:txBody>
+          <a:bodyPr rtlCol="0" anchor="ctr"/>
+          <a:lstStyle/>
+          <a:p>
+            <a:pPr algn="ctr"/>
+          </a:p>
+        </p:txBody>
+      </p:sp>
+      <p:sp>
+        <p:nvSpPr>
+          <p:cNvPr id="15" name="TextBox 14"/>
           <p:cNvSpPr txBox="1"/>
           <p:nvPr/>
         </p:nvSpPr>
@@ -21975,7 +22888,7 @@
       </p:sp>
       <p:sp>
         <p:nvSpPr>
-          <p:cNvPr id="10" name="TextBox 9"/>
+          <p:cNvPr id="16" name="TextBox 15"/>
           <p:cNvSpPr txBox="1"/>
           <p:nvPr/>
         </p:nvSpPr>
@@ -22004,7 +22917,388 @@
               </a:defRPr>
             </a:pPr>
             <a:r>
-              <a:t>37/37</a:t>
+              <a:t>37/38</a:t>
+            </a:r>
+          </a:p>
+        </p:txBody>
+      </p:sp>
+    </p:spTree>
+  </p:cSld>
+  <p:clrMapOvr>
+    <a:masterClrMapping/>
+  </p:clrMapOvr>
+</p:sld>
+</file>
+
+<file path=ppt/slides/slide38.xml><?xml version="1.0" encoding="utf-8"?>
+<p:sld xmlns:a="http://schemas.openxmlformats.org/drawingml/2006/main" xmlns:p="http://schemas.openxmlformats.org/presentationml/2006/main" xmlns:r="http://schemas.openxmlformats.org/officeDocument/2006/relationships">
+  <p:cSld>
+    <p:spTree>
+      <p:nvGrpSpPr>
+        <p:cNvPr id="1" name=""/>
+        <p:cNvGrpSpPr/>
+        <p:nvPr/>
+      </p:nvGrpSpPr>
+      <p:grpSpPr/>
+      <p:sp>
+        <p:nvSpPr>
+          <p:cNvPr id="2" name="Rectangle 1"/>
+          <p:cNvSpPr/>
+          <p:nvPr/>
+        </p:nvSpPr>
+        <p:spPr>
+          <a:xfrm>
+            <a:off x="0" y="0"/>
+            <a:ext cx="12191695" cy="6858000"/>
+          </a:xfrm>
+          <a:prstGeom prst="rect">
+            <a:avLst/>
+          </a:prstGeom>
+          <a:solidFill>
+            <a:srgbClr val="1A237E"/>
+          </a:solidFill>
+          <a:ln/>
+        </p:spPr>
+        <p:style>
+          <a:lnRef idx="1">
+            <a:schemeClr val="accent1"/>
+          </a:lnRef>
+          <a:fillRef idx="3">
+            <a:schemeClr val="accent1"/>
+          </a:fillRef>
+          <a:effectRef idx="2">
+            <a:schemeClr val="accent1"/>
+          </a:effectRef>
+          <a:fontRef idx="minor">
+            <a:schemeClr val="lt1"/>
+          </a:fontRef>
+        </p:style>
+        <p:txBody>
+          <a:bodyPr rtlCol="0" anchor="ctr"/>
+          <a:lstStyle/>
+          <a:p>
+            <a:pPr algn="ctr"/>
+          </a:p>
+        </p:txBody>
+      </p:sp>
+      <p:sp>
+        <p:nvSpPr>
+          <p:cNvPr id="3" name="Oval 2"/>
+          <p:cNvSpPr/>
+          <p:nvPr/>
+        </p:nvSpPr>
+        <p:spPr>
+          <a:xfrm>
+            <a:off x="9144000" y="914400"/>
+            <a:ext cx="1371600" cy="1371600"/>
+          </a:xfrm>
+          <a:prstGeom prst="ellipse">
+            <a:avLst/>
+          </a:prstGeom>
+          <a:solidFill>
+            <a:srgbClr val="0096C7">
+              <a:lumMod val="70000"/>
+              <a:lumOff val="30000"/>
+            </a:srgbClr>
+          </a:solidFill>
+          <a:ln/>
+        </p:spPr>
+        <p:style>
+          <a:lnRef idx="1">
+            <a:schemeClr val="accent1"/>
+          </a:lnRef>
+          <a:fillRef idx="3">
+            <a:schemeClr val="accent1"/>
+          </a:fillRef>
+          <a:effectRef idx="2">
+            <a:schemeClr val="accent1"/>
+          </a:effectRef>
+          <a:fontRef idx="minor">
+            <a:schemeClr val="lt1"/>
+          </a:fontRef>
+        </p:style>
+        <p:txBody>
+          <a:bodyPr rtlCol="0" anchor="ctr"/>
+          <a:lstStyle/>
+          <a:p>
+            <a:pPr algn="ctr"/>
+          </a:p>
+        </p:txBody>
+      </p:sp>
+      <p:sp>
+        <p:nvSpPr>
+          <p:cNvPr id="4" name="Oval 3"/>
+          <p:cNvSpPr/>
+          <p:nvPr/>
+        </p:nvSpPr>
+        <p:spPr>
+          <a:xfrm>
+            <a:off x="9784080" y="1371600"/>
+            <a:ext cx="1371600" cy="1371600"/>
+          </a:xfrm>
+          <a:prstGeom prst="ellipse">
+            <a:avLst/>
+          </a:prstGeom>
+          <a:solidFill>
+            <a:srgbClr val="0096C7">
+              <a:lumMod val="70000"/>
+              <a:lumOff val="30000"/>
+            </a:srgbClr>
+          </a:solidFill>
+          <a:ln/>
+        </p:spPr>
+        <p:style>
+          <a:lnRef idx="1">
+            <a:schemeClr val="accent1"/>
+          </a:lnRef>
+          <a:fillRef idx="3">
+            <a:schemeClr val="accent1"/>
+          </a:fillRef>
+          <a:effectRef idx="2">
+            <a:schemeClr val="accent1"/>
+          </a:effectRef>
+          <a:fontRef idx="minor">
+            <a:schemeClr val="lt1"/>
+          </a:fontRef>
+        </p:style>
+        <p:txBody>
+          <a:bodyPr rtlCol="0" anchor="ctr"/>
+          <a:lstStyle/>
+          <a:p>
+            <a:pPr algn="ctr"/>
+          </a:p>
+        </p:txBody>
+      </p:sp>
+      <p:sp>
+        <p:nvSpPr>
+          <p:cNvPr id="5" name="Oval 4"/>
+          <p:cNvSpPr/>
+          <p:nvPr/>
+        </p:nvSpPr>
+        <p:spPr>
+          <a:xfrm>
+            <a:off x="10424160" y="1828800"/>
+            <a:ext cx="1371600" cy="1371600"/>
+          </a:xfrm>
+          <a:prstGeom prst="ellipse">
+            <a:avLst/>
+          </a:prstGeom>
+          <a:solidFill>
+            <a:srgbClr val="0096C7">
+              <a:lumMod val="70000"/>
+              <a:lumOff val="30000"/>
+            </a:srgbClr>
+          </a:solidFill>
+          <a:ln/>
+        </p:spPr>
+        <p:style>
+          <a:lnRef idx="1">
+            <a:schemeClr val="accent1"/>
+          </a:lnRef>
+          <a:fillRef idx="3">
+            <a:schemeClr val="accent1"/>
+          </a:fillRef>
+          <a:effectRef idx="2">
+            <a:schemeClr val="accent1"/>
+          </a:effectRef>
+          <a:fontRef idx="minor">
+            <a:schemeClr val="lt1"/>
+          </a:fontRef>
+        </p:style>
+        <p:txBody>
+          <a:bodyPr rtlCol="0" anchor="ctr"/>
+          <a:lstStyle/>
+          <a:p>
+            <a:pPr algn="ctr"/>
+          </a:p>
+        </p:txBody>
+      </p:sp>
+      <p:sp>
+        <p:nvSpPr>
+          <p:cNvPr id="6" name="TextBox 5"/>
+          <p:cNvSpPr txBox="1"/>
+          <p:nvPr/>
+        </p:nvSpPr>
+        <p:spPr>
+          <a:xfrm>
+            <a:off x="457200" y="2651760"/>
+            <a:ext cx="11247120" cy="1280160"/>
+          </a:xfrm>
+          <a:prstGeom prst="rect">
+            <a:avLst/>
+          </a:prstGeom>
+          <a:noFill/>
+        </p:spPr>
+        <p:txBody>
+          <a:bodyPr wrap="none">
+            <a:spAutoFit/>
+          </a:bodyPr>
+          <a:lstStyle/>
+          <a:p>
+            <a:pPr algn="ctr">
+              <a:defRPr sz="4800" b="1">
+                <a:solidFill>
+                  <a:srgbClr val="F3F6F9"/>
+                </a:solidFill>
+                <a:latin typeface="Microsoft YaHei"/>
+              </a:defRPr>
+            </a:pPr>
+            <a:r>
+              <a:t>谢谢，欢迎讨论</a:t>
+            </a:r>
+          </a:p>
+        </p:txBody>
+      </p:sp>
+      <p:sp>
+        <p:nvSpPr>
+          <p:cNvPr id="7" name="Rectangle 6"/>
+          <p:cNvSpPr/>
+          <p:nvPr/>
+        </p:nvSpPr>
+        <p:spPr>
+          <a:xfrm>
+            <a:off x="5184648" y="3931920"/>
+            <a:ext cx="1828800" cy="73152"/>
+          </a:xfrm>
+          <a:prstGeom prst="rect">
+            <a:avLst/>
+          </a:prstGeom>
+          <a:solidFill>
+            <a:srgbClr val="FF6B35"/>
+          </a:solidFill>
+          <a:ln/>
+        </p:spPr>
+        <p:style>
+          <a:lnRef idx="1">
+            <a:schemeClr val="accent1"/>
+          </a:lnRef>
+          <a:fillRef idx="3">
+            <a:schemeClr val="accent1"/>
+          </a:fillRef>
+          <a:effectRef idx="2">
+            <a:schemeClr val="accent1"/>
+          </a:effectRef>
+          <a:fontRef idx="minor">
+            <a:schemeClr val="lt1"/>
+          </a:fontRef>
+        </p:style>
+        <p:txBody>
+          <a:bodyPr rtlCol="0" anchor="ctr"/>
+          <a:lstStyle/>
+          <a:p>
+            <a:pPr algn="ctr"/>
+          </a:p>
+        </p:txBody>
+      </p:sp>
+      <p:sp>
+        <p:nvSpPr>
+          <p:cNvPr id="8" name="Rectangle 7"/>
+          <p:cNvSpPr/>
+          <p:nvPr/>
+        </p:nvSpPr>
+        <p:spPr>
+          <a:xfrm>
+            <a:off x="0" y="6537960"/>
+            <a:ext cx="12191695" cy="18288"/>
+          </a:xfrm>
+          <a:prstGeom prst="rect">
+            <a:avLst/>
+          </a:prstGeom>
+          <a:solidFill>
+            <a:srgbClr val="0096C7"/>
+          </a:solidFill>
+          <a:ln/>
+        </p:spPr>
+        <p:style>
+          <a:lnRef idx="1">
+            <a:schemeClr val="accent1"/>
+          </a:lnRef>
+          <a:fillRef idx="3">
+            <a:schemeClr val="accent1"/>
+          </a:fillRef>
+          <a:effectRef idx="2">
+            <a:schemeClr val="accent1"/>
+          </a:effectRef>
+          <a:fontRef idx="minor">
+            <a:schemeClr val="lt1"/>
+          </a:fontRef>
+        </p:style>
+        <p:txBody>
+          <a:bodyPr rtlCol="0" anchor="ctr"/>
+          <a:lstStyle/>
+          <a:p>
+            <a:pPr algn="ctr"/>
+          </a:p>
+        </p:txBody>
+      </p:sp>
+      <p:sp>
+        <p:nvSpPr>
+          <p:cNvPr id="9" name="TextBox 8"/>
+          <p:cNvSpPr txBox="1"/>
+          <p:nvPr/>
+        </p:nvSpPr>
+        <p:spPr>
+          <a:xfrm>
+            <a:off x="457200" y="6583680"/>
+            <a:ext cx="3657600" cy="228600"/>
+          </a:xfrm>
+          <a:prstGeom prst="rect">
+            <a:avLst/>
+          </a:prstGeom>
+          <a:noFill/>
+        </p:spPr>
+        <p:txBody>
+          <a:bodyPr wrap="none">
+            <a:spAutoFit/>
+          </a:bodyPr>
+          <a:lstStyle/>
+          <a:p>
+            <a:pPr algn="l">
+              <a:defRPr sz="1000" b="0">
+                <a:solidFill>
+                  <a:srgbClr val="6C757D"/>
+                </a:solidFill>
+                <a:latin typeface="Microsoft YaHei"/>
+              </a:defRPr>
+            </a:pPr>
+            <a:r>
+              <a:t>smallgameagent · LLM/VLM + 规则驱动</a:t>
+            </a:r>
+          </a:p>
+        </p:txBody>
+      </p:sp>
+      <p:sp>
+        <p:nvSpPr>
+          <p:cNvPr id="10" name="TextBox 9"/>
+          <p:cNvSpPr txBox="1"/>
+          <p:nvPr/>
+        </p:nvSpPr>
+        <p:spPr>
+          <a:xfrm>
+            <a:off x="10789920" y="6583680"/>
+            <a:ext cx="914400" cy="228600"/>
+          </a:xfrm>
+          <a:prstGeom prst="rect">
+            <a:avLst/>
+          </a:prstGeom>
+          <a:noFill/>
+        </p:spPr>
+        <p:txBody>
+          <a:bodyPr wrap="none">
+            <a:spAutoFit/>
+          </a:bodyPr>
+          <a:lstStyle/>
+          <a:p>
+            <a:pPr algn="r">
+              <a:defRPr sz="1000" b="0">
+                <a:solidFill>
+                  <a:srgbClr val="6C757D"/>
+                </a:solidFill>
+                <a:latin typeface="Microsoft YaHei"/>
+              </a:defRPr>
+            </a:pPr>
+            <a:r>
+              <a:t>38/38</a:t>
             </a:r>
           </a:p>
         </p:txBody>
@@ -23344,7 +24638,7 @@
               </a:defRPr>
             </a:pPr>
             <a:r>
-              <a:t>4/37</a:t>
+              <a:t>4/38</a:t>
             </a:r>
           </a:p>
         </p:txBody>
@@ -23673,7 +24967,7 @@
               </a:defRPr>
             </a:pPr>
             <a:r>
-              <a:t>5/37</a:t>
+              <a:t>5/38</a:t>
             </a:r>
           </a:p>
         </p:txBody>
@@ -24070,7 +25364,7 @@
               </a:defRPr>
             </a:pPr>
             <a:r>
-              <a:t>6/37</a:t>
+              <a:t>6/38</a:t>
             </a:r>
           </a:p>
         </p:txBody>
@@ -24399,7 +25693,7 @@
               </a:defRPr>
             </a:pPr>
             <a:r>
-              <a:t>7/37</a:t>
+              <a:t>7/38</a:t>
             </a:r>
           </a:p>
         </p:txBody>
@@ -25703,7 +26997,7 @@
               </a:defRPr>
             </a:pPr>
             <a:r>
-              <a:t>8/37</a:t>
+              <a:t>8/38</a:t>
             </a:r>
           </a:p>
         </p:txBody>
@@ -26084,7 +27378,7 @@
               </a:defRPr>
             </a:pPr>
             <a:r>
-              <a:t>9/37</a:t>
+              <a:t>9/38</a:t>
             </a:r>
           </a:p>
         </p:txBody>

--- a/reports/smallgameagent_report.pptx
+++ b/reports/smallgameagent_report.pptx
@@ -44,6 +44,7 @@
     <p:sldId id="292" r:id="rId43"/>
     <p:sldId id="293" r:id="rId44"/>
     <p:sldId id="294" r:id="rId45"/>
+    <p:sldId id="295" r:id="rId46"/>
   </p:sldIdLst>
   <p:sldSz cx="12191695" cy="6858000" type="screen4x3"/>
   <p:notesSz cx="6858000" cy="9144000"/>
@@ -3852,7 +3853,7 @@
               </a:defRPr>
             </a:pPr>
             <a:r>
-              <a:t>10/39</a:t>
+              <a:t>10/40</a:t>
             </a:r>
           </a:p>
         </p:txBody>
@@ -4670,7 +4671,7 @@
               </a:defRPr>
             </a:pPr>
             <a:r>
-              <a:t>11/39</a:t>
+              <a:t>11/40</a:t>
             </a:r>
           </a:p>
         </p:txBody>
@@ -5067,7 +5068,7 @@
               </a:defRPr>
             </a:pPr>
             <a:r>
-              <a:t>12/39</a:t>
+              <a:t>12/40</a:t>
             </a:r>
           </a:p>
         </p:txBody>
@@ -5396,7 +5397,7 @@
               </a:defRPr>
             </a:pPr>
             <a:r>
-              <a:t>13/39</a:t>
+              <a:t>13/40</a:t>
             </a:r>
           </a:p>
         </p:txBody>
@@ -6187,7 +6188,7 @@
               </a:defRPr>
             </a:pPr>
             <a:r>
-              <a:t>14/39</a:t>
+              <a:t>14/40</a:t>
             </a:r>
           </a:p>
         </p:txBody>
@@ -7231,7 +7232,7 @@
               </a:defRPr>
             </a:pPr>
             <a:r>
-              <a:t>15/39</a:t>
+              <a:t>15/40</a:t>
             </a:r>
           </a:p>
         </p:txBody>
@@ -8530,7 +8531,7 @@
               </a:defRPr>
             </a:pPr>
             <a:r>
-              <a:t>16/39</a:t>
+              <a:t>16/40</a:t>
             </a:r>
           </a:p>
         </p:txBody>
@@ -9712,7 +9713,7 @@
               </a:defRPr>
             </a:pPr>
             <a:r>
-              <a:t>17/39</a:t>
+              <a:t>17/40</a:t>
             </a:r>
           </a:p>
         </p:txBody>
@@ -10109,7 +10110,7 @@
               </a:defRPr>
             </a:pPr>
             <a:r>
-              <a:t>18/39</a:t>
+              <a:t>18/40</a:t>
             </a:r>
           </a:p>
         </p:txBody>
@@ -10506,7 +10507,7 @@
               </a:defRPr>
             </a:pPr>
             <a:r>
-              <a:t>19/39</a:t>
+              <a:t>19/40</a:t>
             </a:r>
           </a:p>
         </p:txBody>
@@ -11379,7 +11380,7 @@
               </a:defRPr>
             </a:pPr>
             <a:r>
-              <a:t>2/39</a:t>
+              <a:t>2/40</a:t>
             </a:r>
           </a:p>
         </p:txBody>
@@ -11776,7 +11777,7 @@
               </a:defRPr>
             </a:pPr>
             <a:r>
-              <a:t>20/39</a:t>
+              <a:t>20/40</a:t>
             </a:r>
           </a:p>
         </p:txBody>
@@ -12105,7 +12106,7 @@
               </a:defRPr>
             </a:pPr>
             <a:r>
-              <a:t>21/39</a:t>
+              <a:t>21/40</a:t>
             </a:r>
           </a:p>
         </p:txBody>
@@ -13168,7 +13169,7 @@
               </a:defRPr>
             </a:pPr>
             <a:r>
-              <a:t>22/39</a:t>
+              <a:t>22/40</a:t>
             </a:r>
           </a:p>
         </p:txBody>
@@ -13946,7 +13947,7 @@
               </a:defRPr>
             </a:pPr>
             <a:r>
-              <a:t>23/39</a:t>
+              <a:t>23/40</a:t>
             </a:r>
           </a:p>
         </p:txBody>
@@ -14275,7 +14276,7 @@
               </a:defRPr>
             </a:pPr>
             <a:r>
-              <a:t>24/39</a:t>
+              <a:t>24/40</a:t>
             </a:r>
           </a:p>
         </p:txBody>
@@ -15155,7 +15156,7 @@
               </a:defRPr>
             </a:pPr>
             <a:r>
-              <a:t>25/39</a:t>
+              <a:t>25/40</a:t>
             </a:r>
           </a:p>
         </p:txBody>
@@ -15484,7 +15485,7 @@
               </a:defRPr>
             </a:pPr>
             <a:r>
-              <a:t>26/39</a:t>
+              <a:t>26/40</a:t>
             </a:r>
           </a:p>
         </p:txBody>
@@ -16302,7 +16303,7 @@
               </a:defRPr>
             </a:pPr>
             <a:r>
-              <a:t>27/39</a:t>
+              <a:t>27/40</a:t>
             </a:r>
           </a:p>
         </p:txBody>
@@ -16876,7 +16877,7 @@
               </a:defRPr>
             </a:pPr>
             <a:r>
-              <a:t>28/39</a:t>
+              <a:t>28/40</a:t>
             </a:r>
           </a:p>
         </p:txBody>
@@ -17692,7 +17693,7 @@
               </a:defRPr>
             </a:pPr>
             <a:r>
-              <a:t>29/39</a:t>
+              <a:t>29/40</a:t>
             </a:r>
           </a:p>
         </p:txBody>
@@ -18121,7 +18122,7 @@
               </a:defRPr>
             </a:pPr>
             <a:r>
-              <a:t>3/39</a:t>
+              <a:t>3/40</a:t>
             </a:r>
           </a:p>
         </p:txBody>
@@ -19194,7 +19195,7 @@
               </a:defRPr>
             </a:pPr>
             <a:r>
-              <a:t>30/39</a:t>
+              <a:t>30/40</a:t>
             </a:r>
           </a:p>
         </p:txBody>
@@ -20487,7 +20488,7 @@
               </a:defRPr>
             </a:pPr>
             <a:r>
-              <a:t>31/39</a:t>
+              <a:t>31/40</a:t>
             </a:r>
           </a:p>
         </p:txBody>
@@ -20816,7 +20817,7 @@
               </a:defRPr>
             </a:pPr>
             <a:r>
-              <a:t>32/39</a:t>
+              <a:t>32/40</a:t>
             </a:r>
           </a:p>
         </p:txBody>
@@ -21197,7 +21198,7 @@
               </a:defRPr>
             </a:pPr>
             <a:r>
-              <a:t>33/39</a:t>
+              <a:t>33/40</a:t>
             </a:r>
           </a:p>
         </p:txBody>
@@ -21755,7 +21756,7 @@
               </a:defRPr>
             </a:pPr>
             <a:r>
-              <a:t>34/39</a:t>
+              <a:t>34/40</a:t>
             </a:r>
           </a:p>
         </p:txBody>
@@ -22084,7 +22085,7 @@
               </a:defRPr>
             </a:pPr>
             <a:r>
-              <a:t>35/39</a:t>
+              <a:t>35/40</a:t>
             </a:r>
           </a:p>
         </p:txBody>
@@ -22179,7 +22180,7 @@
               </a:defRPr>
             </a:pPr>
             <a:r>
-              <a:t>技术路线图：从能跑到好用</a:t>
+              <a:t>同学框架集成：统一实验标准</a:t>
             </a:r>
           </a:p>
         </p:txBody>
@@ -22199,7 +22200,7 @@
             <a:avLst/>
           </a:prstGeom>
           <a:solidFill>
-            <a:srgbClr val="0096C7"/>
+            <a:srgbClr val="28A745"/>
           </a:solidFill>
           <a:ln/>
         </p:spPr>
@@ -22272,20 +22273,20 @@
       </p:sp>
       <p:sp>
         <p:nvSpPr>
-          <p:cNvPr id="6" name="Rectangle 5"/>
-          <p:cNvSpPr/>
-          <p:nvPr/>
-        </p:nvSpPr>
-        <p:spPr>
-          <a:xfrm>
-            <a:off x="777240" y="3200400"/>
-            <a:ext cx="10972800" cy="73152"/>
-          </a:xfrm>
-          <a:prstGeom prst="rect">
-            <a:avLst/>
-          </a:prstGeom>
-          <a:solidFill>
-            <a:srgbClr val="6C757D"/>
+          <p:cNvPr id="6" name="Rounded Rectangle 5"/>
+          <p:cNvSpPr/>
+          <p:nvPr/>
+        </p:nvSpPr>
+        <p:spPr>
+          <a:xfrm>
+            <a:off x="621792" y="1353312"/>
+            <a:ext cx="5486400" cy="2286000"/>
+          </a:xfrm>
+          <a:prstGeom prst="roundRect">
+            <a:avLst/>
+          </a:prstGeom>
+          <a:solidFill>
+            <a:srgbClr val="D0D5DA"/>
           </a:solidFill>
           <a:ln/>
         </p:spPr>
@@ -22313,20 +22314,65 @@
       </p:sp>
       <p:sp>
         <p:nvSpPr>
-          <p:cNvPr id="7" name="Oval 6"/>
-          <p:cNvSpPr/>
-          <p:nvPr/>
-        </p:nvSpPr>
-        <p:spPr>
-          <a:xfrm>
-            <a:off x="822960" y="3063240"/>
-            <a:ext cx="320040" cy="320040"/>
-          </a:xfrm>
-          <a:prstGeom prst="ellipse">
-            <a:avLst/>
-          </a:prstGeom>
-          <a:solidFill>
-            <a:srgbClr val="28A745"/>
+          <p:cNvPr id="7" name="Rounded Rectangle 6"/>
+          <p:cNvSpPr/>
+          <p:nvPr/>
+        </p:nvSpPr>
+        <p:spPr>
+          <a:xfrm>
+            <a:off x="594360" y="1325880"/>
+            <a:ext cx="5486400" cy="2286000"/>
+          </a:xfrm>
+          <a:prstGeom prst="roundRect">
+            <a:avLst/>
+          </a:prstGeom>
+          <a:solidFill>
+            <a:srgbClr val="FFFFFF"/>
+          </a:solidFill>
+          <a:ln w="12700">
+            <a:solidFill>
+              <a:srgbClr val="DDE2E6"/>
+            </a:solidFill>
+          </a:ln>
+        </p:spPr>
+        <p:style>
+          <a:lnRef idx="1">
+            <a:schemeClr val="accent1"/>
+          </a:lnRef>
+          <a:fillRef idx="3">
+            <a:schemeClr val="accent1"/>
+          </a:fillRef>
+          <a:effectRef idx="2">
+            <a:schemeClr val="accent1"/>
+          </a:effectRef>
+          <a:fontRef idx="minor">
+            <a:schemeClr val="lt1"/>
+          </a:fontRef>
+        </p:style>
+        <p:txBody>
+          <a:bodyPr rtlCol="0" anchor="ctr"/>
+          <a:lstStyle/>
+          <a:p>
+            <a:pPr algn="ctr"/>
+          </a:p>
+        </p:txBody>
+      </p:sp>
+      <p:sp>
+        <p:nvSpPr>
+          <p:cNvPr id="8" name="Rectangle 7"/>
+          <p:cNvSpPr/>
+          <p:nvPr/>
+        </p:nvSpPr>
+        <p:spPr>
+          <a:xfrm>
+            <a:off x="594360" y="1325880"/>
+            <a:ext cx="5486400" cy="411480"/>
+          </a:xfrm>
+          <a:prstGeom prst="rect">
+            <a:avLst/>
+          </a:prstGeom>
+          <a:solidFill>
+            <a:srgbClr val="0096C7"/>
           </a:solidFill>
           <a:ln/>
         </p:spPr>
@@ -22354,14 +22400,14 @@
       </p:sp>
       <p:sp>
         <p:nvSpPr>
-          <p:cNvPr id="8" name="TextBox 7"/>
+          <p:cNvPr id="9" name="TextBox 8"/>
           <p:cNvSpPr txBox="1"/>
           <p:nvPr/>
         </p:nvSpPr>
         <p:spPr>
           <a:xfrm>
-            <a:off x="320040" y="2103120"/>
-            <a:ext cx="1645920" cy="457200"/>
+            <a:off x="667512" y="1399032"/>
+            <a:ext cx="5340096" cy="320040"/>
           </a:xfrm>
           <a:prstGeom prst="rect">
             <a:avLst/>
@@ -22374,30 +22420,244 @@
           </a:bodyPr>
           <a:lstStyle/>
           <a:p>
-            <a:pPr algn="ctr">
-              <a:defRPr sz="1300" b="1">
-                <a:solidFill>
-                  <a:srgbClr val="28A745"/>
-                </a:solidFill>
-                <a:latin typeface="Microsoft YaHei"/>
-              </a:defRPr>
-            </a:pPr>
-            <a:r>
-              <a:t>已完成</a:t>
-            </a:r>
-          </a:p>
-        </p:txBody>
-      </p:sp>
-      <p:sp>
-        <p:nvSpPr>
-          <p:cNvPr id="9" name="TextBox 8"/>
+            <a:pPr algn="l">
+              <a:defRPr sz="1400" b="1">
+                <a:solidFill>
+                  <a:srgbClr val="F3F6F9"/>
+                </a:solidFill>
+                <a:latin typeface="Microsoft YaHei"/>
+              </a:defRPr>
+            </a:pPr>
+            <a:r>
+              <a:t>规划器桥接（planner-http-adapter）</a:t>
+            </a:r>
+          </a:p>
+        </p:txBody>
+      </p:sp>
+      <p:sp>
+        <p:nvSpPr>
+          <p:cNvPr id="10" name="TextBox 9"/>
           <p:cNvSpPr txBox="1"/>
           <p:nvPr/>
         </p:nvSpPr>
         <p:spPr>
           <a:xfrm>
-            <a:off x="91439" y="3474720"/>
-            <a:ext cx="2194560" cy="1188720"/>
+            <a:off x="704088" y="1828800"/>
+            <a:ext cx="5266944" cy="1691640"/>
+          </a:xfrm>
+          <a:prstGeom prst="rect">
+            <a:avLst/>
+          </a:prstGeom>
+          <a:noFill/>
+        </p:spPr>
+        <p:txBody>
+          <a:bodyPr wrap="square">
+            <a:spAutoFit/>
+          </a:bodyPr>
+          <a:lstStyle/>
+          <a:p>
+            <a:pPr algn="l">
+              <a:spcAft>
+                <a:spcPts val="500"/>
+              </a:spcAft>
+              <a:defRPr sz="1200" b="0">
+                <a:solidFill>
+                  <a:srgbClr val="1E2933"/>
+                </a:solidFill>
+                <a:latin typeface="Microsoft YaHei"/>
+              </a:defRPr>
+            </a:pPr>
+            <a:r>
+              <a:t>harness_http provider ↔ 我们的 Chat Completions API</a:t>
+            </a:r>
+          </a:p>
+          <a:p>
+            <a:pPr algn="l">
+              <a:spcAft>
+                <a:spcPts val="500"/>
+              </a:spcAft>
+              <a:defRPr sz="1200" b="0">
+                <a:solidFill>
+                  <a:srgbClr val="1E2933"/>
+                </a:solidFill>
+                <a:latin typeface="Microsoft YaHei"/>
+              </a:defRPr>
+            </a:pPr>
+            <a:r>
+              <a:t>deepseek-v4-flash / mimo-v2.5 / kimi-k2.7 / qwen3.7-max</a:t>
+            </a:r>
+          </a:p>
+          <a:p>
+            <a:pPr algn="l">
+              <a:spcAft>
+                <a:spcPts val="500"/>
+              </a:spcAft>
+              <a:defRPr sz="1200" b="0">
+                <a:solidFill>
+                  <a:srgbClr val="1E2933"/>
+                </a:solidFill>
+                <a:latin typeface="Microsoft YaHei"/>
+              </a:defRPr>
+            </a:pPr>
+            <a:r>
+              <a:t>kimi few-shot 可产出 schema 合规 StrategySpec（7-48s）</a:t>
+            </a:r>
+          </a:p>
+          <a:p>
+            <a:pPr algn="l">
+              <a:spcAft>
+                <a:spcPts val="500"/>
+              </a:spcAft>
+              <a:defRPr sz="1200" b="0">
+                <a:solidFill>
+                  <a:srgbClr val="1E2933"/>
+                </a:solidFill>
+                <a:latin typeface="Microsoft YaHei"/>
+              </a:defRPr>
+            </a:pPr>
+            <a:r>
+              <a:t>fallback-first 模式：0ms 返回确定性策略</a:t>
+            </a:r>
+          </a:p>
+        </p:txBody>
+      </p:sp>
+      <p:sp>
+        <p:nvSpPr>
+          <p:cNvPr id="11" name="Rounded Rectangle 10"/>
+          <p:cNvSpPr/>
+          <p:nvPr/>
+        </p:nvSpPr>
+        <p:spPr>
+          <a:xfrm>
+            <a:off x="6382512" y="1353312"/>
+            <a:ext cx="5486400" cy="2286000"/>
+          </a:xfrm>
+          <a:prstGeom prst="roundRect">
+            <a:avLst/>
+          </a:prstGeom>
+          <a:solidFill>
+            <a:srgbClr val="D0D5DA"/>
+          </a:solidFill>
+          <a:ln/>
+        </p:spPr>
+        <p:style>
+          <a:lnRef idx="1">
+            <a:schemeClr val="accent1"/>
+          </a:lnRef>
+          <a:fillRef idx="3">
+            <a:schemeClr val="accent1"/>
+          </a:fillRef>
+          <a:effectRef idx="2">
+            <a:schemeClr val="accent1"/>
+          </a:effectRef>
+          <a:fontRef idx="minor">
+            <a:schemeClr val="lt1"/>
+          </a:fontRef>
+        </p:style>
+        <p:txBody>
+          <a:bodyPr rtlCol="0" anchor="ctr"/>
+          <a:lstStyle/>
+          <a:p>
+            <a:pPr algn="ctr"/>
+          </a:p>
+        </p:txBody>
+      </p:sp>
+      <p:sp>
+        <p:nvSpPr>
+          <p:cNvPr id="12" name="Rounded Rectangle 11"/>
+          <p:cNvSpPr/>
+          <p:nvPr/>
+        </p:nvSpPr>
+        <p:spPr>
+          <a:xfrm>
+            <a:off x="6355080" y="1325880"/>
+            <a:ext cx="5486400" cy="2286000"/>
+          </a:xfrm>
+          <a:prstGeom prst="roundRect">
+            <a:avLst/>
+          </a:prstGeom>
+          <a:solidFill>
+            <a:srgbClr val="FFFFFF"/>
+          </a:solidFill>
+          <a:ln w="12700">
+            <a:solidFill>
+              <a:srgbClr val="DDE2E6"/>
+            </a:solidFill>
+          </a:ln>
+        </p:spPr>
+        <p:style>
+          <a:lnRef idx="1">
+            <a:schemeClr val="accent1"/>
+          </a:lnRef>
+          <a:fillRef idx="3">
+            <a:schemeClr val="accent1"/>
+          </a:fillRef>
+          <a:effectRef idx="2">
+            <a:schemeClr val="accent1"/>
+          </a:effectRef>
+          <a:fontRef idx="minor">
+            <a:schemeClr val="lt1"/>
+          </a:fontRef>
+        </p:style>
+        <p:txBody>
+          <a:bodyPr rtlCol="0" anchor="ctr"/>
+          <a:lstStyle/>
+          <a:p>
+            <a:pPr algn="ctr"/>
+          </a:p>
+        </p:txBody>
+      </p:sp>
+      <p:sp>
+        <p:nvSpPr>
+          <p:cNvPr id="13" name="Rectangle 12"/>
+          <p:cNvSpPr/>
+          <p:nvPr/>
+        </p:nvSpPr>
+        <p:spPr>
+          <a:xfrm>
+            <a:off x="6355080" y="1325880"/>
+            <a:ext cx="5486400" cy="411480"/>
+          </a:xfrm>
+          <a:prstGeom prst="rect">
+            <a:avLst/>
+          </a:prstGeom>
+          <a:solidFill>
+            <a:srgbClr val="28A745"/>
+          </a:solidFill>
+          <a:ln/>
+        </p:spPr>
+        <p:style>
+          <a:lnRef idx="1">
+            <a:schemeClr val="accent1"/>
+          </a:lnRef>
+          <a:fillRef idx="3">
+            <a:schemeClr val="accent1"/>
+          </a:fillRef>
+          <a:effectRef idx="2">
+            <a:schemeClr val="accent1"/>
+          </a:effectRef>
+          <a:fontRef idx="minor">
+            <a:schemeClr val="lt1"/>
+          </a:fontRef>
+        </p:style>
+        <p:txBody>
+          <a:bodyPr rtlCol="0" anchor="ctr"/>
+          <a:lstStyle/>
+          <a:p>
+            <a:pPr algn="ctr"/>
+          </a:p>
+        </p:txBody>
+      </p:sp>
+      <p:sp>
+        <p:nvSpPr>
+          <p:cNvPr id="14" name="TextBox 13"/>
+          <p:cNvSpPr txBox="1"/>
+          <p:nvPr/>
+        </p:nvSpPr>
+        <p:spPr>
+          <a:xfrm>
+            <a:off x="6428232" y="1399032"/>
+            <a:ext cx="5340096" cy="320040"/>
           </a:xfrm>
           <a:prstGeom prst="rect">
             <a:avLst/>
@@ -22410,7 +22670,46 @@
           </a:bodyPr>
           <a:lstStyle/>
           <a:p>
-            <a:pPr algn="ctr">
+            <a:pPr algn="l">
+              <a:defRPr sz="1400" b="1">
+                <a:solidFill>
+                  <a:srgbClr val="F3F6F9"/>
+                </a:solidFill>
+                <a:latin typeface="Microsoft YaHei"/>
+              </a:defRPr>
+            </a:pPr>
+            <a:r>
+              <a:t>已解决的工程问题</a:t>
+            </a:r>
+          </a:p>
+        </p:txBody>
+      </p:sp>
+      <p:sp>
+        <p:nvSpPr>
+          <p:cNvPr id="15" name="TextBox 14"/>
+          <p:cNvSpPr txBox="1"/>
+          <p:nvPr/>
+        </p:nvSpPr>
+        <p:spPr>
+          <a:xfrm>
+            <a:off x="6464808" y="1828800"/>
+            <a:ext cx="5266944" cy="1691640"/>
+          </a:xfrm>
+          <a:prstGeom prst="rect">
+            <a:avLst/>
+          </a:prstGeom>
+          <a:noFill/>
+        </p:spPr>
+        <p:txBody>
+          <a:bodyPr wrap="square">
+            <a:spAutoFit/>
+          </a:bodyPr>
+          <a:lstStyle/>
+          <a:p>
+            <a:pPr algn="l">
+              <a:spcAft>
+                <a:spcPts val="500"/>
+              </a:spcAft>
               <a:defRPr sz="1200" b="0">
                 <a:solidFill>
                   <a:srgbClr val="1E2933"/>
@@ -22419,31 +22718,75 @@
               </a:defRPr>
             </a:pPr>
             <a:r>
-              <a:t>规则引擎 + 自动校准</a:t>
-            </a:r>
-            <a:br/>
-            <a:r>
-              <a:t>22 游戏可驱动</a:t>
-            </a:r>
-          </a:p>
-        </p:txBody>
-      </p:sp>
-      <p:sp>
-        <p:nvSpPr>
-          <p:cNvPr id="10" name="Oval 9"/>
-          <p:cNvSpPr/>
-          <p:nvPr/>
-        </p:nvSpPr>
-        <p:spPr>
-          <a:xfrm>
-            <a:off x="3108960" y="3063240"/>
-            <a:ext cx="320040" cy="320040"/>
-          </a:xfrm>
-          <a:prstGeom prst="ellipse">
-            <a:avLst/>
-          </a:prstGeom>
-          <a:solidFill>
-            <a:srgbClr val="28A745"/>
+              <a:t>WSL WebGL：headful + xvfb + swiftshader 标志</a:t>
+            </a:r>
+          </a:p>
+          <a:p>
+            <a:pPr algn="l">
+              <a:spcAft>
+                <a:spcPts val="500"/>
+              </a:spcAft>
+              <a:defRPr sz="1200" b="0">
+                <a:solidFill>
+                  <a:srgbClr val="1E2933"/>
+                </a:solidFill>
+                <a:latin typeface="Microsoft YaHei"/>
+              </a:defRPr>
+            </a:pPr>
+            <a:r>
+              <a:t>probe 假阳性：download/ad 按钮不再误判通关（§5.2 移植）</a:t>
+            </a:r>
+          </a:p>
+          <a:p>
+            <a:pPr algn="l">
+              <a:spcAft>
+                <a:spcPts val="500"/>
+              </a:spcAft>
+              <a:defRPr sz="1200" b="0">
+                <a:solidFill>
+                  <a:srgbClr val="1E2933"/>
+                </a:solidFill>
+                <a:latin typeface="Microsoft YaHei"/>
+              </a:defRPr>
+            </a:pPr>
+            <a:r>
+              <a:t>objective unresolved：无 guide 时用 target_id</a:t>
+            </a:r>
+          </a:p>
+          <a:p>
+            <a:pPr algn="l">
+              <a:spcAft>
+                <a:spcPts val="500"/>
+              </a:spcAft>
+              <a:defRPr sz="1200" b="0">
+                <a:solidFill>
+                  <a:srgbClr val="1E2933"/>
+                </a:solidFill>
+                <a:latin typeface="Microsoft YaHei"/>
+              </a:defRPr>
+            </a:pPr>
+            <a:r>
+              <a:t>代理网络：NODE_USE_ENV_PROXY=1 走 clash</a:t>
+            </a:r>
+          </a:p>
+        </p:txBody>
+      </p:sp>
+      <p:sp>
+        <p:nvSpPr>
+          <p:cNvPr id="16" name="Rounded Rectangle 15"/>
+          <p:cNvSpPr/>
+          <p:nvPr/>
+        </p:nvSpPr>
+        <p:spPr>
+          <a:xfrm>
+            <a:off x="621792" y="3822192"/>
+            <a:ext cx="11247120" cy="2194560"/>
+          </a:xfrm>
+          <a:prstGeom prst="roundRect">
+            <a:avLst/>
+          </a:prstGeom>
+          <a:solidFill>
+            <a:srgbClr val="D0D5DA"/>
           </a:solidFill>
           <a:ln/>
         </p:spPr>
@@ -22471,14 +22814,100 @@
       </p:sp>
       <p:sp>
         <p:nvSpPr>
-          <p:cNvPr id="11" name="TextBox 10"/>
+          <p:cNvPr id="17" name="Rounded Rectangle 16"/>
+          <p:cNvSpPr/>
+          <p:nvPr/>
+        </p:nvSpPr>
+        <p:spPr>
+          <a:xfrm>
+            <a:off x="594360" y="3794760"/>
+            <a:ext cx="11247120" cy="2194560"/>
+          </a:xfrm>
+          <a:prstGeom prst="roundRect">
+            <a:avLst/>
+          </a:prstGeom>
+          <a:solidFill>
+            <a:srgbClr val="FFFFFF"/>
+          </a:solidFill>
+          <a:ln w="12700">
+            <a:solidFill>
+              <a:srgbClr val="DDE2E6"/>
+            </a:solidFill>
+          </a:ln>
+        </p:spPr>
+        <p:style>
+          <a:lnRef idx="1">
+            <a:schemeClr val="accent1"/>
+          </a:lnRef>
+          <a:fillRef idx="3">
+            <a:schemeClr val="accent1"/>
+          </a:fillRef>
+          <a:effectRef idx="2">
+            <a:schemeClr val="accent1"/>
+          </a:effectRef>
+          <a:fontRef idx="minor">
+            <a:schemeClr val="lt1"/>
+          </a:fontRef>
+        </p:style>
+        <p:txBody>
+          <a:bodyPr rtlCol="0" anchor="ctr"/>
+          <a:lstStyle/>
+          <a:p>
+            <a:pPr algn="ctr"/>
+          </a:p>
+        </p:txBody>
+      </p:sp>
+      <p:sp>
+        <p:nvSpPr>
+          <p:cNvPr id="18" name="Rectangle 17"/>
+          <p:cNvSpPr/>
+          <p:nvPr/>
+        </p:nvSpPr>
+        <p:spPr>
+          <a:xfrm>
+            <a:off x="594360" y="3794760"/>
+            <a:ext cx="11247120" cy="411480"/>
+          </a:xfrm>
+          <a:prstGeom prst="rect">
+            <a:avLst/>
+          </a:prstGeom>
+          <a:solidFill>
+            <a:srgbClr val="FF6B35"/>
+          </a:solidFill>
+          <a:ln/>
+        </p:spPr>
+        <p:style>
+          <a:lnRef idx="1">
+            <a:schemeClr val="accent1"/>
+          </a:lnRef>
+          <a:fillRef idx="3">
+            <a:schemeClr val="accent1"/>
+          </a:fillRef>
+          <a:effectRef idx="2">
+            <a:schemeClr val="accent1"/>
+          </a:effectRef>
+          <a:fontRef idx="minor">
+            <a:schemeClr val="lt1"/>
+          </a:fontRef>
+        </p:style>
+        <p:txBody>
+          <a:bodyPr rtlCol="0" anchor="ctr"/>
+          <a:lstStyle/>
+          <a:p>
+            <a:pPr algn="ctr"/>
+          </a:p>
+        </p:txBody>
+      </p:sp>
+      <p:sp>
+        <p:nvSpPr>
+          <p:cNvPr id="19" name="TextBox 18"/>
           <p:cNvSpPr txBox="1"/>
           <p:nvPr/>
         </p:nvSpPr>
         <p:spPr>
           <a:xfrm>
-            <a:off x="2606039" y="2103120"/>
-            <a:ext cx="1645920" cy="457200"/>
+            <a:off x="667512" y="3867912"/>
+            <a:ext cx="11100816" cy="320040"/>
           </a:xfrm>
           <a:prstGeom prst="rect">
             <a:avLst/>
@@ -22491,30 +22920,158 @@
           </a:bodyPr>
           <a:lstStyle/>
           <a:p>
-            <a:pPr algn="ctr">
-              <a:defRPr sz="1300" b="1">
-                <a:solidFill>
-                  <a:srgbClr val="28A745"/>
-                </a:solidFill>
-                <a:latin typeface="Microsoft YaHei"/>
-              </a:defRPr>
-            </a:pPr>
-            <a:r>
-              <a:t>已完成</a:t>
-            </a:r>
-          </a:p>
-        </p:txBody>
-      </p:sp>
-      <p:sp>
-        <p:nvSpPr>
-          <p:cNvPr id="12" name="TextBox 11"/>
+            <a:pPr algn="l">
+              <a:defRPr sz="1400" b="1">
+                <a:solidFill>
+                  <a:srgbClr val="F3F6F9"/>
+                </a:solidFill>
+                <a:latin typeface="Microsoft YaHei"/>
+              </a:defRPr>
+            </a:pPr>
+            <a:r>
+              <a:t>运行结果与瓶颈</a:t>
+            </a:r>
+          </a:p>
+        </p:txBody>
+      </p:sp>
+      <p:sp>
+        <p:nvSpPr>
+          <p:cNvPr id="20" name="TextBox 19"/>
           <p:cNvSpPr txBox="1"/>
           <p:nvPr/>
         </p:nvSpPr>
         <p:spPr>
           <a:xfrm>
-            <a:off x="2377439" y="3474720"/>
-            <a:ext cx="2194560" cy="1188720"/>
+            <a:off x="704088" y="4297680"/>
+            <a:ext cx="11027664" cy="1600200"/>
+          </a:xfrm>
+          <a:prstGeom prst="rect">
+            <a:avLst/>
+          </a:prstGeom>
+          <a:noFill/>
+        </p:spPr>
+        <p:txBody>
+          <a:bodyPr wrap="square">
+            <a:spAutoFit/>
+          </a:bodyPr>
+          <a:lstStyle/>
+          <a:p>
+            <a:pPr algn="l">
+              <a:spcAft>
+                <a:spcPts val="500"/>
+              </a:spcAft>
+              <a:defRPr sz="1200" b="0">
+                <a:solidFill>
+                  <a:srgbClr val="1E2933"/>
+                </a:solidFill>
+                <a:latin typeface="Microsoft YaHei"/>
+              </a:defRPr>
+            </a:pPr>
+            <a:r>
+              <a:t>tiles-survive：可玩 3-4 步，joystick 校准被游戏特殊控制卡住（同学 Codex 用 1h17m 探索）</a:t>
+            </a:r>
+          </a:p>
+          <a:p>
+            <a:pPr algn="l">
+              <a:spcAft>
+                <a:spcPts val="500"/>
+              </a:spcAft>
+              <a:defRPr sz="1200" b="0">
+                <a:solidFill>
+                  <a:srgbClr val="1E2933"/>
+                </a:solidFill>
+                <a:latin typeface="Microsoft YaHei"/>
+              </a:defRPr>
+            </a:pPr>
+            <a:r>
+              <a:t>whiteout 商店：SETTLED_COMPLETE 假阳性已修复 → BLOCKED_UNKNOWN_MECHANIC（诚实信号）</a:t>
+            </a:r>
+          </a:p>
+          <a:p>
+            <a:pPr algn="l">
+              <a:spcAft>
+                <a:spcPts val="500"/>
+              </a:spcAft>
+              <a:defRPr sz="1200" b="0">
+                <a:solidFill>
+                  <a:srgbClr val="1E2933"/>
+                </a:solidFill>
+                <a:latin typeface="Microsoft YaHei"/>
+              </a:defRPr>
+            </a:pPr>
+            <a:r>
+              <a:t>瓶颈：模型 schema 遵循度（fallback 兜底）+ 每游戏控制知识 + WSL 软件渲染不稳定</a:t>
+            </a:r>
+          </a:p>
+          <a:p>
+            <a:pPr algn="l">
+              <a:spcAft>
+                <a:spcPts val="500"/>
+              </a:spcAft>
+              <a:defRPr sz="1200" b="0">
+                <a:solidFill>
+                  <a:srgbClr val="1E2933"/>
+                </a:solidFill>
+                <a:latin typeface="Microsoft YaHei"/>
+              </a:defRPr>
+            </a:pPr>
+            <a:r>
+              <a:t>25+25 游戏清单已筛选交付（指引箭头 + 通关画面 + 广告图标验证）</a:t>
+            </a:r>
+          </a:p>
+        </p:txBody>
+      </p:sp>
+      <p:sp>
+        <p:nvSpPr>
+          <p:cNvPr id="21" name="Rectangle 20"/>
+          <p:cNvSpPr/>
+          <p:nvPr/>
+        </p:nvSpPr>
+        <p:spPr>
+          <a:xfrm>
+            <a:off x="0" y="6537960"/>
+            <a:ext cx="12191695" cy="18288"/>
+          </a:xfrm>
+          <a:prstGeom prst="rect">
+            <a:avLst/>
+          </a:prstGeom>
+          <a:solidFill>
+            <a:srgbClr val="0096C7"/>
+          </a:solidFill>
+          <a:ln/>
+        </p:spPr>
+        <p:style>
+          <a:lnRef idx="1">
+            <a:schemeClr val="accent1"/>
+          </a:lnRef>
+          <a:fillRef idx="3">
+            <a:schemeClr val="accent1"/>
+          </a:fillRef>
+          <a:effectRef idx="2">
+            <a:schemeClr val="accent1"/>
+          </a:effectRef>
+          <a:fontRef idx="minor">
+            <a:schemeClr val="lt1"/>
+          </a:fontRef>
+        </p:style>
+        <p:txBody>
+          <a:bodyPr rtlCol="0" anchor="ctr"/>
+          <a:lstStyle/>
+          <a:p>
+            <a:pPr algn="ctr"/>
+          </a:p>
+        </p:txBody>
+      </p:sp>
+      <p:sp>
+        <p:nvSpPr>
+          <p:cNvPr id="22" name="TextBox 21"/>
+          <p:cNvSpPr txBox="1"/>
+          <p:nvPr/>
+        </p:nvSpPr>
+        <p:spPr>
+          <a:xfrm>
+            <a:off x="457200" y="6583680"/>
+            <a:ext cx="3657600" cy="228600"/>
           </a:xfrm>
           <a:prstGeom prst="rect">
             <a:avLst/>
@@ -22527,75 +23084,30 @@
           </a:bodyPr>
           <a:lstStyle/>
           <a:p>
-            <a:pPr algn="ctr">
-              <a:defRPr sz="1200" b="0">
-                <a:solidFill>
-                  <a:srgbClr val="1E2933"/>
-                </a:solidFill>
-                <a:latin typeface="Microsoft YaHei"/>
-              </a:defRPr>
-            </a:pPr>
-            <a:r>
-              <a:t>multi-bus-memory</a:t>
-            </a:r>
-            <a:br/>
-            <a:r>
-              <a:t>记忆读回 0.300</a:t>
-            </a:r>
-          </a:p>
-        </p:txBody>
-      </p:sp>
-      <p:sp>
-        <p:nvSpPr>
-          <p:cNvPr id="13" name="Oval 12"/>
-          <p:cNvSpPr/>
-          <p:nvPr/>
-        </p:nvSpPr>
-        <p:spPr>
-          <a:xfrm>
-            <a:off x="5394960" y="3063240"/>
-            <a:ext cx="320040" cy="320040"/>
-          </a:xfrm>
-          <a:prstGeom prst="ellipse">
-            <a:avLst/>
-          </a:prstGeom>
-          <a:solidFill>
-            <a:srgbClr val="28A745"/>
-          </a:solidFill>
-          <a:ln/>
-        </p:spPr>
-        <p:style>
-          <a:lnRef idx="1">
-            <a:schemeClr val="accent1"/>
-          </a:lnRef>
-          <a:fillRef idx="3">
-            <a:schemeClr val="accent1"/>
-          </a:fillRef>
-          <a:effectRef idx="2">
-            <a:schemeClr val="accent1"/>
-          </a:effectRef>
-          <a:fontRef idx="minor">
-            <a:schemeClr val="lt1"/>
-          </a:fontRef>
-        </p:style>
-        <p:txBody>
-          <a:bodyPr rtlCol="0" anchor="ctr"/>
-          <a:lstStyle/>
-          <a:p>
-            <a:pPr algn="ctr"/>
-          </a:p>
-        </p:txBody>
-      </p:sp>
-      <p:sp>
-        <p:nvSpPr>
-          <p:cNvPr id="14" name="TextBox 13"/>
+            <a:pPr algn="l">
+              <a:defRPr sz="1000" b="0">
+                <a:solidFill>
+                  <a:srgbClr val="6C757D"/>
+                </a:solidFill>
+                <a:latin typeface="Microsoft YaHei"/>
+              </a:defRPr>
+            </a:pPr>
+            <a:r>
+              <a:t>smallgameagent · LLM/VLM + 规则驱动</a:t>
+            </a:r>
+          </a:p>
+        </p:txBody>
+      </p:sp>
+      <p:sp>
+        <p:nvSpPr>
+          <p:cNvPr id="23" name="TextBox 22"/>
           <p:cNvSpPr txBox="1"/>
           <p:nvPr/>
         </p:nvSpPr>
         <p:spPr>
           <a:xfrm>
-            <a:off x="4892040" y="2103120"/>
-            <a:ext cx="1645920" cy="457200"/>
+            <a:off x="10789920" y="6583680"/>
+            <a:ext cx="914400" cy="228600"/>
           </a:xfrm>
           <a:prstGeom prst="rect">
             <a:avLst/>
@@ -22608,444 +23120,6 @@
           </a:bodyPr>
           <a:lstStyle/>
           <a:p>
-            <a:pPr algn="ctr">
-              <a:defRPr sz="1300" b="1">
-                <a:solidFill>
-                  <a:srgbClr val="28A745"/>
-                </a:solidFill>
-                <a:latin typeface="Microsoft YaHei"/>
-              </a:defRPr>
-            </a:pPr>
-            <a:r>
-              <a:t>已完成</a:t>
-            </a:r>
-          </a:p>
-        </p:txBody>
-      </p:sp>
-      <p:sp>
-        <p:nvSpPr>
-          <p:cNvPr id="15" name="TextBox 14"/>
-          <p:cNvSpPr txBox="1"/>
-          <p:nvPr/>
-        </p:nvSpPr>
-        <p:spPr>
-          <a:xfrm>
-            <a:off x="4663440" y="3474720"/>
-            <a:ext cx="2194560" cy="1188720"/>
-          </a:xfrm>
-          <a:prstGeom prst="rect">
-            <a:avLst/>
-          </a:prstGeom>
-          <a:noFill/>
-        </p:spPr>
-        <p:txBody>
-          <a:bodyPr wrap="none">
-            <a:spAutoFit/>
-          </a:bodyPr>
-          <a:lstStyle/>
-          <a:p>
-            <a:pPr algn="ctr">
-              <a:defRPr sz="1200" b="0">
-                <a:solidFill>
-                  <a:srgbClr val="1E2933"/>
-                </a:solidFill>
-                <a:latin typeface="Microsoft YaHei"/>
-              </a:defRPr>
-            </a:pPr>
-            <a:r>
-              <a:t>L2 code-file 更新</a:t>
-            </a:r>
-            <a:br/>
-            <a:r>
-              <a:t>qwen/kimi/xiaomi/opencodego 验证</a:t>
-            </a:r>
-          </a:p>
-        </p:txBody>
-      </p:sp>
-      <p:sp>
-        <p:nvSpPr>
-          <p:cNvPr id="16" name="Oval 15"/>
-          <p:cNvSpPr/>
-          <p:nvPr/>
-        </p:nvSpPr>
-        <p:spPr>
-          <a:xfrm>
-            <a:off x="7680960" y="3063240"/>
-            <a:ext cx="320040" cy="320040"/>
-          </a:xfrm>
-          <a:prstGeom prst="ellipse">
-            <a:avLst/>
-          </a:prstGeom>
-          <a:solidFill>
-            <a:srgbClr val="FF6B35"/>
-          </a:solidFill>
-          <a:ln/>
-        </p:spPr>
-        <p:style>
-          <a:lnRef idx="1">
-            <a:schemeClr val="accent1"/>
-          </a:lnRef>
-          <a:fillRef idx="3">
-            <a:schemeClr val="accent1"/>
-          </a:fillRef>
-          <a:effectRef idx="2">
-            <a:schemeClr val="accent1"/>
-          </a:effectRef>
-          <a:fontRef idx="minor">
-            <a:schemeClr val="lt1"/>
-          </a:fontRef>
-        </p:style>
-        <p:txBody>
-          <a:bodyPr rtlCol="0" anchor="ctr"/>
-          <a:lstStyle/>
-          <a:p>
-            <a:pPr algn="ctr"/>
-          </a:p>
-        </p:txBody>
-      </p:sp>
-      <p:sp>
-        <p:nvSpPr>
-          <p:cNvPr id="17" name="TextBox 16"/>
-          <p:cNvSpPr txBox="1"/>
-          <p:nvPr/>
-        </p:nvSpPr>
-        <p:spPr>
-          <a:xfrm>
-            <a:off x="7178040" y="2103120"/>
-            <a:ext cx="1645920" cy="457200"/>
-          </a:xfrm>
-          <a:prstGeom prst="rect">
-            <a:avLst/>
-          </a:prstGeom>
-          <a:noFill/>
-        </p:spPr>
-        <p:txBody>
-          <a:bodyPr wrap="none">
-            <a:spAutoFit/>
-          </a:bodyPr>
-          <a:lstStyle/>
-          <a:p>
-            <a:pPr algn="ctr">
-              <a:defRPr sz="1300" b="1">
-                <a:solidFill>
-                  <a:srgbClr val="FF6B35"/>
-                </a:solidFill>
-                <a:latin typeface="Microsoft YaHei"/>
-              </a:defRPr>
-            </a:pPr>
-            <a:r>
-              <a:t>进行中</a:t>
-            </a:r>
-          </a:p>
-        </p:txBody>
-      </p:sp>
-      <p:sp>
-        <p:nvSpPr>
-          <p:cNvPr id="18" name="TextBox 17"/>
-          <p:cNvSpPr txBox="1"/>
-          <p:nvPr/>
-        </p:nvSpPr>
-        <p:spPr>
-          <a:xfrm>
-            <a:off x="6949440" y="3474720"/>
-            <a:ext cx="2194560" cy="1188720"/>
-          </a:xfrm>
-          <a:prstGeom prst="rect">
-            <a:avLst/>
-          </a:prstGeom>
-          <a:noFill/>
-        </p:spPr>
-        <p:txBody>
-          <a:bodyPr wrap="none">
-            <a:spAutoFit/>
-          </a:bodyPr>
-          <a:lstStyle/>
-          <a:p>
-            <a:pPr algn="ctr">
-              <a:defRPr sz="1200" b="0">
-                <a:solidFill>
-                  <a:srgbClr val="1E2933"/>
-                </a:solidFill>
-                <a:latin typeface="Microsoft YaHei"/>
-              </a:defRPr>
-            </a:pPr>
-            <a:r>
-              <a:t>本地 VLM 上下文</a:t>
-            </a:r>
-            <a:br/>
-            <a:r>
-              <a:t>QLoRA 微调准备</a:t>
-            </a:r>
-          </a:p>
-        </p:txBody>
-      </p:sp>
-      <p:sp>
-        <p:nvSpPr>
-          <p:cNvPr id="19" name="Oval 18"/>
-          <p:cNvSpPr/>
-          <p:nvPr/>
-        </p:nvSpPr>
-        <p:spPr>
-          <a:xfrm>
-            <a:off x="9966960" y="3063240"/>
-            <a:ext cx="320040" cy="320040"/>
-          </a:xfrm>
-          <a:prstGeom prst="ellipse">
-            <a:avLst/>
-          </a:prstGeom>
-          <a:solidFill>
-            <a:srgbClr val="0096C7"/>
-          </a:solidFill>
-          <a:ln/>
-        </p:spPr>
-        <p:style>
-          <a:lnRef idx="1">
-            <a:schemeClr val="accent1"/>
-          </a:lnRef>
-          <a:fillRef idx="3">
-            <a:schemeClr val="accent1"/>
-          </a:fillRef>
-          <a:effectRef idx="2">
-            <a:schemeClr val="accent1"/>
-          </a:effectRef>
-          <a:fontRef idx="minor">
-            <a:schemeClr val="lt1"/>
-          </a:fontRef>
-        </p:style>
-        <p:txBody>
-          <a:bodyPr rtlCol="0" anchor="ctr"/>
-          <a:lstStyle/>
-          <a:p>
-            <a:pPr algn="ctr"/>
-          </a:p>
-        </p:txBody>
-      </p:sp>
-      <p:sp>
-        <p:nvSpPr>
-          <p:cNvPr id="20" name="TextBox 19"/>
-          <p:cNvSpPr txBox="1"/>
-          <p:nvPr/>
-        </p:nvSpPr>
-        <p:spPr>
-          <a:xfrm>
-            <a:off x="9464040" y="2103120"/>
-            <a:ext cx="1645920" cy="457200"/>
-          </a:xfrm>
-          <a:prstGeom prst="rect">
-            <a:avLst/>
-          </a:prstGeom>
-          <a:noFill/>
-        </p:spPr>
-        <p:txBody>
-          <a:bodyPr wrap="none">
-            <a:spAutoFit/>
-          </a:bodyPr>
-          <a:lstStyle/>
-          <a:p>
-            <a:pPr algn="ctr">
-              <a:defRPr sz="1300" b="1">
-                <a:solidFill>
-                  <a:srgbClr val="0096C7"/>
-                </a:solidFill>
-                <a:latin typeface="Microsoft YaHei"/>
-              </a:defRPr>
-            </a:pPr>
-            <a:r>
-              <a:t>下一步</a:t>
-            </a:r>
-          </a:p>
-        </p:txBody>
-      </p:sp>
-      <p:sp>
-        <p:nvSpPr>
-          <p:cNvPr id="21" name="TextBox 20"/>
-          <p:cNvSpPr txBox="1"/>
-          <p:nvPr/>
-        </p:nvSpPr>
-        <p:spPr>
-          <a:xfrm>
-            <a:off x="9235440" y="3474720"/>
-            <a:ext cx="2194560" cy="1188720"/>
-          </a:xfrm>
-          <a:prstGeom prst="rect">
-            <a:avLst/>
-          </a:prstGeom>
-          <a:noFill/>
-        </p:spPr>
-        <p:txBody>
-          <a:bodyPr wrap="none">
-            <a:spAutoFit/>
-          </a:bodyPr>
-          <a:lstStyle/>
-          <a:p>
-            <a:pPr algn="ctr">
-              <a:defRPr sz="1200" b="0">
-                <a:solidFill>
-                  <a:srgbClr val="1E2933"/>
-                </a:solidFill>
-                <a:latin typeface="Microsoft YaHei"/>
-              </a:defRPr>
-            </a:pPr>
-            <a:r>
-              <a:t>真实游戏在线触发</a:t>
-            </a:r>
-            <a:br/>
-            <a:r>
-              <a:t>规则更新 + A/B 回归</a:t>
-            </a:r>
-          </a:p>
-        </p:txBody>
-      </p:sp>
-      <p:sp>
-        <p:nvSpPr>
-          <p:cNvPr id="22" name="Rounded Rectangle 21"/>
-          <p:cNvSpPr/>
-          <p:nvPr/>
-        </p:nvSpPr>
-        <p:spPr>
-          <a:xfrm>
-            <a:off x="777240" y="5074920"/>
-            <a:ext cx="10972800" cy="822960"/>
-          </a:xfrm>
-          <a:prstGeom prst="roundRect">
-            <a:avLst/>
-          </a:prstGeom>
-          <a:solidFill>
-            <a:srgbClr val="F3F6F9"/>
-          </a:solidFill>
-          <a:ln/>
-        </p:spPr>
-        <p:style>
-          <a:lnRef idx="1">
-            <a:schemeClr val="accent1"/>
-          </a:lnRef>
-          <a:fillRef idx="3">
-            <a:schemeClr val="accent1"/>
-          </a:fillRef>
-          <a:effectRef idx="2">
-            <a:schemeClr val="accent1"/>
-          </a:effectRef>
-          <a:fontRef idx="minor">
-            <a:schemeClr val="lt1"/>
-          </a:fontRef>
-        </p:style>
-        <p:txBody>
-          <a:bodyPr rtlCol="0" anchor="ctr"/>
-          <a:lstStyle/>
-          <a:p>
-            <a:pPr algn="ctr">
-              <a:defRPr sz="1400" b="0">
-                <a:solidFill>
-                  <a:srgbClr val="1E2933"/>
-                </a:solidFill>
-                <a:latin typeface="Microsoft YaHei"/>
-              </a:defRPr>
-            </a:pPr>
-            <a:r>
-              <a:t>核心原则：把贵且慢的云端调用摊到多步，本地 VLM 只提供「证据」，规则引擎负责零延迟执行。</a:t>
-            </a:r>
-          </a:p>
-        </p:txBody>
-      </p:sp>
-      <p:sp>
-        <p:nvSpPr>
-          <p:cNvPr id="23" name="Rectangle 22"/>
-          <p:cNvSpPr/>
-          <p:nvPr/>
-        </p:nvSpPr>
-        <p:spPr>
-          <a:xfrm>
-            <a:off x="0" y="6537960"/>
-            <a:ext cx="12191695" cy="18288"/>
-          </a:xfrm>
-          <a:prstGeom prst="rect">
-            <a:avLst/>
-          </a:prstGeom>
-          <a:solidFill>
-            <a:srgbClr val="0096C7"/>
-          </a:solidFill>
-          <a:ln/>
-        </p:spPr>
-        <p:style>
-          <a:lnRef idx="1">
-            <a:schemeClr val="accent1"/>
-          </a:lnRef>
-          <a:fillRef idx="3">
-            <a:schemeClr val="accent1"/>
-          </a:fillRef>
-          <a:effectRef idx="2">
-            <a:schemeClr val="accent1"/>
-          </a:effectRef>
-          <a:fontRef idx="minor">
-            <a:schemeClr val="lt1"/>
-          </a:fontRef>
-        </p:style>
-        <p:txBody>
-          <a:bodyPr rtlCol="0" anchor="ctr"/>
-          <a:lstStyle/>
-          <a:p>
-            <a:pPr algn="ctr"/>
-          </a:p>
-        </p:txBody>
-      </p:sp>
-      <p:sp>
-        <p:nvSpPr>
-          <p:cNvPr id="24" name="TextBox 23"/>
-          <p:cNvSpPr txBox="1"/>
-          <p:nvPr/>
-        </p:nvSpPr>
-        <p:spPr>
-          <a:xfrm>
-            <a:off x="457200" y="6583680"/>
-            <a:ext cx="3657600" cy="228600"/>
-          </a:xfrm>
-          <a:prstGeom prst="rect">
-            <a:avLst/>
-          </a:prstGeom>
-          <a:noFill/>
-        </p:spPr>
-        <p:txBody>
-          <a:bodyPr wrap="none">
-            <a:spAutoFit/>
-          </a:bodyPr>
-          <a:lstStyle/>
-          <a:p>
-            <a:pPr algn="l">
-              <a:defRPr sz="1000" b="0">
-                <a:solidFill>
-                  <a:srgbClr val="6C757D"/>
-                </a:solidFill>
-                <a:latin typeface="Microsoft YaHei"/>
-              </a:defRPr>
-            </a:pPr>
-            <a:r>
-              <a:t>smallgameagent · LLM/VLM + 规则驱动</a:t>
-            </a:r>
-          </a:p>
-        </p:txBody>
-      </p:sp>
-      <p:sp>
-        <p:nvSpPr>
-          <p:cNvPr id="25" name="TextBox 24"/>
-          <p:cNvSpPr txBox="1"/>
-          <p:nvPr/>
-        </p:nvSpPr>
-        <p:spPr>
-          <a:xfrm>
-            <a:off x="10789920" y="6583680"/>
-            <a:ext cx="914400" cy="228600"/>
-          </a:xfrm>
-          <a:prstGeom prst="rect">
-            <a:avLst/>
-          </a:prstGeom>
-          <a:noFill/>
-        </p:spPr>
-        <p:txBody>
-          <a:bodyPr wrap="none">
-            <a:spAutoFit/>
-          </a:bodyPr>
-          <a:lstStyle/>
-          <a:p>
             <a:pPr algn="r">
               <a:defRPr sz="1000" b="0">
                 <a:solidFill>
@@ -23055,7 +23129,7 @@
               </a:defRPr>
             </a:pPr>
             <a:r>
-              <a:t>36/39</a:t>
+              <a:t>36/40</a:t>
             </a:r>
           </a:p>
         </p:txBody>
@@ -23087,7 +23161,7 @@
         <p:spPr>
           <a:xfrm>
             <a:off x="0" y="0"/>
-            <a:ext cx="12191695" cy="6858000"/>
+            <a:ext cx="12191695" cy="960120"/>
           </a:xfrm>
           <a:prstGeom prst="rect">
             <a:avLst/>
@@ -23121,58 +23195,14 @@
       </p:sp>
       <p:sp>
         <p:nvSpPr>
-          <p:cNvPr id="3" name="Rectangle 2"/>
-          <p:cNvSpPr/>
-          <p:nvPr/>
-        </p:nvSpPr>
-        <p:spPr>
-          <a:xfrm>
-            <a:off x="6858000" y="-914400"/>
-            <a:ext cx="5943600" cy="8686800"/>
-          </a:xfrm>
-          <a:prstGeom prst="rect">
-            <a:avLst/>
-          </a:prstGeom>
-          <a:solidFill>
-            <a:srgbClr val="0096C7">
-              <a:lumMod val="80000"/>
-              <a:lumOff val="20000"/>
-            </a:srgbClr>
-          </a:solidFill>
-          <a:ln/>
-        </p:spPr>
-        <p:style>
-          <a:lnRef idx="1">
-            <a:schemeClr val="accent1"/>
-          </a:lnRef>
-          <a:fillRef idx="3">
-            <a:schemeClr val="accent1"/>
-          </a:fillRef>
-          <a:effectRef idx="2">
-            <a:schemeClr val="accent1"/>
-          </a:effectRef>
-          <a:fontRef idx="minor">
-            <a:schemeClr val="lt1"/>
-          </a:fontRef>
-        </p:style>
-        <p:txBody>
-          <a:bodyPr rtlCol="0" anchor="ctr"/>
-          <a:lstStyle/>
-          <a:p>
-            <a:pPr algn="ctr"/>
-          </a:p>
-        </p:txBody>
-      </p:sp>
-      <p:sp>
-        <p:nvSpPr>
-          <p:cNvPr id="4" name="TextBox 3"/>
+          <p:cNvPr id="3" name="TextBox 2"/>
           <p:cNvSpPr txBox="1"/>
           <p:nvPr/>
         </p:nvSpPr>
         <p:spPr>
           <a:xfrm>
-            <a:off x="548640" y="1645920"/>
-            <a:ext cx="2743200" cy="1828800"/>
+            <a:off x="457200" y="228600"/>
+            <a:ext cx="11247120" cy="548640"/>
           </a:xfrm>
           <a:prstGeom prst="rect">
             <a:avLst/>
@@ -23186,29 +23216,197 @@
           <a:lstStyle/>
           <a:p>
             <a:pPr algn="l">
-              <a:defRPr sz="12000" b="1">
-                <a:solidFill>
-                  <a:srgbClr val="333DA0"/>
-                </a:solidFill>
-                <a:latin typeface="Microsoft YaHei"/>
-              </a:defRPr>
-            </a:pPr>
-            <a:r>
-              <a:t>10</a:t>
-            </a:r>
-          </a:p>
-        </p:txBody>
-      </p:sp>
-      <p:sp>
-        <p:nvSpPr>
-          <p:cNvPr id="5" name="TextBox 4"/>
+              <a:defRPr sz="3000" b="1">
+                <a:solidFill>
+                  <a:srgbClr val="F3F6F9"/>
+                </a:solidFill>
+                <a:latin typeface="Microsoft YaHei"/>
+              </a:defRPr>
+            </a:pPr>
+            <a:r>
+              <a:t>技术路线图：从能跑到好用</a:t>
+            </a:r>
+          </a:p>
+        </p:txBody>
+      </p:sp>
+      <p:sp>
+        <p:nvSpPr>
+          <p:cNvPr id="4" name="Rectangle 3"/>
+          <p:cNvSpPr/>
+          <p:nvPr/>
+        </p:nvSpPr>
+        <p:spPr>
+          <a:xfrm>
+            <a:off x="0" y="960120"/>
+            <a:ext cx="164592" cy="5897880"/>
+          </a:xfrm>
+          <a:prstGeom prst="rect">
+            <a:avLst/>
+          </a:prstGeom>
+          <a:solidFill>
+            <a:srgbClr val="0096C7"/>
+          </a:solidFill>
+          <a:ln/>
+        </p:spPr>
+        <p:style>
+          <a:lnRef idx="1">
+            <a:schemeClr val="accent1"/>
+          </a:lnRef>
+          <a:fillRef idx="3">
+            <a:schemeClr val="accent1"/>
+          </a:fillRef>
+          <a:effectRef idx="2">
+            <a:schemeClr val="accent1"/>
+          </a:effectRef>
+          <a:fontRef idx="minor">
+            <a:schemeClr val="lt1"/>
+          </a:fontRef>
+        </p:style>
+        <p:txBody>
+          <a:bodyPr rtlCol="0" anchor="ctr"/>
+          <a:lstStyle/>
+          <a:p>
+            <a:pPr algn="ctr"/>
+          </a:p>
+        </p:txBody>
+      </p:sp>
+      <p:sp>
+        <p:nvSpPr>
+          <p:cNvPr id="5" name="Rectangle 4"/>
+          <p:cNvSpPr/>
+          <p:nvPr/>
+        </p:nvSpPr>
+        <p:spPr>
+          <a:xfrm>
+            <a:off x="320040" y="1078992"/>
+            <a:ext cx="11548872" cy="5349240"/>
+          </a:xfrm>
+          <a:prstGeom prst="rect">
+            <a:avLst/>
+          </a:prstGeom>
+          <a:solidFill>
+            <a:srgbClr val="FFFFFF"/>
+          </a:solidFill>
+          <a:ln w="12700">
+            <a:solidFill>
+              <a:srgbClr val="E1E5E9"/>
+            </a:solidFill>
+          </a:ln>
+        </p:spPr>
+        <p:style>
+          <a:lnRef idx="1">
+            <a:schemeClr val="accent1"/>
+          </a:lnRef>
+          <a:fillRef idx="3">
+            <a:schemeClr val="accent1"/>
+          </a:fillRef>
+          <a:effectRef idx="2">
+            <a:schemeClr val="accent1"/>
+          </a:effectRef>
+          <a:fontRef idx="minor">
+            <a:schemeClr val="lt1"/>
+          </a:fontRef>
+        </p:style>
+        <p:txBody>
+          <a:bodyPr rtlCol="0" anchor="ctr"/>
+          <a:lstStyle/>
+          <a:p>
+            <a:pPr algn="ctr"/>
+          </a:p>
+        </p:txBody>
+      </p:sp>
+      <p:sp>
+        <p:nvSpPr>
+          <p:cNvPr id="6" name="Rectangle 5"/>
+          <p:cNvSpPr/>
+          <p:nvPr/>
+        </p:nvSpPr>
+        <p:spPr>
+          <a:xfrm>
+            <a:off x="777240" y="3200400"/>
+            <a:ext cx="10972800" cy="73152"/>
+          </a:xfrm>
+          <a:prstGeom prst="rect">
+            <a:avLst/>
+          </a:prstGeom>
+          <a:solidFill>
+            <a:srgbClr val="6C757D"/>
+          </a:solidFill>
+          <a:ln/>
+        </p:spPr>
+        <p:style>
+          <a:lnRef idx="1">
+            <a:schemeClr val="accent1"/>
+          </a:lnRef>
+          <a:fillRef idx="3">
+            <a:schemeClr val="accent1"/>
+          </a:fillRef>
+          <a:effectRef idx="2">
+            <a:schemeClr val="accent1"/>
+          </a:effectRef>
+          <a:fontRef idx="minor">
+            <a:schemeClr val="lt1"/>
+          </a:fontRef>
+        </p:style>
+        <p:txBody>
+          <a:bodyPr rtlCol="0" anchor="ctr"/>
+          <a:lstStyle/>
+          <a:p>
+            <a:pPr algn="ctr"/>
+          </a:p>
+        </p:txBody>
+      </p:sp>
+      <p:sp>
+        <p:nvSpPr>
+          <p:cNvPr id="7" name="Oval 6"/>
+          <p:cNvSpPr/>
+          <p:nvPr/>
+        </p:nvSpPr>
+        <p:spPr>
+          <a:xfrm>
+            <a:off x="822960" y="3063240"/>
+            <a:ext cx="320040" cy="320040"/>
+          </a:xfrm>
+          <a:prstGeom prst="ellipse">
+            <a:avLst/>
+          </a:prstGeom>
+          <a:solidFill>
+            <a:srgbClr val="28A745"/>
+          </a:solidFill>
+          <a:ln/>
+        </p:spPr>
+        <p:style>
+          <a:lnRef idx="1">
+            <a:schemeClr val="accent1"/>
+          </a:lnRef>
+          <a:fillRef idx="3">
+            <a:schemeClr val="accent1"/>
+          </a:fillRef>
+          <a:effectRef idx="2">
+            <a:schemeClr val="accent1"/>
+          </a:effectRef>
+          <a:fontRef idx="minor">
+            <a:schemeClr val="lt1"/>
+          </a:fontRef>
+        </p:style>
+        <p:txBody>
+          <a:bodyPr rtlCol="0" anchor="ctr"/>
+          <a:lstStyle/>
+          <a:p>
+            <a:pPr algn="ctr"/>
+          </a:p>
+        </p:txBody>
+      </p:sp>
+      <p:sp>
+        <p:nvSpPr>
+          <p:cNvPr id="8" name="TextBox 7"/>
           <p:cNvSpPr txBox="1"/>
           <p:nvPr/>
         </p:nvSpPr>
         <p:spPr>
           <a:xfrm>
-            <a:off x="548640" y="2834640"/>
-            <a:ext cx="11064240" cy="1097280"/>
+            <a:off x="320040" y="2103120"/>
+            <a:ext cx="1645920" cy="457200"/>
           </a:xfrm>
           <a:prstGeom prst="rect">
             <a:avLst/>
@@ -23221,112 +23419,30 @@
           </a:bodyPr>
           <a:lstStyle/>
           <a:p>
-            <a:pPr algn="l">
-              <a:defRPr sz="4400" b="1">
-                <a:solidFill>
-                  <a:srgbClr val="F3F6F9"/>
-                </a:solidFill>
-                <a:latin typeface="Microsoft YaHei"/>
-              </a:defRPr>
-            </a:pPr>
-            <a:r>
-              <a:t>下一步</a:t>
-            </a:r>
-          </a:p>
-        </p:txBody>
-      </p:sp>
-      <p:sp>
-        <p:nvSpPr>
-          <p:cNvPr id="6" name="Rectangle 5"/>
-          <p:cNvSpPr/>
-          <p:nvPr/>
-        </p:nvSpPr>
-        <p:spPr>
-          <a:xfrm>
-            <a:off x="548640" y="4023360"/>
-            <a:ext cx="1828800" cy="73152"/>
-          </a:xfrm>
-          <a:prstGeom prst="rect">
-            <a:avLst/>
-          </a:prstGeom>
-          <a:solidFill>
-            <a:srgbClr val="FF6B35"/>
-          </a:solidFill>
-          <a:ln/>
-        </p:spPr>
-        <p:style>
-          <a:lnRef idx="1">
-            <a:schemeClr val="accent1"/>
-          </a:lnRef>
-          <a:fillRef idx="3">
-            <a:schemeClr val="accent1"/>
-          </a:fillRef>
-          <a:effectRef idx="2">
-            <a:schemeClr val="accent1"/>
-          </a:effectRef>
-          <a:fontRef idx="minor">
-            <a:schemeClr val="lt1"/>
-          </a:fontRef>
-        </p:style>
-        <p:txBody>
-          <a:bodyPr rtlCol="0" anchor="ctr"/>
-          <a:lstStyle/>
-          <a:p>
-            <a:pPr algn="ctr"/>
-          </a:p>
-        </p:txBody>
-      </p:sp>
-      <p:sp>
-        <p:nvSpPr>
-          <p:cNvPr id="7" name="Rectangle 6"/>
-          <p:cNvSpPr/>
-          <p:nvPr/>
-        </p:nvSpPr>
-        <p:spPr>
-          <a:xfrm>
-            <a:off x="0" y="6537960"/>
-            <a:ext cx="12191695" cy="18288"/>
-          </a:xfrm>
-          <a:prstGeom prst="rect">
-            <a:avLst/>
-          </a:prstGeom>
-          <a:solidFill>
-            <a:srgbClr val="0096C7"/>
-          </a:solidFill>
-          <a:ln/>
-        </p:spPr>
-        <p:style>
-          <a:lnRef idx="1">
-            <a:schemeClr val="accent1"/>
-          </a:lnRef>
-          <a:fillRef idx="3">
-            <a:schemeClr val="accent1"/>
-          </a:fillRef>
-          <a:effectRef idx="2">
-            <a:schemeClr val="accent1"/>
-          </a:effectRef>
-          <a:fontRef idx="minor">
-            <a:schemeClr val="lt1"/>
-          </a:fontRef>
-        </p:style>
-        <p:txBody>
-          <a:bodyPr rtlCol="0" anchor="ctr"/>
-          <a:lstStyle/>
-          <a:p>
-            <a:pPr algn="ctr"/>
-          </a:p>
-        </p:txBody>
-      </p:sp>
-      <p:sp>
-        <p:nvSpPr>
-          <p:cNvPr id="8" name="TextBox 7"/>
+            <a:pPr algn="ctr">
+              <a:defRPr sz="1300" b="1">
+                <a:solidFill>
+                  <a:srgbClr val="28A745"/>
+                </a:solidFill>
+                <a:latin typeface="Microsoft YaHei"/>
+              </a:defRPr>
+            </a:pPr>
+            <a:r>
+              <a:t>已完成</a:t>
+            </a:r>
+          </a:p>
+        </p:txBody>
+      </p:sp>
+      <p:sp>
+        <p:nvSpPr>
+          <p:cNvPr id="9" name="TextBox 8"/>
           <p:cNvSpPr txBox="1"/>
           <p:nvPr/>
         </p:nvSpPr>
         <p:spPr>
           <a:xfrm>
-            <a:off x="457200" y="6583680"/>
-            <a:ext cx="3657600" cy="228600"/>
+            <a:off x="91439" y="3474720"/>
+            <a:ext cx="2194560" cy="1188720"/>
           </a:xfrm>
           <a:prstGeom prst="rect">
             <a:avLst/>
@@ -23339,30 +23455,75 @@
           </a:bodyPr>
           <a:lstStyle/>
           <a:p>
-            <a:pPr algn="l">
-              <a:defRPr sz="1000" b="0">
-                <a:solidFill>
-                  <a:srgbClr val="6C757D"/>
-                </a:solidFill>
-                <a:latin typeface="Microsoft YaHei"/>
-              </a:defRPr>
-            </a:pPr>
-            <a:r>
-              <a:t>smallgameagent · LLM/VLM + 规则驱动</a:t>
-            </a:r>
-          </a:p>
-        </p:txBody>
-      </p:sp>
-      <p:sp>
-        <p:nvSpPr>
-          <p:cNvPr id="9" name="TextBox 8"/>
+            <a:pPr algn="ctr">
+              <a:defRPr sz="1200" b="0">
+                <a:solidFill>
+                  <a:srgbClr val="1E2933"/>
+                </a:solidFill>
+                <a:latin typeface="Microsoft YaHei"/>
+              </a:defRPr>
+            </a:pPr>
+            <a:r>
+              <a:t>规则引擎 + 自动校准</a:t>
+            </a:r>
+            <a:br/>
+            <a:r>
+              <a:t>22 游戏可驱动</a:t>
+            </a:r>
+          </a:p>
+        </p:txBody>
+      </p:sp>
+      <p:sp>
+        <p:nvSpPr>
+          <p:cNvPr id="10" name="Oval 9"/>
+          <p:cNvSpPr/>
+          <p:nvPr/>
+        </p:nvSpPr>
+        <p:spPr>
+          <a:xfrm>
+            <a:off x="3108960" y="3063240"/>
+            <a:ext cx="320040" cy="320040"/>
+          </a:xfrm>
+          <a:prstGeom prst="ellipse">
+            <a:avLst/>
+          </a:prstGeom>
+          <a:solidFill>
+            <a:srgbClr val="28A745"/>
+          </a:solidFill>
+          <a:ln/>
+        </p:spPr>
+        <p:style>
+          <a:lnRef idx="1">
+            <a:schemeClr val="accent1"/>
+          </a:lnRef>
+          <a:fillRef idx="3">
+            <a:schemeClr val="accent1"/>
+          </a:fillRef>
+          <a:effectRef idx="2">
+            <a:schemeClr val="accent1"/>
+          </a:effectRef>
+          <a:fontRef idx="minor">
+            <a:schemeClr val="lt1"/>
+          </a:fontRef>
+        </p:style>
+        <p:txBody>
+          <a:bodyPr rtlCol="0" anchor="ctr"/>
+          <a:lstStyle/>
+          <a:p>
+            <a:pPr algn="ctr"/>
+          </a:p>
+        </p:txBody>
+      </p:sp>
+      <p:sp>
+        <p:nvSpPr>
+          <p:cNvPr id="11" name="TextBox 10"/>
           <p:cNvSpPr txBox="1"/>
           <p:nvPr/>
         </p:nvSpPr>
         <p:spPr>
           <a:xfrm>
-            <a:off x="10789920" y="6583680"/>
-            <a:ext cx="914400" cy="228600"/>
+            <a:off x="2606039" y="2103120"/>
+            <a:ext cx="1645920" cy="457200"/>
           </a:xfrm>
           <a:prstGeom prst="rect">
             <a:avLst/>
@@ -23375,6 +23536,561 @@
           </a:bodyPr>
           <a:lstStyle/>
           <a:p>
+            <a:pPr algn="ctr">
+              <a:defRPr sz="1300" b="1">
+                <a:solidFill>
+                  <a:srgbClr val="28A745"/>
+                </a:solidFill>
+                <a:latin typeface="Microsoft YaHei"/>
+              </a:defRPr>
+            </a:pPr>
+            <a:r>
+              <a:t>已完成</a:t>
+            </a:r>
+          </a:p>
+        </p:txBody>
+      </p:sp>
+      <p:sp>
+        <p:nvSpPr>
+          <p:cNvPr id="12" name="TextBox 11"/>
+          <p:cNvSpPr txBox="1"/>
+          <p:nvPr/>
+        </p:nvSpPr>
+        <p:spPr>
+          <a:xfrm>
+            <a:off x="2377439" y="3474720"/>
+            <a:ext cx="2194560" cy="1188720"/>
+          </a:xfrm>
+          <a:prstGeom prst="rect">
+            <a:avLst/>
+          </a:prstGeom>
+          <a:noFill/>
+        </p:spPr>
+        <p:txBody>
+          <a:bodyPr wrap="none">
+            <a:spAutoFit/>
+          </a:bodyPr>
+          <a:lstStyle/>
+          <a:p>
+            <a:pPr algn="ctr">
+              <a:defRPr sz="1200" b="0">
+                <a:solidFill>
+                  <a:srgbClr val="1E2933"/>
+                </a:solidFill>
+                <a:latin typeface="Microsoft YaHei"/>
+              </a:defRPr>
+            </a:pPr>
+            <a:r>
+              <a:t>multi-bus-memory</a:t>
+            </a:r>
+            <a:br/>
+            <a:r>
+              <a:t>记忆读回 0.300</a:t>
+            </a:r>
+          </a:p>
+        </p:txBody>
+      </p:sp>
+      <p:sp>
+        <p:nvSpPr>
+          <p:cNvPr id="13" name="Oval 12"/>
+          <p:cNvSpPr/>
+          <p:nvPr/>
+        </p:nvSpPr>
+        <p:spPr>
+          <a:xfrm>
+            <a:off x="5394960" y="3063240"/>
+            <a:ext cx="320040" cy="320040"/>
+          </a:xfrm>
+          <a:prstGeom prst="ellipse">
+            <a:avLst/>
+          </a:prstGeom>
+          <a:solidFill>
+            <a:srgbClr val="28A745"/>
+          </a:solidFill>
+          <a:ln/>
+        </p:spPr>
+        <p:style>
+          <a:lnRef idx="1">
+            <a:schemeClr val="accent1"/>
+          </a:lnRef>
+          <a:fillRef idx="3">
+            <a:schemeClr val="accent1"/>
+          </a:fillRef>
+          <a:effectRef idx="2">
+            <a:schemeClr val="accent1"/>
+          </a:effectRef>
+          <a:fontRef idx="minor">
+            <a:schemeClr val="lt1"/>
+          </a:fontRef>
+        </p:style>
+        <p:txBody>
+          <a:bodyPr rtlCol="0" anchor="ctr"/>
+          <a:lstStyle/>
+          <a:p>
+            <a:pPr algn="ctr"/>
+          </a:p>
+        </p:txBody>
+      </p:sp>
+      <p:sp>
+        <p:nvSpPr>
+          <p:cNvPr id="14" name="TextBox 13"/>
+          <p:cNvSpPr txBox="1"/>
+          <p:nvPr/>
+        </p:nvSpPr>
+        <p:spPr>
+          <a:xfrm>
+            <a:off x="4892040" y="2103120"/>
+            <a:ext cx="1645920" cy="457200"/>
+          </a:xfrm>
+          <a:prstGeom prst="rect">
+            <a:avLst/>
+          </a:prstGeom>
+          <a:noFill/>
+        </p:spPr>
+        <p:txBody>
+          <a:bodyPr wrap="none">
+            <a:spAutoFit/>
+          </a:bodyPr>
+          <a:lstStyle/>
+          <a:p>
+            <a:pPr algn="ctr">
+              <a:defRPr sz="1300" b="1">
+                <a:solidFill>
+                  <a:srgbClr val="28A745"/>
+                </a:solidFill>
+                <a:latin typeface="Microsoft YaHei"/>
+              </a:defRPr>
+            </a:pPr>
+            <a:r>
+              <a:t>已完成</a:t>
+            </a:r>
+          </a:p>
+        </p:txBody>
+      </p:sp>
+      <p:sp>
+        <p:nvSpPr>
+          <p:cNvPr id="15" name="TextBox 14"/>
+          <p:cNvSpPr txBox="1"/>
+          <p:nvPr/>
+        </p:nvSpPr>
+        <p:spPr>
+          <a:xfrm>
+            <a:off x="4663440" y="3474720"/>
+            <a:ext cx="2194560" cy="1188720"/>
+          </a:xfrm>
+          <a:prstGeom prst="rect">
+            <a:avLst/>
+          </a:prstGeom>
+          <a:noFill/>
+        </p:spPr>
+        <p:txBody>
+          <a:bodyPr wrap="none">
+            <a:spAutoFit/>
+          </a:bodyPr>
+          <a:lstStyle/>
+          <a:p>
+            <a:pPr algn="ctr">
+              <a:defRPr sz="1200" b="0">
+                <a:solidFill>
+                  <a:srgbClr val="1E2933"/>
+                </a:solidFill>
+                <a:latin typeface="Microsoft YaHei"/>
+              </a:defRPr>
+            </a:pPr>
+            <a:r>
+              <a:t>L2 code-file 更新</a:t>
+            </a:r>
+            <a:br/>
+            <a:r>
+              <a:t>qwen/kimi/xiaomi/opencodego 验证</a:t>
+            </a:r>
+          </a:p>
+        </p:txBody>
+      </p:sp>
+      <p:sp>
+        <p:nvSpPr>
+          <p:cNvPr id="16" name="Oval 15"/>
+          <p:cNvSpPr/>
+          <p:nvPr/>
+        </p:nvSpPr>
+        <p:spPr>
+          <a:xfrm>
+            <a:off x="7680960" y="3063240"/>
+            <a:ext cx="320040" cy="320040"/>
+          </a:xfrm>
+          <a:prstGeom prst="ellipse">
+            <a:avLst/>
+          </a:prstGeom>
+          <a:solidFill>
+            <a:srgbClr val="FF6B35"/>
+          </a:solidFill>
+          <a:ln/>
+        </p:spPr>
+        <p:style>
+          <a:lnRef idx="1">
+            <a:schemeClr val="accent1"/>
+          </a:lnRef>
+          <a:fillRef idx="3">
+            <a:schemeClr val="accent1"/>
+          </a:fillRef>
+          <a:effectRef idx="2">
+            <a:schemeClr val="accent1"/>
+          </a:effectRef>
+          <a:fontRef idx="minor">
+            <a:schemeClr val="lt1"/>
+          </a:fontRef>
+        </p:style>
+        <p:txBody>
+          <a:bodyPr rtlCol="0" anchor="ctr"/>
+          <a:lstStyle/>
+          <a:p>
+            <a:pPr algn="ctr"/>
+          </a:p>
+        </p:txBody>
+      </p:sp>
+      <p:sp>
+        <p:nvSpPr>
+          <p:cNvPr id="17" name="TextBox 16"/>
+          <p:cNvSpPr txBox="1"/>
+          <p:nvPr/>
+        </p:nvSpPr>
+        <p:spPr>
+          <a:xfrm>
+            <a:off x="7178040" y="2103120"/>
+            <a:ext cx="1645920" cy="457200"/>
+          </a:xfrm>
+          <a:prstGeom prst="rect">
+            <a:avLst/>
+          </a:prstGeom>
+          <a:noFill/>
+        </p:spPr>
+        <p:txBody>
+          <a:bodyPr wrap="none">
+            <a:spAutoFit/>
+          </a:bodyPr>
+          <a:lstStyle/>
+          <a:p>
+            <a:pPr algn="ctr">
+              <a:defRPr sz="1300" b="1">
+                <a:solidFill>
+                  <a:srgbClr val="FF6B35"/>
+                </a:solidFill>
+                <a:latin typeface="Microsoft YaHei"/>
+              </a:defRPr>
+            </a:pPr>
+            <a:r>
+              <a:t>进行中</a:t>
+            </a:r>
+          </a:p>
+        </p:txBody>
+      </p:sp>
+      <p:sp>
+        <p:nvSpPr>
+          <p:cNvPr id="18" name="TextBox 17"/>
+          <p:cNvSpPr txBox="1"/>
+          <p:nvPr/>
+        </p:nvSpPr>
+        <p:spPr>
+          <a:xfrm>
+            <a:off x="6949440" y="3474720"/>
+            <a:ext cx="2194560" cy="1188720"/>
+          </a:xfrm>
+          <a:prstGeom prst="rect">
+            <a:avLst/>
+          </a:prstGeom>
+          <a:noFill/>
+        </p:spPr>
+        <p:txBody>
+          <a:bodyPr wrap="none">
+            <a:spAutoFit/>
+          </a:bodyPr>
+          <a:lstStyle/>
+          <a:p>
+            <a:pPr algn="ctr">
+              <a:defRPr sz="1200" b="0">
+                <a:solidFill>
+                  <a:srgbClr val="1E2933"/>
+                </a:solidFill>
+                <a:latin typeface="Microsoft YaHei"/>
+              </a:defRPr>
+            </a:pPr>
+            <a:r>
+              <a:t>本地 VLM 上下文</a:t>
+            </a:r>
+            <a:br/>
+            <a:r>
+              <a:t>QLoRA 微调准备</a:t>
+            </a:r>
+          </a:p>
+        </p:txBody>
+      </p:sp>
+      <p:sp>
+        <p:nvSpPr>
+          <p:cNvPr id="19" name="Oval 18"/>
+          <p:cNvSpPr/>
+          <p:nvPr/>
+        </p:nvSpPr>
+        <p:spPr>
+          <a:xfrm>
+            <a:off x="9966960" y="3063240"/>
+            <a:ext cx="320040" cy="320040"/>
+          </a:xfrm>
+          <a:prstGeom prst="ellipse">
+            <a:avLst/>
+          </a:prstGeom>
+          <a:solidFill>
+            <a:srgbClr val="0096C7"/>
+          </a:solidFill>
+          <a:ln/>
+        </p:spPr>
+        <p:style>
+          <a:lnRef idx="1">
+            <a:schemeClr val="accent1"/>
+          </a:lnRef>
+          <a:fillRef idx="3">
+            <a:schemeClr val="accent1"/>
+          </a:fillRef>
+          <a:effectRef idx="2">
+            <a:schemeClr val="accent1"/>
+          </a:effectRef>
+          <a:fontRef idx="minor">
+            <a:schemeClr val="lt1"/>
+          </a:fontRef>
+        </p:style>
+        <p:txBody>
+          <a:bodyPr rtlCol="0" anchor="ctr"/>
+          <a:lstStyle/>
+          <a:p>
+            <a:pPr algn="ctr"/>
+          </a:p>
+        </p:txBody>
+      </p:sp>
+      <p:sp>
+        <p:nvSpPr>
+          <p:cNvPr id="20" name="TextBox 19"/>
+          <p:cNvSpPr txBox="1"/>
+          <p:nvPr/>
+        </p:nvSpPr>
+        <p:spPr>
+          <a:xfrm>
+            <a:off x="9464040" y="2103120"/>
+            <a:ext cx="1645920" cy="457200"/>
+          </a:xfrm>
+          <a:prstGeom prst="rect">
+            <a:avLst/>
+          </a:prstGeom>
+          <a:noFill/>
+        </p:spPr>
+        <p:txBody>
+          <a:bodyPr wrap="none">
+            <a:spAutoFit/>
+          </a:bodyPr>
+          <a:lstStyle/>
+          <a:p>
+            <a:pPr algn="ctr">
+              <a:defRPr sz="1300" b="1">
+                <a:solidFill>
+                  <a:srgbClr val="0096C7"/>
+                </a:solidFill>
+                <a:latin typeface="Microsoft YaHei"/>
+              </a:defRPr>
+            </a:pPr>
+            <a:r>
+              <a:t>下一步</a:t>
+            </a:r>
+          </a:p>
+        </p:txBody>
+      </p:sp>
+      <p:sp>
+        <p:nvSpPr>
+          <p:cNvPr id="21" name="TextBox 20"/>
+          <p:cNvSpPr txBox="1"/>
+          <p:nvPr/>
+        </p:nvSpPr>
+        <p:spPr>
+          <a:xfrm>
+            <a:off x="9235440" y="3474720"/>
+            <a:ext cx="2194560" cy="1188720"/>
+          </a:xfrm>
+          <a:prstGeom prst="rect">
+            <a:avLst/>
+          </a:prstGeom>
+          <a:noFill/>
+        </p:spPr>
+        <p:txBody>
+          <a:bodyPr wrap="none">
+            <a:spAutoFit/>
+          </a:bodyPr>
+          <a:lstStyle/>
+          <a:p>
+            <a:pPr algn="ctr">
+              <a:defRPr sz="1200" b="0">
+                <a:solidFill>
+                  <a:srgbClr val="1E2933"/>
+                </a:solidFill>
+                <a:latin typeface="Microsoft YaHei"/>
+              </a:defRPr>
+            </a:pPr>
+            <a:r>
+              <a:t>真实游戏在线触发</a:t>
+            </a:r>
+            <a:br/>
+            <a:r>
+              <a:t>规则更新 + A/B 回归</a:t>
+            </a:r>
+          </a:p>
+        </p:txBody>
+      </p:sp>
+      <p:sp>
+        <p:nvSpPr>
+          <p:cNvPr id="22" name="Rounded Rectangle 21"/>
+          <p:cNvSpPr/>
+          <p:nvPr/>
+        </p:nvSpPr>
+        <p:spPr>
+          <a:xfrm>
+            <a:off x="777240" y="5074920"/>
+            <a:ext cx="10972800" cy="822960"/>
+          </a:xfrm>
+          <a:prstGeom prst="roundRect">
+            <a:avLst/>
+          </a:prstGeom>
+          <a:solidFill>
+            <a:srgbClr val="F3F6F9"/>
+          </a:solidFill>
+          <a:ln/>
+        </p:spPr>
+        <p:style>
+          <a:lnRef idx="1">
+            <a:schemeClr val="accent1"/>
+          </a:lnRef>
+          <a:fillRef idx="3">
+            <a:schemeClr val="accent1"/>
+          </a:fillRef>
+          <a:effectRef idx="2">
+            <a:schemeClr val="accent1"/>
+          </a:effectRef>
+          <a:fontRef idx="minor">
+            <a:schemeClr val="lt1"/>
+          </a:fontRef>
+        </p:style>
+        <p:txBody>
+          <a:bodyPr rtlCol="0" anchor="ctr"/>
+          <a:lstStyle/>
+          <a:p>
+            <a:pPr algn="ctr">
+              <a:defRPr sz="1400" b="0">
+                <a:solidFill>
+                  <a:srgbClr val="1E2933"/>
+                </a:solidFill>
+                <a:latin typeface="Microsoft YaHei"/>
+              </a:defRPr>
+            </a:pPr>
+            <a:r>
+              <a:t>核心原则：把贵且慢的云端调用摊到多步，本地 VLM 只提供「证据」，规则引擎负责零延迟执行。</a:t>
+            </a:r>
+          </a:p>
+        </p:txBody>
+      </p:sp>
+      <p:sp>
+        <p:nvSpPr>
+          <p:cNvPr id="23" name="Rectangle 22"/>
+          <p:cNvSpPr/>
+          <p:nvPr/>
+        </p:nvSpPr>
+        <p:spPr>
+          <a:xfrm>
+            <a:off x="0" y="6537960"/>
+            <a:ext cx="12191695" cy="18288"/>
+          </a:xfrm>
+          <a:prstGeom prst="rect">
+            <a:avLst/>
+          </a:prstGeom>
+          <a:solidFill>
+            <a:srgbClr val="0096C7"/>
+          </a:solidFill>
+          <a:ln/>
+        </p:spPr>
+        <p:style>
+          <a:lnRef idx="1">
+            <a:schemeClr val="accent1"/>
+          </a:lnRef>
+          <a:fillRef idx="3">
+            <a:schemeClr val="accent1"/>
+          </a:fillRef>
+          <a:effectRef idx="2">
+            <a:schemeClr val="accent1"/>
+          </a:effectRef>
+          <a:fontRef idx="minor">
+            <a:schemeClr val="lt1"/>
+          </a:fontRef>
+        </p:style>
+        <p:txBody>
+          <a:bodyPr rtlCol="0" anchor="ctr"/>
+          <a:lstStyle/>
+          <a:p>
+            <a:pPr algn="ctr"/>
+          </a:p>
+        </p:txBody>
+      </p:sp>
+      <p:sp>
+        <p:nvSpPr>
+          <p:cNvPr id="24" name="TextBox 23"/>
+          <p:cNvSpPr txBox="1"/>
+          <p:nvPr/>
+        </p:nvSpPr>
+        <p:spPr>
+          <a:xfrm>
+            <a:off x="457200" y="6583680"/>
+            <a:ext cx="3657600" cy="228600"/>
+          </a:xfrm>
+          <a:prstGeom prst="rect">
+            <a:avLst/>
+          </a:prstGeom>
+          <a:noFill/>
+        </p:spPr>
+        <p:txBody>
+          <a:bodyPr wrap="none">
+            <a:spAutoFit/>
+          </a:bodyPr>
+          <a:lstStyle/>
+          <a:p>
+            <a:pPr algn="l">
+              <a:defRPr sz="1000" b="0">
+                <a:solidFill>
+                  <a:srgbClr val="6C757D"/>
+                </a:solidFill>
+                <a:latin typeface="Microsoft YaHei"/>
+              </a:defRPr>
+            </a:pPr>
+            <a:r>
+              <a:t>smallgameagent · LLM/VLM + 规则驱动</a:t>
+            </a:r>
+          </a:p>
+        </p:txBody>
+      </p:sp>
+      <p:sp>
+        <p:nvSpPr>
+          <p:cNvPr id="25" name="TextBox 24"/>
+          <p:cNvSpPr txBox="1"/>
+          <p:nvPr/>
+        </p:nvSpPr>
+        <p:spPr>
+          <a:xfrm>
+            <a:off x="10789920" y="6583680"/>
+            <a:ext cx="914400" cy="228600"/>
+          </a:xfrm>
+          <a:prstGeom prst="rect">
+            <a:avLst/>
+          </a:prstGeom>
+          <a:noFill/>
+        </p:spPr>
+        <p:txBody>
+          <a:bodyPr wrap="none">
+            <a:spAutoFit/>
+          </a:bodyPr>
+          <a:lstStyle/>
+          <a:p>
             <a:pPr algn="r">
               <a:defRPr sz="1000" b="0">
                 <a:solidFill>
@@ -23384,7 +24100,7 @@
               </a:defRPr>
             </a:pPr>
             <a:r>
-              <a:t>37/39</a:t>
+              <a:t>37/40</a:t>
             </a:r>
           </a:p>
         </p:txBody>
@@ -23416,7 +24132,7 @@
         <p:spPr>
           <a:xfrm>
             <a:off x="0" y="0"/>
-            <a:ext cx="12191695" cy="960120"/>
+            <a:ext cx="12191695" cy="6858000"/>
           </a:xfrm>
           <a:prstGeom prst="rect">
             <a:avLst/>
@@ -23450,14 +24166,58 @@
       </p:sp>
       <p:sp>
         <p:nvSpPr>
-          <p:cNvPr id="3" name="TextBox 2"/>
+          <p:cNvPr id="3" name="Rectangle 2"/>
+          <p:cNvSpPr/>
+          <p:nvPr/>
+        </p:nvSpPr>
+        <p:spPr>
+          <a:xfrm>
+            <a:off x="6858000" y="-914400"/>
+            <a:ext cx="5943600" cy="8686800"/>
+          </a:xfrm>
+          <a:prstGeom prst="rect">
+            <a:avLst/>
+          </a:prstGeom>
+          <a:solidFill>
+            <a:srgbClr val="0096C7">
+              <a:lumMod val="80000"/>
+              <a:lumOff val="20000"/>
+            </a:srgbClr>
+          </a:solidFill>
+          <a:ln/>
+        </p:spPr>
+        <p:style>
+          <a:lnRef idx="1">
+            <a:schemeClr val="accent1"/>
+          </a:lnRef>
+          <a:fillRef idx="3">
+            <a:schemeClr val="accent1"/>
+          </a:fillRef>
+          <a:effectRef idx="2">
+            <a:schemeClr val="accent1"/>
+          </a:effectRef>
+          <a:fontRef idx="minor">
+            <a:schemeClr val="lt1"/>
+          </a:fontRef>
+        </p:style>
+        <p:txBody>
+          <a:bodyPr rtlCol="0" anchor="ctr"/>
+          <a:lstStyle/>
+          <a:p>
+            <a:pPr algn="ctr"/>
+          </a:p>
+        </p:txBody>
+      </p:sp>
+      <p:sp>
+        <p:nvSpPr>
+          <p:cNvPr id="4" name="TextBox 3"/>
           <p:cNvSpPr txBox="1"/>
           <p:nvPr/>
         </p:nvSpPr>
         <p:spPr>
           <a:xfrm>
-            <a:off x="457200" y="228600"/>
-            <a:ext cx="11247120" cy="548640"/>
+            <a:off x="548640" y="1645920"/>
+            <a:ext cx="2743200" cy="1828800"/>
           </a:xfrm>
           <a:prstGeom prst="rect">
             <a:avLst/>
@@ -23471,578 +24231,29 @@
           <a:lstStyle/>
           <a:p>
             <a:pPr algn="l">
-              <a:defRPr sz="3000" b="1">
-                <a:solidFill>
-                  <a:srgbClr val="F3F6F9"/>
-                </a:solidFill>
-                <a:latin typeface="Microsoft YaHei"/>
-              </a:defRPr>
-            </a:pPr>
-            <a:r>
-              <a:t>下一步：把实验变成稳定系统</a:t>
-            </a:r>
-          </a:p>
-        </p:txBody>
-      </p:sp>
-      <p:sp>
-        <p:nvSpPr>
-          <p:cNvPr id="4" name="Rectangle 3"/>
-          <p:cNvSpPr/>
-          <p:nvPr/>
-        </p:nvSpPr>
-        <p:spPr>
-          <a:xfrm>
-            <a:off x="0" y="960120"/>
-            <a:ext cx="164592" cy="5897880"/>
-          </a:xfrm>
-          <a:prstGeom prst="rect">
-            <a:avLst/>
-          </a:prstGeom>
-          <a:solidFill>
-            <a:srgbClr val="0096C7"/>
-          </a:solidFill>
-          <a:ln/>
-        </p:spPr>
-        <p:style>
-          <a:lnRef idx="1">
-            <a:schemeClr val="accent1"/>
-          </a:lnRef>
-          <a:fillRef idx="3">
-            <a:schemeClr val="accent1"/>
-          </a:fillRef>
-          <a:effectRef idx="2">
-            <a:schemeClr val="accent1"/>
-          </a:effectRef>
-          <a:fontRef idx="minor">
-            <a:schemeClr val="lt1"/>
-          </a:fontRef>
-        </p:style>
-        <p:txBody>
-          <a:bodyPr rtlCol="0" anchor="ctr"/>
-          <a:lstStyle/>
-          <a:p>
-            <a:pPr algn="ctr"/>
-          </a:p>
-        </p:txBody>
-      </p:sp>
-      <p:sp>
-        <p:nvSpPr>
-          <p:cNvPr id="5" name="Rectangle 4"/>
-          <p:cNvSpPr/>
-          <p:nvPr/>
-        </p:nvSpPr>
-        <p:spPr>
-          <a:xfrm>
-            <a:off x="320040" y="1078992"/>
-            <a:ext cx="11548872" cy="5349240"/>
-          </a:xfrm>
-          <a:prstGeom prst="rect">
-            <a:avLst/>
-          </a:prstGeom>
-          <a:solidFill>
-            <a:srgbClr val="FFFFFF"/>
-          </a:solidFill>
-          <a:ln w="12700">
-            <a:solidFill>
-              <a:srgbClr val="E1E5E9"/>
-            </a:solidFill>
-          </a:ln>
-        </p:spPr>
-        <p:style>
-          <a:lnRef idx="1">
-            <a:schemeClr val="accent1"/>
-          </a:lnRef>
-          <a:fillRef idx="3">
-            <a:schemeClr val="accent1"/>
-          </a:fillRef>
-          <a:effectRef idx="2">
-            <a:schemeClr val="accent1"/>
-          </a:effectRef>
-          <a:fontRef idx="minor">
-            <a:schemeClr val="lt1"/>
-          </a:fontRef>
-        </p:style>
-        <p:txBody>
-          <a:bodyPr rtlCol="0" anchor="ctr"/>
-          <a:lstStyle/>
-          <a:p>
-            <a:pPr algn="ctr"/>
-          </a:p>
-        </p:txBody>
-      </p:sp>
-      <p:sp>
-        <p:nvSpPr>
-          <p:cNvPr id="6" name="TextBox 5"/>
+              <a:defRPr sz="12000" b="1">
+                <a:solidFill>
+                  <a:srgbClr val="333DA0"/>
+                </a:solidFill>
+                <a:latin typeface="Microsoft YaHei"/>
+              </a:defRPr>
+            </a:pPr>
+            <a:r>
+              <a:t>10</a:t>
+            </a:r>
+          </a:p>
+        </p:txBody>
+      </p:sp>
+      <p:sp>
+        <p:nvSpPr>
+          <p:cNvPr id="5" name="TextBox 4"/>
           <p:cNvSpPr txBox="1"/>
           <p:nvPr/>
         </p:nvSpPr>
         <p:spPr>
           <a:xfrm>
-            <a:off x="777240" y="1417320"/>
-            <a:ext cx="10972800" cy="5029200"/>
-          </a:xfrm>
-          <a:prstGeom prst="rect">
-            <a:avLst/>
-          </a:prstGeom>
-          <a:noFill/>
-        </p:spPr>
-        <p:txBody>
-          <a:bodyPr wrap="square">
-            <a:spAutoFit/>
-          </a:bodyPr>
-          <a:lstStyle/>
-          <a:p>
-            <a:pPr algn="l">
-              <a:spcAft>
-                <a:spcPts val="1200"/>
-              </a:spcAft>
-              <a:defRPr sz="1800" b="0">
-                <a:solidFill>
-                  <a:srgbClr val="1E2933"/>
-                </a:solidFill>
-                <a:latin typeface="Microsoft YaHei"/>
-              </a:defRPr>
-            </a:pPr>
-            <a:r>
-              <a:t>  在真实游戏运行中触发 code-file 更新，验证动态 stall/composite 下 L2 的决策质量</a:t>
-            </a:r>
-          </a:p>
-          <a:p>
-            <a:pPr algn="l">
-              <a:spcAft>
-                <a:spcPts val="1200"/>
-              </a:spcAft>
-              <a:defRPr sz="1800" b="0">
-                <a:solidFill>
-                  <a:srgbClr val="1E2933"/>
-                </a:solidFill>
-                <a:latin typeface="Microsoft YaHei"/>
-              </a:defRPr>
-            </a:pPr>
-            <a:r>
-              <a:t>  把 runtime_rules.json 的 schema 写进 L2 prompt，约束可改字段与取值范围</a:t>
-            </a:r>
-          </a:p>
-          <a:p>
-            <a:pPr algn="l">
-              <a:spcAft>
-                <a:spcPts val="1200"/>
-              </a:spcAft>
-              <a:defRPr sz="1800" b="0">
-                <a:solidFill>
-                  <a:srgbClr val="1E2933"/>
-                </a:solidFill>
-                <a:latin typeface="Microsoft YaHei"/>
-              </a:defRPr>
-            </a:pPr>
-            <a:r>
-              <a:t>  让本地 VLM 常驻，验证 L1 战术修正对 joystick 游戏的实际收益</a:t>
-            </a:r>
-          </a:p>
-          <a:p>
-            <a:pPr algn="l">
-              <a:spcAft>
-                <a:spcPts val="1200"/>
-              </a:spcAft>
-              <a:defRPr sz="1800" b="0">
-                <a:solidFill>
-                  <a:srgbClr val="1E2933"/>
-                </a:solidFill>
-                <a:latin typeface="Microsoft YaHei"/>
-              </a:defRPr>
-            </a:pPr>
-            <a:r>
-              <a:t>  在 5090 服务器跑 QLoRA 微调，把本地 VLM 训练成专用画面理解器</a:t>
-            </a:r>
-          </a:p>
-          <a:p>
-            <a:pPr algn="l">
-              <a:spcAft>
-                <a:spcPts val="1200"/>
-              </a:spcAft>
-              <a:defRPr sz="1800" b="0">
-                <a:solidFill>
-                  <a:srgbClr val="1E2933"/>
-                </a:solidFill>
-                <a:latin typeface="Microsoft YaHei"/>
-              </a:defRPr>
-            </a:pPr>
-            <a:r>
-              <a:t>  把离线回放接入 CI：每次规则改动自动跑 5 游戏回归</a:t>
-            </a:r>
-          </a:p>
-          <a:p>
-            <a:pPr algn="l">
-              <a:spcAft>
-                <a:spcPts val="1200"/>
-              </a:spcAft>
-              <a:defRPr sz="1800" b="0">
-                <a:solidFill>
-                  <a:srgbClr val="1E2933"/>
-                </a:solidFill>
-                <a:latin typeface="Microsoft YaHei"/>
-              </a:defRPr>
-            </a:pPr>
-            <a:r>
-              <a:t>  探索 Agent 间更严格的仲裁：Critic 对 L0/L2 冲突做最终决策</a:t>
-            </a:r>
-          </a:p>
-          <a:p>
-            <a:pPr algn="l">
-              <a:spcAft>
-                <a:spcPts val="1200"/>
-              </a:spcAft>
-              <a:defRPr sz="1800" b="0">
-                <a:solidFill>
-                  <a:srgbClr val="1E2933"/>
-                </a:solidFill>
-                <a:latin typeface="Microsoft YaHei"/>
-              </a:defRPr>
-            </a:pPr>
-            <a:r>
-              <a:t>   redesign strategy_memory 的 success 信号：结合位置变化、guide 触发、stall 减少</a:t>
-            </a:r>
-          </a:p>
-        </p:txBody>
-      </p:sp>
-      <p:sp>
-        <p:nvSpPr>
-          <p:cNvPr id="7" name="Oval 6"/>
-          <p:cNvSpPr/>
-          <p:nvPr/>
-        </p:nvSpPr>
-        <p:spPr>
-          <a:xfrm>
-            <a:off x="45720" y="0"/>
-            <a:ext cx="137160" cy="137160"/>
-          </a:xfrm>
-          <a:prstGeom prst="ellipse">
-            <a:avLst/>
-          </a:prstGeom>
-          <a:solidFill>
-            <a:srgbClr val="0096C7"/>
-          </a:solidFill>
-          <a:ln/>
-        </p:spPr>
-        <p:style>
-          <a:lnRef idx="1">
-            <a:schemeClr val="accent1"/>
-          </a:lnRef>
-          <a:fillRef idx="3">
-            <a:schemeClr val="accent1"/>
-          </a:fillRef>
-          <a:effectRef idx="2">
-            <a:schemeClr val="accent1"/>
-          </a:effectRef>
-          <a:fontRef idx="minor">
-            <a:schemeClr val="lt1"/>
-          </a:fontRef>
-        </p:style>
-        <p:txBody>
-          <a:bodyPr rtlCol="0" anchor="ctr"/>
-          <a:lstStyle/>
-          <a:p>
-            <a:pPr algn="ctr"/>
-          </a:p>
-        </p:txBody>
-      </p:sp>
-      <p:sp>
-        <p:nvSpPr>
-          <p:cNvPr id="8" name="Oval 7"/>
-          <p:cNvSpPr/>
-          <p:nvPr/>
-        </p:nvSpPr>
-        <p:spPr>
-          <a:xfrm>
-            <a:off x="45720" y="0"/>
-            <a:ext cx="137160" cy="137160"/>
-          </a:xfrm>
-          <a:prstGeom prst="ellipse">
-            <a:avLst/>
-          </a:prstGeom>
-          <a:solidFill>
-            <a:srgbClr val="0096C7"/>
-          </a:solidFill>
-          <a:ln/>
-        </p:spPr>
-        <p:style>
-          <a:lnRef idx="1">
-            <a:schemeClr val="accent1"/>
-          </a:lnRef>
-          <a:fillRef idx="3">
-            <a:schemeClr val="accent1"/>
-          </a:fillRef>
-          <a:effectRef idx="2">
-            <a:schemeClr val="accent1"/>
-          </a:effectRef>
-          <a:fontRef idx="minor">
-            <a:schemeClr val="lt1"/>
-          </a:fontRef>
-        </p:style>
-        <p:txBody>
-          <a:bodyPr rtlCol="0" anchor="ctr"/>
-          <a:lstStyle/>
-          <a:p>
-            <a:pPr algn="ctr"/>
-          </a:p>
-        </p:txBody>
-      </p:sp>
-      <p:sp>
-        <p:nvSpPr>
-          <p:cNvPr id="9" name="Oval 8"/>
-          <p:cNvSpPr/>
-          <p:nvPr/>
-        </p:nvSpPr>
-        <p:spPr>
-          <a:xfrm>
-            <a:off x="45720" y="0"/>
-            <a:ext cx="137160" cy="137160"/>
-          </a:xfrm>
-          <a:prstGeom prst="ellipse">
-            <a:avLst/>
-          </a:prstGeom>
-          <a:solidFill>
-            <a:srgbClr val="0096C7"/>
-          </a:solidFill>
-          <a:ln/>
-        </p:spPr>
-        <p:style>
-          <a:lnRef idx="1">
-            <a:schemeClr val="accent1"/>
-          </a:lnRef>
-          <a:fillRef idx="3">
-            <a:schemeClr val="accent1"/>
-          </a:fillRef>
-          <a:effectRef idx="2">
-            <a:schemeClr val="accent1"/>
-          </a:effectRef>
-          <a:fontRef idx="minor">
-            <a:schemeClr val="lt1"/>
-          </a:fontRef>
-        </p:style>
-        <p:txBody>
-          <a:bodyPr rtlCol="0" anchor="ctr"/>
-          <a:lstStyle/>
-          <a:p>
-            <a:pPr algn="ctr"/>
-          </a:p>
-        </p:txBody>
-      </p:sp>
-      <p:sp>
-        <p:nvSpPr>
-          <p:cNvPr id="10" name="Oval 9"/>
-          <p:cNvSpPr/>
-          <p:nvPr/>
-        </p:nvSpPr>
-        <p:spPr>
-          <a:xfrm>
-            <a:off x="45720" y="0"/>
-            <a:ext cx="137160" cy="137160"/>
-          </a:xfrm>
-          <a:prstGeom prst="ellipse">
-            <a:avLst/>
-          </a:prstGeom>
-          <a:solidFill>
-            <a:srgbClr val="0096C7"/>
-          </a:solidFill>
-          <a:ln/>
-        </p:spPr>
-        <p:style>
-          <a:lnRef idx="1">
-            <a:schemeClr val="accent1"/>
-          </a:lnRef>
-          <a:fillRef idx="3">
-            <a:schemeClr val="accent1"/>
-          </a:fillRef>
-          <a:effectRef idx="2">
-            <a:schemeClr val="accent1"/>
-          </a:effectRef>
-          <a:fontRef idx="minor">
-            <a:schemeClr val="lt1"/>
-          </a:fontRef>
-        </p:style>
-        <p:txBody>
-          <a:bodyPr rtlCol="0" anchor="ctr"/>
-          <a:lstStyle/>
-          <a:p>
-            <a:pPr algn="ctr"/>
-          </a:p>
-        </p:txBody>
-      </p:sp>
-      <p:sp>
-        <p:nvSpPr>
-          <p:cNvPr id="11" name="Oval 10"/>
-          <p:cNvSpPr/>
-          <p:nvPr/>
-        </p:nvSpPr>
-        <p:spPr>
-          <a:xfrm>
-            <a:off x="45720" y="0"/>
-            <a:ext cx="137160" cy="137160"/>
-          </a:xfrm>
-          <a:prstGeom prst="ellipse">
-            <a:avLst/>
-          </a:prstGeom>
-          <a:solidFill>
-            <a:srgbClr val="0096C7"/>
-          </a:solidFill>
-          <a:ln/>
-        </p:spPr>
-        <p:style>
-          <a:lnRef idx="1">
-            <a:schemeClr val="accent1"/>
-          </a:lnRef>
-          <a:fillRef idx="3">
-            <a:schemeClr val="accent1"/>
-          </a:fillRef>
-          <a:effectRef idx="2">
-            <a:schemeClr val="accent1"/>
-          </a:effectRef>
-          <a:fontRef idx="minor">
-            <a:schemeClr val="lt1"/>
-          </a:fontRef>
-        </p:style>
-        <p:txBody>
-          <a:bodyPr rtlCol="0" anchor="ctr"/>
-          <a:lstStyle/>
-          <a:p>
-            <a:pPr algn="ctr"/>
-          </a:p>
-        </p:txBody>
-      </p:sp>
-      <p:sp>
-        <p:nvSpPr>
-          <p:cNvPr id="12" name="Oval 11"/>
-          <p:cNvSpPr/>
-          <p:nvPr/>
-        </p:nvSpPr>
-        <p:spPr>
-          <a:xfrm>
-            <a:off x="45720" y="0"/>
-            <a:ext cx="137160" cy="137160"/>
-          </a:xfrm>
-          <a:prstGeom prst="ellipse">
-            <a:avLst/>
-          </a:prstGeom>
-          <a:solidFill>
-            <a:srgbClr val="0096C7"/>
-          </a:solidFill>
-          <a:ln/>
-        </p:spPr>
-        <p:style>
-          <a:lnRef idx="1">
-            <a:schemeClr val="accent1"/>
-          </a:lnRef>
-          <a:fillRef idx="3">
-            <a:schemeClr val="accent1"/>
-          </a:fillRef>
-          <a:effectRef idx="2">
-            <a:schemeClr val="accent1"/>
-          </a:effectRef>
-          <a:fontRef idx="minor">
-            <a:schemeClr val="lt1"/>
-          </a:fontRef>
-        </p:style>
-        <p:txBody>
-          <a:bodyPr rtlCol="0" anchor="ctr"/>
-          <a:lstStyle/>
-          <a:p>
-            <a:pPr algn="ctr"/>
-          </a:p>
-        </p:txBody>
-      </p:sp>
-      <p:sp>
-        <p:nvSpPr>
-          <p:cNvPr id="13" name="Oval 12"/>
-          <p:cNvSpPr/>
-          <p:nvPr/>
-        </p:nvSpPr>
-        <p:spPr>
-          <a:xfrm>
-            <a:off x="45720" y="0"/>
-            <a:ext cx="137160" cy="137160"/>
-          </a:xfrm>
-          <a:prstGeom prst="ellipse">
-            <a:avLst/>
-          </a:prstGeom>
-          <a:solidFill>
-            <a:srgbClr val="0096C7"/>
-          </a:solidFill>
-          <a:ln/>
-        </p:spPr>
-        <p:style>
-          <a:lnRef idx="1">
-            <a:schemeClr val="accent1"/>
-          </a:lnRef>
-          <a:fillRef idx="3">
-            <a:schemeClr val="accent1"/>
-          </a:fillRef>
-          <a:effectRef idx="2">
-            <a:schemeClr val="accent1"/>
-          </a:effectRef>
-          <a:fontRef idx="minor">
-            <a:schemeClr val="lt1"/>
-          </a:fontRef>
-        </p:style>
-        <p:txBody>
-          <a:bodyPr rtlCol="0" anchor="ctr"/>
-          <a:lstStyle/>
-          <a:p>
-            <a:pPr algn="ctr"/>
-          </a:p>
-        </p:txBody>
-      </p:sp>
-      <p:sp>
-        <p:nvSpPr>
-          <p:cNvPr id="14" name="Rectangle 13"/>
-          <p:cNvSpPr/>
-          <p:nvPr/>
-        </p:nvSpPr>
-        <p:spPr>
-          <a:xfrm>
-            <a:off x="0" y="6537960"/>
-            <a:ext cx="12191695" cy="18288"/>
-          </a:xfrm>
-          <a:prstGeom prst="rect">
-            <a:avLst/>
-          </a:prstGeom>
-          <a:solidFill>
-            <a:srgbClr val="0096C7"/>
-          </a:solidFill>
-          <a:ln/>
-        </p:spPr>
-        <p:style>
-          <a:lnRef idx="1">
-            <a:schemeClr val="accent1"/>
-          </a:lnRef>
-          <a:fillRef idx="3">
-            <a:schemeClr val="accent1"/>
-          </a:fillRef>
-          <a:effectRef idx="2">
-            <a:schemeClr val="accent1"/>
-          </a:effectRef>
-          <a:fontRef idx="minor">
-            <a:schemeClr val="lt1"/>
-          </a:fontRef>
-        </p:style>
-        <p:txBody>
-          <a:bodyPr rtlCol="0" anchor="ctr"/>
-          <a:lstStyle/>
-          <a:p>
-            <a:pPr algn="ctr"/>
-          </a:p>
-        </p:txBody>
-      </p:sp>
-      <p:sp>
-        <p:nvSpPr>
-          <p:cNvPr id="15" name="TextBox 14"/>
-          <p:cNvSpPr txBox="1"/>
-          <p:nvPr/>
-        </p:nvSpPr>
-        <p:spPr>
-          <a:xfrm>
-            <a:off x="457200" y="6583680"/>
-            <a:ext cx="3657600" cy="228600"/>
+            <a:off x="548640" y="2834640"/>
+            <a:ext cx="11064240" cy="1097280"/>
           </a:xfrm>
           <a:prstGeom prst="rect">
             <a:avLst/>
@@ -24056,29 +24267,111 @@
           <a:lstStyle/>
           <a:p>
             <a:pPr algn="l">
-              <a:defRPr sz="1000" b="0">
-                <a:solidFill>
-                  <a:srgbClr val="6C757D"/>
-                </a:solidFill>
-                <a:latin typeface="Microsoft YaHei"/>
-              </a:defRPr>
-            </a:pPr>
-            <a:r>
-              <a:t>smallgameagent · LLM/VLM + 规则驱动</a:t>
-            </a:r>
-          </a:p>
-        </p:txBody>
-      </p:sp>
-      <p:sp>
-        <p:nvSpPr>
-          <p:cNvPr id="16" name="TextBox 15"/>
+              <a:defRPr sz="4400" b="1">
+                <a:solidFill>
+                  <a:srgbClr val="F3F6F9"/>
+                </a:solidFill>
+                <a:latin typeface="Microsoft YaHei"/>
+              </a:defRPr>
+            </a:pPr>
+            <a:r>
+              <a:t>下一步</a:t>
+            </a:r>
+          </a:p>
+        </p:txBody>
+      </p:sp>
+      <p:sp>
+        <p:nvSpPr>
+          <p:cNvPr id="6" name="Rectangle 5"/>
+          <p:cNvSpPr/>
+          <p:nvPr/>
+        </p:nvSpPr>
+        <p:spPr>
+          <a:xfrm>
+            <a:off x="548640" y="4023360"/>
+            <a:ext cx="1828800" cy="73152"/>
+          </a:xfrm>
+          <a:prstGeom prst="rect">
+            <a:avLst/>
+          </a:prstGeom>
+          <a:solidFill>
+            <a:srgbClr val="FF6B35"/>
+          </a:solidFill>
+          <a:ln/>
+        </p:spPr>
+        <p:style>
+          <a:lnRef idx="1">
+            <a:schemeClr val="accent1"/>
+          </a:lnRef>
+          <a:fillRef idx="3">
+            <a:schemeClr val="accent1"/>
+          </a:fillRef>
+          <a:effectRef idx="2">
+            <a:schemeClr val="accent1"/>
+          </a:effectRef>
+          <a:fontRef idx="minor">
+            <a:schemeClr val="lt1"/>
+          </a:fontRef>
+        </p:style>
+        <p:txBody>
+          <a:bodyPr rtlCol="0" anchor="ctr"/>
+          <a:lstStyle/>
+          <a:p>
+            <a:pPr algn="ctr"/>
+          </a:p>
+        </p:txBody>
+      </p:sp>
+      <p:sp>
+        <p:nvSpPr>
+          <p:cNvPr id="7" name="Rectangle 6"/>
+          <p:cNvSpPr/>
+          <p:nvPr/>
+        </p:nvSpPr>
+        <p:spPr>
+          <a:xfrm>
+            <a:off x="0" y="6537960"/>
+            <a:ext cx="12191695" cy="18288"/>
+          </a:xfrm>
+          <a:prstGeom prst="rect">
+            <a:avLst/>
+          </a:prstGeom>
+          <a:solidFill>
+            <a:srgbClr val="0096C7"/>
+          </a:solidFill>
+          <a:ln/>
+        </p:spPr>
+        <p:style>
+          <a:lnRef idx="1">
+            <a:schemeClr val="accent1"/>
+          </a:lnRef>
+          <a:fillRef idx="3">
+            <a:schemeClr val="accent1"/>
+          </a:fillRef>
+          <a:effectRef idx="2">
+            <a:schemeClr val="accent1"/>
+          </a:effectRef>
+          <a:fontRef idx="minor">
+            <a:schemeClr val="lt1"/>
+          </a:fontRef>
+        </p:style>
+        <p:txBody>
+          <a:bodyPr rtlCol="0" anchor="ctr"/>
+          <a:lstStyle/>
+          <a:p>
+            <a:pPr algn="ctr"/>
+          </a:p>
+        </p:txBody>
+      </p:sp>
+      <p:sp>
+        <p:nvSpPr>
+          <p:cNvPr id="8" name="TextBox 7"/>
           <p:cNvSpPr txBox="1"/>
           <p:nvPr/>
         </p:nvSpPr>
         <p:spPr>
           <a:xfrm>
-            <a:off x="10789920" y="6583680"/>
-            <a:ext cx="914400" cy="228600"/>
+            <a:off x="457200" y="6583680"/>
+            <a:ext cx="3657600" cy="228600"/>
           </a:xfrm>
           <a:prstGeom prst="rect">
             <a:avLst/>
@@ -24091,6 +24384,42 @@
           </a:bodyPr>
           <a:lstStyle/>
           <a:p>
+            <a:pPr algn="l">
+              <a:defRPr sz="1000" b="0">
+                <a:solidFill>
+                  <a:srgbClr val="6C757D"/>
+                </a:solidFill>
+                <a:latin typeface="Microsoft YaHei"/>
+              </a:defRPr>
+            </a:pPr>
+            <a:r>
+              <a:t>smallgameagent · LLM/VLM + 规则驱动</a:t>
+            </a:r>
+          </a:p>
+        </p:txBody>
+      </p:sp>
+      <p:sp>
+        <p:nvSpPr>
+          <p:cNvPr id="9" name="TextBox 8"/>
+          <p:cNvSpPr txBox="1"/>
+          <p:nvPr/>
+        </p:nvSpPr>
+        <p:spPr>
+          <a:xfrm>
+            <a:off x="10789920" y="6583680"/>
+            <a:ext cx="914400" cy="228600"/>
+          </a:xfrm>
+          <a:prstGeom prst="rect">
+            <a:avLst/>
+          </a:prstGeom>
+          <a:noFill/>
+        </p:spPr>
+        <p:txBody>
+          <a:bodyPr wrap="none">
+            <a:spAutoFit/>
+          </a:bodyPr>
+          <a:lstStyle/>
+          <a:p>
             <a:pPr algn="r">
               <a:defRPr sz="1000" b="0">
                 <a:solidFill>
@@ -24100,7 +24429,7 @@
               </a:defRPr>
             </a:pPr>
             <a:r>
-              <a:t>38/39</a:t>
+              <a:t>38/40</a:t>
             </a:r>
           </a:p>
         </p:txBody>
@@ -24132,7 +24461,7 @@
         <p:spPr>
           <a:xfrm>
             <a:off x="0" y="0"/>
-            <a:ext cx="12191695" cy="6858000"/>
+            <a:ext cx="12191695" cy="960120"/>
           </a:xfrm>
           <a:prstGeom prst="rect">
             <a:avLst/>
@@ -24166,146 +24495,14 @@
       </p:sp>
       <p:sp>
         <p:nvSpPr>
-          <p:cNvPr id="3" name="Oval 2"/>
-          <p:cNvSpPr/>
-          <p:nvPr/>
-        </p:nvSpPr>
-        <p:spPr>
-          <a:xfrm>
-            <a:off x="9144000" y="914400"/>
-            <a:ext cx="1371600" cy="1371600"/>
-          </a:xfrm>
-          <a:prstGeom prst="ellipse">
-            <a:avLst/>
-          </a:prstGeom>
-          <a:solidFill>
-            <a:srgbClr val="0096C7">
-              <a:lumMod val="70000"/>
-              <a:lumOff val="30000"/>
-            </a:srgbClr>
-          </a:solidFill>
-          <a:ln/>
-        </p:spPr>
-        <p:style>
-          <a:lnRef idx="1">
-            <a:schemeClr val="accent1"/>
-          </a:lnRef>
-          <a:fillRef idx="3">
-            <a:schemeClr val="accent1"/>
-          </a:fillRef>
-          <a:effectRef idx="2">
-            <a:schemeClr val="accent1"/>
-          </a:effectRef>
-          <a:fontRef idx="minor">
-            <a:schemeClr val="lt1"/>
-          </a:fontRef>
-        </p:style>
-        <p:txBody>
-          <a:bodyPr rtlCol="0" anchor="ctr"/>
-          <a:lstStyle/>
-          <a:p>
-            <a:pPr algn="ctr"/>
-          </a:p>
-        </p:txBody>
-      </p:sp>
-      <p:sp>
-        <p:nvSpPr>
-          <p:cNvPr id="4" name="Oval 3"/>
-          <p:cNvSpPr/>
-          <p:nvPr/>
-        </p:nvSpPr>
-        <p:spPr>
-          <a:xfrm>
-            <a:off x="9784080" y="1371600"/>
-            <a:ext cx="1371600" cy="1371600"/>
-          </a:xfrm>
-          <a:prstGeom prst="ellipse">
-            <a:avLst/>
-          </a:prstGeom>
-          <a:solidFill>
-            <a:srgbClr val="0096C7">
-              <a:lumMod val="70000"/>
-              <a:lumOff val="30000"/>
-            </a:srgbClr>
-          </a:solidFill>
-          <a:ln/>
-        </p:spPr>
-        <p:style>
-          <a:lnRef idx="1">
-            <a:schemeClr val="accent1"/>
-          </a:lnRef>
-          <a:fillRef idx="3">
-            <a:schemeClr val="accent1"/>
-          </a:fillRef>
-          <a:effectRef idx="2">
-            <a:schemeClr val="accent1"/>
-          </a:effectRef>
-          <a:fontRef idx="minor">
-            <a:schemeClr val="lt1"/>
-          </a:fontRef>
-        </p:style>
-        <p:txBody>
-          <a:bodyPr rtlCol="0" anchor="ctr"/>
-          <a:lstStyle/>
-          <a:p>
-            <a:pPr algn="ctr"/>
-          </a:p>
-        </p:txBody>
-      </p:sp>
-      <p:sp>
-        <p:nvSpPr>
-          <p:cNvPr id="5" name="Oval 4"/>
-          <p:cNvSpPr/>
-          <p:nvPr/>
-        </p:nvSpPr>
-        <p:spPr>
-          <a:xfrm>
-            <a:off x="10424160" y="1828800"/>
-            <a:ext cx="1371600" cy="1371600"/>
-          </a:xfrm>
-          <a:prstGeom prst="ellipse">
-            <a:avLst/>
-          </a:prstGeom>
-          <a:solidFill>
-            <a:srgbClr val="0096C7">
-              <a:lumMod val="70000"/>
-              <a:lumOff val="30000"/>
-            </a:srgbClr>
-          </a:solidFill>
-          <a:ln/>
-        </p:spPr>
-        <p:style>
-          <a:lnRef idx="1">
-            <a:schemeClr val="accent1"/>
-          </a:lnRef>
-          <a:fillRef idx="3">
-            <a:schemeClr val="accent1"/>
-          </a:fillRef>
-          <a:effectRef idx="2">
-            <a:schemeClr val="accent1"/>
-          </a:effectRef>
-          <a:fontRef idx="minor">
-            <a:schemeClr val="lt1"/>
-          </a:fontRef>
-        </p:style>
-        <p:txBody>
-          <a:bodyPr rtlCol="0" anchor="ctr"/>
-          <a:lstStyle/>
-          <a:p>
-            <a:pPr algn="ctr"/>
-          </a:p>
-        </p:txBody>
-      </p:sp>
-      <p:sp>
-        <p:nvSpPr>
-          <p:cNvPr id="6" name="TextBox 5"/>
+          <p:cNvPr id="3" name="TextBox 2"/>
           <p:cNvSpPr txBox="1"/>
           <p:nvPr/>
         </p:nvSpPr>
         <p:spPr>
           <a:xfrm>
-            <a:off x="457200" y="2651760"/>
-            <a:ext cx="11247120" cy="1280160"/>
+            <a:off x="457200" y="228600"/>
+            <a:ext cx="11247120" cy="548640"/>
           </a:xfrm>
           <a:prstGeom prst="rect">
             <a:avLst/>
@@ -24318,8 +24515,8 @@
           </a:bodyPr>
           <a:lstStyle/>
           <a:p>
-            <a:pPr algn="ctr">
-              <a:defRPr sz="4800" b="1">
+            <a:pPr algn="l">
+              <a:defRPr sz="3000" b="1">
                 <a:solidFill>
                   <a:srgbClr val="F3F6F9"/>
                 </a:solidFill>
@@ -24327,27 +24524,27 @@
               </a:defRPr>
             </a:pPr>
             <a:r>
-              <a:t>谢谢，欢迎讨论</a:t>
-            </a:r>
-          </a:p>
-        </p:txBody>
-      </p:sp>
-      <p:sp>
-        <p:nvSpPr>
-          <p:cNvPr id="7" name="Rectangle 6"/>
-          <p:cNvSpPr/>
-          <p:nvPr/>
-        </p:nvSpPr>
-        <p:spPr>
-          <a:xfrm>
-            <a:off x="5184648" y="3931920"/>
-            <a:ext cx="1828800" cy="73152"/>
-          </a:xfrm>
-          <a:prstGeom prst="rect">
-            <a:avLst/>
-          </a:prstGeom>
-          <a:solidFill>
-            <a:srgbClr val="FF6B35"/>
+              <a:t>下一步：把实验变成稳定系统</a:t>
+            </a:r>
+          </a:p>
+        </p:txBody>
+      </p:sp>
+      <p:sp>
+        <p:nvSpPr>
+          <p:cNvPr id="4" name="Rectangle 3"/>
+          <p:cNvSpPr/>
+          <p:nvPr/>
+        </p:nvSpPr>
+        <p:spPr>
+          <a:xfrm>
+            <a:off x="0" y="960120"/>
+            <a:ext cx="164592" cy="5897880"/>
+          </a:xfrm>
+          <a:prstGeom prst="rect">
+            <a:avLst/>
+          </a:prstGeom>
+          <a:solidFill>
+            <a:srgbClr val="0096C7"/>
           </a:solidFill>
           <a:ln/>
         </p:spPr>
@@ -24375,7 +24572,474 @@
       </p:sp>
       <p:sp>
         <p:nvSpPr>
-          <p:cNvPr id="8" name="Rectangle 7"/>
+          <p:cNvPr id="5" name="Rectangle 4"/>
+          <p:cNvSpPr/>
+          <p:nvPr/>
+        </p:nvSpPr>
+        <p:spPr>
+          <a:xfrm>
+            <a:off x="320040" y="1078992"/>
+            <a:ext cx="11548872" cy="5349240"/>
+          </a:xfrm>
+          <a:prstGeom prst="rect">
+            <a:avLst/>
+          </a:prstGeom>
+          <a:solidFill>
+            <a:srgbClr val="FFFFFF"/>
+          </a:solidFill>
+          <a:ln w="12700">
+            <a:solidFill>
+              <a:srgbClr val="E1E5E9"/>
+            </a:solidFill>
+          </a:ln>
+        </p:spPr>
+        <p:style>
+          <a:lnRef idx="1">
+            <a:schemeClr val="accent1"/>
+          </a:lnRef>
+          <a:fillRef idx="3">
+            <a:schemeClr val="accent1"/>
+          </a:fillRef>
+          <a:effectRef idx="2">
+            <a:schemeClr val="accent1"/>
+          </a:effectRef>
+          <a:fontRef idx="minor">
+            <a:schemeClr val="lt1"/>
+          </a:fontRef>
+        </p:style>
+        <p:txBody>
+          <a:bodyPr rtlCol="0" anchor="ctr"/>
+          <a:lstStyle/>
+          <a:p>
+            <a:pPr algn="ctr"/>
+          </a:p>
+        </p:txBody>
+      </p:sp>
+      <p:sp>
+        <p:nvSpPr>
+          <p:cNvPr id="6" name="TextBox 5"/>
+          <p:cNvSpPr txBox="1"/>
+          <p:nvPr/>
+        </p:nvSpPr>
+        <p:spPr>
+          <a:xfrm>
+            <a:off x="777240" y="1417320"/>
+            <a:ext cx="10972800" cy="5029200"/>
+          </a:xfrm>
+          <a:prstGeom prst="rect">
+            <a:avLst/>
+          </a:prstGeom>
+          <a:noFill/>
+        </p:spPr>
+        <p:txBody>
+          <a:bodyPr wrap="square">
+            <a:spAutoFit/>
+          </a:bodyPr>
+          <a:lstStyle/>
+          <a:p>
+            <a:pPr algn="l">
+              <a:spcAft>
+                <a:spcPts val="1200"/>
+              </a:spcAft>
+              <a:defRPr sz="1800" b="0">
+                <a:solidFill>
+                  <a:srgbClr val="1E2933"/>
+                </a:solidFill>
+                <a:latin typeface="Microsoft YaHei"/>
+              </a:defRPr>
+            </a:pPr>
+            <a:r>
+              <a:t>  在真实游戏运行中触发 code-file 更新，验证动态 stall/composite 下 L2 的决策质量</a:t>
+            </a:r>
+          </a:p>
+          <a:p>
+            <a:pPr algn="l">
+              <a:spcAft>
+                <a:spcPts val="1200"/>
+              </a:spcAft>
+              <a:defRPr sz="1800" b="0">
+                <a:solidFill>
+                  <a:srgbClr val="1E2933"/>
+                </a:solidFill>
+                <a:latin typeface="Microsoft YaHei"/>
+              </a:defRPr>
+            </a:pPr>
+            <a:r>
+              <a:t>  把 runtime_rules.json 的 schema 写进 L2 prompt，约束可改字段与取值范围</a:t>
+            </a:r>
+          </a:p>
+          <a:p>
+            <a:pPr algn="l">
+              <a:spcAft>
+                <a:spcPts val="1200"/>
+              </a:spcAft>
+              <a:defRPr sz="1800" b="0">
+                <a:solidFill>
+                  <a:srgbClr val="1E2933"/>
+                </a:solidFill>
+                <a:latin typeface="Microsoft YaHei"/>
+              </a:defRPr>
+            </a:pPr>
+            <a:r>
+              <a:t>  让本地 VLM 常驻，验证 L1 战术修正对 joystick 游戏的实际收益</a:t>
+            </a:r>
+          </a:p>
+          <a:p>
+            <a:pPr algn="l">
+              <a:spcAft>
+                <a:spcPts val="1200"/>
+              </a:spcAft>
+              <a:defRPr sz="1800" b="0">
+                <a:solidFill>
+                  <a:srgbClr val="1E2933"/>
+                </a:solidFill>
+                <a:latin typeface="Microsoft YaHei"/>
+              </a:defRPr>
+            </a:pPr>
+            <a:r>
+              <a:t>  在 5090 服务器跑 QLoRA 微调，把本地 VLM 训练成专用画面理解器</a:t>
+            </a:r>
+          </a:p>
+          <a:p>
+            <a:pPr algn="l">
+              <a:spcAft>
+                <a:spcPts val="1200"/>
+              </a:spcAft>
+              <a:defRPr sz="1800" b="0">
+                <a:solidFill>
+                  <a:srgbClr val="1E2933"/>
+                </a:solidFill>
+                <a:latin typeface="Microsoft YaHei"/>
+              </a:defRPr>
+            </a:pPr>
+            <a:r>
+              <a:t>  把离线回放接入 CI：每次规则改动自动跑 5 游戏回归</a:t>
+            </a:r>
+          </a:p>
+          <a:p>
+            <a:pPr algn="l">
+              <a:spcAft>
+                <a:spcPts val="1200"/>
+              </a:spcAft>
+              <a:defRPr sz="1800" b="0">
+                <a:solidFill>
+                  <a:srgbClr val="1E2933"/>
+                </a:solidFill>
+                <a:latin typeface="Microsoft YaHei"/>
+              </a:defRPr>
+            </a:pPr>
+            <a:r>
+              <a:t>  探索 Agent 间更严格的仲裁：Critic 对 L0/L2 冲突做最终决策</a:t>
+            </a:r>
+          </a:p>
+          <a:p>
+            <a:pPr algn="l">
+              <a:spcAft>
+                <a:spcPts val="1200"/>
+              </a:spcAft>
+              <a:defRPr sz="1800" b="0">
+                <a:solidFill>
+                  <a:srgbClr val="1E2933"/>
+                </a:solidFill>
+                <a:latin typeface="Microsoft YaHei"/>
+              </a:defRPr>
+            </a:pPr>
+            <a:r>
+              <a:t>   redesign strategy_memory 的 success 信号：结合位置变化、guide 触发、stall 减少</a:t>
+            </a:r>
+          </a:p>
+        </p:txBody>
+      </p:sp>
+      <p:sp>
+        <p:nvSpPr>
+          <p:cNvPr id="7" name="Oval 6"/>
+          <p:cNvSpPr/>
+          <p:nvPr/>
+        </p:nvSpPr>
+        <p:spPr>
+          <a:xfrm>
+            <a:off x="45720" y="0"/>
+            <a:ext cx="137160" cy="137160"/>
+          </a:xfrm>
+          <a:prstGeom prst="ellipse">
+            <a:avLst/>
+          </a:prstGeom>
+          <a:solidFill>
+            <a:srgbClr val="0096C7"/>
+          </a:solidFill>
+          <a:ln/>
+        </p:spPr>
+        <p:style>
+          <a:lnRef idx="1">
+            <a:schemeClr val="accent1"/>
+          </a:lnRef>
+          <a:fillRef idx="3">
+            <a:schemeClr val="accent1"/>
+          </a:fillRef>
+          <a:effectRef idx="2">
+            <a:schemeClr val="accent1"/>
+          </a:effectRef>
+          <a:fontRef idx="minor">
+            <a:schemeClr val="lt1"/>
+          </a:fontRef>
+        </p:style>
+        <p:txBody>
+          <a:bodyPr rtlCol="0" anchor="ctr"/>
+          <a:lstStyle/>
+          <a:p>
+            <a:pPr algn="ctr"/>
+          </a:p>
+        </p:txBody>
+      </p:sp>
+      <p:sp>
+        <p:nvSpPr>
+          <p:cNvPr id="8" name="Oval 7"/>
+          <p:cNvSpPr/>
+          <p:nvPr/>
+        </p:nvSpPr>
+        <p:spPr>
+          <a:xfrm>
+            <a:off x="45720" y="0"/>
+            <a:ext cx="137160" cy="137160"/>
+          </a:xfrm>
+          <a:prstGeom prst="ellipse">
+            <a:avLst/>
+          </a:prstGeom>
+          <a:solidFill>
+            <a:srgbClr val="0096C7"/>
+          </a:solidFill>
+          <a:ln/>
+        </p:spPr>
+        <p:style>
+          <a:lnRef idx="1">
+            <a:schemeClr val="accent1"/>
+          </a:lnRef>
+          <a:fillRef idx="3">
+            <a:schemeClr val="accent1"/>
+          </a:fillRef>
+          <a:effectRef idx="2">
+            <a:schemeClr val="accent1"/>
+          </a:effectRef>
+          <a:fontRef idx="minor">
+            <a:schemeClr val="lt1"/>
+          </a:fontRef>
+        </p:style>
+        <p:txBody>
+          <a:bodyPr rtlCol="0" anchor="ctr"/>
+          <a:lstStyle/>
+          <a:p>
+            <a:pPr algn="ctr"/>
+          </a:p>
+        </p:txBody>
+      </p:sp>
+      <p:sp>
+        <p:nvSpPr>
+          <p:cNvPr id="9" name="Oval 8"/>
+          <p:cNvSpPr/>
+          <p:nvPr/>
+        </p:nvSpPr>
+        <p:spPr>
+          <a:xfrm>
+            <a:off x="45720" y="0"/>
+            <a:ext cx="137160" cy="137160"/>
+          </a:xfrm>
+          <a:prstGeom prst="ellipse">
+            <a:avLst/>
+          </a:prstGeom>
+          <a:solidFill>
+            <a:srgbClr val="0096C7"/>
+          </a:solidFill>
+          <a:ln/>
+        </p:spPr>
+        <p:style>
+          <a:lnRef idx="1">
+            <a:schemeClr val="accent1"/>
+          </a:lnRef>
+          <a:fillRef idx="3">
+            <a:schemeClr val="accent1"/>
+          </a:fillRef>
+          <a:effectRef idx="2">
+            <a:schemeClr val="accent1"/>
+          </a:effectRef>
+          <a:fontRef idx="minor">
+            <a:schemeClr val="lt1"/>
+          </a:fontRef>
+        </p:style>
+        <p:txBody>
+          <a:bodyPr rtlCol="0" anchor="ctr"/>
+          <a:lstStyle/>
+          <a:p>
+            <a:pPr algn="ctr"/>
+          </a:p>
+        </p:txBody>
+      </p:sp>
+      <p:sp>
+        <p:nvSpPr>
+          <p:cNvPr id="10" name="Oval 9"/>
+          <p:cNvSpPr/>
+          <p:nvPr/>
+        </p:nvSpPr>
+        <p:spPr>
+          <a:xfrm>
+            <a:off x="45720" y="0"/>
+            <a:ext cx="137160" cy="137160"/>
+          </a:xfrm>
+          <a:prstGeom prst="ellipse">
+            <a:avLst/>
+          </a:prstGeom>
+          <a:solidFill>
+            <a:srgbClr val="0096C7"/>
+          </a:solidFill>
+          <a:ln/>
+        </p:spPr>
+        <p:style>
+          <a:lnRef idx="1">
+            <a:schemeClr val="accent1"/>
+          </a:lnRef>
+          <a:fillRef idx="3">
+            <a:schemeClr val="accent1"/>
+          </a:fillRef>
+          <a:effectRef idx="2">
+            <a:schemeClr val="accent1"/>
+          </a:effectRef>
+          <a:fontRef idx="minor">
+            <a:schemeClr val="lt1"/>
+          </a:fontRef>
+        </p:style>
+        <p:txBody>
+          <a:bodyPr rtlCol="0" anchor="ctr"/>
+          <a:lstStyle/>
+          <a:p>
+            <a:pPr algn="ctr"/>
+          </a:p>
+        </p:txBody>
+      </p:sp>
+      <p:sp>
+        <p:nvSpPr>
+          <p:cNvPr id="11" name="Oval 10"/>
+          <p:cNvSpPr/>
+          <p:nvPr/>
+        </p:nvSpPr>
+        <p:spPr>
+          <a:xfrm>
+            <a:off x="45720" y="0"/>
+            <a:ext cx="137160" cy="137160"/>
+          </a:xfrm>
+          <a:prstGeom prst="ellipse">
+            <a:avLst/>
+          </a:prstGeom>
+          <a:solidFill>
+            <a:srgbClr val="0096C7"/>
+          </a:solidFill>
+          <a:ln/>
+        </p:spPr>
+        <p:style>
+          <a:lnRef idx="1">
+            <a:schemeClr val="accent1"/>
+          </a:lnRef>
+          <a:fillRef idx="3">
+            <a:schemeClr val="accent1"/>
+          </a:fillRef>
+          <a:effectRef idx="2">
+            <a:schemeClr val="accent1"/>
+          </a:effectRef>
+          <a:fontRef idx="minor">
+            <a:schemeClr val="lt1"/>
+          </a:fontRef>
+        </p:style>
+        <p:txBody>
+          <a:bodyPr rtlCol="0" anchor="ctr"/>
+          <a:lstStyle/>
+          <a:p>
+            <a:pPr algn="ctr"/>
+          </a:p>
+        </p:txBody>
+      </p:sp>
+      <p:sp>
+        <p:nvSpPr>
+          <p:cNvPr id="12" name="Oval 11"/>
+          <p:cNvSpPr/>
+          <p:nvPr/>
+        </p:nvSpPr>
+        <p:spPr>
+          <a:xfrm>
+            <a:off x="45720" y="0"/>
+            <a:ext cx="137160" cy="137160"/>
+          </a:xfrm>
+          <a:prstGeom prst="ellipse">
+            <a:avLst/>
+          </a:prstGeom>
+          <a:solidFill>
+            <a:srgbClr val="0096C7"/>
+          </a:solidFill>
+          <a:ln/>
+        </p:spPr>
+        <p:style>
+          <a:lnRef idx="1">
+            <a:schemeClr val="accent1"/>
+          </a:lnRef>
+          <a:fillRef idx="3">
+            <a:schemeClr val="accent1"/>
+          </a:fillRef>
+          <a:effectRef idx="2">
+            <a:schemeClr val="accent1"/>
+          </a:effectRef>
+          <a:fontRef idx="minor">
+            <a:schemeClr val="lt1"/>
+          </a:fontRef>
+        </p:style>
+        <p:txBody>
+          <a:bodyPr rtlCol="0" anchor="ctr"/>
+          <a:lstStyle/>
+          <a:p>
+            <a:pPr algn="ctr"/>
+          </a:p>
+        </p:txBody>
+      </p:sp>
+      <p:sp>
+        <p:nvSpPr>
+          <p:cNvPr id="13" name="Oval 12"/>
+          <p:cNvSpPr/>
+          <p:nvPr/>
+        </p:nvSpPr>
+        <p:spPr>
+          <a:xfrm>
+            <a:off x="45720" y="0"/>
+            <a:ext cx="137160" cy="137160"/>
+          </a:xfrm>
+          <a:prstGeom prst="ellipse">
+            <a:avLst/>
+          </a:prstGeom>
+          <a:solidFill>
+            <a:srgbClr val="0096C7"/>
+          </a:solidFill>
+          <a:ln/>
+        </p:spPr>
+        <p:style>
+          <a:lnRef idx="1">
+            <a:schemeClr val="accent1"/>
+          </a:lnRef>
+          <a:fillRef idx="3">
+            <a:schemeClr val="accent1"/>
+          </a:fillRef>
+          <a:effectRef idx="2">
+            <a:schemeClr val="accent1"/>
+          </a:effectRef>
+          <a:fontRef idx="minor">
+            <a:schemeClr val="lt1"/>
+          </a:fontRef>
+        </p:style>
+        <p:txBody>
+          <a:bodyPr rtlCol="0" anchor="ctr"/>
+          <a:lstStyle/>
+          <a:p>
+            <a:pPr algn="ctr"/>
+          </a:p>
+        </p:txBody>
+      </p:sp>
+      <p:sp>
+        <p:nvSpPr>
+          <p:cNvPr id="14" name="Rectangle 13"/>
           <p:cNvSpPr/>
           <p:nvPr/>
         </p:nvSpPr>
@@ -24416,7 +25080,7 @@
       </p:sp>
       <p:sp>
         <p:nvSpPr>
-          <p:cNvPr id="9" name="TextBox 8"/>
+          <p:cNvPr id="15" name="TextBox 14"/>
           <p:cNvSpPr txBox="1"/>
           <p:nvPr/>
         </p:nvSpPr>
@@ -24452,7 +25116,7 @@
       </p:sp>
       <p:sp>
         <p:nvSpPr>
-          <p:cNvPr id="10" name="TextBox 9"/>
+          <p:cNvPr id="16" name="TextBox 15"/>
           <p:cNvSpPr txBox="1"/>
           <p:nvPr/>
         </p:nvSpPr>
@@ -24481,7 +25145,7 @@
               </a:defRPr>
             </a:pPr>
             <a:r>
-              <a:t>39/39</a:t>
+              <a:t>39/40</a:t>
             </a:r>
           </a:p>
         </p:txBody>
@@ -25821,7 +26485,388 @@
               </a:defRPr>
             </a:pPr>
             <a:r>
-              <a:t>4/39</a:t>
+              <a:t>4/40</a:t>
+            </a:r>
+          </a:p>
+        </p:txBody>
+      </p:sp>
+    </p:spTree>
+  </p:cSld>
+  <p:clrMapOvr>
+    <a:masterClrMapping/>
+  </p:clrMapOvr>
+</p:sld>
+</file>
+
+<file path=ppt/slides/slide40.xml><?xml version="1.0" encoding="utf-8"?>
+<p:sld xmlns:a="http://schemas.openxmlformats.org/drawingml/2006/main" xmlns:p="http://schemas.openxmlformats.org/presentationml/2006/main" xmlns:r="http://schemas.openxmlformats.org/officeDocument/2006/relationships">
+  <p:cSld>
+    <p:spTree>
+      <p:nvGrpSpPr>
+        <p:cNvPr id="1" name=""/>
+        <p:cNvGrpSpPr/>
+        <p:nvPr/>
+      </p:nvGrpSpPr>
+      <p:grpSpPr/>
+      <p:sp>
+        <p:nvSpPr>
+          <p:cNvPr id="2" name="Rectangle 1"/>
+          <p:cNvSpPr/>
+          <p:nvPr/>
+        </p:nvSpPr>
+        <p:spPr>
+          <a:xfrm>
+            <a:off x="0" y="0"/>
+            <a:ext cx="12191695" cy="6858000"/>
+          </a:xfrm>
+          <a:prstGeom prst="rect">
+            <a:avLst/>
+          </a:prstGeom>
+          <a:solidFill>
+            <a:srgbClr val="1A237E"/>
+          </a:solidFill>
+          <a:ln/>
+        </p:spPr>
+        <p:style>
+          <a:lnRef idx="1">
+            <a:schemeClr val="accent1"/>
+          </a:lnRef>
+          <a:fillRef idx="3">
+            <a:schemeClr val="accent1"/>
+          </a:fillRef>
+          <a:effectRef idx="2">
+            <a:schemeClr val="accent1"/>
+          </a:effectRef>
+          <a:fontRef idx="minor">
+            <a:schemeClr val="lt1"/>
+          </a:fontRef>
+        </p:style>
+        <p:txBody>
+          <a:bodyPr rtlCol="0" anchor="ctr"/>
+          <a:lstStyle/>
+          <a:p>
+            <a:pPr algn="ctr"/>
+          </a:p>
+        </p:txBody>
+      </p:sp>
+      <p:sp>
+        <p:nvSpPr>
+          <p:cNvPr id="3" name="Oval 2"/>
+          <p:cNvSpPr/>
+          <p:nvPr/>
+        </p:nvSpPr>
+        <p:spPr>
+          <a:xfrm>
+            <a:off x="9144000" y="914400"/>
+            <a:ext cx="1371600" cy="1371600"/>
+          </a:xfrm>
+          <a:prstGeom prst="ellipse">
+            <a:avLst/>
+          </a:prstGeom>
+          <a:solidFill>
+            <a:srgbClr val="0096C7">
+              <a:lumMod val="70000"/>
+              <a:lumOff val="30000"/>
+            </a:srgbClr>
+          </a:solidFill>
+          <a:ln/>
+        </p:spPr>
+        <p:style>
+          <a:lnRef idx="1">
+            <a:schemeClr val="accent1"/>
+          </a:lnRef>
+          <a:fillRef idx="3">
+            <a:schemeClr val="accent1"/>
+          </a:fillRef>
+          <a:effectRef idx="2">
+            <a:schemeClr val="accent1"/>
+          </a:effectRef>
+          <a:fontRef idx="minor">
+            <a:schemeClr val="lt1"/>
+          </a:fontRef>
+        </p:style>
+        <p:txBody>
+          <a:bodyPr rtlCol="0" anchor="ctr"/>
+          <a:lstStyle/>
+          <a:p>
+            <a:pPr algn="ctr"/>
+          </a:p>
+        </p:txBody>
+      </p:sp>
+      <p:sp>
+        <p:nvSpPr>
+          <p:cNvPr id="4" name="Oval 3"/>
+          <p:cNvSpPr/>
+          <p:nvPr/>
+        </p:nvSpPr>
+        <p:spPr>
+          <a:xfrm>
+            <a:off x="9784080" y="1371600"/>
+            <a:ext cx="1371600" cy="1371600"/>
+          </a:xfrm>
+          <a:prstGeom prst="ellipse">
+            <a:avLst/>
+          </a:prstGeom>
+          <a:solidFill>
+            <a:srgbClr val="0096C7">
+              <a:lumMod val="70000"/>
+              <a:lumOff val="30000"/>
+            </a:srgbClr>
+          </a:solidFill>
+          <a:ln/>
+        </p:spPr>
+        <p:style>
+          <a:lnRef idx="1">
+            <a:schemeClr val="accent1"/>
+          </a:lnRef>
+          <a:fillRef idx="3">
+            <a:schemeClr val="accent1"/>
+          </a:fillRef>
+          <a:effectRef idx="2">
+            <a:schemeClr val="accent1"/>
+          </a:effectRef>
+          <a:fontRef idx="minor">
+            <a:schemeClr val="lt1"/>
+          </a:fontRef>
+        </p:style>
+        <p:txBody>
+          <a:bodyPr rtlCol="0" anchor="ctr"/>
+          <a:lstStyle/>
+          <a:p>
+            <a:pPr algn="ctr"/>
+          </a:p>
+        </p:txBody>
+      </p:sp>
+      <p:sp>
+        <p:nvSpPr>
+          <p:cNvPr id="5" name="Oval 4"/>
+          <p:cNvSpPr/>
+          <p:nvPr/>
+        </p:nvSpPr>
+        <p:spPr>
+          <a:xfrm>
+            <a:off x="10424160" y="1828800"/>
+            <a:ext cx="1371600" cy="1371600"/>
+          </a:xfrm>
+          <a:prstGeom prst="ellipse">
+            <a:avLst/>
+          </a:prstGeom>
+          <a:solidFill>
+            <a:srgbClr val="0096C7">
+              <a:lumMod val="70000"/>
+              <a:lumOff val="30000"/>
+            </a:srgbClr>
+          </a:solidFill>
+          <a:ln/>
+        </p:spPr>
+        <p:style>
+          <a:lnRef idx="1">
+            <a:schemeClr val="accent1"/>
+          </a:lnRef>
+          <a:fillRef idx="3">
+            <a:schemeClr val="accent1"/>
+          </a:fillRef>
+          <a:effectRef idx="2">
+            <a:schemeClr val="accent1"/>
+          </a:effectRef>
+          <a:fontRef idx="minor">
+            <a:schemeClr val="lt1"/>
+          </a:fontRef>
+        </p:style>
+        <p:txBody>
+          <a:bodyPr rtlCol="0" anchor="ctr"/>
+          <a:lstStyle/>
+          <a:p>
+            <a:pPr algn="ctr"/>
+          </a:p>
+        </p:txBody>
+      </p:sp>
+      <p:sp>
+        <p:nvSpPr>
+          <p:cNvPr id="6" name="TextBox 5"/>
+          <p:cNvSpPr txBox="1"/>
+          <p:nvPr/>
+        </p:nvSpPr>
+        <p:spPr>
+          <a:xfrm>
+            <a:off x="457200" y="2651760"/>
+            <a:ext cx="11247120" cy="1280160"/>
+          </a:xfrm>
+          <a:prstGeom prst="rect">
+            <a:avLst/>
+          </a:prstGeom>
+          <a:noFill/>
+        </p:spPr>
+        <p:txBody>
+          <a:bodyPr wrap="none">
+            <a:spAutoFit/>
+          </a:bodyPr>
+          <a:lstStyle/>
+          <a:p>
+            <a:pPr algn="ctr">
+              <a:defRPr sz="4800" b="1">
+                <a:solidFill>
+                  <a:srgbClr val="F3F6F9"/>
+                </a:solidFill>
+                <a:latin typeface="Microsoft YaHei"/>
+              </a:defRPr>
+            </a:pPr>
+            <a:r>
+              <a:t>谢谢，欢迎讨论</a:t>
+            </a:r>
+          </a:p>
+        </p:txBody>
+      </p:sp>
+      <p:sp>
+        <p:nvSpPr>
+          <p:cNvPr id="7" name="Rectangle 6"/>
+          <p:cNvSpPr/>
+          <p:nvPr/>
+        </p:nvSpPr>
+        <p:spPr>
+          <a:xfrm>
+            <a:off x="5184648" y="3931920"/>
+            <a:ext cx="1828800" cy="73152"/>
+          </a:xfrm>
+          <a:prstGeom prst="rect">
+            <a:avLst/>
+          </a:prstGeom>
+          <a:solidFill>
+            <a:srgbClr val="FF6B35"/>
+          </a:solidFill>
+          <a:ln/>
+        </p:spPr>
+        <p:style>
+          <a:lnRef idx="1">
+            <a:schemeClr val="accent1"/>
+          </a:lnRef>
+          <a:fillRef idx="3">
+            <a:schemeClr val="accent1"/>
+          </a:fillRef>
+          <a:effectRef idx="2">
+            <a:schemeClr val="accent1"/>
+          </a:effectRef>
+          <a:fontRef idx="minor">
+            <a:schemeClr val="lt1"/>
+          </a:fontRef>
+        </p:style>
+        <p:txBody>
+          <a:bodyPr rtlCol="0" anchor="ctr"/>
+          <a:lstStyle/>
+          <a:p>
+            <a:pPr algn="ctr"/>
+          </a:p>
+        </p:txBody>
+      </p:sp>
+      <p:sp>
+        <p:nvSpPr>
+          <p:cNvPr id="8" name="Rectangle 7"/>
+          <p:cNvSpPr/>
+          <p:nvPr/>
+        </p:nvSpPr>
+        <p:spPr>
+          <a:xfrm>
+            <a:off x="0" y="6537960"/>
+            <a:ext cx="12191695" cy="18288"/>
+          </a:xfrm>
+          <a:prstGeom prst="rect">
+            <a:avLst/>
+          </a:prstGeom>
+          <a:solidFill>
+            <a:srgbClr val="0096C7"/>
+          </a:solidFill>
+          <a:ln/>
+        </p:spPr>
+        <p:style>
+          <a:lnRef idx="1">
+            <a:schemeClr val="accent1"/>
+          </a:lnRef>
+          <a:fillRef idx="3">
+            <a:schemeClr val="accent1"/>
+          </a:fillRef>
+          <a:effectRef idx="2">
+            <a:schemeClr val="accent1"/>
+          </a:effectRef>
+          <a:fontRef idx="minor">
+            <a:schemeClr val="lt1"/>
+          </a:fontRef>
+        </p:style>
+        <p:txBody>
+          <a:bodyPr rtlCol="0" anchor="ctr"/>
+          <a:lstStyle/>
+          <a:p>
+            <a:pPr algn="ctr"/>
+          </a:p>
+        </p:txBody>
+      </p:sp>
+      <p:sp>
+        <p:nvSpPr>
+          <p:cNvPr id="9" name="TextBox 8"/>
+          <p:cNvSpPr txBox="1"/>
+          <p:nvPr/>
+        </p:nvSpPr>
+        <p:spPr>
+          <a:xfrm>
+            <a:off x="457200" y="6583680"/>
+            <a:ext cx="3657600" cy="228600"/>
+          </a:xfrm>
+          <a:prstGeom prst="rect">
+            <a:avLst/>
+          </a:prstGeom>
+          <a:noFill/>
+        </p:spPr>
+        <p:txBody>
+          <a:bodyPr wrap="none">
+            <a:spAutoFit/>
+          </a:bodyPr>
+          <a:lstStyle/>
+          <a:p>
+            <a:pPr algn="l">
+              <a:defRPr sz="1000" b="0">
+                <a:solidFill>
+                  <a:srgbClr val="6C757D"/>
+                </a:solidFill>
+                <a:latin typeface="Microsoft YaHei"/>
+              </a:defRPr>
+            </a:pPr>
+            <a:r>
+              <a:t>smallgameagent · LLM/VLM + 规则驱动</a:t>
+            </a:r>
+          </a:p>
+        </p:txBody>
+      </p:sp>
+      <p:sp>
+        <p:nvSpPr>
+          <p:cNvPr id="10" name="TextBox 9"/>
+          <p:cNvSpPr txBox="1"/>
+          <p:nvPr/>
+        </p:nvSpPr>
+        <p:spPr>
+          <a:xfrm>
+            <a:off x="10789920" y="6583680"/>
+            <a:ext cx="914400" cy="228600"/>
+          </a:xfrm>
+          <a:prstGeom prst="rect">
+            <a:avLst/>
+          </a:prstGeom>
+          <a:noFill/>
+        </p:spPr>
+        <p:txBody>
+          <a:bodyPr wrap="none">
+            <a:spAutoFit/>
+          </a:bodyPr>
+          <a:lstStyle/>
+          <a:p>
+            <a:pPr algn="r">
+              <a:defRPr sz="1000" b="0">
+                <a:solidFill>
+                  <a:srgbClr val="6C757D"/>
+                </a:solidFill>
+                <a:latin typeface="Microsoft YaHei"/>
+              </a:defRPr>
+            </a:pPr>
+            <a:r>
+              <a:t>40/40</a:t>
             </a:r>
           </a:p>
         </p:txBody>
@@ -26150,7 +27195,7 @@
               </a:defRPr>
             </a:pPr>
             <a:r>
-              <a:t>5/39</a:t>
+              <a:t>5/40</a:t>
             </a:r>
           </a:p>
         </p:txBody>
@@ -26547,7 +27592,7 @@
               </a:defRPr>
             </a:pPr>
             <a:r>
-              <a:t>6/39</a:t>
+              <a:t>6/40</a:t>
             </a:r>
           </a:p>
         </p:txBody>
@@ -26876,7 +27921,7 @@
               </a:defRPr>
             </a:pPr>
             <a:r>
-              <a:t>7/39</a:t>
+              <a:t>7/40</a:t>
             </a:r>
           </a:p>
         </p:txBody>
@@ -28180,7 +29225,7 @@
               </a:defRPr>
             </a:pPr>
             <a:r>
-              <a:t>8/39</a:t>
+              <a:t>8/40</a:t>
             </a:r>
           </a:p>
         </p:txBody>
@@ -28561,7 +29606,7 @@
               </a:defRPr>
             </a:pPr>
             <a:r>
-              <a:t>9/39</a:t>
+              <a:t>9/40</a:t>
             </a:r>
           </a:p>
         </p:txBody>

--- a/reports/smallgameagent_report.pptx
+++ b/reports/smallgameagent_report.pptx
@@ -45,6 +45,8 @@
     <p:sldId id="293" r:id="rId44"/>
     <p:sldId id="294" r:id="rId45"/>
     <p:sldId id="295" r:id="rId46"/>
+    <p:sldId id="296" r:id="rId47"/>
+    <p:sldId id="297" r:id="rId48"/>
   </p:sldIdLst>
   <p:sldSz cx="12191695" cy="6858000" type="screen4x3"/>
   <p:notesSz cx="6858000" cy="9144000"/>
@@ -3853,7 +3855,7 @@
               </a:defRPr>
             </a:pPr>
             <a:r>
-              <a:t>10/40</a:t>
+              <a:t>10/42</a:t>
             </a:r>
           </a:p>
         </p:txBody>
@@ -4671,7 +4673,7 @@
               </a:defRPr>
             </a:pPr>
             <a:r>
-              <a:t>11/40</a:t>
+              <a:t>11/42</a:t>
             </a:r>
           </a:p>
         </p:txBody>
@@ -5068,7 +5070,7 @@
               </a:defRPr>
             </a:pPr>
             <a:r>
-              <a:t>12/40</a:t>
+              <a:t>12/42</a:t>
             </a:r>
           </a:p>
         </p:txBody>
@@ -5397,7 +5399,7 @@
               </a:defRPr>
             </a:pPr>
             <a:r>
-              <a:t>13/40</a:t>
+              <a:t>13/42</a:t>
             </a:r>
           </a:p>
         </p:txBody>
@@ -6188,7 +6190,7 @@
               </a:defRPr>
             </a:pPr>
             <a:r>
-              <a:t>14/40</a:t>
+              <a:t>14/42</a:t>
             </a:r>
           </a:p>
         </p:txBody>
@@ -7232,7 +7234,7 @@
               </a:defRPr>
             </a:pPr>
             <a:r>
-              <a:t>15/40</a:t>
+              <a:t>15/42</a:t>
             </a:r>
           </a:p>
         </p:txBody>
@@ -8418,7 +8420,7 @@
               </a:defRPr>
             </a:pPr>
             <a:r>
-              <a:t>意义：云端模型不仅能改内存参数，还能持久化地调整规则引擎的「旋钮」，且 qwen/kimi/xiaomi/opencodego 四家都能正确生成可应用的 JSON patch。</a:t>
+              <a:t>意义：云端模型不仅能改内存参数，还能持久化调整规则「旋钮」，qwen/kimi/xiaomi/opencodego 四家都能生成可应用 JSON patch。实测：low_composite/stall_streak 阈值触发 ✅，param 应用 ✅，code_file 未授权进 pending（安全机制）✅</a:t>
             </a:r>
           </a:p>
         </p:txBody>
@@ -8531,7 +8533,7 @@
               </a:defRPr>
             </a:pPr>
             <a:r>
-              <a:t>16/40</a:t>
+              <a:t>16/42</a:t>
             </a:r>
           </a:p>
         </p:txBody>
@@ -9713,7 +9715,7 @@
               </a:defRPr>
             </a:pPr>
             <a:r>
-              <a:t>17/40</a:t>
+              <a:t>17/42</a:t>
             </a:r>
           </a:p>
         </p:txBody>
@@ -10110,7 +10112,7 @@
               </a:defRPr>
             </a:pPr>
             <a:r>
-              <a:t>18/40</a:t>
+              <a:t>18/42</a:t>
             </a:r>
           </a:p>
         </p:txBody>
@@ -10507,7 +10509,7 @@
               </a:defRPr>
             </a:pPr>
             <a:r>
-              <a:t>19/40</a:t>
+              <a:t>19/42</a:t>
             </a:r>
           </a:p>
         </p:txBody>
@@ -11380,7 +11382,7 @@
               </a:defRPr>
             </a:pPr>
             <a:r>
-              <a:t>2/40</a:t>
+              <a:t>2/42</a:t>
             </a:r>
           </a:p>
         </p:txBody>
@@ -11777,7 +11779,7 @@
               </a:defRPr>
             </a:pPr>
             <a:r>
-              <a:t>20/40</a:t>
+              <a:t>20/42</a:t>
             </a:r>
           </a:p>
         </p:txBody>
@@ -12106,7 +12108,7 @@
               </a:defRPr>
             </a:pPr>
             <a:r>
-              <a:t>21/40</a:t>
+              <a:t>21/42</a:t>
             </a:r>
           </a:p>
         </p:txBody>
@@ -13169,7 +13171,7 @@
               </a:defRPr>
             </a:pPr>
             <a:r>
-              <a:t>22/40</a:t>
+              <a:t>22/42</a:t>
             </a:r>
           </a:p>
         </p:txBody>
@@ -13947,7 +13949,7 @@
               </a:defRPr>
             </a:pPr>
             <a:r>
-              <a:t>23/40</a:t>
+              <a:t>23/42</a:t>
             </a:r>
           </a:p>
         </p:txBody>
@@ -14276,7 +14278,7 @@
               </a:defRPr>
             </a:pPr>
             <a:r>
-              <a:t>24/40</a:t>
+              <a:t>24/42</a:t>
             </a:r>
           </a:p>
         </p:txBody>
@@ -15156,7 +15158,7 @@
               </a:defRPr>
             </a:pPr>
             <a:r>
-              <a:t>25/40</a:t>
+              <a:t>25/42</a:t>
             </a:r>
           </a:p>
         </p:txBody>
@@ -15485,7 +15487,7 @@
               </a:defRPr>
             </a:pPr>
             <a:r>
-              <a:t>26/40</a:t>
+              <a:t>26/42</a:t>
             </a:r>
           </a:p>
         </p:txBody>
@@ -16303,7 +16305,7 @@
               </a:defRPr>
             </a:pPr>
             <a:r>
-              <a:t>27/40</a:t>
+              <a:t>27/42</a:t>
             </a:r>
           </a:p>
         </p:txBody>
@@ -16877,7 +16879,7 @@
               </a:defRPr>
             </a:pPr>
             <a:r>
-              <a:t>28/40</a:t>
+              <a:t>28/42</a:t>
             </a:r>
           </a:p>
         </p:txBody>
@@ -17693,7 +17695,7 @@
               </a:defRPr>
             </a:pPr>
             <a:r>
-              <a:t>29/40</a:t>
+              <a:t>29/42</a:t>
             </a:r>
           </a:p>
         </p:txBody>
@@ -18122,7 +18124,7 @@
               </a:defRPr>
             </a:pPr>
             <a:r>
-              <a:t>3/40</a:t>
+              <a:t>3/42</a:t>
             </a:r>
           </a:p>
         </p:txBody>
@@ -19195,7 +19197,7 @@
               </a:defRPr>
             </a:pPr>
             <a:r>
-              <a:t>30/40</a:t>
+              <a:t>30/42</a:t>
             </a:r>
           </a:p>
         </p:txBody>
@@ -20488,7 +20490,7 @@
               </a:defRPr>
             </a:pPr>
             <a:r>
-              <a:t>31/40</a:t>
+              <a:t>31/42</a:t>
             </a:r>
           </a:p>
         </p:txBody>
@@ -20817,7 +20819,7 @@
               </a:defRPr>
             </a:pPr>
             <a:r>
-              <a:t>32/40</a:t>
+              <a:t>32/42</a:t>
             </a:r>
           </a:p>
         </p:txBody>
@@ -21198,7 +21200,7 @@
               </a:defRPr>
             </a:pPr>
             <a:r>
-              <a:t>33/40</a:t>
+              <a:t>33/42</a:t>
             </a:r>
           </a:p>
         </p:txBody>
@@ -21756,7 +21758,7 @@
               </a:defRPr>
             </a:pPr>
             <a:r>
-              <a:t>34/40</a:t>
+              <a:t>34/42</a:t>
             </a:r>
           </a:p>
         </p:txBody>
@@ -22085,7 +22087,7 @@
               </a:defRPr>
             </a:pPr>
             <a:r>
-              <a:t>35/40</a:t>
+              <a:t>35/42</a:t>
             </a:r>
           </a:p>
         </p:txBody>
@@ -23129,7 +23131,7 @@
               </a:defRPr>
             </a:pPr>
             <a:r>
-              <a:t>36/40</a:t>
+              <a:t>36/42</a:t>
             </a:r>
           </a:p>
         </p:txBody>
@@ -23224,7 +23226,7 @@
               </a:defRPr>
             </a:pPr>
             <a:r>
-              <a:t>技术路线图：从能跑到好用</a:t>
+              <a:t>Windows Edge 真 GPU 渲染：批量实验打通</a:t>
             </a:r>
           </a:p>
         </p:txBody>
@@ -23317,20 +23319,20 @@
       </p:sp>
       <p:sp>
         <p:nvSpPr>
-          <p:cNvPr id="6" name="Rectangle 5"/>
+          <p:cNvPr id="6" name="Rounded Rectangle 5"/>
           <p:cNvSpPr/>
           <p:nvPr/>
         </p:nvSpPr>
         <p:spPr>
           <a:xfrm>
-            <a:off x="777240" y="3200400"/>
-            <a:ext cx="10972800" cy="73152"/>
-          </a:xfrm>
-          <a:prstGeom prst="rect">
-            <a:avLst/>
-          </a:prstGeom>
-          <a:solidFill>
-            <a:srgbClr val="6C757D"/>
+            <a:off x="621792" y="1353312"/>
+            <a:ext cx="5486400" cy="2103120"/>
+          </a:xfrm>
+          <a:prstGeom prst="roundRect">
+            <a:avLst/>
+          </a:prstGeom>
+          <a:solidFill>
+            <a:srgbClr val="D0D5DA"/>
           </a:solidFill>
           <a:ln/>
         </p:spPr>
@@ -23358,22 +23360,26 @@
       </p:sp>
       <p:sp>
         <p:nvSpPr>
-          <p:cNvPr id="7" name="Oval 6"/>
+          <p:cNvPr id="7" name="Rounded Rectangle 6"/>
           <p:cNvSpPr/>
           <p:nvPr/>
         </p:nvSpPr>
         <p:spPr>
           <a:xfrm>
-            <a:off x="822960" y="3063240"/>
-            <a:ext cx="320040" cy="320040"/>
-          </a:xfrm>
-          <a:prstGeom prst="ellipse">
-            <a:avLst/>
-          </a:prstGeom>
-          <a:solidFill>
-            <a:srgbClr val="28A745"/>
-          </a:solidFill>
-          <a:ln/>
+            <a:off x="594360" y="1325880"/>
+            <a:ext cx="5486400" cy="2103120"/>
+          </a:xfrm>
+          <a:prstGeom prst="roundRect">
+            <a:avLst/>
+          </a:prstGeom>
+          <a:solidFill>
+            <a:srgbClr val="FFFFFF"/>
+          </a:solidFill>
+          <a:ln w="12700">
+            <a:solidFill>
+              <a:srgbClr val="DDE2E6"/>
+            </a:solidFill>
+          </a:ln>
         </p:spPr>
         <p:style>
           <a:lnRef idx="1">
@@ -23399,96 +23405,20 @@
       </p:sp>
       <p:sp>
         <p:nvSpPr>
-          <p:cNvPr id="8" name="TextBox 7"/>
-          <p:cNvSpPr txBox="1"/>
-          <p:nvPr/>
-        </p:nvSpPr>
-        <p:spPr>
-          <a:xfrm>
-            <a:off x="320040" y="2103120"/>
-            <a:ext cx="1645920" cy="457200"/>
-          </a:xfrm>
-          <a:prstGeom prst="rect">
-            <a:avLst/>
-          </a:prstGeom>
-          <a:noFill/>
-        </p:spPr>
-        <p:txBody>
-          <a:bodyPr wrap="none">
-            <a:spAutoFit/>
-          </a:bodyPr>
-          <a:lstStyle/>
-          <a:p>
-            <a:pPr algn="ctr">
-              <a:defRPr sz="1300" b="1">
-                <a:solidFill>
-                  <a:srgbClr val="28A745"/>
-                </a:solidFill>
-                <a:latin typeface="Microsoft YaHei"/>
-              </a:defRPr>
-            </a:pPr>
-            <a:r>
-              <a:t>已完成</a:t>
-            </a:r>
-          </a:p>
-        </p:txBody>
-      </p:sp>
-      <p:sp>
-        <p:nvSpPr>
-          <p:cNvPr id="9" name="TextBox 8"/>
-          <p:cNvSpPr txBox="1"/>
-          <p:nvPr/>
-        </p:nvSpPr>
-        <p:spPr>
-          <a:xfrm>
-            <a:off x="91439" y="3474720"/>
-            <a:ext cx="2194560" cy="1188720"/>
-          </a:xfrm>
-          <a:prstGeom prst="rect">
-            <a:avLst/>
-          </a:prstGeom>
-          <a:noFill/>
-        </p:spPr>
-        <p:txBody>
-          <a:bodyPr wrap="none">
-            <a:spAutoFit/>
-          </a:bodyPr>
-          <a:lstStyle/>
-          <a:p>
-            <a:pPr algn="ctr">
-              <a:defRPr sz="1200" b="0">
-                <a:solidFill>
-                  <a:srgbClr val="1E2933"/>
-                </a:solidFill>
-                <a:latin typeface="Microsoft YaHei"/>
-              </a:defRPr>
-            </a:pPr>
-            <a:r>
-              <a:t>规则引擎 + 自动校准</a:t>
-            </a:r>
-            <a:br/>
-            <a:r>
-              <a:t>22 游戏可驱动</a:t>
-            </a:r>
-          </a:p>
-        </p:txBody>
-      </p:sp>
-      <p:sp>
-        <p:nvSpPr>
-          <p:cNvPr id="10" name="Oval 9"/>
+          <p:cNvPr id="8" name="Rectangle 7"/>
           <p:cNvSpPr/>
           <p:nvPr/>
         </p:nvSpPr>
         <p:spPr>
           <a:xfrm>
-            <a:off x="3108960" y="3063240"/>
-            <a:ext cx="320040" cy="320040"/>
-          </a:xfrm>
-          <a:prstGeom prst="ellipse">
-            <a:avLst/>
-          </a:prstGeom>
-          <a:solidFill>
-            <a:srgbClr val="28A745"/>
+            <a:off x="594360" y="1325880"/>
+            <a:ext cx="5486400" cy="411480"/>
+          </a:xfrm>
+          <a:prstGeom prst="rect">
+            <a:avLst/>
+          </a:prstGeom>
+          <a:solidFill>
+            <a:srgbClr val="FF6B35"/>
           </a:solidFill>
           <a:ln/>
         </p:spPr>
@@ -23516,14 +23446,14 @@
       </p:sp>
       <p:sp>
         <p:nvSpPr>
-          <p:cNvPr id="11" name="TextBox 10"/>
+          <p:cNvPr id="9" name="TextBox 8"/>
           <p:cNvSpPr txBox="1"/>
           <p:nvPr/>
         </p:nvSpPr>
         <p:spPr>
           <a:xfrm>
-            <a:off x="2606039" y="2103120"/>
-            <a:ext cx="1645920" cy="457200"/>
+            <a:off x="667512" y="1399032"/>
+            <a:ext cx="5340096" cy="320040"/>
           </a:xfrm>
           <a:prstGeom prst="rect">
             <a:avLst/>
@@ -23536,30 +23466,30 @@
           </a:bodyPr>
           <a:lstStyle/>
           <a:p>
-            <a:pPr algn="ctr">
-              <a:defRPr sz="1300" b="1">
-                <a:solidFill>
-                  <a:srgbClr val="28A745"/>
-                </a:solidFill>
-                <a:latin typeface="Microsoft YaHei"/>
-              </a:defRPr>
-            </a:pPr>
-            <a:r>
-              <a:t>已完成</a:t>
-            </a:r>
-          </a:p>
-        </p:txBody>
-      </p:sp>
-      <p:sp>
-        <p:nvSpPr>
-          <p:cNvPr id="12" name="TextBox 11"/>
+            <a:pPr algn="l">
+              <a:defRPr sz="1400" b="1">
+                <a:solidFill>
+                  <a:srgbClr val="F3F6F9"/>
+                </a:solidFill>
+                <a:latin typeface="Microsoft YaHei"/>
+              </a:defRPr>
+            </a:pPr>
+            <a:r>
+              <a:t>为什么必须换渲染环境</a:t>
+            </a:r>
+          </a:p>
+        </p:txBody>
+      </p:sp>
+      <p:sp>
+        <p:nvSpPr>
+          <p:cNvPr id="10" name="TextBox 9"/>
           <p:cNvSpPr txBox="1"/>
           <p:nvPr/>
         </p:nvSpPr>
         <p:spPr>
           <a:xfrm>
-            <a:off x="2377439" y="3474720"/>
-            <a:ext cx="2194560" cy="1188720"/>
+            <a:off x="704088" y="1828800"/>
+            <a:ext cx="5266944" cy="1508760"/>
           </a:xfrm>
           <a:prstGeom prst="rect">
             <a:avLst/>
@@ -23567,12 +23497,15 @@
           <a:noFill/>
         </p:spPr>
         <p:txBody>
-          <a:bodyPr wrap="none">
+          <a:bodyPr wrap="square">
             <a:spAutoFit/>
           </a:bodyPr>
           <a:lstStyle/>
           <a:p>
-            <a:pPr algn="ctr">
+            <a:pPr algn="l">
+              <a:spcAft>
+                <a:spcPts val="500"/>
+              </a:spcAft>
               <a:defRPr sz="1200" b="0">
                 <a:solidFill>
                   <a:srgbClr val="1E2933"/>
@@ -23581,31 +23514,75 @@
               </a:defRPr>
             </a:pPr>
             <a:r>
-              <a:t>multi-bus-memory</a:t>
-            </a:r>
-            <a:br/>
-            <a:r>
-              <a:t>记忆读回 0.300</a:t>
-            </a:r>
-          </a:p>
-        </p:txBody>
-      </p:sp>
-      <p:sp>
-        <p:nvSpPr>
-          <p:cNvPr id="13" name="Oval 12"/>
+              <a:t>Cocos 3.8.5 游戏（kingshot/whiteout）要求完整 WebGL2</a:t>
+            </a:r>
+          </a:p>
+          <a:p>
+            <a:pPr algn="l">
+              <a:spcAft>
+                <a:spcPts val="500"/>
+              </a:spcAft>
+              <a:defRPr sz="1200" b="0">
+                <a:solidFill>
+                  <a:srgbClr val="1E2933"/>
+                </a:solidFill>
+                <a:latin typeface="Microsoft YaHei"/>
+              </a:defRPr>
+            </a:pPr>
+            <a:r>
+              <a:t>WSL 软渲染 / D3D12 / Vulkan 直通均缺扩展 → Error 16405 白屏</a:t>
+            </a:r>
+          </a:p>
+          <a:p>
+            <a:pPr algn="l">
+              <a:spcAft>
+                <a:spcPts val="500"/>
+              </a:spcAft>
+              <a:defRPr sz="1200" b="0">
+                <a:solidFill>
+                  <a:srgbClr val="1E2933"/>
+                </a:solidFill>
+                <a:latin typeface="Microsoft YaHei"/>
+              </a:defRPr>
+            </a:pPr>
+            <a:r>
+              <a:t>Windows Edge headless + D3D11 真 GPU：WebGL2 完整</a:t>
+            </a:r>
+          </a:p>
+          <a:p>
+            <a:pPr algn="l">
+              <a:spcAft>
+                <a:spcPts val="500"/>
+              </a:spcAft>
+              <a:defRPr sz="1200" b="0">
+                <a:solidFill>
+                  <a:srgbClr val="1E2933"/>
+                </a:solidFill>
+                <a:latin typeface="Microsoft YaHei"/>
+              </a:defRPr>
+            </a:pPr>
+            <a:r>
+              <a:t>WSL 连接 Edge CDP（--remote-debugging-port=9222 --mute-audio）</a:t>
+            </a:r>
+          </a:p>
+        </p:txBody>
+      </p:sp>
+      <p:sp>
+        <p:nvSpPr>
+          <p:cNvPr id="11" name="Rounded Rectangle 10"/>
           <p:cNvSpPr/>
           <p:nvPr/>
         </p:nvSpPr>
         <p:spPr>
           <a:xfrm>
-            <a:off x="5394960" y="3063240"/>
-            <a:ext cx="320040" cy="320040"/>
-          </a:xfrm>
-          <a:prstGeom prst="ellipse">
-            <a:avLst/>
-          </a:prstGeom>
-          <a:solidFill>
-            <a:srgbClr val="28A745"/>
+            <a:off x="6382512" y="1353312"/>
+            <a:ext cx="5486400" cy="2103120"/>
+          </a:xfrm>
+          <a:prstGeom prst="roundRect">
+            <a:avLst/>
+          </a:prstGeom>
+          <a:solidFill>
+            <a:srgbClr val="D0D5DA"/>
           </a:solidFill>
           <a:ln/>
         </p:spPr>
@@ -23633,98 +23610,26 @@
       </p:sp>
       <p:sp>
         <p:nvSpPr>
-          <p:cNvPr id="14" name="TextBox 13"/>
-          <p:cNvSpPr txBox="1"/>
-          <p:nvPr/>
-        </p:nvSpPr>
-        <p:spPr>
-          <a:xfrm>
-            <a:off x="4892040" y="2103120"/>
-            <a:ext cx="1645920" cy="457200"/>
-          </a:xfrm>
-          <a:prstGeom prst="rect">
-            <a:avLst/>
-          </a:prstGeom>
-          <a:noFill/>
-        </p:spPr>
-        <p:txBody>
-          <a:bodyPr wrap="none">
-            <a:spAutoFit/>
-          </a:bodyPr>
-          <a:lstStyle/>
-          <a:p>
-            <a:pPr algn="ctr">
-              <a:defRPr sz="1300" b="1">
-                <a:solidFill>
-                  <a:srgbClr val="28A745"/>
-                </a:solidFill>
-                <a:latin typeface="Microsoft YaHei"/>
-              </a:defRPr>
-            </a:pPr>
-            <a:r>
-              <a:t>已完成</a:t>
-            </a:r>
-          </a:p>
-        </p:txBody>
-      </p:sp>
-      <p:sp>
-        <p:nvSpPr>
-          <p:cNvPr id="15" name="TextBox 14"/>
-          <p:cNvSpPr txBox="1"/>
-          <p:nvPr/>
-        </p:nvSpPr>
-        <p:spPr>
-          <a:xfrm>
-            <a:off x="4663440" y="3474720"/>
-            <a:ext cx="2194560" cy="1188720"/>
-          </a:xfrm>
-          <a:prstGeom prst="rect">
-            <a:avLst/>
-          </a:prstGeom>
-          <a:noFill/>
-        </p:spPr>
-        <p:txBody>
-          <a:bodyPr wrap="none">
-            <a:spAutoFit/>
-          </a:bodyPr>
-          <a:lstStyle/>
-          <a:p>
-            <a:pPr algn="ctr">
-              <a:defRPr sz="1200" b="0">
-                <a:solidFill>
-                  <a:srgbClr val="1E2933"/>
-                </a:solidFill>
-                <a:latin typeface="Microsoft YaHei"/>
-              </a:defRPr>
-            </a:pPr>
-            <a:r>
-              <a:t>L2 code-file 更新</a:t>
-            </a:r>
-            <a:br/>
-            <a:r>
-              <a:t>qwen/kimi/xiaomi/opencodego 验证</a:t>
-            </a:r>
-          </a:p>
-        </p:txBody>
-      </p:sp>
-      <p:sp>
-        <p:nvSpPr>
-          <p:cNvPr id="16" name="Oval 15"/>
+          <p:cNvPr id="12" name="Rounded Rectangle 11"/>
           <p:cNvSpPr/>
           <p:nvPr/>
         </p:nvSpPr>
         <p:spPr>
           <a:xfrm>
-            <a:off x="7680960" y="3063240"/>
-            <a:ext cx="320040" cy="320040"/>
-          </a:xfrm>
-          <a:prstGeom prst="ellipse">
-            <a:avLst/>
-          </a:prstGeom>
-          <a:solidFill>
-            <a:srgbClr val="FF6B35"/>
-          </a:solidFill>
-          <a:ln/>
+            <a:off x="6355080" y="1325880"/>
+            <a:ext cx="5486400" cy="2103120"/>
+          </a:xfrm>
+          <a:prstGeom prst="roundRect">
+            <a:avLst/>
+          </a:prstGeom>
+          <a:solidFill>
+            <a:srgbClr val="FFFFFF"/>
+          </a:solidFill>
+          <a:ln w="12700">
+            <a:solidFill>
+              <a:srgbClr val="DDE2E6"/>
+            </a:solidFill>
+          </a:ln>
         </p:spPr>
         <p:style>
           <a:lnRef idx="1">
@@ -23750,96 +23655,20 @@
       </p:sp>
       <p:sp>
         <p:nvSpPr>
-          <p:cNvPr id="17" name="TextBox 16"/>
-          <p:cNvSpPr txBox="1"/>
-          <p:nvPr/>
-        </p:nvSpPr>
-        <p:spPr>
-          <a:xfrm>
-            <a:off x="7178040" y="2103120"/>
-            <a:ext cx="1645920" cy="457200"/>
-          </a:xfrm>
-          <a:prstGeom prst="rect">
-            <a:avLst/>
-          </a:prstGeom>
-          <a:noFill/>
-        </p:spPr>
-        <p:txBody>
-          <a:bodyPr wrap="none">
-            <a:spAutoFit/>
-          </a:bodyPr>
-          <a:lstStyle/>
-          <a:p>
-            <a:pPr algn="ctr">
-              <a:defRPr sz="1300" b="1">
-                <a:solidFill>
-                  <a:srgbClr val="FF6B35"/>
-                </a:solidFill>
-                <a:latin typeface="Microsoft YaHei"/>
-              </a:defRPr>
-            </a:pPr>
-            <a:r>
-              <a:t>进行中</a:t>
-            </a:r>
-          </a:p>
-        </p:txBody>
-      </p:sp>
-      <p:sp>
-        <p:nvSpPr>
-          <p:cNvPr id="18" name="TextBox 17"/>
-          <p:cNvSpPr txBox="1"/>
-          <p:nvPr/>
-        </p:nvSpPr>
-        <p:spPr>
-          <a:xfrm>
-            <a:off x="6949440" y="3474720"/>
-            <a:ext cx="2194560" cy="1188720"/>
-          </a:xfrm>
-          <a:prstGeom prst="rect">
-            <a:avLst/>
-          </a:prstGeom>
-          <a:noFill/>
-        </p:spPr>
-        <p:txBody>
-          <a:bodyPr wrap="none">
-            <a:spAutoFit/>
-          </a:bodyPr>
-          <a:lstStyle/>
-          <a:p>
-            <a:pPr algn="ctr">
-              <a:defRPr sz="1200" b="0">
-                <a:solidFill>
-                  <a:srgbClr val="1E2933"/>
-                </a:solidFill>
-                <a:latin typeface="Microsoft YaHei"/>
-              </a:defRPr>
-            </a:pPr>
-            <a:r>
-              <a:t>本地 VLM 上下文</a:t>
-            </a:r>
-            <a:br/>
-            <a:r>
-              <a:t>QLoRA 微调准备</a:t>
-            </a:r>
-          </a:p>
-        </p:txBody>
-      </p:sp>
-      <p:sp>
-        <p:nvSpPr>
-          <p:cNvPr id="19" name="Oval 18"/>
+          <p:cNvPr id="13" name="Rectangle 12"/>
           <p:cNvSpPr/>
           <p:nvPr/>
         </p:nvSpPr>
         <p:spPr>
           <a:xfrm>
-            <a:off x="9966960" y="3063240"/>
-            <a:ext cx="320040" cy="320040"/>
-          </a:xfrm>
-          <a:prstGeom prst="ellipse">
-            <a:avLst/>
-          </a:prstGeom>
-          <a:solidFill>
-            <a:srgbClr val="0096C7"/>
+            <a:off x="6355080" y="1325880"/>
+            <a:ext cx="5486400" cy="411480"/>
+          </a:xfrm>
+          <a:prstGeom prst="rect">
+            <a:avLst/>
+          </a:prstGeom>
+          <a:solidFill>
+            <a:srgbClr val="28A745"/>
           </a:solidFill>
           <a:ln/>
         </p:spPr>
@@ -23867,14 +23696,14 @@
       </p:sp>
       <p:sp>
         <p:nvSpPr>
-          <p:cNvPr id="20" name="TextBox 19"/>
+          <p:cNvPr id="14" name="TextBox 13"/>
           <p:cNvSpPr txBox="1"/>
           <p:nvPr/>
         </p:nvSpPr>
         <p:spPr>
           <a:xfrm>
-            <a:off x="9464040" y="2103120"/>
-            <a:ext cx="1645920" cy="457200"/>
+            <a:off x="6428232" y="1399032"/>
+            <a:ext cx="5340096" cy="320040"/>
           </a:xfrm>
           <a:prstGeom prst="rect">
             <a:avLst/>
@@ -23887,30 +23716,30 @@
           </a:bodyPr>
           <a:lstStyle/>
           <a:p>
-            <a:pPr algn="ctr">
-              <a:defRPr sz="1300" b="1">
-                <a:solidFill>
-                  <a:srgbClr val="0096C7"/>
-                </a:solidFill>
-                <a:latin typeface="Microsoft YaHei"/>
-              </a:defRPr>
-            </a:pPr>
-            <a:r>
-              <a:t>下一步</a:t>
-            </a:r>
-          </a:p>
-        </p:txBody>
-      </p:sp>
-      <p:sp>
-        <p:nvSpPr>
-          <p:cNvPr id="21" name="TextBox 20"/>
+            <a:pPr algn="l">
+              <a:defRPr sz="1400" b="1">
+                <a:solidFill>
+                  <a:srgbClr val="F3F6F9"/>
+                </a:solidFill>
+                <a:latin typeface="Microsoft YaHei"/>
+              </a:defRPr>
+            </a:pPr>
+            <a:r>
+              <a:t>工程改动</a:t>
+            </a:r>
+          </a:p>
+        </p:txBody>
+      </p:sp>
+      <p:sp>
+        <p:nvSpPr>
+          <p:cNvPr id="15" name="TextBox 14"/>
           <p:cNvSpPr txBox="1"/>
           <p:nvPr/>
         </p:nvSpPr>
         <p:spPr>
           <a:xfrm>
-            <a:off x="9235440" y="3474720"/>
-            <a:ext cx="2194560" cy="1188720"/>
+            <a:off x="6464808" y="1828800"/>
+            <a:ext cx="5266944" cy="1508760"/>
           </a:xfrm>
           <a:prstGeom prst="rect">
             <a:avLst/>
@@ -23918,12 +23747,15 @@
           <a:noFill/>
         </p:spPr>
         <p:txBody>
-          <a:bodyPr wrap="none">
+          <a:bodyPr wrap="square">
             <a:spAutoFit/>
           </a:bodyPr>
           <a:lstStyle/>
           <a:p>
-            <a:pPr algn="ctr">
+            <a:pPr algn="l">
+              <a:spcAft>
+                <a:spcPts val="500"/>
+              </a:spcAft>
               <a:defRPr sz="1200" b="0">
                 <a:solidFill>
                   <a:srgbClr val="1E2933"/>
@@ -23932,25 +23764,3233 @@
               </a:defRPr>
             </a:pPr>
             <a:r>
-              <a:t>真实游戏在线触发</a:t>
-            </a:r>
-            <a:br/>
-            <a:r>
-              <a:t>规则更新 + A/B 回归</a:t>
-            </a:r>
-          </a:p>
-        </p:txBody>
-      </p:sp>
-      <p:sp>
-        <p:nvSpPr>
-          <p:cNvPr id="22" name="Rounded Rectangle 21"/>
+              <a:t>harness 支持 PLAYABLE_BROWSER_CDP 连接外部浏览器</a:t>
+            </a:r>
+          </a:p>
+          <a:p>
+            <a:pPr algn="l">
+              <a:spcAft>
+                <a:spcPts val="500"/>
+              </a:spcAft>
+              <a:defRPr sz="1200" b="0">
+                <a:solidFill>
+                  <a:srgbClr val="1E2933"/>
+                </a:solidFill>
+                <a:latin typeface="Microsoft YaHei"/>
+              </a:defRPr>
+            </a:pPr>
+            <a:r>
+              <a:t>startup_timeout_ms 提到 45s（Unity/Cocos 加载 10-15s 出 canvas）</a:t>
+            </a:r>
+          </a:p>
+          <a:p>
+            <a:pPr algn="l">
+              <a:spcAft>
+                <a:spcPts val="500"/>
+              </a:spcAft>
+              <a:defRPr sz="1200" b="0">
+                <a:solidFill>
+                  <a:srgbClr val="1E2933"/>
+                </a:solidFill>
+                <a:latin typeface="Microsoft YaHei"/>
+              </a:defRPr>
+            </a:pPr>
+            <a:r>
+              <a:t>声音关闭：Edge --mute-audio + harness mute() 双保险</a:t>
+            </a:r>
+          </a:p>
+          <a:p>
+            <a:pPr algn="l">
+              <a:spcAft>
+                <a:spcPts val="500"/>
+              </a:spcAft>
+              <a:defRPr sz="1200" b="0">
+                <a:solidFill>
+                  <a:srgbClr val="1E2933"/>
+                </a:solidFill>
+                <a:latin typeface="Microsoft YaHei"/>
+              </a:defRPr>
+            </a:pPr>
+            <a:r>
+              <a:t>WSL adapter(9100) ↔ Windows harness 双向可达</a:t>
+            </a:r>
+          </a:p>
+        </p:txBody>
+      </p:sp>
+      <p:graphicFrame>
+        <p:nvGraphicFramePr>
+          <p:cNvPr id="16" name="Table 15"/>
+          <p:cNvGraphicFramePr>
+            <a:graphicFrameLocks noGrp="1"/>
+          </p:cNvGraphicFramePr>
+          <p:nvPr/>
+        </p:nvGraphicFramePr>
+        <p:xfrm>
+          <a:off x="594360" y="3611880"/>
+          <a:ext cx="11247120" cy="2377440"/>
+        </p:xfrm>
+        <a:graphic>
+          <a:graphicData uri="http://schemas.openxmlformats.org/drawingml/2006/table">
+            <a:tbl>
+              <a:tblPr firstRow="1" bandRow="1">
+                <a:tableStyleId>{5C22544A-7EE6-4342-B048-85BDC9FD1C3A}</a:tableStyleId>
+              </a:tblPr>
+              <a:tblGrid>
+                <a:gridCol w="1606731"/>
+                <a:gridCol w="1606731"/>
+                <a:gridCol w="1606731"/>
+                <a:gridCol w="1606731"/>
+                <a:gridCol w="1606731"/>
+                <a:gridCol w="1606731"/>
+                <a:gridCol w="1606734"/>
+              </a:tblGrid>
+              <a:tr h="103366">
+                <a:tc>
+                  <a:txBody>
+                    <a:bodyPr/>
+                    <a:lstStyle/>
+                    <a:p>
+                      <a:pPr algn="ctr">
+                        <a:defRPr sz="1200" b="1">
+                          <a:solidFill>
+                            <a:srgbClr val="F3F6F9"/>
+                          </a:solidFill>
+                        </a:defRPr>
+                      </a:pPr>
+                      <a:r>
+                        <a:t>游戏</a:t>
+                      </a:r>
+                    </a:p>
+                  </a:txBody>
+                  <a:tcPr>
+                    <a:solidFill>
+                      <a:srgbClr val="1A237E"/>
+                    </a:solidFill>
+                  </a:tcPr>
+                </a:tc>
+                <a:tc>
+                  <a:txBody>
+                    <a:bodyPr/>
+                    <a:lstStyle/>
+                    <a:p>
+                      <a:pPr algn="ctr">
+                        <a:defRPr sz="1200" b="1">
+                          <a:solidFill>
+                            <a:srgbClr val="F3F6F9"/>
+                          </a:solidFill>
+                        </a:defRPr>
+                      </a:pPr>
+                      <a:r>
+                        <a:t>引擎</a:t>
+                      </a:r>
+                    </a:p>
+                  </a:txBody>
+                  <a:tcPr>
+                    <a:solidFill>
+                      <a:srgbClr val="1A237E"/>
+                    </a:solidFill>
+                  </a:tcPr>
+                </a:tc>
+                <a:tc>
+                  <a:txBody>
+                    <a:bodyPr/>
+                    <a:lstStyle/>
+                    <a:p>
+                      <a:pPr algn="ctr">
+                        <a:defRPr sz="1200" b="1">
+                          <a:solidFill>
+                            <a:srgbClr val="F3F6F9"/>
+                          </a:solidFill>
+                        </a:defRPr>
+                      </a:pPr>
+                      <a:r>
+                        <a:t>terminal</a:t>
+                      </a:r>
+                    </a:p>
+                  </a:txBody>
+                  <a:tcPr>
+                    <a:solidFill>
+                      <a:srgbClr val="1A237E"/>
+                    </a:solidFill>
+                  </a:tcPr>
+                </a:tc>
+                <a:tc>
+                  <a:txBody>
+                    <a:bodyPr/>
+                    <a:lstStyle/>
+                    <a:p>
+                      <a:pPr algn="ctr">
+                        <a:defRPr sz="1200" b="1">
+                          <a:solidFill>
+                            <a:srgbClr val="F3F6F9"/>
+                          </a:solidFill>
+                        </a:defRPr>
+                      </a:pPr>
+                      <a:r>
+                        <a:t>steps</a:t>
+                      </a:r>
+                    </a:p>
+                  </a:txBody>
+                  <a:tcPr>
+                    <a:solidFill>
+                      <a:srgbClr val="1A237E"/>
+                    </a:solidFill>
+                  </a:tcPr>
+                </a:tc>
+                <a:tc>
+                  <a:txBody>
+                    <a:bodyPr/>
+                    <a:lstStyle/>
+                    <a:p>
+                      <a:pPr algn="ctr">
+                        <a:defRPr sz="1200" b="1">
+                          <a:solidFill>
+                            <a:srgbClr val="F3F6F9"/>
+                          </a:solidFill>
+                        </a:defRPr>
+                      </a:pPr>
+                      <a:r>
+                        <a:t>gameplay</a:t>
+                      </a:r>
+                    </a:p>
+                  </a:txBody>
+                  <a:tcPr>
+                    <a:solidFill>
+                      <a:srgbClr val="1A237E"/>
+                    </a:solidFill>
+                  </a:tcPr>
+                </a:tc>
+                <a:tc>
+                  <a:txBody>
+                    <a:bodyPr/>
+                    <a:lstStyle/>
+                    <a:p>
+                      <a:pPr algn="ctr">
+                        <a:defRPr sz="1200" b="1">
+                          <a:solidFill>
+                            <a:srgbClr val="F3F6F9"/>
+                          </a:solidFill>
+                        </a:defRPr>
+                      </a:pPr>
+                      <a:r>
+                        <a:t>plans</a:t>
+                      </a:r>
+                    </a:p>
+                  </a:txBody>
+                  <a:tcPr>
+                    <a:solidFill>
+                      <a:srgbClr val="1A237E"/>
+                    </a:solidFill>
+                  </a:tcPr>
+                </a:tc>
+                <a:tc>
+                  <a:txBody>
+                    <a:bodyPr/>
+                    <a:lstStyle/>
+                    <a:p>
+                      <a:pPr algn="ctr">
+                        <a:defRPr sz="1200" b="1">
+                          <a:solidFill>
+                            <a:srgbClr val="F3F6F9"/>
+                          </a:solidFill>
+                        </a:defRPr>
+                      </a:pPr>
+                      <a:r>
+                        <a:t>actions</a:t>
+                      </a:r>
+                    </a:p>
+                  </a:txBody>
+                  <a:tcPr>
+                    <a:solidFill>
+                      <a:srgbClr val="1A237E"/>
+                    </a:solidFill>
+                  </a:tcPr>
+                </a:tc>
+              </a:tr>
+              <a:tr h="103366">
+                <a:tc>
+                  <a:txBody>
+                    <a:bodyPr/>
+                    <a:lstStyle/>
+                    <a:p>
+                      <a:pPr algn="ctr">
+                        <a:defRPr sz="1100">
+                          <a:solidFill>
+                            <a:srgbClr val="1E2933"/>
+                          </a:solidFill>
+                        </a:defRPr>
+                      </a:pPr>
+                      <a:r>
+                        <a:t>tiles-survive-5ec610abcdff</a:t>
+                      </a:r>
+                    </a:p>
+                  </a:txBody>
+                  <a:tcPr/>
+                </a:tc>
+                <a:tc>
+                  <a:txBody>
+                    <a:bodyPr/>
+                    <a:lstStyle/>
+                    <a:p>
+                      <a:pPr algn="ctr">
+                        <a:defRPr sz="1100">
+                          <a:solidFill>
+                            <a:srgbClr val="1E2933"/>
+                          </a:solidFill>
+                        </a:defRPr>
+                      </a:pPr>
+                      <a:r>
+                        <a:t>Unity</a:t>
+                      </a:r>
+                    </a:p>
+                  </a:txBody>
+                  <a:tcPr/>
+                </a:tc>
+                <a:tc>
+                  <a:txBody>
+                    <a:bodyPr/>
+                    <a:lstStyle/>
+                    <a:p>
+                      <a:pPr algn="ctr">
+                        <a:defRPr sz="1100">
+                          <a:solidFill>
+                            <a:srgbClr val="1E2933"/>
+                          </a:solidFill>
+                        </a:defRPr>
+                      </a:pPr>
+                      <a:r>
+                        <a:t>OPERATOR_INTERRUPTED</a:t>
+                      </a:r>
+                    </a:p>
+                  </a:txBody>
+                  <a:tcPr/>
+                </a:tc>
+                <a:tc>
+                  <a:txBody>
+                    <a:bodyPr/>
+                    <a:lstStyle/>
+                    <a:p>
+                      <a:pPr algn="ctr">
+                        <a:defRPr sz="1100">
+                          <a:solidFill>
+                            <a:srgbClr val="1E2933"/>
+                          </a:solidFill>
+                        </a:defRPr>
+                      </a:pPr>
+                      <a:r>
+                        <a:t>20</a:t>
+                      </a:r>
+                    </a:p>
+                  </a:txBody>
+                  <a:tcPr/>
+                </a:tc>
+                <a:tc>
+                  <a:txBody>
+                    <a:bodyPr/>
+                    <a:lstStyle/>
+                    <a:p>
+                      <a:pPr algn="ctr">
+                        <a:defRPr sz="1100">
+                          <a:solidFill>
+                            <a:srgbClr val="1E2933"/>
+                          </a:solidFill>
+                        </a:defRPr>
+                      </a:pPr>
+                      <a:r>
+                        <a:t>9</a:t>
+                      </a:r>
+                    </a:p>
+                  </a:txBody>
+                  <a:tcPr/>
+                </a:tc>
+                <a:tc>
+                  <a:txBody>
+                    <a:bodyPr/>
+                    <a:lstStyle/>
+                    <a:p>
+                      <a:pPr algn="ctr">
+                        <a:defRPr sz="1100">
+                          <a:solidFill>
+                            <a:srgbClr val="1E2933"/>
+                          </a:solidFill>
+                        </a:defRPr>
+                      </a:pPr>
+                      <a:r>
+                        <a:t>5</a:t>
+                      </a:r>
+                    </a:p>
+                  </a:txBody>
+                  <a:tcPr/>
+                </a:tc>
+                <a:tc>
+                  <a:txBody>
+                    <a:bodyPr/>
+                    <a:lstStyle/>
+                    <a:p>
+                      <a:pPr algn="ctr">
+                        <a:defRPr sz="1100">
+                          <a:solidFill>
+                            <a:srgbClr val="1E2933"/>
+                          </a:solidFill>
+                        </a:defRPr>
+                      </a:pPr>
+                      <a:r>
+                        <a:t>14</a:t>
+                      </a:r>
+                    </a:p>
+                  </a:txBody>
+                  <a:tcPr/>
+                </a:tc>
+              </a:tr>
+              <a:tr h="103366">
+                <a:tc>
+                  <a:txBody>
+                    <a:bodyPr/>
+                    <a:lstStyle/>
+                    <a:p>
+                      <a:pPr algn="ctr">
+                        <a:defRPr sz="1100">
+                          <a:solidFill>
+                            <a:srgbClr val="1E2933"/>
+                          </a:solidFill>
+                        </a:defRPr>
+                      </a:pPr>
+                      <a:r>
+                        <a:t>kingshot-c378f843e877</a:t>
+                      </a:r>
+                    </a:p>
+                  </a:txBody>
+                  <a:tcPr/>
+                </a:tc>
+                <a:tc>
+                  <a:txBody>
+                    <a:bodyPr/>
+                    <a:lstStyle/>
+                    <a:p>
+                      <a:pPr algn="ctr">
+                        <a:defRPr sz="1100">
+                          <a:solidFill>
+                            <a:srgbClr val="1E2933"/>
+                          </a:solidFill>
+                        </a:defRPr>
+                      </a:pPr>
+                      <a:r>
+                        <a:t>Cocos</a:t>
+                      </a:r>
+                    </a:p>
+                  </a:txBody>
+                  <a:tcPr/>
+                </a:tc>
+                <a:tc>
+                  <a:txBody>
+                    <a:bodyPr/>
+                    <a:lstStyle/>
+                    <a:p>
+                      <a:pPr algn="ctr">
+                        <a:defRPr sz="1100">
+                          <a:solidFill>
+                            <a:srgbClr val="1E2933"/>
+                          </a:solidFill>
+                        </a:defRPr>
+                      </a:pPr>
+                      <a:r>
+                        <a:t>OPERATOR_INTERRUPTED</a:t>
+                      </a:r>
+                    </a:p>
+                  </a:txBody>
+                  <a:tcPr/>
+                </a:tc>
+                <a:tc>
+                  <a:txBody>
+                    <a:bodyPr/>
+                    <a:lstStyle/>
+                    <a:p>
+                      <a:pPr algn="ctr">
+                        <a:defRPr sz="1100">
+                          <a:solidFill>
+                            <a:srgbClr val="1E2933"/>
+                          </a:solidFill>
+                        </a:defRPr>
+                      </a:pPr>
+                      <a:r>
+                        <a:t>22</a:t>
+                      </a:r>
+                    </a:p>
+                  </a:txBody>
+                  <a:tcPr/>
+                </a:tc>
+                <a:tc>
+                  <a:txBody>
+                    <a:bodyPr/>
+                    <a:lstStyle/>
+                    <a:p>
+                      <a:pPr algn="ctr">
+                        <a:defRPr sz="1100">
+                          <a:solidFill>
+                            <a:srgbClr val="1E2933"/>
+                          </a:solidFill>
+                        </a:defRPr>
+                      </a:pPr>
+                      <a:r>
+                        <a:t>6</a:t>
+                      </a:r>
+                    </a:p>
+                  </a:txBody>
+                  <a:tcPr/>
+                </a:tc>
+                <a:tc>
+                  <a:txBody>
+                    <a:bodyPr/>
+                    <a:lstStyle/>
+                    <a:p>
+                      <a:pPr algn="ctr">
+                        <a:defRPr sz="1100">
+                          <a:solidFill>
+                            <a:srgbClr val="1E2933"/>
+                          </a:solidFill>
+                        </a:defRPr>
+                      </a:pPr>
+                      <a:r>
+                        <a:t>4</a:t>
+                      </a:r>
+                    </a:p>
+                  </a:txBody>
+                  <a:tcPr/>
+                </a:tc>
+                <a:tc>
+                  <a:txBody>
+                    <a:bodyPr/>
+                    <a:lstStyle/>
+                    <a:p>
+                      <a:pPr algn="ctr">
+                        <a:defRPr sz="1100">
+                          <a:solidFill>
+                            <a:srgbClr val="1E2933"/>
+                          </a:solidFill>
+                        </a:defRPr>
+                      </a:pPr>
+                      <a:r>
+                        <a:t>14</a:t>
+                      </a:r>
+                    </a:p>
+                  </a:txBody>
+                  <a:tcPr/>
+                </a:tc>
+              </a:tr>
+              <a:tr h="103366">
+                <a:tc>
+                  <a:txBody>
+                    <a:bodyPr/>
+                    <a:lstStyle/>
+                    <a:p>
+                      <a:pPr algn="ctr">
+                        <a:defRPr sz="1100">
+                          <a:solidFill>
+                            <a:srgbClr val="1E2933"/>
+                          </a:solidFill>
+                        </a:defRPr>
+                      </a:pPr>
+                      <a:r>
+                        <a:t>kingshot-94766e5d61dc</a:t>
+                      </a:r>
+                    </a:p>
+                  </a:txBody>
+                  <a:tcPr/>
+                </a:tc>
+                <a:tc>
+                  <a:txBody>
+                    <a:bodyPr/>
+                    <a:lstStyle/>
+                    <a:p>
+                      <a:pPr algn="ctr">
+                        <a:defRPr sz="1100">
+                          <a:solidFill>
+                            <a:srgbClr val="1E2933"/>
+                          </a:solidFill>
+                        </a:defRPr>
+                      </a:pPr>
+                      <a:r>
+                        <a:t>Cocos</a:t>
+                      </a:r>
+                    </a:p>
+                  </a:txBody>
+                  <a:tcPr/>
+                </a:tc>
+                <a:tc>
+                  <a:txBody>
+                    <a:bodyPr/>
+                    <a:lstStyle/>
+                    <a:p>
+                      <a:pPr algn="ctr">
+                        <a:defRPr sz="1100">
+                          <a:solidFill>
+                            <a:srgbClr val="1E2933"/>
+                          </a:solidFill>
+                        </a:defRPr>
+                      </a:pPr>
+                      <a:r>
+                        <a:t>BUDGET_EXHAUSTED</a:t>
+                      </a:r>
+                    </a:p>
+                  </a:txBody>
+                  <a:tcPr/>
+                </a:tc>
+                <a:tc>
+                  <a:txBody>
+                    <a:bodyPr/>
+                    <a:lstStyle/>
+                    <a:p>
+                      <a:pPr algn="ctr">
+                        <a:defRPr sz="1100">
+                          <a:solidFill>
+                            <a:srgbClr val="1E2933"/>
+                          </a:solidFill>
+                        </a:defRPr>
+                      </a:pPr>
+                      <a:r>
+                        <a:t>240</a:t>
+                      </a:r>
+                    </a:p>
+                  </a:txBody>
+                  <a:tcPr/>
+                </a:tc>
+                <a:tc>
+                  <a:txBody>
+                    <a:bodyPr/>
+                    <a:lstStyle/>
+                    <a:p>
+                      <a:pPr algn="ctr">
+                        <a:defRPr sz="1100">
+                          <a:solidFill>
+                            <a:srgbClr val="1E2933"/>
+                          </a:solidFill>
+                        </a:defRPr>
+                      </a:pPr>
+                      <a:r>
+                        <a:t>7</a:t>
+                      </a:r>
+                    </a:p>
+                  </a:txBody>
+                  <a:tcPr/>
+                </a:tc>
+                <a:tc>
+                  <a:txBody>
+                    <a:bodyPr/>
+                    <a:lstStyle/>
+                    <a:p>
+                      <a:pPr algn="ctr">
+                        <a:defRPr sz="1100">
+                          <a:solidFill>
+                            <a:srgbClr val="1E2933"/>
+                          </a:solidFill>
+                        </a:defRPr>
+                      </a:pPr>
+                      <a:r>
+                        <a:t>4</a:t>
+                      </a:r>
+                    </a:p>
+                  </a:txBody>
+                  <a:tcPr/>
+                </a:tc>
+                <a:tc>
+                  <a:txBody>
+                    <a:bodyPr/>
+                    <a:lstStyle/>
+                    <a:p>
+                      <a:pPr algn="ctr">
+                        <a:defRPr sz="1100">
+                          <a:solidFill>
+                            <a:srgbClr val="1E2933"/>
+                          </a:solidFill>
+                        </a:defRPr>
+                      </a:pPr>
+                      <a:r>
+                        <a:t>12</a:t>
+                      </a:r>
+                    </a:p>
+                  </a:txBody>
+                  <a:tcPr/>
+                </a:tc>
+              </a:tr>
+              <a:tr h="103366">
+                <a:tc>
+                  <a:txBody>
+                    <a:bodyPr/>
+                    <a:lstStyle/>
+                    <a:p>
+                      <a:pPr algn="ctr">
+                        <a:defRPr sz="1100">
+                          <a:solidFill>
+                            <a:srgbClr val="1E2933"/>
+                          </a:solidFill>
+                        </a:defRPr>
+                      </a:pPr>
+                      <a:r>
+                        <a:t>whiteout-survival-87790941fd83</a:t>
+                      </a:r>
+                    </a:p>
+                  </a:txBody>
+                  <a:tcPr/>
+                </a:tc>
+                <a:tc>
+                  <a:txBody>
+                    <a:bodyPr/>
+                    <a:lstStyle/>
+                    <a:p>
+                      <a:pPr algn="ctr">
+                        <a:defRPr sz="1100">
+                          <a:solidFill>
+                            <a:srgbClr val="1E2933"/>
+                          </a:solidFill>
+                        </a:defRPr>
+                      </a:pPr>
+                      <a:r>
+                        <a:t>Cocos</a:t>
+                      </a:r>
+                    </a:p>
+                  </a:txBody>
+                  <a:tcPr/>
+                </a:tc>
+                <a:tc>
+                  <a:txBody>
+                    <a:bodyPr/>
+                    <a:lstStyle/>
+                    <a:p>
+                      <a:pPr algn="ctr">
+                        <a:defRPr sz="1100">
+                          <a:solidFill>
+                            <a:srgbClr val="1E2933"/>
+                          </a:solidFill>
+                        </a:defRPr>
+                      </a:pPr>
+                      <a:r>
+                        <a:t>OPERATOR_INTERRUPTED</a:t>
+                      </a:r>
+                    </a:p>
+                  </a:txBody>
+                  <a:tcPr/>
+                </a:tc>
+                <a:tc>
+                  <a:txBody>
+                    <a:bodyPr/>
+                    <a:lstStyle/>
+                    <a:p>
+                      <a:pPr algn="ctr">
+                        <a:defRPr sz="1100">
+                          <a:solidFill>
+                            <a:srgbClr val="1E2933"/>
+                          </a:solidFill>
+                        </a:defRPr>
+                      </a:pPr>
+                      <a:r>
+                        <a:t>16</a:t>
+                      </a:r>
+                    </a:p>
+                  </a:txBody>
+                  <a:tcPr/>
+                </a:tc>
+                <a:tc>
+                  <a:txBody>
+                    <a:bodyPr/>
+                    <a:lstStyle/>
+                    <a:p>
+                      <a:pPr algn="ctr">
+                        <a:defRPr sz="1100">
+                          <a:solidFill>
+                            <a:srgbClr val="1E2933"/>
+                          </a:solidFill>
+                        </a:defRPr>
+                      </a:pPr>
+                      <a:r>
+                        <a:t>5</a:t>
+                      </a:r>
+                    </a:p>
+                  </a:txBody>
+                  <a:tcPr/>
+                </a:tc>
+                <a:tc>
+                  <a:txBody>
+                    <a:bodyPr/>
+                    <a:lstStyle/>
+                    <a:p>
+                      <a:pPr algn="ctr">
+                        <a:defRPr sz="1100">
+                          <a:solidFill>
+                            <a:srgbClr val="1E2933"/>
+                          </a:solidFill>
+                        </a:defRPr>
+                      </a:pPr>
+                      <a:r>
+                        <a:t>4</a:t>
+                      </a:r>
+                    </a:p>
+                  </a:txBody>
+                  <a:tcPr/>
+                </a:tc>
+                <a:tc>
+                  <a:txBody>
+                    <a:bodyPr/>
+                    <a:lstStyle/>
+                    <a:p>
+                      <a:pPr algn="ctr">
+                        <a:defRPr sz="1100">
+                          <a:solidFill>
+                            <a:srgbClr val="1E2933"/>
+                          </a:solidFill>
+                        </a:defRPr>
+                      </a:pPr>
+                      <a:r>
+                        <a:t>9</a:t>
+                      </a:r>
+                    </a:p>
+                  </a:txBody>
+                  <a:tcPr/>
+                </a:tc>
+              </a:tr>
+              <a:tr h="103366">
+                <a:tc>
+                  <a:txBody>
+                    <a:bodyPr/>
+                    <a:lstStyle/>
+                    <a:p>
+                      <a:pPr algn="ctr">
+                        <a:defRPr sz="1100">
+                          <a:solidFill>
+                            <a:srgbClr val="1E2933"/>
+                          </a:solidFill>
+                        </a:defRPr>
+                      </a:pPr>
+                      <a:r>
+                        <a:t>whiteout-survival-86420cdd2bbb</a:t>
+                      </a:r>
+                    </a:p>
+                  </a:txBody>
+                  <a:tcPr/>
+                </a:tc>
+                <a:tc>
+                  <a:txBody>
+                    <a:bodyPr/>
+                    <a:lstStyle/>
+                    <a:p>
+                      <a:pPr algn="ctr">
+                        <a:defRPr sz="1100">
+                          <a:solidFill>
+                            <a:srgbClr val="1E2933"/>
+                          </a:solidFill>
+                        </a:defRPr>
+                      </a:pPr>
+                      <a:r>
+                        <a:t>Cocos</a:t>
+                      </a:r>
+                    </a:p>
+                  </a:txBody>
+                  <a:tcPr/>
+                </a:tc>
+                <a:tc>
+                  <a:txBody>
+                    <a:bodyPr/>
+                    <a:lstStyle/>
+                    <a:p>
+                      <a:pPr algn="ctr">
+                        <a:defRPr sz="1100">
+                          <a:solidFill>
+                            <a:srgbClr val="1E2933"/>
+                          </a:solidFill>
+                        </a:defRPr>
+                      </a:pPr>
+                      <a:r>
+                        <a:t>RUNTIME_FAULT</a:t>
+                      </a:r>
+                    </a:p>
+                  </a:txBody>
+                  <a:tcPr/>
+                </a:tc>
+                <a:tc>
+                  <a:txBody>
+                    <a:bodyPr/>
+                    <a:lstStyle/>
+                    <a:p>
+                      <a:pPr algn="ctr">
+                        <a:defRPr sz="1100">
+                          <a:solidFill>
+                            <a:srgbClr val="1E2933"/>
+                          </a:solidFill>
+                        </a:defRPr>
+                      </a:pPr>
+                      <a:r>
+                        <a:t>16</a:t>
+                      </a:r>
+                    </a:p>
+                  </a:txBody>
+                  <a:tcPr/>
+                </a:tc>
+                <a:tc>
+                  <a:txBody>
+                    <a:bodyPr/>
+                    <a:lstStyle/>
+                    <a:p>
+                      <a:pPr algn="ctr">
+                        <a:defRPr sz="1100">
+                          <a:solidFill>
+                            <a:srgbClr val="1E2933"/>
+                          </a:solidFill>
+                        </a:defRPr>
+                      </a:pPr>
+                      <a:r>
+                        <a:t>7</a:t>
+                      </a:r>
+                    </a:p>
+                  </a:txBody>
+                  <a:tcPr/>
+                </a:tc>
+                <a:tc>
+                  <a:txBody>
+                    <a:bodyPr/>
+                    <a:lstStyle/>
+                    <a:p>
+                      <a:pPr algn="ctr">
+                        <a:defRPr sz="1100">
+                          <a:solidFill>
+                            <a:srgbClr val="1E2933"/>
+                          </a:solidFill>
+                        </a:defRPr>
+                      </a:pPr>
+                      <a:r>
+                        <a:t>2</a:t>
+                      </a:r>
+                    </a:p>
+                  </a:txBody>
+                  <a:tcPr/>
+                </a:tc>
+                <a:tc>
+                  <a:txBody>
+                    <a:bodyPr/>
+                    <a:lstStyle/>
+                    <a:p>
+                      <a:pPr algn="ctr">
+                        <a:defRPr sz="1100">
+                          <a:solidFill>
+                            <a:srgbClr val="1E2933"/>
+                          </a:solidFill>
+                        </a:defRPr>
+                      </a:pPr>
+                      <a:r>
+                        <a:t>10</a:t>
+                      </a:r>
+                    </a:p>
+                  </a:txBody>
+                  <a:tcPr/>
+                </a:tc>
+              </a:tr>
+              <a:tr h="103366">
+                <a:tc>
+                  <a:txBody>
+                    <a:bodyPr/>
+                    <a:lstStyle/>
+                    <a:p>
+                      <a:pPr algn="ctr">
+                        <a:defRPr sz="1100">
+                          <a:solidFill>
+                            <a:srgbClr val="1E2933"/>
+                          </a:solidFill>
+                        </a:defRPr>
+                      </a:pPr>
+                      <a:r>
+                        <a:t>whiteout-survival-12ababda99c7</a:t>
+                      </a:r>
+                    </a:p>
+                  </a:txBody>
+                  <a:tcPr/>
+                </a:tc>
+                <a:tc>
+                  <a:txBody>
+                    <a:bodyPr/>
+                    <a:lstStyle/>
+                    <a:p>
+                      <a:pPr algn="ctr">
+                        <a:defRPr sz="1100">
+                          <a:solidFill>
+                            <a:srgbClr val="1E2933"/>
+                          </a:solidFill>
+                        </a:defRPr>
+                      </a:pPr>
+                      <a:r>
+                        <a:t>Cocos</a:t>
+                      </a:r>
+                    </a:p>
+                  </a:txBody>
+                  <a:tcPr/>
+                </a:tc>
+                <a:tc>
+                  <a:txBody>
+                    <a:bodyPr/>
+                    <a:lstStyle/>
+                    <a:p>
+                      <a:pPr algn="ctr">
+                        <a:defRPr sz="1100">
+                          <a:solidFill>
+                            <a:srgbClr val="1E2933"/>
+                          </a:solidFill>
+                        </a:defRPr>
+                      </a:pPr>
+                      <a:r>
+                        <a:t>OPERATOR_INTERRUPTED</a:t>
+                      </a:r>
+                    </a:p>
+                  </a:txBody>
+                  <a:tcPr/>
+                </a:tc>
+                <a:tc>
+                  <a:txBody>
+                    <a:bodyPr/>
+                    <a:lstStyle/>
+                    <a:p>
+                      <a:pPr algn="ctr">
+                        <a:defRPr sz="1100">
+                          <a:solidFill>
+                            <a:srgbClr val="1E2933"/>
+                          </a:solidFill>
+                        </a:defRPr>
+                      </a:pPr>
+                      <a:r>
+                        <a:t>22</a:t>
+                      </a:r>
+                    </a:p>
+                  </a:txBody>
+                  <a:tcPr/>
+                </a:tc>
+                <a:tc>
+                  <a:txBody>
+                    <a:bodyPr/>
+                    <a:lstStyle/>
+                    <a:p>
+                      <a:pPr algn="ctr">
+                        <a:defRPr sz="1100">
+                          <a:solidFill>
+                            <a:srgbClr val="1E2933"/>
+                          </a:solidFill>
+                        </a:defRPr>
+                      </a:pPr>
+                      <a:r>
+                        <a:t>10</a:t>
+                      </a:r>
+                    </a:p>
+                  </a:txBody>
+                  <a:tcPr/>
+                </a:tc>
+                <a:tc>
+                  <a:txBody>
+                    <a:bodyPr/>
+                    <a:lstStyle/>
+                    <a:p>
+                      <a:pPr algn="ctr">
+                        <a:defRPr sz="1100">
+                          <a:solidFill>
+                            <a:srgbClr val="1E2933"/>
+                          </a:solidFill>
+                        </a:defRPr>
+                      </a:pPr>
+                      <a:r>
+                        <a:t>5</a:t>
+                      </a:r>
+                    </a:p>
+                  </a:txBody>
+                  <a:tcPr/>
+                </a:tc>
+                <a:tc>
+                  <a:txBody>
+                    <a:bodyPr/>
+                    <a:lstStyle/>
+                    <a:p>
+                      <a:pPr algn="ctr">
+                        <a:defRPr sz="1100">
+                          <a:solidFill>
+                            <a:srgbClr val="1E2933"/>
+                          </a:solidFill>
+                        </a:defRPr>
+                      </a:pPr>
+                      <a:r>
+                        <a:t>17</a:t>
+                      </a:r>
+                    </a:p>
+                  </a:txBody>
+                  <a:tcPr/>
+                </a:tc>
+              </a:tr>
+              <a:tr h="103366">
+                <a:tc>
+                  <a:txBody>
+                    <a:bodyPr/>
+                    <a:lstStyle/>
+                    <a:p>
+                      <a:pPr algn="ctr">
+                        <a:defRPr sz="1100">
+                          <a:solidFill>
+                            <a:srgbClr val="1E2933"/>
+                          </a:solidFill>
+                        </a:defRPr>
+                      </a:pPr>
+                      <a:r>
+                        <a:t>kingshot-9423402859e9</a:t>
+                      </a:r>
+                    </a:p>
+                  </a:txBody>
+                  <a:tcPr/>
+                </a:tc>
+                <a:tc>
+                  <a:txBody>
+                    <a:bodyPr/>
+                    <a:lstStyle/>
+                    <a:p>
+                      <a:pPr algn="ctr">
+                        <a:defRPr sz="1100">
+                          <a:solidFill>
+                            <a:srgbClr val="1E2933"/>
+                          </a:solidFill>
+                        </a:defRPr>
+                      </a:pPr>
+                      <a:r>
+                        <a:t>Cocos</a:t>
+                      </a:r>
+                    </a:p>
+                  </a:txBody>
+                  <a:tcPr/>
+                </a:tc>
+                <a:tc>
+                  <a:txBody>
+                    <a:bodyPr/>
+                    <a:lstStyle/>
+                    <a:p>
+                      <a:pPr algn="ctr">
+                        <a:defRPr sz="1100">
+                          <a:solidFill>
+                            <a:srgbClr val="1E2933"/>
+                          </a:solidFill>
+                        </a:defRPr>
+                      </a:pPr>
+                      <a:r>
+                        <a:t>OPERATOR_INTERRUPTED</a:t>
+                      </a:r>
+                    </a:p>
+                  </a:txBody>
+                  <a:tcPr/>
+                </a:tc>
+                <a:tc>
+                  <a:txBody>
+                    <a:bodyPr/>
+                    <a:lstStyle/>
+                    <a:p>
+                      <a:pPr algn="ctr">
+                        <a:defRPr sz="1100">
+                          <a:solidFill>
+                            <a:srgbClr val="1E2933"/>
+                          </a:solidFill>
+                        </a:defRPr>
+                      </a:pPr>
+                      <a:r>
+                        <a:t>23</a:t>
+                      </a:r>
+                    </a:p>
+                  </a:txBody>
+                  <a:tcPr/>
+                </a:tc>
+                <a:tc>
+                  <a:txBody>
+                    <a:bodyPr/>
+                    <a:lstStyle/>
+                    <a:p>
+                      <a:pPr algn="ctr">
+                        <a:defRPr sz="1100">
+                          <a:solidFill>
+                            <a:srgbClr val="1E2933"/>
+                          </a:solidFill>
+                        </a:defRPr>
+                      </a:pPr>
+                      <a:r>
+                        <a:t>10</a:t>
+                      </a:r>
+                    </a:p>
+                  </a:txBody>
+                  <a:tcPr/>
+                </a:tc>
+                <a:tc>
+                  <a:txBody>
+                    <a:bodyPr/>
+                    <a:lstStyle/>
+                    <a:p>
+                      <a:pPr algn="ctr">
+                        <a:defRPr sz="1100">
+                          <a:solidFill>
+                            <a:srgbClr val="1E2933"/>
+                          </a:solidFill>
+                        </a:defRPr>
+                      </a:pPr>
+                      <a:r>
+                        <a:t>5</a:t>
+                      </a:r>
+                    </a:p>
+                  </a:txBody>
+                  <a:tcPr/>
+                </a:tc>
+                <a:tc>
+                  <a:txBody>
+                    <a:bodyPr/>
+                    <a:lstStyle/>
+                    <a:p>
+                      <a:pPr algn="ctr">
+                        <a:defRPr sz="1100">
+                          <a:solidFill>
+                            <a:srgbClr val="1E2933"/>
+                          </a:solidFill>
+                        </a:defRPr>
+                      </a:pPr>
+                      <a:r>
+                        <a:t>17</a:t>
+                      </a:r>
+                    </a:p>
+                  </a:txBody>
+                  <a:tcPr/>
+                </a:tc>
+              </a:tr>
+              <a:tr h="103366">
+                <a:tc>
+                  <a:txBody>
+                    <a:bodyPr/>
+                    <a:lstStyle/>
+                    <a:p>
+                      <a:pPr algn="ctr">
+                        <a:defRPr sz="1100">
+                          <a:solidFill>
+                            <a:srgbClr val="1E2933"/>
+                          </a:solidFill>
+                        </a:defRPr>
+                      </a:pPr>
+                      <a:r>
+                        <a:t>whiteout-survival-b64a7594f0c2</a:t>
+                      </a:r>
+                    </a:p>
+                  </a:txBody>
+                  <a:tcPr/>
+                </a:tc>
+                <a:tc>
+                  <a:txBody>
+                    <a:bodyPr/>
+                    <a:lstStyle/>
+                    <a:p>
+                      <a:pPr algn="ctr">
+                        <a:defRPr sz="1100">
+                          <a:solidFill>
+                            <a:srgbClr val="1E2933"/>
+                          </a:solidFill>
+                        </a:defRPr>
+                      </a:pPr>
+                      <a:r>
+                        <a:t>Cocos</a:t>
+                      </a:r>
+                    </a:p>
+                  </a:txBody>
+                  <a:tcPr/>
+                </a:tc>
+                <a:tc>
+                  <a:txBody>
+                    <a:bodyPr/>
+                    <a:lstStyle/>
+                    <a:p>
+                      <a:pPr algn="ctr">
+                        <a:defRPr sz="1100">
+                          <a:solidFill>
+                            <a:srgbClr val="1E2933"/>
+                          </a:solidFill>
+                        </a:defRPr>
+                      </a:pPr>
+                      <a:r>
+                        <a:t>OPERATOR_INTERRUPTED</a:t>
+                      </a:r>
+                    </a:p>
+                  </a:txBody>
+                  <a:tcPr/>
+                </a:tc>
+                <a:tc>
+                  <a:txBody>
+                    <a:bodyPr/>
+                    <a:lstStyle/>
+                    <a:p>
+                      <a:pPr algn="ctr">
+                        <a:defRPr sz="1100">
+                          <a:solidFill>
+                            <a:srgbClr val="1E2933"/>
+                          </a:solidFill>
+                        </a:defRPr>
+                      </a:pPr>
+                      <a:r>
+                        <a:t>19</a:t>
+                      </a:r>
+                    </a:p>
+                  </a:txBody>
+                  <a:tcPr/>
+                </a:tc>
+                <a:tc>
+                  <a:txBody>
+                    <a:bodyPr/>
+                    <a:lstStyle/>
+                    <a:p>
+                      <a:pPr algn="ctr">
+                        <a:defRPr sz="1100">
+                          <a:solidFill>
+                            <a:srgbClr val="1E2933"/>
+                          </a:solidFill>
+                        </a:defRPr>
+                      </a:pPr>
+                      <a:r>
+                        <a:t>8</a:t>
+                      </a:r>
+                    </a:p>
+                  </a:txBody>
+                  <a:tcPr/>
+                </a:tc>
+                <a:tc>
+                  <a:txBody>
+                    <a:bodyPr/>
+                    <a:lstStyle/>
+                    <a:p>
+                      <a:pPr algn="ctr">
+                        <a:defRPr sz="1100">
+                          <a:solidFill>
+                            <a:srgbClr val="1E2933"/>
+                          </a:solidFill>
+                        </a:defRPr>
+                      </a:pPr>
+                      <a:r>
+                        <a:t>5</a:t>
+                      </a:r>
+                    </a:p>
+                  </a:txBody>
+                  <a:tcPr/>
+                </a:tc>
+                <a:tc>
+                  <a:txBody>
+                    <a:bodyPr/>
+                    <a:lstStyle/>
+                    <a:p>
+                      <a:pPr algn="ctr">
+                        <a:defRPr sz="1100">
+                          <a:solidFill>
+                            <a:srgbClr val="1E2933"/>
+                          </a:solidFill>
+                        </a:defRPr>
+                      </a:pPr>
+                      <a:r>
+                        <a:t>14</a:t>
+                      </a:r>
+                    </a:p>
+                  </a:txBody>
+                  <a:tcPr/>
+                </a:tc>
+              </a:tr>
+              <a:tr h="103366">
+                <a:tc>
+                  <a:txBody>
+                    <a:bodyPr/>
+                    <a:lstStyle/>
+                    <a:p>
+                      <a:pPr algn="ctr">
+                        <a:defRPr sz="1100">
+                          <a:solidFill>
+                            <a:srgbClr val="1E2933"/>
+                          </a:solidFill>
+                        </a:defRPr>
+                      </a:pPr>
+                      <a:r>
+                        <a:t>kingshot-2653755ff3a0</a:t>
+                      </a:r>
+                    </a:p>
+                  </a:txBody>
+                  <a:tcPr/>
+                </a:tc>
+                <a:tc>
+                  <a:txBody>
+                    <a:bodyPr/>
+                    <a:lstStyle/>
+                    <a:p>
+                      <a:pPr algn="ctr">
+                        <a:defRPr sz="1100">
+                          <a:solidFill>
+                            <a:srgbClr val="1E2933"/>
+                          </a:solidFill>
+                        </a:defRPr>
+                      </a:pPr>
+                      <a:r>
+                        <a:t>Cocos</a:t>
+                      </a:r>
+                    </a:p>
+                  </a:txBody>
+                  <a:tcPr/>
+                </a:tc>
+                <a:tc>
+                  <a:txBody>
+                    <a:bodyPr/>
+                    <a:lstStyle/>
+                    <a:p>
+                      <a:pPr algn="ctr">
+                        <a:defRPr sz="1100">
+                          <a:solidFill>
+                            <a:srgbClr val="1E2933"/>
+                          </a:solidFill>
+                        </a:defRPr>
+                      </a:pPr>
+                      <a:r>
+                        <a:t>OPERATOR_INTERRUPTED</a:t>
+                      </a:r>
+                    </a:p>
+                  </a:txBody>
+                  <a:tcPr/>
+                </a:tc>
+                <a:tc>
+                  <a:txBody>
+                    <a:bodyPr/>
+                    <a:lstStyle/>
+                    <a:p>
+                      <a:pPr algn="ctr">
+                        <a:defRPr sz="1100">
+                          <a:solidFill>
+                            <a:srgbClr val="1E2933"/>
+                          </a:solidFill>
+                        </a:defRPr>
+                      </a:pPr>
+                      <a:r>
+                        <a:t>18</a:t>
+                      </a:r>
+                    </a:p>
+                  </a:txBody>
+                  <a:tcPr/>
+                </a:tc>
+                <a:tc>
+                  <a:txBody>
+                    <a:bodyPr/>
+                    <a:lstStyle/>
+                    <a:p>
+                      <a:pPr algn="ctr">
+                        <a:defRPr sz="1100">
+                          <a:solidFill>
+                            <a:srgbClr val="1E2933"/>
+                          </a:solidFill>
+                        </a:defRPr>
+                      </a:pPr>
+                      <a:r>
+                        <a:t>13</a:t>
+                      </a:r>
+                    </a:p>
+                  </a:txBody>
+                  <a:tcPr/>
+                </a:tc>
+                <a:tc>
+                  <a:txBody>
+                    <a:bodyPr/>
+                    <a:lstStyle/>
+                    <a:p>
+                      <a:pPr algn="ctr">
+                        <a:defRPr sz="1100">
+                          <a:solidFill>
+                            <a:srgbClr val="1E2933"/>
+                          </a:solidFill>
+                        </a:defRPr>
+                      </a:pPr>
+                      <a:r>
+                        <a:t>5</a:t>
+                      </a:r>
+                    </a:p>
+                  </a:txBody>
+                  <a:tcPr/>
+                </a:tc>
+                <a:tc>
+                  <a:txBody>
+                    <a:bodyPr/>
+                    <a:lstStyle/>
+                    <a:p>
+                      <a:pPr algn="ctr">
+                        <a:defRPr sz="1100">
+                          <a:solidFill>
+                            <a:srgbClr val="1E2933"/>
+                          </a:solidFill>
+                        </a:defRPr>
+                      </a:pPr>
+                      <a:r>
+                        <a:t>14</a:t>
+                      </a:r>
+                    </a:p>
+                  </a:txBody>
+                  <a:tcPr/>
+                </a:tc>
+              </a:tr>
+              <a:tr h="103366">
+                <a:tc>
+                  <a:txBody>
+                    <a:bodyPr/>
+                    <a:lstStyle/>
+                    <a:p>
+                      <a:pPr algn="ctr">
+                        <a:defRPr sz="1100">
+                          <a:solidFill>
+                            <a:srgbClr val="1E2933"/>
+                          </a:solidFill>
+                        </a:defRPr>
+                      </a:pPr>
+                      <a:r>
+                        <a:t>kingshot-0042aa74feb8</a:t>
+                      </a:r>
+                    </a:p>
+                  </a:txBody>
+                  <a:tcPr/>
+                </a:tc>
+                <a:tc>
+                  <a:txBody>
+                    <a:bodyPr/>
+                    <a:lstStyle/>
+                    <a:p>
+                      <a:pPr algn="ctr">
+                        <a:defRPr sz="1100">
+                          <a:solidFill>
+                            <a:srgbClr val="1E2933"/>
+                          </a:solidFill>
+                        </a:defRPr>
+                      </a:pPr>
+                      <a:r>
+                        <a:t>Cocos</a:t>
+                      </a:r>
+                    </a:p>
+                  </a:txBody>
+                  <a:tcPr/>
+                </a:tc>
+                <a:tc>
+                  <a:txBody>
+                    <a:bodyPr/>
+                    <a:lstStyle/>
+                    <a:p>
+                      <a:pPr algn="ctr">
+                        <a:defRPr sz="1100">
+                          <a:solidFill>
+                            <a:srgbClr val="1E2933"/>
+                          </a:solidFill>
+                        </a:defRPr>
+                      </a:pPr>
+                      <a:r>
+                        <a:t>OPERATOR_INTERRUPTED</a:t>
+                      </a:r>
+                    </a:p>
+                  </a:txBody>
+                  <a:tcPr/>
+                </a:tc>
+                <a:tc>
+                  <a:txBody>
+                    <a:bodyPr/>
+                    <a:lstStyle/>
+                    <a:p>
+                      <a:pPr algn="ctr">
+                        <a:defRPr sz="1100">
+                          <a:solidFill>
+                            <a:srgbClr val="1E2933"/>
+                          </a:solidFill>
+                        </a:defRPr>
+                      </a:pPr>
+                      <a:r>
+                        <a:t>20</a:t>
+                      </a:r>
+                    </a:p>
+                  </a:txBody>
+                  <a:tcPr/>
+                </a:tc>
+                <a:tc>
+                  <a:txBody>
+                    <a:bodyPr/>
+                    <a:lstStyle/>
+                    <a:p>
+                      <a:pPr algn="ctr">
+                        <a:defRPr sz="1100">
+                          <a:solidFill>
+                            <a:srgbClr val="1E2933"/>
+                          </a:solidFill>
+                        </a:defRPr>
+                      </a:pPr>
+                      <a:r>
+                        <a:t>10</a:t>
+                      </a:r>
+                    </a:p>
+                  </a:txBody>
+                  <a:tcPr/>
+                </a:tc>
+                <a:tc>
+                  <a:txBody>
+                    <a:bodyPr/>
+                    <a:lstStyle/>
+                    <a:p>
+                      <a:pPr algn="ctr">
+                        <a:defRPr sz="1100">
+                          <a:solidFill>
+                            <a:srgbClr val="1E2933"/>
+                          </a:solidFill>
+                        </a:defRPr>
+                      </a:pPr>
+                      <a:r>
+                        <a:t>6</a:t>
+                      </a:r>
+                    </a:p>
+                  </a:txBody>
+                  <a:tcPr/>
+                </a:tc>
+                <a:tc>
+                  <a:txBody>
+                    <a:bodyPr/>
+                    <a:lstStyle/>
+                    <a:p>
+                      <a:pPr algn="ctr">
+                        <a:defRPr sz="1100">
+                          <a:solidFill>
+                            <a:srgbClr val="1E2933"/>
+                          </a:solidFill>
+                        </a:defRPr>
+                      </a:pPr>
+                      <a:r>
+                        <a:t>15</a:t>
+                      </a:r>
+                    </a:p>
+                  </a:txBody>
+                  <a:tcPr/>
+                </a:tc>
+              </a:tr>
+              <a:tr h="103366">
+                <a:tc>
+                  <a:txBody>
+                    <a:bodyPr/>
+                    <a:lstStyle/>
+                    <a:p>
+                      <a:pPr algn="ctr">
+                        <a:defRPr sz="1100">
+                          <a:solidFill>
+                            <a:srgbClr val="1E2933"/>
+                          </a:solidFill>
+                        </a:defRPr>
+                      </a:pPr>
+                      <a:r>
+                        <a:t>whiteout-survival-b47a4f071e9c</a:t>
+                      </a:r>
+                    </a:p>
+                  </a:txBody>
+                  <a:tcPr/>
+                </a:tc>
+                <a:tc>
+                  <a:txBody>
+                    <a:bodyPr/>
+                    <a:lstStyle/>
+                    <a:p>
+                      <a:pPr algn="ctr">
+                        <a:defRPr sz="1100">
+                          <a:solidFill>
+                            <a:srgbClr val="1E2933"/>
+                          </a:solidFill>
+                        </a:defRPr>
+                      </a:pPr>
+                      <a:r>
+                        <a:t>Cocos</a:t>
+                      </a:r>
+                    </a:p>
+                  </a:txBody>
+                  <a:tcPr/>
+                </a:tc>
+                <a:tc>
+                  <a:txBody>
+                    <a:bodyPr/>
+                    <a:lstStyle/>
+                    <a:p>
+                      <a:pPr algn="ctr">
+                        <a:defRPr sz="1100">
+                          <a:solidFill>
+                            <a:srgbClr val="1E2933"/>
+                          </a:solidFill>
+                        </a:defRPr>
+                      </a:pPr>
+                      <a:r>
+                        <a:t>OPERATOR_INTERRUPTED</a:t>
+                      </a:r>
+                    </a:p>
+                  </a:txBody>
+                  <a:tcPr/>
+                </a:tc>
+                <a:tc>
+                  <a:txBody>
+                    <a:bodyPr/>
+                    <a:lstStyle/>
+                    <a:p>
+                      <a:pPr algn="ctr">
+                        <a:defRPr sz="1100">
+                          <a:solidFill>
+                            <a:srgbClr val="1E2933"/>
+                          </a:solidFill>
+                        </a:defRPr>
+                      </a:pPr>
+                      <a:r>
+                        <a:t>21</a:t>
+                      </a:r>
+                    </a:p>
+                  </a:txBody>
+                  <a:tcPr/>
+                </a:tc>
+                <a:tc>
+                  <a:txBody>
+                    <a:bodyPr/>
+                    <a:lstStyle/>
+                    <a:p>
+                      <a:pPr algn="ctr">
+                        <a:defRPr sz="1100">
+                          <a:solidFill>
+                            <a:srgbClr val="1E2933"/>
+                          </a:solidFill>
+                        </a:defRPr>
+                      </a:pPr>
+                      <a:r>
+                        <a:t>10</a:t>
+                      </a:r>
+                    </a:p>
+                  </a:txBody>
+                  <a:tcPr/>
+                </a:tc>
+                <a:tc>
+                  <a:txBody>
+                    <a:bodyPr/>
+                    <a:lstStyle/>
+                    <a:p>
+                      <a:pPr algn="ctr">
+                        <a:defRPr sz="1100">
+                          <a:solidFill>
+                            <a:srgbClr val="1E2933"/>
+                          </a:solidFill>
+                        </a:defRPr>
+                      </a:pPr>
+                      <a:r>
+                        <a:t>5</a:t>
+                      </a:r>
+                    </a:p>
+                  </a:txBody>
+                  <a:tcPr/>
+                </a:tc>
+                <a:tc>
+                  <a:txBody>
+                    <a:bodyPr/>
+                    <a:lstStyle/>
+                    <a:p>
+                      <a:pPr algn="ctr">
+                        <a:defRPr sz="1100">
+                          <a:solidFill>
+                            <a:srgbClr val="1E2933"/>
+                          </a:solidFill>
+                        </a:defRPr>
+                      </a:pPr>
+                      <a:r>
+                        <a:t>15</a:t>
+                      </a:r>
+                    </a:p>
+                  </a:txBody>
+                  <a:tcPr/>
+                </a:tc>
+              </a:tr>
+              <a:tr h="103366">
+                <a:tc>
+                  <a:txBody>
+                    <a:bodyPr/>
+                    <a:lstStyle/>
+                    <a:p>
+                      <a:pPr algn="ctr">
+                        <a:defRPr sz="1100">
+                          <a:solidFill>
+                            <a:srgbClr val="1E2933"/>
+                          </a:solidFill>
+                        </a:defRPr>
+                      </a:pPr>
+                      <a:r>
+                        <a:t>kingshot-6dd565baa02d</a:t>
+                      </a:r>
+                    </a:p>
+                  </a:txBody>
+                  <a:tcPr/>
+                </a:tc>
+                <a:tc>
+                  <a:txBody>
+                    <a:bodyPr/>
+                    <a:lstStyle/>
+                    <a:p>
+                      <a:pPr algn="ctr">
+                        <a:defRPr sz="1100">
+                          <a:solidFill>
+                            <a:srgbClr val="1E2933"/>
+                          </a:solidFill>
+                        </a:defRPr>
+                      </a:pPr>
+                      <a:r>
+                        <a:t>Cocos</a:t>
+                      </a:r>
+                    </a:p>
+                  </a:txBody>
+                  <a:tcPr/>
+                </a:tc>
+                <a:tc>
+                  <a:txBody>
+                    <a:bodyPr/>
+                    <a:lstStyle/>
+                    <a:p>
+                      <a:pPr algn="ctr">
+                        <a:defRPr sz="1100">
+                          <a:solidFill>
+                            <a:srgbClr val="1E2933"/>
+                          </a:solidFill>
+                        </a:defRPr>
+                      </a:pPr>
+                      <a:r>
+                        <a:t>OPERATOR_INTERRUPTED</a:t>
+                      </a:r>
+                    </a:p>
+                  </a:txBody>
+                  <a:tcPr/>
+                </a:tc>
+                <a:tc>
+                  <a:txBody>
+                    <a:bodyPr/>
+                    <a:lstStyle/>
+                    <a:p>
+                      <a:pPr algn="ctr">
+                        <a:defRPr sz="1100">
+                          <a:solidFill>
+                            <a:srgbClr val="1E2933"/>
+                          </a:solidFill>
+                        </a:defRPr>
+                      </a:pPr>
+                      <a:r>
+                        <a:t>20</a:t>
+                      </a:r>
+                    </a:p>
+                  </a:txBody>
+                  <a:tcPr/>
+                </a:tc>
+                <a:tc>
+                  <a:txBody>
+                    <a:bodyPr/>
+                    <a:lstStyle/>
+                    <a:p>
+                      <a:pPr algn="ctr">
+                        <a:defRPr sz="1100">
+                          <a:solidFill>
+                            <a:srgbClr val="1E2933"/>
+                          </a:solidFill>
+                        </a:defRPr>
+                      </a:pPr>
+                      <a:r>
+                        <a:t>8</a:t>
+                      </a:r>
+                    </a:p>
+                  </a:txBody>
+                  <a:tcPr/>
+                </a:tc>
+                <a:tc>
+                  <a:txBody>
+                    <a:bodyPr/>
+                    <a:lstStyle/>
+                    <a:p>
+                      <a:pPr algn="ctr">
+                        <a:defRPr sz="1100">
+                          <a:solidFill>
+                            <a:srgbClr val="1E2933"/>
+                          </a:solidFill>
+                        </a:defRPr>
+                      </a:pPr>
+                      <a:r>
+                        <a:t>5</a:t>
+                      </a:r>
+                    </a:p>
+                  </a:txBody>
+                  <a:tcPr/>
+                </a:tc>
+                <a:tc>
+                  <a:txBody>
+                    <a:bodyPr/>
+                    <a:lstStyle/>
+                    <a:p>
+                      <a:pPr algn="ctr">
+                        <a:defRPr sz="1100">
+                          <a:solidFill>
+                            <a:srgbClr val="1E2933"/>
+                          </a:solidFill>
+                        </a:defRPr>
+                      </a:pPr>
+                      <a:r>
+                        <a:t>13</a:t>
+                      </a:r>
+                    </a:p>
+                  </a:txBody>
+                  <a:tcPr/>
+                </a:tc>
+              </a:tr>
+              <a:tr h="103366">
+                <a:tc>
+                  <a:txBody>
+                    <a:bodyPr/>
+                    <a:lstStyle/>
+                    <a:p>
+                      <a:pPr algn="ctr">
+                        <a:defRPr sz="1100">
+                          <a:solidFill>
+                            <a:srgbClr val="1E2933"/>
+                          </a:solidFill>
+                        </a:defRPr>
+                      </a:pPr>
+                      <a:r>
+                        <a:t>kingshot-33efef78d709</a:t>
+                      </a:r>
+                    </a:p>
+                  </a:txBody>
+                  <a:tcPr/>
+                </a:tc>
+                <a:tc>
+                  <a:txBody>
+                    <a:bodyPr/>
+                    <a:lstStyle/>
+                    <a:p>
+                      <a:pPr algn="ctr">
+                        <a:defRPr sz="1100">
+                          <a:solidFill>
+                            <a:srgbClr val="1E2933"/>
+                          </a:solidFill>
+                        </a:defRPr>
+                      </a:pPr>
+                      <a:r>
+                        <a:t>Cocos</a:t>
+                      </a:r>
+                    </a:p>
+                  </a:txBody>
+                  <a:tcPr/>
+                </a:tc>
+                <a:tc>
+                  <a:txBody>
+                    <a:bodyPr/>
+                    <a:lstStyle/>
+                    <a:p>
+                      <a:pPr algn="ctr">
+                        <a:defRPr sz="1100">
+                          <a:solidFill>
+                            <a:srgbClr val="1E2933"/>
+                          </a:solidFill>
+                        </a:defRPr>
+                      </a:pPr>
+                      <a:r>
+                        <a:t>OPERATOR_INTERRUPTED</a:t>
+                      </a:r>
+                    </a:p>
+                  </a:txBody>
+                  <a:tcPr/>
+                </a:tc>
+                <a:tc>
+                  <a:txBody>
+                    <a:bodyPr/>
+                    <a:lstStyle/>
+                    <a:p>
+                      <a:pPr algn="ctr">
+                        <a:defRPr sz="1100">
+                          <a:solidFill>
+                            <a:srgbClr val="1E2933"/>
+                          </a:solidFill>
+                        </a:defRPr>
+                      </a:pPr>
+                      <a:r>
+                        <a:t>21</a:t>
+                      </a:r>
+                    </a:p>
+                  </a:txBody>
+                  <a:tcPr/>
+                </a:tc>
+                <a:tc>
+                  <a:txBody>
+                    <a:bodyPr/>
+                    <a:lstStyle/>
+                    <a:p>
+                      <a:pPr algn="ctr">
+                        <a:defRPr sz="1100">
+                          <a:solidFill>
+                            <a:srgbClr val="1E2933"/>
+                          </a:solidFill>
+                        </a:defRPr>
+                      </a:pPr>
+                      <a:r>
+                        <a:t>14</a:t>
+                      </a:r>
+                    </a:p>
+                  </a:txBody>
+                  <a:tcPr/>
+                </a:tc>
+                <a:tc>
+                  <a:txBody>
+                    <a:bodyPr/>
+                    <a:lstStyle/>
+                    <a:p>
+                      <a:pPr algn="ctr">
+                        <a:defRPr sz="1100">
+                          <a:solidFill>
+                            <a:srgbClr val="1E2933"/>
+                          </a:solidFill>
+                        </a:defRPr>
+                      </a:pPr>
+                      <a:r>
+                        <a:t>4</a:t>
+                      </a:r>
+                    </a:p>
+                  </a:txBody>
+                  <a:tcPr/>
+                </a:tc>
+                <a:tc>
+                  <a:txBody>
+                    <a:bodyPr/>
+                    <a:lstStyle/>
+                    <a:p>
+                      <a:pPr algn="ctr">
+                        <a:defRPr sz="1100">
+                          <a:solidFill>
+                            <a:srgbClr val="1E2933"/>
+                          </a:solidFill>
+                        </a:defRPr>
+                      </a:pPr>
+                      <a:r>
+                        <a:t>16</a:t>
+                      </a:r>
+                    </a:p>
+                  </a:txBody>
+                  <a:tcPr/>
+                </a:tc>
+              </a:tr>
+              <a:tr h="103366">
+                <a:tc>
+                  <a:txBody>
+                    <a:bodyPr/>
+                    <a:lstStyle/>
+                    <a:p>
+                      <a:pPr algn="ctr">
+                        <a:defRPr sz="1100">
+                          <a:solidFill>
+                            <a:srgbClr val="1E2933"/>
+                          </a:solidFill>
+                        </a:defRPr>
+                      </a:pPr>
+                      <a:r>
+                        <a:t>kingshot-f9a4fa1b6227</a:t>
+                      </a:r>
+                    </a:p>
+                  </a:txBody>
+                  <a:tcPr/>
+                </a:tc>
+                <a:tc>
+                  <a:txBody>
+                    <a:bodyPr/>
+                    <a:lstStyle/>
+                    <a:p>
+                      <a:pPr algn="ctr">
+                        <a:defRPr sz="1100">
+                          <a:solidFill>
+                            <a:srgbClr val="1E2933"/>
+                          </a:solidFill>
+                        </a:defRPr>
+                      </a:pPr>
+                      <a:r>
+                        <a:t>Cocos</a:t>
+                      </a:r>
+                    </a:p>
+                  </a:txBody>
+                  <a:tcPr/>
+                </a:tc>
+                <a:tc>
+                  <a:txBody>
+                    <a:bodyPr/>
+                    <a:lstStyle/>
+                    <a:p>
+                      <a:pPr algn="ctr">
+                        <a:defRPr sz="1100">
+                          <a:solidFill>
+                            <a:srgbClr val="1E2933"/>
+                          </a:solidFill>
+                        </a:defRPr>
+                      </a:pPr>
+                      <a:r>
+                        <a:t>OPERATOR_INTERRUPTED</a:t>
+                      </a:r>
+                    </a:p>
+                  </a:txBody>
+                  <a:tcPr/>
+                </a:tc>
+                <a:tc>
+                  <a:txBody>
+                    <a:bodyPr/>
+                    <a:lstStyle/>
+                    <a:p>
+                      <a:pPr algn="ctr">
+                        <a:defRPr sz="1100">
+                          <a:solidFill>
+                            <a:srgbClr val="1E2933"/>
+                          </a:solidFill>
+                        </a:defRPr>
+                      </a:pPr>
+                      <a:r>
+                        <a:t>23</a:t>
+                      </a:r>
+                    </a:p>
+                  </a:txBody>
+                  <a:tcPr/>
+                </a:tc>
+                <a:tc>
+                  <a:txBody>
+                    <a:bodyPr/>
+                    <a:lstStyle/>
+                    <a:p>
+                      <a:pPr algn="ctr">
+                        <a:defRPr sz="1100">
+                          <a:solidFill>
+                            <a:srgbClr val="1E2933"/>
+                          </a:solidFill>
+                        </a:defRPr>
+                      </a:pPr>
+                      <a:r>
+                        <a:t>10</a:t>
+                      </a:r>
+                    </a:p>
+                  </a:txBody>
+                  <a:tcPr/>
+                </a:tc>
+                <a:tc>
+                  <a:txBody>
+                    <a:bodyPr/>
+                    <a:lstStyle/>
+                    <a:p>
+                      <a:pPr algn="ctr">
+                        <a:defRPr sz="1100">
+                          <a:solidFill>
+                            <a:srgbClr val="1E2933"/>
+                          </a:solidFill>
+                        </a:defRPr>
+                      </a:pPr>
+                      <a:r>
+                        <a:t>3</a:t>
+                      </a:r>
+                    </a:p>
+                  </a:txBody>
+                  <a:tcPr/>
+                </a:tc>
+                <a:tc>
+                  <a:txBody>
+                    <a:bodyPr/>
+                    <a:lstStyle/>
+                    <a:p>
+                      <a:pPr algn="ctr">
+                        <a:defRPr sz="1100">
+                          <a:solidFill>
+                            <a:srgbClr val="1E2933"/>
+                          </a:solidFill>
+                        </a:defRPr>
+                      </a:pPr>
+                      <a:r>
+                        <a:t>16</a:t>
+                      </a:r>
+                    </a:p>
+                  </a:txBody>
+                  <a:tcPr/>
+                </a:tc>
+              </a:tr>
+              <a:tr h="103366">
+                <a:tc>
+                  <a:txBody>
+                    <a:bodyPr/>
+                    <a:lstStyle/>
+                    <a:p>
+                      <a:pPr algn="ctr">
+                        <a:defRPr sz="1100">
+                          <a:solidFill>
+                            <a:srgbClr val="1E2933"/>
+                          </a:solidFill>
+                        </a:defRPr>
+                      </a:pPr>
+                      <a:r>
+                        <a:t>kingshot-830518bfdad4</a:t>
+                      </a:r>
+                    </a:p>
+                  </a:txBody>
+                  <a:tcPr/>
+                </a:tc>
+                <a:tc>
+                  <a:txBody>
+                    <a:bodyPr/>
+                    <a:lstStyle/>
+                    <a:p>
+                      <a:pPr algn="ctr">
+                        <a:defRPr sz="1100">
+                          <a:solidFill>
+                            <a:srgbClr val="1E2933"/>
+                          </a:solidFill>
+                        </a:defRPr>
+                      </a:pPr>
+                      <a:r>
+                        <a:t>Cocos</a:t>
+                      </a:r>
+                    </a:p>
+                  </a:txBody>
+                  <a:tcPr/>
+                </a:tc>
+                <a:tc>
+                  <a:txBody>
+                    <a:bodyPr/>
+                    <a:lstStyle/>
+                    <a:p>
+                      <a:pPr algn="ctr">
+                        <a:defRPr sz="1100">
+                          <a:solidFill>
+                            <a:srgbClr val="1E2933"/>
+                          </a:solidFill>
+                        </a:defRPr>
+                      </a:pPr>
+                      <a:r>
+                        <a:t>OPERATOR_INTERRUPTED</a:t>
+                      </a:r>
+                    </a:p>
+                  </a:txBody>
+                  <a:tcPr/>
+                </a:tc>
+                <a:tc>
+                  <a:txBody>
+                    <a:bodyPr/>
+                    <a:lstStyle/>
+                    <a:p>
+                      <a:pPr algn="ctr">
+                        <a:defRPr sz="1100">
+                          <a:solidFill>
+                            <a:srgbClr val="1E2933"/>
+                          </a:solidFill>
+                        </a:defRPr>
+                      </a:pPr>
+                      <a:r>
+                        <a:t>26</a:t>
+                      </a:r>
+                    </a:p>
+                  </a:txBody>
+                  <a:tcPr/>
+                </a:tc>
+                <a:tc>
+                  <a:txBody>
+                    <a:bodyPr/>
+                    <a:lstStyle/>
+                    <a:p>
+                      <a:pPr algn="ctr">
+                        <a:defRPr sz="1100">
+                          <a:solidFill>
+                            <a:srgbClr val="1E2933"/>
+                          </a:solidFill>
+                        </a:defRPr>
+                      </a:pPr>
+                      <a:r>
+                        <a:t>19</a:t>
+                      </a:r>
+                    </a:p>
+                  </a:txBody>
+                  <a:tcPr/>
+                </a:tc>
+                <a:tc>
+                  <a:txBody>
+                    <a:bodyPr/>
+                    <a:lstStyle/>
+                    <a:p>
+                      <a:pPr algn="ctr">
+                        <a:defRPr sz="1100">
+                          <a:solidFill>
+                            <a:srgbClr val="1E2933"/>
+                          </a:solidFill>
+                        </a:defRPr>
+                      </a:pPr>
+                      <a:r>
+                        <a:t>4</a:t>
+                      </a:r>
+                    </a:p>
+                  </a:txBody>
+                  <a:tcPr/>
+                </a:tc>
+                <a:tc>
+                  <a:txBody>
+                    <a:bodyPr/>
+                    <a:lstStyle/>
+                    <a:p>
+                      <a:pPr algn="ctr">
+                        <a:defRPr sz="1100">
+                          <a:solidFill>
+                            <a:srgbClr val="1E2933"/>
+                          </a:solidFill>
+                        </a:defRPr>
+                      </a:pPr>
+                      <a:r>
+                        <a:t>21</a:t>
+                      </a:r>
+                    </a:p>
+                  </a:txBody>
+                  <a:tcPr/>
+                </a:tc>
+              </a:tr>
+              <a:tr h="103366">
+                <a:tc>
+                  <a:txBody>
+                    <a:bodyPr/>
+                    <a:lstStyle/>
+                    <a:p>
+                      <a:pPr algn="ctr">
+                        <a:defRPr sz="1100">
+                          <a:solidFill>
+                            <a:srgbClr val="1E2933"/>
+                          </a:solidFill>
+                        </a:defRPr>
+                      </a:pPr>
+                      <a:r>
+                        <a:t>whiteout-survival-c47908da8b11</a:t>
+                      </a:r>
+                    </a:p>
+                  </a:txBody>
+                  <a:tcPr/>
+                </a:tc>
+                <a:tc>
+                  <a:txBody>
+                    <a:bodyPr/>
+                    <a:lstStyle/>
+                    <a:p>
+                      <a:pPr algn="ctr">
+                        <a:defRPr sz="1100">
+                          <a:solidFill>
+                            <a:srgbClr val="1E2933"/>
+                          </a:solidFill>
+                        </a:defRPr>
+                      </a:pPr>
+                      <a:r>
+                        <a:t>Cocos</a:t>
+                      </a:r>
+                    </a:p>
+                  </a:txBody>
+                  <a:tcPr/>
+                </a:tc>
+                <a:tc>
+                  <a:txBody>
+                    <a:bodyPr/>
+                    <a:lstStyle/>
+                    <a:p>
+                      <a:pPr algn="ctr">
+                        <a:defRPr sz="1100">
+                          <a:solidFill>
+                            <a:srgbClr val="1E2933"/>
+                          </a:solidFill>
+                        </a:defRPr>
+                      </a:pPr>
+                      <a:r>
+                        <a:t>OPERATOR_INTERRUPTED</a:t>
+                      </a:r>
+                    </a:p>
+                  </a:txBody>
+                  <a:tcPr/>
+                </a:tc>
+                <a:tc>
+                  <a:txBody>
+                    <a:bodyPr/>
+                    <a:lstStyle/>
+                    <a:p>
+                      <a:pPr algn="ctr">
+                        <a:defRPr sz="1100">
+                          <a:solidFill>
+                            <a:srgbClr val="1E2933"/>
+                          </a:solidFill>
+                        </a:defRPr>
+                      </a:pPr>
+                      <a:r>
+                        <a:t>15</a:t>
+                      </a:r>
+                    </a:p>
+                  </a:txBody>
+                  <a:tcPr/>
+                </a:tc>
+                <a:tc>
+                  <a:txBody>
+                    <a:bodyPr/>
+                    <a:lstStyle/>
+                    <a:p>
+                      <a:pPr algn="ctr">
+                        <a:defRPr sz="1100">
+                          <a:solidFill>
+                            <a:srgbClr val="1E2933"/>
+                          </a:solidFill>
+                        </a:defRPr>
+                      </a:pPr>
+                      <a:r>
+                        <a:t>9</a:t>
+                      </a:r>
+                    </a:p>
+                  </a:txBody>
+                  <a:tcPr/>
+                </a:tc>
+                <a:tc>
+                  <a:txBody>
+                    <a:bodyPr/>
+                    <a:lstStyle/>
+                    <a:p>
+                      <a:pPr algn="ctr">
+                        <a:defRPr sz="1100">
+                          <a:solidFill>
+                            <a:srgbClr val="1E2933"/>
+                          </a:solidFill>
+                        </a:defRPr>
+                      </a:pPr>
+                      <a:r>
+                        <a:t>3</a:t>
+                      </a:r>
+                    </a:p>
+                  </a:txBody>
+                  <a:tcPr/>
+                </a:tc>
+                <a:tc>
+                  <a:txBody>
+                    <a:bodyPr/>
+                    <a:lstStyle/>
+                    <a:p>
+                      <a:pPr algn="ctr">
+                        <a:defRPr sz="1100">
+                          <a:solidFill>
+                            <a:srgbClr val="1E2933"/>
+                          </a:solidFill>
+                        </a:defRPr>
+                      </a:pPr>
+                      <a:r>
+                        <a:t>9</a:t>
+                      </a:r>
+                    </a:p>
+                  </a:txBody>
+                  <a:tcPr/>
+                </a:tc>
+              </a:tr>
+              <a:tr h="103366">
+                <a:tc>
+                  <a:txBody>
+                    <a:bodyPr/>
+                    <a:lstStyle/>
+                    <a:p>
+                      <a:pPr algn="ctr">
+                        <a:defRPr sz="1100">
+                          <a:solidFill>
+                            <a:srgbClr val="1E2933"/>
+                          </a:solidFill>
+                        </a:defRPr>
+                      </a:pPr>
+                      <a:r>
+                        <a:t>kingshot-80b82b11529c</a:t>
+                      </a:r>
+                    </a:p>
+                  </a:txBody>
+                  <a:tcPr/>
+                </a:tc>
+                <a:tc>
+                  <a:txBody>
+                    <a:bodyPr/>
+                    <a:lstStyle/>
+                    <a:p>
+                      <a:pPr algn="ctr">
+                        <a:defRPr sz="1100">
+                          <a:solidFill>
+                            <a:srgbClr val="1E2933"/>
+                          </a:solidFill>
+                        </a:defRPr>
+                      </a:pPr>
+                      <a:r>
+                        <a:t>Cocos</a:t>
+                      </a:r>
+                    </a:p>
+                  </a:txBody>
+                  <a:tcPr/>
+                </a:tc>
+                <a:tc>
+                  <a:txBody>
+                    <a:bodyPr/>
+                    <a:lstStyle/>
+                    <a:p>
+                      <a:pPr algn="ctr">
+                        <a:defRPr sz="1100">
+                          <a:solidFill>
+                            <a:srgbClr val="1E2933"/>
+                          </a:solidFill>
+                        </a:defRPr>
+                      </a:pPr>
+                      <a:r>
+                        <a:t>OPERATOR_INTERRUPTED</a:t>
+                      </a:r>
+                    </a:p>
+                  </a:txBody>
+                  <a:tcPr/>
+                </a:tc>
+                <a:tc>
+                  <a:txBody>
+                    <a:bodyPr/>
+                    <a:lstStyle/>
+                    <a:p>
+                      <a:pPr algn="ctr">
+                        <a:defRPr sz="1100">
+                          <a:solidFill>
+                            <a:srgbClr val="1E2933"/>
+                          </a:solidFill>
+                        </a:defRPr>
+                      </a:pPr>
+                      <a:r>
+                        <a:t>18</a:t>
+                      </a:r>
+                    </a:p>
+                  </a:txBody>
+                  <a:tcPr/>
+                </a:tc>
+                <a:tc>
+                  <a:txBody>
+                    <a:bodyPr/>
+                    <a:lstStyle/>
+                    <a:p>
+                      <a:pPr algn="ctr">
+                        <a:defRPr sz="1100">
+                          <a:solidFill>
+                            <a:srgbClr val="1E2933"/>
+                          </a:solidFill>
+                        </a:defRPr>
+                      </a:pPr>
+                      <a:r>
+                        <a:t>7</a:t>
+                      </a:r>
+                    </a:p>
+                  </a:txBody>
+                  <a:tcPr/>
+                </a:tc>
+                <a:tc>
+                  <a:txBody>
+                    <a:bodyPr/>
+                    <a:lstStyle/>
+                    <a:p>
+                      <a:pPr algn="ctr">
+                        <a:defRPr sz="1100">
+                          <a:solidFill>
+                            <a:srgbClr val="1E2933"/>
+                          </a:solidFill>
+                        </a:defRPr>
+                      </a:pPr>
+                      <a:r>
+                        <a:t>5</a:t>
+                      </a:r>
+                    </a:p>
+                  </a:txBody>
+                  <a:tcPr/>
+                </a:tc>
+                <a:tc>
+                  <a:txBody>
+                    <a:bodyPr/>
+                    <a:lstStyle/>
+                    <a:p>
+                      <a:pPr algn="ctr">
+                        <a:defRPr sz="1100">
+                          <a:solidFill>
+                            <a:srgbClr val="1E2933"/>
+                          </a:solidFill>
+                        </a:defRPr>
+                      </a:pPr>
+                      <a:r>
+                        <a:t>13</a:t>
+                      </a:r>
+                    </a:p>
+                  </a:txBody>
+                  <a:tcPr/>
+                </a:tc>
+              </a:tr>
+              <a:tr h="103366">
+                <a:tc>
+                  <a:txBody>
+                    <a:bodyPr/>
+                    <a:lstStyle/>
+                    <a:p>
+                      <a:pPr algn="ctr">
+                        <a:defRPr sz="1100">
+                          <a:solidFill>
+                            <a:srgbClr val="1E2933"/>
+                          </a:solidFill>
+                        </a:defRPr>
+                      </a:pPr>
+                      <a:r>
+                        <a:t>kingshot-14271ce32d49</a:t>
+                      </a:r>
+                    </a:p>
+                  </a:txBody>
+                  <a:tcPr/>
+                </a:tc>
+                <a:tc>
+                  <a:txBody>
+                    <a:bodyPr/>
+                    <a:lstStyle/>
+                    <a:p>
+                      <a:pPr algn="ctr">
+                        <a:defRPr sz="1100">
+                          <a:solidFill>
+                            <a:srgbClr val="1E2933"/>
+                          </a:solidFill>
+                        </a:defRPr>
+                      </a:pPr>
+                      <a:r>
+                        <a:t>Cocos</a:t>
+                      </a:r>
+                    </a:p>
+                  </a:txBody>
+                  <a:tcPr/>
+                </a:tc>
+                <a:tc>
+                  <a:txBody>
+                    <a:bodyPr/>
+                    <a:lstStyle/>
+                    <a:p>
+                      <a:pPr algn="ctr">
+                        <a:defRPr sz="1100">
+                          <a:solidFill>
+                            <a:srgbClr val="1E2933"/>
+                          </a:solidFill>
+                        </a:defRPr>
+                      </a:pPr>
+                      <a:r>
+                        <a:t>OPERATOR_INTERRUPTED</a:t>
+                      </a:r>
+                    </a:p>
+                  </a:txBody>
+                  <a:tcPr/>
+                </a:tc>
+                <a:tc>
+                  <a:txBody>
+                    <a:bodyPr/>
+                    <a:lstStyle/>
+                    <a:p>
+                      <a:pPr algn="ctr">
+                        <a:defRPr sz="1100">
+                          <a:solidFill>
+                            <a:srgbClr val="1E2933"/>
+                          </a:solidFill>
+                        </a:defRPr>
+                      </a:pPr>
+                      <a:r>
+                        <a:t>21</a:t>
+                      </a:r>
+                    </a:p>
+                  </a:txBody>
+                  <a:tcPr/>
+                </a:tc>
+                <a:tc>
+                  <a:txBody>
+                    <a:bodyPr/>
+                    <a:lstStyle/>
+                    <a:p>
+                      <a:pPr algn="ctr">
+                        <a:defRPr sz="1100">
+                          <a:solidFill>
+                            <a:srgbClr val="1E2933"/>
+                          </a:solidFill>
+                        </a:defRPr>
+                      </a:pPr>
+                      <a:r>
+                        <a:t>12</a:t>
+                      </a:r>
+                    </a:p>
+                  </a:txBody>
+                  <a:tcPr/>
+                </a:tc>
+                <a:tc>
+                  <a:txBody>
+                    <a:bodyPr/>
+                    <a:lstStyle/>
+                    <a:p>
+                      <a:pPr algn="ctr">
+                        <a:defRPr sz="1100">
+                          <a:solidFill>
+                            <a:srgbClr val="1E2933"/>
+                          </a:solidFill>
+                        </a:defRPr>
+                      </a:pPr>
+                      <a:r>
+                        <a:t>4</a:t>
+                      </a:r>
+                    </a:p>
+                  </a:txBody>
+                  <a:tcPr/>
+                </a:tc>
+                <a:tc>
+                  <a:txBody>
+                    <a:bodyPr/>
+                    <a:lstStyle/>
+                    <a:p>
+                      <a:pPr algn="ctr">
+                        <a:defRPr sz="1100">
+                          <a:solidFill>
+                            <a:srgbClr val="1E2933"/>
+                          </a:solidFill>
+                        </a:defRPr>
+                      </a:pPr>
+                      <a:r>
+                        <a:t>17</a:t>
+                      </a:r>
+                    </a:p>
+                  </a:txBody>
+                  <a:tcPr/>
+                </a:tc>
+              </a:tr>
+              <a:tr h="103366">
+                <a:tc>
+                  <a:txBody>
+                    <a:bodyPr/>
+                    <a:lstStyle/>
+                    <a:p>
+                      <a:pPr algn="ctr">
+                        <a:defRPr sz="1100">
+                          <a:solidFill>
+                            <a:srgbClr val="1E2933"/>
+                          </a:solidFill>
+                        </a:defRPr>
+                      </a:pPr>
+                      <a:r>
+                        <a:t>kingshot-e16d5e5e7cce</a:t>
+                      </a:r>
+                    </a:p>
+                  </a:txBody>
+                  <a:tcPr/>
+                </a:tc>
+                <a:tc>
+                  <a:txBody>
+                    <a:bodyPr/>
+                    <a:lstStyle/>
+                    <a:p>
+                      <a:pPr algn="ctr">
+                        <a:defRPr sz="1100">
+                          <a:solidFill>
+                            <a:srgbClr val="1E2933"/>
+                          </a:solidFill>
+                        </a:defRPr>
+                      </a:pPr>
+                      <a:r>
+                        <a:t>Cocos</a:t>
+                      </a:r>
+                    </a:p>
+                  </a:txBody>
+                  <a:tcPr/>
+                </a:tc>
+                <a:tc>
+                  <a:txBody>
+                    <a:bodyPr/>
+                    <a:lstStyle/>
+                    <a:p>
+                      <a:pPr algn="ctr">
+                        <a:defRPr sz="1100">
+                          <a:solidFill>
+                            <a:srgbClr val="1E2933"/>
+                          </a:solidFill>
+                        </a:defRPr>
+                      </a:pPr>
+                      <a:r>
+                        <a:t>OPERATOR_INTERRUPTED</a:t>
+                      </a:r>
+                    </a:p>
+                  </a:txBody>
+                  <a:tcPr/>
+                </a:tc>
+                <a:tc>
+                  <a:txBody>
+                    <a:bodyPr/>
+                    <a:lstStyle/>
+                    <a:p>
+                      <a:pPr algn="ctr">
+                        <a:defRPr sz="1100">
+                          <a:solidFill>
+                            <a:srgbClr val="1E2933"/>
+                          </a:solidFill>
+                        </a:defRPr>
+                      </a:pPr>
+                      <a:r>
+                        <a:t>14</a:t>
+                      </a:r>
+                    </a:p>
+                  </a:txBody>
+                  <a:tcPr/>
+                </a:tc>
+                <a:tc>
+                  <a:txBody>
+                    <a:bodyPr/>
+                    <a:lstStyle/>
+                    <a:p>
+                      <a:pPr algn="ctr">
+                        <a:defRPr sz="1100">
+                          <a:solidFill>
+                            <a:srgbClr val="1E2933"/>
+                          </a:solidFill>
+                        </a:defRPr>
+                      </a:pPr>
+                      <a:r>
+                        <a:t>8</a:t>
+                      </a:r>
+                    </a:p>
+                  </a:txBody>
+                  <a:tcPr/>
+                </a:tc>
+                <a:tc>
+                  <a:txBody>
+                    <a:bodyPr/>
+                    <a:lstStyle/>
+                    <a:p>
+                      <a:pPr algn="ctr">
+                        <a:defRPr sz="1100">
+                          <a:solidFill>
+                            <a:srgbClr val="1E2933"/>
+                          </a:solidFill>
+                        </a:defRPr>
+                      </a:pPr>
+                      <a:r>
+                        <a:t>6</a:t>
+                      </a:r>
+                    </a:p>
+                  </a:txBody>
+                  <a:tcPr/>
+                </a:tc>
+                <a:tc>
+                  <a:txBody>
+                    <a:bodyPr/>
+                    <a:lstStyle/>
+                    <a:p>
+                      <a:pPr algn="ctr">
+                        <a:defRPr sz="1100">
+                          <a:solidFill>
+                            <a:srgbClr val="1E2933"/>
+                          </a:solidFill>
+                        </a:defRPr>
+                      </a:pPr>
+                      <a:r>
+                        <a:t>13</a:t>
+                      </a:r>
+                    </a:p>
+                  </a:txBody>
+                  <a:tcPr/>
+                </a:tc>
+              </a:tr>
+              <a:tr h="103366">
+                <a:tc>
+                  <a:txBody>
+                    <a:bodyPr/>
+                    <a:lstStyle/>
+                    <a:p>
+                      <a:pPr algn="ctr">
+                        <a:defRPr sz="1100">
+                          <a:solidFill>
+                            <a:srgbClr val="1E2933"/>
+                          </a:solidFill>
+                        </a:defRPr>
+                      </a:pPr>
+                      <a:r>
+                        <a:t>whiteout-survival-fa4439bf53cb</a:t>
+                      </a:r>
+                    </a:p>
+                  </a:txBody>
+                  <a:tcPr/>
+                </a:tc>
+                <a:tc>
+                  <a:txBody>
+                    <a:bodyPr/>
+                    <a:lstStyle/>
+                    <a:p>
+                      <a:pPr algn="ctr">
+                        <a:defRPr sz="1100">
+                          <a:solidFill>
+                            <a:srgbClr val="1E2933"/>
+                          </a:solidFill>
+                        </a:defRPr>
+                      </a:pPr>
+                      <a:r>
+                        <a:t>Cocos</a:t>
+                      </a:r>
+                    </a:p>
+                  </a:txBody>
+                  <a:tcPr/>
+                </a:tc>
+                <a:tc>
+                  <a:txBody>
+                    <a:bodyPr/>
+                    <a:lstStyle/>
+                    <a:p>
+                      <a:pPr algn="ctr">
+                        <a:defRPr sz="1100">
+                          <a:solidFill>
+                            <a:srgbClr val="1E2933"/>
+                          </a:solidFill>
+                        </a:defRPr>
+                      </a:pPr>
+                      <a:r>
+                        <a:t>OPERATOR_INTERRUPTED</a:t>
+                      </a:r>
+                    </a:p>
+                  </a:txBody>
+                  <a:tcPr/>
+                </a:tc>
+                <a:tc>
+                  <a:txBody>
+                    <a:bodyPr/>
+                    <a:lstStyle/>
+                    <a:p>
+                      <a:pPr algn="ctr">
+                        <a:defRPr sz="1100">
+                          <a:solidFill>
+                            <a:srgbClr val="1E2933"/>
+                          </a:solidFill>
+                        </a:defRPr>
+                      </a:pPr>
+                      <a:r>
+                        <a:t>20</a:t>
+                      </a:r>
+                    </a:p>
+                  </a:txBody>
+                  <a:tcPr/>
+                </a:tc>
+                <a:tc>
+                  <a:txBody>
+                    <a:bodyPr/>
+                    <a:lstStyle/>
+                    <a:p>
+                      <a:pPr algn="ctr">
+                        <a:defRPr sz="1100">
+                          <a:solidFill>
+                            <a:srgbClr val="1E2933"/>
+                          </a:solidFill>
+                        </a:defRPr>
+                      </a:pPr>
+                      <a:r>
+                        <a:t>7</a:t>
+                      </a:r>
+                    </a:p>
+                  </a:txBody>
+                  <a:tcPr/>
+                </a:tc>
+                <a:tc>
+                  <a:txBody>
+                    <a:bodyPr/>
+                    <a:lstStyle/>
+                    <a:p>
+                      <a:pPr algn="ctr">
+                        <a:defRPr sz="1100">
+                          <a:solidFill>
+                            <a:srgbClr val="1E2933"/>
+                          </a:solidFill>
+                        </a:defRPr>
+                      </a:pPr>
+                      <a:r>
+                        <a:t>5</a:t>
+                      </a:r>
+                    </a:p>
+                  </a:txBody>
+                  <a:tcPr/>
+                </a:tc>
+                <a:tc>
+                  <a:txBody>
+                    <a:bodyPr/>
+                    <a:lstStyle/>
+                    <a:p>
+                      <a:pPr algn="ctr">
+                        <a:defRPr sz="1100">
+                          <a:solidFill>
+                            <a:srgbClr val="1E2933"/>
+                          </a:solidFill>
+                        </a:defRPr>
+                      </a:pPr>
+                      <a:r>
+                        <a:t>14</a:t>
+                      </a:r>
+                    </a:p>
+                  </a:txBody>
+                  <a:tcPr/>
+                </a:tc>
+              </a:tr>
+              <a:tr h="103366">
+                <a:tc>
+                  <a:txBody>
+                    <a:bodyPr/>
+                    <a:lstStyle/>
+                    <a:p>
+                      <a:pPr algn="ctr">
+                        <a:defRPr sz="1100">
+                          <a:solidFill>
+                            <a:srgbClr val="1E2933"/>
+                          </a:solidFill>
+                        </a:defRPr>
+                      </a:pPr>
+                      <a:r>
+                        <a:t>kingshot-ce59e2a9a7a3</a:t>
+                      </a:r>
+                    </a:p>
+                  </a:txBody>
+                  <a:tcPr/>
+                </a:tc>
+                <a:tc>
+                  <a:txBody>
+                    <a:bodyPr/>
+                    <a:lstStyle/>
+                    <a:p>
+                      <a:pPr algn="ctr">
+                        <a:defRPr sz="1100">
+                          <a:solidFill>
+                            <a:srgbClr val="1E2933"/>
+                          </a:solidFill>
+                        </a:defRPr>
+                      </a:pPr>
+                      <a:r>
+                        <a:t>Cocos</a:t>
+                      </a:r>
+                    </a:p>
+                  </a:txBody>
+                  <a:tcPr/>
+                </a:tc>
+                <a:tc>
+                  <a:txBody>
+                    <a:bodyPr/>
+                    <a:lstStyle/>
+                    <a:p>
+                      <a:pPr algn="ctr">
+                        <a:defRPr sz="1100">
+                          <a:solidFill>
+                            <a:srgbClr val="1E2933"/>
+                          </a:solidFill>
+                        </a:defRPr>
+                      </a:pPr>
+                      <a:r>
+                        <a:t>RUNTIME_FAULT</a:t>
+                      </a:r>
+                    </a:p>
+                  </a:txBody>
+                  <a:tcPr/>
+                </a:tc>
+                <a:tc>
+                  <a:txBody>
+                    <a:bodyPr/>
+                    <a:lstStyle/>
+                    <a:p>
+                      <a:pPr algn="ctr">
+                        <a:defRPr sz="1100">
+                          <a:solidFill>
+                            <a:srgbClr val="1E2933"/>
+                          </a:solidFill>
+                        </a:defRPr>
+                      </a:pPr>
+                      <a:r>
+                        <a:t>2</a:t>
+                      </a:r>
+                    </a:p>
+                  </a:txBody>
+                  <a:tcPr/>
+                </a:tc>
+                <a:tc>
+                  <a:txBody>
+                    <a:bodyPr/>
+                    <a:lstStyle/>
+                    <a:p>
+                      <a:pPr algn="ctr">
+                        <a:defRPr sz="1100">
+                          <a:solidFill>
+                            <a:srgbClr val="1E2933"/>
+                          </a:solidFill>
+                        </a:defRPr>
+                      </a:pPr>
+                      <a:r>
+                        <a:t>0</a:t>
+                      </a:r>
+                    </a:p>
+                  </a:txBody>
+                  <a:tcPr/>
+                </a:tc>
+                <a:tc>
+                  <a:txBody>
+                    <a:bodyPr/>
+                    <a:lstStyle/>
+                    <a:p>
+                      <a:pPr algn="ctr">
+                        <a:defRPr sz="1100">
+                          <a:solidFill>
+                            <a:srgbClr val="1E2933"/>
+                          </a:solidFill>
+                        </a:defRPr>
+                      </a:pPr>
+                      <a:r>
+                        <a:t>0</a:t>
+                      </a:r>
+                    </a:p>
+                  </a:txBody>
+                  <a:tcPr/>
+                </a:tc>
+                <a:tc>
+                  <a:txBody>
+                    <a:bodyPr/>
+                    <a:lstStyle/>
+                    <a:p>
+                      <a:pPr algn="ctr">
+                        <a:defRPr sz="1100">
+                          <a:solidFill>
+                            <a:srgbClr val="1E2933"/>
+                          </a:solidFill>
+                        </a:defRPr>
+                      </a:pPr>
+                      <a:r>
+                        <a:t>0</a:t>
+                      </a:r>
+                    </a:p>
+                  </a:txBody>
+                  <a:tcPr/>
+                </a:tc>
+              </a:tr>
+              <a:tr h="103388">
+                <a:tc>
+                  <a:txBody>
+                    <a:bodyPr/>
+                    <a:lstStyle/>
+                    <a:p>
+                      <a:pPr algn="ctr">
+                        <a:defRPr sz="1100">
+                          <a:solidFill>
+                            <a:srgbClr val="1E2933"/>
+                          </a:solidFill>
+                        </a:defRPr>
+                      </a:pPr>
+                      <a:r>
+                        <a:t>kingshot-29345f023e9e</a:t>
+                      </a:r>
+                    </a:p>
+                  </a:txBody>
+                  <a:tcPr/>
+                </a:tc>
+                <a:tc>
+                  <a:txBody>
+                    <a:bodyPr/>
+                    <a:lstStyle/>
+                    <a:p>
+                      <a:pPr algn="ctr">
+                        <a:defRPr sz="1100">
+                          <a:solidFill>
+                            <a:srgbClr val="1E2933"/>
+                          </a:solidFill>
+                        </a:defRPr>
+                      </a:pPr>
+                      <a:r>
+                        <a:t>Cocos</a:t>
+                      </a:r>
+                    </a:p>
+                  </a:txBody>
+                  <a:tcPr/>
+                </a:tc>
+                <a:tc>
+                  <a:txBody>
+                    <a:bodyPr/>
+                    <a:lstStyle/>
+                    <a:p>
+                      <a:pPr algn="ctr">
+                        <a:defRPr sz="1100">
+                          <a:solidFill>
+                            <a:srgbClr val="1E2933"/>
+                          </a:solidFill>
+                        </a:defRPr>
+                      </a:pPr>
+                      <a:r>
+                        <a:t>BLOCKED_UNSAFE</a:t>
+                      </a:r>
+                    </a:p>
+                  </a:txBody>
+                  <a:tcPr/>
+                </a:tc>
+                <a:tc>
+                  <a:txBody>
+                    <a:bodyPr/>
+                    <a:lstStyle/>
+                    <a:p>
+                      <a:pPr algn="ctr">
+                        <a:defRPr sz="1100">
+                          <a:solidFill>
+                            <a:srgbClr val="1E2933"/>
+                          </a:solidFill>
+                        </a:defRPr>
+                      </a:pPr>
+                      <a:r>
+                        <a:t>0</a:t>
+                      </a:r>
+                    </a:p>
+                  </a:txBody>
+                  <a:tcPr/>
+                </a:tc>
+                <a:tc>
+                  <a:txBody>
+                    <a:bodyPr/>
+                    <a:lstStyle/>
+                    <a:p>
+                      <a:pPr algn="ctr">
+                        <a:defRPr sz="1100">
+                          <a:solidFill>
+                            <a:srgbClr val="1E2933"/>
+                          </a:solidFill>
+                        </a:defRPr>
+                      </a:pPr>
+                      <a:r>
+                        <a:t>0</a:t>
+                      </a:r>
+                    </a:p>
+                  </a:txBody>
+                  <a:tcPr/>
+                </a:tc>
+                <a:tc>
+                  <a:txBody>
+                    <a:bodyPr/>
+                    <a:lstStyle/>
+                    <a:p>
+                      <a:pPr algn="ctr">
+                        <a:defRPr sz="1100">
+                          <a:solidFill>
+                            <a:srgbClr val="1E2933"/>
+                          </a:solidFill>
+                        </a:defRPr>
+                      </a:pPr>
+                      <a:r>
+                        <a:t>0</a:t>
+                      </a:r>
+                    </a:p>
+                  </a:txBody>
+                  <a:tcPr/>
+                </a:tc>
+                <a:tc>
+                  <a:txBody>
+                    <a:bodyPr/>
+                    <a:lstStyle/>
+                    <a:p>
+                      <a:pPr algn="ctr">
+                        <a:defRPr sz="1100">
+                          <a:solidFill>
+                            <a:srgbClr val="1E2933"/>
+                          </a:solidFill>
+                        </a:defRPr>
+                      </a:pPr>
+                      <a:r>
+                        <a:t>0</a:t>
+                      </a:r>
+                    </a:p>
+                  </a:txBody>
+                  <a:tcPr/>
+                </a:tc>
+              </a:tr>
+            </a:tbl>
+          </a:graphicData>
+        </a:graphic>
+      </p:graphicFrame>
+      <p:sp>
+        <p:nvSpPr>
+          <p:cNvPr id="17" name="Rounded Rectangle 16"/>
           <p:cNvSpPr/>
           <p:nvPr/>
         </p:nvSpPr>
         <p:spPr>
           <a:xfrm>
-            <a:off x="777240" y="5074920"/>
-            <a:ext cx="10972800" cy="822960"/>
+            <a:off x="594360" y="5989320"/>
+            <a:ext cx="11247120" cy="502920"/>
           </a:xfrm>
           <a:prstGeom prst="roundRect">
             <a:avLst/>
@@ -23979,7 +27019,7 @@
           <a:lstStyle/>
           <a:p>
             <a:pPr algn="ctr">
-              <a:defRPr sz="1400" b="0">
+              <a:defRPr sz="1300" b="0">
                 <a:solidFill>
                   <a:srgbClr val="1E2933"/>
                 </a:solidFill>
@@ -23987,14 +27027,14 @@
               </a:defRPr>
             </a:pPr>
             <a:r>
-              <a:t>核心原则：把贵且慢的云端调用摊到多步，本地 VLM 只提供「证据」，规则引擎负责零延迟执行。</a:t>
-            </a:r>
-          </a:p>
-        </p:txBody>
-      </p:sp>
-      <p:sp>
-        <p:nvSpPr>
-          <p:cNvPr id="23" name="Rectangle 22"/>
+              <a:t>50 游戏清单全部跑完（48 run）：30 个有 gameplay（62.5%），平均 8.4gp/13.4a；最佳 kingshot-830518bfdad4：19gp/21a。mimo-v2.5 大策略经 normalizer 通过 harness 严格契约（planner_rejected=0）。</a:t>
+            </a:r>
+          </a:p>
+        </p:txBody>
+      </p:sp>
+      <p:sp>
+        <p:nvSpPr>
+          <p:cNvPr id="18" name="Rectangle 17"/>
           <p:cNvSpPr/>
           <p:nvPr/>
         </p:nvSpPr>
@@ -24035,7 +27075,7 @@
       </p:sp>
       <p:sp>
         <p:nvSpPr>
-          <p:cNvPr id="24" name="TextBox 23"/>
+          <p:cNvPr id="19" name="TextBox 18"/>
           <p:cNvSpPr txBox="1"/>
           <p:nvPr/>
         </p:nvSpPr>
@@ -24071,7 +27111,7 @@
       </p:sp>
       <p:sp>
         <p:nvSpPr>
-          <p:cNvPr id="25" name="TextBox 24"/>
+          <p:cNvPr id="20" name="TextBox 19"/>
           <p:cNvSpPr txBox="1"/>
           <p:nvPr/>
         </p:nvSpPr>
@@ -24100,7 +27140,7 @@
               </a:defRPr>
             </a:pPr>
             <a:r>
-              <a:t>37/40</a:t>
+              <a:t>37/42</a:t>
             </a:r>
           </a:p>
         </p:txBody>
@@ -24132,7 +27172,7 @@
         <p:spPr>
           <a:xfrm>
             <a:off x="0" y="0"/>
-            <a:ext cx="12191695" cy="6858000"/>
+            <a:ext cx="12191695" cy="960120"/>
           </a:xfrm>
           <a:prstGeom prst="rect">
             <a:avLst/>
@@ -24166,23 +27206,56 @@
       </p:sp>
       <p:sp>
         <p:nvSpPr>
-          <p:cNvPr id="3" name="Rectangle 2"/>
+          <p:cNvPr id="3" name="TextBox 2"/>
+          <p:cNvSpPr txBox="1"/>
+          <p:nvPr/>
+        </p:nvSpPr>
+        <p:spPr>
+          <a:xfrm>
+            <a:off x="457200" y="228600"/>
+            <a:ext cx="11247120" cy="548640"/>
+          </a:xfrm>
+          <a:prstGeom prst="rect">
+            <a:avLst/>
+          </a:prstGeom>
+          <a:noFill/>
+        </p:spPr>
+        <p:txBody>
+          <a:bodyPr wrap="none">
+            <a:spAutoFit/>
+          </a:bodyPr>
+          <a:lstStyle/>
+          <a:p>
+            <a:pPr algn="l">
+              <a:defRPr sz="3000" b="1">
+                <a:solidFill>
+                  <a:srgbClr val="F3F6F9"/>
+                </a:solidFill>
+                <a:latin typeface="Microsoft YaHei"/>
+              </a:defRPr>
+            </a:pPr>
+            <a:r>
+              <a:t>L1 画面理解层：VLM /observe 适配器</a:t>
+            </a:r>
+          </a:p>
+        </p:txBody>
+      </p:sp>
+      <p:sp>
+        <p:nvSpPr>
+          <p:cNvPr id="4" name="Rectangle 3"/>
           <p:cNvSpPr/>
           <p:nvPr/>
         </p:nvSpPr>
         <p:spPr>
           <a:xfrm>
-            <a:off x="6858000" y="-914400"/>
-            <a:ext cx="5943600" cy="8686800"/>
-          </a:xfrm>
-          <a:prstGeom prst="rect">
-            <a:avLst/>
-          </a:prstGeom>
-          <a:solidFill>
-            <a:srgbClr val="0096C7">
-              <a:lumMod val="80000"/>
-              <a:lumOff val="20000"/>
-            </a:srgbClr>
+            <a:off x="0" y="960120"/>
+            <a:ext cx="164592" cy="5897880"/>
+          </a:xfrm>
+          <a:prstGeom prst="rect">
+            <a:avLst/>
+          </a:prstGeom>
+          <a:solidFill>
+            <a:srgbClr val="1A237E"/>
           </a:solidFill>
           <a:ln/>
         </p:spPr>
@@ -24210,94 +27283,26 @@
       </p:sp>
       <p:sp>
         <p:nvSpPr>
-          <p:cNvPr id="4" name="TextBox 3"/>
-          <p:cNvSpPr txBox="1"/>
-          <p:nvPr/>
-        </p:nvSpPr>
-        <p:spPr>
-          <a:xfrm>
-            <a:off x="548640" y="1645920"/>
-            <a:ext cx="2743200" cy="1828800"/>
-          </a:xfrm>
-          <a:prstGeom prst="rect">
-            <a:avLst/>
-          </a:prstGeom>
-          <a:noFill/>
-        </p:spPr>
-        <p:txBody>
-          <a:bodyPr wrap="none">
-            <a:spAutoFit/>
-          </a:bodyPr>
-          <a:lstStyle/>
-          <a:p>
-            <a:pPr algn="l">
-              <a:defRPr sz="12000" b="1">
-                <a:solidFill>
-                  <a:srgbClr val="333DA0"/>
-                </a:solidFill>
-                <a:latin typeface="Microsoft YaHei"/>
-              </a:defRPr>
-            </a:pPr>
-            <a:r>
-              <a:t>10</a:t>
-            </a:r>
-          </a:p>
-        </p:txBody>
-      </p:sp>
-      <p:sp>
-        <p:nvSpPr>
-          <p:cNvPr id="5" name="TextBox 4"/>
-          <p:cNvSpPr txBox="1"/>
-          <p:nvPr/>
-        </p:nvSpPr>
-        <p:spPr>
-          <a:xfrm>
-            <a:off x="548640" y="2834640"/>
-            <a:ext cx="11064240" cy="1097280"/>
-          </a:xfrm>
-          <a:prstGeom prst="rect">
-            <a:avLst/>
-          </a:prstGeom>
-          <a:noFill/>
-        </p:spPr>
-        <p:txBody>
-          <a:bodyPr wrap="none">
-            <a:spAutoFit/>
-          </a:bodyPr>
-          <a:lstStyle/>
-          <a:p>
-            <a:pPr algn="l">
-              <a:defRPr sz="4400" b="1">
-                <a:solidFill>
-                  <a:srgbClr val="F3F6F9"/>
-                </a:solidFill>
-                <a:latin typeface="Microsoft YaHei"/>
-              </a:defRPr>
-            </a:pPr>
-            <a:r>
-              <a:t>下一步</a:t>
-            </a:r>
-          </a:p>
-        </p:txBody>
-      </p:sp>
-      <p:sp>
-        <p:nvSpPr>
-          <p:cNvPr id="6" name="Rectangle 5"/>
+          <p:cNvPr id="5" name="Rectangle 4"/>
           <p:cNvSpPr/>
           <p:nvPr/>
         </p:nvSpPr>
         <p:spPr>
           <a:xfrm>
-            <a:off x="548640" y="4023360"/>
-            <a:ext cx="1828800" cy="73152"/>
-          </a:xfrm>
-          <a:prstGeom prst="rect">
-            <a:avLst/>
-          </a:prstGeom>
-          <a:solidFill>
-            <a:srgbClr val="FF6B35"/>
-          </a:solidFill>
-          <a:ln/>
+            <a:off x="320040" y="1078992"/>
+            <a:ext cx="11548872" cy="5349240"/>
+          </a:xfrm>
+          <a:prstGeom prst="rect">
+            <a:avLst/>
+          </a:prstGeom>
+          <a:solidFill>
+            <a:srgbClr val="FFFFFF"/>
+          </a:solidFill>
+          <a:ln w="12700">
+            <a:solidFill>
+              <a:srgbClr val="E1E5E9"/>
+            </a:solidFill>
+          </a:ln>
         </p:spPr>
         <p:style>
           <a:lnRef idx="1">
@@ -24323,20 +27328,20 @@
       </p:sp>
       <p:sp>
         <p:nvSpPr>
-          <p:cNvPr id="7" name="Rectangle 6"/>
+          <p:cNvPr id="6" name="Rounded Rectangle 5"/>
           <p:cNvSpPr/>
           <p:nvPr/>
         </p:nvSpPr>
         <p:spPr>
           <a:xfrm>
-            <a:off x="0" y="6537960"/>
-            <a:ext cx="12191695" cy="18288"/>
-          </a:xfrm>
-          <a:prstGeom prst="rect">
-            <a:avLst/>
-          </a:prstGeom>
-          <a:solidFill>
-            <a:srgbClr val="0096C7"/>
+            <a:off x="621792" y="1353312"/>
+            <a:ext cx="5486400" cy="2103120"/>
+          </a:xfrm>
+          <a:prstGeom prst="roundRect">
+            <a:avLst/>
+          </a:prstGeom>
+          <a:solidFill>
+            <a:srgbClr val="D0D5DA"/>
           </a:solidFill>
           <a:ln/>
         </p:spPr>
@@ -24364,14 +27369,100 @@
       </p:sp>
       <p:sp>
         <p:nvSpPr>
-          <p:cNvPr id="8" name="TextBox 7"/>
+          <p:cNvPr id="7" name="Rounded Rectangle 6"/>
+          <p:cNvSpPr/>
+          <p:nvPr/>
+        </p:nvSpPr>
+        <p:spPr>
+          <a:xfrm>
+            <a:off x="594360" y="1325880"/>
+            <a:ext cx="5486400" cy="2103120"/>
+          </a:xfrm>
+          <a:prstGeom prst="roundRect">
+            <a:avLst/>
+          </a:prstGeom>
+          <a:solidFill>
+            <a:srgbClr val="FFFFFF"/>
+          </a:solidFill>
+          <a:ln w="12700">
+            <a:solidFill>
+              <a:srgbClr val="DDE2E6"/>
+            </a:solidFill>
+          </a:ln>
+        </p:spPr>
+        <p:style>
+          <a:lnRef idx="1">
+            <a:schemeClr val="accent1"/>
+          </a:lnRef>
+          <a:fillRef idx="3">
+            <a:schemeClr val="accent1"/>
+          </a:fillRef>
+          <a:effectRef idx="2">
+            <a:schemeClr val="accent1"/>
+          </a:effectRef>
+          <a:fontRef idx="minor">
+            <a:schemeClr val="lt1"/>
+          </a:fontRef>
+        </p:style>
+        <p:txBody>
+          <a:bodyPr rtlCol="0" anchor="ctr"/>
+          <a:lstStyle/>
+          <a:p>
+            <a:pPr algn="ctr"/>
+          </a:p>
+        </p:txBody>
+      </p:sp>
+      <p:sp>
+        <p:nvSpPr>
+          <p:cNvPr id="8" name="Rectangle 7"/>
+          <p:cNvSpPr/>
+          <p:nvPr/>
+        </p:nvSpPr>
+        <p:spPr>
+          <a:xfrm>
+            <a:off x="594360" y="1325880"/>
+            <a:ext cx="5486400" cy="411480"/>
+          </a:xfrm>
+          <a:prstGeom prst="rect">
+            <a:avLst/>
+          </a:prstGeom>
+          <a:solidFill>
+            <a:srgbClr val="FF6B35"/>
+          </a:solidFill>
+          <a:ln/>
+        </p:spPr>
+        <p:style>
+          <a:lnRef idx="1">
+            <a:schemeClr val="accent1"/>
+          </a:lnRef>
+          <a:fillRef idx="3">
+            <a:schemeClr val="accent1"/>
+          </a:fillRef>
+          <a:effectRef idx="2">
+            <a:schemeClr val="accent1"/>
+          </a:effectRef>
+          <a:fontRef idx="minor">
+            <a:schemeClr val="lt1"/>
+          </a:fontRef>
+        </p:style>
+        <p:txBody>
+          <a:bodyPr rtlCol="0" anchor="ctr"/>
+          <a:lstStyle/>
+          <a:p>
+            <a:pPr algn="ctr"/>
+          </a:p>
+        </p:txBody>
+      </p:sp>
+      <p:sp>
+        <p:nvSpPr>
+          <p:cNvPr id="9" name="TextBox 8"/>
           <p:cNvSpPr txBox="1"/>
           <p:nvPr/>
         </p:nvSpPr>
         <p:spPr>
           <a:xfrm>
-            <a:off x="457200" y="6583680"/>
-            <a:ext cx="3657600" cy="228600"/>
+            <a:off x="667512" y="1399032"/>
+            <a:ext cx="5340096" cy="320040"/>
           </a:xfrm>
           <a:prstGeom prst="rect">
             <a:avLst/>
@@ -24385,29 +27476,243 @@
           <a:lstStyle/>
           <a:p>
             <a:pPr algn="l">
-              <a:defRPr sz="1000" b="0">
-                <a:solidFill>
-                  <a:srgbClr val="6C757D"/>
-                </a:solidFill>
-                <a:latin typeface="Microsoft YaHei"/>
-              </a:defRPr>
-            </a:pPr>
-            <a:r>
-              <a:t>smallgameagent · LLM/VLM + 规则驱动</a:t>
-            </a:r>
-          </a:p>
-        </p:txBody>
-      </p:sp>
-      <p:sp>
-        <p:nvSpPr>
-          <p:cNvPr id="9" name="TextBox 8"/>
+              <a:defRPr sz="1400" b="1">
+                <a:solidFill>
+                  <a:srgbClr val="F3F6F9"/>
+                </a:solidFill>
+                <a:latin typeface="Microsoft YaHei"/>
+              </a:defRPr>
+            </a:pPr>
+            <a:r>
+              <a:t>实现（src/inference/vlm_observe_adapter.py）</a:t>
+            </a:r>
+          </a:p>
+        </p:txBody>
+      </p:sp>
+      <p:sp>
+        <p:nvSpPr>
+          <p:cNvPr id="10" name="TextBox 9"/>
           <p:cNvSpPr txBox="1"/>
           <p:nvPr/>
         </p:nvSpPr>
         <p:spPr>
           <a:xfrm>
-            <a:off x="10789920" y="6583680"/>
-            <a:ext cx="914400" cy="228600"/>
+            <a:off x="704088" y="1828800"/>
+            <a:ext cx="5266944" cy="1508760"/>
+          </a:xfrm>
+          <a:prstGeom prst="rect">
+            <a:avLst/>
+          </a:prstGeom>
+          <a:noFill/>
+        </p:spPr>
+        <p:txBody>
+          <a:bodyPr wrap="square">
+            <a:spAutoFit/>
+          </a:bodyPr>
+          <a:lstStyle/>
+          <a:p>
+            <a:pPr algn="l">
+              <a:spcAft>
+                <a:spcPts val="500"/>
+              </a:spcAft>
+              <a:defRPr sz="1200" b="0">
+                <a:solidFill>
+                  <a:srgbClr val="1E2933"/>
+                </a:solidFill>
+                <a:latin typeface="Microsoft YaHei"/>
+              </a:defRPr>
+            </a:pPr>
+            <a:r>
+              <a:t>FastAPI 服务监听 8765，实现 harness /observe 协议</a:t>
+            </a:r>
+          </a:p>
+          <a:p>
+            <a:pPr algn="l">
+              <a:spcAft>
+                <a:spcPts val="500"/>
+              </a:spcAft>
+              <a:defRPr sz="1200" b="0">
+                <a:solidFill>
+                  <a:srgbClr val="1E2933"/>
+                </a:solidFill>
+                <a:latin typeface="Microsoft YaHei"/>
+              </a:defRPr>
+            </a:pPr>
+            <a:r>
+              <a:t>后端可切换：kimi-k2.6（云端视觉）/ qwen / opencodego / 本地 VLM</a:t>
+            </a:r>
+          </a:p>
+          <a:p>
+            <a:pPr algn="l">
+              <a:spcAft>
+                <a:spcPts val="500"/>
+              </a:spcAft>
+              <a:defRPr sz="1200" b="0">
+                <a:solidFill>
+                  <a:srgbClr val="1E2933"/>
+                </a:solidFill>
+                <a:latin typeface="Microsoft YaHei"/>
+              </a:defRPr>
+            </a:pPr>
+            <a:r>
+              <a:t>kimi 修复：只允许 temperature=1；输出剥离 prose 提取纯 JSON</a:t>
+            </a:r>
+          </a:p>
+          <a:p>
+            <a:pPr algn="l">
+              <a:spcAft>
+                <a:spcPts val="500"/>
+              </a:spcAft>
+              <a:defRPr sz="1200" b="0">
+                <a:solidFill>
+                  <a:srgbClr val="1E2933"/>
+                </a:solidFill>
+                <a:latin typeface="Microsoft YaHei"/>
+              </a:defRPr>
+            </a:pPr>
+            <a:r>
+              <a:t>延迟 8-17s/次（kimi 视觉 + reasoning）</a:t>
+            </a:r>
+          </a:p>
+        </p:txBody>
+      </p:sp>
+      <p:sp>
+        <p:nvSpPr>
+          <p:cNvPr id="11" name="Rounded Rectangle 10"/>
+          <p:cNvSpPr/>
+          <p:nvPr/>
+        </p:nvSpPr>
+        <p:spPr>
+          <a:xfrm>
+            <a:off x="6382512" y="1353312"/>
+            <a:ext cx="5486400" cy="2103120"/>
+          </a:xfrm>
+          <a:prstGeom prst="roundRect">
+            <a:avLst/>
+          </a:prstGeom>
+          <a:solidFill>
+            <a:srgbClr val="D0D5DA"/>
+          </a:solidFill>
+          <a:ln/>
+        </p:spPr>
+        <p:style>
+          <a:lnRef idx="1">
+            <a:schemeClr val="accent1"/>
+          </a:lnRef>
+          <a:fillRef idx="3">
+            <a:schemeClr val="accent1"/>
+          </a:fillRef>
+          <a:effectRef idx="2">
+            <a:schemeClr val="accent1"/>
+          </a:effectRef>
+          <a:fontRef idx="minor">
+            <a:schemeClr val="lt1"/>
+          </a:fontRef>
+        </p:style>
+        <p:txBody>
+          <a:bodyPr rtlCol="0" anchor="ctr"/>
+          <a:lstStyle/>
+          <a:p>
+            <a:pPr algn="ctr"/>
+          </a:p>
+        </p:txBody>
+      </p:sp>
+      <p:sp>
+        <p:nvSpPr>
+          <p:cNvPr id="12" name="Rounded Rectangle 11"/>
+          <p:cNvSpPr/>
+          <p:nvPr/>
+        </p:nvSpPr>
+        <p:spPr>
+          <a:xfrm>
+            <a:off x="6355080" y="1325880"/>
+            <a:ext cx="5486400" cy="2103120"/>
+          </a:xfrm>
+          <a:prstGeom prst="roundRect">
+            <a:avLst/>
+          </a:prstGeom>
+          <a:solidFill>
+            <a:srgbClr val="FFFFFF"/>
+          </a:solidFill>
+          <a:ln w="12700">
+            <a:solidFill>
+              <a:srgbClr val="DDE2E6"/>
+            </a:solidFill>
+          </a:ln>
+        </p:spPr>
+        <p:style>
+          <a:lnRef idx="1">
+            <a:schemeClr val="accent1"/>
+          </a:lnRef>
+          <a:fillRef idx="3">
+            <a:schemeClr val="accent1"/>
+          </a:fillRef>
+          <a:effectRef idx="2">
+            <a:schemeClr val="accent1"/>
+          </a:effectRef>
+          <a:fontRef idx="minor">
+            <a:schemeClr val="lt1"/>
+          </a:fontRef>
+        </p:style>
+        <p:txBody>
+          <a:bodyPr rtlCol="0" anchor="ctr"/>
+          <a:lstStyle/>
+          <a:p>
+            <a:pPr algn="ctr"/>
+          </a:p>
+        </p:txBody>
+      </p:sp>
+      <p:sp>
+        <p:nvSpPr>
+          <p:cNvPr id="13" name="Rectangle 12"/>
+          <p:cNvSpPr/>
+          <p:nvPr/>
+        </p:nvSpPr>
+        <p:spPr>
+          <a:xfrm>
+            <a:off x="6355080" y="1325880"/>
+            <a:ext cx="5486400" cy="411480"/>
+          </a:xfrm>
+          <a:prstGeom prst="rect">
+            <a:avLst/>
+          </a:prstGeom>
+          <a:solidFill>
+            <a:srgbClr val="28A745"/>
+          </a:solidFill>
+          <a:ln/>
+        </p:spPr>
+        <p:style>
+          <a:lnRef idx="1">
+            <a:schemeClr val="accent1"/>
+          </a:lnRef>
+          <a:fillRef idx="3">
+            <a:schemeClr val="accent1"/>
+          </a:fillRef>
+          <a:effectRef idx="2">
+            <a:schemeClr val="accent1"/>
+          </a:effectRef>
+          <a:fontRef idx="minor">
+            <a:schemeClr val="lt1"/>
+          </a:fontRef>
+        </p:style>
+        <p:txBody>
+          <a:bodyPr rtlCol="0" anchor="ctr"/>
+          <a:lstStyle/>
+          <a:p>
+            <a:pPr algn="ctr"/>
+          </a:p>
+        </p:txBody>
+      </p:sp>
+      <p:sp>
+        <p:nvSpPr>
+          <p:cNvPr id="14" name="TextBox 13"/>
+          <p:cNvSpPr txBox="1"/>
+          <p:nvPr/>
+        </p:nvSpPr>
+        <p:spPr>
+          <a:xfrm>
+            <a:off x="6428232" y="1399032"/>
+            <a:ext cx="5340096" cy="320040"/>
           </a:xfrm>
           <a:prstGeom prst="rect">
             <a:avLst/>
@@ -24420,6 +27725,273 @@
           </a:bodyPr>
           <a:lstStyle/>
           <a:p>
+            <a:pPr algn="l">
+              <a:defRPr sz="1400" b="1">
+                <a:solidFill>
+                  <a:srgbClr val="F3F6F9"/>
+                </a:solidFill>
+                <a:latin typeface="Microsoft YaHei"/>
+              </a:defRPr>
+            </a:pPr>
+            <a:r>
+              <a:t>VLM 参与前后对比</a:t>
+            </a:r>
+          </a:p>
+        </p:txBody>
+      </p:sp>
+      <p:sp>
+        <p:nvSpPr>
+          <p:cNvPr id="15" name="TextBox 14"/>
+          <p:cNvSpPr txBox="1"/>
+          <p:nvPr/>
+        </p:nvSpPr>
+        <p:spPr>
+          <a:xfrm>
+            <a:off x="6464808" y="1828800"/>
+            <a:ext cx="5266944" cy="1508760"/>
+          </a:xfrm>
+          <a:prstGeom prst="rect">
+            <a:avLst/>
+          </a:prstGeom>
+          <a:noFill/>
+        </p:spPr>
+        <p:txBody>
+          <a:bodyPr wrap="square">
+            <a:spAutoFit/>
+          </a:bodyPr>
+          <a:lstStyle/>
+          <a:p>
+            <a:pPr algn="l">
+              <a:spcAft>
+                <a:spcPts val="500"/>
+              </a:spcAft>
+              <a:defRPr sz="1200" b="0">
+                <a:solidFill>
+                  <a:srgbClr val="1E2933"/>
+                </a:solidFill>
+                <a:latin typeface="Microsoft YaHei"/>
+              </a:defRPr>
+            </a:pPr>
+            <a:r>
+              <a:t>14 游戏对照：5 提升 / 2 持平 / 6 下降</a:t>
+            </a:r>
+          </a:p>
+          <a:p>
+            <a:pPr algn="l">
+              <a:spcAft>
+                <a:spcPts val="500"/>
+              </a:spcAft>
+              <a:defRPr sz="1200" b="0">
+                <a:solidFill>
+                  <a:srgbClr val="1E2933"/>
+                </a:solidFill>
+                <a:latin typeface="Microsoft YaHei"/>
+              </a:defRPr>
+            </a:pPr>
+            <a:r>
+              <a:t>大幅提升：12ab 10→228、8779 5→18、94766 7→19（+171%+）</a:t>
+            </a:r>
+          </a:p>
+          <a:p>
+            <a:pPr algn="l">
+              <a:spcAft>
+                <a:spcPts val="500"/>
+              </a:spcAft>
+              <a:defRPr sz="1200" b="0">
+                <a:solidFill>
+                  <a:srgbClr val="1E2933"/>
+                </a:solidFill>
+                <a:latin typeface="Microsoft YaHei"/>
+              </a:defRPr>
+            </a:pPr>
+            <a:r>
+              <a:t>规律：画面信息关键的策略大幅提升；文本驱动游戏 VLM 延迟拖累</a:t>
+            </a:r>
+          </a:p>
+          <a:p>
+            <a:pPr algn="l">
+              <a:spcAft>
+                <a:spcPts val="500"/>
+              </a:spcAft>
+              <a:defRPr sz="1200" b="0">
+                <a:solidFill>
+                  <a:srgbClr val="1E2933"/>
+                </a:solidFill>
+                <a:latin typeface="Microsoft YaHei"/>
+              </a:defRPr>
+            </a:pPr>
+            <a:r>
+              <a:t>落地：VlmCallPolicy 自适应开关（进展跳 VLM/卡住触发/任务分级）+ 本地低延迟 VLM</a:t>
+            </a:r>
+          </a:p>
+          <a:p>
+            <a:pPr algn="l">
+              <a:spcAft>
+                <a:spcPts val="500"/>
+              </a:spcAft>
+              <a:defRPr sz="1200" b="0">
+                <a:solidFill>
+                  <a:srgbClr val="1E2933"/>
+                </a:solidFill>
+                <a:latin typeface="Microsoft YaHei"/>
+              </a:defRPr>
+            </a:pPr>
+            <a:r>
+              <a:t>规则在线更新：RuleUpdateTrigger 阈值触发 + param/code_file 应用 + 安全回滚</a:t>
+            </a:r>
+          </a:p>
+        </p:txBody>
+      </p:sp>
+      <p:sp>
+        <p:nvSpPr>
+          <p:cNvPr id="16" name="Rounded Rectangle 15"/>
+          <p:cNvSpPr/>
+          <p:nvPr/>
+        </p:nvSpPr>
+        <p:spPr>
+          <a:xfrm>
+            <a:off x="594360" y="3611880"/>
+            <a:ext cx="11247120" cy="548640"/>
+          </a:xfrm>
+          <a:prstGeom prst="roundRect">
+            <a:avLst/>
+          </a:prstGeom>
+          <a:solidFill>
+            <a:srgbClr val="F3F6F9"/>
+          </a:solidFill>
+          <a:ln/>
+        </p:spPr>
+        <p:style>
+          <a:lnRef idx="1">
+            <a:schemeClr val="accent1"/>
+          </a:lnRef>
+          <a:fillRef idx="3">
+            <a:schemeClr val="accent1"/>
+          </a:fillRef>
+          <a:effectRef idx="2">
+            <a:schemeClr val="accent1"/>
+          </a:effectRef>
+          <a:fontRef idx="minor">
+            <a:schemeClr val="lt1"/>
+          </a:fontRef>
+        </p:style>
+        <p:txBody>
+          <a:bodyPr rtlCol="0" anchor="ctr"/>
+          <a:lstStyle/>
+          <a:p>
+            <a:pPr algn="ctr">
+              <a:defRPr sz="1300" b="0">
+                <a:solidFill>
+                  <a:srgbClr val="1E2933"/>
+                </a:solidFill>
+                <a:latin typeface="Microsoft YaHei"/>
+              </a:defRPr>
+            </a:pPr>
+            <a:r>
+              <a:t>L1 层就绪：本地 Qwen3.5-4B（QLoRA 微调后）可切换为低延迟本地后端，构成「本地画面理解 → 云端长程规划」三层协同。</a:t>
+            </a:r>
+          </a:p>
+        </p:txBody>
+      </p:sp>
+      <p:sp>
+        <p:nvSpPr>
+          <p:cNvPr id="17" name="Rectangle 16"/>
+          <p:cNvSpPr/>
+          <p:nvPr/>
+        </p:nvSpPr>
+        <p:spPr>
+          <a:xfrm>
+            <a:off x="0" y="6537960"/>
+            <a:ext cx="12191695" cy="18288"/>
+          </a:xfrm>
+          <a:prstGeom prst="rect">
+            <a:avLst/>
+          </a:prstGeom>
+          <a:solidFill>
+            <a:srgbClr val="0096C7"/>
+          </a:solidFill>
+          <a:ln/>
+        </p:spPr>
+        <p:style>
+          <a:lnRef idx="1">
+            <a:schemeClr val="accent1"/>
+          </a:lnRef>
+          <a:fillRef idx="3">
+            <a:schemeClr val="accent1"/>
+          </a:fillRef>
+          <a:effectRef idx="2">
+            <a:schemeClr val="accent1"/>
+          </a:effectRef>
+          <a:fontRef idx="minor">
+            <a:schemeClr val="lt1"/>
+          </a:fontRef>
+        </p:style>
+        <p:txBody>
+          <a:bodyPr rtlCol="0" anchor="ctr"/>
+          <a:lstStyle/>
+          <a:p>
+            <a:pPr algn="ctr"/>
+          </a:p>
+        </p:txBody>
+      </p:sp>
+      <p:sp>
+        <p:nvSpPr>
+          <p:cNvPr id="18" name="TextBox 17"/>
+          <p:cNvSpPr txBox="1"/>
+          <p:nvPr/>
+        </p:nvSpPr>
+        <p:spPr>
+          <a:xfrm>
+            <a:off x="457200" y="6583680"/>
+            <a:ext cx="3657600" cy="228600"/>
+          </a:xfrm>
+          <a:prstGeom prst="rect">
+            <a:avLst/>
+          </a:prstGeom>
+          <a:noFill/>
+        </p:spPr>
+        <p:txBody>
+          <a:bodyPr wrap="none">
+            <a:spAutoFit/>
+          </a:bodyPr>
+          <a:lstStyle/>
+          <a:p>
+            <a:pPr algn="l">
+              <a:defRPr sz="1000" b="0">
+                <a:solidFill>
+                  <a:srgbClr val="6C757D"/>
+                </a:solidFill>
+                <a:latin typeface="Microsoft YaHei"/>
+              </a:defRPr>
+            </a:pPr>
+            <a:r>
+              <a:t>smallgameagent · LLM/VLM + 规则驱动</a:t>
+            </a:r>
+          </a:p>
+        </p:txBody>
+      </p:sp>
+      <p:sp>
+        <p:nvSpPr>
+          <p:cNvPr id="19" name="TextBox 18"/>
+          <p:cNvSpPr txBox="1"/>
+          <p:nvPr/>
+        </p:nvSpPr>
+        <p:spPr>
+          <a:xfrm>
+            <a:off x="10789920" y="6583680"/>
+            <a:ext cx="914400" cy="228600"/>
+          </a:xfrm>
+          <a:prstGeom prst="rect">
+            <a:avLst/>
+          </a:prstGeom>
+          <a:noFill/>
+        </p:spPr>
+        <p:txBody>
+          <a:bodyPr wrap="none">
+            <a:spAutoFit/>
+          </a:bodyPr>
+          <a:lstStyle/>
+          <a:p>
             <a:pPr algn="r">
               <a:defRPr sz="1000" b="0">
                 <a:solidFill>
@@ -24429,7 +28001,7 @@
               </a:defRPr>
             </a:pPr>
             <a:r>
-              <a:t>38/40</a:t>
+              <a:t>38/42</a:t>
             </a:r>
           </a:p>
         </p:txBody>
@@ -24524,7 +28096,7 @@
               </a:defRPr>
             </a:pPr>
             <a:r>
-              <a:t>下一步：把实验变成稳定系统</a:t>
+              <a:t>技术路线图：从能跑到好用</a:t>
             </a:r>
           </a:p>
         </p:txBody>
@@ -24617,155 +28189,20 @@
       </p:sp>
       <p:sp>
         <p:nvSpPr>
-          <p:cNvPr id="6" name="TextBox 5"/>
-          <p:cNvSpPr txBox="1"/>
-          <p:nvPr/>
-        </p:nvSpPr>
-        <p:spPr>
-          <a:xfrm>
-            <a:off x="777240" y="1417320"/>
-            <a:ext cx="10972800" cy="5029200"/>
-          </a:xfrm>
-          <a:prstGeom prst="rect">
-            <a:avLst/>
-          </a:prstGeom>
-          <a:noFill/>
-        </p:spPr>
-        <p:txBody>
-          <a:bodyPr wrap="square">
-            <a:spAutoFit/>
-          </a:bodyPr>
-          <a:lstStyle/>
-          <a:p>
-            <a:pPr algn="l">
-              <a:spcAft>
-                <a:spcPts val="1200"/>
-              </a:spcAft>
-              <a:defRPr sz="1800" b="0">
-                <a:solidFill>
-                  <a:srgbClr val="1E2933"/>
-                </a:solidFill>
-                <a:latin typeface="Microsoft YaHei"/>
-              </a:defRPr>
-            </a:pPr>
-            <a:r>
-              <a:t>  在真实游戏运行中触发 code-file 更新，验证动态 stall/composite 下 L2 的决策质量</a:t>
-            </a:r>
-          </a:p>
-          <a:p>
-            <a:pPr algn="l">
-              <a:spcAft>
-                <a:spcPts val="1200"/>
-              </a:spcAft>
-              <a:defRPr sz="1800" b="0">
-                <a:solidFill>
-                  <a:srgbClr val="1E2933"/>
-                </a:solidFill>
-                <a:latin typeface="Microsoft YaHei"/>
-              </a:defRPr>
-            </a:pPr>
-            <a:r>
-              <a:t>  把 runtime_rules.json 的 schema 写进 L2 prompt，约束可改字段与取值范围</a:t>
-            </a:r>
-          </a:p>
-          <a:p>
-            <a:pPr algn="l">
-              <a:spcAft>
-                <a:spcPts val="1200"/>
-              </a:spcAft>
-              <a:defRPr sz="1800" b="0">
-                <a:solidFill>
-                  <a:srgbClr val="1E2933"/>
-                </a:solidFill>
-                <a:latin typeface="Microsoft YaHei"/>
-              </a:defRPr>
-            </a:pPr>
-            <a:r>
-              <a:t>  让本地 VLM 常驻，验证 L1 战术修正对 joystick 游戏的实际收益</a:t>
-            </a:r>
-          </a:p>
-          <a:p>
-            <a:pPr algn="l">
-              <a:spcAft>
-                <a:spcPts val="1200"/>
-              </a:spcAft>
-              <a:defRPr sz="1800" b="0">
-                <a:solidFill>
-                  <a:srgbClr val="1E2933"/>
-                </a:solidFill>
-                <a:latin typeface="Microsoft YaHei"/>
-              </a:defRPr>
-            </a:pPr>
-            <a:r>
-              <a:t>  在 5090 服务器跑 QLoRA 微调，把本地 VLM 训练成专用画面理解器</a:t>
-            </a:r>
-          </a:p>
-          <a:p>
-            <a:pPr algn="l">
-              <a:spcAft>
-                <a:spcPts val="1200"/>
-              </a:spcAft>
-              <a:defRPr sz="1800" b="0">
-                <a:solidFill>
-                  <a:srgbClr val="1E2933"/>
-                </a:solidFill>
-                <a:latin typeface="Microsoft YaHei"/>
-              </a:defRPr>
-            </a:pPr>
-            <a:r>
-              <a:t>  把离线回放接入 CI：每次规则改动自动跑 5 游戏回归</a:t>
-            </a:r>
-          </a:p>
-          <a:p>
-            <a:pPr algn="l">
-              <a:spcAft>
-                <a:spcPts val="1200"/>
-              </a:spcAft>
-              <a:defRPr sz="1800" b="0">
-                <a:solidFill>
-                  <a:srgbClr val="1E2933"/>
-                </a:solidFill>
-                <a:latin typeface="Microsoft YaHei"/>
-              </a:defRPr>
-            </a:pPr>
-            <a:r>
-              <a:t>  探索 Agent 间更严格的仲裁：Critic 对 L0/L2 冲突做最终决策</a:t>
-            </a:r>
-          </a:p>
-          <a:p>
-            <a:pPr algn="l">
-              <a:spcAft>
-                <a:spcPts val="1200"/>
-              </a:spcAft>
-              <a:defRPr sz="1800" b="0">
-                <a:solidFill>
-                  <a:srgbClr val="1E2933"/>
-                </a:solidFill>
-                <a:latin typeface="Microsoft YaHei"/>
-              </a:defRPr>
-            </a:pPr>
-            <a:r>
-              <a:t>   redesign strategy_memory 的 success 信号：结合位置变化、guide 触发、stall 减少</a:t>
-            </a:r>
-          </a:p>
-        </p:txBody>
-      </p:sp>
-      <p:sp>
-        <p:nvSpPr>
-          <p:cNvPr id="7" name="Oval 6"/>
+          <p:cNvPr id="6" name="Rectangle 5"/>
           <p:cNvSpPr/>
           <p:nvPr/>
         </p:nvSpPr>
         <p:spPr>
           <a:xfrm>
-            <a:off x="45720" y="0"/>
-            <a:ext cx="137160" cy="137160"/>
-          </a:xfrm>
-          <a:prstGeom prst="ellipse">
-            <a:avLst/>
-          </a:prstGeom>
-          <a:solidFill>
-            <a:srgbClr val="0096C7"/>
+            <a:off x="777240" y="3200400"/>
+            <a:ext cx="10972800" cy="73152"/>
+          </a:xfrm>
+          <a:prstGeom prst="rect">
+            <a:avLst/>
+          </a:prstGeom>
+          <a:solidFill>
+            <a:srgbClr val="6C757D"/>
           </a:solidFill>
           <a:ln/>
         </p:spPr>
@@ -24793,20 +28230,20 @@
       </p:sp>
       <p:sp>
         <p:nvSpPr>
-          <p:cNvPr id="8" name="Oval 7"/>
+          <p:cNvPr id="7" name="Oval 6"/>
           <p:cNvSpPr/>
           <p:nvPr/>
         </p:nvSpPr>
         <p:spPr>
           <a:xfrm>
-            <a:off x="45720" y="0"/>
-            <a:ext cx="137160" cy="137160"/>
+            <a:off x="822960" y="3063240"/>
+            <a:ext cx="320040" cy="320040"/>
           </a:xfrm>
           <a:prstGeom prst="ellipse">
             <a:avLst/>
           </a:prstGeom>
           <a:solidFill>
-            <a:srgbClr val="0096C7"/>
+            <a:srgbClr val="28A745"/>
           </a:solidFill>
           <a:ln/>
         </p:spPr>
@@ -24834,20 +28271,96 @@
       </p:sp>
       <p:sp>
         <p:nvSpPr>
-          <p:cNvPr id="9" name="Oval 8"/>
+          <p:cNvPr id="8" name="TextBox 7"/>
+          <p:cNvSpPr txBox="1"/>
+          <p:nvPr/>
+        </p:nvSpPr>
+        <p:spPr>
+          <a:xfrm>
+            <a:off x="320040" y="2103120"/>
+            <a:ext cx="1645920" cy="457200"/>
+          </a:xfrm>
+          <a:prstGeom prst="rect">
+            <a:avLst/>
+          </a:prstGeom>
+          <a:noFill/>
+        </p:spPr>
+        <p:txBody>
+          <a:bodyPr wrap="none">
+            <a:spAutoFit/>
+          </a:bodyPr>
+          <a:lstStyle/>
+          <a:p>
+            <a:pPr algn="ctr">
+              <a:defRPr sz="1300" b="1">
+                <a:solidFill>
+                  <a:srgbClr val="28A745"/>
+                </a:solidFill>
+                <a:latin typeface="Microsoft YaHei"/>
+              </a:defRPr>
+            </a:pPr>
+            <a:r>
+              <a:t>已完成</a:t>
+            </a:r>
+          </a:p>
+        </p:txBody>
+      </p:sp>
+      <p:sp>
+        <p:nvSpPr>
+          <p:cNvPr id="9" name="TextBox 8"/>
+          <p:cNvSpPr txBox="1"/>
+          <p:nvPr/>
+        </p:nvSpPr>
+        <p:spPr>
+          <a:xfrm>
+            <a:off x="91439" y="3474720"/>
+            <a:ext cx="2194560" cy="1188720"/>
+          </a:xfrm>
+          <a:prstGeom prst="rect">
+            <a:avLst/>
+          </a:prstGeom>
+          <a:noFill/>
+        </p:spPr>
+        <p:txBody>
+          <a:bodyPr wrap="none">
+            <a:spAutoFit/>
+          </a:bodyPr>
+          <a:lstStyle/>
+          <a:p>
+            <a:pPr algn="ctr">
+              <a:defRPr sz="1200" b="0">
+                <a:solidFill>
+                  <a:srgbClr val="1E2933"/>
+                </a:solidFill>
+                <a:latin typeface="Microsoft YaHei"/>
+              </a:defRPr>
+            </a:pPr>
+            <a:r>
+              <a:t>规则引擎 + 自动校准</a:t>
+            </a:r>
+            <a:br/>
+            <a:r>
+              <a:t>22 游戏可驱动</a:t>
+            </a:r>
+          </a:p>
+        </p:txBody>
+      </p:sp>
+      <p:sp>
+        <p:nvSpPr>
+          <p:cNvPr id="10" name="Oval 9"/>
           <p:cNvSpPr/>
           <p:nvPr/>
         </p:nvSpPr>
         <p:spPr>
           <a:xfrm>
-            <a:off x="45720" y="0"/>
-            <a:ext cx="137160" cy="137160"/>
+            <a:off x="3108960" y="3063240"/>
+            <a:ext cx="320040" cy="320040"/>
           </a:xfrm>
           <a:prstGeom prst="ellipse">
             <a:avLst/>
           </a:prstGeom>
           <a:solidFill>
-            <a:srgbClr val="0096C7"/>
+            <a:srgbClr val="28A745"/>
           </a:solidFill>
           <a:ln/>
         </p:spPr>
@@ -24875,20 +28388,96 @@
       </p:sp>
       <p:sp>
         <p:nvSpPr>
-          <p:cNvPr id="10" name="Oval 9"/>
+          <p:cNvPr id="11" name="TextBox 10"/>
+          <p:cNvSpPr txBox="1"/>
+          <p:nvPr/>
+        </p:nvSpPr>
+        <p:spPr>
+          <a:xfrm>
+            <a:off x="2606039" y="2103120"/>
+            <a:ext cx="1645920" cy="457200"/>
+          </a:xfrm>
+          <a:prstGeom prst="rect">
+            <a:avLst/>
+          </a:prstGeom>
+          <a:noFill/>
+        </p:spPr>
+        <p:txBody>
+          <a:bodyPr wrap="none">
+            <a:spAutoFit/>
+          </a:bodyPr>
+          <a:lstStyle/>
+          <a:p>
+            <a:pPr algn="ctr">
+              <a:defRPr sz="1300" b="1">
+                <a:solidFill>
+                  <a:srgbClr val="28A745"/>
+                </a:solidFill>
+                <a:latin typeface="Microsoft YaHei"/>
+              </a:defRPr>
+            </a:pPr>
+            <a:r>
+              <a:t>已完成</a:t>
+            </a:r>
+          </a:p>
+        </p:txBody>
+      </p:sp>
+      <p:sp>
+        <p:nvSpPr>
+          <p:cNvPr id="12" name="TextBox 11"/>
+          <p:cNvSpPr txBox="1"/>
+          <p:nvPr/>
+        </p:nvSpPr>
+        <p:spPr>
+          <a:xfrm>
+            <a:off x="2377439" y="3474720"/>
+            <a:ext cx="2194560" cy="1188720"/>
+          </a:xfrm>
+          <a:prstGeom prst="rect">
+            <a:avLst/>
+          </a:prstGeom>
+          <a:noFill/>
+        </p:spPr>
+        <p:txBody>
+          <a:bodyPr wrap="none">
+            <a:spAutoFit/>
+          </a:bodyPr>
+          <a:lstStyle/>
+          <a:p>
+            <a:pPr algn="ctr">
+              <a:defRPr sz="1200" b="0">
+                <a:solidFill>
+                  <a:srgbClr val="1E2933"/>
+                </a:solidFill>
+                <a:latin typeface="Microsoft YaHei"/>
+              </a:defRPr>
+            </a:pPr>
+            <a:r>
+              <a:t>multi-bus-memory</a:t>
+            </a:r>
+            <a:br/>
+            <a:r>
+              <a:t>记忆读回 0.300</a:t>
+            </a:r>
+          </a:p>
+        </p:txBody>
+      </p:sp>
+      <p:sp>
+        <p:nvSpPr>
+          <p:cNvPr id="13" name="Oval 12"/>
           <p:cNvSpPr/>
           <p:nvPr/>
         </p:nvSpPr>
         <p:spPr>
           <a:xfrm>
-            <a:off x="45720" y="0"/>
-            <a:ext cx="137160" cy="137160"/>
+            <a:off x="5394960" y="3063240"/>
+            <a:ext cx="320040" cy="320040"/>
           </a:xfrm>
           <a:prstGeom prst="ellipse">
             <a:avLst/>
           </a:prstGeom>
           <a:solidFill>
-            <a:srgbClr val="0096C7"/>
+            <a:srgbClr val="28A745"/>
           </a:solidFill>
           <a:ln/>
         </p:spPr>
@@ -24916,20 +28505,96 @@
       </p:sp>
       <p:sp>
         <p:nvSpPr>
-          <p:cNvPr id="11" name="Oval 10"/>
+          <p:cNvPr id="14" name="TextBox 13"/>
+          <p:cNvSpPr txBox="1"/>
+          <p:nvPr/>
+        </p:nvSpPr>
+        <p:spPr>
+          <a:xfrm>
+            <a:off x="4892040" y="2103120"/>
+            <a:ext cx="1645920" cy="457200"/>
+          </a:xfrm>
+          <a:prstGeom prst="rect">
+            <a:avLst/>
+          </a:prstGeom>
+          <a:noFill/>
+        </p:spPr>
+        <p:txBody>
+          <a:bodyPr wrap="none">
+            <a:spAutoFit/>
+          </a:bodyPr>
+          <a:lstStyle/>
+          <a:p>
+            <a:pPr algn="ctr">
+              <a:defRPr sz="1300" b="1">
+                <a:solidFill>
+                  <a:srgbClr val="28A745"/>
+                </a:solidFill>
+                <a:latin typeface="Microsoft YaHei"/>
+              </a:defRPr>
+            </a:pPr>
+            <a:r>
+              <a:t>已完成</a:t>
+            </a:r>
+          </a:p>
+        </p:txBody>
+      </p:sp>
+      <p:sp>
+        <p:nvSpPr>
+          <p:cNvPr id="15" name="TextBox 14"/>
+          <p:cNvSpPr txBox="1"/>
+          <p:nvPr/>
+        </p:nvSpPr>
+        <p:spPr>
+          <a:xfrm>
+            <a:off x="4663440" y="3474720"/>
+            <a:ext cx="2194560" cy="1188720"/>
+          </a:xfrm>
+          <a:prstGeom prst="rect">
+            <a:avLst/>
+          </a:prstGeom>
+          <a:noFill/>
+        </p:spPr>
+        <p:txBody>
+          <a:bodyPr wrap="none">
+            <a:spAutoFit/>
+          </a:bodyPr>
+          <a:lstStyle/>
+          <a:p>
+            <a:pPr algn="ctr">
+              <a:defRPr sz="1200" b="0">
+                <a:solidFill>
+                  <a:srgbClr val="1E2933"/>
+                </a:solidFill>
+                <a:latin typeface="Microsoft YaHei"/>
+              </a:defRPr>
+            </a:pPr>
+            <a:r>
+              <a:t>L2 code-file 更新</a:t>
+            </a:r>
+            <a:br/>
+            <a:r>
+              <a:t>qwen/kimi/xiaomi/opencodego 验证</a:t>
+            </a:r>
+          </a:p>
+        </p:txBody>
+      </p:sp>
+      <p:sp>
+        <p:nvSpPr>
+          <p:cNvPr id="16" name="Oval 15"/>
           <p:cNvSpPr/>
           <p:nvPr/>
         </p:nvSpPr>
         <p:spPr>
           <a:xfrm>
-            <a:off x="45720" y="0"/>
-            <a:ext cx="137160" cy="137160"/>
+            <a:off x="7680960" y="3063240"/>
+            <a:ext cx="320040" cy="320040"/>
           </a:xfrm>
           <a:prstGeom prst="ellipse">
             <a:avLst/>
           </a:prstGeom>
           <a:solidFill>
-            <a:srgbClr val="0096C7"/>
+            <a:srgbClr val="FF6B35"/>
           </a:solidFill>
           <a:ln/>
         </p:spPr>
@@ -24957,14 +28622,90 @@
       </p:sp>
       <p:sp>
         <p:nvSpPr>
-          <p:cNvPr id="12" name="Oval 11"/>
+          <p:cNvPr id="17" name="TextBox 16"/>
+          <p:cNvSpPr txBox="1"/>
+          <p:nvPr/>
+        </p:nvSpPr>
+        <p:spPr>
+          <a:xfrm>
+            <a:off x="7178040" y="2103120"/>
+            <a:ext cx="1645920" cy="457200"/>
+          </a:xfrm>
+          <a:prstGeom prst="rect">
+            <a:avLst/>
+          </a:prstGeom>
+          <a:noFill/>
+        </p:spPr>
+        <p:txBody>
+          <a:bodyPr wrap="none">
+            <a:spAutoFit/>
+          </a:bodyPr>
+          <a:lstStyle/>
+          <a:p>
+            <a:pPr algn="ctr">
+              <a:defRPr sz="1300" b="1">
+                <a:solidFill>
+                  <a:srgbClr val="FF6B35"/>
+                </a:solidFill>
+                <a:latin typeface="Microsoft YaHei"/>
+              </a:defRPr>
+            </a:pPr>
+            <a:r>
+              <a:t>进行中</a:t>
+            </a:r>
+          </a:p>
+        </p:txBody>
+      </p:sp>
+      <p:sp>
+        <p:nvSpPr>
+          <p:cNvPr id="18" name="TextBox 17"/>
+          <p:cNvSpPr txBox="1"/>
+          <p:nvPr/>
+        </p:nvSpPr>
+        <p:spPr>
+          <a:xfrm>
+            <a:off x="6949440" y="3474720"/>
+            <a:ext cx="2194560" cy="1188720"/>
+          </a:xfrm>
+          <a:prstGeom prst="rect">
+            <a:avLst/>
+          </a:prstGeom>
+          <a:noFill/>
+        </p:spPr>
+        <p:txBody>
+          <a:bodyPr wrap="none">
+            <a:spAutoFit/>
+          </a:bodyPr>
+          <a:lstStyle/>
+          <a:p>
+            <a:pPr algn="ctr">
+              <a:defRPr sz="1200" b="0">
+                <a:solidFill>
+                  <a:srgbClr val="1E2933"/>
+                </a:solidFill>
+                <a:latin typeface="Microsoft YaHei"/>
+              </a:defRPr>
+            </a:pPr>
+            <a:r>
+              <a:t>本地 VLM 上下文</a:t>
+            </a:r>
+            <a:br/>
+            <a:r>
+              <a:t>QLoRA 微调准备</a:t>
+            </a:r>
+          </a:p>
+        </p:txBody>
+      </p:sp>
+      <p:sp>
+        <p:nvSpPr>
+          <p:cNvPr id="19" name="Oval 18"/>
           <p:cNvSpPr/>
           <p:nvPr/>
         </p:nvSpPr>
         <p:spPr>
           <a:xfrm>
-            <a:off x="45720" y="0"/>
-            <a:ext cx="137160" cy="137160"/>
+            <a:off x="9966960" y="3063240"/>
+            <a:ext cx="320040" cy="320040"/>
           </a:xfrm>
           <a:prstGeom prst="ellipse">
             <a:avLst/>
@@ -24998,20 +28739,96 @@
       </p:sp>
       <p:sp>
         <p:nvSpPr>
-          <p:cNvPr id="13" name="Oval 12"/>
+          <p:cNvPr id="20" name="TextBox 19"/>
+          <p:cNvSpPr txBox="1"/>
+          <p:nvPr/>
+        </p:nvSpPr>
+        <p:spPr>
+          <a:xfrm>
+            <a:off x="9464040" y="2103120"/>
+            <a:ext cx="1645920" cy="457200"/>
+          </a:xfrm>
+          <a:prstGeom prst="rect">
+            <a:avLst/>
+          </a:prstGeom>
+          <a:noFill/>
+        </p:spPr>
+        <p:txBody>
+          <a:bodyPr wrap="none">
+            <a:spAutoFit/>
+          </a:bodyPr>
+          <a:lstStyle/>
+          <a:p>
+            <a:pPr algn="ctr">
+              <a:defRPr sz="1300" b="1">
+                <a:solidFill>
+                  <a:srgbClr val="0096C7"/>
+                </a:solidFill>
+                <a:latin typeface="Microsoft YaHei"/>
+              </a:defRPr>
+            </a:pPr>
+            <a:r>
+              <a:t>下一步</a:t>
+            </a:r>
+          </a:p>
+        </p:txBody>
+      </p:sp>
+      <p:sp>
+        <p:nvSpPr>
+          <p:cNvPr id="21" name="TextBox 20"/>
+          <p:cNvSpPr txBox="1"/>
+          <p:nvPr/>
+        </p:nvSpPr>
+        <p:spPr>
+          <a:xfrm>
+            <a:off x="9235440" y="3474720"/>
+            <a:ext cx="2194560" cy="1188720"/>
+          </a:xfrm>
+          <a:prstGeom prst="rect">
+            <a:avLst/>
+          </a:prstGeom>
+          <a:noFill/>
+        </p:spPr>
+        <p:txBody>
+          <a:bodyPr wrap="none">
+            <a:spAutoFit/>
+          </a:bodyPr>
+          <a:lstStyle/>
+          <a:p>
+            <a:pPr algn="ctr">
+              <a:defRPr sz="1200" b="0">
+                <a:solidFill>
+                  <a:srgbClr val="1E2933"/>
+                </a:solidFill>
+                <a:latin typeface="Microsoft YaHei"/>
+              </a:defRPr>
+            </a:pPr>
+            <a:r>
+              <a:t>真实游戏在线触发</a:t>
+            </a:r>
+            <a:br/>
+            <a:r>
+              <a:t>规则更新 + A/B 回归</a:t>
+            </a:r>
+          </a:p>
+        </p:txBody>
+      </p:sp>
+      <p:sp>
+        <p:nvSpPr>
+          <p:cNvPr id="22" name="Rounded Rectangle 21"/>
           <p:cNvSpPr/>
           <p:nvPr/>
         </p:nvSpPr>
         <p:spPr>
           <a:xfrm>
-            <a:off x="45720" y="0"/>
-            <a:ext cx="137160" cy="137160"/>
-          </a:xfrm>
-          <a:prstGeom prst="ellipse">
-            <a:avLst/>
-          </a:prstGeom>
-          <a:solidFill>
-            <a:srgbClr val="0096C7"/>
+            <a:off x="777240" y="5074920"/>
+            <a:ext cx="10972800" cy="822960"/>
+          </a:xfrm>
+          <a:prstGeom prst="roundRect">
+            <a:avLst/>
+          </a:prstGeom>
+          <a:solidFill>
+            <a:srgbClr val="F3F6F9"/>
           </a:solidFill>
           <a:ln/>
         </p:spPr>
@@ -25033,13 +28850,23 @@
           <a:bodyPr rtlCol="0" anchor="ctr"/>
           <a:lstStyle/>
           <a:p>
-            <a:pPr algn="ctr"/>
-          </a:p>
-        </p:txBody>
-      </p:sp>
-      <p:sp>
-        <p:nvSpPr>
-          <p:cNvPr id="14" name="Rectangle 13"/>
+            <a:pPr algn="ctr">
+              <a:defRPr sz="1400" b="0">
+                <a:solidFill>
+                  <a:srgbClr val="1E2933"/>
+                </a:solidFill>
+                <a:latin typeface="Microsoft YaHei"/>
+              </a:defRPr>
+            </a:pPr>
+            <a:r>
+              <a:t>核心原则：把贵且慢的云端调用摊到多步，本地 VLM 只提供「证据」，规则引擎负责零延迟执行。</a:t>
+            </a:r>
+          </a:p>
+        </p:txBody>
+      </p:sp>
+      <p:sp>
+        <p:nvSpPr>
+          <p:cNvPr id="23" name="Rectangle 22"/>
           <p:cNvSpPr/>
           <p:nvPr/>
         </p:nvSpPr>
@@ -25080,7 +28907,7 @@
       </p:sp>
       <p:sp>
         <p:nvSpPr>
-          <p:cNvPr id="15" name="TextBox 14"/>
+          <p:cNvPr id="24" name="TextBox 23"/>
           <p:cNvSpPr txBox="1"/>
           <p:nvPr/>
         </p:nvSpPr>
@@ -25116,7 +28943,7 @@
       </p:sp>
       <p:sp>
         <p:nvSpPr>
-          <p:cNvPr id="16" name="TextBox 15"/>
+          <p:cNvPr id="25" name="TextBox 24"/>
           <p:cNvSpPr txBox="1"/>
           <p:nvPr/>
         </p:nvSpPr>
@@ -25145,7 +28972,7 @@
               </a:defRPr>
             </a:pPr>
             <a:r>
-              <a:t>39/40</a:t>
+              <a:t>39/42</a:t>
             </a:r>
           </a:p>
         </p:txBody>
@@ -26485,7 +30312,7 @@
               </a:defRPr>
             </a:pPr>
             <a:r>
-              <a:t>4/40</a:t>
+              <a:t>4/42</a:t>
             </a:r>
           </a:p>
         </p:txBody>
@@ -26551,22 +30378,22 @@
       </p:sp>
       <p:sp>
         <p:nvSpPr>
-          <p:cNvPr id="3" name="Oval 2"/>
+          <p:cNvPr id="3" name="Rectangle 2"/>
           <p:cNvSpPr/>
           <p:nvPr/>
         </p:nvSpPr>
         <p:spPr>
           <a:xfrm>
-            <a:off x="9144000" y="914400"/>
-            <a:ext cx="1371600" cy="1371600"/>
-          </a:xfrm>
-          <a:prstGeom prst="ellipse">
+            <a:off x="6858000" y="-914400"/>
+            <a:ext cx="5943600" cy="8686800"/>
+          </a:xfrm>
+          <a:prstGeom prst="rect">
             <a:avLst/>
           </a:prstGeom>
           <a:solidFill>
             <a:srgbClr val="0096C7">
-              <a:lumMod val="70000"/>
-              <a:lumOff val="30000"/>
+              <a:lumMod val="80000"/>
+              <a:lumOff val="20000"/>
             </a:srgbClr>
           </a:solidFill>
           <a:ln/>
@@ -26595,23 +30422,92 @@
       </p:sp>
       <p:sp>
         <p:nvSpPr>
-          <p:cNvPr id="4" name="Oval 3"/>
+          <p:cNvPr id="4" name="TextBox 3"/>
+          <p:cNvSpPr txBox="1"/>
+          <p:nvPr/>
+        </p:nvSpPr>
+        <p:spPr>
+          <a:xfrm>
+            <a:off x="548640" y="1645920"/>
+            <a:ext cx="2743200" cy="1828800"/>
+          </a:xfrm>
+          <a:prstGeom prst="rect">
+            <a:avLst/>
+          </a:prstGeom>
+          <a:noFill/>
+        </p:spPr>
+        <p:txBody>
+          <a:bodyPr wrap="none">
+            <a:spAutoFit/>
+          </a:bodyPr>
+          <a:lstStyle/>
+          <a:p>
+            <a:pPr algn="l">
+              <a:defRPr sz="12000" b="1">
+                <a:solidFill>
+                  <a:srgbClr val="333DA0"/>
+                </a:solidFill>
+                <a:latin typeface="Microsoft YaHei"/>
+              </a:defRPr>
+            </a:pPr>
+            <a:r>
+              <a:t>10</a:t>
+            </a:r>
+          </a:p>
+        </p:txBody>
+      </p:sp>
+      <p:sp>
+        <p:nvSpPr>
+          <p:cNvPr id="5" name="TextBox 4"/>
+          <p:cNvSpPr txBox="1"/>
+          <p:nvPr/>
+        </p:nvSpPr>
+        <p:spPr>
+          <a:xfrm>
+            <a:off x="548640" y="2834640"/>
+            <a:ext cx="11064240" cy="1097280"/>
+          </a:xfrm>
+          <a:prstGeom prst="rect">
+            <a:avLst/>
+          </a:prstGeom>
+          <a:noFill/>
+        </p:spPr>
+        <p:txBody>
+          <a:bodyPr wrap="none">
+            <a:spAutoFit/>
+          </a:bodyPr>
+          <a:lstStyle/>
+          <a:p>
+            <a:pPr algn="l">
+              <a:defRPr sz="4400" b="1">
+                <a:solidFill>
+                  <a:srgbClr val="F3F6F9"/>
+                </a:solidFill>
+                <a:latin typeface="Microsoft YaHei"/>
+              </a:defRPr>
+            </a:pPr>
+            <a:r>
+              <a:t>下一步</a:t>
+            </a:r>
+          </a:p>
+        </p:txBody>
+      </p:sp>
+      <p:sp>
+        <p:nvSpPr>
+          <p:cNvPr id="6" name="Rectangle 5"/>
           <p:cNvSpPr/>
           <p:nvPr/>
         </p:nvSpPr>
         <p:spPr>
           <a:xfrm>
-            <a:off x="9784080" y="1371600"/>
-            <a:ext cx="1371600" cy="1371600"/>
-          </a:xfrm>
-          <a:prstGeom prst="ellipse">
-            <a:avLst/>
-          </a:prstGeom>
-          <a:solidFill>
-            <a:srgbClr val="0096C7">
-              <a:lumMod val="70000"/>
-              <a:lumOff val="30000"/>
-            </a:srgbClr>
+            <a:off x="548640" y="4023360"/>
+            <a:ext cx="1828800" cy="73152"/>
+          </a:xfrm>
+          <a:prstGeom prst="rect">
+            <a:avLst/>
+          </a:prstGeom>
+          <a:solidFill>
+            <a:srgbClr val="FF6B35"/>
           </a:solidFill>
           <a:ln/>
         </p:spPr>
@@ -26639,23 +30535,20 @@
       </p:sp>
       <p:sp>
         <p:nvSpPr>
-          <p:cNvPr id="5" name="Oval 4"/>
+          <p:cNvPr id="7" name="Rectangle 6"/>
           <p:cNvSpPr/>
           <p:nvPr/>
         </p:nvSpPr>
         <p:spPr>
           <a:xfrm>
-            <a:off x="10424160" y="1828800"/>
-            <a:ext cx="1371600" cy="1371600"/>
-          </a:xfrm>
-          <a:prstGeom prst="ellipse">
-            <a:avLst/>
-          </a:prstGeom>
-          <a:solidFill>
-            <a:srgbClr val="0096C7">
-              <a:lumMod val="70000"/>
-              <a:lumOff val="30000"/>
-            </a:srgbClr>
+            <a:off x="0" y="6537960"/>
+            <a:ext cx="12191695" cy="18288"/>
+          </a:xfrm>
+          <a:prstGeom prst="rect">
+            <a:avLst/>
+          </a:prstGeom>
+          <a:solidFill>
+            <a:srgbClr val="0096C7"/>
           </a:solidFill>
           <a:ln/>
         </p:spPr>
@@ -26683,14 +30576,14 @@
       </p:sp>
       <p:sp>
         <p:nvSpPr>
-          <p:cNvPr id="6" name="TextBox 5"/>
+          <p:cNvPr id="8" name="TextBox 7"/>
           <p:cNvSpPr txBox="1"/>
           <p:nvPr/>
         </p:nvSpPr>
         <p:spPr>
           <a:xfrm>
-            <a:off x="457200" y="2651760"/>
-            <a:ext cx="11247120" cy="1280160"/>
+            <a:off x="457200" y="6583680"/>
+            <a:ext cx="3657600" cy="228600"/>
           </a:xfrm>
           <a:prstGeom prst="rect">
             <a:avLst/>
@@ -26703,36 +30596,90 @@
           </a:bodyPr>
           <a:lstStyle/>
           <a:p>
-            <a:pPr algn="ctr">
-              <a:defRPr sz="4800" b="1">
-                <a:solidFill>
-                  <a:srgbClr val="F3F6F9"/>
-                </a:solidFill>
-                <a:latin typeface="Microsoft YaHei"/>
-              </a:defRPr>
-            </a:pPr>
-            <a:r>
-              <a:t>谢谢，欢迎讨论</a:t>
-            </a:r>
-          </a:p>
-        </p:txBody>
-      </p:sp>
-      <p:sp>
-        <p:nvSpPr>
-          <p:cNvPr id="7" name="Rectangle 6"/>
+            <a:pPr algn="l">
+              <a:defRPr sz="1000" b="0">
+                <a:solidFill>
+                  <a:srgbClr val="6C757D"/>
+                </a:solidFill>
+                <a:latin typeface="Microsoft YaHei"/>
+              </a:defRPr>
+            </a:pPr>
+            <a:r>
+              <a:t>smallgameagent · LLM/VLM + 规则驱动</a:t>
+            </a:r>
+          </a:p>
+        </p:txBody>
+      </p:sp>
+      <p:sp>
+        <p:nvSpPr>
+          <p:cNvPr id="9" name="TextBox 8"/>
+          <p:cNvSpPr txBox="1"/>
+          <p:nvPr/>
+        </p:nvSpPr>
+        <p:spPr>
+          <a:xfrm>
+            <a:off x="10789920" y="6583680"/>
+            <a:ext cx="914400" cy="228600"/>
+          </a:xfrm>
+          <a:prstGeom prst="rect">
+            <a:avLst/>
+          </a:prstGeom>
+          <a:noFill/>
+        </p:spPr>
+        <p:txBody>
+          <a:bodyPr wrap="none">
+            <a:spAutoFit/>
+          </a:bodyPr>
+          <a:lstStyle/>
+          <a:p>
+            <a:pPr algn="r">
+              <a:defRPr sz="1000" b="0">
+                <a:solidFill>
+                  <a:srgbClr val="6C757D"/>
+                </a:solidFill>
+                <a:latin typeface="Microsoft YaHei"/>
+              </a:defRPr>
+            </a:pPr>
+            <a:r>
+              <a:t>40/42</a:t>
+            </a:r>
+          </a:p>
+        </p:txBody>
+      </p:sp>
+    </p:spTree>
+  </p:cSld>
+  <p:clrMapOvr>
+    <a:masterClrMapping/>
+  </p:clrMapOvr>
+</p:sld>
+</file>
+
+<file path=ppt/slides/slide41.xml><?xml version="1.0" encoding="utf-8"?>
+<p:sld xmlns:a="http://schemas.openxmlformats.org/drawingml/2006/main" xmlns:p="http://schemas.openxmlformats.org/presentationml/2006/main" xmlns:r="http://schemas.openxmlformats.org/officeDocument/2006/relationships">
+  <p:cSld>
+    <p:spTree>
+      <p:nvGrpSpPr>
+        <p:cNvPr id="1" name=""/>
+        <p:cNvGrpSpPr/>
+        <p:nvPr/>
+      </p:nvGrpSpPr>
+      <p:grpSpPr/>
+      <p:sp>
+        <p:nvSpPr>
+          <p:cNvPr id="2" name="Rectangle 1"/>
           <p:cNvSpPr/>
           <p:nvPr/>
         </p:nvSpPr>
         <p:spPr>
           <a:xfrm>
-            <a:off x="5184648" y="3931920"/>
-            <a:ext cx="1828800" cy="73152"/>
-          </a:xfrm>
-          <a:prstGeom prst="rect">
-            <a:avLst/>
-          </a:prstGeom>
-          <a:solidFill>
-            <a:srgbClr val="FF6B35"/>
+            <a:off x="0" y="0"/>
+            <a:ext cx="12191695" cy="960120"/>
+          </a:xfrm>
+          <a:prstGeom prst="rect">
+            <a:avLst/>
+          </a:prstGeom>
+          <a:solidFill>
+            <a:srgbClr val="1A237E"/>
           </a:solidFill>
           <a:ln/>
         </p:spPr>
@@ -26760,14 +30707,50 @@
       </p:sp>
       <p:sp>
         <p:nvSpPr>
-          <p:cNvPr id="8" name="Rectangle 7"/>
+          <p:cNvPr id="3" name="TextBox 2"/>
+          <p:cNvSpPr txBox="1"/>
+          <p:nvPr/>
+        </p:nvSpPr>
+        <p:spPr>
+          <a:xfrm>
+            <a:off x="457200" y="228600"/>
+            <a:ext cx="11247120" cy="548640"/>
+          </a:xfrm>
+          <a:prstGeom prst="rect">
+            <a:avLst/>
+          </a:prstGeom>
+          <a:noFill/>
+        </p:spPr>
+        <p:txBody>
+          <a:bodyPr wrap="none">
+            <a:spAutoFit/>
+          </a:bodyPr>
+          <a:lstStyle/>
+          <a:p>
+            <a:pPr algn="l">
+              <a:defRPr sz="3000" b="1">
+                <a:solidFill>
+                  <a:srgbClr val="F3F6F9"/>
+                </a:solidFill>
+                <a:latin typeface="Microsoft YaHei"/>
+              </a:defRPr>
+            </a:pPr>
+            <a:r>
+              <a:t>下一步：把实验变成稳定系统</a:t>
+            </a:r>
+          </a:p>
+        </p:txBody>
+      </p:sp>
+      <p:sp>
+        <p:nvSpPr>
+          <p:cNvPr id="4" name="Rectangle 3"/>
           <p:cNvSpPr/>
           <p:nvPr/>
         </p:nvSpPr>
         <p:spPr>
           <a:xfrm>
-            <a:off x="0" y="6537960"/>
-            <a:ext cx="12191695" cy="18288"/>
+            <a:off x="0" y="960120"/>
+            <a:ext cx="164592" cy="5897880"/>
           </a:xfrm>
           <a:prstGeom prst="rect">
             <a:avLst/>
@@ -26801,7 +30784,515 @@
       </p:sp>
       <p:sp>
         <p:nvSpPr>
-          <p:cNvPr id="9" name="TextBox 8"/>
+          <p:cNvPr id="5" name="Rectangle 4"/>
+          <p:cNvSpPr/>
+          <p:nvPr/>
+        </p:nvSpPr>
+        <p:spPr>
+          <a:xfrm>
+            <a:off x="320040" y="1078992"/>
+            <a:ext cx="11548872" cy="5349240"/>
+          </a:xfrm>
+          <a:prstGeom prst="rect">
+            <a:avLst/>
+          </a:prstGeom>
+          <a:solidFill>
+            <a:srgbClr val="FFFFFF"/>
+          </a:solidFill>
+          <a:ln w="12700">
+            <a:solidFill>
+              <a:srgbClr val="E1E5E9"/>
+            </a:solidFill>
+          </a:ln>
+        </p:spPr>
+        <p:style>
+          <a:lnRef idx="1">
+            <a:schemeClr val="accent1"/>
+          </a:lnRef>
+          <a:fillRef idx="3">
+            <a:schemeClr val="accent1"/>
+          </a:fillRef>
+          <a:effectRef idx="2">
+            <a:schemeClr val="accent1"/>
+          </a:effectRef>
+          <a:fontRef idx="minor">
+            <a:schemeClr val="lt1"/>
+          </a:fontRef>
+        </p:style>
+        <p:txBody>
+          <a:bodyPr rtlCol="0" anchor="ctr"/>
+          <a:lstStyle/>
+          <a:p>
+            <a:pPr algn="ctr"/>
+          </a:p>
+        </p:txBody>
+      </p:sp>
+      <p:sp>
+        <p:nvSpPr>
+          <p:cNvPr id="6" name="TextBox 5"/>
+          <p:cNvSpPr txBox="1"/>
+          <p:nvPr/>
+        </p:nvSpPr>
+        <p:spPr>
+          <a:xfrm>
+            <a:off x="777240" y="1417320"/>
+            <a:ext cx="10972800" cy="5029200"/>
+          </a:xfrm>
+          <a:prstGeom prst="rect">
+            <a:avLst/>
+          </a:prstGeom>
+          <a:noFill/>
+        </p:spPr>
+        <p:txBody>
+          <a:bodyPr wrap="square">
+            <a:spAutoFit/>
+          </a:bodyPr>
+          <a:lstStyle/>
+          <a:p>
+            <a:pPr algn="l">
+              <a:spcAft>
+                <a:spcPts val="1200"/>
+              </a:spcAft>
+              <a:defRPr sz="1800" b="0">
+                <a:solidFill>
+                  <a:srgbClr val="1E2933"/>
+                </a:solidFill>
+                <a:latin typeface="Microsoft YaHei"/>
+              </a:defRPr>
+            </a:pPr>
+            <a:r>
+              <a:t>  在真实游戏运行中触发 code-file 更新，验证动态 stall/composite 下 L2 的决策质量</a:t>
+            </a:r>
+          </a:p>
+          <a:p>
+            <a:pPr algn="l">
+              <a:spcAft>
+                <a:spcPts val="1200"/>
+              </a:spcAft>
+              <a:defRPr sz="1800" b="0">
+                <a:solidFill>
+                  <a:srgbClr val="1E2933"/>
+                </a:solidFill>
+                <a:latin typeface="Microsoft YaHei"/>
+              </a:defRPr>
+            </a:pPr>
+            <a:r>
+              <a:t>  把 runtime_rules.json 的 schema 写进 L2 prompt，约束可改字段与取值范围</a:t>
+            </a:r>
+          </a:p>
+          <a:p>
+            <a:pPr algn="l">
+              <a:spcAft>
+                <a:spcPts val="1200"/>
+              </a:spcAft>
+              <a:defRPr sz="1800" b="0">
+                <a:solidFill>
+                  <a:srgbClr val="1E2933"/>
+                </a:solidFill>
+                <a:latin typeface="Microsoft YaHei"/>
+              </a:defRPr>
+            </a:pPr>
+            <a:r>
+              <a:t>  让本地 VLM 常驻，验证 L1 战术修正对 joystick 游戏的实际收益</a:t>
+            </a:r>
+          </a:p>
+          <a:p>
+            <a:pPr algn="l">
+              <a:spcAft>
+                <a:spcPts val="1200"/>
+              </a:spcAft>
+              <a:defRPr sz="1800" b="0">
+                <a:solidFill>
+                  <a:srgbClr val="1E2933"/>
+                </a:solidFill>
+                <a:latin typeface="Microsoft YaHei"/>
+              </a:defRPr>
+            </a:pPr>
+            <a:r>
+              <a:t>  在 5090 服务器跑 QLoRA 微调，把本地 VLM 训练成专用画面理解器</a:t>
+            </a:r>
+          </a:p>
+          <a:p>
+            <a:pPr algn="l">
+              <a:spcAft>
+                <a:spcPts val="1200"/>
+              </a:spcAft>
+              <a:defRPr sz="1800" b="0">
+                <a:solidFill>
+                  <a:srgbClr val="1E2933"/>
+                </a:solidFill>
+                <a:latin typeface="Microsoft YaHei"/>
+              </a:defRPr>
+            </a:pPr>
+            <a:r>
+              <a:t>  把离线回放接入 CI：每次规则改动自动跑 5 游戏回归</a:t>
+            </a:r>
+          </a:p>
+          <a:p>
+            <a:pPr algn="l">
+              <a:spcAft>
+                <a:spcPts val="1200"/>
+              </a:spcAft>
+              <a:defRPr sz="1800" b="0">
+                <a:solidFill>
+                  <a:srgbClr val="1E2933"/>
+                </a:solidFill>
+                <a:latin typeface="Microsoft YaHei"/>
+              </a:defRPr>
+            </a:pPr>
+            <a:r>
+              <a:t>  探索 Agent 间更严格的仲裁：Critic 对 L0/L2 冲突做最终决策</a:t>
+            </a:r>
+          </a:p>
+          <a:p>
+            <a:pPr algn="l">
+              <a:spcAft>
+                <a:spcPts val="1200"/>
+              </a:spcAft>
+              <a:defRPr sz="1800" b="0">
+                <a:solidFill>
+                  <a:srgbClr val="1E2933"/>
+                </a:solidFill>
+                <a:latin typeface="Microsoft YaHei"/>
+              </a:defRPr>
+            </a:pPr>
+            <a:r>
+              <a:t>   redesign strategy_memory 的 success 信号：结合位置变化、guide 触发、stall 减少</a:t>
+            </a:r>
+          </a:p>
+        </p:txBody>
+      </p:sp>
+      <p:sp>
+        <p:nvSpPr>
+          <p:cNvPr id="7" name="Oval 6"/>
+          <p:cNvSpPr/>
+          <p:nvPr/>
+        </p:nvSpPr>
+        <p:spPr>
+          <a:xfrm>
+            <a:off x="45720" y="0"/>
+            <a:ext cx="137160" cy="137160"/>
+          </a:xfrm>
+          <a:prstGeom prst="ellipse">
+            <a:avLst/>
+          </a:prstGeom>
+          <a:solidFill>
+            <a:srgbClr val="0096C7"/>
+          </a:solidFill>
+          <a:ln/>
+        </p:spPr>
+        <p:style>
+          <a:lnRef idx="1">
+            <a:schemeClr val="accent1"/>
+          </a:lnRef>
+          <a:fillRef idx="3">
+            <a:schemeClr val="accent1"/>
+          </a:fillRef>
+          <a:effectRef idx="2">
+            <a:schemeClr val="accent1"/>
+          </a:effectRef>
+          <a:fontRef idx="minor">
+            <a:schemeClr val="lt1"/>
+          </a:fontRef>
+        </p:style>
+        <p:txBody>
+          <a:bodyPr rtlCol="0" anchor="ctr"/>
+          <a:lstStyle/>
+          <a:p>
+            <a:pPr algn="ctr"/>
+          </a:p>
+        </p:txBody>
+      </p:sp>
+      <p:sp>
+        <p:nvSpPr>
+          <p:cNvPr id="8" name="Oval 7"/>
+          <p:cNvSpPr/>
+          <p:nvPr/>
+        </p:nvSpPr>
+        <p:spPr>
+          <a:xfrm>
+            <a:off x="45720" y="0"/>
+            <a:ext cx="137160" cy="137160"/>
+          </a:xfrm>
+          <a:prstGeom prst="ellipse">
+            <a:avLst/>
+          </a:prstGeom>
+          <a:solidFill>
+            <a:srgbClr val="0096C7"/>
+          </a:solidFill>
+          <a:ln/>
+        </p:spPr>
+        <p:style>
+          <a:lnRef idx="1">
+            <a:schemeClr val="accent1"/>
+          </a:lnRef>
+          <a:fillRef idx="3">
+            <a:schemeClr val="accent1"/>
+          </a:fillRef>
+          <a:effectRef idx="2">
+            <a:schemeClr val="accent1"/>
+          </a:effectRef>
+          <a:fontRef idx="minor">
+            <a:schemeClr val="lt1"/>
+          </a:fontRef>
+        </p:style>
+        <p:txBody>
+          <a:bodyPr rtlCol="0" anchor="ctr"/>
+          <a:lstStyle/>
+          <a:p>
+            <a:pPr algn="ctr"/>
+          </a:p>
+        </p:txBody>
+      </p:sp>
+      <p:sp>
+        <p:nvSpPr>
+          <p:cNvPr id="9" name="Oval 8"/>
+          <p:cNvSpPr/>
+          <p:nvPr/>
+        </p:nvSpPr>
+        <p:spPr>
+          <a:xfrm>
+            <a:off x="45720" y="0"/>
+            <a:ext cx="137160" cy="137160"/>
+          </a:xfrm>
+          <a:prstGeom prst="ellipse">
+            <a:avLst/>
+          </a:prstGeom>
+          <a:solidFill>
+            <a:srgbClr val="0096C7"/>
+          </a:solidFill>
+          <a:ln/>
+        </p:spPr>
+        <p:style>
+          <a:lnRef idx="1">
+            <a:schemeClr val="accent1"/>
+          </a:lnRef>
+          <a:fillRef idx="3">
+            <a:schemeClr val="accent1"/>
+          </a:fillRef>
+          <a:effectRef idx="2">
+            <a:schemeClr val="accent1"/>
+          </a:effectRef>
+          <a:fontRef idx="minor">
+            <a:schemeClr val="lt1"/>
+          </a:fontRef>
+        </p:style>
+        <p:txBody>
+          <a:bodyPr rtlCol="0" anchor="ctr"/>
+          <a:lstStyle/>
+          <a:p>
+            <a:pPr algn="ctr"/>
+          </a:p>
+        </p:txBody>
+      </p:sp>
+      <p:sp>
+        <p:nvSpPr>
+          <p:cNvPr id="10" name="Oval 9"/>
+          <p:cNvSpPr/>
+          <p:nvPr/>
+        </p:nvSpPr>
+        <p:spPr>
+          <a:xfrm>
+            <a:off x="45720" y="0"/>
+            <a:ext cx="137160" cy="137160"/>
+          </a:xfrm>
+          <a:prstGeom prst="ellipse">
+            <a:avLst/>
+          </a:prstGeom>
+          <a:solidFill>
+            <a:srgbClr val="0096C7"/>
+          </a:solidFill>
+          <a:ln/>
+        </p:spPr>
+        <p:style>
+          <a:lnRef idx="1">
+            <a:schemeClr val="accent1"/>
+          </a:lnRef>
+          <a:fillRef idx="3">
+            <a:schemeClr val="accent1"/>
+          </a:fillRef>
+          <a:effectRef idx="2">
+            <a:schemeClr val="accent1"/>
+          </a:effectRef>
+          <a:fontRef idx="minor">
+            <a:schemeClr val="lt1"/>
+          </a:fontRef>
+        </p:style>
+        <p:txBody>
+          <a:bodyPr rtlCol="0" anchor="ctr"/>
+          <a:lstStyle/>
+          <a:p>
+            <a:pPr algn="ctr"/>
+          </a:p>
+        </p:txBody>
+      </p:sp>
+      <p:sp>
+        <p:nvSpPr>
+          <p:cNvPr id="11" name="Oval 10"/>
+          <p:cNvSpPr/>
+          <p:nvPr/>
+        </p:nvSpPr>
+        <p:spPr>
+          <a:xfrm>
+            <a:off x="45720" y="0"/>
+            <a:ext cx="137160" cy="137160"/>
+          </a:xfrm>
+          <a:prstGeom prst="ellipse">
+            <a:avLst/>
+          </a:prstGeom>
+          <a:solidFill>
+            <a:srgbClr val="0096C7"/>
+          </a:solidFill>
+          <a:ln/>
+        </p:spPr>
+        <p:style>
+          <a:lnRef idx="1">
+            <a:schemeClr val="accent1"/>
+          </a:lnRef>
+          <a:fillRef idx="3">
+            <a:schemeClr val="accent1"/>
+          </a:fillRef>
+          <a:effectRef idx="2">
+            <a:schemeClr val="accent1"/>
+          </a:effectRef>
+          <a:fontRef idx="minor">
+            <a:schemeClr val="lt1"/>
+          </a:fontRef>
+        </p:style>
+        <p:txBody>
+          <a:bodyPr rtlCol="0" anchor="ctr"/>
+          <a:lstStyle/>
+          <a:p>
+            <a:pPr algn="ctr"/>
+          </a:p>
+        </p:txBody>
+      </p:sp>
+      <p:sp>
+        <p:nvSpPr>
+          <p:cNvPr id="12" name="Oval 11"/>
+          <p:cNvSpPr/>
+          <p:nvPr/>
+        </p:nvSpPr>
+        <p:spPr>
+          <a:xfrm>
+            <a:off x="45720" y="0"/>
+            <a:ext cx="137160" cy="137160"/>
+          </a:xfrm>
+          <a:prstGeom prst="ellipse">
+            <a:avLst/>
+          </a:prstGeom>
+          <a:solidFill>
+            <a:srgbClr val="0096C7"/>
+          </a:solidFill>
+          <a:ln/>
+        </p:spPr>
+        <p:style>
+          <a:lnRef idx="1">
+            <a:schemeClr val="accent1"/>
+          </a:lnRef>
+          <a:fillRef idx="3">
+            <a:schemeClr val="accent1"/>
+          </a:fillRef>
+          <a:effectRef idx="2">
+            <a:schemeClr val="accent1"/>
+          </a:effectRef>
+          <a:fontRef idx="minor">
+            <a:schemeClr val="lt1"/>
+          </a:fontRef>
+        </p:style>
+        <p:txBody>
+          <a:bodyPr rtlCol="0" anchor="ctr"/>
+          <a:lstStyle/>
+          <a:p>
+            <a:pPr algn="ctr"/>
+          </a:p>
+        </p:txBody>
+      </p:sp>
+      <p:sp>
+        <p:nvSpPr>
+          <p:cNvPr id="13" name="Oval 12"/>
+          <p:cNvSpPr/>
+          <p:nvPr/>
+        </p:nvSpPr>
+        <p:spPr>
+          <a:xfrm>
+            <a:off x="45720" y="0"/>
+            <a:ext cx="137160" cy="137160"/>
+          </a:xfrm>
+          <a:prstGeom prst="ellipse">
+            <a:avLst/>
+          </a:prstGeom>
+          <a:solidFill>
+            <a:srgbClr val="0096C7"/>
+          </a:solidFill>
+          <a:ln/>
+        </p:spPr>
+        <p:style>
+          <a:lnRef idx="1">
+            <a:schemeClr val="accent1"/>
+          </a:lnRef>
+          <a:fillRef idx="3">
+            <a:schemeClr val="accent1"/>
+          </a:fillRef>
+          <a:effectRef idx="2">
+            <a:schemeClr val="accent1"/>
+          </a:effectRef>
+          <a:fontRef idx="minor">
+            <a:schemeClr val="lt1"/>
+          </a:fontRef>
+        </p:style>
+        <p:txBody>
+          <a:bodyPr rtlCol="0" anchor="ctr"/>
+          <a:lstStyle/>
+          <a:p>
+            <a:pPr algn="ctr"/>
+          </a:p>
+        </p:txBody>
+      </p:sp>
+      <p:sp>
+        <p:nvSpPr>
+          <p:cNvPr id="14" name="Rectangle 13"/>
+          <p:cNvSpPr/>
+          <p:nvPr/>
+        </p:nvSpPr>
+        <p:spPr>
+          <a:xfrm>
+            <a:off x="0" y="6537960"/>
+            <a:ext cx="12191695" cy="18288"/>
+          </a:xfrm>
+          <a:prstGeom prst="rect">
+            <a:avLst/>
+          </a:prstGeom>
+          <a:solidFill>
+            <a:srgbClr val="0096C7"/>
+          </a:solidFill>
+          <a:ln/>
+        </p:spPr>
+        <p:style>
+          <a:lnRef idx="1">
+            <a:schemeClr val="accent1"/>
+          </a:lnRef>
+          <a:fillRef idx="3">
+            <a:schemeClr val="accent1"/>
+          </a:fillRef>
+          <a:effectRef idx="2">
+            <a:schemeClr val="accent1"/>
+          </a:effectRef>
+          <a:fontRef idx="minor">
+            <a:schemeClr val="lt1"/>
+          </a:fontRef>
+        </p:style>
+        <p:txBody>
+          <a:bodyPr rtlCol="0" anchor="ctr"/>
+          <a:lstStyle/>
+          <a:p>
+            <a:pPr algn="ctr"/>
+          </a:p>
+        </p:txBody>
+      </p:sp>
+      <p:sp>
+        <p:nvSpPr>
+          <p:cNvPr id="15" name="TextBox 14"/>
           <p:cNvSpPr txBox="1"/>
           <p:nvPr/>
         </p:nvSpPr>
@@ -26837,7 +31328,7 @@
       </p:sp>
       <p:sp>
         <p:nvSpPr>
-          <p:cNvPr id="10" name="TextBox 9"/>
+          <p:cNvPr id="16" name="TextBox 15"/>
           <p:cNvSpPr txBox="1"/>
           <p:nvPr/>
         </p:nvSpPr>
@@ -26866,7 +31357,388 @@
               </a:defRPr>
             </a:pPr>
             <a:r>
-              <a:t>40/40</a:t>
+              <a:t>41/42</a:t>
+            </a:r>
+          </a:p>
+        </p:txBody>
+      </p:sp>
+    </p:spTree>
+  </p:cSld>
+  <p:clrMapOvr>
+    <a:masterClrMapping/>
+  </p:clrMapOvr>
+</p:sld>
+</file>
+
+<file path=ppt/slides/slide42.xml><?xml version="1.0" encoding="utf-8"?>
+<p:sld xmlns:a="http://schemas.openxmlformats.org/drawingml/2006/main" xmlns:p="http://schemas.openxmlformats.org/presentationml/2006/main" xmlns:r="http://schemas.openxmlformats.org/officeDocument/2006/relationships">
+  <p:cSld>
+    <p:spTree>
+      <p:nvGrpSpPr>
+        <p:cNvPr id="1" name=""/>
+        <p:cNvGrpSpPr/>
+        <p:nvPr/>
+      </p:nvGrpSpPr>
+      <p:grpSpPr/>
+      <p:sp>
+        <p:nvSpPr>
+          <p:cNvPr id="2" name="Rectangle 1"/>
+          <p:cNvSpPr/>
+          <p:nvPr/>
+        </p:nvSpPr>
+        <p:spPr>
+          <a:xfrm>
+            <a:off x="0" y="0"/>
+            <a:ext cx="12191695" cy="6858000"/>
+          </a:xfrm>
+          <a:prstGeom prst="rect">
+            <a:avLst/>
+          </a:prstGeom>
+          <a:solidFill>
+            <a:srgbClr val="1A237E"/>
+          </a:solidFill>
+          <a:ln/>
+        </p:spPr>
+        <p:style>
+          <a:lnRef idx="1">
+            <a:schemeClr val="accent1"/>
+          </a:lnRef>
+          <a:fillRef idx="3">
+            <a:schemeClr val="accent1"/>
+          </a:fillRef>
+          <a:effectRef idx="2">
+            <a:schemeClr val="accent1"/>
+          </a:effectRef>
+          <a:fontRef idx="minor">
+            <a:schemeClr val="lt1"/>
+          </a:fontRef>
+        </p:style>
+        <p:txBody>
+          <a:bodyPr rtlCol="0" anchor="ctr"/>
+          <a:lstStyle/>
+          <a:p>
+            <a:pPr algn="ctr"/>
+          </a:p>
+        </p:txBody>
+      </p:sp>
+      <p:sp>
+        <p:nvSpPr>
+          <p:cNvPr id="3" name="Oval 2"/>
+          <p:cNvSpPr/>
+          <p:nvPr/>
+        </p:nvSpPr>
+        <p:spPr>
+          <a:xfrm>
+            <a:off x="9144000" y="914400"/>
+            <a:ext cx="1371600" cy="1371600"/>
+          </a:xfrm>
+          <a:prstGeom prst="ellipse">
+            <a:avLst/>
+          </a:prstGeom>
+          <a:solidFill>
+            <a:srgbClr val="0096C7">
+              <a:lumMod val="70000"/>
+              <a:lumOff val="30000"/>
+            </a:srgbClr>
+          </a:solidFill>
+          <a:ln/>
+        </p:spPr>
+        <p:style>
+          <a:lnRef idx="1">
+            <a:schemeClr val="accent1"/>
+          </a:lnRef>
+          <a:fillRef idx="3">
+            <a:schemeClr val="accent1"/>
+          </a:fillRef>
+          <a:effectRef idx="2">
+            <a:schemeClr val="accent1"/>
+          </a:effectRef>
+          <a:fontRef idx="minor">
+            <a:schemeClr val="lt1"/>
+          </a:fontRef>
+        </p:style>
+        <p:txBody>
+          <a:bodyPr rtlCol="0" anchor="ctr"/>
+          <a:lstStyle/>
+          <a:p>
+            <a:pPr algn="ctr"/>
+          </a:p>
+        </p:txBody>
+      </p:sp>
+      <p:sp>
+        <p:nvSpPr>
+          <p:cNvPr id="4" name="Oval 3"/>
+          <p:cNvSpPr/>
+          <p:nvPr/>
+        </p:nvSpPr>
+        <p:spPr>
+          <a:xfrm>
+            <a:off x="9784080" y="1371600"/>
+            <a:ext cx="1371600" cy="1371600"/>
+          </a:xfrm>
+          <a:prstGeom prst="ellipse">
+            <a:avLst/>
+          </a:prstGeom>
+          <a:solidFill>
+            <a:srgbClr val="0096C7">
+              <a:lumMod val="70000"/>
+              <a:lumOff val="30000"/>
+            </a:srgbClr>
+          </a:solidFill>
+          <a:ln/>
+        </p:spPr>
+        <p:style>
+          <a:lnRef idx="1">
+            <a:schemeClr val="accent1"/>
+          </a:lnRef>
+          <a:fillRef idx="3">
+            <a:schemeClr val="accent1"/>
+          </a:fillRef>
+          <a:effectRef idx="2">
+            <a:schemeClr val="accent1"/>
+          </a:effectRef>
+          <a:fontRef idx="minor">
+            <a:schemeClr val="lt1"/>
+          </a:fontRef>
+        </p:style>
+        <p:txBody>
+          <a:bodyPr rtlCol="0" anchor="ctr"/>
+          <a:lstStyle/>
+          <a:p>
+            <a:pPr algn="ctr"/>
+          </a:p>
+        </p:txBody>
+      </p:sp>
+      <p:sp>
+        <p:nvSpPr>
+          <p:cNvPr id="5" name="Oval 4"/>
+          <p:cNvSpPr/>
+          <p:nvPr/>
+        </p:nvSpPr>
+        <p:spPr>
+          <a:xfrm>
+            <a:off x="10424160" y="1828800"/>
+            <a:ext cx="1371600" cy="1371600"/>
+          </a:xfrm>
+          <a:prstGeom prst="ellipse">
+            <a:avLst/>
+          </a:prstGeom>
+          <a:solidFill>
+            <a:srgbClr val="0096C7">
+              <a:lumMod val="70000"/>
+              <a:lumOff val="30000"/>
+            </a:srgbClr>
+          </a:solidFill>
+          <a:ln/>
+        </p:spPr>
+        <p:style>
+          <a:lnRef idx="1">
+            <a:schemeClr val="accent1"/>
+          </a:lnRef>
+          <a:fillRef idx="3">
+            <a:schemeClr val="accent1"/>
+          </a:fillRef>
+          <a:effectRef idx="2">
+            <a:schemeClr val="accent1"/>
+          </a:effectRef>
+          <a:fontRef idx="minor">
+            <a:schemeClr val="lt1"/>
+          </a:fontRef>
+        </p:style>
+        <p:txBody>
+          <a:bodyPr rtlCol="0" anchor="ctr"/>
+          <a:lstStyle/>
+          <a:p>
+            <a:pPr algn="ctr"/>
+          </a:p>
+        </p:txBody>
+      </p:sp>
+      <p:sp>
+        <p:nvSpPr>
+          <p:cNvPr id="6" name="TextBox 5"/>
+          <p:cNvSpPr txBox="1"/>
+          <p:nvPr/>
+        </p:nvSpPr>
+        <p:spPr>
+          <a:xfrm>
+            <a:off x="457200" y="2651760"/>
+            <a:ext cx="11247120" cy="1280160"/>
+          </a:xfrm>
+          <a:prstGeom prst="rect">
+            <a:avLst/>
+          </a:prstGeom>
+          <a:noFill/>
+        </p:spPr>
+        <p:txBody>
+          <a:bodyPr wrap="none">
+            <a:spAutoFit/>
+          </a:bodyPr>
+          <a:lstStyle/>
+          <a:p>
+            <a:pPr algn="ctr">
+              <a:defRPr sz="4800" b="1">
+                <a:solidFill>
+                  <a:srgbClr val="F3F6F9"/>
+                </a:solidFill>
+                <a:latin typeface="Microsoft YaHei"/>
+              </a:defRPr>
+            </a:pPr>
+            <a:r>
+              <a:t>谢谢，欢迎讨论</a:t>
+            </a:r>
+          </a:p>
+        </p:txBody>
+      </p:sp>
+      <p:sp>
+        <p:nvSpPr>
+          <p:cNvPr id="7" name="Rectangle 6"/>
+          <p:cNvSpPr/>
+          <p:nvPr/>
+        </p:nvSpPr>
+        <p:spPr>
+          <a:xfrm>
+            <a:off x="5184648" y="3931920"/>
+            <a:ext cx="1828800" cy="73152"/>
+          </a:xfrm>
+          <a:prstGeom prst="rect">
+            <a:avLst/>
+          </a:prstGeom>
+          <a:solidFill>
+            <a:srgbClr val="FF6B35"/>
+          </a:solidFill>
+          <a:ln/>
+        </p:spPr>
+        <p:style>
+          <a:lnRef idx="1">
+            <a:schemeClr val="accent1"/>
+          </a:lnRef>
+          <a:fillRef idx="3">
+            <a:schemeClr val="accent1"/>
+          </a:fillRef>
+          <a:effectRef idx="2">
+            <a:schemeClr val="accent1"/>
+          </a:effectRef>
+          <a:fontRef idx="minor">
+            <a:schemeClr val="lt1"/>
+          </a:fontRef>
+        </p:style>
+        <p:txBody>
+          <a:bodyPr rtlCol="0" anchor="ctr"/>
+          <a:lstStyle/>
+          <a:p>
+            <a:pPr algn="ctr"/>
+          </a:p>
+        </p:txBody>
+      </p:sp>
+      <p:sp>
+        <p:nvSpPr>
+          <p:cNvPr id="8" name="Rectangle 7"/>
+          <p:cNvSpPr/>
+          <p:nvPr/>
+        </p:nvSpPr>
+        <p:spPr>
+          <a:xfrm>
+            <a:off x="0" y="6537960"/>
+            <a:ext cx="12191695" cy="18288"/>
+          </a:xfrm>
+          <a:prstGeom prst="rect">
+            <a:avLst/>
+          </a:prstGeom>
+          <a:solidFill>
+            <a:srgbClr val="0096C7"/>
+          </a:solidFill>
+          <a:ln/>
+        </p:spPr>
+        <p:style>
+          <a:lnRef idx="1">
+            <a:schemeClr val="accent1"/>
+          </a:lnRef>
+          <a:fillRef idx="3">
+            <a:schemeClr val="accent1"/>
+          </a:fillRef>
+          <a:effectRef idx="2">
+            <a:schemeClr val="accent1"/>
+          </a:effectRef>
+          <a:fontRef idx="minor">
+            <a:schemeClr val="lt1"/>
+          </a:fontRef>
+        </p:style>
+        <p:txBody>
+          <a:bodyPr rtlCol="0" anchor="ctr"/>
+          <a:lstStyle/>
+          <a:p>
+            <a:pPr algn="ctr"/>
+          </a:p>
+        </p:txBody>
+      </p:sp>
+      <p:sp>
+        <p:nvSpPr>
+          <p:cNvPr id="9" name="TextBox 8"/>
+          <p:cNvSpPr txBox="1"/>
+          <p:nvPr/>
+        </p:nvSpPr>
+        <p:spPr>
+          <a:xfrm>
+            <a:off x="457200" y="6583680"/>
+            <a:ext cx="3657600" cy="228600"/>
+          </a:xfrm>
+          <a:prstGeom prst="rect">
+            <a:avLst/>
+          </a:prstGeom>
+          <a:noFill/>
+        </p:spPr>
+        <p:txBody>
+          <a:bodyPr wrap="none">
+            <a:spAutoFit/>
+          </a:bodyPr>
+          <a:lstStyle/>
+          <a:p>
+            <a:pPr algn="l">
+              <a:defRPr sz="1000" b="0">
+                <a:solidFill>
+                  <a:srgbClr val="6C757D"/>
+                </a:solidFill>
+                <a:latin typeface="Microsoft YaHei"/>
+              </a:defRPr>
+            </a:pPr>
+            <a:r>
+              <a:t>smallgameagent · LLM/VLM + 规则驱动</a:t>
+            </a:r>
+          </a:p>
+        </p:txBody>
+      </p:sp>
+      <p:sp>
+        <p:nvSpPr>
+          <p:cNvPr id="10" name="TextBox 9"/>
+          <p:cNvSpPr txBox="1"/>
+          <p:nvPr/>
+        </p:nvSpPr>
+        <p:spPr>
+          <a:xfrm>
+            <a:off x="10789920" y="6583680"/>
+            <a:ext cx="914400" cy="228600"/>
+          </a:xfrm>
+          <a:prstGeom prst="rect">
+            <a:avLst/>
+          </a:prstGeom>
+          <a:noFill/>
+        </p:spPr>
+        <p:txBody>
+          <a:bodyPr wrap="none">
+            <a:spAutoFit/>
+          </a:bodyPr>
+          <a:lstStyle/>
+          <a:p>
+            <a:pPr algn="r">
+              <a:defRPr sz="1000" b="0">
+                <a:solidFill>
+                  <a:srgbClr val="6C757D"/>
+                </a:solidFill>
+                <a:latin typeface="Microsoft YaHei"/>
+              </a:defRPr>
+            </a:pPr>
+            <a:r>
+              <a:t>42/42</a:t>
             </a:r>
           </a:p>
         </p:txBody>
@@ -27195,7 +32067,7 @@
               </a:defRPr>
             </a:pPr>
             <a:r>
-              <a:t>5/40</a:t>
+              <a:t>5/42</a:t>
             </a:r>
           </a:p>
         </p:txBody>
@@ -27592,7 +32464,7 @@
               </a:defRPr>
             </a:pPr>
             <a:r>
-              <a:t>6/40</a:t>
+              <a:t>6/42</a:t>
             </a:r>
           </a:p>
         </p:txBody>
@@ -27921,7 +32793,7 @@
               </a:defRPr>
             </a:pPr>
             <a:r>
-              <a:t>7/40</a:t>
+              <a:t>7/42</a:t>
             </a:r>
           </a:p>
         </p:txBody>
@@ -29225,7 +34097,7 @@
               </a:defRPr>
             </a:pPr>
             <a:r>
-              <a:t>8/40</a:t>
+              <a:t>8/42</a:t>
             </a:r>
           </a:p>
         </p:txBody>
@@ -29606,7 +34478,7 @@
               </a:defRPr>
             </a:pPr>
             <a:r>
-              <a:t>9/40</a:t>
+              <a:t>9/42</a:t>
             </a:r>
           </a:p>
         </p:txBody>

--- a/reports/smallgameagent_report.pptx
+++ b/reports/smallgameagent_report.pptx
@@ -27821,7 +27821,7 @@
               </a:defRPr>
             </a:pPr>
             <a:r>
-              <a:t>落地：VlmCallPolicy 自适应开关（进展跳 VLM/卡住触发/任务分级）+ 本地低延迟 VLM</a:t>
+              <a:t>落地：VlmCallPolicy 自适应开关（进展跳 VLM/卡住触发/任务分级）</a:t>
             </a:r>
           </a:p>
           <a:p>
@@ -27837,7 +27837,23 @@
               </a:defRPr>
             </a:pPr>
             <a:r>
-              <a:t>规则在线更新：RuleUpdateTrigger 阈值触发 + param/code_file 应用 + 安全回滚</a:t>
+              <a:t>QLoRA 微调完成：886 步，train_loss 1.99 / eval_loss 1.51</a:t>
+            </a:r>
+          </a:p>
+          <a:p>
+            <a:pPr algn="l">
+              <a:spcAft>
+                <a:spcPts val="500"/>
+              </a:spcAft>
+              <a:defRPr sz="1200" b="0">
+                <a:solidFill>
+                  <a:srgbClr val="1E2933"/>
+                </a:solidFill>
+                <a:latin typeface="Microsoft YaHei"/>
+              </a:defRPr>
+            </a:pPr>
+            <a:r>
+              <a:t>微调 VLM 部署 5090 GPU1（4bit + adapter, /describe 画面理解验证通过）</a:t>
             </a:r>
           </a:p>
         </p:txBody>
